--- a/deliverables/기획서_천안균형발전나침반_CBC.pptx
+++ b/deliverables/기획서_천안균형발전나침반_CBC.pptx
@@ -3239,7 +3239,7 @@
         <p:spPr>
           <a:xfrm>
             <a:off x="1051560" y="1901952"/>
-            <a:ext cx="10241280" cy="1371600"/>
+            <a:ext cx="10241280" cy="868680"/>
           </a:xfrm>
           <a:prstGeom prst="rect">
             <a:avLst/>
@@ -3651,7 +3651,7 @@
         <p:spPr>
           <a:xfrm>
             <a:off x="1051560" y="6144768"/>
-            <a:ext cx="7315200" cy="274320"/>
+            <a:ext cx="4937760" cy="274320"/>
           </a:xfrm>
           <a:prstGeom prst="rect">
             <a:avLst/>
@@ -4842,7 +4842,7 @@
         </p:nvSpPr>
         <p:spPr>
           <a:xfrm>
-            <a:off x="658368" y="2331720"/>
+            <a:off x="658368" y="2286000"/>
             <a:ext cx="228600" cy="274320"/>
           </a:xfrm>
           <a:prstGeom prst="rect">
@@ -4862,7 +4862,7 @@
               </a:lnSpc>
             </a:pPr>
             <a:r>
-              <a:rPr sz="1250" b="1">
+              <a:rPr sz="1200" b="1">
                 <a:solidFill>
                   <a:srgbClr val="D64545"/>
                 </a:solidFill>
@@ -4881,8 +4881,8 @@
         </p:nvSpPr>
         <p:spPr>
           <a:xfrm>
-            <a:off x="932688" y="2331720"/>
-            <a:ext cx="5486400" cy="274320"/>
+            <a:off x="932688" y="2286000"/>
+            <a:ext cx="5486400" cy="256032"/>
           </a:xfrm>
           <a:prstGeom prst="rect">
             <a:avLst/>
@@ -4901,7 +4901,7 @@
               </a:lnSpc>
             </a:pPr>
             <a:r>
-              <a:rPr sz="1250" b="1">
+              <a:rPr sz="1200" b="1">
                 <a:solidFill>
                   <a:srgbClr val="151C26"/>
                 </a:solidFill>
@@ -4920,27 +4920,27 @@
         </p:nvSpPr>
         <p:spPr>
           <a:xfrm>
-            <a:off x="932688" y="2606039"/>
-            <a:ext cx="5486400" cy="457200"/>
-          </a:xfrm>
-          <a:prstGeom prst="rect">
-            <a:avLst/>
-          </a:prstGeom>
-          <a:noFill/>
-        </p:spPr>
-        <p:txBody>
-          <a:bodyPr wrap="square" lIns="0" rIns="0" tIns="0" bIns="0">
-            <a:spAutoFit/>
-          </a:bodyPr>
-          <a:lstStyle/>
-          <a:p>
-            <a:pPr algn="l">
-              <a:lnSpc>
-                <a:spcPct val="140000"/>
-              </a:lnSpc>
-            </a:pPr>
-            <a:r>
-              <a:rPr sz="1100" b="0">
+            <a:off x="932688" y="2560320"/>
+            <a:ext cx="5486400" cy="602155"/>
+          </a:xfrm>
+          <a:prstGeom prst="rect">
+            <a:avLst/>
+          </a:prstGeom>
+          <a:noFill/>
+        </p:spPr>
+        <p:txBody>
+          <a:bodyPr wrap="square" lIns="0" rIns="0" tIns="0" bIns="0">
+            <a:spAutoFit/>
+          </a:bodyPr>
+          <a:lstStyle/>
+          <a:p>
+            <a:pPr algn="l">
+              <a:lnSpc>
+                <a:spcPct val="142000"/>
+              </a:lnSpc>
+            </a:pPr>
+            <a:r>
+              <a:rPr sz="1050" b="0">
                 <a:solidFill>
                   <a:srgbClr val="5D6874"/>
                 </a:solidFill>
@@ -4952,14 +4952,14 @@
           <a:p>
             <a:pPr algn="l">
               <a:lnSpc>
-                <a:spcPct val="140000"/>
+                <a:spcPct val="142000"/>
               </a:lnSpc>
               <a:spcBef>
                 <a:spcPts val="0"/>
               </a:spcBef>
             </a:pPr>
             <a:r>
-              <a:rPr sz="1100" b="0">
+              <a:rPr sz="1050" b="0">
                 <a:solidFill>
                   <a:srgbClr val="5D6874"/>
                 </a:solidFill>
@@ -4978,7 +4978,7 @@
         </p:nvSpPr>
         <p:spPr>
           <a:xfrm>
-            <a:off x="658368" y="3072384"/>
+            <a:off x="658368" y="3294514"/>
             <a:ext cx="228600" cy="274320"/>
           </a:xfrm>
           <a:prstGeom prst="rect">
@@ -4998,7 +4998,7 @@
               </a:lnSpc>
             </a:pPr>
             <a:r>
-              <a:rPr sz="1250" b="1">
+              <a:rPr sz="1200" b="1">
                 <a:solidFill>
                   <a:srgbClr val="D64545"/>
                 </a:solidFill>
@@ -5017,8 +5017,8 @@
         </p:nvSpPr>
         <p:spPr>
           <a:xfrm>
-            <a:off x="932688" y="3072384"/>
-            <a:ext cx="5486400" cy="274320"/>
+            <a:off x="932688" y="3294514"/>
+            <a:ext cx="5486400" cy="256032"/>
           </a:xfrm>
           <a:prstGeom prst="rect">
             <a:avLst/>
@@ -5037,7 +5037,7 @@
               </a:lnSpc>
             </a:pPr>
             <a:r>
-              <a:rPr sz="1250" b="1">
+              <a:rPr sz="1200" b="1">
                 <a:solidFill>
                   <a:srgbClr val="151C26"/>
                 </a:solidFill>
@@ -5056,27 +5056,27 @@
         </p:nvSpPr>
         <p:spPr>
           <a:xfrm>
-            <a:off x="932688" y="3346703"/>
-            <a:ext cx="5486400" cy="457200"/>
-          </a:xfrm>
-          <a:prstGeom prst="rect">
-            <a:avLst/>
-          </a:prstGeom>
-          <a:noFill/>
-        </p:spPr>
-        <p:txBody>
-          <a:bodyPr wrap="square" lIns="0" rIns="0" tIns="0" bIns="0">
-            <a:spAutoFit/>
-          </a:bodyPr>
-          <a:lstStyle/>
-          <a:p>
-            <a:pPr algn="l">
-              <a:lnSpc>
-                <a:spcPct val="140000"/>
-              </a:lnSpc>
-            </a:pPr>
-            <a:r>
-              <a:rPr sz="1100" b="0">
+            <a:off x="932688" y="3568834"/>
+            <a:ext cx="5486400" cy="401436"/>
+          </a:xfrm>
+          <a:prstGeom prst="rect">
+            <a:avLst/>
+          </a:prstGeom>
+          <a:noFill/>
+        </p:spPr>
+        <p:txBody>
+          <a:bodyPr wrap="square" lIns="0" rIns="0" tIns="0" bIns="0">
+            <a:spAutoFit/>
+          </a:bodyPr>
+          <a:lstStyle/>
+          <a:p>
+            <a:pPr algn="l">
+              <a:lnSpc>
+                <a:spcPct val="142000"/>
+              </a:lnSpc>
+            </a:pPr>
+            <a:r>
+              <a:rPr sz="1050" b="0">
                 <a:solidFill>
                   <a:srgbClr val="5D6874"/>
                 </a:solidFill>
@@ -5095,7 +5095,7 @@
         </p:nvSpPr>
         <p:spPr>
           <a:xfrm>
-            <a:off x="658368" y="3813048"/>
+            <a:off x="658368" y="4102310"/>
             <a:ext cx="228600" cy="274320"/>
           </a:xfrm>
           <a:prstGeom prst="rect">
@@ -5115,7 +5115,7 @@
               </a:lnSpc>
             </a:pPr>
             <a:r>
-              <a:rPr sz="1250" b="1">
+              <a:rPr sz="1200" b="1">
                 <a:solidFill>
                   <a:srgbClr val="D64545"/>
                 </a:solidFill>
@@ -5134,8 +5134,8 @@
         </p:nvSpPr>
         <p:spPr>
           <a:xfrm>
-            <a:off x="932688" y="3813048"/>
-            <a:ext cx="5486400" cy="274320"/>
+            <a:off x="932688" y="4102310"/>
+            <a:ext cx="5486400" cy="256032"/>
           </a:xfrm>
           <a:prstGeom prst="rect">
             <a:avLst/>
@@ -5154,7 +5154,7 @@
               </a:lnSpc>
             </a:pPr>
             <a:r>
-              <a:rPr sz="1250" b="1">
+              <a:rPr sz="1200" b="1">
                 <a:solidFill>
                   <a:srgbClr val="151C26"/>
                 </a:solidFill>
@@ -5173,52 +5173,52 @@
         </p:nvSpPr>
         <p:spPr>
           <a:xfrm>
-            <a:off x="932688" y="4087368"/>
-            <a:ext cx="5486400" cy="457200"/>
-          </a:xfrm>
-          <a:prstGeom prst="rect">
-            <a:avLst/>
-          </a:prstGeom>
-          <a:noFill/>
-        </p:spPr>
-        <p:txBody>
-          <a:bodyPr wrap="square" lIns="0" rIns="0" tIns="0" bIns="0">
-            <a:spAutoFit/>
-          </a:bodyPr>
-          <a:lstStyle/>
-          <a:p>
-            <a:pPr algn="l">
-              <a:lnSpc>
-                <a:spcPct val="140000"/>
-              </a:lnSpc>
-            </a:pPr>
-            <a:r>
-              <a:rPr sz="1100" b="0">
+            <a:off x="932688" y="4376630"/>
+            <a:ext cx="5486400" cy="602155"/>
+          </a:xfrm>
+          <a:prstGeom prst="rect">
+            <a:avLst/>
+          </a:prstGeom>
+          <a:noFill/>
+        </p:spPr>
+        <p:txBody>
+          <a:bodyPr wrap="square" lIns="0" rIns="0" tIns="0" bIns="0">
+            <a:spAutoFit/>
+          </a:bodyPr>
+          <a:lstStyle/>
+          <a:p>
+            <a:pPr algn="l">
+              <a:lnSpc>
+                <a:spcPct val="142000"/>
+              </a:lnSpc>
+            </a:pPr>
+            <a:r>
+              <a:rPr sz="1050" b="0">
                 <a:solidFill>
                   <a:srgbClr val="5D6874"/>
                 </a:solidFill>
                 <a:latin typeface="맑은 고딕"/>
               </a:rPr>
-              <a:t>같은 생활권이 학습·검증에 동시에 들어가지 않게 한다. 공간 자기상관 때문에</a:t>
-            </a:r>
-          </a:p>
-          <a:p>
-            <a:pPr algn="l">
-              <a:lnSpc>
-                <a:spcPct val="140000"/>
+              <a:t>같은 생활권이 학습·검증에 동시에 들어가지 않게 한다. 공간 자기상관 탓에</a:t>
+            </a:r>
+          </a:p>
+          <a:p>
+            <a:pPr algn="l">
+              <a:lnSpc>
+                <a:spcPct val="142000"/>
               </a:lnSpc>
               <a:spcBef>
                 <a:spcPts val="0"/>
               </a:spcBef>
             </a:pPr>
             <a:r>
-              <a:rPr sz="1100" b="0">
+              <a:rPr sz="1050" b="0">
                 <a:solidFill>
                   <a:srgbClr val="5D6874"/>
                 </a:solidFill>
                 <a:latin typeface="맑은 고딕"/>
               </a:rPr>
-              <a:t>무작위 분할을 쓰면 성능이 부풀려지는데, 이를 원천 차단한 설계다.</a:t>
+              <a:t>무작위 분할은 성능을 부풀리는데, 이를 원천 차단한 설계다.</a:t>
             </a:r>
           </a:p>
         </p:txBody>
@@ -5231,7 +5231,7 @@
         </p:nvSpPr>
         <p:spPr>
           <a:xfrm>
-            <a:off x="658368" y="4553712"/>
+            <a:off x="658368" y="5110825"/>
             <a:ext cx="228600" cy="274320"/>
           </a:xfrm>
           <a:prstGeom prst="rect">
@@ -5251,7 +5251,7 @@
               </a:lnSpc>
             </a:pPr>
             <a:r>
-              <a:rPr sz="1250" b="1">
+              <a:rPr sz="1200" b="1">
                 <a:solidFill>
                   <a:srgbClr val="D64545"/>
                 </a:solidFill>
@@ -5270,8 +5270,8 @@
         </p:nvSpPr>
         <p:spPr>
           <a:xfrm>
-            <a:off x="932688" y="4553712"/>
-            <a:ext cx="5486400" cy="274320"/>
+            <a:off x="932688" y="5110825"/>
+            <a:ext cx="5486400" cy="256032"/>
           </a:xfrm>
           <a:prstGeom prst="rect">
             <a:avLst/>
@@ -5290,7 +5290,7 @@
               </a:lnSpc>
             </a:pPr>
             <a:r>
-              <a:rPr sz="1250" b="1">
+              <a:rPr sz="1200" b="1">
                 <a:solidFill>
                   <a:srgbClr val="151C26"/>
                 </a:solidFill>
@@ -5309,33 +5309,33 @@
         </p:nvSpPr>
         <p:spPr>
           <a:xfrm>
-            <a:off x="932688" y="4828032"/>
-            <a:ext cx="5486400" cy="457200"/>
-          </a:xfrm>
-          <a:prstGeom prst="rect">
-            <a:avLst/>
-          </a:prstGeom>
-          <a:noFill/>
-        </p:spPr>
-        <p:txBody>
-          <a:bodyPr wrap="square" lIns="0" rIns="0" tIns="0" bIns="0">
-            <a:spAutoFit/>
-          </a:bodyPr>
-          <a:lstStyle/>
-          <a:p>
-            <a:pPr algn="l">
-              <a:lnSpc>
-                <a:spcPct val="140000"/>
-              </a:lnSpc>
-            </a:pPr>
-            <a:r>
-              <a:rPr sz="1100" b="0">
+            <a:off x="932688" y="5385145"/>
+            <a:ext cx="5486400" cy="401436"/>
+          </a:xfrm>
+          <a:prstGeom prst="rect">
+            <a:avLst/>
+          </a:prstGeom>
+          <a:noFill/>
+        </p:spPr>
+        <p:txBody>
+          <a:bodyPr wrap="square" lIns="0" rIns="0" tIns="0" bIns="0">
+            <a:spAutoFit/>
+          </a:bodyPr>
+          <a:lstStyle/>
+          <a:p>
+            <a:pPr algn="l">
+              <a:lnSpc>
+                <a:spcPct val="142000"/>
+              </a:lnSpc>
+            </a:pPr>
+            <a:r>
+              <a:rPr sz="1050" b="0">
                 <a:solidFill>
                   <a:srgbClr val="5D6874"/>
                 </a:solidFill>
                 <a:latin typeface="맑은 고딕"/>
               </a:rPr>
-              <a:t>생활권마다 위험을 밀어올린 요인을 분해한다. 모델 출력이 곧 사업 제안서의 근거가 된다.</a:t>
+              <a:t>생활권마다 위험을 밀어올린 요인을 분해한다. 모델 출력이 곧 근거 문서가 된다.</a:t>
             </a:r>
           </a:p>
         </p:txBody>
@@ -6551,7 +6551,7 @@
         </p:nvSpPr>
         <p:spPr>
           <a:xfrm>
-            <a:off x="658368" y="3310128"/>
+            <a:off x="658368" y="3218688"/>
             <a:ext cx="228600" cy="274320"/>
           </a:xfrm>
           <a:prstGeom prst="rect">
@@ -6571,7 +6571,7 @@
               </a:lnSpc>
             </a:pPr>
             <a:r>
-              <a:rPr sz="1200" b="1">
+              <a:rPr sz="1150" b="1">
                 <a:solidFill>
                   <a:srgbClr val="D64545"/>
                 </a:solidFill>
@@ -6590,8 +6590,8 @@
         </p:nvSpPr>
         <p:spPr>
           <a:xfrm>
-            <a:off x="932688" y="3310128"/>
-            <a:ext cx="5394960" cy="274320"/>
+            <a:off x="932688" y="3218688"/>
+            <a:ext cx="5394960" cy="256032"/>
           </a:xfrm>
           <a:prstGeom prst="rect">
             <a:avLst/>
@@ -6610,7 +6610,7 @@
               </a:lnSpc>
             </a:pPr>
             <a:r>
-              <a:rPr sz="1200" b="1">
+              <a:rPr sz="1150" b="1">
                 <a:solidFill>
                   <a:srgbClr val="151C26"/>
                 </a:solidFill>
@@ -6629,33 +6629,33 @@
         </p:nvSpPr>
         <p:spPr>
           <a:xfrm>
-            <a:off x="932688" y="3584448"/>
-            <a:ext cx="5394960" cy="457200"/>
-          </a:xfrm>
-          <a:prstGeom prst="rect">
-            <a:avLst/>
-          </a:prstGeom>
-          <a:noFill/>
-        </p:spPr>
-        <p:txBody>
-          <a:bodyPr wrap="square" lIns="0" rIns="0" tIns="0" bIns="0">
-            <a:spAutoFit/>
-          </a:bodyPr>
-          <a:lstStyle/>
-          <a:p>
-            <a:pPr algn="l">
-              <a:lnSpc>
-                <a:spcPct val="140000"/>
-              </a:lnSpc>
-            </a:pPr>
-            <a:r>
-              <a:rPr sz="1050" b="0">
+            <a:off x="932688" y="3493008"/>
+            <a:ext cx="5394960" cy="382320"/>
+          </a:xfrm>
+          <a:prstGeom prst="rect">
+            <a:avLst/>
+          </a:prstGeom>
+          <a:noFill/>
+        </p:spPr>
+        <p:txBody>
+          <a:bodyPr wrap="square" lIns="0" rIns="0" tIns="0" bIns="0">
+            <a:spAutoFit/>
+          </a:bodyPr>
+          <a:lstStyle/>
+          <a:p>
+            <a:pPr algn="l">
+              <a:lnSpc>
+                <a:spcPct val="142000"/>
+              </a:lnSpc>
+            </a:pPr>
+            <a:r>
+              <a:rPr sz="1000" b="0">
                 <a:solidFill>
                   <a:srgbClr val="5D6874"/>
                 </a:solidFill>
                 <a:latin typeface="맑은 고딕"/>
               </a:rPr>
-              <a:t>격자별 인구에 고령화율과 CBI 열위를 가중해, 같은 1명이라도 취약한 지역의 1명을 더 크게 센다.</a:t>
+              <a:t>격자 인구에 고령화율과 CBI 열위를 가중한다. 같은 1명이라도 취약지역의 1명을 더 크게 센다.</a:t>
             </a:r>
           </a:p>
         </p:txBody>
@@ -6668,7 +6668,7 @@
         </p:nvSpPr>
         <p:spPr>
           <a:xfrm>
-            <a:off x="658368" y="4006352"/>
+            <a:off x="658368" y="4007368"/>
             <a:ext cx="228600" cy="274320"/>
           </a:xfrm>
           <a:prstGeom prst="rect">
@@ -6688,7 +6688,7 @@
               </a:lnSpc>
             </a:pPr>
             <a:r>
-              <a:rPr sz="1200" b="1">
+              <a:rPr sz="1150" b="1">
                 <a:solidFill>
                   <a:srgbClr val="D64545"/>
                 </a:solidFill>
@@ -6707,8 +6707,8 @@
         </p:nvSpPr>
         <p:spPr>
           <a:xfrm>
-            <a:off x="932688" y="4006352"/>
-            <a:ext cx="5394960" cy="274320"/>
+            <a:off x="932688" y="4007368"/>
+            <a:ext cx="5394960" cy="256032"/>
           </a:xfrm>
           <a:prstGeom prst="rect">
             <a:avLst/>
@@ -6727,7 +6727,7 @@
               </a:lnSpc>
             </a:pPr>
             <a:r>
-              <a:rPr sz="1200" b="1">
+              <a:rPr sz="1150" b="1">
                 <a:solidFill>
                   <a:srgbClr val="151C26"/>
                 </a:solidFill>
@@ -6746,33 +6746,33 @@
         </p:nvSpPr>
         <p:spPr>
           <a:xfrm>
-            <a:off x="932688" y="4280672"/>
-            <a:ext cx="5394960" cy="457200"/>
-          </a:xfrm>
-          <a:prstGeom prst="rect">
-            <a:avLst/>
-          </a:prstGeom>
-          <a:noFill/>
-        </p:spPr>
-        <p:txBody>
-          <a:bodyPr wrap="square" lIns="0" rIns="0" tIns="0" bIns="0">
-            <a:spAutoFit/>
-          </a:bodyPr>
-          <a:lstStyle/>
-          <a:p>
-            <a:pPr algn="l">
-              <a:lnSpc>
-                <a:spcPct val="140000"/>
-              </a:lnSpc>
-            </a:pPr>
-            <a:r>
-              <a:rPr sz="1050" b="0">
+            <a:off x="932688" y="4281688"/>
+            <a:ext cx="5394960" cy="382320"/>
+          </a:xfrm>
+          <a:prstGeom prst="rect">
+            <a:avLst/>
+          </a:prstGeom>
+          <a:noFill/>
+        </p:spPr>
+        <p:txBody>
+          <a:bodyPr wrap="square" lIns="0" rIns="0" tIns="0" bIns="0">
+            <a:spAutoFit/>
+          </a:bodyPr>
+          <a:lstStyle/>
+          <a:p>
+            <a:pPr algn="l">
+              <a:lnSpc>
+                <a:spcPct val="142000"/>
+              </a:lnSpc>
+            </a:pPr>
+            <a:r>
+              <a:rPr sz="1000" b="0">
                 <a:solidFill>
                   <a:srgbClr val="5D6874"/>
                 </a:solidFill>
                 <a:latin typeface="맑은 고딕"/>
               </a:rPr>
-              <a:t>도보 15분권. '15분 도시' 개념과 맞추고, 행정경계를 넘는 이용도 그대로 반영한다.</a:t>
+              <a:t>도보 15분권. '15분 도시' 개념과 맞추고 행정경계를 넘는 이용도 반영한다.</a:t>
             </a:r>
           </a:p>
         </p:txBody>
@@ -6785,7 +6785,7 @@
         </p:nvSpPr>
         <p:spPr>
           <a:xfrm>
-            <a:off x="658368" y="4702576"/>
+            <a:off x="658368" y="4796048"/>
             <a:ext cx="228600" cy="274320"/>
           </a:xfrm>
           <a:prstGeom prst="rect">
@@ -6805,7 +6805,7 @@
               </a:lnSpc>
             </a:pPr>
             <a:r>
-              <a:rPr sz="1200" b="1">
+              <a:rPr sz="1150" b="1">
                 <a:solidFill>
                   <a:srgbClr val="D64545"/>
                 </a:solidFill>
@@ -6824,8 +6824,8 @@
         </p:nvSpPr>
         <p:spPr>
           <a:xfrm>
-            <a:off x="932688" y="4702576"/>
-            <a:ext cx="5394960" cy="274320"/>
+            <a:off x="932688" y="4796048"/>
+            <a:ext cx="5394960" cy="256032"/>
           </a:xfrm>
           <a:prstGeom prst="rect">
             <a:avLst/>
@@ -6844,7 +6844,7 @@
               </a:lnSpc>
             </a:pPr>
             <a:r>
-              <a:rPr sz="1200" b="1">
+              <a:rPr sz="1150" b="1">
                 <a:solidFill>
                   <a:srgbClr val="151C26"/>
                 </a:solidFill>
@@ -6863,33 +6863,33 @@
         </p:nvSpPr>
         <p:spPr>
           <a:xfrm>
-            <a:off x="932688" y="4976896"/>
-            <a:ext cx="5394960" cy="457200"/>
-          </a:xfrm>
-          <a:prstGeom prst="rect">
-            <a:avLst/>
-          </a:prstGeom>
-          <a:noFill/>
-        </p:spPr>
-        <p:txBody>
-          <a:bodyPr wrap="square" lIns="0" rIns="0" tIns="0" bIns="0">
-            <a:spAutoFit/>
-          </a:bodyPr>
-          <a:lstStyle/>
-          <a:p>
-            <a:pPr algn="l">
-              <a:lnSpc>
-                <a:spcPct val="140000"/>
-              </a:lnSpc>
-            </a:pPr>
-            <a:r>
-              <a:rPr sz="1050" b="0">
+            <a:off x="932688" y="5070368"/>
+            <a:ext cx="5394960" cy="382320"/>
+          </a:xfrm>
+          <a:prstGeom prst="rect">
+            <a:avLst/>
+          </a:prstGeom>
+          <a:noFill/>
+        </p:spPr>
+        <p:txBody>
+          <a:bodyPr wrap="square" lIns="0" rIns="0" tIns="0" bIns="0">
+            <a:spAutoFit/>
+          </a:bodyPr>
+          <a:lstStyle/>
+          <a:p>
+            <a:pPr algn="l">
+              <a:lnSpc>
+                <a:spcPct val="142000"/>
+              </a:lnSpc>
+            </a:pPr>
+            <a:r>
+              <a:rPr sz="1000" b="0">
                 <a:solidFill>
                   <a:srgbClr val="5D6874"/>
                 </a:solidFill>
                 <a:latin typeface="맑은 고딕"/>
               </a:rPr>
-              <a:t>새 땅을 사는 대신 이미 비어 있는 공간을 후보로 둔다. 도시재생 사업과 그대로 접속된다.</a:t>
+              <a:t>새 땅을 사는 대신 이미 비어 있는 공간을 후보로 둔다. 도시재생 사업과 바로 접속된다.</a:t>
             </a:r>
           </a:p>
         </p:txBody>
@@ -6902,7 +6902,7 @@
         </p:nvSpPr>
         <p:spPr>
           <a:xfrm>
-            <a:off x="658368" y="5398800"/>
+            <a:off x="658368" y="5584728"/>
             <a:ext cx="228600" cy="274320"/>
           </a:xfrm>
           <a:prstGeom prst="rect">
@@ -6922,7 +6922,7 @@
               </a:lnSpc>
             </a:pPr>
             <a:r>
-              <a:rPr sz="1200" b="1">
+              <a:rPr sz="1150" b="1">
                 <a:solidFill>
                   <a:srgbClr val="D64545"/>
                 </a:solidFill>
@@ -6941,8 +6941,8 @@
         </p:nvSpPr>
         <p:spPr>
           <a:xfrm>
-            <a:off x="932688" y="5398800"/>
-            <a:ext cx="5394960" cy="274320"/>
+            <a:off x="932688" y="5584728"/>
+            <a:ext cx="5394960" cy="256032"/>
           </a:xfrm>
           <a:prstGeom prst="rect">
             <a:avLst/>
@@ -6961,7 +6961,7 @@
               </a:lnSpc>
             </a:pPr>
             <a:r>
-              <a:rPr sz="1200" b="1">
+              <a:rPr sz="1150" b="1">
                 <a:solidFill>
                   <a:srgbClr val="151C26"/>
                 </a:solidFill>
@@ -6980,52 +6980,33 @@
         </p:nvSpPr>
         <p:spPr>
           <a:xfrm>
-            <a:off x="932688" y="5673120"/>
-            <a:ext cx="5394960" cy="457200"/>
-          </a:xfrm>
-          <a:prstGeom prst="rect">
-            <a:avLst/>
-          </a:prstGeom>
-          <a:noFill/>
-        </p:spPr>
-        <p:txBody>
-          <a:bodyPr wrap="square" lIns="0" rIns="0" tIns="0" bIns="0">
-            <a:spAutoFit/>
-          </a:bodyPr>
-          <a:lstStyle/>
-          <a:p>
-            <a:pPr algn="l">
-              <a:lnSpc>
-                <a:spcPct val="140000"/>
-              </a:lnSpc>
-            </a:pPr>
-            <a:r>
-              <a:rPr sz="1050" b="0">
+            <a:off x="932688" y="5859048"/>
+            <a:ext cx="5394960" cy="382320"/>
+          </a:xfrm>
+          <a:prstGeom prst="rect">
+            <a:avLst/>
+          </a:prstGeom>
+          <a:noFill/>
+        </p:spPr>
+        <p:txBody>
+          <a:bodyPr wrap="square" lIns="0" rIns="0" tIns="0" bIns="0">
+            <a:spAutoFit/>
+          </a:bodyPr>
+          <a:lstStyle/>
+          <a:p>
+            <a:pPr algn="l">
+              <a:lnSpc>
+                <a:spcPct val="142000"/>
+              </a:lnSpc>
+            </a:pPr>
+            <a:r>
+              <a:rPr sz="1000" b="0">
                 <a:solidFill>
                   <a:srgbClr val="5D6874"/>
                 </a:solidFill>
                 <a:latin typeface="맑은 고딕"/>
               </a:rPr>
-              <a:t>목적함수가 submodular이므로 탐욕해는 최적해의 (1−1/e)≈63% 이상을 보장한다.</a:t>
-            </a:r>
-          </a:p>
-          <a:p>
-            <a:pPr algn="l">
-              <a:lnSpc>
-                <a:spcPct val="140000"/>
-              </a:lnSpc>
-              <a:spcBef>
-                <a:spcPts val="0"/>
-              </a:spcBef>
-            </a:pPr>
-            <a:r>
-              <a:rPr sz="1050" b="0">
-                <a:solidFill>
-                  <a:srgbClr val="5D6874"/>
-                </a:solidFill>
-                <a:latin typeface="맑은 고딕"/>
-              </a:rPr>
-              <a:t>정수계획을 풀지 않고도 근거 있는 순서를 즉시 낼 수 있다.</a:t>
+              <a:t>submodular 목적함수이므로 탐욕해가 최적해의 (1−1/e)≈63% 이상을 보장한다.</a:t>
             </a:r>
           </a:p>
         </p:txBody>
@@ -13064,8 +13045,8 @@
         </p:nvSpPr>
         <p:spPr>
           <a:xfrm>
-            <a:off x="658368" y="2084831"/>
-            <a:ext cx="2615184" cy="1298448"/>
+            <a:off x="658368" y="2066543"/>
+            <a:ext cx="2615184" cy="1280160"/>
           </a:xfrm>
           <a:prstGeom prst="roundRect">
             <a:avLst>
@@ -13110,8 +13091,8 @@
         </p:nvSpPr>
         <p:spPr>
           <a:xfrm>
-            <a:off x="658368" y="2084831"/>
-            <a:ext cx="68580" cy="1298448"/>
+            <a:off x="658368" y="2066543"/>
+            <a:ext cx="68580" cy="1280160"/>
           </a:xfrm>
           <a:prstGeom prst="rect">
             <a:avLst/>
@@ -13152,8 +13133,8 @@
         </p:nvSpPr>
         <p:spPr>
           <a:xfrm>
-            <a:off x="914400" y="2267712"/>
-            <a:ext cx="2157984" cy="228600"/>
+            <a:off x="914400" y="2212848"/>
+            <a:ext cx="2157984" cy="201168"/>
           </a:xfrm>
           <a:prstGeom prst="rect">
             <a:avLst/>
@@ -13172,7 +13153,7 @@
               </a:lnSpc>
             </a:pPr>
             <a:r>
-              <a:rPr sz="1100" b="1">
+              <a:rPr sz="1050" b="1">
                 <a:solidFill>
                   <a:srgbClr val="5D6874"/>
                 </a:solidFill>
@@ -13191,8 +13172,8 @@
         </p:nvSpPr>
         <p:spPr>
           <a:xfrm>
-            <a:off x="914400" y="2523744"/>
-            <a:ext cx="2157984" cy="411480"/>
+            <a:off x="914400" y="2450591"/>
+            <a:ext cx="2157984" cy="365760"/>
           </a:xfrm>
           <a:prstGeom prst="rect">
             <a:avLst/>
@@ -13211,7 +13192,7 @@
               </a:lnSpc>
             </a:pPr>
             <a:r>
-              <a:rPr sz="2500" b="1">
+              <a:rPr sz="2200" b="1">
                 <a:solidFill>
                   <a:srgbClr val="151C26"/>
                 </a:solidFill>
@@ -13230,27 +13211,27 @@
         </p:nvSpPr>
         <p:spPr>
           <a:xfrm>
-            <a:off x="914400" y="2944368"/>
-            <a:ext cx="2157984" cy="320040"/>
-          </a:xfrm>
-          <a:prstGeom prst="rect">
-            <a:avLst/>
-          </a:prstGeom>
-          <a:noFill/>
-        </p:spPr>
-        <p:txBody>
-          <a:bodyPr wrap="square" lIns="0" rIns="0" tIns="0" bIns="0">
-            <a:spAutoFit/>
-          </a:bodyPr>
-          <a:lstStyle/>
-          <a:p>
-            <a:pPr algn="l">
-              <a:lnSpc>
-                <a:spcPct val="130000"/>
-              </a:lnSpc>
-            </a:pPr>
-            <a:r>
-              <a:rPr sz="1050" b="0">
+            <a:off x="914400" y="2907791"/>
+            <a:ext cx="2157984" cy="347472"/>
+          </a:xfrm>
+          <a:prstGeom prst="rect">
+            <a:avLst/>
+          </a:prstGeom>
+          <a:noFill/>
+        </p:spPr>
+        <p:txBody>
+          <a:bodyPr wrap="square" lIns="0" rIns="0" tIns="0" bIns="0">
+            <a:spAutoFit/>
+          </a:bodyPr>
+          <a:lstStyle/>
+          <a:p>
+            <a:pPr algn="l">
+              <a:lnSpc>
+                <a:spcPct val="132000"/>
+              </a:lnSpc>
+            </a:pPr>
+            <a:r>
+              <a:rPr sz="1000" b="0">
                 <a:solidFill>
                   <a:srgbClr val="5D6874"/>
                 </a:solidFill>
@@ -13269,8 +13250,8 @@
         </p:nvSpPr>
         <p:spPr>
           <a:xfrm>
-            <a:off x="3456432" y="2084831"/>
-            <a:ext cx="2615184" cy="1298448"/>
+            <a:off x="3456432" y="2066543"/>
+            <a:ext cx="2615184" cy="1280160"/>
           </a:xfrm>
           <a:prstGeom prst="roundRect">
             <a:avLst>
@@ -13315,8 +13296,8 @@
         </p:nvSpPr>
         <p:spPr>
           <a:xfrm>
-            <a:off x="3456432" y="2084831"/>
-            <a:ext cx="68580" cy="1298448"/>
+            <a:off x="3456432" y="2066543"/>
+            <a:ext cx="68580" cy="1280160"/>
           </a:xfrm>
           <a:prstGeom prst="rect">
             <a:avLst/>
@@ -13357,8 +13338,8 @@
         </p:nvSpPr>
         <p:spPr>
           <a:xfrm>
-            <a:off x="3712464" y="2267712"/>
-            <a:ext cx="2157984" cy="228600"/>
+            <a:off x="3712464" y="2212848"/>
+            <a:ext cx="2157984" cy="201168"/>
           </a:xfrm>
           <a:prstGeom prst="rect">
             <a:avLst/>
@@ -13377,7 +13358,7 @@
               </a:lnSpc>
             </a:pPr>
             <a:r>
-              <a:rPr sz="1100" b="1">
+              <a:rPr sz="1050" b="1">
                 <a:solidFill>
                   <a:srgbClr val="5D6874"/>
                 </a:solidFill>
@@ -13396,8 +13377,8 @@
         </p:nvSpPr>
         <p:spPr>
           <a:xfrm>
-            <a:off x="3712464" y="2523744"/>
-            <a:ext cx="2157984" cy="411480"/>
+            <a:off x="3712464" y="2450591"/>
+            <a:ext cx="2157984" cy="365760"/>
           </a:xfrm>
           <a:prstGeom prst="rect">
             <a:avLst/>
@@ -13416,7 +13397,7 @@
               </a:lnSpc>
             </a:pPr>
             <a:r>
-              <a:rPr sz="2500" b="1">
+              <a:rPr sz="2200" b="1">
                 <a:solidFill>
                   <a:srgbClr val="151C26"/>
                 </a:solidFill>
@@ -13435,27 +13416,27 @@
         </p:nvSpPr>
         <p:spPr>
           <a:xfrm>
-            <a:off x="3712464" y="2944368"/>
-            <a:ext cx="2157984" cy="320040"/>
-          </a:xfrm>
-          <a:prstGeom prst="rect">
-            <a:avLst/>
-          </a:prstGeom>
-          <a:noFill/>
-        </p:spPr>
-        <p:txBody>
-          <a:bodyPr wrap="square" lIns="0" rIns="0" tIns="0" bIns="0">
-            <a:spAutoFit/>
-          </a:bodyPr>
-          <a:lstStyle/>
-          <a:p>
-            <a:pPr algn="l">
-              <a:lnSpc>
-                <a:spcPct val="130000"/>
-              </a:lnSpc>
-            </a:pPr>
-            <a:r>
-              <a:rPr sz="1050" b="0">
+            <a:off x="3712464" y="2907791"/>
+            <a:ext cx="2157984" cy="347472"/>
+          </a:xfrm>
+          <a:prstGeom prst="rect">
+            <a:avLst/>
+          </a:prstGeom>
+          <a:noFill/>
+        </p:spPr>
+        <p:txBody>
+          <a:bodyPr wrap="square" lIns="0" rIns="0" tIns="0" bIns="0">
+            <a:spAutoFit/>
+          </a:bodyPr>
+          <a:lstStyle/>
+          <a:p>
+            <a:pPr algn="l">
+              <a:lnSpc>
+                <a:spcPct val="132000"/>
+              </a:lnSpc>
+            </a:pPr>
+            <a:r>
+              <a:rPr sz="1000" b="0">
                 <a:solidFill>
                   <a:srgbClr val="5D6874"/>
                 </a:solidFill>
@@ -13474,8 +13455,8 @@
         </p:nvSpPr>
         <p:spPr>
           <a:xfrm>
-            <a:off x="6254496" y="2084831"/>
-            <a:ext cx="2615184" cy="1298448"/>
+            <a:off x="6254496" y="2066543"/>
+            <a:ext cx="2615184" cy="1280160"/>
           </a:xfrm>
           <a:prstGeom prst="roundRect">
             <a:avLst>
@@ -13520,8 +13501,8 @@
         </p:nvSpPr>
         <p:spPr>
           <a:xfrm>
-            <a:off x="6254496" y="2084831"/>
-            <a:ext cx="68580" cy="1298448"/>
+            <a:off x="6254496" y="2066543"/>
+            <a:ext cx="68580" cy="1280160"/>
           </a:xfrm>
           <a:prstGeom prst="rect">
             <a:avLst/>
@@ -13562,8 +13543,8 @@
         </p:nvSpPr>
         <p:spPr>
           <a:xfrm>
-            <a:off x="6510528" y="2267712"/>
-            <a:ext cx="2157984" cy="228600"/>
+            <a:off x="6510528" y="2212848"/>
+            <a:ext cx="2157984" cy="201168"/>
           </a:xfrm>
           <a:prstGeom prst="rect">
             <a:avLst/>
@@ -13582,7 +13563,7 @@
               </a:lnSpc>
             </a:pPr>
             <a:r>
-              <a:rPr sz="1100" b="1">
+              <a:rPr sz="1050" b="1">
                 <a:solidFill>
                   <a:srgbClr val="5D6874"/>
                 </a:solidFill>
@@ -13601,8 +13582,8 @@
         </p:nvSpPr>
         <p:spPr>
           <a:xfrm>
-            <a:off x="6510528" y="2523744"/>
-            <a:ext cx="2157984" cy="411480"/>
+            <a:off x="6510528" y="2450591"/>
+            <a:ext cx="2157984" cy="365760"/>
           </a:xfrm>
           <a:prstGeom prst="rect">
             <a:avLst/>
@@ -13621,7 +13602,7 @@
               </a:lnSpc>
             </a:pPr>
             <a:r>
-              <a:rPr sz="2500" b="1">
+              <a:rPr sz="2200" b="1">
                 <a:solidFill>
                   <a:srgbClr val="151C26"/>
                 </a:solidFill>
@@ -13640,27 +13621,27 @@
         </p:nvSpPr>
         <p:spPr>
           <a:xfrm>
-            <a:off x="6510528" y="2944368"/>
-            <a:ext cx="2157984" cy="320040"/>
-          </a:xfrm>
-          <a:prstGeom prst="rect">
-            <a:avLst/>
-          </a:prstGeom>
-          <a:noFill/>
-        </p:spPr>
-        <p:txBody>
-          <a:bodyPr wrap="square" lIns="0" rIns="0" tIns="0" bIns="0">
-            <a:spAutoFit/>
-          </a:bodyPr>
-          <a:lstStyle/>
-          <a:p>
-            <a:pPr algn="l">
-              <a:lnSpc>
-                <a:spcPct val="130000"/>
-              </a:lnSpc>
-            </a:pPr>
-            <a:r>
-              <a:rPr sz="1050" b="0">
+            <a:off x="6510528" y="2907791"/>
+            <a:ext cx="2157984" cy="347472"/>
+          </a:xfrm>
+          <a:prstGeom prst="rect">
+            <a:avLst/>
+          </a:prstGeom>
+          <a:noFill/>
+        </p:spPr>
+        <p:txBody>
+          <a:bodyPr wrap="square" lIns="0" rIns="0" tIns="0" bIns="0">
+            <a:spAutoFit/>
+          </a:bodyPr>
+          <a:lstStyle/>
+          <a:p>
+            <a:pPr algn="l">
+              <a:lnSpc>
+                <a:spcPct val="132000"/>
+              </a:lnSpc>
+            </a:pPr>
+            <a:r>
+              <a:rPr sz="1000" b="0">
                 <a:solidFill>
                   <a:srgbClr val="5D6874"/>
                 </a:solidFill>
@@ -13679,8 +13660,8 @@
         </p:nvSpPr>
         <p:spPr>
           <a:xfrm>
-            <a:off x="9052560" y="2084831"/>
-            <a:ext cx="2615184" cy="1298448"/>
+            <a:off x="9052560" y="2066543"/>
+            <a:ext cx="2615184" cy="1280160"/>
           </a:xfrm>
           <a:prstGeom prst="roundRect">
             <a:avLst>
@@ -13725,8 +13706,8 @@
         </p:nvSpPr>
         <p:spPr>
           <a:xfrm>
-            <a:off x="9052560" y="2084831"/>
-            <a:ext cx="68580" cy="1298448"/>
+            <a:off x="9052560" y="2066543"/>
+            <a:ext cx="68580" cy="1280160"/>
           </a:xfrm>
           <a:prstGeom prst="rect">
             <a:avLst/>
@@ -13767,8 +13748,8 @@
         </p:nvSpPr>
         <p:spPr>
           <a:xfrm>
-            <a:off x="9308592" y="2267712"/>
-            <a:ext cx="2157984" cy="228600"/>
+            <a:off x="9308592" y="2212848"/>
+            <a:ext cx="2157984" cy="201168"/>
           </a:xfrm>
           <a:prstGeom prst="rect">
             <a:avLst/>
@@ -13787,7 +13768,7 @@
               </a:lnSpc>
             </a:pPr>
             <a:r>
-              <a:rPr sz="1100" b="1">
+              <a:rPr sz="1050" b="1">
                 <a:solidFill>
                   <a:srgbClr val="5D6874"/>
                 </a:solidFill>
@@ -13806,8 +13787,8 @@
         </p:nvSpPr>
         <p:spPr>
           <a:xfrm>
-            <a:off x="9308592" y="2523744"/>
-            <a:ext cx="2157984" cy="411480"/>
+            <a:off x="9308592" y="2450591"/>
+            <a:ext cx="2157984" cy="365760"/>
           </a:xfrm>
           <a:prstGeom prst="rect">
             <a:avLst/>
@@ -13826,7 +13807,7 @@
               </a:lnSpc>
             </a:pPr>
             <a:r>
-              <a:rPr sz="2500" b="1">
+              <a:rPr sz="2200" b="1">
                 <a:solidFill>
                   <a:srgbClr val="151C26"/>
                 </a:solidFill>
@@ -13845,27 +13826,27 @@
         </p:nvSpPr>
         <p:spPr>
           <a:xfrm>
-            <a:off x="9308592" y="2944368"/>
-            <a:ext cx="2157984" cy="320040"/>
-          </a:xfrm>
-          <a:prstGeom prst="rect">
-            <a:avLst/>
-          </a:prstGeom>
-          <a:noFill/>
-        </p:spPr>
-        <p:txBody>
-          <a:bodyPr wrap="square" lIns="0" rIns="0" tIns="0" bIns="0">
-            <a:spAutoFit/>
-          </a:bodyPr>
-          <a:lstStyle/>
-          <a:p>
-            <a:pPr algn="l">
-              <a:lnSpc>
-                <a:spcPct val="130000"/>
-              </a:lnSpc>
-            </a:pPr>
-            <a:r>
-              <a:rPr sz="1050" b="0">
+            <a:off x="9308592" y="2907791"/>
+            <a:ext cx="2157984" cy="347472"/>
+          </a:xfrm>
+          <a:prstGeom prst="rect">
+            <a:avLst/>
+          </a:prstGeom>
+          <a:noFill/>
+        </p:spPr>
+        <p:txBody>
+          <a:bodyPr wrap="square" lIns="0" rIns="0" tIns="0" bIns="0">
+            <a:spAutoFit/>
+          </a:bodyPr>
+          <a:lstStyle/>
+          <a:p>
+            <a:pPr algn="l">
+              <a:lnSpc>
+                <a:spcPct val="132000"/>
+              </a:lnSpc>
+            </a:pPr>
+            <a:r>
+              <a:rPr sz="1000" b="0">
                 <a:solidFill>
                   <a:srgbClr val="5D6874"/>
                 </a:solidFill>
@@ -16559,7 +16540,7 @@
         <p:spPr>
           <a:xfrm>
             <a:off x="7013448" y="2871216"/>
-            <a:ext cx="4251960" cy="274320"/>
+            <a:ext cx="4251960" cy="256032"/>
           </a:xfrm>
           <a:prstGeom prst="rect">
             <a:avLst/>
@@ -16598,22 +16579,22 @@
         <p:spPr>
           <a:xfrm>
             <a:off x="7013448" y="3145536"/>
-            <a:ext cx="4251960" cy="457200"/>
-          </a:xfrm>
-          <a:prstGeom prst="rect">
-            <a:avLst/>
-          </a:prstGeom>
-          <a:noFill/>
-        </p:spPr>
-        <p:txBody>
-          <a:bodyPr wrap="square" lIns="0" rIns="0" tIns="0" bIns="0">
-            <a:spAutoFit/>
-          </a:bodyPr>
-          <a:lstStyle/>
-          <a:p>
-            <a:pPr algn="l">
-              <a:lnSpc>
-                <a:spcPct val="140000"/>
+            <a:ext cx="4251960" cy="841105"/>
+          </a:xfrm>
+          <a:prstGeom prst="rect">
+            <a:avLst/>
+          </a:prstGeom>
+          <a:noFill/>
+        </p:spPr>
+        <p:txBody>
+          <a:bodyPr wrap="square" lIns="0" rIns="0" tIns="0" bIns="0">
+            <a:spAutoFit/>
+          </a:bodyPr>
+          <a:lstStyle/>
+          <a:p>
+            <a:pPr algn="l">
+              <a:lnSpc>
+                <a:spcPct val="142000"/>
               </a:lnSpc>
             </a:pPr>
             <a:r>
@@ -16629,7 +16610,7 @@
           <a:p>
             <a:pPr algn="l">
               <a:lnSpc>
-                <a:spcPct val="140000"/>
+                <a:spcPct val="142000"/>
               </a:lnSpc>
               <a:spcBef>
                 <a:spcPts val="0"/>
@@ -16655,7 +16636,7 @@
         </p:nvSpPr>
         <p:spPr>
           <a:xfrm>
-            <a:off x="6739128" y="3523000"/>
+            <a:off x="6739128" y="4139529"/>
             <a:ext cx="228600" cy="274320"/>
           </a:xfrm>
           <a:prstGeom prst="rect">
@@ -16694,8 +16675,8 @@
         </p:nvSpPr>
         <p:spPr>
           <a:xfrm>
-            <a:off x="7013448" y="3523000"/>
-            <a:ext cx="4251960" cy="274320"/>
+            <a:off x="7013448" y="4139529"/>
+            <a:ext cx="4251960" cy="256032"/>
           </a:xfrm>
           <a:prstGeom prst="rect">
             <a:avLst/>
@@ -16733,23 +16714,23 @@
         </p:nvSpPr>
         <p:spPr>
           <a:xfrm>
-            <a:off x="7013448" y="3797320"/>
-            <a:ext cx="4251960" cy="457200"/>
-          </a:xfrm>
-          <a:prstGeom prst="rect">
-            <a:avLst/>
-          </a:prstGeom>
-          <a:noFill/>
-        </p:spPr>
-        <p:txBody>
-          <a:bodyPr wrap="square" lIns="0" rIns="0" tIns="0" bIns="0">
-            <a:spAutoFit/>
-          </a:bodyPr>
-          <a:lstStyle/>
-          <a:p>
-            <a:pPr algn="l">
-              <a:lnSpc>
-                <a:spcPct val="140000"/>
+            <a:off x="7013448" y="4413849"/>
+            <a:ext cx="4251960" cy="841105"/>
+          </a:xfrm>
+          <a:prstGeom prst="rect">
+            <a:avLst/>
+          </a:prstGeom>
+          <a:noFill/>
+        </p:spPr>
+        <p:txBody>
+          <a:bodyPr wrap="square" lIns="0" rIns="0" tIns="0" bIns="0">
+            <a:spAutoFit/>
+          </a:bodyPr>
+          <a:lstStyle/>
+          <a:p>
+            <a:pPr algn="l">
+              <a:lnSpc>
+                <a:spcPct val="142000"/>
               </a:lnSpc>
             </a:pPr>
             <a:r>
@@ -16765,7 +16746,7 @@
           <a:p>
             <a:pPr algn="l">
               <a:lnSpc>
-                <a:spcPct val="140000"/>
+                <a:spcPct val="142000"/>
               </a:lnSpc>
               <a:spcBef>
                 <a:spcPts val="0"/>
@@ -16791,7 +16772,7 @@
         </p:nvSpPr>
         <p:spPr>
           <a:xfrm>
-            <a:off x="6739128" y="4174784"/>
+            <a:off x="6739128" y="5407842"/>
             <a:ext cx="228600" cy="274320"/>
           </a:xfrm>
           <a:prstGeom prst="rect">
@@ -16830,8 +16811,8 @@
         </p:nvSpPr>
         <p:spPr>
           <a:xfrm>
-            <a:off x="7013448" y="4174784"/>
-            <a:ext cx="4251960" cy="274320"/>
+            <a:off x="7013448" y="5407842"/>
+            <a:ext cx="4251960" cy="256032"/>
           </a:xfrm>
           <a:prstGeom prst="rect">
             <a:avLst/>
@@ -16869,23 +16850,23 @@
         </p:nvSpPr>
         <p:spPr>
           <a:xfrm>
-            <a:off x="7013448" y="4449104"/>
-            <a:ext cx="4251960" cy="457200"/>
-          </a:xfrm>
-          <a:prstGeom prst="rect">
-            <a:avLst/>
-          </a:prstGeom>
-          <a:noFill/>
-        </p:spPr>
-        <p:txBody>
-          <a:bodyPr wrap="square" lIns="0" rIns="0" tIns="0" bIns="0">
-            <a:spAutoFit/>
-          </a:bodyPr>
-          <a:lstStyle/>
-          <a:p>
-            <a:pPr algn="l">
-              <a:lnSpc>
-                <a:spcPct val="140000"/>
+            <a:off x="7013448" y="5682162"/>
+            <a:ext cx="4251960" cy="630829"/>
+          </a:xfrm>
+          <a:prstGeom prst="rect">
+            <a:avLst/>
+          </a:prstGeom>
+          <a:noFill/>
+        </p:spPr>
+        <p:txBody>
+          <a:bodyPr wrap="square" lIns="0" rIns="0" tIns="0" bIns="0">
+            <a:spAutoFit/>
+          </a:bodyPr>
+          <a:lstStyle/>
+          <a:p>
+            <a:pPr algn="l">
+              <a:lnSpc>
+                <a:spcPct val="142000"/>
               </a:lnSpc>
             </a:pPr>
             <a:r>
@@ -16901,7 +16882,7 @@
           <a:p>
             <a:pPr algn="l">
               <a:lnSpc>
-                <a:spcPct val="140000"/>
+                <a:spcPct val="142000"/>
               </a:lnSpc>
               <a:spcBef>
                 <a:spcPts val="0"/>
@@ -21632,52 +21613,52 @@
         </p:nvSpPr>
         <p:spPr>
           <a:xfrm>
-            <a:off x="658368" y="4526280"/>
-            <a:ext cx="10874959" cy="914400"/>
-          </a:xfrm>
-          <a:prstGeom prst="rect">
-            <a:avLst/>
-          </a:prstGeom>
-          <a:noFill/>
-        </p:spPr>
-        <p:txBody>
-          <a:bodyPr wrap="square" lIns="0" rIns="0" tIns="0" bIns="0">
-            <a:spAutoFit/>
-          </a:bodyPr>
-          <a:lstStyle/>
-          <a:p>
-            <a:pPr algn="l">
-              <a:lnSpc>
-                <a:spcPct val="160000"/>
-              </a:lnSpc>
-            </a:pPr>
-            <a:r>
-              <a:rPr sz="1250" b="0">
+            <a:off x="658368" y="4498848"/>
+            <a:ext cx="10874959" cy="713232"/>
+          </a:xfrm>
+          <a:prstGeom prst="rect">
+            <a:avLst/>
+          </a:prstGeom>
+          <a:noFill/>
+        </p:spPr>
+        <p:txBody>
+          <a:bodyPr wrap="square" lIns="0" rIns="0" tIns="0" bIns="0">
+            <a:spAutoFit/>
+          </a:bodyPr>
+          <a:lstStyle/>
+          <a:p>
+            <a:pPr algn="l">
+              <a:lnSpc>
+                <a:spcPct val="150000"/>
+              </a:lnSpc>
+            </a:pPr>
+            <a:r>
+              <a:rPr sz="1200" b="0">
                 <a:solidFill>
                   <a:srgbClr val="5D6874"/>
                 </a:solidFill>
                 <a:latin typeface="맑은 고딕"/>
               </a:rPr>
-              <a:t>공간 키가 다른 데이터를 억지로 맞추려면 인구 비례 안분 같은 가정을 넣어야 하는데, 그 가정이 틀리면 지표 전체가 조용히 오염된다. 특히 격차 분석은 '어느 동이 더 나쁜가'를 다투는 작업이라, 배분 오차가 곧 결론의 오차가 된다.</a:t>
-            </a:r>
-          </a:p>
-          <a:p>
-            <a:pPr algn="l">
-              <a:lnSpc>
-                <a:spcPct val="160000"/>
+              <a:t>공간 키가 다른 데이터를 억지로 맞추려면 인구 비례 안분 같은 가정이 필요한데, 그 가정이 틀리면 지표 전체가 조용히 오염된다.</a:t>
+            </a:r>
+          </a:p>
+          <a:p>
+            <a:pPr algn="l">
+              <a:lnSpc>
+                <a:spcPct val="150000"/>
               </a:lnSpc>
               <a:spcBef>
                 <a:spcPts val="0"/>
               </a:spcBef>
             </a:pPr>
             <a:r>
-              <a:rPr sz="1250" b="0">
+              <a:rPr sz="1200" b="0">
                 <a:solidFill>
                   <a:srgbClr val="5D6874"/>
                 </a:solidFill>
                 <a:latin typeface="맑은 고딕"/>
               </a:rPr>
-              <a:t>우리는 정밀도를 조금 포기하는 대신 배분 가정을 아예 쓰지 않는 쪽을 택했다. 25개 생활권은 천안시 생활권계획·주민센터 관할과도 대체로 일치해 정책 집행 단위로도 그대로 쓸 수 있다.</a:t>
+              <a:t>격차 분석은 '어느 동이 더 나쁜가'를 다투는 작업이라 배분 오차가 곧 결론의 오차가 된다. 정밀도를 조금 포기하는 대신 배분 가정을 아예 쓰지 않는 쪽을 택했다.</a:t>
             </a:r>
           </a:p>
         </p:txBody>
@@ -21691,8 +21672,8 @@
           <p:nvPr/>
         </p:nvGraphicFramePr>
         <p:xfrm>
-          <a:off x="658368" y="5532120"/>
-          <a:ext cx="10874958" cy="1837944"/>
+          <a:off x="658368" y="5138928"/>
+          <a:ext cx="10874958" cy="1645920"/>
         </p:xfrm>
         <a:graphic>
           <a:graphicData uri="http://schemas.openxmlformats.org/drawingml/2006/table">
@@ -21704,7 +21685,7 @@
                 <a:gridCol w="1812493"/>
                 <a:gridCol w="9062465"/>
               </a:tblGrid>
-              <a:tr h="306324">
+              <a:tr h="274320">
                 <a:tc>
                   <a:txBody>
                     <a:bodyPr/>
@@ -21712,7 +21693,7 @@
                     <a:p>
                       <a:pPr algn="ctr"/>
                       <a:r>
-                        <a:rPr sz="1000" b="1">
+                        <a:rPr sz="950" b="1">
                           <a:solidFill>
                             <a:srgbClr val="151C26"/>
                           </a:solidFill>
@@ -21735,7 +21716,7 @@
                     <a:p>
                       <a:pPr algn="ctr"/>
                       <a:r>
-                        <a:rPr sz="1000" b="1">
+                        <a:rPr sz="950" b="1">
                           <a:solidFill>
                             <a:srgbClr val="151C26"/>
                           </a:solidFill>
@@ -21752,7 +21733,7 @@
                   </a:tcPr>
                 </a:tc>
               </a:tr>
-              <a:tr h="306324">
+              <a:tr h="274320">
                 <a:tc>
                   <a:txBody>
                     <a:bodyPr/>
@@ -21760,7 +21741,7 @@
                     <a:p>
                       <a:pPr algn="l"/>
                       <a:r>
-                        <a:rPr sz="950">
+                        <a:rPr sz="900">
                           <a:solidFill>
                             <a:srgbClr val="151C26"/>
                           </a:solidFill>
@@ -21783,7 +21764,7 @@
                     <a:p>
                       <a:pPr algn="ctr"/>
                       <a:r>
-                        <a:rPr sz="950">
+                        <a:rPr sz="900">
                           <a:solidFill>
                             <a:srgbClr val="151C26"/>
                           </a:solidFill>
@@ -21800,7 +21781,7 @@
                   </a:tcPr>
                 </a:tc>
               </a:tr>
-              <a:tr h="306324">
+              <a:tr h="274320">
                 <a:tc>
                   <a:txBody>
                     <a:bodyPr/>
@@ -21808,7 +21789,7 @@
                     <a:p>
                       <a:pPr algn="l"/>
                       <a:r>
-                        <a:rPr sz="950">
+                        <a:rPr sz="900">
                           <a:solidFill>
                             <a:srgbClr val="151C26"/>
                           </a:solidFill>
@@ -21831,7 +21812,7 @@
                     <a:p>
                       <a:pPr algn="ctr"/>
                       <a:r>
-                        <a:rPr sz="950">
+                        <a:rPr sz="900">
                           <a:solidFill>
                             <a:srgbClr val="151C26"/>
                           </a:solidFill>
@@ -21848,7 +21829,7 @@
                   </a:tcPr>
                 </a:tc>
               </a:tr>
-              <a:tr h="306324">
+              <a:tr h="274320">
                 <a:tc>
                   <a:txBody>
                     <a:bodyPr/>
@@ -21856,7 +21837,7 @@
                     <a:p>
                       <a:pPr algn="l"/>
                       <a:r>
-                        <a:rPr sz="950">
+                        <a:rPr sz="900">
                           <a:solidFill>
                             <a:srgbClr val="151C26"/>
                           </a:solidFill>
@@ -21879,7 +21860,7 @@
                     <a:p>
                       <a:pPr algn="ctr"/>
                       <a:r>
-                        <a:rPr sz="950">
+                        <a:rPr sz="900">
                           <a:solidFill>
                             <a:srgbClr val="151C26"/>
                           </a:solidFill>
@@ -21896,7 +21877,7 @@
                   </a:tcPr>
                 </a:tc>
               </a:tr>
-              <a:tr h="306324">
+              <a:tr h="274320">
                 <a:tc>
                   <a:txBody>
                     <a:bodyPr/>
@@ -21904,7 +21885,7 @@
                     <a:p>
                       <a:pPr algn="l"/>
                       <a:r>
-                        <a:rPr sz="950">
+                        <a:rPr sz="900">
                           <a:solidFill>
                             <a:srgbClr val="151C26"/>
                           </a:solidFill>
@@ -21927,7 +21908,7 @@
                     <a:p>
                       <a:pPr algn="ctr"/>
                       <a:r>
-                        <a:rPr sz="950">
+                        <a:rPr sz="900">
                           <a:solidFill>
                             <a:srgbClr val="151C26"/>
                           </a:solidFill>
@@ -21944,7 +21925,7 @@
                   </a:tcPr>
                 </a:tc>
               </a:tr>
-              <a:tr h="306324">
+              <a:tr h="274320">
                 <a:tc>
                   <a:txBody>
                     <a:bodyPr/>
@@ -21952,7 +21933,7 @@
                     <a:p>
                       <a:pPr algn="l"/>
                       <a:r>
-                        <a:rPr sz="950">
+                        <a:rPr sz="900">
                           <a:solidFill>
                             <a:srgbClr val="151C26"/>
                           </a:solidFill>
@@ -21975,7 +21956,7 @@
                     <a:p>
                       <a:pPr algn="ctr"/>
                       <a:r>
-                        <a:rPr sz="950">
+                        <a:rPr sz="900">
                           <a:solidFill>
                             <a:srgbClr val="151C26"/>
                           </a:solidFill>
@@ -22299,7 +22280,7 @@
         <p:spPr>
           <a:xfrm>
             <a:off x="877824" y="2688336"/>
-            <a:ext cx="1280160" cy="274320"/>
+            <a:ext cx="1188720" cy="256032"/>
           </a:xfrm>
           <a:prstGeom prst="rect">
             <a:avLst/>
@@ -22337,8 +22318,8 @@
         </p:nvSpPr>
         <p:spPr>
           <a:xfrm>
-            <a:off x="2121408" y="2715768"/>
-            <a:ext cx="4023360" cy="365760"/>
+            <a:off x="2176272" y="2706624"/>
+            <a:ext cx="3977639" cy="384048"/>
           </a:xfrm>
           <a:prstGeom prst="rect">
             <a:avLst/>
@@ -22419,7 +22400,7 @@
         <p:spPr>
           <a:xfrm>
             <a:off x="877824" y="3255264"/>
-            <a:ext cx="1280160" cy="274320"/>
+            <a:ext cx="1188720" cy="256032"/>
           </a:xfrm>
           <a:prstGeom prst="rect">
             <a:avLst/>
@@ -22457,8 +22438,8 @@
         </p:nvSpPr>
         <p:spPr>
           <a:xfrm>
-            <a:off x="2121408" y="3282696"/>
-            <a:ext cx="4023360" cy="365760"/>
+            <a:off x="2176272" y="3273552"/>
+            <a:ext cx="3977639" cy="384048"/>
           </a:xfrm>
           <a:prstGeom prst="rect">
             <a:avLst/>
@@ -22539,7 +22520,7 @@
         <p:spPr>
           <a:xfrm>
             <a:off x="877824" y="3822191"/>
-            <a:ext cx="1280160" cy="274320"/>
+            <a:ext cx="1188720" cy="256032"/>
           </a:xfrm>
           <a:prstGeom prst="rect">
             <a:avLst/>
@@ -22577,8 +22558,8 @@
         </p:nvSpPr>
         <p:spPr>
           <a:xfrm>
-            <a:off x="2121408" y="3849624"/>
-            <a:ext cx="4023360" cy="365760"/>
+            <a:off x="2176272" y="3840480"/>
+            <a:ext cx="3977639" cy="384048"/>
           </a:xfrm>
           <a:prstGeom prst="rect">
             <a:avLst/>
@@ -22659,7 +22640,7 @@
         <p:spPr>
           <a:xfrm>
             <a:off x="877824" y="4389119"/>
-            <a:ext cx="1280160" cy="274320"/>
+            <a:ext cx="1188720" cy="256032"/>
           </a:xfrm>
           <a:prstGeom prst="rect">
             <a:avLst/>
@@ -22697,8 +22678,8 @@
         </p:nvSpPr>
         <p:spPr>
           <a:xfrm>
-            <a:off x="2121408" y="4416551"/>
-            <a:ext cx="4023360" cy="365760"/>
+            <a:off x="2176272" y="4407407"/>
+            <a:ext cx="3977639" cy="384048"/>
           </a:xfrm>
           <a:prstGeom prst="rect">
             <a:avLst/>
@@ -22779,7 +22760,7 @@
         <p:spPr>
           <a:xfrm>
             <a:off x="877824" y="4956048"/>
-            <a:ext cx="1280160" cy="274320"/>
+            <a:ext cx="1188720" cy="256032"/>
           </a:xfrm>
           <a:prstGeom prst="rect">
             <a:avLst/>
@@ -22817,8 +22798,8 @@
         </p:nvSpPr>
         <p:spPr>
           <a:xfrm>
-            <a:off x="2121408" y="4983480"/>
-            <a:ext cx="4023360" cy="365760"/>
+            <a:off x="2176272" y="4974336"/>
+            <a:ext cx="3977639" cy="384048"/>
           </a:xfrm>
           <a:prstGeom prst="rect">
             <a:avLst/>
@@ -23432,8 +23413,8 @@
         </p:nvSpPr>
         <p:spPr>
           <a:xfrm>
-            <a:off x="7333488" y="2148840"/>
-            <a:ext cx="4160520" cy="1024128"/>
+            <a:off x="7333488" y="2121408"/>
+            <a:ext cx="4160520" cy="1225296"/>
           </a:xfrm>
           <a:prstGeom prst="roundRect">
             <a:avLst>
@@ -23478,8 +23459,8 @@
         </p:nvSpPr>
         <p:spPr>
           <a:xfrm>
-            <a:off x="7333488" y="2148840"/>
-            <a:ext cx="68580" cy="1024128"/>
+            <a:off x="7333488" y="2121408"/>
+            <a:ext cx="68580" cy="1225296"/>
           </a:xfrm>
           <a:prstGeom prst="rect">
             <a:avLst/>
@@ -23520,8 +23501,8 @@
         </p:nvSpPr>
         <p:spPr>
           <a:xfrm>
-            <a:off x="7589519" y="2331720"/>
-            <a:ext cx="3703320" cy="228600"/>
+            <a:off x="7589519" y="2267712"/>
+            <a:ext cx="3703320" cy="201168"/>
           </a:xfrm>
           <a:prstGeom prst="rect">
             <a:avLst/>
@@ -23540,7 +23521,7 @@
               </a:lnSpc>
             </a:pPr>
             <a:r>
-              <a:rPr sz="1100" b="1">
+              <a:rPr sz="1050" b="1">
                 <a:solidFill>
                   <a:srgbClr val="5D6874"/>
                 </a:solidFill>
@@ -23559,8 +23540,8 @@
         </p:nvSpPr>
         <p:spPr>
           <a:xfrm>
-            <a:off x="7589519" y="2587752"/>
-            <a:ext cx="3703320" cy="411480"/>
+            <a:off x="7589519" y="2505456"/>
+            <a:ext cx="3703320" cy="365760"/>
           </a:xfrm>
           <a:prstGeom prst="rect">
             <a:avLst/>
@@ -23579,7 +23560,7 @@
               </a:lnSpc>
             </a:pPr>
             <a:r>
-              <a:rPr sz="2500" b="1">
+              <a:rPr sz="2400" b="1">
                 <a:solidFill>
                   <a:srgbClr val="151C26"/>
                 </a:solidFill>
@@ -23598,27 +23579,27 @@
         </p:nvSpPr>
         <p:spPr>
           <a:xfrm>
-            <a:off x="7589519" y="2734056"/>
-            <a:ext cx="3703320" cy="320040"/>
-          </a:xfrm>
-          <a:prstGeom prst="rect">
-            <a:avLst/>
-          </a:prstGeom>
-          <a:noFill/>
-        </p:spPr>
-        <p:txBody>
-          <a:bodyPr wrap="square" lIns="0" rIns="0" tIns="0" bIns="0">
-            <a:spAutoFit/>
-          </a:bodyPr>
-          <a:lstStyle/>
-          <a:p>
-            <a:pPr algn="l">
-              <a:lnSpc>
-                <a:spcPct val="130000"/>
-              </a:lnSpc>
-            </a:pPr>
-            <a:r>
-              <a:rPr sz="1050" b="0">
+            <a:off x="7589519" y="2962656"/>
+            <a:ext cx="3703320" cy="347472"/>
+          </a:xfrm>
+          <a:prstGeom prst="rect">
+            <a:avLst/>
+          </a:prstGeom>
+          <a:noFill/>
+        </p:spPr>
+        <p:txBody>
+          <a:bodyPr wrap="square" lIns="0" rIns="0" tIns="0" bIns="0">
+            <a:spAutoFit/>
+          </a:bodyPr>
+          <a:lstStyle/>
+          <a:p>
+            <a:pPr algn="l">
+              <a:lnSpc>
+                <a:spcPct val="132000"/>
+              </a:lnSpc>
+            </a:pPr>
+            <a:r>
+              <a:rPr sz="1000" b="0">
                 <a:solidFill>
                   <a:srgbClr val="5D6874"/>
                 </a:solidFill>
@@ -23637,8 +23618,8 @@
         </p:nvSpPr>
         <p:spPr>
           <a:xfrm>
-            <a:off x="7333488" y="3291840"/>
-            <a:ext cx="4160520" cy="1024128"/>
+            <a:off x="7333488" y="3438144"/>
+            <a:ext cx="4160520" cy="1225296"/>
           </a:xfrm>
           <a:prstGeom prst="roundRect">
             <a:avLst>
@@ -23683,8 +23664,8 @@
         </p:nvSpPr>
         <p:spPr>
           <a:xfrm>
-            <a:off x="7333488" y="3291840"/>
-            <a:ext cx="68580" cy="1024128"/>
+            <a:off x="7333488" y="3438144"/>
+            <a:ext cx="68580" cy="1225296"/>
           </a:xfrm>
           <a:prstGeom prst="rect">
             <a:avLst/>
@@ -23725,8 +23706,8 @@
         </p:nvSpPr>
         <p:spPr>
           <a:xfrm>
-            <a:off x="7589519" y="3474720"/>
-            <a:ext cx="3703320" cy="228600"/>
+            <a:off x="7589519" y="3584448"/>
+            <a:ext cx="3703320" cy="201168"/>
           </a:xfrm>
           <a:prstGeom prst="rect">
             <a:avLst/>
@@ -23745,7 +23726,7 @@
               </a:lnSpc>
             </a:pPr>
             <a:r>
-              <a:rPr sz="1100" b="1">
+              <a:rPr sz="1050" b="1">
                 <a:solidFill>
                   <a:srgbClr val="5D6874"/>
                 </a:solidFill>
@@ -23764,8 +23745,8 @@
         </p:nvSpPr>
         <p:spPr>
           <a:xfrm>
-            <a:off x="7589519" y="3730752"/>
-            <a:ext cx="3703320" cy="411480"/>
+            <a:off x="7589519" y="3822191"/>
+            <a:ext cx="3703320" cy="365760"/>
           </a:xfrm>
           <a:prstGeom prst="rect">
             <a:avLst/>
@@ -23784,7 +23765,7 @@
               </a:lnSpc>
             </a:pPr>
             <a:r>
-              <a:rPr sz="2500" b="1">
+              <a:rPr sz="2400" b="1">
                 <a:solidFill>
                   <a:srgbClr val="151C26"/>
                 </a:solidFill>
@@ -23803,27 +23784,27 @@
         </p:nvSpPr>
         <p:spPr>
           <a:xfrm>
-            <a:off x="7589519" y="3877056"/>
-            <a:ext cx="3703320" cy="320040"/>
-          </a:xfrm>
-          <a:prstGeom prst="rect">
-            <a:avLst/>
-          </a:prstGeom>
-          <a:noFill/>
-        </p:spPr>
-        <p:txBody>
-          <a:bodyPr wrap="square" lIns="0" rIns="0" tIns="0" bIns="0">
-            <a:spAutoFit/>
-          </a:bodyPr>
-          <a:lstStyle/>
-          <a:p>
-            <a:pPr algn="l">
-              <a:lnSpc>
-                <a:spcPct val="130000"/>
-              </a:lnSpc>
-            </a:pPr>
-            <a:r>
-              <a:rPr sz="1050" b="0">
+            <a:off x="7589519" y="4279392"/>
+            <a:ext cx="3703320" cy="347472"/>
+          </a:xfrm>
+          <a:prstGeom prst="rect">
+            <a:avLst/>
+          </a:prstGeom>
+          <a:noFill/>
+        </p:spPr>
+        <p:txBody>
+          <a:bodyPr wrap="square" lIns="0" rIns="0" tIns="0" bIns="0">
+            <a:spAutoFit/>
+          </a:bodyPr>
+          <a:lstStyle/>
+          <a:p>
+            <a:pPr algn="l">
+              <a:lnSpc>
+                <a:spcPct val="132000"/>
+              </a:lnSpc>
+            </a:pPr>
+            <a:r>
+              <a:rPr sz="1000" b="0">
                 <a:solidFill>
                   <a:srgbClr val="5D6874"/>
                 </a:solidFill>
@@ -23842,8 +23823,8 @@
         </p:nvSpPr>
         <p:spPr>
           <a:xfrm>
-            <a:off x="7333488" y="4434840"/>
-            <a:ext cx="4160520" cy="1024128"/>
+            <a:off x="7333488" y="4754880"/>
+            <a:ext cx="4160520" cy="1225296"/>
           </a:xfrm>
           <a:prstGeom prst="roundRect">
             <a:avLst>
@@ -23888,8 +23869,8 @@
         </p:nvSpPr>
         <p:spPr>
           <a:xfrm>
-            <a:off x="7333488" y="4434840"/>
-            <a:ext cx="68580" cy="1024128"/>
+            <a:off x="7333488" y="4754880"/>
+            <a:ext cx="68580" cy="1225296"/>
           </a:xfrm>
           <a:prstGeom prst="rect">
             <a:avLst/>
@@ -23930,8 +23911,8 @@
         </p:nvSpPr>
         <p:spPr>
           <a:xfrm>
-            <a:off x="7589519" y="4617720"/>
-            <a:ext cx="3703320" cy="228600"/>
+            <a:off x="7589519" y="4901184"/>
+            <a:ext cx="3703320" cy="201168"/>
           </a:xfrm>
           <a:prstGeom prst="rect">
             <a:avLst/>
@@ -23950,7 +23931,7 @@
               </a:lnSpc>
             </a:pPr>
             <a:r>
-              <a:rPr sz="1100" b="1">
+              <a:rPr sz="1050" b="1">
                 <a:solidFill>
                   <a:srgbClr val="5D6874"/>
                 </a:solidFill>
@@ -23969,8 +23950,8 @@
         </p:nvSpPr>
         <p:spPr>
           <a:xfrm>
-            <a:off x="7589519" y="4873752"/>
-            <a:ext cx="3703320" cy="411480"/>
+            <a:off x="7589519" y="5138928"/>
+            <a:ext cx="3703320" cy="365760"/>
           </a:xfrm>
           <a:prstGeom prst="rect">
             <a:avLst/>
@@ -23989,7 +23970,7 @@
               </a:lnSpc>
             </a:pPr>
             <a:r>
-              <a:rPr sz="2500" b="1">
+              <a:rPr sz="2400" b="1">
                 <a:solidFill>
                   <a:srgbClr val="151C26"/>
                 </a:solidFill>
@@ -24008,27 +23989,27 @@
         </p:nvSpPr>
         <p:spPr>
           <a:xfrm>
-            <a:off x="7589519" y="5020056"/>
-            <a:ext cx="3703320" cy="320040"/>
-          </a:xfrm>
-          <a:prstGeom prst="rect">
-            <a:avLst/>
-          </a:prstGeom>
-          <a:noFill/>
-        </p:spPr>
-        <p:txBody>
-          <a:bodyPr wrap="square" lIns="0" rIns="0" tIns="0" bIns="0">
-            <a:spAutoFit/>
-          </a:bodyPr>
-          <a:lstStyle/>
-          <a:p>
-            <a:pPr algn="l">
-              <a:lnSpc>
-                <a:spcPct val="130000"/>
-              </a:lnSpc>
-            </a:pPr>
-            <a:r>
-              <a:rPr sz="1050" b="0">
+            <a:off x="7589519" y="5596128"/>
+            <a:ext cx="3703320" cy="347472"/>
+          </a:xfrm>
+          <a:prstGeom prst="rect">
+            <a:avLst/>
+          </a:prstGeom>
+          <a:noFill/>
+        </p:spPr>
+        <p:txBody>
+          <a:bodyPr wrap="square" lIns="0" rIns="0" tIns="0" bIns="0">
+            <a:spAutoFit/>
+          </a:bodyPr>
+          <a:lstStyle/>
+          <a:p>
+            <a:pPr algn="l">
+              <a:lnSpc>
+                <a:spcPct val="132000"/>
+              </a:lnSpc>
+            </a:pPr>
+            <a:r>
+              <a:rPr sz="1000" b="0">
                 <a:solidFill>
                   <a:srgbClr val="5D6874"/>
                 </a:solidFill>
@@ -24047,52 +24028,33 @@
         </p:nvSpPr>
         <p:spPr>
           <a:xfrm>
-            <a:off x="7333488" y="5650992"/>
-            <a:ext cx="4160520" cy="640080"/>
-          </a:xfrm>
-          <a:prstGeom prst="rect">
-            <a:avLst/>
-          </a:prstGeom>
-          <a:noFill/>
-        </p:spPr>
-        <p:txBody>
-          <a:bodyPr wrap="square" lIns="0" rIns="0" tIns="0" bIns="0">
-            <a:spAutoFit/>
-          </a:bodyPr>
-          <a:lstStyle/>
-          <a:p>
-            <a:pPr algn="l">
-              <a:lnSpc>
-                <a:spcPct val="145000"/>
-              </a:lnSpc>
-            </a:pPr>
-            <a:r>
-              <a:rPr sz="1050" b="0">
+            <a:off x="7333488" y="6053328"/>
+            <a:ext cx="4160520" cy="292608"/>
+          </a:xfrm>
+          <a:prstGeom prst="rect">
+            <a:avLst/>
+          </a:prstGeom>
+          <a:noFill/>
+        </p:spPr>
+        <p:txBody>
+          <a:bodyPr wrap="square" lIns="0" rIns="0" tIns="0" bIns="0">
+            <a:spAutoFit/>
+          </a:bodyPr>
+          <a:lstStyle/>
+          <a:p>
+            <a:pPr algn="l">
+              <a:lnSpc>
+                <a:spcPct val="135000"/>
+              </a:lnSpc>
+            </a:pPr>
+            <a:r>
+              <a:rPr sz="1000" b="0">
                 <a:solidFill>
                   <a:srgbClr val="5D6874"/>
                 </a:solidFill>
                 <a:latin typeface="맑은 고딕"/>
               </a:rPr>
-              <a:t>쇠퇴단계는 CBI 순위가 아니라 12개 지표의 다차원 패턴으로 분류한다.</a:t>
-            </a:r>
-          </a:p>
-          <a:p>
-            <a:pPr algn="l">
-              <a:lnSpc>
-                <a:spcPct val="145000"/>
-              </a:lnSpc>
-              <a:spcBef>
-                <a:spcPts val="0"/>
-              </a:spcBef>
-            </a:pPr>
-            <a:r>
-              <a:rPr sz="1050" b="0">
-                <a:solidFill>
-                  <a:srgbClr val="5D6874"/>
-                </a:solidFill>
-                <a:latin typeface="맑은 고딕"/>
-              </a:rPr>
-              <a:t>CBI가 조금 높아도 쇠퇴 패턴이면 낮은 단계로 잡힌다.</a:t>
+              <a:t>쇠퇴단계는 CBI 순위가 아니라 다차원 패턴으로 분류된다.</a:t>
             </a:r>
           </a:p>
         </p:txBody>

--- a/deliverables/기획서_천안균형발전나침반_CBC.pptx
+++ b/deliverables/기획서_천안균형발전나침반_CBC.pptx
@@ -25,6 +25,7 @@
     <p:sldId id="273" r:id="rId24"/>
     <p:sldId id="274" r:id="rId25"/>
     <p:sldId id="275" r:id="rId26"/>
+    <p:sldId id="276" r:id="rId27"/>
   </p:sldIdLst>
   <p:sldSz cx="12191695" cy="6858000" type="screen4x3"/>
   <p:notesSz cx="6858000" cy="9144000"/>
@@ -3384,7 +3385,7 @@
                 </a:solidFill>
                 <a:latin typeface="맑은 고딕"/>
               </a:rPr>
-              <a:t>원도심 쇠퇴를 3년 먼저 경보하고,</a:t>
+              <a:t>천안시민 누구나 걸어서 닿는 생활환경을 바라며,</a:t>
             </a:r>
           </a:p>
           <a:p>
@@ -3403,7 +3404,7 @@
                 </a:solidFill>
                 <a:latin typeface="맑은 고딕"/>
               </a:rPr>
-              <a:t>생활SOC 예산의 투입 순서를 정하는 AI</a:t>
+              <a:t>공공데이터로 먼저 살펴본 균형발전 이야기</a:t>
             </a:r>
           </a:p>
         </p:txBody>
@@ -3811,7 +3812,7 @@
                 </a:solidFill>
                 <a:latin typeface="맑은 고딕"/>
               </a:rPr>
-              <a:t>핵심 발견 — 같은 '낙후'인데 처방은 정반대여야 한다</a:t>
+              <a:t>같은 '어려움'이라도 필요한 도움이 다릅니다</a:t>
             </a:r>
           </a:p>
         </p:txBody>
@@ -3850,7 +3851,7 @@
                 </a:solidFill>
                 <a:latin typeface="맑은 고딕"/>
               </a:rPr>
-              <a:t>원도심과 농촌면은 CBI가 모두 낮다. 그런데 도메인을 뜯어보면 원인이 완전히 다르다.</a:t>
+              <a:t>원도심과 농촌면은 지수가 모두 낮게 나왔습니다. 그런데 항목을 나눠 보니 사정이 서로 달랐습니다.</a:t>
             </a:r>
           </a:p>
         </p:txBody>
@@ -3996,7 +3997,7 @@
                 </a:solidFill>
                 <a:latin typeface="맑은 고딕"/>
               </a:rPr>
-              <a:t>생활SOC는 이미 갖췄다.</a:t>
+              <a:t>시설은 이미 갖춰져 있습니다.</a:t>
             </a:r>
           </a:p>
           <a:p>
@@ -4015,7 +4016,7 @@
                 </a:solidFill>
                 <a:latin typeface="맑은 고딕"/>
               </a:rPr>
-              <a:t>무너진 건 경제활력과 인구활력이다.</a:t>
+              <a:t>어려운 쪽은 상권과 인구였습니다.</a:t>
             </a:r>
           </a:p>
           <a:p>
@@ -4034,7 +4035,7 @@
                 </a:solidFill>
                 <a:latin typeface="맑은 고딕"/>
               </a:rPr>
-              <a:t>→ 시설을 더 짓는 게 아니라, 비어 있는 공간을 다시 쓰게 만드는 처방</a:t>
+              <a:t>→ 새로 짓기보다, 비어 있는 공간을 다시 쓰는 방향이 맞지 않을까 합니다</a:t>
             </a:r>
           </a:p>
         </p:txBody>
@@ -4156,7 +4157,7 @@
                 </a:solidFill>
                 <a:latin typeface="맑은 고딕"/>
               </a:rPr>
-              <a:t>생활SOC 자체가 없다.</a:t>
+              <a:t>가까운 시설 자체가 부족합니다.</a:t>
             </a:r>
           </a:p>
           <a:p>
@@ -4175,7 +4176,7 @@
                 </a:solidFill>
                 <a:latin typeface="맑은 고딕"/>
               </a:rPr>
-              <a:t>이동성 점수는 사실상 바닥이다.</a:t>
+              <a:t>대중교통 여건도 넉넉하지 않습니다.</a:t>
             </a:r>
           </a:p>
           <a:p>
@@ -4194,7 +4195,7 @@
                 </a:solidFill>
                 <a:latin typeface="맑은 고딕"/>
               </a:rPr>
-              <a:t>→ 거점 복합 SOC 신설과 수요응답형 교통 연계가 먼저</a:t>
+              <a:t>→ 거점 복합시설과 이동 지원을 함께 보시면 좋겠습니다</a:t>
             </a:r>
           </a:p>
         </p:txBody>
@@ -4277,7 +4278,7 @@
                 </a:solidFill>
                 <a:latin typeface="맑은 고딕"/>
               </a:rPr>
-              <a:t>정책적 함의 — 현행처럼 '낙후지역'을 한 덩어리로 묶어 같은 사업을 배분하면, 두 지역 모두에서 예산이 헛돈다.</a:t>
+              <a:t>여러 동네를 한 묶음으로 보면 놓치기 쉬운 부분입니다. 유형을 나눠 보면 같은 예산으로도 각 동네에 조금 더 맞는</a:t>
             </a:r>
           </a:p>
           <a:p>
@@ -4296,7 +4297,7 @@
                 </a:solidFill>
                 <a:latin typeface="맑은 고딕"/>
               </a:rPr>
-              <a:t>CBC는 낙후의 유형을 구분해 주므로, 같은 예산으로 각각에 맞는 사업을 고를 수 있다.</a:t>
+              <a:t>도움을 드릴 수 있지 않을까 합니다. 어떤 사업이 맞을지는 결국 현장을 아시는 분들의 판단이 필요한 부분입니다.</a:t>
             </a:r>
           </a:p>
         </p:txBody>
@@ -4790,7 +4791,7 @@
                 </a:solidFill>
                 <a:latin typeface="맑은 고딕"/>
               </a:rPr>
-              <a:t>예측 엔진 — 쇠퇴 조기경보</a:t>
+              <a:t>미리 살펴보기 — 쇠퇴 조기경보 모델</a:t>
             </a:r>
           </a:p>
         </p:txBody>
@@ -4829,7 +4830,7 @@
                 </a:solidFill>
                 <a:latin typeface="맑은 고딕"/>
               </a:rPr>
-              <a:t>'이미 나빠진 곳'이 아니라 '곧 나빠질 곳'을 찾는 것이 이 모델의 목적이다.</a:t>
+              <a:t>이미 어려워진 곳뿐 아니라, 앞으로 살펴보면 좋을 곳도 함께 짚어보려 만들었습니다.</a:t>
             </a:r>
           </a:p>
         </p:txBody>
@@ -4907,7 +4908,7 @@
                 </a:solidFill>
                 <a:latin typeface="맑은 고딕"/>
               </a:rPr>
-              <a:t>문제 정의</a:t>
+              <a:t>무엇을 살펴보나요</a:t>
             </a:r>
           </a:p>
         </p:txBody>
@@ -4946,7 +4947,7 @@
                 </a:solidFill>
                 <a:latin typeface="맑은 고딕"/>
               </a:rPr>
-              <a:t>t년 시점에 관측 가능한 정보만으로 t+3년 쇠퇴위험도를 예측한다.</a:t>
+              <a:t>t년 정보만으로 t+3년 상황을 미리 봅니다. 예산 편성에 1년, 사업 착수에 1~2년이</a:t>
             </a:r>
           </a:p>
           <a:p>
@@ -4965,7 +4966,7 @@
                 </a:solidFill>
                 <a:latin typeface="맑은 고딕"/>
               </a:rPr>
-              <a:t>예산 편성이 1년, 사업 착수가 1~2년 걸리므로 3년은 실제 개입 가능한 최소 선행폭이다.</a:t>
+              <a:t>걸리는 점을 감안해 3년으로 잡았습니다.</a:t>
             </a:r>
           </a:p>
         </p:txBody>
@@ -5082,7 +5083,7 @@
                 </a:solidFill>
                 <a:latin typeface="맑은 고딕"/>
               </a:rPr>
-              <a:t>LightGBM 회귀 — 지표 수 대비 표본이 적어 규제를 강하게 걸고 얕은 트리를 쓴다.</a:t>
+              <a:t>LightGBM 회귀입니다. 표본이 많지 않아 규제를 강하게 걸고 얕은 트리를 썼습니다.</a:t>
             </a:r>
           </a:p>
         </p:txBody>
@@ -5199,7 +5200,7 @@
                 </a:solidFill>
                 <a:latin typeface="맑은 고딕"/>
               </a:rPr>
-              <a:t>같은 생활권이 학습·검증에 동시에 들어가지 않게 한다. 공간 자기상관 탓에</a:t>
+              <a:t>같은 생활권이 학습과 검증에 동시에 들어가지 않게 했습니다. 가까운 동네끼리는</a:t>
             </a:r>
           </a:p>
           <a:p>
@@ -5218,7 +5219,7 @@
                 </a:solidFill>
                 <a:latin typeface="맑은 고딕"/>
               </a:rPr>
-              <a:t>무작위 분할은 성능을 부풀리는데, 이를 원천 차단한 설계다.</a:t>
+              <a:t>닮아 있어 무작위로 나누면 성능이 실제보다 좋아 보이기 때문입니다.</a:t>
             </a:r>
           </a:p>
         </p:txBody>
@@ -5296,7 +5297,7 @@
                 </a:solidFill>
                 <a:latin typeface="맑은 고딕"/>
               </a:rPr>
-              <a:t>해석 — SHAP</a:t>
+              <a:t>이유까지 함께 — SHAP</a:t>
             </a:r>
           </a:p>
         </p:txBody>
@@ -5310,7 +5311,7 @@
         <p:spPr>
           <a:xfrm>
             <a:off x="932688" y="5385145"/>
-            <a:ext cx="5486400" cy="401436"/>
+            <a:ext cx="5486400" cy="200718"/>
           </a:xfrm>
           <a:prstGeom prst="rect">
             <a:avLst/>
@@ -5335,7 +5336,7 @@
                 </a:solidFill>
                 <a:latin typeface="맑은 고딕"/>
               </a:rPr>
-              <a:t>생활권마다 위험을 밀어올린 요인을 분해한다. 모델 출력이 곧 근거 문서가 된다.</a:t>
+              <a:t>동네마다 어떤 항목 때문에 그렇게 나왔는지 나눠서 보여드립니다.</a:t>
             </a:r>
           </a:p>
         </p:txBody>
@@ -5849,7 +5850,7 @@
                 </a:solidFill>
                 <a:latin typeface="맑은 고딕"/>
               </a:rPr>
-              <a:t>베이스라인은 '현 상태가 그대로 간다'는 가정. 이를 이겨야 예측 가치가 있다.</a:t>
+              <a:t>베이스라인은 '지금 상태가 그대로 간다'는 가정입니다. 이보다 나아야 참고할 가치가 있다고 보았습니다.</a:t>
             </a:r>
           </a:p>
         </p:txBody>
@@ -6402,7 +6403,7 @@
                 </a:solidFill>
                 <a:latin typeface="맑은 고딕"/>
               </a:rPr>
-              <a:t>처방 엔진 — 생활SOC 투자 우선순위 최적화</a:t>
+              <a:t>순서 정하기 — 생활SOC 우선순위 계산</a:t>
             </a:r>
           </a:p>
         </p:txBody>
@@ -6441,7 +6442,7 @@
                 </a:solidFill>
                 <a:latin typeface="맑은 고딕"/>
               </a:rPr>
-              <a:t>'얼마를 줄 것인가'가 아니라 '어디부터 지을 것인가'를 푼다.</a:t>
+              <a:t>예산을 얼마나 쓸지가 아니라, 한 곳을 놓는다면 어디가 가장 많은 분께 닿을지를 계산했습니다.</a:t>
             </a:r>
           </a:p>
         </p:txBody>
@@ -7128,7 +7129,7 @@
                 </a:solidFill>
                 <a:latin typeface="맑은 고딕"/>
               </a:rPr>
-              <a:t>순수 MCLP는 커버 효율이 가장 높은 한 지역에 예산을 몰아준다. 수학적으로는 옳지만 '균형발전' 사업으로는 성립하지 않는다.</a:t>
+              <a:t>계산만 그대로 두면 효율이 가장 높은 한 동네에 전부 몰립니다. 수식으로는 맞지만 균형발전이라는 취지에는 맞지 않는다고 생각했습니다.</a:t>
             </a:r>
           </a:p>
           <a:p>
@@ -7166,7 +7167,7 @@
                 </a:solidFill>
                 <a:latin typeface="맑은 고딕"/>
               </a:rPr>
-              <a:t>그래서 생활권당 최대 2개소 제약을 걸었다. 총 커버리지는 조금 줄지만, 예산이 여러 생활권에 분산되어 실제 집행 가능한 안이 된다.</a:t>
+              <a:t>그래서 생활권당 최대 2개소로 제한했습니다. 총 효과는 조금 줄지만 여러 동네에 나누어 닿습니다.</a:t>
             </a:r>
           </a:p>
           <a:p>
@@ -7204,7 +7205,7 @@
                 </a:solidFill>
                 <a:latin typeface="맑은 고딕"/>
               </a:rPr>
-              <a:t>제약 값은 파라미터라, 시 예산 규모에 맞춰 바로 조정할 수 있다.</a:t>
+              <a:t>이 값은 조정 가능하니, 시 사정에 맞게 바꿔 쓰시면 됩니다.</a:t>
             </a:r>
           </a:p>
         </p:txBody>
@@ -7287,7 +7288,7 @@
                 </a:solidFill>
                 <a:latin typeface="맑은 고딕"/>
               </a:rPr>
-              <a:t>산출물은 '순위 · 생활권 · 시설유형 · 신규 수혜인구 · 커버리지 개선폭'이 적힌 표 한 장이다.</a:t>
+              <a:t>결과는 '순위 · 생활권 · 시설유형 · 새로 닿는 인구 · 개선폭'이 적힌 표 한 장입니다.</a:t>
             </a:r>
           </a:p>
           <a:p>
@@ -7306,7 +7307,7 @@
                 </a:solidFill>
                 <a:latin typeface="맑은 고딕"/>
               </a:rPr>
-              <a:t>그대로 예산 요구서의 근거 자료가 된다.</a:t>
+              <a:t>검토 자료로 참고하실 수 있으면 좋겠습니다.</a:t>
             </a:r>
           </a:p>
         </p:txBody>
@@ -9396,7 +9397,7 @@
                 </a:solidFill>
                 <a:latin typeface="맑은 고딕"/>
               </a:rPr>
-              <a:t>APPLICATION</a:t>
+              <a:t>FOR WHOM</a:t>
             </a:r>
           </a:p>
         </p:txBody>
@@ -9435,7 +9436,7 @@
                 </a:solidFill>
                 <a:latin typeface="맑은 고딕"/>
               </a:rPr>
-              <a:t>천안시는 이것을 어떻게 쓰는가</a:t>
+              <a:t>결국, 이런 분들께 닿았으면 합니다</a:t>
             </a:r>
           </a:p>
         </p:txBody>
@@ -9474,7 +9475,7 @@
                 </a:solidFill>
                 <a:latin typeface="맑은 고딕"/>
               </a:rPr>
-              <a:t>연구 결과가 아니라 연간 행정 사이클에 얹히는 운영 도구로 설계했다.</a:t>
+              <a:t>지수와 모델은 수단일 뿐입니다. 저희가 계속 떠올린 것은 아래 네 분의 하루였습니다.</a:t>
             </a:r>
           </a:p>
         </p:txBody>
@@ -9575,8 +9576,8 @@
         </p:nvSpPr>
         <p:spPr>
           <a:xfrm>
-            <a:off x="914400" y="2450592"/>
-            <a:ext cx="2194560" cy="256032"/>
+            <a:off x="914400" y="2468880"/>
+            <a:ext cx="4663440" cy="274320"/>
           </a:xfrm>
           <a:prstGeom prst="rect">
             <a:avLst/>
@@ -9595,13 +9596,13 @@
               </a:lnSpc>
             </a:pPr>
             <a:r>
-              <a:rPr sz="1250" b="1">
+              <a:rPr sz="1350" b="1">
                 <a:solidFill>
                   <a:srgbClr val="D64545"/>
                 </a:solidFill>
                 <a:latin typeface="맑은 고딕"/>
               </a:rPr>
-              <a:t>도시재생 부서</a:t>
+              <a:t>원도심에 오래 사신 어르신</a:t>
             </a:r>
           </a:p>
         </p:txBody>
@@ -9614,98 +9615,59 @@
         </p:nvSpPr>
         <p:spPr>
           <a:xfrm>
-            <a:off x="914400" y="2743200"/>
-            <a:ext cx="4663440" cy="256032"/>
-          </a:xfrm>
-          <a:prstGeom prst="rect">
-            <a:avLst/>
-          </a:prstGeom>
-          <a:noFill/>
-        </p:spPr>
-        <p:txBody>
-          <a:bodyPr wrap="square" lIns="0" rIns="0" tIns="0" bIns="0">
-            <a:spAutoFit/>
-          </a:bodyPr>
-          <a:lstStyle/>
-          <a:p>
-            <a:pPr algn="l">
-              <a:lnSpc>
-                <a:spcPct val="135000"/>
-              </a:lnSpc>
-            </a:pPr>
-            <a:r>
-              <a:rPr sz="1350" b="1">
-                <a:solidFill>
-                  <a:srgbClr val="151C26"/>
-                </a:solidFill>
-                <a:latin typeface="맑은 고딕"/>
-              </a:rPr>
-              <a:t>사업지 선정 · 공모 대응</a:t>
-            </a:r>
-          </a:p>
-        </p:txBody>
-      </p:sp>
-      <p:sp>
-        <p:nvSpPr>
-          <p:cNvPr id="9" name="TextBox 8"/>
-          <p:cNvSpPr txBox="1"/>
-          <p:nvPr/>
-        </p:nvSpPr>
-        <p:spPr>
-          <a:xfrm>
-            <a:off x="914400" y="3054096"/>
-            <a:ext cx="4663440" cy="548640"/>
-          </a:xfrm>
-          <a:prstGeom prst="rect">
-            <a:avLst/>
-          </a:prstGeom>
-          <a:noFill/>
-        </p:spPr>
-        <p:txBody>
-          <a:bodyPr wrap="square" lIns="0" rIns="0" tIns="0" bIns="0">
-            <a:spAutoFit/>
-          </a:bodyPr>
-          <a:lstStyle/>
-          <a:p>
-            <a:pPr algn="l">
-              <a:lnSpc>
-                <a:spcPct val="145000"/>
-              </a:lnSpc>
-            </a:pPr>
-            <a:r>
-              <a:rPr sz="1080" b="0">
+            <a:off x="914400" y="2834640"/>
+            <a:ext cx="4663440" cy="731520"/>
+          </a:xfrm>
+          <a:prstGeom prst="rect">
+            <a:avLst/>
+          </a:prstGeom>
+          <a:noFill/>
+        </p:spPr>
+        <p:txBody>
+          <a:bodyPr wrap="square" lIns="0" rIns="0" tIns="0" bIns="0">
+            <a:spAutoFit/>
+          </a:bodyPr>
+          <a:lstStyle/>
+          <a:p>
+            <a:pPr algn="l">
+              <a:lnSpc>
+                <a:spcPct val="150000"/>
+              </a:lnSpc>
+            </a:pPr>
+            <a:r>
+              <a:rPr sz="1100" b="0">
                 <a:solidFill>
                   <a:srgbClr val="5D6874"/>
                 </a:solidFill>
                 <a:latin typeface="맑은 고딕"/>
               </a:rPr>
-              <a:t>CBI 하위 생활권과 3년 후 고위험 생활권을 교차해 후보지를 추린다.</a:t>
-            </a:r>
-          </a:p>
-          <a:p>
-            <a:pPr algn="l">
-              <a:lnSpc>
-                <a:spcPct val="145000"/>
+              <a:t>24 일대는 젊은 이웃이 하나둘 떠나고 상가도 비었습니다.</a:t>
+            </a:r>
+          </a:p>
+          <a:p>
+            <a:pPr algn="l">
+              <a:lnSpc>
+                <a:spcPct val="150000"/>
               </a:lnSpc>
               <a:spcBef>
                 <a:spcPts val="0"/>
               </a:spcBef>
             </a:pPr>
             <a:r>
-              <a:rPr sz="1080" b="0">
+              <a:rPr sz="1100" b="0">
                 <a:solidFill>
                   <a:srgbClr val="5D6874"/>
                 </a:solidFill>
                 <a:latin typeface="맑은 고딕"/>
               </a:rPr>
-              <a:t>국토부 도시재생 공모 신청서의 '쇠퇴도 진단' 항목에 그대로 인용 가능.</a:t>
-            </a:r>
-          </a:p>
-        </p:txBody>
-      </p:sp>
-      <p:sp>
-        <p:nvSpPr>
-          <p:cNvPr id="10" name="Rounded Rectangle 9"/>
+              <a:t>가게와 병원이 멀어질수록, 걸어서 하실 수 있는 일이 줄어듭니다.</a:t>
+            </a:r>
+          </a:p>
+        </p:txBody>
+      </p:sp>
+      <p:sp>
+        <p:nvSpPr>
+          <p:cNvPr id="9" name="Rounded Rectangle 8"/>
           <p:cNvSpPr/>
           <p:nvPr/>
         </p:nvSpPr>
@@ -9751,7 +9713,7 @@
       </p:sp>
       <p:sp>
         <p:nvSpPr>
-          <p:cNvPr id="11" name="Rectangle 10"/>
+          <p:cNvPr id="10" name="Rectangle 9"/>
           <p:cNvSpPr/>
           <p:nvPr/>
         </p:nvSpPr>
@@ -9764,7 +9726,7 @@
             <a:avLst/>
           </a:prstGeom>
           <a:solidFill>
-            <a:srgbClr val="2E7DD1"/>
+            <a:srgbClr val="8A7FB5"/>
           </a:solidFill>
           <a:ln>
             <a:noFill/>
@@ -9793,143 +9755,104 @@
       </p:sp>
       <p:sp>
         <p:nvSpPr>
+          <p:cNvPr id="11" name="TextBox 10"/>
+          <p:cNvSpPr txBox="1"/>
+          <p:nvPr/>
+        </p:nvSpPr>
+        <p:spPr>
+          <a:xfrm>
+            <a:off x="6492240" y="2468880"/>
+            <a:ext cx="4663440" cy="274320"/>
+          </a:xfrm>
+          <a:prstGeom prst="rect">
+            <a:avLst/>
+          </a:prstGeom>
+          <a:noFill/>
+        </p:spPr>
+        <p:txBody>
+          <a:bodyPr wrap="square" lIns="0" rIns="0" tIns="0" bIns="0">
+            <a:spAutoFit/>
+          </a:bodyPr>
+          <a:lstStyle/>
+          <a:p>
+            <a:pPr algn="l">
+              <a:lnSpc>
+                <a:spcPct val="135000"/>
+              </a:lnSpc>
+            </a:pPr>
+            <a:r>
+              <a:rPr sz="1350" b="1">
+                <a:solidFill>
+                  <a:srgbClr val="8A7FB5"/>
+                </a:solidFill>
+                <a:latin typeface="맑은 고딕"/>
+              </a:rPr>
+              <a:t>농촌면에서 아이 키우시는 부모님</a:t>
+            </a:r>
+          </a:p>
+        </p:txBody>
+      </p:sp>
+      <p:sp>
+        <p:nvSpPr>
           <p:cNvPr id="12" name="TextBox 11"/>
           <p:cNvSpPr txBox="1"/>
           <p:nvPr/>
         </p:nvSpPr>
         <p:spPr>
           <a:xfrm>
-            <a:off x="6492240" y="2450592"/>
-            <a:ext cx="2194560" cy="256032"/>
-          </a:xfrm>
-          <a:prstGeom prst="rect">
-            <a:avLst/>
-          </a:prstGeom>
-          <a:noFill/>
-        </p:spPr>
-        <p:txBody>
-          <a:bodyPr wrap="square" lIns="0" rIns="0" tIns="0" bIns="0">
-            <a:spAutoFit/>
-          </a:bodyPr>
-          <a:lstStyle/>
-          <a:p>
-            <a:pPr algn="l">
-              <a:lnSpc>
-                <a:spcPct val="135000"/>
-              </a:lnSpc>
-            </a:pPr>
-            <a:r>
-              <a:rPr sz="1250" b="1">
-                <a:solidFill>
-                  <a:srgbClr val="2E7DD1"/>
-                </a:solidFill>
-                <a:latin typeface="맑은 고딕"/>
-              </a:rPr>
-              <a:t>복지·보건 부서</a:t>
-            </a:r>
-          </a:p>
-        </p:txBody>
-      </p:sp>
-      <p:sp>
-        <p:nvSpPr>
-          <p:cNvPr id="13" name="TextBox 12"/>
-          <p:cNvSpPr txBox="1"/>
-          <p:nvPr/>
-        </p:nvSpPr>
-        <p:spPr>
-          <a:xfrm>
-            <a:off x="6492240" y="2743200"/>
-            <a:ext cx="4663440" cy="256032"/>
-          </a:xfrm>
-          <a:prstGeom prst="rect">
-            <a:avLst/>
-          </a:prstGeom>
-          <a:noFill/>
-        </p:spPr>
-        <p:txBody>
-          <a:bodyPr wrap="square" lIns="0" rIns="0" tIns="0" bIns="0">
-            <a:spAutoFit/>
-          </a:bodyPr>
-          <a:lstStyle/>
-          <a:p>
-            <a:pPr algn="l">
-              <a:lnSpc>
-                <a:spcPct val="135000"/>
-              </a:lnSpc>
-            </a:pPr>
-            <a:r>
-              <a:rPr sz="1350" b="1">
-                <a:solidFill>
-                  <a:srgbClr val="151C26"/>
-                </a:solidFill>
-                <a:latin typeface="맑은 고딕"/>
-              </a:rPr>
-              <a:t>생활SOC 신설 입지 결정</a:t>
-            </a:r>
-          </a:p>
-        </p:txBody>
-      </p:sp>
-      <p:sp>
-        <p:nvSpPr>
-          <p:cNvPr id="14" name="TextBox 13"/>
-          <p:cNvSpPr txBox="1"/>
-          <p:nvPr/>
-        </p:nvSpPr>
-        <p:spPr>
-          <a:xfrm>
-            <a:off x="6492240" y="3054096"/>
-            <a:ext cx="4663440" cy="548640"/>
-          </a:xfrm>
-          <a:prstGeom prst="rect">
-            <a:avLst/>
-          </a:prstGeom>
-          <a:noFill/>
-        </p:spPr>
-        <p:txBody>
-          <a:bodyPr wrap="square" lIns="0" rIns="0" tIns="0" bIns="0">
-            <a:spAutoFit/>
-          </a:bodyPr>
-          <a:lstStyle/>
-          <a:p>
-            <a:pPr algn="l">
-              <a:lnSpc>
-                <a:spcPct val="145000"/>
-              </a:lnSpc>
-            </a:pPr>
-            <a:r>
-              <a:rPr sz="1080" b="0">
+            <a:off x="6492240" y="2834640"/>
+            <a:ext cx="4663440" cy="731520"/>
+          </a:xfrm>
+          <a:prstGeom prst="rect">
+            <a:avLst/>
+          </a:prstGeom>
+          <a:noFill/>
+        </p:spPr>
+        <p:txBody>
+          <a:bodyPr wrap="square" lIns="0" rIns="0" tIns="0" bIns="0">
+            <a:spAutoFit/>
+          </a:bodyPr>
+          <a:lstStyle/>
+          <a:p>
+            <a:pPr algn="l">
+              <a:lnSpc>
+                <a:spcPct val="150000"/>
+              </a:lnSpc>
+            </a:pPr>
+            <a:r>
+              <a:rPr sz="1100" b="0">
                 <a:solidFill>
                   <a:srgbClr val="5D6874"/>
                 </a:solidFill>
                 <a:latin typeface="맑은 고딕"/>
               </a:rPr>
-              <a:t>투자 우선순위표의 시설유형별 추천 좌표를 그대로 검토안으로 쓴다.</a:t>
-            </a:r>
-          </a:p>
-          <a:p>
-            <a:pPr algn="l">
-              <a:lnSpc>
-                <a:spcPct val="145000"/>
+              <a:t>고령 비율이 가장 높은 곳은 22으로 54%였습니다.</a:t>
+            </a:r>
+          </a:p>
+          <a:p>
+            <a:pPr algn="l">
+              <a:lnSpc>
+                <a:spcPct val="150000"/>
               </a:lnSpc>
               <a:spcBef>
                 <a:spcPts val="0"/>
               </a:spcBef>
             </a:pPr>
             <a:r>
-              <a:rPr sz="1080" b="0">
+              <a:rPr sz="1100" b="0">
                 <a:solidFill>
                   <a:srgbClr val="5D6874"/>
                 </a:solidFill>
                 <a:latin typeface="맑은 고딕"/>
               </a:rPr>
-              <a:t>'왜 이 동인가'를 SHAP 요인분해로 설명한다.</a:t>
-            </a:r>
-          </a:p>
-        </p:txBody>
-      </p:sp>
-      <p:sp>
-        <p:nvSpPr>
-          <p:cNvPr id="15" name="Rounded Rectangle 14"/>
+              <a:t>어린이집·도서관이 가까이 없으면 그 부담은 온전히 가정의 몫이 됩니다.</a:t>
+            </a:r>
+          </a:p>
+        </p:txBody>
+      </p:sp>
+      <p:sp>
+        <p:nvSpPr>
+          <p:cNvPr id="13" name="Rounded Rectangle 12"/>
           <p:cNvSpPr/>
           <p:nvPr/>
         </p:nvSpPr>
@@ -9975,7 +9898,7 @@
       </p:sp>
       <p:sp>
         <p:nvSpPr>
-          <p:cNvPr id="16" name="Rectangle 15"/>
+          <p:cNvPr id="14" name="Rectangle 13"/>
           <p:cNvSpPr/>
           <p:nvPr/>
         </p:nvSpPr>
@@ -9988,7 +9911,7 @@
             <a:avLst/>
           </a:prstGeom>
           <a:solidFill>
-            <a:srgbClr val="3E9B7C"/>
+            <a:srgbClr val="C98A1E"/>
           </a:solidFill>
           <a:ln>
             <a:noFill/>
@@ -10017,14 +9940,14 @@
       </p:sp>
       <p:sp>
         <p:nvSpPr>
-          <p:cNvPr id="17" name="TextBox 16"/>
-          <p:cNvSpPr txBox="1"/>
-          <p:nvPr/>
-        </p:nvSpPr>
-        <p:spPr>
-          <a:xfrm>
-            <a:off x="914400" y="4023359"/>
-            <a:ext cx="2194560" cy="256032"/>
+          <p:cNvPr id="15" name="TextBox 14"/>
+          <p:cNvSpPr txBox="1"/>
+          <p:nvPr/>
+        </p:nvSpPr>
+        <p:spPr>
+          <a:xfrm>
+            <a:off x="914400" y="4041648"/>
+            <a:ext cx="4663440" cy="274320"/>
           </a:xfrm>
           <a:prstGeom prst="rect">
             <a:avLst/>
@@ -10043,117 +9966,78 @@
               </a:lnSpc>
             </a:pPr>
             <a:r>
-              <a:rPr sz="1250" b="1">
-                <a:solidFill>
-                  <a:srgbClr val="3E9B7C"/>
-                </a:solidFill>
-                <a:latin typeface="맑은 고딕"/>
-              </a:rPr>
-              <a:t>예산 부서</a:t>
-            </a:r>
-          </a:p>
-        </p:txBody>
-      </p:sp>
-      <p:sp>
-        <p:nvSpPr>
-          <p:cNvPr id="18" name="TextBox 17"/>
-          <p:cNvSpPr txBox="1"/>
-          <p:nvPr/>
-        </p:nvSpPr>
-        <p:spPr>
-          <a:xfrm>
-            <a:off x="914400" y="4315968"/>
-            <a:ext cx="4663440" cy="256032"/>
-          </a:xfrm>
-          <a:prstGeom prst="rect">
-            <a:avLst/>
-          </a:prstGeom>
-          <a:noFill/>
-        </p:spPr>
-        <p:txBody>
-          <a:bodyPr wrap="square" lIns="0" rIns="0" tIns="0" bIns="0">
-            <a:spAutoFit/>
-          </a:bodyPr>
-          <a:lstStyle/>
-          <a:p>
-            <a:pPr algn="l">
-              <a:lnSpc>
-                <a:spcPct val="135000"/>
-              </a:lnSpc>
-            </a:pPr>
-            <a:r>
               <a:rPr sz="1350" b="1">
                 <a:solidFill>
-                  <a:srgbClr val="151C26"/>
-                </a:solidFill>
-                <a:latin typeface="맑은 고딕"/>
-              </a:rPr>
-              <a:t>배분 심의 근거</a:t>
-            </a:r>
-          </a:p>
-        </p:txBody>
-      </p:sp>
-      <p:sp>
-        <p:nvSpPr>
-          <p:cNvPr id="19" name="TextBox 18"/>
-          <p:cNvSpPr txBox="1"/>
-          <p:nvPr/>
-        </p:nvSpPr>
-        <p:spPr>
-          <a:xfrm>
-            <a:off x="914400" y="4626864"/>
-            <a:ext cx="4663440" cy="548640"/>
-          </a:xfrm>
-          <a:prstGeom prst="rect">
-            <a:avLst/>
-          </a:prstGeom>
-          <a:noFill/>
-        </p:spPr>
-        <p:txBody>
-          <a:bodyPr wrap="square" lIns="0" rIns="0" tIns="0" bIns="0">
-            <a:spAutoFit/>
-          </a:bodyPr>
-          <a:lstStyle/>
-          <a:p>
-            <a:pPr algn="l">
-              <a:lnSpc>
-                <a:spcPct val="145000"/>
-              </a:lnSpc>
-            </a:pPr>
-            <a:r>
-              <a:rPr sz="1080" b="0">
+                  <a:srgbClr val="C98A1E"/>
+                </a:solidFill>
+                <a:latin typeface="맑은 고딕"/>
+              </a:rPr>
+              <a:t>원도심에서 가게를 지켜오신 상인</a:t>
+            </a:r>
+          </a:p>
+        </p:txBody>
+      </p:sp>
+      <p:sp>
+        <p:nvSpPr>
+          <p:cNvPr id="16" name="TextBox 15"/>
+          <p:cNvSpPr txBox="1"/>
+          <p:nvPr/>
+        </p:nvSpPr>
+        <p:spPr>
+          <a:xfrm>
+            <a:off x="914400" y="4407407"/>
+            <a:ext cx="4663440" cy="731520"/>
+          </a:xfrm>
+          <a:prstGeom prst="rect">
+            <a:avLst/>
+          </a:prstGeom>
+          <a:noFill/>
+        </p:spPr>
+        <p:txBody>
+          <a:bodyPr wrap="square" lIns="0" rIns="0" tIns="0" bIns="0">
+            <a:spAutoFit/>
+          </a:bodyPr>
+          <a:lstStyle/>
+          <a:p>
+            <a:pPr algn="l">
+              <a:lnSpc>
+                <a:spcPct val="150000"/>
+              </a:lnSpc>
+            </a:pPr>
+            <a:r>
+              <a:rPr sz="1100" b="0">
                 <a:solidFill>
                   <a:srgbClr val="5D6874"/>
                 </a:solidFill>
                 <a:latin typeface="맑은 고딕"/>
               </a:rPr>
-              <a:t>한계효용 곡선으로 사업 규모별 기대효과를 비교한다.</a:t>
-            </a:r>
-          </a:p>
-          <a:p>
-            <a:pPr algn="l">
-              <a:lnSpc>
-                <a:spcPct val="145000"/>
+              <a:t>오가는 분이 줄면 매출이 줄고, 문 닫는 가게가 늘면 오가는 분이 더 줍니다.</a:t>
+            </a:r>
+          </a:p>
+          <a:p>
+            <a:pPr algn="l">
+              <a:lnSpc>
+                <a:spcPct val="150000"/>
               </a:lnSpc>
               <a:spcBef>
                 <a:spcPts val="0"/>
               </a:spcBef>
             </a:pPr>
             <a:r>
-              <a:rPr sz="1080" b="0">
+              <a:rPr sz="1100" b="0">
                 <a:solidFill>
                   <a:srgbClr val="5D6874"/>
                 </a:solidFill>
                 <a:latin typeface="맑은 고딕"/>
               </a:rPr>
-              <a:t>예산 삭감 시 어디까지 유지할지 판단 근거가 된다.</a:t>
-            </a:r>
-          </a:p>
-        </p:txBody>
-      </p:sp>
-      <p:sp>
-        <p:nvSpPr>
-          <p:cNvPr id="20" name="Rounded Rectangle 19"/>
+              <a:t>이 고리를 일찍 알아차릴 수 있다면, 도움드릴 방법도 더 많아집니다.</a:t>
+            </a:r>
+          </a:p>
+        </p:txBody>
+      </p:sp>
+      <p:sp>
+        <p:nvSpPr>
+          <p:cNvPr id="17" name="Rounded Rectangle 16"/>
           <p:cNvSpPr/>
           <p:nvPr/>
         </p:nvSpPr>
@@ -10199,7 +10083,7 @@
       </p:sp>
       <p:sp>
         <p:nvSpPr>
-          <p:cNvPr id="21" name="Rectangle 20"/>
+          <p:cNvPr id="18" name="Rectangle 17"/>
           <p:cNvSpPr/>
           <p:nvPr/>
         </p:nvSpPr>
@@ -10212,7 +10096,7 @@
             <a:avLst/>
           </a:prstGeom>
           <a:solidFill>
-            <a:srgbClr val="C98A1E"/>
+            <a:srgbClr val="2E7DD1"/>
           </a:solidFill>
           <a:ln>
             <a:noFill/>
@@ -10241,14 +10125,14 @@
       </p:sp>
       <p:sp>
         <p:nvSpPr>
-          <p:cNvPr id="22" name="TextBox 21"/>
-          <p:cNvSpPr txBox="1"/>
-          <p:nvPr/>
-        </p:nvSpPr>
-        <p:spPr>
-          <a:xfrm>
-            <a:off x="6492240" y="4023359"/>
-            <a:ext cx="2194560" cy="256032"/>
+          <p:cNvPr id="19" name="TextBox 18"/>
+          <p:cNvSpPr txBox="1"/>
+          <p:nvPr/>
+        </p:nvSpPr>
+        <p:spPr>
+          <a:xfrm>
+            <a:off x="6492240" y="4041648"/>
+            <a:ext cx="4663440" cy="274320"/>
           </a:xfrm>
           <a:prstGeom prst="rect">
             <a:avLst/>
@@ -10267,117 +10151,78 @@
               </a:lnSpc>
             </a:pPr>
             <a:r>
-              <a:rPr sz="1250" b="1">
-                <a:solidFill>
-                  <a:srgbClr val="C98A1E"/>
-                </a:solidFill>
-                <a:latin typeface="맑은 고딕"/>
-              </a:rPr>
-              <a:t>기획·감사</a:t>
-            </a:r>
-          </a:p>
-        </p:txBody>
-      </p:sp>
-      <p:sp>
-        <p:nvSpPr>
-          <p:cNvPr id="23" name="TextBox 22"/>
-          <p:cNvSpPr txBox="1"/>
-          <p:nvPr/>
-        </p:nvSpPr>
-        <p:spPr>
-          <a:xfrm>
-            <a:off x="6492240" y="4315968"/>
-            <a:ext cx="4663440" cy="256032"/>
-          </a:xfrm>
-          <a:prstGeom prst="rect">
-            <a:avLst/>
-          </a:prstGeom>
-          <a:noFill/>
-        </p:spPr>
-        <p:txBody>
-          <a:bodyPr wrap="square" lIns="0" rIns="0" tIns="0" bIns="0">
-            <a:spAutoFit/>
-          </a:bodyPr>
-          <a:lstStyle/>
-          <a:p>
-            <a:pPr algn="l">
-              <a:lnSpc>
-                <a:spcPct val="135000"/>
-              </a:lnSpc>
-            </a:pPr>
-            <a:r>
               <a:rPr sz="1350" b="1">
                 <a:solidFill>
-                  <a:srgbClr val="151C26"/>
-                </a:solidFill>
-                <a:latin typeface="맑은 고딕"/>
-              </a:rPr>
-              <a:t>정책 효과 사후검증</a:t>
-            </a:r>
-          </a:p>
-        </p:txBody>
-      </p:sp>
-      <p:sp>
-        <p:nvSpPr>
-          <p:cNvPr id="24" name="TextBox 23"/>
-          <p:cNvSpPr txBox="1"/>
-          <p:nvPr/>
-        </p:nvSpPr>
-        <p:spPr>
-          <a:xfrm>
-            <a:off x="6492240" y="4626864"/>
-            <a:ext cx="4663440" cy="548640"/>
-          </a:xfrm>
-          <a:prstGeom prst="rect">
-            <a:avLst/>
-          </a:prstGeom>
-          <a:noFill/>
-        </p:spPr>
-        <p:txBody>
-          <a:bodyPr wrap="square" lIns="0" rIns="0" tIns="0" bIns="0">
-            <a:spAutoFit/>
-          </a:bodyPr>
-          <a:lstStyle/>
-          <a:p>
-            <a:pPr algn="l">
-              <a:lnSpc>
-                <a:spcPct val="145000"/>
-              </a:lnSpc>
-            </a:pPr>
-            <a:r>
-              <a:rPr sz="1080" b="0">
+                  <a:srgbClr val="2E7DD1"/>
+                </a:solidFill>
+                <a:latin typeface="맑은 고딕"/>
+              </a:rPr>
+              <a:t>신도심에서 자리 잡은 이웃</a:t>
+            </a:r>
+          </a:p>
+        </p:txBody>
+      </p:sp>
+      <p:sp>
+        <p:nvSpPr>
+          <p:cNvPr id="20" name="TextBox 19"/>
+          <p:cNvSpPr txBox="1"/>
+          <p:nvPr/>
+        </p:nvSpPr>
+        <p:spPr>
+          <a:xfrm>
+            <a:off x="6492240" y="4407407"/>
+            <a:ext cx="4663440" cy="731520"/>
+          </a:xfrm>
+          <a:prstGeom prst="rect">
+            <a:avLst/>
+          </a:prstGeom>
+          <a:noFill/>
+        </p:spPr>
+        <p:txBody>
+          <a:bodyPr wrap="square" lIns="0" rIns="0" tIns="0" bIns="0">
+            <a:spAutoFit/>
+          </a:bodyPr>
+          <a:lstStyle/>
+          <a:p>
+            <a:pPr algn="l">
+              <a:lnSpc>
+                <a:spcPct val="150000"/>
+              </a:lnSpc>
+            </a:pPr>
+            <a:r>
+              <a:rPr sz="1100" b="0">
                 <a:solidFill>
                   <a:srgbClr val="5D6874"/>
                 </a:solidFill>
                 <a:latin typeface="맑은 고딕"/>
               </a:rPr>
-              <a:t>매년 같은 스크립트를 돌려 CBI 변화를 추적한다.</a:t>
-            </a:r>
-          </a:p>
-          <a:p>
-            <a:pPr algn="l">
-              <a:lnSpc>
-                <a:spcPct val="145000"/>
+              <a:t>지금 여건이 좋은 곳도 언젠가는 나이가 듭니다.</a:t>
+            </a:r>
+          </a:p>
+          <a:p>
+            <a:pPr algn="l">
+              <a:lnSpc>
+                <a:spcPct val="150000"/>
               </a:lnSpc>
               <a:spcBef>
                 <a:spcPts val="0"/>
               </a:spcBef>
             </a:pPr>
             <a:r>
-              <a:rPr sz="1080" b="0">
+              <a:rPr sz="1100" b="0">
                 <a:solidFill>
                   <a:srgbClr val="5D6874"/>
                 </a:solidFill>
                 <a:latin typeface="맑은 고딕"/>
               </a:rPr>
-              <a:t>투입한 사업이 실제로 지수를 올렸는지 정량 확인한다.</a:t>
-            </a:r>
-          </a:p>
-        </p:txBody>
-      </p:sp>
-      <p:sp>
-        <p:nvSpPr>
-          <p:cNvPr id="25" name="Rounded Rectangle 24"/>
+              <a:t>미리 살펴보는 습관은 결국 천안시민 모두를 위한 준비라고 생각합니다.</a:t>
+            </a:r>
+          </a:p>
+        </p:txBody>
+      </p:sp>
+      <p:sp>
+        <p:nvSpPr>
+          <p:cNvPr id="21" name="Rounded Rectangle 20"/>
           <p:cNvSpPr/>
           <p:nvPr/>
         </p:nvSpPr>
@@ -10421,14 +10266,14 @@
       </p:sp>
       <p:sp>
         <p:nvSpPr>
-          <p:cNvPr id="26" name="TextBox 25"/>
-          <p:cNvSpPr txBox="1"/>
-          <p:nvPr/>
-        </p:nvSpPr>
-        <p:spPr>
-          <a:xfrm>
-            <a:off x="932688" y="5705856"/>
-            <a:ext cx="10515600" cy="502920"/>
+          <p:cNvPr id="22" name="TextBox 21"/>
+          <p:cNvSpPr txBox="1"/>
+          <p:nvPr/>
+        </p:nvSpPr>
+        <p:spPr>
+          <a:xfrm>
+            <a:off x="932688" y="5724144"/>
+            <a:ext cx="10515600" cy="457200"/>
           </a:xfrm>
           <a:prstGeom prst="rect">
             <a:avLst/>
@@ -10453,7 +10298,7 @@
                 </a:solidFill>
                 <a:latin typeface="맑은 고딕"/>
               </a:rPr>
-              <a:t>운영 방식 — 연 1회 공공데이터를 갱신하고 스크립트를 실행하면 모든 산출물이 자동으로 재생성된다.</a:t>
+              <a:t>저희는 천안시 사정을 현장에서 겪어보지 못한 참가자입니다. 다만 공개된 데이터로 할 수 있는 만큼은 성실하게 살펴보았습니다.</a:t>
             </a:r>
           </a:p>
           <a:p>
@@ -10472,14 +10317,14 @@
                 </a:solidFill>
                 <a:latin typeface="맑은 고딕"/>
               </a:rPr>
-              <a:t>별도 시스템 구축이나 데이터 구매 없이, 담당자 1명이 반나절이면 그 해의 진단을 끝낼 수 있다.</a:t>
-            </a:r>
-          </a:p>
-        </p:txBody>
-      </p:sp>
-      <p:sp>
-        <p:nvSpPr>
-          <p:cNvPr id="27" name="TextBox 26"/>
+              <a:t>부족한 부분은 현장을 아시는 분들이 채워주시길 바라며, 이 자료가 그 논의의 출발점이 될 수 있다면 더 바랄 것이 없겠습니다.</a:t>
+            </a:r>
+          </a:p>
+        </p:txBody>
+      </p:sp>
+      <p:sp>
+        <p:nvSpPr>
+          <p:cNvPr id="23" name="TextBox 22"/>
           <p:cNvSpPr txBox="1"/>
           <p:nvPr/>
         </p:nvSpPr>
@@ -10518,7 +10363,7 @@
       </p:sp>
       <p:sp>
         <p:nvSpPr>
-          <p:cNvPr id="28" name="TextBox 27"/>
+          <p:cNvPr id="24" name="TextBox 23"/>
           <p:cNvSpPr txBox="1"/>
           <p:nvPr/>
         </p:nvSpPr>
@@ -10607,7 +10452,7 @@
                 </a:solidFill>
                 <a:latin typeface="맑은 고딕"/>
               </a:rPr>
-              <a:t>IMPACT</a:t>
+              <a:t>APPLICATION</a:t>
             </a:r>
           </a:p>
         </p:txBody>
@@ -10646,7 +10491,7 @@
                 </a:solidFill>
                 <a:latin typeface="맑은 고딕"/>
               </a:rPr>
-              <a:t>기대효과와 실행 로드맵</a:t>
+              <a:t>실무에 이렇게 보탬이 되면 좋겠습니다</a:t>
             </a:r>
           </a:p>
         </p:txBody>
@@ -10659,47 +10504,93 @@
         </p:nvSpPr>
         <p:spPr>
           <a:xfrm>
-            <a:off x="658368" y="2084831"/>
-            <a:ext cx="5486400" cy="274320"/>
-          </a:xfrm>
-          <a:prstGeom prst="rect">
-            <a:avLst/>
-          </a:prstGeom>
-          <a:noFill/>
-        </p:spPr>
-        <p:txBody>
-          <a:bodyPr wrap="square" lIns="0" rIns="0" tIns="0" bIns="0">
-            <a:spAutoFit/>
-          </a:bodyPr>
-          <a:lstStyle/>
-          <a:p>
-            <a:pPr algn="l">
-              <a:lnSpc>
-                <a:spcPct val="135000"/>
-              </a:lnSpc>
-            </a:pPr>
-            <a:r>
-              <a:rPr sz="1450" b="1">
-                <a:solidFill>
-                  <a:srgbClr val="151C26"/>
-                </a:solidFill>
-                <a:latin typeface="맑은 고딕"/>
-              </a:rPr>
-              <a:t>기대효과</a:t>
-            </a:r>
-          </a:p>
-        </p:txBody>
-      </p:sp>
-      <p:sp>
-        <p:nvSpPr>
-          <p:cNvPr id="5" name="Rectangle 4"/>
+            <a:off x="658368" y="1517904"/>
+            <a:ext cx="10874959" cy="411480"/>
+          </a:xfrm>
+          <a:prstGeom prst="rect">
+            <a:avLst/>
+          </a:prstGeom>
+          <a:noFill/>
+        </p:spPr>
+        <p:txBody>
+          <a:bodyPr wrap="square" lIns="0" rIns="0" tIns="0" bIns="0">
+            <a:spAutoFit/>
+          </a:bodyPr>
+          <a:lstStyle/>
+          <a:p>
+            <a:pPr algn="l">
+              <a:lnSpc>
+                <a:spcPct val="145000"/>
+              </a:lnSpc>
+            </a:pPr>
+            <a:r>
+              <a:rPr sz="1350" b="0">
+                <a:solidFill>
+                  <a:srgbClr val="5D6874"/>
+                </a:solidFill>
+                <a:latin typeface="맑은 고딕"/>
+              </a:rPr>
+              <a:t>따로 시간을 내어 다뤄야 하는 연구물이 아니라, 하시던 업무 곁에 놓고 참고하실 수 있는 자료로 준비했습니다.</a:t>
+            </a:r>
+          </a:p>
+        </p:txBody>
+      </p:sp>
+      <p:sp>
+        <p:nvSpPr>
+          <p:cNvPr id="5" name="Rounded Rectangle 4"/>
           <p:cNvSpPr/>
           <p:nvPr/>
         </p:nvSpPr>
         <p:spPr>
           <a:xfrm>
-            <a:off x="658368" y="2468880"/>
-            <a:ext cx="68580" cy="566928"/>
+            <a:off x="658368" y="2286000"/>
+            <a:ext cx="5257800" cy="1371600"/>
+          </a:xfrm>
+          <a:prstGeom prst="roundRect">
+            <a:avLst>
+              <a:gd name="adj" fmla="val 6000"/>
+            </a:avLst>
+          </a:prstGeom>
+          <a:solidFill>
+            <a:srgbClr val="FFFFFF"/>
+          </a:solidFill>
+          <a:ln w="12700">
+            <a:solidFill>
+              <a:srgbClr val="E0E5EB"/>
+            </a:solidFill>
+          </a:ln>
+          <a:effectLst/>
+        </p:spPr>
+        <p:style>
+          <a:lnRef idx="1">
+            <a:schemeClr val="accent1"/>
+          </a:lnRef>
+          <a:fillRef idx="3">
+            <a:schemeClr val="accent1"/>
+          </a:fillRef>
+          <a:effectRef idx="2">
+            <a:schemeClr val="accent1"/>
+          </a:effectRef>
+          <a:fontRef idx="minor">
+            <a:schemeClr val="lt1"/>
+          </a:fontRef>
+        </p:style>
+        <p:txBody>
+          <a:bodyPr rtlCol="0" anchor="ctr"/>
+          <a:lstStyle/>
+          <a:p/>
+        </p:txBody>
+      </p:sp>
+      <p:sp>
+        <p:nvSpPr>
+          <p:cNvPr id="6" name="Rectangle 5"/>
+          <p:cNvSpPr/>
+          <p:nvPr/>
+        </p:nvSpPr>
+        <p:spPr>
+          <a:xfrm>
+            <a:off x="658368" y="2286000"/>
+            <a:ext cx="68580" cy="1371600"/>
           </a:xfrm>
           <a:prstGeom prst="rect">
             <a:avLst/>
@@ -10734,14 +10625,14 @@
       </p:sp>
       <p:sp>
         <p:nvSpPr>
-          <p:cNvPr id="6" name="TextBox 5"/>
-          <p:cNvSpPr txBox="1"/>
-          <p:nvPr/>
-        </p:nvSpPr>
-        <p:spPr>
-          <a:xfrm>
-            <a:off x="877824" y="2468880"/>
-            <a:ext cx="5120640" cy="256032"/>
+          <p:cNvPr id="7" name="TextBox 6"/>
+          <p:cNvSpPr txBox="1"/>
+          <p:nvPr/>
+        </p:nvSpPr>
+        <p:spPr>
+          <a:xfrm>
+            <a:off x="914400" y="2450592"/>
+            <a:ext cx="2194560" cy="256032"/>
           </a:xfrm>
           <a:prstGeom prst="rect">
             <a:avLst/>
@@ -10762,70 +10653,174 @@
             <a:r>
               <a:rPr sz="1250" b="1">
                 <a:solidFill>
+                  <a:srgbClr val="D64545"/>
+                </a:solidFill>
+                <a:latin typeface="맑은 고딕"/>
+              </a:rPr>
+              <a:t>도시재생 담당</a:t>
+            </a:r>
+          </a:p>
+        </p:txBody>
+      </p:sp>
+      <p:sp>
+        <p:nvSpPr>
+          <p:cNvPr id="8" name="TextBox 7"/>
+          <p:cNvSpPr txBox="1"/>
+          <p:nvPr/>
+        </p:nvSpPr>
+        <p:spPr>
+          <a:xfrm>
+            <a:off x="914400" y="2743200"/>
+            <a:ext cx="4663440" cy="256032"/>
+          </a:xfrm>
+          <a:prstGeom prst="rect">
+            <a:avLst/>
+          </a:prstGeom>
+          <a:noFill/>
+        </p:spPr>
+        <p:txBody>
+          <a:bodyPr wrap="square" lIns="0" rIns="0" tIns="0" bIns="0">
+            <a:spAutoFit/>
+          </a:bodyPr>
+          <a:lstStyle/>
+          <a:p>
+            <a:pPr algn="l">
+              <a:lnSpc>
+                <a:spcPct val="135000"/>
+              </a:lnSpc>
+            </a:pPr>
+            <a:r>
+              <a:rPr sz="1350" b="1">
+                <a:solidFill>
                   <a:srgbClr val="151C26"/>
                 </a:solidFill>
                 <a:latin typeface="맑은 고딕"/>
               </a:rPr>
-              <a:t>예산 효율</a:t>
-            </a:r>
-          </a:p>
-        </p:txBody>
-      </p:sp>
-      <p:sp>
-        <p:nvSpPr>
-          <p:cNvPr id="7" name="TextBox 6"/>
-          <p:cNvSpPr txBox="1"/>
-          <p:nvPr/>
-        </p:nvSpPr>
-        <p:spPr>
-          <a:xfrm>
-            <a:off x="877824" y="2743200"/>
-            <a:ext cx="5120640" cy="365760"/>
-          </a:xfrm>
-          <a:prstGeom prst="rect">
-            <a:avLst/>
-          </a:prstGeom>
-          <a:noFill/>
-        </p:spPr>
-        <p:txBody>
-          <a:bodyPr wrap="square" lIns="0" rIns="0" tIns="0" bIns="0">
-            <a:spAutoFit/>
-          </a:bodyPr>
-          <a:lstStyle/>
-          <a:p>
-            <a:pPr algn="l">
-              <a:lnSpc>
-                <a:spcPct val="140000"/>
-              </a:lnSpc>
-            </a:pPr>
-            <a:r>
-              <a:rPr sz="1100" b="0">
+              <a:t>사업지 검토 · 공모 준비</a:t>
+            </a:r>
+          </a:p>
+        </p:txBody>
+      </p:sp>
+      <p:sp>
+        <p:nvSpPr>
+          <p:cNvPr id="9" name="TextBox 8"/>
+          <p:cNvSpPr txBox="1"/>
+          <p:nvPr/>
+        </p:nvSpPr>
+        <p:spPr>
+          <a:xfrm>
+            <a:off x="914400" y="3054096"/>
+            <a:ext cx="4663440" cy="548640"/>
+          </a:xfrm>
+          <a:prstGeom prst="rect">
+            <a:avLst/>
+          </a:prstGeom>
+          <a:noFill/>
+        </p:spPr>
+        <p:txBody>
+          <a:bodyPr wrap="square" lIns="0" rIns="0" tIns="0" bIns="0">
+            <a:spAutoFit/>
+          </a:bodyPr>
+          <a:lstStyle/>
+          <a:p>
+            <a:pPr algn="l">
+              <a:lnSpc>
+                <a:spcPct val="145000"/>
+              </a:lnSpc>
+            </a:pPr>
+            <a:r>
+              <a:rPr sz="1080" b="0">
                 <a:solidFill>
                   <a:srgbClr val="5D6874"/>
                 </a:solidFill>
                 <a:latin typeface="맑은 고딕"/>
               </a:rPr>
-              <a:t>커버리지 기준 상위 지점부터 투입 — 같은 예산으로 더 많은 취약수요를 커버</a:t>
-            </a:r>
-          </a:p>
-        </p:txBody>
-      </p:sp>
-      <p:sp>
-        <p:nvSpPr>
-          <p:cNvPr id="8" name="Rectangle 7"/>
+              <a:t>지수가 낮은 곳과 3년 뒤 살펴볼 곳을 겹쳐 후보를 좁히실 때,</a:t>
+            </a:r>
+          </a:p>
+          <a:p>
+            <a:pPr algn="l">
+              <a:lnSpc>
+                <a:spcPct val="145000"/>
+              </a:lnSpc>
+              <a:spcBef>
+                <a:spcPts val="0"/>
+              </a:spcBef>
+            </a:pPr>
+            <a:r>
+              <a:rPr sz="1080" b="0">
+                <a:solidFill>
+                  <a:srgbClr val="5D6874"/>
+                </a:solidFill>
+                <a:latin typeface="맑은 고딕"/>
+              </a:rPr>
+              <a:t>공모의 '쇠퇴도 진단' 항목에 근거 수치로.</a:t>
+            </a:r>
+          </a:p>
+        </p:txBody>
+      </p:sp>
+      <p:sp>
+        <p:nvSpPr>
+          <p:cNvPr id="10" name="Rounded Rectangle 9"/>
           <p:cNvSpPr/>
           <p:nvPr/>
         </p:nvSpPr>
         <p:spPr>
           <a:xfrm>
-            <a:off x="658368" y="3218688"/>
-            <a:ext cx="68580" cy="566928"/>
-          </a:xfrm>
-          <a:prstGeom prst="rect">
-            <a:avLst/>
+            <a:off x="6236207" y="2286000"/>
+            <a:ext cx="5257800" cy="1371600"/>
+          </a:xfrm>
+          <a:prstGeom prst="roundRect">
+            <a:avLst>
+              <a:gd name="adj" fmla="val 6000"/>
+            </a:avLst>
           </a:prstGeom>
           <a:solidFill>
-            <a:srgbClr val="D64545"/>
+            <a:srgbClr val="FFFFFF"/>
+          </a:solidFill>
+          <a:ln w="12700">
+            <a:solidFill>
+              <a:srgbClr val="E0E5EB"/>
+            </a:solidFill>
+          </a:ln>
+          <a:effectLst/>
+        </p:spPr>
+        <p:style>
+          <a:lnRef idx="1">
+            <a:schemeClr val="accent1"/>
+          </a:lnRef>
+          <a:fillRef idx="3">
+            <a:schemeClr val="accent1"/>
+          </a:fillRef>
+          <a:effectRef idx="2">
+            <a:schemeClr val="accent1"/>
+          </a:effectRef>
+          <a:fontRef idx="minor">
+            <a:schemeClr val="lt1"/>
+          </a:fontRef>
+        </p:style>
+        <p:txBody>
+          <a:bodyPr rtlCol="0" anchor="ctr"/>
+          <a:lstStyle/>
+          <a:p/>
+        </p:txBody>
+      </p:sp>
+      <p:sp>
+        <p:nvSpPr>
+          <p:cNvPr id="11" name="Rectangle 10"/>
+          <p:cNvSpPr/>
+          <p:nvPr/>
+        </p:nvSpPr>
+        <p:spPr>
+          <a:xfrm>
+            <a:off x="6236207" y="2286000"/>
+            <a:ext cx="68580" cy="1371600"/>
+          </a:xfrm>
+          <a:prstGeom prst="rect">
+            <a:avLst/>
+          </a:prstGeom>
+          <a:solidFill>
+            <a:srgbClr val="2E7DD1"/>
           </a:solidFill>
           <a:ln>
             <a:noFill/>
@@ -10854,14 +10849,14 @@
       </p:sp>
       <p:sp>
         <p:nvSpPr>
-          <p:cNvPr id="9" name="TextBox 8"/>
-          <p:cNvSpPr txBox="1"/>
-          <p:nvPr/>
-        </p:nvSpPr>
-        <p:spPr>
-          <a:xfrm>
-            <a:off x="877824" y="3218688"/>
-            <a:ext cx="5120640" cy="256032"/>
+          <p:cNvPr id="12" name="TextBox 11"/>
+          <p:cNvSpPr txBox="1"/>
+          <p:nvPr/>
+        </p:nvSpPr>
+        <p:spPr>
+          <a:xfrm>
+            <a:off x="6492240" y="2450592"/>
+            <a:ext cx="2194560" cy="256032"/>
           </a:xfrm>
           <a:prstGeom prst="rect">
             <a:avLst/>
@@ -10882,73 +10877,135 @@
             <a:r>
               <a:rPr sz="1250" b="1">
                 <a:solidFill>
+                  <a:srgbClr val="2E7DD1"/>
+                </a:solidFill>
+                <a:latin typeface="맑은 고딕"/>
+              </a:rPr>
+              <a:t>복지·보건 담당</a:t>
+            </a:r>
+          </a:p>
+        </p:txBody>
+      </p:sp>
+      <p:sp>
+        <p:nvSpPr>
+          <p:cNvPr id="13" name="TextBox 12"/>
+          <p:cNvSpPr txBox="1"/>
+          <p:nvPr/>
+        </p:nvSpPr>
+        <p:spPr>
+          <a:xfrm>
+            <a:off x="6492240" y="2743200"/>
+            <a:ext cx="4663440" cy="256032"/>
+          </a:xfrm>
+          <a:prstGeom prst="rect">
+            <a:avLst/>
+          </a:prstGeom>
+          <a:noFill/>
+        </p:spPr>
+        <p:txBody>
+          <a:bodyPr wrap="square" lIns="0" rIns="0" tIns="0" bIns="0">
+            <a:spAutoFit/>
+          </a:bodyPr>
+          <a:lstStyle/>
+          <a:p>
+            <a:pPr algn="l">
+              <a:lnSpc>
+                <a:spcPct val="135000"/>
+              </a:lnSpc>
+            </a:pPr>
+            <a:r>
+              <a:rPr sz="1350" b="1">
+                <a:solidFill>
                   <a:srgbClr val="151C26"/>
                 </a:solidFill>
                 <a:latin typeface="맑은 고딕"/>
               </a:rPr>
-              <a:t>개입 시점</a:t>
-            </a:r>
-          </a:p>
-        </p:txBody>
-      </p:sp>
-      <p:sp>
-        <p:nvSpPr>
-          <p:cNvPr id="10" name="TextBox 9"/>
-          <p:cNvSpPr txBox="1"/>
-          <p:nvPr/>
-        </p:nvSpPr>
-        <p:spPr>
-          <a:xfrm>
-            <a:off x="877824" y="3493008"/>
-            <a:ext cx="5120640" cy="365760"/>
-          </a:xfrm>
-          <a:prstGeom prst="rect">
-            <a:avLst/>
-          </a:prstGeom>
-          <a:noFill/>
-        </p:spPr>
-        <p:txBody>
-          <a:bodyPr wrap="square" lIns="0" rIns="0" tIns="0" bIns="0">
-            <a:spAutoFit/>
-          </a:bodyPr>
-          <a:lstStyle/>
-          <a:p>
-            <a:pPr algn="l">
-              <a:lnSpc>
-                <a:spcPct val="140000"/>
-              </a:lnSpc>
-            </a:pPr>
-            <a:r>
-              <a:rPr sz="1100" b="0">
+              <a:t>생활시설 위치 검토</a:t>
+            </a:r>
+          </a:p>
+        </p:txBody>
+      </p:sp>
+      <p:sp>
+        <p:nvSpPr>
+          <p:cNvPr id="14" name="TextBox 13"/>
+          <p:cNvSpPr txBox="1"/>
+          <p:nvPr/>
+        </p:nvSpPr>
+        <p:spPr>
+          <a:xfrm>
+            <a:off x="6492240" y="3054096"/>
+            <a:ext cx="4663440" cy="548640"/>
+          </a:xfrm>
+          <a:prstGeom prst="rect">
+            <a:avLst/>
+          </a:prstGeom>
+          <a:noFill/>
+        </p:spPr>
+        <p:txBody>
+          <a:bodyPr wrap="square" lIns="0" rIns="0" tIns="0" bIns="0">
+            <a:spAutoFit/>
+          </a:bodyPr>
+          <a:lstStyle/>
+          <a:p>
+            <a:pPr algn="l">
+              <a:lnSpc>
+                <a:spcPct val="145000"/>
+              </a:lnSpc>
+            </a:pPr>
+            <a:r>
+              <a:rPr sz="1080" b="0">
                 <a:solidFill>
                   <a:srgbClr val="5D6874"/>
                 </a:solidFill>
                 <a:latin typeface="맑은 고딕"/>
               </a:rPr>
-              <a:t>쇠퇴 확정 후 대응 → 3년 선행 경보로 전환</a:t>
-            </a:r>
-          </a:p>
-        </p:txBody>
-      </p:sp>
-      <p:sp>
-        <p:nvSpPr>
-          <p:cNvPr id="11" name="Rectangle 10"/>
+              <a:t>우선순위표의 좌표를 검토 후보 중 하나로,</a:t>
+            </a:r>
+          </a:p>
+          <a:p>
+            <a:pPr algn="l">
+              <a:lnSpc>
+                <a:spcPct val="145000"/>
+              </a:lnSpc>
+              <a:spcBef>
+                <a:spcPts val="0"/>
+              </a:spcBef>
+            </a:pPr>
+            <a:r>
+              <a:rPr sz="1080" b="0">
+                <a:solidFill>
+                  <a:srgbClr val="5D6874"/>
+                </a:solidFill>
+                <a:latin typeface="맑은 고딕"/>
+              </a:rPr>
+              <a:t>왜 그 동네인지 설명하실 때 항목별 근거로.</a:t>
+            </a:r>
+          </a:p>
+        </p:txBody>
+      </p:sp>
+      <p:sp>
+        <p:nvSpPr>
+          <p:cNvPr id="15" name="Rounded Rectangle 14"/>
           <p:cNvSpPr/>
           <p:nvPr/>
         </p:nvSpPr>
         <p:spPr>
           <a:xfrm>
-            <a:off x="658368" y="3968496"/>
-            <a:ext cx="68580" cy="566928"/>
-          </a:xfrm>
-          <a:prstGeom prst="rect">
-            <a:avLst/>
+            <a:off x="658368" y="3858768"/>
+            <a:ext cx="5257800" cy="1371600"/>
+          </a:xfrm>
+          <a:prstGeom prst="roundRect">
+            <a:avLst>
+              <a:gd name="adj" fmla="val 6000"/>
+            </a:avLst>
           </a:prstGeom>
           <a:solidFill>
-            <a:srgbClr val="D64545"/>
+            <a:srgbClr val="FFFFFF"/>
           </a:solidFill>
-          <a:ln>
-            <a:noFill/>
+          <a:ln w="12700">
+            <a:solidFill>
+              <a:srgbClr val="E0E5EB"/>
+            </a:solidFill>
           </a:ln>
           <a:effectLst/>
         </p:spPr>
@@ -10974,251 +11031,14 @@
       </p:sp>
       <p:sp>
         <p:nvSpPr>
-          <p:cNvPr id="12" name="TextBox 11"/>
-          <p:cNvSpPr txBox="1"/>
-          <p:nvPr/>
-        </p:nvSpPr>
-        <p:spPr>
-          <a:xfrm>
-            <a:off x="877824" y="3968496"/>
-            <a:ext cx="5120640" cy="256032"/>
-          </a:xfrm>
-          <a:prstGeom prst="rect">
-            <a:avLst/>
-          </a:prstGeom>
-          <a:noFill/>
-        </p:spPr>
-        <p:txBody>
-          <a:bodyPr wrap="square" lIns="0" rIns="0" tIns="0" bIns="0">
-            <a:spAutoFit/>
-          </a:bodyPr>
-          <a:lstStyle/>
-          <a:p>
-            <a:pPr algn="l">
-              <a:lnSpc>
-                <a:spcPct val="135000"/>
-              </a:lnSpc>
-            </a:pPr>
-            <a:r>
-              <a:rPr sz="1250" b="1">
-                <a:solidFill>
-                  <a:srgbClr val="151C26"/>
-                </a:solidFill>
-                <a:latin typeface="맑은 고딕"/>
-              </a:rPr>
-              <a:t>설명 책임</a:t>
-            </a:r>
-          </a:p>
-        </p:txBody>
-      </p:sp>
-      <p:sp>
-        <p:nvSpPr>
-          <p:cNvPr id="13" name="TextBox 12"/>
-          <p:cNvSpPr txBox="1"/>
-          <p:nvPr/>
-        </p:nvSpPr>
-        <p:spPr>
-          <a:xfrm>
-            <a:off x="877824" y="4242816"/>
-            <a:ext cx="5120640" cy="365760"/>
-          </a:xfrm>
-          <a:prstGeom prst="rect">
-            <a:avLst/>
-          </a:prstGeom>
-          <a:noFill/>
-        </p:spPr>
-        <p:txBody>
-          <a:bodyPr wrap="square" lIns="0" rIns="0" tIns="0" bIns="0">
-            <a:spAutoFit/>
-          </a:bodyPr>
-          <a:lstStyle/>
-          <a:p>
-            <a:pPr algn="l">
-              <a:lnSpc>
-                <a:spcPct val="140000"/>
-              </a:lnSpc>
-            </a:pPr>
-            <a:r>
-              <a:rPr sz="1100" b="0">
-                <a:solidFill>
-                  <a:srgbClr val="5D6874"/>
-                </a:solidFill>
-                <a:latin typeface="맑은 고딕"/>
-              </a:rPr>
-              <a:t>선정 근거를 SHAP 요인분해로 문서화 — 감사·의회 대응 부담 감소</a:t>
-            </a:r>
-          </a:p>
-        </p:txBody>
-      </p:sp>
-      <p:sp>
-        <p:nvSpPr>
-          <p:cNvPr id="14" name="Rectangle 13"/>
+          <p:cNvPr id="16" name="Rectangle 15"/>
           <p:cNvSpPr/>
           <p:nvPr/>
         </p:nvSpPr>
         <p:spPr>
           <a:xfrm>
-            <a:off x="658368" y="4718304"/>
-            <a:ext cx="68580" cy="566928"/>
-          </a:xfrm>
-          <a:prstGeom prst="rect">
-            <a:avLst/>
-          </a:prstGeom>
-          <a:solidFill>
-            <a:srgbClr val="D64545"/>
-          </a:solidFill>
-          <a:ln>
-            <a:noFill/>
-          </a:ln>
-          <a:effectLst/>
-        </p:spPr>
-        <p:style>
-          <a:lnRef idx="1">
-            <a:schemeClr val="accent1"/>
-          </a:lnRef>
-          <a:fillRef idx="3">
-            <a:schemeClr val="accent1"/>
-          </a:fillRef>
-          <a:effectRef idx="2">
-            <a:schemeClr val="accent1"/>
-          </a:effectRef>
-          <a:fontRef idx="minor">
-            <a:schemeClr val="lt1"/>
-          </a:fontRef>
-        </p:style>
-        <p:txBody>
-          <a:bodyPr rtlCol="0" anchor="ctr"/>
-          <a:lstStyle/>
-          <a:p/>
-        </p:txBody>
-      </p:sp>
-      <p:sp>
-        <p:nvSpPr>
-          <p:cNvPr id="15" name="TextBox 14"/>
-          <p:cNvSpPr txBox="1"/>
-          <p:nvPr/>
-        </p:nvSpPr>
-        <p:spPr>
-          <a:xfrm>
-            <a:off x="877824" y="4718304"/>
-            <a:ext cx="5120640" cy="256032"/>
-          </a:xfrm>
-          <a:prstGeom prst="rect">
-            <a:avLst/>
-          </a:prstGeom>
-          <a:noFill/>
-        </p:spPr>
-        <p:txBody>
-          <a:bodyPr wrap="square" lIns="0" rIns="0" tIns="0" bIns="0">
-            <a:spAutoFit/>
-          </a:bodyPr>
-          <a:lstStyle/>
-          <a:p>
-            <a:pPr algn="l">
-              <a:lnSpc>
-                <a:spcPct val="135000"/>
-              </a:lnSpc>
-            </a:pPr>
-            <a:r>
-              <a:rPr sz="1250" b="1">
-                <a:solidFill>
-                  <a:srgbClr val="151C26"/>
-                </a:solidFill>
-                <a:latin typeface="맑은 고딕"/>
-              </a:rPr>
-              <a:t>행정 비용</a:t>
-            </a:r>
-          </a:p>
-        </p:txBody>
-      </p:sp>
-      <p:sp>
-        <p:nvSpPr>
-          <p:cNvPr id="16" name="TextBox 15"/>
-          <p:cNvSpPr txBox="1"/>
-          <p:nvPr/>
-        </p:nvSpPr>
-        <p:spPr>
-          <a:xfrm>
-            <a:off x="877824" y="4992624"/>
-            <a:ext cx="5120640" cy="365760"/>
-          </a:xfrm>
-          <a:prstGeom prst="rect">
-            <a:avLst/>
-          </a:prstGeom>
-          <a:noFill/>
-        </p:spPr>
-        <p:txBody>
-          <a:bodyPr wrap="square" lIns="0" rIns="0" tIns="0" bIns="0">
-            <a:spAutoFit/>
-          </a:bodyPr>
-          <a:lstStyle/>
-          <a:p>
-            <a:pPr algn="l">
-              <a:lnSpc>
-                <a:spcPct val="140000"/>
-              </a:lnSpc>
-            </a:pPr>
-            <a:r>
-              <a:rPr sz="1100" b="0">
-                <a:solidFill>
-                  <a:srgbClr val="5D6874"/>
-                </a:solidFill>
-                <a:latin typeface="맑은 고딕"/>
-              </a:rPr>
-              <a:t>추가 데이터 구매·시스템 구축 없음 — 스크립트 재실행만으로 연간 갱신</a:t>
-            </a:r>
-          </a:p>
-        </p:txBody>
-      </p:sp>
-      <p:sp>
-        <p:nvSpPr>
-          <p:cNvPr id="17" name="TextBox 16"/>
-          <p:cNvSpPr txBox="1"/>
-          <p:nvPr/>
-        </p:nvSpPr>
-        <p:spPr>
-          <a:xfrm>
-            <a:off x="6510528" y="2084831"/>
-            <a:ext cx="5029200" cy="274320"/>
-          </a:xfrm>
-          <a:prstGeom prst="rect">
-            <a:avLst/>
-          </a:prstGeom>
-          <a:noFill/>
-        </p:spPr>
-        <p:txBody>
-          <a:bodyPr wrap="square" lIns="0" rIns="0" tIns="0" bIns="0">
-            <a:spAutoFit/>
-          </a:bodyPr>
-          <a:lstStyle/>
-          <a:p>
-            <a:pPr algn="l">
-              <a:lnSpc>
-                <a:spcPct val="135000"/>
-              </a:lnSpc>
-            </a:pPr>
-            <a:r>
-              <a:rPr sz="1450" b="1">
-                <a:solidFill>
-                  <a:srgbClr val="151C26"/>
-                </a:solidFill>
-                <a:latin typeface="맑은 고딕"/>
-              </a:rPr>
-              <a:t>실행 로드맵</a:t>
-            </a:r>
-          </a:p>
-        </p:txBody>
-      </p:sp>
-      <p:sp>
-        <p:nvSpPr>
-          <p:cNvPr id="18" name="Rectangle 17"/>
-          <p:cNvSpPr/>
-          <p:nvPr/>
-        </p:nvSpPr>
-        <p:spPr>
-          <a:xfrm>
-            <a:off x="6510528" y="2468880"/>
-            <a:ext cx="68580" cy="566928"/>
+            <a:off x="658368" y="3858768"/>
+            <a:ext cx="68580" cy="1371600"/>
           </a:xfrm>
           <a:prstGeom prst="rect">
             <a:avLst/>
@@ -11253,101 +11073,163 @@
       </p:sp>
       <p:sp>
         <p:nvSpPr>
+          <p:cNvPr id="17" name="TextBox 16"/>
+          <p:cNvSpPr txBox="1"/>
+          <p:nvPr/>
+        </p:nvSpPr>
+        <p:spPr>
+          <a:xfrm>
+            <a:off x="914400" y="4023359"/>
+            <a:ext cx="2194560" cy="256032"/>
+          </a:xfrm>
+          <a:prstGeom prst="rect">
+            <a:avLst/>
+          </a:prstGeom>
+          <a:noFill/>
+        </p:spPr>
+        <p:txBody>
+          <a:bodyPr wrap="square" lIns="0" rIns="0" tIns="0" bIns="0">
+            <a:spAutoFit/>
+          </a:bodyPr>
+          <a:lstStyle/>
+          <a:p>
+            <a:pPr algn="l">
+              <a:lnSpc>
+                <a:spcPct val="135000"/>
+              </a:lnSpc>
+            </a:pPr>
+            <a:r>
+              <a:rPr sz="1250" b="1">
+                <a:solidFill>
+                  <a:srgbClr val="3E9B7C"/>
+                </a:solidFill>
+                <a:latin typeface="맑은 고딕"/>
+              </a:rPr>
+              <a:t>예산 담당</a:t>
+            </a:r>
+          </a:p>
+        </p:txBody>
+      </p:sp>
+      <p:sp>
+        <p:nvSpPr>
+          <p:cNvPr id="18" name="TextBox 17"/>
+          <p:cNvSpPr txBox="1"/>
+          <p:nvPr/>
+        </p:nvSpPr>
+        <p:spPr>
+          <a:xfrm>
+            <a:off x="914400" y="4315968"/>
+            <a:ext cx="4663440" cy="256032"/>
+          </a:xfrm>
+          <a:prstGeom prst="rect">
+            <a:avLst/>
+          </a:prstGeom>
+          <a:noFill/>
+        </p:spPr>
+        <p:txBody>
+          <a:bodyPr wrap="square" lIns="0" rIns="0" tIns="0" bIns="0">
+            <a:spAutoFit/>
+          </a:bodyPr>
+          <a:lstStyle/>
+          <a:p>
+            <a:pPr algn="l">
+              <a:lnSpc>
+                <a:spcPct val="135000"/>
+              </a:lnSpc>
+            </a:pPr>
+            <a:r>
+              <a:rPr sz="1350" b="1">
+                <a:solidFill>
+                  <a:srgbClr val="151C26"/>
+                </a:solidFill>
+                <a:latin typeface="맑은 고딕"/>
+              </a:rPr>
+              <a:t>배분 검토 자료</a:t>
+            </a:r>
+          </a:p>
+        </p:txBody>
+      </p:sp>
+      <p:sp>
+        <p:nvSpPr>
           <p:cNvPr id="19" name="TextBox 18"/>
           <p:cNvSpPr txBox="1"/>
           <p:nvPr/>
         </p:nvSpPr>
         <p:spPr>
           <a:xfrm>
-            <a:off x="6729983" y="2468880"/>
-            <a:ext cx="4754880" cy="256032"/>
-          </a:xfrm>
-          <a:prstGeom prst="rect">
-            <a:avLst/>
-          </a:prstGeom>
-          <a:noFill/>
-        </p:spPr>
-        <p:txBody>
-          <a:bodyPr wrap="square" lIns="0" rIns="0" tIns="0" bIns="0">
-            <a:spAutoFit/>
-          </a:bodyPr>
-          <a:lstStyle/>
-          <a:p>
-            <a:pPr algn="l">
-              <a:lnSpc>
-                <a:spcPct val="135000"/>
-              </a:lnSpc>
-            </a:pPr>
-            <a:r>
-              <a:rPr sz="1250" b="1">
-                <a:solidFill>
-                  <a:srgbClr val="3E9B7C"/>
-                </a:solidFill>
-                <a:latin typeface="맑은 고딕"/>
-              </a:rPr>
-              <a:t>1단계 · 즉시</a:t>
-            </a:r>
-          </a:p>
-        </p:txBody>
-      </p:sp>
-      <p:sp>
-        <p:nvSpPr>
-          <p:cNvPr id="20" name="TextBox 19"/>
-          <p:cNvSpPr txBox="1"/>
-          <p:nvPr/>
-        </p:nvSpPr>
-        <p:spPr>
-          <a:xfrm>
-            <a:off x="6729983" y="2743200"/>
-            <a:ext cx="4754880" cy="365760"/>
-          </a:xfrm>
-          <a:prstGeom prst="rect">
-            <a:avLst/>
-          </a:prstGeom>
-          <a:noFill/>
-        </p:spPr>
-        <p:txBody>
-          <a:bodyPr wrap="square" lIns="0" rIns="0" tIns="0" bIns="0">
-            <a:spAutoFit/>
-          </a:bodyPr>
-          <a:lstStyle/>
-          <a:p>
-            <a:pPr algn="l">
-              <a:lnSpc>
-                <a:spcPct val="140000"/>
-              </a:lnSpc>
-            </a:pPr>
-            <a:r>
-              <a:rPr sz="1100" b="0">
+            <a:off x="914400" y="4626864"/>
+            <a:ext cx="4663440" cy="548640"/>
+          </a:xfrm>
+          <a:prstGeom prst="rect">
+            <a:avLst/>
+          </a:prstGeom>
+          <a:noFill/>
+        </p:spPr>
+        <p:txBody>
+          <a:bodyPr wrap="square" lIns="0" rIns="0" tIns="0" bIns="0">
+            <a:spAutoFit/>
+          </a:bodyPr>
+          <a:lstStyle/>
+          <a:p>
+            <a:pPr algn="l">
+              <a:lnSpc>
+                <a:spcPct val="145000"/>
+              </a:lnSpc>
+            </a:pPr>
+            <a:r>
+              <a:rPr sz="1080" b="0">
                 <a:solidFill>
                   <a:srgbClr val="5D6874"/>
                 </a:solidFill>
                 <a:latin typeface="맑은 고딕"/>
               </a:rPr>
-              <a:t>본 스크립트로 천안시 25개 생활권 기준선 진단 확정</a:t>
-            </a:r>
-          </a:p>
-        </p:txBody>
-      </p:sp>
-      <p:sp>
-        <p:nvSpPr>
-          <p:cNvPr id="21" name="Rectangle 20"/>
+              <a:t>몇 개소까지면 어느 정도 효과인지 곡선으로 비교하실 때,</a:t>
+            </a:r>
+          </a:p>
+          <a:p>
+            <a:pPr algn="l">
+              <a:lnSpc>
+                <a:spcPct val="145000"/>
+              </a:lnSpc>
+              <a:spcBef>
+                <a:spcPts val="0"/>
+              </a:spcBef>
+            </a:pPr>
+            <a:r>
+              <a:rPr sz="1080" b="0">
+                <a:solidFill>
+                  <a:srgbClr val="5D6874"/>
+                </a:solidFill>
+                <a:latin typeface="맑은 고딕"/>
+              </a:rPr>
+              <a:t>예산 조정이 필요할 때 판단의 참고로.</a:t>
+            </a:r>
+          </a:p>
+        </p:txBody>
+      </p:sp>
+      <p:sp>
+        <p:nvSpPr>
+          <p:cNvPr id="20" name="Rounded Rectangle 19"/>
           <p:cNvSpPr/>
           <p:nvPr/>
         </p:nvSpPr>
         <p:spPr>
           <a:xfrm>
-            <a:off x="6510528" y="3218688"/>
-            <a:ext cx="68580" cy="566928"/>
-          </a:xfrm>
-          <a:prstGeom prst="rect">
-            <a:avLst/>
+            <a:off x="6236207" y="3858768"/>
+            <a:ext cx="5257800" cy="1371600"/>
+          </a:xfrm>
+          <a:prstGeom prst="roundRect">
+            <a:avLst>
+              <a:gd name="adj" fmla="val 6000"/>
+            </a:avLst>
           </a:prstGeom>
           <a:solidFill>
-            <a:srgbClr val="2E7DD1"/>
+            <a:srgbClr val="FFFFFF"/>
           </a:solidFill>
-          <a:ln>
-            <a:noFill/>
+          <a:ln w="12700">
+            <a:solidFill>
+              <a:srgbClr val="E0E5EB"/>
+            </a:solidFill>
           </a:ln>
           <a:effectLst/>
         </p:spPr>
@@ -11373,92 +11255,14 @@
       </p:sp>
       <p:sp>
         <p:nvSpPr>
-          <p:cNvPr id="22" name="TextBox 21"/>
-          <p:cNvSpPr txBox="1"/>
-          <p:nvPr/>
-        </p:nvSpPr>
-        <p:spPr>
-          <a:xfrm>
-            <a:off x="6729983" y="3218688"/>
-            <a:ext cx="4754880" cy="256032"/>
-          </a:xfrm>
-          <a:prstGeom prst="rect">
-            <a:avLst/>
-          </a:prstGeom>
-          <a:noFill/>
-        </p:spPr>
-        <p:txBody>
-          <a:bodyPr wrap="square" lIns="0" rIns="0" tIns="0" bIns="0">
-            <a:spAutoFit/>
-          </a:bodyPr>
-          <a:lstStyle/>
-          <a:p>
-            <a:pPr algn="l">
-              <a:lnSpc>
-                <a:spcPct val="135000"/>
-              </a:lnSpc>
-            </a:pPr>
-            <a:r>
-              <a:rPr sz="1250" b="1">
-                <a:solidFill>
-                  <a:srgbClr val="2E7DD1"/>
-                </a:solidFill>
-                <a:latin typeface="맑은 고딕"/>
-              </a:rPr>
-              <a:t>2단계 · 3개월</a:t>
-            </a:r>
-          </a:p>
-        </p:txBody>
-      </p:sp>
-      <p:sp>
-        <p:nvSpPr>
-          <p:cNvPr id="23" name="TextBox 22"/>
-          <p:cNvSpPr txBox="1"/>
-          <p:nvPr/>
-        </p:nvSpPr>
-        <p:spPr>
-          <a:xfrm>
-            <a:off x="6729983" y="3493008"/>
-            <a:ext cx="4754880" cy="365760"/>
-          </a:xfrm>
-          <a:prstGeom prst="rect">
-            <a:avLst/>
-          </a:prstGeom>
-          <a:noFill/>
-        </p:spPr>
-        <p:txBody>
-          <a:bodyPr wrap="square" lIns="0" rIns="0" tIns="0" bIns="0">
-            <a:spAutoFit/>
-          </a:bodyPr>
-          <a:lstStyle/>
-          <a:p>
-            <a:pPr algn="l">
-              <a:lnSpc>
-                <a:spcPct val="140000"/>
-              </a:lnSpc>
-            </a:pPr>
-            <a:r>
-              <a:rPr sz="1100" b="0">
-                <a:solidFill>
-                  <a:srgbClr val="5D6874"/>
-                </a:solidFill>
-                <a:latin typeface="맑은 고딕"/>
-              </a:rPr>
-              <a:t>천안시 내부 행정데이터(인허가 원장·건축물대장·복지수급) 연계로 지표 정밀화</a:t>
-            </a:r>
-          </a:p>
-        </p:txBody>
-      </p:sp>
-      <p:sp>
-        <p:nvSpPr>
-          <p:cNvPr id="24" name="Rectangle 23"/>
+          <p:cNvPr id="21" name="Rectangle 20"/>
           <p:cNvSpPr/>
           <p:nvPr/>
         </p:nvSpPr>
         <p:spPr>
           <a:xfrm>
-            <a:off x="6510528" y="3968496"/>
-            <a:ext cx="68580" cy="566928"/>
+            <a:off x="6236207" y="3858768"/>
+            <a:ext cx="68580" cy="1371600"/>
           </a:xfrm>
           <a:prstGeom prst="rect">
             <a:avLst/>
@@ -11493,14 +11297,14 @@
       </p:sp>
       <p:sp>
         <p:nvSpPr>
-          <p:cNvPr id="25" name="TextBox 24"/>
-          <p:cNvSpPr txBox="1"/>
-          <p:nvPr/>
-        </p:nvSpPr>
-        <p:spPr>
-          <a:xfrm>
-            <a:off x="6729983" y="3968496"/>
-            <a:ext cx="4754880" cy="256032"/>
+          <p:cNvPr id="22" name="TextBox 21"/>
+          <p:cNvSpPr txBox="1"/>
+          <p:nvPr/>
+        </p:nvSpPr>
+        <p:spPr>
+          <a:xfrm>
+            <a:off x="6492240" y="4023359"/>
+            <a:ext cx="2194560" cy="256032"/>
           </a:xfrm>
           <a:prstGeom prst="rect">
             <a:avLst/>
@@ -11525,66 +11329,126 @@
                 </a:solidFill>
                 <a:latin typeface="맑은 고딕"/>
               </a:rPr>
-              <a:t>3단계 · 6개월</a:t>
-            </a:r>
-          </a:p>
-        </p:txBody>
-      </p:sp>
-      <p:sp>
-        <p:nvSpPr>
-          <p:cNvPr id="26" name="TextBox 25"/>
-          <p:cNvSpPr txBox="1"/>
-          <p:nvPr/>
-        </p:nvSpPr>
-        <p:spPr>
-          <a:xfrm>
-            <a:off x="6729983" y="4242816"/>
-            <a:ext cx="4754880" cy="365760"/>
-          </a:xfrm>
-          <a:prstGeom prst="rect">
-            <a:avLst/>
-          </a:prstGeom>
-          <a:noFill/>
-        </p:spPr>
-        <p:txBody>
-          <a:bodyPr wrap="square" lIns="0" rIns="0" tIns="0" bIns="0">
-            <a:spAutoFit/>
-          </a:bodyPr>
-          <a:lstStyle/>
-          <a:p>
-            <a:pPr algn="l">
-              <a:lnSpc>
-                <a:spcPct val="140000"/>
-              </a:lnSpc>
-            </a:pPr>
-            <a:r>
-              <a:rPr sz="1100" b="0">
+              <a:t>기획·평가 담당</a:t>
+            </a:r>
+          </a:p>
+        </p:txBody>
+      </p:sp>
+      <p:sp>
+        <p:nvSpPr>
+          <p:cNvPr id="23" name="TextBox 22"/>
+          <p:cNvSpPr txBox="1"/>
+          <p:nvPr/>
+        </p:nvSpPr>
+        <p:spPr>
+          <a:xfrm>
+            <a:off x="6492240" y="4315968"/>
+            <a:ext cx="4663440" cy="256032"/>
+          </a:xfrm>
+          <a:prstGeom prst="rect">
+            <a:avLst/>
+          </a:prstGeom>
+          <a:noFill/>
+        </p:spPr>
+        <p:txBody>
+          <a:bodyPr wrap="square" lIns="0" rIns="0" tIns="0" bIns="0">
+            <a:spAutoFit/>
+          </a:bodyPr>
+          <a:lstStyle/>
+          <a:p>
+            <a:pPr algn="l">
+              <a:lnSpc>
+                <a:spcPct val="135000"/>
+              </a:lnSpc>
+            </a:pPr>
+            <a:r>
+              <a:rPr sz="1350" b="1">
+                <a:solidFill>
+                  <a:srgbClr val="151C26"/>
+                </a:solidFill>
+                <a:latin typeface="맑은 고딕"/>
+              </a:rPr>
+              <a:t>시행 이후 확인</a:t>
+            </a:r>
+          </a:p>
+        </p:txBody>
+      </p:sp>
+      <p:sp>
+        <p:nvSpPr>
+          <p:cNvPr id="24" name="TextBox 23"/>
+          <p:cNvSpPr txBox="1"/>
+          <p:nvPr/>
+        </p:nvSpPr>
+        <p:spPr>
+          <a:xfrm>
+            <a:off x="6492240" y="4626864"/>
+            <a:ext cx="4663440" cy="548640"/>
+          </a:xfrm>
+          <a:prstGeom prst="rect">
+            <a:avLst/>
+          </a:prstGeom>
+          <a:noFill/>
+        </p:spPr>
+        <p:txBody>
+          <a:bodyPr wrap="square" lIns="0" rIns="0" tIns="0" bIns="0">
+            <a:spAutoFit/>
+          </a:bodyPr>
+          <a:lstStyle/>
+          <a:p>
+            <a:pPr algn="l">
+              <a:lnSpc>
+                <a:spcPct val="145000"/>
+              </a:lnSpc>
+            </a:pPr>
+            <a:r>
+              <a:rPr sz="1080" b="0">
                 <a:solidFill>
                   <a:srgbClr val="5D6874"/>
                 </a:solidFill>
                 <a:latin typeface="맑은 고딕"/>
               </a:rPr>
-              <a:t>500m 격자 단위로 공간해상도 상향 — 표본 확대로 예측모델 성능 개선</a:t>
-            </a:r>
-          </a:p>
-        </p:txBody>
-      </p:sp>
-      <p:sp>
-        <p:nvSpPr>
-          <p:cNvPr id="27" name="Rectangle 26"/>
+              <a:t>이듬해 같은 스크립트로 지수 변화를 이어 보실 때,</a:t>
+            </a:r>
+          </a:p>
+          <a:p>
+            <a:pPr algn="l">
+              <a:lnSpc>
+                <a:spcPct val="145000"/>
+              </a:lnSpc>
+              <a:spcBef>
+                <a:spcPts val="0"/>
+              </a:spcBef>
+            </a:pPr>
+            <a:r>
+              <a:rPr sz="1080" b="0">
+                <a:solidFill>
+                  <a:srgbClr val="5D6874"/>
+                </a:solidFill>
+                <a:latin typeface="맑은 고딕"/>
+              </a:rPr>
+              <a:t>하신 사업이 수치로도 나아졌는지 확인하실 때.</a:t>
+            </a:r>
+          </a:p>
+        </p:txBody>
+      </p:sp>
+      <p:sp>
+        <p:nvSpPr>
+          <p:cNvPr id="25" name="Rounded Rectangle 24"/>
           <p:cNvSpPr/>
           <p:nvPr/>
         </p:nvSpPr>
         <p:spPr>
           <a:xfrm>
-            <a:off x="6510528" y="4718304"/>
-            <a:ext cx="68580" cy="566928"/>
-          </a:xfrm>
-          <a:prstGeom prst="rect">
-            <a:avLst/>
+            <a:off x="658368" y="5541264"/>
+            <a:ext cx="10874959" cy="786384"/>
+          </a:xfrm>
+          <a:prstGeom prst="roundRect">
+            <a:avLst>
+              <a:gd name="adj" fmla="val 6000"/>
+            </a:avLst>
           </a:prstGeom>
           <a:solidFill>
-            <a:srgbClr val="D64545"/>
+            <a:srgbClr val="F0F7F2"/>
           </a:solidFill>
           <a:ln>
             <a:noFill/>
@@ -11613,135 +11477,13 @@
       </p:sp>
       <p:sp>
         <p:nvSpPr>
-          <p:cNvPr id="28" name="TextBox 27"/>
-          <p:cNvSpPr txBox="1"/>
-          <p:nvPr/>
-        </p:nvSpPr>
-        <p:spPr>
-          <a:xfrm>
-            <a:off x="6729983" y="4718304"/>
-            <a:ext cx="4754880" cy="256032"/>
-          </a:xfrm>
-          <a:prstGeom prst="rect">
-            <a:avLst/>
-          </a:prstGeom>
-          <a:noFill/>
-        </p:spPr>
-        <p:txBody>
-          <a:bodyPr wrap="square" lIns="0" rIns="0" tIns="0" bIns="0">
-            <a:spAutoFit/>
-          </a:bodyPr>
-          <a:lstStyle/>
-          <a:p>
-            <a:pPr algn="l">
-              <a:lnSpc>
-                <a:spcPct val="135000"/>
-              </a:lnSpc>
-            </a:pPr>
-            <a:r>
-              <a:rPr sz="1250" b="1">
-                <a:solidFill>
-                  <a:srgbClr val="D64545"/>
-                </a:solidFill>
-                <a:latin typeface="맑은 고딕"/>
-              </a:rPr>
-              <a:t>4단계 · 1년</a:t>
-            </a:r>
-          </a:p>
-        </p:txBody>
-      </p:sp>
-      <p:sp>
-        <p:nvSpPr>
-          <p:cNvPr id="29" name="TextBox 28"/>
-          <p:cNvSpPr txBox="1"/>
-          <p:nvPr/>
-        </p:nvSpPr>
-        <p:spPr>
-          <a:xfrm>
-            <a:off x="6729983" y="4992624"/>
-            <a:ext cx="4754880" cy="365760"/>
-          </a:xfrm>
-          <a:prstGeom prst="rect">
-            <a:avLst/>
-          </a:prstGeom>
-          <a:noFill/>
-        </p:spPr>
-        <p:txBody>
-          <a:bodyPr wrap="square" lIns="0" rIns="0" tIns="0" bIns="0">
-            <a:spAutoFit/>
-          </a:bodyPr>
-          <a:lstStyle/>
-          <a:p>
-            <a:pPr algn="l">
-              <a:lnSpc>
-                <a:spcPct val="140000"/>
-              </a:lnSpc>
-            </a:pPr>
-            <a:r>
-              <a:rPr sz="1100" b="0">
-                <a:solidFill>
-                  <a:srgbClr val="5D6874"/>
-                </a:solidFill>
-                <a:latin typeface="맑은 고딕"/>
-              </a:rPr>
-              <a:t>천안시 행정포털 대시보드 내재화, 연 1회 자동 갱신 체계 정착</a:t>
-            </a:r>
-          </a:p>
-        </p:txBody>
-      </p:sp>
-      <p:sp>
-        <p:nvSpPr>
-          <p:cNvPr id="30" name="Rounded Rectangle 29"/>
-          <p:cNvSpPr/>
-          <p:nvPr/>
-        </p:nvSpPr>
-        <p:spPr>
-          <a:xfrm>
-            <a:off x="658368" y="5504688"/>
-            <a:ext cx="10874959" cy="822960"/>
-          </a:xfrm>
-          <a:prstGeom prst="roundRect">
-            <a:avLst>
-              <a:gd name="adj" fmla="val 6000"/>
-            </a:avLst>
-          </a:prstGeom>
-          <a:solidFill>
-            <a:srgbClr val="F5F7FA"/>
-          </a:solidFill>
-          <a:ln>
-            <a:noFill/>
-          </a:ln>
-          <a:effectLst/>
-        </p:spPr>
-        <p:style>
-          <a:lnRef idx="1">
-            <a:schemeClr val="accent1"/>
-          </a:lnRef>
-          <a:fillRef idx="3">
-            <a:schemeClr val="accent1"/>
-          </a:fillRef>
-          <a:effectRef idx="2">
-            <a:schemeClr val="accent1"/>
-          </a:effectRef>
-          <a:fontRef idx="minor">
-            <a:schemeClr val="lt1"/>
-          </a:fontRef>
-        </p:style>
-        <p:txBody>
-          <a:bodyPr rtlCol="0" anchor="ctr"/>
-          <a:lstStyle/>
-          <a:p/>
-        </p:txBody>
-      </p:sp>
-      <p:sp>
-        <p:nvSpPr>
-          <p:cNvPr id="31" name="TextBox 30"/>
-          <p:cNvSpPr txBox="1"/>
-          <p:nvPr/>
-        </p:nvSpPr>
-        <p:spPr>
-          <a:xfrm>
-            <a:off x="932688" y="5687568"/>
+          <p:cNvPr id="26" name="TextBox 25"/>
+          <p:cNvSpPr txBox="1"/>
+          <p:nvPr/>
+        </p:nvSpPr>
+        <p:spPr>
+          <a:xfrm>
+            <a:off x="932688" y="5705856"/>
             <a:ext cx="10515600" cy="502920"/>
           </a:xfrm>
           <a:prstGeom prst="rect">
@@ -11767,7 +11509,7 @@
                 </a:solidFill>
                 <a:latin typeface="맑은 고딕"/>
               </a:rPr>
-              <a:t>확장 가능성 — 공간단위 정의(config.py)만 바꾸면 아산·청주 등 다른 도시에 그대로 적용된다.</a:t>
+              <a:t>쓰시는 방법 — 연 1회 공공데이터를 새로 받아 스크립트를 실행하시면 모든 자료가 다시 만들어집니다.</a:t>
             </a:r>
           </a:p>
           <a:p>
@@ -11786,14 +11528,14 @@
                 </a:solidFill>
                 <a:latin typeface="맑은 고딕"/>
               </a:rPr>
-              <a:t>'구도심 공동화'는 천안만의 문제가 아니므로, 검증되면 충남 시군 공통 진단도구로 확장할 수 있다.</a:t>
-            </a:r>
-          </a:p>
-        </p:txBody>
-      </p:sp>
-      <p:sp>
-        <p:nvSpPr>
-          <p:cNvPr id="32" name="TextBox 31"/>
+              <a:t>별도 시스템이나 데이터 구매 없이, 담당자 한 분이 반나절이면 그 해 자료를 준비하실 수 있습니다.</a:t>
+            </a:r>
+          </a:p>
+        </p:txBody>
+      </p:sp>
+      <p:sp>
+        <p:nvSpPr>
+          <p:cNvPr id="27" name="TextBox 26"/>
           <p:cNvSpPr txBox="1"/>
           <p:nvPr/>
         </p:nvSpPr>
@@ -11832,7 +11574,7 @@
       </p:sp>
       <p:sp>
         <p:nvSpPr>
-          <p:cNvPr id="33" name="TextBox 32"/>
+          <p:cNvPr id="28" name="TextBox 27"/>
           <p:cNvSpPr txBox="1"/>
           <p:nvPr/>
         </p:nvSpPr>
@@ -11921,7 +11663,7 @@
                 </a:solidFill>
                 <a:latin typeface="맑은 고딕"/>
               </a:rPr>
-              <a:t>LIMITATION</a:t>
+              <a:t>IMPACT</a:t>
             </a:r>
           </a:p>
         </p:txBody>
@@ -11960,7 +11702,7 @@
                 </a:solidFill>
                 <a:latin typeface="맑은 고딕"/>
               </a:rPr>
-              <a:t>알고 있는 한계와 보완 계획</a:t>
+              <a:t>기대효과와 실행 로드맵</a:t>
             </a:r>
           </a:p>
         </p:txBody>
@@ -11973,60 +11715,56 @@
         </p:nvSpPr>
         <p:spPr>
           <a:xfrm>
-            <a:off x="658368" y="1517904"/>
-            <a:ext cx="10874959" cy="411480"/>
-          </a:xfrm>
-          <a:prstGeom prst="rect">
-            <a:avLst/>
-          </a:prstGeom>
-          <a:noFill/>
-        </p:spPr>
-        <p:txBody>
-          <a:bodyPr wrap="square" lIns="0" rIns="0" tIns="0" bIns="0">
-            <a:spAutoFit/>
-          </a:bodyPr>
-          <a:lstStyle/>
-          <a:p>
-            <a:pPr algn="l">
-              <a:lnSpc>
-                <a:spcPct val="145000"/>
-              </a:lnSpc>
-            </a:pPr>
-            <a:r>
-              <a:rPr sz="1350" b="0">
-                <a:solidFill>
-                  <a:srgbClr val="5D6874"/>
-                </a:solidFill>
-                <a:latin typeface="맑은 고딕"/>
-              </a:rPr>
-              <a:t>모델의 한계를 감추면 정책 도구로 쓸 수 없다. 무엇을 아직 못 하는지 먼저 밝힌다.</a:t>
-            </a:r>
-          </a:p>
-        </p:txBody>
-      </p:sp>
-      <p:sp>
-        <p:nvSpPr>
-          <p:cNvPr id="5" name="Rounded Rectangle 4"/>
+            <a:off x="658368" y="2084831"/>
+            <a:ext cx="5486400" cy="274320"/>
+          </a:xfrm>
+          <a:prstGeom prst="rect">
+            <a:avLst/>
+          </a:prstGeom>
+          <a:noFill/>
+        </p:spPr>
+        <p:txBody>
+          <a:bodyPr wrap="square" lIns="0" rIns="0" tIns="0" bIns="0">
+            <a:spAutoFit/>
+          </a:bodyPr>
+          <a:lstStyle/>
+          <a:p>
+            <a:pPr algn="l">
+              <a:lnSpc>
+                <a:spcPct val="135000"/>
+              </a:lnSpc>
+            </a:pPr>
+            <a:r>
+              <a:rPr sz="1450" b="1">
+                <a:solidFill>
+                  <a:srgbClr val="151C26"/>
+                </a:solidFill>
+                <a:latin typeface="맑은 고딕"/>
+              </a:rPr>
+              <a:t>기대효과</a:t>
+            </a:r>
+          </a:p>
+        </p:txBody>
+      </p:sp>
+      <p:sp>
+        <p:nvSpPr>
+          <p:cNvPr id="5" name="Rectangle 4"/>
           <p:cNvSpPr/>
           <p:nvPr/>
         </p:nvSpPr>
         <p:spPr>
           <a:xfrm>
-            <a:off x="658368" y="2286000"/>
-            <a:ext cx="10874959" cy="896112"/>
-          </a:xfrm>
-          <a:prstGeom prst="roundRect">
-            <a:avLst>
-              <a:gd name="adj" fmla="val 6000"/>
-            </a:avLst>
+            <a:off x="658368" y="2468880"/>
+            <a:ext cx="68580" cy="566928"/>
+          </a:xfrm>
+          <a:prstGeom prst="rect">
+            <a:avLst/>
           </a:prstGeom>
           <a:solidFill>
-            <a:srgbClr val="FFFFFF"/>
+            <a:srgbClr val="D64545"/>
           </a:solidFill>
-          <a:ln w="12700">
-            <a:solidFill>
-              <a:srgbClr val="E0E5EB"/>
-            </a:solidFill>
+          <a:ln>
+            <a:noFill/>
           </a:ln>
           <a:effectLst/>
         </p:spPr>
@@ -12052,14 +11790,731 @@
       </p:sp>
       <p:sp>
         <p:nvSpPr>
-          <p:cNvPr id="6" name="Rectangle 5"/>
+          <p:cNvPr id="6" name="TextBox 5"/>
+          <p:cNvSpPr txBox="1"/>
+          <p:nvPr/>
+        </p:nvSpPr>
+        <p:spPr>
+          <a:xfrm>
+            <a:off x="877824" y="2468880"/>
+            <a:ext cx="5120640" cy="256032"/>
+          </a:xfrm>
+          <a:prstGeom prst="rect">
+            <a:avLst/>
+          </a:prstGeom>
+          <a:noFill/>
+        </p:spPr>
+        <p:txBody>
+          <a:bodyPr wrap="square" lIns="0" rIns="0" tIns="0" bIns="0">
+            <a:spAutoFit/>
+          </a:bodyPr>
+          <a:lstStyle/>
+          <a:p>
+            <a:pPr algn="l">
+              <a:lnSpc>
+                <a:spcPct val="135000"/>
+              </a:lnSpc>
+            </a:pPr>
+            <a:r>
+              <a:rPr sz="1250" b="1">
+                <a:solidFill>
+                  <a:srgbClr val="151C26"/>
+                </a:solidFill>
+                <a:latin typeface="맑은 고딕"/>
+              </a:rPr>
+              <a:t>시민께 닿는 범위</a:t>
+            </a:r>
+          </a:p>
+        </p:txBody>
+      </p:sp>
+      <p:sp>
+        <p:nvSpPr>
+          <p:cNvPr id="7" name="TextBox 6"/>
+          <p:cNvSpPr txBox="1"/>
+          <p:nvPr/>
+        </p:nvSpPr>
+        <p:spPr>
+          <a:xfrm>
+            <a:off x="877824" y="2743200"/>
+            <a:ext cx="5120640" cy="365760"/>
+          </a:xfrm>
+          <a:prstGeom prst="rect">
+            <a:avLst/>
+          </a:prstGeom>
+          <a:noFill/>
+        </p:spPr>
+        <p:txBody>
+          <a:bodyPr wrap="square" lIns="0" rIns="0" tIns="0" bIns="0">
+            <a:spAutoFit/>
+          </a:bodyPr>
+          <a:lstStyle/>
+          <a:p>
+            <a:pPr algn="l">
+              <a:lnSpc>
+                <a:spcPct val="140000"/>
+              </a:lnSpc>
+            </a:pPr>
+            <a:r>
+              <a:rPr sz="1100" b="0">
+                <a:solidFill>
+                  <a:srgbClr val="5D6874"/>
+                </a:solidFill>
+                <a:latin typeface="맑은 고딕"/>
+              </a:rPr>
+              <a:t>효과가 큰 곳부터 살펴보면, 같은 예산으로도 더 많은 분께 닿을 수 있습니다</a:t>
+            </a:r>
+          </a:p>
+        </p:txBody>
+      </p:sp>
+      <p:sp>
+        <p:nvSpPr>
+          <p:cNvPr id="8" name="Rectangle 7"/>
           <p:cNvSpPr/>
           <p:nvPr/>
         </p:nvSpPr>
         <p:spPr>
           <a:xfrm>
-            <a:off x="658368" y="2286000"/>
-            <a:ext cx="68580" cy="896112"/>
+            <a:off x="658368" y="3218688"/>
+            <a:ext cx="68580" cy="566928"/>
+          </a:xfrm>
+          <a:prstGeom prst="rect">
+            <a:avLst/>
+          </a:prstGeom>
+          <a:solidFill>
+            <a:srgbClr val="D64545"/>
+          </a:solidFill>
+          <a:ln>
+            <a:noFill/>
+          </a:ln>
+          <a:effectLst/>
+        </p:spPr>
+        <p:style>
+          <a:lnRef idx="1">
+            <a:schemeClr val="accent1"/>
+          </a:lnRef>
+          <a:fillRef idx="3">
+            <a:schemeClr val="accent1"/>
+          </a:fillRef>
+          <a:effectRef idx="2">
+            <a:schemeClr val="accent1"/>
+          </a:effectRef>
+          <a:fontRef idx="minor">
+            <a:schemeClr val="lt1"/>
+          </a:fontRef>
+        </p:style>
+        <p:txBody>
+          <a:bodyPr rtlCol="0" anchor="ctr"/>
+          <a:lstStyle/>
+          <a:p/>
+        </p:txBody>
+      </p:sp>
+      <p:sp>
+        <p:nvSpPr>
+          <p:cNvPr id="9" name="TextBox 8"/>
+          <p:cNvSpPr txBox="1"/>
+          <p:nvPr/>
+        </p:nvSpPr>
+        <p:spPr>
+          <a:xfrm>
+            <a:off x="877824" y="3218688"/>
+            <a:ext cx="5120640" cy="256032"/>
+          </a:xfrm>
+          <a:prstGeom prst="rect">
+            <a:avLst/>
+          </a:prstGeom>
+          <a:noFill/>
+        </p:spPr>
+        <p:txBody>
+          <a:bodyPr wrap="square" lIns="0" rIns="0" tIns="0" bIns="0">
+            <a:spAutoFit/>
+          </a:bodyPr>
+          <a:lstStyle/>
+          <a:p>
+            <a:pPr algn="l">
+              <a:lnSpc>
+                <a:spcPct val="135000"/>
+              </a:lnSpc>
+            </a:pPr>
+            <a:r>
+              <a:rPr sz="1250" b="1">
+                <a:solidFill>
+                  <a:srgbClr val="151C26"/>
+                </a:solidFill>
+                <a:latin typeface="맑은 고딕"/>
+              </a:rPr>
+              <a:t>살펴보는 시점</a:t>
+            </a:r>
+          </a:p>
+        </p:txBody>
+      </p:sp>
+      <p:sp>
+        <p:nvSpPr>
+          <p:cNvPr id="10" name="TextBox 9"/>
+          <p:cNvSpPr txBox="1"/>
+          <p:nvPr/>
+        </p:nvSpPr>
+        <p:spPr>
+          <a:xfrm>
+            <a:off x="877824" y="3493008"/>
+            <a:ext cx="5120640" cy="365760"/>
+          </a:xfrm>
+          <a:prstGeom prst="rect">
+            <a:avLst/>
+          </a:prstGeom>
+          <a:noFill/>
+        </p:spPr>
+        <p:txBody>
+          <a:bodyPr wrap="square" lIns="0" rIns="0" tIns="0" bIns="0">
+            <a:spAutoFit/>
+          </a:bodyPr>
+          <a:lstStyle/>
+          <a:p>
+            <a:pPr algn="l">
+              <a:lnSpc>
+                <a:spcPct val="140000"/>
+              </a:lnSpc>
+            </a:pPr>
+            <a:r>
+              <a:rPr sz="1100" b="0">
+                <a:solidFill>
+                  <a:srgbClr val="5D6874"/>
+                </a:solidFill>
+                <a:latin typeface="맑은 고딕"/>
+              </a:rPr>
+              <a:t>어려워진 뒤가 아니라, 3년 앞을 미리 짚어볼 수 있습니다</a:t>
+            </a:r>
+          </a:p>
+        </p:txBody>
+      </p:sp>
+      <p:sp>
+        <p:nvSpPr>
+          <p:cNvPr id="11" name="Rectangle 10"/>
+          <p:cNvSpPr/>
+          <p:nvPr/>
+        </p:nvSpPr>
+        <p:spPr>
+          <a:xfrm>
+            <a:off x="658368" y="3968496"/>
+            <a:ext cx="68580" cy="566928"/>
+          </a:xfrm>
+          <a:prstGeom prst="rect">
+            <a:avLst/>
+          </a:prstGeom>
+          <a:solidFill>
+            <a:srgbClr val="D64545"/>
+          </a:solidFill>
+          <a:ln>
+            <a:noFill/>
+          </a:ln>
+          <a:effectLst/>
+        </p:spPr>
+        <p:style>
+          <a:lnRef idx="1">
+            <a:schemeClr val="accent1"/>
+          </a:lnRef>
+          <a:fillRef idx="3">
+            <a:schemeClr val="accent1"/>
+          </a:fillRef>
+          <a:effectRef idx="2">
+            <a:schemeClr val="accent1"/>
+          </a:effectRef>
+          <a:fontRef idx="minor">
+            <a:schemeClr val="lt1"/>
+          </a:fontRef>
+        </p:style>
+        <p:txBody>
+          <a:bodyPr rtlCol="0" anchor="ctr"/>
+          <a:lstStyle/>
+          <a:p/>
+        </p:txBody>
+      </p:sp>
+      <p:sp>
+        <p:nvSpPr>
+          <p:cNvPr id="12" name="TextBox 11"/>
+          <p:cNvSpPr txBox="1"/>
+          <p:nvPr/>
+        </p:nvSpPr>
+        <p:spPr>
+          <a:xfrm>
+            <a:off x="877824" y="3968496"/>
+            <a:ext cx="5120640" cy="256032"/>
+          </a:xfrm>
+          <a:prstGeom prst="rect">
+            <a:avLst/>
+          </a:prstGeom>
+          <a:noFill/>
+        </p:spPr>
+        <p:txBody>
+          <a:bodyPr wrap="square" lIns="0" rIns="0" tIns="0" bIns="0">
+            <a:spAutoFit/>
+          </a:bodyPr>
+          <a:lstStyle/>
+          <a:p>
+            <a:pPr algn="l">
+              <a:lnSpc>
+                <a:spcPct val="135000"/>
+              </a:lnSpc>
+            </a:pPr>
+            <a:r>
+              <a:rPr sz="1250" b="1">
+                <a:solidFill>
+                  <a:srgbClr val="151C26"/>
+                </a:solidFill>
+                <a:latin typeface="맑은 고딕"/>
+              </a:rPr>
+              <a:t>설명하실 때</a:t>
+            </a:r>
+          </a:p>
+        </p:txBody>
+      </p:sp>
+      <p:sp>
+        <p:nvSpPr>
+          <p:cNvPr id="13" name="TextBox 12"/>
+          <p:cNvSpPr txBox="1"/>
+          <p:nvPr/>
+        </p:nvSpPr>
+        <p:spPr>
+          <a:xfrm>
+            <a:off x="877824" y="4242816"/>
+            <a:ext cx="5120640" cy="365760"/>
+          </a:xfrm>
+          <a:prstGeom prst="rect">
+            <a:avLst/>
+          </a:prstGeom>
+          <a:noFill/>
+        </p:spPr>
+        <p:txBody>
+          <a:bodyPr wrap="square" lIns="0" rIns="0" tIns="0" bIns="0">
+            <a:spAutoFit/>
+          </a:bodyPr>
+          <a:lstStyle/>
+          <a:p>
+            <a:pPr algn="l">
+              <a:lnSpc>
+                <a:spcPct val="140000"/>
+              </a:lnSpc>
+            </a:pPr>
+            <a:r>
+              <a:rPr sz="1100" b="0">
+                <a:solidFill>
+                  <a:srgbClr val="5D6874"/>
+                </a:solidFill>
+                <a:latin typeface="맑은 고딕"/>
+              </a:rPr>
+              <a:t>판단 근거를 항목별 수치로 정리해 드려 설명 부담을 조금 덜어드립니다</a:t>
+            </a:r>
+          </a:p>
+        </p:txBody>
+      </p:sp>
+      <p:sp>
+        <p:nvSpPr>
+          <p:cNvPr id="14" name="Rectangle 13"/>
+          <p:cNvSpPr/>
+          <p:nvPr/>
+        </p:nvSpPr>
+        <p:spPr>
+          <a:xfrm>
+            <a:off x="658368" y="4718304"/>
+            <a:ext cx="68580" cy="566928"/>
+          </a:xfrm>
+          <a:prstGeom prst="rect">
+            <a:avLst/>
+          </a:prstGeom>
+          <a:solidFill>
+            <a:srgbClr val="D64545"/>
+          </a:solidFill>
+          <a:ln>
+            <a:noFill/>
+          </a:ln>
+          <a:effectLst/>
+        </p:spPr>
+        <p:style>
+          <a:lnRef idx="1">
+            <a:schemeClr val="accent1"/>
+          </a:lnRef>
+          <a:fillRef idx="3">
+            <a:schemeClr val="accent1"/>
+          </a:fillRef>
+          <a:effectRef idx="2">
+            <a:schemeClr val="accent1"/>
+          </a:effectRef>
+          <a:fontRef idx="minor">
+            <a:schemeClr val="lt1"/>
+          </a:fontRef>
+        </p:style>
+        <p:txBody>
+          <a:bodyPr rtlCol="0" anchor="ctr"/>
+          <a:lstStyle/>
+          <a:p/>
+        </p:txBody>
+      </p:sp>
+      <p:sp>
+        <p:nvSpPr>
+          <p:cNvPr id="15" name="TextBox 14"/>
+          <p:cNvSpPr txBox="1"/>
+          <p:nvPr/>
+        </p:nvSpPr>
+        <p:spPr>
+          <a:xfrm>
+            <a:off x="877824" y="4718304"/>
+            <a:ext cx="5120640" cy="256032"/>
+          </a:xfrm>
+          <a:prstGeom prst="rect">
+            <a:avLst/>
+          </a:prstGeom>
+          <a:noFill/>
+        </p:spPr>
+        <p:txBody>
+          <a:bodyPr wrap="square" lIns="0" rIns="0" tIns="0" bIns="0">
+            <a:spAutoFit/>
+          </a:bodyPr>
+          <a:lstStyle/>
+          <a:p>
+            <a:pPr algn="l">
+              <a:lnSpc>
+                <a:spcPct val="135000"/>
+              </a:lnSpc>
+            </a:pPr>
+            <a:r>
+              <a:rPr sz="1250" b="1">
+                <a:solidFill>
+                  <a:srgbClr val="151C26"/>
+                </a:solidFill>
+                <a:latin typeface="맑은 고딕"/>
+              </a:rPr>
+              <a:t>드는 비용</a:t>
+            </a:r>
+          </a:p>
+        </p:txBody>
+      </p:sp>
+      <p:sp>
+        <p:nvSpPr>
+          <p:cNvPr id="16" name="TextBox 15"/>
+          <p:cNvSpPr txBox="1"/>
+          <p:nvPr/>
+        </p:nvSpPr>
+        <p:spPr>
+          <a:xfrm>
+            <a:off x="877824" y="4992624"/>
+            <a:ext cx="5120640" cy="365760"/>
+          </a:xfrm>
+          <a:prstGeom prst="rect">
+            <a:avLst/>
+          </a:prstGeom>
+          <a:noFill/>
+        </p:spPr>
+        <p:txBody>
+          <a:bodyPr wrap="square" lIns="0" rIns="0" tIns="0" bIns="0">
+            <a:spAutoFit/>
+          </a:bodyPr>
+          <a:lstStyle/>
+          <a:p>
+            <a:pPr algn="l">
+              <a:lnSpc>
+                <a:spcPct val="140000"/>
+              </a:lnSpc>
+            </a:pPr>
+            <a:r>
+              <a:rPr sz="1100" b="0">
+                <a:solidFill>
+                  <a:srgbClr val="5D6874"/>
+                </a:solidFill>
+                <a:latin typeface="맑은 고딕"/>
+              </a:rPr>
+              <a:t>데이터 구매나 시스템 없이, 스크립트 재실행만으로 매년 갱신됩니다</a:t>
+            </a:r>
+          </a:p>
+        </p:txBody>
+      </p:sp>
+      <p:sp>
+        <p:nvSpPr>
+          <p:cNvPr id="17" name="TextBox 16"/>
+          <p:cNvSpPr txBox="1"/>
+          <p:nvPr/>
+        </p:nvSpPr>
+        <p:spPr>
+          <a:xfrm>
+            <a:off x="6510528" y="2084831"/>
+            <a:ext cx="5029200" cy="274320"/>
+          </a:xfrm>
+          <a:prstGeom prst="rect">
+            <a:avLst/>
+          </a:prstGeom>
+          <a:noFill/>
+        </p:spPr>
+        <p:txBody>
+          <a:bodyPr wrap="square" lIns="0" rIns="0" tIns="0" bIns="0">
+            <a:spAutoFit/>
+          </a:bodyPr>
+          <a:lstStyle/>
+          <a:p>
+            <a:pPr algn="l">
+              <a:lnSpc>
+                <a:spcPct val="135000"/>
+              </a:lnSpc>
+            </a:pPr>
+            <a:r>
+              <a:rPr sz="1450" b="1">
+                <a:solidFill>
+                  <a:srgbClr val="151C26"/>
+                </a:solidFill>
+                <a:latin typeface="맑은 고딕"/>
+              </a:rPr>
+              <a:t>실행 로드맵</a:t>
+            </a:r>
+          </a:p>
+        </p:txBody>
+      </p:sp>
+      <p:sp>
+        <p:nvSpPr>
+          <p:cNvPr id="18" name="Rectangle 17"/>
+          <p:cNvSpPr/>
+          <p:nvPr/>
+        </p:nvSpPr>
+        <p:spPr>
+          <a:xfrm>
+            <a:off x="6510528" y="2468880"/>
+            <a:ext cx="68580" cy="566928"/>
+          </a:xfrm>
+          <a:prstGeom prst="rect">
+            <a:avLst/>
+          </a:prstGeom>
+          <a:solidFill>
+            <a:srgbClr val="3E9B7C"/>
+          </a:solidFill>
+          <a:ln>
+            <a:noFill/>
+          </a:ln>
+          <a:effectLst/>
+        </p:spPr>
+        <p:style>
+          <a:lnRef idx="1">
+            <a:schemeClr val="accent1"/>
+          </a:lnRef>
+          <a:fillRef idx="3">
+            <a:schemeClr val="accent1"/>
+          </a:fillRef>
+          <a:effectRef idx="2">
+            <a:schemeClr val="accent1"/>
+          </a:effectRef>
+          <a:fontRef idx="minor">
+            <a:schemeClr val="lt1"/>
+          </a:fontRef>
+        </p:style>
+        <p:txBody>
+          <a:bodyPr rtlCol="0" anchor="ctr"/>
+          <a:lstStyle/>
+          <a:p/>
+        </p:txBody>
+      </p:sp>
+      <p:sp>
+        <p:nvSpPr>
+          <p:cNvPr id="19" name="TextBox 18"/>
+          <p:cNvSpPr txBox="1"/>
+          <p:nvPr/>
+        </p:nvSpPr>
+        <p:spPr>
+          <a:xfrm>
+            <a:off x="6729983" y="2468880"/>
+            <a:ext cx="4754880" cy="256032"/>
+          </a:xfrm>
+          <a:prstGeom prst="rect">
+            <a:avLst/>
+          </a:prstGeom>
+          <a:noFill/>
+        </p:spPr>
+        <p:txBody>
+          <a:bodyPr wrap="square" lIns="0" rIns="0" tIns="0" bIns="0">
+            <a:spAutoFit/>
+          </a:bodyPr>
+          <a:lstStyle/>
+          <a:p>
+            <a:pPr algn="l">
+              <a:lnSpc>
+                <a:spcPct val="135000"/>
+              </a:lnSpc>
+            </a:pPr>
+            <a:r>
+              <a:rPr sz="1250" b="1">
+                <a:solidFill>
+                  <a:srgbClr val="3E9B7C"/>
+                </a:solidFill>
+                <a:latin typeface="맑은 고딕"/>
+              </a:rPr>
+              <a:t>1단계 · 즉시</a:t>
+            </a:r>
+          </a:p>
+        </p:txBody>
+      </p:sp>
+      <p:sp>
+        <p:nvSpPr>
+          <p:cNvPr id="20" name="TextBox 19"/>
+          <p:cNvSpPr txBox="1"/>
+          <p:nvPr/>
+        </p:nvSpPr>
+        <p:spPr>
+          <a:xfrm>
+            <a:off x="6729983" y="2743200"/>
+            <a:ext cx="4754880" cy="365760"/>
+          </a:xfrm>
+          <a:prstGeom prst="rect">
+            <a:avLst/>
+          </a:prstGeom>
+          <a:noFill/>
+        </p:spPr>
+        <p:txBody>
+          <a:bodyPr wrap="square" lIns="0" rIns="0" tIns="0" bIns="0">
+            <a:spAutoFit/>
+          </a:bodyPr>
+          <a:lstStyle/>
+          <a:p>
+            <a:pPr algn="l">
+              <a:lnSpc>
+                <a:spcPct val="140000"/>
+              </a:lnSpc>
+            </a:pPr>
+            <a:r>
+              <a:rPr sz="1100" b="0">
+                <a:solidFill>
+                  <a:srgbClr val="5D6874"/>
+                </a:solidFill>
+                <a:latin typeface="맑은 고딕"/>
+              </a:rPr>
+              <a:t>본 스크립트로 천안시 25개 생활권 기준선 진단 확정</a:t>
+            </a:r>
+          </a:p>
+        </p:txBody>
+      </p:sp>
+      <p:sp>
+        <p:nvSpPr>
+          <p:cNvPr id="21" name="Rectangle 20"/>
+          <p:cNvSpPr/>
+          <p:nvPr/>
+        </p:nvSpPr>
+        <p:spPr>
+          <a:xfrm>
+            <a:off x="6510528" y="3218688"/>
+            <a:ext cx="68580" cy="566928"/>
+          </a:xfrm>
+          <a:prstGeom prst="rect">
+            <a:avLst/>
+          </a:prstGeom>
+          <a:solidFill>
+            <a:srgbClr val="2E7DD1"/>
+          </a:solidFill>
+          <a:ln>
+            <a:noFill/>
+          </a:ln>
+          <a:effectLst/>
+        </p:spPr>
+        <p:style>
+          <a:lnRef idx="1">
+            <a:schemeClr val="accent1"/>
+          </a:lnRef>
+          <a:fillRef idx="3">
+            <a:schemeClr val="accent1"/>
+          </a:fillRef>
+          <a:effectRef idx="2">
+            <a:schemeClr val="accent1"/>
+          </a:effectRef>
+          <a:fontRef idx="minor">
+            <a:schemeClr val="lt1"/>
+          </a:fontRef>
+        </p:style>
+        <p:txBody>
+          <a:bodyPr rtlCol="0" anchor="ctr"/>
+          <a:lstStyle/>
+          <a:p/>
+        </p:txBody>
+      </p:sp>
+      <p:sp>
+        <p:nvSpPr>
+          <p:cNvPr id="22" name="TextBox 21"/>
+          <p:cNvSpPr txBox="1"/>
+          <p:nvPr/>
+        </p:nvSpPr>
+        <p:spPr>
+          <a:xfrm>
+            <a:off x="6729983" y="3218688"/>
+            <a:ext cx="4754880" cy="256032"/>
+          </a:xfrm>
+          <a:prstGeom prst="rect">
+            <a:avLst/>
+          </a:prstGeom>
+          <a:noFill/>
+        </p:spPr>
+        <p:txBody>
+          <a:bodyPr wrap="square" lIns="0" rIns="0" tIns="0" bIns="0">
+            <a:spAutoFit/>
+          </a:bodyPr>
+          <a:lstStyle/>
+          <a:p>
+            <a:pPr algn="l">
+              <a:lnSpc>
+                <a:spcPct val="135000"/>
+              </a:lnSpc>
+            </a:pPr>
+            <a:r>
+              <a:rPr sz="1250" b="1">
+                <a:solidFill>
+                  <a:srgbClr val="2E7DD1"/>
+                </a:solidFill>
+                <a:latin typeface="맑은 고딕"/>
+              </a:rPr>
+              <a:t>2단계 · 3개월</a:t>
+            </a:r>
+          </a:p>
+        </p:txBody>
+      </p:sp>
+      <p:sp>
+        <p:nvSpPr>
+          <p:cNvPr id="23" name="TextBox 22"/>
+          <p:cNvSpPr txBox="1"/>
+          <p:nvPr/>
+        </p:nvSpPr>
+        <p:spPr>
+          <a:xfrm>
+            <a:off x="6729983" y="3493008"/>
+            <a:ext cx="4754880" cy="365760"/>
+          </a:xfrm>
+          <a:prstGeom prst="rect">
+            <a:avLst/>
+          </a:prstGeom>
+          <a:noFill/>
+        </p:spPr>
+        <p:txBody>
+          <a:bodyPr wrap="square" lIns="0" rIns="0" tIns="0" bIns="0">
+            <a:spAutoFit/>
+          </a:bodyPr>
+          <a:lstStyle/>
+          <a:p>
+            <a:pPr algn="l">
+              <a:lnSpc>
+                <a:spcPct val="140000"/>
+              </a:lnSpc>
+            </a:pPr>
+            <a:r>
+              <a:rPr sz="1100" b="0">
+                <a:solidFill>
+                  <a:srgbClr val="5D6874"/>
+                </a:solidFill>
+                <a:latin typeface="맑은 고딕"/>
+              </a:rPr>
+              <a:t>천안시 내부 행정데이터(인허가 원장·건축물대장·복지수급) 연계로 지표 정밀화</a:t>
+            </a:r>
+          </a:p>
+        </p:txBody>
+      </p:sp>
+      <p:sp>
+        <p:nvSpPr>
+          <p:cNvPr id="24" name="Rectangle 23"/>
+          <p:cNvSpPr/>
+          <p:nvPr/>
+        </p:nvSpPr>
+        <p:spPr>
+          <a:xfrm>
+            <a:off x="6510528" y="3968496"/>
+            <a:ext cx="68580" cy="566928"/>
           </a:xfrm>
           <a:prstGeom prst="rect">
             <a:avLst/>
@@ -12094,14 +12549,14 @@
       </p:sp>
       <p:sp>
         <p:nvSpPr>
-          <p:cNvPr id="7" name="TextBox 6"/>
-          <p:cNvSpPr txBox="1"/>
-          <p:nvPr/>
-        </p:nvSpPr>
-        <p:spPr>
-          <a:xfrm>
-            <a:off x="932688" y="2414016"/>
-            <a:ext cx="2103120" cy="256032"/>
+          <p:cNvPr id="25" name="TextBox 24"/>
+          <p:cNvSpPr txBox="1"/>
+          <p:nvPr/>
+        </p:nvSpPr>
+        <p:spPr>
+          <a:xfrm>
+            <a:off x="6729983" y="3968496"/>
+            <a:ext cx="4754880" cy="256032"/>
           </a:xfrm>
           <a:prstGeom prst="rect">
             <a:avLst/>
@@ -12126,60 +12581,21 @@
                 </a:solidFill>
                 <a:latin typeface="맑은 고딕"/>
               </a:rPr>
-              <a:t>표본 크기</a:t>
-            </a:r>
-          </a:p>
-        </p:txBody>
-      </p:sp>
-      <p:sp>
-        <p:nvSpPr>
-          <p:cNvPr id="8" name="TextBox 7"/>
-          <p:cNvSpPr txBox="1"/>
-          <p:nvPr/>
-        </p:nvSpPr>
-        <p:spPr>
-          <a:xfrm>
-            <a:off x="3172968" y="2414016"/>
-            <a:ext cx="8046720" cy="256032"/>
-          </a:xfrm>
-          <a:prstGeom prst="rect">
-            <a:avLst/>
-          </a:prstGeom>
-          <a:noFill/>
-        </p:spPr>
-        <p:txBody>
-          <a:bodyPr wrap="square" lIns="0" rIns="0" tIns="0" bIns="0">
-            <a:spAutoFit/>
-          </a:bodyPr>
-          <a:lstStyle/>
-          <a:p>
-            <a:pPr algn="l">
-              <a:lnSpc>
-                <a:spcPct val="135000"/>
-              </a:lnSpc>
-            </a:pPr>
-            <a:r>
-              <a:rPr sz="1200" b="1">
-                <a:solidFill>
-                  <a:srgbClr val="151C26"/>
-                </a:solidFill>
-                <a:latin typeface="맑은 고딕"/>
-              </a:rPr>
-              <a:t>분석 단위가 25개 생활권이라 머신러닝 표본으로는 작다.</a:t>
-            </a:r>
-          </a:p>
-        </p:txBody>
-      </p:sp>
-      <p:sp>
-        <p:nvSpPr>
-          <p:cNvPr id="9" name="TextBox 8"/>
-          <p:cNvSpPr txBox="1"/>
-          <p:nvPr/>
-        </p:nvSpPr>
-        <p:spPr>
-          <a:xfrm>
-            <a:off x="3172968" y="2706624"/>
-            <a:ext cx="8046720" cy="384048"/>
+              <a:t>3단계 · 6개월</a:t>
+            </a:r>
+          </a:p>
+        </p:txBody>
+      </p:sp>
+      <p:sp>
+        <p:nvSpPr>
+          <p:cNvPr id="26" name="TextBox 25"/>
+          <p:cNvSpPr txBox="1"/>
+          <p:nvPr/>
+        </p:nvSpPr>
+        <p:spPr>
+          <a:xfrm>
+            <a:off x="6729983" y="4242816"/>
+            <a:ext cx="4754880" cy="365760"/>
           </a:xfrm>
           <a:prstGeom prst="rect">
             <a:avLst/>
@@ -12198,40 +12614,36 @@
               </a:lnSpc>
             </a:pPr>
             <a:r>
-              <a:rPr sz="1080" b="0">
+              <a:rPr sz="1100" b="0">
                 <a:solidFill>
                   <a:srgbClr val="5D6874"/>
                 </a:solidFill>
                 <a:latin typeface="맑은 고딕"/>
               </a:rPr>
-              <a:t>→ 500m 격자 단위로 내리면 표본이 수천 개로 늘어난다. 현재는 규제를 강하게 걸고 Leave-One-Zone-Out CV와 베이스라인 비교로 과적합 여부를 확인하고 있다.</a:t>
-            </a:r>
-          </a:p>
-        </p:txBody>
-      </p:sp>
-      <p:sp>
-        <p:nvSpPr>
-          <p:cNvPr id="10" name="Rounded Rectangle 9"/>
+              <a:t>500m 격자 단위로 공간해상도 상향 — 표본 확대로 예측모델 성능 개선</a:t>
+            </a:r>
+          </a:p>
+        </p:txBody>
+      </p:sp>
+      <p:sp>
+        <p:nvSpPr>
+          <p:cNvPr id="27" name="Rectangle 26"/>
           <p:cNvSpPr/>
           <p:nvPr/>
         </p:nvSpPr>
         <p:spPr>
           <a:xfrm>
-            <a:off x="658368" y="3310128"/>
-            <a:ext cx="10874959" cy="896112"/>
-          </a:xfrm>
-          <a:prstGeom prst="roundRect">
-            <a:avLst>
-              <a:gd name="adj" fmla="val 6000"/>
-            </a:avLst>
+            <a:off x="6510528" y="4718304"/>
+            <a:ext cx="68580" cy="566928"/>
+          </a:xfrm>
+          <a:prstGeom prst="rect">
+            <a:avLst/>
           </a:prstGeom>
           <a:solidFill>
-            <a:srgbClr val="FFFFFF"/>
+            <a:srgbClr val="D64545"/>
           </a:solidFill>
-          <a:ln w="12700">
-            <a:solidFill>
-              <a:srgbClr val="E0E5EB"/>
-            </a:solidFill>
+          <a:ln>
+            <a:noFill/>
           </a:ln>
           <a:effectLst/>
         </p:spPr>
@@ -12257,20 +12669,100 @@
       </p:sp>
       <p:sp>
         <p:nvSpPr>
-          <p:cNvPr id="11" name="Rectangle 10"/>
+          <p:cNvPr id="28" name="TextBox 27"/>
+          <p:cNvSpPr txBox="1"/>
+          <p:nvPr/>
+        </p:nvSpPr>
+        <p:spPr>
+          <a:xfrm>
+            <a:off x="6729983" y="4718304"/>
+            <a:ext cx="4754880" cy="256032"/>
+          </a:xfrm>
+          <a:prstGeom prst="rect">
+            <a:avLst/>
+          </a:prstGeom>
+          <a:noFill/>
+        </p:spPr>
+        <p:txBody>
+          <a:bodyPr wrap="square" lIns="0" rIns="0" tIns="0" bIns="0">
+            <a:spAutoFit/>
+          </a:bodyPr>
+          <a:lstStyle/>
+          <a:p>
+            <a:pPr algn="l">
+              <a:lnSpc>
+                <a:spcPct val="135000"/>
+              </a:lnSpc>
+            </a:pPr>
+            <a:r>
+              <a:rPr sz="1250" b="1">
+                <a:solidFill>
+                  <a:srgbClr val="D64545"/>
+                </a:solidFill>
+                <a:latin typeface="맑은 고딕"/>
+              </a:rPr>
+              <a:t>4단계 · 1년</a:t>
+            </a:r>
+          </a:p>
+        </p:txBody>
+      </p:sp>
+      <p:sp>
+        <p:nvSpPr>
+          <p:cNvPr id="29" name="TextBox 28"/>
+          <p:cNvSpPr txBox="1"/>
+          <p:nvPr/>
+        </p:nvSpPr>
+        <p:spPr>
+          <a:xfrm>
+            <a:off x="6729983" y="4992624"/>
+            <a:ext cx="4754880" cy="365760"/>
+          </a:xfrm>
+          <a:prstGeom prst="rect">
+            <a:avLst/>
+          </a:prstGeom>
+          <a:noFill/>
+        </p:spPr>
+        <p:txBody>
+          <a:bodyPr wrap="square" lIns="0" rIns="0" tIns="0" bIns="0">
+            <a:spAutoFit/>
+          </a:bodyPr>
+          <a:lstStyle/>
+          <a:p>
+            <a:pPr algn="l">
+              <a:lnSpc>
+                <a:spcPct val="140000"/>
+              </a:lnSpc>
+            </a:pPr>
+            <a:r>
+              <a:rPr sz="1100" b="0">
+                <a:solidFill>
+                  <a:srgbClr val="5D6874"/>
+                </a:solidFill>
+                <a:latin typeface="맑은 고딕"/>
+              </a:rPr>
+              <a:t>천안시 행정포털 대시보드 내재화, 연 1회 자동 갱신 체계 정착</a:t>
+            </a:r>
+          </a:p>
+        </p:txBody>
+      </p:sp>
+      <p:sp>
+        <p:nvSpPr>
+          <p:cNvPr id="30" name="Rounded Rectangle 29"/>
           <p:cNvSpPr/>
           <p:nvPr/>
         </p:nvSpPr>
         <p:spPr>
           <a:xfrm>
-            <a:off x="658368" y="3310128"/>
-            <a:ext cx="68580" cy="896112"/>
-          </a:xfrm>
-          <a:prstGeom prst="rect">
-            <a:avLst/>
+            <a:off x="658368" y="5504688"/>
+            <a:ext cx="10874959" cy="822960"/>
+          </a:xfrm>
+          <a:prstGeom prst="roundRect">
+            <a:avLst>
+              <a:gd name="adj" fmla="val 6000"/>
+            </a:avLst>
           </a:prstGeom>
           <a:solidFill>
-            <a:srgbClr val="C98A1E"/>
+            <a:srgbClr val="F5F7FA"/>
           </a:solidFill>
           <a:ln>
             <a:noFill/>
@@ -12299,534 +12791,65 @@
       </p:sp>
       <p:sp>
         <p:nvSpPr>
-          <p:cNvPr id="12" name="TextBox 11"/>
-          <p:cNvSpPr txBox="1"/>
-          <p:nvPr/>
-        </p:nvSpPr>
-        <p:spPr>
-          <a:xfrm>
-            <a:off x="932688" y="3438144"/>
-            <a:ext cx="2103120" cy="256032"/>
-          </a:xfrm>
-          <a:prstGeom prst="rect">
-            <a:avLst/>
-          </a:prstGeom>
-          <a:noFill/>
-        </p:spPr>
-        <p:txBody>
-          <a:bodyPr wrap="square" lIns="0" rIns="0" tIns="0" bIns="0">
-            <a:spAutoFit/>
-          </a:bodyPr>
-          <a:lstStyle/>
-          <a:p>
-            <a:pPr algn="l">
-              <a:lnSpc>
-                <a:spcPct val="135000"/>
-              </a:lnSpc>
-            </a:pPr>
-            <a:r>
-              <a:rPr sz="1250" b="1">
-                <a:solidFill>
-                  <a:srgbClr val="C98A1E"/>
-                </a:solidFill>
-                <a:latin typeface="맑은 고딕"/>
-              </a:rPr>
-              <a:t>공간 해상도</a:t>
-            </a:r>
-          </a:p>
-        </p:txBody>
-      </p:sp>
-      <p:sp>
-        <p:nvSpPr>
-          <p:cNvPr id="13" name="TextBox 12"/>
-          <p:cNvSpPr txBox="1"/>
-          <p:nvPr/>
-        </p:nvSpPr>
-        <p:spPr>
-          <a:xfrm>
-            <a:off x="3172968" y="3438144"/>
-            <a:ext cx="8046720" cy="256032"/>
-          </a:xfrm>
-          <a:prstGeom prst="rect">
-            <a:avLst/>
-          </a:prstGeom>
-          <a:noFill/>
-        </p:spPr>
-        <p:txBody>
-          <a:bodyPr wrap="square" lIns="0" rIns="0" tIns="0" bIns="0">
-            <a:spAutoFit/>
-          </a:bodyPr>
-          <a:lstStyle/>
-          <a:p>
-            <a:pPr algn="l">
-              <a:lnSpc>
-                <a:spcPct val="135000"/>
-              </a:lnSpc>
-            </a:pPr>
-            <a:r>
-              <a:rPr sz="1200" b="1">
+          <p:cNvPr id="31" name="TextBox 30"/>
+          <p:cNvSpPr txBox="1"/>
+          <p:nvPr/>
+        </p:nvSpPr>
+        <p:spPr>
+          <a:xfrm>
+            <a:off x="932688" y="5687568"/>
+            <a:ext cx="10515600" cy="502920"/>
+          </a:xfrm>
+          <a:prstGeom prst="rect">
+            <a:avLst/>
+          </a:prstGeom>
+          <a:noFill/>
+        </p:spPr>
+        <p:txBody>
+          <a:bodyPr wrap="square" lIns="0" rIns="0" tIns="0" bIns="0">
+            <a:spAutoFit/>
+          </a:bodyPr>
+          <a:lstStyle/>
+          <a:p>
+            <a:pPr algn="l">
+              <a:lnSpc>
+                <a:spcPct val="150000"/>
+              </a:lnSpc>
+            </a:pPr>
+            <a:r>
+              <a:rPr sz="1200" b="0">
                 <a:solidFill>
                   <a:srgbClr val="151C26"/>
                 </a:solidFill>
                 <a:latin typeface="맑은 고딕"/>
               </a:rPr>
-              <a:t>생활권 내부의 격차(같은 동 안의 편차)는 잡히지 않는다.</a:t>
-            </a:r>
-          </a:p>
-        </p:txBody>
-      </p:sp>
-      <p:sp>
-        <p:nvSpPr>
-          <p:cNvPr id="14" name="TextBox 13"/>
-          <p:cNvSpPr txBox="1"/>
-          <p:nvPr/>
-        </p:nvSpPr>
-        <p:spPr>
-          <a:xfrm>
-            <a:off x="3172968" y="3730752"/>
-            <a:ext cx="8046720" cy="384048"/>
-          </a:xfrm>
-          <a:prstGeom prst="rect">
-            <a:avLst/>
-          </a:prstGeom>
-          <a:noFill/>
-        </p:spPr>
-        <p:txBody>
-          <a:bodyPr wrap="square" lIns="0" rIns="0" tIns="0" bIns="0">
-            <a:spAutoFit/>
-          </a:bodyPr>
-          <a:lstStyle/>
-          <a:p>
-            <a:pPr algn="l">
-              <a:lnSpc>
-                <a:spcPct val="140000"/>
-              </a:lnSpc>
-            </a:pPr>
-            <a:r>
-              <a:rPr sz="1080" b="0">
-                <a:solidFill>
-                  <a:srgbClr val="5D6874"/>
-                </a:solidFill>
-                <a:latin typeface="맑은 고딕"/>
-              </a:rPr>
-              <a:t>→ 집계구·격자 데이터로 전환하면 해결된다. 공간단위 정의만 교체하면 되도록 설계했다.</a:t>
-            </a:r>
-          </a:p>
-        </p:txBody>
-      </p:sp>
-      <p:sp>
-        <p:nvSpPr>
-          <p:cNvPr id="15" name="Rounded Rectangle 14"/>
-          <p:cNvSpPr/>
-          <p:nvPr/>
-        </p:nvSpPr>
-        <p:spPr>
-          <a:xfrm>
-            <a:off x="658368" y="4334256"/>
-            <a:ext cx="10874959" cy="896112"/>
-          </a:xfrm>
-          <a:prstGeom prst="roundRect">
-            <a:avLst>
-              <a:gd name="adj" fmla="val 6000"/>
-            </a:avLst>
-          </a:prstGeom>
-          <a:solidFill>
-            <a:srgbClr val="FFFFFF"/>
-          </a:solidFill>
-          <a:ln w="12700">
-            <a:solidFill>
-              <a:srgbClr val="E0E5EB"/>
-            </a:solidFill>
-          </a:ln>
-          <a:effectLst/>
-        </p:spPr>
-        <p:style>
-          <a:lnRef idx="1">
-            <a:schemeClr val="accent1"/>
-          </a:lnRef>
-          <a:fillRef idx="3">
-            <a:schemeClr val="accent1"/>
-          </a:fillRef>
-          <a:effectRef idx="2">
-            <a:schemeClr val="accent1"/>
-          </a:effectRef>
-          <a:fontRef idx="minor">
-            <a:schemeClr val="lt1"/>
-          </a:fontRef>
-        </p:style>
-        <p:txBody>
-          <a:bodyPr rtlCol="0" anchor="ctr"/>
-          <a:lstStyle/>
-          <a:p/>
-        </p:txBody>
-      </p:sp>
-      <p:sp>
-        <p:nvSpPr>
-          <p:cNvPr id="16" name="Rectangle 15"/>
-          <p:cNvSpPr/>
-          <p:nvPr/>
-        </p:nvSpPr>
-        <p:spPr>
-          <a:xfrm>
-            <a:off x="658368" y="4334256"/>
-            <a:ext cx="68580" cy="896112"/>
-          </a:xfrm>
-          <a:prstGeom prst="rect">
-            <a:avLst/>
-          </a:prstGeom>
-          <a:solidFill>
-            <a:srgbClr val="C98A1E"/>
-          </a:solidFill>
-          <a:ln>
-            <a:noFill/>
-          </a:ln>
-          <a:effectLst/>
-        </p:spPr>
-        <p:style>
-          <a:lnRef idx="1">
-            <a:schemeClr val="accent1"/>
-          </a:lnRef>
-          <a:fillRef idx="3">
-            <a:schemeClr val="accent1"/>
-          </a:fillRef>
-          <a:effectRef idx="2">
-            <a:schemeClr val="accent1"/>
-          </a:effectRef>
-          <a:fontRef idx="minor">
-            <a:schemeClr val="lt1"/>
-          </a:fontRef>
-        </p:style>
-        <p:txBody>
-          <a:bodyPr rtlCol="0" anchor="ctr"/>
-          <a:lstStyle/>
-          <a:p/>
-        </p:txBody>
-      </p:sp>
-      <p:sp>
-        <p:nvSpPr>
-          <p:cNvPr id="17" name="TextBox 16"/>
-          <p:cNvSpPr txBox="1"/>
-          <p:nvPr/>
-        </p:nvSpPr>
-        <p:spPr>
-          <a:xfrm>
-            <a:off x="932688" y="4462272"/>
-            <a:ext cx="2103120" cy="256032"/>
-          </a:xfrm>
-          <a:prstGeom prst="rect">
-            <a:avLst/>
-          </a:prstGeom>
-          <a:noFill/>
-        </p:spPr>
-        <p:txBody>
-          <a:bodyPr wrap="square" lIns="0" rIns="0" tIns="0" bIns="0">
-            <a:spAutoFit/>
-          </a:bodyPr>
-          <a:lstStyle/>
-          <a:p>
-            <a:pPr algn="l">
-              <a:lnSpc>
-                <a:spcPct val="135000"/>
-              </a:lnSpc>
-            </a:pPr>
-            <a:r>
-              <a:rPr sz="1250" b="1">
-                <a:solidFill>
-                  <a:srgbClr val="C98A1E"/>
-                </a:solidFill>
-                <a:latin typeface="맑은 고딕"/>
-              </a:rPr>
-              <a:t>빈집 데이터 정밀도</a:t>
-            </a:r>
-          </a:p>
-        </p:txBody>
-      </p:sp>
-      <p:sp>
-        <p:nvSpPr>
-          <p:cNvPr id="18" name="TextBox 17"/>
-          <p:cNvSpPr txBox="1"/>
-          <p:nvPr/>
-        </p:nvSpPr>
-        <p:spPr>
-          <a:xfrm>
-            <a:off x="3172968" y="4462272"/>
-            <a:ext cx="8046720" cy="256032"/>
-          </a:xfrm>
-          <a:prstGeom prst="rect">
-            <a:avLst/>
-          </a:prstGeom>
-          <a:noFill/>
-        </p:spPr>
-        <p:txBody>
-          <a:bodyPr wrap="square" lIns="0" rIns="0" tIns="0" bIns="0">
-            <a:spAutoFit/>
-          </a:bodyPr>
-          <a:lstStyle/>
-          <a:p>
-            <a:pPr algn="l">
-              <a:lnSpc>
-                <a:spcPct val="135000"/>
-              </a:lnSpc>
-            </a:pPr>
-            <a:r>
-              <a:rPr sz="1200" b="1">
+              <a:t>다른 지역에도 — 공간단위 정의(config.py)만 바꾸면 아산·청주 등에도 같은 방식으로 쓸 수 있습니다.</a:t>
+            </a:r>
+          </a:p>
+          <a:p>
+            <a:pPr algn="l">
+              <a:lnSpc>
+                <a:spcPct val="150000"/>
+              </a:lnSpc>
+              <a:spcBef>
+                <a:spcPts val="0"/>
+              </a:spcBef>
+            </a:pPr>
+            <a:r>
+              <a:rPr sz="1200" b="0">
                 <a:solidFill>
                   <a:srgbClr val="151C26"/>
                 </a:solidFill>
                 <a:latin typeface="맑은 고딕"/>
               </a:rPr>
-              <a:t>빈집 통계는 시군구 단위 공표가 많아 읍면동 배분에 가정이 들어간다.</a:t>
-            </a:r>
-          </a:p>
-        </p:txBody>
-      </p:sp>
-      <p:sp>
-        <p:nvSpPr>
-          <p:cNvPr id="19" name="TextBox 18"/>
-          <p:cNvSpPr txBox="1"/>
-          <p:nvPr/>
-        </p:nvSpPr>
-        <p:spPr>
-          <a:xfrm>
-            <a:off x="3172968" y="4754880"/>
-            <a:ext cx="8046720" cy="384048"/>
-          </a:xfrm>
-          <a:prstGeom prst="rect">
-            <a:avLst/>
-          </a:prstGeom>
-          <a:noFill/>
-        </p:spPr>
-        <p:txBody>
-          <a:bodyPr wrap="square" lIns="0" rIns="0" tIns="0" bIns="0">
-            <a:spAutoFit/>
-          </a:bodyPr>
-          <a:lstStyle/>
-          <a:p>
-            <a:pPr algn="l">
-              <a:lnSpc>
-                <a:spcPct val="140000"/>
-              </a:lnSpc>
-            </a:pPr>
-            <a:r>
-              <a:rPr sz="1080" b="0">
-                <a:solidFill>
-                  <a:srgbClr val="5D6874"/>
-                </a:solidFill>
-                <a:latin typeface="맑은 고딕"/>
-              </a:rPr>
-              <a:t>→ 천안시 빈집실태조사 원자료를 연계하면 가정 없이 대체된다.</a:t>
-            </a:r>
-          </a:p>
-        </p:txBody>
-      </p:sp>
-      <p:sp>
-        <p:nvSpPr>
-          <p:cNvPr id="20" name="Rounded Rectangle 19"/>
-          <p:cNvSpPr/>
-          <p:nvPr/>
-        </p:nvSpPr>
-        <p:spPr>
-          <a:xfrm>
-            <a:off x="658368" y="5358384"/>
-            <a:ext cx="10874959" cy="896112"/>
-          </a:xfrm>
-          <a:prstGeom prst="roundRect">
-            <a:avLst>
-              <a:gd name="adj" fmla="val 6000"/>
-            </a:avLst>
-          </a:prstGeom>
-          <a:solidFill>
-            <a:srgbClr val="FFFFFF"/>
-          </a:solidFill>
-          <a:ln w="12700">
-            <a:solidFill>
-              <a:srgbClr val="E0E5EB"/>
-            </a:solidFill>
-          </a:ln>
-          <a:effectLst/>
-        </p:spPr>
-        <p:style>
-          <a:lnRef idx="1">
-            <a:schemeClr val="accent1"/>
-          </a:lnRef>
-          <a:fillRef idx="3">
-            <a:schemeClr val="accent1"/>
-          </a:fillRef>
-          <a:effectRef idx="2">
-            <a:schemeClr val="accent1"/>
-          </a:effectRef>
-          <a:fontRef idx="minor">
-            <a:schemeClr val="lt1"/>
-          </a:fontRef>
-        </p:style>
-        <p:txBody>
-          <a:bodyPr rtlCol="0" anchor="ctr"/>
-          <a:lstStyle/>
-          <a:p/>
-        </p:txBody>
-      </p:sp>
-      <p:sp>
-        <p:nvSpPr>
-          <p:cNvPr id="21" name="Rectangle 20"/>
-          <p:cNvSpPr/>
-          <p:nvPr/>
-        </p:nvSpPr>
-        <p:spPr>
-          <a:xfrm>
-            <a:off x="658368" y="5358384"/>
-            <a:ext cx="68580" cy="896112"/>
-          </a:xfrm>
-          <a:prstGeom prst="rect">
-            <a:avLst/>
-          </a:prstGeom>
-          <a:solidFill>
-            <a:srgbClr val="C98A1E"/>
-          </a:solidFill>
-          <a:ln>
-            <a:noFill/>
-          </a:ln>
-          <a:effectLst/>
-        </p:spPr>
-        <p:style>
-          <a:lnRef idx="1">
-            <a:schemeClr val="accent1"/>
-          </a:lnRef>
-          <a:fillRef idx="3">
-            <a:schemeClr val="accent1"/>
-          </a:fillRef>
-          <a:effectRef idx="2">
-            <a:schemeClr val="accent1"/>
-          </a:effectRef>
-          <a:fontRef idx="minor">
-            <a:schemeClr val="lt1"/>
-          </a:fontRef>
-        </p:style>
-        <p:txBody>
-          <a:bodyPr rtlCol="0" anchor="ctr"/>
-          <a:lstStyle/>
-          <a:p/>
-        </p:txBody>
-      </p:sp>
-      <p:sp>
-        <p:nvSpPr>
-          <p:cNvPr id="22" name="TextBox 21"/>
-          <p:cNvSpPr txBox="1"/>
-          <p:nvPr/>
-        </p:nvSpPr>
-        <p:spPr>
-          <a:xfrm>
-            <a:off x="932688" y="5486400"/>
-            <a:ext cx="2103120" cy="256032"/>
-          </a:xfrm>
-          <a:prstGeom prst="rect">
-            <a:avLst/>
-          </a:prstGeom>
-          <a:noFill/>
-        </p:spPr>
-        <p:txBody>
-          <a:bodyPr wrap="square" lIns="0" rIns="0" tIns="0" bIns="0">
-            <a:spAutoFit/>
-          </a:bodyPr>
-          <a:lstStyle/>
-          <a:p>
-            <a:pPr algn="l">
-              <a:lnSpc>
-                <a:spcPct val="135000"/>
-              </a:lnSpc>
-            </a:pPr>
-            <a:r>
-              <a:rPr sz="1250" b="1">
-                <a:solidFill>
-                  <a:srgbClr val="C98A1E"/>
-                </a:solidFill>
-                <a:latin typeface="맑은 고딕"/>
-              </a:rPr>
-              <a:t>인과 아닌 상관</a:t>
-            </a:r>
-          </a:p>
-        </p:txBody>
-      </p:sp>
-      <p:sp>
-        <p:nvSpPr>
-          <p:cNvPr id="23" name="TextBox 22"/>
-          <p:cNvSpPr txBox="1"/>
-          <p:nvPr/>
-        </p:nvSpPr>
-        <p:spPr>
-          <a:xfrm>
-            <a:off x="3172968" y="5486400"/>
-            <a:ext cx="8046720" cy="256032"/>
-          </a:xfrm>
-          <a:prstGeom prst="rect">
-            <a:avLst/>
-          </a:prstGeom>
-          <a:noFill/>
-        </p:spPr>
-        <p:txBody>
-          <a:bodyPr wrap="square" lIns="0" rIns="0" tIns="0" bIns="0">
-            <a:spAutoFit/>
-          </a:bodyPr>
-          <a:lstStyle/>
-          <a:p>
-            <a:pPr algn="l">
-              <a:lnSpc>
-                <a:spcPct val="135000"/>
-              </a:lnSpc>
-            </a:pPr>
-            <a:r>
-              <a:rPr sz="1200" b="1">
-                <a:solidFill>
-                  <a:srgbClr val="151C26"/>
-                </a:solidFill>
-                <a:latin typeface="맑은 고딕"/>
-              </a:rPr>
-              <a:t>본 모델은 쇠퇴를 예측할 뿐, 사업의 인과효과를 증명하지 않는다.</a:t>
-            </a:r>
-          </a:p>
-        </p:txBody>
-      </p:sp>
-      <p:sp>
-        <p:nvSpPr>
-          <p:cNvPr id="24" name="TextBox 23"/>
-          <p:cNvSpPr txBox="1"/>
-          <p:nvPr/>
-        </p:nvSpPr>
-        <p:spPr>
-          <a:xfrm>
-            <a:off x="3172968" y="5779008"/>
-            <a:ext cx="8046720" cy="384048"/>
-          </a:xfrm>
-          <a:prstGeom prst="rect">
-            <a:avLst/>
-          </a:prstGeom>
-          <a:noFill/>
-        </p:spPr>
-        <p:txBody>
-          <a:bodyPr wrap="square" lIns="0" rIns="0" tIns="0" bIns="0">
-            <a:spAutoFit/>
-          </a:bodyPr>
-          <a:lstStyle/>
-          <a:p>
-            <a:pPr algn="l">
-              <a:lnSpc>
-                <a:spcPct val="140000"/>
-              </a:lnSpc>
-            </a:pPr>
-            <a:r>
-              <a:rPr sz="1080" b="0">
-                <a:solidFill>
-                  <a:srgbClr val="5D6874"/>
-                </a:solidFill>
-                <a:latin typeface="맑은 고딕"/>
-              </a:rPr>
-              <a:t>→ 사업 시행 전후 이중차분(DID) 설계를 붙이면 효과 검증까지 확장 가능하다.</a:t>
-            </a:r>
-          </a:p>
-        </p:txBody>
-      </p:sp>
-      <p:sp>
-        <p:nvSpPr>
-          <p:cNvPr id="25" name="TextBox 24"/>
+              <a:t>원도심 공동화는 천안만의 일이 아니어서, 도움이 된다면 충남 시군이 함께 쓰는 자료가 되어도 좋겠습니다.</a:t>
+            </a:r>
+          </a:p>
+        </p:txBody>
+      </p:sp>
+      <p:sp>
+        <p:nvSpPr>
+          <p:cNvPr id="32" name="TextBox 31"/>
           <p:cNvSpPr txBox="1"/>
           <p:nvPr/>
         </p:nvSpPr>
@@ -12865,7 +12888,7 @@
       </p:sp>
       <p:sp>
         <p:nvSpPr>
-          <p:cNvPr id="26" name="TextBox 25"/>
+          <p:cNvPr id="33" name="TextBox 32"/>
           <p:cNvSpPr txBox="1"/>
           <p:nvPr/>
         </p:nvSpPr>
@@ -13032,7 +13055,7 @@
                 </a:solidFill>
                 <a:latin typeface="맑은 고딕"/>
               </a:rPr>
-              <a:t>천안의 이중격차를 진단하고, 다음에 무너질 곳을 예측하며, 예산 투입 순서를 정한다.</a:t>
+              <a:t>천안시민의 생활여건 차이를 데이터로 살펴보고, 도움이 조금 더 필요한 곳을 먼저 찾아보고자 준비했습니다.</a:t>
             </a:r>
           </a:p>
         </p:txBody>
@@ -13979,7 +14002,7 @@
                 </a:solidFill>
                 <a:latin typeface="맑은 고딕"/>
               </a:rPr>
-              <a:t>문제</a:t>
+              <a:t>저희가 주목한 것</a:t>
             </a:r>
           </a:p>
         </p:txBody>
@@ -14018,7 +14041,7 @@
                 </a:solidFill>
                 <a:latin typeface="맑은 고딕"/>
               </a:rPr>
-              <a:t>한 도시 안의 이중격차</a:t>
+              <a:t>한 도시 안에 생긴 생활여건의 차이</a:t>
             </a:r>
           </a:p>
         </p:txBody>
@@ -14057,7 +14080,7 @@
                 </a:solidFill>
                 <a:latin typeface="맑은 고딕"/>
               </a:rPr>
-              <a:t>서북부 신도심은 팽창하는데 동남부 원도심은 비어간다.</a:t>
+              <a:t>서북부 신도심이 커지는 동안 동남부 원도심과 농촌면은</a:t>
             </a:r>
           </a:p>
           <a:p>
@@ -14076,7 +14099,7 @@
                 </a:solidFill>
                 <a:latin typeface="맑은 고딕"/>
               </a:rPr>
-              <a:t>그런데 재생·SOC 사업지 선정은 여전히 정성평가와</a:t>
+              <a:t>반대 방향으로 움직였습니다. 같은 천안시민인데 사시는 곳에</a:t>
             </a:r>
           </a:p>
           <a:p>
@@ -14095,7 +14118,7 @@
                 </a:solidFill>
                 <a:latin typeface="맑은 고딕"/>
               </a:rPr>
-              <a:t>사후 대응에 의존한다.</a:t>
+              <a:t>따라 일상의 여건이 달라지고 있었습니다.</a:t>
             </a:r>
           </a:p>
         </p:txBody>
@@ -14222,7 +14245,7 @@
                 </a:solidFill>
                 <a:latin typeface="맑은 고딕"/>
               </a:rPr>
-              <a:t>해법</a:t>
+              <a:t>저희가 준비한 것</a:t>
             </a:r>
           </a:p>
         </p:txBody>
@@ -14261,7 +14284,7 @@
                 </a:solidFill>
                 <a:latin typeface="맑은 고딕"/>
               </a:rPr>
-              <a:t>진단 → 예측 → 처방 3-엔진</a:t>
+              <a:t>살펴보기 → 미리 알기 → 순서 정하기</a:t>
             </a:r>
           </a:p>
         </p:txBody>
@@ -14300,7 +14323,7 @@
                 </a:solidFill>
                 <a:latin typeface="맑은 고딕"/>
               </a:rPr>
-              <a:t>12개 지표를 엔트로피 가중으로 합성해 격차를 계량하고,</a:t>
+              <a:t>공공데이터 12개 지표로 생활권별 여건을 수치화하고,</a:t>
             </a:r>
           </a:p>
           <a:p>
@@ -14319,7 +14342,7 @@
                 </a:solidFill>
                 <a:latin typeface="맑은 고딕"/>
               </a:rPr>
-              <a:t>LightGBM으로 3년 후 쇠퇴를 경보하며,</a:t>
+              <a:t>어느 동네가 어려워질지 미리 살펴본 뒤,</a:t>
             </a:r>
           </a:p>
           <a:p>
@@ -14338,7 +14361,7 @@
                 </a:solidFill>
                 <a:latin typeface="맑은 고딕"/>
               </a:rPr>
-              <a:t>MCLP 최적화로 투자 우선순위를 산출한다.</a:t>
+              <a:t>생활SOC를 어디부터 놓으면 좋을지 순서를 제안드립니다.</a:t>
             </a:r>
           </a:p>
         </p:txBody>
@@ -14465,7 +14488,7 @@
                 </a:solidFill>
                 <a:latin typeface="맑은 고딕"/>
               </a:rPr>
-              <a:t>성과</a:t>
+              <a:t>이렇게 쓰이면 좋겠습니다</a:t>
             </a:r>
           </a:p>
         </p:txBody>
@@ -14504,7 +14527,7 @@
                 </a:solidFill>
                 <a:latin typeface="맑은 고딕"/>
               </a:rPr>
-              <a:t>예산 집행 근거가 되는 산출물</a:t>
+              <a:t>담당자분께 드리는 근거 자료</a:t>
             </a:r>
           </a:p>
         </p:txBody>
@@ -14543,7 +14566,7 @@
                 </a:solidFill>
                 <a:latin typeface="맑은 고딕"/>
               </a:rPr>
-              <a:t>생활권별 CBI·쇠퇴단계, 3년 후 위험도와 SHAP 요인분해,</a:t>
+              <a:t>생활권별 지수와 유형, 3년 뒤 전망과 그 이유, 12개소 우선순위표입니다.</a:t>
             </a:r>
           </a:p>
           <a:p>
@@ -14562,7 +14585,7 @@
                 </a:solidFill>
                 <a:latin typeface="맑은 고딕"/>
               </a:rPr>
-              <a:t>12개소 투자 순위표. 모두 스크립트 한 줄로 재현된다.</a:t>
+              <a:t>스크립트 한 줄이면 매년 새 데이터로 다시 만드실 수 있습니다.</a:t>
             </a:r>
           </a:p>
         </p:txBody>
@@ -14697,7 +14720,7 @@
                 </a:solidFill>
                 <a:latin typeface="맑은 고딕"/>
               </a:rPr>
-              <a:t>INTEGRITY</a:t>
+              <a:t>LIMITATION</a:t>
             </a:r>
           </a:p>
         </p:txBody>
@@ -14736,21 +14759,60 @@
                 </a:solidFill>
                 <a:latin typeface="맑은 고딕"/>
               </a:rPr>
-              <a:t>재현성과 데이터 윤리</a:t>
-            </a:r>
-          </a:p>
-        </p:txBody>
-      </p:sp>
-      <p:sp>
-        <p:nvSpPr>
-          <p:cNvPr id="4" name="Rounded Rectangle 3"/>
+              <a:t>저희가 아직 못 한 부분을 먼저 말씀드립니다</a:t>
+            </a:r>
+          </a:p>
+        </p:txBody>
+      </p:sp>
+      <p:sp>
+        <p:nvSpPr>
+          <p:cNvPr id="4" name="TextBox 3"/>
+          <p:cNvSpPr txBox="1"/>
+          <p:nvPr/>
+        </p:nvSpPr>
+        <p:spPr>
+          <a:xfrm>
+            <a:off x="658368" y="1517904"/>
+            <a:ext cx="10874959" cy="411480"/>
+          </a:xfrm>
+          <a:prstGeom prst="rect">
+            <a:avLst/>
+          </a:prstGeom>
+          <a:noFill/>
+        </p:spPr>
+        <p:txBody>
+          <a:bodyPr wrap="square" lIns="0" rIns="0" tIns="0" bIns="0">
+            <a:spAutoFit/>
+          </a:bodyPr>
+          <a:lstStyle/>
+          <a:p>
+            <a:pPr algn="l">
+              <a:lnSpc>
+                <a:spcPct val="145000"/>
+              </a:lnSpc>
+            </a:pPr>
+            <a:r>
+              <a:rPr sz="1350" b="0">
+                <a:solidFill>
+                  <a:srgbClr val="5D6874"/>
+                </a:solidFill>
+                <a:latin typeface="맑은 고딕"/>
+              </a:rPr>
+              <a:t>행정에 쓰이는 자료인 만큼, 어디까지 믿고 쓰실 수 있는지 분명히 알려드리는 것이 도리라고 생각했습니다.</a:t>
+            </a:r>
+          </a:p>
+        </p:txBody>
+      </p:sp>
+      <p:sp>
+        <p:nvSpPr>
+          <p:cNvPr id="5" name="Rounded Rectangle 4"/>
           <p:cNvSpPr/>
           <p:nvPr/>
         </p:nvSpPr>
         <p:spPr>
           <a:xfrm>
-            <a:off x="658368" y="2121408"/>
-            <a:ext cx="5257800" cy="2487168"/>
+            <a:off x="658368" y="2286000"/>
+            <a:ext cx="10874959" cy="896112"/>
           </a:xfrm>
           <a:prstGeom prst="roundRect">
             <a:avLst>
@@ -14789,20 +14851,20 @@
       </p:sp>
       <p:sp>
         <p:nvSpPr>
-          <p:cNvPr id="5" name="Rectangle 4"/>
+          <p:cNvPr id="6" name="Rectangle 5"/>
           <p:cNvSpPr/>
           <p:nvPr/>
         </p:nvSpPr>
         <p:spPr>
           <a:xfrm>
-            <a:off x="658368" y="2121408"/>
-            <a:ext cx="5257800" cy="68580"/>
+            <a:off x="658368" y="2286000"/>
+            <a:ext cx="68580" cy="896112"/>
           </a:xfrm>
           <a:prstGeom prst="rect">
             <a:avLst/>
           </a:prstGeom>
           <a:solidFill>
-            <a:srgbClr val="3E9B7C"/>
+            <a:srgbClr val="C98A1E"/>
           </a:solidFill>
           <a:ln>
             <a:noFill/>
@@ -14831,14 +14893,14 @@
       </p:sp>
       <p:sp>
         <p:nvSpPr>
-          <p:cNvPr id="6" name="TextBox 5"/>
-          <p:cNvSpPr txBox="1"/>
-          <p:nvPr/>
-        </p:nvSpPr>
-        <p:spPr>
-          <a:xfrm>
-            <a:off x="932688" y="2340864"/>
-            <a:ext cx="4114800" cy="274320"/>
+          <p:cNvPr id="7" name="TextBox 6"/>
+          <p:cNvSpPr txBox="1"/>
+          <p:nvPr/>
+        </p:nvSpPr>
+        <p:spPr>
+          <a:xfrm>
+            <a:off x="932688" y="2414016"/>
+            <a:ext cx="2103120" cy="256032"/>
           </a:xfrm>
           <a:prstGeom prst="rect">
             <a:avLst/>
@@ -14857,27 +14919,27 @@
               </a:lnSpc>
             </a:pPr>
             <a:r>
-              <a:rPr sz="1450" b="1">
-                <a:solidFill>
-                  <a:srgbClr val="3E9B7C"/>
-                </a:solidFill>
-                <a:latin typeface="맑은 고딕"/>
-              </a:rPr>
-              <a:t>재현성</a:t>
-            </a:r>
-          </a:p>
-        </p:txBody>
-      </p:sp>
-      <p:sp>
-        <p:nvSpPr>
-          <p:cNvPr id="7" name="TextBox 6"/>
-          <p:cNvSpPr txBox="1"/>
-          <p:nvPr/>
-        </p:nvSpPr>
-        <p:spPr>
-          <a:xfrm>
-            <a:off x="932688" y="2743200"/>
-            <a:ext cx="182880" cy="256032"/>
+              <a:rPr sz="1250" b="1">
+                <a:solidFill>
+                  <a:srgbClr val="C98A1E"/>
+                </a:solidFill>
+                <a:latin typeface="맑은 고딕"/>
+              </a:rPr>
+              <a:t>표본 크기</a:t>
+            </a:r>
+          </a:p>
+        </p:txBody>
+      </p:sp>
+      <p:sp>
+        <p:nvSpPr>
+          <p:cNvPr id="8" name="TextBox 7"/>
+          <p:cNvSpPr txBox="1"/>
+          <p:nvPr/>
+        </p:nvSpPr>
+        <p:spPr>
+          <a:xfrm>
+            <a:off x="3172968" y="2414016"/>
+            <a:ext cx="8046720" cy="256032"/>
           </a:xfrm>
           <a:prstGeom prst="rect">
             <a:avLst/>
@@ -14896,27 +14958,27 @@
               </a:lnSpc>
             </a:pPr>
             <a:r>
-              <a:rPr sz="1300" b="1">
-                <a:solidFill>
-                  <a:srgbClr val="3E9B7C"/>
-                </a:solidFill>
-                <a:latin typeface="맑은 고딕"/>
-              </a:rPr>
-              <a:t>·</a:t>
-            </a:r>
-          </a:p>
-        </p:txBody>
-      </p:sp>
-      <p:sp>
-        <p:nvSpPr>
-          <p:cNvPr id="8" name="TextBox 7"/>
-          <p:cNvSpPr txBox="1"/>
-          <p:nvPr/>
-        </p:nvSpPr>
-        <p:spPr>
-          <a:xfrm>
-            <a:off x="1133856" y="2743200"/>
-            <a:ext cx="4572000" cy="411480"/>
+              <a:rPr sz="1200" b="1">
+                <a:solidFill>
+                  <a:srgbClr val="151C26"/>
+                </a:solidFill>
+                <a:latin typeface="맑은 고딕"/>
+              </a:rPr>
+              <a:t>분석 단위가 25개 생활권이라 머신러닝 표본으로는 작다.</a:t>
+            </a:r>
+          </a:p>
+        </p:txBody>
+      </p:sp>
+      <p:sp>
+        <p:nvSpPr>
+          <p:cNvPr id="9" name="TextBox 8"/>
+          <p:cNvSpPr txBox="1"/>
+          <p:nvPr/>
+        </p:nvSpPr>
+        <p:spPr>
+          <a:xfrm>
+            <a:off x="3172968" y="2706624"/>
+            <a:ext cx="8046720" cy="384048"/>
           </a:xfrm>
           <a:prstGeom prst="rect">
             <a:avLst/>
@@ -14935,261 +14997,27 @@
               </a:lnSpc>
             </a:pPr>
             <a:r>
-              <a:rPr sz="1100" b="0">
-                <a:solidFill>
-                  <a:srgbClr val="151C26"/>
-                </a:solidFill>
-                <a:latin typeface="맑은 고딕"/>
-              </a:rPr>
-              <a:t>전 과정이 공개 스크립트로 실행 — `python3 src/run_all.py` 한 줄</a:t>
-            </a:r>
-          </a:p>
-        </p:txBody>
-      </p:sp>
-      <p:sp>
-        <p:nvSpPr>
-          <p:cNvPr id="9" name="TextBox 8"/>
-          <p:cNvSpPr txBox="1"/>
-          <p:nvPr/>
-        </p:nvSpPr>
-        <p:spPr>
-          <a:xfrm>
-            <a:off x="932688" y="3218688"/>
-            <a:ext cx="182880" cy="256032"/>
-          </a:xfrm>
-          <a:prstGeom prst="rect">
-            <a:avLst/>
-          </a:prstGeom>
-          <a:noFill/>
-        </p:spPr>
-        <p:txBody>
-          <a:bodyPr wrap="square" lIns="0" rIns="0" tIns="0" bIns="0">
-            <a:spAutoFit/>
-          </a:bodyPr>
-          <a:lstStyle/>
-          <a:p>
-            <a:pPr algn="l">
-              <a:lnSpc>
-                <a:spcPct val="135000"/>
-              </a:lnSpc>
-            </a:pPr>
-            <a:r>
-              <a:rPr sz="1300" b="1">
-                <a:solidFill>
-                  <a:srgbClr val="3E9B7C"/>
-                </a:solidFill>
-                <a:latin typeface="맑은 고딕"/>
-              </a:rPr>
-              <a:t>·</a:t>
-            </a:r>
-          </a:p>
-        </p:txBody>
-      </p:sp>
-      <p:sp>
-        <p:nvSpPr>
-          <p:cNvPr id="10" name="TextBox 9"/>
-          <p:cNvSpPr txBox="1"/>
-          <p:nvPr/>
-        </p:nvSpPr>
-        <p:spPr>
-          <a:xfrm>
-            <a:off x="1133856" y="3218688"/>
-            <a:ext cx="4572000" cy="411480"/>
-          </a:xfrm>
-          <a:prstGeom prst="rect">
-            <a:avLst/>
-          </a:prstGeom>
-          <a:noFill/>
-        </p:spPr>
-        <p:txBody>
-          <a:bodyPr wrap="square" lIns="0" rIns="0" tIns="0" bIns="0">
-            <a:spAutoFit/>
-          </a:bodyPr>
-          <a:lstStyle/>
-          <a:p>
-            <a:pPr algn="l">
-              <a:lnSpc>
-                <a:spcPct val="140000"/>
-              </a:lnSpc>
-            </a:pPr>
-            <a:r>
-              <a:rPr sz="1100" b="0">
-                <a:solidFill>
-                  <a:srgbClr val="151C26"/>
-                </a:solidFill>
-                <a:latin typeface="맑은 고딕"/>
-              </a:rPr>
-              <a:t>난수 시드 고정(20260831) — 군집·모델 결과가 실행마다 동일</a:t>
-            </a:r>
-          </a:p>
-        </p:txBody>
-      </p:sp>
-      <p:sp>
-        <p:nvSpPr>
-          <p:cNvPr id="11" name="TextBox 10"/>
-          <p:cNvSpPr txBox="1"/>
-          <p:nvPr/>
-        </p:nvSpPr>
-        <p:spPr>
-          <a:xfrm>
-            <a:off x="932688" y="3694176"/>
-            <a:ext cx="182880" cy="256032"/>
-          </a:xfrm>
-          <a:prstGeom prst="rect">
-            <a:avLst/>
-          </a:prstGeom>
-          <a:noFill/>
-        </p:spPr>
-        <p:txBody>
-          <a:bodyPr wrap="square" lIns="0" rIns="0" tIns="0" bIns="0">
-            <a:spAutoFit/>
-          </a:bodyPr>
-          <a:lstStyle/>
-          <a:p>
-            <a:pPr algn="l">
-              <a:lnSpc>
-                <a:spcPct val="135000"/>
-              </a:lnSpc>
-            </a:pPr>
-            <a:r>
-              <a:rPr sz="1300" b="1">
-                <a:solidFill>
-                  <a:srgbClr val="3E9B7C"/>
-                </a:solidFill>
-                <a:latin typeface="맑은 고딕"/>
-              </a:rPr>
-              <a:t>·</a:t>
-            </a:r>
-          </a:p>
-        </p:txBody>
-      </p:sp>
-      <p:sp>
-        <p:nvSpPr>
-          <p:cNvPr id="12" name="TextBox 11"/>
-          <p:cNvSpPr txBox="1"/>
-          <p:nvPr/>
-        </p:nvSpPr>
-        <p:spPr>
-          <a:xfrm>
-            <a:off x="1133856" y="3694176"/>
-            <a:ext cx="4572000" cy="411480"/>
-          </a:xfrm>
-          <a:prstGeom prst="rect">
-            <a:avLst/>
-          </a:prstGeom>
-          <a:noFill/>
-        </p:spPr>
-        <p:txBody>
-          <a:bodyPr wrap="square" lIns="0" rIns="0" tIns="0" bIns="0">
-            <a:spAutoFit/>
-          </a:bodyPr>
-          <a:lstStyle/>
-          <a:p>
-            <a:pPr algn="l">
-              <a:lnSpc>
-                <a:spcPct val="140000"/>
-              </a:lnSpc>
-            </a:pPr>
-            <a:r>
-              <a:rPr sz="1100" b="0">
-                <a:solidFill>
-                  <a:srgbClr val="151C26"/>
-                </a:solidFill>
-                <a:latin typeface="맑은 고딕"/>
-              </a:rPr>
-              <a:t>그림 8종·분석표 9종·대시보드가 같은 실행에서 함께 생성됨</a:t>
-            </a:r>
-          </a:p>
-        </p:txBody>
-      </p:sp>
-      <p:sp>
-        <p:nvSpPr>
-          <p:cNvPr id="13" name="TextBox 12"/>
-          <p:cNvSpPr txBox="1"/>
-          <p:nvPr/>
-        </p:nvSpPr>
-        <p:spPr>
-          <a:xfrm>
-            <a:off x="932688" y="4169664"/>
-            <a:ext cx="182880" cy="256032"/>
-          </a:xfrm>
-          <a:prstGeom prst="rect">
-            <a:avLst/>
-          </a:prstGeom>
-          <a:noFill/>
-        </p:spPr>
-        <p:txBody>
-          <a:bodyPr wrap="square" lIns="0" rIns="0" tIns="0" bIns="0">
-            <a:spAutoFit/>
-          </a:bodyPr>
-          <a:lstStyle/>
-          <a:p>
-            <a:pPr algn="l">
-              <a:lnSpc>
-                <a:spcPct val="135000"/>
-              </a:lnSpc>
-            </a:pPr>
-            <a:r>
-              <a:rPr sz="1300" b="1">
-                <a:solidFill>
-                  <a:srgbClr val="3E9B7C"/>
-                </a:solidFill>
-                <a:latin typeface="맑은 고딕"/>
-              </a:rPr>
-              <a:t>·</a:t>
-            </a:r>
-          </a:p>
-        </p:txBody>
-      </p:sp>
-      <p:sp>
-        <p:nvSpPr>
-          <p:cNvPr id="14" name="TextBox 13"/>
-          <p:cNvSpPr txBox="1"/>
-          <p:nvPr/>
-        </p:nvSpPr>
-        <p:spPr>
-          <a:xfrm>
-            <a:off x="1133856" y="4169664"/>
-            <a:ext cx="4572000" cy="411480"/>
-          </a:xfrm>
-          <a:prstGeom prst="rect">
-            <a:avLst/>
-          </a:prstGeom>
-          <a:noFill/>
-        </p:spPr>
-        <p:txBody>
-          <a:bodyPr wrap="square" lIns="0" rIns="0" tIns="0" bIns="0">
-            <a:spAutoFit/>
-          </a:bodyPr>
-          <a:lstStyle/>
-          <a:p>
-            <a:pPr algn="l">
-              <a:lnSpc>
-                <a:spcPct val="140000"/>
-              </a:lnSpc>
-            </a:pPr>
-            <a:r>
-              <a:rPr sz="1100" b="0">
-                <a:solidFill>
-                  <a:srgbClr val="151C26"/>
-                </a:solidFill>
-                <a:latin typeface="맑은 고딕"/>
-              </a:rPr>
-              <a:t>지표 정의·가중치·모델 파라미터가 전부 코드에 명시</a:t>
-            </a:r>
-          </a:p>
-        </p:txBody>
-      </p:sp>
-      <p:sp>
-        <p:nvSpPr>
-          <p:cNvPr id="15" name="Rounded Rectangle 14"/>
+              <a:rPr sz="1080" b="0">
+                <a:solidFill>
+                  <a:srgbClr val="5D6874"/>
+                </a:solidFill>
+                <a:latin typeface="맑은 고딕"/>
+              </a:rPr>
+              <a:t>→ 500m 격자 단위로 내리면 표본이 수천 개로 늘어난다. 현재는 규제를 강하게 걸고 Leave-One-Zone-Out CV와 베이스라인 비교로 과적합 여부를 확인하고 있다.</a:t>
+            </a:r>
+          </a:p>
+        </p:txBody>
+      </p:sp>
+      <p:sp>
+        <p:nvSpPr>
+          <p:cNvPr id="10" name="Rounded Rectangle 9"/>
           <p:cNvSpPr/>
           <p:nvPr/>
         </p:nvSpPr>
         <p:spPr>
           <a:xfrm>
-            <a:off x="6236207" y="2121408"/>
-            <a:ext cx="5257800" cy="2487168"/>
+            <a:off x="658368" y="3310128"/>
+            <a:ext cx="10874959" cy="896112"/>
           </a:xfrm>
           <a:prstGeom prst="roundRect">
             <a:avLst>
@@ -15228,6 +15056,1234 @@
       </p:sp>
       <p:sp>
         <p:nvSpPr>
+          <p:cNvPr id="11" name="Rectangle 10"/>
+          <p:cNvSpPr/>
+          <p:nvPr/>
+        </p:nvSpPr>
+        <p:spPr>
+          <a:xfrm>
+            <a:off x="658368" y="3310128"/>
+            <a:ext cx="68580" cy="896112"/>
+          </a:xfrm>
+          <a:prstGeom prst="rect">
+            <a:avLst/>
+          </a:prstGeom>
+          <a:solidFill>
+            <a:srgbClr val="C98A1E"/>
+          </a:solidFill>
+          <a:ln>
+            <a:noFill/>
+          </a:ln>
+          <a:effectLst/>
+        </p:spPr>
+        <p:style>
+          <a:lnRef idx="1">
+            <a:schemeClr val="accent1"/>
+          </a:lnRef>
+          <a:fillRef idx="3">
+            <a:schemeClr val="accent1"/>
+          </a:fillRef>
+          <a:effectRef idx="2">
+            <a:schemeClr val="accent1"/>
+          </a:effectRef>
+          <a:fontRef idx="minor">
+            <a:schemeClr val="lt1"/>
+          </a:fontRef>
+        </p:style>
+        <p:txBody>
+          <a:bodyPr rtlCol="0" anchor="ctr"/>
+          <a:lstStyle/>
+          <a:p/>
+        </p:txBody>
+      </p:sp>
+      <p:sp>
+        <p:nvSpPr>
+          <p:cNvPr id="12" name="TextBox 11"/>
+          <p:cNvSpPr txBox="1"/>
+          <p:nvPr/>
+        </p:nvSpPr>
+        <p:spPr>
+          <a:xfrm>
+            <a:off x="932688" y="3438144"/>
+            <a:ext cx="2103120" cy="256032"/>
+          </a:xfrm>
+          <a:prstGeom prst="rect">
+            <a:avLst/>
+          </a:prstGeom>
+          <a:noFill/>
+        </p:spPr>
+        <p:txBody>
+          <a:bodyPr wrap="square" lIns="0" rIns="0" tIns="0" bIns="0">
+            <a:spAutoFit/>
+          </a:bodyPr>
+          <a:lstStyle/>
+          <a:p>
+            <a:pPr algn="l">
+              <a:lnSpc>
+                <a:spcPct val="135000"/>
+              </a:lnSpc>
+            </a:pPr>
+            <a:r>
+              <a:rPr sz="1250" b="1">
+                <a:solidFill>
+                  <a:srgbClr val="C98A1E"/>
+                </a:solidFill>
+                <a:latin typeface="맑은 고딕"/>
+              </a:rPr>
+              <a:t>공간 해상도</a:t>
+            </a:r>
+          </a:p>
+        </p:txBody>
+      </p:sp>
+      <p:sp>
+        <p:nvSpPr>
+          <p:cNvPr id="13" name="TextBox 12"/>
+          <p:cNvSpPr txBox="1"/>
+          <p:nvPr/>
+        </p:nvSpPr>
+        <p:spPr>
+          <a:xfrm>
+            <a:off x="3172968" y="3438144"/>
+            <a:ext cx="8046720" cy="256032"/>
+          </a:xfrm>
+          <a:prstGeom prst="rect">
+            <a:avLst/>
+          </a:prstGeom>
+          <a:noFill/>
+        </p:spPr>
+        <p:txBody>
+          <a:bodyPr wrap="square" lIns="0" rIns="0" tIns="0" bIns="0">
+            <a:spAutoFit/>
+          </a:bodyPr>
+          <a:lstStyle/>
+          <a:p>
+            <a:pPr algn="l">
+              <a:lnSpc>
+                <a:spcPct val="135000"/>
+              </a:lnSpc>
+            </a:pPr>
+            <a:r>
+              <a:rPr sz="1200" b="1">
+                <a:solidFill>
+                  <a:srgbClr val="151C26"/>
+                </a:solidFill>
+                <a:latin typeface="맑은 고딕"/>
+              </a:rPr>
+              <a:t>생활권 내부의 격차(같은 동 안의 편차)는 잡히지 않는다.</a:t>
+            </a:r>
+          </a:p>
+        </p:txBody>
+      </p:sp>
+      <p:sp>
+        <p:nvSpPr>
+          <p:cNvPr id="14" name="TextBox 13"/>
+          <p:cNvSpPr txBox="1"/>
+          <p:nvPr/>
+        </p:nvSpPr>
+        <p:spPr>
+          <a:xfrm>
+            <a:off x="3172968" y="3730752"/>
+            <a:ext cx="8046720" cy="384048"/>
+          </a:xfrm>
+          <a:prstGeom prst="rect">
+            <a:avLst/>
+          </a:prstGeom>
+          <a:noFill/>
+        </p:spPr>
+        <p:txBody>
+          <a:bodyPr wrap="square" lIns="0" rIns="0" tIns="0" bIns="0">
+            <a:spAutoFit/>
+          </a:bodyPr>
+          <a:lstStyle/>
+          <a:p>
+            <a:pPr algn="l">
+              <a:lnSpc>
+                <a:spcPct val="140000"/>
+              </a:lnSpc>
+            </a:pPr>
+            <a:r>
+              <a:rPr sz="1080" b="0">
+                <a:solidFill>
+                  <a:srgbClr val="5D6874"/>
+                </a:solidFill>
+                <a:latin typeface="맑은 고딕"/>
+              </a:rPr>
+              <a:t>→ 집계구·격자 데이터로 전환하면 해결된다. 공간단위 정의만 교체하면 되도록 설계했다.</a:t>
+            </a:r>
+          </a:p>
+        </p:txBody>
+      </p:sp>
+      <p:sp>
+        <p:nvSpPr>
+          <p:cNvPr id="15" name="Rounded Rectangle 14"/>
+          <p:cNvSpPr/>
+          <p:nvPr/>
+        </p:nvSpPr>
+        <p:spPr>
+          <a:xfrm>
+            <a:off x="658368" y="4334256"/>
+            <a:ext cx="10874959" cy="896112"/>
+          </a:xfrm>
+          <a:prstGeom prst="roundRect">
+            <a:avLst>
+              <a:gd name="adj" fmla="val 6000"/>
+            </a:avLst>
+          </a:prstGeom>
+          <a:solidFill>
+            <a:srgbClr val="FFFFFF"/>
+          </a:solidFill>
+          <a:ln w="12700">
+            <a:solidFill>
+              <a:srgbClr val="E0E5EB"/>
+            </a:solidFill>
+          </a:ln>
+          <a:effectLst/>
+        </p:spPr>
+        <p:style>
+          <a:lnRef idx="1">
+            <a:schemeClr val="accent1"/>
+          </a:lnRef>
+          <a:fillRef idx="3">
+            <a:schemeClr val="accent1"/>
+          </a:fillRef>
+          <a:effectRef idx="2">
+            <a:schemeClr val="accent1"/>
+          </a:effectRef>
+          <a:fontRef idx="minor">
+            <a:schemeClr val="lt1"/>
+          </a:fontRef>
+        </p:style>
+        <p:txBody>
+          <a:bodyPr rtlCol="0" anchor="ctr"/>
+          <a:lstStyle/>
+          <a:p/>
+        </p:txBody>
+      </p:sp>
+      <p:sp>
+        <p:nvSpPr>
+          <p:cNvPr id="16" name="Rectangle 15"/>
+          <p:cNvSpPr/>
+          <p:nvPr/>
+        </p:nvSpPr>
+        <p:spPr>
+          <a:xfrm>
+            <a:off x="658368" y="4334256"/>
+            <a:ext cx="68580" cy="896112"/>
+          </a:xfrm>
+          <a:prstGeom prst="rect">
+            <a:avLst/>
+          </a:prstGeom>
+          <a:solidFill>
+            <a:srgbClr val="C98A1E"/>
+          </a:solidFill>
+          <a:ln>
+            <a:noFill/>
+          </a:ln>
+          <a:effectLst/>
+        </p:spPr>
+        <p:style>
+          <a:lnRef idx="1">
+            <a:schemeClr val="accent1"/>
+          </a:lnRef>
+          <a:fillRef idx="3">
+            <a:schemeClr val="accent1"/>
+          </a:fillRef>
+          <a:effectRef idx="2">
+            <a:schemeClr val="accent1"/>
+          </a:effectRef>
+          <a:fontRef idx="minor">
+            <a:schemeClr val="lt1"/>
+          </a:fontRef>
+        </p:style>
+        <p:txBody>
+          <a:bodyPr rtlCol="0" anchor="ctr"/>
+          <a:lstStyle/>
+          <a:p/>
+        </p:txBody>
+      </p:sp>
+      <p:sp>
+        <p:nvSpPr>
+          <p:cNvPr id="17" name="TextBox 16"/>
+          <p:cNvSpPr txBox="1"/>
+          <p:nvPr/>
+        </p:nvSpPr>
+        <p:spPr>
+          <a:xfrm>
+            <a:off x="932688" y="4462272"/>
+            <a:ext cx="2103120" cy="256032"/>
+          </a:xfrm>
+          <a:prstGeom prst="rect">
+            <a:avLst/>
+          </a:prstGeom>
+          <a:noFill/>
+        </p:spPr>
+        <p:txBody>
+          <a:bodyPr wrap="square" lIns="0" rIns="0" tIns="0" bIns="0">
+            <a:spAutoFit/>
+          </a:bodyPr>
+          <a:lstStyle/>
+          <a:p>
+            <a:pPr algn="l">
+              <a:lnSpc>
+                <a:spcPct val="135000"/>
+              </a:lnSpc>
+            </a:pPr>
+            <a:r>
+              <a:rPr sz="1250" b="1">
+                <a:solidFill>
+                  <a:srgbClr val="C98A1E"/>
+                </a:solidFill>
+                <a:latin typeface="맑은 고딕"/>
+              </a:rPr>
+              <a:t>빈집 데이터 정밀도</a:t>
+            </a:r>
+          </a:p>
+        </p:txBody>
+      </p:sp>
+      <p:sp>
+        <p:nvSpPr>
+          <p:cNvPr id="18" name="TextBox 17"/>
+          <p:cNvSpPr txBox="1"/>
+          <p:nvPr/>
+        </p:nvSpPr>
+        <p:spPr>
+          <a:xfrm>
+            <a:off x="3172968" y="4462272"/>
+            <a:ext cx="8046720" cy="256032"/>
+          </a:xfrm>
+          <a:prstGeom prst="rect">
+            <a:avLst/>
+          </a:prstGeom>
+          <a:noFill/>
+        </p:spPr>
+        <p:txBody>
+          <a:bodyPr wrap="square" lIns="0" rIns="0" tIns="0" bIns="0">
+            <a:spAutoFit/>
+          </a:bodyPr>
+          <a:lstStyle/>
+          <a:p>
+            <a:pPr algn="l">
+              <a:lnSpc>
+                <a:spcPct val="135000"/>
+              </a:lnSpc>
+            </a:pPr>
+            <a:r>
+              <a:rPr sz="1200" b="1">
+                <a:solidFill>
+                  <a:srgbClr val="151C26"/>
+                </a:solidFill>
+                <a:latin typeface="맑은 고딕"/>
+              </a:rPr>
+              <a:t>빈집 통계는 시군구 단위 공표가 많아 읍면동 배분에 가정이 들어간다.</a:t>
+            </a:r>
+          </a:p>
+        </p:txBody>
+      </p:sp>
+      <p:sp>
+        <p:nvSpPr>
+          <p:cNvPr id="19" name="TextBox 18"/>
+          <p:cNvSpPr txBox="1"/>
+          <p:nvPr/>
+        </p:nvSpPr>
+        <p:spPr>
+          <a:xfrm>
+            <a:off x="3172968" y="4754880"/>
+            <a:ext cx="8046720" cy="384048"/>
+          </a:xfrm>
+          <a:prstGeom prst="rect">
+            <a:avLst/>
+          </a:prstGeom>
+          <a:noFill/>
+        </p:spPr>
+        <p:txBody>
+          <a:bodyPr wrap="square" lIns="0" rIns="0" tIns="0" bIns="0">
+            <a:spAutoFit/>
+          </a:bodyPr>
+          <a:lstStyle/>
+          <a:p>
+            <a:pPr algn="l">
+              <a:lnSpc>
+                <a:spcPct val="140000"/>
+              </a:lnSpc>
+            </a:pPr>
+            <a:r>
+              <a:rPr sz="1080" b="0">
+                <a:solidFill>
+                  <a:srgbClr val="5D6874"/>
+                </a:solidFill>
+                <a:latin typeface="맑은 고딕"/>
+              </a:rPr>
+              <a:t>→ 천안시 빈집실태조사 원자료를 연계하면 가정 없이 대체된다.</a:t>
+            </a:r>
+          </a:p>
+        </p:txBody>
+      </p:sp>
+      <p:sp>
+        <p:nvSpPr>
+          <p:cNvPr id="20" name="Rounded Rectangle 19"/>
+          <p:cNvSpPr/>
+          <p:nvPr/>
+        </p:nvSpPr>
+        <p:spPr>
+          <a:xfrm>
+            <a:off x="658368" y="5358384"/>
+            <a:ext cx="10874959" cy="896112"/>
+          </a:xfrm>
+          <a:prstGeom prst="roundRect">
+            <a:avLst>
+              <a:gd name="adj" fmla="val 6000"/>
+            </a:avLst>
+          </a:prstGeom>
+          <a:solidFill>
+            <a:srgbClr val="FFFFFF"/>
+          </a:solidFill>
+          <a:ln w="12700">
+            <a:solidFill>
+              <a:srgbClr val="E0E5EB"/>
+            </a:solidFill>
+          </a:ln>
+          <a:effectLst/>
+        </p:spPr>
+        <p:style>
+          <a:lnRef idx="1">
+            <a:schemeClr val="accent1"/>
+          </a:lnRef>
+          <a:fillRef idx="3">
+            <a:schemeClr val="accent1"/>
+          </a:fillRef>
+          <a:effectRef idx="2">
+            <a:schemeClr val="accent1"/>
+          </a:effectRef>
+          <a:fontRef idx="minor">
+            <a:schemeClr val="lt1"/>
+          </a:fontRef>
+        </p:style>
+        <p:txBody>
+          <a:bodyPr rtlCol="0" anchor="ctr"/>
+          <a:lstStyle/>
+          <a:p/>
+        </p:txBody>
+      </p:sp>
+      <p:sp>
+        <p:nvSpPr>
+          <p:cNvPr id="21" name="Rectangle 20"/>
+          <p:cNvSpPr/>
+          <p:nvPr/>
+        </p:nvSpPr>
+        <p:spPr>
+          <a:xfrm>
+            <a:off x="658368" y="5358384"/>
+            <a:ext cx="68580" cy="896112"/>
+          </a:xfrm>
+          <a:prstGeom prst="rect">
+            <a:avLst/>
+          </a:prstGeom>
+          <a:solidFill>
+            <a:srgbClr val="C98A1E"/>
+          </a:solidFill>
+          <a:ln>
+            <a:noFill/>
+          </a:ln>
+          <a:effectLst/>
+        </p:spPr>
+        <p:style>
+          <a:lnRef idx="1">
+            <a:schemeClr val="accent1"/>
+          </a:lnRef>
+          <a:fillRef idx="3">
+            <a:schemeClr val="accent1"/>
+          </a:fillRef>
+          <a:effectRef idx="2">
+            <a:schemeClr val="accent1"/>
+          </a:effectRef>
+          <a:fontRef idx="minor">
+            <a:schemeClr val="lt1"/>
+          </a:fontRef>
+        </p:style>
+        <p:txBody>
+          <a:bodyPr rtlCol="0" anchor="ctr"/>
+          <a:lstStyle/>
+          <a:p/>
+        </p:txBody>
+      </p:sp>
+      <p:sp>
+        <p:nvSpPr>
+          <p:cNvPr id="22" name="TextBox 21"/>
+          <p:cNvSpPr txBox="1"/>
+          <p:nvPr/>
+        </p:nvSpPr>
+        <p:spPr>
+          <a:xfrm>
+            <a:off x="932688" y="5486400"/>
+            <a:ext cx="2103120" cy="256032"/>
+          </a:xfrm>
+          <a:prstGeom prst="rect">
+            <a:avLst/>
+          </a:prstGeom>
+          <a:noFill/>
+        </p:spPr>
+        <p:txBody>
+          <a:bodyPr wrap="square" lIns="0" rIns="0" tIns="0" bIns="0">
+            <a:spAutoFit/>
+          </a:bodyPr>
+          <a:lstStyle/>
+          <a:p>
+            <a:pPr algn="l">
+              <a:lnSpc>
+                <a:spcPct val="135000"/>
+              </a:lnSpc>
+            </a:pPr>
+            <a:r>
+              <a:rPr sz="1250" b="1">
+                <a:solidFill>
+                  <a:srgbClr val="C98A1E"/>
+                </a:solidFill>
+                <a:latin typeface="맑은 고딕"/>
+              </a:rPr>
+              <a:t>인과 아닌 상관</a:t>
+            </a:r>
+          </a:p>
+        </p:txBody>
+      </p:sp>
+      <p:sp>
+        <p:nvSpPr>
+          <p:cNvPr id="23" name="TextBox 22"/>
+          <p:cNvSpPr txBox="1"/>
+          <p:nvPr/>
+        </p:nvSpPr>
+        <p:spPr>
+          <a:xfrm>
+            <a:off x="3172968" y="5486400"/>
+            <a:ext cx="8046720" cy="256032"/>
+          </a:xfrm>
+          <a:prstGeom prst="rect">
+            <a:avLst/>
+          </a:prstGeom>
+          <a:noFill/>
+        </p:spPr>
+        <p:txBody>
+          <a:bodyPr wrap="square" lIns="0" rIns="0" tIns="0" bIns="0">
+            <a:spAutoFit/>
+          </a:bodyPr>
+          <a:lstStyle/>
+          <a:p>
+            <a:pPr algn="l">
+              <a:lnSpc>
+                <a:spcPct val="135000"/>
+              </a:lnSpc>
+            </a:pPr>
+            <a:r>
+              <a:rPr sz="1200" b="1">
+                <a:solidFill>
+                  <a:srgbClr val="151C26"/>
+                </a:solidFill>
+                <a:latin typeface="맑은 고딕"/>
+              </a:rPr>
+              <a:t>본 모델은 쇠퇴를 예측할 뿐, 사업의 인과효과를 증명하지 않는다.</a:t>
+            </a:r>
+          </a:p>
+        </p:txBody>
+      </p:sp>
+      <p:sp>
+        <p:nvSpPr>
+          <p:cNvPr id="24" name="TextBox 23"/>
+          <p:cNvSpPr txBox="1"/>
+          <p:nvPr/>
+        </p:nvSpPr>
+        <p:spPr>
+          <a:xfrm>
+            <a:off x="3172968" y="5779008"/>
+            <a:ext cx="8046720" cy="384048"/>
+          </a:xfrm>
+          <a:prstGeom prst="rect">
+            <a:avLst/>
+          </a:prstGeom>
+          <a:noFill/>
+        </p:spPr>
+        <p:txBody>
+          <a:bodyPr wrap="square" lIns="0" rIns="0" tIns="0" bIns="0">
+            <a:spAutoFit/>
+          </a:bodyPr>
+          <a:lstStyle/>
+          <a:p>
+            <a:pPr algn="l">
+              <a:lnSpc>
+                <a:spcPct val="140000"/>
+              </a:lnSpc>
+            </a:pPr>
+            <a:r>
+              <a:rPr sz="1080" b="0">
+                <a:solidFill>
+                  <a:srgbClr val="5D6874"/>
+                </a:solidFill>
+                <a:latin typeface="맑은 고딕"/>
+              </a:rPr>
+              <a:t>→ 사업 시행 전후 이중차분(DID) 설계를 붙이면 효과 검증까지 확장 가능하다.</a:t>
+            </a:r>
+          </a:p>
+        </p:txBody>
+      </p:sp>
+      <p:sp>
+        <p:nvSpPr>
+          <p:cNvPr id="25" name="TextBox 24"/>
+          <p:cNvSpPr txBox="1"/>
+          <p:nvPr/>
+        </p:nvSpPr>
+        <p:spPr>
+          <a:xfrm>
+            <a:off x="658368" y="6437376"/>
+            <a:ext cx="5486400" cy="274320"/>
+          </a:xfrm>
+          <a:prstGeom prst="rect">
+            <a:avLst/>
+          </a:prstGeom>
+          <a:noFill/>
+        </p:spPr>
+        <p:txBody>
+          <a:bodyPr wrap="square" lIns="0" rIns="0" tIns="0" bIns="0">
+            <a:spAutoFit/>
+          </a:bodyPr>
+          <a:lstStyle/>
+          <a:p>
+            <a:pPr algn="l">
+              <a:lnSpc>
+                <a:spcPct val="135000"/>
+              </a:lnSpc>
+            </a:pPr>
+            <a:r>
+              <a:rPr sz="950" b="0">
+                <a:solidFill>
+                  <a:srgbClr val="5D6874"/>
+                </a:solidFill>
+                <a:latin typeface="맑은 고딕"/>
+              </a:rPr>
+              <a:t>천안 균형발전 나침반(CBC)</a:t>
+            </a:r>
+          </a:p>
+        </p:txBody>
+      </p:sp>
+      <p:sp>
+        <p:nvSpPr>
+          <p:cNvPr id="26" name="TextBox 25"/>
+          <p:cNvSpPr txBox="1"/>
+          <p:nvPr/>
+        </p:nvSpPr>
+        <p:spPr>
+          <a:xfrm>
+            <a:off x="10618927" y="6437376"/>
+            <a:ext cx="914400" cy="274320"/>
+          </a:xfrm>
+          <a:prstGeom prst="rect">
+            <a:avLst/>
+          </a:prstGeom>
+          <a:noFill/>
+        </p:spPr>
+        <p:txBody>
+          <a:bodyPr wrap="square" lIns="0" rIns="0" tIns="0" bIns="0">
+            <a:spAutoFit/>
+          </a:bodyPr>
+          <a:lstStyle/>
+          <a:p>
+            <a:pPr algn="r">
+              <a:lnSpc>
+                <a:spcPct val="135000"/>
+              </a:lnSpc>
+            </a:pPr>
+            <a:r>
+              <a:rPr sz="950" b="0">
+                <a:solidFill>
+                  <a:srgbClr val="5D6874"/>
+                </a:solidFill>
+                <a:latin typeface="맑은 고딕"/>
+              </a:rPr>
+              <a:t>19</a:t>
+            </a:r>
+          </a:p>
+        </p:txBody>
+      </p:sp>
+    </p:spTree>
+  </p:cSld>
+  <p:clrMapOvr>
+    <a:masterClrMapping/>
+  </p:clrMapOvr>
+</p:sld>
+</file>
+
+<file path=ppt/slides/slide21.xml><?xml version="1.0" encoding="utf-8"?>
+<p:sld xmlns:a="http://schemas.openxmlformats.org/drawingml/2006/main" xmlns:p="http://schemas.openxmlformats.org/presentationml/2006/main" xmlns:r="http://schemas.openxmlformats.org/officeDocument/2006/relationships">
+  <p:cSld>
+    <p:spTree>
+      <p:nvGrpSpPr>
+        <p:cNvPr id="1" name=""/>
+        <p:cNvGrpSpPr/>
+        <p:nvPr/>
+      </p:nvGrpSpPr>
+      <p:grpSpPr/>
+      <p:sp>
+        <p:nvSpPr>
+          <p:cNvPr id="2" name="TextBox 1"/>
+          <p:cNvSpPr txBox="1"/>
+          <p:nvPr/>
+        </p:nvSpPr>
+        <p:spPr>
+          <a:xfrm>
+            <a:off x="658368" y="475488"/>
+            <a:ext cx="10874959" cy="274320"/>
+          </a:xfrm>
+          <a:prstGeom prst="rect">
+            <a:avLst/>
+          </a:prstGeom>
+          <a:noFill/>
+        </p:spPr>
+        <p:txBody>
+          <a:bodyPr wrap="square" lIns="0" rIns="0" tIns="0" bIns="0">
+            <a:spAutoFit/>
+          </a:bodyPr>
+          <a:lstStyle/>
+          <a:p>
+            <a:pPr algn="l">
+              <a:lnSpc>
+                <a:spcPct val="135000"/>
+              </a:lnSpc>
+            </a:pPr>
+            <a:r>
+              <a:rPr sz="1150" b="1">
+                <a:solidFill>
+                  <a:srgbClr val="D64545"/>
+                </a:solidFill>
+                <a:latin typeface="맑은 고딕"/>
+              </a:rPr>
+              <a:t>INTEGRITY</a:t>
+            </a:r>
+          </a:p>
+        </p:txBody>
+      </p:sp>
+      <p:sp>
+        <p:nvSpPr>
+          <p:cNvPr id="3" name="TextBox 2"/>
+          <p:cNvSpPr txBox="1"/>
+          <p:nvPr/>
+        </p:nvSpPr>
+        <p:spPr>
+          <a:xfrm>
+            <a:off x="658368" y="804672"/>
+            <a:ext cx="10874959" cy="566928"/>
+          </a:xfrm>
+          <a:prstGeom prst="rect">
+            <a:avLst/>
+          </a:prstGeom>
+          <a:noFill/>
+        </p:spPr>
+        <p:txBody>
+          <a:bodyPr wrap="square" lIns="0" rIns="0" tIns="0" bIns="0">
+            <a:spAutoFit/>
+          </a:bodyPr>
+          <a:lstStyle/>
+          <a:p>
+            <a:pPr algn="l">
+              <a:lnSpc>
+                <a:spcPct val="118000"/>
+              </a:lnSpc>
+            </a:pPr>
+            <a:r>
+              <a:rPr sz="2700" b="1">
+                <a:solidFill>
+                  <a:srgbClr val="151C26"/>
+                </a:solidFill>
+                <a:latin typeface="맑은 고딕"/>
+              </a:rPr>
+              <a:t>재현성과 데이터 윤리</a:t>
+            </a:r>
+          </a:p>
+        </p:txBody>
+      </p:sp>
+      <p:sp>
+        <p:nvSpPr>
+          <p:cNvPr id="4" name="Rounded Rectangle 3"/>
+          <p:cNvSpPr/>
+          <p:nvPr/>
+        </p:nvSpPr>
+        <p:spPr>
+          <a:xfrm>
+            <a:off x="658368" y="2121408"/>
+            <a:ext cx="5257800" cy="2487168"/>
+          </a:xfrm>
+          <a:prstGeom prst="roundRect">
+            <a:avLst>
+              <a:gd name="adj" fmla="val 6000"/>
+            </a:avLst>
+          </a:prstGeom>
+          <a:solidFill>
+            <a:srgbClr val="FFFFFF"/>
+          </a:solidFill>
+          <a:ln w="12700">
+            <a:solidFill>
+              <a:srgbClr val="E0E5EB"/>
+            </a:solidFill>
+          </a:ln>
+          <a:effectLst/>
+        </p:spPr>
+        <p:style>
+          <a:lnRef idx="1">
+            <a:schemeClr val="accent1"/>
+          </a:lnRef>
+          <a:fillRef idx="3">
+            <a:schemeClr val="accent1"/>
+          </a:fillRef>
+          <a:effectRef idx="2">
+            <a:schemeClr val="accent1"/>
+          </a:effectRef>
+          <a:fontRef idx="minor">
+            <a:schemeClr val="lt1"/>
+          </a:fontRef>
+        </p:style>
+        <p:txBody>
+          <a:bodyPr rtlCol="0" anchor="ctr"/>
+          <a:lstStyle/>
+          <a:p/>
+        </p:txBody>
+      </p:sp>
+      <p:sp>
+        <p:nvSpPr>
+          <p:cNvPr id="5" name="Rectangle 4"/>
+          <p:cNvSpPr/>
+          <p:nvPr/>
+        </p:nvSpPr>
+        <p:spPr>
+          <a:xfrm>
+            <a:off x="658368" y="2121408"/>
+            <a:ext cx="5257800" cy="68580"/>
+          </a:xfrm>
+          <a:prstGeom prst="rect">
+            <a:avLst/>
+          </a:prstGeom>
+          <a:solidFill>
+            <a:srgbClr val="3E9B7C"/>
+          </a:solidFill>
+          <a:ln>
+            <a:noFill/>
+          </a:ln>
+          <a:effectLst/>
+        </p:spPr>
+        <p:style>
+          <a:lnRef idx="1">
+            <a:schemeClr val="accent1"/>
+          </a:lnRef>
+          <a:fillRef idx="3">
+            <a:schemeClr val="accent1"/>
+          </a:fillRef>
+          <a:effectRef idx="2">
+            <a:schemeClr val="accent1"/>
+          </a:effectRef>
+          <a:fontRef idx="minor">
+            <a:schemeClr val="lt1"/>
+          </a:fontRef>
+        </p:style>
+        <p:txBody>
+          <a:bodyPr rtlCol="0" anchor="ctr"/>
+          <a:lstStyle/>
+          <a:p/>
+        </p:txBody>
+      </p:sp>
+      <p:sp>
+        <p:nvSpPr>
+          <p:cNvPr id="6" name="TextBox 5"/>
+          <p:cNvSpPr txBox="1"/>
+          <p:nvPr/>
+        </p:nvSpPr>
+        <p:spPr>
+          <a:xfrm>
+            <a:off x="932688" y="2340864"/>
+            <a:ext cx="4114800" cy="274320"/>
+          </a:xfrm>
+          <a:prstGeom prst="rect">
+            <a:avLst/>
+          </a:prstGeom>
+          <a:noFill/>
+        </p:spPr>
+        <p:txBody>
+          <a:bodyPr wrap="square" lIns="0" rIns="0" tIns="0" bIns="0">
+            <a:spAutoFit/>
+          </a:bodyPr>
+          <a:lstStyle/>
+          <a:p>
+            <a:pPr algn="l">
+              <a:lnSpc>
+                <a:spcPct val="135000"/>
+              </a:lnSpc>
+            </a:pPr>
+            <a:r>
+              <a:rPr sz="1450" b="1">
+                <a:solidFill>
+                  <a:srgbClr val="3E9B7C"/>
+                </a:solidFill>
+                <a:latin typeface="맑은 고딕"/>
+              </a:rPr>
+              <a:t>재현성</a:t>
+            </a:r>
+          </a:p>
+        </p:txBody>
+      </p:sp>
+      <p:sp>
+        <p:nvSpPr>
+          <p:cNvPr id="7" name="TextBox 6"/>
+          <p:cNvSpPr txBox="1"/>
+          <p:nvPr/>
+        </p:nvSpPr>
+        <p:spPr>
+          <a:xfrm>
+            <a:off x="932688" y="2743200"/>
+            <a:ext cx="182880" cy="256032"/>
+          </a:xfrm>
+          <a:prstGeom prst="rect">
+            <a:avLst/>
+          </a:prstGeom>
+          <a:noFill/>
+        </p:spPr>
+        <p:txBody>
+          <a:bodyPr wrap="square" lIns="0" rIns="0" tIns="0" bIns="0">
+            <a:spAutoFit/>
+          </a:bodyPr>
+          <a:lstStyle/>
+          <a:p>
+            <a:pPr algn="l">
+              <a:lnSpc>
+                <a:spcPct val="135000"/>
+              </a:lnSpc>
+            </a:pPr>
+            <a:r>
+              <a:rPr sz="1300" b="1">
+                <a:solidFill>
+                  <a:srgbClr val="3E9B7C"/>
+                </a:solidFill>
+                <a:latin typeface="맑은 고딕"/>
+              </a:rPr>
+              <a:t>·</a:t>
+            </a:r>
+          </a:p>
+        </p:txBody>
+      </p:sp>
+      <p:sp>
+        <p:nvSpPr>
+          <p:cNvPr id="8" name="TextBox 7"/>
+          <p:cNvSpPr txBox="1"/>
+          <p:nvPr/>
+        </p:nvSpPr>
+        <p:spPr>
+          <a:xfrm>
+            <a:off x="1133856" y="2743200"/>
+            <a:ext cx="4572000" cy="411480"/>
+          </a:xfrm>
+          <a:prstGeom prst="rect">
+            <a:avLst/>
+          </a:prstGeom>
+          <a:noFill/>
+        </p:spPr>
+        <p:txBody>
+          <a:bodyPr wrap="square" lIns="0" rIns="0" tIns="0" bIns="0">
+            <a:spAutoFit/>
+          </a:bodyPr>
+          <a:lstStyle/>
+          <a:p>
+            <a:pPr algn="l">
+              <a:lnSpc>
+                <a:spcPct val="140000"/>
+              </a:lnSpc>
+            </a:pPr>
+            <a:r>
+              <a:rPr sz="1100" b="0">
+                <a:solidFill>
+                  <a:srgbClr val="151C26"/>
+                </a:solidFill>
+                <a:latin typeface="맑은 고딕"/>
+              </a:rPr>
+              <a:t>전 과정이 공개 스크립트로 실행 — `python3 src/run_all.py` 한 줄</a:t>
+            </a:r>
+          </a:p>
+        </p:txBody>
+      </p:sp>
+      <p:sp>
+        <p:nvSpPr>
+          <p:cNvPr id="9" name="TextBox 8"/>
+          <p:cNvSpPr txBox="1"/>
+          <p:nvPr/>
+        </p:nvSpPr>
+        <p:spPr>
+          <a:xfrm>
+            <a:off x="932688" y="3218688"/>
+            <a:ext cx="182880" cy="256032"/>
+          </a:xfrm>
+          <a:prstGeom prst="rect">
+            <a:avLst/>
+          </a:prstGeom>
+          <a:noFill/>
+        </p:spPr>
+        <p:txBody>
+          <a:bodyPr wrap="square" lIns="0" rIns="0" tIns="0" bIns="0">
+            <a:spAutoFit/>
+          </a:bodyPr>
+          <a:lstStyle/>
+          <a:p>
+            <a:pPr algn="l">
+              <a:lnSpc>
+                <a:spcPct val="135000"/>
+              </a:lnSpc>
+            </a:pPr>
+            <a:r>
+              <a:rPr sz="1300" b="1">
+                <a:solidFill>
+                  <a:srgbClr val="3E9B7C"/>
+                </a:solidFill>
+                <a:latin typeface="맑은 고딕"/>
+              </a:rPr>
+              <a:t>·</a:t>
+            </a:r>
+          </a:p>
+        </p:txBody>
+      </p:sp>
+      <p:sp>
+        <p:nvSpPr>
+          <p:cNvPr id="10" name="TextBox 9"/>
+          <p:cNvSpPr txBox="1"/>
+          <p:nvPr/>
+        </p:nvSpPr>
+        <p:spPr>
+          <a:xfrm>
+            <a:off x="1133856" y="3218688"/>
+            <a:ext cx="4572000" cy="411480"/>
+          </a:xfrm>
+          <a:prstGeom prst="rect">
+            <a:avLst/>
+          </a:prstGeom>
+          <a:noFill/>
+        </p:spPr>
+        <p:txBody>
+          <a:bodyPr wrap="square" lIns="0" rIns="0" tIns="0" bIns="0">
+            <a:spAutoFit/>
+          </a:bodyPr>
+          <a:lstStyle/>
+          <a:p>
+            <a:pPr algn="l">
+              <a:lnSpc>
+                <a:spcPct val="140000"/>
+              </a:lnSpc>
+            </a:pPr>
+            <a:r>
+              <a:rPr sz="1100" b="0">
+                <a:solidFill>
+                  <a:srgbClr val="151C26"/>
+                </a:solidFill>
+                <a:latin typeface="맑은 고딕"/>
+              </a:rPr>
+              <a:t>난수 시드 고정(20260831) — 군집·모델 결과가 실행마다 동일</a:t>
+            </a:r>
+          </a:p>
+        </p:txBody>
+      </p:sp>
+      <p:sp>
+        <p:nvSpPr>
+          <p:cNvPr id="11" name="TextBox 10"/>
+          <p:cNvSpPr txBox="1"/>
+          <p:nvPr/>
+        </p:nvSpPr>
+        <p:spPr>
+          <a:xfrm>
+            <a:off x="932688" y="3694176"/>
+            <a:ext cx="182880" cy="256032"/>
+          </a:xfrm>
+          <a:prstGeom prst="rect">
+            <a:avLst/>
+          </a:prstGeom>
+          <a:noFill/>
+        </p:spPr>
+        <p:txBody>
+          <a:bodyPr wrap="square" lIns="0" rIns="0" tIns="0" bIns="0">
+            <a:spAutoFit/>
+          </a:bodyPr>
+          <a:lstStyle/>
+          <a:p>
+            <a:pPr algn="l">
+              <a:lnSpc>
+                <a:spcPct val="135000"/>
+              </a:lnSpc>
+            </a:pPr>
+            <a:r>
+              <a:rPr sz="1300" b="1">
+                <a:solidFill>
+                  <a:srgbClr val="3E9B7C"/>
+                </a:solidFill>
+                <a:latin typeface="맑은 고딕"/>
+              </a:rPr>
+              <a:t>·</a:t>
+            </a:r>
+          </a:p>
+        </p:txBody>
+      </p:sp>
+      <p:sp>
+        <p:nvSpPr>
+          <p:cNvPr id="12" name="TextBox 11"/>
+          <p:cNvSpPr txBox="1"/>
+          <p:nvPr/>
+        </p:nvSpPr>
+        <p:spPr>
+          <a:xfrm>
+            <a:off x="1133856" y="3694176"/>
+            <a:ext cx="4572000" cy="411480"/>
+          </a:xfrm>
+          <a:prstGeom prst="rect">
+            <a:avLst/>
+          </a:prstGeom>
+          <a:noFill/>
+        </p:spPr>
+        <p:txBody>
+          <a:bodyPr wrap="square" lIns="0" rIns="0" tIns="0" bIns="0">
+            <a:spAutoFit/>
+          </a:bodyPr>
+          <a:lstStyle/>
+          <a:p>
+            <a:pPr algn="l">
+              <a:lnSpc>
+                <a:spcPct val="140000"/>
+              </a:lnSpc>
+            </a:pPr>
+            <a:r>
+              <a:rPr sz="1100" b="0">
+                <a:solidFill>
+                  <a:srgbClr val="151C26"/>
+                </a:solidFill>
+                <a:latin typeface="맑은 고딕"/>
+              </a:rPr>
+              <a:t>그림 8종·분석표 9종·대시보드가 같은 실행에서 함께 생성됨</a:t>
+            </a:r>
+          </a:p>
+        </p:txBody>
+      </p:sp>
+      <p:sp>
+        <p:nvSpPr>
+          <p:cNvPr id="13" name="TextBox 12"/>
+          <p:cNvSpPr txBox="1"/>
+          <p:nvPr/>
+        </p:nvSpPr>
+        <p:spPr>
+          <a:xfrm>
+            <a:off x="932688" y="4169664"/>
+            <a:ext cx="182880" cy="256032"/>
+          </a:xfrm>
+          <a:prstGeom prst="rect">
+            <a:avLst/>
+          </a:prstGeom>
+          <a:noFill/>
+        </p:spPr>
+        <p:txBody>
+          <a:bodyPr wrap="square" lIns="0" rIns="0" tIns="0" bIns="0">
+            <a:spAutoFit/>
+          </a:bodyPr>
+          <a:lstStyle/>
+          <a:p>
+            <a:pPr algn="l">
+              <a:lnSpc>
+                <a:spcPct val="135000"/>
+              </a:lnSpc>
+            </a:pPr>
+            <a:r>
+              <a:rPr sz="1300" b="1">
+                <a:solidFill>
+                  <a:srgbClr val="3E9B7C"/>
+                </a:solidFill>
+                <a:latin typeface="맑은 고딕"/>
+              </a:rPr>
+              <a:t>·</a:t>
+            </a:r>
+          </a:p>
+        </p:txBody>
+      </p:sp>
+      <p:sp>
+        <p:nvSpPr>
+          <p:cNvPr id="14" name="TextBox 13"/>
+          <p:cNvSpPr txBox="1"/>
+          <p:nvPr/>
+        </p:nvSpPr>
+        <p:spPr>
+          <a:xfrm>
+            <a:off x="1133856" y="4169664"/>
+            <a:ext cx="4572000" cy="411480"/>
+          </a:xfrm>
+          <a:prstGeom prst="rect">
+            <a:avLst/>
+          </a:prstGeom>
+          <a:noFill/>
+        </p:spPr>
+        <p:txBody>
+          <a:bodyPr wrap="square" lIns="0" rIns="0" tIns="0" bIns="0">
+            <a:spAutoFit/>
+          </a:bodyPr>
+          <a:lstStyle/>
+          <a:p>
+            <a:pPr algn="l">
+              <a:lnSpc>
+                <a:spcPct val="140000"/>
+              </a:lnSpc>
+            </a:pPr>
+            <a:r>
+              <a:rPr sz="1100" b="0">
+                <a:solidFill>
+                  <a:srgbClr val="151C26"/>
+                </a:solidFill>
+                <a:latin typeface="맑은 고딕"/>
+              </a:rPr>
+              <a:t>지표 정의·가중치·모델 파라미터가 전부 코드에 명시</a:t>
+            </a:r>
+          </a:p>
+        </p:txBody>
+      </p:sp>
+      <p:sp>
+        <p:nvSpPr>
+          <p:cNvPr id="15" name="Rounded Rectangle 14"/>
+          <p:cNvSpPr/>
+          <p:nvPr/>
+        </p:nvSpPr>
+        <p:spPr>
+          <a:xfrm>
+            <a:off x="6236207" y="2121408"/>
+            <a:ext cx="5257800" cy="2487168"/>
+          </a:xfrm>
+          <a:prstGeom prst="roundRect">
+            <a:avLst>
+              <a:gd name="adj" fmla="val 6000"/>
+            </a:avLst>
+          </a:prstGeom>
+          <a:solidFill>
+            <a:srgbClr val="FFFFFF"/>
+          </a:solidFill>
+          <a:ln w="12700">
+            <a:solidFill>
+              <a:srgbClr val="E0E5EB"/>
+            </a:solidFill>
+          </a:ln>
+          <a:effectLst/>
+        </p:spPr>
+        <p:style>
+          <a:lnRef idx="1">
+            <a:schemeClr val="accent1"/>
+          </a:lnRef>
+          <a:fillRef idx="3">
+            <a:schemeClr val="accent1"/>
+          </a:fillRef>
+          <a:effectRef idx="2">
+            <a:schemeClr val="accent1"/>
+          </a:effectRef>
+          <a:fontRef idx="minor">
+            <a:schemeClr val="lt1"/>
+          </a:fontRef>
+        </p:style>
+        <p:txBody>
+          <a:bodyPr rtlCol="0" anchor="ctr"/>
+          <a:lstStyle/>
+          <a:p/>
+        </p:txBody>
+      </p:sp>
+      <p:sp>
+        <p:nvSpPr>
           <p:cNvPr id="16" name="Rectangle 15"/>
           <p:cNvSpPr/>
           <p:nvPr/>
@@ -15872,7 +16928,7 @@
                 </a:solidFill>
                 <a:latin typeface="맑은 고딕"/>
               </a:rPr>
-              <a:t>19</a:t>
+              <a:t>20</a:t>
             </a:r>
           </a:p>
         </p:txBody>
@@ -15929,7 +16985,7 @@
                 </a:solidFill>
                 <a:latin typeface="맑은 고딕"/>
               </a:rPr>
-              <a:t>PROBLEM</a:t>
+              <a:t>BACKGROUND</a:t>
             </a:r>
           </a:p>
         </p:txBody>
@@ -15968,7 +17024,7 @@
                 </a:solidFill>
                 <a:latin typeface="맑은 고딕"/>
               </a:rPr>
-              <a:t>천안은 한 도시 안에 두 개의 시간이 흐른다</a:t>
+              <a:t>한 도시 안에 서로 다른 시간이 흐르고 있습니다</a:t>
             </a:r>
           </a:p>
         </p:txBody>
@@ -16007,7 +17063,7 @@
                 </a:solidFill>
                 <a:latin typeface="맑은 고딕"/>
               </a:rPr>
-              <a:t>수도권 전철·KTX와 산업단지를 축으로 서북부가 팽창하는 사이, 동남부 원도심과 농촌면은 반대로 움직였다.</a:t>
+              <a:t>수도권 전철·KTX와 산업단지를 축으로 서북부가 커지는 사이, 동남부 원도심과 농촌면은 반대 방향으로 움직였습니다.</a:t>
             </a:r>
           </a:p>
         </p:txBody>
@@ -16092,7 +17148,7 @@
                 </a:solidFill>
                 <a:latin typeface="맑은 고딕"/>
               </a:rPr>
-              <a:t>데이터가 말하는 격차</a:t>
+              <a:t>공공데이터로 확인한 차이</a:t>
             </a:r>
           </a:p>
         </p:txBody>
@@ -16404,7 +17460,7 @@
                 </a:solidFill>
                 <a:latin typeface="맑은 고딕"/>
               </a:rPr>
-              <a:t>군집분석상 이미 "쇠퇴" 단계로 분류</a:t>
+              <a:t>여러 지표가 함께 낮은 유형으로 분류되었습니다</a:t>
             </a:r>
           </a:p>
         </p:txBody>
@@ -16487,7 +17543,7 @@
                 </a:solidFill>
                 <a:latin typeface="맑은 고딕"/>
               </a:rPr>
-              <a:t>왜 지금 개입해야 하는가</a:t>
+              <a:t>왜 지금 살펴보면 좋을까요</a:t>
             </a:r>
           </a:p>
         </p:txBody>
@@ -16565,7 +17621,7 @@
                 </a:solidFill>
                 <a:latin typeface="맑은 고딕"/>
               </a:rPr>
-              <a:t>쇠퇴는 임계점을 넘으면 되돌리기 어렵다</a:t>
+              <a:t>변화는 서서히, 그러나 되돌리기는 어렵게 옵니다</a:t>
             </a:r>
           </a:p>
         </p:txBody>
@@ -16604,7 +17660,7 @@
                 </a:solidFill>
                 <a:latin typeface="맑은 고딕"/>
               </a:rPr>
-              <a:t>상권이 비면 유동인구가 줄고, 그래서 더 비는 자기강화 고리가 작동한다.</a:t>
+              <a:t>상권이 비면 오가는 분이 줄고, 그래서 더 비는 흐름이 생깁니다.</a:t>
             </a:r>
           </a:p>
           <a:p>
@@ -16623,7 +17679,7 @@
                 </a:solidFill>
                 <a:latin typeface="맑은 고딕"/>
               </a:rPr>
-              <a:t>이미 무너진 뒤 투입하는 예산은 같은 돈으로 훨씬 적은 효과를 낸다.</a:t>
+              <a:t>많이 진행된 뒤에 쓰는 예산은 같은 금액으로도 효과가 적습니다.</a:t>
             </a:r>
           </a:p>
         </p:txBody>
@@ -16636,7 +17692,7 @@
         </p:nvSpPr>
         <p:spPr>
           <a:xfrm>
-            <a:off x="6739128" y="4139529"/>
+            <a:off x="6739128" y="4125630"/>
             <a:ext cx="228600" cy="274320"/>
           </a:xfrm>
           <a:prstGeom prst="rect">
@@ -16675,7 +17731,7 @@
         </p:nvSpPr>
         <p:spPr>
           <a:xfrm>
-            <a:off x="7013448" y="4139529"/>
+            <a:off x="7013448" y="4125630"/>
             <a:ext cx="4251960" cy="256032"/>
           </a:xfrm>
           <a:prstGeom prst="rect">
@@ -16701,7 +17757,7 @@
                 </a:solidFill>
                 <a:latin typeface="맑은 고딕"/>
               </a:rPr>
-              <a:t>현행 선정 방식은 이 시점을 못 잡는다</a:t>
+              <a:t>조짐은 눈에 잘 띄지 않습니다</a:t>
             </a:r>
           </a:p>
         </p:txBody>
@@ -16714,7 +17770,7 @@
         </p:nvSpPr>
         <p:spPr>
           <a:xfrm>
-            <a:off x="7013448" y="4413849"/>
+            <a:off x="7013448" y="4399950"/>
             <a:ext cx="4251960" cy="841105"/>
           </a:xfrm>
           <a:prstGeom prst="rect">
@@ -16740,7 +17796,7 @@
                 </a:solidFill>
                 <a:latin typeface="맑은 고딕"/>
               </a:rPr>
-              <a:t>민원·정성평가는 '이미 나빠진 곳'을 뒤늦게 가리킨다.</a:t>
+              <a:t>통계가 뚜렷하게 나빠졌을 때는 이미 상당히 진행된 뒤인 경우가 많습니다.</a:t>
             </a:r>
           </a:p>
           <a:p>
@@ -16759,7 +17815,7 @@
                 </a:solidFill>
                 <a:latin typeface="맑은 고딕"/>
               </a:rPr>
-              <a:t>필요한 것은 아직 안 나빠졌지만 곧 나빠질 곳을 찾는 선행지표다.</a:t>
+              <a:t>미리 알아차릴 신호가 하나쯤 더 있으면 좋겠다는 생각에서 출발했습니다.</a:t>
             </a:r>
           </a:p>
         </p:txBody>
@@ -16772,7 +17828,7 @@
         </p:nvSpPr>
         <p:spPr>
           <a:xfrm>
-            <a:off x="6739128" y="5407842"/>
+            <a:off x="6739128" y="5380045"/>
             <a:ext cx="228600" cy="274320"/>
           </a:xfrm>
           <a:prstGeom prst="rect">
@@ -16811,7 +17867,7 @@
         </p:nvSpPr>
         <p:spPr>
           <a:xfrm>
-            <a:off x="7013448" y="5407842"/>
+            <a:off x="7013448" y="5380045"/>
             <a:ext cx="4251960" cy="256032"/>
           </a:xfrm>
           <a:prstGeom prst="rect">
@@ -16837,7 +17893,7 @@
                 </a:solidFill>
                 <a:latin typeface="맑은 고딕"/>
               </a:rPr>
-              <a:t>천안은 그 실험에 가장 적합한 도시다</a:t>
+              <a:t>천안시는 이런 관찰에 좋은 조건을 갖췄습니다</a:t>
             </a:r>
           </a:p>
         </p:txBody>
@@ -16850,8 +17906,8 @@
         </p:nvSpPr>
         <p:spPr>
           <a:xfrm>
-            <a:off x="7013448" y="5682162"/>
-            <a:ext cx="4251960" cy="630829"/>
+            <a:off x="7013448" y="5654365"/>
+            <a:ext cx="4251960" cy="841105"/>
           </a:xfrm>
           <a:prstGeom prst="rect">
             <a:avLst/>
@@ -16876,7 +17932,7 @@
                 </a:solidFill>
                 <a:latin typeface="맑은 고딕"/>
               </a:rPr>
-              <a:t>신도심·기성시가지·원도심·읍·농촌면이 한 시(市) 안에 모두 있어</a:t>
+              <a:t>신도심·기성시가지·원도심·읍·농촌면이 한 시(市) 안에 모두 있어,</a:t>
             </a:r>
           </a:p>
           <a:p>
@@ -16895,7 +17951,7 @@
                 </a:solidFill>
                 <a:latin typeface="맑은 고딕"/>
               </a:rPr>
-              <a:t>유형별 처방을 동시에 검증할 수 있다.</a:t>
+              <a:t>동네 유형별로 무엇이 필요한지 함께 살펴볼 수 있습니다.</a:t>
             </a:r>
           </a:p>
         </p:txBody>
@@ -17030,7 +18086,7 @@
                 </a:solidFill>
                 <a:latin typeface="맑은 고딕"/>
               </a:rPr>
-              <a:t>GAP</a:t>
+              <a:t>OUR ROLE</a:t>
             </a:r>
           </a:p>
         </p:txBody>
@@ -17069,7 +18125,7 @@
                 </a:solidFill>
                 <a:latin typeface="맑은 고딕"/>
               </a:rPr>
-              <a:t>무엇을 바꾸는가</a:t>
+              <a:t>저희가 조심스럽게 보태고 싶은 부분</a:t>
             </a:r>
           </a:p>
         </p:txBody>
@@ -17108,7 +18164,7 @@
                 </a:solidFill>
                 <a:latin typeface="맑은 고딕"/>
               </a:rPr>
-              <a:t>아이디어의 핵심은 새로운 데이터가 아니라, 의사결정의 네 가지 지점을 바꾸는 것이다.</a:t>
+              <a:t>이미 잘 해오고 계신 일들 위에, 공공데이터가 거들 수 있는 자리를 찾아보았습니다.</a:t>
             </a:r>
           </a:p>
         </p:txBody>
@@ -17123,7 +18179,7 @@
         </p:nvGraphicFramePr>
         <p:xfrm>
           <a:off x="658368" y="2395728"/>
-          <a:ext cx="10874958" cy="1531620"/>
+          <a:ext cx="10874957" cy="1920240"/>
         </p:xfrm>
         <a:graphic>
           <a:graphicData uri="http://schemas.openxmlformats.org/drawingml/2006/table">
@@ -17132,11 +18188,11 @@
                 <a:tableStyleId>{5C22544A-7EE6-4342-B048-85BDC9FD1C3A}</a:tableStyleId>
               </a:tblPr>
               <a:tblGrid>
-                <a:gridCol w="2398888"/>
-                <a:gridCol w="3838220"/>
-                <a:gridCol w="4637850"/>
+                <a:gridCol w="1864278"/>
+                <a:gridCol w="4660696"/>
+                <a:gridCol w="4349983"/>
               </a:tblGrid>
-              <a:tr h="306324">
+              <a:tr h="384048">
                 <a:tc>
                   <a:txBody>
                     <a:bodyPr/>
@@ -17144,13 +18200,13 @@
                     <a:p>
                       <a:pPr algn="ctr"/>
                       <a:r>
-                        <a:rPr sz="1300" b="1">
+                        <a:rPr sz="1150" b="1">
                           <a:solidFill>
                             <a:srgbClr val="151C26"/>
                           </a:solidFill>
                           <a:latin typeface="맑은 고딕"/>
                         </a:rPr>
-                        <a:t>의사결정 지점</a:t>
+                        <a:t>업무 장면</a:t>
                       </a:r>
                     </a:p>
                   </a:txBody>
@@ -17167,13 +18223,13 @@
                     <a:p>
                       <a:pPr algn="ctr"/>
                       <a:r>
-                        <a:rPr sz="1300" b="1">
+                        <a:rPr sz="1150" b="1">
                           <a:solidFill>
                             <a:srgbClr val="151C26"/>
                           </a:solidFill>
                           <a:latin typeface="맑은 고딕"/>
                         </a:rPr>
-                        <a:t>현행 방식</a:t>
+                        <a:t>이미 하고 계신 일 (가장 중요한 부분)</a:t>
                       </a:r>
                     </a:p>
                   </a:txBody>
@@ -17190,13 +18246,13 @@
                     <a:p>
                       <a:pPr algn="ctr"/>
                       <a:r>
-                        <a:rPr sz="1300" b="1">
+                        <a:rPr sz="1150" b="1">
                           <a:solidFill>
                             <a:srgbClr val="151C26"/>
                           </a:solidFill>
                           <a:latin typeface="맑은 고딕"/>
                         </a:rPr>
-                        <a:t>CBC 제안</a:t>
+                        <a:t>데이터가 거들 수 있는 일</a:t>
                       </a:r>
                     </a:p>
                   </a:txBody>
@@ -17207,7 +18263,7 @@
                   </a:tcPr>
                 </a:tc>
               </a:tr>
-              <a:tr h="306324">
+              <a:tr h="384048">
                 <a:tc>
                   <a:txBody>
                     <a:bodyPr/>
@@ -17215,13 +18271,13 @@
                     <a:p>
                       <a:pPr algn="l"/>
                       <a:r>
-                        <a:rPr sz="1250">
+                        <a:rPr sz="1100">
                           <a:solidFill>
                             <a:srgbClr val="151C26"/>
                           </a:solidFill>
                           <a:latin typeface="맑은 고딕"/>
                         </a:rPr>
-                        <a:t>사업지 선정 근거</a:t>
+                        <a:t>사업지 검토</a:t>
                       </a:r>
                     </a:p>
                   </a:txBody>
@@ -17238,13 +18294,13 @@
                     <a:p>
                       <a:pPr algn="ctr"/>
                       <a:r>
-                        <a:rPr sz="1250">
+                        <a:rPr sz="1100">
                           <a:solidFill>
                             <a:srgbClr val="151C26"/>
                           </a:solidFill>
                           <a:latin typeface="맑은 고딕"/>
                         </a:rPr>
-                        <a:t>정성평가·민원·경험</a:t>
+                        <a:t>현장을 다니며 쌓은 경험과 주민 의견 청취</a:t>
                       </a:r>
                     </a:p>
                   </a:txBody>
@@ -17261,13 +18317,13 @@
                     <a:p>
                       <a:pPr algn="ctr"/>
                       <a:r>
-                        <a:rPr sz="1250">
+                        <a:rPr sz="1100">
                           <a:solidFill>
                             <a:srgbClr val="151C26"/>
                           </a:solidFill>
                           <a:latin typeface="맑은 고딕"/>
                         </a:rPr>
-                        <a:t>11개 지표 엔트로피 가중 정량지수</a:t>
+                        <a:t>11개 지표로 계산한 참고용 수치 한 장</a:t>
                       </a:r>
                     </a:p>
                   </a:txBody>
@@ -17278,7 +18334,7 @@
                   </a:tcPr>
                 </a:tc>
               </a:tr>
-              <a:tr h="306324">
+              <a:tr h="384048">
                 <a:tc>
                   <a:txBody>
                     <a:bodyPr/>
@@ -17286,13 +18342,13 @@
                     <a:p>
                       <a:pPr algn="l"/>
                       <a:r>
-                        <a:rPr sz="1250">
+                        <a:rPr sz="1100">
                           <a:solidFill>
                             <a:srgbClr val="151C26"/>
                           </a:solidFill>
                           <a:latin typeface="맑은 고딕"/>
                         </a:rPr>
-                        <a:t>개입 시점</a:t>
+                        <a:t>살펴보는 시점</a:t>
                       </a:r>
                     </a:p>
                   </a:txBody>
@@ -17309,13 +18365,13 @@
                     <a:p>
                       <a:pPr algn="ctr"/>
                       <a:r>
-                        <a:rPr sz="1250">
+                        <a:rPr sz="1100">
                           <a:solidFill>
                             <a:srgbClr val="151C26"/>
                           </a:solidFill>
                           <a:latin typeface="맑은 고딕"/>
                         </a:rPr>
-                        <a:t>쇠퇴가 확정된 뒤 사후 대응</a:t>
+                        <a:t>민원과 현장 변화를 통한 상황 파악</a:t>
                       </a:r>
                     </a:p>
                   </a:txBody>
@@ -17332,13 +18388,13 @@
                     <a:p>
                       <a:pPr algn="ctr"/>
                       <a:r>
-                        <a:rPr sz="1250">
+                        <a:rPr sz="1100">
                           <a:solidFill>
                             <a:srgbClr val="151C26"/>
                           </a:solidFill>
                           <a:latin typeface="맑은 고딕"/>
                         </a:rPr>
-                        <a:t>3년 선행 쇠퇴 경보(조기 개입)</a:t>
+                        <a:t>지표 변화로 미리 살펴보는 3년 뒤 전망</a:t>
                       </a:r>
                     </a:p>
                   </a:txBody>
@@ -17349,7 +18405,7 @@
                   </a:tcPr>
                 </a:tc>
               </a:tr>
-              <a:tr h="306324">
+              <a:tr h="384048">
                 <a:tc>
                   <a:txBody>
                     <a:bodyPr/>
@@ -17357,7 +18413,7 @@
                     <a:p>
                       <a:pPr algn="l"/>
                       <a:r>
-                        <a:rPr sz="1250">
+                        <a:rPr sz="1100">
                           <a:solidFill>
                             <a:srgbClr val="151C26"/>
                           </a:solidFill>
@@ -17380,13 +18436,13 @@
                     <a:p>
                       <a:pPr algn="ctr"/>
                       <a:r>
-                        <a:rPr sz="1250">
+                        <a:rPr sz="1100">
                           <a:solidFill>
                             <a:srgbClr val="151C26"/>
                           </a:solidFill>
                           <a:latin typeface="맑은 고딕"/>
                         </a:rPr>
-                        <a:t>지역별 총액 안분</a:t>
+                        <a:t>지역 여건과 형평성을 고려한 배분</a:t>
                       </a:r>
                     </a:p>
                   </a:txBody>
@@ -17403,13 +18459,13 @@
                     <a:p>
                       <a:pPr algn="ctr"/>
                       <a:r>
-                        <a:rPr sz="1250">
+                        <a:rPr sz="1100">
                           <a:solidFill>
                             <a:srgbClr val="151C26"/>
                           </a:solidFill>
                           <a:latin typeface="맑은 고딕"/>
                         </a:rPr>
-                        <a:t>한계효용 기반 투입 순서 산출</a:t>
+                        <a:t>한 곳 더 지을 때의 효과를 순서대로 계산</a:t>
                       </a:r>
                     </a:p>
                   </a:txBody>
@@ -17420,7 +18476,7 @@
                   </a:tcPr>
                 </a:tc>
               </a:tr>
-              <a:tr h="306324">
+              <a:tr h="384048">
                 <a:tc>
                   <a:txBody>
                     <a:bodyPr/>
@@ -17428,13 +18484,13 @@
                     <a:p>
                       <a:pPr algn="l"/>
                       <a:r>
-                        <a:rPr sz="1250">
+                        <a:rPr sz="1100">
                           <a:solidFill>
                             <a:srgbClr val="151C26"/>
                           </a:solidFill>
                           <a:latin typeface="맑은 고딕"/>
                         </a:rPr>
-                        <a:t>설명 책임</a:t>
+                        <a:t>선정 사유 설명</a:t>
                       </a:r>
                     </a:p>
                   </a:txBody>
@@ -17451,13 +18507,13 @@
                     <a:p>
                       <a:pPr algn="ctr"/>
                       <a:r>
-                        <a:rPr sz="1250">
+                        <a:rPr sz="1100">
                           <a:solidFill>
                             <a:srgbClr val="151C26"/>
                           </a:solidFill>
                           <a:latin typeface="맑은 고딕"/>
                         </a:rPr>
-                        <a:t>선정 사유를 사후 서술</a:t>
+                        <a:t>사업 필요성에 대한 행정적 판단</a:t>
                       </a:r>
                     </a:p>
                   </a:txBody>
@@ -17474,13 +18530,13 @@
                     <a:p>
                       <a:pPr algn="ctr"/>
                       <a:r>
-                        <a:rPr sz="1250">
+                        <a:rPr sz="1100">
                           <a:solidFill>
                             <a:srgbClr val="151C26"/>
                           </a:solidFill>
                           <a:latin typeface="맑은 고딕"/>
                         </a:rPr>
-                        <a:t>SHAP 요인분해로 근거 자동 생성</a:t>
+                        <a:t>판단의 근거 수치를 표로 함께 제시</a:t>
                       </a:r>
                     </a:p>
                   </a:txBody>
@@ -17503,8 +18559,8 @@
         </p:nvSpPr>
         <p:spPr>
           <a:xfrm>
-            <a:off x="658368" y="4224528"/>
-            <a:ext cx="10874959" cy="1371600"/>
+            <a:off x="658368" y="4443984"/>
+            <a:ext cx="10874959" cy="1298448"/>
           </a:xfrm>
           <a:prstGeom prst="roundRect">
             <a:avLst>
@@ -17547,7 +18603,7 @@
         </p:nvSpPr>
         <p:spPr>
           <a:xfrm>
-            <a:off x="978407" y="4443984"/>
+            <a:off x="978407" y="4645152"/>
             <a:ext cx="10424160" cy="292608"/>
           </a:xfrm>
           <a:prstGeom prst="rect">
@@ -17567,13 +18623,13 @@
               </a:lnSpc>
             </a:pPr>
             <a:r>
-              <a:rPr sz="1500" b="1">
+              <a:rPr sz="1450" b="1">
                 <a:solidFill>
                   <a:srgbClr val="151C26"/>
                 </a:solidFill>
                 <a:latin typeface="맑은 고딕"/>
               </a:rPr>
-              <a:t>핵심 주장 — 우리는 '더 많은 데이터'가 아니라 '같은 데이터로 더 이른 시점에, 순서를 매겨' 쓰자고 제안한다.</a:t>
+              <a:t>데이터는 현장의 경험을 대신할 수 없습니다. 다만 한 번 더 확인해 보는 참고자료는 될 수 있다고 생각합니다.</a:t>
             </a:r>
           </a:p>
         </p:txBody>
@@ -17586,8 +18642,8 @@
         </p:nvSpPr>
         <p:spPr>
           <a:xfrm>
-            <a:off x="978407" y="4864608"/>
-            <a:ext cx="10424160" cy="640080"/>
+            <a:off x="978407" y="5029200"/>
+            <a:ext cx="10424160" cy="621792"/>
           </a:xfrm>
           <a:prstGeom prst="rect">
             <a:avLst/>
@@ -17612,7 +18668,7 @@
                 </a:solidFill>
                 <a:latin typeface="맑은 고딕"/>
               </a:rPr>
-              <a:t>천안시가 이미 접근 가능한 공공데이터만으로 세 가지 산출물(격차지수·조기경보·투자순위표)을 만들 수 있다.</a:t>
+              <a:t>새로운 데이터를 더 사자는 제안이 아닙니다. 천안시가 이미 쓰실 수 있는 공공데이터만 엮어 세 가지 참고자료를 만들었고,</a:t>
             </a:r>
           </a:p>
           <a:p>
@@ -17631,7 +18687,7 @@
                 </a:solidFill>
                 <a:latin typeface="맑은 고딕"/>
               </a:rPr>
-              <a:t>추가 데이터 구매나 신규 센서 설치 없이, 스크립트 한 줄로 매년 갱신되는 상시 진단체계가 된다.</a:t>
+              <a:t>추가 비용이나 시스템 없이 스크립트 한 줄로 매년 갱신하실 수 있게 준비했습니다.</a:t>
             </a:r>
           </a:p>
         </p:txBody>

--- a/deliverables/기획서_천안균형발전나침반_CBC.pptx
+++ b/deliverables/기획서_천안균형발전나침반_CBC.pptx
@@ -3638,7 +3638,7 @@
                 </a:solidFill>
                 <a:latin typeface="맑은 고딕"/>
               </a:rPr>
-              <a:t>25개 생활권 · 지표 11종</a:t>
+              <a:t>25개 생활권 · 지표 12종</a:t>
             </a:r>
           </a:p>
         </p:txBody>
@@ -5655,7 +5655,7 @@
                 </a:solidFill>
                 <a:latin typeface="맑은 고딕"/>
               </a:rPr>
-              <a:t>— (데이터 대기)</a:t>
+              <a:t>0.487</a:t>
             </a:r>
           </a:p>
         </p:txBody>
@@ -5733,7 +5733,7 @@
                 </a:solidFill>
                 <a:latin typeface="맑은 고딕"/>
               </a:rPr>
-              <a:t>—</a:t>
+              <a:t>16.19</a:t>
             </a:r>
           </a:p>
         </p:txBody>
@@ -5811,7 +5811,7 @@
                 </a:solidFill>
                 <a:latin typeface="맑은 고딕"/>
               </a:rPr>
-              <a:t>—</a:t>
+              <a:t>MAE 0.2% 개선</a:t>
             </a:r>
           </a:p>
         </p:txBody>
@@ -6151,92 +6151,743 @@
           </a:p>
         </p:txBody>
       </p:sp>
-      <p:sp>
-        <p:nvSpPr>
-          <p:cNvPr id="5" name="Rounded Rectangle 4"/>
-          <p:cNvSpPr/>
-          <p:nvPr/>
-        </p:nvSpPr>
-        <p:spPr>
-          <a:xfrm>
-            <a:off x="5961888" y="5029200"/>
-            <a:ext cx="5577840" cy="822960"/>
-          </a:xfrm>
-          <a:prstGeom prst="roundRect">
-            <a:avLst>
-              <a:gd name="adj" fmla="val 6000"/>
-            </a:avLst>
-          </a:prstGeom>
-          <a:solidFill>
-            <a:srgbClr val="FDF8EC"/>
-          </a:solidFill>
-          <a:ln>
-            <a:noFill/>
-          </a:ln>
-          <a:effectLst/>
-        </p:spPr>
-        <p:style>
-          <a:lnRef idx="1">
-            <a:schemeClr val="accent1"/>
-          </a:lnRef>
-          <a:fillRef idx="3">
-            <a:schemeClr val="accent1"/>
-          </a:fillRef>
-          <a:effectRef idx="2">
-            <a:schemeClr val="accent1"/>
-          </a:effectRef>
-          <a:fontRef idx="minor">
-            <a:schemeClr val="lt1"/>
-          </a:fontRef>
-        </p:style>
-        <p:txBody>
-          <a:bodyPr rtlCol="0" anchor="ctr"/>
-          <a:lstStyle/>
-          <a:p/>
-        </p:txBody>
-      </p:sp>
-      <p:sp>
-        <p:nvSpPr>
-          <p:cNvPr id="6" name="TextBox 5"/>
-          <p:cNvSpPr txBox="1"/>
-          <p:nvPr/>
-        </p:nvSpPr>
-        <p:spPr>
-          <a:xfrm>
-            <a:off x="6190488" y="5193792"/>
-            <a:ext cx="5120640" cy="502920"/>
-          </a:xfrm>
-          <a:prstGeom prst="rect">
-            <a:avLst/>
-          </a:prstGeom>
-          <a:noFill/>
-        </p:spPr>
-        <p:txBody>
-          <a:bodyPr wrap="square" lIns="0" rIns="0" tIns="0" bIns="0">
-            <a:spAutoFit/>
-          </a:bodyPr>
-          <a:lstStyle/>
-          <a:p>
-            <a:pPr algn="l">
-              <a:lnSpc>
-                <a:spcPct val="140000"/>
-              </a:lnSpc>
-            </a:pPr>
-            <a:r>
-              <a:rPr sz="1050" b="0">
-                <a:solidFill>
-                  <a:srgbClr val="151C26"/>
-                </a:solidFill>
-                <a:latin typeface="맑은 고딕"/>
-              </a:rPr>
-              <a:t>예측 엔진 미실행 — 인구증감률(정답변수)이 단일 시점이라 변동이 없습니다. 다른 연도의 주민등록 인구 파일을 data/raw/pop_jumin_2.csv 로 추가하면 조기경보 모델이 활성화됩니다.</a:t>
-            </a:r>
-          </a:p>
-        </p:txBody>
-      </p:sp>
-      <p:sp>
-        <p:nvSpPr>
-          <p:cNvPr id="7" name="TextBox 6"/>
+      <p:pic>
+        <p:nvPicPr>
+          <p:cNvPr id="5" name="Picture 4" descr="04_조기경보.png"/>
+          <p:cNvPicPr>
+            <a:picLocks noChangeAspect="1"/>
+          </p:cNvPicPr>
+          <p:nvPr/>
+        </p:nvPicPr>
+        <p:blipFill>
+          <a:blip r:embed="rId2"/>
+          <a:stretch>
+            <a:fillRect/>
+          </a:stretch>
+        </p:blipFill>
+        <p:spPr>
+          <a:xfrm>
+            <a:off x="658368" y="2128755"/>
+            <a:ext cx="5120640" cy="3926369"/>
+          </a:xfrm>
+          <a:prstGeom prst="rect">
+            <a:avLst/>
+          </a:prstGeom>
+        </p:spPr>
+      </p:pic>
+      <p:pic>
+        <p:nvPicPr>
+          <p:cNvPr id="6" name="Picture 5" descr="05_SHAP_요인분해.png"/>
+          <p:cNvPicPr>
+            <a:picLocks noChangeAspect="1"/>
+          </p:cNvPicPr>
+          <p:nvPr/>
+        </p:nvPicPr>
+        <p:blipFill>
+          <a:blip r:embed="rId3"/>
+          <a:stretch>
+            <a:fillRect/>
+          </a:stretch>
+        </p:blipFill>
+        <p:spPr>
+          <a:xfrm>
+            <a:off x="5961888" y="2282773"/>
+            <a:ext cx="5577840" cy="2475333"/>
+          </a:xfrm>
+          <a:prstGeom prst="rect">
+            <a:avLst/>
+          </a:prstGeom>
+        </p:spPr>
+      </p:pic>
+      <p:graphicFrame>
+        <p:nvGraphicFramePr>
+          <p:cNvPr id="7" name="Table 6"/>
+          <p:cNvGraphicFramePr>
+            <a:graphicFrameLocks noGrp="1"/>
+          </p:cNvGraphicFramePr>
+          <p:nvPr/>
+        </p:nvGraphicFramePr>
+        <p:xfrm>
+          <a:off x="5961888" y="5029200"/>
+          <a:ext cx="5577837" cy="2144268"/>
+        </p:xfrm>
+        <a:graphic>
+          <a:graphicData uri="http://schemas.openxmlformats.org/drawingml/2006/table">
+            <a:tbl>
+              <a:tblPr firstRow="1" bandRow="1">
+                <a:tableStyleId>{5C22544A-7EE6-4342-B048-85BDC9FD1C3A}</a:tableStyleId>
+              </a:tblPr>
+              <a:tblGrid>
+                <a:gridCol w="2115732"/>
+                <a:gridCol w="1154035"/>
+                <a:gridCol w="1154035"/>
+                <a:gridCol w="1154035"/>
+              </a:tblGrid>
+              <a:tr h="306324">
+                <a:tc>
+                  <a:txBody>
+                    <a:bodyPr/>
+                    <a:lstStyle/>
+                    <a:p>
+                      <a:pPr algn="ctr"/>
+                      <a:r>
+                        <a:rPr sz="1000" b="1">
+                          <a:solidFill>
+                            <a:srgbClr val="151C26"/>
+                          </a:solidFill>
+                          <a:latin typeface="맑은 고딕"/>
+                        </a:rPr>
+                        <a:t>생활권</a:t>
+                      </a:r>
+                    </a:p>
+                  </a:txBody>
+                  <a:tcPr anchor="ctr">
+                    <a:solidFill>
+                      <a:srgbClr val="F5F7FA"/>
+                    </a:solidFill>
+                  </a:tcPr>
+                </a:tc>
+                <a:tc>
+                  <a:txBody>
+                    <a:bodyPr/>
+                    <a:lstStyle/>
+                    <a:p>
+                      <a:pPr algn="ctr"/>
+                      <a:r>
+                        <a:rPr sz="1000" b="1">
+                          <a:solidFill>
+                            <a:srgbClr val="151C26"/>
+                          </a:solidFill>
+                          <a:latin typeface="맑은 고딕"/>
+                        </a:rPr>
+                        <a:t>현재</a:t>
+                      </a:r>
+                    </a:p>
+                  </a:txBody>
+                  <a:tcPr anchor="ctr">
+                    <a:solidFill>
+                      <a:srgbClr val="F5F7FA"/>
+                    </a:solidFill>
+                  </a:tcPr>
+                </a:tc>
+                <a:tc>
+                  <a:txBody>
+                    <a:bodyPr/>
+                    <a:lstStyle/>
+                    <a:p>
+                      <a:pPr algn="ctr"/>
+                      <a:r>
+                        <a:rPr sz="1000" b="1">
+                          <a:solidFill>
+                            <a:srgbClr val="151C26"/>
+                          </a:solidFill>
+                          <a:latin typeface="맑은 고딕"/>
+                        </a:rPr>
+                        <a:t>3년 후</a:t>
+                      </a:r>
+                    </a:p>
+                  </a:txBody>
+                  <a:tcPr anchor="ctr">
+                    <a:solidFill>
+                      <a:srgbClr val="F5F7FA"/>
+                    </a:solidFill>
+                  </a:tcPr>
+                </a:tc>
+                <a:tc>
+                  <a:txBody>
+                    <a:bodyPr/>
+                    <a:lstStyle/>
+                    <a:p>
+                      <a:pPr algn="ctr"/>
+                      <a:r>
+                        <a:rPr sz="1000" b="1">
+                          <a:solidFill>
+                            <a:srgbClr val="151C26"/>
+                          </a:solidFill>
+                          <a:latin typeface="맑은 고딕"/>
+                        </a:rPr>
+                        <a:t>변화</a:t>
+                      </a:r>
+                    </a:p>
+                  </a:txBody>
+                  <a:tcPr anchor="ctr">
+                    <a:solidFill>
+                      <a:srgbClr val="F5F7FA"/>
+                    </a:solidFill>
+                  </a:tcPr>
+                </a:tc>
+              </a:tr>
+              <a:tr h="306324">
+                <a:tc>
+                  <a:txBody>
+                    <a:bodyPr/>
+                    <a:lstStyle/>
+                    <a:p>
+                      <a:pPr algn="l"/>
+                      <a:r>
+                        <a:rPr sz="950">
+                          <a:solidFill>
+                            <a:srgbClr val="151C26"/>
+                          </a:solidFill>
+                          <a:latin typeface="맑은 고딕"/>
+                        </a:rPr>
+                        <a:t>중앙동</a:t>
+                      </a:r>
+                    </a:p>
+                  </a:txBody>
+                  <a:tcPr anchor="ctr">
+                    <a:solidFill>
+                      <a:srgbClr val="FFFFFF"/>
+                    </a:solidFill>
+                  </a:tcPr>
+                </a:tc>
+                <a:tc>
+                  <a:txBody>
+                    <a:bodyPr/>
+                    <a:lstStyle/>
+                    <a:p>
+                      <a:pPr algn="ctr"/>
+                      <a:r>
+                        <a:rPr sz="950">
+                          <a:solidFill>
+                            <a:srgbClr val="151C26"/>
+                          </a:solidFill>
+                          <a:latin typeface="맑은 고딕"/>
+                        </a:rPr>
+                        <a:t>100</a:t>
+                      </a:r>
+                    </a:p>
+                  </a:txBody>
+                  <a:tcPr anchor="ctr">
+                    <a:solidFill>
+                      <a:srgbClr val="FFFFFF"/>
+                    </a:solidFill>
+                  </a:tcPr>
+                </a:tc>
+                <a:tc>
+                  <a:txBody>
+                    <a:bodyPr/>
+                    <a:lstStyle/>
+                    <a:p>
+                      <a:pPr algn="ctr"/>
+                      <a:r>
+                        <a:rPr sz="950">
+                          <a:solidFill>
+                            <a:srgbClr val="151C26"/>
+                          </a:solidFill>
+                          <a:latin typeface="맑은 고딕"/>
+                        </a:rPr>
+                        <a:t>92</a:t>
+                      </a:r>
+                    </a:p>
+                  </a:txBody>
+                  <a:tcPr anchor="ctr">
+                    <a:solidFill>
+                      <a:srgbClr val="FFFFFF"/>
+                    </a:solidFill>
+                  </a:tcPr>
+                </a:tc>
+                <a:tc>
+                  <a:txBody>
+                    <a:bodyPr/>
+                    <a:lstStyle/>
+                    <a:p>
+                      <a:pPr algn="ctr"/>
+                      <a:r>
+                        <a:rPr sz="950">
+                          <a:solidFill>
+                            <a:srgbClr val="151C26"/>
+                          </a:solidFill>
+                          <a:latin typeface="맑은 고딕"/>
+                        </a:rPr>
+                        <a:t>-8</a:t>
+                      </a:r>
+                    </a:p>
+                  </a:txBody>
+                  <a:tcPr anchor="ctr">
+                    <a:solidFill>
+                      <a:srgbClr val="FFFFFF"/>
+                    </a:solidFill>
+                  </a:tcPr>
+                </a:tc>
+              </a:tr>
+              <a:tr h="306324">
+                <a:tc>
+                  <a:txBody>
+                    <a:bodyPr/>
+                    <a:lstStyle/>
+                    <a:p>
+                      <a:pPr algn="l"/>
+                      <a:r>
+                        <a:rPr sz="950">
+                          <a:solidFill>
+                            <a:srgbClr val="151C26"/>
+                          </a:solidFill>
+                          <a:latin typeface="맑은 고딕"/>
+                        </a:rPr>
+                        <a:t>원성동</a:t>
+                      </a:r>
+                    </a:p>
+                  </a:txBody>
+                  <a:tcPr anchor="ctr">
+                    <a:solidFill>
+                      <a:srgbClr val="FFFFFF"/>
+                    </a:solidFill>
+                  </a:tcPr>
+                </a:tc>
+                <a:tc>
+                  <a:txBody>
+                    <a:bodyPr/>
+                    <a:lstStyle/>
+                    <a:p>
+                      <a:pPr algn="ctr"/>
+                      <a:r>
+                        <a:rPr sz="950">
+                          <a:solidFill>
+                            <a:srgbClr val="151C26"/>
+                          </a:solidFill>
+                          <a:latin typeface="맑은 고딕"/>
+                        </a:rPr>
+                        <a:t>71</a:t>
+                      </a:r>
+                    </a:p>
+                  </a:txBody>
+                  <a:tcPr anchor="ctr">
+                    <a:solidFill>
+                      <a:srgbClr val="FFFFFF"/>
+                    </a:solidFill>
+                  </a:tcPr>
+                </a:tc>
+                <a:tc>
+                  <a:txBody>
+                    <a:bodyPr/>
+                    <a:lstStyle/>
+                    <a:p>
+                      <a:pPr algn="ctr"/>
+                      <a:r>
+                        <a:rPr sz="950">
+                          <a:solidFill>
+                            <a:srgbClr val="151C26"/>
+                          </a:solidFill>
+                          <a:latin typeface="맑은 고딕"/>
+                        </a:rPr>
+                        <a:t>89</a:t>
+                      </a:r>
+                    </a:p>
+                  </a:txBody>
+                  <a:tcPr anchor="ctr">
+                    <a:solidFill>
+                      <a:srgbClr val="FFFFFF"/>
+                    </a:solidFill>
+                  </a:tcPr>
+                </a:tc>
+                <a:tc>
+                  <a:txBody>
+                    <a:bodyPr/>
+                    <a:lstStyle/>
+                    <a:p>
+                      <a:pPr algn="ctr"/>
+                      <a:r>
+                        <a:rPr sz="950">
+                          <a:solidFill>
+                            <a:srgbClr val="151C26"/>
+                          </a:solidFill>
+                          <a:latin typeface="맑은 고딕"/>
+                        </a:rPr>
+                        <a:t>+18</a:t>
+                      </a:r>
+                    </a:p>
+                  </a:txBody>
+                  <a:tcPr anchor="ctr">
+                    <a:solidFill>
+                      <a:srgbClr val="FFFFFF"/>
+                    </a:solidFill>
+                  </a:tcPr>
+                </a:tc>
+              </a:tr>
+              <a:tr h="306324">
+                <a:tc>
+                  <a:txBody>
+                    <a:bodyPr/>
+                    <a:lstStyle/>
+                    <a:p>
+                      <a:pPr algn="l"/>
+                      <a:r>
+                        <a:rPr sz="950">
+                          <a:solidFill>
+                            <a:srgbClr val="151C26"/>
+                          </a:solidFill>
+                          <a:latin typeface="맑은 고딕"/>
+                        </a:rPr>
+                        <a:t>광덕면</a:t>
+                      </a:r>
+                    </a:p>
+                  </a:txBody>
+                  <a:tcPr anchor="ctr">
+                    <a:solidFill>
+                      <a:srgbClr val="FFFFFF"/>
+                    </a:solidFill>
+                  </a:tcPr>
+                </a:tc>
+                <a:tc>
+                  <a:txBody>
+                    <a:bodyPr/>
+                    <a:lstStyle/>
+                    <a:p>
+                      <a:pPr algn="ctr"/>
+                      <a:r>
+                        <a:rPr sz="950">
+                          <a:solidFill>
+                            <a:srgbClr val="151C26"/>
+                          </a:solidFill>
+                          <a:latin typeface="맑은 고딕"/>
+                        </a:rPr>
+                        <a:t>53</a:t>
+                      </a:r>
+                    </a:p>
+                  </a:txBody>
+                  <a:tcPr anchor="ctr">
+                    <a:solidFill>
+                      <a:srgbClr val="FFFFFF"/>
+                    </a:solidFill>
+                  </a:tcPr>
+                </a:tc>
+                <a:tc>
+                  <a:txBody>
+                    <a:bodyPr/>
+                    <a:lstStyle/>
+                    <a:p>
+                      <a:pPr algn="ctr"/>
+                      <a:r>
+                        <a:rPr sz="950">
+                          <a:solidFill>
+                            <a:srgbClr val="151C26"/>
+                          </a:solidFill>
+                          <a:latin typeface="맑은 고딕"/>
+                        </a:rPr>
+                        <a:t>72</a:t>
+                      </a:r>
+                    </a:p>
+                  </a:txBody>
+                  <a:tcPr anchor="ctr">
+                    <a:solidFill>
+                      <a:srgbClr val="FFFFFF"/>
+                    </a:solidFill>
+                  </a:tcPr>
+                </a:tc>
+                <a:tc>
+                  <a:txBody>
+                    <a:bodyPr/>
+                    <a:lstStyle/>
+                    <a:p>
+                      <a:pPr algn="ctr"/>
+                      <a:r>
+                        <a:rPr sz="950">
+                          <a:solidFill>
+                            <a:srgbClr val="151C26"/>
+                          </a:solidFill>
+                          <a:latin typeface="맑은 고딕"/>
+                        </a:rPr>
+                        <a:t>+19</a:t>
+                      </a:r>
+                    </a:p>
+                  </a:txBody>
+                  <a:tcPr anchor="ctr">
+                    <a:solidFill>
+                      <a:srgbClr val="FFFFFF"/>
+                    </a:solidFill>
+                  </a:tcPr>
+                </a:tc>
+              </a:tr>
+              <a:tr h="306324">
+                <a:tc>
+                  <a:txBody>
+                    <a:bodyPr/>
+                    <a:lstStyle/>
+                    <a:p>
+                      <a:pPr algn="l"/>
+                      <a:r>
+                        <a:rPr sz="950">
+                          <a:solidFill>
+                            <a:srgbClr val="151C26"/>
+                          </a:solidFill>
+                          <a:latin typeface="맑은 고딕"/>
+                        </a:rPr>
+                        <a:t>입장면</a:t>
+                      </a:r>
+                    </a:p>
+                  </a:txBody>
+                  <a:tcPr anchor="ctr">
+                    <a:solidFill>
+                      <a:srgbClr val="FFFFFF"/>
+                    </a:solidFill>
+                  </a:tcPr>
+                </a:tc>
+                <a:tc>
+                  <a:txBody>
+                    <a:bodyPr/>
+                    <a:lstStyle/>
+                    <a:p>
+                      <a:pPr algn="ctr"/>
+                      <a:r>
+                        <a:rPr sz="950">
+                          <a:solidFill>
+                            <a:srgbClr val="151C26"/>
+                          </a:solidFill>
+                          <a:latin typeface="맑은 고딕"/>
+                        </a:rPr>
+                        <a:t>61</a:t>
+                      </a:r>
+                    </a:p>
+                  </a:txBody>
+                  <a:tcPr anchor="ctr">
+                    <a:solidFill>
+                      <a:srgbClr val="FFFFFF"/>
+                    </a:solidFill>
+                  </a:tcPr>
+                </a:tc>
+                <a:tc>
+                  <a:txBody>
+                    <a:bodyPr/>
+                    <a:lstStyle/>
+                    <a:p>
+                      <a:pPr algn="ctr"/>
+                      <a:r>
+                        <a:rPr sz="950">
+                          <a:solidFill>
+                            <a:srgbClr val="151C26"/>
+                          </a:solidFill>
+                          <a:latin typeface="맑은 고딕"/>
+                        </a:rPr>
+                        <a:t>71</a:t>
+                      </a:r>
+                    </a:p>
+                  </a:txBody>
+                  <a:tcPr anchor="ctr">
+                    <a:solidFill>
+                      <a:srgbClr val="FFFFFF"/>
+                    </a:solidFill>
+                  </a:tcPr>
+                </a:tc>
+                <a:tc>
+                  <a:txBody>
+                    <a:bodyPr/>
+                    <a:lstStyle/>
+                    <a:p>
+                      <a:pPr algn="ctr"/>
+                      <a:r>
+                        <a:rPr sz="950">
+                          <a:solidFill>
+                            <a:srgbClr val="151C26"/>
+                          </a:solidFill>
+                          <a:latin typeface="맑은 고딕"/>
+                        </a:rPr>
+                        <a:t>+10</a:t>
+                      </a:r>
+                    </a:p>
+                  </a:txBody>
+                  <a:tcPr anchor="ctr">
+                    <a:solidFill>
+                      <a:srgbClr val="FFFFFF"/>
+                    </a:solidFill>
+                  </a:tcPr>
+                </a:tc>
+              </a:tr>
+              <a:tr h="306324">
+                <a:tc>
+                  <a:txBody>
+                    <a:bodyPr/>
+                    <a:lstStyle/>
+                    <a:p>
+                      <a:pPr algn="l"/>
+                      <a:r>
+                        <a:rPr sz="950">
+                          <a:solidFill>
+                            <a:srgbClr val="151C26"/>
+                          </a:solidFill>
+                          <a:latin typeface="맑은 고딕"/>
+                        </a:rPr>
+                        <a:t>북면</a:t>
+                      </a:r>
+                    </a:p>
+                  </a:txBody>
+                  <a:tcPr anchor="ctr">
+                    <a:solidFill>
+                      <a:srgbClr val="FFFFFF"/>
+                    </a:solidFill>
+                  </a:tcPr>
+                </a:tc>
+                <a:tc>
+                  <a:txBody>
+                    <a:bodyPr/>
+                    <a:lstStyle/>
+                    <a:p>
+                      <a:pPr algn="ctr"/>
+                      <a:r>
+                        <a:rPr sz="950">
+                          <a:solidFill>
+                            <a:srgbClr val="151C26"/>
+                          </a:solidFill>
+                          <a:latin typeface="맑은 고딕"/>
+                        </a:rPr>
+                        <a:t>43</a:t>
+                      </a:r>
+                    </a:p>
+                  </a:txBody>
+                  <a:tcPr anchor="ctr">
+                    <a:solidFill>
+                      <a:srgbClr val="FFFFFF"/>
+                    </a:solidFill>
+                  </a:tcPr>
+                </a:tc>
+                <a:tc>
+                  <a:txBody>
+                    <a:bodyPr/>
+                    <a:lstStyle/>
+                    <a:p>
+                      <a:pPr algn="ctr"/>
+                      <a:r>
+                        <a:rPr sz="950">
+                          <a:solidFill>
+                            <a:srgbClr val="151C26"/>
+                          </a:solidFill>
+                          <a:latin typeface="맑은 고딕"/>
+                        </a:rPr>
+                        <a:t>69</a:t>
+                      </a:r>
+                    </a:p>
+                  </a:txBody>
+                  <a:tcPr anchor="ctr">
+                    <a:solidFill>
+                      <a:srgbClr val="FFFFFF"/>
+                    </a:solidFill>
+                  </a:tcPr>
+                </a:tc>
+                <a:tc>
+                  <a:txBody>
+                    <a:bodyPr/>
+                    <a:lstStyle/>
+                    <a:p>
+                      <a:pPr algn="ctr"/>
+                      <a:r>
+                        <a:rPr sz="950">
+                          <a:solidFill>
+                            <a:srgbClr val="151C26"/>
+                          </a:solidFill>
+                          <a:latin typeface="맑은 고딕"/>
+                        </a:rPr>
+                        <a:t>+26</a:t>
+                      </a:r>
+                    </a:p>
+                  </a:txBody>
+                  <a:tcPr anchor="ctr">
+                    <a:solidFill>
+                      <a:srgbClr val="FFFFFF"/>
+                    </a:solidFill>
+                  </a:tcPr>
+                </a:tc>
+              </a:tr>
+              <a:tr h="306324">
+                <a:tc>
+                  <a:txBody>
+                    <a:bodyPr/>
+                    <a:lstStyle/>
+                    <a:p>
+                      <a:pPr algn="l"/>
+                      <a:r>
+                        <a:rPr sz="950">
+                          <a:solidFill>
+                            <a:srgbClr val="151C26"/>
+                          </a:solidFill>
+                          <a:latin typeface="맑은 고딕"/>
+                        </a:rPr>
+                        <a:t>성거읍</a:t>
+                      </a:r>
+                    </a:p>
+                  </a:txBody>
+                  <a:tcPr anchor="ctr">
+                    <a:solidFill>
+                      <a:srgbClr val="FFFFFF"/>
+                    </a:solidFill>
+                  </a:tcPr>
+                </a:tc>
+                <a:tc>
+                  <a:txBody>
+                    <a:bodyPr/>
+                    <a:lstStyle/>
+                    <a:p>
+                      <a:pPr algn="ctr"/>
+                      <a:r>
+                        <a:rPr sz="950">
+                          <a:solidFill>
+                            <a:srgbClr val="151C26"/>
+                          </a:solidFill>
+                          <a:latin typeface="맑은 고딕"/>
+                        </a:rPr>
+                        <a:t>52</a:t>
+                      </a:r>
+                    </a:p>
+                  </a:txBody>
+                  <a:tcPr anchor="ctr">
+                    <a:solidFill>
+                      <a:srgbClr val="FFFFFF"/>
+                    </a:solidFill>
+                  </a:tcPr>
+                </a:tc>
+                <a:tc>
+                  <a:txBody>
+                    <a:bodyPr/>
+                    <a:lstStyle/>
+                    <a:p>
+                      <a:pPr algn="ctr"/>
+                      <a:r>
+                        <a:rPr sz="950">
+                          <a:solidFill>
+                            <a:srgbClr val="151C26"/>
+                          </a:solidFill>
+                          <a:latin typeface="맑은 고딕"/>
+                        </a:rPr>
+                        <a:t>68</a:t>
+                      </a:r>
+                    </a:p>
+                  </a:txBody>
+                  <a:tcPr anchor="ctr">
+                    <a:solidFill>
+                      <a:srgbClr val="FFFFFF"/>
+                    </a:solidFill>
+                  </a:tcPr>
+                </a:tc>
+                <a:tc>
+                  <a:txBody>
+                    <a:bodyPr/>
+                    <a:lstStyle/>
+                    <a:p>
+                      <a:pPr algn="ctr"/>
+                      <a:r>
+                        <a:rPr sz="950">
+                          <a:solidFill>
+                            <a:srgbClr val="151C26"/>
+                          </a:solidFill>
+                          <a:latin typeface="맑은 고딕"/>
+                        </a:rPr>
+                        <a:t>+16</a:t>
+                      </a:r>
+                    </a:p>
+                  </a:txBody>
+                  <a:tcPr anchor="ctr">
+                    <a:solidFill>
+                      <a:srgbClr val="FFFFFF"/>
+                    </a:solidFill>
+                  </a:tcPr>
+                </a:tc>
+              </a:tr>
+            </a:tbl>
+          </a:graphicData>
+        </a:graphic>
+      </p:graphicFrame>
+      <p:sp>
+        <p:nvSpPr>
+          <p:cNvPr id="8" name="TextBox 7"/>
           <p:cNvSpPr txBox="1"/>
           <p:nvPr/>
         </p:nvSpPr>
@@ -6275,7 +6926,7 @@
       </p:sp>
       <p:sp>
         <p:nvSpPr>
-          <p:cNvPr id="8" name="TextBox 7"/>
+          <p:cNvPr id="9" name="TextBox 8"/>
           <p:cNvSpPr txBox="1"/>
           <p:nvPr/>
         </p:nvSpPr>
@@ -7520,7 +8171,7 @@
                 </a:solidFill>
                 <a:latin typeface="맑은 고딕"/>
               </a:rPr>
-              <a:t>상위 12개소 우선 투자 시 취약수요 커버리지 +7.1%p, 신규 수혜인구 약 32,822명.</a:t>
+              <a:t>상위 12개소 우선 투자 시 취약수요 커버리지 +6.9%p, 신규 수혜인구 약 32,822명.</a:t>
             </a:r>
           </a:p>
         </p:txBody>
@@ -7790,7 +8441,7 @@
                           </a:solidFill>
                           <a:latin typeface="맑은 고딕"/>
                         </a:rPr>
-                        <a:t>복지</a:t>
+                        <a:t>의료</a:t>
                       </a:r>
                     </a:p>
                   </a:txBody>
@@ -7813,7 +8464,7 @@
                           </a:solidFill>
                           <a:latin typeface="맑은 고딕"/>
                         </a:rPr>
-                        <a:t>4,078</a:t>
+                        <a:t>7,740</a:t>
                       </a:r>
                     </a:p>
                   </a:txBody>
@@ -7907,7 +8558,7 @@
                           </a:solidFill>
                           <a:latin typeface="맑은 고딕"/>
                         </a:rPr>
-                        <a:t>의료</a:t>
+                        <a:t>복지</a:t>
                       </a:r>
                     </a:p>
                   </a:txBody>
@@ -7930,7 +8581,7 @@
                           </a:solidFill>
                           <a:latin typeface="맑은 고딕"/>
                         </a:rPr>
-                        <a:t>7,740</a:t>
+                        <a:t>4,078</a:t>
                       </a:r>
                     </a:p>
                   </a:txBody>
@@ -7953,7 +8604,7 @@
                           </a:solidFill>
                           <a:latin typeface="맑은 고딕"/>
                         </a:rPr>
-                        <a:t>+1.32%p</a:t>
+                        <a:t>+1.28%p</a:t>
                       </a:r>
                     </a:p>
                   </a:txBody>
@@ -8187,7 +8838,7 @@
                           </a:solidFill>
                           <a:latin typeface="맑은 고딕"/>
                         </a:rPr>
-                        <a:t>+0.59%p</a:t>
+                        <a:t>+0.57%p</a:t>
                       </a:r>
                     </a:p>
                   </a:txBody>
@@ -8421,7 +9072,7 @@
                           </a:solidFill>
                           <a:latin typeface="맑은 고딕"/>
                         </a:rPr>
-                        <a:t>+0.42%p</a:t>
+                        <a:t>+0.4%p</a:t>
                       </a:r>
                     </a:p>
                   </a:txBody>
@@ -8447,6 +9098,240 @@
                           <a:latin typeface="맑은 고딕"/>
                         </a:rPr>
                         <a:t>7</a:t>
+                      </a:r>
+                    </a:p>
+                  </a:txBody>
+                  <a:tcPr anchor="ctr">
+                    <a:solidFill>
+                      <a:srgbClr val="FFFFFF"/>
+                    </a:solidFill>
+                  </a:tcPr>
+                </a:tc>
+                <a:tc>
+                  <a:txBody>
+                    <a:bodyPr/>
+                    <a:lstStyle/>
+                    <a:p>
+                      <a:pPr algn="ctr"/>
+                      <a:r>
+                        <a:rPr sz="950">
+                          <a:solidFill>
+                            <a:srgbClr val="151C26"/>
+                          </a:solidFill>
+                          <a:latin typeface="맑은 고딕"/>
+                        </a:rPr>
+                        <a:t>북면</a:t>
+                      </a:r>
+                    </a:p>
+                  </a:txBody>
+                  <a:tcPr anchor="ctr">
+                    <a:solidFill>
+                      <a:srgbClr val="FFFFFF"/>
+                    </a:solidFill>
+                  </a:tcPr>
+                </a:tc>
+                <a:tc>
+                  <a:txBody>
+                    <a:bodyPr/>
+                    <a:lstStyle/>
+                    <a:p>
+                      <a:pPr algn="ctr"/>
+                      <a:r>
+                        <a:rPr sz="950">
+                          <a:solidFill>
+                            <a:srgbClr val="151C26"/>
+                          </a:solidFill>
+                          <a:latin typeface="맑은 고딕"/>
+                        </a:rPr>
+                        <a:t>의료</a:t>
+                      </a:r>
+                    </a:p>
+                  </a:txBody>
+                  <a:tcPr anchor="ctr">
+                    <a:solidFill>
+                      <a:srgbClr val="FFFFFF"/>
+                    </a:solidFill>
+                  </a:tcPr>
+                </a:tc>
+                <a:tc>
+                  <a:txBody>
+                    <a:bodyPr/>
+                    <a:lstStyle/>
+                    <a:p>
+                      <a:pPr algn="ctr"/>
+                      <a:r>
+                        <a:rPr sz="950">
+                          <a:solidFill>
+                            <a:srgbClr val="151C26"/>
+                          </a:solidFill>
+                          <a:latin typeface="맑은 고딕"/>
+                        </a:rPr>
+                        <a:t>763</a:t>
+                      </a:r>
+                    </a:p>
+                  </a:txBody>
+                  <a:tcPr anchor="ctr">
+                    <a:solidFill>
+                      <a:srgbClr val="FFFFFF"/>
+                    </a:solidFill>
+                  </a:tcPr>
+                </a:tc>
+                <a:tc>
+                  <a:txBody>
+                    <a:bodyPr/>
+                    <a:lstStyle/>
+                    <a:p>
+                      <a:pPr algn="ctr"/>
+                      <a:r>
+                        <a:rPr sz="950">
+                          <a:solidFill>
+                            <a:srgbClr val="151C26"/>
+                          </a:solidFill>
+                          <a:latin typeface="맑은 고딕"/>
+                        </a:rPr>
+                        <a:t>+0.36%p</a:t>
+                      </a:r>
+                    </a:p>
+                  </a:txBody>
+                  <a:tcPr anchor="ctr">
+                    <a:solidFill>
+                      <a:srgbClr val="FFFFFF"/>
+                    </a:solidFill>
+                  </a:tcPr>
+                </a:tc>
+              </a:tr>
+              <a:tr h="306324">
+                <a:tc>
+                  <a:txBody>
+                    <a:bodyPr/>
+                    <a:lstStyle/>
+                    <a:p>
+                      <a:pPr algn="l"/>
+                      <a:r>
+                        <a:rPr sz="950">
+                          <a:solidFill>
+                            <a:srgbClr val="151C26"/>
+                          </a:solidFill>
+                          <a:latin typeface="맑은 고딕"/>
+                        </a:rPr>
+                        <a:t>8</a:t>
+                      </a:r>
+                    </a:p>
+                  </a:txBody>
+                  <a:tcPr anchor="ctr">
+                    <a:solidFill>
+                      <a:srgbClr val="FFFFFF"/>
+                    </a:solidFill>
+                  </a:tcPr>
+                </a:tc>
+                <a:tc>
+                  <a:txBody>
+                    <a:bodyPr/>
+                    <a:lstStyle/>
+                    <a:p>
+                      <a:pPr algn="ctr"/>
+                      <a:r>
+                        <a:rPr sz="950">
+                          <a:solidFill>
+                            <a:srgbClr val="151C26"/>
+                          </a:solidFill>
+                          <a:latin typeface="맑은 고딕"/>
+                        </a:rPr>
+                        <a:t>입장면</a:t>
+                      </a:r>
+                    </a:p>
+                  </a:txBody>
+                  <a:tcPr anchor="ctr">
+                    <a:solidFill>
+                      <a:srgbClr val="FFFFFF"/>
+                    </a:solidFill>
+                  </a:tcPr>
+                </a:tc>
+                <a:tc>
+                  <a:txBody>
+                    <a:bodyPr/>
+                    <a:lstStyle/>
+                    <a:p>
+                      <a:pPr algn="ctr"/>
+                      <a:r>
+                        <a:rPr sz="950">
+                          <a:solidFill>
+                            <a:srgbClr val="151C26"/>
+                          </a:solidFill>
+                          <a:latin typeface="맑은 고딕"/>
+                        </a:rPr>
+                        <a:t>보육</a:t>
+                      </a:r>
+                    </a:p>
+                  </a:txBody>
+                  <a:tcPr anchor="ctr">
+                    <a:solidFill>
+                      <a:srgbClr val="FFFFFF"/>
+                    </a:solidFill>
+                  </a:tcPr>
+                </a:tc>
+                <a:tc>
+                  <a:txBody>
+                    <a:bodyPr/>
+                    <a:lstStyle/>
+                    <a:p>
+                      <a:pPr algn="ctr"/>
+                      <a:r>
+                        <a:rPr sz="950">
+                          <a:solidFill>
+                            <a:srgbClr val="151C26"/>
+                          </a:solidFill>
+                          <a:latin typeface="맑은 고딕"/>
+                        </a:rPr>
+                        <a:t>1,626</a:t>
+                      </a:r>
+                    </a:p>
+                  </a:txBody>
+                  <a:tcPr anchor="ctr">
+                    <a:solidFill>
+                      <a:srgbClr val="FFFFFF"/>
+                    </a:solidFill>
+                  </a:tcPr>
+                </a:tc>
+                <a:tc>
+                  <a:txBody>
+                    <a:bodyPr/>
+                    <a:lstStyle/>
+                    <a:p>
+                      <a:pPr algn="ctr"/>
+                      <a:r>
+                        <a:rPr sz="950">
+                          <a:solidFill>
+                            <a:srgbClr val="151C26"/>
+                          </a:solidFill>
+                          <a:latin typeface="맑은 고딕"/>
+                        </a:rPr>
+                        <a:t>+0.35%p</a:t>
+                      </a:r>
+                    </a:p>
+                  </a:txBody>
+                  <a:tcPr anchor="ctr">
+                    <a:solidFill>
+                      <a:srgbClr val="FFFFFF"/>
+                    </a:solidFill>
+                  </a:tcPr>
+                </a:tc>
+              </a:tr>
+              <a:tr h="306324">
+                <a:tc>
+                  <a:txBody>
+                    <a:bodyPr/>
+                    <a:lstStyle/>
+                    <a:p>
+                      <a:pPr algn="l"/>
+                      <a:r>
+                        <a:rPr sz="950">
+                          <a:solidFill>
+                            <a:srgbClr val="151C26"/>
+                          </a:solidFill>
+                          <a:latin typeface="맑은 고딕"/>
+                        </a:rPr>
+                        <a:t>9</a:t>
                       </a:r>
                     </a:p>
                   </a:txBody>
@@ -8538,241 +9423,7 @@
                           </a:solidFill>
                           <a:latin typeface="맑은 고딕"/>
                         </a:rPr>
-                        <a:t>+0.39%p</a:t>
-                      </a:r>
-                    </a:p>
-                  </a:txBody>
-                  <a:tcPr anchor="ctr">
-                    <a:solidFill>
-                      <a:srgbClr val="FFFFFF"/>
-                    </a:solidFill>
-                  </a:tcPr>
-                </a:tc>
-              </a:tr>
-              <a:tr h="306324">
-                <a:tc>
-                  <a:txBody>
-                    <a:bodyPr/>
-                    <a:lstStyle/>
-                    <a:p>
-                      <a:pPr algn="l"/>
-                      <a:r>
-                        <a:rPr sz="950">
-                          <a:solidFill>
-                            <a:srgbClr val="151C26"/>
-                          </a:solidFill>
-                          <a:latin typeface="맑은 고딕"/>
-                        </a:rPr>
-                        <a:t>8</a:t>
-                      </a:r>
-                    </a:p>
-                  </a:txBody>
-                  <a:tcPr anchor="ctr">
-                    <a:solidFill>
-                      <a:srgbClr val="FFFFFF"/>
-                    </a:solidFill>
-                  </a:tcPr>
-                </a:tc>
-                <a:tc>
-                  <a:txBody>
-                    <a:bodyPr/>
-                    <a:lstStyle/>
-                    <a:p>
-                      <a:pPr algn="ctr"/>
-                      <a:r>
-                        <a:rPr sz="950">
-                          <a:solidFill>
-                            <a:srgbClr val="151C26"/>
-                          </a:solidFill>
-                          <a:latin typeface="맑은 고딕"/>
-                        </a:rPr>
-                        <a:t>북면</a:t>
-                      </a:r>
-                    </a:p>
-                  </a:txBody>
-                  <a:tcPr anchor="ctr">
-                    <a:solidFill>
-                      <a:srgbClr val="FFFFFF"/>
-                    </a:solidFill>
-                  </a:tcPr>
-                </a:tc>
-                <a:tc>
-                  <a:txBody>
-                    <a:bodyPr/>
-                    <a:lstStyle/>
-                    <a:p>
-                      <a:pPr algn="ctr"/>
-                      <a:r>
-                        <a:rPr sz="950">
-                          <a:solidFill>
-                            <a:srgbClr val="151C26"/>
-                          </a:solidFill>
-                          <a:latin typeface="맑은 고딕"/>
-                        </a:rPr>
-                        <a:t>의료</a:t>
-                      </a:r>
-                    </a:p>
-                  </a:txBody>
-                  <a:tcPr anchor="ctr">
-                    <a:solidFill>
-                      <a:srgbClr val="FFFFFF"/>
-                    </a:solidFill>
-                  </a:tcPr>
-                </a:tc>
-                <a:tc>
-                  <a:txBody>
-                    <a:bodyPr/>
-                    <a:lstStyle/>
-                    <a:p>
-                      <a:pPr algn="ctr"/>
-                      <a:r>
-                        <a:rPr sz="950">
-                          <a:solidFill>
-                            <a:srgbClr val="151C26"/>
-                          </a:solidFill>
-                          <a:latin typeface="맑은 고딕"/>
-                        </a:rPr>
-                        <a:t>763</a:t>
-                      </a:r>
-                    </a:p>
-                  </a:txBody>
-                  <a:tcPr anchor="ctr">
-                    <a:solidFill>
-                      <a:srgbClr val="FFFFFF"/>
-                    </a:solidFill>
-                  </a:tcPr>
-                </a:tc>
-                <a:tc>
-                  <a:txBody>
-                    <a:bodyPr/>
-                    <a:lstStyle/>
-                    <a:p>
-                      <a:pPr algn="ctr"/>
-                      <a:r>
-                        <a:rPr sz="950">
-                          <a:solidFill>
-                            <a:srgbClr val="151C26"/>
-                          </a:solidFill>
-                          <a:latin typeface="맑은 고딕"/>
-                        </a:rPr>
-                        <a:t>+0.38%p</a:t>
-                      </a:r>
-                    </a:p>
-                  </a:txBody>
-                  <a:tcPr anchor="ctr">
-                    <a:solidFill>
-                      <a:srgbClr val="FFFFFF"/>
-                    </a:solidFill>
-                  </a:tcPr>
-                </a:tc>
-              </a:tr>
-              <a:tr h="306324">
-                <a:tc>
-                  <a:txBody>
-                    <a:bodyPr/>
-                    <a:lstStyle/>
-                    <a:p>
-                      <a:pPr algn="l"/>
-                      <a:r>
-                        <a:rPr sz="950">
-                          <a:solidFill>
-                            <a:srgbClr val="151C26"/>
-                          </a:solidFill>
-                          <a:latin typeface="맑은 고딕"/>
-                        </a:rPr>
-                        <a:t>9</a:t>
-                      </a:r>
-                    </a:p>
-                  </a:txBody>
-                  <a:tcPr anchor="ctr">
-                    <a:solidFill>
-                      <a:srgbClr val="FFFFFF"/>
-                    </a:solidFill>
-                  </a:tcPr>
-                </a:tc>
-                <a:tc>
-                  <a:txBody>
-                    <a:bodyPr/>
-                    <a:lstStyle/>
-                    <a:p>
-                      <a:pPr algn="ctr"/>
-                      <a:r>
-                        <a:rPr sz="950">
-                          <a:solidFill>
-                            <a:srgbClr val="151C26"/>
-                          </a:solidFill>
-                          <a:latin typeface="맑은 고딕"/>
-                        </a:rPr>
-                        <a:t>풍세면</a:t>
-                      </a:r>
-                    </a:p>
-                  </a:txBody>
-                  <a:tcPr anchor="ctr">
-                    <a:solidFill>
-                      <a:srgbClr val="FFFFFF"/>
-                    </a:solidFill>
-                  </a:tcPr>
-                </a:tc>
-                <a:tc>
-                  <a:txBody>
-                    <a:bodyPr/>
-                    <a:lstStyle/>
-                    <a:p>
-                      <a:pPr algn="ctr"/>
-                      <a:r>
-                        <a:rPr sz="950">
-                          <a:solidFill>
-                            <a:srgbClr val="151C26"/>
-                          </a:solidFill>
-                          <a:latin typeface="맑은 고딕"/>
-                        </a:rPr>
-                        <a:t>보육</a:t>
-                      </a:r>
-                    </a:p>
-                  </a:txBody>
-                  <a:tcPr anchor="ctr">
-                    <a:solidFill>
-                      <a:srgbClr val="FFFFFF"/>
-                    </a:solidFill>
-                  </a:tcPr>
-                </a:tc>
-                <a:tc>
-                  <a:txBody>
-                    <a:bodyPr/>
-                    <a:lstStyle/>
-                    <a:p>
-                      <a:pPr algn="ctr"/>
-                      <a:r>
-                        <a:rPr sz="950">
-                          <a:solidFill>
-                            <a:srgbClr val="151C26"/>
-                          </a:solidFill>
-                          <a:latin typeface="맑은 고딕"/>
-                        </a:rPr>
-                        <a:t>1,003</a:t>
-                      </a:r>
-                    </a:p>
-                  </a:txBody>
-                  <a:tcPr anchor="ctr">
-                    <a:solidFill>
-                      <a:srgbClr val="FFFFFF"/>
-                    </a:solidFill>
-                  </a:tcPr>
-                </a:tc>
-                <a:tc>
-                  <a:txBody>
-                    <a:bodyPr/>
-                    <a:lstStyle/>
-                    <a:p>
-                      <a:pPr algn="ctr"/>
-                      <a:r>
-                        <a:rPr sz="950">
-                          <a:solidFill>
-                            <a:srgbClr val="151C26"/>
-                          </a:solidFill>
-                          <a:latin typeface="맑은 고딕"/>
-                        </a:rPr>
-                        <a:t>+0.36%p</a:t>
+                        <a:t>+0.35%p</a:t>
                       </a:r>
                     </a:p>
                   </a:txBody>
@@ -8820,7 +9471,7 @@
                           </a:solidFill>
                           <a:latin typeface="맑은 고딕"/>
                         </a:rPr>
-                        <a:t>입장면</a:t>
+                        <a:t>북면</a:t>
                       </a:r>
                     </a:p>
                   </a:txBody>
@@ -8866,7 +9517,7 @@
                           </a:solidFill>
                           <a:latin typeface="맑은 고딕"/>
                         </a:rPr>
-                        <a:t>1,626</a:t>
+                        <a:t>1,177</a:t>
                       </a:r>
                     </a:p>
                   </a:txBody>
@@ -8889,7 +9540,7 @@
                           </a:solidFill>
                           <a:latin typeface="맑은 고딕"/>
                         </a:rPr>
-                        <a:t>+0.36%p</a:t>
+                        <a:t>+0.34%p</a:t>
                       </a:r>
                     </a:p>
                   </a:txBody>
@@ -13221,7 +13872,7 @@
                 </a:solidFill>
                 <a:latin typeface="맑은 고딕"/>
               </a:rPr>
-              <a:t>1.79배</a:t>
+              <a:t>1.71배</a:t>
             </a:r>
           </a:p>
         </p:txBody>
@@ -13260,7 +13911,7 @@
                 </a:solidFill>
                 <a:latin typeface="맑은 고딕"/>
               </a:rPr>
-              <a:t>신도심 84.2 vs 원도심 47.1</a:t>
+              <a:t>신도심 69.7 vs 원도심 40.8</a:t>
             </a:r>
           </a:p>
         </p:txBody>
@@ -13426,7 +14077,7 @@
                 </a:solidFill>
                 <a:latin typeface="맑은 고딕"/>
               </a:rPr>
-              <a:t>0.306</a:t>
+              <a:t>0.292</a:t>
             </a:r>
           </a:p>
         </p:txBody>
@@ -13631,7 +14282,7 @@
                 </a:solidFill>
                 <a:latin typeface="맑은 고딕"/>
               </a:rPr>
-              <a:t>데이터 대기</a:t>
+              <a:t>R² 0.487</a:t>
             </a:r>
           </a:p>
         </p:txBody>
@@ -13670,7 +14321,7 @@
                 </a:solidFill>
                 <a:latin typeface="맑은 고딕"/>
               </a:rPr>
-              <a:t>다른 연도 인구 파일 투입 시 활성화</a:t>
+              <a:t>베이스라인 대비 MAE 0.2%↓</a:t>
             </a:r>
           </a:p>
         </p:txBody>
@@ -13875,7 +14526,7 @@
                 </a:solidFill>
                 <a:latin typeface="맑은 고딕"/>
               </a:rPr>
-              <a:t>12개소 · 커버리지 +7.1%p</a:t>
+              <a:t>12개소 · 커버리지 +6.9%p</a:t>
             </a:r>
           </a:p>
         </p:txBody>
@@ -17187,7 +17838,7 @@
                 </a:solidFill>
                 <a:latin typeface="맑은 고딕"/>
               </a:rPr>
-              <a:t>1.79배</a:t>
+              <a:t>1.71배</a:t>
             </a:r>
           </a:p>
         </p:txBody>
@@ -17226,7 +17877,7 @@
                 </a:solidFill>
                 <a:latin typeface="맑은 고딕"/>
               </a:rPr>
-              <a:t>신도심 평균 CBI 84.2 vs 원도심 평균 47.1</a:t>
+              <a:t>신도심 평균 CBI 69.7 vs 원도심 평균 40.8</a:t>
             </a:r>
           </a:p>
         </p:txBody>
@@ -17265,7 +17916,7 @@
                 </a:solidFill>
                 <a:latin typeface="맑은 고딕"/>
               </a:rPr>
-              <a:t>0.306</a:t>
+              <a:t>0.292</a:t>
             </a:r>
           </a:p>
         </p:txBody>
@@ -17304,7 +17955,7 @@
                 </a:solidFill>
                 <a:latin typeface="맑은 고딕"/>
               </a:rPr>
-              <a:t>25개 생활권 CBI 지니계수 — 변동계수 54.7%</a:t>
+              <a:t>25개 생활권 CBI 지니계수 — 변동계수 52.0%</a:t>
             </a:r>
           </a:p>
         </p:txBody>
@@ -17382,7 +18033,7 @@
                 </a:solidFill>
                 <a:latin typeface="맑은 고딕"/>
               </a:rPr>
-              <a:t>최상위 96점 ↔ 최하위 8점, 같은 시(市)</a:t>
+              <a:t>최상위 79점 ↔ 최하위 8점, 같은 시(市)</a:t>
             </a:r>
           </a:p>
         </p:txBody>
@@ -18323,7 +18974,7 @@
                           </a:solidFill>
                           <a:latin typeface="맑은 고딕"/>
                         </a:rPr>
-                        <a:t>11개 지표로 계산한 참고용 수치 한 장</a:t>
+                        <a:t>12개 지표로 계산한 참고용 수치 한 장</a:t>
                       </a:r>
                     </a:p>
                   </a:txBody>
@@ -21698,7 +22349,7 @@
                           </a:solidFill>
                           <a:latin typeface="맑은 고딕"/>
                         </a:rPr>
-                        <a:t>2026년 단일시점, 25개 생활권, 연령기준 2026년07월</a:t>
+                        <a:t>2021~2026년(5년환산), 25개 생활권, 연령기준 2026년07월</a:t>
                       </a:r>
                     </a:p>
                   </a:txBody>
@@ -22874,7 +23525,7 @@
                           </a:solidFill>
                           <a:latin typeface="맑은 고딕"/>
                         </a:rPr>
-                        <a:t>병천면, 입장면, 풍세면, 성남면, 북면, 동면</a:t>
+                        <a:t>풍세면, 병천면, 입장면, 성남면, 북면, 동면</a:t>
                       </a:r>
                     </a:p>
                   </a:txBody>
@@ -22970,7 +23621,7 @@
                           </a:solidFill>
                           <a:latin typeface="맑은 고딕"/>
                         </a:rPr>
-                        <a:t>일봉동, 문성동, 봉명동, 중앙동, 원성동</a:t>
+                        <a:t>문성동, 일봉동, 봉명동, 원성동, 중앙동</a:t>
                       </a:r>
                     </a:p>
                   </a:txBody>
@@ -23280,7 +23931,7 @@
                 </a:solidFill>
                 <a:latin typeface="맑은 고딕"/>
               </a:rPr>
-              <a:t>5대 도메인 · 11개 지표</a:t>
+              <a:t>5대 도메인 · 12개 지표</a:t>
             </a:r>
           </a:p>
         </p:txBody>
@@ -24432,7 +25083,7 @@
                 </a:solidFill>
                 <a:latin typeface="맑은 고딕"/>
               </a:rPr>
-              <a:t>최상위 불당동 96점, 최하위 광덕면 8점. 같은 시(市) 안의 격차다.</a:t>
+              <a:t>최상위 불당동 79점, 최하위 광덕면 8점. 같은 시(市) 안의 격차다.</a:t>
             </a:r>
           </a:p>
         </p:txBody>
@@ -24622,7 +25273,7 @@
                 </a:solidFill>
                 <a:latin typeface="맑은 고딕"/>
               </a:rPr>
-              <a:t>1.79배</a:t>
+              <a:t>1.71배</a:t>
             </a:r>
           </a:p>
         </p:txBody>
@@ -24661,7 +25312,7 @@
                 </a:solidFill>
                 <a:latin typeface="맑은 고딕"/>
               </a:rPr>
-              <a:t>84.2 vs 47.1</a:t>
+              <a:t>69.7 vs 40.8</a:t>
             </a:r>
           </a:p>
         </p:txBody>
@@ -24827,7 +25478,7 @@
                 </a:solidFill>
                 <a:latin typeface="맑은 고딕"/>
               </a:rPr>
-              <a:t>0.306</a:t>
+              <a:t>0.292</a:t>
             </a:r>
           </a:p>
         </p:txBody>
@@ -24866,7 +25517,7 @@
                 </a:solidFill>
                 <a:latin typeface="맑은 고딕"/>
               </a:rPr>
-              <a:t>변동계수 54.7%</a:t>
+              <a:t>변동계수 52.0%</a:t>
             </a:r>
           </a:p>
         </p:txBody>
@@ -25071,7 +25722,7 @@
                 </a:solidFill>
                 <a:latin typeface="맑은 고딕"/>
               </a:rPr>
-              <a:t>실루엣 계수 0.336</a:t>
+              <a:t>실루엣 계수 0.32</a:t>
             </a:r>
           </a:p>
         </p:txBody>

--- a/deliverables/기획서_천안균형발전나침반_CBC.pptx
+++ b/deliverables/기획서_천안균형발전나침반_CBC.pptx
@@ -5434,7 +5434,7 @@
         </p:nvSpPr>
         <p:spPr>
           <a:xfrm>
-            <a:off x="7104888" y="2962656"/>
+            <a:off x="7104888" y="2889504"/>
             <a:ext cx="1828800" cy="274320"/>
           </a:xfrm>
           <a:prstGeom prst="rect">
@@ -5473,7 +5473,7 @@
         </p:nvSpPr>
         <p:spPr>
           <a:xfrm>
-            <a:off x="9025128" y="2962656"/>
+            <a:off x="9025128" y="2889504"/>
             <a:ext cx="2286000" cy="274320"/>
           </a:xfrm>
           <a:prstGeom prst="rect">
@@ -5512,7 +5512,7 @@
         </p:nvSpPr>
         <p:spPr>
           <a:xfrm>
-            <a:off x="7104888" y="3401568"/>
+            <a:off x="7104888" y="3273552"/>
             <a:ext cx="1828800" cy="274320"/>
           </a:xfrm>
           <a:prstGeom prst="rect">
@@ -5538,7 +5538,7 @@
                 </a:solidFill>
                 <a:latin typeface="맑은 고딕"/>
               </a:rPr>
-              <a:t>모드</a:t>
+              <a:t>예측 목표</a:t>
             </a:r>
           </a:p>
         </p:txBody>
@@ -5551,7 +5551,7 @@
         </p:nvSpPr>
         <p:spPr>
           <a:xfrm>
-            <a:off x="9025128" y="3401568"/>
+            <a:off x="9025128" y="3273552"/>
             <a:ext cx="2286000" cy="274320"/>
           </a:xfrm>
           <a:prstGeom prst="rect">
@@ -5577,7 +5577,7 @@
                 </a:solidFill>
                 <a:latin typeface="맑은 고딕"/>
               </a:rPr>
-              <a:t>패널 t → t+3</a:t>
+              <a:t>3년 후 위험도 변화량(Δ)</a:t>
             </a:r>
           </a:p>
         </p:txBody>
@@ -5590,7 +5590,7 @@
         </p:nvSpPr>
         <p:spPr>
           <a:xfrm>
-            <a:off x="7104888" y="3840480"/>
+            <a:off x="7104888" y="3657600"/>
             <a:ext cx="1828800" cy="274320"/>
           </a:xfrm>
           <a:prstGeom prst="rect">
@@ -5616,6 +5616,240 @@
                 </a:solidFill>
                 <a:latin typeface="맑은 고딕"/>
               </a:rPr>
+              <a:t>방향 적중률</a:t>
+            </a:r>
+          </a:p>
+        </p:txBody>
+      </p:sp>
+      <p:sp>
+        <p:nvSpPr>
+          <p:cNvPr id="24" name="TextBox 23"/>
+          <p:cNvSpPr txBox="1"/>
+          <p:nvPr/>
+        </p:nvSpPr>
+        <p:spPr>
+          <a:xfrm>
+            <a:off x="9025128" y="3657600"/>
+            <a:ext cx="2286000" cy="274320"/>
+          </a:xfrm>
+          <a:prstGeom prst="rect">
+            <a:avLst/>
+          </a:prstGeom>
+          <a:noFill/>
+        </p:spPr>
+        <p:txBody>
+          <a:bodyPr wrap="square" lIns="0" rIns="0" tIns="0" bIns="0">
+            <a:spAutoFit/>
+          </a:bodyPr>
+          <a:lstStyle/>
+          <a:p>
+            <a:pPr algn="l">
+              <a:lnSpc>
+                <a:spcPct val="135000"/>
+              </a:lnSpc>
+            </a:pPr>
+            <a:r>
+              <a:rPr sz="1200" b="1">
+                <a:solidFill>
+                  <a:srgbClr val="151C26"/>
+                </a:solidFill>
+                <a:latin typeface="맑은 고딕"/>
+              </a:rPr>
+              <a:t>69%</a:t>
+            </a:r>
+          </a:p>
+        </p:txBody>
+      </p:sp>
+      <p:sp>
+        <p:nvSpPr>
+          <p:cNvPr id="25" name="TextBox 24"/>
+          <p:cNvSpPr txBox="1"/>
+          <p:nvPr/>
+        </p:nvSpPr>
+        <p:spPr>
+          <a:xfrm>
+            <a:off x="7104888" y="4041648"/>
+            <a:ext cx="1828800" cy="274320"/>
+          </a:xfrm>
+          <a:prstGeom prst="rect">
+            <a:avLst/>
+          </a:prstGeom>
+          <a:noFill/>
+        </p:spPr>
+        <p:txBody>
+          <a:bodyPr wrap="square" lIns="0" rIns="0" tIns="0" bIns="0">
+            <a:spAutoFit/>
+          </a:bodyPr>
+          <a:lstStyle/>
+          <a:p>
+            <a:pPr algn="l">
+              <a:lnSpc>
+                <a:spcPct val="135000"/>
+              </a:lnSpc>
+            </a:pPr>
+            <a:r>
+              <a:rPr sz="1150" b="0">
+                <a:solidFill>
+                  <a:srgbClr val="5D6874"/>
+                </a:solidFill>
+                <a:latin typeface="맑은 고딕"/>
+              </a:rPr>
+              <a:t>MAE</a:t>
+            </a:r>
+          </a:p>
+        </p:txBody>
+      </p:sp>
+      <p:sp>
+        <p:nvSpPr>
+          <p:cNvPr id="26" name="TextBox 25"/>
+          <p:cNvSpPr txBox="1"/>
+          <p:nvPr/>
+        </p:nvSpPr>
+        <p:spPr>
+          <a:xfrm>
+            <a:off x="9025128" y="4041648"/>
+            <a:ext cx="2286000" cy="274320"/>
+          </a:xfrm>
+          <a:prstGeom prst="rect">
+            <a:avLst/>
+          </a:prstGeom>
+          <a:noFill/>
+        </p:spPr>
+        <p:txBody>
+          <a:bodyPr wrap="square" lIns="0" rIns="0" tIns="0" bIns="0">
+            <a:spAutoFit/>
+          </a:bodyPr>
+          <a:lstStyle/>
+          <a:p>
+            <a:pPr algn="l">
+              <a:lnSpc>
+                <a:spcPct val="135000"/>
+              </a:lnSpc>
+            </a:pPr>
+            <a:r>
+              <a:rPr sz="1200" b="1">
+                <a:solidFill>
+                  <a:srgbClr val="151C26"/>
+                </a:solidFill>
+                <a:latin typeface="맑은 고딕"/>
+              </a:rPr>
+              <a:t>9.85 (베이스라인 10.4)</a:t>
+            </a:r>
+          </a:p>
+        </p:txBody>
+      </p:sp>
+      <p:sp>
+        <p:nvSpPr>
+          <p:cNvPr id="27" name="TextBox 26"/>
+          <p:cNvSpPr txBox="1"/>
+          <p:nvPr/>
+        </p:nvSpPr>
+        <p:spPr>
+          <a:xfrm>
+            <a:off x="7104888" y="4425696"/>
+            <a:ext cx="1828800" cy="274320"/>
+          </a:xfrm>
+          <a:prstGeom prst="rect">
+            <a:avLst/>
+          </a:prstGeom>
+          <a:noFill/>
+        </p:spPr>
+        <p:txBody>
+          <a:bodyPr wrap="square" lIns="0" rIns="0" tIns="0" bIns="0">
+            <a:spAutoFit/>
+          </a:bodyPr>
+          <a:lstStyle/>
+          <a:p>
+            <a:pPr algn="l">
+              <a:lnSpc>
+                <a:spcPct val="135000"/>
+              </a:lnSpc>
+            </a:pPr>
+            <a:r>
+              <a:rPr sz="1150" b="0">
+                <a:solidFill>
+                  <a:srgbClr val="5D6874"/>
+                </a:solidFill>
+                <a:latin typeface="맑은 고딕"/>
+              </a:rPr>
+              <a:t>베이스라인 대비</a:t>
+            </a:r>
+          </a:p>
+        </p:txBody>
+      </p:sp>
+      <p:sp>
+        <p:nvSpPr>
+          <p:cNvPr id="28" name="TextBox 27"/>
+          <p:cNvSpPr txBox="1"/>
+          <p:nvPr/>
+        </p:nvSpPr>
+        <p:spPr>
+          <a:xfrm>
+            <a:off x="9025128" y="4425696"/>
+            <a:ext cx="2286000" cy="274320"/>
+          </a:xfrm>
+          <a:prstGeom prst="rect">
+            <a:avLst/>
+          </a:prstGeom>
+          <a:noFill/>
+        </p:spPr>
+        <p:txBody>
+          <a:bodyPr wrap="square" lIns="0" rIns="0" tIns="0" bIns="0">
+            <a:spAutoFit/>
+          </a:bodyPr>
+          <a:lstStyle/>
+          <a:p>
+            <a:pPr algn="l">
+              <a:lnSpc>
+                <a:spcPct val="135000"/>
+              </a:lnSpc>
+            </a:pPr>
+            <a:r>
+              <a:rPr sz="1200" b="1">
+                <a:solidFill>
+                  <a:srgbClr val="151C26"/>
+                </a:solidFill>
+                <a:latin typeface="맑은 고딕"/>
+              </a:rPr>
+              <a:t>+5.3%</a:t>
+            </a:r>
+          </a:p>
+        </p:txBody>
+      </p:sp>
+      <p:sp>
+        <p:nvSpPr>
+          <p:cNvPr id="29" name="TextBox 28"/>
+          <p:cNvSpPr txBox="1"/>
+          <p:nvPr/>
+        </p:nvSpPr>
+        <p:spPr>
+          <a:xfrm>
+            <a:off x="7104888" y="4809744"/>
+            <a:ext cx="1828800" cy="274320"/>
+          </a:xfrm>
+          <a:prstGeom prst="rect">
+            <a:avLst/>
+          </a:prstGeom>
+          <a:noFill/>
+        </p:spPr>
+        <p:txBody>
+          <a:bodyPr wrap="square" lIns="0" rIns="0" tIns="0" bIns="0">
+            <a:spAutoFit/>
+          </a:bodyPr>
+          <a:lstStyle/>
+          <a:p>
+            <a:pPr algn="l">
+              <a:lnSpc>
+                <a:spcPct val="135000"/>
+              </a:lnSpc>
+            </a:pPr>
+            <a:r>
+              <a:rPr sz="1150" b="0">
+                <a:solidFill>
+                  <a:srgbClr val="5D6874"/>
+                </a:solidFill>
+                <a:latin typeface="맑은 고딕"/>
+              </a:rPr>
               <a:t>R²</a:t>
             </a:r>
           </a:p>
@@ -5623,13 +5857,13 @@
       </p:sp>
       <p:sp>
         <p:nvSpPr>
-          <p:cNvPr id="24" name="TextBox 23"/>
-          <p:cNvSpPr txBox="1"/>
-          <p:nvPr/>
-        </p:nvSpPr>
-        <p:spPr>
-          <a:xfrm>
-            <a:off x="9025128" y="3840480"/>
+          <p:cNvPr id="30" name="TextBox 29"/>
+          <p:cNvSpPr txBox="1"/>
+          <p:nvPr/>
+        </p:nvSpPr>
+        <p:spPr>
+          <a:xfrm>
+            <a:off x="9025128" y="4809744"/>
             <a:ext cx="2286000" cy="274320"/>
           </a:xfrm>
           <a:prstGeom prst="rect">
@@ -5655,209 +5889,72 @@
                 </a:solidFill>
                 <a:latin typeface="맑은 고딕"/>
               </a:rPr>
-              <a:t>0.487</a:t>
-            </a:r>
-          </a:p>
-        </p:txBody>
-      </p:sp>
-      <p:sp>
-        <p:nvSpPr>
-          <p:cNvPr id="25" name="TextBox 24"/>
-          <p:cNvSpPr txBox="1"/>
-          <p:nvPr/>
-        </p:nvSpPr>
-        <p:spPr>
-          <a:xfrm>
-            <a:off x="7104888" y="4279392"/>
-            <a:ext cx="1828800" cy="274320"/>
-          </a:xfrm>
-          <a:prstGeom prst="rect">
-            <a:avLst/>
-          </a:prstGeom>
-          <a:noFill/>
-        </p:spPr>
-        <p:txBody>
-          <a:bodyPr wrap="square" lIns="0" rIns="0" tIns="0" bIns="0">
-            <a:spAutoFit/>
-          </a:bodyPr>
-          <a:lstStyle/>
-          <a:p>
-            <a:pPr algn="l">
-              <a:lnSpc>
-                <a:spcPct val="135000"/>
-              </a:lnSpc>
-            </a:pPr>
-            <a:r>
-              <a:rPr sz="1150" b="0">
+              <a:t>-0.02</a:t>
+            </a:r>
+          </a:p>
+        </p:txBody>
+      </p:sp>
+      <p:sp>
+        <p:nvSpPr>
+          <p:cNvPr id="31" name="TextBox 30"/>
+          <p:cNvSpPr txBox="1"/>
+          <p:nvPr/>
+        </p:nvSpPr>
+        <p:spPr>
+          <a:xfrm>
+            <a:off x="7104888" y="5193792"/>
+            <a:ext cx="4206240" cy="457200"/>
+          </a:xfrm>
+          <a:prstGeom prst="rect">
+            <a:avLst/>
+          </a:prstGeom>
+          <a:noFill/>
+        </p:spPr>
+        <p:txBody>
+          <a:bodyPr wrap="square" lIns="0" rIns="0" tIns="0" bIns="0">
+            <a:spAutoFit/>
+          </a:bodyPr>
+          <a:lstStyle/>
+          <a:p>
+            <a:pPr algn="l">
+              <a:lnSpc>
+                <a:spcPct val="140000"/>
+              </a:lnSpc>
+            </a:pPr>
+            <a:r>
+              <a:rPr sz="1000" b="0">
                 <a:solidFill>
                   <a:srgbClr val="5D6874"/>
                 </a:solidFill>
                 <a:latin typeface="맑은 고딕"/>
               </a:rPr>
-              <a:t>MAE</a:t>
-            </a:r>
-          </a:p>
-        </p:txBody>
-      </p:sp>
-      <p:sp>
-        <p:nvSpPr>
-          <p:cNvPr id="26" name="TextBox 25"/>
-          <p:cNvSpPr txBox="1"/>
-          <p:nvPr/>
-        </p:nvSpPr>
-        <p:spPr>
-          <a:xfrm>
-            <a:off x="9025128" y="4279392"/>
-            <a:ext cx="2286000" cy="274320"/>
-          </a:xfrm>
-          <a:prstGeom prst="rect">
-            <a:avLst/>
-          </a:prstGeom>
-          <a:noFill/>
-        </p:spPr>
-        <p:txBody>
-          <a:bodyPr wrap="square" lIns="0" rIns="0" tIns="0" bIns="0">
-            <a:spAutoFit/>
-          </a:bodyPr>
-          <a:lstStyle/>
-          <a:p>
-            <a:pPr algn="l">
-              <a:lnSpc>
-                <a:spcPct val="135000"/>
-              </a:lnSpc>
-            </a:pPr>
-            <a:r>
-              <a:rPr sz="1200" b="1">
-                <a:solidFill>
-                  <a:srgbClr val="151C26"/>
-                </a:solidFill>
-                <a:latin typeface="맑은 고딕"/>
-              </a:rPr>
-              <a:t>16.19</a:t>
-            </a:r>
-          </a:p>
-        </p:txBody>
-      </p:sp>
-      <p:sp>
-        <p:nvSpPr>
-          <p:cNvPr id="27" name="TextBox 26"/>
-          <p:cNvSpPr txBox="1"/>
-          <p:nvPr/>
-        </p:nvSpPr>
-        <p:spPr>
-          <a:xfrm>
-            <a:off x="7104888" y="4718304"/>
-            <a:ext cx="1828800" cy="274320"/>
-          </a:xfrm>
-          <a:prstGeom prst="rect">
-            <a:avLst/>
-          </a:prstGeom>
-          <a:noFill/>
-        </p:spPr>
-        <p:txBody>
-          <a:bodyPr wrap="square" lIns="0" rIns="0" tIns="0" bIns="0">
-            <a:spAutoFit/>
-          </a:bodyPr>
-          <a:lstStyle/>
-          <a:p>
-            <a:pPr algn="l">
-              <a:lnSpc>
-                <a:spcPct val="135000"/>
-              </a:lnSpc>
-            </a:pPr>
-            <a:r>
-              <a:rPr sz="1150" b="0">
+              <a:t>베이스라인은 '지금과 달라지지 않는다(Δ=0)'는 예측입니다.</a:t>
+            </a:r>
+          </a:p>
+          <a:p>
+            <a:pPr algn="l">
+              <a:lnSpc>
+                <a:spcPct val="140000"/>
+              </a:lnSpc>
+              <a:spcBef>
+                <a:spcPts val="0"/>
+              </a:spcBef>
+            </a:pPr>
+            <a:r>
+              <a:rPr sz="1000" b="0">
                 <a:solidFill>
                   <a:srgbClr val="5D6874"/>
                 </a:solidFill>
                 <a:latin typeface="맑은 고딕"/>
               </a:rPr>
-              <a:t>베이스라인 대비</a:t>
-            </a:r>
-          </a:p>
-        </p:txBody>
-      </p:sp>
-      <p:sp>
-        <p:nvSpPr>
-          <p:cNvPr id="28" name="TextBox 27"/>
-          <p:cNvSpPr txBox="1"/>
-          <p:nvPr/>
-        </p:nvSpPr>
-        <p:spPr>
-          <a:xfrm>
-            <a:off x="9025128" y="4718304"/>
-            <a:ext cx="2286000" cy="274320"/>
-          </a:xfrm>
-          <a:prstGeom prst="rect">
-            <a:avLst/>
-          </a:prstGeom>
-          <a:noFill/>
-        </p:spPr>
-        <p:txBody>
-          <a:bodyPr wrap="square" lIns="0" rIns="0" tIns="0" bIns="0">
-            <a:spAutoFit/>
-          </a:bodyPr>
-          <a:lstStyle/>
-          <a:p>
-            <a:pPr algn="l">
-              <a:lnSpc>
-                <a:spcPct val="135000"/>
-              </a:lnSpc>
-            </a:pPr>
-            <a:r>
-              <a:rPr sz="1200" b="1">
-                <a:solidFill>
-                  <a:srgbClr val="151C26"/>
-                </a:solidFill>
-                <a:latin typeface="맑은 고딕"/>
-              </a:rPr>
-              <a:t>MAE 0.2% 개선</a:t>
-            </a:r>
-          </a:p>
-        </p:txBody>
-      </p:sp>
-      <p:sp>
-        <p:nvSpPr>
-          <p:cNvPr id="29" name="TextBox 28"/>
-          <p:cNvSpPr txBox="1"/>
-          <p:nvPr/>
-        </p:nvSpPr>
-        <p:spPr>
-          <a:xfrm>
-            <a:off x="7104888" y="5230368"/>
-            <a:ext cx="4114800" cy="320040"/>
-          </a:xfrm>
-          <a:prstGeom prst="rect">
-            <a:avLst/>
-          </a:prstGeom>
-          <a:noFill/>
-        </p:spPr>
-        <p:txBody>
-          <a:bodyPr wrap="square" lIns="0" rIns="0" tIns="0" bIns="0">
-            <a:spAutoFit/>
-          </a:bodyPr>
-          <a:lstStyle/>
-          <a:p>
-            <a:pPr algn="l">
-              <a:lnSpc>
-                <a:spcPct val="140000"/>
-              </a:lnSpc>
-            </a:pPr>
-            <a:r>
-              <a:rPr sz="1050" b="0">
-                <a:solidFill>
-                  <a:srgbClr val="5D6874"/>
-                </a:solidFill>
-                <a:latin typeface="맑은 고딕"/>
-              </a:rPr>
-              <a:t>베이스라인은 '지금 상태가 그대로 간다'는 가정입니다. 이보다 나아야 참고할 가치가 있다고 보았습니다.</a:t>
-            </a:r>
-          </a:p>
-        </p:txBody>
-      </p:sp>
-      <p:sp>
-        <p:nvSpPr>
-          <p:cNvPr id="30" name="Rounded Rectangle 29"/>
+              <a:t>지금은 방향을 주로 맞히는 수준이며, 변화의 크기까지는 아직입니다(R²가 낮은 이유).</a:t>
+            </a:r>
+          </a:p>
+        </p:txBody>
+      </p:sp>
+      <p:sp>
+        <p:nvSpPr>
+          <p:cNvPr id="32" name="Rounded Rectangle 31"/>
           <p:cNvSpPr/>
           <p:nvPr/>
         </p:nvSpPr>
@@ -5901,7 +5998,7 @@
       </p:sp>
       <p:sp>
         <p:nvSpPr>
-          <p:cNvPr id="31" name="TextBox 30"/>
+          <p:cNvPr id="33" name="TextBox 32"/>
           <p:cNvSpPr txBox="1"/>
           <p:nvPr/>
         </p:nvSpPr>
@@ -5940,7 +6037,7 @@
       </p:sp>
       <p:sp>
         <p:nvSpPr>
-          <p:cNvPr id="32" name="TextBox 31"/>
+          <p:cNvPr id="34" name="TextBox 33"/>
           <p:cNvSpPr txBox="1"/>
           <p:nvPr/>
         </p:nvSpPr>
@@ -5979,7 +6076,7 @@
       </p:sp>
       <p:sp>
         <p:nvSpPr>
-          <p:cNvPr id="33" name="TextBox 32"/>
+          <p:cNvPr id="35" name="TextBox 34"/>
           <p:cNvSpPr txBox="1"/>
           <p:nvPr/>
         </p:nvSpPr>
@@ -6199,17 +6296,56 @@
           </a:prstGeom>
         </p:spPr>
       </p:pic>
+      <p:sp>
+        <p:nvSpPr>
+          <p:cNvPr id="7" name="TextBox 6"/>
+          <p:cNvSpPr txBox="1"/>
+          <p:nvPr/>
+        </p:nvSpPr>
+        <p:spPr>
+          <a:xfrm>
+            <a:off x="5961888" y="4956048"/>
+            <a:ext cx="5577840" cy="237744"/>
+          </a:xfrm>
+          <a:prstGeom prst="rect">
+            <a:avLst/>
+          </a:prstGeom>
+          <a:noFill/>
+        </p:spPr>
+        <p:txBody>
+          <a:bodyPr wrap="square" lIns="0" rIns="0" tIns="0" bIns="0">
+            <a:spAutoFit/>
+          </a:bodyPr>
+          <a:lstStyle/>
+          <a:p>
+            <a:pPr algn="l">
+              <a:lnSpc>
+                <a:spcPct val="135000"/>
+              </a:lnSpc>
+            </a:pPr>
+            <a:r>
+              <a:rPr sz="1150" b="1">
+                <a:solidFill>
+                  <a:srgbClr val="151C26"/>
+                </a:solidFill>
+                <a:latin typeface="맑은 고딕"/>
+              </a:rPr>
+              <a:t>3년 뒤 위험 상위 5개 생활권</a:t>
+            </a:r>
+          </a:p>
+        </p:txBody>
+      </p:sp>
       <p:graphicFrame>
         <p:nvGraphicFramePr>
-          <p:cNvPr id="7" name="Table 6"/>
+          <p:cNvPr id="8" name="Table 7"/>
           <p:cNvGraphicFramePr>
             <a:graphicFrameLocks noGrp="1"/>
           </p:cNvGraphicFramePr>
           <p:nvPr/>
         </p:nvGraphicFramePr>
         <p:xfrm>
-          <a:off x="5961888" y="5029200"/>
-          <a:ext cx="5577837" cy="2144268"/>
+          <a:off x="5961888" y="5248656"/>
+          <a:ext cx="5577837" cy="1536192"/>
         </p:xfrm>
         <a:graphic>
           <a:graphicData uri="http://schemas.openxmlformats.org/drawingml/2006/table">
@@ -6223,7 +6359,7 @@
                 <a:gridCol w="1154035"/>
                 <a:gridCol w="1154035"/>
               </a:tblGrid>
-              <a:tr h="306324">
+              <a:tr h="256032">
                 <a:tc>
                   <a:txBody>
                     <a:bodyPr/>
@@ -6231,7 +6367,7 @@
                     <a:p>
                       <a:pPr algn="ctr"/>
                       <a:r>
-                        <a:rPr sz="1000" b="1">
+                        <a:rPr sz="950" b="1">
                           <a:solidFill>
                             <a:srgbClr val="151C26"/>
                           </a:solidFill>
@@ -6254,7 +6390,7 @@
                     <a:p>
                       <a:pPr algn="ctr"/>
                       <a:r>
-                        <a:rPr sz="1000" b="1">
+                        <a:rPr sz="950" b="1">
                           <a:solidFill>
                             <a:srgbClr val="151C26"/>
                           </a:solidFill>
@@ -6277,7 +6413,7 @@
                     <a:p>
                       <a:pPr algn="ctr"/>
                       <a:r>
-                        <a:rPr sz="1000" b="1">
+                        <a:rPr sz="950" b="1">
                           <a:solidFill>
                             <a:srgbClr val="151C26"/>
                           </a:solidFill>
@@ -6300,7 +6436,7 @@
                     <a:p>
                       <a:pPr algn="ctr"/>
                       <a:r>
-                        <a:rPr sz="1000" b="1">
+                        <a:rPr sz="950" b="1">
                           <a:solidFill>
                             <a:srgbClr val="151C26"/>
                           </a:solidFill>
@@ -6317,7 +6453,7 @@
                   </a:tcPr>
                 </a:tc>
               </a:tr>
-              <a:tr h="306324">
+              <a:tr h="256032">
                 <a:tc>
                   <a:txBody>
                     <a:bodyPr/>
@@ -6325,13 +6461,13 @@
                     <a:p>
                       <a:pPr algn="l"/>
                       <a:r>
-                        <a:rPr sz="950">
+                        <a:rPr sz="900">
                           <a:solidFill>
                             <a:srgbClr val="151C26"/>
                           </a:solidFill>
                           <a:latin typeface="맑은 고딕"/>
                         </a:rPr>
-                        <a:t>중앙동</a:t>
+                        <a:t>동면</a:t>
                       </a:r>
                     </a:p>
                   </a:txBody>
@@ -6348,7 +6484,7 @@
                     <a:p>
                       <a:pPr algn="ctr"/>
                       <a:r>
-                        <a:rPr sz="950">
+                        <a:rPr sz="900">
                           <a:solidFill>
                             <a:srgbClr val="151C26"/>
                           </a:solidFill>
@@ -6371,13 +6507,13 @@
                     <a:p>
                       <a:pPr algn="ctr"/>
                       <a:r>
-                        <a:rPr sz="950">
+                        <a:rPr sz="900">
                           <a:solidFill>
                             <a:srgbClr val="151C26"/>
                           </a:solidFill>
                           <a:latin typeface="맑은 고딕"/>
                         </a:rPr>
-                        <a:t>92</a:t>
+                        <a:t>100</a:t>
                       </a:r>
                     </a:p>
                   </a:txBody>
@@ -6394,13 +6530,13 @@
                     <a:p>
                       <a:pPr algn="ctr"/>
                       <a:r>
-                        <a:rPr sz="950">
+                        <a:rPr sz="900">
                           <a:solidFill>
                             <a:srgbClr val="151C26"/>
                           </a:solidFill>
                           <a:latin typeface="맑은 고딕"/>
                         </a:rPr>
-                        <a:t>-8</a:t>
+                        <a:t>+10</a:t>
                       </a:r>
                     </a:p>
                   </a:txBody>
@@ -6411,7 +6547,7 @@
                   </a:tcPr>
                 </a:tc>
               </a:tr>
-              <a:tr h="306324">
+              <a:tr h="256032">
                 <a:tc>
                   <a:txBody>
                     <a:bodyPr/>
@@ -6419,13 +6555,13 @@
                     <a:p>
                       <a:pPr algn="l"/>
                       <a:r>
-                        <a:rPr sz="950">
+                        <a:rPr sz="900">
                           <a:solidFill>
                             <a:srgbClr val="151C26"/>
                           </a:solidFill>
                           <a:latin typeface="맑은 고딕"/>
                         </a:rPr>
-                        <a:t>원성동</a:t>
+                        <a:t>수신면</a:t>
                       </a:r>
                     </a:p>
                   </a:txBody>
@@ -6442,13 +6578,13 @@
                     <a:p>
                       <a:pPr algn="ctr"/>
                       <a:r>
-                        <a:rPr sz="950">
+                        <a:rPr sz="900">
                           <a:solidFill>
                             <a:srgbClr val="151C26"/>
                           </a:solidFill>
                           <a:latin typeface="맑은 고딕"/>
                         </a:rPr>
-                        <a:t>71</a:t>
+                        <a:t>96</a:t>
                       </a:r>
                     </a:p>
                   </a:txBody>
@@ -6465,13 +6601,13 @@
                     <a:p>
                       <a:pPr algn="ctr"/>
                       <a:r>
-                        <a:rPr sz="950">
+                        <a:rPr sz="900">
                           <a:solidFill>
                             <a:srgbClr val="151C26"/>
                           </a:solidFill>
                           <a:latin typeface="맑은 고딕"/>
                         </a:rPr>
-                        <a:t>89</a:t>
+                        <a:t>100</a:t>
                       </a:r>
                     </a:p>
                   </a:txBody>
@@ -6488,13 +6624,13 @@
                     <a:p>
                       <a:pPr algn="ctr"/>
                       <a:r>
-                        <a:rPr sz="950">
+                        <a:rPr sz="900">
                           <a:solidFill>
                             <a:srgbClr val="151C26"/>
                           </a:solidFill>
                           <a:latin typeface="맑은 고딕"/>
                         </a:rPr>
-                        <a:t>+18</a:t>
+                        <a:t>+4</a:t>
                       </a:r>
                     </a:p>
                   </a:txBody>
@@ -6505,7 +6641,7 @@
                   </a:tcPr>
                 </a:tc>
               </a:tr>
-              <a:tr h="306324">
+              <a:tr h="256032">
                 <a:tc>
                   <a:txBody>
                     <a:bodyPr/>
@@ -6513,13 +6649,13 @@
                     <a:p>
                       <a:pPr algn="l"/>
                       <a:r>
-                        <a:rPr sz="950">
+                        <a:rPr sz="900">
                           <a:solidFill>
                             <a:srgbClr val="151C26"/>
                           </a:solidFill>
                           <a:latin typeface="맑은 고딕"/>
                         </a:rPr>
-                        <a:t>광덕면</a:t>
+                        <a:t>성남면</a:t>
                       </a:r>
                     </a:p>
                   </a:txBody>
@@ -6536,13 +6672,13 @@
                     <a:p>
                       <a:pPr algn="ctr"/>
                       <a:r>
-                        <a:rPr sz="950">
+                        <a:rPr sz="900">
                           <a:solidFill>
                             <a:srgbClr val="151C26"/>
                           </a:solidFill>
                           <a:latin typeface="맑은 고딕"/>
                         </a:rPr>
-                        <a:t>53</a:t>
+                        <a:t>98</a:t>
                       </a:r>
                     </a:p>
                   </a:txBody>
@@ -6559,13 +6695,13 @@
                     <a:p>
                       <a:pPr algn="ctr"/>
                       <a:r>
-                        <a:rPr sz="950">
+                        <a:rPr sz="900">
                           <a:solidFill>
                             <a:srgbClr val="151C26"/>
                           </a:solidFill>
                           <a:latin typeface="맑은 고딕"/>
                         </a:rPr>
-                        <a:t>72</a:t>
+                        <a:t>100</a:t>
                       </a:r>
                     </a:p>
                   </a:txBody>
@@ -6582,13 +6718,13 @@
                     <a:p>
                       <a:pPr algn="ctr"/>
                       <a:r>
-                        <a:rPr sz="950">
+                        <a:rPr sz="900">
                           <a:solidFill>
                             <a:srgbClr val="151C26"/>
                           </a:solidFill>
                           <a:latin typeface="맑은 고딕"/>
                         </a:rPr>
-                        <a:t>+19</a:t>
+                        <a:t>+3</a:t>
                       </a:r>
                     </a:p>
                   </a:txBody>
@@ -6599,7 +6735,7 @@
                   </a:tcPr>
                 </a:tc>
               </a:tr>
-              <a:tr h="306324">
+              <a:tr h="256032">
                 <a:tc>
                   <a:txBody>
                     <a:bodyPr/>
@@ -6607,7 +6743,7 @@
                     <a:p>
                       <a:pPr algn="l"/>
                       <a:r>
-                        <a:rPr sz="950">
+                        <a:rPr sz="900">
                           <a:solidFill>
                             <a:srgbClr val="151C26"/>
                           </a:solidFill>
@@ -6630,13 +6766,13 @@
                     <a:p>
                       <a:pPr algn="ctr"/>
                       <a:r>
-                        <a:rPr sz="950">
+                        <a:rPr sz="900">
                           <a:solidFill>
                             <a:srgbClr val="151C26"/>
                           </a:solidFill>
                           <a:latin typeface="맑은 고딕"/>
                         </a:rPr>
-                        <a:t>61</a:t>
+                        <a:t>88</a:t>
                       </a:r>
                     </a:p>
                   </a:txBody>
@@ -6653,13 +6789,13 @@
                     <a:p>
                       <a:pPr algn="ctr"/>
                       <a:r>
-                        <a:rPr sz="950">
+                        <a:rPr sz="900">
                           <a:solidFill>
                             <a:srgbClr val="151C26"/>
                           </a:solidFill>
                           <a:latin typeface="맑은 고딕"/>
                         </a:rPr>
-                        <a:t>71</a:t>
+                        <a:t>96</a:t>
                       </a:r>
                     </a:p>
                   </a:txBody>
@@ -6676,13 +6812,13 @@
                     <a:p>
                       <a:pPr algn="ctr"/>
                       <a:r>
-                        <a:rPr sz="950">
+                        <a:rPr sz="900">
                           <a:solidFill>
                             <a:srgbClr val="151C26"/>
                           </a:solidFill>
                           <a:latin typeface="맑은 고딕"/>
                         </a:rPr>
-                        <a:t>+10</a:t>
+                        <a:t>+9</a:t>
                       </a:r>
                     </a:p>
                   </a:txBody>
@@ -6693,7 +6829,7 @@
                   </a:tcPr>
                 </a:tc>
               </a:tr>
-              <a:tr h="306324">
+              <a:tr h="256032">
                 <a:tc>
                   <a:txBody>
                     <a:bodyPr/>
@@ -6701,13 +6837,13 @@
                     <a:p>
                       <a:pPr algn="l"/>
                       <a:r>
-                        <a:rPr sz="950">
+                        <a:rPr sz="900">
                           <a:solidFill>
                             <a:srgbClr val="151C26"/>
                           </a:solidFill>
                           <a:latin typeface="맑은 고딕"/>
                         </a:rPr>
-                        <a:t>북면</a:t>
+                        <a:t>성환읍</a:t>
                       </a:r>
                     </a:p>
                   </a:txBody>
@@ -6724,13 +6860,13 @@
                     <a:p>
                       <a:pPr algn="ctr"/>
                       <a:r>
-                        <a:rPr sz="950">
+                        <a:rPr sz="900">
                           <a:solidFill>
                             <a:srgbClr val="151C26"/>
                           </a:solidFill>
                           <a:latin typeface="맑은 고딕"/>
                         </a:rPr>
-                        <a:t>43</a:t>
+                        <a:t>74</a:t>
                       </a:r>
                     </a:p>
                   </a:txBody>
@@ -6747,13 +6883,13 @@
                     <a:p>
                       <a:pPr algn="ctr"/>
                       <a:r>
-                        <a:rPr sz="950">
+                        <a:rPr sz="900">
                           <a:solidFill>
                             <a:srgbClr val="151C26"/>
                           </a:solidFill>
                           <a:latin typeface="맑은 고딕"/>
                         </a:rPr>
-                        <a:t>69</a:t>
+                        <a:t>95</a:t>
                       </a:r>
                     </a:p>
                   </a:txBody>
@@ -6770,107 +6906,13 @@
                     <a:p>
                       <a:pPr algn="ctr"/>
                       <a:r>
-                        <a:rPr sz="950">
+                        <a:rPr sz="900">
                           <a:solidFill>
                             <a:srgbClr val="151C26"/>
                           </a:solidFill>
                           <a:latin typeface="맑은 고딕"/>
                         </a:rPr>
-                        <a:t>+26</a:t>
-                      </a:r>
-                    </a:p>
-                  </a:txBody>
-                  <a:tcPr anchor="ctr">
-                    <a:solidFill>
-                      <a:srgbClr val="FFFFFF"/>
-                    </a:solidFill>
-                  </a:tcPr>
-                </a:tc>
-              </a:tr>
-              <a:tr h="306324">
-                <a:tc>
-                  <a:txBody>
-                    <a:bodyPr/>
-                    <a:lstStyle/>
-                    <a:p>
-                      <a:pPr algn="l"/>
-                      <a:r>
-                        <a:rPr sz="950">
-                          <a:solidFill>
-                            <a:srgbClr val="151C26"/>
-                          </a:solidFill>
-                          <a:latin typeface="맑은 고딕"/>
-                        </a:rPr>
-                        <a:t>성거읍</a:t>
-                      </a:r>
-                    </a:p>
-                  </a:txBody>
-                  <a:tcPr anchor="ctr">
-                    <a:solidFill>
-                      <a:srgbClr val="FFFFFF"/>
-                    </a:solidFill>
-                  </a:tcPr>
-                </a:tc>
-                <a:tc>
-                  <a:txBody>
-                    <a:bodyPr/>
-                    <a:lstStyle/>
-                    <a:p>
-                      <a:pPr algn="ctr"/>
-                      <a:r>
-                        <a:rPr sz="950">
-                          <a:solidFill>
-                            <a:srgbClr val="151C26"/>
-                          </a:solidFill>
-                          <a:latin typeface="맑은 고딕"/>
-                        </a:rPr>
-                        <a:t>52</a:t>
-                      </a:r>
-                    </a:p>
-                  </a:txBody>
-                  <a:tcPr anchor="ctr">
-                    <a:solidFill>
-                      <a:srgbClr val="FFFFFF"/>
-                    </a:solidFill>
-                  </a:tcPr>
-                </a:tc>
-                <a:tc>
-                  <a:txBody>
-                    <a:bodyPr/>
-                    <a:lstStyle/>
-                    <a:p>
-                      <a:pPr algn="ctr"/>
-                      <a:r>
-                        <a:rPr sz="950">
-                          <a:solidFill>
-                            <a:srgbClr val="151C26"/>
-                          </a:solidFill>
-                          <a:latin typeface="맑은 고딕"/>
-                        </a:rPr>
-                        <a:t>68</a:t>
-                      </a:r>
-                    </a:p>
-                  </a:txBody>
-                  <a:tcPr anchor="ctr">
-                    <a:solidFill>
-                      <a:srgbClr val="FFFFFF"/>
-                    </a:solidFill>
-                  </a:tcPr>
-                </a:tc>
-                <a:tc>
-                  <a:txBody>
-                    <a:bodyPr/>
-                    <a:lstStyle/>
-                    <a:p>
-                      <a:pPr algn="ctr"/>
-                      <a:r>
-                        <a:rPr sz="950">
-                          <a:solidFill>
-                            <a:srgbClr val="151C26"/>
-                          </a:solidFill>
-                          <a:latin typeface="맑은 고딕"/>
-                        </a:rPr>
-                        <a:t>+16</a:t>
+                        <a:t>+21</a:t>
                       </a:r>
                     </a:p>
                   </a:txBody>
@@ -6887,7 +6929,7 @@
       </p:graphicFrame>
       <p:sp>
         <p:nvSpPr>
-          <p:cNvPr id="8" name="TextBox 7"/>
+          <p:cNvPr id="9" name="TextBox 8"/>
           <p:cNvSpPr txBox="1"/>
           <p:nvPr/>
         </p:nvSpPr>
@@ -6926,7 +6968,7 @@
       </p:sp>
       <p:sp>
         <p:nvSpPr>
-          <p:cNvPr id="9" name="TextBox 8"/>
+          <p:cNvPr id="10" name="TextBox 9"/>
           <p:cNvSpPr txBox="1"/>
           <p:nvPr/>
         </p:nvSpPr>
@@ -14243,7 +14285,7 @@
                 </a:solidFill>
                 <a:latin typeface="맑은 고딕"/>
               </a:rPr>
-              <a:t>조기경보 정확도</a:t>
+              <a:t>조기경보 방향 적중률</a:t>
             </a:r>
           </a:p>
         </p:txBody>
@@ -14282,7 +14324,7 @@
                 </a:solidFill>
                 <a:latin typeface="맑은 고딕"/>
               </a:rPr>
-              <a:t>R² 0.487</a:t>
+              <a:t>69%</a:t>
             </a:r>
           </a:p>
         </p:txBody>
@@ -14321,7 +14363,7 @@
                 </a:solidFill>
                 <a:latin typeface="맑은 고딕"/>
               </a:rPr>
-              <a:t>베이스라인 대비 MAE 0.2%↓</a:t>
+              <a:t>베이스라인 대비 MAE +5.3%</a:t>
             </a:r>
           </a:p>
         </p:txBody>
@@ -15576,7 +15618,7 @@
                 </a:solidFill>
                 <a:latin typeface="맑은 고딕"/>
               </a:rPr>
-              <a:t>표본 크기</a:t>
+              <a:t>예측 성능</a:t>
             </a:r>
           </a:p>
         </p:txBody>
@@ -15615,7 +15657,7 @@
                 </a:solidFill>
                 <a:latin typeface="맑은 고딕"/>
               </a:rPr>
-              <a:t>분석 단위가 25개 생활권이라 머신러닝 표본으로는 작다.</a:t>
+              <a:t>3년 뒤 악화·개선 '방향'은 어느 정도 맞히지만, 변화의 '크기'까지는 아직 부족합니다.</a:t>
             </a:r>
           </a:p>
         </p:txBody>
@@ -15654,7 +15696,7 @@
                 </a:solidFill>
                 <a:latin typeface="맑은 고딕"/>
               </a:rPr>
-              <a:t>→ 500m 격자 단위로 내리면 표본이 수천 개로 늘어난다. 현재는 규제를 강하게 걸고 Leave-One-Zone-Out CV와 베이스라인 비교로 과적합 여부를 확인하고 있다.</a:t>
+              <a:t>→ 위험도 수준은 자기상관이 강해 '그대로 간다'는 예측이 이미 강력한 기준선입니다. 현재는 인구 축만 실데이터라, 상권 개·폐업 시계열이 더해지면 나아질 것으로 봅니다.</a:t>
             </a:r>
           </a:p>
         </p:txBody>
@@ -15781,7 +15823,7 @@
                 </a:solidFill>
                 <a:latin typeface="맑은 고딕"/>
               </a:rPr>
-              <a:t>공간 해상도</a:t>
+              <a:t>표본 크기</a:t>
             </a:r>
           </a:p>
         </p:txBody>
@@ -15820,7 +15862,7 @@
                 </a:solidFill>
                 <a:latin typeface="맑은 고딕"/>
               </a:rPr>
-              <a:t>생활권 내부의 격차(같은 동 안의 편차)는 잡히지 않는다.</a:t>
+              <a:t>분석 단위가 25개 생활권이라 머신러닝 표본으로는 작습니다.</a:t>
             </a:r>
           </a:p>
         </p:txBody>
@@ -15859,7 +15901,7 @@
                 </a:solidFill>
                 <a:latin typeface="맑은 고딕"/>
               </a:rPr>
-              <a:t>→ 집계구·격자 데이터로 전환하면 해결된다. 공간단위 정의만 교체하면 되도록 설계했다.</a:t>
+              <a:t>→ 500m 격자 단위로 내리면 표본이 수천 개로 늘어납니다. 지금은 규제를 강하게 걸고 Leave-One-Zone-Out CV와 베이스라인 비교로 과적합 여부를 확인하고 있습니다.</a:t>
             </a:r>
           </a:p>
         </p:txBody>
@@ -15986,7 +16028,7 @@
                 </a:solidFill>
                 <a:latin typeface="맑은 고딕"/>
               </a:rPr>
-              <a:t>빈집 데이터 정밀도</a:t>
+              <a:t>공간 해상도</a:t>
             </a:r>
           </a:p>
         </p:txBody>
@@ -16025,7 +16067,7 @@
                 </a:solidFill>
                 <a:latin typeface="맑은 고딕"/>
               </a:rPr>
-              <a:t>빈집 통계는 시군구 단위 공표가 많아 읍면동 배분에 가정이 들어간다.</a:t>
+              <a:t>생활권 안쪽의 차이(같은 동 안의 편차)는 잡히지 않습니다.</a:t>
             </a:r>
           </a:p>
         </p:txBody>
@@ -16064,7 +16106,7 @@
                 </a:solidFill>
                 <a:latin typeface="맑은 고딕"/>
               </a:rPr>
-              <a:t>→ 천안시 빈집실태조사 원자료를 연계하면 가정 없이 대체된다.</a:t>
+              <a:t>→ 집계구·격자 데이터로 바꾸면 해결됩니다. 공간단위 정의만 교체하면 되도록 만들어 두었습니다.</a:t>
             </a:r>
           </a:p>
         </p:txBody>
@@ -16230,7 +16272,7 @@
                 </a:solidFill>
                 <a:latin typeface="맑은 고딕"/>
               </a:rPr>
-              <a:t>본 모델은 쇠퇴를 예측할 뿐, 사업의 인과효과를 증명하지 않는다.</a:t>
+              <a:t>이 모델은 변화를 미리 살펴볼 뿐, 사업의 효과를 증명하지는 못합니다.</a:t>
             </a:r>
           </a:p>
         </p:txBody>
@@ -16269,7 +16311,7 @@
                 </a:solidFill>
                 <a:latin typeface="맑은 고딕"/>
               </a:rPr>
-              <a:t>→ 사업 시행 전후 이중차분(DID) 설계를 붙이면 효과 검증까지 확장 가능하다.</a:t>
+              <a:t>→ 시행 전후 이중차분(DID) 설계를 덧붙이면 효과 검증까지 넓힐 수 있습니다.</a:t>
             </a:r>
           </a:p>
         </p:txBody>

--- a/deliverables/기획서_천안균형발전나침반_CBC.pptx
+++ b/deliverables/기획서_천안균형발전나침반_CBC.pptx
@@ -4547,8 +4547,8 @@
         </p:nvSpPr>
         <p:spPr>
           <a:xfrm>
-            <a:off x="658368" y="5650992"/>
-            <a:ext cx="10874959" cy="713232"/>
+            <a:off x="658368" y="5486400"/>
+            <a:ext cx="10874959" cy="877824"/>
           </a:xfrm>
           <a:prstGeom prst="roundRect">
             <a:avLst>
@@ -4556,7 +4556,7 @@
             </a:avLst>
           </a:prstGeom>
           <a:solidFill>
-            <a:srgbClr val="FDF2F2"/>
+            <a:srgbClr val="F0F7F2"/>
           </a:solidFill>
           <a:ln>
             <a:noFill/>
@@ -4591,40 +4591,98 @@
         </p:nvSpPr>
         <p:spPr>
           <a:xfrm>
-            <a:off x="932688" y="5833872"/>
-            <a:ext cx="10515600" cy="411480"/>
-          </a:xfrm>
-          <a:prstGeom prst="rect">
-            <a:avLst/>
-          </a:prstGeom>
-          <a:noFill/>
-        </p:spPr>
-        <p:txBody>
-          <a:bodyPr wrap="square" lIns="0" rIns="0" tIns="0" bIns="0">
-            <a:spAutoFit/>
-          </a:bodyPr>
-          <a:lstStyle/>
-          <a:p>
-            <a:pPr algn="l">
-              <a:lnSpc>
-                <a:spcPct val="150000"/>
-              </a:lnSpc>
-            </a:pPr>
-            <a:r>
-              <a:rPr sz="1250" b="1">
+            <a:off x="932688" y="5650992"/>
+            <a:ext cx="10515600" cy="274320"/>
+          </a:xfrm>
+          <a:prstGeom prst="rect">
+            <a:avLst/>
+          </a:prstGeom>
+          <a:noFill/>
+        </p:spPr>
+        <p:txBody>
+          <a:bodyPr wrap="square" lIns="0" rIns="0" tIns="0" bIns="0">
+            <a:spAutoFit/>
+          </a:bodyPr>
+          <a:lstStyle/>
+          <a:p>
+            <a:pPr algn="l">
+              <a:lnSpc>
+                <a:spcPct val="135000"/>
+              </a:lnSpc>
+            </a:pPr>
+            <a:r>
+              <a:rPr sz="1300" b="1">
+                <a:solidFill>
+                  <a:srgbClr val="3E9B7C"/>
+                </a:solidFill>
+                <a:latin typeface="맑은 고딕"/>
+              </a:rPr>
+              <a:t>다만 '원도심이면 다 줄어든다'는 것은 아니었습니다.</a:t>
+            </a:r>
+          </a:p>
+        </p:txBody>
+      </p:sp>
+      <p:sp>
+        <p:nvSpPr>
+          <p:cNvPr id="8" name="TextBox 7"/>
+          <p:cNvSpPr txBox="1"/>
+          <p:nvPr/>
+        </p:nvSpPr>
+        <p:spPr>
+          <a:xfrm>
+            <a:off x="932688" y="5943600"/>
+            <a:ext cx="10515600" cy="365760"/>
+          </a:xfrm>
+          <a:prstGeom prst="rect">
+            <a:avLst/>
+          </a:prstGeom>
+          <a:noFill/>
+        </p:spPr>
+        <p:txBody>
+          <a:bodyPr wrap="square" lIns="0" rIns="0" tIns="0" bIns="0">
+            <a:spAutoFit/>
+          </a:bodyPr>
+          <a:lstStyle/>
+          <a:p>
+            <a:pPr algn="l">
+              <a:lnSpc>
+                <a:spcPct val="145000"/>
+              </a:lnSpc>
+            </a:pPr>
+            <a:r>
+              <a:rPr sz="1150" b="0">
                 <a:solidFill>
                   <a:srgbClr val="151C26"/>
                 </a:solidFill>
                 <a:latin typeface="맑은 고딕"/>
               </a:rPr>
-              <a:t>이 그림이 조기경보 엔진의 출발점이다 — 추세가 이미 갈라졌다면, 다음에 갈라질 곳도 지금의 구조에서 읽어낼 수 있다.</a:t>
-            </a:r>
-          </a:p>
-        </p:txBody>
-      </p:sp>
-      <p:sp>
-        <p:nvSpPr>
-          <p:cNvPr id="8" name="TextBox 7"/>
+              <a:t>5년 인구증감률 상위는 12(+158%), 3(+81%)으로, 두 곳 모두 신축 입주가 이어진 지역입니다. 원도심에 속한 문성동도 사람이 돌아왔습니다.</a:t>
+            </a:r>
+          </a:p>
+          <a:p>
+            <a:pPr algn="l">
+              <a:lnSpc>
+                <a:spcPct val="145000"/>
+              </a:lnSpc>
+              <a:spcBef>
+                <a:spcPts val="0"/>
+              </a:spcBef>
+            </a:pPr>
+            <a:r>
+              <a:rPr sz="1150" b="0">
+                <a:solidFill>
+                  <a:srgbClr val="151C26"/>
+                </a:solidFill>
+                <a:latin typeface="맑은 고딕"/>
+              </a:rPr>
+              <a:t>비어 있던 공간이 다시 주거로 쓰이면 인구가 회복될 수 있다는 뜻으로 읽었고, 뒤에서 말씀드릴 빈집 활용 제안의 근거가 되었습니다.</a:t>
+            </a:r>
+          </a:p>
+        </p:txBody>
+      </p:sp>
+      <p:sp>
+        <p:nvSpPr>
+          <p:cNvPr id="9" name="TextBox 8"/>
           <p:cNvSpPr txBox="1"/>
           <p:nvPr/>
         </p:nvSpPr>
@@ -4663,7 +4721,7 @@
       </p:sp>
       <p:sp>
         <p:nvSpPr>
-          <p:cNvPr id="9" name="TextBox 8"/>
+          <p:cNvPr id="10" name="TextBox 9"/>
           <p:cNvSpPr txBox="1"/>
           <p:nvPr/>
         </p:nvSpPr>
@@ -8213,7 +8271,7 @@
                 </a:solidFill>
                 <a:latin typeface="맑은 고딕"/>
               </a:rPr>
-              <a:t>상위 12개소 우선 투자 시 취약수요 커버리지 +6.9%p, 신규 수혜인구 약 32,822명.</a:t>
+              <a:t>상위 12개소 우선 투자 시 취약수요 커버리지 +7.0%p, 신규 수혜인구 약 32,822명.</a:t>
             </a:r>
           </a:p>
         </p:txBody>
@@ -8529,7 +8587,7 @@
                           </a:solidFill>
                           <a:latin typeface="맑은 고딕"/>
                         </a:rPr>
-                        <a:t>+1.32%p</a:t>
+                        <a:t>+1.3%p</a:t>
                       </a:r>
                     </a:p>
                   </a:txBody>
@@ -8646,7 +8704,7 @@
                           </a:solidFill>
                           <a:latin typeface="맑은 고딕"/>
                         </a:rPr>
-                        <a:t>+1.28%p</a:t>
+                        <a:t>+1.3%p</a:t>
                       </a:r>
                     </a:p>
                   </a:txBody>
@@ -8880,7 +8938,7 @@
                           </a:solidFill>
                           <a:latin typeface="맑은 고딕"/>
                         </a:rPr>
-                        <a:t>+0.57%p</a:t>
+                        <a:t>+0.59%p</a:t>
                       </a:r>
                     </a:p>
                   </a:txBody>
@@ -9114,7 +9172,7 @@
                           </a:solidFill>
                           <a:latin typeface="맑은 고딕"/>
                         </a:rPr>
-                        <a:t>+0.4%p</a:t>
+                        <a:t>+0.41%p</a:t>
                       </a:r>
                     </a:p>
                   </a:txBody>
@@ -9231,6 +9289,123 @@
                           </a:solidFill>
                           <a:latin typeface="맑은 고딕"/>
                         </a:rPr>
+                        <a:t>+0.37%p</a:t>
+                      </a:r>
+                    </a:p>
+                  </a:txBody>
+                  <a:tcPr anchor="ctr">
+                    <a:solidFill>
+                      <a:srgbClr val="FFFFFF"/>
+                    </a:solidFill>
+                  </a:tcPr>
+                </a:tc>
+              </a:tr>
+              <a:tr h="306324">
+                <a:tc>
+                  <a:txBody>
+                    <a:bodyPr/>
+                    <a:lstStyle/>
+                    <a:p>
+                      <a:pPr algn="l"/>
+                      <a:r>
+                        <a:rPr sz="950">
+                          <a:solidFill>
+                            <a:srgbClr val="151C26"/>
+                          </a:solidFill>
+                          <a:latin typeface="맑은 고딕"/>
+                        </a:rPr>
+                        <a:t>8</a:t>
+                      </a:r>
+                    </a:p>
+                  </a:txBody>
+                  <a:tcPr anchor="ctr">
+                    <a:solidFill>
+                      <a:srgbClr val="FFFFFF"/>
+                    </a:solidFill>
+                  </a:tcPr>
+                </a:tc>
+                <a:tc>
+                  <a:txBody>
+                    <a:bodyPr/>
+                    <a:lstStyle/>
+                    <a:p>
+                      <a:pPr algn="ctr"/>
+                      <a:r>
+                        <a:rPr sz="950">
+                          <a:solidFill>
+                            <a:srgbClr val="151C26"/>
+                          </a:solidFill>
+                          <a:latin typeface="맑은 고딕"/>
+                        </a:rPr>
+                        <a:t>풍세면</a:t>
+                      </a:r>
+                    </a:p>
+                  </a:txBody>
+                  <a:tcPr anchor="ctr">
+                    <a:solidFill>
+                      <a:srgbClr val="FFFFFF"/>
+                    </a:solidFill>
+                  </a:tcPr>
+                </a:tc>
+                <a:tc>
+                  <a:txBody>
+                    <a:bodyPr/>
+                    <a:lstStyle/>
+                    <a:p>
+                      <a:pPr algn="ctr"/>
+                      <a:r>
+                        <a:rPr sz="950">
+                          <a:solidFill>
+                            <a:srgbClr val="151C26"/>
+                          </a:solidFill>
+                          <a:latin typeface="맑은 고딕"/>
+                        </a:rPr>
+                        <a:t>의료</a:t>
+                      </a:r>
+                    </a:p>
+                  </a:txBody>
+                  <a:tcPr anchor="ctr">
+                    <a:solidFill>
+                      <a:srgbClr val="FFFFFF"/>
+                    </a:solidFill>
+                  </a:tcPr>
+                </a:tc>
+                <a:tc>
+                  <a:txBody>
+                    <a:bodyPr/>
+                    <a:lstStyle/>
+                    <a:p>
+                      <a:pPr algn="ctr"/>
+                      <a:r>
+                        <a:rPr sz="950">
+                          <a:solidFill>
+                            <a:srgbClr val="151C26"/>
+                          </a:solidFill>
+                          <a:latin typeface="맑은 고딕"/>
+                        </a:rPr>
+                        <a:t>1,003</a:t>
+                      </a:r>
+                    </a:p>
+                  </a:txBody>
+                  <a:tcPr anchor="ctr">
+                    <a:solidFill>
+                      <a:srgbClr val="FFFFFF"/>
+                    </a:solidFill>
+                  </a:tcPr>
+                </a:tc>
+                <a:tc>
+                  <a:txBody>
+                    <a:bodyPr/>
+                    <a:lstStyle/>
+                    <a:p>
+                      <a:pPr algn="ctr"/>
+                      <a:r>
+                        <a:rPr sz="950">
+                          <a:solidFill>
+                            <a:srgbClr val="151C26"/>
+                          </a:solidFill>
+                          <a:latin typeface="맑은 고딕"/>
+                        </a:rPr>
                         <a:t>+0.36%p</a:t>
                       </a:r>
                     </a:p>
@@ -9256,7 +9431,7 @@
                           </a:solidFill>
                           <a:latin typeface="맑은 고딕"/>
                         </a:rPr>
-                        <a:t>8</a:t>
+                        <a:t>9</a:t>
                       </a:r>
                     </a:p>
                   </a:txBody>
@@ -9326,123 +9501,6 @@
                           <a:latin typeface="맑은 고딕"/>
                         </a:rPr>
                         <a:t>1,626</a:t>
-                      </a:r>
-                    </a:p>
-                  </a:txBody>
-                  <a:tcPr anchor="ctr">
-                    <a:solidFill>
-                      <a:srgbClr val="FFFFFF"/>
-                    </a:solidFill>
-                  </a:tcPr>
-                </a:tc>
-                <a:tc>
-                  <a:txBody>
-                    <a:bodyPr/>
-                    <a:lstStyle/>
-                    <a:p>
-                      <a:pPr algn="ctr"/>
-                      <a:r>
-                        <a:rPr sz="950">
-                          <a:solidFill>
-                            <a:srgbClr val="151C26"/>
-                          </a:solidFill>
-                          <a:latin typeface="맑은 고딕"/>
-                        </a:rPr>
-                        <a:t>+0.35%p</a:t>
-                      </a:r>
-                    </a:p>
-                  </a:txBody>
-                  <a:tcPr anchor="ctr">
-                    <a:solidFill>
-                      <a:srgbClr val="FFFFFF"/>
-                    </a:solidFill>
-                  </a:tcPr>
-                </a:tc>
-              </a:tr>
-              <a:tr h="306324">
-                <a:tc>
-                  <a:txBody>
-                    <a:bodyPr/>
-                    <a:lstStyle/>
-                    <a:p>
-                      <a:pPr algn="l"/>
-                      <a:r>
-                        <a:rPr sz="950">
-                          <a:solidFill>
-                            <a:srgbClr val="151C26"/>
-                          </a:solidFill>
-                          <a:latin typeface="맑은 고딕"/>
-                        </a:rPr>
-                        <a:t>9</a:t>
-                      </a:r>
-                    </a:p>
-                  </a:txBody>
-                  <a:tcPr anchor="ctr">
-                    <a:solidFill>
-                      <a:srgbClr val="FFFFFF"/>
-                    </a:solidFill>
-                  </a:tcPr>
-                </a:tc>
-                <a:tc>
-                  <a:txBody>
-                    <a:bodyPr/>
-                    <a:lstStyle/>
-                    <a:p>
-                      <a:pPr algn="ctr"/>
-                      <a:r>
-                        <a:rPr sz="950">
-                          <a:solidFill>
-                            <a:srgbClr val="151C26"/>
-                          </a:solidFill>
-                          <a:latin typeface="맑은 고딕"/>
-                        </a:rPr>
-                        <a:t>풍세면</a:t>
-                      </a:r>
-                    </a:p>
-                  </a:txBody>
-                  <a:tcPr anchor="ctr">
-                    <a:solidFill>
-                      <a:srgbClr val="FFFFFF"/>
-                    </a:solidFill>
-                  </a:tcPr>
-                </a:tc>
-                <a:tc>
-                  <a:txBody>
-                    <a:bodyPr/>
-                    <a:lstStyle/>
-                    <a:p>
-                      <a:pPr algn="ctr"/>
-                      <a:r>
-                        <a:rPr sz="950">
-                          <a:solidFill>
-                            <a:srgbClr val="151C26"/>
-                          </a:solidFill>
-                          <a:latin typeface="맑은 고딕"/>
-                        </a:rPr>
-                        <a:t>의료</a:t>
-                      </a:r>
-                    </a:p>
-                  </a:txBody>
-                  <a:tcPr anchor="ctr">
-                    <a:solidFill>
-                      <a:srgbClr val="FFFFFF"/>
-                    </a:solidFill>
-                  </a:tcPr>
-                </a:tc>
-                <a:tc>
-                  <a:txBody>
-                    <a:bodyPr/>
-                    <a:lstStyle/>
-                    <a:p>
-                      <a:pPr algn="ctr"/>
-                      <a:r>
-                        <a:rPr sz="950">
-                          <a:solidFill>
-                            <a:srgbClr val="151C26"/>
-                          </a:solidFill>
-                          <a:latin typeface="맑은 고딕"/>
-                        </a:rPr>
-                        <a:t>1,003</a:t>
                       </a:r>
                     </a:p>
                   </a:txBody>
@@ -9582,7 +9640,7 @@
                           </a:solidFill>
                           <a:latin typeface="맑은 고딕"/>
                         </a:rPr>
-                        <a:t>+0.34%p</a:t>
+                        <a:t>+0.35%p</a:t>
                       </a:r>
                     </a:p>
                   </a:txBody>
@@ -13914,7 +13972,7 @@
                 </a:solidFill>
                 <a:latin typeface="맑은 고딕"/>
               </a:rPr>
-              <a:t>1.71배</a:t>
+              <a:t>1.74배</a:t>
             </a:r>
           </a:p>
         </p:txBody>
@@ -13953,7 +14011,7 @@
                 </a:solidFill>
                 <a:latin typeface="맑은 고딕"/>
               </a:rPr>
-              <a:t>신도심 69.7 vs 원도심 40.8</a:t>
+              <a:t>신도심 76.4 vs 원도심 44.0</a:t>
             </a:r>
           </a:p>
         </p:txBody>
@@ -14119,7 +14177,7 @@
                 </a:solidFill>
                 <a:latin typeface="맑은 고딕"/>
               </a:rPr>
-              <a:t>0.292</a:t>
+              <a:t>0.318</a:t>
             </a:r>
           </a:p>
         </p:txBody>
@@ -14568,7 +14626,7 @@
                 </a:solidFill>
                 <a:latin typeface="맑은 고딕"/>
               </a:rPr>
-              <a:t>12개소 · 커버리지 +6.9%p</a:t>
+              <a:t>12개소 · 커버리지 +7.0%p</a:t>
             </a:r>
           </a:p>
         </p:txBody>
@@ -17880,7 +17938,7 @@
                 </a:solidFill>
                 <a:latin typeface="맑은 고딕"/>
               </a:rPr>
-              <a:t>1.71배</a:t>
+              <a:t>1.74배</a:t>
             </a:r>
           </a:p>
         </p:txBody>
@@ -17919,7 +17977,7 @@
                 </a:solidFill>
                 <a:latin typeface="맑은 고딕"/>
               </a:rPr>
-              <a:t>신도심 평균 CBI 69.7 vs 원도심 평균 40.8</a:t>
+              <a:t>신도심 평균 CBI 76.4 vs 원도심 평균 44.0</a:t>
             </a:r>
           </a:p>
         </p:txBody>
@@ -17958,7 +18016,7 @@
                 </a:solidFill>
                 <a:latin typeface="맑은 고딕"/>
               </a:rPr>
-              <a:t>0.292</a:t>
+              <a:t>0.318</a:t>
             </a:r>
           </a:p>
         </p:txBody>
@@ -17997,7 +18055,7 @@
                 </a:solidFill>
                 <a:latin typeface="맑은 고딕"/>
               </a:rPr>
-              <a:t>25개 생활권 CBI 지니계수 — 변동계수 52.0%</a:t>
+              <a:t>25개 생활권 CBI 지니계수 — 변동계수 56.5%</a:t>
             </a:r>
           </a:p>
         </p:txBody>
@@ -18036,7 +18094,7 @@
                 </a:solidFill>
                 <a:latin typeface="맑은 고딕"/>
               </a:rPr>
-              <a:t>불당동 ↔ 광덕면</a:t>
+              <a:t>불당동 ↔ 수신면</a:t>
             </a:r>
           </a:p>
         </p:txBody>
@@ -18075,7 +18133,7 @@
                 </a:solidFill>
                 <a:latin typeface="맑은 고딕"/>
               </a:rPr>
-              <a:t>최상위 79점 ↔ 최하위 8점, 같은 시(市)</a:t>
+              <a:t>최상위 82점 ↔ 최하위 6점, 같은 시(市)</a:t>
             </a:r>
           </a:p>
         </p:txBody>
@@ -25125,7 +25183,7 @@
                 </a:solidFill>
                 <a:latin typeface="맑은 고딕"/>
               </a:rPr>
-              <a:t>최상위 불당동 79점, 최하위 광덕면 8점. 같은 시(市) 안의 격차다.</a:t>
+              <a:t>최상위 불당동 82점, 최하위 수신면 6점. 같은 시(市) 안의 격차다.</a:t>
             </a:r>
           </a:p>
         </p:txBody>
@@ -25315,7 +25373,7 @@
                 </a:solidFill>
                 <a:latin typeface="맑은 고딕"/>
               </a:rPr>
-              <a:t>1.71배</a:t>
+              <a:t>1.74배</a:t>
             </a:r>
           </a:p>
         </p:txBody>
@@ -25354,7 +25412,7 @@
                 </a:solidFill>
                 <a:latin typeface="맑은 고딕"/>
               </a:rPr>
-              <a:t>69.7 vs 40.8</a:t>
+              <a:t>76.4 vs 44.0</a:t>
             </a:r>
           </a:p>
         </p:txBody>
@@ -25520,7 +25578,7 @@
                 </a:solidFill>
                 <a:latin typeface="맑은 고딕"/>
               </a:rPr>
-              <a:t>0.292</a:t>
+              <a:t>0.318</a:t>
             </a:r>
           </a:p>
         </p:txBody>
@@ -25559,7 +25617,7 @@
                 </a:solidFill>
                 <a:latin typeface="맑은 고딕"/>
               </a:rPr>
-              <a:t>변동계수 52.0%</a:t>
+              <a:t>변동계수 56.5%</a:t>
             </a:r>
           </a:p>
         </p:txBody>
@@ -25764,7 +25822,7 @@
                 </a:solidFill>
                 <a:latin typeface="맑은 고딕"/>
               </a:rPr>
-              <a:t>실루엣 계수 0.32</a:t>
+              <a:t>실루엣 계수 0.322</a:t>
             </a:r>
           </a:p>
         </p:txBody>

--- a/deliverables/기획서_천안균형발전나침반_CBC.pptx
+++ b/deliverables/기획서_천안균형발전나침반_CBC.pptx
@@ -6322,8 +6322,8 @@
         </p:blipFill>
         <p:spPr>
           <a:xfrm>
-            <a:off x="658368" y="2128755"/>
-            <a:ext cx="5120640" cy="3926369"/>
+            <a:off x="658368" y="2127119"/>
+            <a:ext cx="5120640" cy="3929641"/>
           </a:xfrm>
           <a:prstGeom prst="rect">
             <a:avLst/>
@@ -9884,8 +9884,8 @@
         </p:blipFill>
         <p:spPr>
           <a:xfrm>
-            <a:off x="1033366" y="2212848"/>
-            <a:ext cx="5833682" cy="3200400"/>
+            <a:off x="1030340" y="2212848"/>
+            <a:ext cx="5839734" cy="3200400"/>
           </a:xfrm>
           <a:prstGeom prst="rect">
             <a:avLst/>

--- a/deliverables/기획서_천안균형발전나침반_CBC.pptx
+++ b/deliverables/기획서_천안균형발전나침반_CBC.pptx
@@ -3123,7 +3123,7 @@
             <a:avLst/>
           </a:prstGeom>
           <a:solidFill>
-            <a:srgbClr val="111822"/>
+            <a:srgbClr val="0F1319"/>
           </a:solidFill>
           <a:ln>
             <a:noFill/>
@@ -3165,7 +3165,7 @@
             <a:avLst/>
           </a:prstGeom>
           <a:solidFill>
-            <a:srgbClr val="D64545"/>
+            <a:srgbClr val="2A78D6"/>
           </a:solidFill>
           <a:ln>
             <a:noFill/>
@@ -3222,9 +3222,11 @@
             <a:r>
               <a:rPr sz="1300" b="1">
                 <a:solidFill>
-                  <a:srgbClr val="E08A8A"/>
-                </a:solidFill>
-                <a:latin typeface="맑은 고딕"/>
+                  <a:srgbClr val="7FB3EE"/>
+                </a:solidFill>
+                <a:latin typeface="Segoe UI"/>
+                <a:ea typeface="맑은 고딕"/>
+                <a:cs typeface="맑은 고딕"/>
               </a:rPr>
               <a:t>2026년 천안시 AI·데이터 기반 정책 아이디어 경진대회</a:t>
             </a:r>
@@ -3263,7 +3265,9 @@
                 <a:solidFill>
                   <a:srgbClr val="FFFFFF"/>
                 </a:solidFill>
-                <a:latin typeface="맑은 고딕"/>
+                <a:latin typeface="Segoe UI"/>
+                <a:ea typeface="맑은 고딕"/>
+                <a:cs typeface="맑은 고딕"/>
               </a:rPr>
               <a:t>천안 균형발전 나침반</a:t>
             </a:r>
@@ -3300,9 +3304,11 @@
             <a:r>
               <a:rPr sz="2000" b="0">
                 <a:solidFill>
-                  <a:srgbClr val="8A97A8"/>
-                </a:solidFill>
-                <a:latin typeface="맑은 고딕"/>
+                  <a:srgbClr val="8894A6"/>
+                </a:solidFill>
+                <a:latin typeface="Segoe UI"/>
+                <a:ea typeface="맑은 고딕"/>
+                <a:cs typeface="맑은 고딕"/>
               </a:rPr>
               <a:t>Cheonan Balance Compass</a:t>
             </a:r>
@@ -3324,7 +3330,7 @@
             <a:avLst/>
           </a:prstGeom>
           <a:solidFill>
-            <a:srgbClr val="D64545"/>
+            <a:srgbClr val="2A78D6"/>
           </a:solidFill>
           <a:ln>
             <a:noFill/>
@@ -3381,9 +3387,11 @@
             <a:r>
               <a:rPr sz="2300" b="1">
                 <a:solidFill>
-                  <a:srgbClr val="E9EDF2"/>
-                </a:solidFill>
-                <a:latin typeface="맑은 고딕"/>
+                  <a:srgbClr val="EAEEF4"/>
+                </a:solidFill>
+                <a:latin typeface="Segoe UI"/>
+                <a:ea typeface="맑은 고딕"/>
+                <a:cs typeface="맑은 고딕"/>
               </a:rPr>
               <a:t>천안시민 누구나 걸어서 닿는 생활환경을 바라며,</a:t>
             </a:r>
@@ -3400,9 +3408,11 @@
             <a:r>
               <a:rPr sz="2300" b="1">
                 <a:solidFill>
-                  <a:srgbClr val="E9EDF2"/>
-                </a:solidFill>
-                <a:latin typeface="맑은 고딕"/>
+                  <a:srgbClr val="EAEEF4"/>
+                </a:solidFill>
+                <a:latin typeface="Segoe UI"/>
+                <a:ea typeface="맑은 고딕"/>
+                <a:cs typeface="맑은 고딕"/>
               </a:rPr>
               <a:t>공공데이터로 먼저 살펴본 균형발전 이야기</a:t>
             </a:r>
@@ -3441,7 +3451,9 @@
                 <a:solidFill>
                   <a:srgbClr val="6E7B8C"/>
                 </a:solidFill>
-                <a:latin typeface="맑은 고딕"/>
+                <a:latin typeface="Segoe UI"/>
+                <a:ea typeface="맑은 고딕"/>
+                <a:cs typeface="맑은 고딕"/>
               </a:rPr>
               <a:t>지정과제</a:t>
             </a:r>
@@ -3480,7 +3492,9 @@
                 <a:solidFill>
                   <a:srgbClr val="FFFFFF"/>
                 </a:solidFill>
-                <a:latin typeface="맑은 고딕"/>
+                <a:latin typeface="Segoe UI"/>
+                <a:ea typeface="맑은 고딕"/>
+                <a:cs typeface="맑은 고딕"/>
               </a:rPr>
               <a:t>③ 지역균형발전</a:t>
             </a:r>
@@ -3519,7 +3533,9 @@
                 <a:solidFill>
                   <a:srgbClr val="6E7B8C"/>
                 </a:solidFill>
-                <a:latin typeface="맑은 고딕"/>
+                <a:latin typeface="Segoe UI"/>
+                <a:ea typeface="맑은 고딕"/>
+                <a:cs typeface="맑은 고딕"/>
               </a:rPr>
               <a:t>응모분야</a:t>
             </a:r>
@@ -3558,7 +3574,9 @@
                 <a:solidFill>
                   <a:srgbClr val="FFFFFF"/>
                 </a:solidFill>
-                <a:latin typeface="맑은 고딕"/>
+                <a:latin typeface="Segoe UI"/>
+                <a:ea typeface="맑은 고딕"/>
+                <a:cs typeface="맑은 고딕"/>
               </a:rPr>
               <a:t>AI 모델 개발</a:t>
             </a:r>
@@ -3597,7 +3615,9 @@
                 <a:solidFill>
                   <a:srgbClr val="6E7B8C"/>
                 </a:solidFill>
-                <a:latin typeface="맑은 고딕"/>
+                <a:latin typeface="Segoe UI"/>
+                <a:ea typeface="맑은 고딕"/>
+                <a:cs typeface="맑은 고딕"/>
               </a:rPr>
               <a:t>분석단위</a:t>
             </a:r>
@@ -3636,7 +3656,9 @@
                 <a:solidFill>
                   <a:srgbClr val="FFFFFF"/>
                 </a:solidFill>
-                <a:latin typeface="맑은 고딕"/>
+                <a:latin typeface="Segoe UI"/>
+                <a:ea typeface="맑은 고딕"/>
+                <a:cs typeface="맑은 고딕"/>
               </a:rPr>
               <a:t>25개 생활권 · 지표 12종</a:t>
             </a:r>
@@ -3675,7 +3697,9 @@
                 <a:solidFill>
                   <a:srgbClr val="8A97A8"/>
                 </a:solidFill>
-                <a:latin typeface="맑은 고딕"/>
+                <a:latin typeface="Segoe UI"/>
+                <a:ea typeface="맑은 고딕"/>
+                <a:cs typeface="맑은 고딕"/>
               </a:rPr>
               <a:t>○○팀 · 홍길동</a:t>
             </a:r>
@@ -3712,9 +3736,11 @@
             <a:r>
               <a:rPr sz="1000" b="1">
                 <a:solidFill>
-                  <a:srgbClr val="C98A1E"/>
-                </a:solidFill>
-                <a:latin typeface="맑은 고딕"/>
+                  <a:srgbClr val="FAB219"/>
+                </a:solidFill>
+                <a:latin typeface="Segoe UI"/>
+                <a:ea typeface="맑은 고딕"/>
+                <a:cs typeface="맑은 고딕"/>
               </a:rPr>
               <a:t>※ 일부 지표 예시 데이터 — 실데이터 재실행 후 제출</a:t>
             </a:r>
@@ -3769,9 +3795,11 @@
             <a:r>
               <a:rPr sz="1150" b="1">
                 <a:solidFill>
-                  <a:srgbClr val="D64545"/>
-                </a:solidFill>
-                <a:latin typeface="맑은 고딕"/>
+                  <a:srgbClr val="2A78D6"/>
+                </a:solidFill>
+                <a:latin typeface="Segoe UI"/>
+                <a:ea typeface="맑은 고딕"/>
+                <a:cs typeface="맑은 고딕"/>
               </a:rPr>
               <a:t>FINDING · 02</a:t>
             </a:r>
@@ -3808,9 +3836,11 @@
             <a:r>
               <a:rPr sz="2700" b="1">
                 <a:solidFill>
-                  <a:srgbClr val="151C26"/>
-                </a:solidFill>
-                <a:latin typeface="맑은 고딕"/>
+                  <a:srgbClr val="12151A"/>
+                </a:solidFill>
+                <a:latin typeface="Segoe UI"/>
+                <a:ea typeface="맑은 고딕"/>
+                <a:cs typeface="맑은 고딕"/>
               </a:rPr>
               <a:t>같은 '어려움'이라도 필요한 도움이 다릅니다</a:t>
             </a:r>
@@ -3847,9 +3877,11 @@
             <a:r>
               <a:rPr sz="1350" b="0">
                 <a:solidFill>
-                  <a:srgbClr val="5D6874"/>
-                </a:solidFill>
-                <a:latin typeface="맑은 고딕"/>
+                  <a:srgbClr val="52514E"/>
+                </a:solidFill>
+                <a:latin typeface="Segoe UI"/>
+                <a:ea typeface="맑은 고딕"/>
+                <a:cs typeface="맑은 고딕"/>
               </a:rPr>
               <a:t>원도심과 농촌면은 지수가 모두 낮게 나왔습니다. 그런데 항목을 나눠 보니 사정이 서로 달랐습니다.</a:t>
             </a:r>
@@ -3872,8 +3904,8 @@
         </p:blipFill>
         <p:spPr>
           <a:xfrm>
-            <a:off x="1179606" y="2157984"/>
-            <a:ext cx="5678362" cy="3200400"/>
+            <a:off x="1535534" y="2157984"/>
+            <a:ext cx="4966507" cy="3200400"/>
           </a:xfrm>
           <a:prstGeom prst="rect">
             <a:avLst/>
@@ -3897,7 +3929,7 @@
             </a:avLst>
           </a:prstGeom>
           <a:solidFill>
-            <a:srgbClr val="FDF2F2"/>
+            <a:srgbClr val="EFF5FD"/>
           </a:solidFill>
           <a:ln>
             <a:noFill/>
@@ -3954,9 +3986,11 @@
             <a:r>
               <a:rPr sz="1350" b="1">
                 <a:solidFill>
-                  <a:srgbClr val="D64545"/>
-                </a:solidFill>
-                <a:latin typeface="맑은 고딕"/>
+                  <a:srgbClr val="2A78D6"/>
+                </a:solidFill>
+                <a:latin typeface="Segoe UI"/>
+                <a:ea typeface="맑은 고딕"/>
+                <a:cs typeface="맑은 고딕"/>
               </a:rPr>
               <a:t>원도심</a:t>
             </a:r>
@@ -3993,9 +4027,11 @@
             <a:r>
               <a:rPr sz="1100" b="0">
                 <a:solidFill>
-                  <a:srgbClr val="151C26"/>
-                </a:solidFill>
-                <a:latin typeface="맑은 고딕"/>
+                  <a:srgbClr val="12151A"/>
+                </a:solidFill>
+                <a:latin typeface="Segoe UI"/>
+                <a:ea typeface="맑은 고딕"/>
+                <a:cs typeface="맑은 고딕"/>
               </a:rPr>
               <a:t>시설은 이미 갖춰져 있습니다.</a:t>
             </a:r>
@@ -4012,9 +4048,11 @@
             <a:r>
               <a:rPr sz="1100" b="0">
                 <a:solidFill>
-                  <a:srgbClr val="151C26"/>
-                </a:solidFill>
-                <a:latin typeface="맑은 고딕"/>
+                  <a:srgbClr val="12151A"/>
+                </a:solidFill>
+                <a:latin typeface="Segoe UI"/>
+                <a:ea typeface="맑은 고딕"/>
+                <a:cs typeface="맑은 고딕"/>
               </a:rPr>
               <a:t>어려운 쪽은 상권과 인구였습니다.</a:t>
             </a:r>
@@ -4031,9 +4069,11 @@
             <a:r>
               <a:rPr sz="1100" b="0">
                 <a:solidFill>
-                  <a:srgbClr val="151C26"/>
-                </a:solidFill>
-                <a:latin typeface="맑은 고딕"/>
+                  <a:srgbClr val="12151A"/>
+                </a:solidFill>
+                <a:latin typeface="Segoe UI"/>
+                <a:ea typeface="맑은 고딕"/>
+                <a:cs typeface="맑은 고딕"/>
               </a:rPr>
               <a:t>→ 새로 짓기보다, 비어 있는 공간을 다시 쓰는 방향이 맞지 않을까 합니다</a:t>
             </a:r>
@@ -4057,7 +4097,7 @@
             </a:avLst>
           </a:prstGeom>
           <a:solidFill>
-            <a:srgbClr val="F3F0F9"/>
+            <a:srgbClr val="F1EFF9"/>
           </a:solidFill>
           <a:ln>
             <a:noFill/>
@@ -4114,9 +4154,11 @@
             <a:r>
               <a:rPr sz="1350" b="1">
                 <a:solidFill>
-                  <a:srgbClr val="6B5F9E"/>
-                </a:solidFill>
-                <a:latin typeface="맑은 고딕"/>
+                  <a:srgbClr val="4A3AA7"/>
+                </a:solidFill>
+                <a:latin typeface="Segoe UI"/>
+                <a:ea typeface="맑은 고딕"/>
+                <a:cs typeface="맑은 고딕"/>
               </a:rPr>
               <a:t>농촌면 · 읍지역</a:t>
             </a:r>
@@ -4153,9 +4195,11 @@
             <a:r>
               <a:rPr sz="1100" b="0">
                 <a:solidFill>
-                  <a:srgbClr val="151C26"/>
-                </a:solidFill>
-                <a:latin typeface="맑은 고딕"/>
+                  <a:srgbClr val="12151A"/>
+                </a:solidFill>
+                <a:latin typeface="Segoe UI"/>
+                <a:ea typeface="맑은 고딕"/>
+                <a:cs typeface="맑은 고딕"/>
               </a:rPr>
               <a:t>가까운 시설 자체가 부족합니다.</a:t>
             </a:r>
@@ -4172,9 +4216,11 @@
             <a:r>
               <a:rPr sz="1100" b="0">
                 <a:solidFill>
-                  <a:srgbClr val="151C26"/>
-                </a:solidFill>
-                <a:latin typeface="맑은 고딕"/>
+                  <a:srgbClr val="12151A"/>
+                </a:solidFill>
+                <a:latin typeface="Segoe UI"/>
+                <a:ea typeface="맑은 고딕"/>
+                <a:cs typeface="맑은 고딕"/>
               </a:rPr>
               <a:t>대중교통 여건도 넉넉하지 않습니다.</a:t>
             </a:r>
@@ -4191,9 +4237,11 @@
             <a:r>
               <a:rPr sz="1100" b="0">
                 <a:solidFill>
-                  <a:srgbClr val="151C26"/>
-                </a:solidFill>
-                <a:latin typeface="맑은 고딕"/>
+                  <a:srgbClr val="12151A"/>
+                </a:solidFill>
+                <a:latin typeface="Segoe UI"/>
+                <a:ea typeface="맑은 고딕"/>
+                <a:cs typeface="맑은 고딕"/>
               </a:rPr>
               <a:t>→ 거점 복합시설과 이동 지원을 함께 보시면 좋겠습니다</a:t>
             </a:r>
@@ -4217,7 +4265,7 @@
             </a:avLst>
           </a:prstGeom>
           <a:solidFill>
-            <a:srgbClr val="F5F7FA"/>
+            <a:srgbClr val="F6F7F9"/>
           </a:solidFill>
           <a:ln>
             <a:noFill/>
@@ -4274,9 +4322,11 @@
             <a:r>
               <a:rPr sz="1200" b="0">
                 <a:solidFill>
-                  <a:srgbClr val="151C26"/>
-                </a:solidFill>
-                <a:latin typeface="맑은 고딕"/>
+                  <a:srgbClr val="12151A"/>
+                </a:solidFill>
+                <a:latin typeface="Segoe UI"/>
+                <a:ea typeface="맑은 고딕"/>
+                <a:cs typeface="맑은 고딕"/>
               </a:rPr>
               <a:t>여러 동네를 한 묶음으로 보면 놓치기 쉬운 부분입니다. 유형을 나눠 보면 같은 예산으로도 각 동네에 조금 더 맞는</a:t>
             </a:r>
@@ -4293,9 +4343,11 @@
             <a:r>
               <a:rPr sz="1200" b="0">
                 <a:solidFill>
-                  <a:srgbClr val="151C26"/>
-                </a:solidFill>
-                <a:latin typeface="맑은 고딕"/>
+                  <a:srgbClr val="12151A"/>
+                </a:solidFill>
+                <a:latin typeface="Segoe UI"/>
+                <a:ea typeface="맑은 고딕"/>
+                <a:cs typeface="맑은 고딕"/>
               </a:rPr>
               <a:t>도움을 드릴 수 있지 않을까 합니다. 어떤 사업이 맞을지는 결국 현장을 아시는 분들의 판단이 필요한 부분입니다.</a:t>
             </a:r>
@@ -4332,9 +4384,11 @@
             <a:r>
               <a:rPr sz="950" b="0">
                 <a:solidFill>
-                  <a:srgbClr val="5D6874"/>
-                </a:solidFill>
-                <a:latin typeface="맑은 고딕"/>
+                  <a:srgbClr val="52514E"/>
+                </a:solidFill>
+                <a:latin typeface="Segoe UI"/>
+                <a:ea typeface="맑은 고딕"/>
+                <a:cs typeface="맑은 고딕"/>
               </a:rPr>
               <a:t>천안 균형발전 나침반(CBC)</a:t>
             </a:r>
@@ -4371,9 +4425,11 @@
             <a:r>
               <a:rPr sz="950" b="0">
                 <a:solidFill>
-                  <a:srgbClr val="5D6874"/>
-                </a:solidFill>
-                <a:latin typeface="맑은 고딕"/>
+                  <a:srgbClr val="52514E"/>
+                </a:solidFill>
+                <a:latin typeface="Segoe UI"/>
+                <a:ea typeface="맑은 고딕"/>
+                <a:cs typeface="맑은 고딕"/>
               </a:rPr>
               <a:t>9</a:t>
             </a:r>
@@ -4428,9 +4484,11 @@
             <a:r>
               <a:rPr sz="1150" b="1">
                 <a:solidFill>
-                  <a:srgbClr val="D64545"/>
-                </a:solidFill>
-                <a:latin typeface="맑은 고딕"/>
+                  <a:srgbClr val="2A78D6"/>
+                </a:solidFill>
+                <a:latin typeface="Segoe UI"/>
+                <a:ea typeface="맑은 고딕"/>
+                <a:cs typeface="맑은 고딕"/>
               </a:rPr>
               <a:t>FINDING · 03</a:t>
             </a:r>
@@ -4467,9 +4525,11 @@
             <a:r>
               <a:rPr sz="2700" b="1">
                 <a:solidFill>
-                  <a:srgbClr val="151C26"/>
-                </a:solidFill>
-                <a:latin typeface="맑은 고딕"/>
+                  <a:srgbClr val="12151A"/>
+                </a:solidFill>
+                <a:latin typeface="Segoe UI"/>
+                <a:ea typeface="맑은 고딕"/>
+                <a:cs typeface="맑은 고딕"/>
               </a:rPr>
               <a:t>격차는 수렴하지 않고 벌어지고 있다</a:t>
             </a:r>
@@ -4506,9 +4566,11 @@
             <a:r>
               <a:rPr sz="1350" b="0">
                 <a:solidFill>
-                  <a:srgbClr val="5D6874"/>
-                </a:solidFill>
-                <a:latin typeface="맑은 고딕"/>
+                  <a:srgbClr val="52514E"/>
+                </a:solidFill>
+                <a:latin typeface="Segoe UI"/>
+                <a:ea typeface="맑은 고딕"/>
+                <a:cs typeface="맑은 고딕"/>
               </a:rPr>
               <a:t>권역유형별 인구·사업체 궤적이 시간이 갈수록 분기한다. 개입하지 않으면 자동으로 좁혀지지 않는다.</a:t>
             </a:r>
@@ -4531,8 +4593,8 @@
         </p:blipFill>
         <p:spPr>
           <a:xfrm>
-            <a:off x="2060187" y="2286000"/>
-            <a:ext cx="8071319" cy="3200400"/>
+            <a:off x="2575407" y="2286000"/>
+            <a:ext cx="7040880" cy="3200400"/>
           </a:xfrm>
           <a:prstGeom prst="rect">
             <a:avLst/>
@@ -4556,7 +4618,7 @@
             </a:avLst>
           </a:prstGeom>
           <a:solidFill>
-            <a:srgbClr val="F0F7F2"/>
+            <a:srgbClr val="EFF7F3"/>
           </a:solidFill>
           <a:ln>
             <a:noFill/>
@@ -4613,9 +4675,11 @@
             <a:r>
               <a:rPr sz="1300" b="1">
                 <a:solidFill>
-                  <a:srgbClr val="3E9B7C"/>
-                </a:solidFill>
-                <a:latin typeface="맑은 고딕"/>
+                  <a:srgbClr val="1BAF7A"/>
+                </a:solidFill>
+                <a:latin typeface="Segoe UI"/>
+                <a:ea typeface="맑은 고딕"/>
+                <a:cs typeface="맑은 고딕"/>
               </a:rPr>
               <a:t>다만 '원도심이면 다 줄어든다'는 것은 아니었습니다.</a:t>
             </a:r>
@@ -4652,9 +4716,11 @@
             <a:r>
               <a:rPr sz="1150" b="0">
                 <a:solidFill>
-                  <a:srgbClr val="151C26"/>
-                </a:solidFill>
-                <a:latin typeface="맑은 고딕"/>
+                  <a:srgbClr val="12151A"/>
+                </a:solidFill>
+                <a:latin typeface="Segoe UI"/>
+                <a:ea typeface="맑은 고딕"/>
+                <a:cs typeface="맑은 고딕"/>
               </a:rPr>
               <a:t>5년 인구증감률 상위는 12(+158%), 3(+81%)으로, 두 곳 모두 신축 입주가 이어진 지역입니다. 원도심에 속한 문성동도 사람이 돌아왔습니다.</a:t>
             </a:r>
@@ -4671,9 +4737,11 @@
             <a:r>
               <a:rPr sz="1150" b="0">
                 <a:solidFill>
-                  <a:srgbClr val="151C26"/>
-                </a:solidFill>
-                <a:latin typeface="맑은 고딕"/>
+                  <a:srgbClr val="12151A"/>
+                </a:solidFill>
+                <a:latin typeface="Segoe UI"/>
+                <a:ea typeface="맑은 고딕"/>
+                <a:cs typeface="맑은 고딕"/>
               </a:rPr>
               <a:t>비어 있던 공간이 다시 주거로 쓰이면 인구가 회복될 수 있다는 뜻으로 읽었고, 뒤에서 말씀드릴 빈집 활용 제안의 근거가 되었습니다.</a:t>
             </a:r>
@@ -4710,9 +4778,11 @@
             <a:r>
               <a:rPr sz="950" b="0">
                 <a:solidFill>
-                  <a:srgbClr val="5D6874"/>
-                </a:solidFill>
-                <a:latin typeface="맑은 고딕"/>
+                  <a:srgbClr val="52514E"/>
+                </a:solidFill>
+                <a:latin typeface="Segoe UI"/>
+                <a:ea typeface="맑은 고딕"/>
+                <a:cs typeface="맑은 고딕"/>
               </a:rPr>
               <a:t>천안 균형발전 나침반(CBC)</a:t>
             </a:r>
@@ -4749,9 +4819,11 @@
             <a:r>
               <a:rPr sz="950" b="0">
                 <a:solidFill>
-                  <a:srgbClr val="5D6874"/>
-                </a:solidFill>
-                <a:latin typeface="맑은 고딕"/>
+                  <a:srgbClr val="52514E"/>
+                </a:solidFill>
+                <a:latin typeface="Segoe UI"/>
+                <a:ea typeface="맑은 고딕"/>
+                <a:cs typeface="맑은 고딕"/>
               </a:rPr>
               <a:t>10</a:t>
             </a:r>
@@ -4806,9 +4878,11 @@
             <a:r>
               <a:rPr sz="1150" b="1">
                 <a:solidFill>
-                  <a:srgbClr val="D64545"/>
-                </a:solidFill>
-                <a:latin typeface="맑은 고딕"/>
+                  <a:srgbClr val="2A78D6"/>
+                </a:solidFill>
+                <a:latin typeface="Segoe UI"/>
+                <a:ea typeface="맑은 고딕"/>
+                <a:cs typeface="맑은 고딕"/>
               </a:rPr>
               <a:t>MODEL</a:t>
             </a:r>
@@ -4845,9 +4919,11 @@
             <a:r>
               <a:rPr sz="2700" b="1">
                 <a:solidFill>
-                  <a:srgbClr val="151C26"/>
-                </a:solidFill>
-                <a:latin typeface="맑은 고딕"/>
+                  <a:srgbClr val="12151A"/>
+                </a:solidFill>
+                <a:latin typeface="Segoe UI"/>
+                <a:ea typeface="맑은 고딕"/>
+                <a:cs typeface="맑은 고딕"/>
               </a:rPr>
               <a:t>미리 살펴보기 — 쇠퇴 조기경보 모델</a:t>
             </a:r>
@@ -4884,9 +4960,11 @@
             <a:r>
               <a:rPr sz="1350" b="0">
                 <a:solidFill>
-                  <a:srgbClr val="5D6874"/>
-                </a:solidFill>
-                <a:latin typeface="맑은 고딕"/>
+                  <a:srgbClr val="52514E"/>
+                </a:solidFill>
+                <a:latin typeface="Segoe UI"/>
+                <a:ea typeface="맑은 고딕"/>
+                <a:cs typeface="맑은 고딕"/>
               </a:rPr>
               <a:t>이미 어려워진 곳뿐 아니라, 앞으로 살펴보면 좋을 곳도 함께 짚어보려 만들었습니다.</a:t>
             </a:r>
@@ -4923,9 +5001,11 @@
             <a:r>
               <a:rPr sz="1200" b="1">
                 <a:solidFill>
-                  <a:srgbClr val="D64545"/>
-                </a:solidFill>
-                <a:latin typeface="맑은 고딕"/>
+                  <a:srgbClr val="2A78D6"/>
+                </a:solidFill>
+                <a:latin typeface="Segoe UI"/>
+                <a:ea typeface="맑은 고딕"/>
+                <a:cs typeface="맑은 고딕"/>
               </a:rPr>
               <a:t>▪</a:t>
             </a:r>
@@ -4962,9 +5042,11 @@
             <a:r>
               <a:rPr sz="1200" b="1">
                 <a:solidFill>
-                  <a:srgbClr val="151C26"/>
-                </a:solidFill>
-                <a:latin typeface="맑은 고딕"/>
+                  <a:srgbClr val="12151A"/>
+                </a:solidFill>
+                <a:latin typeface="Segoe UI"/>
+                <a:ea typeface="맑은 고딕"/>
+                <a:cs typeface="맑은 고딕"/>
               </a:rPr>
               <a:t>무엇을 살펴보나요</a:t>
             </a:r>
@@ -5001,9 +5083,11 @@
             <a:r>
               <a:rPr sz="1050" b="0">
                 <a:solidFill>
-                  <a:srgbClr val="5D6874"/>
-                </a:solidFill>
-                <a:latin typeface="맑은 고딕"/>
+                  <a:srgbClr val="52514E"/>
+                </a:solidFill>
+                <a:latin typeface="Segoe UI"/>
+                <a:ea typeface="맑은 고딕"/>
+                <a:cs typeface="맑은 고딕"/>
               </a:rPr>
               <a:t>t년 정보만으로 t+3년 상황을 미리 봅니다. 예산 편성에 1년, 사업 착수에 1~2년이</a:t>
             </a:r>
@@ -5020,9 +5104,11 @@
             <a:r>
               <a:rPr sz="1050" b="0">
                 <a:solidFill>
-                  <a:srgbClr val="5D6874"/>
-                </a:solidFill>
-                <a:latin typeface="맑은 고딕"/>
+                  <a:srgbClr val="52514E"/>
+                </a:solidFill>
+                <a:latin typeface="Segoe UI"/>
+                <a:ea typeface="맑은 고딕"/>
+                <a:cs typeface="맑은 고딕"/>
               </a:rPr>
               <a:t>걸리는 점을 감안해 3년으로 잡았습니다.</a:t>
             </a:r>
@@ -5059,9 +5145,11 @@
             <a:r>
               <a:rPr sz="1200" b="1">
                 <a:solidFill>
-                  <a:srgbClr val="D64545"/>
-                </a:solidFill>
-                <a:latin typeface="맑은 고딕"/>
+                  <a:srgbClr val="2A78D6"/>
+                </a:solidFill>
+                <a:latin typeface="Segoe UI"/>
+                <a:ea typeface="맑은 고딕"/>
+                <a:cs typeface="맑은 고딕"/>
               </a:rPr>
               <a:t>▪</a:t>
             </a:r>
@@ -5098,9 +5186,11 @@
             <a:r>
               <a:rPr sz="1200" b="1">
                 <a:solidFill>
-                  <a:srgbClr val="151C26"/>
-                </a:solidFill>
-                <a:latin typeface="맑은 고딕"/>
+                  <a:srgbClr val="12151A"/>
+                </a:solidFill>
+                <a:latin typeface="Segoe UI"/>
+                <a:ea typeface="맑은 고딕"/>
+                <a:cs typeface="맑은 고딕"/>
               </a:rPr>
               <a:t>모델</a:t>
             </a:r>
@@ -5137,9 +5227,11 @@
             <a:r>
               <a:rPr sz="1050" b="0">
                 <a:solidFill>
-                  <a:srgbClr val="5D6874"/>
-                </a:solidFill>
-                <a:latin typeface="맑은 고딕"/>
+                  <a:srgbClr val="52514E"/>
+                </a:solidFill>
+                <a:latin typeface="Segoe UI"/>
+                <a:ea typeface="맑은 고딕"/>
+                <a:cs typeface="맑은 고딕"/>
               </a:rPr>
               <a:t>LightGBM 회귀입니다. 표본이 많지 않아 규제를 강하게 걸고 얕은 트리를 썼습니다.</a:t>
             </a:r>
@@ -5176,9 +5268,11 @@
             <a:r>
               <a:rPr sz="1200" b="1">
                 <a:solidFill>
-                  <a:srgbClr val="D64545"/>
-                </a:solidFill>
-                <a:latin typeface="맑은 고딕"/>
+                  <a:srgbClr val="2A78D6"/>
+                </a:solidFill>
+                <a:latin typeface="Segoe UI"/>
+                <a:ea typeface="맑은 고딕"/>
+                <a:cs typeface="맑은 고딕"/>
               </a:rPr>
               <a:t>▪</a:t>
             </a:r>
@@ -5215,9 +5309,11 @@
             <a:r>
               <a:rPr sz="1200" b="1">
                 <a:solidFill>
-                  <a:srgbClr val="151C26"/>
-                </a:solidFill>
-                <a:latin typeface="맑은 고딕"/>
+                  <a:srgbClr val="12151A"/>
+                </a:solidFill>
+                <a:latin typeface="Segoe UI"/>
+                <a:ea typeface="맑은 고딕"/>
+                <a:cs typeface="맑은 고딕"/>
               </a:rPr>
               <a:t>검증 — Leave-One-Zone-Out CV</a:t>
             </a:r>
@@ -5254,9 +5350,11 @@
             <a:r>
               <a:rPr sz="1050" b="0">
                 <a:solidFill>
-                  <a:srgbClr val="5D6874"/>
-                </a:solidFill>
-                <a:latin typeface="맑은 고딕"/>
+                  <a:srgbClr val="52514E"/>
+                </a:solidFill>
+                <a:latin typeface="Segoe UI"/>
+                <a:ea typeface="맑은 고딕"/>
+                <a:cs typeface="맑은 고딕"/>
               </a:rPr>
               <a:t>같은 생활권이 학습과 검증에 동시에 들어가지 않게 했습니다. 가까운 동네끼리는</a:t>
             </a:r>
@@ -5273,9 +5371,11 @@
             <a:r>
               <a:rPr sz="1050" b="0">
                 <a:solidFill>
-                  <a:srgbClr val="5D6874"/>
-                </a:solidFill>
-                <a:latin typeface="맑은 고딕"/>
+                  <a:srgbClr val="52514E"/>
+                </a:solidFill>
+                <a:latin typeface="Segoe UI"/>
+                <a:ea typeface="맑은 고딕"/>
+                <a:cs typeface="맑은 고딕"/>
               </a:rPr>
               <a:t>닮아 있어 무작위로 나누면 성능이 실제보다 좋아 보이기 때문입니다.</a:t>
             </a:r>
@@ -5312,9 +5412,11 @@
             <a:r>
               <a:rPr sz="1200" b="1">
                 <a:solidFill>
-                  <a:srgbClr val="D64545"/>
-                </a:solidFill>
-                <a:latin typeface="맑은 고딕"/>
+                  <a:srgbClr val="2A78D6"/>
+                </a:solidFill>
+                <a:latin typeface="Segoe UI"/>
+                <a:ea typeface="맑은 고딕"/>
+                <a:cs typeface="맑은 고딕"/>
               </a:rPr>
               <a:t>▪</a:t>
             </a:r>
@@ -5351,9 +5453,11 @@
             <a:r>
               <a:rPr sz="1200" b="1">
                 <a:solidFill>
-                  <a:srgbClr val="151C26"/>
-                </a:solidFill>
-                <a:latin typeface="맑은 고딕"/>
+                  <a:srgbClr val="12151A"/>
+                </a:solidFill>
+                <a:latin typeface="Segoe UI"/>
+                <a:ea typeface="맑은 고딕"/>
+                <a:cs typeface="맑은 고딕"/>
               </a:rPr>
               <a:t>이유까지 함께 — SHAP</a:t>
             </a:r>
@@ -5390,9 +5494,11 @@
             <a:r>
               <a:rPr sz="1050" b="0">
                 <a:solidFill>
-                  <a:srgbClr val="5D6874"/>
-                </a:solidFill>
-                <a:latin typeface="맑은 고딕"/>
+                  <a:srgbClr val="52514E"/>
+                </a:solidFill>
+                <a:latin typeface="Segoe UI"/>
+                <a:ea typeface="맑은 고딕"/>
+                <a:cs typeface="맑은 고딕"/>
               </a:rPr>
               <a:t>동네마다 어떤 항목 때문에 그렇게 나왔는지 나눠서 보여드립니다.</a:t>
             </a:r>
@@ -5420,7 +5526,7 @@
           </a:solidFill>
           <a:ln w="12700">
             <a:solidFill>
-              <a:srgbClr val="E0E5EB"/>
+              <a:srgbClr val="E4E7EC"/>
             </a:solidFill>
           </a:ln>
           <a:effectLst/>
@@ -5475,9 +5581,11 @@
             <a:r>
               <a:rPr sz="1350" b="1">
                 <a:solidFill>
-                  <a:srgbClr val="151C26"/>
-                </a:solidFill>
-                <a:latin typeface="맑은 고딕"/>
+                  <a:srgbClr val="12151A"/>
+                </a:solidFill>
+                <a:latin typeface="Segoe UI"/>
+                <a:ea typeface="맑은 고딕"/>
+                <a:cs typeface="맑은 고딕"/>
               </a:rPr>
               <a:t>성능 (현재 데이터 기준)</a:t>
             </a:r>
@@ -5514,9 +5622,11 @@
             <a:r>
               <a:rPr sz="1150" b="0">
                 <a:solidFill>
-                  <a:srgbClr val="5D6874"/>
-                </a:solidFill>
-                <a:latin typeface="맑은 고딕"/>
+                  <a:srgbClr val="52514E"/>
+                </a:solidFill>
+                <a:latin typeface="Segoe UI"/>
+                <a:ea typeface="맑은 고딕"/>
+                <a:cs typeface="맑은 고딕"/>
               </a:rPr>
               <a:t>검증 방식</a:t>
             </a:r>
@@ -5553,9 +5663,11 @@
             <a:r>
               <a:rPr sz="1200" b="1">
                 <a:solidFill>
-                  <a:srgbClr val="151C26"/>
-                </a:solidFill>
-                <a:latin typeface="맑은 고딕"/>
+                  <a:srgbClr val="12151A"/>
+                </a:solidFill>
+                <a:latin typeface="Segoe UI"/>
+                <a:ea typeface="맑은 고딕"/>
+                <a:cs typeface="맑은 고딕"/>
               </a:rPr>
               <a:t>Leave-One-Zone-Out CV</a:t>
             </a:r>
@@ -5592,9 +5704,11 @@
             <a:r>
               <a:rPr sz="1150" b="0">
                 <a:solidFill>
-                  <a:srgbClr val="5D6874"/>
-                </a:solidFill>
-                <a:latin typeface="맑은 고딕"/>
+                  <a:srgbClr val="52514E"/>
+                </a:solidFill>
+                <a:latin typeface="Segoe UI"/>
+                <a:ea typeface="맑은 고딕"/>
+                <a:cs typeface="맑은 고딕"/>
               </a:rPr>
               <a:t>예측 목표</a:t>
             </a:r>
@@ -5631,9 +5745,11 @@
             <a:r>
               <a:rPr sz="1200" b="1">
                 <a:solidFill>
-                  <a:srgbClr val="151C26"/>
-                </a:solidFill>
-                <a:latin typeface="맑은 고딕"/>
+                  <a:srgbClr val="12151A"/>
+                </a:solidFill>
+                <a:latin typeface="Segoe UI"/>
+                <a:ea typeface="맑은 고딕"/>
+                <a:cs typeface="맑은 고딕"/>
               </a:rPr>
               <a:t>3년 후 위험도 변화량(Δ)</a:t>
             </a:r>
@@ -5670,9 +5786,11 @@
             <a:r>
               <a:rPr sz="1150" b="0">
                 <a:solidFill>
-                  <a:srgbClr val="5D6874"/>
-                </a:solidFill>
-                <a:latin typeface="맑은 고딕"/>
+                  <a:srgbClr val="52514E"/>
+                </a:solidFill>
+                <a:latin typeface="Segoe UI"/>
+                <a:ea typeface="맑은 고딕"/>
+                <a:cs typeface="맑은 고딕"/>
               </a:rPr>
               <a:t>방향 적중률</a:t>
             </a:r>
@@ -5709,9 +5827,11 @@
             <a:r>
               <a:rPr sz="1200" b="1">
                 <a:solidFill>
-                  <a:srgbClr val="151C26"/>
-                </a:solidFill>
-                <a:latin typeface="맑은 고딕"/>
+                  <a:srgbClr val="12151A"/>
+                </a:solidFill>
+                <a:latin typeface="Segoe UI"/>
+                <a:ea typeface="맑은 고딕"/>
+                <a:cs typeface="맑은 고딕"/>
               </a:rPr>
               <a:t>69%</a:t>
             </a:r>
@@ -5748,9 +5868,11 @@
             <a:r>
               <a:rPr sz="1150" b="0">
                 <a:solidFill>
-                  <a:srgbClr val="5D6874"/>
-                </a:solidFill>
-                <a:latin typeface="맑은 고딕"/>
+                  <a:srgbClr val="52514E"/>
+                </a:solidFill>
+                <a:latin typeface="Segoe UI"/>
+                <a:ea typeface="맑은 고딕"/>
+                <a:cs typeface="맑은 고딕"/>
               </a:rPr>
               <a:t>MAE</a:t>
             </a:r>
@@ -5787,9 +5909,11 @@
             <a:r>
               <a:rPr sz="1200" b="1">
                 <a:solidFill>
-                  <a:srgbClr val="151C26"/>
-                </a:solidFill>
-                <a:latin typeface="맑은 고딕"/>
+                  <a:srgbClr val="12151A"/>
+                </a:solidFill>
+                <a:latin typeface="Segoe UI"/>
+                <a:ea typeface="맑은 고딕"/>
+                <a:cs typeface="맑은 고딕"/>
               </a:rPr>
               <a:t>9.85 (베이스라인 10.4)</a:t>
             </a:r>
@@ -5826,9 +5950,11 @@
             <a:r>
               <a:rPr sz="1150" b="0">
                 <a:solidFill>
-                  <a:srgbClr val="5D6874"/>
-                </a:solidFill>
-                <a:latin typeface="맑은 고딕"/>
+                  <a:srgbClr val="52514E"/>
+                </a:solidFill>
+                <a:latin typeface="Segoe UI"/>
+                <a:ea typeface="맑은 고딕"/>
+                <a:cs typeface="맑은 고딕"/>
               </a:rPr>
               <a:t>베이스라인 대비</a:t>
             </a:r>
@@ -5865,9 +5991,11 @@
             <a:r>
               <a:rPr sz="1200" b="1">
                 <a:solidFill>
-                  <a:srgbClr val="151C26"/>
-                </a:solidFill>
-                <a:latin typeface="맑은 고딕"/>
+                  <a:srgbClr val="12151A"/>
+                </a:solidFill>
+                <a:latin typeface="Segoe UI"/>
+                <a:ea typeface="맑은 고딕"/>
+                <a:cs typeface="맑은 고딕"/>
               </a:rPr>
               <a:t>+5.3%</a:t>
             </a:r>
@@ -5904,9 +6032,11 @@
             <a:r>
               <a:rPr sz="1150" b="0">
                 <a:solidFill>
-                  <a:srgbClr val="5D6874"/>
-                </a:solidFill>
-                <a:latin typeface="맑은 고딕"/>
+                  <a:srgbClr val="52514E"/>
+                </a:solidFill>
+                <a:latin typeface="Segoe UI"/>
+                <a:ea typeface="맑은 고딕"/>
+                <a:cs typeface="맑은 고딕"/>
               </a:rPr>
               <a:t>R²</a:t>
             </a:r>
@@ -5943,9 +6073,11 @@
             <a:r>
               <a:rPr sz="1200" b="1">
                 <a:solidFill>
-                  <a:srgbClr val="151C26"/>
-                </a:solidFill>
-                <a:latin typeface="맑은 고딕"/>
+                  <a:srgbClr val="12151A"/>
+                </a:solidFill>
+                <a:latin typeface="Segoe UI"/>
+                <a:ea typeface="맑은 고딕"/>
+                <a:cs typeface="맑은 고딕"/>
               </a:rPr>
               <a:t>-0.02</a:t>
             </a:r>
@@ -5982,9 +6114,11 @@
             <a:r>
               <a:rPr sz="1000" b="0">
                 <a:solidFill>
-                  <a:srgbClr val="5D6874"/>
-                </a:solidFill>
-                <a:latin typeface="맑은 고딕"/>
+                  <a:srgbClr val="52514E"/>
+                </a:solidFill>
+                <a:latin typeface="Segoe UI"/>
+                <a:ea typeface="맑은 고딕"/>
+                <a:cs typeface="맑은 고딕"/>
               </a:rPr>
               <a:t>베이스라인은 '지금과 달라지지 않는다(Δ=0)'는 예측입니다.</a:t>
             </a:r>
@@ -6001,9 +6135,11 @@
             <a:r>
               <a:rPr sz="1000" b="0">
                 <a:solidFill>
-                  <a:srgbClr val="5D6874"/>
-                </a:solidFill>
-                <a:latin typeface="맑은 고딕"/>
+                  <a:srgbClr val="52514E"/>
+                </a:solidFill>
+                <a:latin typeface="Segoe UI"/>
+                <a:ea typeface="맑은 고딕"/>
+                <a:cs typeface="맑은 고딕"/>
               </a:rPr>
               <a:t>지금은 방향을 주로 맞히는 수준이며, 변화의 크기까지는 아직입니다(R²가 낮은 이유).</a:t>
             </a:r>
@@ -6027,7 +6163,7 @@
             </a:avLst>
           </a:prstGeom>
           <a:solidFill>
-            <a:srgbClr val="F5F7FA"/>
+            <a:srgbClr val="F6F7F9"/>
           </a:solidFill>
           <a:ln>
             <a:noFill/>
@@ -6084,9 +6220,11 @@
             <a:r>
               <a:rPr sz="1150" b="0">
                 <a:solidFill>
-                  <a:srgbClr val="151C26"/>
-                </a:solidFill>
-                <a:latin typeface="맑은 고딕"/>
+                  <a:srgbClr val="12151A"/>
+                </a:solidFill>
+                <a:latin typeface="Segoe UI"/>
+                <a:ea typeface="맑은 고딕"/>
+                <a:cs typeface="맑은 고딕"/>
               </a:rPr>
               <a:t>데이터 상황에 따라 모드가 자동 전환된다 — 개·폐업 시계열이 확보되면 패널 예측(t→t+3)으로, 없으면 구조지표 횡단면 모드로 돌아간다.</a:t>
             </a:r>
@@ -6123,9 +6261,11 @@
             <a:r>
               <a:rPr sz="950" b="0">
                 <a:solidFill>
-                  <a:srgbClr val="5D6874"/>
-                </a:solidFill>
-                <a:latin typeface="맑은 고딕"/>
+                  <a:srgbClr val="52514E"/>
+                </a:solidFill>
+                <a:latin typeface="Segoe UI"/>
+                <a:ea typeface="맑은 고딕"/>
+                <a:cs typeface="맑은 고딕"/>
               </a:rPr>
               <a:t>천안 균형발전 나침반(CBC)</a:t>
             </a:r>
@@ -6162,9 +6302,11 @@
             <a:r>
               <a:rPr sz="950" b="0">
                 <a:solidFill>
-                  <a:srgbClr val="5D6874"/>
-                </a:solidFill>
-                <a:latin typeface="맑은 고딕"/>
+                  <a:srgbClr val="52514E"/>
+                </a:solidFill>
+                <a:latin typeface="Segoe UI"/>
+                <a:ea typeface="맑은 고딕"/>
+                <a:cs typeface="맑은 고딕"/>
               </a:rPr>
               <a:t>11</a:t>
             </a:r>
@@ -6219,9 +6361,11 @@
             <a:r>
               <a:rPr sz="1150" b="1">
                 <a:solidFill>
-                  <a:srgbClr val="D64545"/>
-                </a:solidFill>
-                <a:latin typeface="맑은 고딕"/>
+                  <a:srgbClr val="2A78D6"/>
+                </a:solidFill>
+                <a:latin typeface="Segoe UI"/>
+                <a:ea typeface="맑은 고딕"/>
+                <a:cs typeface="맑은 고딕"/>
               </a:rPr>
               <a:t>FINDING · 04</a:t>
             </a:r>
@@ -6258,9 +6402,11 @@
             <a:r>
               <a:rPr sz="2700" b="1">
                 <a:solidFill>
-                  <a:srgbClr val="151C26"/>
-                </a:solidFill>
-                <a:latin typeface="맑은 고딕"/>
+                  <a:srgbClr val="12151A"/>
+                </a:solidFill>
+                <a:latin typeface="Segoe UI"/>
+                <a:ea typeface="맑은 고딕"/>
+                <a:cs typeface="맑은 고딕"/>
               </a:rPr>
               <a:t>예측 결과 — 다음 3년, 어디를 봐야 하는가</a:t>
             </a:r>
@@ -6297,9 +6443,11 @@
             <a:r>
               <a:rPr sz="1350" b="0">
                 <a:solidFill>
-                  <a:srgbClr val="5D6874"/>
-                </a:solidFill>
-                <a:latin typeface="맑은 고딕"/>
+                  <a:srgbClr val="52514E"/>
+                </a:solidFill>
+                <a:latin typeface="Segoe UI"/>
+                <a:ea typeface="맑은 고딕"/>
+                <a:cs typeface="맑은 고딕"/>
               </a:rPr>
               <a:t>대각선 위쪽은 현재보다 위험이 더 올라갈 것으로 예측된 생활권이다.</a:t>
             </a:r>
@@ -6322,8 +6470,8 @@
         </p:blipFill>
         <p:spPr>
           <a:xfrm>
-            <a:off x="658368" y="2127119"/>
-            <a:ext cx="5120640" cy="3929641"/>
+            <a:off x="859048" y="2103120"/>
+            <a:ext cx="4719279" cy="3977639"/>
           </a:xfrm>
           <a:prstGeom prst="rect">
             <a:avLst/>
@@ -6346,8 +6494,8 @@
         </p:blipFill>
         <p:spPr>
           <a:xfrm>
-            <a:off x="5961888" y="2282773"/>
-            <a:ext cx="5577840" cy="2475333"/>
+            <a:off x="5963512" y="2103120"/>
+            <a:ext cx="5574590" cy="2834640"/>
           </a:xfrm>
           <a:prstGeom prst="rect">
             <a:avLst/>
@@ -6384,9 +6532,11 @@
             <a:r>
               <a:rPr sz="1150" b="1">
                 <a:solidFill>
-                  <a:srgbClr val="151C26"/>
-                </a:solidFill>
-                <a:latin typeface="맑은 고딕"/>
+                  <a:srgbClr val="12151A"/>
+                </a:solidFill>
+                <a:latin typeface="Segoe UI"/>
+                <a:ea typeface="맑은 고딕"/>
+                <a:cs typeface="맑은 고딕"/>
               </a:rPr>
               <a:t>3년 뒤 위험 상위 5개 생활권</a:t>
             </a:r>
@@ -6427,9 +6577,11 @@
                       <a:r>
                         <a:rPr sz="950" b="1">
                           <a:solidFill>
-                            <a:srgbClr val="151C26"/>
+                            <a:srgbClr val="12151A"/>
                           </a:solidFill>
-                          <a:latin typeface="맑은 고딕"/>
+                          <a:latin typeface="Segoe UI"/>
+                          <a:ea typeface="맑은 고딕"/>
+                          <a:cs typeface="맑은 고딕"/>
                         </a:rPr>
                         <a:t>생활권</a:t>
                       </a:r>
@@ -6437,7 +6589,7 @@
                   </a:txBody>
                   <a:tcPr anchor="ctr">
                     <a:solidFill>
-                      <a:srgbClr val="F5F7FA"/>
+                      <a:srgbClr val="F6F7F9"/>
                     </a:solidFill>
                   </a:tcPr>
                 </a:tc>
@@ -6450,9 +6602,11 @@
                       <a:r>
                         <a:rPr sz="950" b="1">
                           <a:solidFill>
-                            <a:srgbClr val="151C26"/>
+                            <a:srgbClr val="12151A"/>
                           </a:solidFill>
-                          <a:latin typeface="맑은 고딕"/>
+                          <a:latin typeface="Segoe UI"/>
+                          <a:ea typeface="맑은 고딕"/>
+                          <a:cs typeface="맑은 고딕"/>
                         </a:rPr>
                         <a:t>현재</a:t>
                       </a:r>
@@ -6460,7 +6614,7 @@
                   </a:txBody>
                   <a:tcPr anchor="ctr">
                     <a:solidFill>
-                      <a:srgbClr val="F5F7FA"/>
+                      <a:srgbClr val="F6F7F9"/>
                     </a:solidFill>
                   </a:tcPr>
                 </a:tc>
@@ -6473,9 +6627,11 @@
                       <a:r>
                         <a:rPr sz="950" b="1">
                           <a:solidFill>
-                            <a:srgbClr val="151C26"/>
+                            <a:srgbClr val="12151A"/>
                           </a:solidFill>
-                          <a:latin typeface="맑은 고딕"/>
+                          <a:latin typeface="Segoe UI"/>
+                          <a:ea typeface="맑은 고딕"/>
+                          <a:cs typeface="맑은 고딕"/>
                         </a:rPr>
                         <a:t>3년 후</a:t>
                       </a:r>
@@ -6483,7 +6639,7 @@
                   </a:txBody>
                   <a:tcPr anchor="ctr">
                     <a:solidFill>
-                      <a:srgbClr val="F5F7FA"/>
+                      <a:srgbClr val="F6F7F9"/>
                     </a:solidFill>
                   </a:tcPr>
                 </a:tc>
@@ -6496,9 +6652,11 @@
                       <a:r>
                         <a:rPr sz="950" b="1">
                           <a:solidFill>
-                            <a:srgbClr val="151C26"/>
+                            <a:srgbClr val="12151A"/>
                           </a:solidFill>
-                          <a:latin typeface="맑은 고딕"/>
+                          <a:latin typeface="Segoe UI"/>
+                          <a:ea typeface="맑은 고딕"/>
+                          <a:cs typeface="맑은 고딕"/>
                         </a:rPr>
                         <a:t>변화</a:t>
                       </a:r>
@@ -6506,7 +6664,7 @@
                   </a:txBody>
                   <a:tcPr anchor="ctr">
                     <a:solidFill>
-                      <a:srgbClr val="F5F7FA"/>
+                      <a:srgbClr val="F6F7F9"/>
                     </a:solidFill>
                   </a:tcPr>
                 </a:tc>
@@ -6521,9 +6679,11 @@
                       <a:r>
                         <a:rPr sz="900">
                           <a:solidFill>
-                            <a:srgbClr val="151C26"/>
+                            <a:srgbClr val="12151A"/>
                           </a:solidFill>
-                          <a:latin typeface="맑은 고딕"/>
+                          <a:latin typeface="Segoe UI"/>
+                          <a:ea typeface="맑은 고딕"/>
+                          <a:cs typeface="맑은 고딕"/>
                         </a:rPr>
                         <a:t>동면</a:t>
                       </a:r>
@@ -6544,9 +6704,11 @@
                       <a:r>
                         <a:rPr sz="900">
                           <a:solidFill>
-                            <a:srgbClr val="151C26"/>
+                            <a:srgbClr val="12151A"/>
                           </a:solidFill>
-                          <a:latin typeface="맑은 고딕"/>
+                          <a:latin typeface="Segoe UI"/>
+                          <a:ea typeface="맑은 고딕"/>
+                          <a:cs typeface="맑은 고딕"/>
                         </a:rPr>
                         <a:t>100</a:t>
                       </a:r>
@@ -6567,9 +6729,11 @@
                       <a:r>
                         <a:rPr sz="900">
                           <a:solidFill>
-                            <a:srgbClr val="151C26"/>
+                            <a:srgbClr val="12151A"/>
                           </a:solidFill>
-                          <a:latin typeface="맑은 고딕"/>
+                          <a:latin typeface="Segoe UI"/>
+                          <a:ea typeface="맑은 고딕"/>
+                          <a:cs typeface="맑은 고딕"/>
                         </a:rPr>
                         <a:t>100</a:t>
                       </a:r>
@@ -6590,9 +6754,11 @@
                       <a:r>
                         <a:rPr sz="900">
                           <a:solidFill>
-                            <a:srgbClr val="151C26"/>
+                            <a:srgbClr val="12151A"/>
                           </a:solidFill>
-                          <a:latin typeface="맑은 고딕"/>
+                          <a:latin typeface="Segoe UI"/>
+                          <a:ea typeface="맑은 고딕"/>
+                          <a:cs typeface="맑은 고딕"/>
                         </a:rPr>
                         <a:t>+10</a:t>
                       </a:r>
@@ -6615,9 +6781,11 @@
                       <a:r>
                         <a:rPr sz="900">
                           <a:solidFill>
-                            <a:srgbClr val="151C26"/>
+                            <a:srgbClr val="12151A"/>
                           </a:solidFill>
-                          <a:latin typeface="맑은 고딕"/>
+                          <a:latin typeface="Segoe UI"/>
+                          <a:ea typeface="맑은 고딕"/>
+                          <a:cs typeface="맑은 고딕"/>
                         </a:rPr>
                         <a:t>수신면</a:t>
                       </a:r>
@@ -6638,9 +6806,11 @@
                       <a:r>
                         <a:rPr sz="900">
                           <a:solidFill>
-                            <a:srgbClr val="151C26"/>
+                            <a:srgbClr val="12151A"/>
                           </a:solidFill>
-                          <a:latin typeface="맑은 고딕"/>
+                          <a:latin typeface="Segoe UI"/>
+                          <a:ea typeface="맑은 고딕"/>
+                          <a:cs typeface="맑은 고딕"/>
                         </a:rPr>
                         <a:t>96</a:t>
                       </a:r>
@@ -6661,9 +6831,11 @@
                       <a:r>
                         <a:rPr sz="900">
                           <a:solidFill>
-                            <a:srgbClr val="151C26"/>
+                            <a:srgbClr val="12151A"/>
                           </a:solidFill>
-                          <a:latin typeface="맑은 고딕"/>
+                          <a:latin typeface="Segoe UI"/>
+                          <a:ea typeface="맑은 고딕"/>
+                          <a:cs typeface="맑은 고딕"/>
                         </a:rPr>
                         <a:t>100</a:t>
                       </a:r>
@@ -6684,9 +6856,11 @@
                       <a:r>
                         <a:rPr sz="900">
                           <a:solidFill>
-                            <a:srgbClr val="151C26"/>
+                            <a:srgbClr val="12151A"/>
                           </a:solidFill>
-                          <a:latin typeface="맑은 고딕"/>
+                          <a:latin typeface="Segoe UI"/>
+                          <a:ea typeface="맑은 고딕"/>
+                          <a:cs typeface="맑은 고딕"/>
                         </a:rPr>
                         <a:t>+4</a:t>
                       </a:r>
@@ -6709,9 +6883,11 @@
                       <a:r>
                         <a:rPr sz="900">
                           <a:solidFill>
-                            <a:srgbClr val="151C26"/>
+                            <a:srgbClr val="12151A"/>
                           </a:solidFill>
-                          <a:latin typeface="맑은 고딕"/>
+                          <a:latin typeface="Segoe UI"/>
+                          <a:ea typeface="맑은 고딕"/>
+                          <a:cs typeface="맑은 고딕"/>
                         </a:rPr>
                         <a:t>성남면</a:t>
                       </a:r>
@@ -6732,9 +6908,11 @@
                       <a:r>
                         <a:rPr sz="900">
                           <a:solidFill>
-                            <a:srgbClr val="151C26"/>
+                            <a:srgbClr val="12151A"/>
                           </a:solidFill>
-                          <a:latin typeface="맑은 고딕"/>
+                          <a:latin typeface="Segoe UI"/>
+                          <a:ea typeface="맑은 고딕"/>
+                          <a:cs typeface="맑은 고딕"/>
                         </a:rPr>
                         <a:t>98</a:t>
                       </a:r>
@@ -6755,9 +6933,11 @@
                       <a:r>
                         <a:rPr sz="900">
                           <a:solidFill>
-                            <a:srgbClr val="151C26"/>
+                            <a:srgbClr val="12151A"/>
                           </a:solidFill>
-                          <a:latin typeface="맑은 고딕"/>
+                          <a:latin typeface="Segoe UI"/>
+                          <a:ea typeface="맑은 고딕"/>
+                          <a:cs typeface="맑은 고딕"/>
                         </a:rPr>
                         <a:t>100</a:t>
                       </a:r>
@@ -6778,9 +6958,11 @@
                       <a:r>
                         <a:rPr sz="900">
                           <a:solidFill>
-                            <a:srgbClr val="151C26"/>
+                            <a:srgbClr val="12151A"/>
                           </a:solidFill>
-                          <a:latin typeface="맑은 고딕"/>
+                          <a:latin typeface="Segoe UI"/>
+                          <a:ea typeface="맑은 고딕"/>
+                          <a:cs typeface="맑은 고딕"/>
                         </a:rPr>
                         <a:t>+3</a:t>
                       </a:r>
@@ -6803,9 +6985,11 @@
                       <a:r>
                         <a:rPr sz="900">
                           <a:solidFill>
-                            <a:srgbClr val="151C26"/>
+                            <a:srgbClr val="12151A"/>
                           </a:solidFill>
-                          <a:latin typeface="맑은 고딕"/>
+                          <a:latin typeface="Segoe UI"/>
+                          <a:ea typeface="맑은 고딕"/>
+                          <a:cs typeface="맑은 고딕"/>
                         </a:rPr>
                         <a:t>입장면</a:t>
                       </a:r>
@@ -6826,9 +7010,11 @@
                       <a:r>
                         <a:rPr sz="900">
                           <a:solidFill>
-                            <a:srgbClr val="151C26"/>
+                            <a:srgbClr val="12151A"/>
                           </a:solidFill>
-                          <a:latin typeface="맑은 고딕"/>
+                          <a:latin typeface="Segoe UI"/>
+                          <a:ea typeface="맑은 고딕"/>
+                          <a:cs typeface="맑은 고딕"/>
                         </a:rPr>
                         <a:t>88</a:t>
                       </a:r>
@@ -6849,9 +7035,11 @@
                       <a:r>
                         <a:rPr sz="900">
                           <a:solidFill>
-                            <a:srgbClr val="151C26"/>
+                            <a:srgbClr val="12151A"/>
                           </a:solidFill>
-                          <a:latin typeface="맑은 고딕"/>
+                          <a:latin typeface="Segoe UI"/>
+                          <a:ea typeface="맑은 고딕"/>
+                          <a:cs typeface="맑은 고딕"/>
                         </a:rPr>
                         <a:t>96</a:t>
                       </a:r>
@@ -6872,9 +7060,11 @@
                       <a:r>
                         <a:rPr sz="900">
                           <a:solidFill>
-                            <a:srgbClr val="151C26"/>
+                            <a:srgbClr val="12151A"/>
                           </a:solidFill>
-                          <a:latin typeface="맑은 고딕"/>
+                          <a:latin typeface="Segoe UI"/>
+                          <a:ea typeface="맑은 고딕"/>
+                          <a:cs typeface="맑은 고딕"/>
                         </a:rPr>
                         <a:t>+9</a:t>
                       </a:r>
@@ -6897,9 +7087,11 @@
                       <a:r>
                         <a:rPr sz="900">
                           <a:solidFill>
-                            <a:srgbClr val="151C26"/>
+                            <a:srgbClr val="12151A"/>
                           </a:solidFill>
-                          <a:latin typeface="맑은 고딕"/>
+                          <a:latin typeface="Segoe UI"/>
+                          <a:ea typeface="맑은 고딕"/>
+                          <a:cs typeface="맑은 고딕"/>
                         </a:rPr>
                         <a:t>성환읍</a:t>
                       </a:r>
@@ -6920,9 +7112,11 @@
                       <a:r>
                         <a:rPr sz="900">
                           <a:solidFill>
-                            <a:srgbClr val="151C26"/>
+                            <a:srgbClr val="12151A"/>
                           </a:solidFill>
-                          <a:latin typeface="맑은 고딕"/>
+                          <a:latin typeface="Segoe UI"/>
+                          <a:ea typeface="맑은 고딕"/>
+                          <a:cs typeface="맑은 고딕"/>
                         </a:rPr>
                         <a:t>74</a:t>
                       </a:r>
@@ -6943,9 +7137,11 @@
                       <a:r>
                         <a:rPr sz="900">
                           <a:solidFill>
-                            <a:srgbClr val="151C26"/>
+                            <a:srgbClr val="12151A"/>
                           </a:solidFill>
-                          <a:latin typeface="맑은 고딕"/>
+                          <a:latin typeface="Segoe UI"/>
+                          <a:ea typeface="맑은 고딕"/>
+                          <a:cs typeface="맑은 고딕"/>
                         </a:rPr>
                         <a:t>95</a:t>
                       </a:r>
@@ -6966,9 +7162,11 @@
                       <a:r>
                         <a:rPr sz="900">
                           <a:solidFill>
-                            <a:srgbClr val="151C26"/>
+                            <a:srgbClr val="12151A"/>
                           </a:solidFill>
-                          <a:latin typeface="맑은 고딕"/>
+                          <a:latin typeface="Segoe UI"/>
+                          <a:ea typeface="맑은 고딕"/>
+                          <a:cs typeface="맑은 고딕"/>
                         </a:rPr>
                         <a:t>+21</a:t>
                       </a:r>
@@ -7015,9 +7213,11 @@
             <a:r>
               <a:rPr sz="950" b="0">
                 <a:solidFill>
-                  <a:srgbClr val="5D6874"/>
-                </a:solidFill>
-                <a:latin typeface="맑은 고딕"/>
+                  <a:srgbClr val="52514E"/>
+                </a:solidFill>
+                <a:latin typeface="Segoe UI"/>
+                <a:ea typeface="맑은 고딕"/>
+                <a:cs typeface="맑은 고딕"/>
               </a:rPr>
               <a:t>천안 균형발전 나침반(CBC)</a:t>
             </a:r>
@@ -7054,9 +7254,11 @@
             <a:r>
               <a:rPr sz="950" b="0">
                 <a:solidFill>
-                  <a:srgbClr val="5D6874"/>
-                </a:solidFill>
-                <a:latin typeface="맑은 고딕"/>
+                  <a:srgbClr val="52514E"/>
+                </a:solidFill>
+                <a:latin typeface="Segoe UI"/>
+                <a:ea typeface="맑은 고딕"/>
+                <a:cs typeface="맑은 고딕"/>
               </a:rPr>
               <a:t>12</a:t>
             </a:r>
@@ -7111,9 +7313,11 @@
             <a:r>
               <a:rPr sz="1150" b="1">
                 <a:solidFill>
-                  <a:srgbClr val="D64545"/>
-                </a:solidFill>
-                <a:latin typeface="맑은 고딕"/>
+                  <a:srgbClr val="2A78D6"/>
+                </a:solidFill>
+                <a:latin typeface="Segoe UI"/>
+                <a:ea typeface="맑은 고딕"/>
+                <a:cs typeface="맑은 고딕"/>
               </a:rPr>
               <a:t>MODEL</a:t>
             </a:r>
@@ -7150,9 +7354,11 @@
             <a:r>
               <a:rPr sz="2700" b="1">
                 <a:solidFill>
-                  <a:srgbClr val="151C26"/>
-                </a:solidFill>
-                <a:latin typeface="맑은 고딕"/>
+                  <a:srgbClr val="12151A"/>
+                </a:solidFill>
+                <a:latin typeface="Segoe UI"/>
+                <a:ea typeface="맑은 고딕"/>
+                <a:cs typeface="맑은 고딕"/>
               </a:rPr>
               <a:t>순서 정하기 — 생활SOC 우선순위 계산</a:t>
             </a:r>
@@ -7189,9 +7395,11 @@
             <a:r>
               <a:rPr sz="1350" b="0">
                 <a:solidFill>
-                  <a:srgbClr val="5D6874"/>
-                </a:solidFill>
-                <a:latin typeface="맑은 고딕"/>
+                  <a:srgbClr val="52514E"/>
+                </a:solidFill>
+                <a:latin typeface="Segoe UI"/>
+                <a:ea typeface="맑은 고딕"/>
+                <a:cs typeface="맑은 고딕"/>
               </a:rPr>
               <a:t>예산을 얼마나 쓸지가 아니라, 한 곳을 놓는다면 어디가 가장 많은 분께 닿을지를 계산했습니다.</a:t>
             </a:r>
@@ -7228,9 +7436,11 @@
             <a:r>
               <a:rPr sz="1400" b="1">
                 <a:solidFill>
-                  <a:srgbClr val="151C26"/>
-                </a:solidFill>
-                <a:latin typeface="맑은 고딕"/>
+                  <a:srgbClr val="12151A"/>
+                </a:solidFill>
+                <a:latin typeface="Segoe UI"/>
+                <a:ea typeface="맑은 고딕"/>
+                <a:cs typeface="맑은 고딕"/>
               </a:rPr>
               <a:t>MCLP — 최대커버링 입지문제</a:t>
             </a:r>
@@ -7267,9 +7477,11 @@
             <a:r>
               <a:rPr sz="1200" b="1">
                 <a:solidFill>
-                  <a:srgbClr val="D64545"/>
+                  <a:srgbClr val="2A78D6"/>
                 </a:solidFill>
                 <a:latin typeface="Consolas"/>
+                <a:ea typeface="Consolas"/>
+                <a:cs typeface="Consolas"/>
               </a:rPr>
               <a:t>max  Σ  dᵢ · yᵢ      s.t.  yᵢ ≤ Σ xⱼ ,  Σ xⱼ = p</a:t>
             </a:r>
@@ -7286,9 +7498,11 @@
             <a:r>
               <a:rPr sz="1200" b="1">
                 <a:solidFill>
-                  <a:srgbClr val="D64545"/>
+                  <a:srgbClr val="2A78D6"/>
                 </a:solidFill>
                 <a:latin typeface="Consolas"/>
+                <a:ea typeface="Consolas"/>
+                <a:cs typeface="Consolas"/>
               </a:rPr>
               <a:t>        i∈수요격자                    j∈Nᵢ</a:t>
             </a:r>
@@ -7325,9 +7539,11 @@
             <a:r>
               <a:rPr sz="1150" b="1">
                 <a:solidFill>
-                  <a:srgbClr val="D64545"/>
-                </a:solidFill>
-                <a:latin typeface="맑은 고딕"/>
+                  <a:srgbClr val="2A78D6"/>
+                </a:solidFill>
+                <a:latin typeface="Segoe UI"/>
+                <a:ea typeface="맑은 고딕"/>
+                <a:cs typeface="맑은 고딕"/>
               </a:rPr>
               <a:t>▪</a:t>
             </a:r>
@@ -7364,9 +7580,11 @@
             <a:r>
               <a:rPr sz="1150" b="1">
                 <a:solidFill>
-                  <a:srgbClr val="151C26"/>
-                </a:solidFill>
-                <a:latin typeface="맑은 고딕"/>
+                  <a:srgbClr val="12151A"/>
+                </a:solidFill>
+                <a:latin typeface="Segoe UI"/>
+                <a:ea typeface="맑은 고딕"/>
+                <a:cs typeface="맑은 고딕"/>
               </a:rPr>
               <a:t>수요 dᵢ — 취약가중 인구</a:t>
             </a:r>
@@ -7403,9 +7621,11 @@
             <a:r>
               <a:rPr sz="1000" b="0">
                 <a:solidFill>
-                  <a:srgbClr val="5D6874"/>
-                </a:solidFill>
-                <a:latin typeface="맑은 고딕"/>
+                  <a:srgbClr val="52514E"/>
+                </a:solidFill>
+                <a:latin typeface="Segoe UI"/>
+                <a:ea typeface="맑은 고딕"/>
+                <a:cs typeface="맑은 고딕"/>
               </a:rPr>
               <a:t>격자 인구에 고령화율과 CBI 열위를 가중한다. 같은 1명이라도 취약지역의 1명을 더 크게 센다.</a:t>
             </a:r>
@@ -7442,9 +7662,11 @@
             <a:r>
               <a:rPr sz="1150" b="1">
                 <a:solidFill>
-                  <a:srgbClr val="D64545"/>
-                </a:solidFill>
-                <a:latin typeface="맑은 고딕"/>
+                  <a:srgbClr val="2A78D6"/>
+                </a:solidFill>
+                <a:latin typeface="Segoe UI"/>
+                <a:ea typeface="맑은 고딕"/>
+                <a:cs typeface="맑은 고딕"/>
               </a:rPr>
               <a:t>▪</a:t>
             </a:r>
@@ -7481,9 +7703,11 @@
             <a:r>
               <a:rPr sz="1150" b="1">
                 <a:solidFill>
-                  <a:srgbClr val="151C26"/>
-                </a:solidFill>
-                <a:latin typeface="맑은 고딕"/>
+                  <a:srgbClr val="12151A"/>
+                </a:solidFill>
+                <a:latin typeface="Segoe UI"/>
+                <a:ea typeface="맑은 고딕"/>
+                <a:cs typeface="맑은 고딕"/>
               </a:rPr>
               <a:t>커버 Nᵢ — 반경 1.0km</a:t>
             </a:r>
@@ -7520,9 +7744,11 @@
             <a:r>
               <a:rPr sz="1000" b="0">
                 <a:solidFill>
-                  <a:srgbClr val="5D6874"/>
-                </a:solidFill>
-                <a:latin typeface="맑은 고딕"/>
+                  <a:srgbClr val="52514E"/>
+                </a:solidFill>
+                <a:latin typeface="Segoe UI"/>
+                <a:ea typeface="맑은 고딕"/>
+                <a:cs typeface="맑은 고딕"/>
               </a:rPr>
               <a:t>도보 15분권. '15분 도시' 개념과 맞추고 행정경계를 넘는 이용도 반영한다.</a:t>
             </a:r>
@@ -7559,9 +7785,11 @@
             <a:r>
               <a:rPr sz="1150" b="1">
                 <a:solidFill>
-                  <a:srgbClr val="D64545"/>
-                </a:solidFill>
-                <a:latin typeface="맑은 고딕"/>
+                  <a:srgbClr val="2A78D6"/>
+                </a:solidFill>
+                <a:latin typeface="Segoe UI"/>
+                <a:ea typeface="맑은 고딕"/>
+                <a:cs typeface="맑은 고딕"/>
               </a:rPr>
               <a:t>▪</a:t>
             </a:r>
@@ -7598,9 +7826,11 @@
             <a:r>
               <a:rPr sz="1150" b="1">
                 <a:solidFill>
-                  <a:srgbClr val="151C26"/>
-                </a:solidFill>
-                <a:latin typeface="맑은 고딕"/>
+                  <a:srgbClr val="12151A"/>
+                </a:solidFill>
+                <a:latin typeface="Segoe UI"/>
+                <a:ea typeface="맑은 고딕"/>
+                <a:cs typeface="맑은 고딕"/>
               </a:rPr>
               <a:t>후보지 xⱼ — 빈집·노후 밀집 격자</a:t>
             </a:r>
@@ -7637,9 +7867,11 @@
             <a:r>
               <a:rPr sz="1000" b="0">
                 <a:solidFill>
-                  <a:srgbClr val="5D6874"/>
-                </a:solidFill>
-                <a:latin typeface="맑은 고딕"/>
+                  <a:srgbClr val="52514E"/>
+                </a:solidFill>
+                <a:latin typeface="Segoe UI"/>
+                <a:ea typeface="맑은 고딕"/>
+                <a:cs typeface="맑은 고딕"/>
               </a:rPr>
               <a:t>새 땅을 사는 대신 이미 비어 있는 공간을 후보로 둔다. 도시재생 사업과 바로 접속된다.</a:t>
             </a:r>
@@ -7676,9 +7908,11 @@
             <a:r>
               <a:rPr sz="1150" b="1">
                 <a:solidFill>
-                  <a:srgbClr val="D64545"/>
-                </a:solidFill>
-                <a:latin typeface="맑은 고딕"/>
+                  <a:srgbClr val="2A78D6"/>
+                </a:solidFill>
+                <a:latin typeface="Segoe UI"/>
+                <a:ea typeface="맑은 고딕"/>
+                <a:cs typeface="맑은 고딕"/>
               </a:rPr>
               <a:t>▪</a:t>
             </a:r>
@@ -7715,9 +7949,11 @@
             <a:r>
               <a:rPr sz="1150" b="1">
                 <a:solidFill>
-                  <a:srgbClr val="151C26"/>
-                </a:solidFill>
-                <a:latin typeface="맑은 고딕"/>
+                  <a:srgbClr val="12151A"/>
+                </a:solidFill>
+                <a:latin typeface="Segoe UI"/>
+                <a:ea typeface="맑은 고딕"/>
+                <a:cs typeface="맑은 고딕"/>
               </a:rPr>
               <a:t>탐욕 근사의 보장</a:t>
             </a:r>
@@ -7754,9 +7990,11 @@
             <a:r>
               <a:rPr sz="1000" b="0">
                 <a:solidFill>
-                  <a:srgbClr val="5D6874"/>
-                </a:solidFill>
-                <a:latin typeface="맑은 고딕"/>
+                  <a:srgbClr val="52514E"/>
+                </a:solidFill>
+                <a:latin typeface="Segoe UI"/>
+                <a:ea typeface="맑은 고딕"/>
+                <a:cs typeface="맑은 고딕"/>
               </a:rPr>
               <a:t>submodular 목적함수이므로 탐욕해가 최적해의 (1−1/e)≈63% 이상을 보장한다.</a:t>
             </a:r>
@@ -7780,7 +8018,7 @@
             </a:avLst>
           </a:prstGeom>
           <a:solidFill>
-            <a:srgbClr val="F0F7F2"/>
+            <a:srgbClr val="EFF7F3"/>
           </a:solidFill>
           <a:ln>
             <a:noFill/>
@@ -7837,9 +8075,11 @@
             <a:r>
               <a:rPr sz="1350" b="1">
                 <a:solidFill>
-                  <a:srgbClr val="3E9B7C"/>
-                </a:solidFill>
-                <a:latin typeface="맑은 고딕"/>
+                  <a:srgbClr val="1BAF7A"/>
+                </a:solidFill>
+                <a:latin typeface="Segoe UI"/>
+                <a:ea typeface="맑은 고딕"/>
+                <a:cs typeface="맑은 고딕"/>
               </a:rPr>
               <a:t>형평성 제약을 넣은 이유</a:t>
             </a:r>
@@ -7876,9 +8116,11 @@
             <a:r>
               <a:rPr sz="1100" b="0">
                 <a:solidFill>
-                  <a:srgbClr val="151C26"/>
-                </a:solidFill>
-                <a:latin typeface="맑은 고딕"/>
+                  <a:srgbClr val="12151A"/>
+                </a:solidFill>
+                <a:latin typeface="Segoe UI"/>
+                <a:ea typeface="맑은 고딕"/>
+                <a:cs typeface="맑은 고딕"/>
               </a:rPr>
               <a:t>계산만 그대로 두면 효율이 가장 높은 한 동네에 전부 몰립니다. 수식으로는 맞지만 균형발전이라는 취지에는 맞지 않는다고 생각했습니다.</a:t>
             </a:r>
@@ -7895,9 +8137,11 @@
             <a:r>
               <a:rPr sz="1100" b="0">
                 <a:solidFill>
-                  <a:srgbClr val="151C26"/>
-                </a:solidFill>
-                <a:latin typeface="맑은 고딕"/>
+                  <a:srgbClr val="12151A"/>
+                </a:solidFill>
+                <a:latin typeface="Segoe UI"/>
+                <a:ea typeface="맑은 고딕"/>
+                <a:cs typeface="맑은 고딕"/>
               </a:rPr>
               <a:t/>
             </a:r>
@@ -7914,9 +8158,11 @@
             <a:r>
               <a:rPr sz="1100" b="0">
                 <a:solidFill>
-                  <a:srgbClr val="151C26"/>
-                </a:solidFill>
-                <a:latin typeface="맑은 고딕"/>
+                  <a:srgbClr val="12151A"/>
+                </a:solidFill>
+                <a:latin typeface="Segoe UI"/>
+                <a:ea typeface="맑은 고딕"/>
+                <a:cs typeface="맑은 고딕"/>
               </a:rPr>
               <a:t>그래서 생활권당 최대 2개소로 제한했습니다. 총 효과는 조금 줄지만 여러 동네에 나누어 닿습니다.</a:t>
             </a:r>
@@ -7933,9 +8179,11 @@
             <a:r>
               <a:rPr sz="1100" b="0">
                 <a:solidFill>
-                  <a:srgbClr val="151C26"/>
-                </a:solidFill>
-                <a:latin typeface="맑은 고딕"/>
+                  <a:srgbClr val="12151A"/>
+                </a:solidFill>
+                <a:latin typeface="Segoe UI"/>
+                <a:ea typeface="맑은 고딕"/>
+                <a:cs typeface="맑은 고딕"/>
               </a:rPr>
               <a:t/>
             </a:r>
@@ -7952,9 +8200,11 @@
             <a:r>
               <a:rPr sz="1100" b="0">
                 <a:solidFill>
-                  <a:srgbClr val="151C26"/>
-                </a:solidFill>
-                <a:latin typeface="맑은 고딕"/>
+                  <a:srgbClr val="12151A"/>
+                </a:solidFill>
+                <a:latin typeface="Segoe UI"/>
+                <a:ea typeface="맑은 고딕"/>
+                <a:cs typeface="맑은 고딕"/>
               </a:rPr>
               <a:t>이 값은 조정 가능하니, 시 사정에 맞게 바꿔 쓰시면 됩니다.</a:t>
             </a:r>
@@ -7978,7 +8228,7 @@
             </a:avLst>
           </a:prstGeom>
           <a:solidFill>
-            <a:srgbClr val="F5F7FA"/>
+            <a:srgbClr val="F6F7F9"/>
           </a:solidFill>
           <a:ln>
             <a:noFill/>
@@ -8035,9 +8285,11 @@
             <a:r>
               <a:rPr sz="1100" b="0">
                 <a:solidFill>
-                  <a:srgbClr val="151C26"/>
-                </a:solidFill>
-                <a:latin typeface="맑은 고딕"/>
+                  <a:srgbClr val="12151A"/>
+                </a:solidFill>
+                <a:latin typeface="Segoe UI"/>
+                <a:ea typeface="맑은 고딕"/>
+                <a:cs typeface="맑은 고딕"/>
               </a:rPr>
               <a:t>결과는 '순위 · 생활권 · 시설유형 · 새로 닿는 인구 · 개선폭'이 적힌 표 한 장입니다.</a:t>
             </a:r>
@@ -8054,9 +8306,11 @@
             <a:r>
               <a:rPr sz="1100" b="0">
                 <a:solidFill>
-                  <a:srgbClr val="151C26"/>
-                </a:solidFill>
-                <a:latin typeface="맑은 고딕"/>
+                  <a:srgbClr val="12151A"/>
+                </a:solidFill>
+                <a:latin typeface="Segoe UI"/>
+                <a:ea typeface="맑은 고딕"/>
+                <a:cs typeface="맑은 고딕"/>
               </a:rPr>
               <a:t>검토 자료로 참고하실 수 있으면 좋겠습니다.</a:t>
             </a:r>
@@ -8093,9 +8347,11 @@
             <a:r>
               <a:rPr sz="950" b="0">
                 <a:solidFill>
-                  <a:srgbClr val="5D6874"/>
-                </a:solidFill>
-                <a:latin typeface="맑은 고딕"/>
+                  <a:srgbClr val="52514E"/>
+                </a:solidFill>
+                <a:latin typeface="Segoe UI"/>
+                <a:ea typeface="맑은 고딕"/>
+                <a:cs typeface="맑은 고딕"/>
               </a:rPr>
               <a:t>천안 균형발전 나침반(CBC)</a:t>
             </a:r>
@@ -8132,9 +8388,11 @@
             <a:r>
               <a:rPr sz="950" b="0">
                 <a:solidFill>
-                  <a:srgbClr val="5D6874"/>
-                </a:solidFill>
-                <a:latin typeface="맑은 고딕"/>
+                  <a:srgbClr val="52514E"/>
+                </a:solidFill>
+                <a:latin typeface="Segoe UI"/>
+                <a:ea typeface="맑은 고딕"/>
+                <a:cs typeface="맑은 고딕"/>
               </a:rPr>
               <a:t>13</a:t>
             </a:r>
@@ -8189,9 +8447,11 @@
             <a:r>
               <a:rPr sz="1150" b="1">
                 <a:solidFill>
-                  <a:srgbClr val="D64545"/>
-                </a:solidFill>
-                <a:latin typeface="맑은 고딕"/>
+                  <a:srgbClr val="2A78D6"/>
+                </a:solidFill>
+                <a:latin typeface="Segoe UI"/>
+                <a:ea typeface="맑은 고딕"/>
+                <a:cs typeface="맑은 고딕"/>
               </a:rPr>
               <a:t>FINDING · 05</a:t>
             </a:r>
@@ -8228,9 +8488,11 @@
             <a:r>
               <a:rPr sz="2700" b="1">
                 <a:solidFill>
-                  <a:srgbClr val="151C26"/>
-                </a:solidFill>
-                <a:latin typeface="맑은 고딕"/>
+                  <a:srgbClr val="12151A"/>
+                </a:solidFill>
+                <a:latin typeface="Segoe UI"/>
+                <a:ea typeface="맑은 고딕"/>
+                <a:cs typeface="맑은 고딕"/>
               </a:rPr>
               <a:t>처방 결과 — 투자 우선순위</a:t>
             </a:r>
@@ -8267,9 +8529,11 @@
             <a:r>
               <a:rPr sz="1350" b="0">
                 <a:solidFill>
-                  <a:srgbClr val="5D6874"/>
-                </a:solidFill>
-                <a:latin typeface="맑은 고딕"/>
+                  <a:srgbClr val="52514E"/>
+                </a:solidFill>
+                <a:latin typeface="Segoe UI"/>
+                <a:ea typeface="맑은 고딕"/>
+                <a:cs typeface="맑은 고딕"/>
               </a:rPr>
               <a:t>상위 12개소 우선 투자 시 취약수요 커버리지 +7.0%p, 신규 수혜인구 약 32,822명.</a:t>
             </a:r>
@@ -8292,8 +8556,8 @@
         </p:blipFill>
         <p:spPr>
           <a:xfrm>
-            <a:off x="1254495" y="2212848"/>
-            <a:ext cx="3654064" cy="3931920"/>
+            <a:off x="1329188" y="2212848"/>
+            <a:ext cx="3504678" cy="3931920"/>
           </a:xfrm>
           <a:prstGeom prst="rect">
             <a:avLst/>
@@ -8330,9 +8594,11 @@
             <a:r>
               <a:rPr sz="1350" b="1">
                 <a:solidFill>
-                  <a:srgbClr val="151C26"/>
-                </a:solidFill>
-                <a:latin typeface="맑은 고딕"/>
+                  <a:srgbClr val="12151A"/>
+                </a:solidFill>
+                <a:latin typeface="Segoe UI"/>
+                <a:ea typeface="맑은 고딕"/>
+                <a:cs typeface="맑은 고딕"/>
               </a:rPr>
               <a:t>AI 추천 투자 순위 (상위 10)</a:t>
             </a:r>
@@ -8374,9 +8640,11 @@
                       <a:r>
                         <a:rPr sz="1000" b="1">
                           <a:solidFill>
-                            <a:srgbClr val="151C26"/>
+                            <a:srgbClr val="12151A"/>
                           </a:solidFill>
-                          <a:latin typeface="맑은 고딕"/>
+                          <a:latin typeface="Segoe UI"/>
+                          <a:ea typeface="맑은 고딕"/>
+                          <a:cs typeface="맑은 고딕"/>
                         </a:rPr>
                         <a:t>순위</a:t>
                       </a:r>
@@ -8384,7 +8652,7 @@
                   </a:txBody>
                   <a:tcPr anchor="ctr">
                     <a:solidFill>
-                      <a:srgbClr val="F5F7FA"/>
+                      <a:srgbClr val="F6F7F9"/>
                     </a:solidFill>
                   </a:tcPr>
                 </a:tc>
@@ -8397,9 +8665,11 @@
                       <a:r>
                         <a:rPr sz="1000" b="1">
                           <a:solidFill>
-                            <a:srgbClr val="151C26"/>
+                            <a:srgbClr val="12151A"/>
                           </a:solidFill>
-                          <a:latin typeface="맑은 고딕"/>
+                          <a:latin typeface="Segoe UI"/>
+                          <a:ea typeface="맑은 고딕"/>
+                          <a:cs typeface="맑은 고딕"/>
                         </a:rPr>
                         <a:t>생활권</a:t>
                       </a:r>
@@ -8407,7 +8677,7 @@
                   </a:txBody>
                   <a:tcPr anchor="ctr">
                     <a:solidFill>
-                      <a:srgbClr val="F5F7FA"/>
+                      <a:srgbClr val="F6F7F9"/>
                     </a:solidFill>
                   </a:tcPr>
                 </a:tc>
@@ -8420,9 +8690,11 @@
                       <a:r>
                         <a:rPr sz="1000" b="1">
                           <a:solidFill>
-                            <a:srgbClr val="151C26"/>
+                            <a:srgbClr val="12151A"/>
                           </a:solidFill>
-                          <a:latin typeface="맑은 고딕"/>
+                          <a:latin typeface="Segoe UI"/>
+                          <a:ea typeface="맑은 고딕"/>
+                          <a:cs typeface="맑은 고딕"/>
                         </a:rPr>
                         <a:t>시설유형</a:t>
                       </a:r>
@@ -8430,7 +8702,7 @@
                   </a:txBody>
                   <a:tcPr anchor="ctr">
                     <a:solidFill>
-                      <a:srgbClr val="F5F7FA"/>
+                      <a:srgbClr val="F6F7F9"/>
                     </a:solidFill>
                   </a:tcPr>
                 </a:tc>
@@ -8443,9 +8715,11 @@
                       <a:r>
                         <a:rPr sz="1000" b="1">
                           <a:solidFill>
-                            <a:srgbClr val="151C26"/>
+                            <a:srgbClr val="12151A"/>
                           </a:solidFill>
-                          <a:latin typeface="맑은 고딕"/>
+                          <a:latin typeface="Segoe UI"/>
+                          <a:ea typeface="맑은 고딕"/>
+                          <a:cs typeface="맑은 고딕"/>
                         </a:rPr>
                         <a:t>신규 수혜인구</a:t>
                       </a:r>
@@ -8453,7 +8727,7 @@
                   </a:txBody>
                   <a:tcPr anchor="ctr">
                     <a:solidFill>
-                      <a:srgbClr val="F5F7FA"/>
+                      <a:srgbClr val="F6F7F9"/>
                     </a:solidFill>
                   </a:tcPr>
                 </a:tc>
@@ -8466,9 +8740,11 @@
                       <a:r>
                         <a:rPr sz="1000" b="1">
                           <a:solidFill>
-                            <a:srgbClr val="151C26"/>
+                            <a:srgbClr val="12151A"/>
                           </a:solidFill>
-                          <a:latin typeface="맑은 고딕"/>
+                          <a:latin typeface="Segoe UI"/>
+                          <a:ea typeface="맑은 고딕"/>
+                          <a:cs typeface="맑은 고딕"/>
                         </a:rPr>
                         <a:t>커버리지 개선</a:t>
                       </a:r>
@@ -8476,7 +8752,7 @@
                   </a:txBody>
                   <a:tcPr anchor="ctr">
                     <a:solidFill>
-                      <a:srgbClr val="F5F7FA"/>
+                      <a:srgbClr val="F6F7F9"/>
                     </a:solidFill>
                   </a:tcPr>
                 </a:tc>
@@ -8491,9 +8767,11 @@
                       <a:r>
                         <a:rPr sz="950">
                           <a:solidFill>
-                            <a:srgbClr val="151C26"/>
+                            <a:srgbClr val="12151A"/>
                           </a:solidFill>
-                          <a:latin typeface="맑은 고딕"/>
+                          <a:latin typeface="Segoe UI"/>
+                          <a:ea typeface="맑은 고딕"/>
+                          <a:cs typeface="맑은 고딕"/>
                         </a:rPr>
                         <a:t>1</a:t>
                       </a:r>
@@ -8514,9 +8792,11 @@
                       <a:r>
                         <a:rPr sz="950">
                           <a:solidFill>
-                            <a:srgbClr val="151C26"/>
+                            <a:srgbClr val="12151A"/>
                           </a:solidFill>
-                          <a:latin typeface="맑은 고딕"/>
+                          <a:latin typeface="Segoe UI"/>
+                          <a:ea typeface="맑은 고딕"/>
+                          <a:cs typeface="맑은 고딕"/>
                         </a:rPr>
                         <a:t>성거읍</a:t>
                       </a:r>
@@ -8537,9 +8817,11 @@
                       <a:r>
                         <a:rPr sz="950">
                           <a:solidFill>
-                            <a:srgbClr val="151C26"/>
+                            <a:srgbClr val="12151A"/>
                           </a:solidFill>
-                          <a:latin typeface="맑은 고딕"/>
+                          <a:latin typeface="Segoe UI"/>
+                          <a:ea typeface="맑은 고딕"/>
+                          <a:cs typeface="맑은 고딕"/>
                         </a:rPr>
                         <a:t>의료</a:t>
                       </a:r>
@@ -8560,9 +8842,11 @@
                       <a:r>
                         <a:rPr sz="950">
                           <a:solidFill>
-                            <a:srgbClr val="151C26"/>
+                            <a:srgbClr val="12151A"/>
                           </a:solidFill>
-                          <a:latin typeface="맑은 고딕"/>
+                          <a:latin typeface="Segoe UI"/>
+                          <a:ea typeface="맑은 고딕"/>
+                          <a:cs typeface="맑은 고딕"/>
                         </a:rPr>
                         <a:t>7,740</a:t>
                       </a:r>
@@ -8583,9 +8867,11 @@
                       <a:r>
                         <a:rPr sz="950">
                           <a:solidFill>
-                            <a:srgbClr val="151C26"/>
+                            <a:srgbClr val="12151A"/>
                           </a:solidFill>
-                          <a:latin typeface="맑은 고딕"/>
+                          <a:latin typeface="Segoe UI"/>
+                          <a:ea typeface="맑은 고딕"/>
+                          <a:cs typeface="맑은 고딕"/>
                         </a:rPr>
                         <a:t>+1.3%p</a:t>
                       </a:r>
@@ -8608,9 +8894,11 @@
                       <a:r>
                         <a:rPr sz="950">
                           <a:solidFill>
-                            <a:srgbClr val="151C26"/>
+                            <a:srgbClr val="12151A"/>
                           </a:solidFill>
-                          <a:latin typeface="맑은 고딕"/>
+                          <a:latin typeface="Segoe UI"/>
+                          <a:ea typeface="맑은 고딕"/>
+                          <a:cs typeface="맑은 고딕"/>
                         </a:rPr>
                         <a:t>2</a:t>
                       </a:r>
@@ -8631,9 +8919,11 @@
                       <a:r>
                         <a:rPr sz="950">
                           <a:solidFill>
-                            <a:srgbClr val="151C26"/>
+                            <a:srgbClr val="12151A"/>
                           </a:solidFill>
-                          <a:latin typeface="맑은 고딕"/>
+                          <a:latin typeface="Segoe UI"/>
+                          <a:ea typeface="맑은 고딕"/>
+                          <a:cs typeface="맑은 고딕"/>
                         </a:rPr>
                         <a:t>성거읍</a:t>
                       </a:r>
@@ -8654,9 +8944,11 @@
                       <a:r>
                         <a:rPr sz="950">
                           <a:solidFill>
-                            <a:srgbClr val="151C26"/>
+                            <a:srgbClr val="12151A"/>
                           </a:solidFill>
-                          <a:latin typeface="맑은 고딕"/>
+                          <a:latin typeface="Segoe UI"/>
+                          <a:ea typeface="맑은 고딕"/>
+                          <a:cs typeface="맑은 고딕"/>
                         </a:rPr>
                         <a:t>복지</a:t>
                       </a:r>
@@ -8677,9 +8969,11 @@
                       <a:r>
                         <a:rPr sz="950">
                           <a:solidFill>
-                            <a:srgbClr val="151C26"/>
+                            <a:srgbClr val="12151A"/>
                           </a:solidFill>
-                          <a:latin typeface="맑은 고딕"/>
+                          <a:latin typeface="Segoe UI"/>
+                          <a:ea typeface="맑은 고딕"/>
+                          <a:cs typeface="맑은 고딕"/>
                         </a:rPr>
                         <a:t>4,078</a:t>
                       </a:r>
@@ -8700,9 +8994,11 @@
                       <a:r>
                         <a:rPr sz="950">
                           <a:solidFill>
-                            <a:srgbClr val="151C26"/>
+                            <a:srgbClr val="12151A"/>
                           </a:solidFill>
-                          <a:latin typeface="맑은 고딕"/>
+                          <a:latin typeface="Segoe UI"/>
+                          <a:ea typeface="맑은 고딕"/>
+                          <a:cs typeface="맑은 고딕"/>
                         </a:rPr>
                         <a:t>+1.3%p</a:t>
                       </a:r>
@@ -8725,9 +9021,11 @@
                       <a:r>
                         <a:rPr sz="950">
                           <a:solidFill>
-                            <a:srgbClr val="151C26"/>
+                            <a:srgbClr val="12151A"/>
                           </a:solidFill>
-                          <a:latin typeface="맑은 고딕"/>
+                          <a:latin typeface="Segoe UI"/>
+                          <a:ea typeface="맑은 고딕"/>
+                          <a:cs typeface="맑은 고딕"/>
                         </a:rPr>
                         <a:t>3</a:t>
                       </a:r>
@@ -8748,9 +9046,11 @@
                       <a:r>
                         <a:rPr sz="950">
                           <a:solidFill>
-                            <a:srgbClr val="151C26"/>
+                            <a:srgbClr val="12151A"/>
                           </a:solidFill>
-                          <a:latin typeface="맑은 고딕"/>
+                          <a:latin typeface="Segoe UI"/>
+                          <a:ea typeface="맑은 고딕"/>
+                          <a:cs typeface="맑은 고딕"/>
                         </a:rPr>
                         <a:t>성남면</a:t>
                       </a:r>
@@ -8771,9 +9071,11 @@
                       <a:r>
                         <a:rPr sz="950">
                           <a:solidFill>
-                            <a:srgbClr val="151C26"/>
+                            <a:srgbClr val="12151A"/>
                           </a:solidFill>
-                          <a:latin typeface="맑은 고딕"/>
+                          <a:latin typeface="Segoe UI"/>
+                          <a:ea typeface="맑은 고딕"/>
+                          <a:cs typeface="맑은 고딕"/>
                         </a:rPr>
                         <a:t>복지</a:t>
                       </a:r>
@@ -8794,9 +9096,11 @@
                       <a:r>
                         <a:rPr sz="950">
                           <a:solidFill>
-                            <a:srgbClr val="151C26"/>
+                            <a:srgbClr val="12151A"/>
                           </a:solidFill>
-                          <a:latin typeface="맑은 고딕"/>
+                          <a:latin typeface="Segoe UI"/>
+                          <a:ea typeface="맑은 고딕"/>
+                          <a:cs typeface="맑은 고딕"/>
                         </a:rPr>
                         <a:t>6,645</a:t>
                       </a:r>
@@ -8817,9 +9121,11 @@
                       <a:r>
                         <a:rPr sz="950">
                           <a:solidFill>
-                            <a:srgbClr val="151C26"/>
+                            <a:srgbClr val="12151A"/>
                           </a:solidFill>
-                          <a:latin typeface="맑은 고딕"/>
+                          <a:latin typeface="Segoe UI"/>
+                          <a:ea typeface="맑은 고딕"/>
+                          <a:cs typeface="맑은 고딕"/>
                         </a:rPr>
                         <a:t>+0.82%p</a:t>
                       </a:r>
@@ -8842,9 +9148,11 @@
                       <a:r>
                         <a:rPr sz="950">
                           <a:solidFill>
-                            <a:srgbClr val="151C26"/>
+                            <a:srgbClr val="12151A"/>
                           </a:solidFill>
-                          <a:latin typeface="맑은 고딕"/>
+                          <a:latin typeface="Segoe UI"/>
+                          <a:ea typeface="맑은 고딕"/>
+                          <a:cs typeface="맑은 고딕"/>
                         </a:rPr>
                         <a:t>4</a:t>
                       </a:r>
@@ -8865,9 +9173,11 @@
                       <a:r>
                         <a:rPr sz="950">
                           <a:solidFill>
-                            <a:srgbClr val="151C26"/>
+                            <a:srgbClr val="12151A"/>
                           </a:solidFill>
-                          <a:latin typeface="맑은 고딕"/>
+                          <a:latin typeface="Segoe UI"/>
+                          <a:ea typeface="맑은 고딕"/>
+                          <a:cs typeface="맑은 고딕"/>
                         </a:rPr>
                         <a:t>성환읍</a:t>
                       </a:r>
@@ -8888,9 +9198,11 @@
                       <a:r>
                         <a:rPr sz="950">
                           <a:solidFill>
-                            <a:srgbClr val="151C26"/>
+                            <a:srgbClr val="12151A"/>
                           </a:solidFill>
-                          <a:latin typeface="맑은 고딕"/>
+                          <a:latin typeface="Segoe UI"/>
+                          <a:ea typeface="맑은 고딕"/>
+                          <a:cs typeface="맑은 고딕"/>
                         </a:rPr>
                         <a:t>의료</a:t>
                       </a:r>
@@ -8911,9 +9223,11 @@
                       <a:r>
                         <a:rPr sz="950">
                           <a:solidFill>
-                            <a:srgbClr val="151C26"/>
+                            <a:srgbClr val="12151A"/>
                           </a:solidFill>
-                          <a:latin typeface="맑은 고딕"/>
+                          <a:latin typeface="Segoe UI"/>
+                          <a:ea typeface="맑은 고딕"/>
+                          <a:cs typeface="맑은 고딕"/>
                         </a:rPr>
                         <a:t>1,689</a:t>
                       </a:r>
@@ -8934,9 +9248,11 @@
                       <a:r>
                         <a:rPr sz="950">
                           <a:solidFill>
-                            <a:srgbClr val="151C26"/>
+                            <a:srgbClr val="12151A"/>
                           </a:solidFill>
-                          <a:latin typeface="맑은 고딕"/>
+                          <a:latin typeface="Segoe UI"/>
+                          <a:ea typeface="맑은 고딕"/>
+                          <a:cs typeface="맑은 고딕"/>
                         </a:rPr>
                         <a:t>+0.59%p</a:t>
                       </a:r>
@@ -8959,9 +9275,11 @@
                       <a:r>
                         <a:rPr sz="950">
                           <a:solidFill>
-                            <a:srgbClr val="151C26"/>
+                            <a:srgbClr val="12151A"/>
                           </a:solidFill>
-                          <a:latin typeface="맑은 고딕"/>
+                          <a:latin typeface="Segoe UI"/>
+                          <a:ea typeface="맑은 고딕"/>
+                          <a:cs typeface="맑은 고딕"/>
                         </a:rPr>
                         <a:t>5</a:t>
                       </a:r>
@@ -8982,9 +9300,11 @@
                       <a:r>
                         <a:rPr sz="950">
                           <a:solidFill>
-                            <a:srgbClr val="151C26"/>
+                            <a:srgbClr val="12151A"/>
                           </a:solidFill>
-                          <a:latin typeface="맑은 고딕"/>
+                          <a:latin typeface="Segoe UI"/>
+                          <a:ea typeface="맑은 고딕"/>
+                          <a:cs typeface="맑은 고딕"/>
                         </a:rPr>
                         <a:t>성남면</a:t>
                       </a:r>
@@ -9005,9 +9325,11 @@
                       <a:r>
                         <a:rPr sz="950">
                           <a:solidFill>
-                            <a:srgbClr val="151C26"/>
+                            <a:srgbClr val="12151A"/>
                           </a:solidFill>
-                          <a:latin typeface="맑은 고딕"/>
+                          <a:latin typeface="Segoe UI"/>
+                          <a:ea typeface="맑은 고딕"/>
+                          <a:cs typeface="맑은 고딕"/>
                         </a:rPr>
                         <a:t>의료</a:t>
                       </a:r>
@@ -9028,9 +9350,11 @@
                       <a:r>
                         <a:rPr sz="950">
                           <a:solidFill>
-                            <a:srgbClr val="151C26"/>
+                            <a:srgbClr val="12151A"/>
                           </a:solidFill>
-                          <a:latin typeface="맑은 고딕"/>
+                          <a:latin typeface="Segoe UI"/>
+                          <a:ea typeface="맑은 고딕"/>
+                          <a:cs typeface="맑은 고딕"/>
                         </a:rPr>
                         <a:t>4,415</a:t>
                       </a:r>
@@ -9051,9 +9375,11 @@
                       <a:r>
                         <a:rPr sz="950">
                           <a:solidFill>
-                            <a:srgbClr val="151C26"/>
+                            <a:srgbClr val="12151A"/>
                           </a:solidFill>
-                          <a:latin typeface="맑은 고딕"/>
+                          <a:latin typeface="Segoe UI"/>
+                          <a:ea typeface="맑은 고딕"/>
+                          <a:cs typeface="맑은 고딕"/>
                         </a:rPr>
                         <a:t>+0.53%p</a:t>
                       </a:r>
@@ -9076,9 +9402,11 @@
                       <a:r>
                         <a:rPr sz="950">
                           <a:solidFill>
-                            <a:srgbClr val="151C26"/>
+                            <a:srgbClr val="12151A"/>
                           </a:solidFill>
-                          <a:latin typeface="맑은 고딕"/>
+                          <a:latin typeface="Segoe UI"/>
+                          <a:ea typeface="맑은 고딕"/>
+                          <a:cs typeface="맑은 고딕"/>
                         </a:rPr>
                         <a:t>6</a:t>
                       </a:r>
@@ -9099,9 +9427,11 @@
                       <a:r>
                         <a:rPr sz="950">
                           <a:solidFill>
-                            <a:srgbClr val="151C26"/>
+                            <a:srgbClr val="12151A"/>
                           </a:solidFill>
-                          <a:latin typeface="맑은 고딕"/>
+                          <a:latin typeface="Segoe UI"/>
+                          <a:ea typeface="맑은 고딕"/>
+                          <a:cs typeface="맑은 고딕"/>
                         </a:rPr>
                         <a:t>성환읍</a:t>
                       </a:r>
@@ -9122,9 +9452,11 @@
                       <a:r>
                         <a:rPr sz="950">
                           <a:solidFill>
-                            <a:srgbClr val="151C26"/>
+                            <a:srgbClr val="12151A"/>
                           </a:solidFill>
-                          <a:latin typeface="맑은 고딕"/>
+                          <a:latin typeface="Segoe UI"/>
+                          <a:ea typeface="맑은 고딕"/>
+                          <a:cs typeface="맑은 고딕"/>
                         </a:rPr>
                         <a:t>의료</a:t>
                       </a:r>
@@ -9145,9 +9477,11 @@
                       <a:r>
                         <a:rPr sz="950">
                           <a:solidFill>
-                            <a:srgbClr val="151C26"/>
+                            <a:srgbClr val="12151A"/>
                           </a:solidFill>
-                          <a:latin typeface="맑은 고딕"/>
+                          <a:latin typeface="Segoe UI"/>
+                          <a:ea typeface="맑은 고딕"/>
+                          <a:cs typeface="맑은 고딕"/>
                         </a:rPr>
                         <a:t>1,501</a:t>
                       </a:r>
@@ -9168,9 +9502,11 @@
                       <a:r>
                         <a:rPr sz="950">
                           <a:solidFill>
-                            <a:srgbClr val="151C26"/>
+                            <a:srgbClr val="12151A"/>
                           </a:solidFill>
-                          <a:latin typeface="맑은 고딕"/>
+                          <a:latin typeface="Segoe UI"/>
+                          <a:ea typeface="맑은 고딕"/>
+                          <a:cs typeface="맑은 고딕"/>
                         </a:rPr>
                         <a:t>+0.41%p</a:t>
                       </a:r>
@@ -9193,9 +9529,11 @@
                       <a:r>
                         <a:rPr sz="950">
                           <a:solidFill>
-                            <a:srgbClr val="151C26"/>
+                            <a:srgbClr val="12151A"/>
                           </a:solidFill>
-                          <a:latin typeface="맑은 고딕"/>
+                          <a:latin typeface="Segoe UI"/>
+                          <a:ea typeface="맑은 고딕"/>
+                          <a:cs typeface="맑은 고딕"/>
                         </a:rPr>
                         <a:t>7</a:t>
                       </a:r>
@@ -9216,9 +9554,11 @@
                       <a:r>
                         <a:rPr sz="950">
                           <a:solidFill>
-                            <a:srgbClr val="151C26"/>
+                            <a:srgbClr val="12151A"/>
                           </a:solidFill>
-                          <a:latin typeface="맑은 고딕"/>
+                          <a:latin typeface="Segoe UI"/>
+                          <a:ea typeface="맑은 고딕"/>
+                          <a:cs typeface="맑은 고딕"/>
                         </a:rPr>
                         <a:t>북면</a:t>
                       </a:r>
@@ -9239,9 +9579,11 @@
                       <a:r>
                         <a:rPr sz="950">
                           <a:solidFill>
-                            <a:srgbClr val="151C26"/>
+                            <a:srgbClr val="12151A"/>
                           </a:solidFill>
-                          <a:latin typeface="맑은 고딕"/>
+                          <a:latin typeface="Segoe UI"/>
+                          <a:ea typeface="맑은 고딕"/>
+                          <a:cs typeface="맑은 고딕"/>
                         </a:rPr>
                         <a:t>의료</a:t>
                       </a:r>
@@ -9262,9 +9604,11 @@
                       <a:r>
                         <a:rPr sz="950">
                           <a:solidFill>
-                            <a:srgbClr val="151C26"/>
+                            <a:srgbClr val="12151A"/>
                           </a:solidFill>
-                          <a:latin typeface="맑은 고딕"/>
+                          <a:latin typeface="Segoe UI"/>
+                          <a:ea typeface="맑은 고딕"/>
+                          <a:cs typeface="맑은 고딕"/>
                         </a:rPr>
                         <a:t>763</a:t>
                       </a:r>
@@ -9285,9 +9629,11 @@
                       <a:r>
                         <a:rPr sz="950">
                           <a:solidFill>
-                            <a:srgbClr val="151C26"/>
+                            <a:srgbClr val="12151A"/>
                           </a:solidFill>
-                          <a:latin typeface="맑은 고딕"/>
+                          <a:latin typeface="Segoe UI"/>
+                          <a:ea typeface="맑은 고딕"/>
+                          <a:cs typeface="맑은 고딕"/>
                         </a:rPr>
                         <a:t>+0.37%p</a:t>
                       </a:r>
@@ -9310,9 +9656,11 @@
                       <a:r>
                         <a:rPr sz="950">
                           <a:solidFill>
-                            <a:srgbClr val="151C26"/>
+                            <a:srgbClr val="12151A"/>
                           </a:solidFill>
-                          <a:latin typeface="맑은 고딕"/>
+                          <a:latin typeface="Segoe UI"/>
+                          <a:ea typeface="맑은 고딕"/>
+                          <a:cs typeface="맑은 고딕"/>
                         </a:rPr>
                         <a:t>8</a:t>
                       </a:r>
@@ -9333,9 +9681,11 @@
                       <a:r>
                         <a:rPr sz="950">
                           <a:solidFill>
-                            <a:srgbClr val="151C26"/>
+                            <a:srgbClr val="12151A"/>
                           </a:solidFill>
-                          <a:latin typeface="맑은 고딕"/>
+                          <a:latin typeface="Segoe UI"/>
+                          <a:ea typeface="맑은 고딕"/>
+                          <a:cs typeface="맑은 고딕"/>
                         </a:rPr>
                         <a:t>풍세면</a:t>
                       </a:r>
@@ -9356,9 +9706,11 @@
                       <a:r>
                         <a:rPr sz="950">
                           <a:solidFill>
-                            <a:srgbClr val="151C26"/>
+                            <a:srgbClr val="12151A"/>
                           </a:solidFill>
-                          <a:latin typeface="맑은 고딕"/>
+                          <a:latin typeface="Segoe UI"/>
+                          <a:ea typeface="맑은 고딕"/>
+                          <a:cs typeface="맑은 고딕"/>
                         </a:rPr>
                         <a:t>의료</a:t>
                       </a:r>
@@ -9379,9 +9731,11 @@
                       <a:r>
                         <a:rPr sz="950">
                           <a:solidFill>
-                            <a:srgbClr val="151C26"/>
+                            <a:srgbClr val="12151A"/>
                           </a:solidFill>
-                          <a:latin typeface="맑은 고딕"/>
+                          <a:latin typeface="Segoe UI"/>
+                          <a:ea typeface="맑은 고딕"/>
+                          <a:cs typeface="맑은 고딕"/>
                         </a:rPr>
                         <a:t>1,003</a:t>
                       </a:r>
@@ -9402,9 +9756,11 @@
                       <a:r>
                         <a:rPr sz="950">
                           <a:solidFill>
-                            <a:srgbClr val="151C26"/>
+                            <a:srgbClr val="12151A"/>
                           </a:solidFill>
-                          <a:latin typeface="맑은 고딕"/>
+                          <a:latin typeface="Segoe UI"/>
+                          <a:ea typeface="맑은 고딕"/>
+                          <a:cs typeface="맑은 고딕"/>
                         </a:rPr>
                         <a:t>+0.36%p</a:t>
                       </a:r>
@@ -9427,9 +9783,11 @@
                       <a:r>
                         <a:rPr sz="950">
                           <a:solidFill>
-                            <a:srgbClr val="151C26"/>
+                            <a:srgbClr val="12151A"/>
                           </a:solidFill>
-                          <a:latin typeface="맑은 고딕"/>
+                          <a:latin typeface="Segoe UI"/>
+                          <a:ea typeface="맑은 고딕"/>
+                          <a:cs typeface="맑은 고딕"/>
                         </a:rPr>
                         <a:t>9</a:t>
                       </a:r>
@@ -9450,9 +9808,11 @@
                       <a:r>
                         <a:rPr sz="950">
                           <a:solidFill>
-                            <a:srgbClr val="151C26"/>
+                            <a:srgbClr val="12151A"/>
                           </a:solidFill>
-                          <a:latin typeface="맑은 고딕"/>
+                          <a:latin typeface="Segoe UI"/>
+                          <a:ea typeface="맑은 고딕"/>
+                          <a:cs typeface="맑은 고딕"/>
                         </a:rPr>
                         <a:t>입장면</a:t>
                       </a:r>
@@ -9473,9 +9833,11 @@
                       <a:r>
                         <a:rPr sz="950">
                           <a:solidFill>
-                            <a:srgbClr val="151C26"/>
+                            <a:srgbClr val="12151A"/>
                           </a:solidFill>
-                          <a:latin typeface="맑은 고딕"/>
+                          <a:latin typeface="Segoe UI"/>
+                          <a:ea typeface="맑은 고딕"/>
+                          <a:cs typeface="맑은 고딕"/>
                         </a:rPr>
                         <a:t>보육</a:t>
                       </a:r>
@@ -9496,9 +9858,11 @@
                       <a:r>
                         <a:rPr sz="950">
                           <a:solidFill>
-                            <a:srgbClr val="151C26"/>
+                            <a:srgbClr val="12151A"/>
                           </a:solidFill>
-                          <a:latin typeface="맑은 고딕"/>
+                          <a:latin typeface="Segoe UI"/>
+                          <a:ea typeface="맑은 고딕"/>
+                          <a:cs typeface="맑은 고딕"/>
                         </a:rPr>
                         <a:t>1,626</a:t>
                       </a:r>
@@ -9519,9 +9883,11 @@
                       <a:r>
                         <a:rPr sz="950">
                           <a:solidFill>
-                            <a:srgbClr val="151C26"/>
+                            <a:srgbClr val="12151A"/>
                           </a:solidFill>
-                          <a:latin typeface="맑은 고딕"/>
+                          <a:latin typeface="Segoe UI"/>
+                          <a:ea typeface="맑은 고딕"/>
+                          <a:cs typeface="맑은 고딕"/>
                         </a:rPr>
                         <a:t>+0.35%p</a:t>
                       </a:r>
@@ -9544,9 +9910,11 @@
                       <a:r>
                         <a:rPr sz="950">
                           <a:solidFill>
-                            <a:srgbClr val="151C26"/>
+                            <a:srgbClr val="12151A"/>
                           </a:solidFill>
-                          <a:latin typeface="맑은 고딕"/>
+                          <a:latin typeface="Segoe UI"/>
+                          <a:ea typeface="맑은 고딕"/>
+                          <a:cs typeface="맑은 고딕"/>
                         </a:rPr>
                         <a:t>10</a:t>
                       </a:r>
@@ -9567,9 +9935,11 @@
                       <a:r>
                         <a:rPr sz="950">
                           <a:solidFill>
-                            <a:srgbClr val="151C26"/>
+                            <a:srgbClr val="12151A"/>
                           </a:solidFill>
-                          <a:latin typeface="맑은 고딕"/>
+                          <a:latin typeface="Segoe UI"/>
+                          <a:ea typeface="맑은 고딕"/>
+                          <a:cs typeface="맑은 고딕"/>
                         </a:rPr>
                         <a:t>북면</a:t>
                       </a:r>
@@ -9590,9 +9960,11 @@
                       <a:r>
                         <a:rPr sz="950">
                           <a:solidFill>
-                            <a:srgbClr val="151C26"/>
+                            <a:srgbClr val="12151A"/>
                           </a:solidFill>
-                          <a:latin typeface="맑은 고딕"/>
+                          <a:latin typeface="Segoe UI"/>
+                          <a:ea typeface="맑은 고딕"/>
+                          <a:cs typeface="맑은 고딕"/>
                         </a:rPr>
                         <a:t>보육</a:t>
                       </a:r>
@@ -9613,9 +9985,11 @@
                       <a:r>
                         <a:rPr sz="950">
                           <a:solidFill>
-                            <a:srgbClr val="151C26"/>
+                            <a:srgbClr val="12151A"/>
                           </a:solidFill>
-                          <a:latin typeface="맑은 고딕"/>
+                          <a:latin typeface="Segoe UI"/>
+                          <a:ea typeface="맑은 고딕"/>
+                          <a:cs typeface="맑은 고딕"/>
                         </a:rPr>
                         <a:t>1,177</a:t>
                       </a:r>
@@ -9636,9 +10010,11 @@
                       <a:r>
                         <a:rPr sz="950">
                           <a:solidFill>
-                            <a:srgbClr val="151C26"/>
+                            <a:srgbClr val="12151A"/>
                           </a:solidFill>
-                          <a:latin typeface="맑은 고딕"/>
+                          <a:latin typeface="Segoe UI"/>
+                          <a:ea typeface="맑은 고딕"/>
+                          <a:cs typeface="맑은 고딕"/>
                         </a:rPr>
                         <a:t>+0.35%p</a:t>
                       </a:r>
@@ -9685,9 +10061,11 @@
             <a:r>
               <a:rPr sz="950" b="0">
                 <a:solidFill>
-                  <a:srgbClr val="5D6874"/>
-                </a:solidFill>
-                <a:latin typeface="맑은 고딕"/>
+                  <a:srgbClr val="52514E"/>
+                </a:solidFill>
+                <a:latin typeface="Segoe UI"/>
+                <a:ea typeface="맑은 고딕"/>
+                <a:cs typeface="맑은 고딕"/>
               </a:rPr>
               <a:t>천안 균형발전 나침반(CBC)</a:t>
             </a:r>
@@ -9724,9 +10102,11 @@
             <a:r>
               <a:rPr sz="950" b="0">
                 <a:solidFill>
-                  <a:srgbClr val="5D6874"/>
-                </a:solidFill>
-                <a:latin typeface="맑은 고딕"/>
+                  <a:srgbClr val="52514E"/>
+                </a:solidFill>
+                <a:latin typeface="Segoe UI"/>
+                <a:ea typeface="맑은 고딕"/>
+                <a:cs typeface="맑은 고딕"/>
               </a:rPr>
               <a:t>14</a:t>
             </a:r>
@@ -9781,9 +10161,11 @@
             <a:r>
               <a:rPr sz="1150" b="1">
                 <a:solidFill>
-                  <a:srgbClr val="D64545"/>
-                </a:solidFill>
-                <a:latin typeface="맑은 고딕"/>
+                  <a:srgbClr val="2A78D6"/>
+                </a:solidFill>
+                <a:latin typeface="Segoe UI"/>
+                <a:ea typeface="맑은 고딕"/>
+                <a:cs typeface="맑은 고딕"/>
               </a:rPr>
               <a:t>FINDING · 06</a:t>
             </a:r>
@@ -9820,9 +10202,11 @@
             <a:r>
               <a:rPr sz="2700" b="1">
                 <a:solidFill>
-                  <a:srgbClr val="151C26"/>
-                </a:solidFill>
-                <a:latin typeface="맑은 고딕"/>
+                  <a:srgbClr val="12151A"/>
+                </a:solidFill>
+                <a:latin typeface="Segoe UI"/>
+                <a:ea typeface="맑은 고딕"/>
+                <a:cs typeface="맑은 고딕"/>
               </a:rPr>
               <a:t>어디서 멈춰도 근거가 남는다</a:t>
             </a:r>
@@ -9859,9 +10243,11 @@
             <a:r>
               <a:rPr sz="1350" b="0">
                 <a:solidFill>
-                  <a:srgbClr val="5D6874"/>
-                </a:solidFill>
-                <a:latin typeface="맑은 고딕"/>
+                  <a:srgbClr val="52514E"/>
+                </a:solidFill>
+                <a:latin typeface="Segoe UI"/>
+                <a:ea typeface="맑은 고딕"/>
+                <a:cs typeface="맑은 고딕"/>
               </a:rPr>
               <a:t>한계효용 체감 곡선이 있으면 예산이 깎여도 '몇 개소까지가 합리적인가'를 답할 수 있다.</a:t>
             </a:r>
@@ -9884,8 +10270,8 @@
         </p:blipFill>
         <p:spPr>
           <a:xfrm>
-            <a:off x="1030340" y="2212848"/>
-            <a:ext cx="5839734" cy="3200400"/>
+            <a:off x="2014907" y="2212848"/>
+            <a:ext cx="3870601" cy="3200400"/>
           </a:xfrm>
           <a:prstGeom prst="rect">
             <a:avLst/>
@@ -9908,8 +10294,8 @@
         </p:blipFill>
         <p:spPr>
           <a:xfrm>
-            <a:off x="7516368" y="2388514"/>
-            <a:ext cx="4023360" cy="2849066"/>
+            <a:off x="7516368" y="2265192"/>
+            <a:ext cx="4023360" cy="3095710"/>
           </a:xfrm>
           <a:prstGeom prst="rect">
             <a:avLst/>
@@ -9933,7 +10319,7 @@
             </a:avLst>
           </a:prstGeom>
           <a:solidFill>
-            <a:srgbClr val="F5F7FA"/>
+            <a:srgbClr val="F6F7F9"/>
           </a:solidFill>
           <a:ln>
             <a:noFill/>
@@ -9990,9 +10376,11 @@
             <a:r>
               <a:rPr sz="1200" b="0">
                 <a:solidFill>
-                  <a:srgbClr val="151C26"/>
-                </a:solidFill>
-                <a:latin typeface="맑은 고딕"/>
+                  <a:srgbClr val="12151A"/>
+                </a:solidFill>
+                <a:latin typeface="Segoe UI"/>
+                <a:ea typeface="맑은 고딕"/>
+                <a:cs typeface="맑은 고딕"/>
               </a:rPr>
               <a:t>실무적 가치 — 예산 심의에서 가장 자주 나오는 질문은 '이걸 왜 이 순서로 하느냐'와 '반만 하면 어떻게 되느냐'다.</a:t>
             </a:r>
@@ -10009,9 +10397,11 @@
             <a:r>
               <a:rPr sz="1200" b="0">
                 <a:solidFill>
-                  <a:srgbClr val="151C26"/>
-                </a:solidFill>
-                <a:latin typeface="맑은 고딕"/>
+                  <a:srgbClr val="12151A"/>
+                </a:solidFill>
+                <a:latin typeface="Segoe UI"/>
+                <a:ea typeface="맑은 고딕"/>
+                <a:cs typeface="맑은 고딕"/>
               </a:rPr>
               <a:t>이 곡선은 두 질문에 동시에 답한다. 좌측 그림의 좌상단 영역(고령↑·SOC↓)이 최우선 사각지대다.</a:t>
             </a:r>
@@ -10048,9 +10438,11 @@
             <a:r>
               <a:rPr sz="950" b="0">
                 <a:solidFill>
-                  <a:srgbClr val="5D6874"/>
-                </a:solidFill>
-                <a:latin typeface="맑은 고딕"/>
+                  <a:srgbClr val="52514E"/>
+                </a:solidFill>
+                <a:latin typeface="Segoe UI"/>
+                <a:ea typeface="맑은 고딕"/>
+                <a:cs typeface="맑은 고딕"/>
               </a:rPr>
               <a:t>천안 균형발전 나침반(CBC)</a:t>
             </a:r>
@@ -10087,9 +10479,11 @@
             <a:r>
               <a:rPr sz="950" b="0">
                 <a:solidFill>
-                  <a:srgbClr val="5D6874"/>
-                </a:solidFill>
-                <a:latin typeface="맑은 고딕"/>
+                  <a:srgbClr val="52514E"/>
+                </a:solidFill>
+                <a:latin typeface="Segoe UI"/>
+                <a:ea typeface="맑은 고딕"/>
+                <a:cs typeface="맑은 고딕"/>
               </a:rPr>
               <a:t>15</a:t>
             </a:r>
@@ -10144,9 +10538,11 @@
             <a:r>
               <a:rPr sz="1150" b="1">
                 <a:solidFill>
-                  <a:srgbClr val="D64545"/>
-                </a:solidFill>
-                <a:latin typeface="맑은 고딕"/>
+                  <a:srgbClr val="2A78D6"/>
+                </a:solidFill>
+                <a:latin typeface="Segoe UI"/>
+                <a:ea typeface="맑은 고딕"/>
+                <a:cs typeface="맑은 고딕"/>
               </a:rPr>
               <a:t>FOR WHOM</a:t>
             </a:r>
@@ -10183,9 +10579,11 @@
             <a:r>
               <a:rPr sz="2700" b="1">
                 <a:solidFill>
-                  <a:srgbClr val="151C26"/>
-                </a:solidFill>
-                <a:latin typeface="맑은 고딕"/>
+                  <a:srgbClr val="12151A"/>
+                </a:solidFill>
+                <a:latin typeface="Segoe UI"/>
+                <a:ea typeface="맑은 고딕"/>
+                <a:cs typeface="맑은 고딕"/>
               </a:rPr>
               <a:t>결국, 이런 분들께 닿았으면 합니다</a:t>
             </a:r>
@@ -10222,9 +10620,11 @@
             <a:r>
               <a:rPr sz="1350" b="0">
                 <a:solidFill>
-                  <a:srgbClr val="5D6874"/>
-                </a:solidFill>
-                <a:latin typeface="맑은 고딕"/>
+                  <a:srgbClr val="52514E"/>
+                </a:solidFill>
+                <a:latin typeface="Segoe UI"/>
+                <a:ea typeface="맑은 고딕"/>
+                <a:cs typeface="맑은 고딕"/>
               </a:rPr>
               <a:t>지수와 모델은 수단일 뿐입니다. 저희가 계속 떠올린 것은 아래 네 분의 하루였습니다.</a:t>
             </a:r>
@@ -10252,7 +10652,7 @@
           </a:solidFill>
           <a:ln w="12700">
             <a:solidFill>
-              <a:srgbClr val="E0E5EB"/>
+              <a:srgbClr val="E4E7EC"/>
             </a:solidFill>
           </a:ln>
           <a:effectLst/>
@@ -10292,7 +10692,7 @@
             <a:avLst/>
           </a:prstGeom>
           <a:solidFill>
-            <a:srgbClr val="D64545"/>
+            <a:srgbClr val="2A78D6"/>
           </a:solidFill>
           <a:ln>
             <a:noFill/>
@@ -10349,9 +10749,11 @@
             <a:r>
               <a:rPr sz="1350" b="1">
                 <a:solidFill>
-                  <a:srgbClr val="D64545"/>
-                </a:solidFill>
-                <a:latin typeface="맑은 고딕"/>
+                  <a:srgbClr val="2A78D6"/>
+                </a:solidFill>
+                <a:latin typeface="Segoe UI"/>
+                <a:ea typeface="맑은 고딕"/>
+                <a:cs typeface="맑은 고딕"/>
               </a:rPr>
               <a:t>원도심에 오래 사신 어르신</a:t>
             </a:r>
@@ -10388,9 +10790,11 @@
             <a:r>
               <a:rPr sz="1100" b="0">
                 <a:solidFill>
-                  <a:srgbClr val="5D6874"/>
-                </a:solidFill>
-                <a:latin typeface="맑은 고딕"/>
+                  <a:srgbClr val="52514E"/>
+                </a:solidFill>
+                <a:latin typeface="Segoe UI"/>
+                <a:ea typeface="맑은 고딕"/>
+                <a:cs typeface="맑은 고딕"/>
               </a:rPr>
               <a:t>24 일대는 젊은 이웃이 하나둘 떠나고 상가도 비었습니다.</a:t>
             </a:r>
@@ -10407,9 +10811,11 @@
             <a:r>
               <a:rPr sz="1100" b="0">
                 <a:solidFill>
-                  <a:srgbClr val="5D6874"/>
-                </a:solidFill>
-                <a:latin typeface="맑은 고딕"/>
+                  <a:srgbClr val="52514E"/>
+                </a:solidFill>
+                <a:latin typeface="Segoe UI"/>
+                <a:ea typeface="맑은 고딕"/>
+                <a:cs typeface="맑은 고딕"/>
               </a:rPr>
               <a:t>가게와 병원이 멀어질수록, 걸어서 하실 수 있는 일이 줄어듭니다.</a:t>
             </a:r>
@@ -10437,7 +10843,7 @@
           </a:solidFill>
           <a:ln w="12700">
             <a:solidFill>
-              <a:srgbClr val="E0E5EB"/>
+              <a:srgbClr val="E4E7EC"/>
             </a:solidFill>
           </a:ln>
           <a:effectLst/>
@@ -10536,7 +10942,9 @@
                 <a:solidFill>
                   <a:srgbClr val="8A7FB5"/>
                 </a:solidFill>
-                <a:latin typeface="맑은 고딕"/>
+                <a:latin typeface="Segoe UI"/>
+                <a:ea typeface="맑은 고딕"/>
+                <a:cs typeface="맑은 고딕"/>
               </a:rPr>
               <a:t>농촌면에서 아이 키우시는 부모님</a:t>
             </a:r>
@@ -10573,9 +10981,11 @@
             <a:r>
               <a:rPr sz="1100" b="0">
                 <a:solidFill>
-                  <a:srgbClr val="5D6874"/>
-                </a:solidFill>
-                <a:latin typeface="맑은 고딕"/>
+                  <a:srgbClr val="52514E"/>
+                </a:solidFill>
+                <a:latin typeface="Segoe UI"/>
+                <a:ea typeface="맑은 고딕"/>
+                <a:cs typeface="맑은 고딕"/>
               </a:rPr>
               <a:t>고령 비율이 가장 높은 곳은 22으로 54%였습니다.</a:t>
             </a:r>
@@ -10592,9 +11002,11 @@
             <a:r>
               <a:rPr sz="1100" b="0">
                 <a:solidFill>
-                  <a:srgbClr val="5D6874"/>
-                </a:solidFill>
-                <a:latin typeface="맑은 고딕"/>
+                  <a:srgbClr val="52514E"/>
+                </a:solidFill>
+                <a:latin typeface="Segoe UI"/>
+                <a:ea typeface="맑은 고딕"/>
+                <a:cs typeface="맑은 고딕"/>
               </a:rPr>
               <a:t>어린이집·도서관이 가까이 없으면 그 부담은 온전히 가정의 몫이 됩니다.</a:t>
             </a:r>
@@ -10622,7 +11034,7 @@
           </a:solidFill>
           <a:ln w="12700">
             <a:solidFill>
-              <a:srgbClr val="E0E5EB"/>
+              <a:srgbClr val="E4E7EC"/>
             </a:solidFill>
           </a:ln>
           <a:effectLst/>
@@ -10662,7 +11074,7 @@
             <a:avLst/>
           </a:prstGeom>
           <a:solidFill>
-            <a:srgbClr val="C98A1E"/>
+            <a:srgbClr val="EDA100"/>
           </a:solidFill>
           <a:ln>
             <a:noFill/>
@@ -10719,9 +11131,11 @@
             <a:r>
               <a:rPr sz="1350" b="1">
                 <a:solidFill>
-                  <a:srgbClr val="C98A1E"/>
-                </a:solidFill>
-                <a:latin typeface="맑은 고딕"/>
+                  <a:srgbClr val="EDA100"/>
+                </a:solidFill>
+                <a:latin typeface="Segoe UI"/>
+                <a:ea typeface="맑은 고딕"/>
+                <a:cs typeface="맑은 고딕"/>
               </a:rPr>
               <a:t>원도심에서 가게를 지켜오신 상인</a:t>
             </a:r>
@@ -10758,9 +11172,11 @@
             <a:r>
               <a:rPr sz="1100" b="0">
                 <a:solidFill>
-                  <a:srgbClr val="5D6874"/>
-                </a:solidFill>
-                <a:latin typeface="맑은 고딕"/>
+                  <a:srgbClr val="52514E"/>
+                </a:solidFill>
+                <a:latin typeface="Segoe UI"/>
+                <a:ea typeface="맑은 고딕"/>
+                <a:cs typeface="맑은 고딕"/>
               </a:rPr>
               <a:t>오가는 분이 줄면 매출이 줄고, 문 닫는 가게가 늘면 오가는 분이 더 줍니다.</a:t>
             </a:r>
@@ -10777,9 +11193,11 @@
             <a:r>
               <a:rPr sz="1100" b="0">
                 <a:solidFill>
-                  <a:srgbClr val="5D6874"/>
-                </a:solidFill>
-                <a:latin typeface="맑은 고딕"/>
+                  <a:srgbClr val="52514E"/>
+                </a:solidFill>
+                <a:latin typeface="Segoe UI"/>
+                <a:ea typeface="맑은 고딕"/>
+                <a:cs typeface="맑은 고딕"/>
               </a:rPr>
               <a:t>이 고리를 일찍 알아차릴 수 있다면, 도움드릴 방법도 더 많아집니다.</a:t>
             </a:r>
@@ -10807,7 +11225,7 @@
           </a:solidFill>
           <a:ln w="12700">
             <a:solidFill>
-              <a:srgbClr val="E0E5EB"/>
+              <a:srgbClr val="E4E7EC"/>
             </a:solidFill>
           </a:ln>
           <a:effectLst/>
@@ -10847,7 +11265,7 @@
             <a:avLst/>
           </a:prstGeom>
           <a:solidFill>
-            <a:srgbClr val="2E7DD1"/>
+            <a:srgbClr val="2A78D6"/>
           </a:solidFill>
           <a:ln>
             <a:noFill/>
@@ -10904,9 +11322,11 @@
             <a:r>
               <a:rPr sz="1350" b="1">
                 <a:solidFill>
-                  <a:srgbClr val="2E7DD1"/>
-                </a:solidFill>
-                <a:latin typeface="맑은 고딕"/>
+                  <a:srgbClr val="2A78D6"/>
+                </a:solidFill>
+                <a:latin typeface="Segoe UI"/>
+                <a:ea typeface="맑은 고딕"/>
+                <a:cs typeface="맑은 고딕"/>
               </a:rPr>
               <a:t>신도심에서 자리 잡은 이웃</a:t>
             </a:r>
@@ -10943,9 +11363,11 @@
             <a:r>
               <a:rPr sz="1100" b="0">
                 <a:solidFill>
-                  <a:srgbClr val="5D6874"/>
-                </a:solidFill>
-                <a:latin typeface="맑은 고딕"/>
+                  <a:srgbClr val="52514E"/>
+                </a:solidFill>
+                <a:latin typeface="Segoe UI"/>
+                <a:ea typeface="맑은 고딕"/>
+                <a:cs typeface="맑은 고딕"/>
               </a:rPr>
               <a:t>지금 여건이 좋은 곳도 언젠가는 나이가 듭니다.</a:t>
             </a:r>
@@ -10962,9 +11384,11 @@
             <a:r>
               <a:rPr sz="1100" b="0">
                 <a:solidFill>
-                  <a:srgbClr val="5D6874"/>
-                </a:solidFill>
-                <a:latin typeface="맑은 고딕"/>
+                  <a:srgbClr val="52514E"/>
+                </a:solidFill>
+                <a:latin typeface="Segoe UI"/>
+                <a:ea typeface="맑은 고딕"/>
+                <a:cs typeface="맑은 고딕"/>
               </a:rPr>
               <a:t>미리 살펴보는 습관은 결국 천안시민 모두를 위한 준비라고 생각합니다.</a:t>
             </a:r>
@@ -10988,7 +11412,7 @@
             </a:avLst>
           </a:prstGeom>
           <a:solidFill>
-            <a:srgbClr val="F0F7F2"/>
+            <a:srgbClr val="EFF7F3"/>
           </a:solidFill>
           <a:ln>
             <a:noFill/>
@@ -11045,9 +11469,11 @@
             <a:r>
               <a:rPr sz="1200" b="0">
                 <a:solidFill>
-                  <a:srgbClr val="151C26"/>
-                </a:solidFill>
-                <a:latin typeface="맑은 고딕"/>
+                  <a:srgbClr val="12151A"/>
+                </a:solidFill>
+                <a:latin typeface="Segoe UI"/>
+                <a:ea typeface="맑은 고딕"/>
+                <a:cs typeface="맑은 고딕"/>
               </a:rPr>
               <a:t>저희는 천안시 사정을 현장에서 겪어보지 못한 참가자입니다. 다만 공개된 데이터로 할 수 있는 만큼은 성실하게 살펴보았습니다.</a:t>
             </a:r>
@@ -11064,9 +11490,11 @@
             <a:r>
               <a:rPr sz="1200" b="0">
                 <a:solidFill>
-                  <a:srgbClr val="151C26"/>
-                </a:solidFill>
-                <a:latin typeface="맑은 고딕"/>
+                  <a:srgbClr val="12151A"/>
+                </a:solidFill>
+                <a:latin typeface="Segoe UI"/>
+                <a:ea typeface="맑은 고딕"/>
+                <a:cs typeface="맑은 고딕"/>
               </a:rPr>
               <a:t>부족한 부분은 현장을 아시는 분들이 채워주시길 바라며, 이 자료가 그 논의의 출발점이 될 수 있다면 더 바랄 것이 없겠습니다.</a:t>
             </a:r>
@@ -11103,9 +11531,11 @@
             <a:r>
               <a:rPr sz="950" b="0">
                 <a:solidFill>
-                  <a:srgbClr val="5D6874"/>
-                </a:solidFill>
-                <a:latin typeface="맑은 고딕"/>
+                  <a:srgbClr val="52514E"/>
+                </a:solidFill>
+                <a:latin typeface="Segoe UI"/>
+                <a:ea typeface="맑은 고딕"/>
+                <a:cs typeface="맑은 고딕"/>
               </a:rPr>
               <a:t>천안 균형발전 나침반(CBC)</a:t>
             </a:r>
@@ -11142,9 +11572,11 @@
             <a:r>
               <a:rPr sz="950" b="0">
                 <a:solidFill>
-                  <a:srgbClr val="5D6874"/>
-                </a:solidFill>
-                <a:latin typeface="맑은 고딕"/>
+                  <a:srgbClr val="52514E"/>
+                </a:solidFill>
+                <a:latin typeface="Segoe UI"/>
+                <a:ea typeface="맑은 고딕"/>
+                <a:cs typeface="맑은 고딕"/>
               </a:rPr>
               <a:t>16</a:t>
             </a:r>
@@ -11199,9 +11631,11 @@
             <a:r>
               <a:rPr sz="1150" b="1">
                 <a:solidFill>
-                  <a:srgbClr val="D64545"/>
-                </a:solidFill>
-                <a:latin typeface="맑은 고딕"/>
+                  <a:srgbClr val="2A78D6"/>
+                </a:solidFill>
+                <a:latin typeface="Segoe UI"/>
+                <a:ea typeface="맑은 고딕"/>
+                <a:cs typeface="맑은 고딕"/>
               </a:rPr>
               <a:t>APPLICATION</a:t>
             </a:r>
@@ -11238,9 +11672,11 @@
             <a:r>
               <a:rPr sz="2700" b="1">
                 <a:solidFill>
-                  <a:srgbClr val="151C26"/>
-                </a:solidFill>
-                <a:latin typeface="맑은 고딕"/>
+                  <a:srgbClr val="12151A"/>
+                </a:solidFill>
+                <a:latin typeface="Segoe UI"/>
+                <a:ea typeface="맑은 고딕"/>
+                <a:cs typeface="맑은 고딕"/>
               </a:rPr>
               <a:t>실무에 이렇게 보탬이 되면 좋겠습니다</a:t>
             </a:r>
@@ -11277,9 +11713,11 @@
             <a:r>
               <a:rPr sz="1350" b="0">
                 <a:solidFill>
-                  <a:srgbClr val="5D6874"/>
-                </a:solidFill>
-                <a:latin typeface="맑은 고딕"/>
+                  <a:srgbClr val="52514E"/>
+                </a:solidFill>
+                <a:latin typeface="Segoe UI"/>
+                <a:ea typeface="맑은 고딕"/>
+                <a:cs typeface="맑은 고딕"/>
               </a:rPr>
               <a:t>따로 시간을 내어 다뤄야 하는 연구물이 아니라, 하시던 업무 곁에 놓고 참고하실 수 있는 자료로 준비했습니다.</a:t>
             </a:r>
@@ -11307,7 +11745,7 @@
           </a:solidFill>
           <a:ln w="12700">
             <a:solidFill>
-              <a:srgbClr val="E0E5EB"/>
+              <a:srgbClr val="E4E7EC"/>
             </a:solidFill>
           </a:ln>
           <a:effectLst/>
@@ -11347,7 +11785,7 @@
             <a:avLst/>
           </a:prstGeom>
           <a:solidFill>
-            <a:srgbClr val="D64545"/>
+            <a:srgbClr val="2A78D6"/>
           </a:solidFill>
           <a:ln>
             <a:noFill/>
@@ -11404,9 +11842,11 @@
             <a:r>
               <a:rPr sz="1250" b="1">
                 <a:solidFill>
-                  <a:srgbClr val="D64545"/>
-                </a:solidFill>
-                <a:latin typeface="맑은 고딕"/>
+                  <a:srgbClr val="2A78D6"/>
+                </a:solidFill>
+                <a:latin typeface="Segoe UI"/>
+                <a:ea typeface="맑은 고딕"/>
+                <a:cs typeface="맑은 고딕"/>
               </a:rPr>
               <a:t>도시재생 담당</a:t>
             </a:r>
@@ -11443,9 +11883,11 @@
             <a:r>
               <a:rPr sz="1350" b="1">
                 <a:solidFill>
-                  <a:srgbClr val="151C26"/>
-                </a:solidFill>
-                <a:latin typeface="맑은 고딕"/>
+                  <a:srgbClr val="12151A"/>
+                </a:solidFill>
+                <a:latin typeface="Segoe UI"/>
+                <a:ea typeface="맑은 고딕"/>
+                <a:cs typeface="맑은 고딕"/>
               </a:rPr>
               <a:t>사업지 검토 · 공모 준비</a:t>
             </a:r>
@@ -11482,9 +11924,11 @@
             <a:r>
               <a:rPr sz="1080" b="0">
                 <a:solidFill>
-                  <a:srgbClr val="5D6874"/>
-                </a:solidFill>
-                <a:latin typeface="맑은 고딕"/>
+                  <a:srgbClr val="52514E"/>
+                </a:solidFill>
+                <a:latin typeface="Segoe UI"/>
+                <a:ea typeface="맑은 고딕"/>
+                <a:cs typeface="맑은 고딕"/>
               </a:rPr>
               <a:t>지수가 낮은 곳과 3년 뒤 살펴볼 곳을 겹쳐 후보를 좁히실 때,</a:t>
             </a:r>
@@ -11501,9 +11945,11 @@
             <a:r>
               <a:rPr sz="1080" b="0">
                 <a:solidFill>
-                  <a:srgbClr val="5D6874"/>
-                </a:solidFill>
-                <a:latin typeface="맑은 고딕"/>
+                  <a:srgbClr val="52514E"/>
+                </a:solidFill>
+                <a:latin typeface="Segoe UI"/>
+                <a:ea typeface="맑은 고딕"/>
+                <a:cs typeface="맑은 고딕"/>
               </a:rPr>
               <a:t>공모의 '쇠퇴도 진단' 항목에 근거 수치로.</a:t>
             </a:r>
@@ -11531,7 +11977,7 @@
           </a:solidFill>
           <a:ln w="12700">
             <a:solidFill>
-              <a:srgbClr val="E0E5EB"/>
+              <a:srgbClr val="E4E7EC"/>
             </a:solidFill>
           </a:ln>
           <a:effectLst/>
@@ -11571,7 +12017,7 @@
             <a:avLst/>
           </a:prstGeom>
           <a:solidFill>
-            <a:srgbClr val="2E7DD1"/>
+            <a:srgbClr val="1BAF7A"/>
           </a:solidFill>
           <a:ln>
             <a:noFill/>
@@ -11628,9 +12074,11 @@
             <a:r>
               <a:rPr sz="1250" b="1">
                 <a:solidFill>
-                  <a:srgbClr val="2E7DD1"/>
-                </a:solidFill>
-                <a:latin typeface="맑은 고딕"/>
+                  <a:srgbClr val="1BAF7A"/>
+                </a:solidFill>
+                <a:latin typeface="Segoe UI"/>
+                <a:ea typeface="맑은 고딕"/>
+                <a:cs typeface="맑은 고딕"/>
               </a:rPr>
               <a:t>복지·보건 담당</a:t>
             </a:r>
@@ -11667,9 +12115,11 @@
             <a:r>
               <a:rPr sz="1350" b="1">
                 <a:solidFill>
-                  <a:srgbClr val="151C26"/>
-                </a:solidFill>
-                <a:latin typeface="맑은 고딕"/>
+                  <a:srgbClr val="12151A"/>
+                </a:solidFill>
+                <a:latin typeface="Segoe UI"/>
+                <a:ea typeface="맑은 고딕"/>
+                <a:cs typeface="맑은 고딕"/>
               </a:rPr>
               <a:t>생활시설 위치 검토</a:t>
             </a:r>
@@ -11706,9 +12156,11 @@
             <a:r>
               <a:rPr sz="1080" b="0">
                 <a:solidFill>
-                  <a:srgbClr val="5D6874"/>
-                </a:solidFill>
-                <a:latin typeface="맑은 고딕"/>
+                  <a:srgbClr val="52514E"/>
+                </a:solidFill>
+                <a:latin typeface="Segoe UI"/>
+                <a:ea typeface="맑은 고딕"/>
+                <a:cs typeface="맑은 고딕"/>
               </a:rPr>
               <a:t>우선순위표의 좌표를 검토 후보 중 하나로,</a:t>
             </a:r>
@@ -11725,9 +12177,11 @@
             <a:r>
               <a:rPr sz="1080" b="0">
                 <a:solidFill>
-                  <a:srgbClr val="5D6874"/>
-                </a:solidFill>
-                <a:latin typeface="맑은 고딕"/>
+                  <a:srgbClr val="52514E"/>
+                </a:solidFill>
+                <a:latin typeface="Segoe UI"/>
+                <a:ea typeface="맑은 고딕"/>
+                <a:cs typeface="맑은 고딕"/>
               </a:rPr>
               <a:t>왜 그 동네인지 설명하실 때 항목별 근거로.</a:t>
             </a:r>
@@ -11755,7 +12209,7 @@
           </a:solidFill>
           <a:ln w="12700">
             <a:solidFill>
-              <a:srgbClr val="E0E5EB"/>
+              <a:srgbClr val="E4E7EC"/>
             </a:solidFill>
           </a:ln>
           <a:effectLst/>
@@ -11795,7 +12249,7 @@
             <a:avLst/>
           </a:prstGeom>
           <a:solidFill>
-            <a:srgbClr val="3E9B7C"/>
+            <a:srgbClr val="EDA100"/>
           </a:solidFill>
           <a:ln>
             <a:noFill/>
@@ -11852,9 +12306,11 @@
             <a:r>
               <a:rPr sz="1250" b="1">
                 <a:solidFill>
-                  <a:srgbClr val="3E9B7C"/>
-                </a:solidFill>
-                <a:latin typeface="맑은 고딕"/>
+                  <a:srgbClr val="EDA100"/>
+                </a:solidFill>
+                <a:latin typeface="Segoe UI"/>
+                <a:ea typeface="맑은 고딕"/>
+                <a:cs typeface="맑은 고딕"/>
               </a:rPr>
               <a:t>예산 담당</a:t>
             </a:r>
@@ -11891,9 +12347,11 @@
             <a:r>
               <a:rPr sz="1350" b="1">
                 <a:solidFill>
-                  <a:srgbClr val="151C26"/>
-                </a:solidFill>
-                <a:latin typeface="맑은 고딕"/>
+                  <a:srgbClr val="12151A"/>
+                </a:solidFill>
+                <a:latin typeface="Segoe UI"/>
+                <a:ea typeface="맑은 고딕"/>
+                <a:cs typeface="맑은 고딕"/>
               </a:rPr>
               <a:t>배분 검토 자료</a:t>
             </a:r>
@@ -11930,9 +12388,11 @@
             <a:r>
               <a:rPr sz="1080" b="0">
                 <a:solidFill>
-                  <a:srgbClr val="5D6874"/>
-                </a:solidFill>
-                <a:latin typeface="맑은 고딕"/>
+                  <a:srgbClr val="52514E"/>
+                </a:solidFill>
+                <a:latin typeface="Segoe UI"/>
+                <a:ea typeface="맑은 고딕"/>
+                <a:cs typeface="맑은 고딕"/>
               </a:rPr>
               <a:t>몇 개소까지면 어느 정도 효과인지 곡선으로 비교하실 때,</a:t>
             </a:r>
@@ -11949,9 +12409,11 @@
             <a:r>
               <a:rPr sz="1080" b="0">
                 <a:solidFill>
-                  <a:srgbClr val="5D6874"/>
-                </a:solidFill>
-                <a:latin typeface="맑은 고딕"/>
+                  <a:srgbClr val="52514E"/>
+                </a:solidFill>
+                <a:latin typeface="Segoe UI"/>
+                <a:ea typeface="맑은 고딕"/>
+                <a:cs typeface="맑은 고딕"/>
               </a:rPr>
               <a:t>예산 조정이 필요할 때 판단의 참고로.</a:t>
             </a:r>
@@ -11979,7 +12441,7 @@
           </a:solidFill>
           <a:ln w="12700">
             <a:solidFill>
-              <a:srgbClr val="E0E5EB"/>
+              <a:srgbClr val="E4E7EC"/>
             </a:solidFill>
           </a:ln>
           <a:effectLst/>
@@ -12019,7 +12481,7 @@
             <a:avLst/>
           </a:prstGeom>
           <a:solidFill>
-            <a:srgbClr val="C98A1E"/>
+            <a:srgbClr val="4A3AA7"/>
           </a:solidFill>
           <a:ln>
             <a:noFill/>
@@ -12076,9 +12538,11 @@
             <a:r>
               <a:rPr sz="1250" b="1">
                 <a:solidFill>
-                  <a:srgbClr val="C98A1E"/>
-                </a:solidFill>
-                <a:latin typeface="맑은 고딕"/>
+                  <a:srgbClr val="4A3AA7"/>
+                </a:solidFill>
+                <a:latin typeface="Segoe UI"/>
+                <a:ea typeface="맑은 고딕"/>
+                <a:cs typeface="맑은 고딕"/>
               </a:rPr>
               <a:t>기획·평가 담당</a:t>
             </a:r>
@@ -12115,9 +12579,11 @@
             <a:r>
               <a:rPr sz="1350" b="1">
                 <a:solidFill>
-                  <a:srgbClr val="151C26"/>
-                </a:solidFill>
-                <a:latin typeface="맑은 고딕"/>
+                  <a:srgbClr val="12151A"/>
+                </a:solidFill>
+                <a:latin typeface="Segoe UI"/>
+                <a:ea typeface="맑은 고딕"/>
+                <a:cs typeface="맑은 고딕"/>
               </a:rPr>
               <a:t>시행 이후 확인</a:t>
             </a:r>
@@ -12154,9 +12620,11 @@
             <a:r>
               <a:rPr sz="1080" b="0">
                 <a:solidFill>
-                  <a:srgbClr val="5D6874"/>
-                </a:solidFill>
-                <a:latin typeface="맑은 고딕"/>
+                  <a:srgbClr val="52514E"/>
+                </a:solidFill>
+                <a:latin typeface="Segoe UI"/>
+                <a:ea typeface="맑은 고딕"/>
+                <a:cs typeface="맑은 고딕"/>
               </a:rPr>
               <a:t>이듬해 같은 스크립트로 지수 변화를 이어 보실 때,</a:t>
             </a:r>
@@ -12173,9 +12641,11 @@
             <a:r>
               <a:rPr sz="1080" b="0">
                 <a:solidFill>
-                  <a:srgbClr val="5D6874"/>
-                </a:solidFill>
-                <a:latin typeface="맑은 고딕"/>
+                  <a:srgbClr val="52514E"/>
+                </a:solidFill>
+                <a:latin typeface="Segoe UI"/>
+                <a:ea typeface="맑은 고딕"/>
+                <a:cs typeface="맑은 고딕"/>
               </a:rPr>
               <a:t>하신 사업이 수치로도 나아졌는지 확인하실 때.</a:t>
             </a:r>
@@ -12199,7 +12669,7 @@
             </a:avLst>
           </a:prstGeom>
           <a:solidFill>
-            <a:srgbClr val="F0F7F2"/>
+            <a:srgbClr val="EFF7F3"/>
           </a:solidFill>
           <a:ln>
             <a:noFill/>
@@ -12256,9 +12726,11 @@
             <a:r>
               <a:rPr sz="1200" b="0">
                 <a:solidFill>
-                  <a:srgbClr val="151C26"/>
-                </a:solidFill>
-                <a:latin typeface="맑은 고딕"/>
+                  <a:srgbClr val="12151A"/>
+                </a:solidFill>
+                <a:latin typeface="Segoe UI"/>
+                <a:ea typeface="맑은 고딕"/>
+                <a:cs typeface="맑은 고딕"/>
               </a:rPr>
               <a:t>쓰시는 방법 — 연 1회 공공데이터를 새로 받아 스크립트를 실행하시면 모든 자료가 다시 만들어집니다.</a:t>
             </a:r>
@@ -12275,9 +12747,11 @@
             <a:r>
               <a:rPr sz="1200" b="0">
                 <a:solidFill>
-                  <a:srgbClr val="151C26"/>
-                </a:solidFill>
-                <a:latin typeface="맑은 고딕"/>
+                  <a:srgbClr val="12151A"/>
+                </a:solidFill>
+                <a:latin typeface="Segoe UI"/>
+                <a:ea typeface="맑은 고딕"/>
+                <a:cs typeface="맑은 고딕"/>
               </a:rPr>
               <a:t>별도 시스템이나 데이터 구매 없이, 담당자 한 분이 반나절이면 그 해 자료를 준비하실 수 있습니다.</a:t>
             </a:r>
@@ -12314,9 +12788,11 @@
             <a:r>
               <a:rPr sz="950" b="0">
                 <a:solidFill>
-                  <a:srgbClr val="5D6874"/>
-                </a:solidFill>
-                <a:latin typeface="맑은 고딕"/>
+                  <a:srgbClr val="52514E"/>
+                </a:solidFill>
+                <a:latin typeface="Segoe UI"/>
+                <a:ea typeface="맑은 고딕"/>
+                <a:cs typeface="맑은 고딕"/>
               </a:rPr>
               <a:t>천안 균형발전 나침반(CBC)</a:t>
             </a:r>
@@ -12353,9 +12829,11 @@
             <a:r>
               <a:rPr sz="950" b="0">
                 <a:solidFill>
-                  <a:srgbClr val="5D6874"/>
-                </a:solidFill>
-                <a:latin typeface="맑은 고딕"/>
+                  <a:srgbClr val="52514E"/>
+                </a:solidFill>
+                <a:latin typeface="Segoe UI"/>
+                <a:ea typeface="맑은 고딕"/>
+                <a:cs typeface="맑은 고딕"/>
               </a:rPr>
               <a:t>17</a:t>
             </a:r>
@@ -12410,9 +12888,11 @@
             <a:r>
               <a:rPr sz="1150" b="1">
                 <a:solidFill>
-                  <a:srgbClr val="D64545"/>
-                </a:solidFill>
-                <a:latin typeface="맑은 고딕"/>
+                  <a:srgbClr val="2A78D6"/>
+                </a:solidFill>
+                <a:latin typeface="Segoe UI"/>
+                <a:ea typeface="맑은 고딕"/>
+                <a:cs typeface="맑은 고딕"/>
               </a:rPr>
               <a:t>IMPACT</a:t>
             </a:r>
@@ -12449,9 +12929,11 @@
             <a:r>
               <a:rPr sz="2700" b="1">
                 <a:solidFill>
-                  <a:srgbClr val="151C26"/>
-                </a:solidFill>
-                <a:latin typeface="맑은 고딕"/>
+                  <a:srgbClr val="12151A"/>
+                </a:solidFill>
+                <a:latin typeface="Segoe UI"/>
+                <a:ea typeface="맑은 고딕"/>
+                <a:cs typeface="맑은 고딕"/>
               </a:rPr>
               <a:t>기대효과와 실행 로드맵</a:t>
             </a:r>
@@ -12488,9 +12970,11 @@
             <a:r>
               <a:rPr sz="1450" b="1">
                 <a:solidFill>
-                  <a:srgbClr val="151C26"/>
-                </a:solidFill>
-                <a:latin typeface="맑은 고딕"/>
+                  <a:srgbClr val="12151A"/>
+                </a:solidFill>
+                <a:latin typeface="Segoe UI"/>
+                <a:ea typeface="맑은 고딕"/>
+                <a:cs typeface="맑은 고딕"/>
               </a:rPr>
               <a:t>기대효과</a:t>
             </a:r>
@@ -12512,7 +12996,7 @@
             <a:avLst/>
           </a:prstGeom>
           <a:solidFill>
-            <a:srgbClr val="D64545"/>
+            <a:srgbClr val="2A78D6"/>
           </a:solidFill>
           <a:ln>
             <a:noFill/>
@@ -12569,9 +13053,11 @@
             <a:r>
               <a:rPr sz="1250" b="1">
                 <a:solidFill>
-                  <a:srgbClr val="151C26"/>
-                </a:solidFill>
-                <a:latin typeface="맑은 고딕"/>
+                  <a:srgbClr val="12151A"/>
+                </a:solidFill>
+                <a:latin typeface="Segoe UI"/>
+                <a:ea typeface="맑은 고딕"/>
+                <a:cs typeface="맑은 고딕"/>
               </a:rPr>
               <a:t>시민께 닿는 범위</a:t>
             </a:r>
@@ -12608,9 +13094,11 @@
             <a:r>
               <a:rPr sz="1100" b="0">
                 <a:solidFill>
-                  <a:srgbClr val="5D6874"/>
-                </a:solidFill>
-                <a:latin typeface="맑은 고딕"/>
+                  <a:srgbClr val="52514E"/>
+                </a:solidFill>
+                <a:latin typeface="Segoe UI"/>
+                <a:ea typeface="맑은 고딕"/>
+                <a:cs typeface="맑은 고딕"/>
               </a:rPr>
               <a:t>효과가 큰 곳부터 살펴보면, 같은 예산으로도 더 많은 분께 닿을 수 있습니다</a:t>
             </a:r>
@@ -12632,7 +13120,7 @@
             <a:avLst/>
           </a:prstGeom>
           <a:solidFill>
-            <a:srgbClr val="D64545"/>
+            <a:srgbClr val="2A78D6"/>
           </a:solidFill>
           <a:ln>
             <a:noFill/>
@@ -12689,9 +13177,11 @@
             <a:r>
               <a:rPr sz="1250" b="1">
                 <a:solidFill>
-                  <a:srgbClr val="151C26"/>
-                </a:solidFill>
-                <a:latin typeface="맑은 고딕"/>
+                  <a:srgbClr val="12151A"/>
+                </a:solidFill>
+                <a:latin typeface="Segoe UI"/>
+                <a:ea typeface="맑은 고딕"/>
+                <a:cs typeface="맑은 고딕"/>
               </a:rPr>
               <a:t>살펴보는 시점</a:t>
             </a:r>
@@ -12728,9 +13218,11 @@
             <a:r>
               <a:rPr sz="1100" b="0">
                 <a:solidFill>
-                  <a:srgbClr val="5D6874"/>
-                </a:solidFill>
-                <a:latin typeface="맑은 고딕"/>
+                  <a:srgbClr val="52514E"/>
+                </a:solidFill>
+                <a:latin typeface="Segoe UI"/>
+                <a:ea typeface="맑은 고딕"/>
+                <a:cs typeface="맑은 고딕"/>
               </a:rPr>
               <a:t>어려워진 뒤가 아니라, 3년 앞을 미리 짚어볼 수 있습니다</a:t>
             </a:r>
@@ -12752,7 +13244,7 @@
             <a:avLst/>
           </a:prstGeom>
           <a:solidFill>
-            <a:srgbClr val="D64545"/>
+            <a:srgbClr val="2A78D6"/>
           </a:solidFill>
           <a:ln>
             <a:noFill/>
@@ -12809,9 +13301,11 @@
             <a:r>
               <a:rPr sz="1250" b="1">
                 <a:solidFill>
-                  <a:srgbClr val="151C26"/>
-                </a:solidFill>
-                <a:latin typeface="맑은 고딕"/>
+                  <a:srgbClr val="12151A"/>
+                </a:solidFill>
+                <a:latin typeface="Segoe UI"/>
+                <a:ea typeface="맑은 고딕"/>
+                <a:cs typeface="맑은 고딕"/>
               </a:rPr>
               <a:t>설명하실 때</a:t>
             </a:r>
@@ -12848,9 +13342,11 @@
             <a:r>
               <a:rPr sz="1100" b="0">
                 <a:solidFill>
-                  <a:srgbClr val="5D6874"/>
-                </a:solidFill>
-                <a:latin typeface="맑은 고딕"/>
+                  <a:srgbClr val="52514E"/>
+                </a:solidFill>
+                <a:latin typeface="Segoe UI"/>
+                <a:ea typeface="맑은 고딕"/>
+                <a:cs typeface="맑은 고딕"/>
               </a:rPr>
               <a:t>판단 근거를 항목별 수치로 정리해 드려 설명 부담을 조금 덜어드립니다</a:t>
             </a:r>
@@ -12872,7 +13368,7 @@
             <a:avLst/>
           </a:prstGeom>
           <a:solidFill>
-            <a:srgbClr val="D64545"/>
+            <a:srgbClr val="2A78D6"/>
           </a:solidFill>
           <a:ln>
             <a:noFill/>
@@ -12929,9 +13425,11 @@
             <a:r>
               <a:rPr sz="1250" b="1">
                 <a:solidFill>
-                  <a:srgbClr val="151C26"/>
-                </a:solidFill>
-                <a:latin typeface="맑은 고딕"/>
+                  <a:srgbClr val="12151A"/>
+                </a:solidFill>
+                <a:latin typeface="Segoe UI"/>
+                <a:ea typeface="맑은 고딕"/>
+                <a:cs typeface="맑은 고딕"/>
               </a:rPr>
               <a:t>드는 비용</a:t>
             </a:r>
@@ -12968,9 +13466,11 @@
             <a:r>
               <a:rPr sz="1100" b="0">
                 <a:solidFill>
-                  <a:srgbClr val="5D6874"/>
-                </a:solidFill>
-                <a:latin typeface="맑은 고딕"/>
+                  <a:srgbClr val="52514E"/>
+                </a:solidFill>
+                <a:latin typeface="Segoe UI"/>
+                <a:ea typeface="맑은 고딕"/>
+                <a:cs typeface="맑은 고딕"/>
               </a:rPr>
               <a:t>데이터 구매나 시스템 없이, 스크립트 재실행만으로 매년 갱신됩니다</a:t>
             </a:r>
@@ -13007,9 +13507,11 @@
             <a:r>
               <a:rPr sz="1450" b="1">
                 <a:solidFill>
-                  <a:srgbClr val="151C26"/>
-                </a:solidFill>
-                <a:latin typeface="맑은 고딕"/>
+                  <a:srgbClr val="12151A"/>
+                </a:solidFill>
+                <a:latin typeface="Segoe UI"/>
+                <a:ea typeface="맑은 고딕"/>
+                <a:cs typeface="맑은 고딕"/>
               </a:rPr>
               <a:t>실행 로드맵</a:t>
             </a:r>
@@ -13031,7 +13533,7 @@
             <a:avLst/>
           </a:prstGeom>
           <a:solidFill>
-            <a:srgbClr val="3E9B7C"/>
+            <a:srgbClr val="1BAF7A"/>
           </a:solidFill>
           <a:ln>
             <a:noFill/>
@@ -13088,9 +13590,11 @@
             <a:r>
               <a:rPr sz="1250" b="1">
                 <a:solidFill>
-                  <a:srgbClr val="3E9B7C"/>
-                </a:solidFill>
-                <a:latin typeface="맑은 고딕"/>
+                  <a:srgbClr val="1BAF7A"/>
+                </a:solidFill>
+                <a:latin typeface="Segoe UI"/>
+                <a:ea typeface="맑은 고딕"/>
+                <a:cs typeface="맑은 고딕"/>
               </a:rPr>
               <a:t>1단계 · 즉시</a:t>
             </a:r>
@@ -13127,9 +13631,11 @@
             <a:r>
               <a:rPr sz="1100" b="0">
                 <a:solidFill>
-                  <a:srgbClr val="5D6874"/>
-                </a:solidFill>
-                <a:latin typeface="맑은 고딕"/>
+                  <a:srgbClr val="52514E"/>
+                </a:solidFill>
+                <a:latin typeface="Segoe UI"/>
+                <a:ea typeface="맑은 고딕"/>
+                <a:cs typeface="맑은 고딕"/>
               </a:rPr>
               <a:t>본 스크립트로 천안시 25개 생활권 기준선 진단 확정</a:t>
             </a:r>
@@ -13151,7 +13657,7 @@
             <a:avLst/>
           </a:prstGeom>
           <a:solidFill>
-            <a:srgbClr val="2E7DD1"/>
+            <a:srgbClr val="2A78D6"/>
           </a:solidFill>
           <a:ln>
             <a:noFill/>
@@ -13208,9 +13714,11 @@
             <a:r>
               <a:rPr sz="1250" b="1">
                 <a:solidFill>
-                  <a:srgbClr val="2E7DD1"/>
-                </a:solidFill>
-                <a:latin typeface="맑은 고딕"/>
+                  <a:srgbClr val="2A78D6"/>
+                </a:solidFill>
+                <a:latin typeface="Segoe UI"/>
+                <a:ea typeface="맑은 고딕"/>
+                <a:cs typeface="맑은 고딕"/>
               </a:rPr>
               <a:t>2단계 · 3개월</a:t>
             </a:r>
@@ -13247,9 +13755,11 @@
             <a:r>
               <a:rPr sz="1100" b="0">
                 <a:solidFill>
-                  <a:srgbClr val="5D6874"/>
-                </a:solidFill>
-                <a:latin typeface="맑은 고딕"/>
+                  <a:srgbClr val="52514E"/>
+                </a:solidFill>
+                <a:latin typeface="Segoe UI"/>
+                <a:ea typeface="맑은 고딕"/>
+                <a:cs typeface="맑은 고딕"/>
               </a:rPr>
               <a:t>천안시 내부 행정데이터(인허가 원장·건축물대장·복지수급) 연계로 지표 정밀화</a:t>
             </a:r>
@@ -13271,7 +13781,7 @@
             <a:avLst/>
           </a:prstGeom>
           <a:solidFill>
-            <a:srgbClr val="C98A1E"/>
+            <a:srgbClr val="EDA100"/>
           </a:solidFill>
           <a:ln>
             <a:noFill/>
@@ -13328,9 +13838,11 @@
             <a:r>
               <a:rPr sz="1250" b="1">
                 <a:solidFill>
-                  <a:srgbClr val="C98A1E"/>
-                </a:solidFill>
-                <a:latin typeface="맑은 고딕"/>
+                  <a:srgbClr val="EDA100"/>
+                </a:solidFill>
+                <a:latin typeface="Segoe UI"/>
+                <a:ea typeface="맑은 고딕"/>
+                <a:cs typeface="맑은 고딕"/>
               </a:rPr>
               <a:t>3단계 · 6개월</a:t>
             </a:r>
@@ -13367,9 +13879,11 @@
             <a:r>
               <a:rPr sz="1100" b="0">
                 <a:solidFill>
-                  <a:srgbClr val="5D6874"/>
-                </a:solidFill>
-                <a:latin typeface="맑은 고딕"/>
+                  <a:srgbClr val="52514E"/>
+                </a:solidFill>
+                <a:latin typeface="Segoe UI"/>
+                <a:ea typeface="맑은 고딕"/>
+                <a:cs typeface="맑은 고딕"/>
               </a:rPr>
               <a:t>500m 격자 단위로 공간해상도 상향 — 표본 확대로 예측모델 성능 개선</a:t>
             </a:r>
@@ -13391,7 +13905,7 @@
             <a:avLst/>
           </a:prstGeom>
           <a:solidFill>
-            <a:srgbClr val="D64545"/>
+            <a:srgbClr val="2A78D6"/>
           </a:solidFill>
           <a:ln>
             <a:noFill/>
@@ -13448,9 +13962,11 @@
             <a:r>
               <a:rPr sz="1250" b="1">
                 <a:solidFill>
-                  <a:srgbClr val="D64545"/>
-                </a:solidFill>
-                <a:latin typeface="맑은 고딕"/>
+                  <a:srgbClr val="2A78D6"/>
+                </a:solidFill>
+                <a:latin typeface="Segoe UI"/>
+                <a:ea typeface="맑은 고딕"/>
+                <a:cs typeface="맑은 고딕"/>
               </a:rPr>
               <a:t>4단계 · 1년</a:t>
             </a:r>
@@ -13487,9 +14003,11 @@
             <a:r>
               <a:rPr sz="1100" b="0">
                 <a:solidFill>
-                  <a:srgbClr val="5D6874"/>
-                </a:solidFill>
-                <a:latin typeface="맑은 고딕"/>
+                  <a:srgbClr val="52514E"/>
+                </a:solidFill>
+                <a:latin typeface="Segoe UI"/>
+                <a:ea typeface="맑은 고딕"/>
+                <a:cs typeface="맑은 고딕"/>
               </a:rPr>
               <a:t>천안시 행정포털 대시보드 내재화, 연 1회 자동 갱신 체계 정착</a:t>
             </a:r>
@@ -13513,7 +14031,7 @@
             </a:avLst>
           </a:prstGeom>
           <a:solidFill>
-            <a:srgbClr val="F5F7FA"/>
+            <a:srgbClr val="F6F7F9"/>
           </a:solidFill>
           <a:ln>
             <a:noFill/>
@@ -13570,9 +14088,11 @@
             <a:r>
               <a:rPr sz="1200" b="0">
                 <a:solidFill>
-                  <a:srgbClr val="151C26"/>
-                </a:solidFill>
-                <a:latin typeface="맑은 고딕"/>
+                  <a:srgbClr val="12151A"/>
+                </a:solidFill>
+                <a:latin typeface="Segoe UI"/>
+                <a:ea typeface="맑은 고딕"/>
+                <a:cs typeface="맑은 고딕"/>
               </a:rPr>
               <a:t>다른 지역에도 — 공간단위 정의(config.py)만 바꾸면 아산·청주 등에도 같은 방식으로 쓸 수 있습니다.</a:t>
             </a:r>
@@ -13589,9 +14109,11 @@
             <a:r>
               <a:rPr sz="1200" b="0">
                 <a:solidFill>
-                  <a:srgbClr val="151C26"/>
-                </a:solidFill>
-                <a:latin typeface="맑은 고딕"/>
+                  <a:srgbClr val="12151A"/>
+                </a:solidFill>
+                <a:latin typeface="Segoe UI"/>
+                <a:ea typeface="맑은 고딕"/>
+                <a:cs typeface="맑은 고딕"/>
               </a:rPr>
               <a:t>원도심 공동화는 천안만의 일이 아니어서, 도움이 된다면 충남 시군이 함께 쓰는 자료가 되어도 좋겠습니다.</a:t>
             </a:r>
@@ -13628,9 +14150,11 @@
             <a:r>
               <a:rPr sz="950" b="0">
                 <a:solidFill>
-                  <a:srgbClr val="5D6874"/>
-                </a:solidFill>
-                <a:latin typeface="맑은 고딕"/>
+                  <a:srgbClr val="52514E"/>
+                </a:solidFill>
+                <a:latin typeface="Segoe UI"/>
+                <a:ea typeface="맑은 고딕"/>
+                <a:cs typeface="맑은 고딕"/>
               </a:rPr>
               <a:t>천안 균형발전 나침반(CBC)</a:t>
             </a:r>
@@ -13667,9 +14191,11 @@
             <a:r>
               <a:rPr sz="950" b="0">
                 <a:solidFill>
-                  <a:srgbClr val="5D6874"/>
-                </a:solidFill>
-                <a:latin typeface="맑은 고딕"/>
+                  <a:srgbClr val="52514E"/>
+                </a:solidFill>
+                <a:latin typeface="Segoe UI"/>
+                <a:ea typeface="맑은 고딕"/>
+                <a:cs typeface="맑은 고딕"/>
               </a:rPr>
               <a:t>18</a:t>
             </a:r>
@@ -13724,9 +14250,11 @@
             <a:r>
               <a:rPr sz="1150" b="1">
                 <a:solidFill>
-                  <a:srgbClr val="D64545"/>
-                </a:solidFill>
-                <a:latin typeface="맑은 고딕"/>
+                  <a:srgbClr val="2A78D6"/>
+                </a:solidFill>
+                <a:latin typeface="Segoe UI"/>
+                <a:ea typeface="맑은 고딕"/>
+                <a:cs typeface="맑은 고딕"/>
               </a:rPr>
               <a:t>EXECUTIVE SUMMARY</a:t>
             </a:r>
@@ -13763,9 +14291,11 @@
             <a:r>
               <a:rPr sz="2700" b="1">
                 <a:solidFill>
-                  <a:srgbClr val="151C26"/>
-                </a:solidFill>
-                <a:latin typeface="맑은 고딕"/>
+                  <a:srgbClr val="12151A"/>
+                </a:solidFill>
+                <a:latin typeface="Segoe UI"/>
+                <a:ea typeface="맑은 고딕"/>
+                <a:cs typeface="맑은 고딕"/>
               </a:rPr>
               <a:t>한 장으로 보는 제안</a:t>
             </a:r>
@@ -13802,9 +14332,11 @@
             <a:r>
               <a:rPr sz="1350" b="0">
                 <a:solidFill>
-                  <a:srgbClr val="5D6874"/>
-                </a:solidFill>
-                <a:latin typeface="맑은 고딕"/>
+                  <a:srgbClr val="52514E"/>
+                </a:solidFill>
+                <a:latin typeface="Segoe UI"/>
+                <a:ea typeface="맑은 고딕"/>
+                <a:cs typeface="맑은 고딕"/>
               </a:rPr>
               <a:t>천안시민의 생활여건 차이를 데이터로 살펴보고, 도움이 조금 더 필요한 곳을 먼저 찾아보고자 준비했습니다.</a:t>
             </a:r>
@@ -13832,7 +14364,7 @@
           </a:solidFill>
           <a:ln w="12700">
             <a:solidFill>
-              <a:srgbClr val="E0E5EB"/>
+              <a:srgbClr val="E4E7EC"/>
             </a:solidFill>
           </a:ln>
           <a:effectLst/>
@@ -13872,7 +14404,7 @@
             <a:avLst/>
           </a:prstGeom>
           <a:solidFill>
-            <a:srgbClr val="D64545"/>
+            <a:srgbClr val="2A78D6"/>
           </a:solidFill>
           <a:ln>
             <a:noFill/>
@@ -13929,9 +14461,11 @@
             <a:r>
               <a:rPr sz="1050" b="1">
                 <a:solidFill>
-                  <a:srgbClr val="5D6874"/>
-                </a:solidFill>
-                <a:latin typeface="맑은 고딕"/>
+                  <a:srgbClr val="52514E"/>
+                </a:solidFill>
+                <a:latin typeface="Segoe UI"/>
+                <a:ea typeface="맑은 고딕"/>
+                <a:cs typeface="맑은 고딕"/>
               </a:rPr>
               <a:t>격차 배율</a:t>
             </a:r>
@@ -13968,9 +14502,11 @@
             <a:r>
               <a:rPr sz="2200" b="1">
                 <a:solidFill>
-                  <a:srgbClr val="151C26"/>
-                </a:solidFill>
-                <a:latin typeface="맑은 고딕"/>
+                  <a:srgbClr val="12151A"/>
+                </a:solidFill>
+                <a:latin typeface="Segoe UI"/>
+                <a:ea typeface="맑은 고딕"/>
+                <a:cs typeface="맑은 고딕"/>
               </a:rPr>
               <a:t>1.74배</a:t>
             </a:r>
@@ -14007,9 +14543,11 @@
             <a:r>
               <a:rPr sz="1000" b="0">
                 <a:solidFill>
-                  <a:srgbClr val="5D6874"/>
-                </a:solidFill>
-                <a:latin typeface="맑은 고딕"/>
+                  <a:srgbClr val="52514E"/>
+                </a:solidFill>
+                <a:latin typeface="Segoe UI"/>
+                <a:ea typeface="맑은 고딕"/>
+                <a:cs typeface="맑은 고딕"/>
               </a:rPr>
               <a:t>신도심 76.4 vs 원도심 44.0</a:t>
             </a:r>
@@ -14037,7 +14575,7 @@
           </a:solidFill>
           <a:ln w="12700">
             <a:solidFill>
-              <a:srgbClr val="E0E5EB"/>
+              <a:srgbClr val="E4E7EC"/>
             </a:solidFill>
           </a:ln>
           <a:effectLst/>
@@ -14077,7 +14615,7 @@
             <a:avLst/>
           </a:prstGeom>
           <a:solidFill>
-            <a:srgbClr val="C98A1E"/>
+            <a:srgbClr val="4A3AA7"/>
           </a:solidFill>
           <a:ln>
             <a:noFill/>
@@ -14134,9 +14672,11 @@
             <a:r>
               <a:rPr sz="1050" b="1">
                 <a:solidFill>
-                  <a:srgbClr val="5D6874"/>
-                </a:solidFill>
-                <a:latin typeface="맑은 고딕"/>
+                  <a:srgbClr val="52514E"/>
+                </a:solidFill>
+                <a:latin typeface="Segoe UI"/>
+                <a:ea typeface="맑은 고딕"/>
+                <a:cs typeface="맑은 고딕"/>
               </a:rPr>
               <a:t>불균등도(지니)</a:t>
             </a:r>
@@ -14173,9 +14713,11 @@
             <a:r>
               <a:rPr sz="2200" b="1">
                 <a:solidFill>
-                  <a:srgbClr val="151C26"/>
-                </a:solidFill>
-                <a:latin typeface="맑은 고딕"/>
+                  <a:srgbClr val="12151A"/>
+                </a:solidFill>
+                <a:latin typeface="Segoe UI"/>
+                <a:ea typeface="맑은 고딕"/>
+                <a:cs typeface="맑은 고딕"/>
               </a:rPr>
               <a:t>0.318</a:t>
             </a:r>
@@ -14212,9 +14754,11 @@
             <a:r>
               <a:rPr sz="1000" b="0">
                 <a:solidFill>
-                  <a:srgbClr val="5D6874"/>
-                </a:solidFill>
-                <a:latin typeface="맑은 고딕"/>
+                  <a:srgbClr val="52514E"/>
+                </a:solidFill>
+                <a:latin typeface="Segoe UI"/>
+                <a:ea typeface="맑은 고딕"/>
+                <a:cs typeface="맑은 고딕"/>
               </a:rPr>
               <a:t>25개 생활권 CBI 기준</a:t>
             </a:r>
@@ -14242,7 +14786,7 @@
           </a:solidFill>
           <a:ln w="12700">
             <a:solidFill>
-              <a:srgbClr val="E0E5EB"/>
+              <a:srgbClr val="E4E7EC"/>
             </a:solidFill>
           </a:ln>
           <a:effectLst/>
@@ -14282,7 +14826,7 @@
             <a:avLst/>
           </a:prstGeom>
           <a:solidFill>
-            <a:srgbClr val="2E7DD1"/>
+            <a:srgbClr val="2A78D6"/>
           </a:solidFill>
           <a:ln>
             <a:noFill/>
@@ -14339,9 +14883,11 @@
             <a:r>
               <a:rPr sz="1050" b="1">
                 <a:solidFill>
-                  <a:srgbClr val="5D6874"/>
-                </a:solidFill>
-                <a:latin typeface="맑은 고딕"/>
+                  <a:srgbClr val="52514E"/>
+                </a:solidFill>
+                <a:latin typeface="Segoe UI"/>
+                <a:ea typeface="맑은 고딕"/>
+                <a:cs typeface="맑은 고딕"/>
               </a:rPr>
               <a:t>조기경보 방향 적중률</a:t>
             </a:r>
@@ -14378,9 +14924,11 @@
             <a:r>
               <a:rPr sz="2200" b="1">
                 <a:solidFill>
-                  <a:srgbClr val="151C26"/>
-                </a:solidFill>
-                <a:latin typeface="맑은 고딕"/>
+                  <a:srgbClr val="12151A"/>
+                </a:solidFill>
+                <a:latin typeface="Segoe UI"/>
+                <a:ea typeface="맑은 고딕"/>
+                <a:cs typeface="맑은 고딕"/>
               </a:rPr>
               <a:t>69%</a:t>
             </a:r>
@@ -14417,9 +14965,11 @@
             <a:r>
               <a:rPr sz="1000" b="0">
                 <a:solidFill>
-                  <a:srgbClr val="5D6874"/>
-                </a:solidFill>
-                <a:latin typeface="맑은 고딕"/>
+                  <a:srgbClr val="52514E"/>
+                </a:solidFill>
+                <a:latin typeface="Segoe UI"/>
+                <a:ea typeface="맑은 고딕"/>
+                <a:cs typeface="맑은 고딕"/>
               </a:rPr>
               <a:t>베이스라인 대비 MAE +5.3%</a:t>
             </a:r>
@@ -14447,7 +14997,7 @@
           </a:solidFill>
           <a:ln w="12700">
             <a:solidFill>
-              <a:srgbClr val="E0E5EB"/>
+              <a:srgbClr val="E4E7EC"/>
             </a:solidFill>
           </a:ln>
           <a:effectLst/>
@@ -14487,7 +15037,7 @@
             <a:avLst/>
           </a:prstGeom>
           <a:solidFill>
-            <a:srgbClr val="3E9B7C"/>
+            <a:srgbClr val="1BAF7A"/>
           </a:solidFill>
           <a:ln>
             <a:noFill/>
@@ -14544,9 +15094,11 @@
             <a:r>
               <a:rPr sz="1050" b="1">
                 <a:solidFill>
-                  <a:srgbClr val="5D6874"/>
-                </a:solidFill>
-                <a:latin typeface="맑은 고딕"/>
+                  <a:srgbClr val="52514E"/>
+                </a:solidFill>
+                <a:latin typeface="Segoe UI"/>
+                <a:ea typeface="맑은 고딕"/>
+                <a:cs typeface="맑은 고딕"/>
               </a:rPr>
               <a:t>투자 수혜</a:t>
             </a:r>
@@ -14583,9 +15135,11 @@
             <a:r>
               <a:rPr sz="2200" b="1">
                 <a:solidFill>
-                  <a:srgbClr val="151C26"/>
-                </a:solidFill>
-                <a:latin typeface="맑은 고딕"/>
+                  <a:srgbClr val="12151A"/>
+                </a:solidFill>
+                <a:latin typeface="Segoe UI"/>
+                <a:ea typeface="맑은 고딕"/>
+                <a:cs typeface="맑은 고딕"/>
               </a:rPr>
               <a:t>32,822명</a:t>
             </a:r>
@@ -14622,9 +15176,11 @@
             <a:r>
               <a:rPr sz="1000" b="0">
                 <a:solidFill>
-                  <a:srgbClr val="5D6874"/>
-                </a:solidFill>
-                <a:latin typeface="맑은 고딕"/>
+                  <a:srgbClr val="52514E"/>
+                </a:solidFill>
+                <a:latin typeface="Segoe UI"/>
+                <a:ea typeface="맑은 고딕"/>
+                <a:cs typeface="맑은 고딕"/>
               </a:rPr>
               <a:t>12개소 · 커버리지 +7.0%p</a:t>
             </a:r>
@@ -14652,7 +15208,7 @@
           </a:solidFill>
           <a:ln w="12700">
             <a:solidFill>
-              <a:srgbClr val="E0E5EB"/>
+              <a:srgbClr val="E4E7EC"/>
             </a:solidFill>
           </a:ln>
           <a:effectLst/>
@@ -14692,7 +15248,7 @@
             <a:avLst/>
           </a:prstGeom>
           <a:solidFill>
-            <a:srgbClr val="D64545"/>
+            <a:srgbClr val="2A78D6"/>
           </a:solidFill>
           <a:ln>
             <a:noFill/>
@@ -14749,9 +15305,11 @@
             <a:r>
               <a:rPr sz="1100" b="1">
                 <a:solidFill>
-                  <a:srgbClr val="D64545"/>
-                </a:solidFill>
-                <a:latin typeface="맑은 고딕"/>
+                  <a:srgbClr val="2A78D6"/>
+                </a:solidFill>
+                <a:latin typeface="Segoe UI"/>
+                <a:ea typeface="맑은 고딕"/>
+                <a:cs typeface="맑은 고딕"/>
               </a:rPr>
               <a:t>저희가 주목한 것</a:t>
             </a:r>
@@ -14788,9 +15346,11 @@
             <a:r>
               <a:rPr sz="1550" b="1">
                 <a:solidFill>
-                  <a:srgbClr val="151C26"/>
-                </a:solidFill>
-                <a:latin typeface="맑은 고딕"/>
+                  <a:srgbClr val="12151A"/>
+                </a:solidFill>
+                <a:latin typeface="Segoe UI"/>
+                <a:ea typeface="맑은 고딕"/>
+                <a:cs typeface="맑은 고딕"/>
               </a:rPr>
               <a:t>한 도시 안에 생긴 생활여건의 차이</a:t>
             </a:r>
@@ -14827,9 +15387,11 @@
             <a:r>
               <a:rPr sz="1150" b="0">
                 <a:solidFill>
-                  <a:srgbClr val="5D6874"/>
-                </a:solidFill>
-                <a:latin typeface="맑은 고딕"/>
+                  <a:srgbClr val="52514E"/>
+                </a:solidFill>
+                <a:latin typeface="Segoe UI"/>
+                <a:ea typeface="맑은 고딕"/>
+                <a:cs typeface="맑은 고딕"/>
               </a:rPr>
               <a:t>서북부 신도심이 커지는 동안 동남부 원도심과 농촌면은</a:t>
             </a:r>
@@ -14846,9 +15408,11 @@
             <a:r>
               <a:rPr sz="1150" b="0">
                 <a:solidFill>
-                  <a:srgbClr val="5D6874"/>
-                </a:solidFill>
-                <a:latin typeface="맑은 고딕"/>
+                  <a:srgbClr val="52514E"/>
+                </a:solidFill>
+                <a:latin typeface="Segoe UI"/>
+                <a:ea typeface="맑은 고딕"/>
+                <a:cs typeface="맑은 고딕"/>
               </a:rPr>
               <a:t>반대 방향으로 움직였습니다. 같은 천안시민인데 사시는 곳에</a:t>
             </a:r>
@@ -14865,9 +15429,11 @@
             <a:r>
               <a:rPr sz="1150" b="0">
                 <a:solidFill>
-                  <a:srgbClr val="5D6874"/>
-                </a:solidFill>
-                <a:latin typeface="맑은 고딕"/>
+                  <a:srgbClr val="52514E"/>
+                </a:solidFill>
+                <a:latin typeface="Segoe UI"/>
+                <a:ea typeface="맑은 고딕"/>
+                <a:cs typeface="맑은 고딕"/>
               </a:rPr>
               <a:t>따라 일상의 여건이 달라지고 있었습니다.</a:t>
             </a:r>
@@ -14895,7 +15461,7 @@
           </a:solidFill>
           <a:ln w="12700">
             <a:solidFill>
-              <a:srgbClr val="E0E5EB"/>
+              <a:srgbClr val="E4E7EC"/>
             </a:solidFill>
           </a:ln>
           <a:effectLst/>
@@ -14935,7 +15501,7 @@
             <a:avLst/>
           </a:prstGeom>
           <a:solidFill>
-            <a:srgbClr val="2E7DD1"/>
+            <a:srgbClr val="2A78D6"/>
           </a:solidFill>
           <a:ln>
             <a:noFill/>
@@ -14992,9 +15558,11 @@
             <a:r>
               <a:rPr sz="1100" b="1">
                 <a:solidFill>
-                  <a:srgbClr val="2E7DD1"/>
-                </a:solidFill>
-                <a:latin typeface="맑은 고딕"/>
+                  <a:srgbClr val="2A78D6"/>
+                </a:solidFill>
+                <a:latin typeface="Segoe UI"/>
+                <a:ea typeface="맑은 고딕"/>
+                <a:cs typeface="맑은 고딕"/>
               </a:rPr>
               <a:t>저희가 준비한 것</a:t>
             </a:r>
@@ -15031,9 +15599,11 @@
             <a:r>
               <a:rPr sz="1550" b="1">
                 <a:solidFill>
-                  <a:srgbClr val="151C26"/>
-                </a:solidFill>
-                <a:latin typeface="맑은 고딕"/>
+                  <a:srgbClr val="12151A"/>
+                </a:solidFill>
+                <a:latin typeface="Segoe UI"/>
+                <a:ea typeface="맑은 고딕"/>
+                <a:cs typeface="맑은 고딕"/>
               </a:rPr>
               <a:t>살펴보기 → 미리 알기 → 순서 정하기</a:t>
             </a:r>
@@ -15070,9 +15640,11 @@
             <a:r>
               <a:rPr sz="1150" b="0">
                 <a:solidFill>
-                  <a:srgbClr val="5D6874"/>
-                </a:solidFill>
-                <a:latin typeface="맑은 고딕"/>
+                  <a:srgbClr val="52514E"/>
+                </a:solidFill>
+                <a:latin typeface="Segoe UI"/>
+                <a:ea typeface="맑은 고딕"/>
+                <a:cs typeface="맑은 고딕"/>
               </a:rPr>
               <a:t>공공데이터 12개 지표로 생활권별 여건을 수치화하고,</a:t>
             </a:r>
@@ -15089,9 +15661,11 @@
             <a:r>
               <a:rPr sz="1150" b="0">
                 <a:solidFill>
-                  <a:srgbClr val="5D6874"/>
-                </a:solidFill>
-                <a:latin typeface="맑은 고딕"/>
+                  <a:srgbClr val="52514E"/>
+                </a:solidFill>
+                <a:latin typeface="Segoe UI"/>
+                <a:ea typeface="맑은 고딕"/>
+                <a:cs typeface="맑은 고딕"/>
               </a:rPr>
               <a:t>어느 동네가 어려워질지 미리 살펴본 뒤,</a:t>
             </a:r>
@@ -15108,9 +15682,11 @@
             <a:r>
               <a:rPr sz="1150" b="0">
                 <a:solidFill>
-                  <a:srgbClr val="5D6874"/>
-                </a:solidFill>
-                <a:latin typeface="맑은 고딕"/>
+                  <a:srgbClr val="52514E"/>
+                </a:solidFill>
+                <a:latin typeface="Segoe UI"/>
+                <a:ea typeface="맑은 고딕"/>
+                <a:cs typeface="맑은 고딕"/>
               </a:rPr>
               <a:t>생활SOC를 어디부터 놓으면 좋을지 순서를 제안드립니다.</a:t>
             </a:r>
@@ -15138,7 +15714,7 @@
           </a:solidFill>
           <a:ln w="12700">
             <a:solidFill>
-              <a:srgbClr val="E0E5EB"/>
+              <a:srgbClr val="E4E7EC"/>
             </a:solidFill>
           </a:ln>
           <a:effectLst/>
@@ -15178,7 +15754,7 @@
             <a:avLst/>
           </a:prstGeom>
           <a:solidFill>
-            <a:srgbClr val="3E9B7C"/>
+            <a:srgbClr val="1BAF7A"/>
           </a:solidFill>
           <a:ln>
             <a:noFill/>
@@ -15235,9 +15811,11 @@
             <a:r>
               <a:rPr sz="1100" b="1">
                 <a:solidFill>
-                  <a:srgbClr val="3E9B7C"/>
-                </a:solidFill>
-                <a:latin typeface="맑은 고딕"/>
+                  <a:srgbClr val="1BAF7A"/>
+                </a:solidFill>
+                <a:latin typeface="Segoe UI"/>
+                <a:ea typeface="맑은 고딕"/>
+                <a:cs typeface="맑은 고딕"/>
               </a:rPr>
               <a:t>이렇게 쓰이면 좋겠습니다</a:t>
             </a:r>
@@ -15274,9 +15852,11 @@
             <a:r>
               <a:rPr sz="1550" b="1">
                 <a:solidFill>
-                  <a:srgbClr val="151C26"/>
-                </a:solidFill>
-                <a:latin typeface="맑은 고딕"/>
+                  <a:srgbClr val="12151A"/>
+                </a:solidFill>
+                <a:latin typeface="Segoe UI"/>
+                <a:ea typeface="맑은 고딕"/>
+                <a:cs typeface="맑은 고딕"/>
               </a:rPr>
               <a:t>담당자분께 드리는 근거 자료</a:t>
             </a:r>
@@ -15313,9 +15893,11 @@
             <a:r>
               <a:rPr sz="1150" b="0">
                 <a:solidFill>
-                  <a:srgbClr val="5D6874"/>
-                </a:solidFill>
-                <a:latin typeface="맑은 고딕"/>
+                  <a:srgbClr val="52514E"/>
+                </a:solidFill>
+                <a:latin typeface="Segoe UI"/>
+                <a:ea typeface="맑은 고딕"/>
+                <a:cs typeface="맑은 고딕"/>
               </a:rPr>
               <a:t>생활권별 지수와 유형, 3년 뒤 전망과 그 이유, 12개소 우선순위표입니다.</a:t>
             </a:r>
@@ -15332,9 +15914,11 @@
             <a:r>
               <a:rPr sz="1150" b="0">
                 <a:solidFill>
-                  <a:srgbClr val="5D6874"/>
-                </a:solidFill>
-                <a:latin typeface="맑은 고딕"/>
+                  <a:srgbClr val="52514E"/>
+                </a:solidFill>
+                <a:latin typeface="Segoe UI"/>
+                <a:ea typeface="맑은 고딕"/>
+                <a:cs typeface="맑은 고딕"/>
               </a:rPr>
               <a:t>스크립트 한 줄이면 매년 새 데이터로 다시 만드실 수 있습니다.</a:t>
             </a:r>
@@ -15371,9 +15955,11 @@
             <a:r>
               <a:rPr sz="950" b="0">
                 <a:solidFill>
-                  <a:srgbClr val="5D6874"/>
-                </a:solidFill>
-                <a:latin typeface="맑은 고딕"/>
+                  <a:srgbClr val="52514E"/>
+                </a:solidFill>
+                <a:latin typeface="Segoe UI"/>
+                <a:ea typeface="맑은 고딕"/>
+                <a:cs typeface="맑은 고딕"/>
               </a:rPr>
               <a:t>천안 균형발전 나침반(CBC)</a:t>
             </a:r>
@@ -15410,9 +15996,11 @@
             <a:r>
               <a:rPr sz="950" b="0">
                 <a:solidFill>
-                  <a:srgbClr val="5D6874"/>
-                </a:solidFill>
-                <a:latin typeface="맑은 고딕"/>
+                  <a:srgbClr val="52514E"/>
+                </a:solidFill>
+                <a:latin typeface="Segoe UI"/>
+                <a:ea typeface="맑은 고딕"/>
+                <a:cs typeface="맑은 고딕"/>
               </a:rPr>
               <a:t>1</a:t>
             </a:r>
@@ -15467,9 +16055,11 @@
             <a:r>
               <a:rPr sz="1150" b="1">
                 <a:solidFill>
-                  <a:srgbClr val="D64545"/>
-                </a:solidFill>
-                <a:latin typeface="맑은 고딕"/>
+                  <a:srgbClr val="2A78D6"/>
+                </a:solidFill>
+                <a:latin typeface="Segoe UI"/>
+                <a:ea typeface="맑은 고딕"/>
+                <a:cs typeface="맑은 고딕"/>
               </a:rPr>
               <a:t>LIMITATION</a:t>
             </a:r>
@@ -15506,9 +16096,11 @@
             <a:r>
               <a:rPr sz="2700" b="1">
                 <a:solidFill>
-                  <a:srgbClr val="151C26"/>
-                </a:solidFill>
-                <a:latin typeface="맑은 고딕"/>
+                  <a:srgbClr val="12151A"/>
+                </a:solidFill>
+                <a:latin typeface="Segoe UI"/>
+                <a:ea typeface="맑은 고딕"/>
+                <a:cs typeface="맑은 고딕"/>
               </a:rPr>
               <a:t>저희가 아직 못 한 부분을 먼저 말씀드립니다</a:t>
             </a:r>
@@ -15545,9 +16137,11 @@
             <a:r>
               <a:rPr sz="1350" b="0">
                 <a:solidFill>
-                  <a:srgbClr val="5D6874"/>
-                </a:solidFill>
-                <a:latin typeface="맑은 고딕"/>
+                  <a:srgbClr val="52514E"/>
+                </a:solidFill>
+                <a:latin typeface="Segoe UI"/>
+                <a:ea typeface="맑은 고딕"/>
+                <a:cs typeface="맑은 고딕"/>
               </a:rPr>
               <a:t>행정에 쓰이는 자료인 만큼, 어디까지 믿고 쓰실 수 있는지 분명히 알려드리는 것이 도리라고 생각했습니다.</a:t>
             </a:r>
@@ -15575,7 +16169,7 @@
           </a:solidFill>
           <a:ln w="12700">
             <a:solidFill>
-              <a:srgbClr val="E0E5EB"/>
+              <a:srgbClr val="E4E7EC"/>
             </a:solidFill>
           </a:ln>
           <a:effectLst/>
@@ -15615,7 +16209,7 @@
             <a:avLst/>
           </a:prstGeom>
           <a:solidFill>
-            <a:srgbClr val="C98A1E"/>
+            <a:srgbClr val="EDA100"/>
           </a:solidFill>
           <a:ln>
             <a:noFill/>
@@ -15672,9 +16266,11 @@
             <a:r>
               <a:rPr sz="1250" b="1">
                 <a:solidFill>
-                  <a:srgbClr val="C98A1E"/>
-                </a:solidFill>
-                <a:latin typeface="맑은 고딕"/>
+                  <a:srgbClr val="EDA100"/>
+                </a:solidFill>
+                <a:latin typeface="Segoe UI"/>
+                <a:ea typeface="맑은 고딕"/>
+                <a:cs typeface="맑은 고딕"/>
               </a:rPr>
               <a:t>예측 성능</a:t>
             </a:r>
@@ -15711,9 +16307,11 @@
             <a:r>
               <a:rPr sz="1200" b="1">
                 <a:solidFill>
-                  <a:srgbClr val="151C26"/>
-                </a:solidFill>
-                <a:latin typeface="맑은 고딕"/>
+                  <a:srgbClr val="12151A"/>
+                </a:solidFill>
+                <a:latin typeface="Segoe UI"/>
+                <a:ea typeface="맑은 고딕"/>
+                <a:cs typeface="맑은 고딕"/>
               </a:rPr>
               <a:t>3년 뒤 악화·개선 '방향'은 어느 정도 맞히지만, 변화의 '크기'까지는 아직 부족합니다.</a:t>
             </a:r>
@@ -15750,9 +16348,11 @@
             <a:r>
               <a:rPr sz="1080" b="0">
                 <a:solidFill>
-                  <a:srgbClr val="5D6874"/>
-                </a:solidFill>
-                <a:latin typeface="맑은 고딕"/>
+                  <a:srgbClr val="52514E"/>
+                </a:solidFill>
+                <a:latin typeface="Segoe UI"/>
+                <a:ea typeface="맑은 고딕"/>
+                <a:cs typeface="맑은 고딕"/>
               </a:rPr>
               <a:t>→ 위험도 수준은 자기상관이 강해 '그대로 간다'는 예측이 이미 강력한 기준선입니다. 현재는 인구 축만 실데이터라, 상권 개·폐업 시계열이 더해지면 나아질 것으로 봅니다.</a:t>
             </a:r>
@@ -15780,7 +16380,7 @@
           </a:solidFill>
           <a:ln w="12700">
             <a:solidFill>
-              <a:srgbClr val="E0E5EB"/>
+              <a:srgbClr val="E4E7EC"/>
             </a:solidFill>
           </a:ln>
           <a:effectLst/>
@@ -15820,7 +16420,7 @@
             <a:avLst/>
           </a:prstGeom>
           <a:solidFill>
-            <a:srgbClr val="C98A1E"/>
+            <a:srgbClr val="EDA100"/>
           </a:solidFill>
           <a:ln>
             <a:noFill/>
@@ -15877,9 +16477,11 @@
             <a:r>
               <a:rPr sz="1250" b="1">
                 <a:solidFill>
-                  <a:srgbClr val="C98A1E"/>
-                </a:solidFill>
-                <a:latin typeface="맑은 고딕"/>
+                  <a:srgbClr val="EDA100"/>
+                </a:solidFill>
+                <a:latin typeface="Segoe UI"/>
+                <a:ea typeface="맑은 고딕"/>
+                <a:cs typeface="맑은 고딕"/>
               </a:rPr>
               <a:t>표본 크기</a:t>
             </a:r>
@@ -15916,9 +16518,11 @@
             <a:r>
               <a:rPr sz="1200" b="1">
                 <a:solidFill>
-                  <a:srgbClr val="151C26"/>
-                </a:solidFill>
-                <a:latin typeface="맑은 고딕"/>
+                  <a:srgbClr val="12151A"/>
+                </a:solidFill>
+                <a:latin typeface="Segoe UI"/>
+                <a:ea typeface="맑은 고딕"/>
+                <a:cs typeface="맑은 고딕"/>
               </a:rPr>
               <a:t>분석 단위가 25개 생활권이라 머신러닝 표본으로는 작습니다.</a:t>
             </a:r>
@@ -15955,9 +16559,11 @@
             <a:r>
               <a:rPr sz="1080" b="0">
                 <a:solidFill>
-                  <a:srgbClr val="5D6874"/>
-                </a:solidFill>
-                <a:latin typeface="맑은 고딕"/>
+                  <a:srgbClr val="52514E"/>
+                </a:solidFill>
+                <a:latin typeface="Segoe UI"/>
+                <a:ea typeface="맑은 고딕"/>
+                <a:cs typeface="맑은 고딕"/>
               </a:rPr>
               <a:t>→ 500m 격자 단위로 내리면 표본이 수천 개로 늘어납니다. 지금은 규제를 강하게 걸고 Leave-One-Zone-Out CV와 베이스라인 비교로 과적합 여부를 확인하고 있습니다.</a:t>
             </a:r>
@@ -15985,7 +16591,7 @@
           </a:solidFill>
           <a:ln w="12700">
             <a:solidFill>
-              <a:srgbClr val="E0E5EB"/>
+              <a:srgbClr val="E4E7EC"/>
             </a:solidFill>
           </a:ln>
           <a:effectLst/>
@@ -16025,7 +16631,7 @@
             <a:avLst/>
           </a:prstGeom>
           <a:solidFill>
-            <a:srgbClr val="C98A1E"/>
+            <a:srgbClr val="EDA100"/>
           </a:solidFill>
           <a:ln>
             <a:noFill/>
@@ -16082,9 +16688,11 @@
             <a:r>
               <a:rPr sz="1250" b="1">
                 <a:solidFill>
-                  <a:srgbClr val="C98A1E"/>
-                </a:solidFill>
-                <a:latin typeface="맑은 고딕"/>
+                  <a:srgbClr val="EDA100"/>
+                </a:solidFill>
+                <a:latin typeface="Segoe UI"/>
+                <a:ea typeface="맑은 고딕"/>
+                <a:cs typeface="맑은 고딕"/>
               </a:rPr>
               <a:t>공간 해상도</a:t>
             </a:r>
@@ -16121,9 +16729,11 @@
             <a:r>
               <a:rPr sz="1200" b="1">
                 <a:solidFill>
-                  <a:srgbClr val="151C26"/>
-                </a:solidFill>
-                <a:latin typeface="맑은 고딕"/>
+                  <a:srgbClr val="12151A"/>
+                </a:solidFill>
+                <a:latin typeface="Segoe UI"/>
+                <a:ea typeface="맑은 고딕"/>
+                <a:cs typeface="맑은 고딕"/>
               </a:rPr>
               <a:t>생활권 안쪽의 차이(같은 동 안의 편차)는 잡히지 않습니다.</a:t>
             </a:r>
@@ -16160,9 +16770,11 @@
             <a:r>
               <a:rPr sz="1080" b="0">
                 <a:solidFill>
-                  <a:srgbClr val="5D6874"/>
-                </a:solidFill>
-                <a:latin typeface="맑은 고딕"/>
+                  <a:srgbClr val="52514E"/>
+                </a:solidFill>
+                <a:latin typeface="Segoe UI"/>
+                <a:ea typeface="맑은 고딕"/>
+                <a:cs typeface="맑은 고딕"/>
               </a:rPr>
               <a:t>→ 집계구·격자 데이터로 바꾸면 해결됩니다. 공간단위 정의만 교체하면 되도록 만들어 두었습니다.</a:t>
             </a:r>
@@ -16190,7 +16802,7 @@
           </a:solidFill>
           <a:ln w="12700">
             <a:solidFill>
-              <a:srgbClr val="E0E5EB"/>
+              <a:srgbClr val="E4E7EC"/>
             </a:solidFill>
           </a:ln>
           <a:effectLst/>
@@ -16230,7 +16842,7 @@
             <a:avLst/>
           </a:prstGeom>
           <a:solidFill>
-            <a:srgbClr val="C98A1E"/>
+            <a:srgbClr val="EDA100"/>
           </a:solidFill>
           <a:ln>
             <a:noFill/>
@@ -16287,9 +16899,11 @@
             <a:r>
               <a:rPr sz="1250" b="1">
                 <a:solidFill>
-                  <a:srgbClr val="C98A1E"/>
-                </a:solidFill>
-                <a:latin typeface="맑은 고딕"/>
+                  <a:srgbClr val="EDA100"/>
+                </a:solidFill>
+                <a:latin typeface="Segoe UI"/>
+                <a:ea typeface="맑은 고딕"/>
+                <a:cs typeface="맑은 고딕"/>
               </a:rPr>
               <a:t>인과 아닌 상관</a:t>
             </a:r>
@@ -16326,9 +16940,11 @@
             <a:r>
               <a:rPr sz="1200" b="1">
                 <a:solidFill>
-                  <a:srgbClr val="151C26"/>
-                </a:solidFill>
-                <a:latin typeface="맑은 고딕"/>
+                  <a:srgbClr val="12151A"/>
+                </a:solidFill>
+                <a:latin typeface="Segoe UI"/>
+                <a:ea typeface="맑은 고딕"/>
+                <a:cs typeface="맑은 고딕"/>
               </a:rPr>
               <a:t>이 모델은 변화를 미리 살펴볼 뿐, 사업의 효과를 증명하지는 못합니다.</a:t>
             </a:r>
@@ -16365,9 +16981,11 @@
             <a:r>
               <a:rPr sz="1080" b="0">
                 <a:solidFill>
-                  <a:srgbClr val="5D6874"/>
-                </a:solidFill>
-                <a:latin typeface="맑은 고딕"/>
+                  <a:srgbClr val="52514E"/>
+                </a:solidFill>
+                <a:latin typeface="Segoe UI"/>
+                <a:ea typeface="맑은 고딕"/>
+                <a:cs typeface="맑은 고딕"/>
               </a:rPr>
               <a:t>→ 시행 전후 이중차분(DID) 설계를 덧붙이면 효과 검증까지 넓힐 수 있습니다.</a:t>
             </a:r>
@@ -16404,9 +17022,11 @@
             <a:r>
               <a:rPr sz="950" b="0">
                 <a:solidFill>
-                  <a:srgbClr val="5D6874"/>
-                </a:solidFill>
-                <a:latin typeface="맑은 고딕"/>
+                  <a:srgbClr val="52514E"/>
+                </a:solidFill>
+                <a:latin typeface="Segoe UI"/>
+                <a:ea typeface="맑은 고딕"/>
+                <a:cs typeface="맑은 고딕"/>
               </a:rPr>
               <a:t>천안 균형발전 나침반(CBC)</a:t>
             </a:r>
@@ -16443,9 +17063,11 @@
             <a:r>
               <a:rPr sz="950" b="0">
                 <a:solidFill>
-                  <a:srgbClr val="5D6874"/>
-                </a:solidFill>
-                <a:latin typeface="맑은 고딕"/>
+                  <a:srgbClr val="52514E"/>
+                </a:solidFill>
+                <a:latin typeface="Segoe UI"/>
+                <a:ea typeface="맑은 고딕"/>
+                <a:cs typeface="맑은 고딕"/>
               </a:rPr>
               <a:t>19</a:t>
             </a:r>
@@ -16500,9 +17122,11 @@
             <a:r>
               <a:rPr sz="1150" b="1">
                 <a:solidFill>
-                  <a:srgbClr val="D64545"/>
-                </a:solidFill>
-                <a:latin typeface="맑은 고딕"/>
+                  <a:srgbClr val="2A78D6"/>
+                </a:solidFill>
+                <a:latin typeface="Segoe UI"/>
+                <a:ea typeface="맑은 고딕"/>
+                <a:cs typeface="맑은 고딕"/>
               </a:rPr>
               <a:t>INTEGRITY</a:t>
             </a:r>
@@ -16539,9 +17163,11 @@
             <a:r>
               <a:rPr sz="2700" b="1">
                 <a:solidFill>
-                  <a:srgbClr val="151C26"/>
-                </a:solidFill>
-                <a:latin typeface="맑은 고딕"/>
+                  <a:srgbClr val="12151A"/>
+                </a:solidFill>
+                <a:latin typeface="Segoe UI"/>
+                <a:ea typeface="맑은 고딕"/>
+                <a:cs typeface="맑은 고딕"/>
               </a:rPr>
               <a:t>재현성과 데이터 윤리</a:t>
             </a:r>
@@ -16569,7 +17195,7 @@
           </a:solidFill>
           <a:ln w="12700">
             <a:solidFill>
-              <a:srgbClr val="E0E5EB"/>
+              <a:srgbClr val="E4E7EC"/>
             </a:solidFill>
           </a:ln>
           <a:effectLst/>
@@ -16609,7 +17235,7 @@
             <a:avLst/>
           </a:prstGeom>
           <a:solidFill>
-            <a:srgbClr val="3E9B7C"/>
+            <a:srgbClr val="1BAF7A"/>
           </a:solidFill>
           <a:ln>
             <a:noFill/>
@@ -16666,9 +17292,11 @@
             <a:r>
               <a:rPr sz="1450" b="1">
                 <a:solidFill>
-                  <a:srgbClr val="3E9B7C"/>
-                </a:solidFill>
-                <a:latin typeface="맑은 고딕"/>
+                  <a:srgbClr val="1BAF7A"/>
+                </a:solidFill>
+                <a:latin typeface="Segoe UI"/>
+                <a:ea typeface="맑은 고딕"/>
+                <a:cs typeface="맑은 고딕"/>
               </a:rPr>
               <a:t>재현성</a:t>
             </a:r>
@@ -16705,9 +17333,11 @@
             <a:r>
               <a:rPr sz="1300" b="1">
                 <a:solidFill>
-                  <a:srgbClr val="3E9B7C"/>
-                </a:solidFill>
-                <a:latin typeface="맑은 고딕"/>
+                  <a:srgbClr val="1BAF7A"/>
+                </a:solidFill>
+                <a:latin typeface="Segoe UI"/>
+                <a:ea typeface="맑은 고딕"/>
+                <a:cs typeface="맑은 고딕"/>
               </a:rPr>
               <a:t>·</a:t>
             </a:r>
@@ -16744,9 +17374,11 @@
             <a:r>
               <a:rPr sz="1100" b="0">
                 <a:solidFill>
-                  <a:srgbClr val="151C26"/>
-                </a:solidFill>
-                <a:latin typeface="맑은 고딕"/>
+                  <a:srgbClr val="12151A"/>
+                </a:solidFill>
+                <a:latin typeface="Segoe UI"/>
+                <a:ea typeface="맑은 고딕"/>
+                <a:cs typeface="맑은 고딕"/>
               </a:rPr>
               <a:t>전 과정이 공개 스크립트로 실행 — `python3 src/run_all.py` 한 줄</a:t>
             </a:r>
@@ -16783,9 +17415,11 @@
             <a:r>
               <a:rPr sz="1300" b="1">
                 <a:solidFill>
-                  <a:srgbClr val="3E9B7C"/>
-                </a:solidFill>
-                <a:latin typeface="맑은 고딕"/>
+                  <a:srgbClr val="1BAF7A"/>
+                </a:solidFill>
+                <a:latin typeface="Segoe UI"/>
+                <a:ea typeface="맑은 고딕"/>
+                <a:cs typeface="맑은 고딕"/>
               </a:rPr>
               <a:t>·</a:t>
             </a:r>
@@ -16822,9 +17456,11 @@
             <a:r>
               <a:rPr sz="1100" b="0">
                 <a:solidFill>
-                  <a:srgbClr val="151C26"/>
-                </a:solidFill>
-                <a:latin typeface="맑은 고딕"/>
+                  <a:srgbClr val="12151A"/>
+                </a:solidFill>
+                <a:latin typeface="Segoe UI"/>
+                <a:ea typeface="맑은 고딕"/>
+                <a:cs typeface="맑은 고딕"/>
               </a:rPr>
               <a:t>난수 시드 고정(20260831) — 군집·모델 결과가 실행마다 동일</a:t>
             </a:r>
@@ -16861,9 +17497,11 @@
             <a:r>
               <a:rPr sz="1300" b="1">
                 <a:solidFill>
-                  <a:srgbClr val="3E9B7C"/>
-                </a:solidFill>
-                <a:latin typeface="맑은 고딕"/>
+                  <a:srgbClr val="1BAF7A"/>
+                </a:solidFill>
+                <a:latin typeface="Segoe UI"/>
+                <a:ea typeface="맑은 고딕"/>
+                <a:cs typeface="맑은 고딕"/>
               </a:rPr>
               <a:t>·</a:t>
             </a:r>
@@ -16900,9 +17538,11 @@
             <a:r>
               <a:rPr sz="1100" b="0">
                 <a:solidFill>
-                  <a:srgbClr val="151C26"/>
-                </a:solidFill>
-                <a:latin typeface="맑은 고딕"/>
+                  <a:srgbClr val="12151A"/>
+                </a:solidFill>
+                <a:latin typeface="Segoe UI"/>
+                <a:ea typeface="맑은 고딕"/>
+                <a:cs typeface="맑은 고딕"/>
               </a:rPr>
               <a:t>그림 8종·분석표 9종·대시보드가 같은 실행에서 함께 생성됨</a:t>
             </a:r>
@@ -16939,9 +17579,11 @@
             <a:r>
               <a:rPr sz="1300" b="1">
                 <a:solidFill>
-                  <a:srgbClr val="3E9B7C"/>
-                </a:solidFill>
-                <a:latin typeface="맑은 고딕"/>
+                  <a:srgbClr val="1BAF7A"/>
+                </a:solidFill>
+                <a:latin typeface="Segoe UI"/>
+                <a:ea typeface="맑은 고딕"/>
+                <a:cs typeface="맑은 고딕"/>
               </a:rPr>
               <a:t>·</a:t>
             </a:r>
@@ -16978,9 +17620,11 @@
             <a:r>
               <a:rPr sz="1100" b="0">
                 <a:solidFill>
-                  <a:srgbClr val="151C26"/>
-                </a:solidFill>
-                <a:latin typeface="맑은 고딕"/>
+                  <a:srgbClr val="12151A"/>
+                </a:solidFill>
+                <a:latin typeface="Segoe UI"/>
+                <a:ea typeface="맑은 고딕"/>
+                <a:cs typeface="맑은 고딕"/>
               </a:rPr>
               <a:t>지표 정의·가중치·모델 파라미터가 전부 코드에 명시</a:t>
             </a:r>
@@ -17008,7 +17652,7 @@
           </a:solidFill>
           <a:ln w="12700">
             <a:solidFill>
-              <a:srgbClr val="E0E5EB"/>
+              <a:srgbClr val="E4E7EC"/>
             </a:solidFill>
           </a:ln>
           <a:effectLst/>
@@ -17048,7 +17692,7 @@
             <a:avLst/>
           </a:prstGeom>
           <a:solidFill>
-            <a:srgbClr val="2E7DD1"/>
+            <a:srgbClr val="2A78D6"/>
           </a:solidFill>
           <a:ln>
             <a:noFill/>
@@ -17105,9 +17749,11 @@
             <a:r>
               <a:rPr sz="1450" b="1">
                 <a:solidFill>
-                  <a:srgbClr val="2E7DD1"/>
-                </a:solidFill>
-                <a:latin typeface="맑은 고딕"/>
+                  <a:srgbClr val="2A78D6"/>
+                </a:solidFill>
+                <a:latin typeface="Segoe UI"/>
+                <a:ea typeface="맑은 고딕"/>
+                <a:cs typeface="맑은 고딕"/>
               </a:rPr>
               <a:t>데이터 윤리</a:t>
             </a:r>
@@ -17144,9 +17790,11 @@
             <a:r>
               <a:rPr sz="1300" b="1">
                 <a:solidFill>
-                  <a:srgbClr val="2E7DD1"/>
-                </a:solidFill>
-                <a:latin typeface="맑은 고딕"/>
+                  <a:srgbClr val="2A78D6"/>
+                </a:solidFill>
+                <a:latin typeface="Segoe UI"/>
+                <a:ea typeface="맑은 고딕"/>
+                <a:cs typeface="맑은 고딕"/>
               </a:rPr>
               <a:t>·</a:t>
             </a:r>
@@ -17183,9 +17831,11 @@
             <a:r>
               <a:rPr sz="1100" b="0">
                 <a:solidFill>
-                  <a:srgbClr val="151C26"/>
-                </a:solidFill>
-                <a:latin typeface="맑은 고딕"/>
+                  <a:srgbClr val="12151A"/>
+                </a:solidFill>
+                <a:latin typeface="Segoe UI"/>
+                <a:ea typeface="맑은 고딕"/>
+                <a:cs typeface="맑은 고딕"/>
               </a:rPr>
               <a:t>정식 공공데이터 포털에서 내려받은 파일만 사용 — 크롤링 없음</a:t>
             </a:r>
@@ -17222,9 +17872,11 @@
             <a:r>
               <a:rPr sz="1300" b="1">
                 <a:solidFill>
-                  <a:srgbClr val="2E7DD1"/>
-                </a:solidFill>
-                <a:latin typeface="맑은 고딕"/>
+                  <a:srgbClr val="2A78D6"/>
+                </a:solidFill>
+                <a:latin typeface="Segoe UI"/>
+                <a:ea typeface="맑은 고딕"/>
+                <a:cs typeface="맑은 고딕"/>
               </a:rPr>
               <a:t>·</a:t>
             </a:r>
@@ -17261,9 +17913,11 @@
             <a:r>
               <a:rPr sz="1100" b="0">
                 <a:solidFill>
-                  <a:srgbClr val="151C26"/>
-                </a:solidFill>
-                <a:latin typeface="맑은 고딕"/>
+                  <a:srgbClr val="12151A"/>
+                </a:solidFill>
+                <a:latin typeface="Segoe UI"/>
+                <a:ea typeface="맑은 고딕"/>
+                <a:cs typeface="맑은 고딕"/>
               </a:rPr>
               <a:t>상업 목적 민간데이터 무단 사용 없음</a:t>
             </a:r>
@@ -17300,9 +17954,11 @@
             <a:r>
               <a:rPr sz="1300" b="1">
                 <a:solidFill>
-                  <a:srgbClr val="2E7DD1"/>
-                </a:solidFill>
-                <a:latin typeface="맑은 고딕"/>
+                  <a:srgbClr val="2A78D6"/>
+                </a:solidFill>
+                <a:latin typeface="Segoe UI"/>
+                <a:ea typeface="맑은 고딕"/>
+                <a:cs typeface="맑은 고딕"/>
               </a:rPr>
               <a:t>·</a:t>
             </a:r>
@@ -17339,9 +17995,11 @@
             <a:r>
               <a:rPr sz="1100" b="0">
                 <a:solidFill>
-                  <a:srgbClr val="151C26"/>
-                </a:solidFill>
-                <a:latin typeface="맑은 고딕"/>
+                  <a:srgbClr val="12151A"/>
+                </a:solidFill>
+                <a:latin typeface="Segoe UI"/>
+                <a:ea typeface="맑은 고딕"/>
+                <a:cs typeface="맑은 고딕"/>
               </a:rPr>
               <a:t>전 지표가 생활권 단위 집계값 — 개인식별정보 미취급</a:t>
             </a:r>
@@ -17378,9 +18036,11 @@
             <a:r>
               <a:rPr sz="1300" b="1">
                 <a:solidFill>
-                  <a:srgbClr val="2E7DD1"/>
-                </a:solidFill>
-                <a:latin typeface="맑은 고딕"/>
+                  <a:srgbClr val="2A78D6"/>
+                </a:solidFill>
+                <a:latin typeface="Segoe UI"/>
+                <a:ea typeface="맑은 고딕"/>
+                <a:cs typeface="맑은 고딕"/>
               </a:rPr>
               <a:t>·</a:t>
             </a:r>
@@ -17417,9 +18077,11 @@
             <a:r>
               <a:rPr sz="1100" b="0">
                 <a:solidFill>
-                  <a:srgbClr val="151C26"/>
-                </a:solidFill>
-                <a:latin typeface="맑은 고딕"/>
+                  <a:srgbClr val="12151A"/>
+                </a:solidFill>
+                <a:latin typeface="Segoe UI"/>
+                <a:ea typeface="맑은 고딕"/>
+                <a:cs typeface="맑은 고딕"/>
               </a:rPr>
               <a:t>출처·수집시점·컬럼을 `00_데이터_출처.csv` 에 자동 기록</a:t>
             </a:r>
@@ -17443,7 +18105,7 @@
             </a:avLst>
           </a:prstGeom>
           <a:solidFill>
-            <a:srgbClr val="FDF2F2"/>
+            <a:srgbClr val="FDF3F2"/>
           </a:solidFill>
           <a:ln>
             <a:noFill/>
@@ -17500,9 +18162,11 @@
             <a:r>
               <a:rPr sz="1350" b="1">
                 <a:solidFill>
-                  <a:srgbClr val="D64545"/>
-                </a:solidFill>
-                <a:latin typeface="맑은 고딕"/>
+                  <a:srgbClr val="D03B3B"/>
+                </a:solidFill>
+                <a:latin typeface="Segoe UI"/>
+                <a:ea typeface="맑은 고딕"/>
+                <a:cs typeface="맑은 고딕"/>
               </a:rPr>
               <a:t>실데이터 / 예시데이터 구분 장치</a:t>
             </a:r>
@@ -17539,9 +18203,11 @@
             <a:r>
               <a:rPr sz="1150" b="0">
                 <a:solidFill>
-                  <a:srgbClr val="151C26"/>
-                </a:solidFill>
-                <a:latin typeface="맑은 고딕"/>
+                  <a:srgbClr val="12151A"/>
+                </a:solidFill>
+                <a:latin typeface="Segoe UI"/>
+                <a:ea typeface="맑은 고딕"/>
+                <a:cs typeface="맑은 고딕"/>
               </a:rPr>
               <a:t>파이프라인은 각 지표가 실데이터인지 예시(illustrative) 값인지를 매 실행마다 판정해 로그·대시보드·본 기획서에 표기한다.</a:t>
             </a:r>
@@ -17558,9 +18224,11 @@
             <a:r>
               <a:rPr sz="1150" b="0">
                 <a:solidFill>
-                  <a:srgbClr val="151C26"/>
-                </a:solidFill>
-                <a:latin typeface="맑은 고딕"/>
+                  <a:srgbClr val="12151A"/>
+                </a:solidFill>
+                <a:latin typeface="Segoe UI"/>
+                <a:ea typeface="맑은 고딕"/>
+                <a:cs typeface="맑은 고딕"/>
               </a:rPr>
               <a:t>예시 데이터를 실측치로 오인해 제출하는 사고를 막기 위한 장치이며, 실데이터를 넣으면 해당 표기가 자동으로 사라진다.</a:t>
             </a:r>
@@ -17597,9 +18265,11 @@
             <a:r>
               <a:rPr sz="1200" b="1">
                 <a:solidFill>
-                  <a:srgbClr val="D64545"/>
-                </a:solidFill>
-                <a:latin typeface="맑은 고딕"/>
+                  <a:srgbClr val="D03B3B"/>
+                </a:solidFill>
+                <a:latin typeface="Segoe UI"/>
+                <a:ea typeface="맑은 고딕"/>
+                <a:cs typeface="맑은 고딕"/>
               </a:rPr>
               <a:t>현재 상태: 실데이터 지표 1/5  ·  제출 전 실데이터 투입 후 재실행 필요</a:t>
             </a:r>
@@ -17636,9 +18306,11 @@
             <a:r>
               <a:rPr sz="950" b="0">
                 <a:solidFill>
-                  <a:srgbClr val="5D6874"/>
-                </a:solidFill>
-                <a:latin typeface="맑은 고딕"/>
+                  <a:srgbClr val="52514E"/>
+                </a:solidFill>
+                <a:latin typeface="Segoe UI"/>
+                <a:ea typeface="맑은 고딕"/>
+                <a:cs typeface="맑은 고딕"/>
               </a:rPr>
               <a:t>천안 균형발전 나침반(CBC)</a:t>
             </a:r>
@@ -17675,9 +18347,11 @@
             <a:r>
               <a:rPr sz="950" b="0">
                 <a:solidFill>
-                  <a:srgbClr val="5D6874"/>
-                </a:solidFill>
-                <a:latin typeface="맑은 고딕"/>
+                  <a:srgbClr val="52514E"/>
+                </a:solidFill>
+                <a:latin typeface="Segoe UI"/>
+                <a:ea typeface="맑은 고딕"/>
+                <a:cs typeface="맑은 고딕"/>
               </a:rPr>
               <a:t>20</a:t>
             </a:r>
@@ -17732,9 +18406,11 @@
             <a:r>
               <a:rPr sz="1150" b="1">
                 <a:solidFill>
-                  <a:srgbClr val="D64545"/>
-                </a:solidFill>
-                <a:latin typeface="맑은 고딕"/>
+                  <a:srgbClr val="2A78D6"/>
+                </a:solidFill>
+                <a:latin typeface="Segoe UI"/>
+                <a:ea typeface="맑은 고딕"/>
+                <a:cs typeface="맑은 고딕"/>
               </a:rPr>
               <a:t>BACKGROUND</a:t>
             </a:r>
@@ -17771,9 +18447,11 @@
             <a:r>
               <a:rPr sz="2700" b="1">
                 <a:solidFill>
-                  <a:srgbClr val="151C26"/>
-                </a:solidFill>
-                <a:latin typeface="맑은 고딕"/>
+                  <a:srgbClr val="12151A"/>
+                </a:solidFill>
+                <a:latin typeface="Segoe UI"/>
+                <a:ea typeface="맑은 고딕"/>
+                <a:cs typeface="맑은 고딕"/>
               </a:rPr>
               <a:t>한 도시 안에 서로 다른 시간이 흐르고 있습니다</a:t>
             </a:r>
@@ -17810,9 +18488,11 @@
             <a:r>
               <a:rPr sz="1350" b="0">
                 <a:solidFill>
-                  <a:srgbClr val="5D6874"/>
-                </a:solidFill>
-                <a:latin typeface="맑은 고딕"/>
+                  <a:srgbClr val="52514E"/>
+                </a:solidFill>
+                <a:latin typeface="Segoe UI"/>
+                <a:ea typeface="맑은 고딕"/>
+                <a:cs typeface="맑은 고딕"/>
               </a:rPr>
               <a:t>수도권 전철·KTX와 산업단지를 축으로 서북부가 커지는 사이, 동남부 원도심과 농촌면은 반대 방향으로 움직였습니다.</a:t>
             </a:r>
@@ -17840,7 +18520,7 @@
           </a:solidFill>
           <a:ln w="12700">
             <a:solidFill>
-              <a:srgbClr val="E0E5EB"/>
+              <a:srgbClr val="E4E7EC"/>
             </a:solidFill>
           </a:ln>
           <a:effectLst/>
@@ -17895,9 +18575,11 @@
             <a:r>
               <a:rPr sz="1450" b="1">
                 <a:solidFill>
-                  <a:srgbClr val="151C26"/>
-                </a:solidFill>
-                <a:latin typeface="맑은 고딕"/>
+                  <a:srgbClr val="12151A"/>
+                </a:solidFill>
+                <a:latin typeface="Segoe UI"/>
+                <a:ea typeface="맑은 고딕"/>
+                <a:cs typeface="맑은 고딕"/>
               </a:rPr>
               <a:t>공공데이터로 확인한 차이</a:t>
             </a:r>
@@ -17934,9 +18616,11 @@
             <a:r>
               <a:rPr sz="1900" b="1">
                 <a:solidFill>
-                  <a:srgbClr val="D64545"/>
-                </a:solidFill>
-                <a:latin typeface="맑은 고딕"/>
+                  <a:srgbClr val="2A78D6"/>
+                </a:solidFill>
+                <a:latin typeface="Segoe UI"/>
+                <a:ea typeface="맑은 고딕"/>
+                <a:cs typeface="맑은 고딕"/>
               </a:rPr>
               <a:t>1.74배</a:t>
             </a:r>
@@ -17973,9 +18657,11 @@
             <a:r>
               <a:rPr sz="1150" b="0">
                 <a:solidFill>
-                  <a:srgbClr val="5D6874"/>
-                </a:solidFill>
-                <a:latin typeface="맑은 고딕"/>
+                  <a:srgbClr val="52514E"/>
+                </a:solidFill>
+                <a:latin typeface="Segoe UI"/>
+                <a:ea typeface="맑은 고딕"/>
+                <a:cs typeface="맑은 고딕"/>
               </a:rPr>
               <a:t>신도심 평균 CBI 76.4 vs 원도심 평균 44.0</a:t>
             </a:r>
@@ -18012,9 +18698,11 @@
             <a:r>
               <a:rPr sz="1900" b="1">
                 <a:solidFill>
-                  <a:srgbClr val="D64545"/>
-                </a:solidFill>
-                <a:latin typeface="맑은 고딕"/>
+                  <a:srgbClr val="2A78D6"/>
+                </a:solidFill>
+                <a:latin typeface="Segoe UI"/>
+                <a:ea typeface="맑은 고딕"/>
+                <a:cs typeface="맑은 고딕"/>
               </a:rPr>
               <a:t>0.318</a:t>
             </a:r>
@@ -18051,9 +18739,11 @@
             <a:r>
               <a:rPr sz="1150" b="0">
                 <a:solidFill>
-                  <a:srgbClr val="5D6874"/>
-                </a:solidFill>
-                <a:latin typeface="맑은 고딕"/>
+                  <a:srgbClr val="52514E"/>
+                </a:solidFill>
+                <a:latin typeface="Segoe UI"/>
+                <a:ea typeface="맑은 고딕"/>
+                <a:cs typeface="맑은 고딕"/>
               </a:rPr>
               <a:t>25개 생활권 CBI 지니계수 — 변동계수 56.5%</a:t>
             </a:r>
@@ -18090,9 +18780,11 @@
             <a:r>
               <a:rPr sz="1900" b="1">
                 <a:solidFill>
-                  <a:srgbClr val="D64545"/>
-                </a:solidFill>
-                <a:latin typeface="맑은 고딕"/>
+                  <a:srgbClr val="2A78D6"/>
+                </a:solidFill>
+                <a:latin typeface="Segoe UI"/>
+                <a:ea typeface="맑은 고딕"/>
+                <a:cs typeface="맑은 고딕"/>
               </a:rPr>
               <a:t>불당동 ↔ 수신면</a:t>
             </a:r>
@@ -18129,9 +18821,11 @@
             <a:r>
               <a:rPr sz="1150" b="0">
                 <a:solidFill>
-                  <a:srgbClr val="5D6874"/>
-                </a:solidFill>
-                <a:latin typeface="맑은 고딕"/>
+                  <a:srgbClr val="52514E"/>
+                </a:solidFill>
+                <a:latin typeface="Segoe UI"/>
+                <a:ea typeface="맑은 고딕"/>
+                <a:cs typeface="맑은 고딕"/>
               </a:rPr>
               <a:t>최상위 82점 ↔ 최하위 6점, 같은 시(市)</a:t>
             </a:r>
@@ -18168,9 +18862,11 @@
             <a:r>
               <a:rPr sz="1900" b="1">
                 <a:solidFill>
-                  <a:srgbClr val="D64545"/>
-                </a:solidFill>
-                <a:latin typeface="맑은 고딕"/>
+                  <a:srgbClr val="2A78D6"/>
+                </a:solidFill>
+                <a:latin typeface="Segoe UI"/>
+                <a:ea typeface="맑은 고딕"/>
+                <a:cs typeface="맑은 고딕"/>
               </a:rPr>
               <a:t>0개 생활권</a:t>
             </a:r>
@@ -18207,9 +18903,11 @@
             <a:r>
               <a:rPr sz="1150" b="0">
                 <a:solidFill>
-                  <a:srgbClr val="5D6874"/>
-                </a:solidFill>
-                <a:latin typeface="맑은 고딕"/>
+                  <a:srgbClr val="52514E"/>
+                </a:solidFill>
+                <a:latin typeface="Segoe UI"/>
+                <a:ea typeface="맑은 고딕"/>
+                <a:cs typeface="맑은 고딕"/>
               </a:rPr>
               <a:t>여러 지표가 함께 낮은 유형으로 분류되었습니다</a:t>
             </a:r>
@@ -18233,7 +18931,7 @@
             </a:avLst>
           </a:prstGeom>
           <a:solidFill>
-            <a:srgbClr val="F5F7FA"/>
+            <a:srgbClr val="F6F7F9"/>
           </a:solidFill>
           <a:ln>
             <a:noFill/>
@@ -18290,9 +18988,11 @@
             <a:r>
               <a:rPr sz="1450" b="1">
                 <a:solidFill>
-                  <a:srgbClr val="151C26"/>
-                </a:solidFill>
-                <a:latin typeface="맑은 고딕"/>
+                  <a:srgbClr val="12151A"/>
+                </a:solidFill>
+                <a:latin typeface="Segoe UI"/>
+                <a:ea typeface="맑은 고딕"/>
+                <a:cs typeface="맑은 고딕"/>
               </a:rPr>
               <a:t>왜 지금 살펴보면 좋을까요</a:t>
             </a:r>
@@ -18329,9 +19029,11 @@
             <a:r>
               <a:rPr sz="1250" b="1">
                 <a:solidFill>
-                  <a:srgbClr val="D64545"/>
-                </a:solidFill>
-                <a:latin typeface="맑은 고딕"/>
+                  <a:srgbClr val="2A78D6"/>
+                </a:solidFill>
+                <a:latin typeface="Segoe UI"/>
+                <a:ea typeface="맑은 고딕"/>
+                <a:cs typeface="맑은 고딕"/>
               </a:rPr>
               <a:t>▪</a:t>
             </a:r>
@@ -18368,9 +19070,11 @@
             <a:r>
               <a:rPr sz="1250" b="1">
                 <a:solidFill>
-                  <a:srgbClr val="151C26"/>
-                </a:solidFill>
-                <a:latin typeface="맑은 고딕"/>
+                  <a:srgbClr val="12151A"/>
+                </a:solidFill>
+                <a:latin typeface="Segoe UI"/>
+                <a:ea typeface="맑은 고딕"/>
+                <a:cs typeface="맑은 고딕"/>
               </a:rPr>
               <a:t>변화는 서서히, 그러나 되돌리기는 어렵게 옵니다</a:t>
             </a:r>
@@ -18407,9 +19111,11 @@
             <a:r>
               <a:rPr sz="1100" b="0">
                 <a:solidFill>
-                  <a:srgbClr val="5D6874"/>
-                </a:solidFill>
-                <a:latin typeface="맑은 고딕"/>
+                  <a:srgbClr val="52514E"/>
+                </a:solidFill>
+                <a:latin typeface="Segoe UI"/>
+                <a:ea typeface="맑은 고딕"/>
+                <a:cs typeface="맑은 고딕"/>
               </a:rPr>
               <a:t>상권이 비면 오가는 분이 줄고, 그래서 더 비는 흐름이 생깁니다.</a:t>
             </a:r>
@@ -18426,9 +19132,11 @@
             <a:r>
               <a:rPr sz="1100" b="0">
                 <a:solidFill>
-                  <a:srgbClr val="5D6874"/>
-                </a:solidFill>
-                <a:latin typeface="맑은 고딕"/>
+                  <a:srgbClr val="52514E"/>
+                </a:solidFill>
+                <a:latin typeface="Segoe UI"/>
+                <a:ea typeface="맑은 고딕"/>
+                <a:cs typeface="맑은 고딕"/>
               </a:rPr>
               <a:t>많이 진행된 뒤에 쓰는 예산은 같은 금액으로도 효과가 적습니다.</a:t>
             </a:r>
@@ -18465,9 +19173,11 @@
             <a:r>
               <a:rPr sz="1250" b="1">
                 <a:solidFill>
-                  <a:srgbClr val="D64545"/>
-                </a:solidFill>
-                <a:latin typeface="맑은 고딕"/>
+                  <a:srgbClr val="2A78D6"/>
+                </a:solidFill>
+                <a:latin typeface="Segoe UI"/>
+                <a:ea typeface="맑은 고딕"/>
+                <a:cs typeface="맑은 고딕"/>
               </a:rPr>
               <a:t>▪</a:t>
             </a:r>
@@ -18504,9 +19214,11 @@
             <a:r>
               <a:rPr sz="1250" b="1">
                 <a:solidFill>
-                  <a:srgbClr val="151C26"/>
-                </a:solidFill>
-                <a:latin typeface="맑은 고딕"/>
+                  <a:srgbClr val="12151A"/>
+                </a:solidFill>
+                <a:latin typeface="Segoe UI"/>
+                <a:ea typeface="맑은 고딕"/>
+                <a:cs typeface="맑은 고딕"/>
               </a:rPr>
               <a:t>조짐은 눈에 잘 띄지 않습니다</a:t>
             </a:r>
@@ -18543,9 +19255,11 @@
             <a:r>
               <a:rPr sz="1100" b="0">
                 <a:solidFill>
-                  <a:srgbClr val="5D6874"/>
-                </a:solidFill>
-                <a:latin typeface="맑은 고딕"/>
+                  <a:srgbClr val="52514E"/>
+                </a:solidFill>
+                <a:latin typeface="Segoe UI"/>
+                <a:ea typeface="맑은 고딕"/>
+                <a:cs typeface="맑은 고딕"/>
               </a:rPr>
               <a:t>통계가 뚜렷하게 나빠졌을 때는 이미 상당히 진행된 뒤인 경우가 많습니다.</a:t>
             </a:r>
@@ -18562,9 +19276,11 @@
             <a:r>
               <a:rPr sz="1100" b="0">
                 <a:solidFill>
-                  <a:srgbClr val="5D6874"/>
-                </a:solidFill>
-                <a:latin typeface="맑은 고딕"/>
+                  <a:srgbClr val="52514E"/>
+                </a:solidFill>
+                <a:latin typeface="Segoe UI"/>
+                <a:ea typeface="맑은 고딕"/>
+                <a:cs typeface="맑은 고딕"/>
               </a:rPr>
               <a:t>미리 알아차릴 신호가 하나쯤 더 있으면 좋겠다는 생각에서 출발했습니다.</a:t>
             </a:r>
@@ -18601,9 +19317,11 @@
             <a:r>
               <a:rPr sz="1250" b="1">
                 <a:solidFill>
-                  <a:srgbClr val="D64545"/>
-                </a:solidFill>
-                <a:latin typeface="맑은 고딕"/>
+                  <a:srgbClr val="2A78D6"/>
+                </a:solidFill>
+                <a:latin typeface="Segoe UI"/>
+                <a:ea typeface="맑은 고딕"/>
+                <a:cs typeface="맑은 고딕"/>
               </a:rPr>
               <a:t>▪</a:t>
             </a:r>
@@ -18640,9 +19358,11 @@
             <a:r>
               <a:rPr sz="1250" b="1">
                 <a:solidFill>
-                  <a:srgbClr val="151C26"/>
-                </a:solidFill>
-                <a:latin typeface="맑은 고딕"/>
+                  <a:srgbClr val="12151A"/>
+                </a:solidFill>
+                <a:latin typeface="Segoe UI"/>
+                <a:ea typeface="맑은 고딕"/>
+                <a:cs typeface="맑은 고딕"/>
               </a:rPr>
               <a:t>천안시는 이런 관찰에 좋은 조건을 갖췄습니다</a:t>
             </a:r>
@@ -18679,9 +19399,11 @@
             <a:r>
               <a:rPr sz="1100" b="0">
                 <a:solidFill>
-                  <a:srgbClr val="5D6874"/>
-                </a:solidFill>
-                <a:latin typeface="맑은 고딕"/>
+                  <a:srgbClr val="52514E"/>
+                </a:solidFill>
+                <a:latin typeface="Segoe UI"/>
+                <a:ea typeface="맑은 고딕"/>
+                <a:cs typeface="맑은 고딕"/>
               </a:rPr>
               <a:t>신도심·기성시가지·원도심·읍·농촌면이 한 시(市) 안에 모두 있어,</a:t>
             </a:r>
@@ -18698,9 +19420,11 @@
             <a:r>
               <a:rPr sz="1100" b="0">
                 <a:solidFill>
-                  <a:srgbClr val="5D6874"/>
-                </a:solidFill>
-                <a:latin typeface="맑은 고딕"/>
+                  <a:srgbClr val="52514E"/>
+                </a:solidFill>
+                <a:latin typeface="Segoe UI"/>
+                <a:ea typeface="맑은 고딕"/>
+                <a:cs typeface="맑은 고딕"/>
               </a:rPr>
               <a:t>동네 유형별로 무엇이 필요한지 함께 살펴볼 수 있습니다.</a:t>
             </a:r>
@@ -18737,9 +19461,11 @@
             <a:r>
               <a:rPr sz="950" b="0">
                 <a:solidFill>
-                  <a:srgbClr val="5D6874"/>
-                </a:solidFill>
-                <a:latin typeface="맑은 고딕"/>
+                  <a:srgbClr val="52514E"/>
+                </a:solidFill>
+                <a:latin typeface="Segoe UI"/>
+                <a:ea typeface="맑은 고딕"/>
+                <a:cs typeface="맑은 고딕"/>
               </a:rPr>
               <a:t>천안 균형발전 나침반(CBC)</a:t>
             </a:r>
@@ -18776,9 +19502,11 @@
             <a:r>
               <a:rPr sz="950" b="0">
                 <a:solidFill>
-                  <a:srgbClr val="5D6874"/>
-                </a:solidFill>
-                <a:latin typeface="맑은 고딕"/>
+                  <a:srgbClr val="52514E"/>
+                </a:solidFill>
+                <a:latin typeface="Segoe UI"/>
+                <a:ea typeface="맑은 고딕"/>
+                <a:cs typeface="맑은 고딕"/>
               </a:rPr>
               <a:t>2</a:t>
             </a:r>
@@ -18833,9 +19561,11 @@
             <a:r>
               <a:rPr sz="1150" b="1">
                 <a:solidFill>
-                  <a:srgbClr val="D64545"/>
-                </a:solidFill>
-                <a:latin typeface="맑은 고딕"/>
+                  <a:srgbClr val="2A78D6"/>
+                </a:solidFill>
+                <a:latin typeface="Segoe UI"/>
+                <a:ea typeface="맑은 고딕"/>
+                <a:cs typeface="맑은 고딕"/>
               </a:rPr>
               <a:t>OUR ROLE</a:t>
             </a:r>
@@ -18872,9 +19602,11 @@
             <a:r>
               <a:rPr sz="2700" b="1">
                 <a:solidFill>
-                  <a:srgbClr val="151C26"/>
-                </a:solidFill>
-                <a:latin typeface="맑은 고딕"/>
+                  <a:srgbClr val="12151A"/>
+                </a:solidFill>
+                <a:latin typeface="Segoe UI"/>
+                <a:ea typeface="맑은 고딕"/>
+                <a:cs typeface="맑은 고딕"/>
               </a:rPr>
               <a:t>저희가 조심스럽게 보태고 싶은 부분</a:t>
             </a:r>
@@ -18911,9 +19643,11 @@
             <a:r>
               <a:rPr sz="1350" b="0">
                 <a:solidFill>
-                  <a:srgbClr val="5D6874"/>
-                </a:solidFill>
-                <a:latin typeface="맑은 고딕"/>
+                  <a:srgbClr val="52514E"/>
+                </a:solidFill>
+                <a:latin typeface="Segoe UI"/>
+                <a:ea typeface="맑은 고딕"/>
+                <a:cs typeface="맑은 고딕"/>
               </a:rPr>
               <a:t>이미 잘 해오고 계신 일들 위에, 공공데이터가 거들 수 있는 자리를 찾아보았습니다.</a:t>
             </a:r>
@@ -18953,9 +19687,11 @@
                       <a:r>
                         <a:rPr sz="1150" b="1">
                           <a:solidFill>
-                            <a:srgbClr val="151C26"/>
+                            <a:srgbClr val="12151A"/>
                           </a:solidFill>
-                          <a:latin typeface="맑은 고딕"/>
+                          <a:latin typeface="Segoe UI"/>
+                          <a:ea typeface="맑은 고딕"/>
+                          <a:cs typeface="맑은 고딕"/>
                         </a:rPr>
                         <a:t>업무 장면</a:t>
                       </a:r>
@@ -18963,7 +19699,7 @@
                   </a:txBody>
                   <a:tcPr anchor="ctr">
                     <a:solidFill>
-                      <a:srgbClr val="F5F7FA"/>
+                      <a:srgbClr val="F6F7F9"/>
                     </a:solidFill>
                   </a:tcPr>
                 </a:tc>
@@ -18976,9 +19712,11 @@
                       <a:r>
                         <a:rPr sz="1150" b="1">
                           <a:solidFill>
-                            <a:srgbClr val="151C26"/>
+                            <a:srgbClr val="12151A"/>
                           </a:solidFill>
-                          <a:latin typeface="맑은 고딕"/>
+                          <a:latin typeface="Segoe UI"/>
+                          <a:ea typeface="맑은 고딕"/>
+                          <a:cs typeface="맑은 고딕"/>
                         </a:rPr>
                         <a:t>이미 하고 계신 일 (가장 중요한 부분)</a:t>
                       </a:r>
@@ -18986,7 +19724,7 @@
                   </a:txBody>
                   <a:tcPr anchor="ctr">
                     <a:solidFill>
-                      <a:srgbClr val="F5F7FA"/>
+                      <a:srgbClr val="F6F7F9"/>
                     </a:solidFill>
                   </a:tcPr>
                 </a:tc>
@@ -18999,9 +19737,11 @@
                       <a:r>
                         <a:rPr sz="1150" b="1">
                           <a:solidFill>
-                            <a:srgbClr val="151C26"/>
+                            <a:srgbClr val="12151A"/>
                           </a:solidFill>
-                          <a:latin typeface="맑은 고딕"/>
+                          <a:latin typeface="Segoe UI"/>
+                          <a:ea typeface="맑은 고딕"/>
+                          <a:cs typeface="맑은 고딕"/>
                         </a:rPr>
                         <a:t>데이터가 거들 수 있는 일</a:t>
                       </a:r>
@@ -19009,7 +19749,7 @@
                   </a:txBody>
                   <a:tcPr anchor="ctr">
                     <a:solidFill>
-                      <a:srgbClr val="F5F7FA"/>
+                      <a:srgbClr val="F6F7F9"/>
                     </a:solidFill>
                   </a:tcPr>
                 </a:tc>
@@ -19024,9 +19764,11 @@
                       <a:r>
                         <a:rPr sz="1100">
                           <a:solidFill>
-                            <a:srgbClr val="151C26"/>
+                            <a:srgbClr val="12151A"/>
                           </a:solidFill>
-                          <a:latin typeface="맑은 고딕"/>
+                          <a:latin typeface="Segoe UI"/>
+                          <a:ea typeface="맑은 고딕"/>
+                          <a:cs typeface="맑은 고딕"/>
                         </a:rPr>
                         <a:t>사업지 검토</a:t>
                       </a:r>
@@ -19047,9 +19789,11 @@
                       <a:r>
                         <a:rPr sz="1100">
                           <a:solidFill>
-                            <a:srgbClr val="151C26"/>
+                            <a:srgbClr val="12151A"/>
                           </a:solidFill>
-                          <a:latin typeface="맑은 고딕"/>
+                          <a:latin typeface="Segoe UI"/>
+                          <a:ea typeface="맑은 고딕"/>
+                          <a:cs typeface="맑은 고딕"/>
                         </a:rPr>
                         <a:t>현장을 다니며 쌓은 경험과 주민 의견 청취</a:t>
                       </a:r>
@@ -19070,9 +19814,11 @@
                       <a:r>
                         <a:rPr sz="1100">
                           <a:solidFill>
-                            <a:srgbClr val="151C26"/>
+                            <a:srgbClr val="12151A"/>
                           </a:solidFill>
-                          <a:latin typeface="맑은 고딕"/>
+                          <a:latin typeface="Segoe UI"/>
+                          <a:ea typeface="맑은 고딕"/>
+                          <a:cs typeface="맑은 고딕"/>
                         </a:rPr>
                         <a:t>12개 지표로 계산한 참고용 수치 한 장</a:t>
                       </a:r>
@@ -19095,9 +19841,11 @@
                       <a:r>
                         <a:rPr sz="1100">
                           <a:solidFill>
-                            <a:srgbClr val="151C26"/>
+                            <a:srgbClr val="12151A"/>
                           </a:solidFill>
-                          <a:latin typeface="맑은 고딕"/>
+                          <a:latin typeface="Segoe UI"/>
+                          <a:ea typeface="맑은 고딕"/>
+                          <a:cs typeface="맑은 고딕"/>
                         </a:rPr>
                         <a:t>살펴보는 시점</a:t>
                       </a:r>
@@ -19118,9 +19866,11 @@
                       <a:r>
                         <a:rPr sz="1100">
                           <a:solidFill>
-                            <a:srgbClr val="151C26"/>
+                            <a:srgbClr val="12151A"/>
                           </a:solidFill>
-                          <a:latin typeface="맑은 고딕"/>
+                          <a:latin typeface="Segoe UI"/>
+                          <a:ea typeface="맑은 고딕"/>
+                          <a:cs typeface="맑은 고딕"/>
                         </a:rPr>
                         <a:t>민원과 현장 변화를 통한 상황 파악</a:t>
                       </a:r>
@@ -19141,9 +19891,11 @@
                       <a:r>
                         <a:rPr sz="1100">
                           <a:solidFill>
-                            <a:srgbClr val="151C26"/>
+                            <a:srgbClr val="12151A"/>
                           </a:solidFill>
-                          <a:latin typeface="맑은 고딕"/>
+                          <a:latin typeface="Segoe UI"/>
+                          <a:ea typeface="맑은 고딕"/>
+                          <a:cs typeface="맑은 고딕"/>
                         </a:rPr>
                         <a:t>지표 변화로 미리 살펴보는 3년 뒤 전망</a:t>
                       </a:r>
@@ -19166,9 +19918,11 @@
                       <a:r>
                         <a:rPr sz="1100">
                           <a:solidFill>
-                            <a:srgbClr val="151C26"/>
+                            <a:srgbClr val="12151A"/>
                           </a:solidFill>
-                          <a:latin typeface="맑은 고딕"/>
+                          <a:latin typeface="Segoe UI"/>
+                          <a:ea typeface="맑은 고딕"/>
+                          <a:cs typeface="맑은 고딕"/>
                         </a:rPr>
                         <a:t>예산 배분</a:t>
                       </a:r>
@@ -19189,9 +19943,11 @@
                       <a:r>
                         <a:rPr sz="1100">
                           <a:solidFill>
-                            <a:srgbClr val="151C26"/>
+                            <a:srgbClr val="12151A"/>
                           </a:solidFill>
-                          <a:latin typeface="맑은 고딕"/>
+                          <a:latin typeface="Segoe UI"/>
+                          <a:ea typeface="맑은 고딕"/>
+                          <a:cs typeface="맑은 고딕"/>
                         </a:rPr>
                         <a:t>지역 여건과 형평성을 고려한 배분</a:t>
                       </a:r>
@@ -19212,9 +19968,11 @@
                       <a:r>
                         <a:rPr sz="1100">
                           <a:solidFill>
-                            <a:srgbClr val="151C26"/>
+                            <a:srgbClr val="12151A"/>
                           </a:solidFill>
-                          <a:latin typeface="맑은 고딕"/>
+                          <a:latin typeface="Segoe UI"/>
+                          <a:ea typeface="맑은 고딕"/>
+                          <a:cs typeface="맑은 고딕"/>
                         </a:rPr>
                         <a:t>한 곳 더 지을 때의 효과를 순서대로 계산</a:t>
                       </a:r>
@@ -19237,9 +19995,11 @@
                       <a:r>
                         <a:rPr sz="1100">
                           <a:solidFill>
-                            <a:srgbClr val="151C26"/>
+                            <a:srgbClr val="12151A"/>
                           </a:solidFill>
-                          <a:latin typeface="맑은 고딕"/>
+                          <a:latin typeface="Segoe UI"/>
+                          <a:ea typeface="맑은 고딕"/>
+                          <a:cs typeface="맑은 고딕"/>
                         </a:rPr>
                         <a:t>선정 사유 설명</a:t>
                       </a:r>
@@ -19260,9 +20020,11 @@
                       <a:r>
                         <a:rPr sz="1100">
                           <a:solidFill>
-                            <a:srgbClr val="151C26"/>
+                            <a:srgbClr val="12151A"/>
                           </a:solidFill>
-                          <a:latin typeface="맑은 고딕"/>
+                          <a:latin typeface="Segoe UI"/>
+                          <a:ea typeface="맑은 고딕"/>
+                          <a:cs typeface="맑은 고딕"/>
                         </a:rPr>
                         <a:t>사업 필요성에 대한 행정적 판단</a:t>
                       </a:r>
@@ -19283,9 +20045,11 @@
                       <a:r>
                         <a:rPr sz="1100">
                           <a:solidFill>
-                            <a:srgbClr val="151C26"/>
+                            <a:srgbClr val="12151A"/>
                           </a:solidFill>
-                          <a:latin typeface="맑은 고딕"/>
+                          <a:latin typeface="Segoe UI"/>
+                          <a:ea typeface="맑은 고딕"/>
+                          <a:cs typeface="맑은 고딕"/>
                         </a:rPr>
                         <a:t>판단의 근거 수치를 표로 함께 제시</a:t>
                       </a:r>
@@ -19319,7 +20083,7 @@
             </a:avLst>
           </a:prstGeom>
           <a:solidFill>
-            <a:srgbClr val="F5F7FA"/>
+            <a:srgbClr val="F6F7F9"/>
           </a:solidFill>
           <a:ln>
             <a:noFill/>
@@ -19376,9 +20140,11 @@
             <a:r>
               <a:rPr sz="1450" b="1">
                 <a:solidFill>
-                  <a:srgbClr val="151C26"/>
-                </a:solidFill>
-                <a:latin typeface="맑은 고딕"/>
+                  <a:srgbClr val="12151A"/>
+                </a:solidFill>
+                <a:latin typeface="Segoe UI"/>
+                <a:ea typeface="맑은 고딕"/>
+                <a:cs typeface="맑은 고딕"/>
               </a:rPr>
               <a:t>데이터는 현장의 경험을 대신할 수 없습니다. 다만 한 번 더 확인해 보는 참고자료는 될 수 있다고 생각합니다.</a:t>
             </a:r>
@@ -19415,9 +20181,11 @@
             <a:r>
               <a:rPr sz="1250" b="0">
                 <a:solidFill>
-                  <a:srgbClr val="5D6874"/>
-                </a:solidFill>
-                <a:latin typeface="맑은 고딕"/>
+                  <a:srgbClr val="52514E"/>
+                </a:solidFill>
+                <a:latin typeface="Segoe UI"/>
+                <a:ea typeface="맑은 고딕"/>
+                <a:cs typeface="맑은 고딕"/>
               </a:rPr>
               <a:t>새로운 데이터를 더 사자는 제안이 아닙니다. 천안시가 이미 쓰실 수 있는 공공데이터만 엮어 세 가지 참고자료를 만들었고,</a:t>
             </a:r>
@@ -19434,9 +20202,11 @@
             <a:r>
               <a:rPr sz="1250" b="0">
                 <a:solidFill>
-                  <a:srgbClr val="5D6874"/>
-                </a:solidFill>
-                <a:latin typeface="맑은 고딕"/>
+                  <a:srgbClr val="52514E"/>
+                </a:solidFill>
+                <a:latin typeface="Segoe UI"/>
+                <a:ea typeface="맑은 고딕"/>
+                <a:cs typeface="맑은 고딕"/>
               </a:rPr>
               <a:t>추가 비용이나 시스템 없이 스크립트 한 줄로 매년 갱신하실 수 있게 준비했습니다.</a:t>
             </a:r>
@@ -19473,9 +20243,11 @@
             <a:r>
               <a:rPr sz="950" b="0">
                 <a:solidFill>
-                  <a:srgbClr val="5D6874"/>
-                </a:solidFill>
-                <a:latin typeface="맑은 고딕"/>
+                  <a:srgbClr val="52514E"/>
+                </a:solidFill>
+                <a:latin typeface="Segoe UI"/>
+                <a:ea typeface="맑은 고딕"/>
+                <a:cs typeface="맑은 고딕"/>
               </a:rPr>
               <a:t>천안 균형발전 나침반(CBC)</a:t>
             </a:r>
@@ -19512,9 +20284,11 @@
             <a:r>
               <a:rPr sz="950" b="0">
                 <a:solidFill>
-                  <a:srgbClr val="5D6874"/>
-                </a:solidFill>
-                <a:latin typeface="맑은 고딕"/>
+                  <a:srgbClr val="52514E"/>
+                </a:solidFill>
+                <a:latin typeface="Segoe UI"/>
+                <a:ea typeface="맑은 고딕"/>
+                <a:cs typeface="맑은 고딕"/>
               </a:rPr>
               <a:t>3</a:t>
             </a:r>
@@ -19569,9 +20343,11 @@
             <a:r>
               <a:rPr sz="1150" b="1">
                 <a:solidFill>
-                  <a:srgbClr val="D64545"/>
-                </a:solidFill>
-                <a:latin typeface="맑은 고딕"/>
+                  <a:srgbClr val="2A78D6"/>
+                </a:solidFill>
+                <a:latin typeface="Segoe UI"/>
+                <a:ea typeface="맑은 고딕"/>
+                <a:cs typeface="맑은 고딕"/>
               </a:rPr>
               <a:t>ARCHITECTURE</a:t>
             </a:r>
@@ -19608,9 +20384,11 @@
             <a:r>
               <a:rPr sz="2700" b="1">
                 <a:solidFill>
-                  <a:srgbClr val="151C26"/>
-                </a:solidFill>
-                <a:latin typeface="맑은 고딕"/>
+                  <a:srgbClr val="12151A"/>
+                </a:solidFill>
+                <a:latin typeface="Segoe UI"/>
+                <a:ea typeface="맑은 고딕"/>
+                <a:cs typeface="맑은 고딕"/>
               </a:rPr>
               <a:t>3-엔진 파이프라인</a:t>
             </a:r>
@@ -19647,9 +20425,11 @@
             <a:r>
               <a:rPr sz="1350" b="0">
                 <a:solidFill>
-                  <a:srgbClr val="5D6874"/>
-                </a:solidFill>
-                <a:latin typeface="맑은 고딕"/>
+                  <a:srgbClr val="52514E"/>
+                </a:solidFill>
+                <a:latin typeface="Segoe UI"/>
+                <a:ea typeface="맑은 고딕"/>
+                <a:cs typeface="맑은 고딕"/>
               </a:rPr>
               <a:t>공공데이터 입력부터 정책 산출물까지 단일 스크립트로 연결된다.</a:t>
             </a:r>
@@ -19677,7 +20457,7 @@
           </a:solidFill>
           <a:ln w="12700">
             <a:solidFill>
-              <a:srgbClr val="E0E5EB"/>
+              <a:srgbClr val="E4E7EC"/>
             </a:solidFill>
           </a:ln>
           <a:effectLst/>
@@ -19717,7 +20497,7 @@
             <a:avLst/>
           </a:prstGeom>
           <a:solidFill>
-            <a:srgbClr val="5D6874"/>
+            <a:srgbClr val="52514E"/>
           </a:solidFill>
           <a:ln>
             <a:noFill/>
@@ -19774,9 +20554,11 @@
             <a:r>
               <a:rPr sz="950" b="1">
                 <a:solidFill>
-                  <a:srgbClr val="5D6874"/>
-                </a:solidFill>
-                <a:latin typeface="맑은 고딕"/>
+                  <a:srgbClr val="52514E"/>
+                </a:solidFill>
+                <a:latin typeface="Segoe UI"/>
+                <a:ea typeface="맑은 고딕"/>
+                <a:cs typeface="맑은 고딕"/>
               </a:rPr>
               <a:t>INPUT</a:t>
             </a:r>
@@ -19813,9 +20595,11 @@
             <a:r>
               <a:rPr sz="1450" b="1">
                 <a:solidFill>
-                  <a:srgbClr val="151C26"/>
-                </a:solidFill>
-                <a:latin typeface="맑은 고딕"/>
+                  <a:srgbClr val="12151A"/>
+                </a:solidFill>
+                <a:latin typeface="Segoe UI"/>
+                <a:ea typeface="맑은 고딕"/>
+                <a:cs typeface="맑은 고딕"/>
               </a:rPr>
               <a:t>공공데이터</a:t>
             </a:r>
@@ -19852,9 +20636,11 @@
             <a:r>
               <a:rPr sz="1100" b="0">
                 <a:solidFill>
-                  <a:srgbClr val="5D6874"/>
-                </a:solidFill>
-                <a:latin typeface="맑은 고딕"/>
+                  <a:srgbClr val="52514E"/>
+                </a:solidFill>
+                <a:latin typeface="Segoe UI"/>
+                <a:ea typeface="맑은 고딕"/>
+                <a:cs typeface="맑은 고딕"/>
               </a:rPr>
               <a:t>주민등록 인구</a:t>
             </a:r>
@@ -19871,9 +20657,11 @@
             <a:r>
               <a:rPr sz="1100" b="0">
                 <a:solidFill>
-                  <a:srgbClr val="5D6874"/>
-                </a:solidFill>
-                <a:latin typeface="맑은 고딕"/>
+                  <a:srgbClr val="52514E"/>
+                </a:solidFill>
+                <a:latin typeface="Segoe UI"/>
+                <a:ea typeface="맑은 고딕"/>
+                <a:cs typeface="맑은 고딕"/>
               </a:rPr>
               <a:t>LOCALDATA 인허가</a:t>
             </a:r>
@@ -19890,9 +20678,11 @@
             <a:r>
               <a:rPr sz="1100" b="0">
                 <a:solidFill>
-                  <a:srgbClr val="5D6874"/>
-                </a:solidFill>
-                <a:latin typeface="맑은 고딕"/>
+                  <a:srgbClr val="52514E"/>
+                </a:solidFill>
+                <a:latin typeface="Segoe UI"/>
+                <a:ea typeface="맑은 고딕"/>
+                <a:cs typeface="맑은 고딕"/>
               </a:rPr>
               <a:t>상가정보·생활SOC</a:t>
             </a:r>
@@ -19909,9 +20699,11 @@
             <a:r>
               <a:rPr sz="1100" b="0">
                 <a:solidFill>
-                  <a:srgbClr val="5D6874"/>
-                </a:solidFill>
-                <a:latin typeface="맑은 고딕"/>
+                  <a:srgbClr val="52514E"/>
+                </a:solidFill>
+                <a:latin typeface="Segoe UI"/>
+                <a:ea typeface="맑은 고딕"/>
+                <a:cs typeface="맑은 고딕"/>
               </a:rPr>
               <a:t>빈집·버스정류장</a:t>
             </a:r>
@@ -19950,7 +20742,9 @@
                 <a:solidFill>
                   <a:srgbClr val="B8C0CA"/>
                 </a:solidFill>
-                <a:latin typeface="맑은 고딕"/>
+                <a:latin typeface="Segoe UI"/>
+                <a:ea typeface="맑은 고딕"/>
+                <a:cs typeface="맑은 고딕"/>
               </a:rPr>
               <a:t>▶</a:t>
             </a:r>
@@ -19978,7 +20772,7 @@
           </a:solidFill>
           <a:ln w="12700">
             <a:solidFill>
-              <a:srgbClr val="E0E5EB"/>
+              <a:srgbClr val="E4E7EC"/>
             </a:solidFill>
           </a:ln>
           <a:effectLst/>
@@ -20018,7 +20812,7 @@
             <a:avLst/>
           </a:prstGeom>
           <a:solidFill>
-            <a:srgbClr val="D64545"/>
+            <a:srgbClr val="2A78D6"/>
           </a:solidFill>
           <a:ln>
             <a:noFill/>
@@ -20075,9 +20869,11 @@
             <a:r>
               <a:rPr sz="950" b="1">
                 <a:solidFill>
-                  <a:srgbClr val="D64545"/>
-                </a:solidFill>
-                <a:latin typeface="맑은 고딕"/>
+                  <a:srgbClr val="2A78D6"/>
+                </a:solidFill>
+                <a:latin typeface="Segoe UI"/>
+                <a:ea typeface="맑은 고딕"/>
+                <a:cs typeface="맑은 고딕"/>
               </a:rPr>
               <a:t>① DIAGNOSE</a:t>
             </a:r>
@@ -20114,9 +20910,11 @@
             <a:r>
               <a:rPr sz="1450" b="1">
                 <a:solidFill>
-                  <a:srgbClr val="151C26"/>
-                </a:solidFill>
-                <a:latin typeface="맑은 고딕"/>
+                  <a:srgbClr val="12151A"/>
+                </a:solidFill>
+                <a:latin typeface="Segoe UI"/>
+                <a:ea typeface="맑은 고딕"/>
+                <a:cs typeface="맑은 고딕"/>
               </a:rPr>
               <a:t>진단 엔진</a:t>
             </a:r>
@@ -20153,9 +20951,11 @@
             <a:r>
               <a:rPr sz="1100" b="0">
                 <a:solidFill>
-                  <a:srgbClr val="5D6874"/>
-                </a:solidFill>
-                <a:latin typeface="맑은 고딕"/>
+                  <a:srgbClr val="52514E"/>
+                </a:solidFill>
+                <a:latin typeface="Segoe UI"/>
+                <a:ea typeface="맑은 고딕"/>
+                <a:cs typeface="맑은 고딕"/>
               </a:rPr>
               <a:t>엔트로피 가중 CBI</a:t>
             </a:r>
@@ -20172,9 +20972,11 @@
             <a:r>
               <a:rPr sz="1100" b="0">
                 <a:solidFill>
-                  <a:srgbClr val="5D6874"/>
-                </a:solidFill>
-                <a:latin typeface="맑은 고딕"/>
+                  <a:srgbClr val="52514E"/>
+                </a:solidFill>
+                <a:latin typeface="Segoe UI"/>
+                <a:ea typeface="맑은 고딕"/>
+                <a:cs typeface="맑은 고딕"/>
               </a:rPr>
               <a:t>K-means 유형화</a:t>
             </a:r>
@@ -20191,9 +20993,11 @@
             <a:r>
               <a:rPr sz="1100" b="0">
                 <a:solidFill>
-                  <a:srgbClr val="5D6874"/>
-                </a:solidFill>
-                <a:latin typeface="맑은 고딕"/>
+                  <a:srgbClr val="52514E"/>
+                </a:solidFill>
+                <a:latin typeface="Segoe UI"/>
+                <a:ea typeface="맑은 고딕"/>
+                <a:cs typeface="맑은 고딕"/>
               </a:rPr>
               <a:t>5대 도메인 분해</a:t>
             </a:r>
@@ -20232,7 +21036,9 @@
                 <a:solidFill>
                   <a:srgbClr val="B8C0CA"/>
                 </a:solidFill>
-                <a:latin typeface="맑은 고딕"/>
+                <a:latin typeface="Segoe UI"/>
+                <a:ea typeface="맑은 고딕"/>
+                <a:cs typeface="맑은 고딕"/>
               </a:rPr>
               <a:t>▶</a:t>
             </a:r>
@@ -20260,7 +21066,7 @@
           </a:solidFill>
           <a:ln w="12700">
             <a:solidFill>
-              <a:srgbClr val="E0E5EB"/>
+              <a:srgbClr val="E4E7EC"/>
             </a:solidFill>
           </a:ln>
           <a:effectLst/>
@@ -20300,7 +21106,7 @@
             <a:avLst/>
           </a:prstGeom>
           <a:solidFill>
-            <a:srgbClr val="2E7DD1"/>
+            <a:srgbClr val="2A78D6"/>
           </a:solidFill>
           <a:ln>
             <a:noFill/>
@@ -20357,9 +21163,11 @@
             <a:r>
               <a:rPr sz="950" b="1">
                 <a:solidFill>
-                  <a:srgbClr val="2E7DD1"/>
-                </a:solidFill>
-                <a:latin typeface="맑은 고딕"/>
+                  <a:srgbClr val="2A78D6"/>
+                </a:solidFill>
+                <a:latin typeface="Segoe UI"/>
+                <a:ea typeface="맑은 고딕"/>
+                <a:cs typeface="맑은 고딕"/>
               </a:rPr>
               <a:t>② PREDICT</a:t>
             </a:r>
@@ -20396,9 +21204,11 @@
             <a:r>
               <a:rPr sz="1450" b="1">
                 <a:solidFill>
-                  <a:srgbClr val="151C26"/>
-                </a:solidFill>
-                <a:latin typeface="맑은 고딕"/>
+                  <a:srgbClr val="12151A"/>
+                </a:solidFill>
+                <a:latin typeface="Segoe UI"/>
+                <a:ea typeface="맑은 고딕"/>
+                <a:cs typeface="맑은 고딕"/>
               </a:rPr>
               <a:t>예측 엔진</a:t>
             </a:r>
@@ -20435,9 +21245,11 @@
             <a:r>
               <a:rPr sz="1100" b="0">
                 <a:solidFill>
-                  <a:srgbClr val="5D6874"/>
-                </a:solidFill>
-                <a:latin typeface="맑은 고딕"/>
+                  <a:srgbClr val="52514E"/>
+                </a:solidFill>
+                <a:latin typeface="Segoe UI"/>
+                <a:ea typeface="맑은 고딕"/>
+                <a:cs typeface="맑은 고딕"/>
               </a:rPr>
               <a:t>LightGBM 회귀</a:t>
             </a:r>
@@ -20454,9 +21266,11 @@
             <a:r>
               <a:rPr sz="1100" b="0">
                 <a:solidFill>
-                  <a:srgbClr val="5D6874"/>
-                </a:solidFill>
-                <a:latin typeface="맑은 고딕"/>
+                  <a:srgbClr val="52514E"/>
+                </a:solidFill>
+                <a:latin typeface="Segoe UI"/>
+                <a:ea typeface="맑은 고딕"/>
+                <a:cs typeface="맑은 고딕"/>
               </a:rPr>
               <a:t>Leave-One-Zone-Out CV</a:t>
             </a:r>
@@ -20473,9 +21287,11 @@
             <a:r>
               <a:rPr sz="1100" b="0">
                 <a:solidFill>
-                  <a:srgbClr val="5D6874"/>
-                </a:solidFill>
-                <a:latin typeface="맑은 고딕"/>
+                  <a:srgbClr val="52514E"/>
+                </a:solidFill>
+                <a:latin typeface="Segoe UI"/>
+                <a:ea typeface="맑은 고딕"/>
+                <a:cs typeface="맑은 고딕"/>
               </a:rPr>
               <a:t>SHAP 요인분해</a:t>
             </a:r>
@@ -20514,7 +21330,9 @@
                 <a:solidFill>
                   <a:srgbClr val="B8C0CA"/>
                 </a:solidFill>
-                <a:latin typeface="맑은 고딕"/>
+                <a:latin typeface="Segoe UI"/>
+                <a:ea typeface="맑은 고딕"/>
+                <a:cs typeface="맑은 고딕"/>
               </a:rPr>
               <a:t>▶</a:t>
             </a:r>
@@ -20542,7 +21360,7 @@
           </a:solidFill>
           <a:ln w="12700">
             <a:solidFill>
-              <a:srgbClr val="E0E5EB"/>
+              <a:srgbClr val="E4E7EC"/>
             </a:solidFill>
           </a:ln>
           <a:effectLst/>
@@ -20582,7 +21400,7 @@
             <a:avLst/>
           </a:prstGeom>
           <a:solidFill>
-            <a:srgbClr val="3E9B7C"/>
+            <a:srgbClr val="1BAF7A"/>
           </a:solidFill>
           <a:ln>
             <a:noFill/>
@@ -20639,9 +21457,11 @@
             <a:r>
               <a:rPr sz="950" b="1">
                 <a:solidFill>
-                  <a:srgbClr val="3E9B7C"/>
-                </a:solidFill>
-                <a:latin typeface="맑은 고딕"/>
+                  <a:srgbClr val="1BAF7A"/>
+                </a:solidFill>
+                <a:latin typeface="Segoe UI"/>
+                <a:ea typeface="맑은 고딕"/>
+                <a:cs typeface="맑은 고딕"/>
               </a:rPr>
               <a:t>③ PRESCRIBE</a:t>
             </a:r>
@@ -20678,9 +21498,11 @@
             <a:r>
               <a:rPr sz="1450" b="1">
                 <a:solidFill>
-                  <a:srgbClr val="151C26"/>
-                </a:solidFill>
-                <a:latin typeface="맑은 고딕"/>
+                  <a:srgbClr val="12151A"/>
+                </a:solidFill>
+                <a:latin typeface="Segoe UI"/>
+                <a:ea typeface="맑은 고딕"/>
+                <a:cs typeface="맑은 고딕"/>
               </a:rPr>
               <a:t>처방 엔진</a:t>
             </a:r>
@@ -20717,9 +21539,11 @@
             <a:r>
               <a:rPr sz="1100" b="0">
                 <a:solidFill>
-                  <a:srgbClr val="5D6874"/>
-                </a:solidFill>
-                <a:latin typeface="맑은 고딕"/>
+                  <a:srgbClr val="52514E"/>
+                </a:solidFill>
+                <a:latin typeface="Segoe UI"/>
+                <a:ea typeface="맑은 고딕"/>
+                <a:cs typeface="맑은 고딕"/>
               </a:rPr>
               <a:t>MCLP 탐욕 최적화</a:t>
             </a:r>
@@ -20736,9 +21560,11 @@
             <a:r>
               <a:rPr sz="1100" b="0">
                 <a:solidFill>
-                  <a:srgbClr val="5D6874"/>
-                </a:solidFill>
-                <a:latin typeface="맑은 고딕"/>
+                  <a:srgbClr val="52514E"/>
+                </a:solidFill>
+                <a:latin typeface="Segoe UI"/>
+                <a:ea typeface="맑은 고딕"/>
+                <a:cs typeface="맑은 고딕"/>
               </a:rPr>
               <a:t>형평성 제약</a:t>
             </a:r>
@@ -20755,9 +21581,11 @@
             <a:r>
               <a:rPr sz="1100" b="0">
                 <a:solidFill>
-                  <a:srgbClr val="5D6874"/>
-                </a:solidFill>
-                <a:latin typeface="맑은 고딕"/>
+                  <a:srgbClr val="52514E"/>
+                </a:solidFill>
+                <a:latin typeface="Segoe UI"/>
+                <a:ea typeface="맑은 고딕"/>
+                <a:cs typeface="맑은 고딕"/>
               </a:rPr>
               <a:t>한계효용 곡선</a:t>
             </a:r>
@@ -20796,7 +21624,9 @@
                 <a:solidFill>
                   <a:srgbClr val="B8C0CA"/>
                 </a:solidFill>
-                <a:latin typeface="맑은 고딕"/>
+                <a:latin typeface="Segoe UI"/>
+                <a:ea typeface="맑은 고딕"/>
+                <a:cs typeface="맑은 고딕"/>
               </a:rPr>
               <a:t>▶</a:t>
             </a:r>
@@ -20824,7 +21654,7 @@
           </a:solidFill>
           <a:ln w="12700">
             <a:solidFill>
-              <a:srgbClr val="E0E5EB"/>
+              <a:srgbClr val="E4E7EC"/>
             </a:solidFill>
           </a:ln>
           <a:effectLst/>
@@ -20864,7 +21694,7 @@
             <a:avLst/>
           </a:prstGeom>
           <a:solidFill>
-            <a:srgbClr val="151C26"/>
+            <a:srgbClr val="12151A"/>
           </a:solidFill>
           <a:ln>
             <a:noFill/>
@@ -20921,9 +21751,11 @@
             <a:r>
               <a:rPr sz="950" b="1">
                 <a:solidFill>
-                  <a:srgbClr val="151C26"/>
-                </a:solidFill>
-                <a:latin typeface="맑은 고딕"/>
+                  <a:srgbClr val="12151A"/>
+                </a:solidFill>
+                <a:latin typeface="Segoe UI"/>
+                <a:ea typeface="맑은 고딕"/>
+                <a:cs typeface="맑은 고딕"/>
               </a:rPr>
               <a:t>OUTPUT</a:t>
             </a:r>
@@ -20960,9 +21792,11 @@
             <a:r>
               <a:rPr sz="1450" b="1">
                 <a:solidFill>
-                  <a:srgbClr val="151C26"/>
-                </a:solidFill>
-                <a:latin typeface="맑은 고딕"/>
+                  <a:srgbClr val="12151A"/>
+                </a:solidFill>
+                <a:latin typeface="Segoe UI"/>
+                <a:ea typeface="맑은 고딕"/>
+                <a:cs typeface="맑은 고딕"/>
               </a:rPr>
               <a:t>정책 산출물</a:t>
             </a:r>
@@ -20999,9 +21833,11 @@
             <a:r>
               <a:rPr sz="1100" b="0">
                 <a:solidFill>
-                  <a:srgbClr val="5D6874"/>
-                </a:solidFill>
-                <a:latin typeface="맑은 고딕"/>
+                  <a:srgbClr val="52514E"/>
+                </a:solidFill>
+                <a:latin typeface="Segoe UI"/>
+                <a:ea typeface="맑은 고딕"/>
+                <a:cs typeface="맑은 고딕"/>
               </a:rPr>
               <a:t>생활권 CBI 지도</a:t>
             </a:r>
@@ -21018,9 +21854,11 @@
             <a:r>
               <a:rPr sz="1100" b="0">
                 <a:solidFill>
-                  <a:srgbClr val="5D6874"/>
-                </a:solidFill>
-                <a:latin typeface="맑은 고딕"/>
+                  <a:srgbClr val="52514E"/>
+                </a:solidFill>
+                <a:latin typeface="Segoe UI"/>
+                <a:ea typeface="맑은 고딕"/>
+                <a:cs typeface="맑은 고딕"/>
               </a:rPr>
               <a:t>3년 후 위험 경보</a:t>
             </a:r>
@@ -21037,9 +21875,11 @@
             <a:r>
               <a:rPr sz="1100" b="0">
                 <a:solidFill>
-                  <a:srgbClr val="5D6874"/>
-                </a:solidFill>
-                <a:latin typeface="맑은 고딕"/>
+                  <a:srgbClr val="52514E"/>
+                </a:solidFill>
+                <a:latin typeface="Segoe UI"/>
+                <a:ea typeface="맑은 고딕"/>
+                <a:cs typeface="맑은 고딕"/>
               </a:rPr>
               <a:t>투자 우선순위표</a:t>
             </a:r>
@@ -21063,7 +21903,7 @@
             </a:avLst>
           </a:prstGeom>
           <a:solidFill>
-            <a:srgbClr val="F5F7FA"/>
+            <a:srgbClr val="F6F7F9"/>
           </a:solidFill>
           <a:ln>
             <a:noFill/>
@@ -21120,9 +21960,11 @@
             <a:r>
               <a:rPr sz="1250" b="0">
                 <a:solidFill>
-                  <a:srgbClr val="151C26"/>
-                </a:solidFill>
-                <a:latin typeface="맑은 고딕"/>
+                  <a:srgbClr val="12151A"/>
+                </a:solidFill>
+                <a:latin typeface="Segoe UI"/>
+                <a:ea typeface="맑은 고딕"/>
+                <a:cs typeface="맑은 고딕"/>
               </a:rPr>
               <a:t>설계 원칙 ① 재현성 — 모든 단계가 공개 스크립트(`python3 src/run_all.py`)로 동일 재현</a:t>
             </a:r>
@@ -21139,9 +21981,11 @@
             <a:r>
               <a:rPr sz="1250" b="0">
                 <a:solidFill>
-                  <a:srgbClr val="151C26"/>
-                </a:solidFill>
-                <a:latin typeface="맑은 고딕"/>
+                  <a:srgbClr val="12151A"/>
+                </a:solidFill>
+                <a:latin typeface="Segoe UI"/>
+                <a:ea typeface="맑은 고딕"/>
+                <a:cs typeface="맑은 고딕"/>
               </a:rPr>
               <a:t>설계 원칙 ② 정직성 — 실데이터/예시데이터 상태를 로그·산출물에 항상 표기해 오인 제출을 차단</a:t>
             </a:r>
@@ -21178,9 +22022,11 @@
             <a:r>
               <a:rPr sz="950" b="0">
                 <a:solidFill>
-                  <a:srgbClr val="5D6874"/>
-                </a:solidFill>
-                <a:latin typeface="맑은 고딕"/>
+                  <a:srgbClr val="52514E"/>
+                </a:solidFill>
+                <a:latin typeface="Segoe UI"/>
+                <a:ea typeface="맑은 고딕"/>
+                <a:cs typeface="맑은 고딕"/>
               </a:rPr>
               <a:t>천안 균형발전 나침반(CBC)</a:t>
             </a:r>
@@ -21217,9 +22063,11 @@
             <a:r>
               <a:rPr sz="950" b="0">
                 <a:solidFill>
-                  <a:srgbClr val="5D6874"/>
-                </a:solidFill>
-                <a:latin typeface="맑은 고딕"/>
+                  <a:srgbClr val="52514E"/>
+                </a:solidFill>
+                <a:latin typeface="Segoe UI"/>
+                <a:ea typeface="맑은 고딕"/>
+                <a:cs typeface="맑은 고딕"/>
               </a:rPr>
               <a:t>4</a:t>
             </a:r>
@@ -21274,9 +22122,11 @@
             <a:r>
               <a:rPr sz="1150" b="1">
                 <a:solidFill>
-                  <a:srgbClr val="D64545"/>
-                </a:solidFill>
-                <a:latin typeface="맑은 고딕"/>
+                  <a:srgbClr val="2A78D6"/>
+                </a:solidFill>
+                <a:latin typeface="Segoe UI"/>
+                <a:ea typeface="맑은 고딕"/>
+                <a:cs typeface="맑은 고딕"/>
               </a:rPr>
               <a:t>DATA</a:t>
             </a:r>
@@ -21313,9 +22163,11 @@
             <a:r>
               <a:rPr sz="2700" b="1">
                 <a:solidFill>
-                  <a:srgbClr val="151C26"/>
-                </a:solidFill>
-                <a:latin typeface="맑은 고딕"/>
+                  <a:srgbClr val="12151A"/>
+                </a:solidFill>
+                <a:latin typeface="Segoe UI"/>
+                <a:ea typeface="맑은 고딕"/>
+                <a:cs typeface="맑은 고딕"/>
               </a:rPr>
               <a:t>활용 데이터 명세</a:t>
             </a:r>
@@ -21352,9 +22204,11 @@
             <a:r>
               <a:rPr sz="1350" b="0">
                 <a:solidFill>
-                  <a:srgbClr val="5D6874"/>
-                </a:solidFill>
-                <a:latin typeface="맑은 고딕"/>
+                  <a:srgbClr val="52514E"/>
+                </a:solidFill>
+                <a:latin typeface="Segoe UI"/>
+                <a:ea typeface="맑은 고딕"/>
+                <a:cs typeface="맑은 고딕"/>
               </a:rPr>
               <a:t>전부 정식 공공 포털에서 합법적으로 내려받은 파일이며, 개인식별정보를 포함하지 않는다.</a:t>
             </a:r>
@@ -21396,9 +22250,11 @@
                       <a:r>
                         <a:rPr sz="1050" b="1">
                           <a:solidFill>
-                            <a:srgbClr val="151C26"/>
+                            <a:srgbClr val="12151A"/>
                           </a:solidFill>
-                          <a:latin typeface="맑은 고딕"/>
+                          <a:latin typeface="Segoe UI"/>
+                          <a:ea typeface="맑은 고딕"/>
+                          <a:cs typeface="맑은 고딕"/>
                         </a:rPr>
                         <a:t>데이터셋</a:t>
                       </a:r>
@@ -21406,7 +22262,7 @@
                   </a:txBody>
                   <a:tcPr anchor="ctr">
                     <a:solidFill>
-                      <a:srgbClr val="F5F7FA"/>
+                      <a:srgbClr val="F6F7F9"/>
                     </a:solidFill>
                   </a:tcPr>
                 </a:tc>
@@ -21419,9 +22275,11 @@
                       <a:r>
                         <a:rPr sz="1050" b="1">
                           <a:solidFill>
-                            <a:srgbClr val="151C26"/>
+                            <a:srgbClr val="12151A"/>
                           </a:solidFill>
-                          <a:latin typeface="맑은 고딕"/>
+                          <a:latin typeface="Segoe UI"/>
+                          <a:ea typeface="맑은 고딕"/>
+                          <a:cs typeface="맑은 고딕"/>
                         </a:rPr>
                         <a:t>제공기관</a:t>
                       </a:r>
@@ -21429,7 +22287,7 @@
                   </a:txBody>
                   <a:tcPr anchor="ctr">
                     <a:solidFill>
-                      <a:srgbClr val="F5F7FA"/>
+                      <a:srgbClr val="F6F7F9"/>
                     </a:solidFill>
                   </a:tcPr>
                 </a:tc>
@@ -21442,9 +22300,11 @@
                       <a:r>
                         <a:rPr sz="1050" b="1">
                           <a:solidFill>
-                            <a:srgbClr val="151C26"/>
+                            <a:srgbClr val="12151A"/>
                           </a:solidFill>
-                          <a:latin typeface="맑은 고딕"/>
+                          <a:latin typeface="Segoe UI"/>
+                          <a:ea typeface="맑은 고딕"/>
+                          <a:cs typeface="맑은 고딕"/>
                         </a:rPr>
                         <a:t>출처 URL</a:t>
                       </a:r>
@@ -21452,7 +22312,7 @@
                   </a:txBody>
                   <a:tcPr anchor="ctr">
                     <a:solidFill>
-                      <a:srgbClr val="F5F7FA"/>
+                      <a:srgbClr val="F6F7F9"/>
                     </a:solidFill>
                   </a:tcPr>
                 </a:tc>
@@ -21465,9 +22325,11 @@
                       <a:r>
                         <a:rPr sz="1050" b="1">
                           <a:solidFill>
-                            <a:srgbClr val="151C26"/>
+                            <a:srgbClr val="12151A"/>
                           </a:solidFill>
-                          <a:latin typeface="맑은 고딕"/>
+                          <a:latin typeface="Segoe UI"/>
+                          <a:ea typeface="맑은 고딕"/>
+                          <a:cs typeface="맑은 고딕"/>
                         </a:rPr>
                         <a:t>주요 컬럼</a:t>
                       </a:r>
@@ -21475,7 +22337,7 @@
                   </a:txBody>
                   <a:tcPr anchor="ctr">
                     <a:solidFill>
-                      <a:srgbClr val="F5F7FA"/>
+                      <a:srgbClr val="F6F7F9"/>
                     </a:solidFill>
                   </a:tcPr>
                 </a:tc>
@@ -21488,9 +22350,11 @@
                       <a:r>
                         <a:rPr sz="1050" b="1">
                           <a:solidFill>
-                            <a:srgbClr val="151C26"/>
+                            <a:srgbClr val="12151A"/>
                           </a:solidFill>
-                          <a:latin typeface="맑은 고딕"/>
+                          <a:latin typeface="Segoe UI"/>
+                          <a:ea typeface="맑은 고딕"/>
+                          <a:cs typeface="맑은 고딕"/>
                         </a:rPr>
                         <a:t>산출 지표</a:t>
                       </a:r>
@@ -21498,7 +22362,7 @@
                   </a:txBody>
                   <a:tcPr anchor="ctr">
                     <a:solidFill>
-                      <a:srgbClr val="F5F7FA"/>
+                      <a:srgbClr val="F6F7F9"/>
                     </a:solidFill>
                   </a:tcPr>
                 </a:tc>
@@ -21513,9 +22377,11 @@
                       <a:r>
                         <a:rPr sz="1000">
                           <a:solidFill>
-                            <a:srgbClr val="151C26"/>
+                            <a:srgbClr val="12151A"/>
                           </a:solidFill>
-                          <a:latin typeface="맑은 고딕"/>
+                          <a:latin typeface="Segoe UI"/>
+                          <a:ea typeface="맑은 고딕"/>
+                          <a:cs typeface="맑은 고딕"/>
                         </a:rPr>
                         <a:t>주민등록 인구통계(연령별)</a:t>
                       </a:r>
@@ -21536,9 +22402,11 @@
                       <a:r>
                         <a:rPr sz="1000">
                           <a:solidFill>
-                            <a:srgbClr val="151C26"/>
+                            <a:srgbClr val="12151A"/>
                           </a:solidFill>
-                          <a:latin typeface="맑은 고딕"/>
+                          <a:latin typeface="Segoe UI"/>
+                          <a:ea typeface="맑은 고딕"/>
+                          <a:cs typeface="맑은 고딕"/>
                         </a:rPr>
                         <a:t>행정안전부</a:t>
                       </a:r>
@@ -21559,9 +22427,11 @@
                       <a:r>
                         <a:rPr sz="1000">
                           <a:solidFill>
-                            <a:srgbClr val="151C26"/>
+                            <a:srgbClr val="12151A"/>
                           </a:solidFill>
-                          <a:latin typeface="맑은 고딕"/>
+                          <a:latin typeface="Segoe UI"/>
+                          <a:ea typeface="맑은 고딕"/>
+                          <a:cs typeface="맑은 고딕"/>
                         </a:rPr>
                         <a:t>jumin.mois.go.kr</a:t>
                       </a:r>
@@ -21582,9 +22452,11 @@
                       <a:r>
                         <a:rPr sz="1000">
                           <a:solidFill>
-                            <a:srgbClr val="151C26"/>
+                            <a:srgbClr val="12151A"/>
                           </a:solidFill>
-                          <a:latin typeface="맑은 고딕"/>
+                          <a:latin typeface="Segoe UI"/>
+                          <a:ea typeface="맑은 고딕"/>
+                          <a:cs typeface="맑은 고딕"/>
                         </a:rPr>
                         <a:t>행정구역, 총인구수, 연령대별 인구</a:t>
                       </a:r>
@@ -21605,9 +22477,11 @@
                       <a:r>
                         <a:rPr sz="1000">
                           <a:solidFill>
-                            <a:srgbClr val="151C26"/>
+                            <a:srgbClr val="12151A"/>
                           </a:solidFill>
-                          <a:latin typeface="맑은 고딕"/>
+                          <a:latin typeface="Segoe UI"/>
+                          <a:ea typeface="맑은 고딕"/>
+                          <a:cs typeface="맑은 고딕"/>
                         </a:rPr>
                         <a:t>인구증감률·청년비율·고령비율</a:t>
                       </a:r>
@@ -21630,9 +22504,11 @@
                       <a:r>
                         <a:rPr sz="1000">
                           <a:solidFill>
-                            <a:srgbClr val="151C26"/>
+                            <a:srgbClr val="12151A"/>
                           </a:solidFill>
-                          <a:latin typeface="맑은 고딕"/>
+                          <a:latin typeface="Segoe UI"/>
+                          <a:ea typeface="맑은 고딕"/>
+                          <a:cs typeface="맑은 고딕"/>
                         </a:rPr>
                         <a:t>지방행정 인허가데이터</a:t>
                       </a:r>
@@ -21653,9 +22529,11 @@
                       <a:r>
                         <a:rPr sz="1000">
                           <a:solidFill>
-                            <a:srgbClr val="151C26"/>
+                            <a:srgbClr val="12151A"/>
                           </a:solidFill>
-                          <a:latin typeface="맑은 고딕"/>
+                          <a:latin typeface="Segoe UI"/>
+                          <a:ea typeface="맑은 고딕"/>
+                          <a:cs typeface="맑은 고딕"/>
                         </a:rPr>
                         <a:t>행정안전부</a:t>
                       </a:r>
@@ -21676,9 +22554,11 @@
                       <a:r>
                         <a:rPr sz="1000">
                           <a:solidFill>
-                            <a:srgbClr val="151C26"/>
+                            <a:srgbClr val="12151A"/>
                           </a:solidFill>
-                          <a:latin typeface="맑은 고딕"/>
+                          <a:latin typeface="Segoe UI"/>
+                          <a:ea typeface="맑은 고딕"/>
+                          <a:cs typeface="맑은 고딕"/>
                         </a:rPr>
                         <a:t>localdata.go.kr</a:t>
                       </a:r>
@@ -21699,9 +22579,11 @@
                       <a:r>
                         <a:rPr sz="1000">
                           <a:solidFill>
-                            <a:srgbClr val="151C26"/>
+                            <a:srgbClr val="12151A"/>
                           </a:solidFill>
-                          <a:latin typeface="맑은 고딕"/>
+                          <a:latin typeface="Segoe UI"/>
+                          <a:ea typeface="맑은 고딕"/>
+                          <a:cs typeface="맑은 고딕"/>
                         </a:rPr>
                         <a:t>인허가일자, 폐업일자, 영업상태명, 소재지주소, 업태</a:t>
                       </a:r>
@@ -21722,9 +22604,11 @@
                       <a:r>
                         <a:rPr sz="1000">
                           <a:solidFill>
-                            <a:srgbClr val="151C26"/>
+                            <a:srgbClr val="12151A"/>
                           </a:solidFill>
-                          <a:latin typeface="맑은 고딕"/>
+                          <a:latin typeface="Segoe UI"/>
+                          <a:ea typeface="맑은 고딕"/>
+                          <a:cs typeface="맑은 고딕"/>
                         </a:rPr>
                         <a:t>상권 순증감·폐업률·업종다양성</a:t>
                       </a:r>
@@ -21747,9 +22631,11 @@
                       <a:r>
                         <a:rPr sz="1000">
                           <a:solidFill>
-                            <a:srgbClr val="151C26"/>
+                            <a:srgbClr val="12151A"/>
                           </a:solidFill>
-                          <a:latin typeface="맑은 고딕"/>
+                          <a:latin typeface="Segoe UI"/>
+                          <a:ea typeface="맑은 고딕"/>
+                          <a:cs typeface="맑은 고딕"/>
                         </a:rPr>
                         <a:t>소상공인 상가(상권)정보</a:t>
                       </a:r>
@@ -21770,9 +22656,11 @@
                       <a:r>
                         <a:rPr sz="1000">
                           <a:solidFill>
-                            <a:srgbClr val="151C26"/>
+                            <a:srgbClr val="12151A"/>
                           </a:solidFill>
-                          <a:latin typeface="맑은 고딕"/>
+                          <a:latin typeface="Segoe UI"/>
+                          <a:ea typeface="맑은 고딕"/>
+                          <a:cs typeface="맑은 고딕"/>
                         </a:rPr>
                         <a:t>소상공인시장진흥공단</a:t>
                       </a:r>
@@ -21793,9 +22681,11 @@
                       <a:r>
                         <a:rPr sz="1000">
                           <a:solidFill>
-                            <a:srgbClr val="151C26"/>
+                            <a:srgbClr val="12151A"/>
                           </a:solidFill>
-                          <a:latin typeface="맑은 고딕"/>
+                          <a:latin typeface="Segoe UI"/>
+                          <a:ea typeface="맑은 고딕"/>
+                          <a:cs typeface="맑은 고딕"/>
                         </a:rPr>
                         <a:t>data.go.kr</a:t>
                       </a:r>
@@ -21816,9 +22706,11 @@
                       <a:r>
                         <a:rPr sz="1000">
                           <a:solidFill>
-                            <a:srgbClr val="151C26"/>
+                            <a:srgbClr val="12151A"/>
                           </a:solidFill>
-                          <a:latin typeface="맑은 고딕"/>
+                          <a:latin typeface="Segoe UI"/>
+                          <a:ea typeface="맑은 고딕"/>
+                          <a:cs typeface="맑은 고딕"/>
                         </a:rPr>
                         <a:t>상권업종분류, 행정동명, 위경도</a:t>
                       </a:r>
@@ -21839,9 +22731,11 @@
                       <a:r>
                         <a:rPr sz="1000">
                           <a:solidFill>
-                            <a:srgbClr val="151C26"/>
+                            <a:srgbClr val="12151A"/>
                           </a:solidFill>
-                          <a:latin typeface="맑은 고딕"/>
+                          <a:latin typeface="Segoe UI"/>
+                          <a:ea typeface="맑은 고딕"/>
+                          <a:cs typeface="맑은 고딕"/>
                         </a:rPr>
                         <a:t>사업체밀도·생활편의시설</a:t>
                       </a:r>
@@ -21864,9 +22758,11 @@
                       <a:r>
                         <a:rPr sz="1000">
                           <a:solidFill>
-                            <a:srgbClr val="151C26"/>
+                            <a:srgbClr val="12151A"/>
                           </a:solidFill>
-                          <a:latin typeface="맑은 고딕"/>
+                          <a:latin typeface="Segoe UI"/>
+                          <a:ea typeface="맑은 고딕"/>
+                          <a:cs typeface="맑은 고딕"/>
                         </a:rPr>
                         <a:t>생활SOC 표준데이터 6종</a:t>
                       </a:r>
@@ -21887,9 +22783,11 @@
                       <a:r>
                         <a:rPr sz="1000">
                           <a:solidFill>
-                            <a:srgbClr val="151C26"/>
+                            <a:srgbClr val="12151A"/>
                           </a:solidFill>
-                          <a:latin typeface="맑은 고딕"/>
+                          <a:latin typeface="Segoe UI"/>
+                          <a:ea typeface="맑은 고딕"/>
+                          <a:cs typeface="맑은 고딕"/>
                         </a:rPr>
                         <a:t>공공데이터포털</a:t>
                       </a:r>
@@ -21910,9 +22808,11 @@
                       <a:r>
                         <a:rPr sz="1000">
                           <a:solidFill>
-                            <a:srgbClr val="151C26"/>
+                            <a:srgbClr val="12151A"/>
                           </a:solidFill>
-                          <a:latin typeface="맑은 고딕"/>
+                          <a:latin typeface="Segoe UI"/>
+                          <a:ea typeface="맑은 고딕"/>
+                          <a:cs typeface="맑은 고딕"/>
                         </a:rPr>
                         <a:t>data.go.kr</a:t>
                       </a:r>
@@ -21933,9 +22833,11 @@
                       <a:r>
                         <a:rPr sz="1000">
                           <a:solidFill>
-                            <a:srgbClr val="151C26"/>
+                            <a:srgbClr val="12151A"/>
                           </a:solidFill>
-                          <a:latin typeface="맑은 고딕"/>
+                          <a:latin typeface="Segoe UI"/>
+                          <a:ea typeface="맑은 고딕"/>
+                          <a:cs typeface="맑은 고딕"/>
                         </a:rPr>
                         <a:t>시설명, 소재지주소, 위경도</a:t>
                       </a:r>
@@ -21956,9 +22858,11 @@
                       <a:r>
                         <a:rPr sz="1000">
                           <a:solidFill>
-                            <a:srgbClr val="151C26"/>
+                            <a:srgbClr val="12151A"/>
                           </a:solidFill>
-                          <a:latin typeface="맑은 고딕"/>
+                          <a:latin typeface="Segoe UI"/>
+                          <a:ea typeface="맑은 고딕"/>
+                          <a:cs typeface="맑은 고딕"/>
                         </a:rPr>
                         <a:t>생활SOC 접근성·인구당 SOC수</a:t>
                       </a:r>
@@ -21981,9 +22885,11 @@
                       <a:r>
                         <a:rPr sz="1000">
                           <a:solidFill>
-                            <a:srgbClr val="151C26"/>
+                            <a:srgbClr val="12151A"/>
                           </a:solidFill>
-                          <a:latin typeface="맑은 고딕"/>
+                          <a:latin typeface="Segoe UI"/>
+                          <a:ea typeface="맑은 고딕"/>
+                          <a:cs typeface="맑은 고딕"/>
                         </a:rPr>
                         <a:t>빈집 통계</a:t>
                       </a:r>
@@ -22004,9 +22910,11 @@
                       <a:r>
                         <a:rPr sz="1000">
                           <a:solidFill>
-                            <a:srgbClr val="151C26"/>
+                            <a:srgbClr val="12151A"/>
                           </a:solidFill>
-                          <a:latin typeface="맑은 고딕"/>
+                          <a:latin typeface="Segoe UI"/>
+                          <a:ea typeface="맑은 고딕"/>
+                          <a:cs typeface="맑은 고딕"/>
                         </a:rPr>
                         <a:t>통계청 / 한국부동산원</a:t>
                       </a:r>
@@ -22027,9 +22935,11 @@
                       <a:r>
                         <a:rPr sz="1000">
                           <a:solidFill>
-                            <a:srgbClr val="151C26"/>
+                            <a:srgbClr val="12151A"/>
                           </a:solidFill>
-                          <a:latin typeface="맑은 고딕"/>
+                          <a:latin typeface="Segoe UI"/>
+                          <a:ea typeface="맑은 고딕"/>
+                          <a:cs typeface="맑은 고딕"/>
                         </a:rPr>
                         <a:t>kosis.kr / emptyhomes.kr</a:t>
                       </a:r>
@@ -22050,9 +22960,11 @@
                       <a:r>
                         <a:rPr sz="1000">
                           <a:solidFill>
-                            <a:srgbClr val="151C26"/>
+                            <a:srgbClr val="12151A"/>
                           </a:solidFill>
-                          <a:latin typeface="맑은 고딕"/>
+                          <a:latin typeface="Segoe UI"/>
+                          <a:ea typeface="맑은 고딕"/>
+                          <a:cs typeface="맑은 고딕"/>
                         </a:rPr>
                         <a:t>시군구, 빈집수, 빈집사유</a:t>
                       </a:r>
@@ -22073,9 +22985,11 @@
                       <a:r>
                         <a:rPr sz="1000">
                           <a:solidFill>
-                            <a:srgbClr val="151C26"/>
+                            <a:srgbClr val="12151A"/>
                           </a:solidFill>
-                          <a:latin typeface="맑은 고딕"/>
+                          <a:latin typeface="Segoe UI"/>
+                          <a:ea typeface="맑은 고딕"/>
+                          <a:cs typeface="맑은 고딕"/>
                         </a:rPr>
                         <a:t>빈집률</a:t>
                       </a:r>
@@ -22098,9 +23012,11 @@
                       <a:r>
                         <a:rPr sz="1000">
                           <a:solidFill>
-                            <a:srgbClr val="151C26"/>
+                            <a:srgbClr val="12151A"/>
                           </a:solidFill>
-                          <a:latin typeface="맑은 고딕"/>
+                          <a:latin typeface="Segoe UI"/>
+                          <a:ea typeface="맑은 고딕"/>
+                          <a:cs typeface="맑은 고딕"/>
                         </a:rPr>
                         <a:t>버스정류소 현황</a:t>
                       </a:r>
@@ -22121,9 +23037,11 @@
                       <a:r>
                         <a:rPr sz="1000">
                           <a:solidFill>
-                            <a:srgbClr val="151C26"/>
+                            <a:srgbClr val="12151A"/>
                           </a:solidFill>
-                          <a:latin typeface="맑은 고딕"/>
+                          <a:latin typeface="Segoe UI"/>
+                          <a:ea typeface="맑은 고딕"/>
+                          <a:cs typeface="맑은 고딕"/>
                         </a:rPr>
                         <a:t>천안시</a:t>
                       </a:r>
@@ -22144,9 +23062,11 @@
                       <a:r>
                         <a:rPr sz="1000">
                           <a:solidFill>
-                            <a:srgbClr val="151C26"/>
+                            <a:srgbClr val="12151A"/>
                           </a:solidFill>
-                          <a:latin typeface="맑은 고딕"/>
+                          <a:latin typeface="Segoe UI"/>
+                          <a:ea typeface="맑은 고딕"/>
+                          <a:cs typeface="맑은 고딕"/>
                         </a:rPr>
                         <a:t>cheonan.go.kr</a:t>
                       </a:r>
@@ -22167,9 +23087,11 @@
                       <a:r>
                         <a:rPr sz="1000">
                           <a:solidFill>
-                            <a:srgbClr val="151C26"/>
+                            <a:srgbClr val="12151A"/>
                           </a:solidFill>
-                          <a:latin typeface="맑은 고딕"/>
+                          <a:latin typeface="Segoe UI"/>
+                          <a:ea typeface="맑은 고딕"/>
+                          <a:cs typeface="맑은 고딕"/>
                         </a:rPr>
                         <a:t>정류소명, 소재지</a:t>
                       </a:r>
@@ -22190,9 +23112,11 @@
                       <a:r>
                         <a:rPr sz="1000">
                           <a:solidFill>
-                            <a:srgbClr val="151C26"/>
+                            <a:srgbClr val="12151A"/>
                           </a:solidFill>
-                          <a:latin typeface="맑은 고딕"/>
+                          <a:latin typeface="Segoe UI"/>
+                          <a:ea typeface="맑은 고딕"/>
+                          <a:cs typeface="맑은 고딕"/>
                         </a:rPr>
                         <a:t>정류장 밀도</a:t>
                       </a:r>
@@ -22239,9 +23163,11 @@
             <a:r>
               <a:rPr sz="1350" b="1">
                 <a:solidFill>
-                  <a:srgbClr val="151C26"/>
-                </a:solidFill>
-                <a:latin typeface="맑은 고딕"/>
+                  <a:srgbClr val="12151A"/>
+                </a:solidFill>
+                <a:latin typeface="Segoe UI"/>
+                <a:ea typeface="맑은 고딕"/>
+                <a:cs typeface="맑은 고딕"/>
               </a:rPr>
               <a:t>수집 시점 및 데이터 상태</a:t>
             </a:r>
@@ -22282,9 +23208,11 @@
                       <a:r>
                         <a:rPr sz="1000" b="1">
                           <a:solidFill>
-                            <a:srgbClr val="151C26"/>
+                            <a:srgbClr val="12151A"/>
                           </a:solidFill>
-                          <a:latin typeface="맑은 고딕"/>
+                          <a:latin typeface="Segoe UI"/>
+                          <a:ea typeface="맑은 고딕"/>
+                          <a:cs typeface="맑은 고딕"/>
                         </a:rPr>
                         <a:t>지표군</a:t>
                       </a:r>
@@ -22292,7 +23220,7 @@
                   </a:txBody>
                   <a:tcPr anchor="ctr">
                     <a:solidFill>
-                      <a:srgbClr val="F5F7FA"/>
+                      <a:srgbClr val="F6F7F9"/>
                     </a:solidFill>
                   </a:tcPr>
                 </a:tc>
@@ -22305,9 +23233,11 @@
                       <a:r>
                         <a:rPr sz="1000" b="1">
                           <a:solidFill>
-                            <a:srgbClr val="151C26"/>
+                            <a:srgbClr val="12151A"/>
                           </a:solidFill>
-                          <a:latin typeface="맑은 고딕"/>
+                          <a:latin typeface="Segoe UI"/>
+                          <a:ea typeface="맑은 고딕"/>
+                          <a:cs typeface="맑은 고딕"/>
                         </a:rPr>
                         <a:t>상태</a:t>
                       </a:r>
@@ -22315,7 +23245,7 @@
                   </a:txBody>
                   <a:tcPr anchor="ctr">
                     <a:solidFill>
-                      <a:srgbClr val="F5F7FA"/>
+                      <a:srgbClr val="F6F7F9"/>
                     </a:solidFill>
                   </a:tcPr>
                 </a:tc>
@@ -22328,9 +23258,11 @@
                       <a:r>
                         <a:rPr sz="1000" b="1">
                           <a:solidFill>
-                            <a:srgbClr val="151C26"/>
+                            <a:srgbClr val="12151A"/>
                           </a:solidFill>
-                          <a:latin typeface="맑은 고딕"/>
+                          <a:latin typeface="Segoe UI"/>
+                          <a:ea typeface="맑은 고딕"/>
+                          <a:cs typeface="맑은 고딕"/>
                         </a:rPr>
                         <a:t>출처</a:t>
                       </a:r>
@@ -22338,7 +23270,7 @@
                   </a:txBody>
                   <a:tcPr anchor="ctr">
                     <a:solidFill>
-                      <a:srgbClr val="F5F7FA"/>
+                      <a:srgbClr val="F6F7F9"/>
                     </a:solidFill>
                   </a:tcPr>
                 </a:tc>
@@ -22351,9 +23283,11 @@
                       <a:r>
                         <a:rPr sz="1000" b="1">
                           <a:solidFill>
-                            <a:srgbClr val="151C26"/>
+                            <a:srgbClr val="12151A"/>
                           </a:solidFill>
-                          <a:latin typeface="맑은 고딕"/>
+                          <a:latin typeface="Segoe UI"/>
+                          <a:ea typeface="맑은 고딕"/>
+                          <a:cs typeface="맑은 고딕"/>
                         </a:rPr>
                         <a:t>비고</a:t>
                       </a:r>
@@ -22361,7 +23295,7 @@
                   </a:txBody>
                   <a:tcPr anchor="ctr">
                     <a:solidFill>
-                      <a:srgbClr val="F5F7FA"/>
+                      <a:srgbClr val="F6F7F9"/>
                     </a:solidFill>
                   </a:tcPr>
                 </a:tc>
@@ -22376,9 +23310,11 @@
                       <a:r>
                         <a:rPr sz="950">
                           <a:solidFill>
-                            <a:srgbClr val="151C26"/>
+                            <a:srgbClr val="12151A"/>
                           </a:solidFill>
-                          <a:latin typeface="맑은 고딕"/>
+                          <a:latin typeface="Segoe UI"/>
+                          <a:ea typeface="맑은 고딕"/>
+                          <a:cs typeface="맑은 고딕"/>
                         </a:rPr>
                         <a:t>인구</a:t>
                       </a:r>
@@ -22399,9 +23335,11 @@
                       <a:r>
                         <a:rPr sz="950">
                           <a:solidFill>
-                            <a:srgbClr val="151C26"/>
+                            <a:srgbClr val="12151A"/>
                           </a:solidFill>
-                          <a:latin typeface="맑은 고딕"/>
+                          <a:latin typeface="Segoe UI"/>
+                          <a:ea typeface="맑은 고딕"/>
+                          <a:cs typeface="맑은 고딕"/>
                         </a:rPr>
                         <a:t>실데이터</a:t>
                       </a:r>
@@ -22422,9 +23360,11 @@
                       <a:r>
                         <a:rPr sz="950">
                           <a:solidFill>
-                            <a:srgbClr val="151C26"/>
+                            <a:srgbClr val="12151A"/>
                           </a:solidFill>
-                          <a:latin typeface="맑은 고딕"/>
+                          <a:latin typeface="Segoe UI"/>
+                          <a:ea typeface="맑은 고딕"/>
+                          <a:cs typeface="맑은 고딕"/>
                         </a:rPr>
                         <a:t>행안부 주민등록 인구통계(jumin.mois.go.kr)</a:t>
                       </a:r>
@@ -22445,9 +23385,11 @@
                       <a:r>
                         <a:rPr sz="950">
                           <a:solidFill>
-                            <a:srgbClr val="151C26"/>
+                            <a:srgbClr val="12151A"/>
                           </a:solidFill>
-                          <a:latin typeface="맑은 고딕"/>
+                          <a:latin typeface="Segoe UI"/>
+                          <a:ea typeface="맑은 고딕"/>
+                          <a:cs typeface="맑은 고딕"/>
                         </a:rPr>
                         <a:t>2021~2026년(5년환산), 25개 생활권, 연령기준 2026년07월</a:t>
                       </a:r>
@@ -22470,9 +23412,11 @@
                       <a:r>
                         <a:rPr sz="950">
                           <a:solidFill>
-                            <a:srgbClr val="151C26"/>
+                            <a:srgbClr val="12151A"/>
                           </a:solidFill>
-                          <a:latin typeface="맑은 고딕"/>
+                          <a:latin typeface="Segoe UI"/>
+                          <a:ea typeface="맑은 고딕"/>
+                          <a:cs typeface="맑은 고딕"/>
                         </a:rPr>
                         <a:t>상권</a:t>
                       </a:r>
@@ -22493,9 +23437,11 @@
                       <a:r>
                         <a:rPr sz="950">
                           <a:solidFill>
-                            <a:srgbClr val="151C26"/>
+                            <a:srgbClr val="12151A"/>
                           </a:solidFill>
-                          <a:latin typeface="맑은 고딕"/>
+                          <a:latin typeface="Segoe UI"/>
+                          <a:ea typeface="맑은 고딕"/>
+                          <a:cs typeface="맑은 고딕"/>
                         </a:rPr>
                         <a:t>예시(미투입)</a:t>
                       </a:r>
@@ -22516,9 +23462,11 @@
                       <a:r>
                         <a:rPr sz="950">
                           <a:solidFill>
-                            <a:srgbClr val="151C26"/>
+                            <a:srgbClr val="12151A"/>
                           </a:solidFill>
-                          <a:latin typeface="맑은 고딕"/>
+                          <a:latin typeface="Segoe UI"/>
+                          <a:ea typeface="맑은 고딕"/>
+                          <a:cs typeface="맑은 고딕"/>
                         </a:rPr>
                         <a:t>예시 생성(seed=20260832)</a:t>
                       </a:r>
@@ -22539,9 +23487,11 @@
                       <a:r>
                         <a:rPr sz="950">
                           <a:solidFill>
-                            <a:srgbClr val="151C26"/>
+                            <a:srgbClr val="12151A"/>
                           </a:solidFill>
-                          <a:latin typeface="맑은 고딕"/>
+                          <a:latin typeface="Segoe UI"/>
+                          <a:ea typeface="맑은 고딕"/>
+                          <a:cs typeface="맑은 고딕"/>
                         </a:rPr>
                         <a:t>data/raw/localdata_license*.csv 투입 시 자동 대체</a:t>
                       </a:r>
@@ -22564,9 +23514,11 @@
                       <a:r>
                         <a:rPr sz="950">
                           <a:solidFill>
-                            <a:srgbClr val="151C26"/>
+                            <a:srgbClr val="12151A"/>
                           </a:solidFill>
-                          <a:latin typeface="맑은 고딕"/>
+                          <a:latin typeface="Segoe UI"/>
+                          <a:ea typeface="맑은 고딕"/>
+                          <a:cs typeface="맑은 고딕"/>
                         </a:rPr>
                         <a:t>생활SOC</a:t>
                       </a:r>
@@ -22587,9 +23539,11 @@
                       <a:r>
                         <a:rPr sz="950">
                           <a:solidFill>
-                            <a:srgbClr val="151C26"/>
+                            <a:srgbClr val="12151A"/>
                           </a:solidFill>
-                          <a:latin typeface="맑은 고딕"/>
+                          <a:latin typeface="Segoe UI"/>
+                          <a:ea typeface="맑은 고딕"/>
+                          <a:cs typeface="맑은 고딕"/>
                         </a:rPr>
                         <a:t>예시(미투입)</a:t>
                       </a:r>
@@ -22610,9 +23564,11 @@
                       <a:r>
                         <a:rPr sz="950">
                           <a:solidFill>
-                            <a:srgbClr val="151C26"/>
+                            <a:srgbClr val="12151A"/>
                           </a:solidFill>
-                          <a:latin typeface="맑은 고딕"/>
+                          <a:latin typeface="Segoe UI"/>
+                          <a:ea typeface="맑은 고딕"/>
+                          <a:cs typeface="맑은 고딕"/>
                         </a:rPr>
                         <a:t>예시 생성(seed=20260833)</a:t>
                       </a:r>
@@ -22633,9 +23589,11 @@
                       <a:r>
                         <a:rPr sz="950">
                           <a:solidFill>
-                            <a:srgbClr val="151C26"/>
+                            <a:srgbClr val="12151A"/>
                           </a:solidFill>
-                          <a:latin typeface="맑은 고딕"/>
+                          <a:latin typeface="Segoe UI"/>
+                          <a:ea typeface="맑은 고딕"/>
+                          <a:cs typeface="맑은 고딕"/>
                         </a:rPr>
                         <a:t>data/raw/facility_*.csv 투입 시 자동 대체</a:t>
                       </a:r>
@@ -22658,9 +23616,11 @@
                       <a:r>
                         <a:rPr sz="950">
                           <a:solidFill>
-                            <a:srgbClr val="151C26"/>
+                            <a:srgbClr val="12151A"/>
                           </a:solidFill>
-                          <a:latin typeface="맑은 고딕"/>
+                          <a:latin typeface="Segoe UI"/>
+                          <a:ea typeface="맑은 고딕"/>
+                          <a:cs typeface="맑은 고딕"/>
                         </a:rPr>
                         <a:t>주거</a:t>
                       </a:r>
@@ -22681,9 +23641,11 @@
                       <a:r>
                         <a:rPr sz="950">
                           <a:solidFill>
-                            <a:srgbClr val="151C26"/>
+                            <a:srgbClr val="12151A"/>
                           </a:solidFill>
-                          <a:latin typeface="맑은 고딕"/>
+                          <a:latin typeface="Segoe UI"/>
+                          <a:ea typeface="맑은 고딕"/>
+                          <a:cs typeface="맑은 고딕"/>
                         </a:rPr>
                         <a:t>예시(미투입)</a:t>
                       </a:r>
@@ -22704,9 +23666,11 @@
                       <a:r>
                         <a:rPr sz="950">
                           <a:solidFill>
-                            <a:srgbClr val="151C26"/>
+                            <a:srgbClr val="12151A"/>
                           </a:solidFill>
-                          <a:latin typeface="맑은 고딕"/>
+                          <a:latin typeface="Segoe UI"/>
+                          <a:ea typeface="맑은 고딕"/>
+                          <a:cs typeface="맑은 고딕"/>
                         </a:rPr>
                         <a:t>예시 생성(seed=20260834)</a:t>
                       </a:r>
@@ -22727,9 +23691,11 @@
                       <a:r>
                         <a:rPr sz="950">
                           <a:solidFill>
-                            <a:srgbClr val="151C26"/>
+                            <a:srgbClr val="12151A"/>
                           </a:solidFill>
-                          <a:latin typeface="맑은 고딕"/>
+                          <a:latin typeface="Segoe UI"/>
+                          <a:ea typeface="맑은 고딕"/>
+                          <a:cs typeface="맑은 고딕"/>
                         </a:rPr>
                         <a:t>data/raw/vacant_house.csv 투입 시 자동 대체</a:t>
                       </a:r>
@@ -22752,9 +23718,11 @@
                       <a:r>
                         <a:rPr sz="950">
                           <a:solidFill>
-                            <a:srgbClr val="151C26"/>
+                            <a:srgbClr val="12151A"/>
                           </a:solidFill>
-                          <a:latin typeface="맑은 고딕"/>
+                          <a:latin typeface="Segoe UI"/>
+                          <a:ea typeface="맑은 고딕"/>
+                          <a:cs typeface="맑은 고딕"/>
                         </a:rPr>
                         <a:t>이동성</a:t>
                       </a:r>
@@ -22775,9 +23743,11 @@
                       <a:r>
                         <a:rPr sz="950">
                           <a:solidFill>
-                            <a:srgbClr val="151C26"/>
+                            <a:srgbClr val="12151A"/>
                           </a:solidFill>
-                          <a:latin typeface="맑은 고딕"/>
+                          <a:latin typeface="Segoe UI"/>
+                          <a:ea typeface="맑은 고딕"/>
+                          <a:cs typeface="맑은 고딕"/>
                         </a:rPr>
                         <a:t>예시(미투입)</a:t>
                       </a:r>
@@ -22798,9 +23768,11 @@
                       <a:r>
                         <a:rPr sz="950">
                           <a:solidFill>
-                            <a:srgbClr val="151C26"/>
+                            <a:srgbClr val="12151A"/>
                           </a:solidFill>
-                          <a:latin typeface="맑은 고딕"/>
+                          <a:latin typeface="Segoe UI"/>
+                          <a:ea typeface="맑은 고딕"/>
+                          <a:cs typeface="맑은 고딕"/>
                         </a:rPr>
                         <a:t>예시 생성(seed=20260836)</a:t>
                       </a:r>
@@ -22821,9 +23793,11 @@
                       <a:r>
                         <a:rPr sz="950">
                           <a:solidFill>
-                            <a:srgbClr val="151C26"/>
+                            <a:srgbClr val="12151A"/>
                           </a:solidFill>
-                          <a:latin typeface="맑은 고딕"/>
+                          <a:latin typeface="Segoe UI"/>
+                          <a:ea typeface="맑은 고딕"/>
+                          <a:cs typeface="맑은 고딕"/>
                         </a:rPr>
                         <a:t>data/raw/bus_stop.csv 투입 시 자동 대체</a:t>
                       </a:r>
@@ -22870,9 +23844,11 @@
             <a:r>
               <a:rPr sz="950" b="0">
                 <a:solidFill>
-                  <a:srgbClr val="5D6874"/>
-                </a:solidFill>
-                <a:latin typeface="맑은 고딕"/>
+                  <a:srgbClr val="52514E"/>
+                </a:solidFill>
+                <a:latin typeface="Segoe UI"/>
+                <a:ea typeface="맑은 고딕"/>
+                <a:cs typeface="맑은 고딕"/>
               </a:rPr>
               <a:t>천안 균형발전 나침반(CBC)</a:t>
             </a:r>
@@ -22909,9 +23885,11 @@
             <a:r>
               <a:rPr sz="950" b="0">
                 <a:solidFill>
-                  <a:srgbClr val="5D6874"/>
-                </a:solidFill>
-                <a:latin typeface="맑은 고딕"/>
+                  <a:srgbClr val="52514E"/>
+                </a:solidFill>
+                <a:latin typeface="Segoe UI"/>
+                <a:ea typeface="맑은 고딕"/>
+                <a:cs typeface="맑은 고딕"/>
               </a:rPr>
               <a:t>5</a:t>
             </a:r>
@@ -22966,9 +23944,11 @@
             <a:r>
               <a:rPr sz="1150" b="1">
                 <a:solidFill>
-                  <a:srgbClr val="D64545"/>
-                </a:solidFill>
-                <a:latin typeface="맑은 고딕"/>
+                  <a:srgbClr val="2A78D6"/>
+                </a:solidFill>
+                <a:latin typeface="Segoe UI"/>
+                <a:ea typeface="맑은 고딕"/>
+                <a:cs typeface="맑은 고딕"/>
               </a:rPr>
               <a:t>METHOD · 01</a:t>
             </a:r>
@@ -23005,9 +23985,11 @@
             <a:r>
               <a:rPr sz="2700" b="1">
                 <a:solidFill>
-                  <a:srgbClr val="151C26"/>
-                </a:solidFill>
-                <a:latin typeface="맑은 고딕"/>
+                  <a:srgbClr val="12151A"/>
+                </a:solidFill>
+                <a:latin typeface="Segoe UI"/>
+                <a:ea typeface="맑은 고딕"/>
+                <a:cs typeface="맑은 고딕"/>
               </a:rPr>
               <a:t>분석 공간단위를 25개 '생활권'으로 재설계한 이유</a:t>
             </a:r>
@@ -23044,9 +24026,11 @@
             <a:r>
               <a:rPr sz="1350" b="0">
                 <a:solidFill>
-                  <a:srgbClr val="5D6874"/>
-                </a:solidFill>
-                <a:latin typeface="맑은 고딕"/>
+                  <a:srgbClr val="52514E"/>
+                </a:solidFill>
+                <a:latin typeface="Segoe UI"/>
+                <a:ea typeface="맑은 고딕"/>
+                <a:cs typeface="맑은 고딕"/>
               </a:rPr>
               <a:t>데이터마다 공간 키가 달라서 생기는 오차를, 지표를 만들기 전에 먼저 제거했다.</a:t>
             </a:r>
@@ -23070,7 +24054,7 @@
             </a:avLst>
           </a:prstGeom>
           <a:solidFill>
-            <a:srgbClr val="FDF2F2"/>
+            <a:srgbClr val="FDF3F2"/>
           </a:solidFill>
           <a:ln>
             <a:noFill/>
@@ -23127,9 +24111,11 @@
             <a:r>
               <a:rPr sz="1350" b="1">
                 <a:solidFill>
-                  <a:srgbClr val="D64545"/>
-                </a:solidFill>
-                <a:latin typeface="맑은 고딕"/>
+                  <a:srgbClr val="2A78D6"/>
+                </a:solidFill>
+                <a:latin typeface="Segoe UI"/>
+                <a:ea typeface="맑은 고딕"/>
+                <a:cs typeface="맑은 고딕"/>
               </a:rPr>
               <a:t>문제 — 공간 키 불일치</a:t>
             </a:r>
@@ -23166,9 +24152,11 @@
             <a:r>
               <a:rPr sz="1150" b="0">
                 <a:solidFill>
-                  <a:srgbClr val="151C26"/>
-                </a:solidFill>
-                <a:latin typeface="맑은 고딕"/>
+                  <a:srgbClr val="12151A"/>
+                </a:solidFill>
+                <a:latin typeface="Segoe UI"/>
+                <a:ea typeface="맑은 고딕"/>
+                <a:cs typeface="맑은 고딕"/>
               </a:rPr>
               <a:t>· 주민등록 인구통계는 행정동 기준 (성정1동 / 성정2동)</a:t>
             </a:r>
@@ -23185,9 +24173,11 @@
             <a:r>
               <a:rPr sz="1150" b="0">
                 <a:solidFill>
-                  <a:srgbClr val="151C26"/>
-                </a:solidFill>
-                <a:latin typeface="맑은 고딕"/>
+                  <a:srgbClr val="12151A"/>
+                </a:solidFill>
+                <a:latin typeface="Segoe UI"/>
+                <a:ea typeface="맑은 고딕"/>
+                <a:cs typeface="맑은 고딕"/>
               </a:rPr>
               <a:t>· 인허가·상가정보는 주소 문자열 = 법정동 기준 (성정동 하나)</a:t>
             </a:r>
@@ -23204,9 +24194,11 @@
             <a:r>
               <a:rPr sz="1150" b="0">
                 <a:solidFill>
-                  <a:srgbClr val="151C26"/>
-                </a:solidFill>
-                <a:latin typeface="맑은 고딕"/>
+                  <a:srgbClr val="12151A"/>
+                </a:solidFill>
+                <a:latin typeface="Segoe UI"/>
+                <a:ea typeface="맑은 고딕"/>
+                <a:cs typeface="맑은 고딕"/>
               </a:rPr>
               <a:t>· 주소만으로는 성정동 점포를 1동·2동으로 나눌 근거가 없다</a:t>
             </a:r>
@@ -23230,7 +24222,7 @@
             </a:avLst>
           </a:prstGeom>
           <a:solidFill>
-            <a:srgbClr val="F0F7F2"/>
+            <a:srgbClr val="EFF7F3"/>
           </a:solidFill>
           <a:ln>
             <a:noFill/>
@@ -23287,9 +24279,11 @@
             <a:r>
               <a:rPr sz="1350" b="1">
                 <a:solidFill>
-                  <a:srgbClr val="3E9B7C"/>
-                </a:solidFill>
-                <a:latin typeface="맑은 고딕"/>
+                  <a:srgbClr val="1BAF7A"/>
+                </a:solidFill>
+                <a:latin typeface="Segoe UI"/>
+                <a:ea typeface="맑은 고딕"/>
+                <a:cs typeface="맑은 고딕"/>
               </a:rPr>
               <a:t>해결 — 1:1 대응이 되는 수준까지 통합</a:t>
             </a:r>
@@ -23326,9 +24320,11 @@
             <a:r>
               <a:rPr sz="1150" b="0">
                 <a:solidFill>
-                  <a:srgbClr val="151C26"/>
-                </a:solidFill>
-                <a:latin typeface="맑은 고딕"/>
+                  <a:srgbClr val="12151A"/>
+                </a:solidFill>
+                <a:latin typeface="Segoe UI"/>
+                <a:ea typeface="맑은 고딕"/>
+                <a:cs typeface="맑은 고딕"/>
               </a:rPr>
               <a:t>· 성정1·2동 → 성정동 / 쌍용1·2·3동 → 쌍용동</a:t>
             </a:r>
@@ -23345,9 +24341,11 @@
             <a:r>
               <a:rPr sz="1150" b="0">
                 <a:solidFill>
-                  <a:srgbClr val="151C26"/>
-                </a:solidFill>
-                <a:latin typeface="맑은 고딕"/>
+                  <a:srgbClr val="12151A"/>
+                </a:solidFill>
+                <a:latin typeface="Segoe UI"/>
+                <a:ea typeface="맑은 고딕"/>
+                <a:cs typeface="맑은 고딕"/>
               </a:rPr>
               <a:t>· 원성1·2동 → 원성동 / 불당1·2동 → 불당동 / 부성1·2동 → 부성동</a:t>
             </a:r>
@@ -23364,9 +24362,11 @@
             <a:r>
               <a:rPr sz="1150" b="0">
                 <a:solidFill>
-                  <a:srgbClr val="151C26"/>
-                </a:solidFill>
-                <a:latin typeface="맑은 고딕"/>
+                  <a:srgbClr val="12151A"/>
+                </a:solidFill>
+                <a:latin typeface="Segoe UI"/>
+                <a:ea typeface="맑은 고딕"/>
+                <a:cs typeface="맑은 고딕"/>
               </a:rPr>
               <a:t>· 결과: 31개 행정동 → 분석 가능한 25개 생활권</a:t>
             </a:r>
@@ -23403,9 +24403,11 @@
             <a:r>
               <a:rPr sz="1400" b="1">
                 <a:solidFill>
-                  <a:srgbClr val="151C26"/>
-                </a:solidFill>
-                <a:latin typeface="맑은 고딕"/>
+                  <a:srgbClr val="12151A"/>
+                </a:solidFill>
+                <a:latin typeface="Segoe UI"/>
+                <a:ea typeface="맑은 고딕"/>
+                <a:cs typeface="맑은 고딕"/>
               </a:rPr>
               <a:t>왜 이 단계가 중요한가 — 생태학적 오류(ecological fallacy)의 사전 차단</a:t>
             </a:r>
@@ -23442,9 +24444,11 @@
             <a:r>
               <a:rPr sz="1200" b="0">
                 <a:solidFill>
-                  <a:srgbClr val="5D6874"/>
-                </a:solidFill>
-                <a:latin typeface="맑은 고딕"/>
+                  <a:srgbClr val="52514E"/>
+                </a:solidFill>
+                <a:latin typeface="Segoe UI"/>
+                <a:ea typeface="맑은 고딕"/>
+                <a:cs typeface="맑은 고딕"/>
               </a:rPr>
               <a:t>공간 키가 다른 데이터를 억지로 맞추려면 인구 비례 안분 같은 가정이 필요한데, 그 가정이 틀리면 지표 전체가 조용히 오염된다.</a:t>
             </a:r>
@@ -23461,9 +24465,11 @@
             <a:r>
               <a:rPr sz="1200" b="0">
                 <a:solidFill>
-                  <a:srgbClr val="5D6874"/>
-                </a:solidFill>
-                <a:latin typeface="맑은 고딕"/>
+                  <a:srgbClr val="52514E"/>
+                </a:solidFill>
+                <a:latin typeface="Segoe UI"/>
+                <a:ea typeface="맑은 고딕"/>
+                <a:cs typeface="맑은 고딕"/>
               </a:rPr>
               <a:t>격차 분석은 '어느 동이 더 나쁜가'를 다투는 작업이라 배분 오차가 곧 결론의 오차가 된다. 정밀도를 조금 포기하는 대신 배분 가정을 아예 쓰지 않는 쪽을 택했다.</a:t>
             </a:r>
@@ -23502,9 +24508,11 @@
                       <a:r>
                         <a:rPr sz="950" b="1">
                           <a:solidFill>
-                            <a:srgbClr val="151C26"/>
+                            <a:srgbClr val="12151A"/>
                           </a:solidFill>
-                          <a:latin typeface="맑은 고딕"/>
+                          <a:latin typeface="Segoe UI"/>
+                          <a:ea typeface="맑은 고딕"/>
+                          <a:cs typeface="맑은 고딕"/>
                         </a:rPr>
                         <a:t>권역유형</a:t>
                       </a:r>
@@ -23512,7 +24520,7 @@
                   </a:txBody>
                   <a:tcPr anchor="ctr">
                     <a:solidFill>
-                      <a:srgbClr val="F5F7FA"/>
+                      <a:srgbClr val="F6F7F9"/>
                     </a:solidFill>
                   </a:tcPr>
                 </a:tc>
@@ -23525,9 +24533,11 @@
                       <a:r>
                         <a:rPr sz="950" b="1">
                           <a:solidFill>
-                            <a:srgbClr val="151C26"/>
+                            <a:srgbClr val="12151A"/>
                           </a:solidFill>
-                          <a:latin typeface="맑은 고딕"/>
+                          <a:latin typeface="Segoe UI"/>
+                          <a:ea typeface="맑은 고딕"/>
+                          <a:cs typeface="맑은 고딕"/>
                         </a:rPr>
                         <a:t>소속 생활권</a:t>
                       </a:r>
@@ -23535,7 +24545,7 @@
                   </a:txBody>
                   <a:tcPr anchor="ctr">
                     <a:solidFill>
-                      <a:srgbClr val="F5F7FA"/>
+                      <a:srgbClr val="F6F7F9"/>
                     </a:solidFill>
                   </a:tcPr>
                 </a:tc>
@@ -23550,9 +24560,11 @@
                       <a:r>
                         <a:rPr sz="900">
                           <a:solidFill>
-                            <a:srgbClr val="151C26"/>
+                            <a:srgbClr val="12151A"/>
                           </a:solidFill>
-                          <a:latin typeface="맑은 고딕"/>
+                          <a:latin typeface="Segoe UI"/>
+                          <a:ea typeface="맑은 고딕"/>
+                          <a:cs typeface="맑은 고딕"/>
                         </a:rPr>
                         <a:t>기성시가지</a:t>
                       </a:r>
@@ -23573,9 +24585,11 @@
                       <a:r>
                         <a:rPr sz="900">
                           <a:solidFill>
-                            <a:srgbClr val="151C26"/>
+                            <a:srgbClr val="12151A"/>
                           </a:solidFill>
-                          <a:latin typeface="맑은 고딕"/>
+                          <a:latin typeface="Segoe UI"/>
+                          <a:ea typeface="맑은 고딕"/>
+                          <a:cs typeface="맑은 고딕"/>
                         </a:rPr>
                         <a:t>신안동, 성정동, 쌍용동, 청룡동, 신방동</a:t>
                       </a:r>
@@ -23598,9 +24612,11 @@
                       <a:r>
                         <a:rPr sz="900">
                           <a:solidFill>
-                            <a:srgbClr val="151C26"/>
+                            <a:srgbClr val="12151A"/>
                           </a:solidFill>
-                          <a:latin typeface="맑은 고딕"/>
+                          <a:latin typeface="Segoe UI"/>
+                          <a:ea typeface="맑은 고딕"/>
+                          <a:cs typeface="맑은 고딕"/>
                         </a:rPr>
                         <a:t>농촌면</a:t>
                       </a:r>
@@ -23621,9 +24637,11 @@
                       <a:r>
                         <a:rPr sz="900">
                           <a:solidFill>
-                            <a:srgbClr val="151C26"/>
+                            <a:srgbClr val="12151A"/>
                           </a:solidFill>
-                          <a:latin typeface="맑은 고딕"/>
+                          <a:latin typeface="Segoe UI"/>
+                          <a:ea typeface="맑은 고딕"/>
+                          <a:cs typeface="맑은 고딕"/>
                         </a:rPr>
                         <a:t>풍세면, 병천면, 입장면, 성남면, 북면, 동면</a:t>
                       </a:r>
@@ -23646,9 +24664,11 @@
                       <a:r>
                         <a:rPr sz="900">
                           <a:solidFill>
-                            <a:srgbClr val="151C26"/>
+                            <a:srgbClr val="12151A"/>
                           </a:solidFill>
-                          <a:latin typeface="맑은 고딕"/>
+                          <a:latin typeface="Segoe UI"/>
+                          <a:ea typeface="맑은 고딕"/>
+                          <a:cs typeface="맑은 고딕"/>
                         </a:rPr>
                         <a:t>신도심</a:t>
                       </a:r>
@@ -23669,9 +24689,11 @@
                       <a:r>
                         <a:rPr sz="900">
                           <a:solidFill>
-                            <a:srgbClr val="151C26"/>
+                            <a:srgbClr val="12151A"/>
                           </a:solidFill>
-                          <a:latin typeface="맑은 고딕"/>
+                          <a:latin typeface="Segoe UI"/>
+                          <a:ea typeface="맑은 고딕"/>
+                          <a:cs typeface="맑은 고딕"/>
                         </a:rPr>
                         <a:t>불당동, 부성동, 백석동</a:t>
                       </a:r>
@@ -23694,9 +24716,11 @@
                       <a:r>
                         <a:rPr sz="900">
                           <a:solidFill>
-                            <a:srgbClr val="151C26"/>
+                            <a:srgbClr val="12151A"/>
                           </a:solidFill>
-                          <a:latin typeface="맑은 고딕"/>
+                          <a:latin typeface="Segoe UI"/>
+                          <a:ea typeface="맑은 고딕"/>
+                          <a:cs typeface="맑은 고딕"/>
                         </a:rPr>
                         <a:t>원도심</a:t>
                       </a:r>
@@ -23717,9 +24741,11 @@
                       <a:r>
                         <a:rPr sz="900">
                           <a:solidFill>
-                            <a:srgbClr val="151C26"/>
+                            <a:srgbClr val="12151A"/>
                           </a:solidFill>
-                          <a:latin typeface="맑은 고딕"/>
+                          <a:latin typeface="Segoe UI"/>
+                          <a:ea typeface="맑은 고딕"/>
+                          <a:cs typeface="맑은 고딕"/>
                         </a:rPr>
                         <a:t>문성동, 일봉동, 봉명동, 원성동, 중앙동</a:t>
                       </a:r>
@@ -23742,9 +24768,11 @@
                       <a:r>
                         <a:rPr sz="900">
                           <a:solidFill>
-                            <a:srgbClr val="151C26"/>
+                            <a:srgbClr val="12151A"/>
                           </a:solidFill>
-                          <a:latin typeface="맑은 고딕"/>
+                          <a:latin typeface="Segoe UI"/>
+                          <a:ea typeface="맑은 고딕"/>
+                          <a:cs typeface="맑은 고딕"/>
                         </a:rPr>
                         <a:t>읍지역</a:t>
                       </a:r>
@@ -23765,9 +24793,11 @@
                       <a:r>
                         <a:rPr sz="900">
                           <a:solidFill>
-                            <a:srgbClr val="151C26"/>
+                            <a:srgbClr val="12151A"/>
                           </a:solidFill>
-                          <a:latin typeface="맑은 고딕"/>
+                          <a:latin typeface="Segoe UI"/>
+                          <a:ea typeface="맑은 고딕"/>
+                          <a:cs typeface="맑은 고딕"/>
                         </a:rPr>
                         <a:t>직산읍, 목천읍, 성거읍, 성환읍</a:t>
                       </a:r>
@@ -23814,9 +24844,11 @@
             <a:r>
               <a:rPr sz="950" b="0">
                 <a:solidFill>
-                  <a:srgbClr val="5D6874"/>
-                </a:solidFill>
-                <a:latin typeface="맑은 고딕"/>
+                  <a:srgbClr val="52514E"/>
+                </a:solidFill>
+                <a:latin typeface="Segoe UI"/>
+                <a:ea typeface="맑은 고딕"/>
+                <a:cs typeface="맑은 고딕"/>
               </a:rPr>
               <a:t>천안 균형발전 나침반(CBC)</a:t>
             </a:r>
@@ -23853,9 +24885,11 @@
             <a:r>
               <a:rPr sz="950" b="0">
                 <a:solidFill>
-                  <a:srgbClr val="5D6874"/>
-                </a:solidFill>
-                <a:latin typeface="맑은 고딕"/>
+                  <a:srgbClr val="52514E"/>
+                </a:solidFill>
+                <a:latin typeface="Segoe UI"/>
+                <a:ea typeface="맑은 고딕"/>
+                <a:cs typeface="맑은 고딕"/>
               </a:rPr>
               <a:t>6</a:t>
             </a:r>
@@ -23910,9 +24944,11 @@
             <a:r>
               <a:rPr sz="1150" b="1">
                 <a:solidFill>
-                  <a:srgbClr val="D64545"/>
-                </a:solidFill>
-                <a:latin typeface="맑은 고딕"/>
+                  <a:srgbClr val="2A78D6"/>
+                </a:solidFill>
+                <a:latin typeface="Segoe UI"/>
+                <a:ea typeface="맑은 고딕"/>
+                <a:cs typeface="맑은 고딕"/>
               </a:rPr>
               <a:t>METHOD · 02</a:t>
             </a:r>
@@ -23949,9 +24985,11 @@
             <a:r>
               <a:rPr sz="2700" b="1">
                 <a:solidFill>
-                  <a:srgbClr val="151C26"/>
-                </a:solidFill>
-                <a:latin typeface="맑은 고딕"/>
+                  <a:srgbClr val="12151A"/>
+                </a:solidFill>
+                <a:latin typeface="Segoe UI"/>
+                <a:ea typeface="맑은 고딕"/>
+                <a:cs typeface="맑은 고딕"/>
               </a:rPr>
               <a:t>진단 엔진 — 엔트로피 가중 균형발전지수(CBI)</a:t>
             </a:r>
@@ -23988,9 +25026,11 @@
             <a:r>
               <a:rPr sz="1350" b="0">
                 <a:solidFill>
-                  <a:srgbClr val="5D6874"/>
-                </a:solidFill>
-                <a:latin typeface="맑은 고딕"/>
+                  <a:srgbClr val="52514E"/>
+                </a:solidFill>
+                <a:latin typeface="Segoe UI"/>
+                <a:ea typeface="맑은 고딕"/>
+                <a:cs typeface="맑은 고딕"/>
               </a:rPr>
               <a:t>가중치를 연구자가 정하지 않는다. 데이터의 변별력에서 가중치를 유도한다.</a:t>
             </a:r>
@@ -24027,9 +25067,11 @@
             <a:r>
               <a:rPr sz="1400" b="1">
                 <a:solidFill>
-                  <a:srgbClr val="151C26"/>
-                </a:solidFill>
-                <a:latin typeface="맑은 고딕"/>
+                  <a:srgbClr val="12151A"/>
+                </a:solidFill>
+                <a:latin typeface="Segoe UI"/>
+                <a:ea typeface="맑은 고딕"/>
+                <a:cs typeface="맑은 고딕"/>
               </a:rPr>
               <a:t>5대 도메인 · 12개 지표</a:t>
             </a:r>
@@ -24051,7 +25093,7 @@
             <a:avLst/>
           </a:prstGeom>
           <a:solidFill>
-            <a:srgbClr val="D64545"/>
+            <a:srgbClr val="2A78D6"/>
           </a:solidFill>
           <a:ln>
             <a:noFill/>
@@ -24108,9 +25150,11 @@
             <a:r>
               <a:rPr sz="1250" b="1">
                 <a:solidFill>
-                  <a:srgbClr val="151C26"/>
-                </a:solidFill>
-                <a:latin typeface="맑은 고딕"/>
+                  <a:srgbClr val="12151A"/>
+                </a:solidFill>
+                <a:latin typeface="Segoe UI"/>
+                <a:ea typeface="맑은 고딕"/>
+                <a:cs typeface="맑은 고딕"/>
               </a:rPr>
               <a:t>인구활력</a:t>
             </a:r>
@@ -24147,9 +25191,11 @@
             <a:r>
               <a:rPr sz="1050" b="0">
                 <a:solidFill>
-                  <a:srgbClr val="5D6874"/>
-                </a:solidFill>
-                <a:latin typeface="맑은 고딕"/>
+                  <a:srgbClr val="52514E"/>
+                </a:solidFill>
+                <a:latin typeface="Segoe UI"/>
+                <a:ea typeface="맑은 고딕"/>
+                <a:cs typeface="맑은 고딕"/>
               </a:rPr>
               <a:t>5년 인구증감률 · 청년비율 · 고령비율</a:t>
             </a:r>
@@ -24171,7 +25217,7 @@
             <a:avLst/>
           </a:prstGeom>
           <a:solidFill>
-            <a:srgbClr val="C98A1E"/>
+            <a:srgbClr val="EDA100"/>
           </a:solidFill>
           <a:ln>
             <a:noFill/>
@@ -24228,9 +25274,11 @@
             <a:r>
               <a:rPr sz="1250" b="1">
                 <a:solidFill>
-                  <a:srgbClr val="151C26"/>
-                </a:solidFill>
-                <a:latin typeface="맑은 고딕"/>
+                  <a:srgbClr val="12151A"/>
+                </a:solidFill>
+                <a:latin typeface="Segoe UI"/>
+                <a:ea typeface="맑은 고딕"/>
+                <a:cs typeface="맑은 고딕"/>
               </a:rPr>
               <a:t>경제활력</a:t>
             </a:r>
@@ -24267,9 +25315,11 @@
             <a:r>
               <a:rPr sz="1050" b="0">
                 <a:solidFill>
-                  <a:srgbClr val="5D6874"/>
-                </a:solidFill>
-                <a:latin typeface="맑은 고딕"/>
+                  <a:srgbClr val="52514E"/>
+                </a:solidFill>
+                <a:latin typeface="Segoe UI"/>
+                <a:ea typeface="맑은 고딕"/>
+                <a:cs typeface="맑은 고딕"/>
               </a:rPr>
               <a:t>인구천명당 사업체수 · 상권 순증감 · 폐업률 · 업종 다양성</a:t>
             </a:r>
@@ -24291,7 +25341,7 @@
             <a:avLst/>
           </a:prstGeom>
           <a:solidFill>
-            <a:srgbClr val="2E7DD1"/>
+            <a:srgbClr val="2A78D6"/>
           </a:solidFill>
           <a:ln>
             <a:noFill/>
@@ -24348,9 +25398,11 @@
             <a:r>
               <a:rPr sz="1250" b="1">
                 <a:solidFill>
-                  <a:srgbClr val="151C26"/>
-                </a:solidFill>
-                <a:latin typeface="맑은 고딕"/>
+                  <a:srgbClr val="12151A"/>
+                </a:solidFill>
+                <a:latin typeface="Segoe UI"/>
+                <a:ea typeface="맑은 고딕"/>
+                <a:cs typeface="맑은 고딕"/>
               </a:rPr>
               <a:t>생활SOC</a:t>
             </a:r>
@@ -24387,9 +25439,11 @@
             <a:r>
               <a:rPr sz="1050" b="0">
                 <a:solidFill>
-                  <a:srgbClr val="5D6874"/>
-                </a:solidFill>
-                <a:latin typeface="맑은 고딕"/>
+                  <a:srgbClr val="52514E"/>
+                </a:solidFill>
+                <a:latin typeface="Segoe UI"/>
+                <a:ea typeface="맑은 고딕"/>
+                <a:cs typeface="맑은 고딕"/>
               </a:rPr>
               <a:t>생활SOC 접근성(중력모형) · 인구천명당 SOC수</a:t>
             </a:r>
@@ -24411,7 +25465,7 @@
             <a:avLst/>
           </a:prstGeom>
           <a:solidFill>
-            <a:srgbClr val="3E9B7C"/>
+            <a:srgbClr val="1BAF7A"/>
           </a:solidFill>
           <a:ln>
             <a:noFill/>
@@ -24468,9 +25522,11 @@
             <a:r>
               <a:rPr sz="1250" b="1">
                 <a:solidFill>
-                  <a:srgbClr val="151C26"/>
-                </a:solidFill>
-                <a:latin typeface="맑은 고딕"/>
+                  <a:srgbClr val="12151A"/>
+                </a:solidFill>
+                <a:latin typeface="Segoe UI"/>
+                <a:ea typeface="맑은 고딕"/>
+                <a:cs typeface="맑은 고딕"/>
               </a:rPr>
               <a:t>주거</a:t>
             </a:r>
@@ -24507,9 +25563,11 @@
             <a:r>
               <a:rPr sz="1050" b="0">
                 <a:solidFill>
-                  <a:srgbClr val="5D6874"/>
-                </a:solidFill>
-                <a:latin typeface="맑은 고딕"/>
+                  <a:srgbClr val="52514E"/>
+                </a:solidFill>
+                <a:latin typeface="Segoe UI"/>
+                <a:ea typeface="맑은 고딕"/>
+                <a:cs typeface="맑은 고딕"/>
               </a:rPr>
               <a:t>빈집 추정률 · 노후(30년+) 건물 비율</a:t>
             </a:r>
@@ -24588,9 +25646,11 @@
             <a:r>
               <a:rPr sz="1250" b="1">
                 <a:solidFill>
-                  <a:srgbClr val="151C26"/>
-                </a:solidFill>
-                <a:latin typeface="맑은 고딕"/>
+                  <a:srgbClr val="12151A"/>
+                </a:solidFill>
+                <a:latin typeface="Segoe UI"/>
+                <a:ea typeface="맑은 고딕"/>
+                <a:cs typeface="맑은 고딕"/>
               </a:rPr>
               <a:t>이동성</a:t>
             </a:r>
@@ -24627,9 +25687,11 @@
             <a:r>
               <a:rPr sz="1050" b="0">
                 <a:solidFill>
-                  <a:srgbClr val="5D6874"/>
-                </a:solidFill>
-                <a:latin typeface="맑은 고딕"/>
+                  <a:srgbClr val="52514E"/>
+                </a:solidFill>
+                <a:latin typeface="Segoe UI"/>
+                <a:ea typeface="맑은 고딕"/>
+                <a:cs typeface="맑은 고딕"/>
               </a:rPr>
               <a:t>km²당 버스정류장 수</a:t>
             </a:r>
@@ -24653,7 +25715,7 @@
             </a:avLst>
           </a:prstGeom>
           <a:solidFill>
-            <a:srgbClr val="F5F7FA"/>
+            <a:srgbClr val="F6F7F9"/>
           </a:solidFill>
           <a:ln>
             <a:noFill/>
@@ -24710,9 +25772,11 @@
             <a:r>
               <a:rPr sz="1400" b="1">
                 <a:solidFill>
-                  <a:srgbClr val="151C26"/>
-                </a:solidFill>
-                <a:latin typeface="맑은 고딕"/>
+                  <a:srgbClr val="12151A"/>
+                </a:solidFill>
+                <a:latin typeface="Segoe UI"/>
+                <a:ea typeface="맑은 고딕"/>
+                <a:cs typeface="맑은 고딕"/>
               </a:rPr>
               <a:t>왜 엔트로피 가중법인가</a:t>
             </a:r>
@@ -24749,9 +25813,11 @@
             <a:r>
               <a:rPr sz="1250" b="1">
                 <a:solidFill>
-                  <a:srgbClr val="D64545"/>
+                  <a:srgbClr val="2A78D6"/>
                 </a:solidFill>
                 <a:latin typeface="Consolas"/>
+                <a:ea typeface="Consolas"/>
+                <a:cs typeface="Consolas"/>
               </a:rPr>
               <a:t>pⱼ = zⱼ / Σzⱼ    eⱼ = −k·Σ pⱼ ln pⱼ    wⱼ ∝ (1 − eⱼ)</a:t>
             </a:r>
@@ -24788,9 +25854,11 @@
             <a:r>
               <a:rPr sz="1150" b="0">
                 <a:solidFill>
-                  <a:srgbClr val="5D6874"/>
-                </a:solidFill>
-                <a:latin typeface="맑은 고딕"/>
+                  <a:srgbClr val="52514E"/>
+                </a:solidFill>
+                <a:latin typeface="Segoe UI"/>
+                <a:ea typeface="맑은 고딕"/>
+                <a:cs typeface="맑은 고딕"/>
               </a:rPr>
               <a:t>생활권 간 차이를 잘 벌리는 지표일수록(=엔트로피가 낮을수록) 큰 가중치를 받는다.</a:t>
             </a:r>
@@ -24807,9 +25875,11 @@
             <a:r>
               <a:rPr sz="1150" b="0">
                 <a:solidFill>
-                  <a:srgbClr val="5D6874"/>
-                </a:solidFill>
-                <a:latin typeface="맑은 고딕"/>
+                  <a:srgbClr val="52514E"/>
+                </a:solidFill>
+                <a:latin typeface="Segoe UI"/>
+                <a:ea typeface="맑은 고딕"/>
+                <a:cs typeface="맑은 고딕"/>
               </a:rPr>
               <a:t/>
             </a:r>
@@ -24826,9 +25896,11 @@
             <a:r>
               <a:rPr sz="1150" b="0">
                 <a:solidFill>
-                  <a:srgbClr val="5D6874"/>
-                </a:solidFill>
-                <a:latin typeface="맑은 고딕"/>
+                  <a:srgbClr val="52514E"/>
+                </a:solidFill>
+                <a:latin typeface="Segoe UI"/>
+                <a:ea typeface="맑은 고딕"/>
+                <a:cs typeface="맑은 고딕"/>
               </a:rPr>
               <a:t>· 전문가 설문·AHP 방식과 달리 사람이 개입하지 않아 누가 돌려도 같은 값이 나온다</a:t>
             </a:r>
@@ -24845,9 +25917,11 @@
             <a:r>
               <a:rPr sz="1150" b="0">
                 <a:solidFill>
-                  <a:srgbClr val="5D6874"/>
-                </a:solidFill>
-                <a:latin typeface="맑은 고딕"/>
+                  <a:srgbClr val="52514E"/>
+                </a:solidFill>
+                <a:latin typeface="Segoe UI"/>
+                <a:ea typeface="맑은 고딕"/>
+                <a:cs typeface="맑은 고딕"/>
               </a:rPr>
               <a:t>· 지표가 추가·제외돼도 가중치가 자동 재배분되어 지수가 계속 유효하다</a:t>
             </a:r>
@@ -24864,9 +25938,11 @@
             <a:r>
               <a:rPr sz="1150" b="0">
                 <a:solidFill>
-                  <a:srgbClr val="5D6874"/>
-                </a:solidFill>
-                <a:latin typeface="맑은 고딕"/>
+                  <a:srgbClr val="52514E"/>
+                </a:solidFill>
+                <a:latin typeface="Segoe UI"/>
+                <a:ea typeface="맑은 고딕"/>
+                <a:cs typeface="맑은 고딕"/>
               </a:rPr>
               <a:t>· 심사·감사 과정에서 '왜 이 가중치인가'를 수식 한 줄로 답할 수 있다</a:t>
             </a:r>
@@ -24947,9 +26023,11 @@
             <a:r>
               <a:rPr sz="1150" b="0">
                 <a:solidFill>
-                  <a:srgbClr val="151C26"/>
-                </a:solidFill>
-                <a:latin typeface="맑은 고딕"/>
+                  <a:srgbClr val="12151A"/>
+                </a:solidFill>
+                <a:latin typeface="Segoe UI"/>
+                <a:ea typeface="맑은 고딕"/>
+                <a:cs typeface="맑은 고딕"/>
               </a:rPr>
               <a:t>정직성 장치 — 데이터가 없어 산출 불가한 지표는 임의값으로 채우지 않고 지수에서 제외하며,</a:t>
             </a:r>
@@ -24966,9 +26044,11 @@
             <a:r>
               <a:rPr sz="1150" b="0">
                 <a:solidFill>
-                  <a:srgbClr val="151C26"/>
-                </a:solidFill>
-                <a:latin typeface="맑은 고딕"/>
+                  <a:srgbClr val="12151A"/>
+                </a:solidFill>
+                <a:latin typeface="Segoe UI"/>
+                <a:ea typeface="맑은 고딕"/>
+                <a:cs typeface="맑은 고딕"/>
               </a:rPr>
               <a:t>제외 사실을 로그와 산출물에 남긴다. 결측을 평균으로 메워 순위를 왜곡하는 흔한 실수를 구조적으로 막는다.</a:t>
             </a:r>
@@ -25005,9 +26085,11 @@
             <a:r>
               <a:rPr sz="950" b="0">
                 <a:solidFill>
-                  <a:srgbClr val="5D6874"/>
-                </a:solidFill>
-                <a:latin typeface="맑은 고딕"/>
+                  <a:srgbClr val="52514E"/>
+                </a:solidFill>
+                <a:latin typeface="Segoe UI"/>
+                <a:ea typeface="맑은 고딕"/>
+                <a:cs typeface="맑은 고딕"/>
               </a:rPr>
               <a:t>천안 균형발전 나침반(CBC)</a:t>
             </a:r>
@@ -25044,9 +26126,11 @@
             <a:r>
               <a:rPr sz="950" b="0">
                 <a:solidFill>
-                  <a:srgbClr val="5D6874"/>
-                </a:solidFill>
-                <a:latin typeface="맑은 고딕"/>
+                  <a:srgbClr val="52514E"/>
+                </a:solidFill>
+                <a:latin typeface="Segoe UI"/>
+                <a:ea typeface="맑은 고딕"/>
+                <a:cs typeface="맑은 고딕"/>
               </a:rPr>
               <a:t>7</a:t>
             </a:r>
@@ -25101,9 +26185,11 @@
             <a:r>
               <a:rPr sz="1150" b="1">
                 <a:solidFill>
-                  <a:srgbClr val="D64545"/>
-                </a:solidFill>
-                <a:latin typeface="맑은 고딕"/>
+                  <a:srgbClr val="2A78D6"/>
+                </a:solidFill>
+                <a:latin typeface="Segoe UI"/>
+                <a:ea typeface="맑은 고딕"/>
+                <a:cs typeface="맑은 고딕"/>
               </a:rPr>
               <a:t>FINDING · 01</a:t>
             </a:r>
@@ -25140,9 +26226,11 @@
             <a:r>
               <a:rPr sz="2700" b="1">
                 <a:solidFill>
-                  <a:srgbClr val="151C26"/>
-                </a:solidFill>
-                <a:latin typeface="맑은 고딕"/>
+                  <a:srgbClr val="12151A"/>
+                </a:solidFill>
+                <a:latin typeface="Segoe UI"/>
+                <a:ea typeface="맑은 고딕"/>
+                <a:cs typeface="맑은 고딕"/>
               </a:rPr>
               <a:t>진단 결과 — 25개 생활권 CBI</a:t>
             </a:r>
@@ -25179,9 +26267,11 @@
             <a:r>
               <a:rPr sz="1350" b="0">
                 <a:solidFill>
-                  <a:srgbClr val="5D6874"/>
-                </a:solidFill>
-                <a:latin typeface="맑은 고딕"/>
+                  <a:srgbClr val="52514E"/>
+                </a:solidFill>
+                <a:latin typeface="Segoe UI"/>
+                <a:ea typeface="맑은 고딕"/>
+                <a:cs typeface="맑은 고딕"/>
               </a:rPr>
               <a:t>최상위 불당동 82점, 최하위 수신면 6점. 같은 시(市) 안의 격차다.</a:t>
             </a:r>
@@ -25204,8 +26294,8 @@
         </p:blipFill>
         <p:spPr>
           <a:xfrm>
-            <a:off x="1592529" y="2084831"/>
-            <a:ext cx="4532477" cy="4114800"/>
+            <a:off x="1682115" y="2084831"/>
+            <a:ext cx="4353305" cy="4114800"/>
           </a:xfrm>
           <a:prstGeom prst="rect">
             <a:avLst/>
@@ -25233,7 +26323,7 @@
           </a:solidFill>
           <a:ln w="12700">
             <a:solidFill>
-              <a:srgbClr val="E0E5EB"/>
+              <a:srgbClr val="E4E7EC"/>
             </a:solidFill>
           </a:ln>
           <a:effectLst/>
@@ -25273,7 +26363,7 @@
             <a:avLst/>
           </a:prstGeom>
           <a:solidFill>
-            <a:srgbClr val="D64545"/>
+            <a:srgbClr val="2A78D6"/>
           </a:solidFill>
           <a:ln>
             <a:noFill/>
@@ -25330,9 +26420,11 @@
             <a:r>
               <a:rPr sz="1050" b="1">
                 <a:solidFill>
-                  <a:srgbClr val="5D6874"/>
-                </a:solidFill>
-                <a:latin typeface="맑은 고딕"/>
+                  <a:srgbClr val="52514E"/>
+                </a:solidFill>
+                <a:latin typeface="Segoe UI"/>
+                <a:ea typeface="맑은 고딕"/>
+                <a:cs typeface="맑은 고딕"/>
               </a:rPr>
               <a:t>신도심 ↔ 원도심 격차</a:t>
             </a:r>
@@ -25369,9 +26461,11 @@
             <a:r>
               <a:rPr sz="2400" b="1">
                 <a:solidFill>
-                  <a:srgbClr val="151C26"/>
-                </a:solidFill>
-                <a:latin typeface="맑은 고딕"/>
+                  <a:srgbClr val="12151A"/>
+                </a:solidFill>
+                <a:latin typeface="Segoe UI"/>
+                <a:ea typeface="맑은 고딕"/>
+                <a:cs typeface="맑은 고딕"/>
               </a:rPr>
               <a:t>1.74배</a:t>
             </a:r>
@@ -25408,9 +26502,11 @@
             <a:r>
               <a:rPr sz="1000" b="0">
                 <a:solidFill>
-                  <a:srgbClr val="5D6874"/>
-                </a:solidFill>
-                <a:latin typeface="맑은 고딕"/>
+                  <a:srgbClr val="52514E"/>
+                </a:solidFill>
+                <a:latin typeface="Segoe UI"/>
+                <a:ea typeface="맑은 고딕"/>
+                <a:cs typeface="맑은 고딕"/>
               </a:rPr>
               <a:t>76.4 vs 44.0</a:t>
             </a:r>
@@ -25438,7 +26534,7 @@
           </a:solidFill>
           <a:ln w="12700">
             <a:solidFill>
-              <a:srgbClr val="E0E5EB"/>
+              <a:srgbClr val="E4E7EC"/>
             </a:solidFill>
           </a:ln>
           <a:effectLst/>
@@ -25478,7 +26574,7 @@
             <a:avLst/>
           </a:prstGeom>
           <a:solidFill>
-            <a:srgbClr val="C98A1E"/>
+            <a:srgbClr val="EDA100"/>
           </a:solidFill>
           <a:ln>
             <a:noFill/>
@@ -25535,9 +26631,11 @@
             <a:r>
               <a:rPr sz="1050" b="1">
                 <a:solidFill>
-                  <a:srgbClr val="5D6874"/>
-                </a:solidFill>
-                <a:latin typeface="맑은 고딕"/>
+                  <a:srgbClr val="52514E"/>
+                </a:solidFill>
+                <a:latin typeface="Segoe UI"/>
+                <a:ea typeface="맑은 고딕"/>
+                <a:cs typeface="맑은 고딕"/>
               </a:rPr>
               <a:t>CBI 지니계수</a:t>
             </a:r>
@@ -25574,9 +26672,11 @@
             <a:r>
               <a:rPr sz="2400" b="1">
                 <a:solidFill>
-                  <a:srgbClr val="151C26"/>
-                </a:solidFill>
-                <a:latin typeface="맑은 고딕"/>
+                  <a:srgbClr val="12151A"/>
+                </a:solidFill>
+                <a:latin typeface="Segoe UI"/>
+                <a:ea typeface="맑은 고딕"/>
+                <a:cs typeface="맑은 고딕"/>
               </a:rPr>
               <a:t>0.318</a:t>
             </a:r>
@@ -25613,9 +26713,11 @@
             <a:r>
               <a:rPr sz="1000" b="0">
                 <a:solidFill>
-                  <a:srgbClr val="5D6874"/>
-                </a:solidFill>
-                <a:latin typeface="맑은 고딕"/>
+                  <a:srgbClr val="52514E"/>
+                </a:solidFill>
+                <a:latin typeface="Segoe UI"/>
+                <a:ea typeface="맑은 고딕"/>
+                <a:cs typeface="맑은 고딕"/>
               </a:rPr>
               <a:t>변동계수 56.5%</a:t>
             </a:r>
@@ -25643,7 +26745,7 @@
           </a:solidFill>
           <a:ln w="12700">
             <a:solidFill>
-              <a:srgbClr val="E0E5EB"/>
+              <a:srgbClr val="E4E7EC"/>
             </a:solidFill>
           </a:ln>
           <a:effectLst/>
@@ -25683,7 +26785,7 @@
             <a:avLst/>
           </a:prstGeom>
           <a:solidFill>
-            <a:srgbClr val="2E7DD1"/>
+            <a:srgbClr val="2A78D6"/>
           </a:solidFill>
           <a:ln>
             <a:noFill/>
@@ -25740,9 +26842,11 @@
             <a:r>
               <a:rPr sz="1050" b="1">
                 <a:solidFill>
-                  <a:srgbClr val="5D6874"/>
-                </a:solidFill>
-                <a:latin typeface="맑은 고딕"/>
+                  <a:srgbClr val="52514E"/>
+                </a:solidFill>
+                <a:latin typeface="Segoe UI"/>
+                <a:ea typeface="맑은 고딕"/>
+                <a:cs typeface="맑은 고딕"/>
               </a:rPr>
               <a:t>군집 유형화</a:t>
             </a:r>
@@ -25779,9 +26883,11 @@
             <a:r>
               <a:rPr sz="2400" b="1">
                 <a:solidFill>
-                  <a:srgbClr val="151C26"/>
-                </a:solidFill>
-                <a:latin typeface="맑은 고딕"/>
+                  <a:srgbClr val="12151A"/>
+                </a:solidFill>
+                <a:latin typeface="Segoe UI"/>
+                <a:ea typeface="맑은 고딕"/>
+                <a:cs typeface="맑은 고딕"/>
               </a:rPr>
               <a:t>3개 유형</a:t>
             </a:r>
@@ -25818,9 +26924,11 @@
             <a:r>
               <a:rPr sz="1000" b="0">
                 <a:solidFill>
-                  <a:srgbClr val="5D6874"/>
-                </a:solidFill>
-                <a:latin typeface="맑은 고딕"/>
+                  <a:srgbClr val="52514E"/>
+                </a:solidFill>
+                <a:latin typeface="Segoe UI"/>
+                <a:ea typeface="맑은 고딕"/>
+                <a:cs typeface="맑은 고딕"/>
               </a:rPr>
               <a:t>실루엣 계수 0.322</a:t>
             </a:r>
@@ -25857,9 +26965,11 @@
             <a:r>
               <a:rPr sz="1000" b="0">
                 <a:solidFill>
-                  <a:srgbClr val="5D6874"/>
-                </a:solidFill>
-                <a:latin typeface="맑은 고딕"/>
+                  <a:srgbClr val="52514E"/>
+                </a:solidFill>
+                <a:latin typeface="Segoe UI"/>
+                <a:ea typeface="맑은 고딕"/>
+                <a:cs typeface="맑은 고딕"/>
               </a:rPr>
               <a:t>쇠퇴단계는 CBI 순위가 아니라 다차원 패턴으로 분류된다.</a:t>
             </a:r>
@@ -25896,9 +27006,11 @@
             <a:r>
               <a:rPr sz="950" b="0">
                 <a:solidFill>
-                  <a:srgbClr val="5D6874"/>
-                </a:solidFill>
-                <a:latin typeface="맑은 고딕"/>
+                  <a:srgbClr val="52514E"/>
+                </a:solidFill>
+                <a:latin typeface="Segoe UI"/>
+                <a:ea typeface="맑은 고딕"/>
+                <a:cs typeface="맑은 고딕"/>
               </a:rPr>
               <a:t>천안 균형발전 나침반(CBC)</a:t>
             </a:r>
@@ -25935,9 +27047,11 @@
             <a:r>
               <a:rPr sz="950" b="0">
                 <a:solidFill>
-                  <a:srgbClr val="5D6874"/>
-                </a:solidFill>
-                <a:latin typeface="맑은 고딕"/>
+                  <a:srgbClr val="52514E"/>
+                </a:solidFill>
+                <a:latin typeface="Segoe UI"/>
+                <a:ea typeface="맑은 고딕"/>
+                <a:cs typeface="맑은 고딕"/>
               </a:rPr>
               <a:t>8</a:t>
             </a:r>

--- a/deliverables/기획서_천안균형발전나침반_CBC.pptx
+++ b/deliverables/기획서_천안균형발전나침반_CBC.pptx
@@ -8556,8 +8556,8 @@
         </p:blipFill>
         <p:spPr>
           <a:xfrm>
-            <a:off x="1329188" y="2212848"/>
-            <a:ext cx="3504678" cy="3931920"/>
+            <a:off x="859400" y="2212848"/>
+            <a:ext cx="4444255" cy="3931920"/>
           </a:xfrm>
           <a:prstGeom prst="rect">
             <a:avLst/>

--- a/deliverables/기획서_천안균형발전나침반_CBC.pptx
+++ b/deliverables/기획서_천안균형발전나침반_CBC.pptx
@@ -3224,7 +3224,7 @@
                 <a:solidFill>
                   <a:srgbClr val="7FB3EE"/>
                 </a:solidFill>
-                <a:latin typeface="Segoe UI"/>
+                <a:latin typeface="맑은 고딕"/>
                 <a:ea typeface="맑은 고딕"/>
                 <a:cs typeface="맑은 고딕"/>
               </a:rPr>
@@ -3265,7 +3265,7 @@
                 <a:solidFill>
                   <a:srgbClr val="FFFFFF"/>
                 </a:solidFill>
-                <a:latin typeface="Segoe UI"/>
+                <a:latin typeface="맑은 고딕"/>
                 <a:ea typeface="맑은 고딕"/>
                 <a:cs typeface="맑은 고딕"/>
               </a:rPr>
@@ -3306,7 +3306,7 @@
                 <a:solidFill>
                   <a:srgbClr val="8894A6"/>
                 </a:solidFill>
-                <a:latin typeface="Segoe UI"/>
+                <a:latin typeface="맑은 고딕"/>
                 <a:ea typeface="맑은 고딕"/>
                 <a:cs typeface="맑은 고딕"/>
               </a:rPr>
@@ -3389,7 +3389,7 @@
                 <a:solidFill>
                   <a:srgbClr val="EAEEF4"/>
                 </a:solidFill>
-                <a:latin typeface="Segoe UI"/>
+                <a:latin typeface="맑은 고딕"/>
                 <a:ea typeface="맑은 고딕"/>
                 <a:cs typeface="맑은 고딕"/>
               </a:rPr>
@@ -3410,7 +3410,7 @@
                 <a:solidFill>
                   <a:srgbClr val="EAEEF4"/>
                 </a:solidFill>
-                <a:latin typeface="Segoe UI"/>
+                <a:latin typeface="맑은 고딕"/>
                 <a:ea typeface="맑은 고딕"/>
                 <a:cs typeface="맑은 고딕"/>
               </a:rPr>
@@ -3451,7 +3451,7 @@
                 <a:solidFill>
                   <a:srgbClr val="6E7B8C"/>
                 </a:solidFill>
-                <a:latin typeface="Segoe UI"/>
+                <a:latin typeface="맑은 고딕"/>
                 <a:ea typeface="맑은 고딕"/>
                 <a:cs typeface="맑은 고딕"/>
               </a:rPr>
@@ -3492,7 +3492,7 @@
                 <a:solidFill>
                   <a:srgbClr val="FFFFFF"/>
                 </a:solidFill>
-                <a:latin typeface="Segoe UI"/>
+                <a:latin typeface="맑은 고딕"/>
                 <a:ea typeface="맑은 고딕"/>
                 <a:cs typeface="맑은 고딕"/>
               </a:rPr>
@@ -3533,7 +3533,7 @@
                 <a:solidFill>
                   <a:srgbClr val="6E7B8C"/>
                 </a:solidFill>
-                <a:latin typeface="Segoe UI"/>
+                <a:latin typeface="맑은 고딕"/>
                 <a:ea typeface="맑은 고딕"/>
                 <a:cs typeface="맑은 고딕"/>
               </a:rPr>
@@ -3574,7 +3574,7 @@
                 <a:solidFill>
                   <a:srgbClr val="FFFFFF"/>
                 </a:solidFill>
-                <a:latin typeface="Segoe UI"/>
+                <a:latin typeface="맑은 고딕"/>
                 <a:ea typeface="맑은 고딕"/>
                 <a:cs typeface="맑은 고딕"/>
               </a:rPr>
@@ -3615,7 +3615,7 @@
                 <a:solidFill>
                   <a:srgbClr val="6E7B8C"/>
                 </a:solidFill>
-                <a:latin typeface="Segoe UI"/>
+                <a:latin typeface="맑은 고딕"/>
                 <a:ea typeface="맑은 고딕"/>
                 <a:cs typeface="맑은 고딕"/>
               </a:rPr>
@@ -3656,7 +3656,7 @@
                 <a:solidFill>
                   <a:srgbClr val="FFFFFF"/>
                 </a:solidFill>
-                <a:latin typeface="Segoe UI"/>
+                <a:latin typeface="맑은 고딕"/>
                 <a:ea typeface="맑은 고딕"/>
                 <a:cs typeface="맑은 고딕"/>
               </a:rPr>
@@ -3697,11 +3697,11 @@
                 <a:solidFill>
                   <a:srgbClr val="8A97A8"/>
                 </a:solidFill>
-                <a:latin typeface="Segoe UI"/>
-                <a:ea typeface="맑은 고딕"/>
-                <a:cs typeface="맑은 고딕"/>
-              </a:rPr>
-              <a:t>○○팀 · 홍길동</a:t>
+                <a:latin typeface="맑은 고딕"/>
+                <a:ea typeface="맑은 고딕"/>
+                <a:cs typeface="맑은 고딕"/>
+              </a:rPr>
+              <a:t>다시봄 · 팀원 이름을 적어주세요</a:t>
             </a:r>
           </a:p>
         </p:txBody>
@@ -3738,7 +3738,7 @@
                 <a:solidFill>
                   <a:srgbClr val="FAB219"/>
                 </a:solidFill>
-                <a:latin typeface="Segoe UI"/>
+                <a:latin typeface="맑은 고딕"/>
                 <a:ea typeface="맑은 고딕"/>
                 <a:cs typeface="맑은 고딕"/>
               </a:rPr>
@@ -3797,7 +3797,7 @@
                 <a:solidFill>
                   <a:srgbClr val="2A78D6"/>
                 </a:solidFill>
-                <a:latin typeface="Segoe UI"/>
+                <a:latin typeface="맑은 고딕"/>
                 <a:ea typeface="맑은 고딕"/>
                 <a:cs typeface="맑은 고딕"/>
               </a:rPr>
@@ -3838,7 +3838,7 @@
                 <a:solidFill>
                   <a:srgbClr val="12151A"/>
                 </a:solidFill>
-                <a:latin typeface="Segoe UI"/>
+                <a:latin typeface="맑은 고딕"/>
                 <a:ea typeface="맑은 고딕"/>
                 <a:cs typeface="맑은 고딕"/>
               </a:rPr>
@@ -3879,7 +3879,7 @@
                 <a:solidFill>
                   <a:srgbClr val="52514E"/>
                 </a:solidFill>
-                <a:latin typeface="Segoe UI"/>
+                <a:latin typeface="맑은 고딕"/>
                 <a:ea typeface="맑은 고딕"/>
                 <a:cs typeface="맑은 고딕"/>
               </a:rPr>
@@ -3988,7 +3988,7 @@
                 <a:solidFill>
                   <a:srgbClr val="2A78D6"/>
                 </a:solidFill>
-                <a:latin typeface="Segoe UI"/>
+                <a:latin typeface="맑은 고딕"/>
                 <a:ea typeface="맑은 고딕"/>
                 <a:cs typeface="맑은 고딕"/>
               </a:rPr>
@@ -4029,7 +4029,7 @@
                 <a:solidFill>
                   <a:srgbClr val="12151A"/>
                 </a:solidFill>
-                <a:latin typeface="Segoe UI"/>
+                <a:latin typeface="맑은 고딕"/>
                 <a:ea typeface="맑은 고딕"/>
                 <a:cs typeface="맑은 고딕"/>
               </a:rPr>
@@ -4050,7 +4050,7 @@
                 <a:solidFill>
                   <a:srgbClr val="12151A"/>
                 </a:solidFill>
-                <a:latin typeface="Segoe UI"/>
+                <a:latin typeface="맑은 고딕"/>
                 <a:ea typeface="맑은 고딕"/>
                 <a:cs typeface="맑은 고딕"/>
               </a:rPr>
@@ -4071,7 +4071,7 @@
                 <a:solidFill>
                   <a:srgbClr val="12151A"/>
                 </a:solidFill>
-                <a:latin typeface="Segoe UI"/>
+                <a:latin typeface="맑은 고딕"/>
                 <a:ea typeface="맑은 고딕"/>
                 <a:cs typeface="맑은 고딕"/>
               </a:rPr>
@@ -4156,7 +4156,7 @@
                 <a:solidFill>
                   <a:srgbClr val="4A3AA7"/>
                 </a:solidFill>
-                <a:latin typeface="Segoe UI"/>
+                <a:latin typeface="맑은 고딕"/>
                 <a:ea typeface="맑은 고딕"/>
                 <a:cs typeface="맑은 고딕"/>
               </a:rPr>
@@ -4197,7 +4197,7 @@
                 <a:solidFill>
                   <a:srgbClr val="12151A"/>
                 </a:solidFill>
-                <a:latin typeface="Segoe UI"/>
+                <a:latin typeface="맑은 고딕"/>
                 <a:ea typeface="맑은 고딕"/>
                 <a:cs typeface="맑은 고딕"/>
               </a:rPr>
@@ -4218,7 +4218,7 @@
                 <a:solidFill>
                   <a:srgbClr val="12151A"/>
                 </a:solidFill>
-                <a:latin typeface="Segoe UI"/>
+                <a:latin typeface="맑은 고딕"/>
                 <a:ea typeface="맑은 고딕"/>
                 <a:cs typeface="맑은 고딕"/>
               </a:rPr>
@@ -4239,7 +4239,7 @@
                 <a:solidFill>
                   <a:srgbClr val="12151A"/>
                 </a:solidFill>
-                <a:latin typeface="Segoe UI"/>
+                <a:latin typeface="맑은 고딕"/>
                 <a:ea typeface="맑은 고딕"/>
                 <a:cs typeface="맑은 고딕"/>
               </a:rPr>
@@ -4324,7 +4324,7 @@
                 <a:solidFill>
                   <a:srgbClr val="12151A"/>
                 </a:solidFill>
-                <a:latin typeface="Segoe UI"/>
+                <a:latin typeface="맑은 고딕"/>
                 <a:ea typeface="맑은 고딕"/>
                 <a:cs typeface="맑은 고딕"/>
               </a:rPr>
@@ -4345,7 +4345,7 @@
                 <a:solidFill>
                   <a:srgbClr val="12151A"/>
                 </a:solidFill>
-                <a:latin typeface="Segoe UI"/>
+                <a:latin typeface="맑은 고딕"/>
                 <a:ea typeface="맑은 고딕"/>
                 <a:cs typeface="맑은 고딕"/>
               </a:rPr>
@@ -4386,7 +4386,7 @@
                 <a:solidFill>
                   <a:srgbClr val="52514E"/>
                 </a:solidFill>
-                <a:latin typeface="Segoe UI"/>
+                <a:latin typeface="맑은 고딕"/>
                 <a:ea typeface="맑은 고딕"/>
                 <a:cs typeface="맑은 고딕"/>
               </a:rPr>
@@ -4427,7 +4427,7 @@
                 <a:solidFill>
                   <a:srgbClr val="52514E"/>
                 </a:solidFill>
-                <a:latin typeface="Segoe UI"/>
+                <a:latin typeface="맑은 고딕"/>
                 <a:ea typeface="맑은 고딕"/>
                 <a:cs typeface="맑은 고딕"/>
               </a:rPr>
@@ -4486,7 +4486,7 @@
                 <a:solidFill>
                   <a:srgbClr val="2A78D6"/>
                 </a:solidFill>
-                <a:latin typeface="Segoe UI"/>
+                <a:latin typeface="맑은 고딕"/>
                 <a:ea typeface="맑은 고딕"/>
                 <a:cs typeface="맑은 고딕"/>
               </a:rPr>
@@ -4527,7 +4527,7 @@
                 <a:solidFill>
                   <a:srgbClr val="12151A"/>
                 </a:solidFill>
-                <a:latin typeface="Segoe UI"/>
+                <a:latin typeface="맑은 고딕"/>
                 <a:ea typeface="맑은 고딕"/>
                 <a:cs typeface="맑은 고딕"/>
               </a:rPr>
@@ -4568,7 +4568,7 @@
                 <a:solidFill>
                   <a:srgbClr val="52514E"/>
                 </a:solidFill>
-                <a:latin typeface="Segoe UI"/>
+                <a:latin typeface="맑은 고딕"/>
                 <a:ea typeface="맑은 고딕"/>
                 <a:cs typeface="맑은 고딕"/>
               </a:rPr>
@@ -4677,7 +4677,7 @@
                 <a:solidFill>
                   <a:srgbClr val="1BAF7A"/>
                 </a:solidFill>
-                <a:latin typeface="Segoe UI"/>
+                <a:latin typeface="맑은 고딕"/>
                 <a:ea typeface="맑은 고딕"/>
                 <a:cs typeface="맑은 고딕"/>
               </a:rPr>
@@ -4718,7 +4718,7 @@
                 <a:solidFill>
                   <a:srgbClr val="12151A"/>
                 </a:solidFill>
-                <a:latin typeface="Segoe UI"/>
+                <a:latin typeface="맑은 고딕"/>
                 <a:ea typeface="맑은 고딕"/>
                 <a:cs typeface="맑은 고딕"/>
               </a:rPr>
@@ -4739,7 +4739,7 @@
                 <a:solidFill>
                   <a:srgbClr val="12151A"/>
                 </a:solidFill>
-                <a:latin typeface="Segoe UI"/>
+                <a:latin typeface="맑은 고딕"/>
                 <a:ea typeface="맑은 고딕"/>
                 <a:cs typeface="맑은 고딕"/>
               </a:rPr>
@@ -4780,7 +4780,7 @@
                 <a:solidFill>
                   <a:srgbClr val="52514E"/>
                 </a:solidFill>
-                <a:latin typeface="Segoe UI"/>
+                <a:latin typeface="맑은 고딕"/>
                 <a:ea typeface="맑은 고딕"/>
                 <a:cs typeface="맑은 고딕"/>
               </a:rPr>
@@ -4821,7 +4821,7 @@
                 <a:solidFill>
                   <a:srgbClr val="52514E"/>
                 </a:solidFill>
-                <a:latin typeface="Segoe UI"/>
+                <a:latin typeface="맑은 고딕"/>
                 <a:ea typeface="맑은 고딕"/>
                 <a:cs typeface="맑은 고딕"/>
               </a:rPr>
@@ -4880,7 +4880,7 @@
                 <a:solidFill>
                   <a:srgbClr val="2A78D6"/>
                 </a:solidFill>
-                <a:latin typeface="Segoe UI"/>
+                <a:latin typeface="맑은 고딕"/>
                 <a:ea typeface="맑은 고딕"/>
                 <a:cs typeface="맑은 고딕"/>
               </a:rPr>
@@ -4921,7 +4921,7 @@
                 <a:solidFill>
                   <a:srgbClr val="12151A"/>
                 </a:solidFill>
-                <a:latin typeface="Segoe UI"/>
+                <a:latin typeface="맑은 고딕"/>
                 <a:ea typeface="맑은 고딕"/>
                 <a:cs typeface="맑은 고딕"/>
               </a:rPr>
@@ -4962,7 +4962,7 @@
                 <a:solidFill>
                   <a:srgbClr val="52514E"/>
                 </a:solidFill>
-                <a:latin typeface="Segoe UI"/>
+                <a:latin typeface="맑은 고딕"/>
                 <a:ea typeface="맑은 고딕"/>
                 <a:cs typeface="맑은 고딕"/>
               </a:rPr>
@@ -5003,7 +5003,7 @@
                 <a:solidFill>
                   <a:srgbClr val="2A78D6"/>
                 </a:solidFill>
-                <a:latin typeface="Segoe UI"/>
+                <a:latin typeface="맑은 고딕"/>
                 <a:ea typeface="맑은 고딕"/>
                 <a:cs typeface="맑은 고딕"/>
               </a:rPr>
@@ -5044,7 +5044,7 @@
                 <a:solidFill>
                   <a:srgbClr val="12151A"/>
                 </a:solidFill>
-                <a:latin typeface="Segoe UI"/>
+                <a:latin typeface="맑은 고딕"/>
                 <a:ea typeface="맑은 고딕"/>
                 <a:cs typeface="맑은 고딕"/>
               </a:rPr>
@@ -5085,7 +5085,7 @@
                 <a:solidFill>
                   <a:srgbClr val="52514E"/>
                 </a:solidFill>
-                <a:latin typeface="Segoe UI"/>
+                <a:latin typeface="맑은 고딕"/>
                 <a:ea typeface="맑은 고딕"/>
                 <a:cs typeface="맑은 고딕"/>
               </a:rPr>
@@ -5106,7 +5106,7 @@
                 <a:solidFill>
                   <a:srgbClr val="52514E"/>
                 </a:solidFill>
-                <a:latin typeface="Segoe UI"/>
+                <a:latin typeface="맑은 고딕"/>
                 <a:ea typeface="맑은 고딕"/>
                 <a:cs typeface="맑은 고딕"/>
               </a:rPr>
@@ -5147,7 +5147,7 @@
                 <a:solidFill>
                   <a:srgbClr val="2A78D6"/>
                 </a:solidFill>
-                <a:latin typeface="Segoe UI"/>
+                <a:latin typeface="맑은 고딕"/>
                 <a:ea typeface="맑은 고딕"/>
                 <a:cs typeface="맑은 고딕"/>
               </a:rPr>
@@ -5188,7 +5188,7 @@
                 <a:solidFill>
                   <a:srgbClr val="12151A"/>
                 </a:solidFill>
-                <a:latin typeface="Segoe UI"/>
+                <a:latin typeface="맑은 고딕"/>
                 <a:ea typeface="맑은 고딕"/>
                 <a:cs typeface="맑은 고딕"/>
               </a:rPr>
@@ -5229,7 +5229,7 @@
                 <a:solidFill>
                   <a:srgbClr val="52514E"/>
                 </a:solidFill>
-                <a:latin typeface="Segoe UI"/>
+                <a:latin typeface="맑은 고딕"/>
                 <a:ea typeface="맑은 고딕"/>
                 <a:cs typeface="맑은 고딕"/>
               </a:rPr>
@@ -5270,7 +5270,7 @@
                 <a:solidFill>
                   <a:srgbClr val="2A78D6"/>
                 </a:solidFill>
-                <a:latin typeface="Segoe UI"/>
+                <a:latin typeface="맑은 고딕"/>
                 <a:ea typeface="맑은 고딕"/>
                 <a:cs typeface="맑은 고딕"/>
               </a:rPr>
@@ -5311,7 +5311,7 @@
                 <a:solidFill>
                   <a:srgbClr val="12151A"/>
                 </a:solidFill>
-                <a:latin typeface="Segoe UI"/>
+                <a:latin typeface="맑은 고딕"/>
                 <a:ea typeface="맑은 고딕"/>
                 <a:cs typeface="맑은 고딕"/>
               </a:rPr>
@@ -5352,7 +5352,7 @@
                 <a:solidFill>
                   <a:srgbClr val="52514E"/>
                 </a:solidFill>
-                <a:latin typeface="Segoe UI"/>
+                <a:latin typeface="맑은 고딕"/>
                 <a:ea typeface="맑은 고딕"/>
                 <a:cs typeface="맑은 고딕"/>
               </a:rPr>
@@ -5373,7 +5373,7 @@
                 <a:solidFill>
                   <a:srgbClr val="52514E"/>
                 </a:solidFill>
-                <a:latin typeface="Segoe UI"/>
+                <a:latin typeface="맑은 고딕"/>
                 <a:ea typeface="맑은 고딕"/>
                 <a:cs typeface="맑은 고딕"/>
               </a:rPr>
@@ -5414,7 +5414,7 @@
                 <a:solidFill>
                   <a:srgbClr val="2A78D6"/>
                 </a:solidFill>
-                <a:latin typeface="Segoe UI"/>
+                <a:latin typeface="맑은 고딕"/>
                 <a:ea typeface="맑은 고딕"/>
                 <a:cs typeface="맑은 고딕"/>
               </a:rPr>
@@ -5455,7 +5455,7 @@
                 <a:solidFill>
                   <a:srgbClr val="12151A"/>
                 </a:solidFill>
-                <a:latin typeface="Segoe UI"/>
+                <a:latin typeface="맑은 고딕"/>
                 <a:ea typeface="맑은 고딕"/>
                 <a:cs typeface="맑은 고딕"/>
               </a:rPr>
@@ -5496,7 +5496,7 @@
                 <a:solidFill>
                   <a:srgbClr val="52514E"/>
                 </a:solidFill>
-                <a:latin typeface="Segoe UI"/>
+                <a:latin typeface="맑은 고딕"/>
                 <a:ea typeface="맑은 고딕"/>
                 <a:cs typeface="맑은 고딕"/>
               </a:rPr>
@@ -5583,7 +5583,7 @@
                 <a:solidFill>
                   <a:srgbClr val="12151A"/>
                 </a:solidFill>
-                <a:latin typeface="Segoe UI"/>
+                <a:latin typeface="맑은 고딕"/>
                 <a:ea typeface="맑은 고딕"/>
                 <a:cs typeface="맑은 고딕"/>
               </a:rPr>
@@ -5624,7 +5624,7 @@
                 <a:solidFill>
                   <a:srgbClr val="52514E"/>
                 </a:solidFill>
-                <a:latin typeface="Segoe UI"/>
+                <a:latin typeface="맑은 고딕"/>
                 <a:ea typeface="맑은 고딕"/>
                 <a:cs typeface="맑은 고딕"/>
               </a:rPr>
@@ -5665,7 +5665,7 @@
                 <a:solidFill>
                   <a:srgbClr val="12151A"/>
                 </a:solidFill>
-                <a:latin typeface="Segoe UI"/>
+                <a:latin typeface="맑은 고딕"/>
                 <a:ea typeface="맑은 고딕"/>
                 <a:cs typeface="맑은 고딕"/>
               </a:rPr>
@@ -5706,7 +5706,7 @@
                 <a:solidFill>
                   <a:srgbClr val="52514E"/>
                 </a:solidFill>
-                <a:latin typeface="Segoe UI"/>
+                <a:latin typeface="맑은 고딕"/>
                 <a:ea typeface="맑은 고딕"/>
                 <a:cs typeface="맑은 고딕"/>
               </a:rPr>
@@ -5747,7 +5747,7 @@
                 <a:solidFill>
                   <a:srgbClr val="12151A"/>
                 </a:solidFill>
-                <a:latin typeface="Segoe UI"/>
+                <a:latin typeface="맑은 고딕"/>
                 <a:ea typeface="맑은 고딕"/>
                 <a:cs typeface="맑은 고딕"/>
               </a:rPr>
@@ -5788,7 +5788,7 @@
                 <a:solidFill>
                   <a:srgbClr val="52514E"/>
                 </a:solidFill>
-                <a:latin typeface="Segoe UI"/>
+                <a:latin typeface="맑은 고딕"/>
                 <a:ea typeface="맑은 고딕"/>
                 <a:cs typeface="맑은 고딕"/>
               </a:rPr>
@@ -5829,7 +5829,7 @@
                 <a:solidFill>
                   <a:srgbClr val="12151A"/>
                 </a:solidFill>
-                <a:latin typeface="Segoe UI"/>
+                <a:latin typeface="맑은 고딕"/>
                 <a:ea typeface="맑은 고딕"/>
                 <a:cs typeface="맑은 고딕"/>
               </a:rPr>
@@ -5870,7 +5870,7 @@
                 <a:solidFill>
                   <a:srgbClr val="52514E"/>
                 </a:solidFill>
-                <a:latin typeface="Segoe UI"/>
+                <a:latin typeface="맑은 고딕"/>
                 <a:ea typeface="맑은 고딕"/>
                 <a:cs typeface="맑은 고딕"/>
               </a:rPr>
@@ -5911,7 +5911,7 @@
                 <a:solidFill>
                   <a:srgbClr val="12151A"/>
                 </a:solidFill>
-                <a:latin typeface="Segoe UI"/>
+                <a:latin typeface="맑은 고딕"/>
                 <a:ea typeface="맑은 고딕"/>
                 <a:cs typeface="맑은 고딕"/>
               </a:rPr>
@@ -5952,7 +5952,7 @@
                 <a:solidFill>
                   <a:srgbClr val="52514E"/>
                 </a:solidFill>
-                <a:latin typeface="Segoe UI"/>
+                <a:latin typeface="맑은 고딕"/>
                 <a:ea typeface="맑은 고딕"/>
                 <a:cs typeface="맑은 고딕"/>
               </a:rPr>
@@ -5993,7 +5993,7 @@
                 <a:solidFill>
                   <a:srgbClr val="12151A"/>
                 </a:solidFill>
-                <a:latin typeface="Segoe UI"/>
+                <a:latin typeface="맑은 고딕"/>
                 <a:ea typeface="맑은 고딕"/>
                 <a:cs typeface="맑은 고딕"/>
               </a:rPr>
@@ -6034,7 +6034,7 @@
                 <a:solidFill>
                   <a:srgbClr val="52514E"/>
                 </a:solidFill>
-                <a:latin typeface="Segoe UI"/>
+                <a:latin typeface="맑은 고딕"/>
                 <a:ea typeface="맑은 고딕"/>
                 <a:cs typeface="맑은 고딕"/>
               </a:rPr>
@@ -6075,7 +6075,7 @@
                 <a:solidFill>
                   <a:srgbClr val="12151A"/>
                 </a:solidFill>
-                <a:latin typeface="Segoe UI"/>
+                <a:latin typeface="맑은 고딕"/>
                 <a:ea typeface="맑은 고딕"/>
                 <a:cs typeface="맑은 고딕"/>
               </a:rPr>
@@ -6116,7 +6116,7 @@
                 <a:solidFill>
                   <a:srgbClr val="52514E"/>
                 </a:solidFill>
-                <a:latin typeface="Segoe UI"/>
+                <a:latin typeface="맑은 고딕"/>
                 <a:ea typeface="맑은 고딕"/>
                 <a:cs typeface="맑은 고딕"/>
               </a:rPr>
@@ -6137,7 +6137,7 @@
                 <a:solidFill>
                   <a:srgbClr val="52514E"/>
                 </a:solidFill>
-                <a:latin typeface="Segoe UI"/>
+                <a:latin typeface="맑은 고딕"/>
                 <a:ea typeface="맑은 고딕"/>
                 <a:cs typeface="맑은 고딕"/>
               </a:rPr>
@@ -6222,7 +6222,7 @@
                 <a:solidFill>
                   <a:srgbClr val="12151A"/>
                 </a:solidFill>
-                <a:latin typeface="Segoe UI"/>
+                <a:latin typeface="맑은 고딕"/>
                 <a:ea typeface="맑은 고딕"/>
                 <a:cs typeface="맑은 고딕"/>
               </a:rPr>
@@ -6263,7 +6263,7 @@
                 <a:solidFill>
                   <a:srgbClr val="52514E"/>
                 </a:solidFill>
-                <a:latin typeface="Segoe UI"/>
+                <a:latin typeface="맑은 고딕"/>
                 <a:ea typeface="맑은 고딕"/>
                 <a:cs typeface="맑은 고딕"/>
               </a:rPr>
@@ -6304,7 +6304,7 @@
                 <a:solidFill>
                   <a:srgbClr val="52514E"/>
                 </a:solidFill>
-                <a:latin typeface="Segoe UI"/>
+                <a:latin typeface="맑은 고딕"/>
                 <a:ea typeface="맑은 고딕"/>
                 <a:cs typeface="맑은 고딕"/>
               </a:rPr>
@@ -6363,7 +6363,7 @@
                 <a:solidFill>
                   <a:srgbClr val="2A78D6"/>
                 </a:solidFill>
-                <a:latin typeface="Segoe UI"/>
+                <a:latin typeface="맑은 고딕"/>
                 <a:ea typeface="맑은 고딕"/>
                 <a:cs typeface="맑은 고딕"/>
               </a:rPr>
@@ -6404,7 +6404,7 @@
                 <a:solidFill>
                   <a:srgbClr val="12151A"/>
                 </a:solidFill>
-                <a:latin typeface="Segoe UI"/>
+                <a:latin typeface="맑은 고딕"/>
                 <a:ea typeface="맑은 고딕"/>
                 <a:cs typeface="맑은 고딕"/>
               </a:rPr>
@@ -6445,7 +6445,7 @@
                 <a:solidFill>
                   <a:srgbClr val="52514E"/>
                 </a:solidFill>
-                <a:latin typeface="Segoe UI"/>
+                <a:latin typeface="맑은 고딕"/>
                 <a:ea typeface="맑은 고딕"/>
                 <a:cs typeface="맑은 고딕"/>
               </a:rPr>
@@ -6534,7 +6534,7 @@
                 <a:solidFill>
                   <a:srgbClr val="12151A"/>
                 </a:solidFill>
-                <a:latin typeface="Segoe UI"/>
+                <a:latin typeface="맑은 고딕"/>
                 <a:ea typeface="맑은 고딕"/>
                 <a:cs typeface="맑은 고딕"/>
               </a:rPr>
@@ -6579,7 +6579,7 @@
                           <a:solidFill>
                             <a:srgbClr val="12151A"/>
                           </a:solidFill>
-                          <a:latin typeface="Segoe UI"/>
+                          <a:latin typeface="맑은 고딕"/>
                           <a:ea typeface="맑은 고딕"/>
                           <a:cs typeface="맑은 고딕"/>
                         </a:rPr>
@@ -6604,7 +6604,7 @@
                           <a:solidFill>
                             <a:srgbClr val="12151A"/>
                           </a:solidFill>
-                          <a:latin typeface="Segoe UI"/>
+                          <a:latin typeface="맑은 고딕"/>
                           <a:ea typeface="맑은 고딕"/>
                           <a:cs typeface="맑은 고딕"/>
                         </a:rPr>
@@ -6629,7 +6629,7 @@
                           <a:solidFill>
                             <a:srgbClr val="12151A"/>
                           </a:solidFill>
-                          <a:latin typeface="Segoe UI"/>
+                          <a:latin typeface="맑은 고딕"/>
                           <a:ea typeface="맑은 고딕"/>
                           <a:cs typeface="맑은 고딕"/>
                         </a:rPr>
@@ -6654,7 +6654,7 @@
                           <a:solidFill>
                             <a:srgbClr val="12151A"/>
                           </a:solidFill>
-                          <a:latin typeface="Segoe UI"/>
+                          <a:latin typeface="맑은 고딕"/>
                           <a:ea typeface="맑은 고딕"/>
                           <a:cs typeface="맑은 고딕"/>
                         </a:rPr>
@@ -6681,7 +6681,7 @@
                           <a:solidFill>
                             <a:srgbClr val="12151A"/>
                           </a:solidFill>
-                          <a:latin typeface="Segoe UI"/>
+                          <a:latin typeface="맑은 고딕"/>
                           <a:ea typeface="맑은 고딕"/>
                           <a:cs typeface="맑은 고딕"/>
                         </a:rPr>
@@ -6706,7 +6706,7 @@
                           <a:solidFill>
                             <a:srgbClr val="12151A"/>
                           </a:solidFill>
-                          <a:latin typeface="Segoe UI"/>
+                          <a:latin typeface="맑은 고딕"/>
                           <a:ea typeface="맑은 고딕"/>
                           <a:cs typeface="맑은 고딕"/>
                         </a:rPr>
@@ -6731,7 +6731,7 @@
                           <a:solidFill>
                             <a:srgbClr val="12151A"/>
                           </a:solidFill>
-                          <a:latin typeface="Segoe UI"/>
+                          <a:latin typeface="맑은 고딕"/>
                           <a:ea typeface="맑은 고딕"/>
                           <a:cs typeface="맑은 고딕"/>
                         </a:rPr>
@@ -6756,7 +6756,7 @@
                           <a:solidFill>
                             <a:srgbClr val="12151A"/>
                           </a:solidFill>
-                          <a:latin typeface="Segoe UI"/>
+                          <a:latin typeface="맑은 고딕"/>
                           <a:ea typeface="맑은 고딕"/>
                           <a:cs typeface="맑은 고딕"/>
                         </a:rPr>
@@ -6783,7 +6783,7 @@
                           <a:solidFill>
                             <a:srgbClr val="12151A"/>
                           </a:solidFill>
-                          <a:latin typeface="Segoe UI"/>
+                          <a:latin typeface="맑은 고딕"/>
                           <a:ea typeface="맑은 고딕"/>
                           <a:cs typeface="맑은 고딕"/>
                         </a:rPr>
@@ -6808,7 +6808,7 @@
                           <a:solidFill>
                             <a:srgbClr val="12151A"/>
                           </a:solidFill>
-                          <a:latin typeface="Segoe UI"/>
+                          <a:latin typeface="맑은 고딕"/>
                           <a:ea typeface="맑은 고딕"/>
                           <a:cs typeface="맑은 고딕"/>
                         </a:rPr>
@@ -6833,7 +6833,7 @@
                           <a:solidFill>
                             <a:srgbClr val="12151A"/>
                           </a:solidFill>
-                          <a:latin typeface="Segoe UI"/>
+                          <a:latin typeface="맑은 고딕"/>
                           <a:ea typeface="맑은 고딕"/>
                           <a:cs typeface="맑은 고딕"/>
                         </a:rPr>
@@ -6858,7 +6858,7 @@
                           <a:solidFill>
                             <a:srgbClr val="12151A"/>
                           </a:solidFill>
-                          <a:latin typeface="Segoe UI"/>
+                          <a:latin typeface="맑은 고딕"/>
                           <a:ea typeface="맑은 고딕"/>
                           <a:cs typeface="맑은 고딕"/>
                         </a:rPr>
@@ -6885,7 +6885,7 @@
                           <a:solidFill>
                             <a:srgbClr val="12151A"/>
                           </a:solidFill>
-                          <a:latin typeface="Segoe UI"/>
+                          <a:latin typeface="맑은 고딕"/>
                           <a:ea typeface="맑은 고딕"/>
                           <a:cs typeface="맑은 고딕"/>
                         </a:rPr>
@@ -6910,7 +6910,7 @@
                           <a:solidFill>
                             <a:srgbClr val="12151A"/>
                           </a:solidFill>
-                          <a:latin typeface="Segoe UI"/>
+                          <a:latin typeface="맑은 고딕"/>
                           <a:ea typeface="맑은 고딕"/>
                           <a:cs typeface="맑은 고딕"/>
                         </a:rPr>
@@ -6935,7 +6935,7 @@
                           <a:solidFill>
                             <a:srgbClr val="12151A"/>
                           </a:solidFill>
-                          <a:latin typeface="Segoe UI"/>
+                          <a:latin typeface="맑은 고딕"/>
                           <a:ea typeface="맑은 고딕"/>
                           <a:cs typeface="맑은 고딕"/>
                         </a:rPr>
@@ -6960,7 +6960,7 @@
                           <a:solidFill>
                             <a:srgbClr val="12151A"/>
                           </a:solidFill>
-                          <a:latin typeface="Segoe UI"/>
+                          <a:latin typeface="맑은 고딕"/>
                           <a:ea typeface="맑은 고딕"/>
                           <a:cs typeface="맑은 고딕"/>
                         </a:rPr>
@@ -6987,7 +6987,7 @@
                           <a:solidFill>
                             <a:srgbClr val="12151A"/>
                           </a:solidFill>
-                          <a:latin typeface="Segoe UI"/>
+                          <a:latin typeface="맑은 고딕"/>
                           <a:ea typeface="맑은 고딕"/>
                           <a:cs typeface="맑은 고딕"/>
                         </a:rPr>
@@ -7012,7 +7012,7 @@
                           <a:solidFill>
                             <a:srgbClr val="12151A"/>
                           </a:solidFill>
-                          <a:latin typeface="Segoe UI"/>
+                          <a:latin typeface="맑은 고딕"/>
                           <a:ea typeface="맑은 고딕"/>
                           <a:cs typeface="맑은 고딕"/>
                         </a:rPr>
@@ -7037,7 +7037,7 @@
                           <a:solidFill>
                             <a:srgbClr val="12151A"/>
                           </a:solidFill>
-                          <a:latin typeface="Segoe UI"/>
+                          <a:latin typeface="맑은 고딕"/>
                           <a:ea typeface="맑은 고딕"/>
                           <a:cs typeface="맑은 고딕"/>
                         </a:rPr>
@@ -7062,7 +7062,7 @@
                           <a:solidFill>
                             <a:srgbClr val="12151A"/>
                           </a:solidFill>
-                          <a:latin typeface="Segoe UI"/>
+                          <a:latin typeface="맑은 고딕"/>
                           <a:ea typeface="맑은 고딕"/>
                           <a:cs typeface="맑은 고딕"/>
                         </a:rPr>
@@ -7089,7 +7089,7 @@
                           <a:solidFill>
                             <a:srgbClr val="12151A"/>
                           </a:solidFill>
-                          <a:latin typeface="Segoe UI"/>
+                          <a:latin typeface="맑은 고딕"/>
                           <a:ea typeface="맑은 고딕"/>
                           <a:cs typeface="맑은 고딕"/>
                         </a:rPr>
@@ -7114,7 +7114,7 @@
                           <a:solidFill>
                             <a:srgbClr val="12151A"/>
                           </a:solidFill>
-                          <a:latin typeface="Segoe UI"/>
+                          <a:latin typeface="맑은 고딕"/>
                           <a:ea typeface="맑은 고딕"/>
                           <a:cs typeface="맑은 고딕"/>
                         </a:rPr>
@@ -7139,7 +7139,7 @@
                           <a:solidFill>
                             <a:srgbClr val="12151A"/>
                           </a:solidFill>
-                          <a:latin typeface="Segoe UI"/>
+                          <a:latin typeface="맑은 고딕"/>
                           <a:ea typeface="맑은 고딕"/>
                           <a:cs typeface="맑은 고딕"/>
                         </a:rPr>
@@ -7164,7 +7164,7 @@
                           <a:solidFill>
                             <a:srgbClr val="12151A"/>
                           </a:solidFill>
-                          <a:latin typeface="Segoe UI"/>
+                          <a:latin typeface="맑은 고딕"/>
                           <a:ea typeface="맑은 고딕"/>
                           <a:cs typeface="맑은 고딕"/>
                         </a:rPr>
@@ -7215,7 +7215,7 @@
                 <a:solidFill>
                   <a:srgbClr val="52514E"/>
                 </a:solidFill>
-                <a:latin typeface="Segoe UI"/>
+                <a:latin typeface="맑은 고딕"/>
                 <a:ea typeface="맑은 고딕"/>
                 <a:cs typeface="맑은 고딕"/>
               </a:rPr>
@@ -7256,7 +7256,7 @@
                 <a:solidFill>
                   <a:srgbClr val="52514E"/>
                 </a:solidFill>
-                <a:latin typeface="Segoe UI"/>
+                <a:latin typeface="맑은 고딕"/>
                 <a:ea typeface="맑은 고딕"/>
                 <a:cs typeface="맑은 고딕"/>
               </a:rPr>
@@ -7315,7 +7315,7 @@
                 <a:solidFill>
                   <a:srgbClr val="2A78D6"/>
                 </a:solidFill>
-                <a:latin typeface="Segoe UI"/>
+                <a:latin typeface="맑은 고딕"/>
                 <a:ea typeface="맑은 고딕"/>
                 <a:cs typeface="맑은 고딕"/>
               </a:rPr>
@@ -7356,7 +7356,7 @@
                 <a:solidFill>
                   <a:srgbClr val="12151A"/>
                 </a:solidFill>
-                <a:latin typeface="Segoe UI"/>
+                <a:latin typeface="맑은 고딕"/>
                 <a:ea typeface="맑은 고딕"/>
                 <a:cs typeface="맑은 고딕"/>
               </a:rPr>
@@ -7397,7 +7397,7 @@
                 <a:solidFill>
                   <a:srgbClr val="52514E"/>
                 </a:solidFill>
-                <a:latin typeface="Segoe UI"/>
+                <a:latin typeface="맑은 고딕"/>
                 <a:ea typeface="맑은 고딕"/>
                 <a:cs typeface="맑은 고딕"/>
               </a:rPr>
@@ -7438,7 +7438,7 @@
                 <a:solidFill>
                   <a:srgbClr val="12151A"/>
                 </a:solidFill>
-                <a:latin typeface="Segoe UI"/>
+                <a:latin typeface="맑은 고딕"/>
                 <a:ea typeface="맑은 고딕"/>
                 <a:cs typeface="맑은 고딕"/>
               </a:rPr>
@@ -7541,7 +7541,7 @@
                 <a:solidFill>
                   <a:srgbClr val="2A78D6"/>
                 </a:solidFill>
-                <a:latin typeface="Segoe UI"/>
+                <a:latin typeface="맑은 고딕"/>
                 <a:ea typeface="맑은 고딕"/>
                 <a:cs typeface="맑은 고딕"/>
               </a:rPr>
@@ -7582,7 +7582,7 @@
                 <a:solidFill>
                   <a:srgbClr val="12151A"/>
                 </a:solidFill>
-                <a:latin typeface="Segoe UI"/>
+                <a:latin typeface="맑은 고딕"/>
                 <a:ea typeface="맑은 고딕"/>
                 <a:cs typeface="맑은 고딕"/>
               </a:rPr>
@@ -7623,7 +7623,7 @@
                 <a:solidFill>
                   <a:srgbClr val="52514E"/>
                 </a:solidFill>
-                <a:latin typeface="Segoe UI"/>
+                <a:latin typeface="맑은 고딕"/>
                 <a:ea typeface="맑은 고딕"/>
                 <a:cs typeface="맑은 고딕"/>
               </a:rPr>
@@ -7664,7 +7664,7 @@
                 <a:solidFill>
                   <a:srgbClr val="2A78D6"/>
                 </a:solidFill>
-                <a:latin typeface="Segoe UI"/>
+                <a:latin typeface="맑은 고딕"/>
                 <a:ea typeface="맑은 고딕"/>
                 <a:cs typeface="맑은 고딕"/>
               </a:rPr>
@@ -7705,7 +7705,7 @@
                 <a:solidFill>
                   <a:srgbClr val="12151A"/>
                 </a:solidFill>
-                <a:latin typeface="Segoe UI"/>
+                <a:latin typeface="맑은 고딕"/>
                 <a:ea typeface="맑은 고딕"/>
                 <a:cs typeface="맑은 고딕"/>
               </a:rPr>
@@ -7746,7 +7746,7 @@
                 <a:solidFill>
                   <a:srgbClr val="52514E"/>
                 </a:solidFill>
-                <a:latin typeface="Segoe UI"/>
+                <a:latin typeface="맑은 고딕"/>
                 <a:ea typeface="맑은 고딕"/>
                 <a:cs typeface="맑은 고딕"/>
               </a:rPr>
@@ -7787,7 +7787,7 @@
                 <a:solidFill>
                   <a:srgbClr val="2A78D6"/>
                 </a:solidFill>
-                <a:latin typeface="Segoe UI"/>
+                <a:latin typeface="맑은 고딕"/>
                 <a:ea typeface="맑은 고딕"/>
                 <a:cs typeface="맑은 고딕"/>
               </a:rPr>
@@ -7828,7 +7828,7 @@
                 <a:solidFill>
                   <a:srgbClr val="12151A"/>
                 </a:solidFill>
-                <a:latin typeface="Segoe UI"/>
+                <a:latin typeface="맑은 고딕"/>
                 <a:ea typeface="맑은 고딕"/>
                 <a:cs typeface="맑은 고딕"/>
               </a:rPr>
@@ -7869,7 +7869,7 @@
                 <a:solidFill>
                   <a:srgbClr val="52514E"/>
                 </a:solidFill>
-                <a:latin typeface="Segoe UI"/>
+                <a:latin typeface="맑은 고딕"/>
                 <a:ea typeface="맑은 고딕"/>
                 <a:cs typeface="맑은 고딕"/>
               </a:rPr>
@@ -7910,7 +7910,7 @@
                 <a:solidFill>
                   <a:srgbClr val="2A78D6"/>
                 </a:solidFill>
-                <a:latin typeface="Segoe UI"/>
+                <a:latin typeface="맑은 고딕"/>
                 <a:ea typeface="맑은 고딕"/>
                 <a:cs typeface="맑은 고딕"/>
               </a:rPr>
@@ -7951,7 +7951,7 @@
                 <a:solidFill>
                   <a:srgbClr val="12151A"/>
                 </a:solidFill>
-                <a:latin typeface="Segoe UI"/>
+                <a:latin typeface="맑은 고딕"/>
                 <a:ea typeface="맑은 고딕"/>
                 <a:cs typeface="맑은 고딕"/>
               </a:rPr>
@@ -7992,7 +7992,7 @@
                 <a:solidFill>
                   <a:srgbClr val="52514E"/>
                 </a:solidFill>
-                <a:latin typeface="Segoe UI"/>
+                <a:latin typeface="맑은 고딕"/>
                 <a:ea typeface="맑은 고딕"/>
                 <a:cs typeface="맑은 고딕"/>
               </a:rPr>
@@ -8077,7 +8077,7 @@
                 <a:solidFill>
                   <a:srgbClr val="1BAF7A"/>
                 </a:solidFill>
-                <a:latin typeface="Segoe UI"/>
+                <a:latin typeface="맑은 고딕"/>
                 <a:ea typeface="맑은 고딕"/>
                 <a:cs typeface="맑은 고딕"/>
               </a:rPr>
@@ -8118,7 +8118,7 @@
                 <a:solidFill>
                   <a:srgbClr val="12151A"/>
                 </a:solidFill>
-                <a:latin typeface="Segoe UI"/>
+                <a:latin typeface="맑은 고딕"/>
                 <a:ea typeface="맑은 고딕"/>
                 <a:cs typeface="맑은 고딕"/>
               </a:rPr>
@@ -8139,7 +8139,7 @@
                 <a:solidFill>
                   <a:srgbClr val="12151A"/>
                 </a:solidFill>
-                <a:latin typeface="Segoe UI"/>
+                <a:latin typeface="맑은 고딕"/>
                 <a:ea typeface="맑은 고딕"/>
                 <a:cs typeface="맑은 고딕"/>
               </a:rPr>
@@ -8160,7 +8160,7 @@
                 <a:solidFill>
                   <a:srgbClr val="12151A"/>
                 </a:solidFill>
-                <a:latin typeface="Segoe UI"/>
+                <a:latin typeface="맑은 고딕"/>
                 <a:ea typeface="맑은 고딕"/>
                 <a:cs typeface="맑은 고딕"/>
               </a:rPr>
@@ -8181,7 +8181,7 @@
                 <a:solidFill>
                   <a:srgbClr val="12151A"/>
                 </a:solidFill>
-                <a:latin typeface="Segoe UI"/>
+                <a:latin typeface="맑은 고딕"/>
                 <a:ea typeface="맑은 고딕"/>
                 <a:cs typeface="맑은 고딕"/>
               </a:rPr>
@@ -8202,7 +8202,7 @@
                 <a:solidFill>
                   <a:srgbClr val="12151A"/>
                 </a:solidFill>
-                <a:latin typeface="Segoe UI"/>
+                <a:latin typeface="맑은 고딕"/>
                 <a:ea typeface="맑은 고딕"/>
                 <a:cs typeface="맑은 고딕"/>
               </a:rPr>
@@ -8287,7 +8287,7 @@
                 <a:solidFill>
                   <a:srgbClr val="12151A"/>
                 </a:solidFill>
-                <a:latin typeface="Segoe UI"/>
+                <a:latin typeface="맑은 고딕"/>
                 <a:ea typeface="맑은 고딕"/>
                 <a:cs typeface="맑은 고딕"/>
               </a:rPr>
@@ -8308,7 +8308,7 @@
                 <a:solidFill>
                   <a:srgbClr val="12151A"/>
                 </a:solidFill>
-                <a:latin typeface="Segoe UI"/>
+                <a:latin typeface="맑은 고딕"/>
                 <a:ea typeface="맑은 고딕"/>
                 <a:cs typeface="맑은 고딕"/>
               </a:rPr>
@@ -8349,7 +8349,7 @@
                 <a:solidFill>
                   <a:srgbClr val="52514E"/>
                 </a:solidFill>
-                <a:latin typeface="Segoe UI"/>
+                <a:latin typeface="맑은 고딕"/>
                 <a:ea typeface="맑은 고딕"/>
                 <a:cs typeface="맑은 고딕"/>
               </a:rPr>
@@ -8390,7 +8390,7 @@
                 <a:solidFill>
                   <a:srgbClr val="52514E"/>
                 </a:solidFill>
-                <a:latin typeface="Segoe UI"/>
+                <a:latin typeface="맑은 고딕"/>
                 <a:ea typeface="맑은 고딕"/>
                 <a:cs typeface="맑은 고딕"/>
               </a:rPr>
@@ -8449,7 +8449,7 @@
                 <a:solidFill>
                   <a:srgbClr val="2A78D6"/>
                 </a:solidFill>
-                <a:latin typeface="Segoe UI"/>
+                <a:latin typeface="맑은 고딕"/>
                 <a:ea typeface="맑은 고딕"/>
                 <a:cs typeface="맑은 고딕"/>
               </a:rPr>
@@ -8490,7 +8490,7 @@
                 <a:solidFill>
                   <a:srgbClr val="12151A"/>
                 </a:solidFill>
-                <a:latin typeface="Segoe UI"/>
+                <a:latin typeface="맑은 고딕"/>
                 <a:ea typeface="맑은 고딕"/>
                 <a:cs typeface="맑은 고딕"/>
               </a:rPr>
@@ -8531,7 +8531,7 @@
                 <a:solidFill>
                   <a:srgbClr val="52514E"/>
                 </a:solidFill>
-                <a:latin typeface="Segoe UI"/>
+                <a:latin typeface="맑은 고딕"/>
                 <a:ea typeface="맑은 고딕"/>
                 <a:cs typeface="맑은 고딕"/>
               </a:rPr>
@@ -8596,7 +8596,7 @@
                 <a:solidFill>
                   <a:srgbClr val="12151A"/>
                 </a:solidFill>
-                <a:latin typeface="Segoe UI"/>
+                <a:latin typeface="맑은 고딕"/>
                 <a:ea typeface="맑은 고딕"/>
                 <a:cs typeface="맑은 고딕"/>
               </a:rPr>
@@ -8642,7 +8642,7 @@
                           <a:solidFill>
                             <a:srgbClr val="12151A"/>
                           </a:solidFill>
-                          <a:latin typeface="Segoe UI"/>
+                          <a:latin typeface="맑은 고딕"/>
                           <a:ea typeface="맑은 고딕"/>
                           <a:cs typeface="맑은 고딕"/>
                         </a:rPr>
@@ -8667,7 +8667,7 @@
                           <a:solidFill>
                             <a:srgbClr val="12151A"/>
                           </a:solidFill>
-                          <a:latin typeface="Segoe UI"/>
+                          <a:latin typeface="맑은 고딕"/>
                           <a:ea typeface="맑은 고딕"/>
                           <a:cs typeface="맑은 고딕"/>
                         </a:rPr>
@@ -8692,7 +8692,7 @@
                           <a:solidFill>
                             <a:srgbClr val="12151A"/>
                           </a:solidFill>
-                          <a:latin typeface="Segoe UI"/>
+                          <a:latin typeface="맑은 고딕"/>
                           <a:ea typeface="맑은 고딕"/>
                           <a:cs typeface="맑은 고딕"/>
                         </a:rPr>
@@ -8717,7 +8717,7 @@
                           <a:solidFill>
                             <a:srgbClr val="12151A"/>
                           </a:solidFill>
-                          <a:latin typeface="Segoe UI"/>
+                          <a:latin typeface="맑은 고딕"/>
                           <a:ea typeface="맑은 고딕"/>
                           <a:cs typeface="맑은 고딕"/>
                         </a:rPr>
@@ -8742,7 +8742,7 @@
                           <a:solidFill>
                             <a:srgbClr val="12151A"/>
                           </a:solidFill>
-                          <a:latin typeface="Segoe UI"/>
+                          <a:latin typeface="맑은 고딕"/>
                           <a:ea typeface="맑은 고딕"/>
                           <a:cs typeface="맑은 고딕"/>
                         </a:rPr>
@@ -8769,7 +8769,7 @@
                           <a:solidFill>
                             <a:srgbClr val="12151A"/>
                           </a:solidFill>
-                          <a:latin typeface="Segoe UI"/>
+                          <a:latin typeface="맑은 고딕"/>
                           <a:ea typeface="맑은 고딕"/>
                           <a:cs typeface="맑은 고딕"/>
                         </a:rPr>
@@ -8794,7 +8794,7 @@
                           <a:solidFill>
                             <a:srgbClr val="12151A"/>
                           </a:solidFill>
-                          <a:latin typeface="Segoe UI"/>
+                          <a:latin typeface="맑은 고딕"/>
                           <a:ea typeface="맑은 고딕"/>
                           <a:cs typeface="맑은 고딕"/>
                         </a:rPr>
@@ -8819,7 +8819,7 @@
                           <a:solidFill>
                             <a:srgbClr val="12151A"/>
                           </a:solidFill>
-                          <a:latin typeface="Segoe UI"/>
+                          <a:latin typeface="맑은 고딕"/>
                           <a:ea typeface="맑은 고딕"/>
                           <a:cs typeface="맑은 고딕"/>
                         </a:rPr>
@@ -8844,7 +8844,7 @@
                           <a:solidFill>
                             <a:srgbClr val="12151A"/>
                           </a:solidFill>
-                          <a:latin typeface="Segoe UI"/>
+                          <a:latin typeface="맑은 고딕"/>
                           <a:ea typeface="맑은 고딕"/>
                           <a:cs typeface="맑은 고딕"/>
                         </a:rPr>
@@ -8869,7 +8869,7 @@
                           <a:solidFill>
                             <a:srgbClr val="12151A"/>
                           </a:solidFill>
-                          <a:latin typeface="Segoe UI"/>
+                          <a:latin typeface="맑은 고딕"/>
                           <a:ea typeface="맑은 고딕"/>
                           <a:cs typeface="맑은 고딕"/>
                         </a:rPr>
@@ -8896,7 +8896,7 @@
                           <a:solidFill>
                             <a:srgbClr val="12151A"/>
                           </a:solidFill>
-                          <a:latin typeface="Segoe UI"/>
+                          <a:latin typeface="맑은 고딕"/>
                           <a:ea typeface="맑은 고딕"/>
                           <a:cs typeface="맑은 고딕"/>
                         </a:rPr>
@@ -8921,7 +8921,7 @@
                           <a:solidFill>
                             <a:srgbClr val="12151A"/>
                           </a:solidFill>
-                          <a:latin typeface="Segoe UI"/>
+                          <a:latin typeface="맑은 고딕"/>
                           <a:ea typeface="맑은 고딕"/>
                           <a:cs typeface="맑은 고딕"/>
                         </a:rPr>
@@ -8946,7 +8946,7 @@
                           <a:solidFill>
                             <a:srgbClr val="12151A"/>
                           </a:solidFill>
-                          <a:latin typeface="Segoe UI"/>
+                          <a:latin typeface="맑은 고딕"/>
                           <a:ea typeface="맑은 고딕"/>
                           <a:cs typeface="맑은 고딕"/>
                         </a:rPr>
@@ -8971,7 +8971,7 @@
                           <a:solidFill>
                             <a:srgbClr val="12151A"/>
                           </a:solidFill>
-                          <a:latin typeface="Segoe UI"/>
+                          <a:latin typeface="맑은 고딕"/>
                           <a:ea typeface="맑은 고딕"/>
                           <a:cs typeface="맑은 고딕"/>
                         </a:rPr>
@@ -8996,7 +8996,7 @@
                           <a:solidFill>
                             <a:srgbClr val="12151A"/>
                           </a:solidFill>
-                          <a:latin typeface="Segoe UI"/>
+                          <a:latin typeface="맑은 고딕"/>
                           <a:ea typeface="맑은 고딕"/>
                           <a:cs typeface="맑은 고딕"/>
                         </a:rPr>
@@ -9023,7 +9023,7 @@
                           <a:solidFill>
                             <a:srgbClr val="12151A"/>
                           </a:solidFill>
-                          <a:latin typeface="Segoe UI"/>
+                          <a:latin typeface="맑은 고딕"/>
                           <a:ea typeface="맑은 고딕"/>
                           <a:cs typeface="맑은 고딕"/>
                         </a:rPr>
@@ -9048,7 +9048,7 @@
                           <a:solidFill>
                             <a:srgbClr val="12151A"/>
                           </a:solidFill>
-                          <a:latin typeface="Segoe UI"/>
+                          <a:latin typeface="맑은 고딕"/>
                           <a:ea typeface="맑은 고딕"/>
                           <a:cs typeface="맑은 고딕"/>
                         </a:rPr>
@@ -9073,7 +9073,7 @@
                           <a:solidFill>
                             <a:srgbClr val="12151A"/>
                           </a:solidFill>
-                          <a:latin typeface="Segoe UI"/>
+                          <a:latin typeface="맑은 고딕"/>
                           <a:ea typeface="맑은 고딕"/>
                           <a:cs typeface="맑은 고딕"/>
                         </a:rPr>
@@ -9098,7 +9098,7 @@
                           <a:solidFill>
                             <a:srgbClr val="12151A"/>
                           </a:solidFill>
-                          <a:latin typeface="Segoe UI"/>
+                          <a:latin typeface="맑은 고딕"/>
                           <a:ea typeface="맑은 고딕"/>
                           <a:cs typeface="맑은 고딕"/>
                         </a:rPr>
@@ -9123,7 +9123,7 @@
                           <a:solidFill>
                             <a:srgbClr val="12151A"/>
                           </a:solidFill>
-                          <a:latin typeface="Segoe UI"/>
+                          <a:latin typeface="맑은 고딕"/>
                           <a:ea typeface="맑은 고딕"/>
                           <a:cs typeface="맑은 고딕"/>
                         </a:rPr>
@@ -9150,7 +9150,7 @@
                           <a:solidFill>
                             <a:srgbClr val="12151A"/>
                           </a:solidFill>
-                          <a:latin typeface="Segoe UI"/>
+                          <a:latin typeface="맑은 고딕"/>
                           <a:ea typeface="맑은 고딕"/>
                           <a:cs typeface="맑은 고딕"/>
                         </a:rPr>
@@ -9175,7 +9175,7 @@
                           <a:solidFill>
                             <a:srgbClr val="12151A"/>
                           </a:solidFill>
-                          <a:latin typeface="Segoe UI"/>
+                          <a:latin typeface="맑은 고딕"/>
                           <a:ea typeface="맑은 고딕"/>
                           <a:cs typeface="맑은 고딕"/>
                         </a:rPr>
@@ -9200,7 +9200,7 @@
                           <a:solidFill>
                             <a:srgbClr val="12151A"/>
                           </a:solidFill>
-                          <a:latin typeface="Segoe UI"/>
+                          <a:latin typeface="맑은 고딕"/>
                           <a:ea typeface="맑은 고딕"/>
                           <a:cs typeface="맑은 고딕"/>
                         </a:rPr>
@@ -9225,7 +9225,7 @@
                           <a:solidFill>
                             <a:srgbClr val="12151A"/>
                           </a:solidFill>
-                          <a:latin typeface="Segoe UI"/>
+                          <a:latin typeface="맑은 고딕"/>
                           <a:ea typeface="맑은 고딕"/>
                           <a:cs typeface="맑은 고딕"/>
                         </a:rPr>
@@ -9250,7 +9250,7 @@
                           <a:solidFill>
                             <a:srgbClr val="12151A"/>
                           </a:solidFill>
-                          <a:latin typeface="Segoe UI"/>
+                          <a:latin typeface="맑은 고딕"/>
                           <a:ea typeface="맑은 고딕"/>
                           <a:cs typeface="맑은 고딕"/>
                         </a:rPr>
@@ -9277,7 +9277,7 @@
                           <a:solidFill>
                             <a:srgbClr val="12151A"/>
                           </a:solidFill>
-                          <a:latin typeface="Segoe UI"/>
+                          <a:latin typeface="맑은 고딕"/>
                           <a:ea typeface="맑은 고딕"/>
                           <a:cs typeface="맑은 고딕"/>
                         </a:rPr>
@@ -9302,7 +9302,7 @@
                           <a:solidFill>
                             <a:srgbClr val="12151A"/>
                           </a:solidFill>
-                          <a:latin typeface="Segoe UI"/>
+                          <a:latin typeface="맑은 고딕"/>
                           <a:ea typeface="맑은 고딕"/>
                           <a:cs typeface="맑은 고딕"/>
                         </a:rPr>
@@ -9327,7 +9327,7 @@
                           <a:solidFill>
                             <a:srgbClr val="12151A"/>
                           </a:solidFill>
-                          <a:latin typeface="Segoe UI"/>
+                          <a:latin typeface="맑은 고딕"/>
                           <a:ea typeface="맑은 고딕"/>
                           <a:cs typeface="맑은 고딕"/>
                         </a:rPr>
@@ -9352,7 +9352,7 @@
                           <a:solidFill>
                             <a:srgbClr val="12151A"/>
                           </a:solidFill>
-                          <a:latin typeface="Segoe UI"/>
+                          <a:latin typeface="맑은 고딕"/>
                           <a:ea typeface="맑은 고딕"/>
                           <a:cs typeface="맑은 고딕"/>
                         </a:rPr>
@@ -9377,7 +9377,7 @@
                           <a:solidFill>
                             <a:srgbClr val="12151A"/>
                           </a:solidFill>
-                          <a:latin typeface="Segoe UI"/>
+                          <a:latin typeface="맑은 고딕"/>
                           <a:ea typeface="맑은 고딕"/>
                           <a:cs typeface="맑은 고딕"/>
                         </a:rPr>
@@ -9404,7 +9404,7 @@
                           <a:solidFill>
                             <a:srgbClr val="12151A"/>
                           </a:solidFill>
-                          <a:latin typeface="Segoe UI"/>
+                          <a:latin typeface="맑은 고딕"/>
                           <a:ea typeface="맑은 고딕"/>
                           <a:cs typeface="맑은 고딕"/>
                         </a:rPr>
@@ -9429,7 +9429,7 @@
                           <a:solidFill>
                             <a:srgbClr val="12151A"/>
                           </a:solidFill>
-                          <a:latin typeface="Segoe UI"/>
+                          <a:latin typeface="맑은 고딕"/>
                           <a:ea typeface="맑은 고딕"/>
                           <a:cs typeface="맑은 고딕"/>
                         </a:rPr>
@@ -9454,7 +9454,7 @@
                           <a:solidFill>
                             <a:srgbClr val="12151A"/>
                           </a:solidFill>
-                          <a:latin typeface="Segoe UI"/>
+                          <a:latin typeface="맑은 고딕"/>
                           <a:ea typeface="맑은 고딕"/>
                           <a:cs typeface="맑은 고딕"/>
                         </a:rPr>
@@ -9479,7 +9479,7 @@
                           <a:solidFill>
                             <a:srgbClr val="12151A"/>
                           </a:solidFill>
-                          <a:latin typeface="Segoe UI"/>
+                          <a:latin typeface="맑은 고딕"/>
                           <a:ea typeface="맑은 고딕"/>
                           <a:cs typeface="맑은 고딕"/>
                         </a:rPr>
@@ -9504,7 +9504,7 @@
                           <a:solidFill>
                             <a:srgbClr val="12151A"/>
                           </a:solidFill>
-                          <a:latin typeface="Segoe UI"/>
+                          <a:latin typeface="맑은 고딕"/>
                           <a:ea typeface="맑은 고딕"/>
                           <a:cs typeface="맑은 고딕"/>
                         </a:rPr>
@@ -9531,7 +9531,7 @@
                           <a:solidFill>
                             <a:srgbClr val="12151A"/>
                           </a:solidFill>
-                          <a:latin typeface="Segoe UI"/>
+                          <a:latin typeface="맑은 고딕"/>
                           <a:ea typeface="맑은 고딕"/>
                           <a:cs typeface="맑은 고딕"/>
                         </a:rPr>
@@ -9556,7 +9556,7 @@
                           <a:solidFill>
                             <a:srgbClr val="12151A"/>
                           </a:solidFill>
-                          <a:latin typeface="Segoe UI"/>
+                          <a:latin typeface="맑은 고딕"/>
                           <a:ea typeface="맑은 고딕"/>
                           <a:cs typeface="맑은 고딕"/>
                         </a:rPr>
@@ -9581,7 +9581,7 @@
                           <a:solidFill>
                             <a:srgbClr val="12151A"/>
                           </a:solidFill>
-                          <a:latin typeface="Segoe UI"/>
+                          <a:latin typeface="맑은 고딕"/>
                           <a:ea typeface="맑은 고딕"/>
                           <a:cs typeface="맑은 고딕"/>
                         </a:rPr>
@@ -9606,7 +9606,7 @@
                           <a:solidFill>
                             <a:srgbClr val="12151A"/>
                           </a:solidFill>
-                          <a:latin typeface="Segoe UI"/>
+                          <a:latin typeface="맑은 고딕"/>
                           <a:ea typeface="맑은 고딕"/>
                           <a:cs typeface="맑은 고딕"/>
                         </a:rPr>
@@ -9631,7 +9631,7 @@
                           <a:solidFill>
                             <a:srgbClr val="12151A"/>
                           </a:solidFill>
-                          <a:latin typeface="Segoe UI"/>
+                          <a:latin typeface="맑은 고딕"/>
                           <a:ea typeface="맑은 고딕"/>
                           <a:cs typeface="맑은 고딕"/>
                         </a:rPr>
@@ -9658,7 +9658,7 @@
                           <a:solidFill>
                             <a:srgbClr val="12151A"/>
                           </a:solidFill>
-                          <a:latin typeface="Segoe UI"/>
+                          <a:latin typeface="맑은 고딕"/>
                           <a:ea typeface="맑은 고딕"/>
                           <a:cs typeface="맑은 고딕"/>
                         </a:rPr>
@@ -9683,7 +9683,7 @@
                           <a:solidFill>
                             <a:srgbClr val="12151A"/>
                           </a:solidFill>
-                          <a:latin typeface="Segoe UI"/>
+                          <a:latin typeface="맑은 고딕"/>
                           <a:ea typeface="맑은 고딕"/>
                           <a:cs typeface="맑은 고딕"/>
                         </a:rPr>
@@ -9708,7 +9708,7 @@
                           <a:solidFill>
                             <a:srgbClr val="12151A"/>
                           </a:solidFill>
-                          <a:latin typeface="Segoe UI"/>
+                          <a:latin typeface="맑은 고딕"/>
                           <a:ea typeface="맑은 고딕"/>
                           <a:cs typeface="맑은 고딕"/>
                         </a:rPr>
@@ -9733,7 +9733,7 @@
                           <a:solidFill>
                             <a:srgbClr val="12151A"/>
                           </a:solidFill>
-                          <a:latin typeface="Segoe UI"/>
+                          <a:latin typeface="맑은 고딕"/>
                           <a:ea typeface="맑은 고딕"/>
                           <a:cs typeface="맑은 고딕"/>
                         </a:rPr>
@@ -9758,7 +9758,7 @@
                           <a:solidFill>
                             <a:srgbClr val="12151A"/>
                           </a:solidFill>
-                          <a:latin typeface="Segoe UI"/>
+                          <a:latin typeface="맑은 고딕"/>
                           <a:ea typeface="맑은 고딕"/>
                           <a:cs typeface="맑은 고딕"/>
                         </a:rPr>
@@ -9785,7 +9785,7 @@
                           <a:solidFill>
                             <a:srgbClr val="12151A"/>
                           </a:solidFill>
-                          <a:latin typeface="Segoe UI"/>
+                          <a:latin typeface="맑은 고딕"/>
                           <a:ea typeface="맑은 고딕"/>
                           <a:cs typeface="맑은 고딕"/>
                         </a:rPr>
@@ -9810,7 +9810,7 @@
                           <a:solidFill>
                             <a:srgbClr val="12151A"/>
                           </a:solidFill>
-                          <a:latin typeface="Segoe UI"/>
+                          <a:latin typeface="맑은 고딕"/>
                           <a:ea typeface="맑은 고딕"/>
                           <a:cs typeface="맑은 고딕"/>
                         </a:rPr>
@@ -9835,7 +9835,7 @@
                           <a:solidFill>
                             <a:srgbClr val="12151A"/>
                           </a:solidFill>
-                          <a:latin typeface="Segoe UI"/>
+                          <a:latin typeface="맑은 고딕"/>
                           <a:ea typeface="맑은 고딕"/>
                           <a:cs typeface="맑은 고딕"/>
                         </a:rPr>
@@ -9860,7 +9860,7 @@
                           <a:solidFill>
                             <a:srgbClr val="12151A"/>
                           </a:solidFill>
-                          <a:latin typeface="Segoe UI"/>
+                          <a:latin typeface="맑은 고딕"/>
                           <a:ea typeface="맑은 고딕"/>
                           <a:cs typeface="맑은 고딕"/>
                         </a:rPr>
@@ -9885,7 +9885,7 @@
                           <a:solidFill>
                             <a:srgbClr val="12151A"/>
                           </a:solidFill>
-                          <a:latin typeface="Segoe UI"/>
+                          <a:latin typeface="맑은 고딕"/>
                           <a:ea typeface="맑은 고딕"/>
                           <a:cs typeface="맑은 고딕"/>
                         </a:rPr>
@@ -9912,7 +9912,7 @@
                           <a:solidFill>
                             <a:srgbClr val="12151A"/>
                           </a:solidFill>
-                          <a:latin typeface="Segoe UI"/>
+                          <a:latin typeface="맑은 고딕"/>
                           <a:ea typeface="맑은 고딕"/>
                           <a:cs typeface="맑은 고딕"/>
                         </a:rPr>
@@ -9937,7 +9937,7 @@
                           <a:solidFill>
                             <a:srgbClr val="12151A"/>
                           </a:solidFill>
-                          <a:latin typeface="Segoe UI"/>
+                          <a:latin typeface="맑은 고딕"/>
                           <a:ea typeface="맑은 고딕"/>
                           <a:cs typeface="맑은 고딕"/>
                         </a:rPr>
@@ -9962,7 +9962,7 @@
                           <a:solidFill>
                             <a:srgbClr val="12151A"/>
                           </a:solidFill>
-                          <a:latin typeface="Segoe UI"/>
+                          <a:latin typeface="맑은 고딕"/>
                           <a:ea typeface="맑은 고딕"/>
                           <a:cs typeface="맑은 고딕"/>
                         </a:rPr>
@@ -9987,7 +9987,7 @@
                           <a:solidFill>
                             <a:srgbClr val="12151A"/>
                           </a:solidFill>
-                          <a:latin typeface="Segoe UI"/>
+                          <a:latin typeface="맑은 고딕"/>
                           <a:ea typeface="맑은 고딕"/>
                           <a:cs typeface="맑은 고딕"/>
                         </a:rPr>
@@ -10012,7 +10012,7 @@
                           <a:solidFill>
                             <a:srgbClr val="12151A"/>
                           </a:solidFill>
-                          <a:latin typeface="Segoe UI"/>
+                          <a:latin typeface="맑은 고딕"/>
                           <a:ea typeface="맑은 고딕"/>
                           <a:cs typeface="맑은 고딕"/>
                         </a:rPr>
@@ -10063,7 +10063,7 @@
                 <a:solidFill>
                   <a:srgbClr val="52514E"/>
                 </a:solidFill>
-                <a:latin typeface="Segoe UI"/>
+                <a:latin typeface="맑은 고딕"/>
                 <a:ea typeface="맑은 고딕"/>
                 <a:cs typeface="맑은 고딕"/>
               </a:rPr>
@@ -10104,7 +10104,7 @@
                 <a:solidFill>
                   <a:srgbClr val="52514E"/>
                 </a:solidFill>
-                <a:latin typeface="Segoe UI"/>
+                <a:latin typeface="맑은 고딕"/>
                 <a:ea typeface="맑은 고딕"/>
                 <a:cs typeface="맑은 고딕"/>
               </a:rPr>
@@ -10163,7 +10163,7 @@
                 <a:solidFill>
                   <a:srgbClr val="2A78D6"/>
                 </a:solidFill>
-                <a:latin typeface="Segoe UI"/>
+                <a:latin typeface="맑은 고딕"/>
                 <a:ea typeface="맑은 고딕"/>
                 <a:cs typeface="맑은 고딕"/>
               </a:rPr>
@@ -10204,7 +10204,7 @@
                 <a:solidFill>
                   <a:srgbClr val="12151A"/>
                 </a:solidFill>
-                <a:latin typeface="Segoe UI"/>
+                <a:latin typeface="맑은 고딕"/>
                 <a:ea typeface="맑은 고딕"/>
                 <a:cs typeface="맑은 고딕"/>
               </a:rPr>
@@ -10245,7 +10245,7 @@
                 <a:solidFill>
                   <a:srgbClr val="52514E"/>
                 </a:solidFill>
-                <a:latin typeface="Segoe UI"/>
+                <a:latin typeface="맑은 고딕"/>
                 <a:ea typeface="맑은 고딕"/>
                 <a:cs typeface="맑은 고딕"/>
               </a:rPr>
@@ -10378,7 +10378,7 @@
                 <a:solidFill>
                   <a:srgbClr val="12151A"/>
                 </a:solidFill>
-                <a:latin typeface="Segoe UI"/>
+                <a:latin typeface="맑은 고딕"/>
                 <a:ea typeface="맑은 고딕"/>
                 <a:cs typeface="맑은 고딕"/>
               </a:rPr>
@@ -10399,7 +10399,7 @@
                 <a:solidFill>
                   <a:srgbClr val="12151A"/>
                 </a:solidFill>
-                <a:latin typeface="Segoe UI"/>
+                <a:latin typeface="맑은 고딕"/>
                 <a:ea typeface="맑은 고딕"/>
                 <a:cs typeface="맑은 고딕"/>
               </a:rPr>
@@ -10440,7 +10440,7 @@
                 <a:solidFill>
                   <a:srgbClr val="52514E"/>
                 </a:solidFill>
-                <a:latin typeface="Segoe UI"/>
+                <a:latin typeface="맑은 고딕"/>
                 <a:ea typeface="맑은 고딕"/>
                 <a:cs typeface="맑은 고딕"/>
               </a:rPr>
@@ -10481,7 +10481,7 @@
                 <a:solidFill>
                   <a:srgbClr val="52514E"/>
                 </a:solidFill>
-                <a:latin typeface="Segoe UI"/>
+                <a:latin typeface="맑은 고딕"/>
                 <a:ea typeface="맑은 고딕"/>
                 <a:cs typeface="맑은 고딕"/>
               </a:rPr>
@@ -10540,7 +10540,7 @@
                 <a:solidFill>
                   <a:srgbClr val="2A78D6"/>
                 </a:solidFill>
-                <a:latin typeface="Segoe UI"/>
+                <a:latin typeface="맑은 고딕"/>
                 <a:ea typeface="맑은 고딕"/>
                 <a:cs typeface="맑은 고딕"/>
               </a:rPr>
@@ -10581,7 +10581,7 @@
                 <a:solidFill>
                   <a:srgbClr val="12151A"/>
                 </a:solidFill>
-                <a:latin typeface="Segoe UI"/>
+                <a:latin typeface="맑은 고딕"/>
                 <a:ea typeface="맑은 고딕"/>
                 <a:cs typeface="맑은 고딕"/>
               </a:rPr>
@@ -10622,7 +10622,7 @@
                 <a:solidFill>
                   <a:srgbClr val="52514E"/>
                 </a:solidFill>
-                <a:latin typeface="Segoe UI"/>
+                <a:latin typeface="맑은 고딕"/>
                 <a:ea typeface="맑은 고딕"/>
                 <a:cs typeface="맑은 고딕"/>
               </a:rPr>
@@ -10751,7 +10751,7 @@
                 <a:solidFill>
                   <a:srgbClr val="2A78D6"/>
                 </a:solidFill>
-                <a:latin typeface="Segoe UI"/>
+                <a:latin typeface="맑은 고딕"/>
                 <a:ea typeface="맑은 고딕"/>
                 <a:cs typeface="맑은 고딕"/>
               </a:rPr>
@@ -10792,7 +10792,7 @@
                 <a:solidFill>
                   <a:srgbClr val="52514E"/>
                 </a:solidFill>
-                <a:latin typeface="Segoe UI"/>
+                <a:latin typeface="맑은 고딕"/>
                 <a:ea typeface="맑은 고딕"/>
                 <a:cs typeface="맑은 고딕"/>
               </a:rPr>
@@ -10813,7 +10813,7 @@
                 <a:solidFill>
                   <a:srgbClr val="52514E"/>
                 </a:solidFill>
-                <a:latin typeface="Segoe UI"/>
+                <a:latin typeface="맑은 고딕"/>
                 <a:ea typeface="맑은 고딕"/>
                 <a:cs typeface="맑은 고딕"/>
               </a:rPr>
@@ -10942,7 +10942,7 @@
                 <a:solidFill>
                   <a:srgbClr val="8A7FB5"/>
                 </a:solidFill>
-                <a:latin typeface="Segoe UI"/>
+                <a:latin typeface="맑은 고딕"/>
                 <a:ea typeface="맑은 고딕"/>
                 <a:cs typeface="맑은 고딕"/>
               </a:rPr>
@@ -10983,7 +10983,7 @@
                 <a:solidFill>
                   <a:srgbClr val="52514E"/>
                 </a:solidFill>
-                <a:latin typeface="Segoe UI"/>
+                <a:latin typeface="맑은 고딕"/>
                 <a:ea typeface="맑은 고딕"/>
                 <a:cs typeface="맑은 고딕"/>
               </a:rPr>
@@ -11004,7 +11004,7 @@
                 <a:solidFill>
                   <a:srgbClr val="52514E"/>
                 </a:solidFill>
-                <a:latin typeface="Segoe UI"/>
+                <a:latin typeface="맑은 고딕"/>
                 <a:ea typeface="맑은 고딕"/>
                 <a:cs typeface="맑은 고딕"/>
               </a:rPr>
@@ -11133,7 +11133,7 @@
                 <a:solidFill>
                   <a:srgbClr val="EDA100"/>
                 </a:solidFill>
-                <a:latin typeface="Segoe UI"/>
+                <a:latin typeface="맑은 고딕"/>
                 <a:ea typeface="맑은 고딕"/>
                 <a:cs typeface="맑은 고딕"/>
               </a:rPr>
@@ -11174,7 +11174,7 @@
                 <a:solidFill>
                   <a:srgbClr val="52514E"/>
                 </a:solidFill>
-                <a:latin typeface="Segoe UI"/>
+                <a:latin typeface="맑은 고딕"/>
                 <a:ea typeface="맑은 고딕"/>
                 <a:cs typeface="맑은 고딕"/>
               </a:rPr>
@@ -11195,7 +11195,7 @@
                 <a:solidFill>
                   <a:srgbClr val="52514E"/>
                 </a:solidFill>
-                <a:latin typeface="Segoe UI"/>
+                <a:latin typeface="맑은 고딕"/>
                 <a:ea typeface="맑은 고딕"/>
                 <a:cs typeface="맑은 고딕"/>
               </a:rPr>
@@ -11324,7 +11324,7 @@
                 <a:solidFill>
                   <a:srgbClr val="2A78D6"/>
                 </a:solidFill>
-                <a:latin typeface="Segoe UI"/>
+                <a:latin typeface="맑은 고딕"/>
                 <a:ea typeface="맑은 고딕"/>
                 <a:cs typeface="맑은 고딕"/>
               </a:rPr>
@@ -11365,7 +11365,7 @@
                 <a:solidFill>
                   <a:srgbClr val="52514E"/>
                 </a:solidFill>
-                <a:latin typeface="Segoe UI"/>
+                <a:latin typeface="맑은 고딕"/>
                 <a:ea typeface="맑은 고딕"/>
                 <a:cs typeface="맑은 고딕"/>
               </a:rPr>
@@ -11386,7 +11386,7 @@
                 <a:solidFill>
                   <a:srgbClr val="52514E"/>
                 </a:solidFill>
-                <a:latin typeface="Segoe UI"/>
+                <a:latin typeface="맑은 고딕"/>
                 <a:ea typeface="맑은 고딕"/>
                 <a:cs typeface="맑은 고딕"/>
               </a:rPr>
@@ -11471,7 +11471,7 @@
                 <a:solidFill>
                   <a:srgbClr val="12151A"/>
                 </a:solidFill>
-                <a:latin typeface="Segoe UI"/>
+                <a:latin typeface="맑은 고딕"/>
                 <a:ea typeface="맑은 고딕"/>
                 <a:cs typeface="맑은 고딕"/>
               </a:rPr>
@@ -11492,7 +11492,7 @@
                 <a:solidFill>
                   <a:srgbClr val="12151A"/>
                 </a:solidFill>
-                <a:latin typeface="Segoe UI"/>
+                <a:latin typeface="맑은 고딕"/>
                 <a:ea typeface="맑은 고딕"/>
                 <a:cs typeface="맑은 고딕"/>
               </a:rPr>
@@ -11533,7 +11533,7 @@
                 <a:solidFill>
                   <a:srgbClr val="52514E"/>
                 </a:solidFill>
-                <a:latin typeface="Segoe UI"/>
+                <a:latin typeface="맑은 고딕"/>
                 <a:ea typeface="맑은 고딕"/>
                 <a:cs typeface="맑은 고딕"/>
               </a:rPr>
@@ -11574,7 +11574,7 @@
                 <a:solidFill>
                   <a:srgbClr val="52514E"/>
                 </a:solidFill>
-                <a:latin typeface="Segoe UI"/>
+                <a:latin typeface="맑은 고딕"/>
                 <a:ea typeface="맑은 고딕"/>
                 <a:cs typeface="맑은 고딕"/>
               </a:rPr>
@@ -11633,7 +11633,7 @@
                 <a:solidFill>
                   <a:srgbClr val="2A78D6"/>
                 </a:solidFill>
-                <a:latin typeface="Segoe UI"/>
+                <a:latin typeface="맑은 고딕"/>
                 <a:ea typeface="맑은 고딕"/>
                 <a:cs typeface="맑은 고딕"/>
               </a:rPr>
@@ -11674,7 +11674,7 @@
                 <a:solidFill>
                   <a:srgbClr val="12151A"/>
                 </a:solidFill>
-                <a:latin typeface="Segoe UI"/>
+                <a:latin typeface="맑은 고딕"/>
                 <a:ea typeface="맑은 고딕"/>
                 <a:cs typeface="맑은 고딕"/>
               </a:rPr>
@@ -11715,7 +11715,7 @@
                 <a:solidFill>
                   <a:srgbClr val="52514E"/>
                 </a:solidFill>
-                <a:latin typeface="Segoe UI"/>
+                <a:latin typeface="맑은 고딕"/>
                 <a:ea typeface="맑은 고딕"/>
                 <a:cs typeface="맑은 고딕"/>
               </a:rPr>
@@ -11844,7 +11844,7 @@
                 <a:solidFill>
                   <a:srgbClr val="2A78D6"/>
                 </a:solidFill>
-                <a:latin typeface="Segoe UI"/>
+                <a:latin typeface="맑은 고딕"/>
                 <a:ea typeface="맑은 고딕"/>
                 <a:cs typeface="맑은 고딕"/>
               </a:rPr>
@@ -11885,7 +11885,7 @@
                 <a:solidFill>
                   <a:srgbClr val="12151A"/>
                 </a:solidFill>
-                <a:latin typeface="Segoe UI"/>
+                <a:latin typeface="맑은 고딕"/>
                 <a:ea typeface="맑은 고딕"/>
                 <a:cs typeface="맑은 고딕"/>
               </a:rPr>
@@ -11926,7 +11926,7 @@
                 <a:solidFill>
                   <a:srgbClr val="52514E"/>
                 </a:solidFill>
-                <a:latin typeface="Segoe UI"/>
+                <a:latin typeface="맑은 고딕"/>
                 <a:ea typeface="맑은 고딕"/>
                 <a:cs typeface="맑은 고딕"/>
               </a:rPr>
@@ -11947,7 +11947,7 @@
                 <a:solidFill>
                   <a:srgbClr val="52514E"/>
                 </a:solidFill>
-                <a:latin typeface="Segoe UI"/>
+                <a:latin typeface="맑은 고딕"/>
                 <a:ea typeface="맑은 고딕"/>
                 <a:cs typeface="맑은 고딕"/>
               </a:rPr>
@@ -12076,7 +12076,7 @@
                 <a:solidFill>
                   <a:srgbClr val="1BAF7A"/>
                 </a:solidFill>
-                <a:latin typeface="Segoe UI"/>
+                <a:latin typeface="맑은 고딕"/>
                 <a:ea typeface="맑은 고딕"/>
                 <a:cs typeface="맑은 고딕"/>
               </a:rPr>
@@ -12117,7 +12117,7 @@
                 <a:solidFill>
                   <a:srgbClr val="12151A"/>
                 </a:solidFill>
-                <a:latin typeface="Segoe UI"/>
+                <a:latin typeface="맑은 고딕"/>
                 <a:ea typeface="맑은 고딕"/>
                 <a:cs typeface="맑은 고딕"/>
               </a:rPr>
@@ -12158,7 +12158,7 @@
                 <a:solidFill>
                   <a:srgbClr val="52514E"/>
                 </a:solidFill>
-                <a:latin typeface="Segoe UI"/>
+                <a:latin typeface="맑은 고딕"/>
                 <a:ea typeface="맑은 고딕"/>
                 <a:cs typeface="맑은 고딕"/>
               </a:rPr>
@@ -12179,7 +12179,7 @@
                 <a:solidFill>
                   <a:srgbClr val="52514E"/>
                 </a:solidFill>
-                <a:latin typeface="Segoe UI"/>
+                <a:latin typeface="맑은 고딕"/>
                 <a:ea typeface="맑은 고딕"/>
                 <a:cs typeface="맑은 고딕"/>
               </a:rPr>
@@ -12308,7 +12308,7 @@
                 <a:solidFill>
                   <a:srgbClr val="EDA100"/>
                 </a:solidFill>
-                <a:latin typeface="Segoe UI"/>
+                <a:latin typeface="맑은 고딕"/>
                 <a:ea typeface="맑은 고딕"/>
                 <a:cs typeface="맑은 고딕"/>
               </a:rPr>
@@ -12349,7 +12349,7 @@
                 <a:solidFill>
                   <a:srgbClr val="12151A"/>
                 </a:solidFill>
-                <a:latin typeface="Segoe UI"/>
+                <a:latin typeface="맑은 고딕"/>
                 <a:ea typeface="맑은 고딕"/>
                 <a:cs typeface="맑은 고딕"/>
               </a:rPr>
@@ -12390,7 +12390,7 @@
                 <a:solidFill>
                   <a:srgbClr val="52514E"/>
                 </a:solidFill>
-                <a:latin typeface="Segoe UI"/>
+                <a:latin typeface="맑은 고딕"/>
                 <a:ea typeface="맑은 고딕"/>
                 <a:cs typeface="맑은 고딕"/>
               </a:rPr>
@@ -12411,7 +12411,7 @@
                 <a:solidFill>
                   <a:srgbClr val="52514E"/>
                 </a:solidFill>
-                <a:latin typeface="Segoe UI"/>
+                <a:latin typeface="맑은 고딕"/>
                 <a:ea typeface="맑은 고딕"/>
                 <a:cs typeface="맑은 고딕"/>
               </a:rPr>
@@ -12540,7 +12540,7 @@
                 <a:solidFill>
                   <a:srgbClr val="4A3AA7"/>
                 </a:solidFill>
-                <a:latin typeface="Segoe UI"/>
+                <a:latin typeface="맑은 고딕"/>
                 <a:ea typeface="맑은 고딕"/>
                 <a:cs typeface="맑은 고딕"/>
               </a:rPr>
@@ -12581,7 +12581,7 @@
                 <a:solidFill>
                   <a:srgbClr val="12151A"/>
                 </a:solidFill>
-                <a:latin typeface="Segoe UI"/>
+                <a:latin typeface="맑은 고딕"/>
                 <a:ea typeface="맑은 고딕"/>
                 <a:cs typeface="맑은 고딕"/>
               </a:rPr>
@@ -12622,7 +12622,7 @@
                 <a:solidFill>
                   <a:srgbClr val="52514E"/>
                 </a:solidFill>
-                <a:latin typeface="Segoe UI"/>
+                <a:latin typeface="맑은 고딕"/>
                 <a:ea typeface="맑은 고딕"/>
                 <a:cs typeface="맑은 고딕"/>
               </a:rPr>
@@ -12643,7 +12643,7 @@
                 <a:solidFill>
                   <a:srgbClr val="52514E"/>
                 </a:solidFill>
-                <a:latin typeface="Segoe UI"/>
+                <a:latin typeface="맑은 고딕"/>
                 <a:ea typeface="맑은 고딕"/>
                 <a:cs typeface="맑은 고딕"/>
               </a:rPr>
@@ -12728,7 +12728,7 @@
                 <a:solidFill>
                   <a:srgbClr val="12151A"/>
                 </a:solidFill>
-                <a:latin typeface="Segoe UI"/>
+                <a:latin typeface="맑은 고딕"/>
                 <a:ea typeface="맑은 고딕"/>
                 <a:cs typeface="맑은 고딕"/>
               </a:rPr>
@@ -12749,7 +12749,7 @@
                 <a:solidFill>
                   <a:srgbClr val="12151A"/>
                 </a:solidFill>
-                <a:latin typeface="Segoe UI"/>
+                <a:latin typeface="맑은 고딕"/>
                 <a:ea typeface="맑은 고딕"/>
                 <a:cs typeface="맑은 고딕"/>
               </a:rPr>
@@ -12790,7 +12790,7 @@
                 <a:solidFill>
                   <a:srgbClr val="52514E"/>
                 </a:solidFill>
-                <a:latin typeface="Segoe UI"/>
+                <a:latin typeface="맑은 고딕"/>
                 <a:ea typeface="맑은 고딕"/>
                 <a:cs typeface="맑은 고딕"/>
               </a:rPr>
@@ -12831,7 +12831,7 @@
                 <a:solidFill>
                   <a:srgbClr val="52514E"/>
                 </a:solidFill>
-                <a:latin typeface="Segoe UI"/>
+                <a:latin typeface="맑은 고딕"/>
                 <a:ea typeface="맑은 고딕"/>
                 <a:cs typeface="맑은 고딕"/>
               </a:rPr>
@@ -12890,7 +12890,7 @@
                 <a:solidFill>
                   <a:srgbClr val="2A78D6"/>
                 </a:solidFill>
-                <a:latin typeface="Segoe UI"/>
+                <a:latin typeface="맑은 고딕"/>
                 <a:ea typeface="맑은 고딕"/>
                 <a:cs typeface="맑은 고딕"/>
               </a:rPr>
@@ -12931,7 +12931,7 @@
                 <a:solidFill>
                   <a:srgbClr val="12151A"/>
                 </a:solidFill>
-                <a:latin typeface="Segoe UI"/>
+                <a:latin typeface="맑은 고딕"/>
                 <a:ea typeface="맑은 고딕"/>
                 <a:cs typeface="맑은 고딕"/>
               </a:rPr>
@@ -12972,7 +12972,7 @@
                 <a:solidFill>
                   <a:srgbClr val="12151A"/>
                 </a:solidFill>
-                <a:latin typeface="Segoe UI"/>
+                <a:latin typeface="맑은 고딕"/>
                 <a:ea typeface="맑은 고딕"/>
                 <a:cs typeface="맑은 고딕"/>
               </a:rPr>
@@ -13055,7 +13055,7 @@
                 <a:solidFill>
                   <a:srgbClr val="12151A"/>
                 </a:solidFill>
-                <a:latin typeface="Segoe UI"/>
+                <a:latin typeface="맑은 고딕"/>
                 <a:ea typeface="맑은 고딕"/>
                 <a:cs typeface="맑은 고딕"/>
               </a:rPr>
@@ -13096,7 +13096,7 @@
                 <a:solidFill>
                   <a:srgbClr val="52514E"/>
                 </a:solidFill>
-                <a:latin typeface="Segoe UI"/>
+                <a:latin typeface="맑은 고딕"/>
                 <a:ea typeface="맑은 고딕"/>
                 <a:cs typeface="맑은 고딕"/>
               </a:rPr>
@@ -13179,7 +13179,7 @@
                 <a:solidFill>
                   <a:srgbClr val="12151A"/>
                 </a:solidFill>
-                <a:latin typeface="Segoe UI"/>
+                <a:latin typeface="맑은 고딕"/>
                 <a:ea typeface="맑은 고딕"/>
                 <a:cs typeface="맑은 고딕"/>
               </a:rPr>
@@ -13220,7 +13220,7 @@
                 <a:solidFill>
                   <a:srgbClr val="52514E"/>
                 </a:solidFill>
-                <a:latin typeface="Segoe UI"/>
+                <a:latin typeface="맑은 고딕"/>
                 <a:ea typeface="맑은 고딕"/>
                 <a:cs typeface="맑은 고딕"/>
               </a:rPr>
@@ -13303,7 +13303,7 @@
                 <a:solidFill>
                   <a:srgbClr val="12151A"/>
                 </a:solidFill>
-                <a:latin typeface="Segoe UI"/>
+                <a:latin typeface="맑은 고딕"/>
                 <a:ea typeface="맑은 고딕"/>
                 <a:cs typeface="맑은 고딕"/>
               </a:rPr>
@@ -13344,7 +13344,7 @@
                 <a:solidFill>
                   <a:srgbClr val="52514E"/>
                 </a:solidFill>
-                <a:latin typeface="Segoe UI"/>
+                <a:latin typeface="맑은 고딕"/>
                 <a:ea typeface="맑은 고딕"/>
                 <a:cs typeface="맑은 고딕"/>
               </a:rPr>
@@ -13427,7 +13427,7 @@
                 <a:solidFill>
                   <a:srgbClr val="12151A"/>
                 </a:solidFill>
-                <a:latin typeface="Segoe UI"/>
+                <a:latin typeface="맑은 고딕"/>
                 <a:ea typeface="맑은 고딕"/>
                 <a:cs typeface="맑은 고딕"/>
               </a:rPr>
@@ -13468,7 +13468,7 @@
                 <a:solidFill>
                   <a:srgbClr val="52514E"/>
                 </a:solidFill>
-                <a:latin typeface="Segoe UI"/>
+                <a:latin typeface="맑은 고딕"/>
                 <a:ea typeface="맑은 고딕"/>
                 <a:cs typeface="맑은 고딕"/>
               </a:rPr>
@@ -13509,7 +13509,7 @@
                 <a:solidFill>
                   <a:srgbClr val="12151A"/>
                 </a:solidFill>
-                <a:latin typeface="Segoe UI"/>
+                <a:latin typeface="맑은 고딕"/>
                 <a:ea typeface="맑은 고딕"/>
                 <a:cs typeface="맑은 고딕"/>
               </a:rPr>
@@ -13592,7 +13592,7 @@
                 <a:solidFill>
                   <a:srgbClr val="1BAF7A"/>
                 </a:solidFill>
-                <a:latin typeface="Segoe UI"/>
+                <a:latin typeface="맑은 고딕"/>
                 <a:ea typeface="맑은 고딕"/>
                 <a:cs typeface="맑은 고딕"/>
               </a:rPr>
@@ -13633,7 +13633,7 @@
                 <a:solidFill>
                   <a:srgbClr val="52514E"/>
                 </a:solidFill>
-                <a:latin typeface="Segoe UI"/>
+                <a:latin typeface="맑은 고딕"/>
                 <a:ea typeface="맑은 고딕"/>
                 <a:cs typeface="맑은 고딕"/>
               </a:rPr>
@@ -13716,7 +13716,7 @@
                 <a:solidFill>
                   <a:srgbClr val="2A78D6"/>
                 </a:solidFill>
-                <a:latin typeface="Segoe UI"/>
+                <a:latin typeface="맑은 고딕"/>
                 <a:ea typeface="맑은 고딕"/>
                 <a:cs typeface="맑은 고딕"/>
               </a:rPr>
@@ -13757,7 +13757,7 @@
                 <a:solidFill>
                   <a:srgbClr val="52514E"/>
                 </a:solidFill>
-                <a:latin typeface="Segoe UI"/>
+                <a:latin typeface="맑은 고딕"/>
                 <a:ea typeface="맑은 고딕"/>
                 <a:cs typeface="맑은 고딕"/>
               </a:rPr>
@@ -13840,7 +13840,7 @@
                 <a:solidFill>
                   <a:srgbClr val="EDA100"/>
                 </a:solidFill>
-                <a:latin typeface="Segoe UI"/>
+                <a:latin typeface="맑은 고딕"/>
                 <a:ea typeface="맑은 고딕"/>
                 <a:cs typeface="맑은 고딕"/>
               </a:rPr>
@@ -13881,7 +13881,7 @@
                 <a:solidFill>
                   <a:srgbClr val="52514E"/>
                 </a:solidFill>
-                <a:latin typeface="Segoe UI"/>
+                <a:latin typeface="맑은 고딕"/>
                 <a:ea typeface="맑은 고딕"/>
                 <a:cs typeface="맑은 고딕"/>
               </a:rPr>
@@ -13964,7 +13964,7 @@
                 <a:solidFill>
                   <a:srgbClr val="2A78D6"/>
                 </a:solidFill>
-                <a:latin typeface="Segoe UI"/>
+                <a:latin typeface="맑은 고딕"/>
                 <a:ea typeface="맑은 고딕"/>
                 <a:cs typeface="맑은 고딕"/>
               </a:rPr>
@@ -14005,7 +14005,7 @@
                 <a:solidFill>
                   <a:srgbClr val="52514E"/>
                 </a:solidFill>
-                <a:latin typeface="Segoe UI"/>
+                <a:latin typeface="맑은 고딕"/>
                 <a:ea typeface="맑은 고딕"/>
                 <a:cs typeface="맑은 고딕"/>
               </a:rPr>
@@ -14090,7 +14090,7 @@
                 <a:solidFill>
                   <a:srgbClr val="12151A"/>
                 </a:solidFill>
-                <a:latin typeface="Segoe UI"/>
+                <a:latin typeface="맑은 고딕"/>
                 <a:ea typeface="맑은 고딕"/>
                 <a:cs typeface="맑은 고딕"/>
               </a:rPr>
@@ -14111,7 +14111,7 @@
                 <a:solidFill>
                   <a:srgbClr val="12151A"/>
                 </a:solidFill>
-                <a:latin typeface="Segoe UI"/>
+                <a:latin typeface="맑은 고딕"/>
                 <a:ea typeface="맑은 고딕"/>
                 <a:cs typeface="맑은 고딕"/>
               </a:rPr>
@@ -14152,7 +14152,7 @@
                 <a:solidFill>
                   <a:srgbClr val="52514E"/>
                 </a:solidFill>
-                <a:latin typeface="Segoe UI"/>
+                <a:latin typeface="맑은 고딕"/>
                 <a:ea typeface="맑은 고딕"/>
                 <a:cs typeface="맑은 고딕"/>
               </a:rPr>
@@ -14193,7 +14193,7 @@
                 <a:solidFill>
                   <a:srgbClr val="52514E"/>
                 </a:solidFill>
-                <a:latin typeface="Segoe UI"/>
+                <a:latin typeface="맑은 고딕"/>
                 <a:ea typeface="맑은 고딕"/>
                 <a:cs typeface="맑은 고딕"/>
               </a:rPr>
@@ -14252,7 +14252,7 @@
                 <a:solidFill>
                   <a:srgbClr val="2A78D6"/>
                 </a:solidFill>
-                <a:latin typeface="Segoe UI"/>
+                <a:latin typeface="맑은 고딕"/>
                 <a:ea typeface="맑은 고딕"/>
                 <a:cs typeface="맑은 고딕"/>
               </a:rPr>
@@ -14293,7 +14293,7 @@
                 <a:solidFill>
                   <a:srgbClr val="12151A"/>
                 </a:solidFill>
-                <a:latin typeface="Segoe UI"/>
+                <a:latin typeface="맑은 고딕"/>
                 <a:ea typeface="맑은 고딕"/>
                 <a:cs typeface="맑은 고딕"/>
               </a:rPr>
@@ -14334,7 +14334,7 @@
                 <a:solidFill>
                   <a:srgbClr val="52514E"/>
                 </a:solidFill>
-                <a:latin typeface="Segoe UI"/>
+                <a:latin typeface="맑은 고딕"/>
                 <a:ea typeface="맑은 고딕"/>
                 <a:cs typeface="맑은 고딕"/>
               </a:rPr>
@@ -14463,7 +14463,7 @@
                 <a:solidFill>
                   <a:srgbClr val="52514E"/>
                 </a:solidFill>
-                <a:latin typeface="Segoe UI"/>
+                <a:latin typeface="맑은 고딕"/>
                 <a:ea typeface="맑은 고딕"/>
                 <a:cs typeface="맑은 고딕"/>
               </a:rPr>
@@ -14504,7 +14504,7 @@
                 <a:solidFill>
                   <a:srgbClr val="12151A"/>
                 </a:solidFill>
-                <a:latin typeface="Segoe UI"/>
+                <a:latin typeface="맑은 고딕"/>
                 <a:ea typeface="맑은 고딕"/>
                 <a:cs typeface="맑은 고딕"/>
               </a:rPr>
@@ -14545,7 +14545,7 @@
                 <a:solidFill>
                   <a:srgbClr val="52514E"/>
                 </a:solidFill>
-                <a:latin typeface="Segoe UI"/>
+                <a:latin typeface="맑은 고딕"/>
                 <a:ea typeface="맑은 고딕"/>
                 <a:cs typeface="맑은 고딕"/>
               </a:rPr>
@@ -14674,7 +14674,7 @@
                 <a:solidFill>
                   <a:srgbClr val="52514E"/>
                 </a:solidFill>
-                <a:latin typeface="Segoe UI"/>
+                <a:latin typeface="맑은 고딕"/>
                 <a:ea typeface="맑은 고딕"/>
                 <a:cs typeface="맑은 고딕"/>
               </a:rPr>
@@ -14715,7 +14715,7 @@
                 <a:solidFill>
                   <a:srgbClr val="12151A"/>
                 </a:solidFill>
-                <a:latin typeface="Segoe UI"/>
+                <a:latin typeface="맑은 고딕"/>
                 <a:ea typeface="맑은 고딕"/>
                 <a:cs typeface="맑은 고딕"/>
               </a:rPr>
@@ -14756,7 +14756,7 @@
                 <a:solidFill>
                   <a:srgbClr val="52514E"/>
                 </a:solidFill>
-                <a:latin typeface="Segoe UI"/>
+                <a:latin typeface="맑은 고딕"/>
                 <a:ea typeface="맑은 고딕"/>
                 <a:cs typeface="맑은 고딕"/>
               </a:rPr>
@@ -14885,7 +14885,7 @@
                 <a:solidFill>
                   <a:srgbClr val="52514E"/>
                 </a:solidFill>
-                <a:latin typeface="Segoe UI"/>
+                <a:latin typeface="맑은 고딕"/>
                 <a:ea typeface="맑은 고딕"/>
                 <a:cs typeface="맑은 고딕"/>
               </a:rPr>
@@ -14926,7 +14926,7 @@
                 <a:solidFill>
                   <a:srgbClr val="12151A"/>
                 </a:solidFill>
-                <a:latin typeface="Segoe UI"/>
+                <a:latin typeface="맑은 고딕"/>
                 <a:ea typeface="맑은 고딕"/>
                 <a:cs typeface="맑은 고딕"/>
               </a:rPr>
@@ -14967,7 +14967,7 @@
                 <a:solidFill>
                   <a:srgbClr val="52514E"/>
                 </a:solidFill>
-                <a:latin typeface="Segoe UI"/>
+                <a:latin typeface="맑은 고딕"/>
                 <a:ea typeface="맑은 고딕"/>
                 <a:cs typeface="맑은 고딕"/>
               </a:rPr>
@@ -15096,7 +15096,7 @@
                 <a:solidFill>
                   <a:srgbClr val="52514E"/>
                 </a:solidFill>
-                <a:latin typeface="Segoe UI"/>
+                <a:latin typeface="맑은 고딕"/>
                 <a:ea typeface="맑은 고딕"/>
                 <a:cs typeface="맑은 고딕"/>
               </a:rPr>
@@ -15137,7 +15137,7 @@
                 <a:solidFill>
                   <a:srgbClr val="12151A"/>
                 </a:solidFill>
-                <a:latin typeface="Segoe UI"/>
+                <a:latin typeface="맑은 고딕"/>
                 <a:ea typeface="맑은 고딕"/>
                 <a:cs typeface="맑은 고딕"/>
               </a:rPr>
@@ -15178,7 +15178,7 @@
                 <a:solidFill>
                   <a:srgbClr val="52514E"/>
                 </a:solidFill>
-                <a:latin typeface="Segoe UI"/>
+                <a:latin typeface="맑은 고딕"/>
                 <a:ea typeface="맑은 고딕"/>
                 <a:cs typeface="맑은 고딕"/>
               </a:rPr>
@@ -15307,7 +15307,7 @@
                 <a:solidFill>
                   <a:srgbClr val="2A78D6"/>
                 </a:solidFill>
-                <a:latin typeface="Segoe UI"/>
+                <a:latin typeface="맑은 고딕"/>
                 <a:ea typeface="맑은 고딕"/>
                 <a:cs typeface="맑은 고딕"/>
               </a:rPr>
@@ -15348,7 +15348,7 @@
                 <a:solidFill>
                   <a:srgbClr val="12151A"/>
                 </a:solidFill>
-                <a:latin typeface="Segoe UI"/>
+                <a:latin typeface="맑은 고딕"/>
                 <a:ea typeface="맑은 고딕"/>
                 <a:cs typeface="맑은 고딕"/>
               </a:rPr>
@@ -15389,7 +15389,7 @@
                 <a:solidFill>
                   <a:srgbClr val="52514E"/>
                 </a:solidFill>
-                <a:latin typeface="Segoe UI"/>
+                <a:latin typeface="맑은 고딕"/>
                 <a:ea typeface="맑은 고딕"/>
                 <a:cs typeface="맑은 고딕"/>
               </a:rPr>
@@ -15410,7 +15410,7 @@
                 <a:solidFill>
                   <a:srgbClr val="52514E"/>
                 </a:solidFill>
-                <a:latin typeface="Segoe UI"/>
+                <a:latin typeface="맑은 고딕"/>
                 <a:ea typeface="맑은 고딕"/>
                 <a:cs typeface="맑은 고딕"/>
               </a:rPr>
@@ -15431,7 +15431,7 @@
                 <a:solidFill>
                   <a:srgbClr val="52514E"/>
                 </a:solidFill>
-                <a:latin typeface="Segoe UI"/>
+                <a:latin typeface="맑은 고딕"/>
                 <a:ea typeface="맑은 고딕"/>
                 <a:cs typeface="맑은 고딕"/>
               </a:rPr>
@@ -15560,7 +15560,7 @@
                 <a:solidFill>
                   <a:srgbClr val="2A78D6"/>
                 </a:solidFill>
-                <a:latin typeface="Segoe UI"/>
+                <a:latin typeface="맑은 고딕"/>
                 <a:ea typeface="맑은 고딕"/>
                 <a:cs typeface="맑은 고딕"/>
               </a:rPr>
@@ -15601,7 +15601,7 @@
                 <a:solidFill>
                   <a:srgbClr val="12151A"/>
                 </a:solidFill>
-                <a:latin typeface="Segoe UI"/>
+                <a:latin typeface="맑은 고딕"/>
                 <a:ea typeface="맑은 고딕"/>
                 <a:cs typeface="맑은 고딕"/>
               </a:rPr>
@@ -15642,7 +15642,7 @@
                 <a:solidFill>
                   <a:srgbClr val="52514E"/>
                 </a:solidFill>
-                <a:latin typeface="Segoe UI"/>
+                <a:latin typeface="맑은 고딕"/>
                 <a:ea typeface="맑은 고딕"/>
                 <a:cs typeface="맑은 고딕"/>
               </a:rPr>
@@ -15663,7 +15663,7 @@
                 <a:solidFill>
                   <a:srgbClr val="52514E"/>
                 </a:solidFill>
-                <a:latin typeface="Segoe UI"/>
+                <a:latin typeface="맑은 고딕"/>
                 <a:ea typeface="맑은 고딕"/>
                 <a:cs typeface="맑은 고딕"/>
               </a:rPr>
@@ -15684,7 +15684,7 @@
                 <a:solidFill>
                   <a:srgbClr val="52514E"/>
                 </a:solidFill>
-                <a:latin typeface="Segoe UI"/>
+                <a:latin typeface="맑은 고딕"/>
                 <a:ea typeface="맑은 고딕"/>
                 <a:cs typeface="맑은 고딕"/>
               </a:rPr>
@@ -15813,7 +15813,7 @@
                 <a:solidFill>
                   <a:srgbClr val="1BAF7A"/>
                 </a:solidFill>
-                <a:latin typeface="Segoe UI"/>
+                <a:latin typeface="맑은 고딕"/>
                 <a:ea typeface="맑은 고딕"/>
                 <a:cs typeface="맑은 고딕"/>
               </a:rPr>
@@ -15854,7 +15854,7 @@
                 <a:solidFill>
                   <a:srgbClr val="12151A"/>
                 </a:solidFill>
-                <a:latin typeface="Segoe UI"/>
+                <a:latin typeface="맑은 고딕"/>
                 <a:ea typeface="맑은 고딕"/>
                 <a:cs typeface="맑은 고딕"/>
               </a:rPr>
@@ -15895,7 +15895,7 @@
                 <a:solidFill>
                   <a:srgbClr val="52514E"/>
                 </a:solidFill>
-                <a:latin typeface="Segoe UI"/>
+                <a:latin typeface="맑은 고딕"/>
                 <a:ea typeface="맑은 고딕"/>
                 <a:cs typeface="맑은 고딕"/>
               </a:rPr>
@@ -15916,7 +15916,7 @@
                 <a:solidFill>
                   <a:srgbClr val="52514E"/>
                 </a:solidFill>
-                <a:latin typeface="Segoe UI"/>
+                <a:latin typeface="맑은 고딕"/>
                 <a:ea typeface="맑은 고딕"/>
                 <a:cs typeface="맑은 고딕"/>
               </a:rPr>
@@ -15957,7 +15957,7 @@
                 <a:solidFill>
                   <a:srgbClr val="52514E"/>
                 </a:solidFill>
-                <a:latin typeface="Segoe UI"/>
+                <a:latin typeface="맑은 고딕"/>
                 <a:ea typeface="맑은 고딕"/>
                 <a:cs typeface="맑은 고딕"/>
               </a:rPr>
@@ -15998,7 +15998,7 @@
                 <a:solidFill>
                   <a:srgbClr val="52514E"/>
                 </a:solidFill>
-                <a:latin typeface="Segoe UI"/>
+                <a:latin typeface="맑은 고딕"/>
                 <a:ea typeface="맑은 고딕"/>
                 <a:cs typeface="맑은 고딕"/>
               </a:rPr>
@@ -16057,7 +16057,7 @@
                 <a:solidFill>
                   <a:srgbClr val="2A78D6"/>
                 </a:solidFill>
-                <a:latin typeface="Segoe UI"/>
+                <a:latin typeface="맑은 고딕"/>
                 <a:ea typeface="맑은 고딕"/>
                 <a:cs typeface="맑은 고딕"/>
               </a:rPr>
@@ -16098,7 +16098,7 @@
                 <a:solidFill>
                   <a:srgbClr val="12151A"/>
                 </a:solidFill>
-                <a:latin typeface="Segoe UI"/>
+                <a:latin typeface="맑은 고딕"/>
                 <a:ea typeface="맑은 고딕"/>
                 <a:cs typeface="맑은 고딕"/>
               </a:rPr>
@@ -16139,7 +16139,7 @@
                 <a:solidFill>
                   <a:srgbClr val="52514E"/>
                 </a:solidFill>
-                <a:latin typeface="Segoe UI"/>
+                <a:latin typeface="맑은 고딕"/>
                 <a:ea typeface="맑은 고딕"/>
                 <a:cs typeface="맑은 고딕"/>
               </a:rPr>
@@ -16268,7 +16268,7 @@
                 <a:solidFill>
                   <a:srgbClr val="EDA100"/>
                 </a:solidFill>
-                <a:latin typeface="Segoe UI"/>
+                <a:latin typeface="맑은 고딕"/>
                 <a:ea typeface="맑은 고딕"/>
                 <a:cs typeface="맑은 고딕"/>
               </a:rPr>
@@ -16309,7 +16309,7 @@
                 <a:solidFill>
                   <a:srgbClr val="12151A"/>
                 </a:solidFill>
-                <a:latin typeface="Segoe UI"/>
+                <a:latin typeface="맑은 고딕"/>
                 <a:ea typeface="맑은 고딕"/>
                 <a:cs typeface="맑은 고딕"/>
               </a:rPr>
@@ -16350,7 +16350,7 @@
                 <a:solidFill>
                   <a:srgbClr val="52514E"/>
                 </a:solidFill>
-                <a:latin typeface="Segoe UI"/>
+                <a:latin typeface="맑은 고딕"/>
                 <a:ea typeface="맑은 고딕"/>
                 <a:cs typeface="맑은 고딕"/>
               </a:rPr>
@@ -16479,7 +16479,7 @@
                 <a:solidFill>
                   <a:srgbClr val="EDA100"/>
                 </a:solidFill>
-                <a:latin typeface="Segoe UI"/>
+                <a:latin typeface="맑은 고딕"/>
                 <a:ea typeface="맑은 고딕"/>
                 <a:cs typeface="맑은 고딕"/>
               </a:rPr>
@@ -16520,7 +16520,7 @@
                 <a:solidFill>
                   <a:srgbClr val="12151A"/>
                 </a:solidFill>
-                <a:latin typeface="Segoe UI"/>
+                <a:latin typeface="맑은 고딕"/>
                 <a:ea typeface="맑은 고딕"/>
                 <a:cs typeface="맑은 고딕"/>
               </a:rPr>
@@ -16561,7 +16561,7 @@
                 <a:solidFill>
                   <a:srgbClr val="52514E"/>
                 </a:solidFill>
-                <a:latin typeface="Segoe UI"/>
+                <a:latin typeface="맑은 고딕"/>
                 <a:ea typeface="맑은 고딕"/>
                 <a:cs typeface="맑은 고딕"/>
               </a:rPr>
@@ -16690,7 +16690,7 @@
                 <a:solidFill>
                   <a:srgbClr val="EDA100"/>
                 </a:solidFill>
-                <a:latin typeface="Segoe UI"/>
+                <a:latin typeface="맑은 고딕"/>
                 <a:ea typeface="맑은 고딕"/>
                 <a:cs typeface="맑은 고딕"/>
               </a:rPr>
@@ -16731,7 +16731,7 @@
                 <a:solidFill>
                   <a:srgbClr val="12151A"/>
                 </a:solidFill>
-                <a:latin typeface="Segoe UI"/>
+                <a:latin typeface="맑은 고딕"/>
                 <a:ea typeface="맑은 고딕"/>
                 <a:cs typeface="맑은 고딕"/>
               </a:rPr>
@@ -16772,7 +16772,7 @@
                 <a:solidFill>
                   <a:srgbClr val="52514E"/>
                 </a:solidFill>
-                <a:latin typeface="Segoe UI"/>
+                <a:latin typeface="맑은 고딕"/>
                 <a:ea typeface="맑은 고딕"/>
                 <a:cs typeface="맑은 고딕"/>
               </a:rPr>
@@ -16901,7 +16901,7 @@
                 <a:solidFill>
                   <a:srgbClr val="EDA100"/>
                 </a:solidFill>
-                <a:latin typeface="Segoe UI"/>
+                <a:latin typeface="맑은 고딕"/>
                 <a:ea typeface="맑은 고딕"/>
                 <a:cs typeface="맑은 고딕"/>
               </a:rPr>
@@ -16942,7 +16942,7 @@
                 <a:solidFill>
                   <a:srgbClr val="12151A"/>
                 </a:solidFill>
-                <a:latin typeface="Segoe UI"/>
+                <a:latin typeface="맑은 고딕"/>
                 <a:ea typeface="맑은 고딕"/>
                 <a:cs typeface="맑은 고딕"/>
               </a:rPr>
@@ -16983,7 +16983,7 @@
                 <a:solidFill>
                   <a:srgbClr val="52514E"/>
                 </a:solidFill>
-                <a:latin typeface="Segoe UI"/>
+                <a:latin typeface="맑은 고딕"/>
                 <a:ea typeface="맑은 고딕"/>
                 <a:cs typeface="맑은 고딕"/>
               </a:rPr>
@@ -17024,7 +17024,7 @@
                 <a:solidFill>
                   <a:srgbClr val="52514E"/>
                 </a:solidFill>
-                <a:latin typeface="Segoe UI"/>
+                <a:latin typeface="맑은 고딕"/>
                 <a:ea typeface="맑은 고딕"/>
                 <a:cs typeface="맑은 고딕"/>
               </a:rPr>
@@ -17065,7 +17065,7 @@
                 <a:solidFill>
                   <a:srgbClr val="52514E"/>
                 </a:solidFill>
-                <a:latin typeface="Segoe UI"/>
+                <a:latin typeface="맑은 고딕"/>
                 <a:ea typeface="맑은 고딕"/>
                 <a:cs typeface="맑은 고딕"/>
               </a:rPr>
@@ -17124,7 +17124,7 @@
                 <a:solidFill>
                   <a:srgbClr val="2A78D6"/>
                 </a:solidFill>
-                <a:latin typeface="Segoe UI"/>
+                <a:latin typeface="맑은 고딕"/>
                 <a:ea typeface="맑은 고딕"/>
                 <a:cs typeface="맑은 고딕"/>
               </a:rPr>
@@ -17165,7 +17165,7 @@
                 <a:solidFill>
                   <a:srgbClr val="12151A"/>
                 </a:solidFill>
-                <a:latin typeface="Segoe UI"/>
+                <a:latin typeface="맑은 고딕"/>
                 <a:ea typeface="맑은 고딕"/>
                 <a:cs typeface="맑은 고딕"/>
               </a:rPr>
@@ -17294,7 +17294,7 @@
                 <a:solidFill>
                   <a:srgbClr val="1BAF7A"/>
                 </a:solidFill>
-                <a:latin typeface="Segoe UI"/>
+                <a:latin typeface="맑은 고딕"/>
                 <a:ea typeface="맑은 고딕"/>
                 <a:cs typeface="맑은 고딕"/>
               </a:rPr>
@@ -17335,7 +17335,7 @@
                 <a:solidFill>
                   <a:srgbClr val="1BAF7A"/>
                 </a:solidFill>
-                <a:latin typeface="Segoe UI"/>
+                <a:latin typeface="맑은 고딕"/>
                 <a:ea typeface="맑은 고딕"/>
                 <a:cs typeface="맑은 고딕"/>
               </a:rPr>
@@ -17376,7 +17376,7 @@
                 <a:solidFill>
                   <a:srgbClr val="12151A"/>
                 </a:solidFill>
-                <a:latin typeface="Segoe UI"/>
+                <a:latin typeface="맑은 고딕"/>
                 <a:ea typeface="맑은 고딕"/>
                 <a:cs typeface="맑은 고딕"/>
               </a:rPr>
@@ -17417,7 +17417,7 @@
                 <a:solidFill>
                   <a:srgbClr val="1BAF7A"/>
                 </a:solidFill>
-                <a:latin typeface="Segoe UI"/>
+                <a:latin typeface="맑은 고딕"/>
                 <a:ea typeface="맑은 고딕"/>
                 <a:cs typeface="맑은 고딕"/>
               </a:rPr>
@@ -17458,7 +17458,7 @@
                 <a:solidFill>
                   <a:srgbClr val="12151A"/>
                 </a:solidFill>
-                <a:latin typeface="Segoe UI"/>
+                <a:latin typeface="맑은 고딕"/>
                 <a:ea typeface="맑은 고딕"/>
                 <a:cs typeface="맑은 고딕"/>
               </a:rPr>
@@ -17499,7 +17499,7 @@
                 <a:solidFill>
                   <a:srgbClr val="1BAF7A"/>
                 </a:solidFill>
-                <a:latin typeface="Segoe UI"/>
+                <a:latin typeface="맑은 고딕"/>
                 <a:ea typeface="맑은 고딕"/>
                 <a:cs typeface="맑은 고딕"/>
               </a:rPr>
@@ -17540,7 +17540,7 @@
                 <a:solidFill>
                   <a:srgbClr val="12151A"/>
                 </a:solidFill>
-                <a:latin typeface="Segoe UI"/>
+                <a:latin typeface="맑은 고딕"/>
                 <a:ea typeface="맑은 고딕"/>
                 <a:cs typeface="맑은 고딕"/>
               </a:rPr>
@@ -17581,7 +17581,7 @@
                 <a:solidFill>
                   <a:srgbClr val="1BAF7A"/>
                 </a:solidFill>
-                <a:latin typeface="Segoe UI"/>
+                <a:latin typeface="맑은 고딕"/>
                 <a:ea typeface="맑은 고딕"/>
                 <a:cs typeface="맑은 고딕"/>
               </a:rPr>
@@ -17622,7 +17622,7 @@
                 <a:solidFill>
                   <a:srgbClr val="12151A"/>
                 </a:solidFill>
-                <a:latin typeface="Segoe UI"/>
+                <a:latin typeface="맑은 고딕"/>
                 <a:ea typeface="맑은 고딕"/>
                 <a:cs typeface="맑은 고딕"/>
               </a:rPr>
@@ -17751,7 +17751,7 @@
                 <a:solidFill>
                   <a:srgbClr val="2A78D6"/>
                 </a:solidFill>
-                <a:latin typeface="Segoe UI"/>
+                <a:latin typeface="맑은 고딕"/>
                 <a:ea typeface="맑은 고딕"/>
                 <a:cs typeface="맑은 고딕"/>
               </a:rPr>
@@ -17792,7 +17792,7 @@
                 <a:solidFill>
                   <a:srgbClr val="2A78D6"/>
                 </a:solidFill>
-                <a:latin typeface="Segoe UI"/>
+                <a:latin typeface="맑은 고딕"/>
                 <a:ea typeface="맑은 고딕"/>
                 <a:cs typeface="맑은 고딕"/>
               </a:rPr>
@@ -17833,7 +17833,7 @@
                 <a:solidFill>
                   <a:srgbClr val="12151A"/>
                 </a:solidFill>
-                <a:latin typeface="Segoe UI"/>
+                <a:latin typeface="맑은 고딕"/>
                 <a:ea typeface="맑은 고딕"/>
                 <a:cs typeface="맑은 고딕"/>
               </a:rPr>
@@ -17874,7 +17874,7 @@
                 <a:solidFill>
                   <a:srgbClr val="2A78D6"/>
                 </a:solidFill>
-                <a:latin typeface="Segoe UI"/>
+                <a:latin typeface="맑은 고딕"/>
                 <a:ea typeface="맑은 고딕"/>
                 <a:cs typeface="맑은 고딕"/>
               </a:rPr>
@@ -17915,7 +17915,7 @@
                 <a:solidFill>
                   <a:srgbClr val="12151A"/>
                 </a:solidFill>
-                <a:latin typeface="Segoe UI"/>
+                <a:latin typeface="맑은 고딕"/>
                 <a:ea typeface="맑은 고딕"/>
                 <a:cs typeface="맑은 고딕"/>
               </a:rPr>
@@ -17956,7 +17956,7 @@
                 <a:solidFill>
                   <a:srgbClr val="2A78D6"/>
                 </a:solidFill>
-                <a:latin typeface="Segoe UI"/>
+                <a:latin typeface="맑은 고딕"/>
                 <a:ea typeface="맑은 고딕"/>
                 <a:cs typeface="맑은 고딕"/>
               </a:rPr>
@@ -17997,7 +17997,7 @@
                 <a:solidFill>
                   <a:srgbClr val="12151A"/>
                 </a:solidFill>
-                <a:latin typeface="Segoe UI"/>
+                <a:latin typeface="맑은 고딕"/>
                 <a:ea typeface="맑은 고딕"/>
                 <a:cs typeface="맑은 고딕"/>
               </a:rPr>
@@ -18038,7 +18038,7 @@
                 <a:solidFill>
                   <a:srgbClr val="2A78D6"/>
                 </a:solidFill>
-                <a:latin typeface="Segoe UI"/>
+                <a:latin typeface="맑은 고딕"/>
                 <a:ea typeface="맑은 고딕"/>
                 <a:cs typeface="맑은 고딕"/>
               </a:rPr>
@@ -18079,7 +18079,7 @@
                 <a:solidFill>
                   <a:srgbClr val="12151A"/>
                 </a:solidFill>
-                <a:latin typeface="Segoe UI"/>
+                <a:latin typeface="맑은 고딕"/>
                 <a:ea typeface="맑은 고딕"/>
                 <a:cs typeface="맑은 고딕"/>
               </a:rPr>
@@ -18164,7 +18164,7 @@
                 <a:solidFill>
                   <a:srgbClr val="D03B3B"/>
                 </a:solidFill>
-                <a:latin typeface="Segoe UI"/>
+                <a:latin typeface="맑은 고딕"/>
                 <a:ea typeface="맑은 고딕"/>
                 <a:cs typeface="맑은 고딕"/>
               </a:rPr>
@@ -18205,7 +18205,7 @@
                 <a:solidFill>
                   <a:srgbClr val="12151A"/>
                 </a:solidFill>
-                <a:latin typeface="Segoe UI"/>
+                <a:latin typeface="맑은 고딕"/>
                 <a:ea typeface="맑은 고딕"/>
                 <a:cs typeface="맑은 고딕"/>
               </a:rPr>
@@ -18226,7 +18226,7 @@
                 <a:solidFill>
                   <a:srgbClr val="12151A"/>
                 </a:solidFill>
-                <a:latin typeface="Segoe UI"/>
+                <a:latin typeface="맑은 고딕"/>
                 <a:ea typeface="맑은 고딕"/>
                 <a:cs typeface="맑은 고딕"/>
               </a:rPr>
@@ -18267,7 +18267,7 @@
                 <a:solidFill>
                   <a:srgbClr val="D03B3B"/>
                 </a:solidFill>
-                <a:latin typeface="Segoe UI"/>
+                <a:latin typeface="맑은 고딕"/>
                 <a:ea typeface="맑은 고딕"/>
                 <a:cs typeface="맑은 고딕"/>
               </a:rPr>
@@ -18308,7 +18308,7 @@
                 <a:solidFill>
                   <a:srgbClr val="52514E"/>
                 </a:solidFill>
-                <a:latin typeface="Segoe UI"/>
+                <a:latin typeface="맑은 고딕"/>
                 <a:ea typeface="맑은 고딕"/>
                 <a:cs typeface="맑은 고딕"/>
               </a:rPr>
@@ -18349,7 +18349,7 @@
                 <a:solidFill>
                   <a:srgbClr val="52514E"/>
                 </a:solidFill>
-                <a:latin typeface="Segoe UI"/>
+                <a:latin typeface="맑은 고딕"/>
                 <a:ea typeface="맑은 고딕"/>
                 <a:cs typeface="맑은 고딕"/>
               </a:rPr>
@@ -18408,7 +18408,7 @@
                 <a:solidFill>
                   <a:srgbClr val="2A78D6"/>
                 </a:solidFill>
-                <a:latin typeface="Segoe UI"/>
+                <a:latin typeface="맑은 고딕"/>
                 <a:ea typeface="맑은 고딕"/>
                 <a:cs typeface="맑은 고딕"/>
               </a:rPr>
@@ -18449,7 +18449,7 @@
                 <a:solidFill>
                   <a:srgbClr val="12151A"/>
                 </a:solidFill>
-                <a:latin typeface="Segoe UI"/>
+                <a:latin typeface="맑은 고딕"/>
                 <a:ea typeface="맑은 고딕"/>
                 <a:cs typeface="맑은 고딕"/>
               </a:rPr>
@@ -18490,7 +18490,7 @@
                 <a:solidFill>
                   <a:srgbClr val="52514E"/>
                 </a:solidFill>
-                <a:latin typeface="Segoe UI"/>
+                <a:latin typeface="맑은 고딕"/>
                 <a:ea typeface="맑은 고딕"/>
                 <a:cs typeface="맑은 고딕"/>
               </a:rPr>
@@ -18577,7 +18577,7 @@
                 <a:solidFill>
                   <a:srgbClr val="12151A"/>
                 </a:solidFill>
-                <a:latin typeface="Segoe UI"/>
+                <a:latin typeface="맑은 고딕"/>
                 <a:ea typeface="맑은 고딕"/>
                 <a:cs typeface="맑은 고딕"/>
               </a:rPr>
@@ -18618,7 +18618,7 @@
                 <a:solidFill>
                   <a:srgbClr val="2A78D6"/>
                 </a:solidFill>
-                <a:latin typeface="Segoe UI"/>
+                <a:latin typeface="맑은 고딕"/>
                 <a:ea typeface="맑은 고딕"/>
                 <a:cs typeface="맑은 고딕"/>
               </a:rPr>
@@ -18659,7 +18659,7 @@
                 <a:solidFill>
                   <a:srgbClr val="52514E"/>
                 </a:solidFill>
-                <a:latin typeface="Segoe UI"/>
+                <a:latin typeface="맑은 고딕"/>
                 <a:ea typeface="맑은 고딕"/>
                 <a:cs typeface="맑은 고딕"/>
               </a:rPr>
@@ -18700,7 +18700,7 @@
                 <a:solidFill>
                   <a:srgbClr val="2A78D6"/>
                 </a:solidFill>
-                <a:latin typeface="Segoe UI"/>
+                <a:latin typeface="맑은 고딕"/>
                 <a:ea typeface="맑은 고딕"/>
                 <a:cs typeface="맑은 고딕"/>
               </a:rPr>
@@ -18741,7 +18741,7 @@
                 <a:solidFill>
                   <a:srgbClr val="52514E"/>
                 </a:solidFill>
-                <a:latin typeface="Segoe UI"/>
+                <a:latin typeface="맑은 고딕"/>
                 <a:ea typeface="맑은 고딕"/>
                 <a:cs typeface="맑은 고딕"/>
               </a:rPr>
@@ -18782,7 +18782,7 @@
                 <a:solidFill>
                   <a:srgbClr val="2A78D6"/>
                 </a:solidFill>
-                <a:latin typeface="Segoe UI"/>
+                <a:latin typeface="맑은 고딕"/>
                 <a:ea typeface="맑은 고딕"/>
                 <a:cs typeface="맑은 고딕"/>
               </a:rPr>
@@ -18823,7 +18823,7 @@
                 <a:solidFill>
                   <a:srgbClr val="52514E"/>
                 </a:solidFill>
-                <a:latin typeface="Segoe UI"/>
+                <a:latin typeface="맑은 고딕"/>
                 <a:ea typeface="맑은 고딕"/>
                 <a:cs typeface="맑은 고딕"/>
               </a:rPr>
@@ -18864,11 +18864,11 @@
                 <a:solidFill>
                   <a:srgbClr val="2A78D6"/>
                 </a:solidFill>
-                <a:latin typeface="Segoe UI"/>
-                <a:ea typeface="맑은 고딕"/>
-                <a:cs typeface="맑은 고딕"/>
-              </a:rPr>
-              <a:t>0개 생활권</a:t>
+                <a:latin typeface="맑은 고딕"/>
+                <a:ea typeface="맑은 고딕"/>
+                <a:cs typeface="맑은 고딕"/>
+              </a:rPr>
+              <a:t>11개 생활권</a:t>
             </a:r>
           </a:p>
         </p:txBody>
@@ -18905,11 +18905,11 @@
                 <a:solidFill>
                   <a:srgbClr val="52514E"/>
                 </a:solidFill>
-                <a:latin typeface="Segoe UI"/>
-                <a:ea typeface="맑은 고딕"/>
-                <a:cs typeface="맑은 고딕"/>
-              </a:rPr>
-              <a:t>여러 지표가 함께 낮은 유형으로 분류되었습니다</a:t>
+                <a:latin typeface="맑은 고딕"/>
+                <a:ea typeface="맑은 고딕"/>
+                <a:cs typeface="맑은 고딕"/>
+              </a:rPr>
+              <a:t>여러 지표가 함께 낮은 '주의' 유형으로 분류되었습니다</a:t>
             </a:r>
           </a:p>
         </p:txBody>
@@ -18990,7 +18990,7 @@
                 <a:solidFill>
                   <a:srgbClr val="12151A"/>
                 </a:solidFill>
-                <a:latin typeface="Segoe UI"/>
+                <a:latin typeface="맑은 고딕"/>
                 <a:ea typeface="맑은 고딕"/>
                 <a:cs typeface="맑은 고딕"/>
               </a:rPr>
@@ -19007,7 +19007,7 @@
         </p:nvSpPr>
         <p:spPr>
           <a:xfrm>
-            <a:off x="6739128" y="2871216"/>
+            <a:off x="6739128" y="2798064"/>
             <a:ext cx="228600" cy="274320"/>
           </a:xfrm>
           <a:prstGeom prst="rect">
@@ -19031,7 +19031,7 @@
                 <a:solidFill>
                   <a:srgbClr val="2A78D6"/>
                 </a:solidFill>
-                <a:latin typeface="Segoe UI"/>
+                <a:latin typeface="맑은 고딕"/>
                 <a:ea typeface="맑은 고딕"/>
                 <a:cs typeface="맑은 고딕"/>
               </a:rPr>
@@ -19048,8 +19048,8 @@
         </p:nvSpPr>
         <p:spPr>
           <a:xfrm>
-            <a:off x="7013448" y="2871216"/>
-            <a:ext cx="4251960" cy="256032"/>
+            <a:off x="7013448" y="2798064"/>
+            <a:ext cx="4206240" cy="256032"/>
           </a:xfrm>
           <a:prstGeom prst="rect">
             <a:avLst/>
@@ -19072,11 +19072,11 @@
                 <a:solidFill>
                   <a:srgbClr val="12151A"/>
                 </a:solidFill>
-                <a:latin typeface="Segoe UI"/>
-                <a:ea typeface="맑은 고딕"/>
-                <a:cs typeface="맑은 고딕"/>
-              </a:rPr>
-              <a:t>변화는 서서히, 그러나 되돌리기는 어렵게 옵니다</a:t>
+                <a:latin typeface="맑은 고딕"/>
+                <a:ea typeface="맑은 고딕"/>
+                <a:cs typeface="맑은 고딕"/>
+              </a:rPr>
+              <a:t>변화는 서서히, 되돌리기는 어렵게 옵니다</a:t>
             </a:r>
           </a:p>
         </p:txBody>
@@ -19089,8 +19089,8 @@
         </p:nvSpPr>
         <p:spPr>
           <a:xfrm>
-            <a:off x="7013448" y="3145536"/>
-            <a:ext cx="4251960" cy="841105"/>
+            <a:off x="7013448" y="3072384"/>
+            <a:ext cx="4206240" cy="420552"/>
           </a:xfrm>
           <a:prstGeom prst="rect">
             <a:avLst/>
@@ -19113,45 +19113,147 @@
                 <a:solidFill>
                   <a:srgbClr val="52514E"/>
                 </a:solidFill>
-                <a:latin typeface="Segoe UI"/>
+                <a:latin typeface="맑은 고딕"/>
                 <a:ea typeface="맑은 고딕"/>
                 <a:cs typeface="맑은 고딕"/>
               </a:rPr>
               <a:t>상권이 비면 오가는 분이 줄고, 그래서 더 비는 흐름이 생깁니다.</a:t>
             </a:r>
           </a:p>
+        </p:txBody>
+      </p:sp>
+      <p:sp>
+        <p:nvSpPr>
+          <p:cNvPr id="20" name="TextBox 19"/>
+          <p:cNvSpPr txBox="1"/>
+          <p:nvPr/>
+        </p:nvSpPr>
+        <p:spPr>
+          <a:xfrm>
+            <a:off x="6739128" y="3673622"/>
+            <a:ext cx="228600" cy="274320"/>
+          </a:xfrm>
+          <a:prstGeom prst="rect">
+            <a:avLst/>
+          </a:prstGeom>
+          <a:noFill/>
+        </p:spPr>
+        <p:txBody>
+          <a:bodyPr wrap="square" lIns="0" rIns="0" tIns="0" bIns="0">
+            <a:spAutoFit/>
+          </a:bodyPr>
+          <a:lstStyle/>
+          <a:p>
+            <a:pPr algn="l">
+              <a:lnSpc>
+                <a:spcPct val="135000"/>
+              </a:lnSpc>
+            </a:pPr>
+            <a:r>
+              <a:rPr sz="1250" b="1">
+                <a:solidFill>
+                  <a:srgbClr val="2A78D6"/>
+                </a:solidFill>
+                <a:latin typeface="맑은 고딕"/>
+                <a:ea typeface="맑은 고딕"/>
+                <a:cs typeface="맑은 고딕"/>
+              </a:rPr>
+              <a:t>▪</a:t>
+            </a:r>
+          </a:p>
+        </p:txBody>
+      </p:sp>
+      <p:sp>
+        <p:nvSpPr>
+          <p:cNvPr id="21" name="TextBox 20"/>
+          <p:cNvSpPr txBox="1"/>
+          <p:nvPr/>
+        </p:nvSpPr>
+        <p:spPr>
+          <a:xfrm>
+            <a:off x="7013448" y="3673622"/>
+            <a:ext cx="4206240" cy="256032"/>
+          </a:xfrm>
+          <a:prstGeom prst="rect">
+            <a:avLst/>
+          </a:prstGeom>
+          <a:noFill/>
+        </p:spPr>
+        <p:txBody>
+          <a:bodyPr wrap="square" lIns="0" rIns="0" tIns="0" bIns="0">
+            <a:spAutoFit/>
+          </a:bodyPr>
+          <a:lstStyle/>
+          <a:p>
+            <a:pPr algn="l">
+              <a:lnSpc>
+                <a:spcPct val="135000"/>
+              </a:lnSpc>
+            </a:pPr>
+            <a:r>
+              <a:rPr sz="1250" b="1">
+                <a:solidFill>
+                  <a:srgbClr val="12151A"/>
+                </a:solidFill>
+                <a:latin typeface="맑은 고딕"/>
+                <a:ea typeface="맑은 고딕"/>
+                <a:cs typeface="맑은 고딕"/>
+              </a:rPr>
+              <a:t>조짐은 눈에 잘 띄지 않습니다</a:t>
+            </a:r>
+          </a:p>
+        </p:txBody>
+      </p:sp>
+      <p:sp>
+        <p:nvSpPr>
+          <p:cNvPr id="22" name="TextBox 21"/>
+          <p:cNvSpPr txBox="1"/>
+          <p:nvPr/>
+        </p:nvSpPr>
+        <p:spPr>
+          <a:xfrm>
+            <a:off x="7013448" y="3947942"/>
+            <a:ext cx="4206240" cy="420552"/>
+          </a:xfrm>
+          <a:prstGeom prst="rect">
+            <a:avLst/>
+          </a:prstGeom>
+          <a:noFill/>
+        </p:spPr>
+        <p:txBody>
+          <a:bodyPr wrap="square" lIns="0" rIns="0" tIns="0" bIns="0">
+            <a:spAutoFit/>
+          </a:bodyPr>
+          <a:lstStyle/>
           <a:p>
             <a:pPr algn="l">
               <a:lnSpc>
                 <a:spcPct val="142000"/>
               </a:lnSpc>
-              <a:spcBef>
-                <a:spcPts val="0"/>
-              </a:spcBef>
             </a:pPr>
             <a:r>
               <a:rPr sz="1100" b="0">
                 <a:solidFill>
                   <a:srgbClr val="52514E"/>
                 </a:solidFill>
-                <a:latin typeface="Segoe UI"/>
-                <a:ea typeface="맑은 고딕"/>
-                <a:cs typeface="맑은 고딕"/>
-              </a:rPr>
-              <a:t>많이 진행된 뒤에 쓰는 예산은 같은 금액으로도 효과가 적습니다.</a:t>
-            </a:r>
-          </a:p>
-        </p:txBody>
-      </p:sp>
-      <p:sp>
-        <p:nvSpPr>
-          <p:cNvPr id="20" name="TextBox 19"/>
-          <p:cNvSpPr txBox="1"/>
-          <p:nvPr/>
-        </p:nvSpPr>
-        <p:spPr>
-          <a:xfrm>
-            <a:off x="6739128" y="4125630"/>
+                <a:latin typeface="맑은 고딕"/>
+                <a:ea typeface="맑은 고딕"/>
+                <a:cs typeface="맑은 고딕"/>
+              </a:rPr>
+              <a:t>통계가 뚜렷해졌을 때는 이미 많이 진행된 뒤인 경우가 많습니다.</a:t>
+            </a:r>
+          </a:p>
+        </p:txBody>
+      </p:sp>
+      <p:sp>
+        <p:nvSpPr>
+          <p:cNvPr id="23" name="TextBox 22"/>
+          <p:cNvSpPr txBox="1"/>
+          <p:nvPr/>
+        </p:nvSpPr>
+        <p:spPr>
+          <a:xfrm>
+            <a:off x="6739128" y="4549180"/>
             <a:ext cx="228600" cy="274320"/>
           </a:xfrm>
           <a:prstGeom prst="rect">
@@ -19175,7 +19277,7 @@
                 <a:solidFill>
                   <a:srgbClr val="2A78D6"/>
                 </a:solidFill>
-                <a:latin typeface="Segoe UI"/>
+                <a:latin typeface="맑은 고딕"/>
                 <a:ea typeface="맑은 고딕"/>
                 <a:cs typeface="맑은 고딕"/>
               </a:rPr>
@@ -19186,14 +19288,14 @@
       </p:sp>
       <p:sp>
         <p:nvSpPr>
-          <p:cNvPr id="21" name="TextBox 20"/>
-          <p:cNvSpPr txBox="1"/>
-          <p:nvPr/>
-        </p:nvSpPr>
-        <p:spPr>
-          <a:xfrm>
-            <a:off x="7013448" y="4125630"/>
-            <a:ext cx="4251960" cy="256032"/>
+          <p:cNvPr id="24" name="TextBox 23"/>
+          <p:cNvSpPr txBox="1"/>
+          <p:nvPr/>
+        </p:nvSpPr>
+        <p:spPr>
+          <a:xfrm>
+            <a:off x="7013448" y="4549180"/>
+            <a:ext cx="4206240" cy="256032"/>
           </a:xfrm>
           <a:prstGeom prst="rect">
             <a:avLst/>
@@ -19216,25 +19318,25 @@
                 <a:solidFill>
                   <a:srgbClr val="12151A"/>
                 </a:solidFill>
-                <a:latin typeface="Segoe UI"/>
-                <a:ea typeface="맑은 고딕"/>
-                <a:cs typeface="맑은 고딕"/>
-              </a:rPr>
-              <a:t>조짐은 눈에 잘 띄지 않습니다</a:t>
-            </a:r>
-          </a:p>
-        </p:txBody>
-      </p:sp>
-      <p:sp>
-        <p:nvSpPr>
-          <p:cNvPr id="22" name="TextBox 21"/>
-          <p:cNvSpPr txBox="1"/>
-          <p:nvPr/>
-        </p:nvSpPr>
-        <p:spPr>
-          <a:xfrm>
-            <a:off x="7013448" y="4399950"/>
-            <a:ext cx="4251960" cy="841105"/>
+                <a:latin typeface="맑은 고딕"/>
+                <a:ea typeface="맑은 고딕"/>
+                <a:cs typeface="맑은 고딕"/>
+              </a:rPr>
+              <a:t>천안시는 이런 관찰에 좋은 조건입니다</a:t>
+            </a:r>
+          </a:p>
+        </p:txBody>
+      </p:sp>
+      <p:sp>
+        <p:nvSpPr>
+          <p:cNvPr id="25" name="TextBox 24"/>
+          <p:cNvSpPr txBox="1"/>
+          <p:nvPr/>
+        </p:nvSpPr>
+        <p:spPr>
+          <a:xfrm>
+            <a:off x="7013448" y="4823500"/>
+            <a:ext cx="4206240" cy="420552"/>
           </a:xfrm>
           <a:prstGeom prst="rect">
             <a:avLst/>
@@ -19257,176 +19359,11 @@
                 <a:solidFill>
                   <a:srgbClr val="52514E"/>
                 </a:solidFill>
-                <a:latin typeface="Segoe UI"/>
-                <a:ea typeface="맑은 고딕"/>
-                <a:cs typeface="맑은 고딕"/>
-              </a:rPr>
-              <a:t>통계가 뚜렷하게 나빠졌을 때는 이미 상당히 진행된 뒤인 경우가 많습니다.</a:t>
-            </a:r>
-          </a:p>
-          <a:p>
-            <a:pPr algn="l">
-              <a:lnSpc>
-                <a:spcPct val="142000"/>
-              </a:lnSpc>
-              <a:spcBef>
-                <a:spcPts val="0"/>
-              </a:spcBef>
-            </a:pPr>
-            <a:r>
-              <a:rPr sz="1100" b="0">
-                <a:solidFill>
-                  <a:srgbClr val="52514E"/>
-                </a:solidFill>
-                <a:latin typeface="Segoe UI"/>
-                <a:ea typeface="맑은 고딕"/>
-                <a:cs typeface="맑은 고딕"/>
-              </a:rPr>
-              <a:t>미리 알아차릴 신호가 하나쯤 더 있으면 좋겠다는 생각에서 출발했습니다.</a:t>
-            </a:r>
-          </a:p>
-        </p:txBody>
-      </p:sp>
-      <p:sp>
-        <p:nvSpPr>
-          <p:cNvPr id="23" name="TextBox 22"/>
-          <p:cNvSpPr txBox="1"/>
-          <p:nvPr/>
-        </p:nvSpPr>
-        <p:spPr>
-          <a:xfrm>
-            <a:off x="6739128" y="5380045"/>
-            <a:ext cx="228600" cy="274320"/>
-          </a:xfrm>
-          <a:prstGeom prst="rect">
-            <a:avLst/>
-          </a:prstGeom>
-          <a:noFill/>
-        </p:spPr>
-        <p:txBody>
-          <a:bodyPr wrap="square" lIns="0" rIns="0" tIns="0" bIns="0">
-            <a:spAutoFit/>
-          </a:bodyPr>
-          <a:lstStyle/>
-          <a:p>
-            <a:pPr algn="l">
-              <a:lnSpc>
-                <a:spcPct val="135000"/>
-              </a:lnSpc>
-            </a:pPr>
-            <a:r>
-              <a:rPr sz="1250" b="1">
-                <a:solidFill>
-                  <a:srgbClr val="2A78D6"/>
-                </a:solidFill>
-                <a:latin typeface="Segoe UI"/>
-                <a:ea typeface="맑은 고딕"/>
-                <a:cs typeface="맑은 고딕"/>
-              </a:rPr>
-              <a:t>▪</a:t>
-            </a:r>
-          </a:p>
-        </p:txBody>
-      </p:sp>
-      <p:sp>
-        <p:nvSpPr>
-          <p:cNvPr id="24" name="TextBox 23"/>
-          <p:cNvSpPr txBox="1"/>
-          <p:nvPr/>
-        </p:nvSpPr>
-        <p:spPr>
-          <a:xfrm>
-            <a:off x="7013448" y="5380045"/>
-            <a:ext cx="4251960" cy="256032"/>
-          </a:xfrm>
-          <a:prstGeom prst="rect">
-            <a:avLst/>
-          </a:prstGeom>
-          <a:noFill/>
-        </p:spPr>
-        <p:txBody>
-          <a:bodyPr wrap="square" lIns="0" rIns="0" tIns="0" bIns="0">
-            <a:spAutoFit/>
-          </a:bodyPr>
-          <a:lstStyle/>
-          <a:p>
-            <a:pPr algn="l">
-              <a:lnSpc>
-                <a:spcPct val="135000"/>
-              </a:lnSpc>
-            </a:pPr>
-            <a:r>
-              <a:rPr sz="1250" b="1">
-                <a:solidFill>
-                  <a:srgbClr val="12151A"/>
-                </a:solidFill>
-                <a:latin typeface="Segoe UI"/>
-                <a:ea typeface="맑은 고딕"/>
-                <a:cs typeface="맑은 고딕"/>
-              </a:rPr>
-              <a:t>천안시는 이런 관찰에 좋은 조건을 갖췄습니다</a:t>
-            </a:r>
-          </a:p>
-        </p:txBody>
-      </p:sp>
-      <p:sp>
-        <p:nvSpPr>
-          <p:cNvPr id="25" name="TextBox 24"/>
-          <p:cNvSpPr txBox="1"/>
-          <p:nvPr/>
-        </p:nvSpPr>
-        <p:spPr>
-          <a:xfrm>
-            <a:off x="7013448" y="5654365"/>
-            <a:ext cx="4251960" cy="841105"/>
-          </a:xfrm>
-          <a:prstGeom prst="rect">
-            <a:avLst/>
-          </a:prstGeom>
-          <a:noFill/>
-        </p:spPr>
-        <p:txBody>
-          <a:bodyPr wrap="square" lIns="0" rIns="0" tIns="0" bIns="0">
-            <a:spAutoFit/>
-          </a:bodyPr>
-          <a:lstStyle/>
-          <a:p>
-            <a:pPr algn="l">
-              <a:lnSpc>
-                <a:spcPct val="142000"/>
-              </a:lnSpc>
-            </a:pPr>
-            <a:r>
-              <a:rPr sz="1100" b="0">
-                <a:solidFill>
-                  <a:srgbClr val="52514E"/>
-                </a:solidFill>
-                <a:latin typeface="Segoe UI"/>
-                <a:ea typeface="맑은 고딕"/>
-                <a:cs typeface="맑은 고딕"/>
-              </a:rPr>
-              <a:t>신도심·기성시가지·원도심·읍·농촌면이 한 시(市) 안에 모두 있어,</a:t>
-            </a:r>
-          </a:p>
-          <a:p>
-            <a:pPr algn="l">
-              <a:lnSpc>
-                <a:spcPct val="142000"/>
-              </a:lnSpc>
-              <a:spcBef>
-                <a:spcPts val="0"/>
-              </a:spcBef>
-            </a:pPr>
-            <a:r>
-              <a:rPr sz="1100" b="0">
-                <a:solidFill>
-                  <a:srgbClr val="52514E"/>
-                </a:solidFill>
-                <a:latin typeface="Segoe UI"/>
-                <a:ea typeface="맑은 고딕"/>
-                <a:cs typeface="맑은 고딕"/>
-              </a:rPr>
-              <a:t>동네 유형별로 무엇이 필요한지 함께 살펴볼 수 있습니다.</a:t>
+                <a:latin typeface="맑은 고딕"/>
+                <a:ea typeface="맑은 고딕"/>
+                <a:cs typeface="맑은 고딕"/>
+              </a:rPr>
+              <a:t>신도심·기성시가지·원도심·읍·농촌면이 한 시(市) 안에 모두 있습니다.</a:t>
             </a:r>
           </a:p>
         </p:txBody>
@@ -19463,7 +19400,7 @@
                 <a:solidFill>
                   <a:srgbClr val="52514E"/>
                 </a:solidFill>
-                <a:latin typeface="Segoe UI"/>
+                <a:latin typeface="맑은 고딕"/>
                 <a:ea typeface="맑은 고딕"/>
                 <a:cs typeface="맑은 고딕"/>
               </a:rPr>
@@ -19504,7 +19441,7 @@
                 <a:solidFill>
                   <a:srgbClr val="52514E"/>
                 </a:solidFill>
-                <a:latin typeface="Segoe UI"/>
+                <a:latin typeface="맑은 고딕"/>
                 <a:ea typeface="맑은 고딕"/>
                 <a:cs typeface="맑은 고딕"/>
               </a:rPr>
@@ -19563,7 +19500,7 @@
                 <a:solidFill>
                   <a:srgbClr val="2A78D6"/>
                 </a:solidFill>
-                <a:latin typeface="Segoe UI"/>
+                <a:latin typeface="맑은 고딕"/>
                 <a:ea typeface="맑은 고딕"/>
                 <a:cs typeface="맑은 고딕"/>
               </a:rPr>
@@ -19604,7 +19541,7 @@
                 <a:solidFill>
                   <a:srgbClr val="12151A"/>
                 </a:solidFill>
-                <a:latin typeface="Segoe UI"/>
+                <a:latin typeface="맑은 고딕"/>
                 <a:ea typeface="맑은 고딕"/>
                 <a:cs typeface="맑은 고딕"/>
               </a:rPr>
@@ -19645,7 +19582,7 @@
                 <a:solidFill>
                   <a:srgbClr val="52514E"/>
                 </a:solidFill>
-                <a:latin typeface="Segoe UI"/>
+                <a:latin typeface="맑은 고딕"/>
                 <a:ea typeface="맑은 고딕"/>
                 <a:cs typeface="맑은 고딕"/>
               </a:rPr>
@@ -19689,7 +19626,7 @@
                           <a:solidFill>
                             <a:srgbClr val="12151A"/>
                           </a:solidFill>
-                          <a:latin typeface="Segoe UI"/>
+                          <a:latin typeface="맑은 고딕"/>
                           <a:ea typeface="맑은 고딕"/>
                           <a:cs typeface="맑은 고딕"/>
                         </a:rPr>
@@ -19714,7 +19651,7 @@
                           <a:solidFill>
                             <a:srgbClr val="12151A"/>
                           </a:solidFill>
-                          <a:latin typeface="Segoe UI"/>
+                          <a:latin typeface="맑은 고딕"/>
                           <a:ea typeface="맑은 고딕"/>
                           <a:cs typeface="맑은 고딕"/>
                         </a:rPr>
@@ -19739,7 +19676,7 @@
                           <a:solidFill>
                             <a:srgbClr val="12151A"/>
                           </a:solidFill>
-                          <a:latin typeface="Segoe UI"/>
+                          <a:latin typeface="맑은 고딕"/>
                           <a:ea typeface="맑은 고딕"/>
                           <a:cs typeface="맑은 고딕"/>
                         </a:rPr>
@@ -19766,7 +19703,7 @@
                           <a:solidFill>
                             <a:srgbClr val="12151A"/>
                           </a:solidFill>
-                          <a:latin typeface="Segoe UI"/>
+                          <a:latin typeface="맑은 고딕"/>
                           <a:ea typeface="맑은 고딕"/>
                           <a:cs typeface="맑은 고딕"/>
                         </a:rPr>
@@ -19791,7 +19728,7 @@
                           <a:solidFill>
                             <a:srgbClr val="12151A"/>
                           </a:solidFill>
-                          <a:latin typeface="Segoe UI"/>
+                          <a:latin typeface="맑은 고딕"/>
                           <a:ea typeface="맑은 고딕"/>
                           <a:cs typeface="맑은 고딕"/>
                         </a:rPr>
@@ -19816,7 +19753,7 @@
                           <a:solidFill>
                             <a:srgbClr val="12151A"/>
                           </a:solidFill>
-                          <a:latin typeface="Segoe UI"/>
+                          <a:latin typeface="맑은 고딕"/>
                           <a:ea typeface="맑은 고딕"/>
                           <a:cs typeface="맑은 고딕"/>
                         </a:rPr>
@@ -19843,7 +19780,7 @@
                           <a:solidFill>
                             <a:srgbClr val="12151A"/>
                           </a:solidFill>
-                          <a:latin typeface="Segoe UI"/>
+                          <a:latin typeface="맑은 고딕"/>
                           <a:ea typeface="맑은 고딕"/>
                           <a:cs typeface="맑은 고딕"/>
                         </a:rPr>
@@ -19868,7 +19805,7 @@
                           <a:solidFill>
                             <a:srgbClr val="12151A"/>
                           </a:solidFill>
-                          <a:latin typeface="Segoe UI"/>
+                          <a:latin typeface="맑은 고딕"/>
                           <a:ea typeface="맑은 고딕"/>
                           <a:cs typeface="맑은 고딕"/>
                         </a:rPr>
@@ -19893,7 +19830,7 @@
                           <a:solidFill>
                             <a:srgbClr val="12151A"/>
                           </a:solidFill>
-                          <a:latin typeface="Segoe UI"/>
+                          <a:latin typeface="맑은 고딕"/>
                           <a:ea typeface="맑은 고딕"/>
                           <a:cs typeface="맑은 고딕"/>
                         </a:rPr>
@@ -19920,7 +19857,7 @@
                           <a:solidFill>
                             <a:srgbClr val="12151A"/>
                           </a:solidFill>
-                          <a:latin typeface="Segoe UI"/>
+                          <a:latin typeface="맑은 고딕"/>
                           <a:ea typeface="맑은 고딕"/>
                           <a:cs typeface="맑은 고딕"/>
                         </a:rPr>
@@ -19945,7 +19882,7 @@
                           <a:solidFill>
                             <a:srgbClr val="12151A"/>
                           </a:solidFill>
-                          <a:latin typeface="Segoe UI"/>
+                          <a:latin typeface="맑은 고딕"/>
                           <a:ea typeface="맑은 고딕"/>
                           <a:cs typeface="맑은 고딕"/>
                         </a:rPr>
@@ -19970,7 +19907,7 @@
                           <a:solidFill>
                             <a:srgbClr val="12151A"/>
                           </a:solidFill>
-                          <a:latin typeface="Segoe UI"/>
+                          <a:latin typeface="맑은 고딕"/>
                           <a:ea typeface="맑은 고딕"/>
                           <a:cs typeface="맑은 고딕"/>
                         </a:rPr>
@@ -19997,7 +19934,7 @@
                           <a:solidFill>
                             <a:srgbClr val="12151A"/>
                           </a:solidFill>
-                          <a:latin typeface="Segoe UI"/>
+                          <a:latin typeface="맑은 고딕"/>
                           <a:ea typeface="맑은 고딕"/>
                           <a:cs typeface="맑은 고딕"/>
                         </a:rPr>
@@ -20022,7 +19959,7 @@
                           <a:solidFill>
                             <a:srgbClr val="12151A"/>
                           </a:solidFill>
-                          <a:latin typeface="Segoe UI"/>
+                          <a:latin typeface="맑은 고딕"/>
                           <a:ea typeface="맑은 고딕"/>
                           <a:cs typeface="맑은 고딕"/>
                         </a:rPr>
@@ -20047,7 +19984,7 @@
                           <a:solidFill>
                             <a:srgbClr val="12151A"/>
                           </a:solidFill>
-                          <a:latin typeface="Segoe UI"/>
+                          <a:latin typeface="맑은 고딕"/>
                           <a:ea typeface="맑은 고딕"/>
                           <a:cs typeface="맑은 고딕"/>
                         </a:rPr>
@@ -20142,7 +20079,7 @@
                 <a:solidFill>
                   <a:srgbClr val="12151A"/>
                 </a:solidFill>
-                <a:latin typeface="Segoe UI"/>
+                <a:latin typeface="맑은 고딕"/>
                 <a:ea typeface="맑은 고딕"/>
                 <a:cs typeface="맑은 고딕"/>
               </a:rPr>
@@ -20183,7 +20120,7 @@
                 <a:solidFill>
                   <a:srgbClr val="52514E"/>
                 </a:solidFill>
-                <a:latin typeface="Segoe UI"/>
+                <a:latin typeface="맑은 고딕"/>
                 <a:ea typeface="맑은 고딕"/>
                 <a:cs typeface="맑은 고딕"/>
               </a:rPr>
@@ -20204,7 +20141,7 @@
                 <a:solidFill>
                   <a:srgbClr val="52514E"/>
                 </a:solidFill>
-                <a:latin typeface="Segoe UI"/>
+                <a:latin typeface="맑은 고딕"/>
                 <a:ea typeface="맑은 고딕"/>
                 <a:cs typeface="맑은 고딕"/>
               </a:rPr>
@@ -20245,7 +20182,7 @@
                 <a:solidFill>
                   <a:srgbClr val="52514E"/>
                 </a:solidFill>
-                <a:latin typeface="Segoe UI"/>
+                <a:latin typeface="맑은 고딕"/>
                 <a:ea typeface="맑은 고딕"/>
                 <a:cs typeface="맑은 고딕"/>
               </a:rPr>
@@ -20286,7 +20223,7 @@
                 <a:solidFill>
                   <a:srgbClr val="52514E"/>
                 </a:solidFill>
-                <a:latin typeface="Segoe UI"/>
+                <a:latin typeface="맑은 고딕"/>
                 <a:ea typeface="맑은 고딕"/>
                 <a:cs typeface="맑은 고딕"/>
               </a:rPr>
@@ -20345,7 +20282,7 @@
                 <a:solidFill>
                   <a:srgbClr val="2A78D6"/>
                 </a:solidFill>
-                <a:latin typeface="Segoe UI"/>
+                <a:latin typeface="맑은 고딕"/>
                 <a:ea typeface="맑은 고딕"/>
                 <a:cs typeface="맑은 고딕"/>
               </a:rPr>
@@ -20386,7 +20323,7 @@
                 <a:solidFill>
                   <a:srgbClr val="12151A"/>
                 </a:solidFill>
-                <a:latin typeface="Segoe UI"/>
+                <a:latin typeface="맑은 고딕"/>
                 <a:ea typeface="맑은 고딕"/>
                 <a:cs typeface="맑은 고딕"/>
               </a:rPr>
@@ -20427,7 +20364,7 @@
                 <a:solidFill>
                   <a:srgbClr val="52514E"/>
                 </a:solidFill>
-                <a:latin typeface="Segoe UI"/>
+                <a:latin typeface="맑은 고딕"/>
                 <a:ea typeface="맑은 고딕"/>
                 <a:cs typeface="맑은 고딕"/>
               </a:rPr>
@@ -20556,7 +20493,7 @@
                 <a:solidFill>
                   <a:srgbClr val="52514E"/>
                 </a:solidFill>
-                <a:latin typeface="Segoe UI"/>
+                <a:latin typeface="맑은 고딕"/>
                 <a:ea typeface="맑은 고딕"/>
                 <a:cs typeface="맑은 고딕"/>
               </a:rPr>
@@ -20597,7 +20534,7 @@
                 <a:solidFill>
                   <a:srgbClr val="12151A"/>
                 </a:solidFill>
-                <a:latin typeface="Segoe UI"/>
+                <a:latin typeface="맑은 고딕"/>
                 <a:ea typeface="맑은 고딕"/>
                 <a:cs typeface="맑은 고딕"/>
               </a:rPr>
@@ -20638,7 +20575,7 @@
                 <a:solidFill>
                   <a:srgbClr val="52514E"/>
                 </a:solidFill>
-                <a:latin typeface="Segoe UI"/>
+                <a:latin typeface="맑은 고딕"/>
                 <a:ea typeface="맑은 고딕"/>
                 <a:cs typeface="맑은 고딕"/>
               </a:rPr>
@@ -20659,7 +20596,7 @@
                 <a:solidFill>
                   <a:srgbClr val="52514E"/>
                 </a:solidFill>
-                <a:latin typeface="Segoe UI"/>
+                <a:latin typeface="맑은 고딕"/>
                 <a:ea typeface="맑은 고딕"/>
                 <a:cs typeface="맑은 고딕"/>
               </a:rPr>
@@ -20680,7 +20617,7 @@
                 <a:solidFill>
                   <a:srgbClr val="52514E"/>
                 </a:solidFill>
-                <a:latin typeface="Segoe UI"/>
+                <a:latin typeface="맑은 고딕"/>
                 <a:ea typeface="맑은 고딕"/>
                 <a:cs typeface="맑은 고딕"/>
               </a:rPr>
@@ -20701,7 +20638,7 @@
                 <a:solidFill>
                   <a:srgbClr val="52514E"/>
                 </a:solidFill>
-                <a:latin typeface="Segoe UI"/>
+                <a:latin typeface="맑은 고딕"/>
                 <a:ea typeface="맑은 고딕"/>
                 <a:cs typeface="맑은 고딕"/>
               </a:rPr>
@@ -20742,7 +20679,7 @@
                 <a:solidFill>
                   <a:srgbClr val="B8C0CA"/>
                 </a:solidFill>
-                <a:latin typeface="Segoe UI"/>
+                <a:latin typeface="맑은 고딕"/>
                 <a:ea typeface="맑은 고딕"/>
                 <a:cs typeface="맑은 고딕"/>
               </a:rPr>
@@ -20871,7 +20808,7 @@
                 <a:solidFill>
                   <a:srgbClr val="2A78D6"/>
                 </a:solidFill>
-                <a:latin typeface="Segoe UI"/>
+                <a:latin typeface="맑은 고딕"/>
                 <a:ea typeface="맑은 고딕"/>
                 <a:cs typeface="맑은 고딕"/>
               </a:rPr>
@@ -20912,7 +20849,7 @@
                 <a:solidFill>
                   <a:srgbClr val="12151A"/>
                 </a:solidFill>
-                <a:latin typeface="Segoe UI"/>
+                <a:latin typeface="맑은 고딕"/>
                 <a:ea typeface="맑은 고딕"/>
                 <a:cs typeface="맑은 고딕"/>
               </a:rPr>
@@ -20953,7 +20890,7 @@
                 <a:solidFill>
                   <a:srgbClr val="52514E"/>
                 </a:solidFill>
-                <a:latin typeface="Segoe UI"/>
+                <a:latin typeface="맑은 고딕"/>
                 <a:ea typeface="맑은 고딕"/>
                 <a:cs typeface="맑은 고딕"/>
               </a:rPr>
@@ -20974,7 +20911,7 @@
                 <a:solidFill>
                   <a:srgbClr val="52514E"/>
                 </a:solidFill>
-                <a:latin typeface="Segoe UI"/>
+                <a:latin typeface="맑은 고딕"/>
                 <a:ea typeface="맑은 고딕"/>
                 <a:cs typeface="맑은 고딕"/>
               </a:rPr>
@@ -20995,7 +20932,7 @@
                 <a:solidFill>
                   <a:srgbClr val="52514E"/>
                 </a:solidFill>
-                <a:latin typeface="Segoe UI"/>
+                <a:latin typeface="맑은 고딕"/>
                 <a:ea typeface="맑은 고딕"/>
                 <a:cs typeface="맑은 고딕"/>
               </a:rPr>
@@ -21036,7 +20973,7 @@
                 <a:solidFill>
                   <a:srgbClr val="B8C0CA"/>
                 </a:solidFill>
-                <a:latin typeface="Segoe UI"/>
+                <a:latin typeface="맑은 고딕"/>
                 <a:ea typeface="맑은 고딕"/>
                 <a:cs typeface="맑은 고딕"/>
               </a:rPr>
@@ -21165,7 +21102,7 @@
                 <a:solidFill>
                   <a:srgbClr val="2A78D6"/>
                 </a:solidFill>
-                <a:latin typeface="Segoe UI"/>
+                <a:latin typeface="맑은 고딕"/>
                 <a:ea typeface="맑은 고딕"/>
                 <a:cs typeface="맑은 고딕"/>
               </a:rPr>
@@ -21206,7 +21143,7 @@
                 <a:solidFill>
                   <a:srgbClr val="12151A"/>
                 </a:solidFill>
-                <a:latin typeface="Segoe UI"/>
+                <a:latin typeface="맑은 고딕"/>
                 <a:ea typeface="맑은 고딕"/>
                 <a:cs typeface="맑은 고딕"/>
               </a:rPr>
@@ -21247,7 +21184,7 @@
                 <a:solidFill>
                   <a:srgbClr val="52514E"/>
                 </a:solidFill>
-                <a:latin typeface="Segoe UI"/>
+                <a:latin typeface="맑은 고딕"/>
                 <a:ea typeface="맑은 고딕"/>
                 <a:cs typeface="맑은 고딕"/>
               </a:rPr>
@@ -21268,7 +21205,7 @@
                 <a:solidFill>
                   <a:srgbClr val="52514E"/>
                 </a:solidFill>
-                <a:latin typeface="Segoe UI"/>
+                <a:latin typeface="맑은 고딕"/>
                 <a:ea typeface="맑은 고딕"/>
                 <a:cs typeface="맑은 고딕"/>
               </a:rPr>
@@ -21289,7 +21226,7 @@
                 <a:solidFill>
                   <a:srgbClr val="52514E"/>
                 </a:solidFill>
-                <a:latin typeface="Segoe UI"/>
+                <a:latin typeface="맑은 고딕"/>
                 <a:ea typeface="맑은 고딕"/>
                 <a:cs typeface="맑은 고딕"/>
               </a:rPr>
@@ -21330,7 +21267,7 @@
                 <a:solidFill>
                   <a:srgbClr val="B8C0CA"/>
                 </a:solidFill>
-                <a:latin typeface="Segoe UI"/>
+                <a:latin typeface="맑은 고딕"/>
                 <a:ea typeface="맑은 고딕"/>
                 <a:cs typeface="맑은 고딕"/>
               </a:rPr>
@@ -21459,7 +21396,7 @@
                 <a:solidFill>
                   <a:srgbClr val="1BAF7A"/>
                 </a:solidFill>
-                <a:latin typeface="Segoe UI"/>
+                <a:latin typeface="맑은 고딕"/>
                 <a:ea typeface="맑은 고딕"/>
                 <a:cs typeface="맑은 고딕"/>
               </a:rPr>
@@ -21500,7 +21437,7 @@
                 <a:solidFill>
                   <a:srgbClr val="12151A"/>
                 </a:solidFill>
-                <a:latin typeface="Segoe UI"/>
+                <a:latin typeface="맑은 고딕"/>
                 <a:ea typeface="맑은 고딕"/>
                 <a:cs typeface="맑은 고딕"/>
               </a:rPr>
@@ -21541,7 +21478,7 @@
                 <a:solidFill>
                   <a:srgbClr val="52514E"/>
                 </a:solidFill>
-                <a:latin typeface="Segoe UI"/>
+                <a:latin typeface="맑은 고딕"/>
                 <a:ea typeface="맑은 고딕"/>
                 <a:cs typeface="맑은 고딕"/>
               </a:rPr>
@@ -21562,7 +21499,7 @@
                 <a:solidFill>
                   <a:srgbClr val="52514E"/>
                 </a:solidFill>
-                <a:latin typeface="Segoe UI"/>
+                <a:latin typeface="맑은 고딕"/>
                 <a:ea typeface="맑은 고딕"/>
                 <a:cs typeface="맑은 고딕"/>
               </a:rPr>
@@ -21583,7 +21520,7 @@
                 <a:solidFill>
                   <a:srgbClr val="52514E"/>
                 </a:solidFill>
-                <a:latin typeface="Segoe UI"/>
+                <a:latin typeface="맑은 고딕"/>
                 <a:ea typeface="맑은 고딕"/>
                 <a:cs typeface="맑은 고딕"/>
               </a:rPr>
@@ -21624,7 +21561,7 @@
                 <a:solidFill>
                   <a:srgbClr val="B8C0CA"/>
                 </a:solidFill>
-                <a:latin typeface="Segoe UI"/>
+                <a:latin typeface="맑은 고딕"/>
                 <a:ea typeface="맑은 고딕"/>
                 <a:cs typeface="맑은 고딕"/>
               </a:rPr>
@@ -21753,7 +21690,7 @@
                 <a:solidFill>
                   <a:srgbClr val="12151A"/>
                 </a:solidFill>
-                <a:latin typeface="Segoe UI"/>
+                <a:latin typeface="맑은 고딕"/>
                 <a:ea typeface="맑은 고딕"/>
                 <a:cs typeface="맑은 고딕"/>
               </a:rPr>
@@ -21794,7 +21731,7 @@
                 <a:solidFill>
                   <a:srgbClr val="12151A"/>
                 </a:solidFill>
-                <a:latin typeface="Segoe UI"/>
+                <a:latin typeface="맑은 고딕"/>
                 <a:ea typeface="맑은 고딕"/>
                 <a:cs typeface="맑은 고딕"/>
               </a:rPr>
@@ -21835,7 +21772,7 @@
                 <a:solidFill>
                   <a:srgbClr val="52514E"/>
                 </a:solidFill>
-                <a:latin typeface="Segoe UI"/>
+                <a:latin typeface="맑은 고딕"/>
                 <a:ea typeface="맑은 고딕"/>
                 <a:cs typeface="맑은 고딕"/>
               </a:rPr>
@@ -21856,7 +21793,7 @@
                 <a:solidFill>
                   <a:srgbClr val="52514E"/>
                 </a:solidFill>
-                <a:latin typeface="Segoe UI"/>
+                <a:latin typeface="맑은 고딕"/>
                 <a:ea typeface="맑은 고딕"/>
                 <a:cs typeface="맑은 고딕"/>
               </a:rPr>
@@ -21877,7 +21814,7 @@
                 <a:solidFill>
                   <a:srgbClr val="52514E"/>
                 </a:solidFill>
-                <a:latin typeface="Segoe UI"/>
+                <a:latin typeface="맑은 고딕"/>
                 <a:ea typeface="맑은 고딕"/>
                 <a:cs typeface="맑은 고딕"/>
               </a:rPr>
@@ -21962,7 +21899,7 @@
                 <a:solidFill>
                   <a:srgbClr val="12151A"/>
                 </a:solidFill>
-                <a:latin typeface="Segoe UI"/>
+                <a:latin typeface="맑은 고딕"/>
                 <a:ea typeface="맑은 고딕"/>
                 <a:cs typeface="맑은 고딕"/>
               </a:rPr>
@@ -21983,7 +21920,7 @@
                 <a:solidFill>
                   <a:srgbClr val="12151A"/>
                 </a:solidFill>
-                <a:latin typeface="Segoe UI"/>
+                <a:latin typeface="맑은 고딕"/>
                 <a:ea typeface="맑은 고딕"/>
                 <a:cs typeface="맑은 고딕"/>
               </a:rPr>
@@ -22024,7 +21961,7 @@
                 <a:solidFill>
                   <a:srgbClr val="52514E"/>
                 </a:solidFill>
-                <a:latin typeface="Segoe UI"/>
+                <a:latin typeface="맑은 고딕"/>
                 <a:ea typeface="맑은 고딕"/>
                 <a:cs typeface="맑은 고딕"/>
               </a:rPr>
@@ -22065,7 +22002,7 @@
                 <a:solidFill>
                   <a:srgbClr val="52514E"/>
                 </a:solidFill>
-                <a:latin typeface="Segoe UI"/>
+                <a:latin typeface="맑은 고딕"/>
                 <a:ea typeface="맑은 고딕"/>
                 <a:cs typeface="맑은 고딕"/>
               </a:rPr>
@@ -22124,7 +22061,7 @@
                 <a:solidFill>
                   <a:srgbClr val="2A78D6"/>
                 </a:solidFill>
-                <a:latin typeface="Segoe UI"/>
+                <a:latin typeface="맑은 고딕"/>
                 <a:ea typeface="맑은 고딕"/>
                 <a:cs typeface="맑은 고딕"/>
               </a:rPr>
@@ -22165,7 +22102,7 @@
                 <a:solidFill>
                   <a:srgbClr val="12151A"/>
                 </a:solidFill>
-                <a:latin typeface="Segoe UI"/>
+                <a:latin typeface="맑은 고딕"/>
                 <a:ea typeface="맑은 고딕"/>
                 <a:cs typeface="맑은 고딕"/>
               </a:rPr>
@@ -22206,7 +22143,7 @@
                 <a:solidFill>
                   <a:srgbClr val="52514E"/>
                 </a:solidFill>
-                <a:latin typeface="Segoe UI"/>
+                <a:latin typeface="맑은 고딕"/>
                 <a:ea typeface="맑은 고딕"/>
                 <a:cs typeface="맑은 고딕"/>
               </a:rPr>
@@ -22252,7 +22189,7 @@
                           <a:solidFill>
                             <a:srgbClr val="12151A"/>
                           </a:solidFill>
-                          <a:latin typeface="Segoe UI"/>
+                          <a:latin typeface="맑은 고딕"/>
                           <a:ea typeface="맑은 고딕"/>
                           <a:cs typeface="맑은 고딕"/>
                         </a:rPr>
@@ -22277,7 +22214,7 @@
                           <a:solidFill>
                             <a:srgbClr val="12151A"/>
                           </a:solidFill>
-                          <a:latin typeface="Segoe UI"/>
+                          <a:latin typeface="맑은 고딕"/>
                           <a:ea typeface="맑은 고딕"/>
                           <a:cs typeface="맑은 고딕"/>
                         </a:rPr>
@@ -22302,7 +22239,7 @@
                           <a:solidFill>
                             <a:srgbClr val="12151A"/>
                           </a:solidFill>
-                          <a:latin typeface="Segoe UI"/>
+                          <a:latin typeface="맑은 고딕"/>
                           <a:ea typeface="맑은 고딕"/>
                           <a:cs typeface="맑은 고딕"/>
                         </a:rPr>
@@ -22327,7 +22264,7 @@
                           <a:solidFill>
                             <a:srgbClr val="12151A"/>
                           </a:solidFill>
-                          <a:latin typeface="Segoe UI"/>
+                          <a:latin typeface="맑은 고딕"/>
                           <a:ea typeface="맑은 고딕"/>
                           <a:cs typeface="맑은 고딕"/>
                         </a:rPr>
@@ -22352,7 +22289,7 @@
                           <a:solidFill>
                             <a:srgbClr val="12151A"/>
                           </a:solidFill>
-                          <a:latin typeface="Segoe UI"/>
+                          <a:latin typeface="맑은 고딕"/>
                           <a:ea typeface="맑은 고딕"/>
                           <a:cs typeface="맑은 고딕"/>
                         </a:rPr>
@@ -22379,7 +22316,7 @@
                           <a:solidFill>
                             <a:srgbClr val="12151A"/>
                           </a:solidFill>
-                          <a:latin typeface="Segoe UI"/>
+                          <a:latin typeface="맑은 고딕"/>
                           <a:ea typeface="맑은 고딕"/>
                           <a:cs typeface="맑은 고딕"/>
                         </a:rPr>
@@ -22404,7 +22341,7 @@
                           <a:solidFill>
                             <a:srgbClr val="12151A"/>
                           </a:solidFill>
-                          <a:latin typeface="Segoe UI"/>
+                          <a:latin typeface="맑은 고딕"/>
                           <a:ea typeface="맑은 고딕"/>
                           <a:cs typeface="맑은 고딕"/>
                         </a:rPr>
@@ -22429,7 +22366,7 @@
                           <a:solidFill>
                             <a:srgbClr val="12151A"/>
                           </a:solidFill>
-                          <a:latin typeface="Segoe UI"/>
+                          <a:latin typeface="맑은 고딕"/>
                           <a:ea typeface="맑은 고딕"/>
                           <a:cs typeface="맑은 고딕"/>
                         </a:rPr>
@@ -22454,7 +22391,7 @@
                           <a:solidFill>
                             <a:srgbClr val="12151A"/>
                           </a:solidFill>
-                          <a:latin typeface="Segoe UI"/>
+                          <a:latin typeface="맑은 고딕"/>
                           <a:ea typeface="맑은 고딕"/>
                           <a:cs typeface="맑은 고딕"/>
                         </a:rPr>
@@ -22479,7 +22416,7 @@
                           <a:solidFill>
                             <a:srgbClr val="12151A"/>
                           </a:solidFill>
-                          <a:latin typeface="Segoe UI"/>
+                          <a:latin typeface="맑은 고딕"/>
                           <a:ea typeface="맑은 고딕"/>
                           <a:cs typeface="맑은 고딕"/>
                         </a:rPr>
@@ -22506,7 +22443,7 @@
                           <a:solidFill>
                             <a:srgbClr val="12151A"/>
                           </a:solidFill>
-                          <a:latin typeface="Segoe UI"/>
+                          <a:latin typeface="맑은 고딕"/>
                           <a:ea typeface="맑은 고딕"/>
                           <a:cs typeface="맑은 고딕"/>
                         </a:rPr>
@@ -22531,7 +22468,7 @@
                           <a:solidFill>
                             <a:srgbClr val="12151A"/>
                           </a:solidFill>
-                          <a:latin typeface="Segoe UI"/>
+                          <a:latin typeface="맑은 고딕"/>
                           <a:ea typeface="맑은 고딕"/>
                           <a:cs typeface="맑은 고딕"/>
                         </a:rPr>
@@ -22556,7 +22493,7 @@
                           <a:solidFill>
                             <a:srgbClr val="12151A"/>
                           </a:solidFill>
-                          <a:latin typeface="Segoe UI"/>
+                          <a:latin typeface="맑은 고딕"/>
                           <a:ea typeface="맑은 고딕"/>
                           <a:cs typeface="맑은 고딕"/>
                         </a:rPr>
@@ -22581,7 +22518,7 @@
                           <a:solidFill>
                             <a:srgbClr val="12151A"/>
                           </a:solidFill>
-                          <a:latin typeface="Segoe UI"/>
+                          <a:latin typeface="맑은 고딕"/>
                           <a:ea typeface="맑은 고딕"/>
                           <a:cs typeface="맑은 고딕"/>
                         </a:rPr>
@@ -22606,7 +22543,7 @@
                           <a:solidFill>
                             <a:srgbClr val="12151A"/>
                           </a:solidFill>
-                          <a:latin typeface="Segoe UI"/>
+                          <a:latin typeface="맑은 고딕"/>
                           <a:ea typeface="맑은 고딕"/>
                           <a:cs typeface="맑은 고딕"/>
                         </a:rPr>
@@ -22633,7 +22570,7 @@
                           <a:solidFill>
                             <a:srgbClr val="12151A"/>
                           </a:solidFill>
-                          <a:latin typeface="Segoe UI"/>
+                          <a:latin typeface="맑은 고딕"/>
                           <a:ea typeface="맑은 고딕"/>
                           <a:cs typeface="맑은 고딕"/>
                         </a:rPr>
@@ -22658,7 +22595,7 @@
                           <a:solidFill>
                             <a:srgbClr val="12151A"/>
                           </a:solidFill>
-                          <a:latin typeface="Segoe UI"/>
+                          <a:latin typeface="맑은 고딕"/>
                           <a:ea typeface="맑은 고딕"/>
                           <a:cs typeface="맑은 고딕"/>
                         </a:rPr>
@@ -22683,7 +22620,7 @@
                           <a:solidFill>
                             <a:srgbClr val="12151A"/>
                           </a:solidFill>
-                          <a:latin typeface="Segoe UI"/>
+                          <a:latin typeface="맑은 고딕"/>
                           <a:ea typeface="맑은 고딕"/>
                           <a:cs typeface="맑은 고딕"/>
                         </a:rPr>
@@ -22708,7 +22645,7 @@
                           <a:solidFill>
                             <a:srgbClr val="12151A"/>
                           </a:solidFill>
-                          <a:latin typeface="Segoe UI"/>
+                          <a:latin typeface="맑은 고딕"/>
                           <a:ea typeface="맑은 고딕"/>
                           <a:cs typeface="맑은 고딕"/>
                         </a:rPr>
@@ -22733,7 +22670,7 @@
                           <a:solidFill>
                             <a:srgbClr val="12151A"/>
                           </a:solidFill>
-                          <a:latin typeface="Segoe UI"/>
+                          <a:latin typeface="맑은 고딕"/>
                           <a:ea typeface="맑은 고딕"/>
                           <a:cs typeface="맑은 고딕"/>
                         </a:rPr>
@@ -22760,7 +22697,7 @@
                           <a:solidFill>
                             <a:srgbClr val="12151A"/>
                           </a:solidFill>
-                          <a:latin typeface="Segoe UI"/>
+                          <a:latin typeface="맑은 고딕"/>
                           <a:ea typeface="맑은 고딕"/>
                           <a:cs typeface="맑은 고딕"/>
                         </a:rPr>
@@ -22785,7 +22722,7 @@
                           <a:solidFill>
                             <a:srgbClr val="12151A"/>
                           </a:solidFill>
-                          <a:latin typeface="Segoe UI"/>
+                          <a:latin typeface="맑은 고딕"/>
                           <a:ea typeface="맑은 고딕"/>
                           <a:cs typeface="맑은 고딕"/>
                         </a:rPr>
@@ -22810,7 +22747,7 @@
                           <a:solidFill>
                             <a:srgbClr val="12151A"/>
                           </a:solidFill>
-                          <a:latin typeface="Segoe UI"/>
+                          <a:latin typeface="맑은 고딕"/>
                           <a:ea typeface="맑은 고딕"/>
                           <a:cs typeface="맑은 고딕"/>
                         </a:rPr>
@@ -22835,7 +22772,7 @@
                           <a:solidFill>
                             <a:srgbClr val="12151A"/>
                           </a:solidFill>
-                          <a:latin typeface="Segoe UI"/>
+                          <a:latin typeface="맑은 고딕"/>
                           <a:ea typeface="맑은 고딕"/>
                           <a:cs typeface="맑은 고딕"/>
                         </a:rPr>
@@ -22860,7 +22797,7 @@
                           <a:solidFill>
                             <a:srgbClr val="12151A"/>
                           </a:solidFill>
-                          <a:latin typeface="Segoe UI"/>
+                          <a:latin typeface="맑은 고딕"/>
                           <a:ea typeface="맑은 고딕"/>
                           <a:cs typeface="맑은 고딕"/>
                         </a:rPr>
@@ -22887,7 +22824,7 @@
                           <a:solidFill>
                             <a:srgbClr val="12151A"/>
                           </a:solidFill>
-                          <a:latin typeface="Segoe UI"/>
+                          <a:latin typeface="맑은 고딕"/>
                           <a:ea typeface="맑은 고딕"/>
                           <a:cs typeface="맑은 고딕"/>
                         </a:rPr>
@@ -22912,7 +22849,7 @@
                           <a:solidFill>
                             <a:srgbClr val="12151A"/>
                           </a:solidFill>
-                          <a:latin typeface="Segoe UI"/>
+                          <a:latin typeface="맑은 고딕"/>
                           <a:ea typeface="맑은 고딕"/>
                           <a:cs typeface="맑은 고딕"/>
                         </a:rPr>
@@ -22937,7 +22874,7 @@
                           <a:solidFill>
                             <a:srgbClr val="12151A"/>
                           </a:solidFill>
-                          <a:latin typeface="Segoe UI"/>
+                          <a:latin typeface="맑은 고딕"/>
                           <a:ea typeface="맑은 고딕"/>
                           <a:cs typeface="맑은 고딕"/>
                         </a:rPr>
@@ -22962,7 +22899,7 @@
                           <a:solidFill>
                             <a:srgbClr val="12151A"/>
                           </a:solidFill>
-                          <a:latin typeface="Segoe UI"/>
+                          <a:latin typeface="맑은 고딕"/>
                           <a:ea typeface="맑은 고딕"/>
                           <a:cs typeface="맑은 고딕"/>
                         </a:rPr>
@@ -22987,7 +22924,7 @@
                           <a:solidFill>
                             <a:srgbClr val="12151A"/>
                           </a:solidFill>
-                          <a:latin typeface="Segoe UI"/>
+                          <a:latin typeface="맑은 고딕"/>
                           <a:ea typeface="맑은 고딕"/>
                           <a:cs typeface="맑은 고딕"/>
                         </a:rPr>
@@ -23014,7 +22951,7 @@
                           <a:solidFill>
                             <a:srgbClr val="12151A"/>
                           </a:solidFill>
-                          <a:latin typeface="Segoe UI"/>
+                          <a:latin typeface="맑은 고딕"/>
                           <a:ea typeface="맑은 고딕"/>
                           <a:cs typeface="맑은 고딕"/>
                         </a:rPr>
@@ -23039,7 +22976,7 @@
                           <a:solidFill>
                             <a:srgbClr val="12151A"/>
                           </a:solidFill>
-                          <a:latin typeface="Segoe UI"/>
+                          <a:latin typeface="맑은 고딕"/>
                           <a:ea typeface="맑은 고딕"/>
                           <a:cs typeface="맑은 고딕"/>
                         </a:rPr>
@@ -23064,7 +23001,7 @@
                           <a:solidFill>
                             <a:srgbClr val="12151A"/>
                           </a:solidFill>
-                          <a:latin typeface="Segoe UI"/>
+                          <a:latin typeface="맑은 고딕"/>
                           <a:ea typeface="맑은 고딕"/>
                           <a:cs typeface="맑은 고딕"/>
                         </a:rPr>
@@ -23089,7 +23026,7 @@
                           <a:solidFill>
                             <a:srgbClr val="12151A"/>
                           </a:solidFill>
-                          <a:latin typeface="Segoe UI"/>
+                          <a:latin typeface="맑은 고딕"/>
                           <a:ea typeface="맑은 고딕"/>
                           <a:cs typeface="맑은 고딕"/>
                         </a:rPr>
@@ -23114,7 +23051,7 @@
                           <a:solidFill>
                             <a:srgbClr val="12151A"/>
                           </a:solidFill>
-                          <a:latin typeface="Segoe UI"/>
+                          <a:latin typeface="맑은 고딕"/>
                           <a:ea typeface="맑은 고딕"/>
                           <a:cs typeface="맑은 고딕"/>
                         </a:rPr>
@@ -23165,7 +23102,7 @@
                 <a:solidFill>
                   <a:srgbClr val="12151A"/>
                 </a:solidFill>
-                <a:latin typeface="Segoe UI"/>
+                <a:latin typeface="맑은 고딕"/>
                 <a:ea typeface="맑은 고딕"/>
                 <a:cs typeface="맑은 고딕"/>
               </a:rPr>
@@ -23210,7 +23147,7 @@
                           <a:solidFill>
                             <a:srgbClr val="12151A"/>
                           </a:solidFill>
-                          <a:latin typeface="Segoe UI"/>
+                          <a:latin typeface="맑은 고딕"/>
                           <a:ea typeface="맑은 고딕"/>
                           <a:cs typeface="맑은 고딕"/>
                         </a:rPr>
@@ -23235,7 +23172,7 @@
                           <a:solidFill>
                             <a:srgbClr val="12151A"/>
                           </a:solidFill>
-                          <a:latin typeface="Segoe UI"/>
+                          <a:latin typeface="맑은 고딕"/>
                           <a:ea typeface="맑은 고딕"/>
                           <a:cs typeface="맑은 고딕"/>
                         </a:rPr>
@@ -23260,7 +23197,7 @@
                           <a:solidFill>
                             <a:srgbClr val="12151A"/>
                           </a:solidFill>
-                          <a:latin typeface="Segoe UI"/>
+                          <a:latin typeface="맑은 고딕"/>
                           <a:ea typeface="맑은 고딕"/>
                           <a:cs typeface="맑은 고딕"/>
                         </a:rPr>
@@ -23285,7 +23222,7 @@
                           <a:solidFill>
                             <a:srgbClr val="12151A"/>
                           </a:solidFill>
-                          <a:latin typeface="Segoe UI"/>
+                          <a:latin typeface="맑은 고딕"/>
                           <a:ea typeface="맑은 고딕"/>
                           <a:cs typeface="맑은 고딕"/>
                         </a:rPr>
@@ -23312,7 +23249,7 @@
                           <a:solidFill>
                             <a:srgbClr val="12151A"/>
                           </a:solidFill>
-                          <a:latin typeface="Segoe UI"/>
+                          <a:latin typeface="맑은 고딕"/>
                           <a:ea typeface="맑은 고딕"/>
                           <a:cs typeface="맑은 고딕"/>
                         </a:rPr>
@@ -23337,7 +23274,7 @@
                           <a:solidFill>
                             <a:srgbClr val="12151A"/>
                           </a:solidFill>
-                          <a:latin typeface="Segoe UI"/>
+                          <a:latin typeface="맑은 고딕"/>
                           <a:ea typeface="맑은 고딕"/>
                           <a:cs typeface="맑은 고딕"/>
                         </a:rPr>
@@ -23362,7 +23299,7 @@
                           <a:solidFill>
                             <a:srgbClr val="12151A"/>
                           </a:solidFill>
-                          <a:latin typeface="Segoe UI"/>
+                          <a:latin typeface="맑은 고딕"/>
                           <a:ea typeface="맑은 고딕"/>
                           <a:cs typeface="맑은 고딕"/>
                         </a:rPr>
@@ -23387,7 +23324,7 @@
                           <a:solidFill>
                             <a:srgbClr val="12151A"/>
                           </a:solidFill>
-                          <a:latin typeface="Segoe UI"/>
+                          <a:latin typeface="맑은 고딕"/>
                           <a:ea typeface="맑은 고딕"/>
                           <a:cs typeface="맑은 고딕"/>
                         </a:rPr>
@@ -23414,7 +23351,7 @@
                           <a:solidFill>
                             <a:srgbClr val="12151A"/>
                           </a:solidFill>
-                          <a:latin typeface="Segoe UI"/>
+                          <a:latin typeface="맑은 고딕"/>
                           <a:ea typeface="맑은 고딕"/>
                           <a:cs typeface="맑은 고딕"/>
                         </a:rPr>
@@ -23439,7 +23376,7 @@
                           <a:solidFill>
                             <a:srgbClr val="12151A"/>
                           </a:solidFill>
-                          <a:latin typeface="Segoe UI"/>
+                          <a:latin typeface="맑은 고딕"/>
                           <a:ea typeface="맑은 고딕"/>
                           <a:cs typeface="맑은 고딕"/>
                         </a:rPr>
@@ -23464,7 +23401,7 @@
                           <a:solidFill>
                             <a:srgbClr val="12151A"/>
                           </a:solidFill>
-                          <a:latin typeface="Segoe UI"/>
+                          <a:latin typeface="맑은 고딕"/>
                           <a:ea typeface="맑은 고딕"/>
                           <a:cs typeface="맑은 고딕"/>
                         </a:rPr>
@@ -23489,7 +23426,7 @@
                           <a:solidFill>
                             <a:srgbClr val="12151A"/>
                           </a:solidFill>
-                          <a:latin typeface="Segoe UI"/>
+                          <a:latin typeface="맑은 고딕"/>
                           <a:ea typeface="맑은 고딕"/>
                           <a:cs typeface="맑은 고딕"/>
                         </a:rPr>
@@ -23516,7 +23453,7 @@
                           <a:solidFill>
                             <a:srgbClr val="12151A"/>
                           </a:solidFill>
-                          <a:latin typeface="Segoe UI"/>
+                          <a:latin typeface="맑은 고딕"/>
                           <a:ea typeface="맑은 고딕"/>
                           <a:cs typeface="맑은 고딕"/>
                         </a:rPr>
@@ -23541,7 +23478,7 @@
                           <a:solidFill>
                             <a:srgbClr val="12151A"/>
                           </a:solidFill>
-                          <a:latin typeface="Segoe UI"/>
+                          <a:latin typeface="맑은 고딕"/>
                           <a:ea typeface="맑은 고딕"/>
                           <a:cs typeface="맑은 고딕"/>
                         </a:rPr>
@@ -23566,7 +23503,7 @@
                           <a:solidFill>
                             <a:srgbClr val="12151A"/>
                           </a:solidFill>
-                          <a:latin typeface="Segoe UI"/>
+                          <a:latin typeface="맑은 고딕"/>
                           <a:ea typeface="맑은 고딕"/>
                           <a:cs typeface="맑은 고딕"/>
                         </a:rPr>
@@ -23591,7 +23528,7 @@
                           <a:solidFill>
                             <a:srgbClr val="12151A"/>
                           </a:solidFill>
-                          <a:latin typeface="Segoe UI"/>
+                          <a:latin typeface="맑은 고딕"/>
                           <a:ea typeface="맑은 고딕"/>
                           <a:cs typeface="맑은 고딕"/>
                         </a:rPr>
@@ -23618,7 +23555,7 @@
                           <a:solidFill>
                             <a:srgbClr val="12151A"/>
                           </a:solidFill>
-                          <a:latin typeface="Segoe UI"/>
+                          <a:latin typeface="맑은 고딕"/>
                           <a:ea typeface="맑은 고딕"/>
                           <a:cs typeface="맑은 고딕"/>
                         </a:rPr>
@@ -23643,7 +23580,7 @@
                           <a:solidFill>
                             <a:srgbClr val="12151A"/>
                           </a:solidFill>
-                          <a:latin typeface="Segoe UI"/>
+                          <a:latin typeface="맑은 고딕"/>
                           <a:ea typeface="맑은 고딕"/>
                           <a:cs typeface="맑은 고딕"/>
                         </a:rPr>
@@ -23668,7 +23605,7 @@
                           <a:solidFill>
                             <a:srgbClr val="12151A"/>
                           </a:solidFill>
-                          <a:latin typeface="Segoe UI"/>
+                          <a:latin typeface="맑은 고딕"/>
                           <a:ea typeface="맑은 고딕"/>
                           <a:cs typeface="맑은 고딕"/>
                         </a:rPr>
@@ -23693,7 +23630,7 @@
                           <a:solidFill>
                             <a:srgbClr val="12151A"/>
                           </a:solidFill>
-                          <a:latin typeface="Segoe UI"/>
+                          <a:latin typeface="맑은 고딕"/>
                           <a:ea typeface="맑은 고딕"/>
                           <a:cs typeface="맑은 고딕"/>
                         </a:rPr>
@@ -23720,7 +23657,7 @@
                           <a:solidFill>
                             <a:srgbClr val="12151A"/>
                           </a:solidFill>
-                          <a:latin typeface="Segoe UI"/>
+                          <a:latin typeface="맑은 고딕"/>
                           <a:ea typeface="맑은 고딕"/>
                           <a:cs typeface="맑은 고딕"/>
                         </a:rPr>
@@ -23745,7 +23682,7 @@
                           <a:solidFill>
                             <a:srgbClr val="12151A"/>
                           </a:solidFill>
-                          <a:latin typeface="Segoe UI"/>
+                          <a:latin typeface="맑은 고딕"/>
                           <a:ea typeface="맑은 고딕"/>
                           <a:cs typeface="맑은 고딕"/>
                         </a:rPr>
@@ -23770,7 +23707,7 @@
                           <a:solidFill>
                             <a:srgbClr val="12151A"/>
                           </a:solidFill>
-                          <a:latin typeface="Segoe UI"/>
+                          <a:latin typeface="맑은 고딕"/>
                           <a:ea typeface="맑은 고딕"/>
                           <a:cs typeface="맑은 고딕"/>
                         </a:rPr>
@@ -23795,7 +23732,7 @@
                           <a:solidFill>
                             <a:srgbClr val="12151A"/>
                           </a:solidFill>
-                          <a:latin typeface="Segoe UI"/>
+                          <a:latin typeface="맑은 고딕"/>
                           <a:ea typeface="맑은 고딕"/>
                           <a:cs typeface="맑은 고딕"/>
                         </a:rPr>
@@ -23846,7 +23783,7 @@
                 <a:solidFill>
                   <a:srgbClr val="52514E"/>
                 </a:solidFill>
-                <a:latin typeface="Segoe UI"/>
+                <a:latin typeface="맑은 고딕"/>
                 <a:ea typeface="맑은 고딕"/>
                 <a:cs typeface="맑은 고딕"/>
               </a:rPr>
@@ -23887,7 +23824,7 @@
                 <a:solidFill>
                   <a:srgbClr val="52514E"/>
                 </a:solidFill>
-                <a:latin typeface="Segoe UI"/>
+                <a:latin typeface="맑은 고딕"/>
                 <a:ea typeface="맑은 고딕"/>
                 <a:cs typeface="맑은 고딕"/>
               </a:rPr>
@@ -23946,7 +23883,7 @@
                 <a:solidFill>
                   <a:srgbClr val="2A78D6"/>
                 </a:solidFill>
-                <a:latin typeface="Segoe UI"/>
+                <a:latin typeface="맑은 고딕"/>
                 <a:ea typeface="맑은 고딕"/>
                 <a:cs typeface="맑은 고딕"/>
               </a:rPr>
@@ -23987,7 +23924,7 @@
                 <a:solidFill>
                   <a:srgbClr val="12151A"/>
                 </a:solidFill>
-                <a:latin typeface="Segoe UI"/>
+                <a:latin typeface="맑은 고딕"/>
                 <a:ea typeface="맑은 고딕"/>
                 <a:cs typeface="맑은 고딕"/>
               </a:rPr>
@@ -24028,7 +23965,7 @@
                 <a:solidFill>
                   <a:srgbClr val="52514E"/>
                 </a:solidFill>
-                <a:latin typeface="Segoe UI"/>
+                <a:latin typeface="맑은 고딕"/>
                 <a:ea typeface="맑은 고딕"/>
                 <a:cs typeface="맑은 고딕"/>
               </a:rPr>
@@ -24113,7 +24050,7 @@
                 <a:solidFill>
                   <a:srgbClr val="2A78D6"/>
                 </a:solidFill>
-                <a:latin typeface="Segoe UI"/>
+                <a:latin typeface="맑은 고딕"/>
                 <a:ea typeface="맑은 고딕"/>
                 <a:cs typeface="맑은 고딕"/>
               </a:rPr>
@@ -24154,7 +24091,7 @@
                 <a:solidFill>
                   <a:srgbClr val="12151A"/>
                 </a:solidFill>
-                <a:latin typeface="Segoe UI"/>
+                <a:latin typeface="맑은 고딕"/>
                 <a:ea typeface="맑은 고딕"/>
                 <a:cs typeface="맑은 고딕"/>
               </a:rPr>
@@ -24175,7 +24112,7 @@
                 <a:solidFill>
                   <a:srgbClr val="12151A"/>
                 </a:solidFill>
-                <a:latin typeface="Segoe UI"/>
+                <a:latin typeface="맑은 고딕"/>
                 <a:ea typeface="맑은 고딕"/>
                 <a:cs typeface="맑은 고딕"/>
               </a:rPr>
@@ -24196,7 +24133,7 @@
                 <a:solidFill>
                   <a:srgbClr val="12151A"/>
                 </a:solidFill>
-                <a:latin typeface="Segoe UI"/>
+                <a:latin typeface="맑은 고딕"/>
                 <a:ea typeface="맑은 고딕"/>
                 <a:cs typeface="맑은 고딕"/>
               </a:rPr>
@@ -24281,7 +24218,7 @@
                 <a:solidFill>
                   <a:srgbClr val="1BAF7A"/>
                 </a:solidFill>
-                <a:latin typeface="Segoe UI"/>
+                <a:latin typeface="맑은 고딕"/>
                 <a:ea typeface="맑은 고딕"/>
                 <a:cs typeface="맑은 고딕"/>
               </a:rPr>
@@ -24322,7 +24259,7 @@
                 <a:solidFill>
                   <a:srgbClr val="12151A"/>
                 </a:solidFill>
-                <a:latin typeface="Segoe UI"/>
+                <a:latin typeface="맑은 고딕"/>
                 <a:ea typeface="맑은 고딕"/>
                 <a:cs typeface="맑은 고딕"/>
               </a:rPr>
@@ -24343,7 +24280,7 @@
                 <a:solidFill>
                   <a:srgbClr val="12151A"/>
                 </a:solidFill>
-                <a:latin typeface="Segoe UI"/>
+                <a:latin typeface="맑은 고딕"/>
                 <a:ea typeface="맑은 고딕"/>
                 <a:cs typeface="맑은 고딕"/>
               </a:rPr>
@@ -24364,7 +24301,7 @@
                 <a:solidFill>
                   <a:srgbClr val="12151A"/>
                 </a:solidFill>
-                <a:latin typeface="Segoe UI"/>
+                <a:latin typeface="맑은 고딕"/>
                 <a:ea typeface="맑은 고딕"/>
                 <a:cs typeface="맑은 고딕"/>
               </a:rPr>
@@ -24405,7 +24342,7 @@
                 <a:solidFill>
                   <a:srgbClr val="12151A"/>
                 </a:solidFill>
-                <a:latin typeface="Segoe UI"/>
+                <a:latin typeface="맑은 고딕"/>
                 <a:ea typeface="맑은 고딕"/>
                 <a:cs typeface="맑은 고딕"/>
               </a:rPr>
@@ -24446,7 +24383,7 @@
                 <a:solidFill>
                   <a:srgbClr val="52514E"/>
                 </a:solidFill>
-                <a:latin typeface="Segoe UI"/>
+                <a:latin typeface="맑은 고딕"/>
                 <a:ea typeface="맑은 고딕"/>
                 <a:cs typeface="맑은 고딕"/>
               </a:rPr>
@@ -24467,7 +24404,7 @@
                 <a:solidFill>
                   <a:srgbClr val="52514E"/>
                 </a:solidFill>
-                <a:latin typeface="Segoe UI"/>
+                <a:latin typeface="맑은 고딕"/>
                 <a:ea typeface="맑은 고딕"/>
                 <a:cs typeface="맑은 고딕"/>
               </a:rPr>
@@ -24510,7 +24447,7 @@
                           <a:solidFill>
                             <a:srgbClr val="12151A"/>
                           </a:solidFill>
-                          <a:latin typeface="Segoe UI"/>
+                          <a:latin typeface="맑은 고딕"/>
                           <a:ea typeface="맑은 고딕"/>
                           <a:cs typeface="맑은 고딕"/>
                         </a:rPr>
@@ -24535,7 +24472,7 @@
                           <a:solidFill>
                             <a:srgbClr val="12151A"/>
                           </a:solidFill>
-                          <a:latin typeface="Segoe UI"/>
+                          <a:latin typeface="맑은 고딕"/>
                           <a:ea typeface="맑은 고딕"/>
                           <a:cs typeface="맑은 고딕"/>
                         </a:rPr>
@@ -24562,7 +24499,7 @@
                           <a:solidFill>
                             <a:srgbClr val="12151A"/>
                           </a:solidFill>
-                          <a:latin typeface="Segoe UI"/>
+                          <a:latin typeface="맑은 고딕"/>
                           <a:ea typeface="맑은 고딕"/>
                           <a:cs typeface="맑은 고딕"/>
                         </a:rPr>
@@ -24587,7 +24524,7 @@
                           <a:solidFill>
                             <a:srgbClr val="12151A"/>
                           </a:solidFill>
-                          <a:latin typeface="Segoe UI"/>
+                          <a:latin typeface="맑은 고딕"/>
                           <a:ea typeface="맑은 고딕"/>
                           <a:cs typeface="맑은 고딕"/>
                         </a:rPr>
@@ -24614,7 +24551,7 @@
                           <a:solidFill>
                             <a:srgbClr val="12151A"/>
                           </a:solidFill>
-                          <a:latin typeface="Segoe UI"/>
+                          <a:latin typeface="맑은 고딕"/>
                           <a:ea typeface="맑은 고딕"/>
                           <a:cs typeface="맑은 고딕"/>
                         </a:rPr>
@@ -24639,7 +24576,7 @@
                           <a:solidFill>
                             <a:srgbClr val="12151A"/>
                           </a:solidFill>
-                          <a:latin typeface="Segoe UI"/>
+                          <a:latin typeface="맑은 고딕"/>
                           <a:ea typeface="맑은 고딕"/>
                           <a:cs typeface="맑은 고딕"/>
                         </a:rPr>
@@ -24666,7 +24603,7 @@
                           <a:solidFill>
                             <a:srgbClr val="12151A"/>
                           </a:solidFill>
-                          <a:latin typeface="Segoe UI"/>
+                          <a:latin typeface="맑은 고딕"/>
                           <a:ea typeface="맑은 고딕"/>
                           <a:cs typeface="맑은 고딕"/>
                         </a:rPr>
@@ -24691,7 +24628,7 @@
                           <a:solidFill>
                             <a:srgbClr val="12151A"/>
                           </a:solidFill>
-                          <a:latin typeface="Segoe UI"/>
+                          <a:latin typeface="맑은 고딕"/>
                           <a:ea typeface="맑은 고딕"/>
                           <a:cs typeface="맑은 고딕"/>
                         </a:rPr>
@@ -24718,7 +24655,7 @@
                           <a:solidFill>
                             <a:srgbClr val="12151A"/>
                           </a:solidFill>
-                          <a:latin typeface="Segoe UI"/>
+                          <a:latin typeface="맑은 고딕"/>
                           <a:ea typeface="맑은 고딕"/>
                           <a:cs typeface="맑은 고딕"/>
                         </a:rPr>
@@ -24743,7 +24680,7 @@
                           <a:solidFill>
                             <a:srgbClr val="12151A"/>
                           </a:solidFill>
-                          <a:latin typeface="Segoe UI"/>
+                          <a:latin typeface="맑은 고딕"/>
                           <a:ea typeface="맑은 고딕"/>
                           <a:cs typeface="맑은 고딕"/>
                         </a:rPr>
@@ -24770,7 +24707,7 @@
                           <a:solidFill>
                             <a:srgbClr val="12151A"/>
                           </a:solidFill>
-                          <a:latin typeface="Segoe UI"/>
+                          <a:latin typeface="맑은 고딕"/>
                           <a:ea typeface="맑은 고딕"/>
                           <a:cs typeface="맑은 고딕"/>
                         </a:rPr>
@@ -24795,7 +24732,7 @@
                           <a:solidFill>
                             <a:srgbClr val="12151A"/>
                           </a:solidFill>
-                          <a:latin typeface="Segoe UI"/>
+                          <a:latin typeface="맑은 고딕"/>
                           <a:ea typeface="맑은 고딕"/>
                           <a:cs typeface="맑은 고딕"/>
                         </a:rPr>
@@ -24846,7 +24783,7 @@
                 <a:solidFill>
                   <a:srgbClr val="52514E"/>
                 </a:solidFill>
-                <a:latin typeface="Segoe UI"/>
+                <a:latin typeface="맑은 고딕"/>
                 <a:ea typeface="맑은 고딕"/>
                 <a:cs typeface="맑은 고딕"/>
               </a:rPr>
@@ -24887,7 +24824,7 @@
                 <a:solidFill>
                   <a:srgbClr val="52514E"/>
                 </a:solidFill>
-                <a:latin typeface="Segoe UI"/>
+                <a:latin typeface="맑은 고딕"/>
                 <a:ea typeface="맑은 고딕"/>
                 <a:cs typeface="맑은 고딕"/>
               </a:rPr>
@@ -24946,7 +24883,7 @@
                 <a:solidFill>
                   <a:srgbClr val="2A78D6"/>
                 </a:solidFill>
-                <a:latin typeface="Segoe UI"/>
+                <a:latin typeface="맑은 고딕"/>
                 <a:ea typeface="맑은 고딕"/>
                 <a:cs typeface="맑은 고딕"/>
               </a:rPr>
@@ -24987,7 +24924,7 @@
                 <a:solidFill>
                   <a:srgbClr val="12151A"/>
                 </a:solidFill>
-                <a:latin typeface="Segoe UI"/>
+                <a:latin typeface="맑은 고딕"/>
                 <a:ea typeface="맑은 고딕"/>
                 <a:cs typeface="맑은 고딕"/>
               </a:rPr>
@@ -25028,7 +24965,7 @@
                 <a:solidFill>
                   <a:srgbClr val="52514E"/>
                 </a:solidFill>
-                <a:latin typeface="Segoe UI"/>
+                <a:latin typeface="맑은 고딕"/>
                 <a:ea typeface="맑은 고딕"/>
                 <a:cs typeface="맑은 고딕"/>
               </a:rPr>
@@ -25069,7 +25006,7 @@
                 <a:solidFill>
                   <a:srgbClr val="12151A"/>
                 </a:solidFill>
-                <a:latin typeface="Segoe UI"/>
+                <a:latin typeface="맑은 고딕"/>
                 <a:ea typeface="맑은 고딕"/>
                 <a:cs typeface="맑은 고딕"/>
               </a:rPr>
@@ -25152,7 +25089,7 @@
                 <a:solidFill>
                   <a:srgbClr val="12151A"/>
                 </a:solidFill>
-                <a:latin typeface="Segoe UI"/>
+                <a:latin typeface="맑은 고딕"/>
                 <a:ea typeface="맑은 고딕"/>
                 <a:cs typeface="맑은 고딕"/>
               </a:rPr>
@@ -25193,7 +25130,7 @@
                 <a:solidFill>
                   <a:srgbClr val="52514E"/>
                 </a:solidFill>
-                <a:latin typeface="Segoe UI"/>
+                <a:latin typeface="맑은 고딕"/>
                 <a:ea typeface="맑은 고딕"/>
                 <a:cs typeface="맑은 고딕"/>
               </a:rPr>
@@ -25276,7 +25213,7 @@
                 <a:solidFill>
                   <a:srgbClr val="12151A"/>
                 </a:solidFill>
-                <a:latin typeface="Segoe UI"/>
+                <a:latin typeface="맑은 고딕"/>
                 <a:ea typeface="맑은 고딕"/>
                 <a:cs typeface="맑은 고딕"/>
               </a:rPr>
@@ -25317,7 +25254,7 @@
                 <a:solidFill>
                   <a:srgbClr val="52514E"/>
                 </a:solidFill>
-                <a:latin typeface="Segoe UI"/>
+                <a:latin typeface="맑은 고딕"/>
                 <a:ea typeface="맑은 고딕"/>
                 <a:cs typeface="맑은 고딕"/>
               </a:rPr>
@@ -25400,7 +25337,7 @@
                 <a:solidFill>
                   <a:srgbClr val="12151A"/>
                 </a:solidFill>
-                <a:latin typeface="Segoe UI"/>
+                <a:latin typeface="맑은 고딕"/>
                 <a:ea typeface="맑은 고딕"/>
                 <a:cs typeface="맑은 고딕"/>
               </a:rPr>
@@ -25441,7 +25378,7 @@
                 <a:solidFill>
                   <a:srgbClr val="52514E"/>
                 </a:solidFill>
-                <a:latin typeface="Segoe UI"/>
+                <a:latin typeface="맑은 고딕"/>
                 <a:ea typeface="맑은 고딕"/>
                 <a:cs typeface="맑은 고딕"/>
               </a:rPr>
@@ -25524,7 +25461,7 @@
                 <a:solidFill>
                   <a:srgbClr val="12151A"/>
                 </a:solidFill>
-                <a:latin typeface="Segoe UI"/>
+                <a:latin typeface="맑은 고딕"/>
                 <a:ea typeface="맑은 고딕"/>
                 <a:cs typeface="맑은 고딕"/>
               </a:rPr>
@@ -25565,7 +25502,7 @@
                 <a:solidFill>
                   <a:srgbClr val="52514E"/>
                 </a:solidFill>
-                <a:latin typeface="Segoe UI"/>
+                <a:latin typeface="맑은 고딕"/>
                 <a:ea typeface="맑은 고딕"/>
                 <a:cs typeface="맑은 고딕"/>
               </a:rPr>
@@ -25648,7 +25585,7 @@
                 <a:solidFill>
                   <a:srgbClr val="12151A"/>
                 </a:solidFill>
-                <a:latin typeface="Segoe UI"/>
+                <a:latin typeface="맑은 고딕"/>
                 <a:ea typeface="맑은 고딕"/>
                 <a:cs typeface="맑은 고딕"/>
               </a:rPr>
@@ -25689,7 +25626,7 @@
                 <a:solidFill>
                   <a:srgbClr val="52514E"/>
                 </a:solidFill>
-                <a:latin typeface="Segoe UI"/>
+                <a:latin typeface="맑은 고딕"/>
                 <a:ea typeface="맑은 고딕"/>
                 <a:cs typeface="맑은 고딕"/>
               </a:rPr>
@@ -25774,7 +25711,7 @@
                 <a:solidFill>
                   <a:srgbClr val="12151A"/>
                 </a:solidFill>
-                <a:latin typeface="Segoe UI"/>
+                <a:latin typeface="맑은 고딕"/>
                 <a:ea typeface="맑은 고딕"/>
                 <a:cs typeface="맑은 고딕"/>
               </a:rPr>
@@ -25856,7 +25793,7 @@
                 <a:solidFill>
                   <a:srgbClr val="52514E"/>
                 </a:solidFill>
-                <a:latin typeface="Segoe UI"/>
+                <a:latin typeface="맑은 고딕"/>
                 <a:ea typeface="맑은 고딕"/>
                 <a:cs typeface="맑은 고딕"/>
               </a:rPr>
@@ -25877,7 +25814,7 @@
                 <a:solidFill>
                   <a:srgbClr val="52514E"/>
                 </a:solidFill>
-                <a:latin typeface="Segoe UI"/>
+                <a:latin typeface="맑은 고딕"/>
                 <a:ea typeface="맑은 고딕"/>
                 <a:cs typeface="맑은 고딕"/>
               </a:rPr>
@@ -25898,7 +25835,7 @@
                 <a:solidFill>
                   <a:srgbClr val="52514E"/>
                 </a:solidFill>
-                <a:latin typeface="Segoe UI"/>
+                <a:latin typeface="맑은 고딕"/>
                 <a:ea typeface="맑은 고딕"/>
                 <a:cs typeface="맑은 고딕"/>
               </a:rPr>
@@ -25919,7 +25856,7 @@
                 <a:solidFill>
                   <a:srgbClr val="52514E"/>
                 </a:solidFill>
-                <a:latin typeface="Segoe UI"/>
+                <a:latin typeface="맑은 고딕"/>
                 <a:ea typeface="맑은 고딕"/>
                 <a:cs typeface="맑은 고딕"/>
               </a:rPr>
@@ -25940,7 +25877,7 @@
                 <a:solidFill>
                   <a:srgbClr val="52514E"/>
                 </a:solidFill>
-                <a:latin typeface="Segoe UI"/>
+                <a:latin typeface="맑은 고딕"/>
                 <a:ea typeface="맑은 고딕"/>
                 <a:cs typeface="맑은 고딕"/>
               </a:rPr>
@@ -26025,7 +25962,7 @@
                 <a:solidFill>
                   <a:srgbClr val="12151A"/>
                 </a:solidFill>
-                <a:latin typeface="Segoe UI"/>
+                <a:latin typeface="맑은 고딕"/>
                 <a:ea typeface="맑은 고딕"/>
                 <a:cs typeface="맑은 고딕"/>
               </a:rPr>
@@ -26046,7 +25983,7 @@
                 <a:solidFill>
                   <a:srgbClr val="12151A"/>
                 </a:solidFill>
-                <a:latin typeface="Segoe UI"/>
+                <a:latin typeface="맑은 고딕"/>
                 <a:ea typeface="맑은 고딕"/>
                 <a:cs typeface="맑은 고딕"/>
               </a:rPr>
@@ -26087,7 +26024,7 @@
                 <a:solidFill>
                   <a:srgbClr val="52514E"/>
                 </a:solidFill>
-                <a:latin typeface="Segoe UI"/>
+                <a:latin typeface="맑은 고딕"/>
                 <a:ea typeface="맑은 고딕"/>
                 <a:cs typeface="맑은 고딕"/>
               </a:rPr>
@@ -26128,7 +26065,7 @@
                 <a:solidFill>
                   <a:srgbClr val="52514E"/>
                 </a:solidFill>
-                <a:latin typeface="Segoe UI"/>
+                <a:latin typeface="맑은 고딕"/>
                 <a:ea typeface="맑은 고딕"/>
                 <a:cs typeface="맑은 고딕"/>
               </a:rPr>
@@ -26187,7 +26124,7 @@
                 <a:solidFill>
                   <a:srgbClr val="2A78D6"/>
                 </a:solidFill>
-                <a:latin typeface="Segoe UI"/>
+                <a:latin typeface="맑은 고딕"/>
                 <a:ea typeface="맑은 고딕"/>
                 <a:cs typeface="맑은 고딕"/>
               </a:rPr>
@@ -26228,7 +26165,7 @@
                 <a:solidFill>
                   <a:srgbClr val="12151A"/>
                 </a:solidFill>
-                <a:latin typeface="Segoe UI"/>
+                <a:latin typeface="맑은 고딕"/>
                 <a:ea typeface="맑은 고딕"/>
                 <a:cs typeface="맑은 고딕"/>
               </a:rPr>
@@ -26269,7 +26206,7 @@
                 <a:solidFill>
                   <a:srgbClr val="52514E"/>
                 </a:solidFill>
-                <a:latin typeface="Segoe UI"/>
+                <a:latin typeface="맑은 고딕"/>
                 <a:ea typeface="맑은 고딕"/>
                 <a:cs typeface="맑은 고딕"/>
               </a:rPr>
@@ -26422,7 +26359,7 @@
                 <a:solidFill>
                   <a:srgbClr val="52514E"/>
                 </a:solidFill>
-                <a:latin typeface="Segoe UI"/>
+                <a:latin typeface="맑은 고딕"/>
                 <a:ea typeface="맑은 고딕"/>
                 <a:cs typeface="맑은 고딕"/>
               </a:rPr>
@@ -26463,7 +26400,7 @@
                 <a:solidFill>
                   <a:srgbClr val="12151A"/>
                 </a:solidFill>
-                <a:latin typeface="Segoe UI"/>
+                <a:latin typeface="맑은 고딕"/>
                 <a:ea typeface="맑은 고딕"/>
                 <a:cs typeface="맑은 고딕"/>
               </a:rPr>
@@ -26504,7 +26441,7 @@
                 <a:solidFill>
                   <a:srgbClr val="52514E"/>
                 </a:solidFill>
-                <a:latin typeface="Segoe UI"/>
+                <a:latin typeface="맑은 고딕"/>
                 <a:ea typeface="맑은 고딕"/>
                 <a:cs typeface="맑은 고딕"/>
               </a:rPr>
@@ -26633,7 +26570,7 @@
                 <a:solidFill>
                   <a:srgbClr val="52514E"/>
                 </a:solidFill>
-                <a:latin typeface="Segoe UI"/>
+                <a:latin typeface="맑은 고딕"/>
                 <a:ea typeface="맑은 고딕"/>
                 <a:cs typeface="맑은 고딕"/>
               </a:rPr>
@@ -26674,7 +26611,7 @@
                 <a:solidFill>
                   <a:srgbClr val="12151A"/>
                 </a:solidFill>
-                <a:latin typeface="Segoe UI"/>
+                <a:latin typeface="맑은 고딕"/>
                 <a:ea typeface="맑은 고딕"/>
                 <a:cs typeface="맑은 고딕"/>
               </a:rPr>
@@ -26715,7 +26652,7 @@
                 <a:solidFill>
                   <a:srgbClr val="52514E"/>
                 </a:solidFill>
-                <a:latin typeface="Segoe UI"/>
+                <a:latin typeface="맑은 고딕"/>
                 <a:ea typeface="맑은 고딕"/>
                 <a:cs typeface="맑은 고딕"/>
               </a:rPr>
@@ -26844,7 +26781,7 @@
                 <a:solidFill>
                   <a:srgbClr val="52514E"/>
                 </a:solidFill>
-                <a:latin typeface="Segoe UI"/>
+                <a:latin typeface="맑은 고딕"/>
                 <a:ea typeface="맑은 고딕"/>
                 <a:cs typeface="맑은 고딕"/>
               </a:rPr>
@@ -26885,7 +26822,7 @@
                 <a:solidFill>
                   <a:srgbClr val="12151A"/>
                 </a:solidFill>
-                <a:latin typeface="Segoe UI"/>
+                <a:latin typeface="맑은 고딕"/>
                 <a:ea typeface="맑은 고딕"/>
                 <a:cs typeface="맑은 고딕"/>
               </a:rPr>
@@ -26926,7 +26863,7 @@
                 <a:solidFill>
                   <a:srgbClr val="52514E"/>
                 </a:solidFill>
-                <a:latin typeface="Segoe UI"/>
+                <a:latin typeface="맑은 고딕"/>
                 <a:ea typeface="맑은 고딕"/>
                 <a:cs typeface="맑은 고딕"/>
               </a:rPr>
@@ -26967,7 +26904,7 @@
                 <a:solidFill>
                   <a:srgbClr val="52514E"/>
                 </a:solidFill>
-                <a:latin typeface="Segoe UI"/>
+                <a:latin typeface="맑은 고딕"/>
                 <a:ea typeface="맑은 고딕"/>
                 <a:cs typeface="맑은 고딕"/>
               </a:rPr>
@@ -27008,7 +26945,7 @@
                 <a:solidFill>
                   <a:srgbClr val="52514E"/>
                 </a:solidFill>
-                <a:latin typeface="Segoe UI"/>
+                <a:latin typeface="맑은 고딕"/>
                 <a:ea typeface="맑은 고딕"/>
                 <a:cs typeface="맑은 고딕"/>
               </a:rPr>
@@ -27049,7 +26986,7 @@
                 <a:solidFill>
                   <a:srgbClr val="52514E"/>
                 </a:solidFill>
-                <a:latin typeface="Segoe UI"/>
+                <a:latin typeface="맑은 고딕"/>
                 <a:ea typeface="맑은 고딕"/>
                 <a:cs typeface="맑은 고딕"/>
               </a:rPr>

--- a/deliverables/기획서_천안균형발전나침반_CBC.pptx
+++ b/deliverables/기획서_천안균형발전나침반_CBC.pptx
@@ -25,7 +25,6 @@
     <p:sldId id="273" r:id="rId24"/>
     <p:sldId id="274" r:id="rId25"/>
     <p:sldId id="275" r:id="rId26"/>
-    <p:sldId id="276" r:id="rId27"/>
   </p:sldIdLst>
   <p:sldSz cx="12191695" cy="6858000" type="screen4x3"/>
   <p:notesSz cx="6858000" cy="9144000"/>
@@ -3660,7 +3659,7 @@
                 <a:ea typeface="맑은 고딕"/>
                 <a:cs typeface="맑은 고딕"/>
               </a:rPr>
-              <a:t>25개 생활권 · 지표 12종</a:t>
+              <a:t>25개 생활권 · 지표 3종</a:t>
             </a:r>
           </a:p>
         </p:txBody>
@@ -3904,8 +3903,8 @@
         </p:blipFill>
         <p:spPr>
           <a:xfrm>
-            <a:off x="1535534" y="2157984"/>
-            <a:ext cx="4966507" cy="3200400"/>
+            <a:off x="1826826" y="2157984"/>
+            <a:ext cx="4383923" cy="3200400"/>
           </a:xfrm>
           <a:prstGeom prst="rect">
             <a:avLst/>
@@ -4593,8 +4592,8 @@
         </p:blipFill>
         <p:spPr>
           <a:xfrm>
-            <a:off x="2575407" y="2286000"/>
-            <a:ext cx="7040880" cy="3200400"/>
+            <a:off x="4300436" y="2286000"/>
+            <a:ext cx="3590822" cy="3200400"/>
           </a:xfrm>
           <a:prstGeom prst="rect">
             <a:avLst/>
@@ -4722,7 +4721,7 @@
                 <a:ea typeface="맑은 고딕"/>
                 <a:cs typeface="맑은 고딕"/>
               </a:rPr>
-              <a:t>5년 인구증감률 상위는 12(+158%), 3(+81%)으로, 두 곳 모두 신축 입주가 이어진 지역입니다. 원도심에 속한 문성동도 사람이 돌아왔습니다.</a:t>
+              <a:t>5년 인구증감률 상위는 1(+158%), 0(+81%)으로, 두 곳 모두 신축 입주가 이어진 지역입니다. 원도심에 속한 문성동도 사람이 돌아왔습니다.</a:t>
             </a:r>
           </a:p>
           <a:p>
@@ -6470,8 +6469,8 @@
         </p:blipFill>
         <p:spPr>
           <a:xfrm>
-            <a:off x="859048" y="2103120"/>
-            <a:ext cx="4719279" cy="3977639"/>
+            <a:off x="976873" y="2103120"/>
+            <a:ext cx="4483629" cy="3977639"/>
           </a:xfrm>
           <a:prstGeom prst="rect">
             <a:avLst/>
@@ -6494,8 +6493,8 @@
         </p:blipFill>
         <p:spPr>
           <a:xfrm>
-            <a:off x="5963512" y="2103120"/>
-            <a:ext cx="5574590" cy="2834640"/>
+            <a:off x="6010146" y="2103120"/>
+            <a:ext cx="5481323" cy="2834640"/>
           </a:xfrm>
           <a:prstGeom prst="rect">
             <a:avLst/>
@@ -8494,7 +8493,7 @@
                 <a:ea typeface="맑은 고딕"/>
                 <a:cs typeface="맑은 고딕"/>
               </a:rPr>
-              <a:t>처방 결과 — 투자 우선순위</a:t>
+              <a:t>처방 결과 — 생활SOC 위치 자료 확보 후 산출</a:t>
             </a:r>
           </a:p>
         </p:txBody>
@@ -8535,35 +8534,55 @@
                 <a:ea typeface="맑은 고딕"/>
                 <a:cs typeface="맑은 고딕"/>
               </a:rPr>
-              <a:t>상위 12개소 우선 투자 시 취약수요 커버리지 +7.0%p, 신규 수혜인구 약 32,822명.</a:t>
-            </a:r>
-          </a:p>
-        </p:txBody>
-      </p:sp>
-      <p:pic>
-        <p:nvPicPr>
-          <p:cNvPr id="5" name="Picture 4" descr="07_투자입지_지도.png"/>
-          <p:cNvPicPr>
-            <a:picLocks noChangeAspect="1"/>
-          </p:cNvPicPr>
-          <p:nvPr/>
-        </p:nvPicPr>
-        <p:blipFill>
-          <a:blip r:embed="rId2"/>
-          <a:stretch>
-            <a:fillRect/>
-          </a:stretch>
-        </p:blipFill>
-        <p:spPr>
-          <a:xfrm>
-            <a:off x="859400" y="2212848"/>
-            <a:ext cx="4444255" cy="3931920"/>
-          </a:xfrm>
-          <a:prstGeom prst="rect">
-            <a:avLst/>
-          </a:prstGeom>
-        </p:spPr>
-      </p:pic>
+              <a:t>커버리지 계산에는 기존 생활SOC의 위치가 필요합니다. 현재는 미확보 상태입니다.</a:t>
+            </a:r>
+          </a:p>
+        </p:txBody>
+      </p:sp>
+      <p:sp>
+        <p:nvSpPr>
+          <p:cNvPr id="5" name="Rounded Rectangle 4"/>
+          <p:cNvSpPr/>
+          <p:nvPr/>
+        </p:nvSpPr>
+        <p:spPr>
+          <a:xfrm>
+            <a:off x="658368" y="2377440"/>
+            <a:ext cx="10874959" cy="1371600"/>
+          </a:xfrm>
+          <a:prstGeom prst="roundRect">
+            <a:avLst>
+              <a:gd name="adj" fmla="val 6000"/>
+            </a:avLst>
+          </a:prstGeom>
+          <a:solidFill>
+            <a:srgbClr val="F6F7F9"/>
+          </a:solidFill>
+          <a:ln>
+            <a:noFill/>
+          </a:ln>
+          <a:effectLst/>
+        </p:spPr>
+        <p:style>
+          <a:lnRef idx="1">
+            <a:schemeClr val="accent1"/>
+          </a:lnRef>
+          <a:fillRef idx="3">
+            <a:schemeClr val="accent1"/>
+          </a:fillRef>
+          <a:effectRef idx="2">
+            <a:schemeClr val="accent1"/>
+          </a:effectRef>
+          <a:fontRef idx="minor">
+            <a:schemeClr val="lt1"/>
+          </a:fontRef>
+        </p:style>
+        <p:txBody>
+          <a:bodyPr rtlCol="0" anchor="ctr"/>
+          <a:lstStyle/>
+          <a:p/>
+        </p:txBody>
+      </p:sp>
       <p:sp>
         <p:nvSpPr>
           <p:cNvPr id="6" name="TextBox 5"/>
@@ -8572,8 +8591,8 @@
         </p:nvSpPr>
         <p:spPr>
           <a:xfrm>
-            <a:off x="5779007" y="2212848"/>
-            <a:ext cx="5760720" cy="274320"/>
+            <a:off x="978407" y="2615184"/>
+            <a:ext cx="10424160" cy="292608"/>
           </a:xfrm>
           <a:prstGeom prst="rect">
             <a:avLst/>
@@ -8592,7 +8611,7 @@
               </a:lnSpc>
             </a:pPr>
             <a:r>
-              <a:rPr sz="1350" b="1">
+              <a:rPr sz="1450" b="1">
                 <a:solidFill>
                   <a:srgbClr val="12151A"/>
                 </a:solidFill>
@@ -8600,1437 +8619,73 @@
                 <a:ea typeface="맑은 고딕"/>
                 <a:cs typeface="맑은 고딕"/>
               </a:rPr>
-              <a:t>AI 추천 투자 순위 (상위 10)</a:t>
-            </a:r>
-          </a:p>
-        </p:txBody>
-      </p:sp>
-      <p:graphicFrame>
-        <p:nvGraphicFramePr>
-          <p:cNvPr id="7" name="Table 6"/>
-          <p:cNvGraphicFramePr>
-            <a:graphicFrameLocks noGrp="1"/>
-          </p:cNvGraphicFramePr>
-          <p:nvPr/>
-        </p:nvGraphicFramePr>
-        <p:xfrm>
-          <a:off x="5779007" y="2560320"/>
-          <a:ext cx="5760715" cy="3369564"/>
-        </p:xfrm>
-        <a:graphic>
-          <a:graphicData uri="http://schemas.openxmlformats.org/drawingml/2006/table">
-            <a:tbl>
-              <a:tblPr firstRow="1" bandRow="1">
-                <a:tableStyleId>{5C22544A-7EE6-4342-B048-85BDC9FD1C3A}</a:tableStyleId>
-              </a:tblPr>
-              <a:tblGrid>
-                <a:gridCol w="640079"/>
-                <a:gridCol w="1280159"/>
-                <a:gridCol w="1097279"/>
-                <a:gridCol w="1463039"/>
-                <a:gridCol w="1280159"/>
-              </a:tblGrid>
-              <a:tr h="306324">
-                <a:tc>
-                  <a:txBody>
-                    <a:bodyPr/>
-                    <a:lstStyle/>
-                    <a:p>
-                      <a:pPr algn="ctr"/>
-                      <a:r>
-                        <a:rPr sz="1000" b="1">
-                          <a:solidFill>
-                            <a:srgbClr val="12151A"/>
-                          </a:solidFill>
-                          <a:latin typeface="맑은 고딕"/>
-                          <a:ea typeface="맑은 고딕"/>
-                          <a:cs typeface="맑은 고딕"/>
-                        </a:rPr>
-                        <a:t>순위</a:t>
-                      </a:r>
-                    </a:p>
-                  </a:txBody>
-                  <a:tcPr anchor="ctr">
-                    <a:solidFill>
-                      <a:srgbClr val="F6F7F9"/>
-                    </a:solidFill>
-                  </a:tcPr>
-                </a:tc>
-                <a:tc>
-                  <a:txBody>
-                    <a:bodyPr/>
-                    <a:lstStyle/>
-                    <a:p>
-                      <a:pPr algn="ctr"/>
-                      <a:r>
-                        <a:rPr sz="1000" b="1">
-                          <a:solidFill>
-                            <a:srgbClr val="12151A"/>
-                          </a:solidFill>
-                          <a:latin typeface="맑은 고딕"/>
-                          <a:ea typeface="맑은 고딕"/>
-                          <a:cs typeface="맑은 고딕"/>
-                        </a:rPr>
-                        <a:t>생활권</a:t>
-                      </a:r>
-                    </a:p>
-                  </a:txBody>
-                  <a:tcPr anchor="ctr">
-                    <a:solidFill>
-                      <a:srgbClr val="F6F7F9"/>
-                    </a:solidFill>
-                  </a:tcPr>
-                </a:tc>
-                <a:tc>
-                  <a:txBody>
-                    <a:bodyPr/>
-                    <a:lstStyle/>
-                    <a:p>
-                      <a:pPr algn="ctr"/>
-                      <a:r>
-                        <a:rPr sz="1000" b="1">
-                          <a:solidFill>
-                            <a:srgbClr val="12151A"/>
-                          </a:solidFill>
-                          <a:latin typeface="맑은 고딕"/>
-                          <a:ea typeface="맑은 고딕"/>
-                          <a:cs typeface="맑은 고딕"/>
-                        </a:rPr>
-                        <a:t>시설유형</a:t>
-                      </a:r>
-                    </a:p>
-                  </a:txBody>
-                  <a:tcPr anchor="ctr">
-                    <a:solidFill>
-                      <a:srgbClr val="F6F7F9"/>
-                    </a:solidFill>
-                  </a:tcPr>
-                </a:tc>
-                <a:tc>
-                  <a:txBody>
-                    <a:bodyPr/>
-                    <a:lstStyle/>
-                    <a:p>
-                      <a:pPr algn="ctr"/>
-                      <a:r>
-                        <a:rPr sz="1000" b="1">
-                          <a:solidFill>
-                            <a:srgbClr val="12151A"/>
-                          </a:solidFill>
-                          <a:latin typeface="맑은 고딕"/>
-                          <a:ea typeface="맑은 고딕"/>
-                          <a:cs typeface="맑은 고딕"/>
-                        </a:rPr>
-                        <a:t>신규 수혜인구</a:t>
-                      </a:r>
-                    </a:p>
-                  </a:txBody>
-                  <a:tcPr anchor="ctr">
-                    <a:solidFill>
-                      <a:srgbClr val="F6F7F9"/>
-                    </a:solidFill>
-                  </a:tcPr>
-                </a:tc>
-                <a:tc>
-                  <a:txBody>
-                    <a:bodyPr/>
-                    <a:lstStyle/>
-                    <a:p>
-                      <a:pPr algn="ctr"/>
-                      <a:r>
-                        <a:rPr sz="1000" b="1">
-                          <a:solidFill>
-                            <a:srgbClr val="12151A"/>
-                          </a:solidFill>
-                          <a:latin typeface="맑은 고딕"/>
-                          <a:ea typeface="맑은 고딕"/>
-                          <a:cs typeface="맑은 고딕"/>
-                        </a:rPr>
-                        <a:t>커버리지 개선</a:t>
-                      </a:r>
-                    </a:p>
-                  </a:txBody>
-                  <a:tcPr anchor="ctr">
-                    <a:solidFill>
-                      <a:srgbClr val="F6F7F9"/>
-                    </a:solidFill>
-                  </a:tcPr>
-                </a:tc>
-              </a:tr>
-              <a:tr h="306324">
-                <a:tc>
-                  <a:txBody>
-                    <a:bodyPr/>
-                    <a:lstStyle/>
-                    <a:p>
-                      <a:pPr algn="l"/>
-                      <a:r>
-                        <a:rPr sz="950">
-                          <a:solidFill>
-                            <a:srgbClr val="12151A"/>
-                          </a:solidFill>
-                          <a:latin typeface="맑은 고딕"/>
-                          <a:ea typeface="맑은 고딕"/>
-                          <a:cs typeface="맑은 고딕"/>
-                        </a:rPr>
-                        <a:t>1</a:t>
-                      </a:r>
-                    </a:p>
-                  </a:txBody>
-                  <a:tcPr anchor="ctr">
-                    <a:solidFill>
-                      <a:srgbClr val="FFFFFF"/>
-                    </a:solidFill>
-                  </a:tcPr>
-                </a:tc>
-                <a:tc>
-                  <a:txBody>
-                    <a:bodyPr/>
-                    <a:lstStyle/>
-                    <a:p>
-                      <a:pPr algn="ctr"/>
-                      <a:r>
-                        <a:rPr sz="950">
-                          <a:solidFill>
-                            <a:srgbClr val="12151A"/>
-                          </a:solidFill>
-                          <a:latin typeface="맑은 고딕"/>
-                          <a:ea typeface="맑은 고딕"/>
-                          <a:cs typeface="맑은 고딕"/>
-                        </a:rPr>
-                        <a:t>성거읍</a:t>
-                      </a:r>
-                    </a:p>
-                  </a:txBody>
-                  <a:tcPr anchor="ctr">
-                    <a:solidFill>
-                      <a:srgbClr val="FFFFFF"/>
-                    </a:solidFill>
-                  </a:tcPr>
-                </a:tc>
-                <a:tc>
-                  <a:txBody>
-                    <a:bodyPr/>
-                    <a:lstStyle/>
-                    <a:p>
-                      <a:pPr algn="ctr"/>
-                      <a:r>
-                        <a:rPr sz="950">
-                          <a:solidFill>
-                            <a:srgbClr val="12151A"/>
-                          </a:solidFill>
-                          <a:latin typeface="맑은 고딕"/>
-                          <a:ea typeface="맑은 고딕"/>
-                          <a:cs typeface="맑은 고딕"/>
-                        </a:rPr>
-                        <a:t>의료</a:t>
-                      </a:r>
-                    </a:p>
-                  </a:txBody>
-                  <a:tcPr anchor="ctr">
-                    <a:solidFill>
-                      <a:srgbClr val="FFFFFF"/>
-                    </a:solidFill>
-                  </a:tcPr>
-                </a:tc>
-                <a:tc>
-                  <a:txBody>
-                    <a:bodyPr/>
-                    <a:lstStyle/>
-                    <a:p>
-                      <a:pPr algn="ctr"/>
-                      <a:r>
-                        <a:rPr sz="950">
-                          <a:solidFill>
-                            <a:srgbClr val="12151A"/>
-                          </a:solidFill>
-                          <a:latin typeface="맑은 고딕"/>
-                          <a:ea typeface="맑은 고딕"/>
-                          <a:cs typeface="맑은 고딕"/>
-                        </a:rPr>
-                        <a:t>7,740</a:t>
-                      </a:r>
-                    </a:p>
-                  </a:txBody>
-                  <a:tcPr anchor="ctr">
-                    <a:solidFill>
-                      <a:srgbClr val="FFFFFF"/>
-                    </a:solidFill>
-                  </a:tcPr>
-                </a:tc>
-                <a:tc>
-                  <a:txBody>
-                    <a:bodyPr/>
-                    <a:lstStyle/>
-                    <a:p>
-                      <a:pPr algn="ctr"/>
-                      <a:r>
-                        <a:rPr sz="950">
-                          <a:solidFill>
-                            <a:srgbClr val="12151A"/>
-                          </a:solidFill>
-                          <a:latin typeface="맑은 고딕"/>
-                          <a:ea typeface="맑은 고딕"/>
-                          <a:cs typeface="맑은 고딕"/>
-                        </a:rPr>
-                        <a:t>+1.3%p</a:t>
-                      </a:r>
-                    </a:p>
-                  </a:txBody>
-                  <a:tcPr anchor="ctr">
-                    <a:solidFill>
-                      <a:srgbClr val="FFFFFF"/>
-                    </a:solidFill>
-                  </a:tcPr>
-                </a:tc>
-              </a:tr>
-              <a:tr h="306324">
-                <a:tc>
-                  <a:txBody>
-                    <a:bodyPr/>
-                    <a:lstStyle/>
-                    <a:p>
-                      <a:pPr algn="l"/>
-                      <a:r>
-                        <a:rPr sz="950">
-                          <a:solidFill>
-                            <a:srgbClr val="12151A"/>
-                          </a:solidFill>
-                          <a:latin typeface="맑은 고딕"/>
-                          <a:ea typeface="맑은 고딕"/>
-                          <a:cs typeface="맑은 고딕"/>
-                        </a:rPr>
-                        <a:t>2</a:t>
-                      </a:r>
-                    </a:p>
-                  </a:txBody>
-                  <a:tcPr anchor="ctr">
-                    <a:solidFill>
-                      <a:srgbClr val="FFFFFF"/>
-                    </a:solidFill>
-                  </a:tcPr>
-                </a:tc>
-                <a:tc>
-                  <a:txBody>
-                    <a:bodyPr/>
-                    <a:lstStyle/>
-                    <a:p>
-                      <a:pPr algn="ctr"/>
-                      <a:r>
-                        <a:rPr sz="950">
-                          <a:solidFill>
-                            <a:srgbClr val="12151A"/>
-                          </a:solidFill>
-                          <a:latin typeface="맑은 고딕"/>
-                          <a:ea typeface="맑은 고딕"/>
-                          <a:cs typeface="맑은 고딕"/>
-                        </a:rPr>
-                        <a:t>성거읍</a:t>
-                      </a:r>
-                    </a:p>
-                  </a:txBody>
-                  <a:tcPr anchor="ctr">
-                    <a:solidFill>
-                      <a:srgbClr val="FFFFFF"/>
-                    </a:solidFill>
-                  </a:tcPr>
-                </a:tc>
-                <a:tc>
-                  <a:txBody>
-                    <a:bodyPr/>
-                    <a:lstStyle/>
-                    <a:p>
-                      <a:pPr algn="ctr"/>
-                      <a:r>
-                        <a:rPr sz="950">
-                          <a:solidFill>
-                            <a:srgbClr val="12151A"/>
-                          </a:solidFill>
-                          <a:latin typeface="맑은 고딕"/>
-                          <a:ea typeface="맑은 고딕"/>
-                          <a:cs typeface="맑은 고딕"/>
-                        </a:rPr>
-                        <a:t>복지</a:t>
-                      </a:r>
-                    </a:p>
-                  </a:txBody>
-                  <a:tcPr anchor="ctr">
-                    <a:solidFill>
-                      <a:srgbClr val="FFFFFF"/>
-                    </a:solidFill>
-                  </a:tcPr>
-                </a:tc>
-                <a:tc>
-                  <a:txBody>
-                    <a:bodyPr/>
-                    <a:lstStyle/>
-                    <a:p>
-                      <a:pPr algn="ctr"/>
-                      <a:r>
-                        <a:rPr sz="950">
-                          <a:solidFill>
-                            <a:srgbClr val="12151A"/>
-                          </a:solidFill>
-                          <a:latin typeface="맑은 고딕"/>
-                          <a:ea typeface="맑은 고딕"/>
-                          <a:cs typeface="맑은 고딕"/>
-                        </a:rPr>
-                        <a:t>4,078</a:t>
-                      </a:r>
-                    </a:p>
-                  </a:txBody>
-                  <a:tcPr anchor="ctr">
-                    <a:solidFill>
-                      <a:srgbClr val="FFFFFF"/>
-                    </a:solidFill>
-                  </a:tcPr>
-                </a:tc>
-                <a:tc>
-                  <a:txBody>
-                    <a:bodyPr/>
-                    <a:lstStyle/>
-                    <a:p>
-                      <a:pPr algn="ctr"/>
-                      <a:r>
-                        <a:rPr sz="950">
-                          <a:solidFill>
-                            <a:srgbClr val="12151A"/>
-                          </a:solidFill>
-                          <a:latin typeface="맑은 고딕"/>
-                          <a:ea typeface="맑은 고딕"/>
-                          <a:cs typeface="맑은 고딕"/>
-                        </a:rPr>
-                        <a:t>+1.3%p</a:t>
-                      </a:r>
-                    </a:p>
-                  </a:txBody>
-                  <a:tcPr anchor="ctr">
-                    <a:solidFill>
-                      <a:srgbClr val="FFFFFF"/>
-                    </a:solidFill>
-                  </a:tcPr>
-                </a:tc>
-              </a:tr>
-              <a:tr h="306324">
-                <a:tc>
-                  <a:txBody>
-                    <a:bodyPr/>
-                    <a:lstStyle/>
-                    <a:p>
-                      <a:pPr algn="l"/>
-                      <a:r>
-                        <a:rPr sz="950">
-                          <a:solidFill>
-                            <a:srgbClr val="12151A"/>
-                          </a:solidFill>
-                          <a:latin typeface="맑은 고딕"/>
-                          <a:ea typeface="맑은 고딕"/>
-                          <a:cs typeface="맑은 고딕"/>
-                        </a:rPr>
-                        <a:t>3</a:t>
-                      </a:r>
-                    </a:p>
-                  </a:txBody>
-                  <a:tcPr anchor="ctr">
-                    <a:solidFill>
-                      <a:srgbClr val="FFFFFF"/>
-                    </a:solidFill>
-                  </a:tcPr>
-                </a:tc>
-                <a:tc>
-                  <a:txBody>
-                    <a:bodyPr/>
-                    <a:lstStyle/>
-                    <a:p>
-                      <a:pPr algn="ctr"/>
-                      <a:r>
-                        <a:rPr sz="950">
-                          <a:solidFill>
-                            <a:srgbClr val="12151A"/>
-                          </a:solidFill>
-                          <a:latin typeface="맑은 고딕"/>
-                          <a:ea typeface="맑은 고딕"/>
-                          <a:cs typeface="맑은 고딕"/>
-                        </a:rPr>
-                        <a:t>성남면</a:t>
-                      </a:r>
-                    </a:p>
-                  </a:txBody>
-                  <a:tcPr anchor="ctr">
-                    <a:solidFill>
-                      <a:srgbClr val="FFFFFF"/>
-                    </a:solidFill>
-                  </a:tcPr>
-                </a:tc>
-                <a:tc>
-                  <a:txBody>
-                    <a:bodyPr/>
-                    <a:lstStyle/>
-                    <a:p>
-                      <a:pPr algn="ctr"/>
-                      <a:r>
-                        <a:rPr sz="950">
-                          <a:solidFill>
-                            <a:srgbClr val="12151A"/>
-                          </a:solidFill>
-                          <a:latin typeface="맑은 고딕"/>
-                          <a:ea typeface="맑은 고딕"/>
-                          <a:cs typeface="맑은 고딕"/>
-                        </a:rPr>
-                        <a:t>복지</a:t>
-                      </a:r>
-                    </a:p>
-                  </a:txBody>
-                  <a:tcPr anchor="ctr">
-                    <a:solidFill>
-                      <a:srgbClr val="FFFFFF"/>
-                    </a:solidFill>
-                  </a:tcPr>
-                </a:tc>
-                <a:tc>
-                  <a:txBody>
-                    <a:bodyPr/>
-                    <a:lstStyle/>
-                    <a:p>
-                      <a:pPr algn="ctr"/>
-                      <a:r>
-                        <a:rPr sz="950">
-                          <a:solidFill>
-                            <a:srgbClr val="12151A"/>
-                          </a:solidFill>
-                          <a:latin typeface="맑은 고딕"/>
-                          <a:ea typeface="맑은 고딕"/>
-                          <a:cs typeface="맑은 고딕"/>
-                        </a:rPr>
-                        <a:t>6,645</a:t>
-                      </a:r>
-                    </a:p>
-                  </a:txBody>
-                  <a:tcPr anchor="ctr">
-                    <a:solidFill>
-                      <a:srgbClr val="FFFFFF"/>
-                    </a:solidFill>
-                  </a:tcPr>
-                </a:tc>
-                <a:tc>
-                  <a:txBody>
-                    <a:bodyPr/>
-                    <a:lstStyle/>
-                    <a:p>
-                      <a:pPr algn="ctr"/>
-                      <a:r>
-                        <a:rPr sz="950">
-                          <a:solidFill>
-                            <a:srgbClr val="12151A"/>
-                          </a:solidFill>
-                          <a:latin typeface="맑은 고딕"/>
-                          <a:ea typeface="맑은 고딕"/>
-                          <a:cs typeface="맑은 고딕"/>
-                        </a:rPr>
-                        <a:t>+0.82%p</a:t>
-                      </a:r>
-                    </a:p>
-                  </a:txBody>
-                  <a:tcPr anchor="ctr">
-                    <a:solidFill>
-                      <a:srgbClr val="FFFFFF"/>
-                    </a:solidFill>
-                  </a:tcPr>
-                </a:tc>
-              </a:tr>
-              <a:tr h="306324">
-                <a:tc>
-                  <a:txBody>
-                    <a:bodyPr/>
-                    <a:lstStyle/>
-                    <a:p>
-                      <a:pPr algn="l"/>
-                      <a:r>
-                        <a:rPr sz="950">
-                          <a:solidFill>
-                            <a:srgbClr val="12151A"/>
-                          </a:solidFill>
-                          <a:latin typeface="맑은 고딕"/>
-                          <a:ea typeface="맑은 고딕"/>
-                          <a:cs typeface="맑은 고딕"/>
-                        </a:rPr>
-                        <a:t>4</a:t>
-                      </a:r>
-                    </a:p>
-                  </a:txBody>
-                  <a:tcPr anchor="ctr">
-                    <a:solidFill>
-                      <a:srgbClr val="FFFFFF"/>
-                    </a:solidFill>
-                  </a:tcPr>
-                </a:tc>
-                <a:tc>
-                  <a:txBody>
-                    <a:bodyPr/>
-                    <a:lstStyle/>
-                    <a:p>
-                      <a:pPr algn="ctr"/>
-                      <a:r>
-                        <a:rPr sz="950">
-                          <a:solidFill>
-                            <a:srgbClr val="12151A"/>
-                          </a:solidFill>
-                          <a:latin typeface="맑은 고딕"/>
-                          <a:ea typeface="맑은 고딕"/>
-                          <a:cs typeface="맑은 고딕"/>
-                        </a:rPr>
-                        <a:t>성환읍</a:t>
-                      </a:r>
-                    </a:p>
-                  </a:txBody>
-                  <a:tcPr anchor="ctr">
-                    <a:solidFill>
-                      <a:srgbClr val="FFFFFF"/>
-                    </a:solidFill>
-                  </a:tcPr>
-                </a:tc>
-                <a:tc>
-                  <a:txBody>
-                    <a:bodyPr/>
-                    <a:lstStyle/>
-                    <a:p>
-                      <a:pPr algn="ctr"/>
-                      <a:r>
-                        <a:rPr sz="950">
-                          <a:solidFill>
-                            <a:srgbClr val="12151A"/>
-                          </a:solidFill>
-                          <a:latin typeface="맑은 고딕"/>
-                          <a:ea typeface="맑은 고딕"/>
-                          <a:cs typeface="맑은 고딕"/>
-                        </a:rPr>
-                        <a:t>의료</a:t>
-                      </a:r>
-                    </a:p>
-                  </a:txBody>
-                  <a:tcPr anchor="ctr">
-                    <a:solidFill>
-                      <a:srgbClr val="FFFFFF"/>
-                    </a:solidFill>
-                  </a:tcPr>
-                </a:tc>
-                <a:tc>
-                  <a:txBody>
-                    <a:bodyPr/>
-                    <a:lstStyle/>
-                    <a:p>
-                      <a:pPr algn="ctr"/>
-                      <a:r>
-                        <a:rPr sz="950">
-                          <a:solidFill>
-                            <a:srgbClr val="12151A"/>
-                          </a:solidFill>
-                          <a:latin typeface="맑은 고딕"/>
-                          <a:ea typeface="맑은 고딕"/>
-                          <a:cs typeface="맑은 고딕"/>
-                        </a:rPr>
-                        <a:t>1,689</a:t>
-                      </a:r>
-                    </a:p>
-                  </a:txBody>
-                  <a:tcPr anchor="ctr">
-                    <a:solidFill>
-                      <a:srgbClr val="FFFFFF"/>
-                    </a:solidFill>
-                  </a:tcPr>
-                </a:tc>
-                <a:tc>
-                  <a:txBody>
-                    <a:bodyPr/>
-                    <a:lstStyle/>
-                    <a:p>
-                      <a:pPr algn="ctr"/>
-                      <a:r>
-                        <a:rPr sz="950">
-                          <a:solidFill>
-                            <a:srgbClr val="12151A"/>
-                          </a:solidFill>
-                          <a:latin typeface="맑은 고딕"/>
-                          <a:ea typeface="맑은 고딕"/>
-                          <a:cs typeface="맑은 고딕"/>
-                        </a:rPr>
-                        <a:t>+0.59%p</a:t>
-                      </a:r>
-                    </a:p>
-                  </a:txBody>
-                  <a:tcPr anchor="ctr">
-                    <a:solidFill>
-                      <a:srgbClr val="FFFFFF"/>
-                    </a:solidFill>
-                  </a:tcPr>
-                </a:tc>
-              </a:tr>
-              <a:tr h="306324">
-                <a:tc>
-                  <a:txBody>
-                    <a:bodyPr/>
-                    <a:lstStyle/>
-                    <a:p>
-                      <a:pPr algn="l"/>
-                      <a:r>
-                        <a:rPr sz="950">
-                          <a:solidFill>
-                            <a:srgbClr val="12151A"/>
-                          </a:solidFill>
-                          <a:latin typeface="맑은 고딕"/>
-                          <a:ea typeface="맑은 고딕"/>
-                          <a:cs typeface="맑은 고딕"/>
-                        </a:rPr>
-                        <a:t>5</a:t>
-                      </a:r>
-                    </a:p>
-                  </a:txBody>
-                  <a:tcPr anchor="ctr">
-                    <a:solidFill>
-                      <a:srgbClr val="FFFFFF"/>
-                    </a:solidFill>
-                  </a:tcPr>
-                </a:tc>
-                <a:tc>
-                  <a:txBody>
-                    <a:bodyPr/>
-                    <a:lstStyle/>
-                    <a:p>
-                      <a:pPr algn="ctr"/>
-                      <a:r>
-                        <a:rPr sz="950">
-                          <a:solidFill>
-                            <a:srgbClr val="12151A"/>
-                          </a:solidFill>
-                          <a:latin typeface="맑은 고딕"/>
-                          <a:ea typeface="맑은 고딕"/>
-                          <a:cs typeface="맑은 고딕"/>
-                        </a:rPr>
-                        <a:t>성남면</a:t>
-                      </a:r>
-                    </a:p>
-                  </a:txBody>
-                  <a:tcPr anchor="ctr">
-                    <a:solidFill>
-                      <a:srgbClr val="FFFFFF"/>
-                    </a:solidFill>
-                  </a:tcPr>
-                </a:tc>
-                <a:tc>
-                  <a:txBody>
-                    <a:bodyPr/>
-                    <a:lstStyle/>
-                    <a:p>
-                      <a:pPr algn="ctr"/>
-                      <a:r>
-                        <a:rPr sz="950">
-                          <a:solidFill>
-                            <a:srgbClr val="12151A"/>
-                          </a:solidFill>
-                          <a:latin typeface="맑은 고딕"/>
-                          <a:ea typeface="맑은 고딕"/>
-                          <a:cs typeface="맑은 고딕"/>
-                        </a:rPr>
-                        <a:t>의료</a:t>
-                      </a:r>
-                    </a:p>
-                  </a:txBody>
-                  <a:tcPr anchor="ctr">
-                    <a:solidFill>
-                      <a:srgbClr val="FFFFFF"/>
-                    </a:solidFill>
-                  </a:tcPr>
-                </a:tc>
-                <a:tc>
-                  <a:txBody>
-                    <a:bodyPr/>
-                    <a:lstStyle/>
-                    <a:p>
-                      <a:pPr algn="ctr"/>
-                      <a:r>
-                        <a:rPr sz="950">
-                          <a:solidFill>
-                            <a:srgbClr val="12151A"/>
-                          </a:solidFill>
-                          <a:latin typeface="맑은 고딕"/>
-                          <a:ea typeface="맑은 고딕"/>
-                          <a:cs typeface="맑은 고딕"/>
-                        </a:rPr>
-                        <a:t>4,415</a:t>
-                      </a:r>
-                    </a:p>
-                  </a:txBody>
-                  <a:tcPr anchor="ctr">
-                    <a:solidFill>
-                      <a:srgbClr val="FFFFFF"/>
-                    </a:solidFill>
-                  </a:tcPr>
-                </a:tc>
-                <a:tc>
-                  <a:txBody>
-                    <a:bodyPr/>
-                    <a:lstStyle/>
-                    <a:p>
-                      <a:pPr algn="ctr"/>
-                      <a:r>
-                        <a:rPr sz="950">
-                          <a:solidFill>
-                            <a:srgbClr val="12151A"/>
-                          </a:solidFill>
-                          <a:latin typeface="맑은 고딕"/>
-                          <a:ea typeface="맑은 고딕"/>
-                          <a:cs typeface="맑은 고딕"/>
-                        </a:rPr>
-                        <a:t>+0.53%p</a:t>
-                      </a:r>
-                    </a:p>
-                  </a:txBody>
-                  <a:tcPr anchor="ctr">
-                    <a:solidFill>
-                      <a:srgbClr val="FFFFFF"/>
-                    </a:solidFill>
-                  </a:tcPr>
-                </a:tc>
-              </a:tr>
-              <a:tr h="306324">
-                <a:tc>
-                  <a:txBody>
-                    <a:bodyPr/>
-                    <a:lstStyle/>
-                    <a:p>
-                      <a:pPr algn="l"/>
-                      <a:r>
-                        <a:rPr sz="950">
-                          <a:solidFill>
-                            <a:srgbClr val="12151A"/>
-                          </a:solidFill>
-                          <a:latin typeface="맑은 고딕"/>
-                          <a:ea typeface="맑은 고딕"/>
-                          <a:cs typeface="맑은 고딕"/>
-                        </a:rPr>
-                        <a:t>6</a:t>
-                      </a:r>
-                    </a:p>
-                  </a:txBody>
-                  <a:tcPr anchor="ctr">
-                    <a:solidFill>
-                      <a:srgbClr val="FFFFFF"/>
-                    </a:solidFill>
-                  </a:tcPr>
-                </a:tc>
-                <a:tc>
-                  <a:txBody>
-                    <a:bodyPr/>
-                    <a:lstStyle/>
-                    <a:p>
-                      <a:pPr algn="ctr"/>
-                      <a:r>
-                        <a:rPr sz="950">
-                          <a:solidFill>
-                            <a:srgbClr val="12151A"/>
-                          </a:solidFill>
-                          <a:latin typeface="맑은 고딕"/>
-                          <a:ea typeface="맑은 고딕"/>
-                          <a:cs typeface="맑은 고딕"/>
-                        </a:rPr>
-                        <a:t>성환읍</a:t>
-                      </a:r>
-                    </a:p>
-                  </a:txBody>
-                  <a:tcPr anchor="ctr">
-                    <a:solidFill>
-                      <a:srgbClr val="FFFFFF"/>
-                    </a:solidFill>
-                  </a:tcPr>
-                </a:tc>
-                <a:tc>
-                  <a:txBody>
-                    <a:bodyPr/>
-                    <a:lstStyle/>
-                    <a:p>
-                      <a:pPr algn="ctr"/>
-                      <a:r>
-                        <a:rPr sz="950">
-                          <a:solidFill>
-                            <a:srgbClr val="12151A"/>
-                          </a:solidFill>
-                          <a:latin typeface="맑은 고딕"/>
-                          <a:ea typeface="맑은 고딕"/>
-                          <a:cs typeface="맑은 고딕"/>
-                        </a:rPr>
-                        <a:t>의료</a:t>
-                      </a:r>
-                    </a:p>
-                  </a:txBody>
-                  <a:tcPr anchor="ctr">
-                    <a:solidFill>
-                      <a:srgbClr val="FFFFFF"/>
-                    </a:solidFill>
-                  </a:tcPr>
-                </a:tc>
-                <a:tc>
-                  <a:txBody>
-                    <a:bodyPr/>
-                    <a:lstStyle/>
-                    <a:p>
-                      <a:pPr algn="ctr"/>
-                      <a:r>
-                        <a:rPr sz="950">
-                          <a:solidFill>
-                            <a:srgbClr val="12151A"/>
-                          </a:solidFill>
-                          <a:latin typeface="맑은 고딕"/>
-                          <a:ea typeface="맑은 고딕"/>
-                          <a:cs typeface="맑은 고딕"/>
-                        </a:rPr>
-                        <a:t>1,501</a:t>
-                      </a:r>
-                    </a:p>
-                  </a:txBody>
-                  <a:tcPr anchor="ctr">
-                    <a:solidFill>
-                      <a:srgbClr val="FFFFFF"/>
-                    </a:solidFill>
-                  </a:tcPr>
-                </a:tc>
-                <a:tc>
-                  <a:txBody>
-                    <a:bodyPr/>
-                    <a:lstStyle/>
-                    <a:p>
-                      <a:pPr algn="ctr"/>
-                      <a:r>
-                        <a:rPr sz="950">
-                          <a:solidFill>
-                            <a:srgbClr val="12151A"/>
-                          </a:solidFill>
-                          <a:latin typeface="맑은 고딕"/>
-                          <a:ea typeface="맑은 고딕"/>
-                          <a:cs typeface="맑은 고딕"/>
-                        </a:rPr>
-                        <a:t>+0.41%p</a:t>
-                      </a:r>
-                    </a:p>
-                  </a:txBody>
-                  <a:tcPr anchor="ctr">
-                    <a:solidFill>
-                      <a:srgbClr val="FFFFFF"/>
-                    </a:solidFill>
-                  </a:tcPr>
-                </a:tc>
-              </a:tr>
-              <a:tr h="306324">
-                <a:tc>
-                  <a:txBody>
-                    <a:bodyPr/>
-                    <a:lstStyle/>
-                    <a:p>
-                      <a:pPr algn="l"/>
-                      <a:r>
-                        <a:rPr sz="950">
-                          <a:solidFill>
-                            <a:srgbClr val="12151A"/>
-                          </a:solidFill>
-                          <a:latin typeface="맑은 고딕"/>
-                          <a:ea typeface="맑은 고딕"/>
-                          <a:cs typeface="맑은 고딕"/>
-                        </a:rPr>
-                        <a:t>7</a:t>
-                      </a:r>
-                    </a:p>
-                  </a:txBody>
-                  <a:tcPr anchor="ctr">
-                    <a:solidFill>
-                      <a:srgbClr val="FFFFFF"/>
-                    </a:solidFill>
-                  </a:tcPr>
-                </a:tc>
-                <a:tc>
-                  <a:txBody>
-                    <a:bodyPr/>
-                    <a:lstStyle/>
-                    <a:p>
-                      <a:pPr algn="ctr"/>
-                      <a:r>
-                        <a:rPr sz="950">
-                          <a:solidFill>
-                            <a:srgbClr val="12151A"/>
-                          </a:solidFill>
-                          <a:latin typeface="맑은 고딕"/>
-                          <a:ea typeface="맑은 고딕"/>
-                          <a:cs typeface="맑은 고딕"/>
-                        </a:rPr>
-                        <a:t>북면</a:t>
-                      </a:r>
-                    </a:p>
-                  </a:txBody>
-                  <a:tcPr anchor="ctr">
-                    <a:solidFill>
-                      <a:srgbClr val="FFFFFF"/>
-                    </a:solidFill>
-                  </a:tcPr>
-                </a:tc>
-                <a:tc>
-                  <a:txBody>
-                    <a:bodyPr/>
-                    <a:lstStyle/>
-                    <a:p>
-                      <a:pPr algn="ctr"/>
-                      <a:r>
-                        <a:rPr sz="950">
-                          <a:solidFill>
-                            <a:srgbClr val="12151A"/>
-                          </a:solidFill>
-                          <a:latin typeface="맑은 고딕"/>
-                          <a:ea typeface="맑은 고딕"/>
-                          <a:cs typeface="맑은 고딕"/>
-                        </a:rPr>
-                        <a:t>의료</a:t>
-                      </a:r>
-                    </a:p>
-                  </a:txBody>
-                  <a:tcPr anchor="ctr">
-                    <a:solidFill>
-                      <a:srgbClr val="FFFFFF"/>
-                    </a:solidFill>
-                  </a:tcPr>
-                </a:tc>
-                <a:tc>
-                  <a:txBody>
-                    <a:bodyPr/>
-                    <a:lstStyle/>
-                    <a:p>
-                      <a:pPr algn="ctr"/>
-                      <a:r>
-                        <a:rPr sz="950">
-                          <a:solidFill>
-                            <a:srgbClr val="12151A"/>
-                          </a:solidFill>
-                          <a:latin typeface="맑은 고딕"/>
-                          <a:ea typeface="맑은 고딕"/>
-                          <a:cs typeface="맑은 고딕"/>
-                        </a:rPr>
-                        <a:t>763</a:t>
-                      </a:r>
-                    </a:p>
-                  </a:txBody>
-                  <a:tcPr anchor="ctr">
-                    <a:solidFill>
-                      <a:srgbClr val="FFFFFF"/>
-                    </a:solidFill>
-                  </a:tcPr>
-                </a:tc>
-                <a:tc>
-                  <a:txBody>
-                    <a:bodyPr/>
-                    <a:lstStyle/>
-                    <a:p>
-                      <a:pPr algn="ctr"/>
-                      <a:r>
-                        <a:rPr sz="950">
-                          <a:solidFill>
-                            <a:srgbClr val="12151A"/>
-                          </a:solidFill>
-                          <a:latin typeface="맑은 고딕"/>
-                          <a:ea typeface="맑은 고딕"/>
-                          <a:cs typeface="맑은 고딕"/>
-                        </a:rPr>
-                        <a:t>+0.37%p</a:t>
-                      </a:r>
-                    </a:p>
-                  </a:txBody>
-                  <a:tcPr anchor="ctr">
-                    <a:solidFill>
-                      <a:srgbClr val="FFFFFF"/>
-                    </a:solidFill>
-                  </a:tcPr>
-                </a:tc>
-              </a:tr>
-              <a:tr h="306324">
-                <a:tc>
-                  <a:txBody>
-                    <a:bodyPr/>
-                    <a:lstStyle/>
-                    <a:p>
-                      <a:pPr algn="l"/>
-                      <a:r>
-                        <a:rPr sz="950">
-                          <a:solidFill>
-                            <a:srgbClr val="12151A"/>
-                          </a:solidFill>
-                          <a:latin typeface="맑은 고딕"/>
-                          <a:ea typeface="맑은 고딕"/>
-                          <a:cs typeface="맑은 고딕"/>
-                        </a:rPr>
-                        <a:t>8</a:t>
-                      </a:r>
-                    </a:p>
-                  </a:txBody>
-                  <a:tcPr anchor="ctr">
-                    <a:solidFill>
-                      <a:srgbClr val="FFFFFF"/>
-                    </a:solidFill>
-                  </a:tcPr>
-                </a:tc>
-                <a:tc>
-                  <a:txBody>
-                    <a:bodyPr/>
-                    <a:lstStyle/>
-                    <a:p>
-                      <a:pPr algn="ctr"/>
-                      <a:r>
-                        <a:rPr sz="950">
-                          <a:solidFill>
-                            <a:srgbClr val="12151A"/>
-                          </a:solidFill>
-                          <a:latin typeface="맑은 고딕"/>
-                          <a:ea typeface="맑은 고딕"/>
-                          <a:cs typeface="맑은 고딕"/>
-                        </a:rPr>
-                        <a:t>풍세면</a:t>
-                      </a:r>
-                    </a:p>
-                  </a:txBody>
-                  <a:tcPr anchor="ctr">
-                    <a:solidFill>
-                      <a:srgbClr val="FFFFFF"/>
-                    </a:solidFill>
-                  </a:tcPr>
-                </a:tc>
-                <a:tc>
-                  <a:txBody>
-                    <a:bodyPr/>
-                    <a:lstStyle/>
-                    <a:p>
-                      <a:pPr algn="ctr"/>
-                      <a:r>
-                        <a:rPr sz="950">
-                          <a:solidFill>
-                            <a:srgbClr val="12151A"/>
-                          </a:solidFill>
-                          <a:latin typeface="맑은 고딕"/>
-                          <a:ea typeface="맑은 고딕"/>
-                          <a:cs typeface="맑은 고딕"/>
-                        </a:rPr>
-                        <a:t>의료</a:t>
-                      </a:r>
-                    </a:p>
-                  </a:txBody>
-                  <a:tcPr anchor="ctr">
-                    <a:solidFill>
-                      <a:srgbClr val="FFFFFF"/>
-                    </a:solidFill>
-                  </a:tcPr>
-                </a:tc>
-                <a:tc>
-                  <a:txBody>
-                    <a:bodyPr/>
-                    <a:lstStyle/>
-                    <a:p>
-                      <a:pPr algn="ctr"/>
-                      <a:r>
-                        <a:rPr sz="950">
-                          <a:solidFill>
-                            <a:srgbClr val="12151A"/>
-                          </a:solidFill>
-                          <a:latin typeface="맑은 고딕"/>
-                          <a:ea typeface="맑은 고딕"/>
-                          <a:cs typeface="맑은 고딕"/>
-                        </a:rPr>
-                        <a:t>1,003</a:t>
-                      </a:r>
-                    </a:p>
-                  </a:txBody>
-                  <a:tcPr anchor="ctr">
-                    <a:solidFill>
-                      <a:srgbClr val="FFFFFF"/>
-                    </a:solidFill>
-                  </a:tcPr>
-                </a:tc>
-                <a:tc>
-                  <a:txBody>
-                    <a:bodyPr/>
-                    <a:lstStyle/>
-                    <a:p>
-                      <a:pPr algn="ctr"/>
-                      <a:r>
-                        <a:rPr sz="950">
-                          <a:solidFill>
-                            <a:srgbClr val="12151A"/>
-                          </a:solidFill>
-                          <a:latin typeface="맑은 고딕"/>
-                          <a:ea typeface="맑은 고딕"/>
-                          <a:cs typeface="맑은 고딕"/>
-                        </a:rPr>
-                        <a:t>+0.36%p</a:t>
-                      </a:r>
-                    </a:p>
-                  </a:txBody>
-                  <a:tcPr anchor="ctr">
-                    <a:solidFill>
-                      <a:srgbClr val="FFFFFF"/>
-                    </a:solidFill>
-                  </a:tcPr>
-                </a:tc>
-              </a:tr>
-              <a:tr h="306324">
-                <a:tc>
-                  <a:txBody>
-                    <a:bodyPr/>
-                    <a:lstStyle/>
-                    <a:p>
-                      <a:pPr algn="l"/>
-                      <a:r>
-                        <a:rPr sz="950">
-                          <a:solidFill>
-                            <a:srgbClr val="12151A"/>
-                          </a:solidFill>
-                          <a:latin typeface="맑은 고딕"/>
-                          <a:ea typeface="맑은 고딕"/>
-                          <a:cs typeface="맑은 고딕"/>
-                        </a:rPr>
-                        <a:t>9</a:t>
-                      </a:r>
-                    </a:p>
-                  </a:txBody>
-                  <a:tcPr anchor="ctr">
-                    <a:solidFill>
-                      <a:srgbClr val="FFFFFF"/>
-                    </a:solidFill>
-                  </a:tcPr>
-                </a:tc>
-                <a:tc>
-                  <a:txBody>
-                    <a:bodyPr/>
-                    <a:lstStyle/>
-                    <a:p>
-                      <a:pPr algn="ctr"/>
-                      <a:r>
-                        <a:rPr sz="950">
-                          <a:solidFill>
-                            <a:srgbClr val="12151A"/>
-                          </a:solidFill>
-                          <a:latin typeface="맑은 고딕"/>
-                          <a:ea typeface="맑은 고딕"/>
-                          <a:cs typeface="맑은 고딕"/>
-                        </a:rPr>
-                        <a:t>입장면</a:t>
-                      </a:r>
-                    </a:p>
-                  </a:txBody>
-                  <a:tcPr anchor="ctr">
-                    <a:solidFill>
-                      <a:srgbClr val="FFFFFF"/>
-                    </a:solidFill>
-                  </a:tcPr>
-                </a:tc>
-                <a:tc>
-                  <a:txBody>
-                    <a:bodyPr/>
-                    <a:lstStyle/>
-                    <a:p>
-                      <a:pPr algn="ctr"/>
-                      <a:r>
-                        <a:rPr sz="950">
-                          <a:solidFill>
-                            <a:srgbClr val="12151A"/>
-                          </a:solidFill>
-                          <a:latin typeface="맑은 고딕"/>
-                          <a:ea typeface="맑은 고딕"/>
-                          <a:cs typeface="맑은 고딕"/>
-                        </a:rPr>
-                        <a:t>보육</a:t>
-                      </a:r>
-                    </a:p>
-                  </a:txBody>
-                  <a:tcPr anchor="ctr">
-                    <a:solidFill>
-                      <a:srgbClr val="FFFFFF"/>
-                    </a:solidFill>
-                  </a:tcPr>
-                </a:tc>
-                <a:tc>
-                  <a:txBody>
-                    <a:bodyPr/>
-                    <a:lstStyle/>
-                    <a:p>
-                      <a:pPr algn="ctr"/>
-                      <a:r>
-                        <a:rPr sz="950">
-                          <a:solidFill>
-                            <a:srgbClr val="12151A"/>
-                          </a:solidFill>
-                          <a:latin typeface="맑은 고딕"/>
-                          <a:ea typeface="맑은 고딕"/>
-                          <a:cs typeface="맑은 고딕"/>
-                        </a:rPr>
-                        <a:t>1,626</a:t>
-                      </a:r>
-                    </a:p>
-                  </a:txBody>
-                  <a:tcPr anchor="ctr">
-                    <a:solidFill>
-                      <a:srgbClr val="FFFFFF"/>
-                    </a:solidFill>
-                  </a:tcPr>
-                </a:tc>
-                <a:tc>
-                  <a:txBody>
-                    <a:bodyPr/>
-                    <a:lstStyle/>
-                    <a:p>
-                      <a:pPr algn="ctr"/>
-                      <a:r>
-                        <a:rPr sz="950">
-                          <a:solidFill>
-                            <a:srgbClr val="12151A"/>
-                          </a:solidFill>
-                          <a:latin typeface="맑은 고딕"/>
-                          <a:ea typeface="맑은 고딕"/>
-                          <a:cs typeface="맑은 고딕"/>
-                        </a:rPr>
-                        <a:t>+0.35%p</a:t>
-                      </a:r>
-                    </a:p>
-                  </a:txBody>
-                  <a:tcPr anchor="ctr">
-                    <a:solidFill>
-                      <a:srgbClr val="FFFFFF"/>
-                    </a:solidFill>
-                  </a:tcPr>
-                </a:tc>
-              </a:tr>
-              <a:tr h="306324">
-                <a:tc>
-                  <a:txBody>
-                    <a:bodyPr/>
-                    <a:lstStyle/>
-                    <a:p>
-                      <a:pPr algn="l"/>
-                      <a:r>
-                        <a:rPr sz="950">
-                          <a:solidFill>
-                            <a:srgbClr val="12151A"/>
-                          </a:solidFill>
-                          <a:latin typeface="맑은 고딕"/>
-                          <a:ea typeface="맑은 고딕"/>
-                          <a:cs typeface="맑은 고딕"/>
-                        </a:rPr>
-                        <a:t>10</a:t>
-                      </a:r>
-                    </a:p>
-                  </a:txBody>
-                  <a:tcPr anchor="ctr">
-                    <a:solidFill>
-                      <a:srgbClr val="FFFFFF"/>
-                    </a:solidFill>
-                  </a:tcPr>
-                </a:tc>
-                <a:tc>
-                  <a:txBody>
-                    <a:bodyPr/>
-                    <a:lstStyle/>
-                    <a:p>
-                      <a:pPr algn="ctr"/>
-                      <a:r>
-                        <a:rPr sz="950">
-                          <a:solidFill>
-                            <a:srgbClr val="12151A"/>
-                          </a:solidFill>
-                          <a:latin typeface="맑은 고딕"/>
-                          <a:ea typeface="맑은 고딕"/>
-                          <a:cs typeface="맑은 고딕"/>
-                        </a:rPr>
-                        <a:t>북면</a:t>
-                      </a:r>
-                    </a:p>
-                  </a:txBody>
-                  <a:tcPr anchor="ctr">
-                    <a:solidFill>
-                      <a:srgbClr val="FFFFFF"/>
-                    </a:solidFill>
-                  </a:tcPr>
-                </a:tc>
-                <a:tc>
-                  <a:txBody>
-                    <a:bodyPr/>
-                    <a:lstStyle/>
-                    <a:p>
-                      <a:pPr algn="ctr"/>
-                      <a:r>
-                        <a:rPr sz="950">
-                          <a:solidFill>
-                            <a:srgbClr val="12151A"/>
-                          </a:solidFill>
-                          <a:latin typeface="맑은 고딕"/>
-                          <a:ea typeface="맑은 고딕"/>
-                          <a:cs typeface="맑은 고딕"/>
-                        </a:rPr>
-                        <a:t>보육</a:t>
-                      </a:r>
-                    </a:p>
-                  </a:txBody>
-                  <a:tcPr anchor="ctr">
-                    <a:solidFill>
-                      <a:srgbClr val="FFFFFF"/>
-                    </a:solidFill>
-                  </a:tcPr>
-                </a:tc>
-                <a:tc>
-                  <a:txBody>
-                    <a:bodyPr/>
-                    <a:lstStyle/>
-                    <a:p>
-                      <a:pPr algn="ctr"/>
-                      <a:r>
-                        <a:rPr sz="950">
-                          <a:solidFill>
-                            <a:srgbClr val="12151A"/>
-                          </a:solidFill>
-                          <a:latin typeface="맑은 고딕"/>
-                          <a:ea typeface="맑은 고딕"/>
-                          <a:cs typeface="맑은 고딕"/>
-                        </a:rPr>
-                        <a:t>1,177</a:t>
-                      </a:r>
-                    </a:p>
-                  </a:txBody>
-                  <a:tcPr anchor="ctr">
-                    <a:solidFill>
-                      <a:srgbClr val="FFFFFF"/>
-                    </a:solidFill>
-                  </a:tcPr>
-                </a:tc>
-                <a:tc>
-                  <a:txBody>
-                    <a:bodyPr/>
-                    <a:lstStyle/>
-                    <a:p>
-                      <a:pPr algn="ctr"/>
-                      <a:r>
-                        <a:rPr sz="950">
-                          <a:solidFill>
-                            <a:srgbClr val="12151A"/>
-                          </a:solidFill>
-                          <a:latin typeface="맑은 고딕"/>
-                          <a:ea typeface="맑은 고딕"/>
-                          <a:cs typeface="맑은 고딕"/>
-                        </a:rPr>
-                        <a:t>+0.35%p</a:t>
-                      </a:r>
-                    </a:p>
-                  </a:txBody>
-                  <a:tcPr anchor="ctr">
-                    <a:solidFill>
-                      <a:srgbClr val="FFFFFF"/>
-                    </a:solidFill>
-                  </a:tcPr>
-                </a:tc>
-              </a:tr>
-            </a:tbl>
-          </a:graphicData>
-        </a:graphic>
-      </p:graphicFrame>
+              <a:t>설계와 코드는 완성되어 있고, 자료가 들어오면 즉시 산출됩니다.</a:t>
+            </a:r>
+          </a:p>
+        </p:txBody>
+      </p:sp>
+      <p:sp>
+        <p:nvSpPr>
+          <p:cNvPr id="7" name="TextBox 6"/>
+          <p:cNvSpPr txBox="1"/>
+          <p:nvPr/>
+        </p:nvSpPr>
+        <p:spPr>
+          <a:xfrm>
+            <a:off x="978407" y="3017520"/>
+            <a:ext cx="10424160" cy="640080"/>
+          </a:xfrm>
+          <a:prstGeom prst="rect">
+            <a:avLst/>
+          </a:prstGeom>
+          <a:noFill/>
+        </p:spPr>
+        <p:txBody>
+          <a:bodyPr wrap="square" lIns="0" rIns="0" tIns="0" bIns="0">
+            <a:spAutoFit/>
+          </a:bodyPr>
+          <a:lstStyle/>
+          <a:p>
+            <a:pPr algn="l">
+              <a:lnSpc>
+                <a:spcPct val="150000"/>
+              </a:lnSpc>
+            </a:pPr>
+            <a:r>
+              <a:rPr sz="1250" b="0">
+                <a:solidFill>
+                  <a:srgbClr val="52514E"/>
+                </a:solidFill>
+                <a:latin typeface="맑은 고딕"/>
+                <a:ea typeface="맑은 고딕"/>
+                <a:cs typeface="맑은 고딕"/>
+              </a:rPr>
+              <a:t>필요한 자료: 소상공인 상가(상권)정보 또는 공공데이터포털 생활SOC 표준데이터(위경도 포함)</a:t>
+            </a:r>
+          </a:p>
+          <a:p>
+            <a:pPr algn="l">
+              <a:lnSpc>
+                <a:spcPct val="150000"/>
+              </a:lnSpc>
+              <a:spcBef>
+                <a:spcPts val="0"/>
+              </a:spcBef>
+            </a:pPr>
+            <a:r>
+              <a:rPr sz="1250" b="0">
+                <a:solidFill>
+                  <a:srgbClr val="52514E"/>
+                </a:solidFill>
+                <a:latin typeface="맑은 고딕"/>
+                <a:ea typeface="맑은 고딕"/>
+                <a:cs typeface="맑은 고딕"/>
+              </a:rPr>
+              <a:t>산출물: 순위 · 생활권 · 시설유형 · 새로 닿는 인구 · 커버리지 개선폭이 담긴 표와 지도</a:t>
+            </a:r>
+          </a:p>
+        </p:txBody>
+      </p:sp>
       <p:sp>
         <p:nvSpPr>
           <p:cNvPr id="8" name="TextBox 7"/>
@@ -10167,7 +8822,7 @@
                 <a:ea typeface="맑은 고딕"/>
                 <a:cs typeface="맑은 고딕"/>
               </a:rPr>
-              <a:t>FINDING · 06</a:t>
+              <a:t>FOR WHOM</a:t>
             </a:r>
           </a:p>
         </p:txBody>
@@ -10208,7 +8863,7 @@
                 <a:ea typeface="맑은 고딕"/>
                 <a:cs typeface="맑은 고딕"/>
               </a:rPr>
-              <a:t>어디서 멈춰도 근거가 남는다</a:t>
+              <a:t>결국, 이런 분들께 닿았으면 합니다</a:t>
             </a:r>
           </a:p>
         </p:txBody>
@@ -10249,69 +8904,21 @@
                 <a:ea typeface="맑은 고딕"/>
                 <a:cs typeface="맑은 고딕"/>
               </a:rPr>
-              <a:t>한계효용 체감 곡선이 있으면 예산이 깎여도 '몇 개소까지가 합리적인가'를 답할 수 있다.</a:t>
-            </a:r>
-          </a:p>
-        </p:txBody>
-      </p:sp>
-      <p:pic>
-        <p:nvPicPr>
-          <p:cNvPr id="5" name="Picture 4" descr="08_커버리지_곡선.png"/>
-          <p:cNvPicPr>
-            <a:picLocks noChangeAspect="1"/>
-          </p:cNvPicPr>
-          <p:nvPr/>
-        </p:nvPicPr>
-        <p:blipFill>
-          <a:blip r:embed="rId2"/>
-          <a:stretch>
-            <a:fillRect/>
-          </a:stretch>
-        </p:blipFill>
-        <p:spPr>
-          <a:xfrm>
-            <a:off x="2014907" y="2212848"/>
-            <a:ext cx="3870601" cy="3200400"/>
-          </a:xfrm>
-          <a:prstGeom prst="rect">
-            <a:avLst/>
-          </a:prstGeom>
-        </p:spPr>
-      </p:pic>
-      <p:pic>
-        <p:nvPicPr>
-          <p:cNvPr id="6" name="Picture 5" descr="06_SOC_사각지대.png"/>
-          <p:cNvPicPr>
-            <a:picLocks noChangeAspect="1"/>
-          </p:cNvPicPr>
-          <p:nvPr/>
-        </p:nvPicPr>
-        <p:blipFill>
-          <a:blip r:embed="rId3"/>
-          <a:stretch>
-            <a:fillRect/>
-          </a:stretch>
-        </p:blipFill>
-        <p:spPr>
-          <a:xfrm>
-            <a:off x="7516368" y="2265192"/>
-            <a:ext cx="4023360" cy="3095710"/>
-          </a:xfrm>
-          <a:prstGeom prst="rect">
-            <a:avLst/>
-          </a:prstGeom>
-        </p:spPr>
-      </p:pic>
-      <p:sp>
-        <p:nvSpPr>
-          <p:cNvPr id="7" name="Rounded Rectangle 6"/>
+              <a:t>지수와 모델은 수단일 뿐입니다. 저희가 계속 떠올린 것은 아래 네 분의 하루였습니다.</a:t>
+            </a:r>
+          </a:p>
+        </p:txBody>
+      </p:sp>
+      <p:sp>
+        <p:nvSpPr>
+          <p:cNvPr id="5" name="Rounded Rectangle 4"/>
           <p:cNvSpPr/>
           <p:nvPr/>
         </p:nvSpPr>
         <p:spPr>
           <a:xfrm>
-            <a:off x="658368" y="5577840"/>
-            <a:ext cx="10874959" cy="749808"/>
+            <a:off x="658368" y="2286000"/>
+            <a:ext cx="5257800" cy="1371600"/>
           </a:xfrm>
           <a:prstGeom prst="roundRect">
             <a:avLst>
@@ -10319,7 +8926,51 @@
             </a:avLst>
           </a:prstGeom>
           <a:solidFill>
-            <a:srgbClr val="F6F7F9"/>
+            <a:srgbClr val="FFFFFF"/>
+          </a:solidFill>
+          <a:ln w="12700">
+            <a:solidFill>
+              <a:srgbClr val="E4E7EC"/>
+            </a:solidFill>
+          </a:ln>
+          <a:effectLst/>
+        </p:spPr>
+        <p:style>
+          <a:lnRef idx="1">
+            <a:schemeClr val="accent1"/>
+          </a:lnRef>
+          <a:fillRef idx="3">
+            <a:schemeClr val="accent1"/>
+          </a:fillRef>
+          <a:effectRef idx="2">
+            <a:schemeClr val="accent1"/>
+          </a:effectRef>
+          <a:fontRef idx="minor">
+            <a:schemeClr val="lt1"/>
+          </a:fontRef>
+        </p:style>
+        <p:txBody>
+          <a:bodyPr rtlCol="0" anchor="ctr"/>
+          <a:lstStyle/>
+          <a:p/>
+        </p:txBody>
+      </p:sp>
+      <p:sp>
+        <p:nvSpPr>
+          <p:cNvPr id="6" name="Rectangle 5"/>
+          <p:cNvSpPr/>
+          <p:nvPr/>
+        </p:nvSpPr>
+        <p:spPr>
+          <a:xfrm>
+            <a:off x="658368" y="2286000"/>
+            <a:ext cx="68580" cy="1371600"/>
+          </a:xfrm>
+          <a:prstGeom prst="rect">
+            <a:avLst/>
+          </a:prstGeom>
+          <a:solidFill>
+            <a:srgbClr val="2A78D6"/>
           </a:solidFill>
           <a:ln>
             <a:noFill/>
@@ -10348,14 +8999,55 @@
       </p:sp>
       <p:sp>
         <p:nvSpPr>
+          <p:cNvPr id="7" name="TextBox 6"/>
+          <p:cNvSpPr txBox="1"/>
+          <p:nvPr/>
+        </p:nvSpPr>
+        <p:spPr>
+          <a:xfrm>
+            <a:off x="914400" y="2468880"/>
+            <a:ext cx="4663440" cy="274320"/>
+          </a:xfrm>
+          <a:prstGeom prst="rect">
+            <a:avLst/>
+          </a:prstGeom>
+          <a:noFill/>
+        </p:spPr>
+        <p:txBody>
+          <a:bodyPr wrap="square" lIns="0" rIns="0" tIns="0" bIns="0">
+            <a:spAutoFit/>
+          </a:bodyPr>
+          <a:lstStyle/>
+          <a:p>
+            <a:pPr algn="l">
+              <a:lnSpc>
+                <a:spcPct val="135000"/>
+              </a:lnSpc>
+            </a:pPr>
+            <a:r>
+              <a:rPr sz="1350" b="1">
+                <a:solidFill>
+                  <a:srgbClr val="2A78D6"/>
+                </a:solidFill>
+                <a:latin typeface="맑은 고딕"/>
+                <a:ea typeface="맑은 고딕"/>
+                <a:cs typeface="맑은 고딕"/>
+              </a:rPr>
+              <a:t>원도심에 오래 사신 어르신</a:t>
+            </a:r>
+          </a:p>
+        </p:txBody>
+      </p:sp>
+      <p:sp>
+        <p:nvSpPr>
           <p:cNvPr id="8" name="TextBox 7"/>
           <p:cNvSpPr txBox="1"/>
           <p:nvPr/>
         </p:nvSpPr>
         <p:spPr>
           <a:xfrm>
-            <a:off x="932688" y="5760720"/>
-            <a:ext cx="10515600" cy="457200"/>
+            <a:off x="914400" y="2834640"/>
+            <a:ext cx="4663440" cy="731520"/>
           </a:xfrm>
           <a:prstGeom prst="rect">
             <a:avLst/>
@@ -10374,15 +9066,15 @@
               </a:lnSpc>
             </a:pPr>
             <a:r>
-              <a:rPr sz="1200" b="0">
-                <a:solidFill>
-                  <a:srgbClr val="12151A"/>
-                </a:solidFill>
-                <a:latin typeface="맑은 고딕"/>
-                <a:ea typeface="맑은 고딕"/>
-                <a:cs typeface="맑은 고딕"/>
-              </a:rPr>
-              <a:t>실무적 가치 — 예산 심의에서 가장 자주 나오는 질문은 '이걸 왜 이 순서로 하느냐'와 '반만 하면 어떻게 되느냐'다.</a:t>
+              <a:rPr sz="1100" b="0">
+                <a:solidFill>
+                  <a:srgbClr val="52514E"/>
+                </a:solidFill>
+                <a:latin typeface="맑은 고딕"/>
+                <a:ea typeface="맑은 고딕"/>
+                <a:cs typeface="맑은 고딕"/>
+              </a:rPr>
+              <a:t>24 일대는 젊은 이웃이 하나둘 떠나고 상가도 비었습니다.</a:t>
             </a:r>
           </a:p>
           <a:p>
@@ -10395,6 +9087,664 @@
               </a:spcBef>
             </a:pPr>
             <a:r>
+              <a:rPr sz="1100" b="0">
+                <a:solidFill>
+                  <a:srgbClr val="52514E"/>
+                </a:solidFill>
+                <a:latin typeface="맑은 고딕"/>
+                <a:ea typeface="맑은 고딕"/>
+                <a:cs typeface="맑은 고딕"/>
+              </a:rPr>
+              <a:t>가게와 병원이 멀어질수록, 걸어서 하실 수 있는 일이 줄어듭니다.</a:t>
+            </a:r>
+          </a:p>
+        </p:txBody>
+      </p:sp>
+      <p:sp>
+        <p:nvSpPr>
+          <p:cNvPr id="9" name="Rounded Rectangle 8"/>
+          <p:cNvSpPr/>
+          <p:nvPr/>
+        </p:nvSpPr>
+        <p:spPr>
+          <a:xfrm>
+            <a:off x="6236207" y="2286000"/>
+            <a:ext cx="5257800" cy="1371600"/>
+          </a:xfrm>
+          <a:prstGeom prst="roundRect">
+            <a:avLst>
+              <a:gd name="adj" fmla="val 6000"/>
+            </a:avLst>
+          </a:prstGeom>
+          <a:solidFill>
+            <a:srgbClr val="FFFFFF"/>
+          </a:solidFill>
+          <a:ln w="12700">
+            <a:solidFill>
+              <a:srgbClr val="E4E7EC"/>
+            </a:solidFill>
+          </a:ln>
+          <a:effectLst/>
+        </p:spPr>
+        <p:style>
+          <a:lnRef idx="1">
+            <a:schemeClr val="accent1"/>
+          </a:lnRef>
+          <a:fillRef idx="3">
+            <a:schemeClr val="accent1"/>
+          </a:fillRef>
+          <a:effectRef idx="2">
+            <a:schemeClr val="accent1"/>
+          </a:effectRef>
+          <a:fontRef idx="minor">
+            <a:schemeClr val="lt1"/>
+          </a:fontRef>
+        </p:style>
+        <p:txBody>
+          <a:bodyPr rtlCol="0" anchor="ctr"/>
+          <a:lstStyle/>
+          <a:p/>
+        </p:txBody>
+      </p:sp>
+      <p:sp>
+        <p:nvSpPr>
+          <p:cNvPr id="10" name="Rectangle 9"/>
+          <p:cNvSpPr/>
+          <p:nvPr/>
+        </p:nvSpPr>
+        <p:spPr>
+          <a:xfrm>
+            <a:off x="6236207" y="2286000"/>
+            <a:ext cx="68580" cy="1371600"/>
+          </a:xfrm>
+          <a:prstGeom prst="rect">
+            <a:avLst/>
+          </a:prstGeom>
+          <a:solidFill>
+            <a:srgbClr val="8A7FB5"/>
+          </a:solidFill>
+          <a:ln>
+            <a:noFill/>
+          </a:ln>
+          <a:effectLst/>
+        </p:spPr>
+        <p:style>
+          <a:lnRef idx="1">
+            <a:schemeClr val="accent1"/>
+          </a:lnRef>
+          <a:fillRef idx="3">
+            <a:schemeClr val="accent1"/>
+          </a:fillRef>
+          <a:effectRef idx="2">
+            <a:schemeClr val="accent1"/>
+          </a:effectRef>
+          <a:fontRef idx="minor">
+            <a:schemeClr val="lt1"/>
+          </a:fontRef>
+        </p:style>
+        <p:txBody>
+          <a:bodyPr rtlCol="0" anchor="ctr"/>
+          <a:lstStyle/>
+          <a:p/>
+        </p:txBody>
+      </p:sp>
+      <p:sp>
+        <p:nvSpPr>
+          <p:cNvPr id="11" name="TextBox 10"/>
+          <p:cNvSpPr txBox="1"/>
+          <p:nvPr/>
+        </p:nvSpPr>
+        <p:spPr>
+          <a:xfrm>
+            <a:off x="6492240" y="2468880"/>
+            <a:ext cx="4663440" cy="274320"/>
+          </a:xfrm>
+          <a:prstGeom prst="rect">
+            <a:avLst/>
+          </a:prstGeom>
+          <a:noFill/>
+        </p:spPr>
+        <p:txBody>
+          <a:bodyPr wrap="square" lIns="0" rIns="0" tIns="0" bIns="0">
+            <a:spAutoFit/>
+          </a:bodyPr>
+          <a:lstStyle/>
+          <a:p>
+            <a:pPr algn="l">
+              <a:lnSpc>
+                <a:spcPct val="135000"/>
+              </a:lnSpc>
+            </a:pPr>
+            <a:r>
+              <a:rPr sz="1350" b="1">
+                <a:solidFill>
+                  <a:srgbClr val="8A7FB5"/>
+                </a:solidFill>
+                <a:latin typeface="맑은 고딕"/>
+                <a:ea typeface="맑은 고딕"/>
+                <a:cs typeface="맑은 고딕"/>
+              </a:rPr>
+              <a:t>농촌면에서 아이 키우시는 부모님</a:t>
+            </a:r>
+          </a:p>
+        </p:txBody>
+      </p:sp>
+      <p:sp>
+        <p:nvSpPr>
+          <p:cNvPr id="12" name="TextBox 11"/>
+          <p:cNvSpPr txBox="1"/>
+          <p:nvPr/>
+        </p:nvSpPr>
+        <p:spPr>
+          <a:xfrm>
+            <a:off x="6492240" y="2834640"/>
+            <a:ext cx="4663440" cy="731520"/>
+          </a:xfrm>
+          <a:prstGeom prst="rect">
+            <a:avLst/>
+          </a:prstGeom>
+          <a:noFill/>
+        </p:spPr>
+        <p:txBody>
+          <a:bodyPr wrap="square" lIns="0" rIns="0" tIns="0" bIns="0">
+            <a:spAutoFit/>
+          </a:bodyPr>
+          <a:lstStyle/>
+          <a:p>
+            <a:pPr algn="l">
+              <a:lnSpc>
+                <a:spcPct val="150000"/>
+              </a:lnSpc>
+            </a:pPr>
+            <a:r>
+              <a:rPr sz="1100" b="0">
+                <a:solidFill>
+                  <a:srgbClr val="52514E"/>
+                </a:solidFill>
+                <a:latin typeface="맑은 고딕"/>
+                <a:ea typeface="맑은 고딕"/>
+                <a:cs typeface="맑은 고딕"/>
+              </a:rPr>
+              <a:t>고령 비율이 가장 높은 곳은 23으로 54%였습니다.</a:t>
+            </a:r>
+          </a:p>
+          <a:p>
+            <a:pPr algn="l">
+              <a:lnSpc>
+                <a:spcPct val="150000"/>
+              </a:lnSpc>
+              <a:spcBef>
+                <a:spcPts val="0"/>
+              </a:spcBef>
+            </a:pPr>
+            <a:r>
+              <a:rPr sz="1100" b="0">
+                <a:solidFill>
+                  <a:srgbClr val="52514E"/>
+                </a:solidFill>
+                <a:latin typeface="맑은 고딕"/>
+                <a:ea typeface="맑은 고딕"/>
+                <a:cs typeface="맑은 고딕"/>
+              </a:rPr>
+              <a:t>어린이집·도서관이 가까이 없으면 그 부담은 온전히 가정의 몫이 됩니다.</a:t>
+            </a:r>
+          </a:p>
+        </p:txBody>
+      </p:sp>
+      <p:sp>
+        <p:nvSpPr>
+          <p:cNvPr id="13" name="Rounded Rectangle 12"/>
+          <p:cNvSpPr/>
+          <p:nvPr/>
+        </p:nvSpPr>
+        <p:spPr>
+          <a:xfrm>
+            <a:off x="658368" y="3858768"/>
+            <a:ext cx="5257800" cy="1371600"/>
+          </a:xfrm>
+          <a:prstGeom prst="roundRect">
+            <a:avLst>
+              <a:gd name="adj" fmla="val 6000"/>
+            </a:avLst>
+          </a:prstGeom>
+          <a:solidFill>
+            <a:srgbClr val="FFFFFF"/>
+          </a:solidFill>
+          <a:ln w="12700">
+            <a:solidFill>
+              <a:srgbClr val="E4E7EC"/>
+            </a:solidFill>
+          </a:ln>
+          <a:effectLst/>
+        </p:spPr>
+        <p:style>
+          <a:lnRef idx="1">
+            <a:schemeClr val="accent1"/>
+          </a:lnRef>
+          <a:fillRef idx="3">
+            <a:schemeClr val="accent1"/>
+          </a:fillRef>
+          <a:effectRef idx="2">
+            <a:schemeClr val="accent1"/>
+          </a:effectRef>
+          <a:fontRef idx="minor">
+            <a:schemeClr val="lt1"/>
+          </a:fontRef>
+        </p:style>
+        <p:txBody>
+          <a:bodyPr rtlCol="0" anchor="ctr"/>
+          <a:lstStyle/>
+          <a:p/>
+        </p:txBody>
+      </p:sp>
+      <p:sp>
+        <p:nvSpPr>
+          <p:cNvPr id="14" name="Rectangle 13"/>
+          <p:cNvSpPr/>
+          <p:nvPr/>
+        </p:nvSpPr>
+        <p:spPr>
+          <a:xfrm>
+            <a:off x="658368" y="3858768"/>
+            <a:ext cx="68580" cy="1371600"/>
+          </a:xfrm>
+          <a:prstGeom prst="rect">
+            <a:avLst/>
+          </a:prstGeom>
+          <a:solidFill>
+            <a:srgbClr val="EDA100"/>
+          </a:solidFill>
+          <a:ln>
+            <a:noFill/>
+          </a:ln>
+          <a:effectLst/>
+        </p:spPr>
+        <p:style>
+          <a:lnRef idx="1">
+            <a:schemeClr val="accent1"/>
+          </a:lnRef>
+          <a:fillRef idx="3">
+            <a:schemeClr val="accent1"/>
+          </a:fillRef>
+          <a:effectRef idx="2">
+            <a:schemeClr val="accent1"/>
+          </a:effectRef>
+          <a:fontRef idx="minor">
+            <a:schemeClr val="lt1"/>
+          </a:fontRef>
+        </p:style>
+        <p:txBody>
+          <a:bodyPr rtlCol="0" anchor="ctr"/>
+          <a:lstStyle/>
+          <a:p/>
+        </p:txBody>
+      </p:sp>
+      <p:sp>
+        <p:nvSpPr>
+          <p:cNvPr id="15" name="TextBox 14"/>
+          <p:cNvSpPr txBox="1"/>
+          <p:nvPr/>
+        </p:nvSpPr>
+        <p:spPr>
+          <a:xfrm>
+            <a:off x="914400" y="4041648"/>
+            <a:ext cx="4663440" cy="274320"/>
+          </a:xfrm>
+          <a:prstGeom prst="rect">
+            <a:avLst/>
+          </a:prstGeom>
+          <a:noFill/>
+        </p:spPr>
+        <p:txBody>
+          <a:bodyPr wrap="square" lIns="0" rIns="0" tIns="0" bIns="0">
+            <a:spAutoFit/>
+          </a:bodyPr>
+          <a:lstStyle/>
+          <a:p>
+            <a:pPr algn="l">
+              <a:lnSpc>
+                <a:spcPct val="135000"/>
+              </a:lnSpc>
+            </a:pPr>
+            <a:r>
+              <a:rPr sz="1350" b="1">
+                <a:solidFill>
+                  <a:srgbClr val="EDA100"/>
+                </a:solidFill>
+                <a:latin typeface="맑은 고딕"/>
+                <a:ea typeface="맑은 고딕"/>
+                <a:cs typeface="맑은 고딕"/>
+              </a:rPr>
+              <a:t>원도심에서 가게를 지켜오신 상인</a:t>
+            </a:r>
+          </a:p>
+        </p:txBody>
+      </p:sp>
+      <p:sp>
+        <p:nvSpPr>
+          <p:cNvPr id="16" name="TextBox 15"/>
+          <p:cNvSpPr txBox="1"/>
+          <p:nvPr/>
+        </p:nvSpPr>
+        <p:spPr>
+          <a:xfrm>
+            <a:off x="914400" y="4407407"/>
+            <a:ext cx="4663440" cy="731520"/>
+          </a:xfrm>
+          <a:prstGeom prst="rect">
+            <a:avLst/>
+          </a:prstGeom>
+          <a:noFill/>
+        </p:spPr>
+        <p:txBody>
+          <a:bodyPr wrap="square" lIns="0" rIns="0" tIns="0" bIns="0">
+            <a:spAutoFit/>
+          </a:bodyPr>
+          <a:lstStyle/>
+          <a:p>
+            <a:pPr algn="l">
+              <a:lnSpc>
+                <a:spcPct val="150000"/>
+              </a:lnSpc>
+            </a:pPr>
+            <a:r>
+              <a:rPr sz="1100" b="0">
+                <a:solidFill>
+                  <a:srgbClr val="52514E"/>
+                </a:solidFill>
+                <a:latin typeface="맑은 고딕"/>
+                <a:ea typeface="맑은 고딕"/>
+                <a:cs typeface="맑은 고딕"/>
+              </a:rPr>
+              <a:t>오가는 분이 줄면 매출이 줄고, 문 닫는 가게가 늘면 오가는 분이 더 줍니다.</a:t>
+            </a:r>
+          </a:p>
+          <a:p>
+            <a:pPr algn="l">
+              <a:lnSpc>
+                <a:spcPct val="150000"/>
+              </a:lnSpc>
+              <a:spcBef>
+                <a:spcPts val="0"/>
+              </a:spcBef>
+            </a:pPr>
+            <a:r>
+              <a:rPr sz="1100" b="0">
+                <a:solidFill>
+                  <a:srgbClr val="52514E"/>
+                </a:solidFill>
+                <a:latin typeface="맑은 고딕"/>
+                <a:ea typeface="맑은 고딕"/>
+                <a:cs typeface="맑은 고딕"/>
+              </a:rPr>
+              <a:t>이 고리를 일찍 알아차릴 수 있다면, 도움드릴 방법도 더 많아집니다.</a:t>
+            </a:r>
+          </a:p>
+        </p:txBody>
+      </p:sp>
+      <p:sp>
+        <p:nvSpPr>
+          <p:cNvPr id="17" name="Rounded Rectangle 16"/>
+          <p:cNvSpPr/>
+          <p:nvPr/>
+        </p:nvSpPr>
+        <p:spPr>
+          <a:xfrm>
+            <a:off x="6236207" y="3858768"/>
+            <a:ext cx="5257800" cy="1371600"/>
+          </a:xfrm>
+          <a:prstGeom prst="roundRect">
+            <a:avLst>
+              <a:gd name="adj" fmla="val 6000"/>
+            </a:avLst>
+          </a:prstGeom>
+          <a:solidFill>
+            <a:srgbClr val="FFFFFF"/>
+          </a:solidFill>
+          <a:ln w="12700">
+            <a:solidFill>
+              <a:srgbClr val="E4E7EC"/>
+            </a:solidFill>
+          </a:ln>
+          <a:effectLst/>
+        </p:spPr>
+        <p:style>
+          <a:lnRef idx="1">
+            <a:schemeClr val="accent1"/>
+          </a:lnRef>
+          <a:fillRef idx="3">
+            <a:schemeClr val="accent1"/>
+          </a:fillRef>
+          <a:effectRef idx="2">
+            <a:schemeClr val="accent1"/>
+          </a:effectRef>
+          <a:fontRef idx="minor">
+            <a:schemeClr val="lt1"/>
+          </a:fontRef>
+        </p:style>
+        <p:txBody>
+          <a:bodyPr rtlCol="0" anchor="ctr"/>
+          <a:lstStyle/>
+          <a:p/>
+        </p:txBody>
+      </p:sp>
+      <p:sp>
+        <p:nvSpPr>
+          <p:cNvPr id="18" name="Rectangle 17"/>
+          <p:cNvSpPr/>
+          <p:nvPr/>
+        </p:nvSpPr>
+        <p:spPr>
+          <a:xfrm>
+            <a:off x="6236207" y="3858768"/>
+            <a:ext cx="68580" cy="1371600"/>
+          </a:xfrm>
+          <a:prstGeom prst="rect">
+            <a:avLst/>
+          </a:prstGeom>
+          <a:solidFill>
+            <a:srgbClr val="2A78D6"/>
+          </a:solidFill>
+          <a:ln>
+            <a:noFill/>
+          </a:ln>
+          <a:effectLst/>
+        </p:spPr>
+        <p:style>
+          <a:lnRef idx="1">
+            <a:schemeClr val="accent1"/>
+          </a:lnRef>
+          <a:fillRef idx="3">
+            <a:schemeClr val="accent1"/>
+          </a:fillRef>
+          <a:effectRef idx="2">
+            <a:schemeClr val="accent1"/>
+          </a:effectRef>
+          <a:fontRef idx="minor">
+            <a:schemeClr val="lt1"/>
+          </a:fontRef>
+        </p:style>
+        <p:txBody>
+          <a:bodyPr rtlCol="0" anchor="ctr"/>
+          <a:lstStyle/>
+          <a:p/>
+        </p:txBody>
+      </p:sp>
+      <p:sp>
+        <p:nvSpPr>
+          <p:cNvPr id="19" name="TextBox 18"/>
+          <p:cNvSpPr txBox="1"/>
+          <p:nvPr/>
+        </p:nvSpPr>
+        <p:spPr>
+          <a:xfrm>
+            <a:off x="6492240" y="4041648"/>
+            <a:ext cx="4663440" cy="274320"/>
+          </a:xfrm>
+          <a:prstGeom prst="rect">
+            <a:avLst/>
+          </a:prstGeom>
+          <a:noFill/>
+        </p:spPr>
+        <p:txBody>
+          <a:bodyPr wrap="square" lIns="0" rIns="0" tIns="0" bIns="0">
+            <a:spAutoFit/>
+          </a:bodyPr>
+          <a:lstStyle/>
+          <a:p>
+            <a:pPr algn="l">
+              <a:lnSpc>
+                <a:spcPct val="135000"/>
+              </a:lnSpc>
+            </a:pPr>
+            <a:r>
+              <a:rPr sz="1350" b="1">
+                <a:solidFill>
+                  <a:srgbClr val="2A78D6"/>
+                </a:solidFill>
+                <a:latin typeface="맑은 고딕"/>
+                <a:ea typeface="맑은 고딕"/>
+                <a:cs typeface="맑은 고딕"/>
+              </a:rPr>
+              <a:t>신도심에서 자리 잡은 이웃</a:t>
+            </a:r>
+          </a:p>
+        </p:txBody>
+      </p:sp>
+      <p:sp>
+        <p:nvSpPr>
+          <p:cNvPr id="20" name="TextBox 19"/>
+          <p:cNvSpPr txBox="1"/>
+          <p:nvPr/>
+        </p:nvSpPr>
+        <p:spPr>
+          <a:xfrm>
+            <a:off x="6492240" y="4407407"/>
+            <a:ext cx="4663440" cy="731520"/>
+          </a:xfrm>
+          <a:prstGeom prst="rect">
+            <a:avLst/>
+          </a:prstGeom>
+          <a:noFill/>
+        </p:spPr>
+        <p:txBody>
+          <a:bodyPr wrap="square" lIns="0" rIns="0" tIns="0" bIns="0">
+            <a:spAutoFit/>
+          </a:bodyPr>
+          <a:lstStyle/>
+          <a:p>
+            <a:pPr algn="l">
+              <a:lnSpc>
+                <a:spcPct val="150000"/>
+              </a:lnSpc>
+            </a:pPr>
+            <a:r>
+              <a:rPr sz="1100" b="0">
+                <a:solidFill>
+                  <a:srgbClr val="52514E"/>
+                </a:solidFill>
+                <a:latin typeface="맑은 고딕"/>
+                <a:ea typeface="맑은 고딕"/>
+                <a:cs typeface="맑은 고딕"/>
+              </a:rPr>
+              <a:t>지금 여건이 좋은 곳도 언젠가는 나이가 듭니다.</a:t>
+            </a:r>
+          </a:p>
+          <a:p>
+            <a:pPr algn="l">
+              <a:lnSpc>
+                <a:spcPct val="150000"/>
+              </a:lnSpc>
+              <a:spcBef>
+                <a:spcPts val="0"/>
+              </a:spcBef>
+            </a:pPr>
+            <a:r>
+              <a:rPr sz="1100" b="0">
+                <a:solidFill>
+                  <a:srgbClr val="52514E"/>
+                </a:solidFill>
+                <a:latin typeface="맑은 고딕"/>
+                <a:ea typeface="맑은 고딕"/>
+                <a:cs typeface="맑은 고딕"/>
+              </a:rPr>
+              <a:t>미리 살펴보는 습관은 결국 천안시민 모두를 위한 준비라고 생각합니다.</a:t>
+            </a:r>
+          </a:p>
+        </p:txBody>
+      </p:sp>
+      <p:sp>
+        <p:nvSpPr>
+          <p:cNvPr id="21" name="Rounded Rectangle 20"/>
+          <p:cNvSpPr/>
+          <p:nvPr/>
+        </p:nvSpPr>
+        <p:spPr>
+          <a:xfrm>
+            <a:off x="658368" y="5541264"/>
+            <a:ext cx="10874959" cy="786384"/>
+          </a:xfrm>
+          <a:prstGeom prst="roundRect">
+            <a:avLst>
+              <a:gd name="adj" fmla="val 6000"/>
+            </a:avLst>
+          </a:prstGeom>
+          <a:solidFill>
+            <a:srgbClr val="EFF7F3"/>
+          </a:solidFill>
+          <a:ln>
+            <a:noFill/>
+          </a:ln>
+          <a:effectLst/>
+        </p:spPr>
+        <p:style>
+          <a:lnRef idx="1">
+            <a:schemeClr val="accent1"/>
+          </a:lnRef>
+          <a:fillRef idx="3">
+            <a:schemeClr val="accent1"/>
+          </a:fillRef>
+          <a:effectRef idx="2">
+            <a:schemeClr val="accent1"/>
+          </a:effectRef>
+          <a:fontRef idx="minor">
+            <a:schemeClr val="lt1"/>
+          </a:fontRef>
+        </p:style>
+        <p:txBody>
+          <a:bodyPr rtlCol="0" anchor="ctr"/>
+          <a:lstStyle/>
+          <a:p/>
+        </p:txBody>
+      </p:sp>
+      <p:sp>
+        <p:nvSpPr>
+          <p:cNvPr id="22" name="TextBox 21"/>
+          <p:cNvSpPr txBox="1"/>
+          <p:nvPr/>
+        </p:nvSpPr>
+        <p:spPr>
+          <a:xfrm>
+            <a:off x="932688" y="5724144"/>
+            <a:ext cx="10515600" cy="457200"/>
+          </a:xfrm>
+          <a:prstGeom prst="rect">
+            <a:avLst/>
+          </a:prstGeom>
+          <a:noFill/>
+        </p:spPr>
+        <p:txBody>
+          <a:bodyPr wrap="square" lIns="0" rIns="0" tIns="0" bIns="0">
+            <a:spAutoFit/>
+          </a:bodyPr>
+          <a:lstStyle/>
+          <a:p>
+            <a:pPr algn="l">
+              <a:lnSpc>
+                <a:spcPct val="150000"/>
+              </a:lnSpc>
+            </a:pPr>
+            <a:r>
               <a:rPr sz="1200" b="0">
                 <a:solidFill>
                   <a:srgbClr val="12151A"/>
@@ -10403,14 +9753,35 @@
                 <a:ea typeface="맑은 고딕"/>
                 <a:cs typeface="맑은 고딕"/>
               </a:rPr>
-              <a:t>이 곡선은 두 질문에 동시에 답한다. 좌측 그림의 좌상단 영역(고령↑·SOC↓)이 최우선 사각지대다.</a:t>
-            </a:r>
-          </a:p>
-        </p:txBody>
-      </p:sp>
-      <p:sp>
-        <p:nvSpPr>
-          <p:cNvPr id="9" name="TextBox 8"/>
+              <a:t>저희는 천안시 사정을 현장에서 겪어보지 못한 참가자입니다. 다만 공개된 데이터로 할 수 있는 만큼은 성실하게 살펴보았습니다.</a:t>
+            </a:r>
+          </a:p>
+          <a:p>
+            <a:pPr algn="l">
+              <a:lnSpc>
+                <a:spcPct val="150000"/>
+              </a:lnSpc>
+              <a:spcBef>
+                <a:spcPts val="0"/>
+              </a:spcBef>
+            </a:pPr>
+            <a:r>
+              <a:rPr sz="1200" b="0">
+                <a:solidFill>
+                  <a:srgbClr val="12151A"/>
+                </a:solidFill>
+                <a:latin typeface="맑은 고딕"/>
+                <a:ea typeface="맑은 고딕"/>
+                <a:cs typeface="맑은 고딕"/>
+              </a:rPr>
+              <a:t>부족한 부분은 현장을 아시는 분들이 채워주시길 바라며, 이 자료가 그 논의의 출발점이 될 수 있다면 더 바랄 것이 없겠습니다.</a:t>
+            </a:r>
+          </a:p>
+        </p:txBody>
+      </p:sp>
+      <p:sp>
+        <p:nvSpPr>
+          <p:cNvPr id="23" name="TextBox 22"/>
           <p:cNvSpPr txBox="1"/>
           <p:nvPr/>
         </p:nvSpPr>
@@ -10451,7 +9822,7 @@
       </p:sp>
       <p:sp>
         <p:nvSpPr>
-          <p:cNvPr id="10" name="TextBox 9"/>
+          <p:cNvPr id="24" name="TextBox 23"/>
           <p:cNvSpPr txBox="1"/>
           <p:nvPr/>
         </p:nvSpPr>
@@ -10544,7 +9915,7 @@
                 <a:ea typeface="맑은 고딕"/>
                 <a:cs typeface="맑은 고딕"/>
               </a:rPr>
-              <a:t>FOR WHOM</a:t>
+              <a:t>APPLICATION</a:t>
             </a:r>
           </a:p>
         </p:txBody>
@@ -10585,7 +9956,7 @@
                 <a:ea typeface="맑은 고딕"/>
                 <a:cs typeface="맑은 고딕"/>
               </a:rPr>
-              <a:t>결국, 이런 분들께 닿았으면 합니다</a:t>
+              <a:t>실무에 이렇게 보탬이 되면 좋겠습니다</a:t>
             </a:r>
           </a:p>
         </p:txBody>
@@ -10626,7 +9997,7 @@
                 <a:ea typeface="맑은 고딕"/>
                 <a:cs typeface="맑은 고딕"/>
               </a:rPr>
-              <a:t>지수와 모델은 수단일 뿐입니다. 저희가 계속 떠올린 것은 아래 네 분의 하루였습니다.</a:t>
+              <a:t>따로 시간을 내어 다뤄야 하는 연구물이 아니라, 하시던 업무 곁에 놓고 참고하실 수 있는 자료로 준비했습니다.</a:t>
             </a:r>
           </a:p>
         </p:txBody>
@@ -10727,8 +10098,8 @@
         </p:nvSpPr>
         <p:spPr>
           <a:xfrm>
-            <a:off x="914400" y="2468880"/>
-            <a:ext cx="4663440" cy="274320"/>
+            <a:off x="914400" y="2450592"/>
+            <a:ext cx="2194560" cy="256032"/>
           </a:xfrm>
           <a:prstGeom prst="rect">
             <a:avLst/>
@@ -10747,48 +10118,89 @@
               </a:lnSpc>
             </a:pPr>
             <a:r>
+              <a:rPr sz="1250" b="1">
+                <a:solidFill>
+                  <a:srgbClr val="2A78D6"/>
+                </a:solidFill>
+                <a:latin typeface="맑은 고딕"/>
+                <a:ea typeface="맑은 고딕"/>
+                <a:cs typeface="맑은 고딕"/>
+              </a:rPr>
+              <a:t>도시재생 담당</a:t>
+            </a:r>
+          </a:p>
+        </p:txBody>
+      </p:sp>
+      <p:sp>
+        <p:nvSpPr>
+          <p:cNvPr id="8" name="TextBox 7"/>
+          <p:cNvSpPr txBox="1"/>
+          <p:nvPr/>
+        </p:nvSpPr>
+        <p:spPr>
+          <a:xfrm>
+            <a:off x="914400" y="2743200"/>
+            <a:ext cx="4663440" cy="256032"/>
+          </a:xfrm>
+          <a:prstGeom prst="rect">
+            <a:avLst/>
+          </a:prstGeom>
+          <a:noFill/>
+        </p:spPr>
+        <p:txBody>
+          <a:bodyPr wrap="square" lIns="0" rIns="0" tIns="0" bIns="0">
+            <a:spAutoFit/>
+          </a:bodyPr>
+          <a:lstStyle/>
+          <a:p>
+            <a:pPr algn="l">
+              <a:lnSpc>
+                <a:spcPct val="135000"/>
+              </a:lnSpc>
+            </a:pPr>
+            <a:r>
               <a:rPr sz="1350" b="1">
                 <a:solidFill>
-                  <a:srgbClr val="2A78D6"/>
-                </a:solidFill>
-                <a:latin typeface="맑은 고딕"/>
-                <a:ea typeface="맑은 고딕"/>
-                <a:cs typeface="맑은 고딕"/>
-              </a:rPr>
-              <a:t>원도심에 오래 사신 어르신</a:t>
-            </a:r>
-          </a:p>
-        </p:txBody>
-      </p:sp>
-      <p:sp>
-        <p:nvSpPr>
-          <p:cNvPr id="8" name="TextBox 7"/>
-          <p:cNvSpPr txBox="1"/>
-          <p:nvPr/>
-        </p:nvSpPr>
-        <p:spPr>
-          <a:xfrm>
-            <a:off x="914400" y="2834640"/>
-            <a:ext cx="4663440" cy="731520"/>
-          </a:xfrm>
-          <a:prstGeom prst="rect">
-            <a:avLst/>
-          </a:prstGeom>
-          <a:noFill/>
-        </p:spPr>
-        <p:txBody>
-          <a:bodyPr wrap="square" lIns="0" rIns="0" tIns="0" bIns="0">
-            <a:spAutoFit/>
-          </a:bodyPr>
-          <a:lstStyle/>
-          <a:p>
-            <a:pPr algn="l">
-              <a:lnSpc>
-                <a:spcPct val="150000"/>
-              </a:lnSpc>
-            </a:pPr>
-            <a:r>
-              <a:rPr sz="1100" b="0">
+                  <a:srgbClr val="12151A"/>
+                </a:solidFill>
+                <a:latin typeface="맑은 고딕"/>
+                <a:ea typeface="맑은 고딕"/>
+                <a:cs typeface="맑은 고딕"/>
+              </a:rPr>
+              <a:t>사업지 검토 · 공모 준비</a:t>
+            </a:r>
+          </a:p>
+        </p:txBody>
+      </p:sp>
+      <p:sp>
+        <p:nvSpPr>
+          <p:cNvPr id="9" name="TextBox 8"/>
+          <p:cNvSpPr txBox="1"/>
+          <p:nvPr/>
+        </p:nvSpPr>
+        <p:spPr>
+          <a:xfrm>
+            <a:off x="914400" y="3054096"/>
+            <a:ext cx="4663440" cy="548640"/>
+          </a:xfrm>
+          <a:prstGeom prst="rect">
+            <a:avLst/>
+          </a:prstGeom>
+          <a:noFill/>
+        </p:spPr>
+        <p:txBody>
+          <a:bodyPr wrap="square" lIns="0" rIns="0" tIns="0" bIns="0">
+            <a:spAutoFit/>
+          </a:bodyPr>
+          <a:lstStyle/>
+          <a:p>
+            <a:pPr algn="l">
+              <a:lnSpc>
+                <a:spcPct val="145000"/>
+              </a:lnSpc>
+            </a:pPr>
+            <a:r>
+              <a:rPr sz="1080" b="0">
                 <a:solidFill>
                   <a:srgbClr val="52514E"/>
                 </a:solidFill>
@@ -10796,20 +10208,20 @@
                 <a:ea typeface="맑은 고딕"/>
                 <a:cs typeface="맑은 고딕"/>
               </a:rPr>
-              <a:t>24 일대는 젊은 이웃이 하나둘 떠나고 상가도 비었습니다.</a:t>
-            </a:r>
-          </a:p>
-          <a:p>
-            <a:pPr algn="l">
-              <a:lnSpc>
-                <a:spcPct val="150000"/>
+              <a:t>지수가 낮은 곳과 3년 뒤 살펴볼 곳을 겹쳐 후보를 좁히실 때,</a:t>
+            </a:r>
+          </a:p>
+          <a:p>
+            <a:pPr algn="l">
+              <a:lnSpc>
+                <a:spcPct val="145000"/>
               </a:lnSpc>
               <a:spcBef>
                 <a:spcPts val="0"/>
               </a:spcBef>
             </a:pPr>
             <a:r>
-              <a:rPr sz="1100" b="0">
+              <a:rPr sz="1080" b="0">
                 <a:solidFill>
                   <a:srgbClr val="52514E"/>
                 </a:solidFill>
@@ -10817,14 +10229,14 @@
                 <a:ea typeface="맑은 고딕"/>
                 <a:cs typeface="맑은 고딕"/>
               </a:rPr>
-              <a:t>가게와 병원이 멀어질수록, 걸어서 하실 수 있는 일이 줄어듭니다.</a:t>
-            </a:r>
-          </a:p>
-        </p:txBody>
-      </p:sp>
-      <p:sp>
-        <p:nvSpPr>
-          <p:cNvPr id="9" name="Rounded Rectangle 8"/>
+              <a:t>공모의 '쇠퇴도 진단' 항목에 근거 수치로.</a:t>
+            </a:r>
+          </a:p>
+        </p:txBody>
+      </p:sp>
+      <p:sp>
+        <p:nvSpPr>
+          <p:cNvPr id="10" name="Rounded Rectangle 9"/>
           <p:cNvSpPr/>
           <p:nvPr/>
         </p:nvSpPr>
@@ -10870,7 +10282,7 @@
       </p:sp>
       <p:sp>
         <p:nvSpPr>
-          <p:cNvPr id="10" name="Rectangle 9"/>
+          <p:cNvPr id="11" name="Rectangle 10"/>
           <p:cNvSpPr/>
           <p:nvPr/>
         </p:nvSpPr>
@@ -10883,7 +10295,7 @@
             <a:avLst/>
           </a:prstGeom>
           <a:solidFill>
-            <a:srgbClr val="8A7FB5"/>
+            <a:srgbClr val="1BAF7A"/>
           </a:solidFill>
           <a:ln>
             <a:noFill/>
@@ -10912,14 +10324,14 @@
       </p:sp>
       <p:sp>
         <p:nvSpPr>
-          <p:cNvPr id="11" name="TextBox 10"/>
-          <p:cNvSpPr txBox="1"/>
-          <p:nvPr/>
-        </p:nvSpPr>
-        <p:spPr>
-          <a:xfrm>
-            <a:off x="6492240" y="2468880"/>
-            <a:ext cx="4663440" cy="274320"/>
+          <p:cNvPr id="12" name="TextBox 11"/>
+          <p:cNvSpPr txBox="1"/>
+          <p:nvPr/>
+        </p:nvSpPr>
+        <p:spPr>
+          <a:xfrm>
+            <a:off x="6492240" y="2450592"/>
+            <a:ext cx="2194560" cy="256032"/>
           </a:xfrm>
           <a:prstGeom prst="rect">
             <a:avLst/>
@@ -10938,48 +10350,89 @@
               </a:lnSpc>
             </a:pPr>
             <a:r>
+              <a:rPr sz="1250" b="1">
+                <a:solidFill>
+                  <a:srgbClr val="1BAF7A"/>
+                </a:solidFill>
+                <a:latin typeface="맑은 고딕"/>
+                <a:ea typeface="맑은 고딕"/>
+                <a:cs typeface="맑은 고딕"/>
+              </a:rPr>
+              <a:t>복지·보건 담당</a:t>
+            </a:r>
+          </a:p>
+        </p:txBody>
+      </p:sp>
+      <p:sp>
+        <p:nvSpPr>
+          <p:cNvPr id="13" name="TextBox 12"/>
+          <p:cNvSpPr txBox="1"/>
+          <p:nvPr/>
+        </p:nvSpPr>
+        <p:spPr>
+          <a:xfrm>
+            <a:off x="6492240" y="2743200"/>
+            <a:ext cx="4663440" cy="256032"/>
+          </a:xfrm>
+          <a:prstGeom prst="rect">
+            <a:avLst/>
+          </a:prstGeom>
+          <a:noFill/>
+        </p:spPr>
+        <p:txBody>
+          <a:bodyPr wrap="square" lIns="0" rIns="0" tIns="0" bIns="0">
+            <a:spAutoFit/>
+          </a:bodyPr>
+          <a:lstStyle/>
+          <a:p>
+            <a:pPr algn="l">
+              <a:lnSpc>
+                <a:spcPct val="135000"/>
+              </a:lnSpc>
+            </a:pPr>
+            <a:r>
               <a:rPr sz="1350" b="1">
                 <a:solidFill>
-                  <a:srgbClr val="8A7FB5"/>
-                </a:solidFill>
-                <a:latin typeface="맑은 고딕"/>
-                <a:ea typeface="맑은 고딕"/>
-                <a:cs typeface="맑은 고딕"/>
-              </a:rPr>
-              <a:t>농촌면에서 아이 키우시는 부모님</a:t>
-            </a:r>
-          </a:p>
-        </p:txBody>
-      </p:sp>
-      <p:sp>
-        <p:nvSpPr>
-          <p:cNvPr id="12" name="TextBox 11"/>
-          <p:cNvSpPr txBox="1"/>
-          <p:nvPr/>
-        </p:nvSpPr>
-        <p:spPr>
-          <a:xfrm>
-            <a:off x="6492240" y="2834640"/>
-            <a:ext cx="4663440" cy="731520"/>
-          </a:xfrm>
-          <a:prstGeom prst="rect">
-            <a:avLst/>
-          </a:prstGeom>
-          <a:noFill/>
-        </p:spPr>
-        <p:txBody>
-          <a:bodyPr wrap="square" lIns="0" rIns="0" tIns="0" bIns="0">
-            <a:spAutoFit/>
-          </a:bodyPr>
-          <a:lstStyle/>
-          <a:p>
-            <a:pPr algn="l">
-              <a:lnSpc>
-                <a:spcPct val="150000"/>
-              </a:lnSpc>
-            </a:pPr>
-            <a:r>
-              <a:rPr sz="1100" b="0">
+                  <a:srgbClr val="12151A"/>
+                </a:solidFill>
+                <a:latin typeface="맑은 고딕"/>
+                <a:ea typeface="맑은 고딕"/>
+                <a:cs typeface="맑은 고딕"/>
+              </a:rPr>
+              <a:t>생활시설 위치 검토</a:t>
+            </a:r>
+          </a:p>
+        </p:txBody>
+      </p:sp>
+      <p:sp>
+        <p:nvSpPr>
+          <p:cNvPr id="14" name="TextBox 13"/>
+          <p:cNvSpPr txBox="1"/>
+          <p:nvPr/>
+        </p:nvSpPr>
+        <p:spPr>
+          <a:xfrm>
+            <a:off x="6492240" y="3054096"/>
+            <a:ext cx="4663440" cy="548640"/>
+          </a:xfrm>
+          <a:prstGeom prst="rect">
+            <a:avLst/>
+          </a:prstGeom>
+          <a:noFill/>
+        </p:spPr>
+        <p:txBody>
+          <a:bodyPr wrap="square" lIns="0" rIns="0" tIns="0" bIns="0">
+            <a:spAutoFit/>
+          </a:bodyPr>
+          <a:lstStyle/>
+          <a:p>
+            <a:pPr algn="l">
+              <a:lnSpc>
+                <a:spcPct val="145000"/>
+              </a:lnSpc>
+            </a:pPr>
+            <a:r>
+              <a:rPr sz="1080" b="0">
                 <a:solidFill>
                   <a:srgbClr val="52514E"/>
                 </a:solidFill>
@@ -10987,20 +10440,20 @@
                 <a:ea typeface="맑은 고딕"/>
                 <a:cs typeface="맑은 고딕"/>
               </a:rPr>
-              <a:t>고령 비율이 가장 높은 곳은 22으로 54%였습니다.</a:t>
-            </a:r>
-          </a:p>
-          <a:p>
-            <a:pPr algn="l">
-              <a:lnSpc>
-                <a:spcPct val="150000"/>
+              <a:t>우선순위표의 좌표를 검토 후보 중 하나로,</a:t>
+            </a:r>
+          </a:p>
+          <a:p>
+            <a:pPr algn="l">
+              <a:lnSpc>
+                <a:spcPct val="145000"/>
               </a:lnSpc>
               <a:spcBef>
                 <a:spcPts val="0"/>
               </a:spcBef>
             </a:pPr>
             <a:r>
-              <a:rPr sz="1100" b="0">
+              <a:rPr sz="1080" b="0">
                 <a:solidFill>
                   <a:srgbClr val="52514E"/>
                 </a:solidFill>
@@ -11008,14 +10461,14 @@
                 <a:ea typeface="맑은 고딕"/>
                 <a:cs typeface="맑은 고딕"/>
               </a:rPr>
-              <a:t>어린이집·도서관이 가까이 없으면 그 부담은 온전히 가정의 몫이 됩니다.</a:t>
-            </a:r>
-          </a:p>
-        </p:txBody>
-      </p:sp>
-      <p:sp>
-        <p:nvSpPr>
-          <p:cNvPr id="13" name="Rounded Rectangle 12"/>
+              <a:t>왜 그 동네인지 설명하실 때 항목별 근거로.</a:t>
+            </a:r>
+          </a:p>
+        </p:txBody>
+      </p:sp>
+      <p:sp>
+        <p:nvSpPr>
+          <p:cNvPr id="15" name="Rounded Rectangle 14"/>
           <p:cNvSpPr/>
           <p:nvPr/>
         </p:nvSpPr>
@@ -11061,7 +10514,7 @@
       </p:sp>
       <p:sp>
         <p:nvSpPr>
-          <p:cNvPr id="14" name="Rectangle 13"/>
+          <p:cNvPr id="16" name="Rectangle 15"/>
           <p:cNvSpPr/>
           <p:nvPr/>
         </p:nvSpPr>
@@ -11103,14 +10556,14 @@
       </p:sp>
       <p:sp>
         <p:nvSpPr>
-          <p:cNvPr id="15" name="TextBox 14"/>
-          <p:cNvSpPr txBox="1"/>
-          <p:nvPr/>
-        </p:nvSpPr>
-        <p:spPr>
-          <a:xfrm>
-            <a:off x="914400" y="4041648"/>
-            <a:ext cx="4663440" cy="274320"/>
+          <p:cNvPr id="17" name="TextBox 16"/>
+          <p:cNvSpPr txBox="1"/>
+          <p:nvPr/>
+        </p:nvSpPr>
+        <p:spPr>
+          <a:xfrm>
+            <a:off x="914400" y="4023359"/>
+            <a:ext cx="2194560" cy="256032"/>
           </a:xfrm>
           <a:prstGeom prst="rect">
             <a:avLst/>
@@ -11129,48 +10582,89 @@
               </a:lnSpc>
             </a:pPr>
             <a:r>
+              <a:rPr sz="1250" b="1">
+                <a:solidFill>
+                  <a:srgbClr val="EDA100"/>
+                </a:solidFill>
+                <a:latin typeface="맑은 고딕"/>
+                <a:ea typeface="맑은 고딕"/>
+                <a:cs typeface="맑은 고딕"/>
+              </a:rPr>
+              <a:t>예산 담당</a:t>
+            </a:r>
+          </a:p>
+        </p:txBody>
+      </p:sp>
+      <p:sp>
+        <p:nvSpPr>
+          <p:cNvPr id="18" name="TextBox 17"/>
+          <p:cNvSpPr txBox="1"/>
+          <p:nvPr/>
+        </p:nvSpPr>
+        <p:spPr>
+          <a:xfrm>
+            <a:off x="914400" y="4315968"/>
+            <a:ext cx="4663440" cy="256032"/>
+          </a:xfrm>
+          <a:prstGeom prst="rect">
+            <a:avLst/>
+          </a:prstGeom>
+          <a:noFill/>
+        </p:spPr>
+        <p:txBody>
+          <a:bodyPr wrap="square" lIns="0" rIns="0" tIns="0" bIns="0">
+            <a:spAutoFit/>
+          </a:bodyPr>
+          <a:lstStyle/>
+          <a:p>
+            <a:pPr algn="l">
+              <a:lnSpc>
+                <a:spcPct val="135000"/>
+              </a:lnSpc>
+            </a:pPr>
+            <a:r>
               <a:rPr sz="1350" b="1">
                 <a:solidFill>
-                  <a:srgbClr val="EDA100"/>
-                </a:solidFill>
-                <a:latin typeface="맑은 고딕"/>
-                <a:ea typeface="맑은 고딕"/>
-                <a:cs typeface="맑은 고딕"/>
-              </a:rPr>
-              <a:t>원도심에서 가게를 지켜오신 상인</a:t>
-            </a:r>
-          </a:p>
-        </p:txBody>
-      </p:sp>
-      <p:sp>
-        <p:nvSpPr>
-          <p:cNvPr id="16" name="TextBox 15"/>
-          <p:cNvSpPr txBox="1"/>
-          <p:nvPr/>
-        </p:nvSpPr>
-        <p:spPr>
-          <a:xfrm>
-            <a:off x="914400" y="4407407"/>
-            <a:ext cx="4663440" cy="731520"/>
-          </a:xfrm>
-          <a:prstGeom prst="rect">
-            <a:avLst/>
-          </a:prstGeom>
-          <a:noFill/>
-        </p:spPr>
-        <p:txBody>
-          <a:bodyPr wrap="square" lIns="0" rIns="0" tIns="0" bIns="0">
-            <a:spAutoFit/>
-          </a:bodyPr>
-          <a:lstStyle/>
-          <a:p>
-            <a:pPr algn="l">
-              <a:lnSpc>
-                <a:spcPct val="150000"/>
-              </a:lnSpc>
-            </a:pPr>
-            <a:r>
-              <a:rPr sz="1100" b="0">
+                  <a:srgbClr val="12151A"/>
+                </a:solidFill>
+                <a:latin typeface="맑은 고딕"/>
+                <a:ea typeface="맑은 고딕"/>
+                <a:cs typeface="맑은 고딕"/>
+              </a:rPr>
+              <a:t>배분 검토 자료</a:t>
+            </a:r>
+          </a:p>
+        </p:txBody>
+      </p:sp>
+      <p:sp>
+        <p:nvSpPr>
+          <p:cNvPr id="19" name="TextBox 18"/>
+          <p:cNvSpPr txBox="1"/>
+          <p:nvPr/>
+        </p:nvSpPr>
+        <p:spPr>
+          <a:xfrm>
+            <a:off x="914400" y="4626864"/>
+            <a:ext cx="4663440" cy="548640"/>
+          </a:xfrm>
+          <a:prstGeom prst="rect">
+            <a:avLst/>
+          </a:prstGeom>
+          <a:noFill/>
+        </p:spPr>
+        <p:txBody>
+          <a:bodyPr wrap="square" lIns="0" rIns="0" tIns="0" bIns="0">
+            <a:spAutoFit/>
+          </a:bodyPr>
+          <a:lstStyle/>
+          <a:p>
+            <a:pPr algn="l">
+              <a:lnSpc>
+                <a:spcPct val="145000"/>
+              </a:lnSpc>
+            </a:pPr>
+            <a:r>
+              <a:rPr sz="1080" b="0">
                 <a:solidFill>
                   <a:srgbClr val="52514E"/>
                 </a:solidFill>
@@ -11178,20 +10672,20 @@
                 <a:ea typeface="맑은 고딕"/>
                 <a:cs typeface="맑은 고딕"/>
               </a:rPr>
-              <a:t>오가는 분이 줄면 매출이 줄고, 문 닫는 가게가 늘면 오가는 분이 더 줍니다.</a:t>
-            </a:r>
-          </a:p>
-          <a:p>
-            <a:pPr algn="l">
-              <a:lnSpc>
-                <a:spcPct val="150000"/>
+              <a:t>몇 개소까지면 어느 정도 효과인지 곡선으로 비교하실 때,</a:t>
+            </a:r>
+          </a:p>
+          <a:p>
+            <a:pPr algn="l">
+              <a:lnSpc>
+                <a:spcPct val="145000"/>
               </a:lnSpc>
               <a:spcBef>
                 <a:spcPts val="0"/>
               </a:spcBef>
             </a:pPr>
             <a:r>
-              <a:rPr sz="1100" b="0">
+              <a:rPr sz="1080" b="0">
                 <a:solidFill>
                   <a:srgbClr val="52514E"/>
                 </a:solidFill>
@@ -11199,14 +10693,14 @@
                 <a:ea typeface="맑은 고딕"/>
                 <a:cs typeface="맑은 고딕"/>
               </a:rPr>
-              <a:t>이 고리를 일찍 알아차릴 수 있다면, 도움드릴 방법도 더 많아집니다.</a:t>
-            </a:r>
-          </a:p>
-        </p:txBody>
-      </p:sp>
-      <p:sp>
-        <p:nvSpPr>
-          <p:cNvPr id="17" name="Rounded Rectangle 16"/>
+              <a:t>예산 조정이 필요할 때 판단의 참고로.</a:t>
+            </a:r>
+          </a:p>
+        </p:txBody>
+      </p:sp>
+      <p:sp>
+        <p:nvSpPr>
+          <p:cNvPr id="20" name="Rounded Rectangle 19"/>
           <p:cNvSpPr/>
           <p:nvPr/>
         </p:nvSpPr>
@@ -11252,7 +10746,7 @@
       </p:sp>
       <p:sp>
         <p:nvSpPr>
-          <p:cNvPr id="18" name="Rectangle 17"/>
+          <p:cNvPr id="21" name="Rectangle 20"/>
           <p:cNvSpPr/>
           <p:nvPr/>
         </p:nvSpPr>
@@ -11265,7 +10759,7 @@
             <a:avLst/>
           </a:prstGeom>
           <a:solidFill>
-            <a:srgbClr val="2A78D6"/>
+            <a:srgbClr val="4A3AA7"/>
           </a:solidFill>
           <a:ln>
             <a:noFill/>
@@ -11294,14 +10788,14 @@
       </p:sp>
       <p:sp>
         <p:nvSpPr>
-          <p:cNvPr id="19" name="TextBox 18"/>
-          <p:cNvSpPr txBox="1"/>
-          <p:nvPr/>
-        </p:nvSpPr>
-        <p:spPr>
-          <a:xfrm>
-            <a:off x="6492240" y="4041648"/>
-            <a:ext cx="4663440" cy="274320"/>
+          <p:cNvPr id="22" name="TextBox 21"/>
+          <p:cNvSpPr txBox="1"/>
+          <p:nvPr/>
+        </p:nvSpPr>
+        <p:spPr>
+          <a:xfrm>
+            <a:off x="6492240" y="4023359"/>
+            <a:ext cx="2194560" cy="256032"/>
           </a:xfrm>
           <a:prstGeom prst="rect">
             <a:avLst/>
@@ -11320,48 +10814,89 @@
               </a:lnSpc>
             </a:pPr>
             <a:r>
+              <a:rPr sz="1250" b="1">
+                <a:solidFill>
+                  <a:srgbClr val="4A3AA7"/>
+                </a:solidFill>
+                <a:latin typeface="맑은 고딕"/>
+                <a:ea typeface="맑은 고딕"/>
+                <a:cs typeface="맑은 고딕"/>
+              </a:rPr>
+              <a:t>기획·평가 담당</a:t>
+            </a:r>
+          </a:p>
+        </p:txBody>
+      </p:sp>
+      <p:sp>
+        <p:nvSpPr>
+          <p:cNvPr id="23" name="TextBox 22"/>
+          <p:cNvSpPr txBox="1"/>
+          <p:nvPr/>
+        </p:nvSpPr>
+        <p:spPr>
+          <a:xfrm>
+            <a:off x="6492240" y="4315968"/>
+            <a:ext cx="4663440" cy="256032"/>
+          </a:xfrm>
+          <a:prstGeom prst="rect">
+            <a:avLst/>
+          </a:prstGeom>
+          <a:noFill/>
+        </p:spPr>
+        <p:txBody>
+          <a:bodyPr wrap="square" lIns="0" rIns="0" tIns="0" bIns="0">
+            <a:spAutoFit/>
+          </a:bodyPr>
+          <a:lstStyle/>
+          <a:p>
+            <a:pPr algn="l">
+              <a:lnSpc>
+                <a:spcPct val="135000"/>
+              </a:lnSpc>
+            </a:pPr>
+            <a:r>
               <a:rPr sz="1350" b="1">
                 <a:solidFill>
-                  <a:srgbClr val="2A78D6"/>
-                </a:solidFill>
-                <a:latin typeface="맑은 고딕"/>
-                <a:ea typeface="맑은 고딕"/>
-                <a:cs typeface="맑은 고딕"/>
-              </a:rPr>
-              <a:t>신도심에서 자리 잡은 이웃</a:t>
-            </a:r>
-          </a:p>
-        </p:txBody>
-      </p:sp>
-      <p:sp>
-        <p:nvSpPr>
-          <p:cNvPr id="20" name="TextBox 19"/>
-          <p:cNvSpPr txBox="1"/>
-          <p:nvPr/>
-        </p:nvSpPr>
-        <p:spPr>
-          <a:xfrm>
-            <a:off x="6492240" y="4407407"/>
-            <a:ext cx="4663440" cy="731520"/>
-          </a:xfrm>
-          <a:prstGeom prst="rect">
-            <a:avLst/>
-          </a:prstGeom>
-          <a:noFill/>
-        </p:spPr>
-        <p:txBody>
-          <a:bodyPr wrap="square" lIns="0" rIns="0" tIns="0" bIns="0">
-            <a:spAutoFit/>
-          </a:bodyPr>
-          <a:lstStyle/>
-          <a:p>
-            <a:pPr algn="l">
-              <a:lnSpc>
-                <a:spcPct val="150000"/>
-              </a:lnSpc>
-            </a:pPr>
-            <a:r>
-              <a:rPr sz="1100" b="0">
+                  <a:srgbClr val="12151A"/>
+                </a:solidFill>
+                <a:latin typeface="맑은 고딕"/>
+                <a:ea typeface="맑은 고딕"/>
+                <a:cs typeface="맑은 고딕"/>
+              </a:rPr>
+              <a:t>시행 이후 확인</a:t>
+            </a:r>
+          </a:p>
+        </p:txBody>
+      </p:sp>
+      <p:sp>
+        <p:nvSpPr>
+          <p:cNvPr id="24" name="TextBox 23"/>
+          <p:cNvSpPr txBox="1"/>
+          <p:nvPr/>
+        </p:nvSpPr>
+        <p:spPr>
+          <a:xfrm>
+            <a:off x="6492240" y="4626864"/>
+            <a:ext cx="4663440" cy="548640"/>
+          </a:xfrm>
+          <a:prstGeom prst="rect">
+            <a:avLst/>
+          </a:prstGeom>
+          <a:noFill/>
+        </p:spPr>
+        <p:txBody>
+          <a:bodyPr wrap="square" lIns="0" rIns="0" tIns="0" bIns="0">
+            <a:spAutoFit/>
+          </a:bodyPr>
+          <a:lstStyle/>
+          <a:p>
+            <a:pPr algn="l">
+              <a:lnSpc>
+                <a:spcPct val="145000"/>
+              </a:lnSpc>
+            </a:pPr>
+            <a:r>
+              <a:rPr sz="1080" b="0">
                 <a:solidFill>
                   <a:srgbClr val="52514E"/>
                 </a:solidFill>
@@ -11369,20 +10904,20 @@
                 <a:ea typeface="맑은 고딕"/>
                 <a:cs typeface="맑은 고딕"/>
               </a:rPr>
-              <a:t>지금 여건이 좋은 곳도 언젠가는 나이가 듭니다.</a:t>
-            </a:r>
-          </a:p>
-          <a:p>
-            <a:pPr algn="l">
-              <a:lnSpc>
-                <a:spcPct val="150000"/>
+              <a:t>이듬해 같은 스크립트로 지수 변화를 이어 보실 때,</a:t>
+            </a:r>
+          </a:p>
+          <a:p>
+            <a:pPr algn="l">
+              <a:lnSpc>
+                <a:spcPct val="145000"/>
               </a:lnSpc>
               <a:spcBef>
                 <a:spcPts val="0"/>
               </a:spcBef>
             </a:pPr>
             <a:r>
-              <a:rPr sz="1100" b="0">
+              <a:rPr sz="1080" b="0">
                 <a:solidFill>
                   <a:srgbClr val="52514E"/>
                 </a:solidFill>
@@ -11390,14 +10925,14 @@
                 <a:ea typeface="맑은 고딕"/>
                 <a:cs typeface="맑은 고딕"/>
               </a:rPr>
-              <a:t>미리 살펴보는 습관은 결국 천안시민 모두를 위한 준비라고 생각합니다.</a:t>
-            </a:r>
-          </a:p>
-        </p:txBody>
-      </p:sp>
-      <p:sp>
-        <p:nvSpPr>
-          <p:cNvPr id="21" name="Rounded Rectangle 20"/>
+              <a:t>하신 사업이 수치로도 나아졌는지 확인하실 때.</a:t>
+            </a:r>
+          </a:p>
+        </p:txBody>
+      </p:sp>
+      <p:sp>
+        <p:nvSpPr>
+          <p:cNvPr id="25" name="Rounded Rectangle 24"/>
           <p:cNvSpPr/>
           <p:nvPr/>
         </p:nvSpPr>
@@ -11441,14 +10976,14 @@
       </p:sp>
       <p:sp>
         <p:nvSpPr>
-          <p:cNvPr id="22" name="TextBox 21"/>
-          <p:cNvSpPr txBox="1"/>
-          <p:nvPr/>
-        </p:nvSpPr>
-        <p:spPr>
-          <a:xfrm>
-            <a:off x="932688" y="5724144"/>
-            <a:ext cx="10515600" cy="457200"/>
+          <p:cNvPr id="26" name="TextBox 25"/>
+          <p:cNvSpPr txBox="1"/>
+          <p:nvPr/>
+        </p:nvSpPr>
+        <p:spPr>
+          <a:xfrm>
+            <a:off x="932688" y="5705856"/>
+            <a:ext cx="10515600" cy="502920"/>
           </a:xfrm>
           <a:prstGeom prst="rect">
             <a:avLst/>
@@ -11475,7 +11010,7 @@
                 <a:ea typeface="맑은 고딕"/>
                 <a:cs typeface="맑은 고딕"/>
               </a:rPr>
-              <a:t>저희는 천안시 사정을 현장에서 겪어보지 못한 참가자입니다. 다만 공개된 데이터로 할 수 있는 만큼은 성실하게 살펴보았습니다.</a:t>
+              <a:t>쓰시는 방법 — 연 1회 공공데이터를 새로 받아 스크립트를 실행하시면 모든 자료가 다시 만들어집니다.</a:t>
             </a:r>
           </a:p>
           <a:p>
@@ -11496,14 +11031,14 @@
                 <a:ea typeface="맑은 고딕"/>
                 <a:cs typeface="맑은 고딕"/>
               </a:rPr>
-              <a:t>부족한 부분은 현장을 아시는 분들이 채워주시길 바라며, 이 자료가 그 논의의 출발점이 될 수 있다면 더 바랄 것이 없겠습니다.</a:t>
-            </a:r>
-          </a:p>
-        </p:txBody>
-      </p:sp>
-      <p:sp>
-        <p:nvSpPr>
-          <p:cNvPr id="23" name="TextBox 22"/>
+              <a:t>별도 시스템이나 데이터 구매 없이, 담당자 한 분이 반나절이면 그 해 자료를 준비하실 수 있습니다.</a:t>
+            </a:r>
+          </a:p>
+        </p:txBody>
+      </p:sp>
+      <p:sp>
+        <p:nvSpPr>
+          <p:cNvPr id="27" name="TextBox 26"/>
           <p:cNvSpPr txBox="1"/>
           <p:nvPr/>
         </p:nvSpPr>
@@ -11544,7 +11079,7 @@
       </p:sp>
       <p:sp>
         <p:nvSpPr>
-          <p:cNvPr id="24" name="TextBox 23"/>
+          <p:cNvPr id="28" name="TextBox 27"/>
           <p:cNvSpPr txBox="1"/>
           <p:nvPr/>
         </p:nvSpPr>
@@ -11637,7 +11172,7 @@
                 <a:ea typeface="맑은 고딕"/>
                 <a:cs typeface="맑은 고딕"/>
               </a:rPr>
-              <a:t>APPLICATION</a:t>
+              <a:t>IMPACT</a:t>
             </a:r>
           </a:p>
         </p:txBody>
@@ -11678,7 +11213,7 @@
                 <a:ea typeface="맑은 고딕"/>
                 <a:cs typeface="맑은 고딕"/>
               </a:rPr>
-              <a:t>실무에 이렇게 보탬이 되면 좋겠습니다</a:t>
+              <a:t>기대효과와 실행 로드맵</a:t>
             </a:r>
           </a:p>
         </p:txBody>
@@ -11691,95 +11226,49 @@
         </p:nvSpPr>
         <p:spPr>
           <a:xfrm>
-            <a:off x="658368" y="1517904"/>
-            <a:ext cx="10874959" cy="411480"/>
-          </a:xfrm>
-          <a:prstGeom prst="rect">
-            <a:avLst/>
-          </a:prstGeom>
-          <a:noFill/>
-        </p:spPr>
-        <p:txBody>
-          <a:bodyPr wrap="square" lIns="0" rIns="0" tIns="0" bIns="0">
-            <a:spAutoFit/>
-          </a:bodyPr>
-          <a:lstStyle/>
-          <a:p>
-            <a:pPr algn="l">
-              <a:lnSpc>
-                <a:spcPct val="145000"/>
-              </a:lnSpc>
-            </a:pPr>
-            <a:r>
-              <a:rPr sz="1350" b="0">
-                <a:solidFill>
-                  <a:srgbClr val="52514E"/>
-                </a:solidFill>
-                <a:latin typeface="맑은 고딕"/>
-                <a:ea typeface="맑은 고딕"/>
-                <a:cs typeface="맑은 고딕"/>
-              </a:rPr>
-              <a:t>따로 시간을 내어 다뤄야 하는 연구물이 아니라, 하시던 업무 곁에 놓고 참고하실 수 있는 자료로 준비했습니다.</a:t>
-            </a:r>
-          </a:p>
-        </p:txBody>
-      </p:sp>
-      <p:sp>
-        <p:nvSpPr>
-          <p:cNvPr id="5" name="Rounded Rectangle 4"/>
+            <a:off x="658368" y="2084831"/>
+            <a:ext cx="5486400" cy="274320"/>
+          </a:xfrm>
+          <a:prstGeom prst="rect">
+            <a:avLst/>
+          </a:prstGeom>
+          <a:noFill/>
+        </p:spPr>
+        <p:txBody>
+          <a:bodyPr wrap="square" lIns="0" rIns="0" tIns="0" bIns="0">
+            <a:spAutoFit/>
+          </a:bodyPr>
+          <a:lstStyle/>
+          <a:p>
+            <a:pPr algn="l">
+              <a:lnSpc>
+                <a:spcPct val="135000"/>
+              </a:lnSpc>
+            </a:pPr>
+            <a:r>
+              <a:rPr sz="1450" b="1">
+                <a:solidFill>
+                  <a:srgbClr val="12151A"/>
+                </a:solidFill>
+                <a:latin typeface="맑은 고딕"/>
+                <a:ea typeface="맑은 고딕"/>
+                <a:cs typeface="맑은 고딕"/>
+              </a:rPr>
+              <a:t>기대효과</a:t>
+            </a:r>
+          </a:p>
+        </p:txBody>
+      </p:sp>
+      <p:sp>
+        <p:nvSpPr>
+          <p:cNvPr id="5" name="Rectangle 4"/>
           <p:cNvSpPr/>
           <p:nvPr/>
         </p:nvSpPr>
         <p:spPr>
           <a:xfrm>
-            <a:off x="658368" y="2286000"/>
-            <a:ext cx="5257800" cy="1371600"/>
-          </a:xfrm>
-          <a:prstGeom prst="roundRect">
-            <a:avLst>
-              <a:gd name="adj" fmla="val 6000"/>
-            </a:avLst>
-          </a:prstGeom>
-          <a:solidFill>
-            <a:srgbClr val="FFFFFF"/>
-          </a:solidFill>
-          <a:ln w="12700">
-            <a:solidFill>
-              <a:srgbClr val="E4E7EC"/>
-            </a:solidFill>
-          </a:ln>
-          <a:effectLst/>
-        </p:spPr>
-        <p:style>
-          <a:lnRef idx="1">
-            <a:schemeClr val="accent1"/>
-          </a:lnRef>
-          <a:fillRef idx="3">
-            <a:schemeClr val="accent1"/>
-          </a:fillRef>
-          <a:effectRef idx="2">
-            <a:schemeClr val="accent1"/>
-          </a:effectRef>
-          <a:fontRef idx="minor">
-            <a:schemeClr val="lt1"/>
-          </a:fontRef>
-        </p:style>
-        <p:txBody>
-          <a:bodyPr rtlCol="0" anchor="ctr"/>
-          <a:lstStyle/>
-          <a:p/>
-        </p:txBody>
-      </p:sp>
-      <p:sp>
-        <p:nvSpPr>
-          <p:cNvPr id="6" name="Rectangle 5"/>
-          <p:cNvSpPr/>
-          <p:nvPr/>
-        </p:nvSpPr>
-        <p:spPr>
-          <a:xfrm>
-            <a:off x="658368" y="2286000"/>
-            <a:ext cx="68580" cy="1371600"/>
+            <a:off x="658368" y="2468880"/>
+            <a:ext cx="68580" cy="566928"/>
           </a:xfrm>
           <a:prstGeom prst="rect">
             <a:avLst/>
@@ -11814,115 +11303,74 @@
       </p:sp>
       <p:sp>
         <p:nvSpPr>
+          <p:cNvPr id="6" name="TextBox 5"/>
+          <p:cNvSpPr txBox="1"/>
+          <p:nvPr/>
+        </p:nvSpPr>
+        <p:spPr>
+          <a:xfrm>
+            <a:off x="877824" y="2468880"/>
+            <a:ext cx="5120640" cy="256032"/>
+          </a:xfrm>
+          <a:prstGeom prst="rect">
+            <a:avLst/>
+          </a:prstGeom>
+          <a:noFill/>
+        </p:spPr>
+        <p:txBody>
+          <a:bodyPr wrap="square" lIns="0" rIns="0" tIns="0" bIns="0">
+            <a:spAutoFit/>
+          </a:bodyPr>
+          <a:lstStyle/>
+          <a:p>
+            <a:pPr algn="l">
+              <a:lnSpc>
+                <a:spcPct val="135000"/>
+              </a:lnSpc>
+            </a:pPr>
+            <a:r>
+              <a:rPr sz="1250" b="1">
+                <a:solidFill>
+                  <a:srgbClr val="12151A"/>
+                </a:solidFill>
+                <a:latin typeface="맑은 고딕"/>
+                <a:ea typeface="맑은 고딕"/>
+                <a:cs typeface="맑은 고딕"/>
+              </a:rPr>
+              <a:t>시민께 닿는 범위</a:t>
+            </a:r>
+          </a:p>
+        </p:txBody>
+      </p:sp>
+      <p:sp>
+        <p:nvSpPr>
           <p:cNvPr id="7" name="TextBox 6"/>
           <p:cNvSpPr txBox="1"/>
           <p:nvPr/>
         </p:nvSpPr>
         <p:spPr>
           <a:xfrm>
-            <a:off x="914400" y="2450592"/>
-            <a:ext cx="2194560" cy="256032"/>
-          </a:xfrm>
-          <a:prstGeom prst="rect">
-            <a:avLst/>
-          </a:prstGeom>
-          <a:noFill/>
-        </p:spPr>
-        <p:txBody>
-          <a:bodyPr wrap="square" lIns="0" rIns="0" tIns="0" bIns="0">
-            <a:spAutoFit/>
-          </a:bodyPr>
-          <a:lstStyle/>
-          <a:p>
-            <a:pPr algn="l">
-              <a:lnSpc>
-                <a:spcPct val="135000"/>
-              </a:lnSpc>
-            </a:pPr>
-            <a:r>
-              <a:rPr sz="1250" b="1">
-                <a:solidFill>
-                  <a:srgbClr val="2A78D6"/>
-                </a:solidFill>
-                <a:latin typeface="맑은 고딕"/>
-                <a:ea typeface="맑은 고딕"/>
-                <a:cs typeface="맑은 고딕"/>
-              </a:rPr>
-              <a:t>도시재생 담당</a:t>
-            </a:r>
-          </a:p>
-        </p:txBody>
-      </p:sp>
-      <p:sp>
-        <p:nvSpPr>
-          <p:cNvPr id="8" name="TextBox 7"/>
-          <p:cNvSpPr txBox="1"/>
-          <p:nvPr/>
-        </p:nvSpPr>
-        <p:spPr>
-          <a:xfrm>
-            <a:off x="914400" y="2743200"/>
-            <a:ext cx="4663440" cy="256032"/>
-          </a:xfrm>
-          <a:prstGeom prst="rect">
-            <a:avLst/>
-          </a:prstGeom>
-          <a:noFill/>
-        </p:spPr>
-        <p:txBody>
-          <a:bodyPr wrap="square" lIns="0" rIns="0" tIns="0" bIns="0">
-            <a:spAutoFit/>
-          </a:bodyPr>
-          <a:lstStyle/>
-          <a:p>
-            <a:pPr algn="l">
-              <a:lnSpc>
-                <a:spcPct val="135000"/>
-              </a:lnSpc>
-            </a:pPr>
-            <a:r>
-              <a:rPr sz="1350" b="1">
-                <a:solidFill>
-                  <a:srgbClr val="12151A"/>
-                </a:solidFill>
-                <a:latin typeface="맑은 고딕"/>
-                <a:ea typeface="맑은 고딕"/>
-                <a:cs typeface="맑은 고딕"/>
-              </a:rPr>
-              <a:t>사업지 검토 · 공모 준비</a:t>
-            </a:r>
-          </a:p>
-        </p:txBody>
-      </p:sp>
-      <p:sp>
-        <p:nvSpPr>
-          <p:cNvPr id="9" name="TextBox 8"/>
-          <p:cNvSpPr txBox="1"/>
-          <p:nvPr/>
-        </p:nvSpPr>
-        <p:spPr>
-          <a:xfrm>
-            <a:off x="914400" y="3054096"/>
-            <a:ext cx="4663440" cy="548640"/>
-          </a:xfrm>
-          <a:prstGeom prst="rect">
-            <a:avLst/>
-          </a:prstGeom>
-          <a:noFill/>
-        </p:spPr>
-        <p:txBody>
-          <a:bodyPr wrap="square" lIns="0" rIns="0" tIns="0" bIns="0">
-            <a:spAutoFit/>
-          </a:bodyPr>
-          <a:lstStyle/>
-          <a:p>
-            <a:pPr algn="l">
-              <a:lnSpc>
-                <a:spcPct val="145000"/>
-              </a:lnSpc>
-            </a:pPr>
-            <a:r>
-              <a:rPr sz="1080" b="0">
+            <a:off x="877824" y="2743200"/>
+            <a:ext cx="5120640" cy="365760"/>
+          </a:xfrm>
+          <a:prstGeom prst="rect">
+            <a:avLst/>
+          </a:prstGeom>
+          <a:noFill/>
+        </p:spPr>
+        <p:txBody>
+          <a:bodyPr wrap="square" lIns="0" rIns="0" tIns="0" bIns="0">
+            <a:spAutoFit/>
+          </a:bodyPr>
+          <a:lstStyle/>
+          <a:p>
+            <a:pPr algn="l">
+              <a:lnSpc>
+                <a:spcPct val="140000"/>
+              </a:lnSpc>
+            </a:pPr>
+            <a:r>
+              <a:rPr sz="1100" b="0">
                 <a:solidFill>
                   <a:srgbClr val="52514E"/>
                 </a:solidFill>
@@ -11930,55 +11378,30 @@
                 <a:ea typeface="맑은 고딕"/>
                 <a:cs typeface="맑은 고딕"/>
               </a:rPr>
-              <a:t>지수가 낮은 곳과 3년 뒤 살펴볼 곳을 겹쳐 후보를 좁히실 때,</a:t>
-            </a:r>
-          </a:p>
-          <a:p>
-            <a:pPr algn="l">
-              <a:lnSpc>
-                <a:spcPct val="145000"/>
-              </a:lnSpc>
-              <a:spcBef>
-                <a:spcPts val="0"/>
-              </a:spcBef>
-            </a:pPr>
-            <a:r>
-              <a:rPr sz="1080" b="0">
-                <a:solidFill>
-                  <a:srgbClr val="52514E"/>
-                </a:solidFill>
-                <a:latin typeface="맑은 고딕"/>
-                <a:ea typeface="맑은 고딕"/>
-                <a:cs typeface="맑은 고딕"/>
-              </a:rPr>
-              <a:t>공모의 '쇠퇴도 진단' 항목에 근거 수치로.</a:t>
-            </a:r>
-          </a:p>
-        </p:txBody>
-      </p:sp>
-      <p:sp>
-        <p:nvSpPr>
-          <p:cNvPr id="10" name="Rounded Rectangle 9"/>
+              <a:t>효과가 큰 곳부터 살펴보면, 같은 예산으로도 더 많은 분께 닿을 수 있습니다</a:t>
+            </a:r>
+          </a:p>
+        </p:txBody>
+      </p:sp>
+      <p:sp>
+        <p:nvSpPr>
+          <p:cNvPr id="8" name="Rectangle 7"/>
           <p:cNvSpPr/>
           <p:nvPr/>
         </p:nvSpPr>
         <p:spPr>
           <a:xfrm>
-            <a:off x="6236207" y="2286000"/>
-            <a:ext cx="5257800" cy="1371600"/>
-          </a:xfrm>
-          <a:prstGeom prst="roundRect">
-            <a:avLst>
-              <a:gd name="adj" fmla="val 6000"/>
-            </a:avLst>
+            <a:off x="658368" y="3218688"/>
+            <a:ext cx="68580" cy="566928"/>
+          </a:xfrm>
+          <a:prstGeom prst="rect">
+            <a:avLst/>
           </a:prstGeom>
           <a:solidFill>
-            <a:srgbClr val="FFFFFF"/>
+            <a:srgbClr val="2A78D6"/>
           </a:solidFill>
-          <a:ln w="12700">
-            <a:solidFill>
-              <a:srgbClr val="E4E7EC"/>
-            </a:solidFill>
+          <a:ln>
+            <a:noFill/>
           </a:ln>
           <a:effectLst/>
         </p:spPr>
@@ -12004,14 +11427,385 @@
       </p:sp>
       <p:sp>
         <p:nvSpPr>
+          <p:cNvPr id="9" name="TextBox 8"/>
+          <p:cNvSpPr txBox="1"/>
+          <p:nvPr/>
+        </p:nvSpPr>
+        <p:spPr>
+          <a:xfrm>
+            <a:off x="877824" y="3218688"/>
+            <a:ext cx="5120640" cy="256032"/>
+          </a:xfrm>
+          <a:prstGeom prst="rect">
+            <a:avLst/>
+          </a:prstGeom>
+          <a:noFill/>
+        </p:spPr>
+        <p:txBody>
+          <a:bodyPr wrap="square" lIns="0" rIns="0" tIns="0" bIns="0">
+            <a:spAutoFit/>
+          </a:bodyPr>
+          <a:lstStyle/>
+          <a:p>
+            <a:pPr algn="l">
+              <a:lnSpc>
+                <a:spcPct val="135000"/>
+              </a:lnSpc>
+            </a:pPr>
+            <a:r>
+              <a:rPr sz="1250" b="1">
+                <a:solidFill>
+                  <a:srgbClr val="12151A"/>
+                </a:solidFill>
+                <a:latin typeface="맑은 고딕"/>
+                <a:ea typeface="맑은 고딕"/>
+                <a:cs typeface="맑은 고딕"/>
+              </a:rPr>
+              <a:t>살펴보는 시점</a:t>
+            </a:r>
+          </a:p>
+        </p:txBody>
+      </p:sp>
+      <p:sp>
+        <p:nvSpPr>
+          <p:cNvPr id="10" name="TextBox 9"/>
+          <p:cNvSpPr txBox="1"/>
+          <p:nvPr/>
+        </p:nvSpPr>
+        <p:spPr>
+          <a:xfrm>
+            <a:off x="877824" y="3493008"/>
+            <a:ext cx="5120640" cy="365760"/>
+          </a:xfrm>
+          <a:prstGeom prst="rect">
+            <a:avLst/>
+          </a:prstGeom>
+          <a:noFill/>
+        </p:spPr>
+        <p:txBody>
+          <a:bodyPr wrap="square" lIns="0" rIns="0" tIns="0" bIns="0">
+            <a:spAutoFit/>
+          </a:bodyPr>
+          <a:lstStyle/>
+          <a:p>
+            <a:pPr algn="l">
+              <a:lnSpc>
+                <a:spcPct val="140000"/>
+              </a:lnSpc>
+            </a:pPr>
+            <a:r>
+              <a:rPr sz="1100" b="0">
+                <a:solidFill>
+                  <a:srgbClr val="52514E"/>
+                </a:solidFill>
+                <a:latin typeface="맑은 고딕"/>
+                <a:ea typeface="맑은 고딕"/>
+                <a:cs typeface="맑은 고딕"/>
+              </a:rPr>
+              <a:t>어려워진 뒤가 아니라, 3년 앞을 미리 짚어볼 수 있습니다</a:t>
+            </a:r>
+          </a:p>
+        </p:txBody>
+      </p:sp>
+      <p:sp>
+        <p:nvSpPr>
           <p:cNvPr id="11" name="Rectangle 10"/>
           <p:cNvSpPr/>
           <p:nvPr/>
         </p:nvSpPr>
         <p:spPr>
           <a:xfrm>
-            <a:off x="6236207" y="2286000"/>
-            <a:ext cx="68580" cy="1371600"/>
+            <a:off x="658368" y="3968496"/>
+            <a:ext cx="68580" cy="566928"/>
+          </a:xfrm>
+          <a:prstGeom prst="rect">
+            <a:avLst/>
+          </a:prstGeom>
+          <a:solidFill>
+            <a:srgbClr val="2A78D6"/>
+          </a:solidFill>
+          <a:ln>
+            <a:noFill/>
+          </a:ln>
+          <a:effectLst/>
+        </p:spPr>
+        <p:style>
+          <a:lnRef idx="1">
+            <a:schemeClr val="accent1"/>
+          </a:lnRef>
+          <a:fillRef idx="3">
+            <a:schemeClr val="accent1"/>
+          </a:fillRef>
+          <a:effectRef idx="2">
+            <a:schemeClr val="accent1"/>
+          </a:effectRef>
+          <a:fontRef idx="minor">
+            <a:schemeClr val="lt1"/>
+          </a:fontRef>
+        </p:style>
+        <p:txBody>
+          <a:bodyPr rtlCol="0" anchor="ctr"/>
+          <a:lstStyle/>
+          <a:p/>
+        </p:txBody>
+      </p:sp>
+      <p:sp>
+        <p:nvSpPr>
+          <p:cNvPr id="12" name="TextBox 11"/>
+          <p:cNvSpPr txBox="1"/>
+          <p:nvPr/>
+        </p:nvSpPr>
+        <p:spPr>
+          <a:xfrm>
+            <a:off x="877824" y="3968496"/>
+            <a:ext cx="5120640" cy="256032"/>
+          </a:xfrm>
+          <a:prstGeom prst="rect">
+            <a:avLst/>
+          </a:prstGeom>
+          <a:noFill/>
+        </p:spPr>
+        <p:txBody>
+          <a:bodyPr wrap="square" lIns="0" rIns="0" tIns="0" bIns="0">
+            <a:spAutoFit/>
+          </a:bodyPr>
+          <a:lstStyle/>
+          <a:p>
+            <a:pPr algn="l">
+              <a:lnSpc>
+                <a:spcPct val="135000"/>
+              </a:lnSpc>
+            </a:pPr>
+            <a:r>
+              <a:rPr sz="1250" b="1">
+                <a:solidFill>
+                  <a:srgbClr val="12151A"/>
+                </a:solidFill>
+                <a:latin typeface="맑은 고딕"/>
+                <a:ea typeface="맑은 고딕"/>
+                <a:cs typeface="맑은 고딕"/>
+              </a:rPr>
+              <a:t>설명하실 때</a:t>
+            </a:r>
+          </a:p>
+        </p:txBody>
+      </p:sp>
+      <p:sp>
+        <p:nvSpPr>
+          <p:cNvPr id="13" name="TextBox 12"/>
+          <p:cNvSpPr txBox="1"/>
+          <p:nvPr/>
+        </p:nvSpPr>
+        <p:spPr>
+          <a:xfrm>
+            <a:off x="877824" y="4242816"/>
+            <a:ext cx="5120640" cy="365760"/>
+          </a:xfrm>
+          <a:prstGeom prst="rect">
+            <a:avLst/>
+          </a:prstGeom>
+          <a:noFill/>
+        </p:spPr>
+        <p:txBody>
+          <a:bodyPr wrap="square" lIns="0" rIns="0" tIns="0" bIns="0">
+            <a:spAutoFit/>
+          </a:bodyPr>
+          <a:lstStyle/>
+          <a:p>
+            <a:pPr algn="l">
+              <a:lnSpc>
+                <a:spcPct val="140000"/>
+              </a:lnSpc>
+            </a:pPr>
+            <a:r>
+              <a:rPr sz="1100" b="0">
+                <a:solidFill>
+                  <a:srgbClr val="52514E"/>
+                </a:solidFill>
+                <a:latin typeface="맑은 고딕"/>
+                <a:ea typeface="맑은 고딕"/>
+                <a:cs typeface="맑은 고딕"/>
+              </a:rPr>
+              <a:t>판단 근거를 항목별 수치로 정리해 드려 설명 부담을 조금 덜어드립니다</a:t>
+            </a:r>
+          </a:p>
+        </p:txBody>
+      </p:sp>
+      <p:sp>
+        <p:nvSpPr>
+          <p:cNvPr id="14" name="Rectangle 13"/>
+          <p:cNvSpPr/>
+          <p:nvPr/>
+        </p:nvSpPr>
+        <p:spPr>
+          <a:xfrm>
+            <a:off x="658368" y="4718304"/>
+            <a:ext cx="68580" cy="566928"/>
+          </a:xfrm>
+          <a:prstGeom prst="rect">
+            <a:avLst/>
+          </a:prstGeom>
+          <a:solidFill>
+            <a:srgbClr val="2A78D6"/>
+          </a:solidFill>
+          <a:ln>
+            <a:noFill/>
+          </a:ln>
+          <a:effectLst/>
+        </p:spPr>
+        <p:style>
+          <a:lnRef idx="1">
+            <a:schemeClr val="accent1"/>
+          </a:lnRef>
+          <a:fillRef idx="3">
+            <a:schemeClr val="accent1"/>
+          </a:fillRef>
+          <a:effectRef idx="2">
+            <a:schemeClr val="accent1"/>
+          </a:effectRef>
+          <a:fontRef idx="minor">
+            <a:schemeClr val="lt1"/>
+          </a:fontRef>
+        </p:style>
+        <p:txBody>
+          <a:bodyPr rtlCol="0" anchor="ctr"/>
+          <a:lstStyle/>
+          <a:p/>
+        </p:txBody>
+      </p:sp>
+      <p:sp>
+        <p:nvSpPr>
+          <p:cNvPr id="15" name="TextBox 14"/>
+          <p:cNvSpPr txBox="1"/>
+          <p:nvPr/>
+        </p:nvSpPr>
+        <p:spPr>
+          <a:xfrm>
+            <a:off x="877824" y="4718304"/>
+            <a:ext cx="5120640" cy="256032"/>
+          </a:xfrm>
+          <a:prstGeom prst="rect">
+            <a:avLst/>
+          </a:prstGeom>
+          <a:noFill/>
+        </p:spPr>
+        <p:txBody>
+          <a:bodyPr wrap="square" lIns="0" rIns="0" tIns="0" bIns="0">
+            <a:spAutoFit/>
+          </a:bodyPr>
+          <a:lstStyle/>
+          <a:p>
+            <a:pPr algn="l">
+              <a:lnSpc>
+                <a:spcPct val="135000"/>
+              </a:lnSpc>
+            </a:pPr>
+            <a:r>
+              <a:rPr sz="1250" b="1">
+                <a:solidFill>
+                  <a:srgbClr val="12151A"/>
+                </a:solidFill>
+                <a:latin typeface="맑은 고딕"/>
+                <a:ea typeface="맑은 고딕"/>
+                <a:cs typeface="맑은 고딕"/>
+              </a:rPr>
+              <a:t>드는 비용</a:t>
+            </a:r>
+          </a:p>
+        </p:txBody>
+      </p:sp>
+      <p:sp>
+        <p:nvSpPr>
+          <p:cNvPr id="16" name="TextBox 15"/>
+          <p:cNvSpPr txBox="1"/>
+          <p:nvPr/>
+        </p:nvSpPr>
+        <p:spPr>
+          <a:xfrm>
+            <a:off x="877824" y="4992624"/>
+            <a:ext cx="5120640" cy="365760"/>
+          </a:xfrm>
+          <a:prstGeom prst="rect">
+            <a:avLst/>
+          </a:prstGeom>
+          <a:noFill/>
+        </p:spPr>
+        <p:txBody>
+          <a:bodyPr wrap="square" lIns="0" rIns="0" tIns="0" bIns="0">
+            <a:spAutoFit/>
+          </a:bodyPr>
+          <a:lstStyle/>
+          <a:p>
+            <a:pPr algn="l">
+              <a:lnSpc>
+                <a:spcPct val="140000"/>
+              </a:lnSpc>
+            </a:pPr>
+            <a:r>
+              <a:rPr sz="1100" b="0">
+                <a:solidFill>
+                  <a:srgbClr val="52514E"/>
+                </a:solidFill>
+                <a:latin typeface="맑은 고딕"/>
+                <a:ea typeface="맑은 고딕"/>
+                <a:cs typeface="맑은 고딕"/>
+              </a:rPr>
+              <a:t>데이터 구매나 시스템 없이, 스크립트 재실행만으로 매년 갱신됩니다</a:t>
+            </a:r>
+          </a:p>
+        </p:txBody>
+      </p:sp>
+      <p:sp>
+        <p:nvSpPr>
+          <p:cNvPr id="17" name="TextBox 16"/>
+          <p:cNvSpPr txBox="1"/>
+          <p:nvPr/>
+        </p:nvSpPr>
+        <p:spPr>
+          <a:xfrm>
+            <a:off x="6510528" y="2084831"/>
+            <a:ext cx="5029200" cy="274320"/>
+          </a:xfrm>
+          <a:prstGeom prst="rect">
+            <a:avLst/>
+          </a:prstGeom>
+          <a:noFill/>
+        </p:spPr>
+        <p:txBody>
+          <a:bodyPr wrap="square" lIns="0" rIns="0" tIns="0" bIns="0">
+            <a:spAutoFit/>
+          </a:bodyPr>
+          <a:lstStyle/>
+          <a:p>
+            <a:pPr algn="l">
+              <a:lnSpc>
+                <a:spcPct val="135000"/>
+              </a:lnSpc>
+            </a:pPr>
+            <a:r>
+              <a:rPr sz="1450" b="1">
+                <a:solidFill>
+                  <a:srgbClr val="12151A"/>
+                </a:solidFill>
+                <a:latin typeface="맑은 고딕"/>
+                <a:ea typeface="맑은 고딕"/>
+                <a:cs typeface="맑은 고딕"/>
+              </a:rPr>
+              <a:t>실행 로드맵</a:t>
+            </a:r>
+          </a:p>
+        </p:txBody>
+      </p:sp>
+      <p:sp>
+        <p:nvSpPr>
+          <p:cNvPr id="18" name="Rectangle 17"/>
+          <p:cNvSpPr/>
+          <p:nvPr/>
+        </p:nvSpPr>
+        <p:spPr>
+          <a:xfrm>
+            <a:off x="6510528" y="2468880"/>
+            <a:ext cx="68580" cy="566928"/>
           </a:xfrm>
           <a:prstGeom prst="rect">
             <a:avLst/>
@@ -12046,14 +11840,14 @@
       </p:sp>
       <p:sp>
         <p:nvSpPr>
-          <p:cNvPr id="12" name="TextBox 11"/>
-          <p:cNvSpPr txBox="1"/>
-          <p:nvPr/>
-        </p:nvSpPr>
-        <p:spPr>
-          <a:xfrm>
-            <a:off x="6492240" y="2450592"/>
-            <a:ext cx="2194560" cy="256032"/>
+          <p:cNvPr id="19" name="TextBox 18"/>
+          <p:cNvSpPr txBox="1"/>
+          <p:nvPr/>
+        </p:nvSpPr>
+        <p:spPr>
+          <a:xfrm>
+            <a:off x="6729983" y="2468880"/>
+            <a:ext cx="4754880" cy="256032"/>
           </a:xfrm>
           <a:prstGeom prst="rect">
             <a:avLst/>
@@ -12080,81 +11874,40 @@
                 <a:ea typeface="맑은 고딕"/>
                 <a:cs typeface="맑은 고딕"/>
               </a:rPr>
-              <a:t>복지·보건 담당</a:t>
-            </a:r>
-          </a:p>
-        </p:txBody>
-      </p:sp>
-      <p:sp>
-        <p:nvSpPr>
-          <p:cNvPr id="13" name="TextBox 12"/>
-          <p:cNvSpPr txBox="1"/>
-          <p:nvPr/>
-        </p:nvSpPr>
-        <p:spPr>
-          <a:xfrm>
-            <a:off x="6492240" y="2743200"/>
-            <a:ext cx="4663440" cy="256032"/>
-          </a:xfrm>
-          <a:prstGeom prst="rect">
-            <a:avLst/>
-          </a:prstGeom>
-          <a:noFill/>
-        </p:spPr>
-        <p:txBody>
-          <a:bodyPr wrap="square" lIns="0" rIns="0" tIns="0" bIns="0">
-            <a:spAutoFit/>
-          </a:bodyPr>
-          <a:lstStyle/>
-          <a:p>
-            <a:pPr algn="l">
-              <a:lnSpc>
-                <a:spcPct val="135000"/>
-              </a:lnSpc>
-            </a:pPr>
-            <a:r>
-              <a:rPr sz="1350" b="1">
-                <a:solidFill>
-                  <a:srgbClr val="12151A"/>
-                </a:solidFill>
-                <a:latin typeface="맑은 고딕"/>
-                <a:ea typeface="맑은 고딕"/>
-                <a:cs typeface="맑은 고딕"/>
-              </a:rPr>
-              <a:t>생활시설 위치 검토</a:t>
-            </a:r>
-          </a:p>
-        </p:txBody>
-      </p:sp>
-      <p:sp>
-        <p:nvSpPr>
-          <p:cNvPr id="14" name="TextBox 13"/>
-          <p:cNvSpPr txBox="1"/>
-          <p:nvPr/>
-        </p:nvSpPr>
-        <p:spPr>
-          <a:xfrm>
-            <a:off x="6492240" y="3054096"/>
-            <a:ext cx="4663440" cy="548640"/>
-          </a:xfrm>
-          <a:prstGeom prst="rect">
-            <a:avLst/>
-          </a:prstGeom>
-          <a:noFill/>
-        </p:spPr>
-        <p:txBody>
-          <a:bodyPr wrap="square" lIns="0" rIns="0" tIns="0" bIns="0">
-            <a:spAutoFit/>
-          </a:bodyPr>
-          <a:lstStyle/>
-          <a:p>
-            <a:pPr algn="l">
-              <a:lnSpc>
-                <a:spcPct val="145000"/>
-              </a:lnSpc>
-            </a:pPr>
-            <a:r>
-              <a:rPr sz="1080" b="0">
+              <a:t>1단계 · 즉시</a:t>
+            </a:r>
+          </a:p>
+        </p:txBody>
+      </p:sp>
+      <p:sp>
+        <p:nvSpPr>
+          <p:cNvPr id="20" name="TextBox 19"/>
+          <p:cNvSpPr txBox="1"/>
+          <p:nvPr/>
+        </p:nvSpPr>
+        <p:spPr>
+          <a:xfrm>
+            <a:off x="6729983" y="2743200"/>
+            <a:ext cx="4754880" cy="365760"/>
+          </a:xfrm>
+          <a:prstGeom prst="rect">
+            <a:avLst/>
+          </a:prstGeom>
+          <a:noFill/>
+        </p:spPr>
+        <p:txBody>
+          <a:bodyPr wrap="square" lIns="0" rIns="0" tIns="0" bIns="0">
+            <a:spAutoFit/>
+          </a:bodyPr>
+          <a:lstStyle/>
+          <a:p>
+            <a:pPr algn="l">
+              <a:lnSpc>
+                <a:spcPct val="140000"/>
+              </a:lnSpc>
+            </a:pPr>
+            <a:r>
+              <a:rPr sz="1100" b="0">
                 <a:solidFill>
                   <a:srgbClr val="52514E"/>
                 </a:solidFill>
@@ -12162,55 +11915,30 @@
                 <a:ea typeface="맑은 고딕"/>
                 <a:cs typeface="맑은 고딕"/>
               </a:rPr>
-              <a:t>우선순위표의 좌표를 검토 후보 중 하나로,</a:t>
-            </a:r>
-          </a:p>
-          <a:p>
-            <a:pPr algn="l">
-              <a:lnSpc>
-                <a:spcPct val="145000"/>
-              </a:lnSpc>
-              <a:spcBef>
-                <a:spcPts val="0"/>
-              </a:spcBef>
-            </a:pPr>
-            <a:r>
-              <a:rPr sz="1080" b="0">
-                <a:solidFill>
-                  <a:srgbClr val="52514E"/>
-                </a:solidFill>
-                <a:latin typeface="맑은 고딕"/>
-                <a:ea typeface="맑은 고딕"/>
-                <a:cs typeface="맑은 고딕"/>
-              </a:rPr>
-              <a:t>왜 그 동네인지 설명하실 때 항목별 근거로.</a:t>
-            </a:r>
-          </a:p>
-        </p:txBody>
-      </p:sp>
-      <p:sp>
-        <p:nvSpPr>
-          <p:cNvPr id="15" name="Rounded Rectangle 14"/>
+              <a:t>본 스크립트로 천안시 25개 생활권 기준선 진단 확정</a:t>
+            </a:r>
+          </a:p>
+        </p:txBody>
+      </p:sp>
+      <p:sp>
+        <p:nvSpPr>
+          <p:cNvPr id="21" name="Rectangle 20"/>
           <p:cNvSpPr/>
           <p:nvPr/>
         </p:nvSpPr>
         <p:spPr>
           <a:xfrm>
-            <a:off x="658368" y="3858768"/>
-            <a:ext cx="5257800" cy="1371600"/>
-          </a:xfrm>
-          <a:prstGeom prst="roundRect">
-            <a:avLst>
-              <a:gd name="adj" fmla="val 6000"/>
-            </a:avLst>
+            <a:off x="6510528" y="3218688"/>
+            <a:ext cx="68580" cy="566928"/>
+          </a:xfrm>
+          <a:prstGeom prst="rect">
+            <a:avLst/>
           </a:prstGeom>
           <a:solidFill>
-            <a:srgbClr val="FFFFFF"/>
+            <a:srgbClr val="2A78D6"/>
           </a:solidFill>
-          <a:ln w="12700">
-            <a:solidFill>
-              <a:srgbClr val="E4E7EC"/>
-            </a:solidFill>
+          <a:ln>
+            <a:noFill/>
           </a:ln>
           <a:effectLst/>
         </p:spPr>
@@ -12236,14 +11964,96 @@
       </p:sp>
       <p:sp>
         <p:nvSpPr>
-          <p:cNvPr id="16" name="Rectangle 15"/>
+          <p:cNvPr id="22" name="TextBox 21"/>
+          <p:cNvSpPr txBox="1"/>
+          <p:nvPr/>
+        </p:nvSpPr>
+        <p:spPr>
+          <a:xfrm>
+            <a:off x="6729983" y="3218688"/>
+            <a:ext cx="4754880" cy="256032"/>
+          </a:xfrm>
+          <a:prstGeom prst="rect">
+            <a:avLst/>
+          </a:prstGeom>
+          <a:noFill/>
+        </p:spPr>
+        <p:txBody>
+          <a:bodyPr wrap="square" lIns="0" rIns="0" tIns="0" bIns="0">
+            <a:spAutoFit/>
+          </a:bodyPr>
+          <a:lstStyle/>
+          <a:p>
+            <a:pPr algn="l">
+              <a:lnSpc>
+                <a:spcPct val="135000"/>
+              </a:lnSpc>
+            </a:pPr>
+            <a:r>
+              <a:rPr sz="1250" b="1">
+                <a:solidFill>
+                  <a:srgbClr val="2A78D6"/>
+                </a:solidFill>
+                <a:latin typeface="맑은 고딕"/>
+                <a:ea typeface="맑은 고딕"/>
+                <a:cs typeface="맑은 고딕"/>
+              </a:rPr>
+              <a:t>2단계 · 3개월</a:t>
+            </a:r>
+          </a:p>
+        </p:txBody>
+      </p:sp>
+      <p:sp>
+        <p:nvSpPr>
+          <p:cNvPr id="23" name="TextBox 22"/>
+          <p:cNvSpPr txBox="1"/>
+          <p:nvPr/>
+        </p:nvSpPr>
+        <p:spPr>
+          <a:xfrm>
+            <a:off x="6729983" y="3493008"/>
+            <a:ext cx="4754880" cy="365760"/>
+          </a:xfrm>
+          <a:prstGeom prst="rect">
+            <a:avLst/>
+          </a:prstGeom>
+          <a:noFill/>
+        </p:spPr>
+        <p:txBody>
+          <a:bodyPr wrap="square" lIns="0" rIns="0" tIns="0" bIns="0">
+            <a:spAutoFit/>
+          </a:bodyPr>
+          <a:lstStyle/>
+          <a:p>
+            <a:pPr algn="l">
+              <a:lnSpc>
+                <a:spcPct val="140000"/>
+              </a:lnSpc>
+            </a:pPr>
+            <a:r>
+              <a:rPr sz="1100" b="0">
+                <a:solidFill>
+                  <a:srgbClr val="52514E"/>
+                </a:solidFill>
+                <a:latin typeface="맑은 고딕"/>
+                <a:ea typeface="맑은 고딕"/>
+                <a:cs typeface="맑은 고딕"/>
+              </a:rPr>
+              <a:t>천안시 내부 행정데이터(인허가 원장·건축물대장·복지수급) 연계로 지표 정밀화</a:t>
+            </a:r>
+          </a:p>
+        </p:txBody>
+      </p:sp>
+      <p:sp>
+        <p:nvSpPr>
+          <p:cNvPr id="24" name="Rectangle 23"/>
           <p:cNvSpPr/>
           <p:nvPr/>
         </p:nvSpPr>
         <p:spPr>
           <a:xfrm>
-            <a:off x="658368" y="3858768"/>
-            <a:ext cx="68580" cy="1371600"/>
+            <a:off x="6510528" y="3968496"/>
+            <a:ext cx="68580" cy="566928"/>
           </a:xfrm>
           <a:prstGeom prst="rect">
             <a:avLst/>
@@ -12278,14 +12088,14 @@
       </p:sp>
       <p:sp>
         <p:nvSpPr>
-          <p:cNvPr id="17" name="TextBox 16"/>
-          <p:cNvSpPr txBox="1"/>
-          <p:nvPr/>
-        </p:nvSpPr>
-        <p:spPr>
-          <a:xfrm>
-            <a:off x="914400" y="4023359"/>
-            <a:ext cx="2194560" cy="256032"/>
+          <p:cNvPr id="25" name="TextBox 24"/>
+          <p:cNvSpPr txBox="1"/>
+          <p:nvPr/>
+        </p:nvSpPr>
+        <p:spPr>
+          <a:xfrm>
+            <a:off x="6729983" y="3968496"/>
+            <a:ext cx="4754880" cy="256032"/>
           </a:xfrm>
           <a:prstGeom prst="rect">
             <a:avLst/>
@@ -12312,81 +12122,40 @@
                 <a:ea typeface="맑은 고딕"/>
                 <a:cs typeface="맑은 고딕"/>
               </a:rPr>
-              <a:t>예산 담당</a:t>
-            </a:r>
-          </a:p>
-        </p:txBody>
-      </p:sp>
-      <p:sp>
-        <p:nvSpPr>
-          <p:cNvPr id="18" name="TextBox 17"/>
-          <p:cNvSpPr txBox="1"/>
-          <p:nvPr/>
-        </p:nvSpPr>
-        <p:spPr>
-          <a:xfrm>
-            <a:off x="914400" y="4315968"/>
-            <a:ext cx="4663440" cy="256032"/>
-          </a:xfrm>
-          <a:prstGeom prst="rect">
-            <a:avLst/>
-          </a:prstGeom>
-          <a:noFill/>
-        </p:spPr>
-        <p:txBody>
-          <a:bodyPr wrap="square" lIns="0" rIns="0" tIns="0" bIns="0">
-            <a:spAutoFit/>
-          </a:bodyPr>
-          <a:lstStyle/>
-          <a:p>
-            <a:pPr algn="l">
-              <a:lnSpc>
-                <a:spcPct val="135000"/>
-              </a:lnSpc>
-            </a:pPr>
-            <a:r>
-              <a:rPr sz="1350" b="1">
-                <a:solidFill>
-                  <a:srgbClr val="12151A"/>
-                </a:solidFill>
-                <a:latin typeface="맑은 고딕"/>
-                <a:ea typeface="맑은 고딕"/>
-                <a:cs typeface="맑은 고딕"/>
-              </a:rPr>
-              <a:t>배분 검토 자료</a:t>
-            </a:r>
-          </a:p>
-        </p:txBody>
-      </p:sp>
-      <p:sp>
-        <p:nvSpPr>
-          <p:cNvPr id="19" name="TextBox 18"/>
-          <p:cNvSpPr txBox="1"/>
-          <p:nvPr/>
-        </p:nvSpPr>
-        <p:spPr>
-          <a:xfrm>
-            <a:off x="914400" y="4626864"/>
-            <a:ext cx="4663440" cy="548640"/>
-          </a:xfrm>
-          <a:prstGeom prst="rect">
-            <a:avLst/>
-          </a:prstGeom>
-          <a:noFill/>
-        </p:spPr>
-        <p:txBody>
-          <a:bodyPr wrap="square" lIns="0" rIns="0" tIns="0" bIns="0">
-            <a:spAutoFit/>
-          </a:bodyPr>
-          <a:lstStyle/>
-          <a:p>
-            <a:pPr algn="l">
-              <a:lnSpc>
-                <a:spcPct val="145000"/>
-              </a:lnSpc>
-            </a:pPr>
-            <a:r>
-              <a:rPr sz="1080" b="0">
+              <a:t>3단계 · 6개월</a:t>
+            </a:r>
+          </a:p>
+        </p:txBody>
+      </p:sp>
+      <p:sp>
+        <p:nvSpPr>
+          <p:cNvPr id="26" name="TextBox 25"/>
+          <p:cNvSpPr txBox="1"/>
+          <p:nvPr/>
+        </p:nvSpPr>
+        <p:spPr>
+          <a:xfrm>
+            <a:off x="6729983" y="4242816"/>
+            <a:ext cx="4754880" cy="365760"/>
+          </a:xfrm>
+          <a:prstGeom prst="rect">
+            <a:avLst/>
+          </a:prstGeom>
+          <a:noFill/>
+        </p:spPr>
+        <p:txBody>
+          <a:bodyPr wrap="square" lIns="0" rIns="0" tIns="0" bIns="0">
+            <a:spAutoFit/>
+          </a:bodyPr>
+          <a:lstStyle/>
+          <a:p>
+            <a:pPr algn="l">
+              <a:lnSpc>
+                <a:spcPct val="140000"/>
+              </a:lnSpc>
+            </a:pPr>
+            <a:r>
+              <a:rPr sz="1100" b="0">
                 <a:solidFill>
                   <a:srgbClr val="52514E"/>
                 </a:solidFill>
@@ -12394,55 +12163,30 @@
                 <a:ea typeface="맑은 고딕"/>
                 <a:cs typeface="맑은 고딕"/>
               </a:rPr>
-              <a:t>몇 개소까지면 어느 정도 효과인지 곡선으로 비교하실 때,</a:t>
-            </a:r>
-          </a:p>
-          <a:p>
-            <a:pPr algn="l">
-              <a:lnSpc>
-                <a:spcPct val="145000"/>
-              </a:lnSpc>
-              <a:spcBef>
-                <a:spcPts val="0"/>
-              </a:spcBef>
-            </a:pPr>
-            <a:r>
-              <a:rPr sz="1080" b="0">
-                <a:solidFill>
-                  <a:srgbClr val="52514E"/>
-                </a:solidFill>
-                <a:latin typeface="맑은 고딕"/>
-                <a:ea typeface="맑은 고딕"/>
-                <a:cs typeface="맑은 고딕"/>
-              </a:rPr>
-              <a:t>예산 조정이 필요할 때 판단의 참고로.</a:t>
-            </a:r>
-          </a:p>
-        </p:txBody>
-      </p:sp>
-      <p:sp>
-        <p:nvSpPr>
-          <p:cNvPr id="20" name="Rounded Rectangle 19"/>
+              <a:t>500m 격자 단위로 공간해상도 상향 — 표본 확대로 예측모델 성능 개선</a:t>
+            </a:r>
+          </a:p>
+        </p:txBody>
+      </p:sp>
+      <p:sp>
+        <p:nvSpPr>
+          <p:cNvPr id="27" name="Rectangle 26"/>
           <p:cNvSpPr/>
           <p:nvPr/>
         </p:nvSpPr>
         <p:spPr>
           <a:xfrm>
-            <a:off x="6236207" y="3858768"/>
-            <a:ext cx="5257800" cy="1371600"/>
-          </a:xfrm>
-          <a:prstGeom prst="roundRect">
-            <a:avLst>
-              <a:gd name="adj" fmla="val 6000"/>
-            </a:avLst>
+            <a:off x="6510528" y="4718304"/>
+            <a:ext cx="68580" cy="566928"/>
+          </a:xfrm>
+          <a:prstGeom prst="rect">
+            <a:avLst/>
           </a:prstGeom>
           <a:solidFill>
-            <a:srgbClr val="FFFFFF"/>
+            <a:srgbClr val="2A78D6"/>
           </a:solidFill>
-          <a:ln w="12700">
-            <a:solidFill>
-              <a:srgbClr val="E4E7EC"/>
-            </a:solidFill>
+          <a:ln>
+            <a:noFill/>
           </a:ln>
           <a:effectLst/>
         </p:spPr>
@@ -12468,20 +12212,104 @@
       </p:sp>
       <p:sp>
         <p:nvSpPr>
-          <p:cNvPr id="21" name="Rectangle 20"/>
+          <p:cNvPr id="28" name="TextBox 27"/>
+          <p:cNvSpPr txBox="1"/>
+          <p:nvPr/>
+        </p:nvSpPr>
+        <p:spPr>
+          <a:xfrm>
+            <a:off x="6729983" y="4718304"/>
+            <a:ext cx="4754880" cy="256032"/>
+          </a:xfrm>
+          <a:prstGeom prst="rect">
+            <a:avLst/>
+          </a:prstGeom>
+          <a:noFill/>
+        </p:spPr>
+        <p:txBody>
+          <a:bodyPr wrap="square" lIns="0" rIns="0" tIns="0" bIns="0">
+            <a:spAutoFit/>
+          </a:bodyPr>
+          <a:lstStyle/>
+          <a:p>
+            <a:pPr algn="l">
+              <a:lnSpc>
+                <a:spcPct val="135000"/>
+              </a:lnSpc>
+            </a:pPr>
+            <a:r>
+              <a:rPr sz="1250" b="1">
+                <a:solidFill>
+                  <a:srgbClr val="2A78D6"/>
+                </a:solidFill>
+                <a:latin typeface="맑은 고딕"/>
+                <a:ea typeface="맑은 고딕"/>
+                <a:cs typeface="맑은 고딕"/>
+              </a:rPr>
+              <a:t>4단계 · 1년</a:t>
+            </a:r>
+          </a:p>
+        </p:txBody>
+      </p:sp>
+      <p:sp>
+        <p:nvSpPr>
+          <p:cNvPr id="29" name="TextBox 28"/>
+          <p:cNvSpPr txBox="1"/>
+          <p:nvPr/>
+        </p:nvSpPr>
+        <p:spPr>
+          <a:xfrm>
+            <a:off x="6729983" y="4992624"/>
+            <a:ext cx="4754880" cy="365760"/>
+          </a:xfrm>
+          <a:prstGeom prst="rect">
+            <a:avLst/>
+          </a:prstGeom>
+          <a:noFill/>
+        </p:spPr>
+        <p:txBody>
+          <a:bodyPr wrap="square" lIns="0" rIns="0" tIns="0" bIns="0">
+            <a:spAutoFit/>
+          </a:bodyPr>
+          <a:lstStyle/>
+          <a:p>
+            <a:pPr algn="l">
+              <a:lnSpc>
+                <a:spcPct val="140000"/>
+              </a:lnSpc>
+            </a:pPr>
+            <a:r>
+              <a:rPr sz="1100" b="0">
+                <a:solidFill>
+                  <a:srgbClr val="52514E"/>
+                </a:solidFill>
+                <a:latin typeface="맑은 고딕"/>
+                <a:ea typeface="맑은 고딕"/>
+                <a:cs typeface="맑은 고딕"/>
+              </a:rPr>
+              <a:t>천안시 행정포털 대시보드 내재화, 연 1회 자동 갱신 체계 정착</a:t>
+            </a:r>
+          </a:p>
+        </p:txBody>
+      </p:sp>
+      <p:sp>
+        <p:nvSpPr>
+          <p:cNvPr id="30" name="Rounded Rectangle 29"/>
           <p:cNvSpPr/>
           <p:nvPr/>
         </p:nvSpPr>
         <p:spPr>
           <a:xfrm>
-            <a:off x="6236207" y="3858768"/>
-            <a:ext cx="68580" cy="1371600"/>
-          </a:xfrm>
-          <a:prstGeom prst="rect">
-            <a:avLst/>
+            <a:off x="658368" y="5504688"/>
+            <a:ext cx="10874959" cy="822960"/>
+          </a:xfrm>
+          <a:prstGeom prst="roundRect">
+            <a:avLst>
+              <a:gd name="adj" fmla="val 6000"/>
+            </a:avLst>
           </a:prstGeom>
           <a:solidFill>
-            <a:srgbClr val="4A3AA7"/>
+            <a:srgbClr val="F6F7F9"/>
           </a:solidFill>
           <a:ln>
             <a:noFill/>
@@ -12510,74 +12338,33 @@
       </p:sp>
       <p:sp>
         <p:nvSpPr>
-          <p:cNvPr id="22" name="TextBox 21"/>
-          <p:cNvSpPr txBox="1"/>
-          <p:nvPr/>
-        </p:nvSpPr>
-        <p:spPr>
-          <a:xfrm>
-            <a:off x="6492240" y="4023359"/>
-            <a:ext cx="2194560" cy="256032"/>
-          </a:xfrm>
-          <a:prstGeom prst="rect">
-            <a:avLst/>
-          </a:prstGeom>
-          <a:noFill/>
-        </p:spPr>
-        <p:txBody>
-          <a:bodyPr wrap="square" lIns="0" rIns="0" tIns="0" bIns="0">
-            <a:spAutoFit/>
-          </a:bodyPr>
-          <a:lstStyle/>
-          <a:p>
-            <a:pPr algn="l">
-              <a:lnSpc>
-                <a:spcPct val="135000"/>
-              </a:lnSpc>
-            </a:pPr>
-            <a:r>
-              <a:rPr sz="1250" b="1">
-                <a:solidFill>
-                  <a:srgbClr val="4A3AA7"/>
-                </a:solidFill>
-                <a:latin typeface="맑은 고딕"/>
-                <a:ea typeface="맑은 고딕"/>
-                <a:cs typeface="맑은 고딕"/>
-              </a:rPr>
-              <a:t>기획·평가 담당</a:t>
-            </a:r>
-          </a:p>
-        </p:txBody>
-      </p:sp>
-      <p:sp>
-        <p:nvSpPr>
-          <p:cNvPr id="23" name="TextBox 22"/>
-          <p:cNvSpPr txBox="1"/>
-          <p:nvPr/>
-        </p:nvSpPr>
-        <p:spPr>
-          <a:xfrm>
-            <a:off x="6492240" y="4315968"/>
-            <a:ext cx="4663440" cy="256032"/>
-          </a:xfrm>
-          <a:prstGeom prst="rect">
-            <a:avLst/>
-          </a:prstGeom>
-          <a:noFill/>
-        </p:spPr>
-        <p:txBody>
-          <a:bodyPr wrap="square" lIns="0" rIns="0" tIns="0" bIns="0">
-            <a:spAutoFit/>
-          </a:bodyPr>
-          <a:lstStyle/>
-          <a:p>
-            <a:pPr algn="l">
-              <a:lnSpc>
-                <a:spcPct val="135000"/>
-              </a:lnSpc>
-            </a:pPr>
-            <a:r>
-              <a:rPr sz="1350" b="1">
+          <p:cNvPr id="31" name="TextBox 30"/>
+          <p:cNvSpPr txBox="1"/>
+          <p:nvPr/>
+        </p:nvSpPr>
+        <p:spPr>
+          <a:xfrm>
+            <a:off x="932688" y="5687568"/>
+            <a:ext cx="10515600" cy="502920"/>
+          </a:xfrm>
+          <a:prstGeom prst="rect">
+            <a:avLst/>
+          </a:prstGeom>
+          <a:noFill/>
+        </p:spPr>
+        <p:txBody>
+          <a:bodyPr wrap="square" lIns="0" rIns="0" tIns="0" bIns="0">
+            <a:spAutoFit/>
+          </a:bodyPr>
+          <a:lstStyle/>
+          <a:p>
+            <a:pPr algn="l">
+              <a:lnSpc>
+                <a:spcPct val="150000"/>
+              </a:lnSpc>
+            </a:pPr>
+            <a:r>
+              <a:rPr sz="1200" b="0">
                 <a:solidFill>
                   <a:srgbClr val="12151A"/>
                 </a:solidFill>
@@ -12585,145 +12372,19 @@
                 <a:ea typeface="맑은 고딕"/>
                 <a:cs typeface="맑은 고딕"/>
               </a:rPr>
-              <a:t>시행 이후 확인</a:t>
-            </a:r>
-          </a:p>
-        </p:txBody>
-      </p:sp>
-      <p:sp>
-        <p:nvSpPr>
-          <p:cNvPr id="24" name="TextBox 23"/>
-          <p:cNvSpPr txBox="1"/>
-          <p:nvPr/>
-        </p:nvSpPr>
-        <p:spPr>
-          <a:xfrm>
-            <a:off x="6492240" y="4626864"/>
-            <a:ext cx="4663440" cy="548640"/>
-          </a:xfrm>
-          <a:prstGeom prst="rect">
-            <a:avLst/>
-          </a:prstGeom>
-          <a:noFill/>
-        </p:spPr>
-        <p:txBody>
-          <a:bodyPr wrap="square" lIns="0" rIns="0" tIns="0" bIns="0">
-            <a:spAutoFit/>
-          </a:bodyPr>
-          <a:lstStyle/>
-          <a:p>
-            <a:pPr algn="l">
-              <a:lnSpc>
-                <a:spcPct val="145000"/>
-              </a:lnSpc>
-            </a:pPr>
-            <a:r>
-              <a:rPr sz="1080" b="0">
-                <a:solidFill>
-                  <a:srgbClr val="52514E"/>
-                </a:solidFill>
-                <a:latin typeface="맑은 고딕"/>
-                <a:ea typeface="맑은 고딕"/>
-                <a:cs typeface="맑은 고딕"/>
-              </a:rPr>
-              <a:t>이듬해 같은 스크립트로 지수 변화를 이어 보실 때,</a:t>
-            </a:r>
-          </a:p>
-          <a:p>
-            <a:pPr algn="l">
-              <a:lnSpc>
-                <a:spcPct val="145000"/>
+              <a:t>다른 지역에도 — 공간단위 정의(config.py)만 바꾸면 아산·청주 등에도 같은 방식으로 쓸 수 있습니다.</a:t>
+            </a:r>
+          </a:p>
+          <a:p>
+            <a:pPr algn="l">
+              <a:lnSpc>
+                <a:spcPct val="150000"/>
               </a:lnSpc>
               <a:spcBef>
                 <a:spcPts val="0"/>
               </a:spcBef>
             </a:pPr>
             <a:r>
-              <a:rPr sz="1080" b="0">
-                <a:solidFill>
-                  <a:srgbClr val="52514E"/>
-                </a:solidFill>
-                <a:latin typeface="맑은 고딕"/>
-                <a:ea typeface="맑은 고딕"/>
-                <a:cs typeface="맑은 고딕"/>
-              </a:rPr>
-              <a:t>하신 사업이 수치로도 나아졌는지 확인하실 때.</a:t>
-            </a:r>
-          </a:p>
-        </p:txBody>
-      </p:sp>
-      <p:sp>
-        <p:nvSpPr>
-          <p:cNvPr id="25" name="Rounded Rectangle 24"/>
-          <p:cNvSpPr/>
-          <p:nvPr/>
-        </p:nvSpPr>
-        <p:spPr>
-          <a:xfrm>
-            <a:off x="658368" y="5541264"/>
-            <a:ext cx="10874959" cy="786384"/>
-          </a:xfrm>
-          <a:prstGeom prst="roundRect">
-            <a:avLst>
-              <a:gd name="adj" fmla="val 6000"/>
-            </a:avLst>
-          </a:prstGeom>
-          <a:solidFill>
-            <a:srgbClr val="EFF7F3"/>
-          </a:solidFill>
-          <a:ln>
-            <a:noFill/>
-          </a:ln>
-          <a:effectLst/>
-        </p:spPr>
-        <p:style>
-          <a:lnRef idx="1">
-            <a:schemeClr val="accent1"/>
-          </a:lnRef>
-          <a:fillRef idx="3">
-            <a:schemeClr val="accent1"/>
-          </a:fillRef>
-          <a:effectRef idx="2">
-            <a:schemeClr val="accent1"/>
-          </a:effectRef>
-          <a:fontRef idx="minor">
-            <a:schemeClr val="lt1"/>
-          </a:fontRef>
-        </p:style>
-        <p:txBody>
-          <a:bodyPr rtlCol="0" anchor="ctr"/>
-          <a:lstStyle/>
-          <a:p/>
-        </p:txBody>
-      </p:sp>
-      <p:sp>
-        <p:nvSpPr>
-          <p:cNvPr id="26" name="TextBox 25"/>
-          <p:cNvSpPr txBox="1"/>
-          <p:nvPr/>
-        </p:nvSpPr>
-        <p:spPr>
-          <a:xfrm>
-            <a:off x="932688" y="5705856"/>
-            <a:ext cx="10515600" cy="502920"/>
-          </a:xfrm>
-          <a:prstGeom prst="rect">
-            <a:avLst/>
-          </a:prstGeom>
-          <a:noFill/>
-        </p:spPr>
-        <p:txBody>
-          <a:bodyPr wrap="square" lIns="0" rIns="0" tIns="0" bIns="0">
-            <a:spAutoFit/>
-          </a:bodyPr>
-          <a:lstStyle/>
-          <a:p>
-            <a:pPr algn="l">
-              <a:lnSpc>
-                <a:spcPct val="150000"/>
-              </a:lnSpc>
-            </a:pPr>
-            <a:r>
               <a:rPr sz="1200" b="0">
                 <a:solidFill>
                   <a:srgbClr val="12151A"/>
@@ -12732,35 +12393,14 @@
                 <a:ea typeface="맑은 고딕"/>
                 <a:cs typeface="맑은 고딕"/>
               </a:rPr>
-              <a:t>쓰시는 방법 — 연 1회 공공데이터를 새로 받아 스크립트를 실행하시면 모든 자료가 다시 만들어집니다.</a:t>
-            </a:r>
-          </a:p>
-          <a:p>
-            <a:pPr algn="l">
-              <a:lnSpc>
-                <a:spcPct val="150000"/>
-              </a:lnSpc>
-              <a:spcBef>
-                <a:spcPts val="0"/>
-              </a:spcBef>
-            </a:pPr>
-            <a:r>
-              <a:rPr sz="1200" b="0">
-                <a:solidFill>
-                  <a:srgbClr val="12151A"/>
-                </a:solidFill>
-                <a:latin typeface="맑은 고딕"/>
-                <a:ea typeface="맑은 고딕"/>
-                <a:cs typeface="맑은 고딕"/>
-              </a:rPr>
-              <a:t>별도 시스템이나 데이터 구매 없이, 담당자 한 분이 반나절이면 그 해 자료를 준비하실 수 있습니다.</a:t>
-            </a:r>
-          </a:p>
-        </p:txBody>
-      </p:sp>
-      <p:sp>
-        <p:nvSpPr>
-          <p:cNvPr id="27" name="TextBox 26"/>
+              <a:t>원도심 공동화는 천안만의 일이 아니어서, 도움이 된다면 충남 시군이 함께 쓰는 자료가 되어도 좋겠습니다.</a:t>
+            </a:r>
+          </a:p>
+        </p:txBody>
+      </p:sp>
+      <p:sp>
+        <p:nvSpPr>
+          <p:cNvPr id="32" name="TextBox 31"/>
           <p:cNvSpPr txBox="1"/>
           <p:nvPr/>
         </p:nvSpPr>
@@ -12801,7 +12441,7 @@
       </p:sp>
       <p:sp>
         <p:nvSpPr>
-          <p:cNvPr id="28" name="TextBox 27"/>
+          <p:cNvPr id="33" name="TextBox 32"/>
           <p:cNvSpPr txBox="1"/>
           <p:nvPr/>
         </p:nvSpPr>
@@ -12894,7 +12534,7 @@
                 <a:ea typeface="맑은 고딕"/>
                 <a:cs typeface="맑은 고딕"/>
               </a:rPr>
-              <a:t>IMPACT</a:t>
+              <a:t>LIMITATION</a:t>
             </a:r>
           </a:p>
         </p:txBody>
@@ -12935,7 +12575,7 @@
                 <a:ea typeface="맑은 고딕"/>
                 <a:cs typeface="맑은 고딕"/>
               </a:rPr>
-              <a:t>기대효과와 실행 로드맵</a:t>
+              <a:t>저희가 아직 못 한 부분을 먼저 말씀드립니다</a:t>
             </a:r>
           </a:p>
         </p:txBody>
@@ -12948,58 +12588,62 @@
         </p:nvSpPr>
         <p:spPr>
           <a:xfrm>
-            <a:off x="658368" y="2084831"/>
-            <a:ext cx="5486400" cy="274320"/>
-          </a:xfrm>
-          <a:prstGeom prst="rect">
-            <a:avLst/>
-          </a:prstGeom>
-          <a:noFill/>
-        </p:spPr>
-        <p:txBody>
-          <a:bodyPr wrap="square" lIns="0" rIns="0" tIns="0" bIns="0">
-            <a:spAutoFit/>
-          </a:bodyPr>
-          <a:lstStyle/>
-          <a:p>
-            <a:pPr algn="l">
-              <a:lnSpc>
-                <a:spcPct val="135000"/>
-              </a:lnSpc>
-            </a:pPr>
-            <a:r>
-              <a:rPr sz="1450" b="1">
-                <a:solidFill>
-                  <a:srgbClr val="12151A"/>
-                </a:solidFill>
-                <a:latin typeface="맑은 고딕"/>
-                <a:ea typeface="맑은 고딕"/>
-                <a:cs typeface="맑은 고딕"/>
-              </a:rPr>
-              <a:t>기대효과</a:t>
-            </a:r>
-          </a:p>
-        </p:txBody>
-      </p:sp>
-      <p:sp>
-        <p:nvSpPr>
-          <p:cNvPr id="5" name="Rectangle 4"/>
+            <a:off x="658368" y="1517904"/>
+            <a:ext cx="10874959" cy="411480"/>
+          </a:xfrm>
+          <a:prstGeom prst="rect">
+            <a:avLst/>
+          </a:prstGeom>
+          <a:noFill/>
+        </p:spPr>
+        <p:txBody>
+          <a:bodyPr wrap="square" lIns="0" rIns="0" tIns="0" bIns="0">
+            <a:spAutoFit/>
+          </a:bodyPr>
+          <a:lstStyle/>
+          <a:p>
+            <a:pPr algn="l">
+              <a:lnSpc>
+                <a:spcPct val="145000"/>
+              </a:lnSpc>
+            </a:pPr>
+            <a:r>
+              <a:rPr sz="1350" b="0">
+                <a:solidFill>
+                  <a:srgbClr val="52514E"/>
+                </a:solidFill>
+                <a:latin typeface="맑은 고딕"/>
+                <a:ea typeface="맑은 고딕"/>
+                <a:cs typeface="맑은 고딕"/>
+              </a:rPr>
+              <a:t>행정에 쓰이는 자료인 만큼, 어디까지 믿고 쓰실 수 있는지 분명히 알려드리는 것이 도리라고 생각했습니다.</a:t>
+            </a:r>
+          </a:p>
+        </p:txBody>
+      </p:sp>
+      <p:sp>
+        <p:nvSpPr>
+          <p:cNvPr id="5" name="Rounded Rectangle 4"/>
           <p:cNvSpPr/>
           <p:nvPr/>
         </p:nvSpPr>
         <p:spPr>
           <a:xfrm>
-            <a:off x="658368" y="2468880"/>
-            <a:ext cx="68580" cy="566928"/>
-          </a:xfrm>
-          <a:prstGeom prst="rect">
-            <a:avLst/>
+            <a:off x="658368" y="2286000"/>
+            <a:ext cx="10874959" cy="896112"/>
+          </a:xfrm>
+          <a:prstGeom prst="roundRect">
+            <a:avLst>
+              <a:gd name="adj" fmla="val 6000"/>
+            </a:avLst>
           </a:prstGeom>
           <a:solidFill>
-            <a:srgbClr val="2A78D6"/>
+            <a:srgbClr val="FFFFFF"/>
           </a:solidFill>
-          <a:ln>
-            <a:noFill/>
+          <a:ln w="12700">
+            <a:solidFill>
+              <a:srgbClr val="E4E7EC"/>
+            </a:solidFill>
           </a:ln>
           <a:effectLst/>
         </p:spPr>
@@ -13025,757 +12669,14 @@
       </p:sp>
       <p:sp>
         <p:nvSpPr>
-          <p:cNvPr id="6" name="TextBox 5"/>
-          <p:cNvSpPr txBox="1"/>
-          <p:nvPr/>
-        </p:nvSpPr>
-        <p:spPr>
-          <a:xfrm>
-            <a:off x="877824" y="2468880"/>
-            <a:ext cx="5120640" cy="256032"/>
-          </a:xfrm>
-          <a:prstGeom prst="rect">
-            <a:avLst/>
-          </a:prstGeom>
-          <a:noFill/>
-        </p:spPr>
-        <p:txBody>
-          <a:bodyPr wrap="square" lIns="0" rIns="0" tIns="0" bIns="0">
-            <a:spAutoFit/>
-          </a:bodyPr>
-          <a:lstStyle/>
-          <a:p>
-            <a:pPr algn="l">
-              <a:lnSpc>
-                <a:spcPct val="135000"/>
-              </a:lnSpc>
-            </a:pPr>
-            <a:r>
-              <a:rPr sz="1250" b="1">
-                <a:solidFill>
-                  <a:srgbClr val="12151A"/>
-                </a:solidFill>
-                <a:latin typeface="맑은 고딕"/>
-                <a:ea typeface="맑은 고딕"/>
-                <a:cs typeface="맑은 고딕"/>
-              </a:rPr>
-              <a:t>시민께 닿는 범위</a:t>
-            </a:r>
-          </a:p>
-        </p:txBody>
-      </p:sp>
-      <p:sp>
-        <p:nvSpPr>
-          <p:cNvPr id="7" name="TextBox 6"/>
-          <p:cNvSpPr txBox="1"/>
-          <p:nvPr/>
-        </p:nvSpPr>
-        <p:spPr>
-          <a:xfrm>
-            <a:off x="877824" y="2743200"/>
-            <a:ext cx="5120640" cy="365760"/>
-          </a:xfrm>
-          <a:prstGeom prst="rect">
-            <a:avLst/>
-          </a:prstGeom>
-          <a:noFill/>
-        </p:spPr>
-        <p:txBody>
-          <a:bodyPr wrap="square" lIns="0" rIns="0" tIns="0" bIns="0">
-            <a:spAutoFit/>
-          </a:bodyPr>
-          <a:lstStyle/>
-          <a:p>
-            <a:pPr algn="l">
-              <a:lnSpc>
-                <a:spcPct val="140000"/>
-              </a:lnSpc>
-            </a:pPr>
-            <a:r>
-              <a:rPr sz="1100" b="0">
-                <a:solidFill>
-                  <a:srgbClr val="52514E"/>
-                </a:solidFill>
-                <a:latin typeface="맑은 고딕"/>
-                <a:ea typeface="맑은 고딕"/>
-                <a:cs typeface="맑은 고딕"/>
-              </a:rPr>
-              <a:t>효과가 큰 곳부터 살펴보면, 같은 예산으로도 더 많은 분께 닿을 수 있습니다</a:t>
-            </a:r>
-          </a:p>
-        </p:txBody>
-      </p:sp>
-      <p:sp>
-        <p:nvSpPr>
-          <p:cNvPr id="8" name="Rectangle 7"/>
+          <p:cNvPr id="6" name="Rectangle 5"/>
           <p:cNvSpPr/>
           <p:nvPr/>
         </p:nvSpPr>
         <p:spPr>
           <a:xfrm>
-            <a:off x="658368" y="3218688"/>
-            <a:ext cx="68580" cy="566928"/>
-          </a:xfrm>
-          <a:prstGeom prst="rect">
-            <a:avLst/>
-          </a:prstGeom>
-          <a:solidFill>
-            <a:srgbClr val="2A78D6"/>
-          </a:solidFill>
-          <a:ln>
-            <a:noFill/>
-          </a:ln>
-          <a:effectLst/>
-        </p:spPr>
-        <p:style>
-          <a:lnRef idx="1">
-            <a:schemeClr val="accent1"/>
-          </a:lnRef>
-          <a:fillRef idx="3">
-            <a:schemeClr val="accent1"/>
-          </a:fillRef>
-          <a:effectRef idx="2">
-            <a:schemeClr val="accent1"/>
-          </a:effectRef>
-          <a:fontRef idx="minor">
-            <a:schemeClr val="lt1"/>
-          </a:fontRef>
-        </p:style>
-        <p:txBody>
-          <a:bodyPr rtlCol="0" anchor="ctr"/>
-          <a:lstStyle/>
-          <a:p/>
-        </p:txBody>
-      </p:sp>
-      <p:sp>
-        <p:nvSpPr>
-          <p:cNvPr id="9" name="TextBox 8"/>
-          <p:cNvSpPr txBox="1"/>
-          <p:nvPr/>
-        </p:nvSpPr>
-        <p:spPr>
-          <a:xfrm>
-            <a:off x="877824" y="3218688"/>
-            <a:ext cx="5120640" cy="256032"/>
-          </a:xfrm>
-          <a:prstGeom prst="rect">
-            <a:avLst/>
-          </a:prstGeom>
-          <a:noFill/>
-        </p:spPr>
-        <p:txBody>
-          <a:bodyPr wrap="square" lIns="0" rIns="0" tIns="0" bIns="0">
-            <a:spAutoFit/>
-          </a:bodyPr>
-          <a:lstStyle/>
-          <a:p>
-            <a:pPr algn="l">
-              <a:lnSpc>
-                <a:spcPct val="135000"/>
-              </a:lnSpc>
-            </a:pPr>
-            <a:r>
-              <a:rPr sz="1250" b="1">
-                <a:solidFill>
-                  <a:srgbClr val="12151A"/>
-                </a:solidFill>
-                <a:latin typeface="맑은 고딕"/>
-                <a:ea typeface="맑은 고딕"/>
-                <a:cs typeface="맑은 고딕"/>
-              </a:rPr>
-              <a:t>살펴보는 시점</a:t>
-            </a:r>
-          </a:p>
-        </p:txBody>
-      </p:sp>
-      <p:sp>
-        <p:nvSpPr>
-          <p:cNvPr id="10" name="TextBox 9"/>
-          <p:cNvSpPr txBox="1"/>
-          <p:nvPr/>
-        </p:nvSpPr>
-        <p:spPr>
-          <a:xfrm>
-            <a:off x="877824" y="3493008"/>
-            <a:ext cx="5120640" cy="365760"/>
-          </a:xfrm>
-          <a:prstGeom prst="rect">
-            <a:avLst/>
-          </a:prstGeom>
-          <a:noFill/>
-        </p:spPr>
-        <p:txBody>
-          <a:bodyPr wrap="square" lIns="0" rIns="0" tIns="0" bIns="0">
-            <a:spAutoFit/>
-          </a:bodyPr>
-          <a:lstStyle/>
-          <a:p>
-            <a:pPr algn="l">
-              <a:lnSpc>
-                <a:spcPct val="140000"/>
-              </a:lnSpc>
-            </a:pPr>
-            <a:r>
-              <a:rPr sz="1100" b="0">
-                <a:solidFill>
-                  <a:srgbClr val="52514E"/>
-                </a:solidFill>
-                <a:latin typeface="맑은 고딕"/>
-                <a:ea typeface="맑은 고딕"/>
-                <a:cs typeface="맑은 고딕"/>
-              </a:rPr>
-              <a:t>어려워진 뒤가 아니라, 3년 앞을 미리 짚어볼 수 있습니다</a:t>
-            </a:r>
-          </a:p>
-        </p:txBody>
-      </p:sp>
-      <p:sp>
-        <p:nvSpPr>
-          <p:cNvPr id="11" name="Rectangle 10"/>
-          <p:cNvSpPr/>
-          <p:nvPr/>
-        </p:nvSpPr>
-        <p:spPr>
-          <a:xfrm>
-            <a:off x="658368" y="3968496"/>
-            <a:ext cx="68580" cy="566928"/>
-          </a:xfrm>
-          <a:prstGeom prst="rect">
-            <a:avLst/>
-          </a:prstGeom>
-          <a:solidFill>
-            <a:srgbClr val="2A78D6"/>
-          </a:solidFill>
-          <a:ln>
-            <a:noFill/>
-          </a:ln>
-          <a:effectLst/>
-        </p:spPr>
-        <p:style>
-          <a:lnRef idx="1">
-            <a:schemeClr val="accent1"/>
-          </a:lnRef>
-          <a:fillRef idx="3">
-            <a:schemeClr val="accent1"/>
-          </a:fillRef>
-          <a:effectRef idx="2">
-            <a:schemeClr val="accent1"/>
-          </a:effectRef>
-          <a:fontRef idx="minor">
-            <a:schemeClr val="lt1"/>
-          </a:fontRef>
-        </p:style>
-        <p:txBody>
-          <a:bodyPr rtlCol="0" anchor="ctr"/>
-          <a:lstStyle/>
-          <a:p/>
-        </p:txBody>
-      </p:sp>
-      <p:sp>
-        <p:nvSpPr>
-          <p:cNvPr id="12" name="TextBox 11"/>
-          <p:cNvSpPr txBox="1"/>
-          <p:nvPr/>
-        </p:nvSpPr>
-        <p:spPr>
-          <a:xfrm>
-            <a:off x="877824" y="3968496"/>
-            <a:ext cx="5120640" cy="256032"/>
-          </a:xfrm>
-          <a:prstGeom prst="rect">
-            <a:avLst/>
-          </a:prstGeom>
-          <a:noFill/>
-        </p:spPr>
-        <p:txBody>
-          <a:bodyPr wrap="square" lIns="0" rIns="0" tIns="0" bIns="0">
-            <a:spAutoFit/>
-          </a:bodyPr>
-          <a:lstStyle/>
-          <a:p>
-            <a:pPr algn="l">
-              <a:lnSpc>
-                <a:spcPct val="135000"/>
-              </a:lnSpc>
-            </a:pPr>
-            <a:r>
-              <a:rPr sz="1250" b="1">
-                <a:solidFill>
-                  <a:srgbClr val="12151A"/>
-                </a:solidFill>
-                <a:latin typeface="맑은 고딕"/>
-                <a:ea typeface="맑은 고딕"/>
-                <a:cs typeface="맑은 고딕"/>
-              </a:rPr>
-              <a:t>설명하실 때</a:t>
-            </a:r>
-          </a:p>
-        </p:txBody>
-      </p:sp>
-      <p:sp>
-        <p:nvSpPr>
-          <p:cNvPr id="13" name="TextBox 12"/>
-          <p:cNvSpPr txBox="1"/>
-          <p:nvPr/>
-        </p:nvSpPr>
-        <p:spPr>
-          <a:xfrm>
-            <a:off x="877824" y="4242816"/>
-            <a:ext cx="5120640" cy="365760"/>
-          </a:xfrm>
-          <a:prstGeom prst="rect">
-            <a:avLst/>
-          </a:prstGeom>
-          <a:noFill/>
-        </p:spPr>
-        <p:txBody>
-          <a:bodyPr wrap="square" lIns="0" rIns="0" tIns="0" bIns="0">
-            <a:spAutoFit/>
-          </a:bodyPr>
-          <a:lstStyle/>
-          <a:p>
-            <a:pPr algn="l">
-              <a:lnSpc>
-                <a:spcPct val="140000"/>
-              </a:lnSpc>
-            </a:pPr>
-            <a:r>
-              <a:rPr sz="1100" b="0">
-                <a:solidFill>
-                  <a:srgbClr val="52514E"/>
-                </a:solidFill>
-                <a:latin typeface="맑은 고딕"/>
-                <a:ea typeface="맑은 고딕"/>
-                <a:cs typeface="맑은 고딕"/>
-              </a:rPr>
-              <a:t>판단 근거를 항목별 수치로 정리해 드려 설명 부담을 조금 덜어드립니다</a:t>
-            </a:r>
-          </a:p>
-        </p:txBody>
-      </p:sp>
-      <p:sp>
-        <p:nvSpPr>
-          <p:cNvPr id="14" name="Rectangle 13"/>
-          <p:cNvSpPr/>
-          <p:nvPr/>
-        </p:nvSpPr>
-        <p:spPr>
-          <a:xfrm>
-            <a:off x="658368" y="4718304"/>
-            <a:ext cx="68580" cy="566928"/>
-          </a:xfrm>
-          <a:prstGeom prst="rect">
-            <a:avLst/>
-          </a:prstGeom>
-          <a:solidFill>
-            <a:srgbClr val="2A78D6"/>
-          </a:solidFill>
-          <a:ln>
-            <a:noFill/>
-          </a:ln>
-          <a:effectLst/>
-        </p:spPr>
-        <p:style>
-          <a:lnRef idx="1">
-            <a:schemeClr val="accent1"/>
-          </a:lnRef>
-          <a:fillRef idx="3">
-            <a:schemeClr val="accent1"/>
-          </a:fillRef>
-          <a:effectRef idx="2">
-            <a:schemeClr val="accent1"/>
-          </a:effectRef>
-          <a:fontRef idx="minor">
-            <a:schemeClr val="lt1"/>
-          </a:fontRef>
-        </p:style>
-        <p:txBody>
-          <a:bodyPr rtlCol="0" anchor="ctr"/>
-          <a:lstStyle/>
-          <a:p/>
-        </p:txBody>
-      </p:sp>
-      <p:sp>
-        <p:nvSpPr>
-          <p:cNvPr id="15" name="TextBox 14"/>
-          <p:cNvSpPr txBox="1"/>
-          <p:nvPr/>
-        </p:nvSpPr>
-        <p:spPr>
-          <a:xfrm>
-            <a:off x="877824" y="4718304"/>
-            <a:ext cx="5120640" cy="256032"/>
-          </a:xfrm>
-          <a:prstGeom prst="rect">
-            <a:avLst/>
-          </a:prstGeom>
-          <a:noFill/>
-        </p:spPr>
-        <p:txBody>
-          <a:bodyPr wrap="square" lIns="0" rIns="0" tIns="0" bIns="0">
-            <a:spAutoFit/>
-          </a:bodyPr>
-          <a:lstStyle/>
-          <a:p>
-            <a:pPr algn="l">
-              <a:lnSpc>
-                <a:spcPct val="135000"/>
-              </a:lnSpc>
-            </a:pPr>
-            <a:r>
-              <a:rPr sz="1250" b="1">
-                <a:solidFill>
-                  <a:srgbClr val="12151A"/>
-                </a:solidFill>
-                <a:latin typeface="맑은 고딕"/>
-                <a:ea typeface="맑은 고딕"/>
-                <a:cs typeface="맑은 고딕"/>
-              </a:rPr>
-              <a:t>드는 비용</a:t>
-            </a:r>
-          </a:p>
-        </p:txBody>
-      </p:sp>
-      <p:sp>
-        <p:nvSpPr>
-          <p:cNvPr id="16" name="TextBox 15"/>
-          <p:cNvSpPr txBox="1"/>
-          <p:nvPr/>
-        </p:nvSpPr>
-        <p:spPr>
-          <a:xfrm>
-            <a:off x="877824" y="4992624"/>
-            <a:ext cx="5120640" cy="365760"/>
-          </a:xfrm>
-          <a:prstGeom prst="rect">
-            <a:avLst/>
-          </a:prstGeom>
-          <a:noFill/>
-        </p:spPr>
-        <p:txBody>
-          <a:bodyPr wrap="square" lIns="0" rIns="0" tIns="0" bIns="0">
-            <a:spAutoFit/>
-          </a:bodyPr>
-          <a:lstStyle/>
-          <a:p>
-            <a:pPr algn="l">
-              <a:lnSpc>
-                <a:spcPct val="140000"/>
-              </a:lnSpc>
-            </a:pPr>
-            <a:r>
-              <a:rPr sz="1100" b="0">
-                <a:solidFill>
-                  <a:srgbClr val="52514E"/>
-                </a:solidFill>
-                <a:latin typeface="맑은 고딕"/>
-                <a:ea typeface="맑은 고딕"/>
-                <a:cs typeface="맑은 고딕"/>
-              </a:rPr>
-              <a:t>데이터 구매나 시스템 없이, 스크립트 재실행만으로 매년 갱신됩니다</a:t>
-            </a:r>
-          </a:p>
-        </p:txBody>
-      </p:sp>
-      <p:sp>
-        <p:nvSpPr>
-          <p:cNvPr id="17" name="TextBox 16"/>
-          <p:cNvSpPr txBox="1"/>
-          <p:nvPr/>
-        </p:nvSpPr>
-        <p:spPr>
-          <a:xfrm>
-            <a:off x="6510528" y="2084831"/>
-            <a:ext cx="5029200" cy="274320"/>
-          </a:xfrm>
-          <a:prstGeom prst="rect">
-            <a:avLst/>
-          </a:prstGeom>
-          <a:noFill/>
-        </p:spPr>
-        <p:txBody>
-          <a:bodyPr wrap="square" lIns="0" rIns="0" tIns="0" bIns="0">
-            <a:spAutoFit/>
-          </a:bodyPr>
-          <a:lstStyle/>
-          <a:p>
-            <a:pPr algn="l">
-              <a:lnSpc>
-                <a:spcPct val="135000"/>
-              </a:lnSpc>
-            </a:pPr>
-            <a:r>
-              <a:rPr sz="1450" b="1">
-                <a:solidFill>
-                  <a:srgbClr val="12151A"/>
-                </a:solidFill>
-                <a:latin typeface="맑은 고딕"/>
-                <a:ea typeface="맑은 고딕"/>
-                <a:cs typeface="맑은 고딕"/>
-              </a:rPr>
-              <a:t>실행 로드맵</a:t>
-            </a:r>
-          </a:p>
-        </p:txBody>
-      </p:sp>
-      <p:sp>
-        <p:nvSpPr>
-          <p:cNvPr id="18" name="Rectangle 17"/>
-          <p:cNvSpPr/>
-          <p:nvPr/>
-        </p:nvSpPr>
-        <p:spPr>
-          <a:xfrm>
-            <a:off x="6510528" y="2468880"/>
-            <a:ext cx="68580" cy="566928"/>
-          </a:xfrm>
-          <a:prstGeom prst="rect">
-            <a:avLst/>
-          </a:prstGeom>
-          <a:solidFill>
-            <a:srgbClr val="1BAF7A"/>
-          </a:solidFill>
-          <a:ln>
-            <a:noFill/>
-          </a:ln>
-          <a:effectLst/>
-        </p:spPr>
-        <p:style>
-          <a:lnRef idx="1">
-            <a:schemeClr val="accent1"/>
-          </a:lnRef>
-          <a:fillRef idx="3">
-            <a:schemeClr val="accent1"/>
-          </a:fillRef>
-          <a:effectRef idx="2">
-            <a:schemeClr val="accent1"/>
-          </a:effectRef>
-          <a:fontRef idx="minor">
-            <a:schemeClr val="lt1"/>
-          </a:fontRef>
-        </p:style>
-        <p:txBody>
-          <a:bodyPr rtlCol="0" anchor="ctr"/>
-          <a:lstStyle/>
-          <a:p/>
-        </p:txBody>
-      </p:sp>
-      <p:sp>
-        <p:nvSpPr>
-          <p:cNvPr id="19" name="TextBox 18"/>
-          <p:cNvSpPr txBox="1"/>
-          <p:nvPr/>
-        </p:nvSpPr>
-        <p:spPr>
-          <a:xfrm>
-            <a:off x="6729983" y="2468880"/>
-            <a:ext cx="4754880" cy="256032"/>
-          </a:xfrm>
-          <a:prstGeom prst="rect">
-            <a:avLst/>
-          </a:prstGeom>
-          <a:noFill/>
-        </p:spPr>
-        <p:txBody>
-          <a:bodyPr wrap="square" lIns="0" rIns="0" tIns="0" bIns="0">
-            <a:spAutoFit/>
-          </a:bodyPr>
-          <a:lstStyle/>
-          <a:p>
-            <a:pPr algn="l">
-              <a:lnSpc>
-                <a:spcPct val="135000"/>
-              </a:lnSpc>
-            </a:pPr>
-            <a:r>
-              <a:rPr sz="1250" b="1">
-                <a:solidFill>
-                  <a:srgbClr val="1BAF7A"/>
-                </a:solidFill>
-                <a:latin typeface="맑은 고딕"/>
-                <a:ea typeface="맑은 고딕"/>
-                <a:cs typeface="맑은 고딕"/>
-              </a:rPr>
-              <a:t>1단계 · 즉시</a:t>
-            </a:r>
-          </a:p>
-        </p:txBody>
-      </p:sp>
-      <p:sp>
-        <p:nvSpPr>
-          <p:cNvPr id="20" name="TextBox 19"/>
-          <p:cNvSpPr txBox="1"/>
-          <p:nvPr/>
-        </p:nvSpPr>
-        <p:spPr>
-          <a:xfrm>
-            <a:off x="6729983" y="2743200"/>
-            <a:ext cx="4754880" cy="365760"/>
-          </a:xfrm>
-          <a:prstGeom prst="rect">
-            <a:avLst/>
-          </a:prstGeom>
-          <a:noFill/>
-        </p:spPr>
-        <p:txBody>
-          <a:bodyPr wrap="square" lIns="0" rIns="0" tIns="0" bIns="0">
-            <a:spAutoFit/>
-          </a:bodyPr>
-          <a:lstStyle/>
-          <a:p>
-            <a:pPr algn="l">
-              <a:lnSpc>
-                <a:spcPct val="140000"/>
-              </a:lnSpc>
-            </a:pPr>
-            <a:r>
-              <a:rPr sz="1100" b="0">
-                <a:solidFill>
-                  <a:srgbClr val="52514E"/>
-                </a:solidFill>
-                <a:latin typeface="맑은 고딕"/>
-                <a:ea typeface="맑은 고딕"/>
-                <a:cs typeface="맑은 고딕"/>
-              </a:rPr>
-              <a:t>본 스크립트로 천안시 25개 생활권 기준선 진단 확정</a:t>
-            </a:r>
-          </a:p>
-        </p:txBody>
-      </p:sp>
-      <p:sp>
-        <p:nvSpPr>
-          <p:cNvPr id="21" name="Rectangle 20"/>
-          <p:cNvSpPr/>
-          <p:nvPr/>
-        </p:nvSpPr>
-        <p:spPr>
-          <a:xfrm>
-            <a:off x="6510528" y="3218688"/>
-            <a:ext cx="68580" cy="566928"/>
-          </a:xfrm>
-          <a:prstGeom prst="rect">
-            <a:avLst/>
-          </a:prstGeom>
-          <a:solidFill>
-            <a:srgbClr val="2A78D6"/>
-          </a:solidFill>
-          <a:ln>
-            <a:noFill/>
-          </a:ln>
-          <a:effectLst/>
-        </p:spPr>
-        <p:style>
-          <a:lnRef idx="1">
-            <a:schemeClr val="accent1"/>
-          </a:lnRef>
-          <a:fillRef idx="3">
-            <a:schemeClr val="accent1"/>
-          </a:fillRef>
-          <a:effectRef idx="2">
-            <a:schemeClr val="accent1"/>
-          </a:effectRef>
-          <a:fontRef idx="minor">
-            <a:schemeClr val="lt1"/>
-          </a:fontRef>
-        </p:style>
-        <p:txBody>
-          <a:bodyPr rtlCol="0" anchor="ctr"/>
-          <a:lstStyle/>
-          <a:p/>
-        </p:txBody>
-      </p:sp>
-      <p:sp>
-        <p:nvSpPr>
-          <p:cNvPr id="22" name="TextBox 21"/>
-          <p:cNvSpPr txBox="1"/>
-          <p:nvPr/>
-        </p:nvSpPr>
-        <p:spPr>
-          <a:xfrm>
-            <a:off x="6729983" y="3218688"/>
-            <a:ext cx="4754880" cy="256032"/>
-          </a:xfrm>
-          <a:prstGeom prst="rect">
-            <a:avLst/>
-          </a:prstGeom>
-          <a:noFill/>
-        </p:spPr>
-        <p:txBody>
-          <a:bodyPr wrap="square" lIns="0" rIns="0" tIns="0" bIns="0">
-            <a:spAutoFit/>
-          </a:bodyPr>
-          <a:lstStyle/>
-          <a:p>
-            <a:pPr algn="l">
-              <a:lnSpc>
-                <a:spcPct val="135000"/>
-              </a:lnSpc>
-            </a:pPr>
-            <a:r>
-              <a:rPr sz="1250" b="1">
-                <a:solidFill>
-                  <a:srgbClr val="2A78D6"/>
-                </a:solidFill>
-                <a:latin typeface="맑은 고딕"/>
-                <a:ea typeface="맑은 고딕"/>
-                <a:cs typeface="맑은 고딕"/>
-              </a:rPr>
-              <a:t>2단계 · 3개월</a:t>
-            </a:r>
-          </a:p>
-        </p:txBody>
-      </p:sp>
-      <p:sp>
-        <p:nvSpPr>
-          <p:cNvPr id="23" name="TextBox 22"/>
-          <p:cNvSpPr txBox="1"/>
-          <p:nvPr/>
-        </p:nvSpPr>
-        <p:spPr>
-          <a:xfrm>
-            <a:off x="6729983" y="3493008"/>
-            <a:ext cx="4754880" cy="365760"/>
-          </a:xfrm>
-          <a:prstGeom prst="rect">
-            <a:avLst/>
-          </a:prstGeom>
-          <a:noFill/>
-        </p:spPr>
-        <p:txBody>
-          <a:bodyPr wrap="square" lIns="0" rIns="0" tIns="0" bIns="0">
-            <a:spAutoFit/>
-          </a:bodyPr>
-          <a:lstStyle/>
-          <a:p>
-            <a:pPr algn="l">
-              <a:lnSpc>
-                <a:spcPct val="140000"/>
-              </a:lnSpc>
-            </a:pPr>
-            <a:r>
-              <a:rPr sz="1100" b="0">
-                <a:solidFill>
-                  <a:srgbClr val="52514E"/>
-                </a:solidFill>
-                <a:latin typeface="맑은 고딕"/>
-                <a:ea typeface="맑은 고딕"/>
-                <a:cs typeface="맑은 고딕"/>
-              </a:rPr>
-              <a:t>천안시 내부 행정데이터(인허가 원장·건축물대장·복지수급) 연계로 지표 정밀화</a:t>
-            </a:r>
-          </a:p>
-        </p:txBody>
-      </p:sp>
-      <p:sp>
-        <p:nvSpPr>
-          <p:cNvPr id="24" name="Rectangle 23"/>
-          <p:cNvSpPr/>
-          <p:nvPr/>
-        </p:nvSpPr>
-        <p:spPr>
-          <a:xfrm>
-            <a:off x="6510528" y="3968496"/>
-            <a:ext cx="68580" cy="566928"/>
+            <a:off x="658368" y="2286000"/>
+            <a:ext cx="68580" cy="896112"/>
           </a:xfrm>
           <a:prstGeom prst="rect">
             <a:avLst/>
@@ -13810,14 +12711,14 @@
       </p:sp>
       <p:sp>
         <p:nvSpPr>
-          <p:cNvPr id="25" name="TextBox 24"/>
-          <p:cNvSpPr txBox="1"/>
-          <p:nvPr/>
-        </p:nvSpPr>
-        <p:spPr>
-          <a:xfrm>
-            <a:off x="6729983" y="3968496"/>
-            <a:ext cx="4754880" cy="256032"/>
+          <p:cNvPr id="7" name="TextBox 6"/>
+          <p:cNvSpPr txBox="1"/>
+          <p:nvPr/>
+        </p:nvSpPr>
+        <p:spPr>
+          <a:xfrm>
+            <a:off x="932688" y="2414016"/>
+            <a:ext cx="2103120" cy="256032"/>
           </a:xfrm>
           <a:prstGeom prst="rect">
             <a:avLst/>
@@ -13844,21 +12745,62 @@
                 <a:ea typeface="맑은 고딕"/>
                 <a:cs typeface="맑은 고딕"/>
               </a:rPr>
-              <a:t>3단계 · 6개월</a:t>
-            </a:r>
-          </a:p>
-        </p:txBody>
-      </p:sp>
-      <p:sp>
-        <p:nvSpPr>
-          <p:cNvPr id="26" name="TextBox 25"/>
-          <p:cNvSpPr txBox="1"/>
-          <p:nvPr/>
-        </p:nvSpPr>
-        <p:spPr>
-          <a:xfrm>
-            <a:off x="6729983" y="4242816"/>
-            <a:ext cx="4754880" cy="365760"/>
+              <a:t>예측 성능</a:t>
+            </a:r>
+          </a:p>
+        </p:txBody>
+      </p:sp>
+      <p:sp>
+        <p:nvSpPr>
+          <p:cNvPr id="8" name="TextBox 7"/>
+          <p:cNvSpPr txBox="1"/>
+          <p:nvPr/>
+        </p:nvSpPr>
+        <p:spPr>
+          <a:xfrm>
+            <a:off x="3172968" y="2414016"/>
+            <a:ext cx="8046720" cy="256032"/>
+          </a:xfrm>
+          <a:prstGeom prst="rect">
+            <a:avLst/>
+          </a:prstGeom>
+          <a:noFill/>
+        </p:spPr>
+        <p:txBody>
+          <a:bodyPr wrap="square" lIns="0" rIns="0" tIns="0" bIns="0">
+            <a:spAutoFit/>
+          </a:bodyPr>
+          <a:lstStyle/>
+          <a:p>
+            <a:pPr algn="l">
+              <a:lnSpc>
+                <a:spcPct val="135000"/>
+              </a:lnSpc>
+            </a:pPr>
+            <a:r>
+              <a:rPr sz="1200" b="1">
+                <a:solidFill>
+                  <a:srgbClr val="12151A"/>
+                </a:solidFill>
+                <a:latin typeface="맑은 고딕"/>
+                <a:ea typeface="맑은 고딕"/>
+                <a:cs typeface="맑은 고딕"/>
+              </a:rPr>
+              <a:t>3년 뒤 악화·개선 '방향'은 어느 정도 맞히지만, 변화의 '크기'까지는 아직 부족합니다.</a:t>
+            </a:r>
+          </a:p>
+        </p:txBody>
+      </p:sp>
+      <p:sp>
+        <p:nvSpPr>
+          <p:cNvPr id="9" name="TextBox 8"/>
+          <p:cNvSpPr txBox="1"/>
+          <p:nvPr/>
+        </p:nvSpPr>
+        <p:spPr>
+          <a:xfrm>
+            <a:off x="3172968" y="2706624"/>
+            <a:ext cx="8046720" cy="384048"/>
           </a:xfrm>
           <a:prstGeom prst="rect">
             <a:avLst/>
@@ -13877,7 +12819,7 @@
               </a:lnSpc>
             </a:pPr>
             <a:r>
-              <a:rPr sz="1100" b="0">
+              <a:rPr sz="1080" b="0">
                 <a:solidFill>
                   <a:srgbClr val="52514E"/>
                 </a:solidFill>
@@ -13885,27 +12827,73 @@
                 <a:ea typeface="맑은 고딕"/>
                 <a:cs typeface="맑은 고딕"/>
               </a:rPr>
-              <a:t>500m 격자 단위로 공간해상도 상향 — 표본 확대로 예측모델 성능 개선</a:t>
-            </a:r>
-          </a:p>
-        </p:txBody>
-      </p:sp>
-      <p:sp>
-        <p:nvSpPr>
-          <p:cNvPr id="27" name="Rectangle 26"/>
+              <a:t>→ 위험도 수준은 자기상관이 강해 '그대로 간다'는 예측이 이미 강력한 기준선입니다. 현재는 인구 축만 실데이터라, 상권 개·폐업 시계열이 더해지면 나아질 것으로 봅니다.</a:t>
+            </a:r>
+          </a:p>
+        </p:txBody>
+      </p:sp>
+      <p:sp>
+        <p:nvSpPr>
+          <p:cNvPr id="10" name="Rounded Rectangle 9"/>
           <p:cNvSpPr/>
           <p:nvPr/>
         </p:nvSpPr>
         <p:spPr>
           <a:xfrm>
-            <a:off x="6510528" y="4718304"/>
-            <a:ext cx="68580" cy="566928"/>
-          </a:xfrm>
-          <a:prstGeom prst="rect">
-            <a:avLst/>
+            <a:off x="658368" y="3310128"/>
+            <a:ext cx="10874959" cy="896112"/>
+          </a:xfrm>
+          <a:prstGeom prst="roundRect">
+            <a:avLst>
+              <a:gd name="adj" fmla="val 6000"/>
+            </a:avLst>
           </a:prstGeom>
           <a:solidFill>
-            <a:srgbClr val="2A78D6"/>
+            <a:srgbClr val="FFFFFF"/>
+          </a:solidFill>
+          <a:ln w="12700">
+            <a:solidFill>
+              <a:srgbClr val="E4E7EC"/>
+            </a:solidFill>
+          </a:ln>
+          <a:effectLst/>
+        </p:spPr>
+        <p:style>
+          <a:lnRef idx="1">
+            <a:schemeClr val="accent1"/>
+          </a:lnRef>
+          <a:fillRef idx="3">
+            <a:schemeClr val="accent1"/>
+          </a:fillRef>
+          <a:effectRef idx="2">
+            <a:schemeClr val="accent1"/>
+          </a:effectRef>
+          <a:fontRef idx="minor">
+            <a:schemeClr val="lt1"/>
+          </a:fontRef>
+        </p:style>
+        <p:txBody>
+          <a:bodyPr rtlCol="0" anchor="ctr"/>
+          <a:lstStyle/>
+          <a:p/>
+        </p:txBody>
+      </p:sp>
+      <p:sp>
+        <p:nvSpPr>
+          <p:cNvPr id="11" name="Rectangle 10"/>
+          <p:cNvSpPr/>
+          <p:nvPr/>
+        </p:nvSpPr>
+        <p:spPr>
+          <a:xfrm>
+            <a:off x="658368" y="3310128"/>
+            <a:ext cx="68580" cy="896112"/>
+          </a:xfrm>
+          <a:prstGeom prst="rect">
+            <a:avLst/>
+          </a:prstGeom>
+          <a:solidFill>
+            <a:srgbClr val="EDA100"/>
           </a:solidFill>
           <a:ln>
             <a:noFill/>
@@ -13934,14 +12922,14 @@
       </p:sp>
       <p:sp>
         <p:nvSpPr>
-          <p:cNvPr id="28" name="TextBox 27"/>
-          <p:cNvSpPr txBox="1"/>
-          <p:nvPr/>
-        </p:nvSpPr>
-        <p:spPr>
-          <a:xfrm>
-            <a:off x="6729983" y="4718304"/>
-            <a:ext cx="4754880" cy="256032"/>
+          <p:cNvPr id="12" name="TextBox 11"/>
+          <p:cNvSpPr txBox="1"/>
+          <p:nvPr/>
+        </p:nvSpPr>
+        <p:spPr>
+          <a:xfrm>
+            <a:off x="932688" y="3438144"/>
+            <a:ext cx="2103120" cy="256032"/>
           </a:xfrm>
           <a:prstGeom prst="rect">
             <a:avLst/>
@@ -13962,27 +12950,68 @@
             <a:r>
               <a:rPr sz="1250" b="1">
                 <a:solidFill>
-                  <a:srgbClr val="2A78D6"/>
-                </a:solidFill>
-                <a:latin typeface="맑은 고딕"/>
-                <a:ea typeface="맑은 고딕"/>
-                <a:cs typeface="맑은 고딕"/>
-              </a:rPr>
-              <a:t>4단계 · 1년</a:t>
-            </a:r>
-          </a:p>
-        </p:txBody>
-      </p:sp>
-      <p:sp>
-        <p:nvSpPr>
-          <p:cNvPr id="29" name="TextBox 28"/>
-          <p:cNvSpPr txBox="1"/>
-          <p:nvPr/>
-        </p:nvSpPr>
-        <p:spPr>
-          <a:xfrm>
-            <a:off x="6729983" y="4992624"/>
-            <a:ext cx="4754880" cy="365760"/>
+                  <a:srgbClr val="EDA100"/>
+                </a:solidFill>
+                <a:latin typeface="맑은 고딕"/>
+                <a:ea typeface="맑은 고딕"/>
+                <a:cs typeface="맑은 고딕"/>
+              </a:rPr>
+              <a:t>표본 크기</a:t>
+            </a:r>
+          </a:p>
+        </p:txBody>
+      </p:sp>
+      <p:sp>
+        <p:nvSpPr>
+          <p:cNvPr id="13" name="TextBox 12"/>
+          <p:cNvSpPr txBox="1"/>
+          <p:nvPr/>
+        </p:nvSpPr>
+        <p:spPr>
+          <a:xfrm>
+            <a:off x="3172968" y="3438144"/>
+            <a:ext cx="8046720" cy="256032"/>
+          </a:xfrm>
+          <a:prstGeom prst="rect">
+            <a:avLst/>
+          </a:prstGeom>
+          <a:noFill/>
+        </p:spPr>
+        <p:txBody>
+          <a:bodyPr wrap="square" lIns="0" rIns="0" tIns="0" bIns="0">
+            <a:spAutoFit/>
+          </a:bodyPr>
+          <a:lstStyle/>
+          <a:p>
+            <a:pPr algn="l">
+              <a:lnSpc>
+                <a:spcPct val="135000"/>
+              </a:lnSpc>
+            </a:pPr>
+            <a:r>
+              <a:rPr sz="1200" b="1">
+                <a:solidFill>
+                  <a:srgbClr val="12151A"/>
+                </a:solidFill>
+                <a:latin typeface="맑은 고딕"/>
+                <a:ea typeface="맑은 고딕"/>
+                <a:cs typeface="맑은 고딕"/>
+              </a:rPr>
+              <a:t>분석 단위가 25개 생활권이라 머신러닝 표본으로는 작습니다.</a:t>
+            </a:r>
+          </a:p>
+        </p:txBody>
+      </p:sp>
+      <p:sp>
+        <p:nvSpPr>
+          <p:cNvPr id="14" name="TextBox 13"/>
+          <p:cNvSpPr txBox="1"/>
+          <p:nvPr/>
+        </p:nvSpPr>
+        <p:spPr>
+          <a:xfrm>
+            <a:off x="3172968" y="3730752"/>
+            <a:ext cx="8046720" cy="384048"/>
           </a:xfrm>
           <a:prstGeom prst="rect">
             <a:avLst/>
@@ -14001,7 +13030,7 @@
               </a:lnSpc>
             </a:pPr>
             <a:r>
-              <a:rPr sz="1100" b="0">
+              <a:rPr sz="1080" b="0">
                 <a:solidFill>
                   <a:srgbClr val="52514E"/>
                 </a:solidFill>
@@ -14009,21 +13038,21 @@
                 <a:ea typeface="맑은 고딕"/>
                 <a:cs typeface="맑은 고딕"/>
               </a:rPr>
-              <a:t>천안시 행정포털 대시보드 내재화, 연 1회 자동 갱신 체계 정착</a:t>
-            </a:r>
-          </a:p>
-        </p:txBody>
-      </p:sp>
-      <p:sp>
-        <p:nvSpPr>
-          <p:cNvPr id="30" name="Rounded Rectangle 29"/>
+              <a:t>→ 500m 격자 단위로 내리면 표본이 수천 개로 늘어납니다. 지금은 규제를 강하게 걸고 Leave-One-Zone-Out CV와 베이스라인 비교로 과적합 여부를 확인하고 있습니다.</a:t>
+            </a:r>
+          </a:p>
+        </p:txBody>
+      </p:sp>
+      <p:sp>
+        <p:nvSpPr>
+          <p:cNvPr id="15" name="Rounded Rectangle 14"/>
           <p:cNvSpPr/>
           <p:nvPr/>
         </p:nvSpPr>
         <p:spPr>
           <a:xfrm>
-            <a:off x="658368" y="5504688"/>
-            <a:ext cx="10874959" cy="822960"/>
+            <a:off x="658368" y="4334256"/>
+            <a:ext cx="10874959" cy="896112"/>
           </a:xfrm>
           <a:prstGeom prst="roundRect">
             <a:avLst>
@@ -14031,7 +13060,51 @@
             </a:avLst>
           </a:prstGeom>
           <a:solidFill>
-            <a:srgbClr val="F6F7F9"/>
+            <a:srgbClr val="FFFFFF"/>
+          </a:solidFill>
+          <a:ln w="12700">
+            <a:solidFill>
+              <a:srgbClr val="E4E7EC"/>
+            </a:solidFill>
+          </a:ln>
+          <a:effectLst/>
+        </p:spPr>
+        <p:style>
+          <a:lnRef idx="1">
+            <a:schemeClr val="accent1"/>
+          </a:lnRef>
+          <a:fillRef idx="3">
+            <a:schemeClr val="accent1"/>
+          </a:fillRef>
+          <a:effectRef idx="2">
+            <a:schemeClr val="accent1"/>
+          </a:effectRef>
+          <a:fontRef idx="minor">
+            <a:schemeClr val="lt1"/>
+          </a:fontRef>
+        </p:style>
+        <p:txBody>
+          <a:bodyPr rtlCol="0" anchor="ctr"/>
+          <a:lstStyle/>
+          <a:p/>
+        </p:txBody>
+      </p:sp>
+      <p:sp>
+        <p:nvSpPr>
+          <p:cNvPr id="16" name="Rectangle 15"/>
+          <p:cNvSpPr/>
+          <p:nvPr/>
+        </p:nvSpPr>
+        <p:spPr>
+          <a:xfrm>
+            <a:off x="658368" y="4334256"/>
+            <a:ext cx="68580" cy="896112"/>
+          </a:xfrm>
+          <a:prstGeom prst="rect">
+            <a:avLst/>
+          </a:prstGeom>
+          <a:solidFill>
+            <a:srgbClr val="EDA100"/>
           </a:solidFill>
           <a:ln>
             <a:noFill/>
@@ -14060,33 +13133,74 @@
       </p:sp>
       <p:sp>
         <p:nvSpPr>
-          <p:cNvPr id="31" name="TextBox 30"/>
-          <p:cNvSpPr txBox="1"/>
-          <p:nvPr/>
-        </p:nvSpPr>
-        <p:spPr>
-          <a:xfrm>
-            <a:off x="932688" y="5687568"/>
-            <a:ext cx="10515600" cy="502920"/>
-          </a:xfrm>
-          <a:prstGeom prst="rect">
-            <a:avLst/>
-          </a:prstGeom>
-          <a:noFill/>
-        </p:spPr>
-        <p:txBody>
-          <a:bodyPr wrap="square" lIns="0" rIns="0" tIns="0" bIns="0">
-            <a:spAutoFit/>
-          </a:bodyPr>
-          <a:lstStyle/>
-          <a:p>
-            <a:pPr algn="l">
-              <a:lnSpc>
-                <a:spcPct val="150000"/>
-              </a:lnSpc>
-            </a:pPr>
-            <a:r>
-              <a:rPr sz="1200" b="0">
+          <p:cNvPr id="17" name="TextBox 16"/>
+          <p:cNvSpPr txBox="1"/>
+          <p:nvPr/>
+        </p:nvSpPr>
+        <p:spPr>
+          <a:xfrm>
+            <a:off x="932688" y="4462272"/>
+            <a:ext cx="2103120" cy="256032"/>
+          </a:xfrm>
+          <a:prstGeom prst="rect">
+            <a:avLst/>
+          </a:prstGeom>
+          <a:noFill/>
+        </p:spPr>
+        <p:txBody>
+          <a:bodyPr wrap="square" lIns="0" rIns="0" tIns="0" bIns="0">
+            <a:spAutoFit/>
+          </a:bodyPr>
+          <a:lstStyle/>
+          <a:p>
+            <a:pPr algn="l">
+              <a:lnSpc>
+                <a:spcPct val="135000"/>
+              </a:lnSpc>
+            </a:pPr>
+            <a:r>
+              <a:rPr sz="1250" b="1">
+                <a:solidFill>
+                  <a:srgbClr val="EDA100"/>
+                </a:solidFill>
+                <a:latin typeface="맑은 고딕"/>
+                <a:ea typeface="맑은 고딕"/>
+                <a:cs typeface="맑은 고딕"/>
+              </a:rPr>
+              <a:t>공간 해상도</a:t>
+            </a:r>
+          </a:p>
+        </p:txBody>
+      </p:sp>
+      <p:sp>
+        <p:nvSpPr>
+          <p:cNvPr id="18" name="TextBox 17"/>
+          <p:cNvSpPr txBox="1"/>
+          <p:nvPr/>
+        </p:nvSpPr>
+        <p:spPr>
+          <a:xfrm>
+            <a:off x="3172968" y="4462272"/>
+            <a:ext cx="8046720" cy="256032"/>
+          </a:xfrm>
+          <a:prstGeom prst="rect">
+            <a:avLst/>
+          </a:prstGeom>
+          <a:noFill/>
+        </p:spPr>
+        <p:txBody>
+          <a:bodyPr wrap="square" lIns="0" rIns="0" tIns="0" bIns="0">
+            <a:spAutoFit/>
+          </a:bodyPr>
+          <a:lstStyle/>
+          <a:p>
+            <a:pPr algn="l">
+              <a:lnSpc>
+                <a:spcPct val="135000"/>
+              </a:lnSpc>
+            </a:pPr>
+            <a:r>
+              <a:rPr sz="1200" b="1">
                 <a:solidFill>
                   <a:srgbClr val="12151A"/>
                 </a:solidFill>
@@ -14094,20 +13208,210 @@
                 <a:ea typeface="맑은 고딕"/>
                 <a:cs typeface="맑은 고딕"/>
               </a:rPr>
-              <a:t>다른 지역에도 — 공간단위 정의(config.py)만 바꾸면 아산·청주 등에도 같은 방식으로 쓸 수 있습니다.</a:t>
-            </a:r>
-          </a:p>
-          <a:p>
-            <a:pPr algn="l">
-              <a:lnSpc>
-                <a:spcPct val="150000"/>
-              </a:lnSpc>
-              <a:spcBef>
-                <a:spcPts val="0"/>
-              </a:spcBef>
-            </a:pPr>
-            <a:r>
-              <a:rPr sz="1200" b="0">
+              <a:t>생활권 안쪽의 차이(같은 동 안의 편차)는 잡히지 않습니다.</a:t>
+            </a:r>
+          </a:p>
+        </p:txBody>
+      </p:sp>
+      <p:sp>
+        <p:nvSpPr>
+          <p:cNvPr id="19" name="TextBox 18"/>
+          <p:cNvSpPr txBox="1"/>
+          <p:nvPr/>
+        </p:nvSpPr>
+        <p:spPr>
+          <a:xfrm>
+            <a:off x="3172968" y="4754880"/>
+            <a:ext cx="8046720" cy="384048"/>
+          </a:xfrm>
+          <a:prstGeom prst="rect">
+            <a:avLst/>
+          </a:prstGeom>
+          <a:noFill/>
+        </p:spPr>
+        <p:txBody>
+          <a:bodyPr wrap="square" lIns="0" rIns="0" tIns="0" bIns="0">
+            <a:spAutoFit/>
+          </a:bodyPr>
+          <a:lstStyle/>
+          <a:p>
+            <a:pPr algn="l">
+              <a:lnSpc>
+                <a:spcPct val="140000"/>
+              </a:lnSpc>
+            </a:pPr>
+            <a:r>
+              <a:rPr sz="1080" b="0">
+                <a:solidFill>
+                  <a:srgbClr val="52514E"/>
+                </a:solidFill>
+                <a:latin typeface="맑은 고딕"/>
+                <a:ea typeface="맑은 고딕"/>
+                <a:cs typeface="맑은 고딕"/>
+              </a:rPr>
+              <a:t>→ 집계구·격자 데이터로 바꾸면 해결됩니다. 공간단위 정의만 교체하면 되도록 만들어 두었습니다.</a:t>
+            </a:r>
+          </a:p>
+        </p:txBody>
+      </p:sp>
+      <p:sp>
+        <p:nvSpPr>
+          <p:cNvPr id="20" name="Rounded Rectangle 19"/>
+          <p:cNvSpPr/>
+          <p:nvPr/>
+        </p:nvSpPr>
+        <p:spPr>
+          <a:xfrm>
+            <a:off x="658368" y="5358384"/>
+            <a:ext cx="10874959" cy="896112"/>
+          </a:xfrm>
+          <a:prstGeom prst="roundRect">
+            <a:avLst>
+              <a:gd name="adj" fmla="val 6000"/>
+            </a:avLst>
+          </a:prstGeom>
+          <a:solidFill>
+            <a:srgbClr val="FFFFFF"/>
+          </a:solidFill>
+          <a:ln w="12700">
+            <a:solidFill>
+              <a:srgbClr val="E4E7EC"/>
+            </a:solidFill>
+          </a:ln>
+          <a:effectLst/>
+        </p:spPr>
+        <p:style>
+          <a:lnRef idx="1">
+            <a:schemeClr val="accent1"/>
+          </a:lnRef>
+          <a:fillRef idx="3">
+            <a:schemeClr val="accent1"/>
+          </a:fillRef>
+          <a:effectRef idx="2">
+            <a:schemeClr val="accent1"/>
+          </a:effectRef>
+          <a:fontRef idx="minor">
+            <a:schemeClr val="lt1"/>
+          </a:fontRef>
+        </p:style>
+        <p:txBody>
+          <a:bodyPr rtlCol="0" anchor="ctr"/>
+          <a:lstStyle/>
+          <a:p/>
+        </p:txBody>
+      </p:sp>
+      <p:sp>
+        <p:nvSpPr>
+          <p:cNvPr id="21" name="Rectangle 20"/>
+          <p:cNvSpPr/>
+          <p:nvPr/>
+        </p:nvSpPr>
+        <p:spPr>
+          <a:xfrm>
+            <a:off x="658368" y="5358384"/>
+            <a:ext cx="68580" cy="896112"/>
+          </a:xfrm>
+          <a:prstGeom prst="rect">
+            <a:avLst/>
+          </a:prstGeom>
+          <a:solidFill>
+            <a:srgbClr val="EDA100"/>
+          </a:solidFill>
+          <a:ln>
+            <a:noFill/>
+          </a:ln>
+          <a:effectLst/>
+        </p:spPr>
+        <p:style>
+          <a:lnRef idx="1">
+            <a:schemeClr val="accent1"/>
+          </a:lnRef>
+          <a:fillRef idx="3">
+            <a:schemeClr val="accent1"/>
+          </a:fillRef>
+          <a:effectRef idx="2">
+            <a:schemeClr val="accent1"/>
+          </a:effectRef>
+          <a:fontRef idx="minor">
+            <a:schemeClr val="lt1"/>
+          </a:fontRef>
+        </p:style>
+        <p:txBody>
+          <a:bodyPr rtlCol="0" anchor="ctr"/>
+          <a:lstStyle/>
+          <a:p/>
+        </p:txBody>
+      </p:sp>
+      <p:sp>
+        <p:nvSpPr>
+          <p:cNvPr id="22" name="TextBox 21"/>
+          <p:cNvSpPr txBox="1"/>
+          <p:nvPr/>
+        </p:nvSpPr>
+        <p:spPr>
+          <a:xfrm>
+            <a:off x="932688" y="5486400"/>
+            <a:ext cx="2103120" cy="256032"/>
+          </a:xfrm>
+          <a:prstGeom prst="rect">
+            <a:avLst/>
+          </a:prstGeom>
+          <a:noFill/>
+        </p:spPr>
+        <p:txBody>
+          <a:bodyPr wrap="square" lIns="0" rIns="0" tIns="0" bIns="0">
+            <a:spAutoFit/>
+          </a:bodyPr>
+          <a:lstStyle/>
+          <a:p>
+            <a:pPr algn="l">
+              <a:lnSpc>
+                <a:spcPct val="135000"/>
+              </a:lnSpc>
+            </a:pPr>
+            <a:r>
+              <a:rPr sz="1250" b="1">
+                <a:solidFill>
+                  <a:srgbClr val="EDA100"/>
+                </a:solidFill>
+                <a:latin typeface="맑은 고딕"/>
+                <a:ea typeface="맑은 고딕"/>
+                <a:cs typeface="맑은 고딕"/>
+              </a:rPr>
+              <a:t>인과 아닌 상관</a:t>
+            </a:r>
+          </a:p>
+        </p:txBody>
+      </p:sp>
+      <p:sp>
+        <p:nvSpPr>
+          <p:cNvPr id="23" name="TextBox 22"/>
+          <p:cNvSpPr txBox="1"/>
+          <p:nvPr/>
+        </p:nvSpPr>
+        <p:spPr>
+          <a:xfrm>
+            <a:off x="3172968" y="5486400"/>
+            <a:ext cx="8046720" cy="256032"/>
+          </a:xfrm>
+          <a:prstGeom prst="rect">
+            <a:avLst/>
+          </a:prstGeom>
+          <a:noFill/>
+        </p:spPr>
+        <p:txBody>
+          <a:bodyPr wrap="square" lIns="0" rIns="0" tIns="0" bIns="0">
+            <a:spAutoFit/>
+          </a:bodyPr>
+          <a:lstStyle/>
+          <a:p>
+            <a:pPr algn="l">
+              <a:lnSpc>
+                <a:spcPct val="135000"/>
+              </a:lnSpc>
+            </a:pPr>
+            <a:r>
+              <a:rPr sz="1200" b="1">
                 <a:solidFill>
                   <a:srgbClr val="12151A"/>
                 </a:solidFill>
@@ -14115,14 +13419,55 @@
                 <a:ea typeface="맑은 고딕"/>
                 <a:cs typeface="맑은 고딕"/>
               </a:rPr>
-              <a:t>원도심 공동화는 천안만의 일이 아니어서, 도움이 된다면 충남 시군이 함께 쓰는 자료가 되어도 좋겠습니다.</a:t>
-            </a:r>
-          </a:p>
-        </p:txBody>
-      </p:sp>
-      <p:sp>
-        <p:nvSpPr>
-          <p:cNvPr id="32" name="TextBox 31"/>
+              <a:t>이 모델은 변화를 미리 살펴볼 뿐, 사업의 효과를 증명하지는 못합니다.</a:t>
+            </a:r>
+          </a:p>
+        </p:txBody>
+      </p:sp>
+      <p:sp>
+        <p:nvSpPr>
+          <p:cNvPr id="24" name="TextBox 23"/>
+          <p:cNvSpPr txBox="1"/>
+          <p:nvPr/>
+        </p:nvSpPr>
+        <p:spPr>
+          <a:xfrm>
+            <a:off x="3172968" y="5779008"/>
+            <a:ext cx="8046720" cy="384048"/>
+          </a:xfrm>
+          <a:prstGeom prst="rect">
+            <a:avLst/>
+          </a:prstGeom>
+          <a:noFill/>
+        </p:spPr>
+        <p:txBody>
+          <a:bodyPr wrap="square" lIns="0" rIns="0" tIns="0" bIns="0">
+            <a:spAutoFit/>
+          </a:bodyPr>
+          <a:lstStyle/>
+          <a:p>
+            <a:pPr algn="l">
+              <a:lnSpc>
+                <a:spcPct val="140000"/>
+              </a:lnSpc>
+            </a:pPr>
+            <a:r>
+              <a:rPr sz="1080" b="0">
+                <a:solidFill>
+                  <a:srgbClr val="52514E"/>
+                </a:solidFill>
+                <a:latin typeface="맑은 고딕"/>
+                <a:ea typeface="맑은 고딕"/>
+                <a:cs typeface="맑은 고딕"/>
+              </a:rPr>
+              <a:t>→ 시행 전후 이중차분(DID) 설계를 덧붙이면 효과 검증까지 넓힐 수 있습니다.</a:t>
+            </a:r>
+          </a:p>
+        </p:txBody>
+      </p:sp>
+      <p:sp>
+        <p:nvSpPr>
+          <p:cNvPr id="25" name="TextBox 24"/>
           <p:cNvSpPr txBox="1"/>
           <p:nvPr/>
         </p:nvSpPr>
@@ -14163,7 +13508,7 @@
       </p:sp>
       <p:sp>
         <p:nvSpPr>
-          <p:cNvPr id="33" name="TextBox 32"/>
+          <p:cNvPr id="26" name="TextBox 25"/>
           <p:cNvSpPr txBox="1"/>
           <p:nvPr/>
         </p:nvSpPr>
@@ -14508,7 +13853,7 @@
                 <a:ea typeface="맑은 고딕"/>
                 <a:cs typeface="맑은 고딕"/>
               </a:rPr>
-              <a:t>1.74배</a:t>
+              <a:t>1.29배</a:t>
             </a:r>
           </a:p>
         </p:txBody>
@@ -14549,7 +13894,7 @@
                 <a:ea typeface="맑은 고딕"/>
                 <a:cs typeface="맑은 고딕"/>
               </a:rPr>
-              <a:t>신도심 76.4 vs 원도심 44.0</a:t>
+              <a:t>신도심 48.9 vs 원도심 38.1</a:t>
             </a:r>
           </a:p>
         </p:txBody>
@@ -14719,7 +14064,7 @@
                 <a:ea typeface="맑은 고딕"/>
                 <a:cs typeface="맑은 고딕"/>
               </a:rPr>
-              <a:t>0.318</a:t>
+              <a:t>0.421</a:t>
             </a:r>
           </a:p>
         </p:txBody>
@@ -15141,7 +14486,7 @@
                 <a:ea typeface="맑은 고딕"/>
                 <a:cs typeface="맑은 고딕"/>
               </a:rPr>
-              <a:t>32,822명</a:t>
+              <a:t>데이터 대기</a:t>
             </a:r>
           </a:p>
         </p:txBody>
@@ -15182,7 +14527,7 @@
                 <a:ea typeface="맑은 고딕"/>
                 <a:cs typeface="맑은 고딕"/>
               </a:rPr>
-              <a:t>12개소 · 커버리지 +7.0%p</a:t>
+              <a:t>생활SOC 위치 자료 필요</a:t>
             </a:r>
           </a:p>
         </p:txBody>
@@ -15899,7 +15244,7 @@
                 <a:ea typeface="맑은 고딕"/>
                 <a:cs typeface="맑은 고딕"/>
               </a:rPr>
-              <a:t>생활권별 지수와 유형, 3년 뒤 전망과 그 이유, 12개소 우선순위표입니다.</a:t>
+              <a:t>생활권별 지수와 유형, 3년 뒤 전망과 그 이유, 0개소 우선순위표입니다.</a:t>
             </a:r>
           </a:p>
           <a:p>
@@ -16061,7 +15406,7 @@
                 <a:ea typeface="맑은 고딕"/>
                 <a:cs typeface="맑은 고딕"/>
               </a:rPr>
-              <a:t>LIMITATION</a:t>
+              <a:t>INTEGRITY</a:t>
             </a:r>
           </a:p>
         </p:txBody>
@@ -16102,62 +15447,21 @@
                 <a:ea typeface="맑은 고딕"/>
                 <a:cs typeface="맑은 고딕"/>
               </a:rPr>
-              <a:t>저희가 아직 못 한 부분을 먼저 말씀드립니다</a:t>
-            </a:r>
-          </a:p>
-        </p:txBody>
-      </p:sp>
-      <p:sp>
-        <p:nvSpPr>
-          <p:cNvPr id="4" name="TextBox 3"/>
-          <p:cNvSpPr txBox="1"/>
-          <p:nvPr/>
-        </p:nvSpPr>
-        <p:spPr>
-          <a:xfrm>
-            <a:off x="658368" y="1517904"/>
-            <a:ext cx="10874959" cy="411480"/>
-          </a:xfrm>
-          <a:prstGeom prst="rect">
-            <a:avLst/>
-          </a:prstGeom>
-          <a:noFill/>
-        </p:spPr>
-        <p:txBody>
-          <a:bodyPr wrap="square" lIns="0" rIns="0" tIns="0" bIns="0">
-            <a:spAutoFit/>
-          </a:bodyPr>
-          <a:lstStyle/>
-          <a:p>
-            <a:pPr algn="l">
-              <a:lnSpc>
-                <a:spcPct val="145000"/>
-              </a:lnSpc>
-            </a:pPr>
-            <a:r>
-              <a:rPr sz="1350" b="0">
-                <a:solidFill>
-                  <a:srgbClr val="52514E"/>
-                </a:solidFill>
-                <a:latin typeface="맑은 고딕"/>
-                <a:ea typeface="맑은 고딕"/>
-                <a:cs typeface="맑은 고딕"/>
-              </a:rPr>
-              <a:t>행정에 쓰이는 자료인 만큼, 어디까지 믿고 쓰실 수 있는지 분명히 알려드리는 것이 도리라고 생각했습니다.</a:t>
-            </a:r>
-          </a:p>
-        </p:txBody>
-      </p:sp>
-      <p:sp>
-        <p:nvSpPr>
-          <p:cNvPr id="5" name="Rounded Rectangle 4"/>
+              <a:t>재현성과 데이터 윤리</a:t>
+            </a:r>
+          </a:p>
+        </p:txBody>
+      </p:sp>
+      <p:sp>
+        <p:nvSpPr>
+          <p:cNvPr id="4" name="Rounded Rectangle 3"/>
           <p:cNvSpPr/>
           <p:nvPr/>
         </p:nvSpPr>
         <p:spPr>
           <a:xfrm>
-            <a:off x="658368" y="2286000"/>
-            <a:ext cx="10874959" cy="896112"/>
+            <a:off x="658368" y="2121408"/>
+            <a:ext cx="5257800" cy="2487168"/>
           </a:xfrm>
           <a:prstGeom prst="roundRect">
             <a:avLst>
@@ -16196,20 +15500,20 @@
       </p:sp>
       <p:sp>
         <p:nvSpPr>
-          <p:cNvPr id="6" name="Rectangle 5"/>
+          <p:cNvPr id="5" name="Rectangle 4"/>
           <p:cNvSpPr/>
           <p:nvPr/>
         </p:nvSpPr>
         <p:spPr>
           <a:xfrm>
-            <a:off x="658368" y="2286000"/>
-            <a:ext cx="68580" cy="896112"/>
+            <a:off x="658368" y="2121408"/>
+            <a:ext cx="5257800" cy="68580"/>
           </a:xfrm>
           <a:prstGeom prst="rect">
             <a:avLst/>
           </a:prstGeom>
           <a:solidFill>
-            <a:srgbClr val="EDA100"/>
+            <a:srgbClr val="1BAF7A"/>
           </a:solidFill>
           <a:ln>
             <a:noFill/>
@@ -16238,14 +15542,55 @@
       </p:sp>
       <p:sp>
         <p:nvSpPr>
+          <p:cNvPr id="6" name="TextBox 5"/>
+          <p:cNvSpPr txBox="1"/>
+          <p:nvPr/>
+        </p:nvSpPr>
+        <p:spPr>
+          <a:xfrm>
+            <a:off x="932688" y="2340864"/>
+            <a:ext cx="4114800" cy="274320"/>
+          </a:xfrm>
+          <a:prstGeom prst="rect">
+            <a:avLst/>
+          </a:prstGeom>
+          <a:noFill/>
+        </p:spPr>
+        <p:txBody>
+          <a:bodyPr wrap="square" lIns="0" rIns="0" tIns="0" bIns="0">
+            <a:spAutoFit/>
+          </a:bodyPr>
+          <a:lstStyle/>
+          <a:p>
+            <a:pPr algn="l">
+              <a:lnSpc>
+                <a:spcPct val="135000"/>
+              </a:lnSpc>
+            </a:pPr>
+            <a:r>
+              <a:rPr sz="1450" b="1">
+                <a:solidFill>
+                  <a:srgbClr val="1BAF7A"/>
+                </a:solidFill>
+                <a:latin typeface="맑은 고딕"/>
+                <a:ea typeface="맑은 고딕"/>
+                <a:cs typeface="맑은 고딕"/>
+              </a:rPr>
+              <a:t>재현성</a:t>
+            </a:r>
+          </a:p>
+        </p:txBody>
+      </p:sp>
+      <p:sp>
+        <p:nvSpPr>
           <p:cNvPr id="7" name="TextBox 6"/>
           <p:cNvSpPr txBox="1"/>
           <p:nvPr/>
         </p:nvSpPr>
         <p:spPr>
           <a:xfrm>
-            <a:off x="932688" y="2414016"/>
-            <a:ext cx="2103120" cy="256032"/>
+            <a:off x="932688" y="2743200"/>
+            <a:ext cx="182880" cy="256032"/>
           </a:xfrm>
           <a:prstGeom prst="rect">
             <a:avLst/>
@@ -16264,15 +15609,15 @@
               </a:lnSpc>
             </a:pPr>
             <a:r>
-              <a:rPr sz="1250" b="1">
-                <a:solidFill>
-                  <a:srgbClr val="EDA100"/>
-                </a:solidFill>
-                <a:latin typeface="맑은 고딕"/>
-                <a:ea typeface="맑은 고딕"/>
-                <a:cs typeface="맑은 고딕"/>
-              </a:rPr>
-              <a:t>예측 성능</a:t>
+              <a:rPr sz="1300" b="1">
+                <a:solidFill>
+                  <a:srgbClr val="1BAF7A"/>
+                </a:solidFill>
+                <a:latin typeface="맑은 고딕"/>
+                <a:ea typeface="맑은 고딕"/>
+                <a:cs typeface="맑은 고딕"/>
+              </a:rPr>
+              <a:t>·</a:t>
             </a:r>
           </a:p>
         </p:txBody>
@@ -16285,8 +15630,49 @@
         </p:nvSpPr>
         <p:spPr>
           <a:xfrm>
-            <a:off x="3172968" y="2414016"/>
-            <a:ext cx="8046720" cy="256032"/>
+            <a:off x="1133856" y="2743200"/>
+            <a:ext cx="4572000" cy="411480"/>
+          </a:xfrm>
+          <a:prstGeom prst="rect">
+            <a:avLst/>
+          </a:prstGeom>
+          <a:noFill/>
+        </p:spPr>
+        <p:txBody>
+          <a:bodyPr wrap="square" lIns="0" rIns="0" tIns="0" bIns="0">
+            <a:spAutoFit/>
+          </a:bodyPr>
+          <a:lstStyle/>
+          <a:p>
+            <a:pPr algn="l">
+              <a:lnSpc>
+                <a:spcPct val="140000"/>
+              </a:lnSpc>
+            </a:pPr>
+            <a:r>
+              <a:rPr sz="1100" b="0">
+                <a:solidFill>
+                  <a:srgbClr val="12151A"/>
+                </a:solidFill>
+                <a:latin typeface="맑은 고딕"/>
+                <a:ea typeface="맑은 고딕"/>
+                <a:cs typeface="맑은 고딕"/>
+              </a:rPr>
+              <a:t>전 과정이 공개 스크립트로 실행 — `python3 src/run_all.py` 한 줄</a:t>
+            </a:r>
+          </a:p>
+        </p:txBody>
+      </p:sp>
+      <p:sp>
+        <p:nvSpPr>
+          <p:cNvPr id="9" name="TextBox 8"/>
+          <p:cNvSpPr txBox="1"/>
+          <p:nvPr/>
+        </p:nvSpPr>
+        <p:spPr>
+          <a:xfrm>
+            <a:off x="932688" y="3218688"/>
+            <a:ext cx="182880" cy="256032"/>
           </a:xfrm>
           <a:prstGeom prst="rect">
             <a:avLst/>
@@ -16305,7 +15691,48 @@
               </a:lnSpc>
             </a:pPr>
             <a:r>
-              <a:rPr sz="1200" b="1">
+              <a:rPr sz="1300" b="1">
+                <a:solidFill>
+                  <a:srgbClr val="1BAF7A"/>
+                </a:solidFill>
+                <a:latin typeface="맑은 고딕"/>
+                <a:ea typeface="맑은 고딕"/>
+                <a:cs typeface="맑은 고딕"/>
+              </a:rPr>
+              <a:t>·</a:t>
+            </a:r>
+          </a:p>
+        </p:txBody>
+      </p:sp>
+      <p:sp>
+        <p:nvSpPr>
+          <p:cNvPr id="10" name="TextBox 9"/>
+          <p:cNvSpPr txBox="1"/>
+          <p:nvPr/>
+        </p:nvSpPr>
+        <p:spPr>
+          <a:xfrm>
+            <a:off x="1133856" y="3218688"/>
+            <a:ext cx="4572000" cy="411480"/>
+          </a:xfrm>
+          <a:prstGeom prst="rect">
+            <a:avLst/>
+          </a:prstGeom>
+          <a:noFill/>
+        </p:spPr>
+        <p:txBody>
+          <a:bodyPr wrap="square" lIns="0" rIns="0" tIns="0" bIns="0">
+            <a:spAutoFit/>
+          </a:bodyPr>
+          <a:lstStyle/>
+          <a:p>
+            <a:pPr algn="l">
+              <a:lnSpc>
+                <a:spcPct val="140000"/>
+              </a:lnSpc>
+            </a:pPr>
+            <a:r>
+              <a:rPr sz="1100" b="0">
                 <a:solidFill>
                   <a:srgbClr val="12151A"/>
                 </a:solidFill>
@@ -16313,21 +15740,62 @@
                 <a:ea typeface="맑은 고딕"/>
                 <a:cs typeface="맑은 고딕"/>
               </a:rPr>
-              <a:t>3년 뒤 악화·개선 '방향'은 어느 정도 맞히지만, 변화의 '크기'까지는 아직 부족합니다.</a:t>
-            </a:r>
-          </a:p>
-        </p:txBody>
-      </p:sp>
-      <p:sp>
-        <p:nvSpPr>
-          <p:cNvPr id="9" name="TextBox 8"/>
-          <p:cNvSpPr txBox="1"/>
-          <p:nvPr/>
-        </p:nvSpPr>
-        <p:spPr>
-          <a:xfrm>
-            <a:off x="3172968" y="2706624"/>
-            <a:ext cx="8046720" cy="384048"/>
+              <a:t>난수 시드 고정(20260831) — 군집·모델 결과가 실행마다 동일</a:t>
+            </a:r>
+          </a:p>
+        </p:txBody>
+      </p:sp>
+      <p:sp>
+        <p:nvSpPr>
+          <p:cNvPr id="11" name="TextBox 10"/>
+          <p:cNvSpPr txBox="1"/>
+          <p:nvPr/>
+        </p:nvSpPr>
+        <p:spPr>
+          <a:xfrm>
+            <a:off x="932688" y="3694176"/>
+            <a:ext cx="182880" cy="256032"/>
+          </a:xfrm>
+          <a:prstGeom prst="rect">
+            <a:avLst/>
+          </a:prstGeom>
+          <a:noFill/>
+        </p:spPr>
+        <p:txBody>
+          <a:bodyPr wrap="square" lIns="0" rIns="0" tIns="0" bIns="0">
+            <a:spAutoFit/>
+          </a:bodyPr>
+          <a:lstStyle/>
+          <a:p>
+            <a:pPr algn="l">
+              <a:lnSpc>
+                <a:spcPct val="135000"/>
+              </a:lnSpc>
+            </a:pPr>
+            <a:r>
+              <a:rPr sz="1300" b="1">
+                <a:solidFill>
+                  <a:srgbClr val="1BAF7A"/>
+                </a:solidFill>
+                <a:latin typeface="맑은 고딕"/>
+                <a:ea typeface="맑은 고딕"/>
+                <a:cs typeface="맑은 고딕"/>
+              </a:rPr>
+              <a:t>·</a:t>
+            </a:r>
+          </a:p>
+        </p:txBody>
+      </p:sp>
+      <p:sp>
+        <p:nvSpPr>
+          <p:cNvPr id="12" name="TextBox 11"/>
+          <p:cNvSpPr txBox="1"/>
+          <p:nvPr/>
+        </p:nvSpPr>
+        <p:spPr>
+          <a:xfrm>
+            <a:off x="1133856" y="3694176"/>
+            <a:ext cx="4572000" cy="411480"/>
           </a:xfrm>
           <a:prstGeom prst="rect">
             <a:avLst/>
@@ -16346,29 +15814,111 @@
               </a:lnSpc>
             </a:pPr>
             <a:r>
-              <a:rPr sz="1080" b="0">
-                <a:solidFill>
-                  <a:srgbClr val="52514E"/>
-                </a:solidFill>
-                <a:latin typeface="맑은 고딕"/>
-                <a:ea typeface="맑은 고딕"/>
-                <a:cs typeface="맑은 고딕"/>
-              </a:rPr>
-              <a:t>→ 위험도 수준은 자기상관이 강해 '그대로 간다'는 예측이 이미 강력한 기준선입니다. 현재는 인구 축만 실데이터라, 상권 개·폐업 시계열이 더해지면 나아질 것으로 봅니다.</a:t>
-            </a:r>
-          </a:p>
-        </p:txBody>
-      </p:sp>
-      <p:sp>
-        <p:nvSpPr>
-          <p:cNvPr id="10" name="Rounded Rectangle 9"/>
+              <a:rPr sz="1100" b="0">
+                <a:solidFill>
+                  <a:srgbClr val="12151A"/>
+                </a:solidFill>
+                <a:latin typeface="맑은 고딕"/>
+                <a:ea typeface="맑은 고딕"/>
+                <a:cs typeface="맑은 고딕"/>
+              </a:rPr>
+              <a:t>그림 8종·분석표 9종·대시보드가 같은 실행에서 함께 생성됨</a:t>
+            </a:r>
+          </a:p>
+        </p:txBody>
+      </p:sp>
+      <p:sp>
+        <p:nvSpPr>
+          <p:cNvPr id="13" name="TextBox 12"/>
+          <p:cNvSpPr txBox="1"/>
+          <p:nvPr/>
+        </p:nvSpPr>
+        <p:spPr>
+          <a:xfrm>
+            <a:off x="932688" y="4169664"/>
+            <a:ext cx="182880" cy="256032"/>
+          </a:xfrm>
+          <a:prstGeom prst="rect">
+            <a:avLst/>
+          </a:prstGeom>
+          <a:noFill/>
+        </p:spPr>
+        <p:txBody>
+          <a:bodyPr wrap="square" lIns="0" rIns="0" tIns="0" bIns="0">
+            <a:spAutoFit/>
+          </a:bodyPr>
+          <a:lstStyle/>
+          <a:p>
+            <a:pPr algn="l">
+              <a:lnSpc>
+                <a:spcPct val="135000"/>
+              </a:lnSpc>
+            </a:pPr>
+            <a:r>
+              <a:rPr sz="1300" b="1">
+                <a:solidFill>
+                  <a:srgbClr val="1BAF7A"/>
+                </a:solidFill>
+                <a:latin typeface="맑은 고딕"/>
+                <a:ea typeface="맑은 고딕"/>
+                <a:cs typeface="맑은 고딕"/>
+              </a:rPr>
+              <a:t>·</a:t>
+            </a:r>
+          </a:p>
+        </p:txBody>
+      </p:sp>
+      <p:sp>
+        <p:nvSpPr>
+          <p:cNvPr id="14" name="TextBox 13"/>
+          <p:cNvSpPr txBox="1"/>
+          <p:nvPr/>
+        </p:nvSpPr>
+        <p:spPr>
+          <a:xfrm>
+            <a:off x="1133856" y="4169664"/>
+            <a:ext cx="4572000" cy="411480"/>
+          </a:xfrm>
+          <a:prstGeom prst="rect">
+            <a:avLst/>
+          </a:prstGeom>
+          <a:noFill/>
+        </p:spPr>
+        <p:txBody>
+          <a:bodyPr wrap="square" lIns="0" rIns="0" tIns="0" bIns="0">
+            <a:spAutoFit/>
+          </a:bodyPr>
+          <a:lstStyle/>
+          <a:p>
+            <a:pPr algn="l">
+              <a:lnSpc>
+                <a:spcPct val="140000"/>
+              </a:lnSpc>
+            </a:pPr>
+            <a:r>
+              <a:rPr sz="1100" b="0">
+                <a:solidFill>
+                  <a:srgbClr val="12151A"/>
+                </a:solidFill>
+                <a:latin typeface="맑은 고딕"/>
+                <a:ea typeface="맑은 고딕"/>
+                <a:cs typeface="맑은 고딕"/>
+              </a:rPr>
+              <a:t>지표 정의·가중치·모델 파라미터가 전부 코드에 명시</a:t>
+            </a:r>
+          </a:p>
+        </p:txBody>
+      </p:sp>
+      <p:sp>
+        <p:nvSpPr>
+          <p:cNvPr id="15" name="Rounded Rectangle 14"/>
           <p:cNvSpPr/>
           <p:nvPr/>
         </p:nvSpPr>
         <p:spPr>
           <a:xfrm>
-            <a:off x="658368" y="3310128"/>
-            <a:ext cx="10874959" cy="896112"/>
+            <a:off x="6236207" y="2121408"/>
+            <a:ext cx="5257800" cy="2487168"/>
           </a:xfrm>
           <a:prstGeom prst="roundRect">
             <a:avLst>
@@ -16407,1278 +15957,6 @@
       </p:sp>
       <p:sp>
         <p:nvSpPr>
-          <p:cNvPr id="11" name="Rectangle 10"/>
-          <p:cNvSpPr/>
-          <p:nvPr/>
-        </p:nvSpPr>
-        <p:spPr>
-          <a:xfrm>
-            <a:off x="658368" y="3310128"/>
-            <a:ext cx="68580" cy="896112"/>
-          </a:xfrm>
-          <a:prstGeom prst="rect">
-            <a:avLst/>
-          </a:prstGeom>
-          <a:solidFill>
-            <a:srgbClr val="EDA100"/>
-          </a:solidFill>
-          <a:ln>
-            <a:noFill/>
-          </a:ln>
-          <a:effectLst/>
-        </p:spPr>
-        <p:style>
-          <a:lnRef idx="1">
-            <a:schemeClr val="accent1"/>
-          </a:lnRef>
-          <a:fillRef idx="3">
-            <a:schemeClr val="accent1"/>
-          </a:fillRef>
-          <a:effectRef idx="2">
-            <a:schemeClr val="accent1"/>
-          </a:effectRef>
-          <a:fontRef idx="minor">
-            <a:schemeClr val="lt1"/>
-          </a:fontRef>
-        </p:style>
-        <p:txBody>
-          <a:bodyPr rtlCol="0" anchor="ctr"/>
-          <a:lstStyle/>
-          <a:p/>
-        </p:txBody>
-      </p:sp>
-      <p:sp>
-        <p:nvSpPr>
-          <p:cNvPr id="12" name="TextBox 11"/>
-          <p:cNvSpPr txBox="1"/>
-          <p:nvPr/>
-        </p:nvSpPr>
-        <p:spPr>
-          <a:xfrm>
-            <a:off x="932688" y="3438144"/>
-            <a:ext cx="2103120" cy="256032"/>
-          </a:xfrm>
-          <a:prstGeom prst="rect">
-            <a:avLst/>
-          </a:prstGeom>
-          <a:noFill/>
-        </p:spPr>
-        <p:txBody>
-          <a:bodyPr wrap="square" lIns="0" rIns="0" tIns="0" bIns="0">
-            <a:spAutoFit/>
-          </a:bodyPr>
-          <a:lstStyle/>
-          <a:p>
-            <a:pPr algn="l">
-              <a:lnSpc>
-                <a:spcPct val="135000"/>
-              </a:lnSpc>
-            </a:pPr>
-            <a:r>
-              <a:rPr sz="1250" b="1">
-                <a:solidFill>
-                  <a:srgbClr val="EDA100"/>
-                </a:solidFill>
-                <a:latin typeface="맑은 고딕"/>
-                <a:ea typeface="맑은 고딕"/>
-                <a:cs typeface="맑은 고딕"/>
-              </a:rPr>
-              <a:t>표본 크기</a:t>
-            </a:r>
-          </a:p>
-        </p:txBody>
-      </p:sp>
-      <p:sp>
-        <p:nvSpPr>
-          <p:cNvPr id="13" name="TextBox 12"/>
-          <p:cNvSpPr txBox="1"/>
-          <p:nvPr/>
-        </p:nvSpPr>
-        <p:spPr>
-          <a:xfrm>
-            <a:off x="3172968" y="3438144"/>
-            <a:ext cx="8046720" cy="256032"/>
-          </a:xfrm>
-          <a:prstGeom prst="rect">
-            <a:avLst/>
-          </a:prstGeom>
-          <a:noFill/>
-        </p:spPr>
-        <p:txBody>
-          <a:bodyPr wrap="square" lIns="0" rIns="0" tIns="0" bIns="0">
-            <a:spAutoFit/>
-          </a:bodyPr>
-          <a:lstStyle/>
-          <a:p>
-            <a:pPr algn="l">
-              <a:lnSpc>
-                <a:spcPct val="135000"/>
-              </a:lnSpc>
-            </a:pPr>
-            <a:r>
-              <a:rPr sz="1200" b="1">
-                <a:solidFill>
-                  <a:srgbClr val="12151A"/>
-                </a:solidFill>
-                <a:latin typeface="맑은 고딕"/>
-                <a:ea typeface="맑은 고딕"/>
-                <a:cs typeface="맑은 고딕"/>
-              </a:rPr>
-              <a:t>분석 단위가 25개 생활권이라 머신러닝 표본으로는 작습니다.</a:t>
-            </a:r>
-          </a:p>
-        </p:txBody>
-      </p:sp>
-      <p:sp>
-        <p:nvSpPr>
-          <p:cNvPr id="14" name="TextBox 13"/>
-          <p:cNvSpPr txBox="1"/>
-          <p:nvPr/>
-        </p:nvSpPr>
-        <p:spPr>
-          <a:xfrm>
-            <a:off x="3172968" y="3730752"/>
-            <a:ext cx="8046720" cy="384048"/>
-          </a:xfrm>
-          <a:prstGeom prst="rect">
-            <a:avLst/>
-          </a:prstGeom>
-          <a:noFill/>
-        </p:spPr>
-        <p:txBody>
-          <a:bodyPr wrap="square" lIns="0" rIns="0" tIns="0" bIns="0">
-            <a:spAutoFit/>
-          </a:bodyPr>
-          <a:lstStyle/>
-          <a:p>
-            <a:pPr algn="l">
-              <a:lnSpc>
-                <a:spcPct val="140000"/>
-              </a:lnSpc>
-            </a:pPr>
-            <a:r>
-              <a:rPr sz="1080" b="0">
-                <a:solidFill>
-                  <a:srgbClr val="52514E"/>
-                </a:solidFill>
-                <a:latin typeface="맑은 고딕"/>
-                <a:ea typeface="맑은 고딕"/>
-                <a:cs typeface="맑은 고딕"/>
-              </a:rPr>
-              <a:t>→ 500m 격자 단위로 내리면 표본이 수천 개로 늘어납니다. 지금은 규제를 강하게 걸고 Leave-One-Zone-Out CV와 베이스라인 비교로 과적합 여부를 확인하고 있습니다.</a:t>
-            </a:r>
-          </a:p>
-        </p:txBody>
-      </p:sp>
-      <p:sp>
-        <p:nvSpPr>
-          <p:cNvPr id="15" name="Rounded Rectangle 14"/>
-          <p:cNvSpPr/>
-          <p:nvPr/>
-        </p:nvSpPr>
-        <p:spPr>
-          <a:xfrm>
-            <a:off x="658368" y="4334256"/>
-            <a:ext cx="10874959" cy="896112"/>
-          </a:xfrm>
-          <a:prstGeom prst="roundRect">
-            <a:avLst>
-              <a:gd name="adj" fmla="val 6000"/>
-            </a:avLst>
-          </a:prstGeom>
-          <a:solidFill>
-            <a:srgbClr val="FFFFFF"/>
-          </a:solidFill>
-          <a:ln w="12700">
-            <a:solidFill>
-              <a:srgbClr val="E4E7EC"/>
-            </a:solidFill>
-          </a:ln>
-          <a:effectLst/>
-        </p:spPr>
-        <p:style>
-          <a:lnRef idx="1">
-            <a:schemeClr val="accent1"/>
-          </a:lnRef>
-          <a:fillRef idx="3">
-            <a:schemeClr val="accent1"/>
-          </a:fillRef>
-          <a:effectRef idx="2">
-            <a:schemeClr val="accent1"/>
-          </a:effectRef>
-          <a:fontRef idx="minor">
-            <a:schemeClr val="lt1"/>
-          </a:fontRef>
-        </p:style>
-        <p:txBody>
-          <a:bodyPr rtlCol="0" anchor="ctr"/>
-          <a:lstStyle/>
-          <a:p/>
-        </p:txBody>
-      </p:sp>
-      <p:sp>
-        <p:nvSpPr>
-          <p:cNvPr id="16" name="Rectangle 15"/>
-          <p:cNvSpPr/>
-          <p:nvPr/>
-        </p:nvSpPr>
-        <p:spPr>
-          <a:xfrm>
-            <a:off x="658368" y="4334256"/>
-            <a:ext cx="68580" cy="896112"/>
-          </a:xfrm>
-          <a:prstGeom prst="rect">
-            <a:avLst/>
-          </a:prstGeom>
-          <a:solidFill>
-            <a:srgbClr val="EDA100"/>
-          </a:solidFill>
-          <a:ln>
-            <a:noFill/>
-          </a:ln>
-          <a:effectLst/>
-        </p:spPr>
-        <p:style>
-          <a:lnRef idx="1">
-            <a:schemeClr val="accent1"/>
-          </a:lnRef>
-          <a:fillRef idx="3">
-            <a:schemeClr val="accent1"/>
-          </a:fillRef>
-          <a:effectRef idx="2">
-            <a:schemeClr val="accent1"/>
-          </a:effectRef>
-          <a:fontRef idx="minor">
-            <a:schemeClr val="lt1"/>
-          </a:fontRef>
-        </p:style>
-        <p:txBody>
-          <a:bodyPr rtlCol="0" anchor="ctr"/>
-          <a:lstStyle/>
-          <a:p/>
-        </p:txBody>
-      </p:sp>
-      <p:sp>
-        <p:nvSpPr>
-          <p:cNvPr id="17" name="TextBox 16"/>
-          <p:cNvSpPr txBox="1"/>
-          <p:nvPr/>
-        </p:nvSpPr>
-        <p:spPr>
-          <a:xfrm>
-            <a:off x="932688" y="4462272"/>
-            <a:ext cx="2103120" cy="256032"/>
-          </a:xfrm>
-          <a:prstGeom prst="rect">
-            <a:avLst/>
-          </a:prstGeom>
-          <a:noFill/>
-        </p:spPr>
-        <p:txBody>
-          <a:bodyPr wrap="square" lIns="0" rIns="0" tIns="0" bIns="0">
-            <a:spAutoFit/>
-          </a:bodyPr>
-          <a:lstStyle/>
-          <a:p>
-            <a:pPr algn="l">
-              <a:lnSpc>
-                <a:spcPct val="135000"/>
-              </a:lnSpc>
-            </a:pPr>
-            <a:r>
-              <a:rPr sz="1250" b="1">
-                <a:solidFill>
-                  <a:srgbClr val="EDA100"/>
-                </a:solidFill>
-                <a:latin typeface="맑은 고딕"/>
-                <a:ea typeface="맑은 고딕"/>
-                <a:cs typeface="맑은 고딕"/>
-              </a:rPr>
-              <a:t>공간 해상도</a:t>
-            </a:r>
-          </a:p>
-        </p:txBody>
-      </p:sp>
-      <p:sp>
-        <p:nvSpPr>
-          <p:cNvPr id="18" name="TextBox 17"/>
-          <p:cNvSpPr txBox="1"/>
-          <p:nvPr/>
-        </p:nvSpPr>
-        <p:spPr>
-          <a:xfrm>
-            <a:off x="3172968" y="4462272"/>
-            <a:ext cx="8046720" cy="256032"/>
-          </a:xfrm>
-          <a:prstGeom prst="rect">
-            <a:avLst/>
-          </a:prstGeom>
-          <a:noFill/>
-        </p:spPr>
-        <p:txBody>
-          <a:bodyPr wrap="square" lIns="0" rIns="0" tIns="0" bIns="0">
-            <a:spAutoFit/>
-          </a:bodyPr>
-          <a:lstStyle/>
-          <a:p>
-            <a:pPr algn="l">
-              <a:lnSpc>
-                <a:spcPct val="135000"/>
-              </a:lnSpc>
-            </a:pPr>
-            <a:r>
-              <a:rPr sz="1200" b="1">
-                <a:solidFill>
-                  <a:srgbClr val="12151A"/>
-                </a:solidFill>
-                <a:latin typeface="맑은 고딕"/>
-                <a:ea typeface="맑은 고딕"/>
-                <a:cs typeface="맑은 고딕"/>
-              </a:rPr>
-              <a:t>생활권 안쪽의 차이(같은 동 안의 편차)는 잡히지 않습니다.</a:t>
-            </a:r>
-          </a:p>
-        </p:txBody>
-      </p:sp>
-      <p:sp>
-        <p:nvSpPr>
-          <p:cNvPr id="19" name="TextBox 18"/>
-          <p:cNvSpPr txBox="1"/>
-          <p:nvPr/>
-        </p:nvSpPr>
-        <p:spPr>
-          <a:xfrm>
-            <a:off x="3172968" y="4754880"/>
-            <a:ext cx="8046720" cy="384048"/>
-          </a:xfrm>
-          <a:prstGeom prst="rect">
-            <a:avLst/>
-          </a:prstGeom>
-          <a:noFill/>
-        </p:spPr>
-        <p:txBody>
-          <a:bodyPr wrap="square" lIns="0" rIns="0" tIns="0" bIns="0">
-            <a:spAutoFit/>
-          </a:bodyPr>
-          <a:lstStyle/>
-          <a:p>
-            <a:pPr algn="l">
-              <a:lnSpc>
-                <a:spcPct val="140000"/>
-              </a:lnSpc>
-            </a:pPr>
-            <a:r>
-              <a:rPr sz="1080" b="0">
-                <a:solidFill>
-                  <a:srgbClr val="52514E"/>
-                </a:solidFill>
-                <a:latin typeface="맑은 고딕"/>
-                <a:ea typeface="맑은 고딕"/>
-                <a:cs typeface="맑은 고딕"/>
-              </a:rPr>
-              <a:t>→ 집계구·격자 데이터로 바꾸면 해결됩니다. 공간단위 정의만 교체하면 되도록 만들어 두었습니다.</a:t>
-            </a:r>
-          </a:p>
-        </p:txBody>
-      </p:sp>
-      <p:sp>
-        <p:nvSpPr>
-          <p:cNvPr id="20" name="Rounded Rectangle 19"/>
-          <p:cNvSpPr/>
-          <p:nvPr/>
-        </p:nvSpPr>
-        <p:spPr>
-          <a:xfrm>
-            <a:off x="658368" y="5358384"/>
-            <a:ext cx="10874959" cy="896112"/>
-          </a:xfrm>
-          <a:prstGeom prst="roundRect">
-            <a:avLst>
-              <a:gd name="adj" fmla="val 6000"/>
-            </a:avLst>
-          </a:prstGeom>
-          <a:solidFill>
-            <a:srgbClr val="FFFFFF"/>
-          </a:solidFill>
-          <a:ln w="12700">
-            <a:solidFill>
-              <a:srgbClr val="E4E7EC"/>
-            </a:solidFill>
-          </a:ln>
-          <a:effectLst/>
-        </p:spPr>
-        <p:style>
-          <a:lnRef idx="1">
-            <a:schemeClr val="accent1"/>
-          </a:lnRef>
-          <a:fillRef idx="3">
-            <a:schemeClr val="accent1"/>
-          </a:fillRef>
-          <a:effectRef idx="2">
-            <a:schemeClr val="accent1"/>
-          </a:effectRef>
-          <a:fontRef idx="minor">
-            <a:schemeClr val="lt1"/>
-          </a:fontRef>
-        </p:style>
-        <p:txBody>
-          <a:bodyPr rtlCol="0" anchor="ctr"/>
-          <a:lstStyle/>
-          <a:p/>
-        </p:txBody>
-      </p:sp>
-      <p:sp>
-        <p:nvSpPr>
-          <p:cNvPr id="21" name="Rectangle 20"/>
-          <p:cNvSpPr/>
-          <p:nvPr/>
-        </p:nvSpPr>
-        <p:spPr>
-          <a:xfrm>
-            <a:off x="658368" y="5358384"/>
-            <a:ext cx="68580" cy="896112"/>
-          </a:xfrm>
-          <a:prstGeom prst="rect">
-            <a:avLst/>
-          </a:prstGeom>
-          <a:solidFill>
-            <a:srgbClr val="EDA100"/>
-          </a:solidFill>
-          <a:ln>
-            <a:noFill/>
-          </a:ln>
-          <a:effectLst/>
-        </p:spPr>
-        <p:style>
-          <a:lnRef idx="1">
-            <a:schemeClr val="accent1"/>
-          </a:lnRef>
-          <a:fillRef idx="3">
-            <a:schemeClr val="accent1"/>
-          </a:fillRef>
-          <a:effectRef idx="2">
-            <a:schemeClr val="accent1"/>
-          </a:effectRef>
-          <a:fontRef idx="minor">
-            <a:schemeClr val="lt1"/>
-          </a:fontRef>
-        </p:style>
-        <p:txBody>
-          <a:bodyPr rtlCol="0" anchor="ctr"/>
-          <a:lstStyle/>
-          <a:p/>
-        </p:txBody>
-      </p:sp>
-      <p:sp>
-        <p:nvSpPr>
-          <p:cNvPr id="22" name="TextBox 21"/>
-          <p:cNvSpPr txBox="1"/>
-          <p:nvPr/>
-        </p:nvSpPr>
-        <p:spPr>
-          <a:xfrm>
-            <a:off x="932688" y="5486400"/>
-            <a:ext cx="2103120" cy="256032"/>
-          </a:xfrm>
-          <a:prstGeom prst="rect">
-            <a:avLst/>
-          </a:prstGeom>
-          <a:noFill/>
-        </p:spPr>
-        <p:txBody>
-          <a:bodyPr wrap="square" lIns="0" rIns="0" tIns="0" bIns="0">
-            <a:spAutoFit/>
-          </a:bodyPr>
-          <a:lstStyle/>
-          <a:p>
-            <a:pPr algn="l">
-              <a:lnSpc>
-                <a:spcPct val="135000"/>
-              </a:lnSpc>
-            </a:pPr>
-            <a:r>
-              <a:rPr sz="1250" b="1">
-                <a:solidFill>
-                  <a:srgbClr val="EDA100"/>
-                </a:solidFill>
-                <a:latin typeface="맑은 고딕"/>
-                <a:ea typeface="맑은 고딕"/>
-                <a:cs typeface="맑은 고딕"/>
-              </a:rPr>
-              <a:t>인과 아닌 상관</a:t>
-            </a:r>
-          </a:p>
-        </p:txBody>
-      </p:sp>
-      <p:sp>
-        <p:nvSpPr>
-          <p:cNvPr id="23" name="TextBox 22"/>
-          <p:cNvSpPr txBox="1"/>
-          <p:nvPr/>
-        </p:nvSpPr>
-        <p:spPr>
-          <a:xfrm>
-            <a:off x="3172968" y="5486400"/>
-            <a:ext cx="8046720" cy="256032"/>
-          </a:xfrm>
-          <a:prstGeom prst="rect">
-            <a:avLst/>
-          </a:prstGeom>
-          <a:noFill/>
-        </p:spPr>
-        <p:txBody>
-          <a:bodyPr wrap="square" lIns="0" rIns="0" tIns="0" bIns="0">
-            <a:spAutoFit/>
-          </a:bodyPr>
-          <a:lstStyle/>
-          <a:p>
-            <a:pPr algn="l">
-              <a:lnSpc>
-                <a:spcPct val="135000"/>
-              </a:lnSpc>
-            </a:pPr>
-            <a:r>
-              <a:rPr sz="1200" b="1">
-                <a:solidFill>
-                  <a:srgbClr val="12151A"/>
-                </a:solidFill>
-                <a:latin typeface="맑은 고딕"/>
-                <a:ea typeface="맑은 고딕"/>
-                <a:cs typeface="맑은 고딕"/>
-              </a:rPr>
-              <a:t>이 모델은 변화를 미리 살펴볼 뿐, 사업의 효과를 증명하지는 못합니다.</a:t>
-            </a:r>
-          </a:p>
-        </p:txBody>
-      </p:sp>
-      <p:sp>
-        <p:nvSpPr>
-          <p:cNvPr id="24" name="TextBox 23"/>
-          <p:cNvSpPr txBox="1"/>
-          <p:nvPr/>
-        </p:nvSpPr>
-        <p:spPr>
-          <a:xfrm>
-            <a:off x="3172968" y="5779008"/>
-            <a:ext cx="8046720" cy="384048"/>
-          </a:xfrm>
-          <a:prstGeom prst="rect">
-            <a:avLst/>
-          </a:prstGeom>
-          <a:noFill/>
-        </p:spPr>
-        <p:txBody>
-          <a:bodyPr wrap="square" lIns="0" rIns="0" tIns="0" bIns="0">
-            <a:spAutoFit/>
-          </a:bodyPr>
-          <a:lstStyle/>
-          <a:p>
-            <a:pPr algn="l">
-              <a:lnSpc>
-                <a:spcPct val="140000"/>
-              </a:lnSpc>
-            </a:pPr>
-            <a:r>
-              <a:rPr sz="1080" b="0">
-                <a:solidFill>
-                  <a:srgbClr val="52514E"/>
-                </a:solidFill>
-                <a:latin typeface="맑은 고딕"/>
-                <a:ea typeface="맑은 고딕"/>
-                <a:cs typeface="맑은 고딕"/>
-              </a:rPr>
-              <a:t>→ 시행 전후 이중차분(DID) 설계를 덧붙이면 효과 검증까지 넓힐 수 있습니다.</a:t>
-            </a:r>
-          </a:p>
-        </p:txBody>
-      </p:sp>
-      <p:sp>
-        <p:nvSpPr>
-          <p:cNvPr id="25" name="TextBox 24"/>
-          <p:cNvSpPr txBox="1"/>
-          <p:nvPr/>
-        </p:nvSpPr>
-        <p:spPr>
-          <a:xfrm>
-            <a:off x="658368" y="6437376"/>
-            <a:ext cx="5486400" cy="274320"/>
-          </a:xfrm>
-          <a:prstGeom prst="rect">
-            <a:avLst/>
-          </a:prstGeom>
-          <a:noFill/>
-        </p:spPr>
-        <p:txBody>
-          <a:bodyPr wrap="square" lIns="0" rIns="0" tIns="0" bIns="0">
-            <a:spAutoFit/>
-          </a:bodyPr>
-          <a:lstStyle/>
-          <a:p>
-            <a:pPr algn="l">
-              <a:lnSpc>
-                <a:spcPct val="135000"/>
-              </a:lnSpc>
-            </a:pPr>
-            <a:r>
-              <a:rPr sz="950" b="0">
-                <a:solidFill>
-                  <a:srgbClr val="52514E"/>
-                </a:solidFill>
-                <a:latin typeface="맑은 고딕"/>
-                <a:ea typeface="맑은 고딕"/>
-                <a:cs typeface="맑은 고딕"/>
-              </a:rPr>
-              <a:t>천안 균형발전 나침반(CBC)</a:t>
-            </a:r>
-          </a:p>
-        </p:txBody>
-      </p:sp>
-      <p:sp>
-        <p:nvSpPr>
-          <p:cNvPr id="26" name="TextBox 25"/>
-          <p:cNvSpPr txBox="1"/>
-          <p:nvPr/>
-        </p:nvSpPr>
-        <p:spPr>
-          <a:xfrm>
-            <a:off x="10618927" y="6437376"/>
-            <a:ext cx="914400" cy="274320"/>
-          </a:xfrm>
-          <a:prstGeom prst="rect">
-            <a:avLst/>
-          </a:prstGeom>
-          <a:noFill/>
-        </p:spPr>
-        <p:txBody>
-          <a:bodyPr wrap="square" lIns="0" rIns="0" tIns="0" bIns="0">
-            <a:spAutoFit/>
-          </a:bodyPr>
-          <a:lstStyle/>
-          <a:p>
-            <a:pPr algn="r">
-              <a:lnSpc>
-                <a:spcPct val="135000"/>
-              </a:lnSpc>
-            </a:pPr>
-            <a:r>
-              <a:rPr sz="950" b="0">
-                <a:solidFill>
-                  <a:srgbClr val="52514E"/>
-                </a:solidFill>
-                <a:latin typeface="맑은 고딕"/>
-                <a:ea typeface="맑은 고딕"/>
-                <a:cs typeface="맑은 고딕"/>
-              </a:rPr>
-              <a:t>19</a:t>
-            </a:r>
-          </a:p>
-        </p:txBody>
-      </p:sp>
-    </p:spTree>
-  </p:cSld>
-  <p:clrMapOvr>
-    <a:masterClrMapping/>
-  </p:clrMapOvr>
-</p:sld>
-</file>
-
-<file path=ppt/slides/slide21.xml><?xml version="1.0" encoding="utf-8"?>
-<p:sld xmlns:a="http://schemas.openxmlformats.org/drawingml/2006/main" xmlns:p="http://schemas.openxmlformats.org/presentationml/2006/main" xmlns:r="http://schemas.openxmlformats.org/officeDocument/2006/relationships">
-  <p:cSld>
-    <p:spTree>
-      <p:nvGrpSpPr>
-        <p:cNvPr id="1" name=""/>
-        <p:cNvGrpSpPr/>
-        <p:nvPr/>
-      </p:nvGrpSpPr>
-      <p:grpSpPr/>
-      <p:sp>
-        <p:nvSpPr>
-          <p:cNvPr id="2" name="TextBox 1"/>
-          <p:cNvSpPr txBox="1"/>
-          <p:nvPr/>
-        </p:nvSpPr>
-        <p:spPr>
-          <a:xfrm>
-            <a:off x="658368" y="475488"/>
-            <a:ext cx="10874959" cy="274320"/>
-          </a:xfrm>
-          <a:prstGeom prst="rect">
-            <a:avLst/>
-          </a:prstGeom>
-          <a:noFill/>
-        </p:spPr>
-        <p:txBody>
-          <a:bodyPr wrap="square" lIns="0" rIns="0" tIns="0" bIns="0">
-            <a:spAutoFit/>
-          </a:bodyPr>
-          <a:lstStyle/>
-          <a:p>
-            <a:pPr algn="l">
-              <a:lnSpc>
-                <a:spcPct val="135000"/>
-              </a:lnSpc>
-            </a:pPr>
-            <a:r>
-              <a:rPr sz="1150" b="1">
-                <a:solidFill>
-                  <a:srgbClr val="2A78D6"/>
-                </a:solidFill>
-                <a:latin typeface="맑은 고딕"/>
-                <a:ea typeface="맑은 고딕"/>
-                <a:cs typeface="맑은 고딕"/>
-              </a:rPr>
-              <a:t>INTEGRITY</a:t>
-            </a:r>
-          </a:p>
-        </p:txBody>
-      </p:sp>
-      <p:sp>
-        <p:nvSpPr>
-          <p:cNvPr id="3" name="TextBox 2"/>
-          <p:cNvSpPr txBox="1"/>
-          <p:nvPr/>
-        </p:nvSpPr>
-        <p:spPr>
-          <a:xfrm>
-            <a:off x="658368" y="804672"/>
-            <a:ext cx="10874959" cy="566928"/>
-          </a:xfrm>
-          <a:prstGeom prst="rect">
-            <a:avLst/>
-          </a:prstGeom>
-          <a:noFill/>
-        </p:spPr>
-        <p:txBody>
-          <a:bodyPr wrap="square" lIns="0" rIns="0" tIns="0" bIns="0">
-            <a:spAutoFit/>
-          </a:bodyPr>
-          <a:lstStyle/>
-          <a:p>
-            <a:pPr algn="l">
-              <a:lnSpc>
-                <a:spcPct val="118000"/>
-              </a:lnSpc>
-            </a:pPr>
-            <a:r>
-              <a:rPr sz="2700" b="1">
-                <a:solidFill>
-                  <a:srgbClr val="12151A"/>
-                </a:solidFill>
-                <a:latin typeface="맑은 고딕"/>
-                <a:ea typeface="맑은 고딕"/>
-                <a:cs typeface="맑은 고딕"/>
-              </a:rPr>
-              <a:t>재현성과 데이터 윤리</a:t>
-            </a:r>
-          </a:p>
-        </p:txBody>
-      </p:sp>
-      <p:sp>
-        <p:nvSpPr>
-          <p:cNvPr id="4" name="Rounded Rectangle 3"/>
-          <p:cNvSpPr/>
-          <p:nvPr/>
-        </p:nvSpPr>
-        <p:spPr>
-          <a:xfrm>
-            <a:off x="658368" y="2121408"/>
-            <a:ext cx="5257800" cy="2487168"/>
-          </a:xfrm>
-          <a:prstGeom prst="roundRect">
-            <a:avLst>
-              <a:gd name="adj" fmla="val 6000"/>
-            </a:avLst>
-          </a:prstGeom>
-          <a:solidFill>
-            <a:srgbClr val="FFFFFF"/>
-          </a:solidFill>
-          <a:ln w="12700">
-            <a:solidFill>
-              <a:srgbClr val="E4E7EC"/>
-            </a:solidFill>
-          </a:ln>
-          <a:effectLst/>
-        </p:spPr>
-        <p:style>
-          <a:lnRef idx="1">
-            <a:schemeClr val="accent1"/>
-          </a:lnRef>
-          <a:fillRef idx="3">
-            <a:schemeClr val="accent1"/>
-          </a:fillRef>
-          <a:effectRef idx="2">
-            <a:schemeClr val="accent1"/>
-          </a:effectRef>
-          <a:fontRef idx="minor">
-            <a:schemeClr val="lt1"/>
-          </a:fontRef>
-        </p:style>
-        <p:txBody>
-          <a:bodyPr rtlCol="0" anchor="ctr"/>
-          <a:lstStyle/>
-          <a:p/>
-        </p:txBody>
-      </p:sp>
-      <p:sp>
-        <p:nvSpPr>
-          <p:cNvPr id="5" name="Rectangle 4"/>
-          <p:cNvSpPr/>
-          <p:nvPr/>
-        </p:nvSpPr>
-        <p:spPr>
-          <a:xfrm>
-            <a:off x="658368" y="2121408"/>
-            <a:ext cx="5257800" cy="68580"/>
-          </a:xfrm>
-          <a:prstGeom prst="rect">
-            <a:avLst/>
-          </a:prstGeom>
-          <a:solidFill>
-            <a:srgbClr val="1BAF7A"/>
-          </a:solidFill>
-          <a:ln>
-            <a:noFill/>
-          </a:ln>
-          <a:effectLst/>
-        </p:spPr>
-        <p:style>
-          <a:lnRef idx="1">
-            <a:schemeClr val="accent1"/>
-          </a:lnRef>
-          <a:fillRef idx="3">
-            <a:schemeClr val="accent1"/>
-          </a:fillRef>
-          <a:effectRef idx="2">
-            <a:schemeClr val="accent1"/>
-          </a:effectRef>
-          <a:fontRef idx="minor">
-            <a:schemeClr val="lt1"/>
-          </a:fontRef>
-        </p:style>
-        <p:txBody>
-          <a:bodyPr rtlCol="0" anchor="ctr"/>
-          <a:lstStyle/>
-          <a:p/>
-        </p:txBody>
-      </p:sp>
-      <p:sp>
-        <p:nvSpPr>
-          <p:cNvPr id="6" name="TextBox 5"/>
-          <p:cNvSpPr txBox="1"/>
-          <p:nvPr/>
-        </p:nvSpPr>
-        <p:spPr>
-          <a:xfrm>
-            <a:off x="932688" y="2340864"/>
-            <a:ext cx="4114800" cy="274320"/>
-          </a:xfrm>
-          <a:prstGeom prst="rect">
-            <a:avLst/>
-          </a:prstGeom>
-          <a:noFill/>
-        </p:spPr>
-        <p:txBody>
-          <a:bodyPr wrap="square" lIns="0" rIns="0" tIns="0" bIns="0">
-            <a:spAutoFit/>
-          </a:bodyPr>
-          <a:lstStyle/>
-          <a:p>
-            <a:pPr algn="l">
-              <a:lnSpc>
-                <a:spcPct val="135000"/>
-              </a:lnSpc>
-            </a:pPr>
-            <a:r>
-              <a:rPr sz="1450" b="1">
-                <a:solidFill>
-                  <a:srgbClr val="1BAF7A"/>
-                </a:solidFill>
-                <a:latin typeface="맑은 고딕"/>
-                <a:ea typeface="맑은 고딕"/>
-                <a:cs typeface="맑은 고딕"/>
-              </a:rPr>
-              <a:t>재현성</a:t>
-            </a:r>
-          </a:p>
-        </p:txBody>
-      </p:sp>
-      <p:sp>
-        <p:nvSpPr>
-          <p:cNvPr id="7" name="TextBox 6"/>
-          <p:cNvSpPr txBox="1"/>
-          <p:nvPr/>
-        </p:nvSpPr>
-        <p:spPr>
-          <a:xfrm>
-            <a:off x="932688" y="2743200"/>
-            <a:ext cx="182880" cy="256032"/>
-          </a:xfrm>
-          <a:prstGeom prst="rect">
-            <a:avLst/>
-          </a:prstGeom>
-          <a:noFill/>
-        </p:spPr>
-        <p:txBody>
-          <a:bodyPr wrap="square" lIns="0" rIns="0" tIns="0" bIns="0">
-            <a:spAutoFit/>
-          </a:bodyPr>
-          <a:lstStyle/>
-          <a:p>
-            <a:pPr algn="l">
-              <a:lnSpc>
-                <a:spcPct val="135000"/>
-              </a:lnSpc>
-            </a:pPr>
-            <a:r>
-              <a:rPr sz="1300" b="1">
-                <a:solidFill>
-                  <a:srgbClr val="1BAF7A"/>
-                </a:solidFill>
-                <a:latin typeface="맑은 고딕"/>
-                <a:ea typeface="맑은 고딕"/>
-                <a:cs typeface="맑은 고딕"/>
-              </a:rPr>
-              <a:t>·</a:t>
-            </a:r>
-          </a:p>
-        </p:txBody>
-      </p:sp>
-      <p:sp>
-        <p:nvSpPr>
-          <p:cNvPr id="8" name="TextBox 7"/>
-          <p:cNvSpPr txBox="1"/>
-          <p:nvPr/>
-        </p:nvSpPr>
-        <p:spPr>
-          <a:xfrm>
-            <a:off x="1133856" y="2743200"/>
-            <a:ext cx="4572000" cy="411480"/>
-          </a:xfrm>
-          <a:prstGeom prst="rect">
-            <a:avLst/>
-          </a:prstGeom>
-          <a:noFill/>
-        </p:spPr>
-        <p:txBody>
-          <a:bodyPr wrap="square" lIns="0" rIns="0" tIns="0" bIns="0">
-            <a:spAutoFit/>
-          </a:bodyPr>
-          <a:lstStyle/>
-          <a:p>
-            <a:pPr algn="l">
-              <a:lnSpc>
-                <a:spcPct val="140000"/>
-              </a:lnSpc>
-            </a:pPr>
-            <a:r>
-              <a:rPr sz="1100" b="0">
-                <a:solidFill>
-                  <a:srgbClr val="12151A"/>
-                </a:solidFill>
-                <a:latin typeface="맑은 고딕"/>
-                <a:ea typeface="맑은 고딕"/>
-                <a:cs typeface="맑은 고딕"/>
-              </a:rPr>
-              <a:t>전 과정이 공개 스크립트로 실행 — `python3 src/run_all.py` 한 줄</a:t>
-            </a:r>
-          </a:p>
-        </p:txBody>
-      </p:sp>
-      <p:sp>
-        <p:nvSpPr>
-          <p:cNvPr id="9" name="TextBox 8"/>
-          <p:cNvSpPr txBox="1"/>
-          <p:nvPr/>
-        </p:nvSpPr>
-        <p:spPr>
-          <a:xfrm>
-            <a:off x="932688" y="3218688"/>
-            <a:ext cx="182880" cy="256032"/>
-          </a:xfrm>
-          <a:prstGeom prst="rect">
-            <a:avLst/>
-          </a:prstGeom>
-          <a:noFill/>
-        </p:spPr>
-        <p:txBody>
-          <a:bodyPr wrap="square" lIns="0" rIns="0" tIns="0" bIns="0">
-            <a:spAutoFit/>
-          </a:bodyPr>
-          <a:lstStyle/>
-          <a:p>
-            <a:pPr algn="l">
-              <a:lnSpc>
-                <a:spcPct val="135000"/>
-              </a:lnSpc>
-            </a:pPr>
-            <a:r>
-              <a:rPr sz="1300" b="1">
-                <a:solidFill>
-                  <a:srgbClr val="1BAF7A"/>
-                </a:solidFill>
-                <a:latin typeface="맑은 고딕"/>
-                <a:ea typeface="맑은 고딕"/>
-                <a:cs typeface="맑은 고딕"/>
-              </a:rPr>
-              <a:t>·</a:t>
-            </a:r>
-          </a:p>
-        </p:txBody>
-      </p:sp>
-      <p:sp>
-        <p:nvSpPr>
-          <p:cNvPr id="10" name="TextBox 9"/>
-          <p:cNvSpPr txBox="1"/>
-          <p:nvPr/>
-        </p:nvSpPr>
-        <p:spPr>
-          <a:xfrm>
-            <a:off x="1133856" y="3218688"/>
-            <a:ext cx="4572000" cy="411480"/>
-          </a:xfrm>
-          <a:prstGeom prst="rect">
-            <a:avLst/>
-          </a:prstGeom>
-          <a:noFill/>
-        </p:spPr>
-        <p:txBody>
-          <a:bodyPr wrap="square" lIns="0" rIns="0" tIns="0" bIns="0">
-            <a:spAutoFit/>
-          </a:bodyPr>
-          <a:lstStyle/>
-          <a:p>
-            <a:pPr algn="l">
-              <a:lnSpc>
-                <a:spcPct val="140000"/>
-              </a:lnSpc>
-            </a:pPr>
-            <a:r>
-              <a:rPr sz="1100" b="0">
-                <a:solidFill>
-                  <a:srgbClr val="12151A"/>
-                </a:solidFill>
-                <a:latin typeface="맑은 고딕"/>
-                <a:ea typeface="맑은 고딕"/>
-                <a:cs typeface="맑은 고딕"/>
-              </a:rPr>
-              <a:t>난수 시드 고정(20260831) — 군집·모델 결과가 실행마다 동일</a:t>
-            </a:r>
-          </a:p>
-        </p:txBody>
-      </p:sp>
-      <p:sp>
-        <p:nvSpPr>
-          <p:cNvPr id="11" name="TextBox 10"/>
-          <p:cNvSpPr txBox="1"/>
-          <p:nvPr/>
-        </p:nvSpPr>
-        <p:spPr>
-          <a:xfrm>
-            <a:off x="932688" y="3694176"/>
-            <a:ext cx="182880" cy="256032"/>
-          </a:xfrm>
-          <a:prstGeom prst="rect">
-            <a:avLst/>
-          </a:prstGeom>
-          <a:noFill/>
-        </p:spPr>
-        <p:txBody>
-          <a:bodyPr wrap="square" lIns="0" rIns="0" tIns="0" bIns="0">
-            <a:spAutoFit/>
-          </a:bodyPr>
-          <a:lstStyle/>
-          <a:p>
-            <a:pPr algn="l">
-              <a:lnSpc>
-                <a:spcPct val="135000"/>
-              </a:lnSpc>
-            </a:pPr>
-            <a:r>
-              <a:rPr sz="1300" b="1">
-                <a:solidFill>
-                  <a:srgbClr val="1BAF7A"/>
-                </a:solidFill>
-                <a:latin typeface="맑은 고딕"/>
-                <a:ea typeface="맑은 고딕"/>
-                <a:cs typeface="맑은 고딕"/>
-              </a:rPr>
-              <a:t>·</a:t>
-            </a:r>
-          </a:p>
-        </p:txBody>
-      </p:sp>
-      <p:sp>
-        <p:nvSpPr>
-          <p:cNvPr id="12" name="TextBox 11"/>
-          <p:cNvSpPr txBox="1"/>
-          <p:nvPr/>
-        </p:nvSpPr>
-        <p:spPr>
-          <a:xfrm>
-            <a:off x="1133856" y="3694176"/>
-            <a:ext cx="4572000" cy="411480"/>
-          </a:xfrm>
-          <a:prstGeom prst="rect">
-            <a:avLst/>
-          </a:prstGeom>
-          <a:noFill/>
-        </p:spPr>
-        <p:txBody>
-          <a:bodyPr wrap="square" lIns="0" rIns="0" tIns="0" bIns="0">
-            <a:spAutoFit/>
-          </a:bodyPr>
-          <a:lstStyle/>
-          <a:p>
-            <a:pPr algn="l">
-              <a:lnSpc>
-                <a:spcPct val="140000"/>
-              </a:lnSpc>
-            </a:pPr>
-            <a:r>
-              <a:rPr sz="1100" b="0">
-                <a:solidFill>
-                  <a:srgbClr val="12151A"/>
-                </a:solidFill>
-                <a:latin typeface="맑은 고딕"/>
-                <a:ea typeface="맑은 고딕"/>
-                <a:cs typeface="맑은 고딕"/>
-              </a:rPr>
-              <a:t>그림 8종·분석표 9종·대시보드가 같은 실행에서 함께 생성됨</a:t>
-            </a:r>
-          </a:p>
-        </p:txBody>
-      </p:sp>
-      <p:sp>
-        <p:nvSpPr>
-          <p:cNvPr id="13" name="TextBox 12"/>
-          <p:cNvSpPr txBox="1"/>
-          <p:nvPr/>
-        </p:nvSpPr>
-        <p:spPr>
-          <a:xfrm>
-            <a:off x="932688" y="4169664"/>
-            <a:ext cx="182880" cy="256032"/>
-          </a:xfrm>
-          <a:prstGeom prst="rect">
-            <a:avLst/>
-          </a:prstGeom>
-          <a:noFill/>
-        </p:spPr>
-        <p:txBody>
-          <a:bodyPr wrap="square" lIns="0" rIns="0" tIns="0" bIns="0">
-            <a:spAutoFit/>
-          </a:bodyPr>
-          <a:lstStyle/>
-          <a:p>
-            <a:pPr algn="l">
-              <a:lnSpc>
-                <a:spcPct val="135000"/>
-              </a:lnSpc>
-            </a:pPr>
-            <a:r>
-              <a:rPr sz="1300" b="1">
-                <a:solidFill>
-                  <a:srgbClr val="1BAF7A"/>
-                </a:solidFill>
-                <a:latin typeface="맑은 고딕"/>
-                <a:ea typeface="맑은 고딕"/>
-                <a:cs typeface="맑은 고딕"/>
-              </a:rPr>
-              <a:t>·</a:t>
-            </a:r>
-          </a:p>
-        </p:txBody>
-      </p:sp>
-      <p:sp>
-        <p:nvSpPr>
-          <p:cNvPr id="14" name="TextBox 13"/>
-          <p:cNvSpPr txBox="1"/>
-          <p:nvPr/>
-        </p:nvSpPr>
-        <p:spPr>
-          <a:xfrm>
-            <a:off x="1133856" y="4169664"/>
-            <a:ext cx="4572000" cy="411480"/>
-          </a:xfrm>
-          <a:prstGeom prst="rect">
-            <a:avLst/>
-          </a:prstGeom>
-          <a:noFill/>
-        </p:spPr>
-        <p:txBody>
-          <a:bodyPr wrap="square" lIns="0" rIns="0" tIns="0" bIns="0">
-            <a:spAutoFit/>
-          </a:bodyPr>
-          <a:lstStyle/>
-          <a:p>
-            <a:pPr algn="l">
-              <a:lnSpc>
-                <a:spcPct val="140000"/>
-              </a:lnSpc>
-            </a:pPr>
-            <a:r>
-              <a:rPr sz="1100" b="0">
-                <a:solidFill>
-                  <a:srgbClr val="12151A"/>
-                </a:solidFill>
-                <a:latin typeface="맑은 고딕"/>
-                <a:ea typeface="맑은 고딕"/>
-                <a:cs typeface="맑은 고딕"/>
-              </a:rPr>
-              <a:t>지표 정의·가중치·모델 파라미터가 전부 코드에 명시</a:t>
-            </a:r>
-          </a:p>
-        </p:txBody>
-      </p:sp>
-      <p:sp>
-        <p:nvSpPr>
-          <p:cNvPr id="15" name="Rounded Rectangle 14"/>
-          <p:cNvSpPr/>
-          <p:nvPr/>
-        </p:nvSpPr>
-        <p:spPr>
-          <a:xfrm>
-            <a:off x="6236207" y="2121408"/>
-            <a:ext cx="5257800" cy="2487168"/>
-          </a:xfrm>
-          <a:prstGeom prst="roundRect">
-            <a:avLst>
-              <a:gd name="adj" fmla="val 6000"/>
-            </a:avLst>
-          </a:prstGeom>
-          <a:solidFill>
-            <a:srgbClr val="FFFFFF"/>
-          </a:solidFill>
-          <a:ln w="12700">
-            <a:solidFill>
-              <a:srgbClr val="E4E7EC"/>
-            </a:solidFill>
-          </a:ln>
-          <a:effectLst/>
-        </p:spPr>
-        <p:style>
-          <a:lnRef idx="1">
-            <a:schemeClr val="accent1"/>
-          </a:lnRef>
-          <a:fillRef idx="3">
-            <a:schemeClr val="accent1"/>
-          </a:fillRef>
-          <a:effectRef idx="2">
-            <a:schemeClr val="accent1"/>
-          </a:effectRef>
-          <a:fontRef idx="minor">
-            <a:schemeClr val="lt1"/>
-          </a:fontRef>
-        </p:style>
-        <p:txBody>
-          <a:bodyPr rtlCol="0" anchor="ctr"/>
-          <a:lstStyle/>
-          <a:p/>
-        </p:txBody>
-      </p:sp>
-      <p:sp>
-        <p:nvSpPr>
           <p:cNvPr id="16" name="Rectangle 15"/>
           <p:cNvSpPr/>
           <p:nvPr/>
@@ -18353,7 +16631,7 @@
                 <a:ea typeface="맑은 고딕"/>
                 <a:cs typeface="맑은 고딕"/>
               </a:rPr>
-              <a:t>20</a:t>
+              <a:t>19</a:t>
             </a:r>
           </a:p>
         </p:txBody>
@@ -18622,7 +16900,7 @@
                 <a:ea typeface="맑은 고딕"/>
                 <a:cs typeface="맑은 고딕"/>
               </a:rPr>
-              <a:t>1.74배</a:t>
+              <a:t>1.29배</a:t>
             </a:r>
           </a:p>
         </p:txBody>
@@ -18663,7 +16941,7 @@
                 <a:ea typeface="맑은 고딕"/>
                 <a:cs typeface="맑은 고딕"/>
               </a:rPr>
-              <a:t>신도심 평균 CBI 76.4 vs 원도심 평균 44.0</a:t>
+              <a:t>신도심 평균 CBI 48.9 vs 원도심 평균 38.1</a:t>
             </a:r>
           </a:p>
         </p:txBody>
@@ -18704,7 +16982,7 @@
                 <a:ea typeface="맑은 고딕"/>
                 <a:cs typeface="맑은 고딕"/>
               </a:rPr>
-              <a:t>0.318</a:t>
+              <a:t>0.421</a:t>
             </a:r>
           </a:p>
         </p:txBody>
@@ -18745,7 +17023,7 @@
                 <a:ea typeface="맑은 고딕"/>
                 <a:cs typeface="맑은 고딕"/>
               </a:rPr>
-              <a:t>25개 생활권 CBI 지니계수 — 변동계수 56.5%</a:t>
+              <a:t>25개 생활권 CBI 지니계수 — 변동계수 78.6%</a:t>
             </a:r>
           </a:p>
         </p:txBody>
@@ -18786,7 +17064,7 @@
                 <a:ea typeface="맑은 고딕"/>
                 <a:cs typeface="맑은 고딕"/>
               </a:rPr>
-              <a:t>불당동 ↔ 수신면</a:t>
+              <a:t>문성동 ↔ 성남면</a:t>
             </a:r>
           </a:p>
         </p:txBody>
@@ -18827,7 +17105,7 @@
                 <a:ea typeface="맑은 고딕"/>
                 <a:cs typeface="맑은 고딕"/>
               </a:rPr>
-              <a:t>최상위 82점 ↔ 최하위 6점, 같은 시(市)</a:t>
+              <a:t>최상위 91점 ↔ 최하위 0점, 같은 시(市)</a:t>
             </a:r>
           </a:p>
         </p:txBody>
@@ -19757,7 +18035,7 @@
                           <a:ea typeface="맑은 고딕"/>
                           <a:cs typeface="맑은 고딕"/>
                         </a:rPr>
-                        <a:t>12개 지표로 계산한 참고용 수치 한 장</a:t>
+                        <a:t>3개 지표로 계산한 참고용 수치 한 장</a:t>
                       </a:r>
                     </a:p>
                   </a:txBody>
@@ -23380,7 +21658,7 @@
                           <a:ea typeface="맑은 고딕"/>
                           <a:cs typeface="맑은 고딕"/>
                         </a:rPr>
-                        <a:t>예시(미투입)</a:t>
+                        <a:t>nan</a:t>
                       </a:r>
                     </a:p>
                   </a:txBody>
@@ -23405,7 +21683,7 @@
                           <a:ea typeface="맑은 고딕"/>
                           <a:cs typeface="맑은 고딕"/>
                         </a:rPr>
-                        <a:t>예시 생성(seed=20260832)</a:t>
+                        <a:t>미확보</a:t>
                       </a:r>
                     </a:p>
                   </a:txBody>
@@ -23430,7 +21708,7 @@
                           <a:ea typeface="맑은 고딕"/>
                           <a:cs typeface="맑은 고딕"/>
                         </a:rPr>
-                        <a:t>data/raw/localdata_license*.csv 투입 시 자동 대체</a:t>
+                        <a:t>상가정보 또는 LOCALDATA 인허가 파일을 넣으면 산출됩니다</a:t>
                       </a:r>
                     </a:p>
                   </a:txBody>
@@ -23482,7 +21760,7 @@
                           <a:ea typeface="맑은 고딕"/>
                           <a:cs typeface="맑은 고딕"/>
                         </a:rPr>
-                        <a:t>예시(미투입)</a:t>
+                        <a:t>nan</a:t>
                       </a:r>
                     </a:p>
                   </a:txBody>
@@ -23507,7 +21785,7 @@
                           <a:ea typeface="맑은 고딕"/>
                           <a:cs typeface="맑은 고딕"/>
                         </a:rPr>
-                        <a:t>예시 생성(seed=20260833)</a:t>
+                        <a:t>미확보</a:t>
                       </a:r>
                     </a:p>
                   </a:txBody>
@@ -23532,7 +21810,7 @@
                           <a:ea typeface="맑은 고딕"/>
                           <a:cs typeface="맑은 고딕"/>
                         </a:rPr>
-                        <a:t>data/raw/facility_*.csv 투입 시 자동 대체</a:t>
+                        <a:t>facility_*.csv 또는 상가정보를 넣으면 산출됩니다</a:t>
                       </a:r>
                     </a:p>
                   </a:txBody>
@@ -23584,7 +21862,7 @@
                           <a:ea typeface="맑은 고딕"/>
                           <a:cs typeface="맑은 고딕"/>
                         </a:rPr>
-                        <a:t>예시(미투입)</a:t>
+                        <a:t>nan</a:t>
                       </a:r>
                     </a:p>
                   </a:txBody>
@@ -23609,7 +21887,7 @@
                           <a:ea typeface="맑은 고딕"/>
                           <a:cs typeface="맑은 고딕"/>
                         </a:rPr>
-                        <a:t>예시 생성(seed=20260834)</a:t>
+                        <a:t>미확보</a:t>
                       </a:r>
                     </a:p>
                   </a:txBody>
@@ -23634,7 +21912,7 @@
                           <a:ea typeface="맑은 고딕"/>
                           <a:cs typeface="맑은 고딕"/>
                         </a:rPr>
-                        <a:t>data/raw/vacant_house.csv 투입 시 자동 대체</a:t>
+                        <a:t>빈집 통계(천안시 동남구·서북구 단위)를 넣으면 산출됩니다</a:t>
                       </a:r>
                     </a:p>
                   </a:txBody>
@@ -23686,7 +21964,7 @@
                           <a:ea typeface="맑은 고딕"/>
                           <a:cs typeface="맑은 고딕"/>
                         </a:rPr>
-                        <a:t>예시(미투입)</a:t>
+                        <a:t>nan</a:t>
                       </a:r>
                     </a:p>
                   </a:txBody>
@@ -23711,7 +21989,7 @@
                           <a:ea typeface="맑은 고딕"/>
                           <a:cs typeface="맑은 고딕"/>
                         </a:rPr>
-                        <a:t>예시 생성(seed=20260836)</a:t>
+                        <a:t>미확보</a:t>
                       </a:r>
                     </a:p>
                   </a:txBody>
@@ -23736,7 +22014,7 @@
                           <a:ea typeface="맑은 고딕"/>
                           <a:cs typeface="맑은 고딕"/>
                         </a:rPr>
-                        <a:t>data/raw/bus_stop.csv 투입 시 자동 대체</a:t>
+                        <a:t>정류소 위치/주소가 담긴 파일이 필요합니다(노선 현황만으로는 불가)</a:t>
                       </a:r>
                     </a:p>
                   </a:txBody>
@@ -24528,7 +22806,7 @@
                           <a:ea typeface="맑은 고딕"/>
                           <a:cs typeface="맑은 고딕"/>
                         </a:rPr>
-                        <a:t>신안동, 성정동, 쌍용동, 청룡동, 신방동</a:t>
+                        <a:t>신안동, 청룡동, 성정동, 신방동, 쌍용동</a:t>
                       </a:r>
                     </a:p>
                   </a:txBody>
@@ -24580,7 +22858,7 @@
                           <a:ea typeface="맑은 고딕"/>
                           <a:cs typeface="맑은 고딕"/>
                         </a:rPr>
-                        <a:t>풍세면, 병천면, 입장면, 성남면, 북면, 동면</a:t>
+                        <a:t>풍세면, 병천면, 입장면, 북면, 광덕면, 수신면</a:t>
                       </a:r>
                     </a:p>
                   </a:txBody>
@@ -24632,7 +22910,7 @@
                           <a:ea typeface="맑은 고딕"/>
                           <a:cs typeface="맑은 고딕"/>
                         </a:rPr>
-                        <a:t>불당동, 부성동, 백석동</a:t>
+                        <a:t>부성동, 불당동, 백석동</a:t>
                       </a:r>
                     </a:p>
                   </a:txBody>
@@ -24736,7 +23014,7 @@
                           <a:ea typeface="맑은 고딕"/>
                           <a:cs typeface="맑은 고딕"/>
                         </a:rPr>
-                        <a:t>직산읍, 목천읍, 성거읍, 성환읍</a:t>
+                        <a:t>성거읍, 직산읍, 목천읍, 성환읍</a:t>
                       </a:r>
                     </a:p>
                   </a:txBody>
@@ -25010,7 +23288,7 @@
                 <a:ea typeface="맑은 고딕"/>
                 <a:cs typeface="맑은 고딕"/>
               </a:rPr>
-              <a:t>5대 도메인 · 12개 지표</a:t>
+              <a:t>5대 도메인 · 3개 지표</a:t>
             </a:r>
           </a:p>
         </p:txBody>
@@ -26210,7 +24488,7 @@
                 <a:ea typeface="맑은 고딕"/>
                 <a:cs typeface="맑은 고딕"/>
               </a:rPr>
-              <a:t>최상위 불당동 82점, 최하위 수신면 6점. 같은 시(市) 안의 격차다.</a:t>
+              <a:t>최상위 문성동 91점, 최하위 성남면 0점. 같은 시(市) 안의 격차다.</a:t>
             </a:r>
           </a:p>
         </p:txBody>
@@ -26231,8 +24509,8 @@
         </p:blipFill>
         <p:spPr>
           <a:xfrm>
-            <a:off x="1682115" y="2084831"/>
-            <a:ext cx="4353305" cy="4114800"/>
+            <a:off x="1765447" y="2084831"/>
+            <a:ext cx="4186641" cy="4114800"/>
           </a:xfrm>
           <a:prstGeom prst="rect">
             <a:avLst/>
@@ -26404,7 +24682,7 @@
                 <a:ea typeface="맑은 고딕"/>
                 <a:cs typeface="맑은 고딕"/>
               </a:rPr>
-              <a:t>1.74배</a:t>
+              <a:t>1.29배</a:t>
             </a:r>
           </a:p>
         </p:txBody>
@@ -26445,7 +24723,7 @@
                 <a:ea typeface="맑은 고딕"/>
                 <a:cs typeface="맑은 고딕"/>
               </a:rPr>
-              <a:t>76.4 vs 44.0</a:t>
+              <a:t>48.9 vs 38.1</a:t>
             </a:r>
           </a:p>
         </p:txBody>
@@ -26615,7 +24893,7 @@
                 <a:ea typeface="맑은 고딕"/>
                 <a:cs typeface="맑은 고딕"/>
               </a:rPr>
-              <a:t>0.318</a:t>
+              <a:t>0.421</a:t>
             </a:r>
           </a:p>
         </p:txBody>
@@ -26656,7 +24934,7 @@
                 <a:ea typeface="맑은 고딕"/>
                 <a:cs typeface="맑은 고딕"/>
               </a:rPr>
-              <a:t>변동계수 56.5%</a:t>
+              <a:t>변동계수 78.6%</a:t>
             </a:r>
           </a:p>
         </p:txBody>
@@ -26867,7 +25145,7 @@
                 <a:ea typeface="맑은 고딕"/>
                 <a:cs typeface="맑은 고딕"/>
               </a:rPr>
-              <a:t>실루엣 계수 0.322</a:t>
+              <a:t>실루엣 계수 0.59</a:t>
             </a:r>
           </a:p>
         </p:txBody>

--- a/deliverables/기획서_천안균형발전나침반_CBC.pptx
+++ b/deliverables/기획서_천안균형발전나침반_CBC.pptx
@@ -3316,7 +3316,48 @@
       </p:sp>
       <p:sp>
         <p:nvSpPr>
-          <p:cNvPr id="7" name="Rectangle 6"/>
+          <p:cNvPr id="7" name="TextBox 6"/>
+          <p:cNvSpPr txBox="1"/>
+          <p:nvPr/>
+        </p:nvSpPr>
+        <p:spPr>
+          <a:xfrm>
+            <a:off x="1051560" y="5815584"/>
+            <a:ext cx="9144000" cy="274320"/>
+          </a:xfrm>
+          <a:prstGeom prst="rect">
+            <a:avLst/>
+          </a:prstGeom>
+          <a:noFill/>
+        </p:spPr>
+        <p:txBody>
+          <a:bodyPr wrap="square" lIns="0" rIns="0" tIns="0" bIns="0">
+            <a:spAutoFit/>
+          </a:bodyPr>
+          <a:lstStyle/>
+          <a:p>
+            <a:pPr algn="l">
+              <a:lnSpc>
+                <a:spcPct val="135000"/>
+              </a:lnSpc>
+            </a:pPr>
+            <a:r>
+              <a:rPr sz="1000" b="0">
+                <a:solidFill>
+                  <a:srgbClr val="FAB219"/>
+                </a:solidFill>
+                <a:latin typeface="맑은 고딕"/>
+                <a:ea typeface="맑은 고딕"/>
+                <a:cs typeface="맑은 고딕"/>
+              </a:rPr>
+              <a:t>※ 현 단계 산출 범위: 인구활력 도메인만 확보 — 균형발전지수로 부르기에는 이릅니다</a:t>
+            </a:r>
+          </a:p>
+        </p:txBody>
+      </p:sp>
+      <p:sp>
+        <p:nvSpPr>
+          <p:cNvPr id="8" name="Rectangle 7"/>
           <p:cNvSpPr/>
           <p:nvPr/>
         </p:nvSpPr>
@@ -3358,7 +3399,7 @@
       </p:sp>
       <p:sp>
         <p:nvSpPr>
-          <p:cNvPr id="8" name="TextBox 7"/>
+          <p:cNvPr id="9" name="TextBox 8"/>
           <p:cNvSpPr txBox="1"/>
           <p:nvPr/>
         </p:nvSpPr>
@@ -3420,7 +3461,7 @@
       </p:sp>
       <p:sp>
         <p:nvSpPr>
-          <p:cNvPr id="9" name="TextBox 8"/>
+          <p:cNvPr id="10" name="TextBox 9"/>
           <p:cNvSpPr txBox="1"/>
           <p:nvPr/>
         </p:nvSpPr>
@@ -3461,7 +3502,7 @@
       </p:sp>
       <p:sp>
         <p:nvSpPr>
-          <p:cNvPr id="10" name="TextBox 9"/>
+          <p:cNvPr id="11" name="TextBox 10"/>
           <p:cNvSpPr txBox="1"/>
           <p:nvPr/>
         </p:nvSpPr>
@@ -3502,7 +3543,7 @@
       </p:sp>
       <p:sp>
         <p:nvSpPr>
-          <p:cNvPr id="11" name="TextBox 10"/>
+          <p:cNvPr id="12" name="TextBox 11"/>
           <p:cNvSpPr txBox="1"/>
           <p:nvPr/>
         </p:nvSpPr>
@@ -3543,7 +3584,7 @@
       </p:sp>
       <p:sp>
         <p:nvSpPr>
-          <p:cNvPr id="12" name="TextBox 11"/>
+          <p:cNvPr id="13" name="TextBox 12"/>
           <p:cNvSpPr txBox="1"/>
           <p:nvPr/>
         </p:nvSpPr>
@@ -3584,7 +3625,7 @@
       </p:sp>
       <p:sp>
         <p:nvSpPr>
-          <p:cNvPr id="13" name="TextBox 12"/>
+          <p:cNvPr id="14" name="TextBox 13"/>
           <p:cNvSpPr txBox="1"/>
           <p:nvPr/>
         </p:nvSpPr>
@@ -3625,7 +3666,7 @@
       </p:sp>
       <p:sp>
         <p:nvSpPr>
-          <p:cNvPr id="14" name="TextBox 13"/>
+          <p:cNvPr id="15" name="TextBox 14"/>
           <p:cNvSpPr txBox="1"/>
           <p:nvPr/>
         </p:nvSpPr>
@@ -3666,7 +3707,7 @@
       </p:sp>
       <p:sp>
         <p:nvSpPr>
-          <p:cNvPr id="15" name="TextBox 14"/>
+          <p:cNvPr id="16" name="TextBox 15"/>
           <p:cNvSpPr txBox="1"/>
           <p:nvPr/>
         </p:nvSpPr>
@@ -3707,7 +3748,7 @@
       </p:sp>
       <p:sp>
         <p:nvSpPr>
-          <p:cNvPr id="16" name="TextBox 15"/>
+          <p:cNvPr id="17" name="TextBox 16"/>
           <p:cNvSpPr txBox="1"/>
           <p:nvPr/>
         </p:nvSpPr>
@@ -24447,7 +24488,7 @@
                 <a:ea typeface="맑은 고딕"/>
                 <a:cs typeface="맑은 고딕"/>
               </a:rPr>
-              <a:t>진단 결과 — 25개 생활권 CBI</a:t>
+              <a:t>살펴본 결과 — 25개 생활권 인구활력지수(잠정)</a:t>
             </a:r>
           </a:p>
         </p:txBody>
@@ -24488,7 +24529,7 @@
                 <a:ea typeface="맑은 고딕"/>
                 <a:cs typeface="맑은 고딕"/>
               </a:rPr>
-              <a:t>최상위 문성동 91점, 최하위 성남면 0점. 같은 시(市) 안의 격차다.</a:t>
+              <a:t>최상위 문성동 91점, 최하위 성남면 0점. (인구활력 도메인만 확보 — 균형발전지수로 부르기에는 이릅니다)</a:t>
             </a:r>
           </a:p>
         </p:txBody>
@@ -24509,8 +24550,8 @@
         </p:blipFill>
         <p:spPr>
           <a:xfrm>
-            <a:off x="1765447" y="2084831"/>
-            <a:ext cx="4186641" cy="4114800"/>
+            <a:off x="1491705" y="2084831"/>
+            <a:ext cx="4734125" cy="4114800"/>
           </a:xfrm>
           <a:prstGeom prst="rect">
             <a:avLst/>

--- a/deliverables/기획서_천안균형발전나침반_CBC.pptx
+++ b/deliverables/기획서_천안균형발전나침반_CBC.pptx
@@ -25,6 +25,7 @@
     <p:sldId id="273" r:id="rId24"/>
     <p:sldId id="274" r:id="rId25"/>
     <p:sldId id="275" r:id="rId26"/>
+    <p:sldId id="276" r:id="rId27"/>
   </p:sldIdLst>
   <p:sldSz cx="12191695" cy="6858000" type="screen4x3"/>
   <p:notesSz cx="6858000" cy="9144000"/>
@@ -3316,48 +3317,7 @@
       </p:sp>
       <p:sp>
         <p:nvSpPr>
-          <p:cNvPr id="7" name="TextBox 6"/>
-          <p:cNvSpPr txBox="1"/>
-          <p:nvPr/>
-        </p:nvSpPr>
-        <p:spPr>
-          <a:xfrm>
-            <a:off x="1051560" y="5815584"/>
-            <a:ext cx="9144000" cy="274320"/>
-          </a:xfrm>
-          <a:prstGeom prst="rect">
-            <a:avLst/>
-          </a:prstGeom>
-          <a:noFill/>
-        </p:spPr>
-        <p:txBody>
-          <a:bodyPr wrap="square" lIns="0" rIns="0" tIns="0" bIns="0">
-            <a:spAutoFit/>
-          </a:bodyPr>
-          <a:lstStyle/>
-          <a:p>
-            <a:pPr algn="l">
-              <a:lnSpc>
-                <a:spcPct val="135000"/>
-              </a:lnSpc>
-            </a:pPr>
-            <a:r>
-              <a:rPr sz="1000" b="0">
-                <a:solidFill>
-                  <a:srgbClr val="FAB219"/>
-                </a:solidFill>
-                <a:latin typeface="맑은 고딕"/>
-                <a:ea typeface="맑은 고딕"/>
-                <a:cs typeface="맑은 고딕"/>
-              </a:rPr>
-              <a:t>※ 현 단계 산출 범위: 인구활력 도메인만 확보 — 균형발전지수로 부르기에는 이릅니다</a:t>
-            </a:r>
-          </a:p>
-        </p:txBody>
-      </p:sp>
-      <p:sp>
-        <p:nvSpPr>
-          <p:cNvPr id="8" name="Rectangle 7"/>
+          <p:cNvPr id="7" name="Rectangle 6"/>
           <p:cNvSpPr/>
           <p:nvPr/>
         </p:nvSpPr>
@@ -3399,7 +3359,7 @@
       </p:sp>
       <p:sp>
         <p:nvSpPr>
-          <p:cNvPr id="9" name="TextBox 8"/>
+          <p:cNvPr id="8" name="TextBox 7"/>
           <p:cNvSpPr txBox="1"/>
           <p:nvPr/>
         </p:nvSpPr>
@@ -3461,7 +3421,7 @@
       </p:sp>
       <p:sp>
         <p:nvSpPr>
-          <p:cNvPr id="10" name="TextBox 9"/>
+          <p:cNvPr id="9" name="TextBox 8"/>
           <p:cNvSpPr txBox="1"/>
           <p:nvPr/>
         </p:nvSpPr>
@@ -3502,7 +3462,7 @@
       </p:sp>
       <p:sp>
         <p:nvSpPr>
-          <p:cNvPr id="11" name="TextBox 10"/>
+          <p:cNvPr id="10" name="TextBox 9"/>
           <p:cNvSpPr txBox="1"/>
           <p:nvPr/>
         </p:nvSpPr>
@@ -3543,7 +3503,7 @@
       </p:sp>
       <p:sp>
         <p:nvSpPr>
-          <p:cNvPr id="12" name="TextBox 11"/>
+          <p:cNvPr id="11" name="TextBox 10"/>
           <p:cNvSpPr txBox="1"/>
           <p:nvPr/>
         </p:nvSpPr>
@@ -3584,7 +3544,7 @@
       </p:sp>
       <p:sp>
         <p:nvSpPr>
-          <p:cNvPr id="13" name="TextBox 12"/>
+          <p:cNvPr id="12" name="TextBox 11"/>
           <p:cNvSpPr txBox="1"/>
           <p:nvPr/>
         </p:nvSpPr>
@@ -3625,7 +3585,7 @@
       </p:sp>
       <p:sp>
         <p:nvSpPr>
-          <p:cNvPr id="14" name="TextBox 13"/>
+          <p:cNvPr id="13" name="TextBox 12"/>
           <p:cNvSpPr txBox="1"/>
           <p:nvPr/>
         </p:nvSpPr>
@@ -3666,7 +3626,7 @@
       </p:sp>
       <p:sp>
         <p:nvSpPr>
-          <p:cNvPr id="15" name="TextBox 14"/>
+          <p:cNvPr id="14" name="TextBox 13"/>
           <p:cNvSpPr txBox="1"/>
           <p:nvPr/>
         </p:nvSpPr>
@@ -3700,14 +3660,14 @@
                 <a:ea typeface="맑은 고딕"/>
                 <a:cs typeface="맑은 고딕"/>
               </a:rPr>
-              <a:t>25개 생활권 · 지표 3종</a:t>
-            </a:r>
-          </a:p>
-        </p:txBody>
-      </p:sp>
-      <p:sp>
-        <p:nvSpPr>
-          <p:cNvPr id="16" name="TextBox 15"/>
+              <a:t>25개 생활권 · 지표 9종</a:t>
+            </a:r>
+          </a:p>
+        </p:txBody>
+      </p:sp>
+      <p:sp>
+        <p:nvSpPr>
+          <p:cNvPr id="15" name="TextBox 14"/>
           <p:cNvSpPr txBox="1"/>
           <p:nvPr/>
         </p:nvSpPr>
@@ -3748,7 +3708,7 @@
       </p:sp>
       <p:sp>
         <p:nvSpPr>
-          <p:cNvPr id="17" name="TextBox 16"/>
+          <p:cNvPr id="16" name="TextBox 15"/>
           <p:cNvSpPr txBox="1"/>
           <p:nvPr/>
         </p:nvSpPr>
@@ -3944,8 +3904,8 @@
         </p:blipFill>
         <p:spPr>
           <a:xfrm>
-            <a:off x="1826826" y="2157984"/>
-            <a:ext cx="4383923" cy="3200400"/>
+            <a:off x="1741580" y="2157984"/>
+            <a:ext cx="4554415" cy="3200400"/>
           </a:xfrm>
           <a:prstGeom prst="rect">
             <a:avLst/>
@@ -4762,7 +4722,7 @@
                 <a:ea typeface="맑은 고딕"/>
                 <a:cs typeface="맑은 고딕"/>
               </a:rPr>
-              <a:t>5년 인구증감률 상위는 1(+158%), 0(+81%)으로, 두 곳 모두 신축 입주가 이어진 지역입니다. 원도심에 속한 문성동도 사람이 돌아왔습니다.</a:t>
+              <a:t>5년 인구증감률 상위는 11(+158%), 4(+81%)으로, 두 곳 모두 신축 입주가 이어진 지역입니다. 원도심에 속한 문성동도 사람이 돌아왔습니다.</a:t>
             </a:r>
           </a:p>
           <a:p>
@@ -5873,7 +5833,7 @@
                 <a:ea typeface="맑은 고딕"/>
                 <a:cs typeface="맑은 고딕"/>
               </a:rPr>
-              <a:t>69%</a:t>
+              <a:t>72%</a:t>
             </a:r>
           </a:p>
         </p:txBody>
@@ -5955,7 +5915,7 @@
                 <a:ea typeface="맑은 고딕"/>
                 <a:cs typeface="맑은 고딕"/>
               </a:rPr>
-              <a:t>9.85 (베이스라인 10.4)</a:t>
+              <a:t>10.09 (베이스라인 10.4)</a:t>
             </a:r>
           </a:p>
         </p:txBody>
@@ -6037,7 +5997,7 @@
                 <a:ea typeface="맑은 고딕"/>
                 <a:cs typeface="맑은 고딕"/>
               </a:rPr>
-              <a:t>+5.3%</a:t>
+              <a:t>+3.0%</a:t>
             </a:r>
           </a:p>
         </p:txBody>
@@ -6119,7 +6079,7 @@
                 <a:ea typeface="맑은 고딕"/>
                 <a:cs typeface="맑은 고딕"/>
               </a:rPr>
-              <a:t>-0.02</a:t>
+              <a:t>-0.13</a:t>
             </a:r>
           </a:p>
         </p:txBody>
@@ -6800,7 +6760,7 @@
                           <a:ea typeface="맑은 고딕"/>
                           <a:cs typeface="맑은 고딕"/>
                         </a:rPr>
-                        <a:t>+10</a:t>
+                        <a:t>+7</a:t>
                       </a:r>
                     </a:p>
                   </a:txBody>
@@ -7004,7 +6964,7 @@
                           <a:ea typeface="맑은 고딕"/>
                           <a:cs typeface="맑은 고딕"/>
                         </a:rPr>
-                        <a:t>+3</a:t>
+                        <a:t>+4</a:t>
                       </a:r>
                     </a:p>
                   </a:txBody>
@@ -7081,7 +7041,7 @@
                           <a:ea typeface="맑은 고딕"/>
                           <a:cs typeface="맑은 고딕"/>
                         </a:rPr>
-                        <a:t>96</a:t>
+                        <a:t>94</a:t>
                       </a:r>
                     </a:p>
                   </a:txBody>
@@ -7106,7 +7066,7 @@
                           <a:ea typeface="맑은 고딕"/>
                           <a:cs typeface="맑은 고딕"/>
                         </a:rPr>
-                        <a:t>+9</a:t>
+                        <a:t>+6</a:t>
                       </a:r>
                     </a:p>
                   </a:txBody>
@@ -7133,7 +7093,7 @@
                           <a:ea typeface="맑은 고딕"/>
                           <a:cs typeface="맑은 고딕"/>
                         </a:rPr>
-                        <a:t>성환읍</a:t>
+                        <a:t>원성동</a:t>
                       </a:r>
                     </a:p>
                   </a:txBody>
@@ -7183,7 +7143,7 @@
                           <a:ea typeface="맑은 고딕"/>
                           <a:cs typeface="맑은 고딕"/>
                         </a:rPr>
-                        <a:t>95</a:t>
+                        <a:t>90</a:t>
                       </a:r>
                     </a:p>
                   </a:txBody>
@@ -7208,7 +7168,7 @@
                           <a:ea typeface="맑은 고딕"/>
                           <a:cs typeface="맑은 고딕"/>
                         </a:rPr>
-                        <a:t>+21</a:t>
+                        <a:t>+16</a:t>
                       </a:r>
                     </a:p>
                   </a:txBody>
@@ -8534,7 +8494,7 @@
                 <a:ea typeface="맑은 고딕"/>
                 <a:cs typeface="맑은 고딕"/>
               </a:rPr>
-              <a:t>처방 결과 — 생활SOC 위치 자료 확보 후 산출</a:t>
+              <a:t>처방 결과 — 투자 우선순위</a:t>
             </a:r>
           </a:p>
         </p:txBody>
@@ -8575,55 +8535,35 @@
                 <a:ea typeface="맑은 고딕"/>
                 <a:cs typeface="맑은 고딕"/>
               </a:rPr>
-              <a:t>커버리지 계산에는 기존 생활SOC의 위치가 필요합니다. 현재는 미확보 상태입니다.</a:t>
-            </a:r>
-          </a:p>
-        </p:txBody>
-      </p:sp>
-      <p:sp>
-        <p:nvSpPr>
-          <p:cNvPr id="5" name="Rounded Rectangle 4"/>
-          <p:cNvSpPr/>
-          <p:nvPr/>
-        </p:nvSpPr>
-        <p:spPr>
-          <a:xfrm>
-            <a:off x="658368" y="2377440"/>
-            <a:ext cx="10874959" cy="1371600"/>
-          </a:xfrm>
-          <a:prstGeom prst="roundRect">
-            <a:avLst>
-              <a:gd name="adj" fmla="val 6000"/>
-            </a:avLst>
-          </a:prstGeom>
-          <a:solidFill>
-            <a:srgbClr val="F6F7F9"/>
-          </a:solidFill>
-          <a:ln>
-            <a:noFill/>
-          </a:ln>
-          <a:effectLst/>
-        </p:spPr>
-        <p:style>
-          <a:lnRef idx="1">
-            <a:schemeClr val="accent1"/>
-          </a:lnRef>
-          <a:fillRef idx="3">
-            <a:schemeClr val="accent1"/>
-          </a:fillRef>
-          <a:effectRef idx="2">
-            <a:schemeClr val="accent1"/>
-          </a:effectRef>
-          <a:fontRef idx="minor">
-            <a:schemeClr val="lt1"/>
-          </a:fontRef>
-        </p:style>
-        <p:txBody>
-          <a:bodyPr rtlCol="0" anchor="ctr"/>
-          <a:lstStyle/>
-          <a:p/>
-        </p:txBody>
-      </p:sp>
+              <a:t>상위 12개소 우선 투자 시 취약수요 커버리지 +28.6%p, 신규 수혜인구 약 188,907명.</a:t>
+            </a:r>
+          </a:p>
+        </p:txBody>
+      </p:sp>
+      <p:pic>
+        <p:nvPicPr>
+          <p:cNvPr id="5" name="Picture 4" descr="07_투자입지_지도.png"/>
+          <p:cNvPicPr>
+            <a:picLocks noChangeAspect="1"/>
+          </p:cNvPicPr>
+          <p:nvPr/>
+        </p:nvPicPr>
+        <p:blipFill>
+          <a:blip r:embed="rId2"/>
+          <a:stretch>
+            <a:fillRect/>
+          </a:stretch>
+        </p:blipFill>
+        <p:spPr>
+          <a:xfrm>
+            <a:off x="1180496" y="2212848"/>
+            <a:ext cx="3802062" cy="3931920"/>
+          </a:xfrm>
+          <a:prstGeom prst="rect">
+            <a:avLst/>
+          </a:prstGeom>
+        </p:spPr>
+      </p:pic>
       <p:sp>
         <p:nvSpPr>
           <p:cNvPr id="6" name="TextBox 5"/>
@@ -8632,8 +8572,8 @@
         </p:nvSpPr>
         <p:spPr>
           <a:xfrm>
-            <a:off x="978407" y="2615184"/>
-            <a:ext cx="10424160" cy="292608"/>
+            <a:off x="5779007" y="2212848"/>
+            <a:ext cx="5760720" cy="274320"/>
           </a:xfrm>
           <a:prstGeom prst="rect">
             <a:avLst/>
@@ -8652,7 +8592,7 @@
               </a:lnSpc>
             </a:pPr>
             <a:r>
-              <a:rPr sz="1450" b="1">
+              <a:rPr sz="1350" b="1">
                 <a:solidFill>
                   <a:srgbClr val="12151A"/>
                 </a:solidFill>
@@ -8660,73 +8600,1437 @@
                 <a:ea typeface="맑은 고딕"/>
                 <a:cs typeface="맑은 고딕"/>
               </a:rPr>
-              <a:t>설계와 코드는 완성되어 있고, 자료가 들어오면 즉시 산출됩니다.</a:t>
-            </a:r>
-          </a:p>
-        </p:txBody>
-      </p:sp>
-      <p:sp>
-        <p:nvSpPr>
-          <p:cNvPr id="7" name="TextBox 6"/>
-          <p:cNvSpPr txBox="1"/>
-          <p:nvPr/>
-        </p:nvSpPr>
-        <p:spPr>
-          <a:xfrm>
-            <a:off x="978407" y="3017520"/>
-            <a:ext cx="10424160" cy="640080"/>
-          </a:xfrm>
-          <a:prstGeom prst="rect">
-            <a:avLst/>
-          </a:prstGeom>
-          <a:noFill/>
-        </p:spPr>
-        <p:txBody>
-          <a:bodyPr wrap="square" lIns="0" rIns="0" tIns="0" bIns="0">
-            <a:spAutoFit/>
-          </a:bodyPr>
-          <a:lstStyle/>
-          <a:p>
-            <a:pPr algn="l">
-              <a:lnSpc>
-                <a:spcPct val="150000"/>
-              </a:lnSpc>
-            </a:pPr>
-            <a:r>
-              <a:rPr sz="1250" b="0">
-                <a:solidFill>
-                  <a:srgbClr val="52514E"/>
-                </a:solidFill>
-                <a:latin typeface="맑은 고딕"/>
-                <a:ea typeface="맑은 고딕"/>
-                <a:cs typeface="맑은 고딕"/>
-              </a:rPr>
-              <a:t>필요한 자료: 소상공인 상가(상권)정보 또는 공공데이터포털 생활SOC 표준데이터(위경도 포함)</a:t>
-            </a:r>
-          </a:p>
-          <a:p>
-            <a:pPr algn="l">
-              <a:lnSpc>
-                <a:spcPct val="150000"/>
-              </a:lnSpc>
-              <a:spcBef>
-                <a:spcPts val="0"/>
-              </a:spcBef>
-            </a:pPr>
-            <a:r>
-              <a:rPr sz="1250" b="0">
-                <a:solidFill>
-                  <a:srgbClr val="52514E"/>
-                </a:solidFill>
-                <a:latin typeface="맑은 고딕"/>
-                <a:ea typeface="맑은 고딕"/>
-                <a:cs typeface="맑은 고딕"/>
-              </a:rPr>
-              <a:t>산출물: 순위 · 생활권 · 시설유형 · 새로 닿는 인구 · 커버리지 개선폭이 담긴 표와 지도</a:t>
-            </a:r>
-          </a:p>
-        </p:txBody>
-      </p:sp>
+              <a:t>AI 추천 투자 순위 (상위 10)</a:t>
+            </a:r>
+          </a:p>
+        </p:txBody>
+      </p:sp>
+      <p:graphicFrame>
+        <p:nvGraphicFramePr>
+          <p:cNvPr id="7" name="Table 6"/>
+          <p:cNvGraphicFramePr>
+            <a:graphicFrameLocks noGrp="1"/>
+          </p:cNvGraphicFramePr>
+          <p:nvPr/>
+        </p:nvGraphicFramePr>
+        <p:xfrm>
+          <a:off x="5779007" y="2560320"/>
+          <a:ext cx="5760715" cy="3369564"/>
+        </p:xfrm>
+        <a:graphic>
+          <a:graphicData uri="http://schemas.openxmlformats.org/drawingml/2006/table">
+            <a:tbl>
+              <a:tblPr firstRow="1" bandRow="1">
+                <a:tableStyleId>{5C22544A-7EE6-4342-B048-85BDC9FD1C3A}</a:tableStyleId>
+              </a:tblPr>
+              <a:tblGrid>
+                <a:gridCol w="640079"/>
+                <a:gridCol w="1280159"/>
+                <a:gridCol w="1097279"/>
+                <a:gridCol w="1463039"/>
+                <a:gridCol w="1280159"/>
+              </a:tblGrid>
+              <a:tr h="306324">
+                <a:tc>
+                  <a:txBody>
+                    <a:bodyPr/>
+                    <a:lstStyle/>
+                    <a:p>
+                      <a:pPr algn="ctr"/>
+                      <a:r>
+                        <a:rPr sz="1000" b="1">
+                          <a:solidFill>
+                            <a:srgbClr val="12151A"/>
+                          </a:solidFill>
+                          <a:latin typeface="맑은 고딕"/>
+                          <a:ea typeface="맑은 고딕"/>
+                          <a:cs typeface="맑은 고딕"/>
+                        </a:rPr>
+                        <a:t>순위</a:t>
+                      </a:r>
+                    </a:p>
+                  </a:txBody>
+                  <a:tcPr anchor="ctr">
+                    <a:solidFill>
+                      <a:srgbClr val="F6F7F9"/>
+                    </a:solidFill>
+                  </a:tcPr>
+                </a:tc>
+                <a:tc>
+                  <a:txBody>
+                    <a:bodyPr/>
+                    <a:lstStyle/>
+                    <a:p>
+                      <a:pPr algn="ctr"/>
+                      <a:r>
+                        <a:rPr sz="1000" b="1">
+                          <a:solidFill>
+                            <a:srgbClr val="12151A"/>
+                          </a:solidFill>
+                          <a:latin typeface="맑은 고딕"/>
+                          <a:ea typeface="맑은 고딕"/>
+                          <a:cs typeface="맑은 고딕"/>
+                        </a:rPr>
+                        <a:t>생활권</a:t>
+                      </a:r>
+                    </a:p>
+                  </a:txBody>
+                  <a:tcPr anchor="ctr">
+                    <a:solidFill>
+                      <a:srgbClr val="F6F7F9"/>
+                    </a:solidFill>
+                  </a:tcPr>
+                </a:tc>
+                <a:tc>
+                  <a:txBody>
+                    <a:bodyPr/>
+                    <a:lstStyle/>
+                    <a:p>
+                      <a:pPr algn="ctr"/>
+                      <a:r>
+                        <a:rPr sz="1000" b="1">
+                          <a:solidFill>
+                            <a:srgbClr val="12151A"/>
+                          </a:solidFill>
+                          <a:latin typeface="맑은 고딕"/>
+                          <a:ea typeface="맑은 고딕"/>
+                          <a:cs typeface="맑은 고딕"/>
+                        </a:rPr>
+                        <a:t>시설유형</a:t>
+                      </a:r>
+                    </a:p>
+                  </a:txBody>
+                  <a:tcPr anchor="ctr">
+                    <a:solidFill>
+                      <a:srgbClr val="F6F7F9"/>
+                    </a:solidFill>
+                  </a:tcPr>
+                </a:tc>
+                <a:tc>
+                  <a:txBody>
+                    <a:bodyPr/>
+                    <a:lstStyle/>
+                    <a:p>
+                      <a:pPr algn="ctr"/>
+                      <a:r>
+                        <a:rPr sz="1000" b="1">
+                          <a:solidFill>
+                            <a:srgbClr val="12151A"/>
+                          </a:solidFill>
+                          <a:latin typeface="맑은 고딕"/>
+                          <a:ea typeface="맑은 고딕"/>
+                          <a:cs typeface="맑은 고딕"/>
+                        </a:rPr>
+                        <a:t>신규 수혜인구</a:t>
+                      </a:r>
+                    </a:p>
+                  </a:txBody>
+                  <a:tcPr anchor="ctr">
+                    <a:solidFill>
+                      <a:srgbClr val="F6F7F9"/>
+                    </a:solidFill>
+                  </a:tcPr>
+                </a:tc>
+                <a:tc>
+                  <a:txBody>
+                    <a:bodyPr/>
+                    <a:lstStyle/>
+                    <a:p>
+                      <a:pPr algn="ctr"/>
+                      <a:r>
+                        <a:rPr sz="1000" b="1">
+                          <a:solidFill>
+                            <a:srgbClr val="12151A"/>
+                          </a:solidFill>
+                          <a:latin typeface="맑은 고딕"/>
+                          <a:ea typeface="맑은 고딕"/>
+                          <a:cs typeface="맑은 고딕"/>
+                        </a:rPr>
+                        <a:t>커버리지 개선</a:t>
+                      </a:r>
+                    </a:p>
+                  </a:txBody>
+                  <a:tcPr anchor="ctr">
+                    <a:solidFill>
+                      <a:srgbClr val="F6F7F9"/>
+                    </a:solidFill>
+                  </a:tcPr>
+                </a:tc>
+              </a:tr>
+              <a:tr h="306324">
+                <a:tc>
+                  <a:txBody>
+                    <a:bodyPr/>
+                    <a:lstStyle/>
+                    <a:p>
+                      <a:pPr algn="l"/>
+                      <a:r>
+                        <a:rPr sz="950">
+                          <a:solidFill>
+                            <a:srgbClr val="12151A"/>
+                          </a:solidFill>
+                          <a:latin typeface="맑은 고딕"/>
+                          <a:ea typeface="맑은 고딕"/>
+                          <a:cs typeface="맑은 고딕"/>
+                        </a:rPr>
+                        <a:t>1</a:t>
+                      </a:r>
+                    </a:p>
+                  </a:txBody>
+                  <a:tcPr anchor="ctr">
+                    <a:solidFill>
+                      <a:srgbClr val="FFFFFF"/>
+                    </a:solidFill>
+                  </a:tcPr>
+                </a:tc>
+                <a:tc>
+                  <a:txBody>
+                    <a:bodyPr/>
+                    <a:lstStyle/>
+                    <a:p>
+                      <a:pPr algn="ctr"/>
+                      <a:r>
+                        <a:rPr sz="950">
+                          <a:solidFill>
+                            <a:srgbClr val="12151A"/>
+                          </a:solidFill>
+                          <a:latin typeface="맑은 고딕"/>
+                          <a:ea typeface="맑은 고딕"/>
+                          <a:cs typeface="맑은 고딕"/>
+                        </a:rPr>
+                        <a:t>신방동</a:t>
+                      </a:r>
+                    </a:p>
+                  </a:txBody>
+                  <a:tcPr anchor="ctr">
+                    <a:solidFill>
+                      <a:srgbClr val="FFFFFF"/>
+                    </a:solidFill>
+                  </a:tcPr>
+                </a:tc>
+                <a:tc>
+                  <a:txBody>
+                    <a:bodyPr/>
+                    <a:lstStyle/>
+                    <a:p>
+                      <a:pPr algn="ctr"/>
+                      <a:r>
+                        <a:rPr sz="950">
+                          <a:solidFill>
+                            <a:srgbClr val="12151A"/>
+                          </a:solidFill>
+                          <a:latin typeface="맑은 고딕"/>
+                          <a:ea typeface="맑은 고딕"/>
+                          <a:cs typeface="맑은 고딕"/>
+                        </a:rPr>
+                        <a:t>체육</a:t>
+                      </a:r>
+                    </a:p>
+                  </a:txBody>
+                  <a:tcPr anchor="ctr">
+                    <a:solidFill>
+                      <a:srgbClr val="FFFFFF"/>
+                    </a:solidFill>
+                  </a:tcPr>
+                </a:tc>
+                <a:tc>
+                  <a:txBody>
+                    <a:bodyPr/>
+                    <a:lstStyle/>
+                    <a:p>
+                      <a:pPr algn="ctr"/>
+                      <a:r>
+                        <a:rPr sz="950">
+                          <a:solidFill>
+                            <a:srgbClr val="12151A"/>
+                          </a:solidFill>
+                          <a:latin typeface="맑은 고딕"/>
+                          <a:ea typeface="맑은 고딕"/>
+                          <a:cs typeface="맑은 고딕"/>
+                        </a:rPr>
+                        <a:t>32,728</a:t>
+                      </a:r>
+                    </a:p>
+                  </a:txBody>
+                  <a:tcPr anchor="ctr">
+                    <a:solidFill>
+                      <a:srgbClr val="FFFFFF"/>
+                    </a:solidFill>
+                  </a:tcPr>
+                </a:tc>
+                <a:tc>
+                  <a:txBody>
+                    <a:bodyPr/>
+                    <a:lstStyle/>
+                    <a:p>
+                      <a:pPr algn="ctr"/>
+                      <a:r>
+                        <a:rPr sz="950">
+                          <a:solidFill>
+                            <a:srgbClr val="12151A"/>
+                          </a:solidFill>
+                          <a:latin typeface="맑은 고딕"/>
+                          <a:ea typeface="맑은 고딕"/>
+                          <a:cs typeface="맑은 고딕"/>
+                        </a:rPr>
+                        <a:t>+5.03%p</a:t>
+                      </a:r>
+                    </a:p>
+                  </a:txBody>
+                  <a:tcPr anchor="ctr">
+                    <a:solidFill>
+                      <a:srgbClr val="FFFFFF"/>
+                    </a:solidFill>
+                  </a:tcPr>
+                </a:tc>
+              </a:tr>
+              <a:tr h="306324">
+                <a:tc>
+                  <a:txBody>
+                    <a:bodyPr/>
+                    <a:lstStyle/>
+                    <a:p>
+                      <a:pPr algn="l"/>
+                      <a:r>
+                        <a:rPr sz="950">
+                          <a:solidFill>
+                            <a:srgbClr val="12151A"/>
+                          </a:solidFill>
+                          <a:latin typeface="맑은 고딕"/>
+                          <a:ea typeface="맑은 고딕"/>
+                          <a:cs typeface="맑은 고딕"/>
+                        </a:rPr>
+                        <a:t>2</a:t>
+                      </a:r>
+                    </a:p>
+                  </a:txBody>
+                  <a:tcPr anchor="ctr">
+                    <a:solidFill>
+                      <a:srgbClr val="FFFFFF"/>
+                    </a:solidFill>
+                  </a:tcPr>
+                </a:tc>
+                <a:tc>
+                  <a:txBody>
+                    <a:bodyPr/>
+                    <a:lstStyle/>
+                    <a:p>
+                      <a:pPr algn="ctr"/>
+                      <a:r>
+                        <a:rPr sz="950">
+                          <a:solidFill>
+                            <a:srgbClr val="12151A"/>
+                          </a:solidFill>
+                          <a:latin typeface="맑은 고딕"/>
+                          <a:ea typeface="맑은 고딕"/>
+                          <a:cs typeface="맑은 고딕"/>
+                        </a:rPr>
+                        <a:t>봉명동</a:t>
+                      </a:r>
+                    </a:p>
+                  </a:txBody>
+                  <a:tcPr anchor="ctr">
+                    <a:solidFill>
+                      <a:srgbClr val="FFFFFF"/>
+                    </a:solidFill>
+                  </a:tcPr>
+                </a:tc>
+                <a:tc>
+                  <a:txBody>
+                    <a:bodyPr/>
+                    <a:lstStyle/>
+                    <a:p>
+                      <a:pPr algn="ctr"/>
+                      <a:r>
+                        <a:rPr sz="950">
+                          <a:solidFill>
+                            <a:srgbClr val="12151A"/>
+                          </a:solidFill>
+                          <a:latin typeface="맑은 고딕"/>
+                          <a:ea typeface="맑은 고딕"/>
+                          <a:cs typeface="맑은 고딕"/>
+                        </a:rPr>
+                        <a:t>체육</a:t>
+                      </a:r>
+                    </a:p>
+                  </a:txBody>
+                  <a:tcPr anchor="ctr">
+                    <a:solidFill>
+                      <a:srgbClr val="FFFFFF"/>
+                    </a:solidFill>
+                  </a:tcPr>
+                </a:tc>
+                <a:tc>
+                  <a:txBody>
+                    <a:bodyPr/>
+                    <a:lstStyle/>
+                    <a:p>
+                      <a:pPr algn="ctr"/>
+                      <a:r>
+                        <a:rPr sz="950">
+                          <a:solidFill>
+                            <a:srgbClr val="12151A"/>
+                          </a:solidFill>
+                          <a:latin typeface="맑은 고딕"/>
+                          <a:ea typeface="맑은 고딕"/>
+                          <a:cs typeface="맑은 고딕"/>
+                        </a:rPr>
+                        <a:t>24,351</a:t>
+                      </a:r>
+                    </a:p>
+                  </a:txBody>
+                  <a:tcPr anchor="ctr">
+                    <a:solidFill>
+                      <a:srgbClr val="FFFFFF"/>
+                    </a:solidFill>
+                  </a:tcPr>
+                </a:tc>
+                <a:tc>
+                  <a:txBody>
+                    <a:bodyPr/>
+                    <a:lstStyle/>
+                    <a:p>
+                      <a:pPr algn="ctr"/>
+                      <a:r>
+                        <a:rPr sz="950">
+                          <a:solidFill>
+                            <a:srgbClr val="12151A"/>
+                          </a:solidFill>
+                          <a:latin typeface="맑은 고딕"/>
+                          <a:ea typeface="맑은 고딕"/>
+                          <a:cs typeface="맑은 고딕"/>
+                        </a:rPr>
+                        <a:t>+4.09%p</a:t>
+                      </a:r>
+                    </a:p>
+                  </a:txBody>
+                  <a:tcPr anchor="ctr">
+                    <a:solidFill>
+                      <a:srgbClr val="FFFFFF"/>
+                    </a:solidFill>
+                  </a:tcPr>
+                </a:tc>
+              </a:tr>
+              <a:tr h="306324">
+                <a:tc>
+                  <a:txBody>
+                    <a:bodyPr/>
+                    <a:lstStyle/>
+                    <a:p>
+                      <a:pPr algn="l"/>
+                      <a:r>
+                        <a:rPr sz="950">
+                          <a:solidFill>
+                            <a:srgbClr val="12151A"/>
+                          </a:solidFill>
+                          <a:latin typeface="맑은 고딕"/>
+                          <a:ea typeface="맑은 고딕"/>
+                          <a:cs typeface="맑은 고딕"/>
+                        </a:rPr>
+                        <a:t>3</a:t>
+                      </a:r>
+                    </a:p>
+                  </a:txBody>
+                  <a:tcPr anchor="ctr">
+                    <a:solidFill>
+                      <a:srgbClr val="FFFFFF"/>
+                    </a:solidFill>
+                  </a:tcPr>
+                </a:tc>
+                <a:tc>
+                  <a:txBody>
+                    <a:bodyPr/>
+                    <a:lstStyle/>
+                    <a:p>
+                      <a:pPr algn="ctr"/>
+                      <a:r>
+                        <a:rPr sz="950">
+                          <a:solidFill>
+                            <a:srgbClr val="12151A"/>
+                          </a:solidFill>
+                          <a:latin typeface="맑은 고딕"/>
+                          <a:ea typeface="맑은 고딕"/>
+                          <a:cs typeface="맑은 고딕"/>
+                        </a:rPr>
+                        <a:t>청룡동</a:t>
+                      </a:r>
+                    </a:p>
+                  </a:txBody>
+                  <a:tcPr anchor="ctr">
+                    <a:solidFill>
+                      <a:srgbClr val="FFFFFF"/>
+                    </a:solidFill>
+                  </a:tcPr>
+                </a:tc>
+                <a:tc>
+                  <a:txBody>
+                    <a:bodyPr/>
+                    <a:lstStyle/>
+                    <a:p>
+                      <a:pPr algn="ctr"/>
+                      <a:r>
+                        <a:rPr sz="950">
+                          <a:solidFill>
+                            <a:srgbClr val="12151A"/>
+                          </a:solidFill>
+                          <a:latin typeface="맑은 고딕"/>
+                          <a:ea typeface="맑은 고딕"/>
+                          <a:cs typeface="맑은 고딕"/>
+                        </a:rPr>
+                        <a:t>체육</a:t>
+                      </a:r>
+                    </a:p>
+                  </a:txBody>
+                  <a:tcPr anchor="ctr">
+                    <a:solidFill>
+                      <a:srgbClr val="FFFFFF"/>
+                    </a:solidFill>
+                  </a:tcPr>
+                </a:tc>
+                <a:tc>
+                  <a:txBody>
+                    <a:bodyPr/>
+                    <a:lstStyle/>
+                    <a:p>
+                      <a:pPr algn="ctr"/>
+                      <a:r>
+                        <a:rPr sz="950">
+                          <a:solidFill>
+                            <a:srgbClr val="12151A"/>
+                          </a:solidFill>
+                          <a:latin typeface="맑은 고딕"/>
+                          <a:ea typeface="맑은 고딕"/>
+                          <a:cs typeface="맑은 고딕"/>
+                        </a:rPr>
+                        <a:t>19,277</a:t>
+                      </a:r>
+                    </a:p>
+                  </a:txBody>
+                  <a:tcPr anchor="ctr">
+                    <a:solidFill>
+                      <a:srgbClr val="FFFFFF"/>
+                    </a:solidFill>
+                  </a:tcPr>
+                </a:tc>
+                <a:tc>
+                  <a:txBody>
+                    <a:bodyPr/>
+                    <a:lstStyle/>
+                    <a:p>
+                      <a:pPr algn="ctr"/>
+                      <a:r>
+                        <a:rPr sz="950">
+                          <a:solidFill>
+                            <a:srgbClr val="12151A"/>
+                          </a:solidFill>
+                          <a:latin typeface="맑은 고딕"/>
+                          <a:ea typeface="맑은 고딕"/>
+                          <a:cs typeface="맑은 고딕"/>
+                        </a:rPr>
+                        <a:t>+3.5%p</a:t>
+                      </a:r>
+                    </a:p>
+                  </a:txBody>
+                  <a:tcPr anchor="ctr">
+                    <a:solidFill>
+                      <a:srgbClr val="FFFFFF"/>
+                    </a:solidFill>
+                  </a:tcPr>
+                </a:tc>
+              </a:tr>
+              <a:tr h="306324">
+                <a:tc>
+                  <a:txBody>
+                    <a:bodyPr/>
+                    <a:lstStyle/>
+                    <a:p>
+                      <a:pPr algn="l"/>
+                      <a:r>
+                        <a:rPr sz="950">
+                          <a:solidFill>
+                            <a:srgbClr val="12151A"/>
+                          </a:solidFill>
+                          <a:latin typeface="맑은 고딕"/>
+                          <a:ea typeface="맑은 고딕"/>
+                          <a:cs typeface="맑은 고딕"/>
+                        </a:rPr>
+                        <a:t>4</a:t>
+                      </a:r>
+                    </a:p>
+                  </a:txBody>
+                  <a:tcPr anchor="ctr">
+                    <a:solidFill>
+                      <a:srgbClr val="FFFFFF"/>
+                    </a:solidFill>
+                  </a:tcPr>
+                </a:tc>
+                <a:tc>
+                  <a:txBody>
+                    <a:bodyPr/>
+                    <a:lstStyle/>
+                    <a:p>
+                      <a:pPr algn="ctr"/>
+                      <a:r>
+                        <a:rPr sz="950">
+                          <a:solidFill>
+                            <a:srgbClr val="12151A"/>
+                          </a:solidFill>
+                          <a:latin typeface="맑은 고딕"/>
+                          <a:ea typeface="맑은 고딕"/>
+                          <a:cs typeface="맑은 고딕"/>
+                        </a:rPr>
+                        <a:t>원성동</a:t>
+                      </a:r>
+                    </a:p>
+                  </a:txBody>
+                  <a:tcPr anchor="ctr">
+                    <a:solidFill>
+                      <a:srgbClr val="FFFFFF"/>
+                    </a:solidFill>
+                  </a:tcPr>
+                </a:tc>
+                <a:tc>
+                  <a:txBody>
+                    <a:bodyPr/>
+                    <a:lstStyle/>
+                    <a:p>
+                      <a:pPr algn="ctr"/>
+                      <a:r>
+                        <a:rPr sz="950">
+                          <a:solidFill>
+                            <a:srgbClr val="12151A"/>
+                          </a:solidFill>
+                          <a:latin typeface="맑은 고딕"/>
+                          <a:ea typeface="맑은 고딕"/>
+                          <a:cs typeface="맑은 고딕"/>
+                        </a:rPr>
+                        <a:t>체육</a:t>
+                      </a:r>
+                    </a:p>
+                  </a:txBody>
+                  <a:tcPr anchor="ctr">
+                    <a:solidFill>
+                      <a:srgbClr val="FFFFFF"/>
+                    </a:solidFill>
+                  </a:tcPr>
+                </a:tc>
+                <a:tc>
+                  <a:txBody>
+                    <a:bodyPr/>
+                    <a:lstStyle/>
+                    <a:p>
+                      <a:pPr algn="ctr"/>
+                      <a:r>
+                        <a:rPr sz="950">
+                          <a:solidFill>
+                            <a:srgbClr val="12151A"/>
+                          </a:solidFill>
+                          <a:latin typeface="맑은 고딕"/>
+                          <a:ea typeface="맑은 고딕"/>
+                          <a:cs typeface="맑은 고딕"/>
+                        </a:rPr>
+                        <a:t>18,133</a:t>
+                      </a:r>
+                    </a:p>
+                  </a:txBody>
+                  <a:tcPr anchor="ctr">
+                    <a:solidFill>
+                      <a:srgbClr val="FFFFFF"/>
+                    </a:solidFill>
+                  </a:tcPr>
+                </a:tc>
+                <a:tc>
+                  <a:txBody>
+                    <a:bodyPr/>
+                    <a:lstStyle/>
+                    <a:p>
+                      <a:pPr algn="ctr"/>
+                      <a:r>
+                        <a:rPr sz="950">
+                          <a:solidFill>
+                            <a:srgbClr val="12151A"/>
+                          </a:solidFill>
+                          <a:latin typeface="맑은 고딕"/>
+                          <a:ea typeface="맑은 고딕"/>
+                          <a:cs typeface="맑은 고딕"/>
+                        </a:rPr>
+                        <a:t>+3.06%p</a:t>
+                      </a:r>
+                    </a:p>
+                  </a:txBody>
+                  <a:tcPr anchor="ctr">
+                    <a:solidFill>
+                      <a:srgbClr val="FFFFFF"/>
+                    </a:solidFill>
+                  </a:tcPr>
+                </a:tc>
+              </a:tr>
+              <a:tr h="306324">
+                <a:tc>
+                  <a:txBody>
+                    <a:bodyPr/>
+                    <a:lstStyle/>
+                    <a:p>
+                      <a:pPr algn="l"/>
+                      <a:r>
+                        <a:rPr sz="950">
+                          <a:solidFill>
+                            <a:srgbClr val="12151A"/>
+                          </a:solidFill>
+                          <a:latin typeface="맑은 고딕"/>
+                          <a:ea typeface="맑은 고딕"/>
+                          <a:cs typeface="맑은 고딕"/>
+                        </a:rPr>
+                        <a:t>5</a:t>
+                      </a:r>
+                    </a:p>
+                  </a:txBody>
+                  <a:tcPr anchor="ctr">
+                    <a:solidFill>
+                      <a:srgbClr val="FFFFFF"/>
+                    </a:solidFill>
+                  </a:tcPr>
+                </a:tc>
+                <a:tc>
+                  <a:txBody>
+                    <a:bodyPr/>
+                    <a:lstStyle/>
+                    <a:p>
+                      <a:pPr algn="ctr"/>
+                      <a:r>
+                        <a:rPr sz="950">
+                          <a:solidFill>
+                            <a:srgbClr val="12151A"/>
+                          </a:solidFill>
+                          <a:latin typeface="맑은 고딕"/>
+                          <a:ea typeface="맑은 고딕"/>
+                          <a:cs typeface="맑은 고딕"/>
+                        </a:rPr>
+                        <a:t>신방동</a:t>
+                      </a:r>
+                    </a:p>
+                  </a:txBody>
+                  <a:tcPr anchor="ctr">
+                    <a:solidFill>
+                      <a:srgbClr val="FFFFFF"/>
+                    </a:solidFill>
+                  </a:tcPr>
+                </a:tc>
+                <a:tc>
+                  <a:txBody>
+                    <a:bodyPr/>
+                    <a:lstStyle/>
+                    <a:p>
+                      <a:pPr algn="ctr"/>
+                      <a:r>
+                        <a:rPr sz="950">
+                          <a:solidFill>
+                            <a:srgbClr val="12151A"/>
+                          </a:solidFill>
+                          <a:latin typeface="맑은 고딕"/>
+                          <a:ea typeface="맑은 고딕"/>
+                          <a:cs typeface="맑은 고딕"/>
+                        </a:rPr>
+                        <a:t>체육</a:t>
+                      </a:r>
+                    </a:p>
+                  </a:txBody>
+                  <a:tcPr anchor="ctr">
+                    <a:solidFill>
+                      <a:srgbClr val="FFFFFF"/>
+                    </a:solidFill>
+                  </a:tcPr>
+                </a:tc>
+                <a:tc>
+                  <a:txBody>
+                    <a:bodyPr/>
+                    <a:lstStyle/>
+                    <a:p>
+                      <a:pPr algn="ctr"/>
+                      <a:r>
+                        <a:rPr sz="950">
+                          <a:solidFill>
+                            <a:srgbClr val="12151A"/>
+                          </a:solidFill>
+                          <a:latin typeface="맑은 고딕"/>
+                          <a:ea typeface="맑은 고딕"/>
+                          <a:cs typeface="맑은 고딕"/>
+                        </a:rPr>
+                        <a:t>20,430</a:t>
+                      </a:r>
+                    </a:p>
+                  </a:txBody>
+                  <a:tcPr anchor="ctr">
+                    <a:solidFill>
+                      <a:srgbClr val="FFFFFF"/>
+                    </a:solidFill>
+                  </a:tcPr>
+                </a:tc>
+                <a:tc>
+                  <a:txBody>
+                    <a:bodyPr/>
+                    <a:lstStyle/>
+                    <a:p>
+                      <a:pPr algn="ctr"/>
+                      <a:r>
+                        <a:rPr sz="950">
+                          <a:solidFill>
+                            <a:srgbClr val="12151A"/>
+                          </a:solidFill>
+                          <a:latin typeface="맑은 고딕"/>
+                          <a:ea typeface="맑은 고딕"/>
+                          <a:cs typeface="맑은 고딕"/>
+                        </a:rPr>
+                        <a:t>+2.63%p</a:t>
+                      </a:r>
+                    </a:p>
+                  </a:txBody>
+                  <a:tcPr anchor="ctr">
+                    <a:solidFill>
+                      <a:srgbClr val="FFFFFF"/>
+                    </a:solidFill>
+                  </a:tcPr>
+                </a:tc>
+              </a:tr>
+              <a:tr h="306324">
+                <a:tc>
+                  <a:txBody>
+                    <a:bodyPr/>
+                    <a:lstStyle/>
+                    <a:p>
+                      <a:pPr algn="l"/>
+                      <a:r>
+                        <a:rPr sz="950">
+                          <a:solidFill>
+                            <a:srgbClr val="12151A"/>
+                          </a:solidFill>
+                          <a:latin typeface="맑은 고딕"/>
+                          <a:ea typeface="맑은 고딕"/>
+                          <a:cs typeface="맑은 고딕"/>
+                        </a:rPr>
+                        <a:t>6</a:t>
+                      </a:r>
+                    </a:p>
+                  </a:txBody>
+                  <a:tcPr anchor="ctr">
+                    <a:solidFill>
+                      <a:srgbClr val="FFFFFF"/>
+                    </a:solidFill>
+                  </a:tcPr>
+                </a:tc>
+                <a:tc>
+                  <a:txBody>
+                    <a:bodyPr/>
+                    <a:lstStyle/>
+                    <a:p>
+                      <a:pPr algn="ctr"/>
+                      <a:r>
+                        <a:rPr sz="950">
+                          <a:solidFill>
+                            <a:srgbClr val="12151A"/>
+                          </a:solidFill>
+                          <a:latin typeface="맑은 고딕"/>
+                          <a:ea typeface="맑은 고딕"/>
+                          <a:cs typeface="맑은 고딕"/>
+                        </a:rPr>
+                        <a:t>일봉동</a:t>
+                      </a:r>
+                    </a:p>
+                  </a:txBody>
+                  <a:tcPr anchor="ctr">
+                    <a:solidFill>
+                      <a:srgbClr val="FFFFFF"/>
+                    </a:solidFill>
+                  </a:tcPr>
+                </a:tc>
+                <a:tc>
+                  <a:txBody>
+                    <a:bodyPr/>
+                    <a:lstStyle/>
+                    <a:p>
+                      <a:pPr algn="ctr"/>
+                      <a:r>
+                        <a:rPr sz="950">
+                          <a:solidFill>
+                            <a:srgbClr val="12151A"/>
+                          </a:solidFill>
+                          <a:latin typeface="맑은 고딕"/>
+                          <a:ea typeface="맑은 고딕"/>
+                          <a:cs typeface="맑은 고딕"/>
+                        </a:rPr>
+                        <a:t>체육</a:t>
+                      </a:r>
+                    </a:p>
+                  </a:txBody>
+                  <a:tcPr anchor="ctr">
+                    <a:solidFill>
+                      <a:srgbClr val="FFFFFF"/>
+                    </a:solidFill>
+                  </a:tcPr>
+                </a:tc>
+                <a:tc>
+                  <a:txBody>
+                    <a:bodyPr/>
+                    <a:lstStyle/>
+                    <a:p>
+                      <a:pPr algn="ctr"/>
+                      <a:r>
+                        <a:rPr sz="950">
+                          <a:solidFill>
+                            <a:srgbClr val="12151A"/>
+                          </a:solidFill>
+                          <a:latin typeface="맑은 고딕"/>
+                          <a:ea typeface="맑은 고딕"/>
+                          <a:cs typeface="맑은 고딕"/>
+                        </a:rPr>
+                        <a:t>16,940</a:t>
+                      </a:r>
+                    </a:p>
+                  </a:txBody>
+                  <a:tcPr anchor="ctr">
+                    <a:solidFill>
+                      <a:srgbClr val="FFFFFF"/>
+                    </a:solidFill>
+                  </a:tcPr>
+                </a:tc>
+                <a:tc>
+                  <a:txBody>
+                    <a:bodyPr/>
+                    <a:lstStyle/>
+                    <a:p>
+                      <a:pPr algn="ctr"/>
+                      <a:r>
+                        <a:rPr sz="950">
+                          <a:solidFill>
+                            <a:srgbClr val="12151A"/>
+                          </a:solidFill>
+                          <a:latin typeface="맑은 고딕"/>
+                          <a:ea typeface="맑은 고딕"/>
+                          <a:cs typeface="맑은 고딕"/>
+                        </a:rPr>
+                        <a:t>+2.41%p</a:t>
+                      </a:r>
+                    </a:p>
+                  </a:txBody>
+                  <a:tcPr anchor="ctr">
+                    <a:solidFill>
+                      <a:srgbClr val="FFFFFF"/>
+                    </a:solidFill>
+                  </a:tcPr>
+                </a:tc>
+              </a:tr>
+              <a:tr h="306324">
+                <a:tc>
+                  <a:txBody>
+                    <a:bodyPr/>
+                    <a:lstStyle/>
+                    <a:p>
+                      <a:pPr algn="l"/>
+                      <a:r>
+                        <a:rPr sz="950">
+                          <a:solidFill>
+                            <a:srgbClr val="12151A"/>
+                          </a:solidFill>
+                          <a:latin typeface="맑은 고딕"/>
+                          <a:ea typeface="맑은 고딕"/>
+                          <a:cs typeface="맑은 고딕"/>
+                        </a:rPr>
+                        <a:t>7</a:t>
+                      </a:r>
+                    </a:p>
+                  </a:txBody>
+                  <a:tcPr anchor="ctr">
+                    <a:solidFill>
+                      <a:srgbClr val="FFFFFF"/>
+                    </a:solidFill>
+                  </a:tcPr>
+                </a:tc>
+                <a:tc>
+                  <a:txBody>
+                    <a:bodyPr/>
+                    <a:lstStyle/>
+                    <a:p>
+                      <a:pPr algn="ctr"/>
+                      <a:r>
+                        <a:rPr sz="950">
+                          <a:solidFill>
+                            <a:srgbClr val="12151A"/>
+                          </a:solidFill>
+                          <a:latin typeface="맑은 고딕"/>
+                          <a:ea typeface="맑은 고딕"/>
+                          <a:cs typeface="맑은 고딕"/>
+                        </a:rPr>
+                        <a:t>청룡동</a:t>
+                      </a:r>
+                    </a:p>
+                  </a:txBody>
+                  <a:tcPr anchor="ctr">
+                    <a:solidFill>
+                      <a:srgbClr val="FFFFFF"/>
+                    </a:solidFill>
+                  </a:tcPr>
+                </a:tc>
+                <a:tc>
+                  <a:txBody>
+                    <a:bodyPr/>
+                    <a:lstStyle/>
+                    <a:p>
+                      <a:pPr algn="ctr"/>
+                      <a:r>
+                        <a:rPr sz="950">
+                          <a:solidFill>
+                            <a:srgbClr val="12151A"/>
+                          </a:solidFill>
+                          <a:latin typeface="맑은 고딕"/>
+                          <a:ea typeface="맑은 고딕"/>
+                          <a:cs typeface="맑은 고딕"/>
+                        </a:rPr>
+                        <a:t>체육</a:t>
+                      </a:r>
+                    </a:p>
+                  </a:txBody>
+                  <a:tcPr anchor="ctr">
+                    <a:solidFill>
+                      <a:srgbClr val="FFFFFF"/>
+                    </a:solidFill>
+                  </a:tcPr>
+                </a:tc>
+                <a:tc>
+                  <a:txBody>
+                    <a:bodyPr/>
+                    <a:lstStyle/>
+                    <a:p>
+                      <a:pPr algn="ctr"/>
+                      <a:r>
+                        <a:rPr sz="950">
+                          <a:solidFill>
+                            <a:srgbClr val="12151A"/>
+                          </a:solidFill>
+                          <a:latin typeface="맑은 고딕"/>
+                          <a:ea typeface="맑은 고딕"/>
+                          <a:cs typeface="맑은 고딕"/>
+                        </a:rPr>
+                        <a:t>17,179</a:t>
+                      </a:r>
+                    </a:p>
+                  </a:txBody>
+                  <a:tcPr anchor="ctr">
+                    <a:solidFill>
+                      <a:srgbClr val="FFFFFF"/>
+                    </a:solidFill>
+                  </a:tcPr>
+                </a:tc>
+                <a:tc>
+                  <a:txBody>
+                    <a:bodyPr/>
+                    <a:lstStyle/>
+                    <a:p>
+                      <a:pPr algn="ctr"/>
+                      <a:r>
+                        <a:rPr sz="950">
+                          <a:solidFill>
+                            <a:srgbClr val="12151A"/>
+                          </a:solidFill>
+                          <a:latin typeface="맑은 고딕"/>
+                          <a:ea typeface="맑은 고딕"/>
+                          <a:cs typeface="맑은 고딕"/>
+                        </a:rPr>
+                        <a:t>+2.0%p</a:t>
+                      </a:r>
+                    </a:p>
+                  </a:txBody>
+                  <a:tcPr anchor="ctr">
+                    <a:solidFill>
+                      <a:srgbClr val="FFFFFF"/>
+                    </a:solidFill>
+                  </a:tcPr>
+                </a:tc>
+              </a:tr>
+              <a:tr h="306324">
+                <a:tc>
+                  <a:txBody>
+                    <a:bodyPr/>
+                    <a:lstStyle/>
+                    <a:p>
+                      <a:pPr algn="l"/>
+                      <a:r>
+                        <a:rPr sz="950">
+                          <a:solidFill>
+                            <a:srgbClr val="12151A"/>
+                          </a:solidFill>
+                          <a:latin typeface="맑은 고딕"/>
+                          <a:ea typeface="맑은 고딕"/>
+                          <a:cs typeface="맑은 고딕"/>
+                        </a:rPr>
+                        <a:t>8</a:t>
+                      </a:r>
+                    </a:p>
+                  </a:txBody>
+                  <a:tcPr anchor="ctr">
+                    <a:solidFill>
+                      <a:srgbClr val="FFFFFF"/>
+                    </a:solidFill>
+                  </a:tcPr>
+                </a:tc>
+                <a:tc>
+                  <a:txBody>
+                    <a:bodyPr/>
+                    <a:lstStyle/>
+                    <a:p>
+                      <a:pPr algn="ctr"/>
+                      <a:r>
+                        <a:rPr sz="950">
+                          <a:solidFill>
+                            <a:srgbClr val="12151A"/>
+                          </a:solidFill>
+                          <a:latin typeface="맑은 고딕"/>
+                          <a:ea typeface="맑은 고딕"/>
+                          <a:cs typeface="맑은 고딕"/>
+                        </a:rPr>
+                        <a:t>신안동</a:t>
+                      </a:r>
+                    </a:p>
+                  </a:txBody>
+                  <a:tcPr anchor="ctr">
+                    <a:solidFill>
+                      <a:srgbClr val="FFFFFF"/>
+                    </a:solidFill>
+                  </a:tcPr>
+                </a:tc>
+                <a:tc>
+                  <a:txBody>
+                    <a:bodyPr/>
+                    <a:lstStyle/>
+                    <a:p>
+                      <a:pPr algn="ctr"/>
+                      <a:r>
+                        <a:rPr sz="950">
+                          <a:solidFill>
+                            <a:srgbClr val="12151A"/>
+                          </a:solidFill>
+                          <a:latin typeface="맑은 고딕"/>
+                          <a:ea typeface="맑은 고딕"/>
+                          <a:cs typeface="맑은 고딕"/>
+                        </a:rPr>
+                        <a:t>체육</a:t>
+                      </a:r>
+                    </a:p>
+                  </a:txBody>
+                  <a:tcPr anchor="ctr">
+                    <a:solidFill>
+                      <a:srgbClr val="FFFFFF"/>
+                    </a:solidFill>
+                  </a:tcPr>
+                </a:tc>
+                <a:tc>
+                  <a:txBody>
+                    <a:bodyPr/>
+                    <a:lstStyle/>
+                    <a:p>
+                      <a:pPr algn="ctr"/>
+                      <a:r>
+                        <a:rPr sz="950">
+                          <a:solidFill>
+                            <a:srgbClr val="12151A"/>
+                          </a:solidFill>
+                          <a:latin typeface="맑은 고딕"/>
+                          <a:ea typeface="맑은 고딕"/>
+                          <a:cs typeface="맑은 고딕"/>
+                        </a:rPr>
+                        <a:t>9,016</a:t>
+                      </a:r>
+                    </a:p>
+                  </a:txBody>
+                  <a:tcPr anchor="ctr">
+                    <a:solidFill>
+                      <a:srgbClr val="FFFFFF"/>
+                    </a:solidFill>
+                  </a:tcPr>
+                </a:tc>
+                <a:tc>
+                  <a:txBody>
+                    <a:bodyPr/>
+                    <a:lstStyle/>
+                    <a:p>
+                      <a:pPr algn="ctr"/>
+                      <a:r>
+                        <a:rPr sz="950">
+                          <a:solidFill>
+                            <a:srgbClr val="12151A"/>
+                          </a:solidFill>
+                          <a:latin typeface="맑은 고딕"/>
+                          <a:ea typeface="맑은 고딕"/>
+                          <a:cs typeface="맑은 고딕"/>
+                        </a:rPr>
+                        <a:t>+1.79%p</a:t>
+                      </a:r>
+                    </a:p>
+                  </a:txBody>
+                  <a:tcPr anchor="ctr">
+                    <a:solidFill>
+                      <a:srgbClr val="FFFFFF"/>
+                    </a:solidFill>
+                  </a:tcPr>
+                </a:tc>
+              </a:tr>
+              <a:tr h="306324">
+                <a:tc>
+                  <a:txBody>
+                    <a:bodyPr/>
+                    <a:lstStyle/>
+                    <a:p>
+                      <a:pPr algn="l"/>
+                      <a:r>
+                        <a:rPr sz="950">
+                          <a:solidFill>
+                            <a:srgbClr val="12151A"/>
+                          </a:solidFill>
+                          <a:latin typeface="맑은 고딕"/>
+                          <a:ea typeface="맑은 고딕"/>
+                          <a:cs typeface="맑은 고딕"/>
+                        </a:rPr>
+                        <a:t>9</a:t>
+                      </a:r>
+                    </a:p>
+                  </a:txBody>
+                  <a:tcPr anchor="ctr">
+                    <a:solidFill>
+                      <a:srgbClr val="FFFFFF"/>
+                    </a:solidFill>
+                  </a:tcPr>
+                </a:tc>
+                <a:tc>
+                  <a:txBody>
+                    <a:bodyPr/>
+                    <a:lstStyle/>
+                    <a:p>
+                      <a:pPr algn="ctr"/>
+                      <a:r>
+                        <a:rPr sz="950">
+                          <a:solidFill>
+                            <a:srgbClr val="12151A"/>
+                          </a:solidFill>
+                          <a:latin typeface="맑은 고딕"/>
+                          <a:ea typeface="맑은 고딕"/>
+                          <a:cs typeface="맑은 고딕"/>
+                        </a:rPr>
+                        <a:t>문성동</a:t>
+                      </a:r>
+                    </a:p>
+                  </a:txBody>
+                  <a:tcPr anchor="ctr">
+                    <a:solidFill>
+                      <a:srgbClr val="FFFFFF"/>
+                    </a:solidFill>
+                  </a:tcPr>
+                </a:tc>
+                <a:tc>
+                  <a:txBody>
+                    <a:bodyPr/>
+                    <a:lstStyle/>
+                    <a:p>
+                      <a:pPr algn="ctr"/>
+                      <a:r>
+                        <a:rPr sz="950">
+                          <a:solidFill>
+                            <a:srgbClr val="12151A"/>
+                          </a:solidFill>
+                          <a:latin typeface="맑은 고딕"/>
+                          <a:ea typeface="맑은 고딕"/>
+                          <a:cs typeface="맑은 고딕"/>
+                        </a:rPr>
+                        <a:t>체육</a:t>
+                      </a:r>
+                    </a:p>
+                  </a:txBody>
+                  <a:tcPr anchor="ctr">
+                    <a:solidFill>
+                      <a:srgbClr val="FFFFFF"/>
+                    </a:solidFill>
+                  </a:tcPr>
+                </a:tc>
+                <a:tc>
+                  <a:txBody>
+                    <a:bodyPr/>
+                    <a:lstStyle/>
+                    <a:p>
+                      <a:pPr algn="ctr"/>
+                      <a:r>
+                        <a:rPr sz="950">
+                          <a:solidFill>
+                            <a:srgbClr val="12151A"/>
+                          </a:solidFill>
+                          <a:latin typeface="맑은 고딕"/>
+                          <a:ea typeface="맑은 고딕"/>
+                          <a:cs typeface="맑은 고딕"/>
+                        </a:rPr>
+                        <a:t>14,900</a:t>
+                      </a:r>
+                    </a:p>
+                  </a:txBody>
+                  <a:tcPr anchor="ctr">
+                    <a:solidFill>
+                      <a:srgbClr val="FFFFFF"/>
+                    </a:solidFill>
+                  </a:tcPr>
+                </a:tc>
+                <a:tc>
+                  <a:txBody>
+                    <a:bodyPr/>
+                    <a:lstStyle/>
+                    <a:p>
+                      <a:pPr algn="ctr"/>
+                      <a:r>
+                        <a:rPr sz="950">
+                          <a:solidFill>
+                            <a:srgbClr val="12151A"/>
+                          </a:solidFill>
+                          <a:latin typeface="맑은 고딕"/>
+                          <a:ea typeface="맑은 고딕"/>
+                          <a:cs typeface="맑은 고딕"/>
+                        </a:rPr>
+                        <a:t>+1.78%p</a:t>
+                      </a:r>
+                    </a:p>
+                  </a:txBody>
+                  <a:tcPr anchor="ctr">
+                    <a:solidFill>
+                      <a:srgbClr val="FFFFFF"/>
+                    </a:solidFill>
+                  </a:tcPr>
+                </a:tc>
+              </a:tr>
+              <a:tr h="306324">
+                <a:tc>
+                  <a:txBody>
+                    <a:bodyPr/>
+                    <a:lstStyle/>
+                    <a:p>
+                      <a:pPr algn="l"/>
+                      <a:r>
+                        <a:rPr sz="950">
+                          <a:solidFill>
+                            <a:srgbClr val="12151A"/>
+                          </a:solidFill>
+                          <a:latin typeface="맑은 고딕"/>
+                          <a:ea typeface="맑은 고딕"/>
+                          <a:cs typeface="맑은 고딕"/>
+                        </a:rPr>
+                        <a:t>10</a:t>
+                      </a:r>
+                    </a:p>
+                  </a:txBody>
+                  <a:tcPr anchor="ctr">
+                    <a:solidFill>
+                      <a:srgbClr val="FFFFFF"/>
+                    </a:solidFill>
+                  </a:tcPr>
+                </a:tc>
+                <a:tc>
+                  <a:txBody>
+                    <a:bodyPr/>
+                    <a:lstStyle/>
+                    <a:p>
+                      <a:pPr algn="ctr"/>
+                      <a:r>
+                        <a:rPr sz="950">
+                          <a:solidFill>
+                            <a:srgbClr val="12151A"/>
+                          </a:solidFill>
+                          <a:latin typeface="맑은 고딕"/>
+                          <a:ea typeface="맑은 고딕"/>
+                          <a:cs typeface="맑은 고딕"/>
+                        </a:rPr>
+                        <a:t>신안동</a:t>
+                      </a:r>
+                    </a:p>
+                  </a:txBody>
+                  <a:tcPr anchor="ctr">
+                    <a:solidFill>
+                      <a:srgbClr val="FFFFFF"/>
+                    </a:solidFill>
+                  </a:tcPr>
+                </a:tc>
+                <a:tc>
+                  <a:txBody>
+                    <a:bodyPr/>
+                    <a:lstStyle/>
+                    <a:p>
+                      <a:pPr algn="ctr"/>
+                      <a:r>
+                        <a:rPr sz="950">
+                          <a:solidFill>
+                            <a:srgbClr val="12151A"/>
+                          </a:solidFill>
+                          <a:latin typeface="맑은 고딕"/>
+                          <a:ea typeface="맑은 고딕"/>
+                          <a:cs typeface="맑은 고딕"/>
+                        </a:rPr>
+                        <a:t>체육</a:t>
+                      </a:r>
+                    </a:p>
+                  </a:txBody>
+                  <a:tcPr anchor="ctr">
+                    <a:solidFill>
+                      <a:srgbClr val="FFFFFF"/>
+                    </a:solidFill>
+                  </a:tcPr>
+                </a:tc>
+                <a:tc>
+                  <a:txBody>
+                    <a:bodyPr/>
+                    <a:lstStyle/>
+                    <a:p>
+                      <a:pPr algn="ctr"/>
+                      <a:r>
+                        <a:rPr sz="950">
+                          <a:solidFill>
+                            <a:srgbClr val="12151A"/>
+                          </a:solidFill>
+                          <a:latin typeface="맑은 고딕"/>
+                          <a:ea typeface="맑은 고딕"/>
+                          <a:cs typeface="맑은 고딕"/>
+                        </a:rPr>
+                        <a:t>9,016</a:t>
+                      </a:r>
+                    </a:p>
+                  </a:txBody>
+                  <a:tcPr anchor="ctr">
+                    <a:solidFill>
+                      <a:srgbClr val="FFFFFF"/>
+                    </a:solidFill>
+                  </a:tcPr>
+                </a:tc>
+                <a:tc>
+                  <a:txBody>
+                    <a:bodyPr/>
+                    <a:lstStyle/>
+                    <a:p>
+                      <a:pPr algn="ctr"/>
+                      <a:r>
+                        <a:rPr sz="950">
+                          <a:solidFill>
+                            <a:srgbClr val="12151A"/>
+                          </a:solidFill>
+                          <a:latin typeface="맑은 고딕"/>
+                          <a:ea typeface="맑은 고딕"/>
+                          <a:cs typeface="맑은 고딕"/>
+                        </a:rPr>
+                        <a:t>+0.99%p</a:t>
+                      </a:r>
+                    </a:p>
+                  </a:txBody>
+                  <a:tcPr anchor="ctr">
+                    <a:solidFill>
+                      <a:srgbClr val="FFFFFF"/>
+                    </a:solidFill>
+                  </a:tcPr>
+                </a:tc>
+              </a:tr>
+            </a:tbl>
+          </a:graphicData>
+        </a:graphic>
+      </p:graphicFrame>
       <p:sp>
         <p:nvSpPr>
           <p:cNvPr id="8" name="TextBox 7"/>
@@ -8863,7 +10167,7 @@
                 <a:ea typeface="맑은 고딕"/>
                 <a:cs typeface="맑은 고딕"/>
               </a:rPr>
-              <a:t>FOR WHOM</a:t>
+              <a:t>FINDING · 06</a:t>
             </a:r>
           </a:p>
         </p:txBody>
@@ -8904,7 +10208,7 @@
                 <a:ea typeface="맑은 고딕"/>
                 <a:cs typeface="맑은 고딕"/>
               </a:rPr>
-              <a:t>결국, 이런 분들께 닿았으면 합니다</a:t>
+              <a:t>어디서 멈춰도 근거가 남습니다</a:t>
             </a:r>
           </a:p>
         </p:txBody>
@@ -8945,21 +10249,69 @@
                 <a:ea typeface="맑은 고딕"/>
                 <a:cs typeface="맑은 고딕"/>
               </a:rPr>
-              <a:t>지수와 모델은 수단일 뿐입니다. 저희가 계속 떠올린 것은 아래 네 분의 하루였습니다.</a:t>
-            </a:r>
-          </a:p>
-        </p:txBody>
-      </p:sp>
-      <p:sp>
-        <p:nvSpPr>
-          <p:cNvPr id="5" name="Rounded Rectangle 4"/>
+              <a:t>한계효용 곡선이 있으면 예산이 조정돼도 '몇 개소까지가 합리적인가'를 답할 수 있습니다.</a:t>
+            </a:r>
+          </a:p>
+        </p:txBody>
+      </p:sp>
+      <p:pic>
+        <p:nvPicPr>
+          <p:cNvPr id="5" name="Picture 4" descr="08_커버리지_곡선.png"/>
+          <p:cNvPicPr>
+            <a:picLocks noChangeAspect="1"/>
+          </p:cNvPicPr>
+          <p:nvPr/>
+        </p:nvPicPr>
+        <p:blipFill>
+          <a:blip r:embed="rId2"/>
+          <a:stretch>
+            <a:fillRect/>
+          </a:stretch>
+        </p:blipFill>
+        <p:spPr>
+          <a:xfrm>
+            <a:off x="2197518" y="2212848"/>
+            <a:ext cx="3505379" cy="3200400"/>
+          </a:xfrm>
+          <a:prstGeom prst="rect">
+            <a:avLst/>
+          </a:prstGeom>
+        </p:spPr>
+      </p:pic>
+      <p:pic>
+        <p:nvPicPr>
+          <p:cNvPr id="6" name="Picture 5" descr="06_SOC_사각지대.png"/>
+          <p:cNvPicPr>
+            <a:picLocks noChangeAspect="1"/>
+          </p:cNvPicPr>
+          <p:nvPr/>
+        </p:nvPicPr>
+        <p:blipFill>
+          <a:blip r:embed="rId3"/>
+          <a:stretch>
+            <a:fillRect/>
+          </a:stretch>
+        </p:blipFill>
+        <p:spPr>
+          <a:xfrm>
+            <a:off x="7561328" y="2212848"/>
+            <a:ext cx="3933439" cy="3200400"/>
+          </a:xfrm>
+          <a:prstGeom prst="rect">
+            <a:avLst/>
+          </a:prstGeom>
+        </p:spPr>
+      </p:pic>
+      <p:sp>
+        <p:nvSpPr>
+          <p:cNvPr id="7" name="Rounded Rectangle 6"/>
           <p:cNvSpPr/>
           <p:nvPr/>
         </p:nvSpPr>
         <p:spPr>
           <a:xfrm>
-            <a:off x="658368" y="2286000"/>
-            <a:ext cx="5257800" cy="1371600"/>
+            <a:off x="658368" y="5577840"/>
+            <a:ext cx="10874959" cy="749808"/>
           </a:xfrm>
           <a:prstGeom prst="roundRect">
             <a:avLst>
@@ -8967,12 +10319,10 @@
             </a:avLst>
           </a:prstGeom>
           <a:solidFill>
-            <a:srgbClr val="FFFFFF"/>
+            <a:srgbClr val="F6F7F9"/>
           </a:solidFill>
-          <a:ln w="12700">
-            <a:solidFill>
-              <a:srgbClr val="E4E7EC"/>
-            </a:solidFill>
+          <a:ln>
+            <a:noFill/>
           </a:ln>
           <a:effectLst/>
         </p:spPr>
@@ -8998,97 +10348,14 @@
       </p:sp>
       <p:sp>
         <p:nvSpPr>
-          <p:cNvPr id="6" name="Rectangle 5"/>
-          <p:cNvSpPr/>
-          <p:nvPr/>
-        </p:nvSpPr>
-        <p:spPr>
-          <a:xfrm>
-            <a:off x="658368" y="2286000"/>
-            <a:ext cx="68580" cy="1371600"/>
-          </a:xfrm>
-          <a:prstGeom prst="rect">
-            <a:avLst/>
-          </a:prstGeom>
-          <a:solidFill>
-            <a:srgbClr val="2A78D6"/>
-          </a:solidFill>
-          <a:ln>
-            <a:noFill/>
-          </a:ln>
-          <a:effectLst/>
-        </p:spPr>
-        <p:style>
-          <a:lnRef idx="1">
-            <a:schemeClr val="accent1"/>
-          </a:lnRef>
-          <a:fillRef idx="3">
-            <a:schemeClr val="accent1"/>
-          </a:fillRef>
-          <a:effectRef idx="2">
-            <a:schemeClr val="accent1"/>
-          </a:effectRef>
-          <a:fontRef idx="minor">
-            <a:schemeClr val="lt1"/>
-          </a:fontRef>
-        </p:style>
-        <p:txBody>
-          <a:bodyPr rtlCol="0" anchor="ctr"/>
-          <a:lstStyle/>
-          <a:p/>
-        </p:txBody>
-      </p:sp>
-      <p:sp>
-        <p:nvSpPr>
-          <p:cNvPr id="7" name="TextBox 6"/>
-          <p:cNvSpPr txBox="1"/>
-          <p:nvPr/>
-        </p:nvSpPr>
-        <p:spPr>
-          <a:xfrm>
-            <a:off x="914400" y="2468880"/>
-            <a:ext cx="4663440" cy="274320"/>
-          </a:xfrm>
-          <a:prstGeom prst="rect">
-            <a:avLst/>
-          </a:prstGeom>
-          <a:noFill/>
-        </p:spPr>
-        <p:txBody>
-          <a:bodyPr wrap="square" lIns="0" rIns="0" tIns="0" bIns="0">
-            <a:spAutoFit/>
-          </a:bodyPr>
-          <a:lstStyle/>
-          <a:p>
-            <a:pPr algn="l">
-              <a:lnSpc>
-                <a:spcPct val="135000"/>
-              </a:lnSpc>
-            </a:pPr>
-            <a:r>
-              <a:rPr sz="1350" b="1">
-                <a:solidFill>
-                  <a:srgbClr val="2A78D6"/>
-                </a:solidFill>
-                <a:latin typeface="맑은 고딕"/>
-                <a:ea typeface="맑은 고딕"/>
-                <a:cs typeface="맑은 고딕"/>
-              </a:rPr>
-              <a:t>원도심에 오래 사신 어르신</a:t>
-            </a:r>
-          </a:p>
-        </p:txBody>
-      </p:sp>
-      <p:sp>
-        <p:nvSpPr>
           <p:cNvPr id="8" name="TextBox 7"/>
           <p:cNvSpPr txBox="1"/>
           <p:nvPr/>
         </p:nvSpPr>
         <p:spPr>
           <a:xfrm>
-            <a:off x="914400" y="2834640"/>
-            <a:ext cx="4663440" cy="731520"/>
+            <a:off x="932688" y="5760720"/>
+            <a:ext cx="10515600" cy="457200"/>
           </a:xfrm>
           <a:prstGeom prst="rect">
             <a:avLst/>
@@ -9107,15 +10374,15 @@
               </a:lnSpc>
             </a:pPr>
             <a:r>
-              <a:rPr sz="1100" b="0">
-                <a:solidFill>
-                  <a:srgbClr val="52514E"/>
-                </a:solidFill>
-                <a:latin typeface="맑은 고딕"/>
-                <a:ea typeface="맑은 고딕"/>
-                <a:cs typeface="맑은 고딕"/>
-              </a:rPr>
-              <a:t>24 일대는 젊은 이웃이 하나둘 떠나고 상가도 비었습니다.</a:t>
+              <a:rPr sz="1200" b="0">
+                <a:solidFill>
+                  <a:srgbClr val="12151A"/>
+                </a:solidFill>
+                <a:latin typeface="맑은 고딕"/>
+                <a:ea typeface="맑은 고딕"/>
+                <a:cs typeface="맑은 고딕"/>
+              </a:rPr>
+              <a:t>예산 심의에서 자주 나오는 질문은 '왜 이 순서인가'와 '반만 하면 어떻게 되나'입니다.</a:t>
             </a:r>
           </a:p>
           <a:p>
@@ -9128,664 +10395,6 @@
               </a:spcBef>
             </a:pPr>
             <a:r>
-              <a:rPr sz="1100" b="0">
-                <a:solidFill>
-                  <a:srgbClr val="52514E"/>
-                </a:solidFill>
-                <a:latin typeface="맑은 고딕"/>
-                <a:ea typeface="맑은 고딕"/>
-                <a:cs typeface="맑은 고딕"/>
-              </a:rPr>
-              <a:t>가게와 병원이 멀어질수록, 걸어서 하실 수 있는 일이 줄어듭니다.</a:t>
-            </a:r>
-          </a:p>
-        </p:txBody>
-      </p:sp>
-      <p:sp>
-        <p:nvSpPr>
-          <p:cNvPr id="9" name="Rounded Rectangle 8"/>
-          <p:cNvSpPr/>
-          <p:nvPr/>
-        </p:nvSpPr>
-        <p:spPr>
-          <a:xfrm>
-            <a:off x="6236207" y="2286000"/>
-            <a:ext cx="5257800" cy="1371600"/>
-          </a:xfrm>
-          <a:prstGeom prst="roundRect">
-            <a:avLst>
-              <a:gd name="adj" fmla="val 6000"/>
-            </a:avLst>
-          </a:prstGeom>
-          <a:solidFill>
-            <a:srgbClr val="FFFFFF"/>
-          </a:solidFill>
-          <a:ln w="12700">
-            <a:solidFill>
-              <a:srgbClr val="E4E7EC"/>
-            </a:solidFill>
-          </a:ln>
-          <a:effectLst/>
-        </p:spPr>
-        <p:style>
-          <a:lnRef idx="1">
-            <a:schemeClr val="accent1"/>
-          </a:lnRef>
-          <a:fillRef idx="3">
-            <a:schemeClr val="accent1"/>
-          </a:fillRef>
-          <a:effectRef idx="2">
-            <a:schemeClr val="accent1"/>
-          </a:effectRef>
-          <a:fontRef idx="minor">
-            <a:schemeClr val="lt1"/>
-          </a:fontRef>
-        </p:style>
-        <p:txBody>
-          <a:bodyPr rtlCol="0" anchor="ctr"/>
-          <a:lstStyle/>
-          <a:p/>
-        </p:txBody>
-      </p:sp>
-      <p:sp>
-        <p:nvSpPr>
-          <p:cNvPr id="10" name="Rectangle 9"/>
-          <p:cNvSpPr/>
-          <p:nvPr/>
-        </p:nvSpPr>
-        <p:spPr>
-          <a:xfrm>
-            <a:off x="6236207" y="2286000"/>
-            <a:ext cx="68580" cy="1371600"/>
-          </a:xfrm>
-          <a:prstGeom prst="rect">
-            <a:avLst/>
-          </a:prstGeom>
-          <a:solidFill>
-            <a:srgbClr val="8A7FB5"/>
-          </a:solidFill>
-          <a:ln>
-            <a:noFill/>
-          </a:ln>
-          <a:effectLst/>
-        </p:spPr>
-        <p:style>
-          <a:lnRef idx="1">
-            <a:schemeClr val="accent1"/>
-          </a:lnRef>
-          <a:fillRef idx="3">
-            <a:schemeClr val="accent1"/>
-          </a:fillRef>
-          <a:effectRef idx="2">
-            <a:schemeClr val="accent1"/>
-          </a:effectRef>
-          <a:fontRef idx="minor">
-            <a:schemeClr val="lt1"/>
-          </a:fontRef>
-        </p:style>
-        <p:txBody>
-          <a:bodyPr rtlCol="0" anchor="ctr"/>
-          <a:lstStyle/>
-          <a:p/>
-        </p:txBody>
-      </p:sp>
-      <p:sp>
-        <p:nvSpPr>
-          <p:cNvPr id="11" name="TextBox 10"/>
-          <p:cNvSpPr txBox="1"/>
-          <p:nvPr/>
-        </p:nvSpPr>
-        <p:spPr>
-          <a:xfrm>
-            <a:off x="6492240" y="2468880"/>
-            <a:ext cx="4663440" cy="274320"/>
-          </a:xfrm>
-          <a:prstGeom prst="rect">
-            <a:avLst/>
-          </a:prstGeom>
-          <a:noFill/>
-        </p:spPr>
-        <p:txBody>
-          <a:bodyPr wrap="square" lIns="0" rIns="0" tIns="0" bIns="0">
-            <a:spAutoFit/>
-          </a:bodyPr>
-          <a:lstStyle/>
-          <a:p>
-            <a:pPr algn="l">
-              <a:lnSpc>
-                <a:spcPct val="135000"/>
-              </a:lnSpc>
-            </a:pPr>
-            <a:r>
-              <a:rPr sz="1350" b="1">
-                <a:solidFill>
-                  <a:srgbClr val="8A7FB5"/>
-                </a:solidFill>
-                <a:latin typeface="맑은 고딕"/>
-                <a:ea typeface="맑은 고딕"/>
-                <a:cs typeface="맑은 고딕"/>
-              </a:rPr>
-              <a:t>농촌면에서 아이 키우시는 부모님</a:t>
-            </a:r>
-          </a:p>
-        </p:txBody>
-      </p:sp>
-      <p:sp>
-        <p:nvSpPr>
-          <p:cNvPr id="12" name="TextBox 11"/>
-          <p:cNvSpPr txBox="1"/>
-          <p:nvPr/>
-        </p:nvSpPr>
-        <p:spPr>
-          <a:xfrm>
-            <a:off x="6492240" y="2834640"/>
-            <a:ext cx="4663440" cy="731520"/>
-          </a:xfrm>
-          <a:prstGeom prst="rect">
-            <a:avLst/>
-          </a:prstGeom>
-          <a:noFill/>
-        </p:spPr>
-        <p:txBody>
-          <a:bodyPr wrap="square" lIns="0" rIns="0" tIns="0" bIns="0">
-            <a:spAutoFit/>
-          </a:bodyPr>
-          <a:lstStyle/>
-          <a:p>
-            <a:pPr algn="l">
-              <a:lnSpc>
-                <a:spcPct val="150000"/>
-              </a:lnSpc>
-            </a:pPr>
-            <a:r>
-              <a:rPr sz="1100" b="0">
-                <a:solidFill>
-                  <a:srgbClr val="52514E"/>
-                </a:solidFill>
-                <a:latin typeface="맑은 고딕"/>
-                <a:ea typeface="맑은 고딕"/>
-                <a:cs typeface="맑은 고딕"/>
-              </a:rPr>
-              <a:t>고령 비율이 가장 높은 곳은 23으로 54%였습니다.</a:t>
-            </a:r>
-          </a:p>
-          <a:p>
-            <a:pPr algn="l">
-              <a:lnSpc>
-                <a:spcPct val="150000"/>
-              </a:lnSpc>
-              <a:spcBef>
-                <a:spcPts val="0"/>
-              </a:spcBef>
-            </a:pPr>
-            <a:r>
-              <a:rPr sz="1100" b="0">
-                <a:solidFill>
-                  <a:srgbClr val="52514E"/>
-                </a:solidFill>
-                <a:latin typeface="맑은 고딕"/>
-                <a:ea typeface="맑은 고딕"/>
-                <a:cs typeface="맑은 고딕"/>
-              </a:rPr>
-              <a:t>어린이집·도서관이 가까이 없으면 그 부담은 온전히 가정의 몫이 됩니다.</a:t>
-            </a:r>
-          </a:p>
-        </p:txBody>
-      </p:sp>
-      <p:sp>
-        <p:nvSpPr>
-          <p:cNvPr id="13" name="Rounded Rectangle 12"/>
-          <p:cNvSpPr/>
-          <p:nvPr/>
-        </p:nvSpPr>
-        <p:spPr>
-          <a:xfrm>
-            <a:off x="658368" y="3858768"/>
-            <a:ext cx="5257800" cy="1371600"/>
-          </a:xfrm>
-          <a:prstGeom prst="roundRect">
-            <a:avLst>
-              <a:gd name="adj" fmla="val 6000"/>
-            </a:avLst>
-          </a:prstGeom>
-          <a:solidFill>
-            <a:srgbClr val="FFFFFF"/>
-          </a:solidFill>
-          <a:ln w="12700">
-            <a:solidFill>
-              <a:srgbClr val="E4E7EC"/>
-            </a:solidFill>
-          </a:ln>
-          <a:effectLst/>
-        </p:spPr>
-        <p:style>
-          <a:lnRef idx="1">
-            <a:schemeClr val="accent1"/>
-          </a:lnRef>
-          <a:fillRef idx="3">
-            <a:schemeClr val="accent1"/>
-          </a:fillRef>
-          <a:effectRef idx="2">
-            <a:schemeClr val="accent1"/>
-          </a:effectRef>
-          <a:fontRef idx="minor">
-            <a:schemeClr val="lt1"/>
-          </a:fontRef>
-        </p:style>
-        <p:txBody>
-          <a:bodyPr rtlCol="0" anchor="ctr"/>
-          <a:lstStyle/>
-          <a:p/>
-        </p:txBody>
-      </p:sp>
-      <p:sp>
-        <p:nvSpPr>
-          <p:cNvPr id="14" name="Rectangle 13"/>
-          <p:cNvSpPr/>
-          <p:nvPr/>
-        </p:nvSpPr>
-        <p:spPr>
-          <a:xfrm>
-            <a:off x="658368" y="3858768"/>
-            <a:ext cx="68580" cy="1371600"/>
-          </a:xfrm>
-          <a:prstGeom prst="rect">
-            <a:avLst/>
-          </a:prstGeom>
-          <a:solidFill>
-            <a:srgbClr val="EDA100"/>
-          </a:solidFill>
-          <a:ln>
-            <a:noFill/>
-          </a:ln>
-          <a:effectLst/>
-        </p:spPr>
-        <p:style>
-          <a:lnRef idx="1">
-            <a:schemeClr val="accent1"/>
-          </a:lnRef>
-          <a:fillRef idx="3">
-            <a:schemeClr val="accent1"/>
-          </a:fillRef>
-          <a:effectRef idx="2">
-            <a:schemeClr val="accent1"/>
-          </a:effectRef>
-          <a:fontRef idx="minor">
-            <a:schemeClr val="lt1"/>
-          </a:fontRef>
-        </p:style>
-        <p:txBody>
-          <a:bodyPr rtlCol="0" anchor="ctr"/>
-          <a:lstStyle/>
-          <a:p/>
-        </p:txBody>
-      </p:sp>
-      <p:sp>
-        <p:nvSpPr>
-          <p:cNvPr id="15" name="TextBox 14"/>
-          <p:cNvSpPr txBox="1"/>
-          <p:nvPr/>
-        </p:nvSpPr>
-        <p:spPr>
-          <a:xfrm>
-            <a:off x="914400" y="4041648"/>
-            <a:ext cx="4663440" cy="274320"/>
-          </a:xfrm>
-          <a:prstGeom prst="rect">
-            <a:avLst/>
-          </a:prstGeom>
-          <a:noFill/>
-        </p:spPr>
-        <p:txBody>
-          <a:bodyPr wrap="square" lIns="0" rIns="0" tIns="0" bIns="0">
-            <a:spAutoFit/>
-          </a:bodyPr>
-          <a:lstStyle/>
-          <a:p>
-            <a:pPr algn="l">
-              <a:lnSpc>
-                <a:spcPct val="135000"/>
-              </a:lnSpc>
-            </a:pPr>
-            <a:r>
-              <a:rPr sz="1350" b="1">
-                <a:solidFill>
-                  <a:srgbClr val="EDA100"/>
-                </a:solidFill>
-                <a:latin typeface="맑은 고딕"/>
-                <a:ea typeface="맑은 고딕"/>
-                <a:cs typeface="맑은 고딕"/>
-              </a:rPr>
-              <a:t>원도심에서 가게를 지켜오신 상인</a:t>
-            </a:r>
-          </a:p>
-        </p:txBody>
-      </p:sp>
-      <p:sp>
-        <p:nvSpPr>
-          <p:cNvPr id="16" name="TextBox 15"/>
-          <p:cNvSpPr txBox="1"/>
-          <p:nvPr/>
-        </p:nvSpPr>
-        <p:spPr>
-          <a:xfrm>
-            <a:off x="914400" y="4407407"/>
-            <a:ext cx="4663440" cy="731520"/>
-          </a:xfrm>
-          <a:prstGeom prst="rect">
-            <a:avLst/>
-          </a:prstGeom>
-          <a:noFill/>
-        </p:spPr>
-        <p:txBody>
-          <a:bodyPr wrap="square" lIns="0" rIns="0" tIns="0" bIns="0">
-            <a:spAutoFit/>
-          </a:bodyPr>
-          <a:lstStyle/>
-          <a:p>
-            <a:pPr algn="l">
-              <a:lnSpc>
-                <a:spcPct val="150000"/>
-              </a:lnSpc>
-            </a:pPr>
-            <a:r>
-              <a:rPr sz="1100" b="0">
-                <a:solidFill>
-                  <a:srgbClr val="52514E"/>
-                </a:solidFill>
-                <a:latin typeface="맑은 고딕"/>
-                <a:ea typeface="맑은 고딕"/>
-                <a:cs typeface="맑은 고딕"/>
-              </a:rPr>
-              <a:t>오가는 분이 줄면 매출이 줄고, 문 닫는 가게가 늘면 오가는 분이 더 줍니다.</a:t>
-            </a:r>
-          </a:p>
-          <a:p>
-            <a:pPr algn="l">
-              <a:lnSpc>
-                <a:spcPct val="150000"/>
-              </a:lnSpc>
-              <a:spcBef>
-                <a:spcPts val="0"/>
-              </a:spcBef>
-            </a:pPr>
-            <a:r>
-              <a:rPr sz="1100" b="0">
-                <a:solidFill>
-                  <a:srgbClr val="52514E"/>
-                </a:solidFill>
-                <a:latin typeface="맑은 고딕"/>
-                <a:ea typeface="맑은 고딕"/>
-                <a:cs typeface="맑은 고딕"/>
-              </a:rPr>
-              <a:t>이 고리를 일찍 알아차릴 수 있다면, 도움드릴 방법도 더 많아집니다.</a:t>
-            </a:r>
-          </a:p>
-        </p:txBody>
-      </p:sp>
-      <p:sp>
-        <p:nvSpPr>
-          <p:cNvPr id="17" name="Rounded Rectangle 16"/>
-          <p:cNvSpPr/>
-          <p:nvPr/>
-        </p:nvSpPr>
-        <p:spPr>
-          <a:xfrm>
-            <a:off x="6236207" y="3858768"/>
-            <a:ext cx="5257800" cy="1371600"/>
-          </a:xfrm>
-          <a:prstGeom prst="roundRect">
-            <a:avLst>
-              <a:gd name="adj" fmla="val 6000"/>
-            </a:avLst>
-          </a:prstGeom>
-          <a:solidFill>
-            <a:srgbClr val="FFFFFF"/>
-          </a:solidFill>
-          <a:ln w="12700">
-            <a:solidFill>
-              <a:srgbClr val="E4E7EC"/>
-            </a:solidFill>
-          </a:ln>
-          <a:effectLst/>
-        </p:spPr>
-        <p:style>
-          <a:lnRef idx="1">
-            <a:schemeClr val="accent1"/>
-          </a:lnRef>
-          <a:fillRef idx="3">
-            <a:schemeClr val="accent1"/>
-          </a:fillRef>
-          <a:effectRef idx="2">
-            <a:schemeClr val="accent1"/>
-          </a:effectRef>
-          <a:fontRef idx="minor">
-            <a:schemeClr val="lt1"/>
-          </a:fontRef>
-        </p:style>
-        <p:txBody>
-          <a:bodyPr rtlCol="0" anchor="ctr"/>
-          <a:lstStyle/>
-          <a:p/>
-        </p:txBody>
-      </p:sp>
-      <p:sp>
-        <p:nvSpPr>
-          <p:cNvPr id="18" name="Rectangle 17"/>
-          <p:cNvSpPr/>
-          <p:nvPr/>
-        </p:nvSpPr>
-        <p:spPr>
-          <a:xfrm>
-            <a:off x="6236207" y="3858768"/>
-            <a:ext cx="68580" cy="1371600"/>
-          </a:xfrm>
-          <a:prstGeom prst="rect">
-            <a:avLst/>
-          </a:prstGeom>
-          <a:solidFill>
-            <a:srgbClr val="2A78D6"/>
-          </a:solidFill>
-          <a:ln>
-            <a:noFill/>
-          </a:ln>
-          <a:effectLst/>
-        </p:spPr>
-        <p:style>
-          <a:lnRef idx="1">
-            <a:schemeClr val="accent1"/>
-          </a:lnRef>
-          <a:fillRef idx="3">
-            <a:schemeClr val="accent1"/>
-          </a:fillRef>
-          <a:effectRef idx="2">
-            <a:schemeClr val="accent1"/>
-          </a:effectRef>
-          <a:fontRef idx="minor">
-            <a:schemeClr val="lt1"/>
-          </a:fontRef>
-        </p:style>
-        <p:txBody>
-          <a:bodyPr rtlCol="0" anchor="ctr"/>
-          <a:lstStyle/>
-          <a:p/>
-        </p:txBody>
-      </p:sp>
-      <p:sp>
-        <p:nvSpPr>
-          <p:cNvPr id="19" name="TextBox 18"/>
-          <p:cNvSpPr txBox="1"/>
-          <p:nvPr/>
-        </p:nvSpPr>
-        <p:spPr>
-          <a:xfrm>
-            <a:off x="6492240" y="4041648"/>
-            <a:ext cx="4663440" cy="274320"/>
-          </a:xfrm>
-          <a:prstGeom prst="rect">
-            <a:avLst/>
-          </a:prstGeom>
-          <a:noFill/>
-        </p:spPr>
-        <p:txBody>
-          <a:bodyPr wrap="square" lIns="0" rIns="0" tIns="0" bIns="0">
-            <a:spAutoFit/>
-          </a:bodyPr>
-          <a:lstStyle/>
-          <a:p>
-            <a:pPr algn="l">
-              <a:lnSpc>
-                <a:spcPct val="135000"/>
-              </a:lnSpc>
-            </a:pPr>
-            <a:r>
-              <a:rPr sz="1350" b="1">
-                <a:solidFill>
-                  <a:srgbClr val="2A78D6"/>
-                </a:solidFill>
-                <a:latin typeface="맑은 고딕"/>
-                <a:ea typeface="맑은 고딕"/>
-                <a:cs typeface="맑은 고딕"/>
-              </a:rPr>
-              <a:t>신도심에서 자리 잡은 이웃</a:t>
-            </a:r>
-          </a:p>
-        </p:txBody>
-      </p:sp>
-      <p:sp>
-        <p:nvSpPr>
-          <p:cNvPr id="20" name="TextBox 19"/>
-          <p:cNvSpPr txBox="1"/>
-          <p:nvPr/>
-        </p:nvSpPr>
-        <p:spPr>
-          <a:xfrm>
-            <a:off x="6492240" y="4407407"/>
-            <a:ext cx="4663440" cy="731520"/>
-          </a:xfrm>
-          <a:prstGeom prst="rect">
-            <a:avLst/>
-          </a:prstGeom>
-          <a:noFill/>
-        </p:spPr>
-        <p:txBody>
-          <a:bodyPr wrap="square" lIns="0" rIns="0" tIns="0" bIns="0">
-            <a:spAutoFit/>
-          </a:bodyPr>
-          <a:lstStyle/>
-          <a:p>
-            <a:pPr algn="l">
-              <a:lnSpc>
-                <a:spcPct val="150000"/>
-              </a:lnSpc>
-            </a:pPr>
-            <a:r>
-              <a:rPr sz="1100" b="0">
-                <a:solidFill>
-                  <a:srgbClr val="52514E"/>
-                </a:solidFill>
-                <a:latin typeface="맑은 고딕"/>
-                <a:ea typeface="맑은 고딕"/>
-                <a:cs typeface="맑은 고딕"/>
-              </a:rPr>
-              <a:t>지금 여건이 좋은 곳도 언젠가는 나이가 듭니다.</a:t>
-            </a:r>
-          </a:p>
-          <a:p>
-            <a:pPr algn="l">
-              <a:lnSpc>
-                <a:spcPct val="150000"/>
-              </a:lnSpc>
-              <a:spcBef>
-                <a:spcPts val="0"/>
-              </a:spcBef>
-            </a:pPr>
-            <a:r>
-              <a:rPr sz="1100" b="0">
-                <a:solidFill>
-                  <a:srgbClr val="52514E"/>
-                </a:solidFill>
-                <a:latin typeface="맑은 고딕"/>
-                <a:ea typeface="맑은 고딕"/>
-                <a:cs typeface="맑은 고딕"/>
-              </a:rPr>
-              <a:t>미리 살펴보는 습관은 결국 천안시민 모두를 위한 준비라고 생각합니다.</a:t>
-            </a:r>
-          </a:p>
-        </p:txBody>
-      </p:sp>
-      <p:sp>
-        <p:nvSpPr>
-          <p:cNvPr id="21" name="Rounded Rectangle 20"/>
-          <p:cNvSpPr/>
-          <p:nvPr/>
-        </p:nvSpPr>
-        <p:spPr>
-          <a:xfrm>
-            <a:off x="658368" y="5541264"/>
-            <a:ext cx="10874959" cy="786384"/>
-          </a:xfrm>
-          <a:prstGeom prst="roundRect">
-            <a:avLst>
-              <a:gd name="adj" fmla="val 6000"/>
-            </a:avLst>
-          </a:prstGeom>
-          <a:solidFill>
-            <a:srgbClr val="EFF7F3"/>
-          </a:solidFill>
-          <a:ln>
-            <a:noFill/>
-          </a:ln>
-          <a:effectLst/>
-        </p:spPr>
-        <p:style>
-          <a:lnRef idx="1">
-            <a:schemeClr val="accent1"/>
-          </a:lnRef>
-          <a:fillRef idx="3">
-            <a:schemeClr val="accent1"/>
-          </a:fillRef>
-          <a:effectRef idx="2">
-            <a:schemeClr val="accent1"/>
-          </a:effectRef>
-          <a:fontRef idx="minor">
-            <a:schemeClr val="lt1"/>
-          </a:fontRef>
-        </p:style>
-        <p:txBody>
-          <a:bodyPr rtlCol="0" anchor="ctr"/>
-          <a:lstStyle/>
-          <a:p/>
-        </p:txBody>
-      </p:sp>
-      <p:sp>
-        <p:nvSpPr>
-          <p:cNvPr id="22" name="TextBox 21"/>
-          <p:cNvSpPr txBox="1"/>
-          <p:nvPr/>
-        </p:nvSpPr>
-        <p:spPr>
-          <a:xfrm>
-            <a:off x="932688" y="5724144"/>
-            <a:ext cx="10515600" cy="457200"/>
-          </a:xfrm>
-          <a:prstGeom prst="rect">
-            <a:avLst/>
-          </a:prstGeom>
-          <a:noFill/>
-        </p:spPr>
-        <p:txBody>
-          <a:bodyPr wrap="square" lIns="0" rIns="0" tIns="0" bIns="0">
-            <a:spAutoFit/>
-          </a:bodyPr>
-          <a:lstStyle/>
-          <a:p>
-            <a:pPr algn="l">
-              <a:lnSpc>
-                <a:spcPct val="150000"/>
-              </a:lnSpc>
-            </a:pPr>
-            <a:r>
               <a:rPr sz="1200" b="0">
                 <a:solidFill>
                   <a:srgbClr val="12151A"/>
@@ -9794,35 +10403,14 @@
                 <a:ea typeface="맑은 고딕"/>
                 <a:cs typeface="맑은 고딕"/>
               </a:rPr>
-              <a:t>저희는 천안시 사정을 현장에서 겪어보지 못한 참가자입니다. 다만 공개된 데이터로 할 수 있는 만큼은 성실하게 살펴보았습니다.</a:t>
-            </a:r>
-          </a:p>
-          <a:p>
-            <a:pPr algn="l">
-              <a:lnSpc>
-                <a:spcPct val="150000"/>
-              </a:lnSpc>
-              <a:spcBef>
-                <a:spcPts val="0"/>
-              </a:spcBef>
-            </a:pPr>
-            <a:r>
-              <a:rPr sz="1200" b="0">
-                <a:solidFill>
-                  <a:srgbClr val="12151A"/>
-                </a:solidFill>
-                <a:latin typeface="맑은 고딕"/>
-                <a:ea typeface="맑은 고딕"/>
-                <a:cs typeface="맑은 고딕"/>
-              </a:rPr>
-              <a:t>부족한 부분은 현장을 아시는 분들이 채워주시길 바라며, 이 자료가 그 논의의 출발점이 될 수 있다면 더 바랄 것이 없겠습니다.</a:t>
-            </a:r>
-          </a:p>
-        </p:txBody>
-      </p:sp>
-      <p:sp>
-        <p:nvSpPr>
-          <p:cNvPr id="23" name="TextBox 22"/>
+              <a:t>이 곡선은 두 질문에 함께 답합니다. 좌측 그림의 좌상단(고령↑·SOC↓)이 먼저 살펴볼 구간입니다.</a:t>
+            </a:r>
+          </a:p>
+        </p:txBody>
+      </p:sp>
+      <p:sp>
+        <p:nvSpPr>
+          <p:cNvPr id="9" name="TextBox 8"/>
           <p:cNvSpPr txBox="1"/>
           <p:nvPr/>
         </p:nvSpPr>
@@ -9863,7 +10451,7 @@
       </p:sp>
       <p:sp>
         <p:nvSpPr>
-          <p:cNvPr id="24" name="TextBox 23"/>
+          <p:cNvPr id="10" name="TextBox 9"/>
           <p:cNvSpPr txBox="1"/>
           <p:nvPr/>
         </p:nvSpPr>
@@ -9956,7 +10544,7 @@
                 <a:ea typeface="맑은 고딕"/>
                 <a:cs typeface="맑은 고딕"/>
               </a:rPr>
-              <a:t>APPLICATION</a:t>
+              <a:t>FOR WHOM</a:t>
             </a:r>
           </a:p>
         </p:txBody>
@@ -9997,7 +10585,7 @@
                 <a:ea typeface="맑은 고딕"/>
                 <a:cs typeface="맑은 고딕"/>
               </a:rPr>
-              <a:t>실무에 이렇게 보탬이 되면 좋겠습니다</a:t>
+              <a:t>결국, 이런 분들께 닿았으면 합니다</a:t>
             </a:r>
           </a:p>
         </p:txBody>
@@ -10038,7 +10626,7 @@
                 <a:ea typeface="맑은 고딕"/>
                 <a:cs typeface="맑은 고딕"/>
               </a:rPr>
-              <a:t>따로 시간을 내어 다뤄야 하는 연구물이 아니라, 하시던 업무 곁에 놓고 참고하실 수 있는 자료로 준비했습니다.</a:t>
+              <a:t>지수와 모델은 수단일 뿐입니다. 저희가 계속 떠올린 것은 아래 네 분의 하루였습니다.</a:t>
             </a:r>
           </a:p>
         </p:txBody>
@@ -10139,8 +10727,8 @@
         </p:nvSpPr>
         <p:spPr>
           <a:xfrm>
-            <a:off x="914400" y="2450592"/>
-            <a:ext cx="2194560" cy="256032"/>
+            <a:off x="914400" y="2468880"/>
+            <a:ext cx="4663440" cy="274320"/>
           </a:xfrm>
           <a:prstGeom prst="rect">
             <a:avLst/>
@@ -10159,7 +10747,7 @@
               </a:lnSpc>
             </a:pPr>
             <a:r>
-              <a:rPr sz="1250" b="1">
+              <a:rPr sz="1350" b="1">
                 <a:solidFill>
                   <a:srgbClr val="2A78D6"/>
                 </a:solidFill>
@@ -10167,7 +10755,7 @@
                 <a:ea typeface="맑은 고딕"/>
                 <a:cs typeface="맑은 고딕"/>
               </a:rPr>
-              <a:t>도시재생 담당</a:t>
+              <a:t>원도심에 오래 사신 어르신</a:t>
             </a:r>
           </a:p>
         </p:txBody>
@@ -10180,68 +10768,27 @@
         </p:nvSpPr>
         <p:spPr>
           <a:xfrm>
-            <a:off x="914400" y="2743200"/>
-            <a:ext cx="4663440" cy="256032"/>
-          </a:xfrm>
-          <a:prstGeom prst="rect">
-            <a:avLst/>
-          </a:prstGeom>
-          <a:noFill/>
-        </p:spPr>
-        <p:txBody>
-          <a:bodyPr wrap="square" lIns="0" rIns="0" tIns="0" bIns="0">
-            <a:spAutoFit/>
-          </a:bodyPr>
-          <a:lstStyle/>
-          <a:p>
-            <a:pPr algn="l">
-              <a:lnSpc>
-                <a:spcPct val="135000"/>
-              </a:lnSpc>
-            </a:pPr>
-            <a:r>
-              <a:rPr sz="1350" b="1">
-                <a:solidFill>
-                  <a:srgbClr val="12151A"/>
-                </a:solidFill>
-                <a:latin typeface="맑은 고딕"/>
-                <a:ea typeface="맑은 고딕"/>
-                <a:cs typeface="맑은 고딕"/>
-              </a:rPr>
-              <a:t>사업지 검토 · 공모 준비</a:t>
-            </a:r>
-          </a:p>
-        </p:txBody>
-      </p:sp>
-      <p:sp>
-        <p:nvSpPr>
-          <p:cNvPr id="9" name="TextBox 8"/>
-          <p:cNvSpPr txBox="1"/>
-          <p:nvPr/>
-        </p:nvSpPr>
-        <p:spPr>
-          <a:xfrm>
-            <a:off x="914400" y="3054096"/>
-            <a:ext cx="4663440" cy="548640"/>
-          </a:xfrm>
-          <a:prstGeom prst="rect">
-            <a:avLst/>
-          </a:prstGeom>
-          <a:noFill/>
-        </p:spPr>
-        <p:txBody>
-          <a:bodyPr wrap="square" lIns="0" rIns="0" tIns="0" bIns="0">
-            <a:spAutoFit/>
-          </a:bodyPr>
-          <a:lstStyle/>
-          <a:p>
-            <a:pPr algn="l">
-              <a:lnSpc>
-                <a:spcPct val="145000"/>
-              </a:lnSpc>
-            </a:pPr>
-            <a:r>
-              <a:rPr sz="1080" b="0">
+            <a:off x="914400" y="2834640"/>
+            <a:ext cx="4663440" cy="731520"/>
+          </a:xfrm>
+          <a:prstGeom prst="rect">
+            <a:avLst/>
+          </a:prstGeom>
+          <a:noFill/>
+        </p:spPr>
+        <p:txBody>
+          <a:bodyPr wrap="square" lIns="0" rIns="0" tIns="0" bIns="0">
+            <a:spAutoFit/>
+          </a:bodyPr>
+          <a:lstStyle/>
+          <a:p>
+            <a:pPr algn="l">
+              <a:lnSpc>
+                <a:spcPct val="150000"/>
+              </a:lnSpc>
+            </a:pPr>
+            <a:r>
+              <a:rPr sz="1100" b="0">
                 <a:solidFill>
                   <a:srgbClr val="52514E"/>
                 </a:solidFill>
@@ -10249,20 +10796,20 @@
                 <a:ea typeface="맑은 고딕"/>
                 <a:cs typeface="맑은 고딕"/>
               </a:rPr>
-              <a:t>지수가 낮은 곳과 3년 뒤 살펴볼 곳을 겹쳐 후보를 좁히실 때,</a:t>
-            </a:r>
-          </a:p>
-          <a:p>
-            <a:pPr algn="l">
-              <a:lnSpc>
-                <a:spcPct val="145000"/>
+              <a:t>24 일대는 젊은 이웃이 하나둘 떠나고 상가도 비었습니다.</a:t>
+            </a:r>
+          </a:p>
+          <a:p>
+            <a:pPr algn="l">
+              <a:lnSpc>
+                <a:spcPct val="150000"/>
               </a:lnSpc>
               <a:spcBef>
                 <a:spcPts val="0"/>
               </a:spcBef>
             </a:pPr>
             <a:r>
-              <a:rPr sz="1080" b="0">
+              <a:rPr sz="1100" b="0">
                 <a:solidFill>
                   <a:srgbClr val="52514E"/>
                 </a:solidFill>
@@ -10270,14 +10817,14 @@
                 <a:ea typeface="맑은 고딕"/>
                 <a:cs typeface="맑은 고딕"/>
               </a:rPr>
-              <a:t>공모의 '쇠퇴도 진단' 항목에 근거 수치로.</a:t>
-            </a:r>
-          </a:p>
-        </p:txBody>
-      </p:sp>
-      <p:sp>
-        <p:nvSpPr>
-          <p:cNvPr id="10" name="Rounded Rectangle 9"/>
+              <a:t>가게와 병원이 멀어질수록, 걸어서 하실 수 있는 일이 줄어듭니다.</a:t>
+            </a:r>
+          </a:p>
+        </p:txBody>
+      </p:sp>
+      <p:sp>
+        <p:nvSpPr>
+          <p:cNvPr id="9" name="Rounded Rectangle 8"/>
           <p:cNvSpPr/>
           <p:nvPr/>
         </p:nvSpPr>
@@ -10323,7 +10870,7 @@
       </p:sp>
       <p:sp>
         <p:nvSpPr>
-          <p:cNvPr id="11" name="Rectangle 10"/>
+          <p:cNvPr id="10" name="Rectangle 9"/>
           <p:cNvSpPr/>
           <p:nvPr/>
         </p:nvSpPr>
@@ -10336,7 +10883,7 @@
             <a:avLst/>
           </a:prstGeom>
           <a:solidFill>
-            <a:srgbClr val="1BAF7A"/>
+            <a:srgbClr val="8A7FB5"/>
           </a:solidFill>
           <a:ln>
             <a:noFill/>
@@ -10365,115 +10912,74 @@
       </p:sp>
       <p:sp>
         <p:nvSpPr>
+          <p:cNvPr id="11" name="TextBox 10"/>
+          <p:cNvSpPr txBox="1"/>
+          <p:nvPr/>
+        </p:nvSpPr>
+        <p:spPr>
+          <a:xfrm>
+            <a:off x="6492240" y="2468880"/>
+            <a:ext cx="4663440" cy="274320"/>
+          </a:xfrm>
+          <a:prstGeom prst="rect">
+            <a:avLst/>
+          </a:prstGeom>
+          <a:noFill/>
+        </p:spPr>
+        <p:txBody>
+          <a:bodyPr wrap="square" lIns="0" rIns="0" tIns="0" bIns="0">
+            <a:spAutoFit/>
+          </a:bodyPr>
+          <a:lstStyle/>
+          <a:p>
+            <a:pPr algn="l">
+              <a:lnSpc>
+                <a:spcPct val="135000"/>
+              </a:lnSpc>
+            </a:pPr>
+            <a:r>
+              <a:rPr sz="1350" b="1">
+                <a:solidFill>
+                  <a:srgbClr val="8A7FB5"/>
+                </a:solidFill>
+                <a:latin typeface="맑은 고딕"/>
+                <a:ea typeface="맑은 고딕"/>
+                <a:cs typeface="맑은 고딕"/>
+              </a:rPr>
+              <a:t>농촌면에서 아이 키우시는 부모님</a:t>
+            </a:r>
+          </a:p>
+        </p:txBody>
+      </p:sp>
+      <p:sp>
+        <p:nvSpPr>
           <p:cNvPr id="12" name="TextBox 11"/>
           <p:cNvSpPr txBox="1"/>
           <p:nvPr/>
         </p:nvSpPr>
         <p:spPr>
           <a:xfrm>
-            <a:off x="6492240" y="2450592"/>
-            <a:ext cx="2194560" cy="256032"/>
-          </a:xfrm>
-          <a:prstGeom prst="rect">
-            <a:avLst/>
-          </a:prstGeom>
-          <a:noFill/>
-        </p:spPr>
-        <p:txBody>
-          <a:bodyPr wrap="square" lIns="0" rIns="0" tIns="0" bIns="0">
-            <a:spAutoFit/>
-          </a:bodyPr>
-          <a:lstStyle/>
-          <a:p>
-            <a:pPr algn="l">
-              <a:lnSpc>
-                <a:spcPct val="135000"/>
-              </a:lnSpc>
-            </a:pPr>
-            <a:r>
-              <a:rPr sz="1250" b="1">
-                <a:solidFill>
-                  <a:srgbClr val="1BAF7A"/>
-                </a:solidFill>
-                <a:latin typeface="맑은 고딕"/>
-                <a:ea typeface="맑은 고딕"/>
-                <a:cs typeface="맑은 고딕"/>
-              </a:rPr>
-              <a:t>복지·보건 담당</a:t>
-            </a:r>
-          </a:p>
-        </p:txBody>
-      </p:sp>
-      <p:sp>
-        <p:nvSpPr>
-          <p:cNvPr id="13" name="TextBox 12"/>
-          <p:cNvSpPr txBox="1"/>
-          <p:nvPr/>
-        </p:nvSpPr>
-        <p:spPr>
-          <a:xfrm>
-            <a:off x="6492240" y="2743200"/>
-            <a:ext cx="4663440" cy="256032"/>
-          </a:xfrm>
-          <a:prstGeom prst="rect">
-            <a:avLst/>
-          </a:prstGeom>
-          <a:noFill/>
-        </p:spPr>
-        <p:txBody>
-          <a:bodyPr wrap="square" lIns="0" rIns="0" tIns="0" bIns="0">
-            <a:spAutoFit/>
-          </a:bodyPr>
-          <a:lstStyle/>
-          <a:p>
-            <a:pPr algn="l">
-              <a:lnSpc>
-                <a:spcPct val="135000"/>
-              </a:lnSpc>
-            </a:pPr>
-            <a:r>
-              <a:rPr sz="1350" b="1">
-                <a:solidFill>
-                  <a:srgbClr val="12151A"/>
-                </a:solidFill>
-                <a:latin typeface="맑은 고딕"/>
-                <a:ea typeface="맑은 고딕"/>
-                <a:cs typeface="맑은 고딕"/>
-              </a:rPr>
-              <a:t>생활시설 위치 검토</a:t>
-            </a:r>
-          </a:p>
-        </p:txBody>
-      </p:sp>
-      <p:sp>
-        <p:nvSpPr>
-          <p:cNvPr id="14" name="TextBox 13"/>
-          <p:cNvSpPr txBox="1"/>
-          <p:nvPr/>
-        </p:nvSpPr>
-        <p:spPr>
-          <a:xfrm>
-            <a:off x="6492240" y="3054096"/>
-            <a:ext cx="4663440" cy="548640"/>
-          </a:xfrm>
-          <a:prstGeom prst="rect">
-            <a:avLst/>
-          </a:prstGeom>
-          <a:noFill/>
-        </p:spPr>
-        <p:txBody>
-          <a:bodyPr wrap="square" lIns="0" rIns="0" tIns="0" bIns="0">
-            <a:spAutoFit/>
-          </a:bodyPr>
-          <a:lstStyle/>
-          <a:p>
-            <a:pPr algn="l">
-              <a:lnSpc>
-                <a:spcPct val="145000"/>
-              </a:lnSpc>
-            </a:pPr>
-            <a:r>
-              <a:rPr sz="1080" b="0">
+            <a:off x="6492240" y="2834640"/>
+            <a:ext cx="4663440" cy="731520"/>
+          </a:xfrm>
+          <a:prstGeom prst="rect">
+            <a:avLst/>
+          </a:prstGeom>
+          <a:noFill/>
+        </p:spPr>
+        <p:txBody>
+          <a:bodyPr wrap="square" lIns="0" rIns="0" tIns="0" bIns="0">
+            <a:spAutoFit/>
+          </a:bodyPr>
+          <a:lstStyle/>
+          <a:p>
+            <a:pPr algn="l">
+              <a:lnSpc>
+                <a:spcPct val="150000"/>
+              </a:lnSpc>
+            </a:pPr>
+            <a:r>
+              <a:rPr sz="1100" b="0">
                 <a:solidFill>
                   <a:srgbClr val="52514E"/>
                 </a:solidFill>
@@ -10481,20 +10987,20 @@
                 <a:ea typeface="맑은 고딕"/>
                 <a:cs typeface="맑은 고딕"/>
               </a:rPr>
-              <a:t>우선순위표의 좌표를 검토 후보 중 하나로,</a:t>
-            </a:r>
-          </a:p>
-          <a:p>
-            <a:pPr algn="l">
-              <a:lnSpc>
-                <a:spcPct val="145000"/>
+              <a:t>고령 비율이 가장 높은 곳은 14으로 54%였습니다.</a:t>
+            </a:r>
+          </a:p>
+          <a:p>
+            <a:pPr algn="l">
+              <a:lnSpc>
+                <a:spcPct val="150000"/>
               </a:lnSpc>
               <a:spcBef>
                 <a:spcPts val="0"/>
               </a:spcBef>
             </a:pPr>
             <a:r>
-              <a:rPr sz="1080" b="0">
+              <a:rPr sz="1100" b="0">
                 <a:solidFill>
                   <a:srgbClr val="52514E"/>
                 </a:solidFill>
@@ -10502,14 +11008,14 @@
                 <a:ea typeface="맑은 고딕"/>
                 <a:cs typeface="맑은 고딕"/>
               </a:rPr>
-              <a:t>왜 그 동네인지 설명하실 때 항목별 근거로.</a:t>
-            </a:r>
-          </a:p>
-        </p:txBody>
-      </p:sp>
-      <p:sp>
-        <p:nvSpPr>
-          <p:cNvPr id="15" name="Rounded Rectangle 14"/>
+              <a:t>어린이집·도서관이 가까이 없으면 그 부담은 온전히 가정의 몫이 됩니다.</a:t>
+            </a:r>
+          </a:p>
+        </p:txBody>
+      </p:sp>
+      <p:sp>
+        <p:nvSpPr>
+          <p:cNvPr id="13" name="Rounded Rectangle 12"/>
           <p:cNvSpPr/>
           <p:nvPr/>
         </p:nvSpPr>
@@ -10555,7 +11061,7 @@
       </p:sp>
       <p:sp>
         <p:nvSpPr>
-          <p:cNvPr id="16" name="Rectangle 15"/>
+          <p:cNvPr id="14" name="Rectangle 13"/>
           <p:cNvSpPr/>
           <p:nvPr/>
         </p:nvSpPr>
@@ -10597,14 +11103,14 @@
       </p:sp>
       <p:sp>
         <p:nvSpPr>
-          <p:cNvPr id="17" name="TextBox 16"/>
-          <p:cNvSpPr txBox="1"/>
-          <p:nvPr/>
-        </p:nvSpPr>
-        <p:spPr>
-          <a:xfrm>
-            <a:off x="914400" y="4023359"/>
-            <a:ext cx="2194560" cy="256032"/>
+          <p:cNvPr id="15" name="TextBox 14"/>
+          <p:cNvSpPr txBox="1"/>
+          <p:nvPr/>
+        </p:nvSpPr>
+        <p:spPr>
+          <a:xfrm>
+            <a:off x="914400" y="4041648"/>
+            <a:ext cx="4663440" cy="274320"/>
           </a:xfrm>
           <a:prstGeom prst="rect">
             <a:avLst/>
@@ -10623,7 +11129,7 @@
               </a:lnSpc>
             </a:pPr>
             <a:r>
-              <a:rPr sz="1250" b="1">
+              <a:rPr sz="1350" b="1">
                 <a:solidFill>
                   <a:srgbClr val="EDA100"/>
                 </a:solidFill>
@@ -10631,81 +11137,40 @@
                 <a:ea typeface="맑은 고딕"/>
                 <a:cs typeface="맑은 고딕"/>
               </a:rPr>
-              <a:t>예산 담당</a:t>
-            </a:r>
-          </a:p>
-        </p:txBody>
-      </p:sp>
-      <p:sp>
-        <p:nvSpPr>
-          <p:cNvPr id="18" name="TextBox 17"/>
-          <p:cNvSpPr txBox="1"/>
-          <p:nvPr/>
-        </p:nvSpPr>
-        <p:spPr>
-          <a:xfrm>
-            <a:off x="914400" y="4315968"/>
-            <a:ext cx="4663440" cy="256032"/>
-          </a:xfrm>
-          <a:prstGeom prst="rect">
-            <a:avLst/>
-          </a:prstGeom>
-          <a:noFill/>
-        </p:spPr>
-        <p:txBody>
-          <a:bodyPr wrap="square" lIns="0" rIns="0" tIns="0" bIns="0">
-            <a:spAutoFit/>
-          </a:bodyPr>
-          <a:lstStyle/>
-          <a:p>
-            <a:pPr algn="l">
-              <a:lnSpc>
-                <a:spcPct val="135000"/>
-              </a:lnSpc>
-            </a:pPr>
-            <a:r>
-              <a:rPr sz="1350" b="1">
-                <a:solidFill>
-                  <a:srgbClr val="12151A"/>
-                </a:solidFill>
-                <a:latin typeface="맑은 고딕"/>
-                <a:ea typeface="맑은 고딕"/>
-                <a:cs typeface="맑은 고딕"/>
-              </a:rPr>
-              <a:t>배분 검토 자료</a:t>
-            </a:r>
-          </a:p>
-        </p:txBody>
-      </p:sp>
-      <p:sp>
-        <p:nvSpPr>
-          <p:cNvPr id="19" name="TextBox 18"/>
-          <p:cNvSpPr txBox="1"/>
-          <p:nvPr/>
-        </p:nvSpPr>
-        <p:spPr>
-          <a:xfrm>
-            <a:off x="914400" y="4626864"/>
-            <a:ext cx="4663440" cy="548640"/>
-          </a:xfrm>
-          <a:prstGeom prst="rect">
-            <a:avLst/>
-          </a:prstGeom>
-          <a:noFill/>
-        </p:spPr>
-        <p:txBody>
-          <a:bodyPr wrap="square" lIns="0" rIns="0" tIns="0" bIns="0">
-            <a:spAutoFit/>
-          </a:bodyPr>
-          <a:lstStyle/>
-          <a:p>
-            <a:pPr algn="l">
-              <a:lnSpc>
-                <a:spcPct val="145000"/>
-              </a:lnSpc>
-            </a:pPr>
-            <a:r>
-              <a:rPr sz="1080" b="0">
+              <a:t>원도심에서 가게를 지켜오신 상인</a:t>
+            </a:r>
+          </a:p>
+        </p:txBody>
+      </p:sp>
+      <p:sp>
+        <p:nvSpPr>
+          <p:cNvPr id="16" name="TextBox 15"/>
+          <p:cNvSpPr txBox="1"/>
+          <p:nvPr/>
+        </p:nvSpPr>
+        <p:spPr>
+          <a:xfrm>
+            <a:off x="914400" y="4407407"/>
+            <a:ext cx="4663440" cy="731520"/>
+          </a:xfrm>
+          <a:prstGeom prst="rect">
+            <a:avLst/>
+          </a:prstGeom>
+          <a:noFill/>
+        </p:spPr>
+        <p:txBody>
+          <a:bodyPr wrap="square" lIns="0" rIns="0" tIns="0" bIns="0">
+            <a:spAutoFit/>
+          </a:bodyPr>
+          <a:lstStyle/>
+          <a:p>
+            <a:pPr algn="l">
+              <a:lnSpc>
+                <a:spcPct val="150000"/>
+              </a:lnSpc>
+            </a:pPr>
+            <a:r>
+              <a:rPr sz="1100" b="0">
                 <a:solidFill>
                   <a:srgbClr val="52514E"/>
                 </a:solidFill>
@@ -10713,20 +11178,20 @@
                 <a:ea typeface="맑은 고딕"/>
                 <a:cs typeface="맑은 고딕"/>
               </a:rPr>
-              <a:t>몇 개소까지면 어느 정도 효과인지 곡선으로 비교하실 때,</a:t>
-            </a:r>
-          </a:p>
-          <a:p>
-            <a:pPr algn="l">
-              <a:lnSpc>
-                <a:spcPct val="145000"/>
+              <a:t>오가는 분이 줄면 매출이 줄고, 문 닫는 가게가 늘면 오가는 분이 더 줍니다.</a:t>
+            </a:r>
+          </a:p>
+          <a:p>
+            <a:pPr algn="l">
+              <a:lnSpc>
+                <a:spcPct val="150000"/>
               </a:lnSpc>
               <a:spcBef>
                 <a:spcPts val="0"/>
               </a:spcBef>
             </a:pPr>
             <a:r>
-              <a:rPr sz="1080" b="0">
+              <a:rPr sz="1100" b="0">
                 <a:solidFill>
                   <a:srgbClr val="52514E"/>
                 </a:solidFill>
@@ -10734,14 +11199,14 @@
                 <a:ea typeface="맑은 고딕"/>
                 <a:cs typeface="맑은 고딕"/>
               </a:rPr>
-              <a:t>예산 조정이 필요할 때 판단의 참고로.</a:t>
-            </a:r>
-          </a:p>
-        </p:txBody>
-      </p:sp>
-      <p:sp>
-        <p:nvSpPr>
-          <p:cNvPr id="20" name="Rounded Rectangle 19"/>
+              <a:t>이 고리를 일찍 알아차릴 수 있다면, 도움드릴 방법도 더 많아집니다.</a:t>
+            </a:r>
+          </a:p>
+        </p:txBody>
+      </p:sp>
+      <p:sp>
+        <p:nvSpPr>
+          <p:cNvPr id="17" name="Rounded Rectangle 16"/>
           <p:cNvSpPr/>
           <p:nvPr/>
         </p:nvSpPr>
@@ -10787,7 +11252,7 @@
       </p:sp>
       <p:sp>
         <p:nvSpPr>
-          <p:cNvPr id="21" name="Rectangle 20"/>
+          <p:cNvPr id="18" name="Rectangle 17"/>
           <p:cNvSpPr/>
           <p:nvPr/>
         </p:nvSpPr>
@@ -10800,7 +11265,7 @@
             <a:avLst/>
           </a:prstGeom>
           <a:solidFill>
-            <a:srgbClr val="4A3AA7"/>
+            <a:srgbClr val="2A78D6"/>
           </a:solidFill>
           <a:ln>
             <a:noFill/>
@@ -10829,14 +11294,14 @@
       </p:sp>
       <p:sp>
         <p:nvSpPr>
-          <p:cNvPr id="22" name="TextBox 21"/>
-          <p:cNvSpPr txBox="1"/>
-          <p:nvPr/>
-        </p:nvSpPr>
-        <p:spPr>
-          <a:xfrm>
-            <a:off x="6492240" y="4023359"/>
-            <a:ext cx="2194560" cy="256032"/>
+          <p:cNvPr id="19" name="TextBox 18"/>
+          <p:cNvSpPr txBox="1"/>
+          <p:nvPr/>
+        </p:nvSpPr>
+        <p:spPr>
+          <a:xfrm>
+            <a:off x="6492240" y="4041648"/>
+            <a:ext cx="4663440" cy="274320"/>
           </a:xfrm>
           <a:prstGeom prst="rect">
             <a:avLst/>
@@ -10855,89 +11320,48 @@
               </a:lnSpc>
             </a:pPr>
             <a:r>
-              <a:rPr sz="1250" b="1">
-                <a:solidFill>
-                  <a:srgbClr val="4A3AA7"/>
-                </a:solidFill>
-                <a:latin typeface="맑은 고딕"/>
-                <a:ea typeface="맑은 고딕"/>
-                <a:cs typeface="맑은 고딕"/>
-              </a:rPr>
-              <a:t>기획·평가 담당</a:t>
-            </a:r>
-          </a:p>
-        </p:txBody>
-      </p:sp>
-      <p:sp>
-        <p:nvSpPr>
-          <p:cNvPr id="23" name="TextBox 22"/>
-          <p:cNvSpPr txBox="1"/>
-          <p:nvPr/>
-        </p:nvSpPr>
-        <p:spPr>
-          <a:xfrm>
-            <a:off x="6492240" y="4315968"/>
-            <a:ext cx="4663440" cy="256032"/>
-          </a:xfrm>
-          <a:prstGeom prst="rect">
-            <a:avLst/>
-          </a:prstGeom>
-          <a:noFill/>
-        </p:spPr>
-        <p:txBody>
-          <a:bodyPr wrap="square" lIns="0" rIns="0" tIns="0" bIns="0">
-            <a:spAutoFit/>
-          </a:bodyPr>
-          <a:lstStyle/>
-          <a:p>
-            <a:pPr algn="l">
-              <a:lnSpc>
-                <a:spcPct val="135000"/>
-              </a:lnSpc>
-            </a:pPr>
-            <a:r>
               <a:rPr sz="1350" b="1">
                 <a:solidFill>
-                  <a:srgbClr val="12151A"/>
-                </a:solidFill>
-                <a:latin typeface="맑은 고딕"/>
-                <a:ea typeface="맑은 고딕"/>
-                <a:cs typeface="맑은 고딕"/>
-              </a:rPr>
-              <a:t>시행 이후 확인</a:t>
-            </a:r>
-          </a:p>
-        </p:txBody>
-      </p:sp>
-      <p:sp>
-        <p:nvSpPr>
-          <p:cNvPr id="24" name="TextBox 23"/>
-          <p:cNvSpPr txBox="1"/>
-          <p:nvPr/>
-        </p:nvSpPr>
-        <p:spPr>
-          <a:xfrm>
-            <a:off x="6492240" y="4626864"/>
-            <a:ext cx="4663440" cy="548640"/>
-          </a:xfrm>
-          <a:prstGeom prst="rect">
-            <a:avLst/>
-          </a:prstGeom>
-          <a:noFill/>
-        </p:spPr>
-        <p:txBody>
-          <a:bodyPr wrap="square" lIns="0" rIns="0" tIns="0" bIns="0">
-            <a:spAutoFit/>
-          </a:bodyPr>
-          <a:lstStyle/>
-          <a:p>
-            <a:pPr algn="l">
-              <a:lnSpc>
-                <a:spcPct val="145000"/>
-              </a:lnSpc>
-            </a:pPr>
-            <a:r>
-              <a:rPr sz="1080" b="0">
+                  <a:srgbClr val="2A78D6"/>
+                </a:solidFill>
+                <a:latin typeface="맑은 고딕"/>
+                <a:ea typeface="맑은 고딕"/>
+                <a:cs typeface="맑은 고딕"/>
+              </a:rPr>
+              <a:t>신도심에서 자리 잡은 이웃</a:t>
+            </a:r>
+          </a:p>
+        </p:txBody>
+      </p:sp>
+      <p:sp>
+        <p:nvSpPr>
+          <p:cNvPr id="20" name="TextBox 19"/>
+          <p:cNvSpPr txBox="1"/>
+          <p:nvPr/>
+        </p:nvSpPr>
+        <p:spPr>
+          <a:xfrm>
+            <a:off x="6492240" y="4407407"/>
+            <a:ext cx="4663440" cy="731520"/>
+          </a:xfrm>
+          <a:prstGeom prst="rect">
+            <a:avLst/>
+          </a:prstGeom>
+          <a:noFill/>
+        </p:spPr>
+        <p:txBody>
+          <a:bodyPr wrap="square" lIns="0" rIns="0" tIns="0" bIns="0">
+            <a:spAutoFit/>
+          </a:bodyPr>
+          <a:lstStyle/>
+          <a:p>
+            <a:pPr algn="l">
+              <a:lnSpc>
+                <a:spcPct val="150000"/>
+              </a:lnSpc>
+            </a:pPr>
+            <a:r>
+              <a:rPr sz="1100" b="0">
                 <a:solidFill>
                   <a:srgbClr val="52514E"/>
                 </a:solidFill>
@@ -10945,20 +11369,20 @@
                 <a:ea typeface="맑은 고딕"/>
                 <a:cs typeface="맑은 고딕"/>
               </a:rPr>
-              <a:t>이듬해 같은 스크립트로 지수 변화를 이어 보실 때,</a:t>
-            </a:r>
-          </a:p>
-          <a:p>
-            <a:pPr algn="l">
-              <a:lnSpc>
-                <a:spcPct val="145000"/>
+              <a:t>지금 여건이 좋은 곳도 언젠가는 나이가 듭니다.</a:t>
+            </a:r>
+          </a:p>
+          <a:p>
+            <a:pPr algn="l">
+              <a:lnSpc>
+                <a:spcPct val="150000"/>
               </a:lnSpc>
               <a:spcBef>
                 <a:spcPts val="0"/>
               </a:spcBef>
             </a:pPr>
             <a:r>
-              <a:rPr sz="1080" b="0">
+              <a:rPr sz="1100" b="0">
                 <a:solidFill>
                   <a:srgbClr val="52514E"/>
                 </a:solidFill>
@@ -10966,14 +11390,14 @@
                 <a:ea typeface="맑은 고딕"/>
                 <a:cs typeface="맑은 고딕"/>
               </a:rPr>
-              <a:t>하신 사업이 수치로도 나아졌는지 확인하실 때.</a:t>
-            </a:r>
-          </a:p>
-        </p:txBody>
-      </p:sp>
-      <p:sp>
-        <p:nvSpPr>
-          <p:cNvPr id="25" name="Rounded Rectangle 24"/>
+              <a:t>미리 살펴보는 습관은 결국 천안시민 모두를 위한 준비라고 생각합니다.</a:t>
+            </a:r>
+          </a:p>
+        </p:txBody>
+      </p:sp>
+      <p:sp>
+        <p:nvSpPr>
+          <p:cNvPr id="21" name="Rounded Rectangle 20"/>
           <p:cNvSpPr/>
           <p:nvPr/>
         </p:nvSpPr>
@@ -11017,14 +11441,14 @@
       </p:sp>
       <p:sp>
         <p:nvSpPr>
-          <p:cNvPr id="26" name="TextBox 25"/>
-          <p:cNvSpPr txBox="1"/>
-          <p:nvPr/>
-        </p:nvSpPr>
-        <p:spPr>
-          <a:xfrm>
-            <a:off x="932688" y="5705856"/>
-            <a:ext cx="10515600" cy="502920"/>
+          <p:cNvPr id="22" name="TextBox 21"/>
+          <p:cNvSpPr txBox="1"/>
+          <p:nvPr/>
+        </p:nvSpPr>
+        <p:spPr>
+          <a:xfrm>
+            <a:off x="932688" y="5724144"/>
+            <a:ext cx="10515600" cy="457200"/>
           </a:xfrm>
           <a:prstGeom prst="rect">
             <a:avLst/>
@@ -11051,7 +11475,7 @@
                 <a:ea typeface="맑은 고딕"/>
                 <a:cs typeface="맑은 고딕"/>
               </a:rPr>
-              <a:t>쓰시는 방법 — 연 1회 공공데이터를 새로 받아 스크립트를 실행하시면 모든 자료가 다시 만들어집니다.</a:t>
+              <a:t>저희는 천안시 사정을 현장에서 겪어보지 못한 참가자입니다. 다만 공개된 데이터로 할 수 있는 만큼은 성실하게 살펴보았습니다.</a:t>
             </a:r>
           </a:p>
           <a:p>
@@ -11072,14 +11496,14 @@
                 <a:ea typeface="맑은 고딕"/>
                 <a:cs typeface="맑은 고딕"/>
               </a:rPr>
-              <a:t>별도 시스템이나 데이터 구매 없이, 담당자 한 분이 반나절이면 그 해 자료를 준비하실 수 있습니다.</a:t>
-            </a:r>
-          </a:p>
-        </p:txBody>
-      </p:sp>
-      <p:sp>
-        <p:nvSpPr>
-          <p:cNvPr id="27" name="TextBox 26"/>
+              <a:t>부족한 부분은 현장을 아시는 분들이 채워주시길 바라며, 이 자료가 그 논의의 출발점이 될 수 있다면 더 바랄 것이 없겠습니다.</a:t>
+            </a:r>
+          </a:p>
+        </p:txBody>
+      </p:sp>
+      <p:sp>
+        <p:nvSpPr>
+          <p:cNvPr id="23" name="TextBox 22"/>
           <p:cNvSpPr txBox="1"/>
           <p:nvPr/>
         </p:nvSpPr>
@@ -11120,7 +11544,7 @@
       </p:sp>
       <p:sp>
         <p:nvSpPr>
-          <p:cNvPr id="28" name="TextBox 27"/>
+          <p:cNvPr id="24" name="TextBox 23"/>
           <p:cNvSpPr txBox="1"/>
           <p:nvPr/>
         </p:nvSpPr>
@@ -11213,7 +11637,7 @@
                 <a:ea typeface="맑은 고딕"/>
                 <a:cs typeface="맑은 고딕"/>
               </a:rPr>
-              <a:t>IMPACT</a:t>
+              <a:t>APPLICATION</a:t>
             </a:r>
           </a:p>
         </p:txBody>
@@ -11254,7 +11678,7 @@
                 <a:ea typeface="맑은 고딕"/>
                 <a:cs typeface="맑은 고딕"/>
               </a:rPr>
-              <a:t>기대효과와 실행 로드맵</a:t>
+              <a:t>실무에 이렇게 보탬이 되면 좋겠습니다</a:t>
             </a:r>
           </a:p>
         </p:txBody>
@@ -11267,49 +11691,95 @@
         </p:nvSpPr>
         <p:spPr>
           <a:xfrm>
-            <a:off x="658368" y="2084831"/>
-            <a:ext cx="5486400" cy="274320"/>
-          </a:xfrm>
-          <a:prstGeom prst="rect">
-            <a:avLst/>
-          </a:prstGeom>
-          <a:noFill/>
-        </p:spPr>
-        <p:txBody>
-          <a:bodyPr wrap="square" lIns="0" rIns="0" tIns="0" bIns="0">
-            <a:spAutoFit/>
-          </a:bodyPr>
-          <a:lstStyle/>
-          <a:p>
-            <a:pPr algn="l">
-              <a:lnSpc>
-                <a:spcPct val="135000"/>
-              </a:lnSpc>
-            </a:pPr>
-            <a:r>
-              <a:rPr sz="1450" b="1">
-                <a:solidFill>
-                  <a:srgbClr val="12151A"/>
-                </a:solidFill>
-                <a:latin typeface="맑은 고딕"/>
-                <a:ea typeface="맑은 고딕"/>
-                <a:cs typeface="맑은 고딕"/>
-              </a:rPr>
-              <a:t>기대효과</a:t>
-            </a:r>
-          </a:p>
-        </p:txBody>
-      </p:sp>
-      <p:sp>
-        <p:nvSpPr>
-          <p:cNvPr id="5" name="Rectangle 4"/>
+            <a:off x="658368" y="1517904"/>
+            <a:ext cx="10874959" cy="411480"/>
+          </a:xfrm>
+          <a:prstGeom prst="rect">
+            <a:avLst/>
+          </a:prstGeom>
+          <a:noFill/>
+        </p:spPr>
+        <p:txBody>
+          <a:bodyPr wrap="square" lIns="0" rIns="0" tIns="0" bIns="0">
+            <a:spAutoFit/>
+          </a:bodyPr>
+          <a:lstStyle/>
+          <a:p>
+            <a:pPr algn="l">
+              <a:lnSpc>
+                <a:spcPct val="145000"/>
+              </a:lnSpc>
+            </a:pPr>
+            <a:r>
+              <a:rPr sz="1350" b="0">
+                <a:solidFill>
+                  <a:srgbClr val="52514E"/>
+                </a:solidFill>
+                <a:latin typeface="맑은 고딕"/>
+                <a:ea typeface="맑은 고딕"/>
+                <a:cs typeface="맑은 고딕"/>
+              </a:rPr>
+              <a:t>따로 시간을 내어 다뤄야 하는 연구물이 아니라, 하시던 업무 곁에 놓고 참고하실 수 있는 자료로 준비했습니다.</a:t>
+            </a:r>
+          </a:p>
+        </p:txBody>
+      </p:sp>
+      <p:sp>
+        <p:nvSpPr>
+          <p:cNvPr id="5" name="Rounded Rectangle 4"/>
           <p:cNvSpPr/>
           <p:nvPr/>
         </p:nvSpPr>
         <p:spPr>
           <a:xfrm>
-            <a:off x="658368" y="2468880"/>
-            <a:ext cx="68580" cy="566928"/>
+            <a:off x="658368" y="2286000"/>
+            <a:ext cx="5257800" cy="1371600"/>
+          </a:xfrm>
+          <a:prstGeom prst="roundRect">
+            <a:avLst>
+              <a:gd name="adj" fmla="val 6000"/>
+            </a:avLst>
+          </a:prstGeom>
+          <a:solidFill>
+            <a:srgbClr val="FFFFFF"/>
+          </a:solidFill>
+          <a:ln w="12700">
+            <a:solidFill>
+              <a:srgbClr val="E4E7EC"/>
+            </a:solidFill>
+          </a:ln>
+          <a:effectLst/>
+        </p:spPr>
+        <p:style>
+          <a:lnRef idx="1">
+            <a:schemeClr val="accent1"/>
+          </a:lnRef>
+          <a:fillRef idx="3">
+            <a:schemeClr val="accent1"/>
+          </a:fillRef>
+          <a:effectRef idx="2">
+            <a:schemeClr val="accent1"/>
+          </a:effectRef>
+          <a:fontRef idx="minor">
+            <a:schemeClr val="lt1"/>
+          </a:fontRef>
+        </p:style>
+        <p:txBody>
+          <a:bodyPr rtlCol="0" anchor="ctr"/>
+          <a:lstStyle/>
+          <a:p/>
+        </p:txBody>
+      </p:sp>
+      <p:sp>
+        <p:nvSpPr>
+          <p:cNvPr id="6" name="Rectangle 5"/>
+          <p:cNvSpPr/>
+          <p:nvPr/>
+        </p:nvSpPr>
+        <p:spPr>
+          <a:xfrm>
+            <a:off x="658368" y="2286000"/>
+            <a:ext cx="68580" cy="1371600"/>
           </a:xfrm>
           <a:prstGeom prst="rect">
             <a:avLst/>
@@ -11344,14 +11814,14 @@
       </p:sp>
       <p:sp>
         <p:nvSpPr>
-          <p:cNvPr id="6" name="TextBox 5"/>
-          <p:cNvSpPr txBox="1"/>
-          <p:nvPr/>
-        </p:nvSpPr>
-        <p:spPr>
-          <a:xfrm>
-            <a:off x="877824" y="2468880"/>
-            <a:ext cx="5120640" cy="256032"/>
+          <p:cNvPr id="7" name="TextBox 6"/>
+          <p:cNvSpPr txBox="1"/>
+          <p:nvPr/>
+        </p:nvSpPr>
+        <p:spPr>
+          <a:xfrm>
+            <a:off x="914400" y="2450592"/>
+            <a:ext cx="2194560" cy="256032"/>
           </a:xfrm>
           <a:prstGeom prst="rect">
             <a:avLst/>
@@ -11372,46 +11842,87 @@
             <a:r>
               <a:rPr sz="1250" b="1">
                 <a:solidFill>
+                  <a:srgbClr val="2A78D6"/>
+                </a:solidFill>
+                <a:latin typeface="맑은 고딕"/>
+                <a:ea typeface="맑은 고딕"/>
+                <a:cs typeface="맑은 고딕"/>
+              </a:rPr>
+              <a:t>도시재생 담당</a:t>
+            </a:r>
+          </a:p>
+        </p:txBody>
+      </p:sp>
+      <p:sp>
+        <p:nvSpPr>
+          <p:cNvPr id="8" name="TextBox 7"/>
+          <p:cNvSpPr txBox="1"/>
+          <p:nvPr/>
+        </p:nvSpPr>
+        <p:spPr>
+          <a:xfrm>
+            <a:off x="914400" y="2743200"/>
+            <a:ext cx="4663440" cy="256032"/>
+          </a:xfrm>
+          <a:prstGeom prst="rect">
+            <a:avLst/>
+          </a:prstGeom>
+          <a:noFill/>
+        </p:spPr>
+        <p:txBody>
+          <a:bodyPr wrap="square" lIns="0" rIns="0" tIns="0" bIns="0">
+            <a:spAutoFit/>
+          </a:bodyPr>
+          <a:lstStyle/>
+          <a:p>
+            <a:pPr algn="l">
+              <a:lnSpc>
+                <a:spcPct val="135000"/>
+              </a:lnSpc>
+            </a:pPr>
+            <a:r>
+              <a:rPr sz="1350" b="1">
+                <a:solidFill>
                   <a:srgbClr val="12151A"/>
                 </a:solidFill>
                 <a:latin typeface="맑은 고딕"/>
                 <a:ea typeface="맑은 고딕"/>
                 <a:cs typeface="맑은 고딕"/>
               </a:rPr>
-              <a:t>시민께 닿는 범위</a:t>
-            </a:r>
-          </a:p>
-        </p:txBody>
-      </p:sp>
-      <p:sp>
-        <p:nvSpPr>
-          <p:cNvPr id="7" name="TextBox 6"/>
-          <p:cNvSpPr txBox="1"/>
-          <p:nvPr/>
-        </p:nvSpPr>
-        <p:spPr>
-          <a:xfrm>
-            <a:off x="877824" y="2743200"/>
-            <a:ext cx="5120640" cy="365760"/>
-          </a:xfrm>
-          <a:prstGeom prst="rect">
-            <a:avLst/>
-          </a:prstGeom>
-          <a:noFill/>
-        </p:spPr>
-        <p:txBody>
-          <a:bodyPr wrap="square" lIns="0" rIns="0" tIns="0" bIns="0">
-            <a:spAutoFit/>
-          </a:bodyPr>
-          <a:lstStyle/>
-          <a:p>
-            <a:pPr algn="l">
-              <a:lnSpc>
-                <a:spcPct val="140000"/>
-              </a:lnSpc>
-            </a:pPr>
-            <a:r>
-              <a:rPr sz="1100" b="0">
+              <a:t>사업지 검토 · 공모 준비</a:t>
+            </a:r>
+          </a:p>
+        </p:txBody>
+      </p:sp>
+      <p:sp>
+        <p:nvSpPr>
+          <p:cNvPr id="9" name="TextBox 8"/>
+          <p:cNvSpPr txBox="1"/>
+          <p:nvPr/>
+        </p:nvSpPr>
+        <p:spPr>
+          <a:xfrm>
+            <a:off x="914400" y="3054096"/>
+            <a:ext cx="4663440" cy="548640"/>
+          </a:xfrm>
+          <a:prstGeom prst="rect">
+            <a:avLst/>
+          </a:prstGeom>
+          <a:noFill/>
+        </p:spPr>
+        <p:txBody>
+          <a:bodyPr wrap="square" lIns="0" rIns="0" tIns="0" bIns="0">
+            <a:spAutoFit/>
+          </a:bodyPr>
+          <a:lstStyle/>
+          <a:p>
+            <a:pPr algn="l">
+              <a:lnSpc>
+                <a:spcPct val="145000"/>
+              </a:lnSpc>
+            </a:pPr>
+            <a:r>
+              <a:rPr sz="1080" b="0">
                 <a:solidFill>
                   <a:srgbClr val="52514E"/>
                 </a:solidFill>
@@ -11419,30 +11930,55 @@
                 <a:ea typeface="맑은 고딕"/>
                 <a:cs typeface="맑은 고딕"/>
               </a:rPr>
-              <a:t>효과가 큰 곳부터 살펴보면, 같은 예산으로도 더 많은 분께 닿을 수 있습니다</a:t>
-            </a:r>
-          </a:p>
-        </p:txBody>
-      </p:sp>
-      <p:sp>
-        <p:nvSpPr>
-          <p:cNvPr id="8" name="Rectangle 7"/>
+              <a:t>지수가 낮은 곳과 3년 뒤 살펴볼 곳을 겹쳐 후보를 좁히실 때,</a:t>
+            </a:r>
+          </a:p>
+          <a:p>
+            <a:pPr algn="l">
+              <a:lnSpc>
+                <a:spcPct val="145000"/>
+              </a:lnSpc>
+              <a:spcBef>
+                <a:spcPts val="0"/>
+              </a:spcBef>
+            </a:pPr>
+            <a:r>
+              <a:rPr sz="1080" b="0">
+                <a:solidFill>
+                  <a:srgbClr val="52514E"/>
+                </a:solidFill>
+                <a:latin typeface="맑은 고딕"/>
+                <a:ea typeface="맑은 고딕"/>
+                <a:cs typeface="맑은 고딕"/>
+              </a:rPr>
+              <a:t>공모의 '쇠퇴도 진단' 항목에 근거 수치로.</a:t>
+            </a:r>
+          </a:p>
+        </p:txBody>
+      </p:sp>
+      <p:sp>
+        <p:nvSpPr>
+          <p:cNvPr id="10" name="Rounded Rectangle 9"/>
           <p:cNvSpPr/>
           <p:nvPr/>
         </p:nvSpPr>
         <p:spPr>
           <a:xfrm>
-            <a:off x="658368" y="3218688"/>
-            <a:ext cx="68580" cy="566928"/>
-          </a:xfrm>
-          <a:prstGeom prst="rect">
-            <a:avLst/>
+            <a:off x="6236207" y="2286000"/>
+            <a:ext cx="5257800" cy="1371600"/>
+          </a:xfrm>
+          <a:prstGeom prst="roundRect">
+            <a:avLst>
+              <a:gd name="adj" fmla="val 6000"/>
+            </a:avLst>
           </a:prstGeom>
           <a:solidFill>
-            <a:srgbClr val="2A78D6"/>
+            <a:srgbClr val="FFFFFF"/>
           </a:solidFill>
-          <a:ln>
-            <a:noFill/>
+          <a:ln w="12700">
+            <a:solidFill>
+              <a:srgbClr val="E4E7EC"/>
+            </a:solidFill>
           </a:ln>
           <a:effectLst/>
         </p:spPr>
@@ -11468,385 +12004,14 @@
       </p:sp>
       <p:sp>
         <p:nvSpPr>
-          <p:cNvPr id="9" name="TextBox 8"/>
-          <p:cNvSpPr txBox="1"/>
-          <p:nvPr/>
-        </p:nvSpPr>
-        <p:spPr>
-          <a:xfrm>
-            <a:off x="877824" y="3218688"/>
-            <a:ext cx="5120640" cy="256032"/>
-          </a:xfrm>
-          <a:prstGeom prst="rect">
-            <a:avLst/>
-          </a:prstGeom>
-          <a:noFill/>
-        </p:spPr>
-        <p:txBody>
-          <a:bodyPr wrap="square" lIns="0" rIns="0" tIns="0" bIns="0">
-            <a:spAutoFit/>
-          </a:bodyPr>
-          <a:lstStyle/>
-          <a:p>
-            <a:pPr algn="l">
-              <a:lnSpc>
-                <a:spcPct val="135000"/>
-              </a:lnSpc>
-            </a:pPr>
-            <a:r>
-              <a:rPr sz="1250" b="1">
-                <a:solidFill>
-                  <a:srgbClr val="12151A"/>
-                </a:solidFill>
-                <a:latin typeface="맑은 고딕"/>
-                <a:ea typeface="맑은 고딕"/>
-                <a:cs typeface="맑은 고딕"/>
-              </a:rPr>
-              <a:t>살펴보는 시점</a:t>
-            </a:r>
-          </a:p>
-        </p:txBody>
-      </p:sp>
-      <p:sp>
-        <p:nvSpPr>
-          <p:cNvPr id="10" name="TextBox 9"/>
-          <p:cNvSpPr txBox="1"/>
-          <p:nvPr/>
-        </p:nvSpPr>
-        <p:spPr>
-          <a:xfrm>
-            <a:off x="877824" y="3493008"/>
-            <a:ext cx="5120640" cy="365760"/>
-          </a:xfrm>
-          <a:prstGeom prst="rect">
-            <a:avLst/>
-          </a:prstGeom>
-          <a:noFill/>
-        </p:spPr>
-        <p:txBody>
-          <a:bodyPr wrap="square" lIns="0" rIns="0" tIns="0" bIns="0">
-            <a:spAutoFit/>
-          </a:bodyPr>
-          <a:lstStyle/>
-          <a:p>
-            <a:pPr algn="l">
-              <a:lnSpc>
-                <a:spcPct val="140000"/>
-              </a:lnSpc>
-            </a:pPr>
-            <a:r>
-              <a:rPr sz="1100" b="0">
-                <a:solidFill>
-                  <a:srgbClr val="52514E"/>
-                </a:solidFill>
-                <a:latin typeface="맑은 고딕"/>
-                <a:ea typeface="맑은 고딕"/>
-                <a:cs typeface="맑은 고딕"/>
-              </a:rPr>
-              <a:t>어려워진 뒤가 아니라, 3년 앞을 미리 짚어볼 수 있습니다</a:t>
-            </a:r>
-          </a:p>
-        </p:txBody>
-      </p:sp>
-      <p:sp>
-        <p:nvSpPr>
           <p:cNvPr id="11" name="Rectangle 10"/>
           <p:cNvSpPr/>
           <p:nvPr/>
         </p:nvSpPr>
         <p:spPr>
           <a:xfrm>
-            <a:off x="658368" y="3968496"/>
-            <a:ext cx="68580" cy="566928"/>
-          </a:xfrm>
-          <a:prstGeom prst="rect">
-            <a:avLst/>
-          </a:prstGeom>
-          <a:solidFill>
-            <a:srgbClr val="2A78D6"/>
-          </a:solidFill>
-          <a:ln>
-            <a:noFill/>
-          </a:ln>
-          <a:effectLst/>
-        </p:spPr>
-        <p:style>
-          <a:lnRef idx="1">
-            <a:schemeClr val="accent1"/>
-          </a:lnRef>
-          <a:fillRef idx="3">
-            <a:schemeClr val="accent1"/>
-          </a:fillRef>
-          <a:effectRef idx="2">
-            <a:schemeClr val="accent1"/>
-          </a:effectRef>
-          <a:fontRef idx="minor">
-            <a:schemeClr val="lt1"/>
-          </a:fontRef>
-        </p:style>
-        <p:txBody>
-          <a:bodyPr rtlCol="0" anchor="ctr"/>
-          <a:lstStyle/>
-          <a:p/>
-        </p:txBody>
-      </p:sp>
-      <p:sp>
-        <p:nvSpPr>
-          <p:cNvPr id="12" name="TextBox 11"/>
-          <p:cNvSpPr txBox="1"/>
-          <p:nvPr/>
-        </p:nvSpPr>
-        <p:spPr>
-          <a:xfrm>
-            <a:off x="877824" y="3968496"/>
-            <a:ext cx="5120640" cy="256032"/>
-          </a:xfrm>
-          <a:prstGeom prst="rect">
-            <a:avLst/>
-          </a:prstGeom>
-          <a:noFill/>
-        </p:spPr>
-        <p:txBody>
-          <a:bodyPr wrap="square" lIns="0" rIns="0" tIns="0" bIns="0">
-            <a:spAutoFit/>
-          </a:bodyPr>
-          <a:lstStyle/>
-          <a:p>
-            <a:pPr algn="l">
-              <a:lnSpc>
-                <a:spcPct val="135000"/>
-              </a:lnSpc>
-            </a:pPr>
-            <a:r>
-              <a:rPr sz="1250" b="1">
-                <a:solidFill>
-                  <a:srgbClr val="12151A"/>
-                </a:solidFill>
-                <a:latin typeface="맑은 고딕"/>
-                <a:ea typeface="맑은 고딕"/>
-                <a:cs typeface="맑은 고딕"/>
-              </a:rPr>
-              <a:t>설명하실 때</a:t>
-            </a:r>
-          </a:p>
-        </p:txBody>
-      </p:sp>
-      <p:sp>
-        <p:nvSpPr>
-          <p:cNvPr id="13" name="TextBox 12"/>
-          <p:cNvSpPr txBox="1"/>
-          <p:nvPr/>
-        </p:nvSpPr>
-        <p:spPr>
-          <a:xfrm>
-            <a:off x="877824" y="4242816"/>
-            <a:ext cx="5120640" cy="365760"/>
-          </a:xfrm>
-          <a:prstGeom prst="rect">
-            <a:avLst/>
-          </a:prstGeom>
-          <a:noFill/>
-        </p:spPr>
-        <p:txBody>
-          <a:bodyPr wrap="square" lIns="0" rIns="0" tIns="0" bIns="0">
-            <a:spAutoFit/>
-          </a:bodyPr>
-          <a:lstStyle/>
-          <a:p>
-            <a:pPr algn="l">
-              <a:lnSpc>
-                <a:spcPct val="140000"/>
-              </a:lnSpc>
-            </a:pPr>
-            <a:r>
-              <a:rPr sz="1100" b="0">
-                <a:solidFill>
-                  <a:srgbClr val="52514E"/>
-                </a:solidFill>
-                <a:latin typeface="맑은 고딕"/>
-                <a:ea typeface="맑은 고딕"/>
-                <a:cs typeface="맑은 고딕"/>
-              </a:rPr>
-              <a:t>판단 근거를 항목별 수치로 정리해 드려 설명 부담을 조금 덜어드립니다</a:t>
-            </a:r>
-          </a:p>
-        </p:txBody>
-      </p:sp>
-      <p:sp>
-        <p:nvSpPr>
-          <p:cNvPr id="14" name="Rectangle 13"/>
-          <p:cNvSpPr/>
-          <p:nvPr/>
-        </p:nvSpPr>
-        <p:spPr>
-          <a:xfrm>
-            <a:off x="658368" y="4718304"/>
-            <a:ext cx="68580" cy="566928"/>
-          </a:xfrm>
-          <a:prstGeom prst="rect">
-            <a:avLst/>
-          </a:prstGeom>
-          <a:solidFill>
-            <a:srgbClr val="2A78D6"/>
-          </a:solidFill>
-          <a:ln>
-            <a:noFill/>
-          </a:ln>
-          <a:effectLst/>
-        </p:spPr>
-        <p:style>
-          <a:lnRef idx="1">
-            <a:schemeClr val="accent1"/>
-          </a:lnRef>
-          <a:fillRef idx="3">
-            <a:schemeClr val="accent1"/>
-          </a:fillRef>
-          <a:effectRef idx="2">
-            <a:schemeClr val="accent1"/>
-          </a:effectRef>
-          <a:fontRef idx="minor">
-            <a:schemeClr val="lt1"/>
-          </a:fontRef>
-        </p:style>
-        <p:txBody>
-          <a:bodyPr rtlCol="0" anchor="ctr"/>
-          <a:lstStyle/>
-          <a:p/>
-        </p:txBody>
-      </p:sp>
-      <p:sp>
-        <p:nvSpPr>
-          <p:cNvPr id="15" name="TextBox 14"/>
-          <p:cNvSpPr txBox="1"/>
-          <p:nvPr/>
-        </p:nvSpPr>
-        <p:spPr>
-          <a:xfrm>
-            <a:off x="877824" y="4718304"/>
-            <a:ext cx="5120640" cy="256032"/>
-          </a:xfrm>
-          <a:prstGeom prst="rect">
-            <a:avLst/>
-          </a:prstGeom>
-          <a:noFill/>
-        </p:spPr>
-        <p:txBody>
-          <a:bodyPr wrap="square" lIns="0" rIns="0" tIns="0" bIns="0">
-            <a:spAutoFit/>
-          </a:bodyPr>
-          <a:lstStyle/>
-          <a:p>
-            <a:pPr algn="l">
-              <a:lnSpc>
-                <a:spcPct val="135000"/>
-              </a:lnSpc>
-            </a:pPr>
-            <a:r>
-              <a:rPr sz="1250" b="1">
-                <a:solidFill>
-                  <a:srgbClr val="12151A"/>
-                </a:solidFill>
-                <a:latin typeface="맑은 고딕"/>
-                <a:ea typeface="맑은 고딕"/>
-                <a:cs typeface="맑은 고딕"/>
-              </a:rPr>
-              <a:t>드는 비용</a:t>
-            </a:r>
-          </a:p>
-        </p:txBody>
-      </p:sp>
-      <p:sp>
-        <p:nvSpPr>
-          <p:cNvPr id="16" name="TextBox 15"/>
-          <p:cNvSpPr txBox="1"/>
-          <p:nvPr/>
-        </p:nvSpPr>
-        <p:spPr>
-          <a:xfrm>
-            <a:off x="877824" y="4992624"/>
-            <a:ext cx="5120640" cy="365760"/>
-          </a:xfrm>
-          <a:prstGeom prst="rect">
-            <a:avLst/>
-          </a:prstGeom>
-          <a:noFill/>
-        </p:spPr>
-        <p:txBody>
-          <a:bodyPr wrap="square" lIns="0" rIns="0" tIns="0" bIns="0">
-            <a:spAutoFit/>
-          </a:bodyPr>
-          <a:lstStyle/>
-          <a:p>
-            <a:pPr algn="l">
-              <a:lnSpc>
-                <a:spcPct val="140000"/>
-              </a:lnSpc>
-            </a:pPr>
-            <a:r>
-              <a:rPr sz="1100" b="0">
-                <a:solidFill>
-                  <a:srgbClr val="52514E"/>
-                </a:solidFill>
-                <a:latin typeface="맑은 고딕"/>
-                <a:ea typeface="맑은 고딕"/>
-                <a:cs typeface="맑은 고딕"/>
-              </a:rPr>
-              <a:t>데이터 구매나 시스템 없이, 스크립트 재실행만으로 매년 갱신됩니다</a:t>
-            </a:r>
-          </a:p>
-        </p:txBody>
-      </p:sp>
-      <p:sp>
-        <p:nvSpPr>
-          <p:cNvPr id="17" name="TextBox 16"/>
-          <p:cNvSpPr txBox="1"/>
-          <p:nvPr/>
-        </p:nvSpPr>
-        <p:spPr>
-          <a:xfrm>
-            <a:off x="6510528" y="2084831"/>
-            <a:ext cx="5029200" cy="274320"/>
-          </a:xfrm>
-          <a:prstGeom prst="rect">
-            <a:avLst/>
-          </a:prstGeom>
-          <a:noFill/>
-        </p:spPr>
-        <p:txBody>
-          <a:bodyPr wrap="square" lIns="0" rIns="0" tIns="0" bIns="0">
-            <a:spAutoFit/>
-          </a:bodyPr>
-          <a:lstStyle/>
-          <a:p>
-            <a:pPr algn="l">
-              <a:lnSpc>
-                <a:spcPct val="135000"/>
-              </a:lnSpc>
-            </a:pPr>
-            <a:r>
-              <a:rPr sz="1450" b="1">
-                <a:solidFill>
-                  <a:srgbClr val="12151A"/>
-                </a:solidFill>
-                <a:latin typeface="맑은 고딕"/>
-                <a:ea typeface="맑은 고딕"/>
-                <a:cs typeface="맑은 고딕"/>
-              </a:rPr>
-              <a:t>실행 로드맵</a:t>
-            </a:r>
-          </a:p>
-        </p:txBody>
-      </p:sp>
-      <p:sp>
-        <p:nvSpPr>
-          <p:cNvPr id="18" name="Rectangle 17"/>
-          <p:cNvSpPr/>
-          <p:nvPr/>
-        </p:nvSpPr>
-        <p:spPr>
-          <a:xfrm>
-            <a:off x="6510528" y="2468880"/>
-            <a:ext cx="68580" cy="566928"/>
+            <a:off x="6236207" y="2286000"/>
+            <a:ext cx="68580" cy="1371600"/>
           </a:xfrm>
           <a:prstGeom prst="rect">
             <a:avLst/>
@@ -11881,14 +12046,14 @@
       </p:sp>
       <p:sp>
         <p:nvSpPr>
-          <p:cNvPr id="19" name="TextBox 18"/>
-          <p:cNvSpPr txBox="1"/>
-          <p:nvPr/>
-        </p:nvSpPr>
-        <p:spPr>
-          <a:xfrm>
-            <a:off x="6729983" y="2468880"/>
-            <a:ext cx="4754880" cy="256032"/>
+          <p:cNvPr id="12" name="TextBox 11"/>
+          <p:cNvSpPr txBox="1"/>
+          <p:nvPr/>
+        </p:nvSpPr>
+        <p:spPr>
+          <a:xfrm>
+            <a:off x="6492240" y="2450592"/>
+            <a:ext cx="2194560" cy="256032"/>
           </a:xfrm>
           <a:prstGeom prst="rect">
             <a:avLst/>
@@ -11915,40 +12080,81 @@
                 <a:ea typeface="맑은 고딕"/>
                 <a:cs typeface="맑은 고딕"/>
               </a:rPr>
-              <a:t>1단계 · 즉시</a:t>
-            </a:r>
-          </a:p>
-        </p:txBody>
-      </p:sp>
-      <p:sp>
-        <p:nvSpPr>
-          <p:cNvPr id="20" name="TextBox 19"/>
-          <p:cNvSpPr txBox="1"/>
-          <p:nvPr/>
-        </p:nvSpPr>
-        <p:spPr>
-          <a:xfrm>
-            <a:off x="6729983" y="2743200"/>
-            <a:ext cx="4754880" cy="365760"/>
-          </a:xfrm>
-          <a:prstGeom prst="rect">
-            <a:avLst/>
-          </a:prstGeom>
-          <a:noFill/>
-        </p:spPr>
-        <p:txBody>
-          <a:bodyPr wrap="square" lIns="0" rIns="0" tIns="0" bIns="0">
-            <a:spAutoFit/>
-          </a:bodyPr>
-          <a:lstStyle/>
-          <a:p>
-            <a:pPr algn="l">
-              <a:lnSpc>
-                <a:spcPct val="140000"/>
-              </a:lnSpc>
-            </a:pPr>
-            <a:r>
-              <a:rPr sz="1100" b="0">
+              <a:t>복지·보건 담당</a:t>
+            </a:r>
+          </a:p>
+        </p:txBody>
+      </p:sp>
+      <p:sp>
+        <p:nvSpPr>
+          <p:cNvPr id="13" name="TextBox 12"/>
+          <p:cNvSpPr txBox="1"/>
+          <p:nvPr/>
+        </p:nvSpPr>
+        <p:spPr>
+          <a:xfrm>
+            <a:off x="6492240" y="2743200"/>
+            <a:ext cx="4663440" cy="256032"/>
+          </a:xfrm>
+          <a:prstGeom prst="rect">
+            <a:avLst/>
+          </a:prstGeom>
+          <a:noFill/>
+        </p:spPr>
+        <p:txBody>
+          <a:bodyPr wrap="square" lIns="0" rIns="0" tIns="0" bIns="0">
+            <a:spAutoFit/>
+          </a:bodyPr>
+          <a:lstStyle/>
+          <a:p>
+            <a:pPr algn="l">
+              <a:lnSpc>
+                <a:spcPct val="135000"/>
+              </a:lnSpc>
+            </a:pPr>
+            <a:r>
+              <a:rPr sz="1350" b="1">
+                <a:solidFill>
+                  <a:srgbClr val="12151A"/>
+                </a:solidFill>
+                <a:latin typeface="맑은 고딕"/>
+                <a:ea typeface="맑은 고딕"/>
+                <a:cs typeface="맑은 고딕"/>
+              </a:rPr>
+              <a:t>생활시설 위치 검토</a:t>
+            </a:r>
+          </a:p>
+        </p:txBody>
+      </p:sp>
+      <p:sp>
+        <p:nvSpPr>
+          <p:cNvPr id="14" name="TextBox 13"/>
+          <p:cNvSpPr txBox="1"/>
+          <p:nvPr/>
+        </p:nvSpPr>
+        <p:spPr>
+          <a:xfrm>
+            <a:off x="6492240" y="3054096"/>
+            <a:ext cx="4663440" cy="548640"/>
+          </a:xfrm>
+          <a:prstGeom prst="rect">
+            <a:avLst/>
+          </a:prstGeom>
+          <a:noFill/>
+        </p:spPr>
+        <p:txBody>
+          <a:bodyPr wrap="square" lIns="0" rIns="0" tIns="0" bIns="0">
+            <a:spAutoFit/>
+          </a:bodyPr>
+          <a:lstStyle/>
+          <a:p>
+            <a:pPr algn="l">
+              <a:lnSpc>
+                <a:spcPct val="145000"/>
+              </a:lnSpc>
+            </a:pPr>
+            <a:r>
+              <a:rPr sz="1080" b="0">
                 <a:solidFill>
                   <a:srgbClr val="52514E"/>
                 </a:solidFill>
@@ -11956,30 +12162,55 @@
                 <a:ea typeface="맑은 고딕"/>
                 <a:cs typeface="맑은 고딕"/>
               </a:rPr>
-              <a:t>본 스크립트로 천안시 25개 생활권 기준선 진단 확정</a:t>
-            </a:r>
-          </a:p>
-        </p:txBody>
-      </p:sp>
-      <p:sp>
-        <p:nvSpPr>
-          <p:cNvPr id="21" name="Rectangle 20"/>
+              <a:t>우선순위표의 좌표를 검토 후보 중 하나로,</a:t>
+            </a:r>
+          </a:p>
+          <a:p>
+            <a:pPr algn="l">
+              <a:lnSpc>
+                <a:spcPct val="145000"/>
+              </a:lnSpc>
+              <a:spcBef>
+                <a:spcPts val="0"/>
+              </a:spcBef>
+            </a:pPr>
+            <a:r>
+              <a:rPr sz="1080" b="0">
+                <a:solidFill>
+                  <a:srgbClr val="52514E"/>
+                </a:solidFill>
+                <a:latin typeface="맑은 고딕"/>
+                <a:ea typeface="맑은 고딕"/>
+                <a:cs typeface="맑은 고딕"/>
+              </a:rPr>
+              <a:t>왜 그 동네인지 설명하실 때 항목별 근거로.</a:t>
+            </a:r>
+          </a:p>
+        </p:txBody>
+      </p:sp>
+      <p:sp>
+        <p:nvSpPr>
+          <p:cNvPr id="15" name="Rounded Rectangle 14"/>
           <p:cNvSpPr/>
           <p:nvPr/>
         </p:nvSpPr>
         <p:spPr>
           <a:xfrm>
-            <a:off x="6510528" y="3218688"/>
-            <a:ext cx="68580" cy="566928"/>
-          </a:xfrm>
-          <a:prstGeom prst="rect">
-            <a:avLst/>
+            <a:off x="658368" y="3858768"/>
+            <a:ext cx="5257800" cy="1371600"/>
+          </a:xfrm>
+          <a:prstGeom prst="roundRect">
+            <a:avLst>
+              <a:gd name="adj" fmla="val 6000"/>
+            </a:avLst>
           </a:prstGeom>
           <a:solidFill>
-            <a:srgbClr val="2A78D6"/>
+            <a:srgbClr val="FFFFFF"/>
           </a:solidFill>
-          <a:ln>
-            <a:noFill/>
+          <a:ln w="12700">
+            <a:solidFill>
+              <a:srgbClr val="E4E7EC"/>
+            </a:solidFill>
           </a:ln>
           <a:effectLst/>
         </p:spPr>
@@ -12005,96 +12236,14 @@
       </p:sp>
       <p:sp>
         <p:nvSpPr>
-          <p:cNvPr id="22" name="TextBox 21"/>
-          <p:cNvSpPr txBox="1"/>
-          <p:nvPr/>
-        </p:nvSpPr>
-        <p:spPr>
-          <a:xfrm>
-            <a:off x="6729983" y="3218688"/>
-            <a:ext cx="4754880" cy="256032"/>
-          </a:xfrm>
-          <a:prstGeom prst="rect">
-            <a:avLst/>
-          </a:prstGeom>
-          <a:noFill/>
-        </p:spPr>
-        <p:txBody>
-          <a:bodyPr wrap="square" lIns="0" rIns="0" tIns="0" bIns="0">
-            <a:spAutoFit/>
-          </a:bodyPr>
-          <a:lstStyle/>
-          <a:p>
-            <a:pPr algn="l">
-              <a:lnSpc>
-                <a:spcPct val="135000"/>
-              </a:lnSpc>
-            </a:pPr>
-            <a:r>
-              <a:rPr sz="1250" b="1">
-                <a:solidFill>
-                  <a:srgbClr val="2A78D6"/>
-                </a:solidFill>
-                <a:latin typeface="맑은 고딕"/>
-                <a:ea typeface="맑은 고딕"/>
-                <a:cs typeface="맑은 고딕"/>
-              </a:rPr>
-              <a:t>2단계 · 3개월</a:t>
-            </a:r>
-          </a:p>
-        </p:txBody>
-      </p:sp>
-      <p:sp>
-        <p:nvSpPr>
-          <p:cNvPr id="23" name="TextBox 22"/>
-          <p:cNvSpPr txBox="1"/>
-          <p:nvPr/>
-        </p:nvSpPr>
-        <p:spPr>
-          <a:xfrm>
-            <a:off x="6729983" y="3493008"/>
-            <a:ext cx="4754880" cy="365760"/>
-          </a:xfrm>
-          <a:prstGeom prst="rect">
-            <a:avLst/>
-          </a:prstGeom>
-          <a:noFill/>
-        </p:spPr>
-        <p:txBody>
-          <a:bodyPr wrap="square" lIns="0" rIns="0" tIns="0" bIns="0">
-            <a:spAutoFit/>
-          </a:bodyPr>
-          <a:lstStyle/>
-          <a:p>
-            <a:pPr algn="l">
-              <a:lnSpc>
-                <a:spcPct val="140000"/>
-              </a:lnSpc>
-            </a:pPr>
-            <a:r>
-              <a:rPr sz="1100" b="0">
-                <a:solidFill>
-                  <a:srgbClr val="52514E"/>
-                </a:solidFill>
-                <a:latin typeface="맑은 고딕"/>
-                <a:ea typeface="맑은 고딕"/>
-                <a:cs typeface="맑은 고딕"/>
-              </a:rPr>
-              <a:t>천안시 내부 행정데이터(인허가 원장·건축물대장·복지수급) 연계로 지표 정밀화</a:t>
-            </a:r>
-          </a:p>
-        </p:txBody>
-      </p:sp>
-      <p:sp>
-        <p:nvSpPr>
-          <p:cNvPr id="24" name="Rectangle 23"/>
+          <p:cNvPr id="16" name="Rectangle 15"/>
           <p:cNvSpPr/>
           <p:nvPr/>
         </p:nvSpPr>
         <p:spPr>
           <a:xfrm>
-            <a:off x="6510528" y="3968496"/>
-            <a:ext cx="68580" cy="566928"/>
+            <a:off x="658368" y="3858768"/>
+            <a:ext cx="68580" cy="1371600"/>
           </a:xfrm>
           <a:prstGeom prst="rect">
             <a:avLst/>
@@ -12129,14 +12278,14 @@
       </p:sp>
       <p:sp>
         <p:nvSpPr>
-          <p:cNvPr id="25" name="TextBox 24"/>
-          <p:cNvSpPr txBox="1"/>
-          <p:nvPr/>
-        </p:nvSpPr>
-        <p:spPr>
-          <a:xfrm>
-            <a:off x="6729983" y="3968496"/>
-            <a:ext cx="4754880" cy="256032"/>
+          <p:cNvPr id="17" name="TextBox 16"/>
+          <p:cNvSpPr txBox="1"/>
+          <p:nvPr/>
+        </p:nvSpPr>
+        <p:spPr>
+          <a:xfrm>
+            <a:off x="914400" y="4023359"/>
+            <a:ext cx="2194560" cy="256032"/>
           </a:xfrm>
           <a:prstGeom prst="rect">
             <a:avLst/>
@@ -12163,40 +12312,81 @@
                 <a:ea typeface="맑은 고딕"/>
                 <a:cs typeface="맑은 고딕"/>
               </a:rPr>
-              <a:t>3단계 · 6개월</a:t>
-            </a:r>
-          </a:p>
-        </p:txBody>
-      </p:sp>
-      <p:sp>
-        <p:nvSpPr>
-          <p:cNvPr id="26" name="TextBox 25"/>
-          <p:cNvSpPr txBox="1"/>
-          <p:nvPr/>
-        </p:nvSpPr>
-        <p:spPr>
-          <a:xfrm>
-            <a:off x="6729983" y="4242816"/>
-            <a:ext cx="4754880" cy="365760"/>
-          </a:xfrm>
-          <a:prstGeom prst="rect">
-            <a:avLst/>
-          </a:prstGeom>
-          <a:noFill/>
-        </p:spPr>
-        <p:txBody>
-          <a:bodyPr wrap="square" lIns="0" rIns="0" tIns="0" bIns="0">
-            <a:spAutoFit/>
-          </a:bodyPr>
-          <a:lstStyle/>
-          <a:p>
-            <a:pPr algn="l">
-              <a:lnSpc>
-                <a:spcPct val="140000"/>
-              </a:lnSpc>
-            </a:pPr>
-            <a:r>
-              <a:rPr sz="1100" b="0">
+              <a:t>예산 담당</a:t>
+            </a:r>
+          </a:p>
+        </p:txBody>
+      </p:sp>
+      <p:sp>
+        <p:nvSpPr>
+          <p:cNvPr id="18" name="TextBox 17"/>
+          <p:cNvSpPr txBox="1"/>
+          <p:nvPr/>
+        </p:nvSpPr>
+        <p:spPr>
+          <a:xfrm>
+            <a:off x="914400" y="4315968"/>
+            <a:ext cx="4663440" cy="256032"/>
+          </a:xfrm>
+          <a:prstGeom prst="rect">
+            <a:avLst/>
+          </a:prstGeom>
+          <a:noFill/>
+        </p:spPr>
+        <p:txBody>
+          <a:bodyPr wrap="square" lIns="0" rIns="0" tIns="0" bIns="0">
+            <a:spAutoFit/>
+          </a:bodyPr>
+          <a:lstStyle/>
+          <a:p>
+            <a:pPr algn="l">
+              <a:lnSpc>
+                <a:spcPct val="135000"/>
+              </a:lnSpc>
+            </a:pPr>
+            <a:r>
+              <a:rPr sz="1350" b="1">
+                <a:solidFill>
+                  <a:srgbClr val="12151A"/>
+                </a:solidFill>
+                <a:latin typeface="맑은 고딕"/>
+                <a:ea typeface="맑은 고딕"/>
+                <a:cs typeface="맑은 고딕"/>
+              </a:rPr>
+              <a:t>배분 검토 자료</a:t>
+            </a:r>
+          </a:p>
+        </p:txBody>
+      </p:sp>
+      <p:sp>
+        <p:nvSpPr>
+          <p:cNvPr id="19" name="TextBox 18"/>
+          <p:cNvSpPr txBox="1"/>
+          <p:nvPr/>
+        </p:nvSpPr>
+        <p:spPr>
+          <a:xfrm>
+            <a:off x="914400" y="4626864"/>
+            <a:ext cx="4663440" cy="548640"/>
+          </a:xfrm>
+          <a:prstGeom prst="rect">
+            <a:avLst/>
+          </a:prstGeom>
+          <a:noFill/>
+        </p:spPr>
+        <p:txBody>
+          <a:bodyPr wrap="square" lIns="0" rIns="0" tIns="0" bIns="0">
+            <a:spAutoFit/>
+          </a:bodyPr>
+          <a:lstStyle/>
+          <a:p>
+            <a:pPr algn="l">
+              <a:lnSpc>
+                <a:spcPct val="145000"/>
+              </a:lnSpc>
+            </a:pPr>
+            <a:r>
+              <a:rPr sz="1080" b="0">
                 <a:solidFill>
                   <a:srgbClr val="52514E"/>
                 </a:solidFill>
@@ -12204,27 +12394,94 @@
                 <a:ea typeface="맑은 고딕"/>
                 <a:cs typeface="맑은 고딕"/>
               </a:rPr>
-              <a:t>500m 격자 단위로 공간해상도 상향 — 표본 확대로 예측모델 성능 개선</a:t>
-            </a:r>
-          </a:p>
-        </p:txBody>
-      </p:sp>
-      <p:sp>
-        <p:nvSpPr>
-          <p:cNvPr id="27" name="Rectangle 26"/>
+              <a:t>몇 개소까지면 어느 정도 효과인지 곡선으로 비교하실 때,</a:t>
+            </a:r>
+          </a:p>
+          <a:p>
+            <a:pPr algn="l">
+              <a:lnSpc>
+                <a:spcPct val="145000"/>
+              </a:lnSpc>
+              <a:spcBef>
+                <a:spcPts val="0"/>
+              </a:spcBef>
+            </a:pPr>
+            <a:r>
+              <a:rPr sz="1080" b="0">
+                <a:solidFill>
+                  <a:srgbClr val="52514E"/>
+                </a:solidFill>
+                <a:latin typeface="맑은 고딕"/>
+                <a:ea typeface="맑은 고딕"/>
+                <a:cs typeface="맑은 고딕"/>
+              </a:rPr>
+              <a:t>예산 조정이 필요할 때 판단의 참고로.</a:t>
+            </a:r>
+          </a:p>
+        </p:txBody>
+      </p:sp>
+      <p:sp>
+        <p:nvSpPr>
+          <p:cNvPr id="20" name="Rounded Rectangle 19"/>
           <p:cNvSpPr/>
           <p:nvPr/>
         </p:nvSpPr>
         <p:spPr>
           <a:xfrm>
-            <a:off x="6510528" y="4718304"/>
-            <a:ext cx="68580" cy="566928"/>
-          </a:xfrm>
-          <a:prstGeom prst="rect">
-            <a:avLst/>
+            <a:off x="6236207" y="3858768"/>
+            <a:ext cx="5257800" cy="1371600"/>
+          </a:xfrm>
+          <a:prstGeom prst="roundRect">
+            <a:avLst>
+              <a:gd name="adj" fmla="val 6000"/>
+            </a:avLst>
           </a:prstGeom>
           <a:solidFill>
-            <a:srgbClr val="2A78D6"/>
+            <a:srgbClr val="FFFFFF"/>
+          </a:solidFill>
+          <a:ln w="12700">
+            <a:solidFill>
+              <a:srgbClr val="E4E7EC"/>
+            </a:solidFill>
+          </a:ln>
+          <a:effectLst/>
+        </p:spPr>
+        <p:style>
+          <a:lnRef idx="1">
+            <a:schemeClr val="accent1"/>
+          </a:lnRef>
+          <a:fillRef idx="3">
+            <a:schemeClr val="accent1"/>
+          </a:fillRef>
+          <a:effectRef idx="2">
+            <a:schemeClr val="accent1"/>
+          </a:effectRef>
+          <a:fontRef idx="minor">
+            <a:schemeClr val="lt1"/>
+          </a:fontRef>
+        </p:style>
+        <p:txBody>
+          <a:bodyPr rtlCol="0" anchor="ctr"/>
+          <a:lstStyle/>
+          <a:p/>
+        </p:txBody>
+      </p:sp>
+      <p:sp>
+        <p:nvSpPr>
+          <p:cNvPr id="21" name="Rectangle 20"/>
+          <p:cNvSpPr/>
+          <p:nvPr/>
+        </p:nvSpPr>
+        <p:spPr>
+          <a:xfrm>
+            <a:off x="6236207" y="3858768"/>
+            <a:ext cx="68580" cy="1371600"/>
+          </a:xfrm>
+          <a:prstGeom prst="rect">
+            <a:avLst/>
+          </a:prstGeom>
+          <a:solidFill>
+            <a:srgbClr val="4A3AA7"/>
           </a:solidFill>
           <a:ln>
             <a:noFill/>
@@ -12253,14 +12510,14 @@
       </p:sp>
       <p:sp>
         <p:nvSpPr>
-          <p:cNvPr id="28" name="TextBox 27"/>
-          <p:cNvSpPr txBox="1"/>
-          <p:nvPr/>
-        </p:nvSpPr>
-        <p:spPr>
-          <a:xfrm>
-            <a:off x="6729983" y="4718304"/>
-            <a:ext cx="4754880" cy="256032"/>
+          <p:cNvPr id="22" name="TextBox 21"/>
+          <p:cNvSpPr txBox="1"/>
+          <p:nvPr/>
+        </p:nvSpPr>
+        <p:spPr>
+          <a:xfrm>
+            <a:off x="6492240" y="4023359"/>
+            <a:ext cx="2194560" cy="256032"/>
           </a:xfrm>
           <a:prstGeom prst="rect">
             <a:avLst/>
@@ -12281,46 +12538,87 @@
             <a:r>
               <a:rPr sz="1250" b="1">
                 <a:solidFill>
-                  <a:srgbClr val="2A78D6"/>
-                </a:solidFill>
-                <a:latin typeface="맑은 고딕"/>
-                <a:ea typeface="맑은 고딕"/>
-                <a:cs typeface="맑은 고딕"/>
-              </a:rPr>
-              <a:t>4단계 · 1년</a:t>
-            </a:r>
-          </a:p>
-        </p:txBody>
-      </p:sp>
-      <p:sp>
-        <p:nvSpPr>
-          <p:cNvPr id="29" name="TextBox 28"/>
-          <p:cNvSpPr txBox="1"/>
-          <p:nvPr/>
-        </p:nvSpPr>
-        <p:spPr>
-          <a:xfrm>
-            <a:off x="6729983" y="4992624"/>
-            <a:ext cx="4754880" cy="365760"/>
-          </a:xfrm>
-          <a:prstGeom prst="rect">
-            <a:avLst/>
-          </a:prstGeom>
-          <a:noFill/>
-        </p:spPr>
-        <p:txBody>
-          <a:bodyPr wrap="square" lIns="0" rIns="0" tIns="0" bIns="0">
-            <a:spAutoFit/>
-          </a:bodyPr>
-          <a:lstStyle/>
-          <a:p>
-            <a:pPr algn="l">
-              <a:lnSpc>
-                <a:spcPct val="140000"/>
-              </a:lnSpc>
-            </a:pPr>
-            <a:r>
-              <a:rPr sz="1100" b="0">
+                  <a:srgbClr val="4A3AA7"/>
+                </a:solidFill>
+                <a:latin typeface="맑은 고딕"/>
+                <a:ea typeface="맑은 고딕"/>
+                <a:cs typeface="맑은 고딕"/>
+              </a:rPr>
+              <a:t>기획·평가 담당</a:t>
+            </a:r>
+          </a:p>
+        </p:txBody>
+      </p:sp>
+      <p:sp>
+        <p:nvSpPr>
+          <p:cNvPr id="23" name="TextBox 22"/>
+          <p:cNvSpPr txBox="1"/>
+          <p:nvPr/>
+        </p:nvSpPr>
+        <p:spPr>
+          <a:xfrm>
+            <a:off x="6492240" y="4315968"/>
+            <a:ext cx="4663440" cy="256032"/>
+          </a:xfrm>
+          <a:prstGeom prst="rect">
+            <a:avLst/>
+          </a:prstGeom>
+          <a:noFill/>
+        </p:spPr>
+        <p:txBody>
+          <a:bodyPr wrap="square" lIns="0" rIns="0" tIns="0" bIns="0">
+            <a:spAutoFit/>
+          </a:bodyPr>
+          <a:lstStyle/>
+          <a:p>
+            <a:pPr algn="l">
+              <a:lnSpc>
+                <a:spcPct val="135000"/>
+              </a:lnSpc>
+            </a:pPr>
+            <a:r>
+              <a:rPr sz="1350" b="1">
+                <a:solidFill>
+                  <a:srgbClr val="12151A"/>
+                </a:solidFill>
+                <a:latin typeface="맑은 고딕"/>
+                <a:ea typeface="맑은 고딕"/>
+                <a:cs typeface="맑은 고딕"/>
+              </a:rPr>
+              <a:t>시행 이후 확인</a:t>
+            </a:r>
+          </a:p>
+        </p:txBody>
+      </p:sp>
+      <p:sp>
+        <p:nvSpPr>
+          <p:cNvPr id="24" name="TextBox 23"/>
+          <p:cNvSpPr txBox="1"/>
+          <p:nvPr/>
+        </p:nvSpPr>
+        <p:spPr>
+          <a:xfrm>
+            <a:off x="6492240" y="4626864"/>
+            <a:ext cx="4663440" cy="548640"/>
+          </a:xfrm>
+          <a:prstGeom prst="rect">
+            <a:avLst/>
+          </a:prstGeom>
+          <a:noFill/>
+        </p:spPr>
+        <p:txBody>
+          <a:bodyPr wrap="square" lIns="0" rIns="0" tIns="0" bIns="0">
+            <a:spAutoFit/>
+          </a:bodyPr>
+          <a:lstStyle/>
+          <a:p>
+            <a:pPr algn="l">
+              <a:lnSpc>
+                <a:spcPct val="145000"/>
+              </a:lnSpc>
+            </a:pPr>
+            <a:r>
+              <a:rPr sz="1080" b="0">
                 <a:solidFill>
                   <a:srgbClr val="52514E"/>
                 </a:solidFill>
@@ -12328,21 +12626,42 @@
                 <a:ea typeface="맑은 고딕"/>
                 <a:cs typeface="맑은 고딕"/>
               </a:rPr>
-              <a:t>천안시 행정포털 대시보드 내재화, 연 1회 자동 갱신 체계 정착</a:t>
-            </a:r>
-          </a:p>
-        </p:txBody>
-      </p:sp>
-      <p:sp>
-        <p:nvSpPr>
-          <p:cNvPr id="30" name="Rounded Rectangle 29"/>
+              <a:t>이듬해 같은 스크립트로 지수 변화를 이어 보실 때,</a:t>
+            </a:r>
+          </a:p>
+          <a:p>
+            <a:pPr algn="l">
+              <a:lnSpc>
+                <a:spcPct val="145000"/>
+              </a:lnSpc>
+              <a:spcBef>
+                <a:spcPts val="0"/>
+              </a:spcBef>
+            </a:pPr>
+            <a:r>
+              <a:rPr sz="1080" b="0">
+                <a:solidFill>
+                  <a:srgbClr val="52514E"/>
+                </a:solidFill>
+                <a:latin typeface="맑은 고딕"/>
+                <a:ea typeface="맑은 고딕"/>
+                <a:cs typeface="맑은 고딕"/>
+              </a:rPr>
+              <a:t>하신 사업이 수치로도 나아졌는지 확인하실 때.</a:t>
+            </a:r>
+          </a:p>
+        </p:txBody>
+      </p:sp>
+      <p:sp>
+        <p:nvSpPr>
+          <p:cNvPr id="25" name="Rounded Rectangle 24"/>
           <p:cNvSpPr/>
           <p:nvPr/>
         </p:nvSpPr>
         <p:spPr>
           <a:xfrm>
-            <a:off x="658368" y="5504688"/>
-            <a:ext cx="10874959" cy="822960"/>
+            <a:off x="658368" y="5541264"/>
+            <a:ext cx="10874959" cy="786384"/>
           </a:xfrm>
           <a:prstGeom prst="roundRect">
             <a:avLst>
@@ -12350,7 +12669,7 @@
             </a:avLst>
           </a:prstGeom>
           <a:solidFill>
-            <a:srgbClr val="F6F7F9"/>
+            <a:srgbClr val="EFF7F3"/>
           </a:solidFill>
           <a:ln>
             <a:noFill/>
@@ -12379,13 +12698,13 @@
       </p:sp>
       <p:sp>
         <p:nvSpPr>
-          <p:cNvPr id="31" name="TextBox 30"/>
-          <p:cNvSpPr txBox="1"/>
-          <p:nvPr/>
-        </p:nvSpPr>
-        <p:spPr>
-          <a:xfrm>
-            <a:off x="932688" y="5687568"/>
+          <p:cNvPr id="26" name="TextBox 25"/>
+          <p:cNvSpPr txBox="1"/>
+          <p:nvPr/>
+        </p:nvSpPr>
+        <p:spPr>
+          <a:xfrm>
+            <a:off x="932688" y="5705856"/>
             <a:ext cx="10515600" cy="502920"/>
           </a:xfrm>
           <a:prstGeom prst="rect">
@@ -12413,7 +12732,7 @@
                 <a:ea typeface="맑은 고딕"/>
                 <a:cs typeface="맑은 고딕"/>
               </a:rPr>
-              <a:t>다른 지역에도 — 공간단위 정의(config.py)만 바꾸면 아산·청주 등에도 같은 방식으로 쓸 수 있습니다.</a:t>
+              <a:t>쓰시는 방법 — 연 1회 공공데이터를 새로 받아 스크립트를 실행하시면 모든 자료가 다시 만들어집니다.</a:t>
             </a:r>
           </a:p>
           <a:p>
@@ -12434,14 +12753,14 @@
                 <a:ea typeface="맑은 고딕"/>
                 <a:cs typeface="맑은 고딕"/>
               </a:rPr>
-              <a:t>원도심 공동화는 천안만의 일이 아니어서, 도움이 된다면 충남 시군이 함께 쓰는 자료가 되어도 좋겠습니다.</a:t>
-            </a:r>
-          </a:p>
-        </p:txBody>
-      </p:sp>
-      <p:sp>
-        <p:nvSpPr>
-          <p:cNvPr id="32" name="TextBox 31"/>
+              <a:t>별도 시스템이나 데이터 구매 없이, 담당자 한 분이 반나절이면 그 해 자료를 준비하실 수 있습니다.</a:t>
+            </a:r>
+          </a:p>
+        </p:txBody>
+      </p:sp>
+      <p:sp>
+        <p:nvSpPr>
+          <p:cNvPr id="27" name="TextBox 26"/>
           <p:cNvSpPr txBox="1"/>
           <p:nvPr/>
         </p:nvSpPr>
@@ -12482,7 +12801,7 @@
       </p:sp>
       <p:sp>
         <p:nvSpPr>
-          <p:cNvPr id="33" name="TextBox 32"/>
+          <p:cNvPr id="28" name="TextBox 27"/>
           <p:cNvSpPr txBox="1"/>
           <p:nvPr/>
         </p:nvSpPr>
@@ -12575,7 +12894,7 @@
                 <a:ea typeface="맑은 고딕"/>
                 <a:cs typeface="맑은 고딕"/>
               </a:rPr>
-              <a:t>LIMITATION</a:t>
+              <a:t>IMPACT</a:t>
             </a:r>
           </a:p>
         </p:txBody>
@@ -12616,7 +12935,7 @@
                 <a:ea typeface="맑은 고딕"/>
                 <a:cs typeface="맑은 고딕"/>
               </a:rPr>
-              <a:t>저희가 아직 못 한 부분을 먼저 말씀드립니다</a:t>
+              <a:t>기대효과와 실행 로드맵</a:t>
             </a:r>
           </a:p>
         </p:txBody>
@@ -12629,62 +12948,58 @@
         </p:nvSpPr>
         <p:spPr>
           <a:xfrm>
-            <a:off x="658368" y="1517904"/>
-            <a:ext cx="10874959" cy="411480"/>
-          </a:xfrm>
-          <a:prstGeom prst="rect">
-            <a:avLst/>
-          </a:prstGeom>
-          <a:noFill/>
-        </p:spPr>
-        <p:txBody>
-          <a:bodyPr wrap="square" lIns="0" rIns="0" tIns="0" bIns="0">
-            <a:spAutoFit/>
-          </a:bodyPr>
-          <a:lstStyle/>
-          <a:p>
-            <a:pPr algn="l">
-              <a:lnSpc>
-                <a:spcPct val="145000"/>
-              </a:lnSpc>
-            </a:pPr>
-            <a:r>
-              <a:rPr sz="1350" b="0">
-                <a:solidFill>
-                  <a:srgbClr val="52514E"/>
-                </a:solidFill>
-                <a:latin typeface="맑은 고딕"/>
-                <a:ea typeface="맑은 고딕"/>
-                <a:cs typeface="맑은 고딕"/>
-              </a:rPr>
-              <a:t>행정에 쓰이는 자료인 만큼, 어디까지 믿고 쓰실 수 있는지 분명히 알려드리는 것이 도리라고 생각했습니다.</a:t>
-            </a:r>
-          </a:p>
-        </p:txBody>
-      </p:sp>
-      <p:sp>
-        <p:nvSpPr>
-          <p:cNvPr id="5" name="Rounded Rectangle 4"/>
+            <a:off x="658368" y="2084831"/>
+            <a:ext cx="5486400" cy="274320"/>
+          </a:xfrm>
+          <a:prstGeom prst="rect">
+            <a:avLst/>
+          </a:prstGeom>
+          <a:noFill/>
+        </p:spPr>
+        <p:txBody>
+          <a:bodyPr wrap="square" lIns="0" rIns="0" tIns="0" bIns="0">
+            <a:spAutoFit/>
+          </a:bodyPr>
+          <a:lstStyle/>
+          <a:p>
+            <a:pPr algn="l">
+              <a:lnSpc>
+                <a:spcPct val="135000"/>
+              </a:lnSpc>
+            </a:pPr>
+            <a:r>
+              <a:rPr sz="1450" b="1">
+                <a:solidFill>
+                  <a:srgbClr val="12151A"/>
+                </a:solidFill>
+                <a:latin typeface="맑은 고딕"/>
+                <a:ea typeface="맑은 고딕"/>
+                <a:cs typeface="맑은 고딕"/>
+              </a:rPr>
+              <a:t>기대효과</a:t>
+            </a:r>
+          </a:p>
+        </p:txBody>
+      </p:sp>
+      <p:sp>
+        <p:nvSpPr>
+          <p:cNvPr id="5" name="Rectangle 4"/>
           <p:cNvSpPr/>
           <p:nvPr/>
         </p:nvSpPr>
         <p:spPr>
           <a:xfrm>
-            <a:off x="658368" y="2286000"/>
-            <a:ext cx="10874959" cy="896112"/>
-          </a:xfrm>
-          <a:prstGeom prst="roundRect">
-            <a:avLst>
-              <a:gd name="adj" fmla="val 6000"/>
-            </a:avLst>
+            <a:off x="658368" y="2468880"/>
+            <a:ext cx="68580" cy="566928"/>
+          </a:xfrm>
+          <a:prstGeom prst="rect">
+            <a:avLst/>
           </a:prstGeom>
           <a:solidFill>
-            <a:srgbClr val="FFFFFF"/>
+            <a:srgbClr val="2A78D6"/>
           </a:solidFill>
-          <a:ln w="12700">
-            <a:solidFill>
-              <a:srgbClr val="E4E7EC"/>
-            </a:solidFill>
+          <a:ln>
+            <a:noFill/>
           </a:ln>
           <a:effectLst/>
         </p:spPr>
@@ -12710,14 +13025,757 @@
       </p:sp>
       <p:sp>
         <p:nvSpPr>
-          <p:cNvPr id="6" name="Rectangle 5"/>
+          <p:cNvPr id="6" name="TextBox 5"/>
+          <p:cNvSpPr txBox="1"/>
+          <p:nvPr/>
+        </p:nvSpPr>
+        <p:spPr>
+          <a:xfrm>
+            <a:off x="877824" y="2468880"/>
+            <a:ext cx="5120640" cy="256032"/>
+          </a:xfrm>
+          <a:prstGeom prst="rect">
+            <a:avLst/>
+          </a:prstGeom>
+          <a:noFill/>
+        </p:spPr>
+        <p:txBody>
+          <a:bodyPr wrap="square" lIns="0" rIns="0" tIns="0" bIns="0">
+            <a:spAutoFit/>
+          </a:bodyPr>
+          <a:lstStyle/>
+          <a:p>
+            <a:pPr algn="l">
+              <a:lnSpc>
+                <a:spcPct val="135000"/>
+              </a:lnSpc>
+            </a:pPr>
+            <a:r>
+              <a:rPr sz="1250" b="1">
+                <a:solidFill>
+                  <a:srgbClr val="12151A"/>
+                </a:solidFill>
+                <a:latin typeface="맑은 고딕"/>
+                <a:ea typeface="맑은 고딕"/>
+                <a:cs typeface="맑은 고딕"/>
+              </a:rPr>
+              <a:t>시민께 닿는 범위</a:t>
+            </a:r>
+          </a:p>
+        </p:txBody>
+      </p:sp>
+      <p:sp>
+        <p:nvSpPr>
+          <p:cNvPr id="7" name="TextBox 6"/>
+          <p:cNvSpPr txBox="1"/>
+          <p:nvPr/>
+        </p:nvSpPr>
+        <p:spPr>
+          <a:xfrm>
+            <a:off x="877824" y="2743200"/>
+            <a:ext cx="5120640" cy="365760"/>
+          </a:xfrm>
+          <a:prstGeom prst="rect">
+            <a:avLst/>
+          </a:prstGeom>
+          <a:noFill/>
+        </p:spPr>
+        <p:txBody>
+          <a:bodyPr wrap="square" lIns="0" rIns="0" tIns="0" bIns="0">
+            <a:spAutoFit/>
+          </a:bodyPr>
+          <a:lstStyle/>
+          <a:p>
+            <a:pPr algn="l">
+              <a:lnSpc>
+                <a:spcPct val="140000"/>
+              </a:lnSpc>
+            </a:pPr>
+            <a:r>
+              <a:rPr sz="1100" b="0">
+                <a:solidFill>
+                  <a:srgbClr val="52514E"/>
+                </a:solidFill>
+                <a:latin typeface="맑은 고딕"/>
+                <a:ea typeface="맑은 고딕"/>
+                <a:cs typeface="맑은 고딕"/>
+              </a:rPr>
+              <a:t>효과가 큰 곳부터 살펴보면, 같은 예산으로도 더 많은 분께 닿을 수 있습니다</a:t>
+            </a:r>
+          </a:p>
+        </p:txBody>
+      </p:sp>
+      <p:sp>
+        <p:nvSpPr>
+          <p:cNvPr id="8" name="Rectangle 7"/>
           <p:cNvSpPr/>
           <p:nvPr/>
         </p:nvSpPr>
         <p:spPr>
           <a:xfrm>
-            <a:off x="658368" y="2286000"/>
-            <a:ext cx="68580" cy="896112"/>
+            <a:off x="658368" y="3218688"/>
+            <a:ext cx="68580" cy="566928"/>
+          </a:xfrm>
+          <a:prstGeom prst="rect">
+            <a:avLst/>
+          </a:prstGeom>
+          <a:solidFill>
+            <a:srgbClr val="2A78D6"/>
+          </a:solidFill>
+          <a:ln>
+            <a:noFill/>
+          </a:ln>
+          <a:effectLst/>
+        </p:spPr>
+        <p:style>
+          <a:lnRef idx="1">
+            <a:schemeClr val="accent1"/>
+          </a:lnRef>
+          <a:fillRef idx="3">
+            <a:schemeClr val="accent1"/>
+          </a:fillRef>
+          <a:effectRef idx="2">
+            <a:schemeClr val="accent1"/>
+          </a:effectRef>
+          <a:fontRef idx="minor">
+            <a:schemeClr val="lt1"/>
+          </a:fontRef>
+        </p:style>
+        <p:txBody>
+          <a:bodyPr rtlCol="0" anchor="ctr"/>
+          <a:lstStyle/>
+          <a:p/>
+        </p:txBody>
+      </p:sp>
+      <p:sp>
+        <p:nvSpPr>
+          <p:cNvPr id="9" name="TextBox 8"/>
+          <p:cNvSpPr txBox="1"/>
+          <p:nvPr/>
+        </p:nvSpPr>
+        <p:spPr>
+          <a:xfrm>
+            <a:off x="877824" y="3218688"/>
+            <a:ext cx="5120640" cy="256032"/>
+          </a:xfrm>
+          <a:prstGeom prst="rect">
+            <a:avLst/>
+          </a:prstGeom>
+          <a:noFill/>
+        </p:spPr>
+        <p:txBody>
+          <a:bodyPr wrap="square" lIns="0" rIns="0" tIns="0" bIns="0">
+            <a:spAutoFit/>
+          </a:bodyPr>
+          <a:lstStyle/>
+          <a:p>
+            <a:pPr algn="l">
+              <a:lnSpc>
+                <a:spcPct val="135000"/>
+              </a:lnSpc>
+            </a:pPr>
+            <a:r>
+              <a:rPr sz="1250" b="1">
+                <a:solidFill>
+                  <a:srgbClr val="12151A"/>
+                </a:solidFill>
+                <a:latin typeface="맑은 고딕"/>
+                <a:ea typeface="맑은 고딕"/>
+                <a:cs typeface="맑은 고딕"/>
+              </a:rPr>
+              <a:t>살펴보는 시점</a:t>
+            </a:r>
+          </a:p>
+        </p:txBody>
+      </p:sp>
+      <p:sp>
+        <p:nvSpPr>
+          <p:cNvPr id="10" name="TextBox 9"/>
+          <p:cNvSpPr txBox="1"/>
+          <p:nvPr/>
+        </p:nvSpPr>
+        <p:spPr>
+          <a:xfrm>
+            <a:off x="877824" y="3493008"/>
+            <a:ext cx="5120640" cy="365760"/>
+          </a:xfrm>
+          <a:prstGeom prst="rect">
+            <a:avLst/>
+          </a:prstGeom>
+          <a:noFill/>
+        </p:spPr>
+        <p:txBody>
+          <a:bodyPr wrap="square" lIns="0" rIns="0" tIns="0" bIns="0">
+            <a:spAutoFit/>
+          </a:bodyPr>
+          <a:lstStyle/>
+          <a:p>
+            <a:pPr algn="l">
+              <a:lnSpc>
+                <a:spcPct val="140000"/>
+              </a:lnSpc>
+            </a:pPr>
+            <a:r>
+              <a:rPr sz="1100" b="0">
+                <a:solidFill>
+                  <a:srgbClr val="52514E"/>
+                </a:solidFill>
+                <a:latin typeface="맑은 고딕"/>
+                <a:ea typeface="맑은 고딕"/>
+                <a:cs typeface="맑은 고딕"/>
+              </a:rPr>
+              <a:t>어려워진 뒤가 아니라, 3년 앞을 미리 짚어볼 수 있습니다</a:t>
+            </a:r>
+          </a:p>
+        </p:txBody>
+      </p:sp>
+      <p:sp>
+        <p:nvSpPr>
+          <p:cNvPr id="11" name="Rectangle 10"/>
+          <p:cNvSpPr/>
+          <p:nvPr/>
+        </p:nvSpPr>
+        <p:spPr>
+          <a:xfrm>
+            <a:off x="658368" y="3968496"/>
+            <a:ext cx="68580" cy="566928"/>
+          </a:xfrm>
+          <a:prstGeom prst="rect">
+            <a:avLst/>
+          </a:prstGeom>
+          <a:solidFill>
+            <a:srgbClr val="2A78D6"/>
+          </a:solidFill>
+          <a:ln>
+            <a:noFill/>
+          </a:ln>
+          <a:effectLst/>
+        </p:spPr>
+        <p:style>
+          <a:lnRef idx="1">
+            <a:schemeClr val="accent1"/>
+          </a:lnRef>
+          <a:fillRef idx="3">
+            <a:schemeClr val="accent1"/>
+          </a:fillRef>
+          <a:effectRef idx="2">
+            <a:schemeClr val="accent1"/>
+          </a:effectRef>
+          <a:fontRef idx="minor">
+            <a:schemeClr val="lt1"/>
+          </a:fontRef>
+        </p:style>
+        <p:txBody>
+          <a:bodyPr rtlCol="0" anchor="ctr"/>
+          <a:lstStyle/>
+          <a:p/>
+        </p:txBody>
+      </p:sp>
+      <p:sp>
+        <p:nvSpPr>
+          <p:cNvPr id="12" name="TextBox 11"/>
+          <p:cNvSpPr txBox="1"/>
+          <p:nvPr/>
+        </p:nvSpPr>
+        <p:spPr>
+          <a:xfrm>
+            <a:off x="877824" y="3968496"/>
+            <a:ext cx="5120640" cy="256032"/>
+          </a:xfrm>
+          <a:prstGeom prst="rect">
+            <a:avLst/>
+          </a:prstGeom>
+          <a:noFill/>
+        </p:spPr>
+        <p:txBody>
+          <a:bodyPr wrap="square" lIns="0" rIns="0" tIns="0" bIns="0">
+            <a:spAutoFit/>
+          </a:bodyPr>
+          <a:lstStyle/>
+          <a:p>
+            <a:pPr algn="l">
+              <a:lnSpc>
+                <a:spcPct val="135000"/>
+              </a:lnSpc>
+            </a:pPr>
+            <a:r>
+              <a:rPr sz="1250" b="1">
+                <a:solidFill>
+                  <a:srgbClr val="12151A"/>
+                </a:solidFill>
+                <a:latin typeface="맑은 고딕"/>
+                <a:ea typeface="맑은 고딕"/>
+                <a:cs typeface="맑은 고딕"/>
+              </a:rPr>
+              <a:t>설명하실 때</a:t>
+            </a:r>
+          </a:p>
+        </p:txBody>
+      </p:sp>
+      <p:sp>
+        <p:nvSpPr>
+          <p:cNvPr id="13" name="TextBox 12"/>
+          <p:cNvSpPr txBox="1"/>
+          <p:nvPr/>
+        </p:nvSpPr>
+        <p:spPr>
+          <a:xfrm>
+            <a:off x="877824" y="4242816"/>
+            <a:ext cx="5120640" cy="365760"/>
+          </a:xfrm>
+          <a:prstGeom prst="rect">
+            <a:avLst/>
+          </a:prstGeom>
+          <a:noFill/>
+        </p:spPr>
+        <p:txBody>
+          <a:bodyPr wrap="square" lIns="0" rIns="0" tIns="0" bIns="0">
+            <a:spAutoFit/>
+          </a:bodyPr>
+          <a:lstStyle/>
+          <a:p>
+            <a:pPr algn="l">
+              <a:lnSpc>
+                <a:spcPct val="140000"/>
+              </a:lnSpc>
+            </a:pPr>
+            <a:r>
+              <a:rPr sz="1100" b="0">
+                <a:solidFill>
+                  <a:srgbClr val="52514E"/>
+                </a:solidFill>
+                <a:latin typeface="맑은 고딕"/>
+                <a:ea typeface="맑은 고딕"/>
+                <a:cs typeface="맑은 고딕"/>
+              </a:rPr>
+              <a:t>판단 근거를 항목별 수치로 정리해 드려 설명 부담을 조금 덜어드립니다</a:t>
+            </a:r>
+          </a:p>
+        </p:txBody>
+      </p:sp>
+      <p:sp>
+        <p:nvSpPr>
+          <p:cNvPr id="14" name="Rectangle 13"/>
+          <p:cNvSpPr/>
+          <p:nvPr/>
+        </p:nvSpPr>
+        <p:spPr>
+          <a:xfrm>
+            <a:off x="658368" y="4718304"/>
+            <a:ext cx="68580" cy="566928"/>
+          </a:xfrm>
+          <a:prstGeom prst="rect">
+            <a:avLst/>
+          </a:prstGeom>
+          <a:solidFill>
+            <a:srgbClr val="2A78D6"/>
+          </a:solidFill>
+          <a:ln>
+            <a:noFill/>
+          </a:ln>
+          <a:effectLst/>
+        </p:spPr>
+        <p:style>
+          <a:lnRef idx="1">
+            <a:schemeClr val="accent1"/>
+          </a:lnRef>
+          <a:fillRef idx="3">
+            <a:schemeClr val="accent1"/>
+          </a:fillRef>
+          <a:effectRef idx="2">
+            <a:schemeClr val="accent1"/>
+          </a:effectRef>
+          <a:fontRef idx="minor">
+            <a:schemeClr val="lt1"/>
+          </a:fontRef>
+        </p:style>
+        <p:txBody>
+          <a:bodyPr rtlCol="0" anchor="ctr"/>
+          <a:lstStyle/>
+          <a:p/>
+        </p:txBody>
+      </p:sp>
+      <p:sp>
+        <p:nvSpPr>
+          <p:cNvPr id="15" name="TextBox 14"/>
+          <p:cNvSpPr txBox="1"/>
+          <p:nvPr/>
+        </p:nvSpPr>
+        <p:spPr>
+          <a:xfrm>
+            <a:off x="877824" y="4718304"/>
+            <a:ext cx="5120640" cy="256032"/>
+          </a:xfrm>
+          <a:prstGeom prst="rect">
+            <a:avLst/>
+          </a:prstGeom>
+          <a:noFill/>
+        </p:spPr>
+        <p:txBody>
+          <a:bodyPr wrap="square" lIns="0" rIns="0" tIns="0" bIns="0">
+            <a:spAutoFit/>
+          </a:bodyPr>
+          <a:lstStyle/>
+          <a:p>
+            <a:pPr algn="l">
+              <a:lnSpc>
+                <a:spcPct val="135000"/>
+              </a:lnSpc>
+            </a:pPr>
+            <a:r>
+              <a:rPr sz="1250" b="1">
+                <a:solidFill>
+                  <a:srgbClr val="12151A"/>
+                </a:solidFill>
+                <a:latin typeface="맑은 고딕"/>
+                <a:ea typeface="맑은 고딕"/>
+                <a:cs typeface="맑은 고딕"/>
+              </a:rPr>
+              <a:t>드는 비용</a:t>
+            </a:r>
+          </a:p>
+        </p:txBody>
+      </p:sp>
+      <p:sp>
+        <p:nvSpPr>
+          <p:cNvPr id="16" name="TextBox 15"/>
+          <p:cNvSpPr txBox="1"/>
+          <p:nvPr/>
+        </p:nvSpPr>
+        <p:spPr>
+          <a:xfrm>
+            <a:off x="877824" y="4992624"/>
+            <a:ext cx="5120640" cy="365760"/>
+          </a:xfrm>
+          <a:prstGeom prst="rect">
+            <a:avLst/>
+          </a:prstGeom>
+          <a:noFill/>
+        </p:spPr>
+        <p:txBody>
+          <a:bodyPr wrap="square" lIns="0" rIns="0" tIns="0" bIns="0">
+            <a:spAutoFit/>
+          </a:bodyPr>
+          <a:lstStyle/>
+          <a:p>
+            <a:pPr algn="l">
+              <a:lnSpc>
+                <a:spcPct val="140000"/>
+              </a:lnSpc>
+            </a:pPr>
+            <a:r>
+              <a:rPr sz="1100" b="0">
+                <a:solidFill>
+                  <a:srgbClr val="52514E"/>
+                </a:solidFill>
+                <a:latin typeface="맑은 고딕"/>
+                <a:ea typeface="맑은 고딕"/>
+                <a:cs typeface="맑은 고딕"/>
+              </a:rPr>
+              <a:t>데이터 구매나 시스템 없이, 스크립트 재실행만으로 매년 갱신됩니다</a:t>
+            </a:r>
+          </a:p>
+        </p:txBody>
+      </p:sp>
+      <p:sp>
+        <p:nvSpPr>
+          <p:cNvPr id="17" name="TextBox 16"/>
+          <p:cNvSpPr txBox="1"/>
+          <p:nvPr/>
+        </p:nvSpPr>
+        <p:spPr>
+          <a:xfrm>
+            <a:off x="6510528" y="2084831"/>
+            <a:ext cx="5029200" cy="274320"/>
+          </a:xfrm>
+          <a:prstGeom prst="rect">
+            <a:avLst/>
+          </a:prstGeom>
+          <a:noFill/>
+        </p:spPr>
+        <p:txBody>
+          <a:bodyPr wrap="square" lIns="0" rIns="0" tIns="0" bIns="0">
+            <a:spAutoFit/>
+          </a:bodyPr>
+          <a:lstStyle/>
+          <a:p>
+            <a:pPr algn="l">
+              <a:lnSpc>
+                <a:spcPct val="135000"/>
+              </a:lnSpc>
+            </a:pPr>
+            <a:r>
+              <a:rPr sz="1450" b="1">
+                <a:solidFill>
+                  <a:srgbClr val="12151A"/>
+                </a:solidFill>
+                <a:latin typeface="맑은 고딕"/>
+                <a:ea typeface="맑은 고딕"/>
+                <a:cs typeface="맑은 고딕"/>
+              </a:rPr>
+              <a:t>실행 로드맵</a:t>
+            </a:r>
+          </a:p>
+        </p:txBody>
+      </p:sp>
+      <p:sp>
+        <p:nvSpPr>
+          <p:cNvPr id="18" name="Rectangle 17"/>
+          <p:cNvSpPr/>
+          <p:nvPr/>
+        </p:nvSpPr>
+        <p:spPr>
+          <a:xfrm>
+            <a:off x="6510528" y="2468880"/>
+            <a:ext cx="68580" cy="566928"/>
+          </a:xfrm>
+          <a:prstGeom prst="rect">
+            <a:avLst/>
+          </a:prstGeom>
+          <a:solidFill>
+            <a:srgbClr val="1BAF7A"/>
+          </a:solidFill>
+          <a:ln>
+            <a:noFill/>
+          </a:ln>
+          <a:effectLst/>
+        </p:spPr>
+        <p:style>
+          <a:lnRef idx="1">
+            <a:schemeClr val="accent1"/>
+          </a:lnRef>
+          <a:fillRef idx="3">
+            <a:schemeClr val="accent1"/>
+          </a:fillRef>
+          <a:effectRef idx="2">
+            <a:schemeClr val="accent1"/>
+          </a:effectRef>
+          <a:fontRef idx="minor">
+            <a:schemeClr val="lt1"/>
+          </a:fontRef>
+        </p:style>
+        <p:txBody>
+          <a:bodyPr rtlCol="0" anchor="ctr"/>
+          <a:lstStyle/>
+          <a:p/>
+        </p:txBody>
+      </p:sp>
+      <p:sp>
+        <p:nvSpPr>
+          <p:cNvPr id="19" name="TextBox 18"/>
+          <p:cNvSpPr txBox="1"/>
+          <p:nvPr/>
+        </p:nvSpPr>
+        <p:spPr>
+          <a:xfrm>
+            <a:off x="6729983" y="2468880"/>
+            <a:ext cx="4754880" cy="256032"/>
+          </a:xfrm>
+          <a:prstGeom prst="rect">
+            <a:avLst/>
+          </a:prstGeom>
+          <a:noFill/>
+        </p:spPr>
+        <p:txBody>
+          <a:bodyPr wrap="square" lIns="0" rIns="0" tIns="0" bIns="0">
+            <a:spAutoFit/>
+          </a:bodyPr>
+          <a:lstStyle/>
+          <a:p>
+            <a:pPr algn="l">
+              <a:lnSpc>
+                <a:spcPct val="135000"/>
+              </a:lnSpc>
+            </a:pPr>
+            <a:r>
+              <a:rPr sz="1250" b="1">
+                <a:solidFill>
+                  <a:srgbClr val="1BAF7A"/>
+                </a:solidFill>
+                <a:latin typeface="맑은 고딕"/>
+                <a:ea typeface="맑은 고딕"/>
+                <a:cs typeface="맑은 고딕"/>
+              </a:rPr>
+              <a:t>1단계 · 즉시</a:t>
+            </a:r>
+          </a:p>
+        </p:txBody>
+      </p:sp>
+      <p:sp>
+        <p:nvSpPr>
+          <p:cNvPr id="20" name="TextBox 19"/>
+          <p:cNvSpPr txBox="1"/>
+          <p:nvPr/>
+        </p:nvSpPr>
+        <p:spPr>
+          <a:xfrm>
+            <a:off x="6729983" y="2743200"/>
+            <a:ext cx="4754880" cy="365760"/>
+          </a:xfrm>
+          <a:prstGeom prst="rect">
+            <a:avLst/>
+          </a:prstGeom>
+          <a:noFill/>
+        </p:spPr>
+        <p:txBody>
+          <a:bodyPr wrap="square" lIns="0" rIns="0" tIns="0" bIns="0">
+            <a:spAutoFit/>
+          </a:bodyPr>
+          <a:lstStyle/>
+          <a:p>
+            <a:pPr algn="l">
+              <a:lnSpc>
+                <a:spcPct val="140000"/>
+              </a:lnSpc>
+            </a:pPr>
+            <a:r>
+              <a:rPr sz="1100" b="0">
+                <a:solidFill>
+                  <a:srgbClr val="52514E"/>
+                </a:solidFill>
+                <a:latin typeface="맑은 고딕"/>
+                <a:ea typeface="맑은 고딕"/>
+                <a:cs typeface="맑은 고딕"/>
+              </a:rPr>
+              <a:t>본 스크립트로 천안시 25개 생활권 기준선 진단 확정</a:t>
+            </a:r>
+          </a:p>
+        </p:txBody>
+      </p:sp>
+      <p:sp>
+        <p:nvSpPr>
+          <p:cNvPr id="21" name="Rectangle 20"/>
+          <p:cNvSpPr/>
+          <p:nvPr/>
+        </p:nvSpPr>
+        <p:spPr>
+          <a:xfrm>
+            <a:off x="6510528" y="3218688"/>
+            <a:ext cx="68580" cy="566928"/>
+          </a:xfrm>
+          <a:prstGeom prst="rect">
+            <a:avLst/>
+          </a:prstGeom>
+          <a:solidFill>
+            <a:srgbClr val="2A78D6"/>
+          </a:solidFill>
+          <a:ln>
+            <a:noFill/>
+          </a:ln>
+          <a:effectLst/>
+        </p:spPr>
+        <p:style>
+          <a:lnRef idx="1">
+            <a:schemeClr val="accent1"/>
+          </a:lnRef>
+          <a:fillRef idx="3">
+            <a:schemeClr val="accent1"/>
+          </a:fillRef>
+          <a:effectRef idx="2">
+            <a:schemeClr val="accent1"/>
+          </a:effectRef>
+          <a:fontRef idx="minor">
+            <a:schemeClr val="lt1"/>
+          </a:fontRef>
+        </p:style>
+        <p:txBody>
+          <a:bodyPr rtlCol="0" anchor="ctr"/>
+          <a:lstStyle/>
+          <a:p/>
+        </p:txBody>
+      </p:sp>
+      <p:sp>
+        <p:nvSpPr>
+          <p:cNvPr id="22" name="TextBox 21"/>
+          <p:cNvSpPr txBox="1"/>
+          <p:nvPr/>
+        </p:nvSpPr>
+        <p:spPr>
+          <a:xfrm>
+            <a:off x="6729983" y="3218688"/>
+            <a:ext cx="4754880" cy="256032"/>
+          </a:xfrm>
+          <a:prstGeom prst="rect">
+            <a:avLst/>
+          </a:prstGeom>
+          <a:noFill/>
+        </p:spPr>
+        <p:txBody>
+          <a:bodyPr wrap="square" lIns="0" rIns="0" tIns="0" bIns="0">
+            <a:spAutoFit/>
+          </a:bodyPr>
+          <a:lstStyle/>
+          <a:p>
+            <a:pPr algn="l">
+              <a:lnSpc>
+                <a:spcPct val="135000"/>
+              </a:lnSpc>
+            </a:pPr>
+            <a:r>
+              <a:rPr sz="1250" b="1">
+                <a:solidFill>
+                  <a:srgbClr val="2A78D6"/>
+                </a:solidFill>
+                <a:latin typeface="맑은 고딕"/>
+                <a:ea typeface="맑은 고딕"/>
+                <a:cs typeface="맑은 고딕"/>
+              </a:rPr>
+              <a:t>2단계 · 3개월</a:t>
+            </a:r>
+          </a:p>
+        </p:txBody>
+      </p:sp>
+      <p:sp>
+        <p:nvSpPr>
+          <p:cNvPr id="23" name="TextBox 22"/>
+          <p:cNvSpPr txBox="1"/>
+          <p:nvPr/>
+        </p:nvSpPr>
+        <p:spPr>
+          <a:xfrm>
+            <a:off x="6729983" y="3493008"/>
+            <a:ext cx="4754880" cy="365760"/>
+          </a:xfrm>
+          <a:prstGeom prst="rect">
+            <a:avLst/>
+          </a:prstGeom>
+          <a:noFill/>
+        </p:spPr>
+        <p:txBody>
+          <a:bodyPr wrap="square" lIns="0" rIns="0" tIns="0" bIns="0">
+            <a:spAutoFit/>
+          </a:bodyPr>
+          <a:lstStyle/>
+          <a:p>
+            <a:pPr algn="l">
+              <a:lnSpc>
+                <a:spcPct val="140000"/>
+              </a:lnSpc>
+            </a:pPr>
+            <a:r>
+              <a:rPr sz="1100" b="0">
+                <a:solidFill>
+                  <a:srgbClr val="52514E"/>
+                </a:solidFill>
+                <a:latin typeface="맑은 고딕"/>
+                <a:ea typeface="맑은 고딕"/>
+                <a:cs typeface="맑은 고딕"/>
+              </a:rPr>
+              <a:t>천안시 내부 행정데이터(인허가 원장·건축물대장·복지수급) 연계로 지표 정밀화</a:t>
+            </a:r>
+          </a:p>
+        </p:txBody>
+      </p:sp>
+      <p:sp>
+        <p:nvSpPr>
+          <p:cNvPr id="24" name="Rectangle 23"/>
+          <p:cNvSpPr/>
+          <p:nvPr/>
+        </p:nvSpPr>
+        <p:spPr>
+          <a:xfrm>
+            <a:off x="6510528" y="3968496"/>
+            <a:ext cx="68580" cy="566928"/>
           </a:xfrm>
           <a:prstGeom prst="rect">
             <a:avLst/>
@@ -12752,14 +13810,14 @@
       </p:sp>
       <p:sp>
         <p:nvSpPr>
-          <p:cNvPr id="7" name="TextBox 6"/>
-          <p:cNvSpPr txBox="1"/>
-          <p:nvPr/>
-        </p:nvSpPr>
-        <p:spPr>
-          <a:xfrm>
-            <a:off x="932688" y="2414016"/>
-            <a:ext cx="2103120" cy="256032"/>
+          <p:cNvPr id="25" name="TextBox 24"/>
+          <p:cNvSpPr txBox="1"/>
+          <p:nvPr/>
+        </p:nvSpPr>
+        <p:spPr>
+          <a:xfrm>
+            <a:off x="6729983" y="3968496"/>
+            <a:ext cx="4754880" cy="256032"/>
           </a:xfrm>
           <a:prstGeom prst="rect">
             <a:avLst/>
@@ -12786,62 +13844,21 @@
                 <a:ea typeface="맑은 고딕"/>
                 <a:cs typeface="맑은 고딕"/>
               </a:rPr>
-              <a:t>예측 성능</a:t>
-            </a:r>
-          </a:p>
-        </p:txBody>
-      </p:sp>
-      <p:sp>
-        <p:nvSpPr>
-          <p:cNvPr id="8" name="TextBox 7"/>
-          <p:cNvSpPr txBox="1"/>
-          <p:nvPr/>
-        </p:nvSpPr>
-        <p:spPr>
-          <a:xfrm>
-            <a:off x="3172968" y="2414016"/>
-            <a:ext cx="8046720" cy="256032"/>
-          </a:xfrm>
-          <a:prstGeom prst="rect">
-            <a:avLst/>
-          </a:prstGeom>
-          <a:noFill/>
-        </p:spPr>
-        <p:txBody>
-          <a:bodyPr wrap="square" lIns="0" rIns="0" tIns="0" bIns="0">
-            <a:spAutoFit/>
-          </a:bodyPr>
-          <a:lstStyle/>
-          <a:p>
-            <a:pPr algn="l">
-              <a:lnSpc>
-                <a:spcPct val="135000"/>
-              </a:lnSpc>
-            </a:pPr>
-            <a:r>
-              <a:rPr sz="1200" b="1">
-                <a:solidFill>
-                  <a:srgbClr val="12151A"/>
-                </a:solidFill>
-                <a:latin typeface="맑은 고딕"/>
-                <a:ea typeface="맑은 고딕"/>
-                <a:cs typeface="맑은 고딕"/>
-              </a:rPr>
-              <a:t>3년 뒤 악화·개선 '방향'은 어느 정도 맞히지만, 변화의 '크기'까지는 아직 부족합니다.</a:t>
-            </a:r>
-          </a:p>
-        </p:txBody>
-      </p:sp>
-      <p:sp>
-        <p:nvSpPr>
-          <p:cNvPr id="9" name="TextBox 8"/>
-          <p:cNvSpPr txBox="1"/>
-          <p:nvPr/>
-        </p:nvSpPr>
-        <p:spPr>
-          <a:xfrm>
-            <a:off x="3172968" y="2706624"/>
-            <a:ext cx="8046720" cy="384048"/>
+              <a:t>3단계 · 6개월</a:t>
+            </a:r>
+          </a:p>
+        </p:txBody>
+      </p:sp>
+      <p:sp>
+        <p:nvSpPr>
+          <p:cNvPr id="26" name="TextBox 25"/>
+          <p:cNvSpPr txBox="1"/>
+          <p:nvPr/>
+        </p:nvSpPr>
+        <p:spPr>
+          <a:xfrm>
+            <a:off x="6729983" y="4242816"/>
+            <a:ext cx="4754880" cy="365760"/>
           </a:xfrm>
           <a:prstGeom prst="rect">
             <a:avLst/>
@@ -12860,7 +13877,7 @@
               </a:lnSpc>
             </a:pPr>
             <a:r>
-              <a:rPr sz="1080" b="0">
+              <a:rPr sz="1100" b="0">
                 <a:solidFill>
                   <a:srgbClr val="52514E"/>
                 </a:solidFill>
@@ -12868,34 +13885,30 @@
                 <a:ea typeface="맑은 고딕"/>
                 <a:cs typeface="맑은 고딕"/>
               </a:rPr>
-              <a:t>→ 위험도 수준은 자기상관이 강해 '그대로 간다'는 예측이 이미 강력한 기준선입니다. 현재는 인구 축만 실데이터라, 상권 개·폐업 시계열이 더해지면 나아질 것으로 봅니다.</a:t>
-            </a:r>
-          </a:p>
-        </p:txBody>
-      </p:sp>
-      <p:sp>
-        <p:nvSpPr>
-          <p:cNvPr id="10" name="Rounded Rectangle 9"/>
+              <a:t>500m 격자 단위로 공간해상도 상향 — 표본 확대로 예측모델 성능 개선</a:t>
+            </a:r>
+          </a:p>
+        </p:txBody>
+      </p:sp>
+      <p:sp>
+        <p:nvSpPr>
+          <p:cNvPr id="27" name="Rectangle 26"/>
           <p:cNvSpPr/>
           <p:nvPr/>
         </p:nvSpPr>
         <p:spPr>
           <a:xfrm>
-            <a:off x="658368" y="3310128"/>
-            <a:ext cx="10874959" cy="896112"/>
-          </a:xfrm>
-          <a:prstGeom prst="roundRect">
-            <a:avLst>
-              <a:gd name="adj" fmla="val 6000"/>
-            </a:avLst>
+            <a:off x="6510528" y="4718304"/>
+            <a:ext cx="68580" cy="566928"/>
+          </a:xfrm>
+          <a:prstGeom prst="rect">
+            <a:avLst/>
           </a:prstGeom>
           <a:solidFill>
-            <a:srgbClr val="FFFFFF"/>
+            <a:srgbClr val="2A78D6"/>
           </a:solidFill>
-          <a:ln w="12700">
-            <a:solidFill>
-              <a:srgbClr val="E4E7EC"/>
-            </a:solidFill>
+          <a:ln>
+            <a:noFill/>
           </a:ln>
           <a:effectLst/>
         </p:spPr>
@@ -12921,20 +13934,104 @@
       </p:sp>
       <p:sp>
         <p:nvSpPr>
-          <p:cNvPr id="11" name="Rectangle 10"/>
+          <p:cNvPr id="28" name="TextBox 27"/>
+          <p:cNvSpPr txBox="1"/>
+          <p:nvPr/>
+        </p:nvSpPr>
+        <p:spPr>
+          <a:xfrm>
+            <a:off x="6729983" y="4718304"/>
+            <a:ext cx="4754880" cy="256032"/>
+          </a:xfrm>
+          <a:prstGeom prst="rect">
+            <a:avLst/>
+          </a:prstGeom>
+          <a:noFill/>
+        </p:spPr>
+        <p:txBody>
+          <a:bodyPr wrap="square" lIns="0" rIns="0" tIns="0" bIns="0">
+            <a:spAutoFit/>
+          </a:bodyPr>
+          <a:lstStyle/>
+          <a:p>
+            <a:pPr algn="l">
+              <a:lnSpc>
+                <a:spcPct val="135000"/>
+              </a:lnSpc>
+            </a:pPr>
+            <a:r>
+              <a:rPr sz="1250" b="1">
+                <a:solidFill>
+                  <a:srgbClr val="2A78D6"/>
+                </a:solidFill>
+                <a:latin typeface="맑은 고딕"/>
+                <a:ea typeface="맑은 고딕"/>
+                <a:cs typeface="맑은 고딕"/>
+              </a:rPr>
+              <a:t>4단계 · 1년</a:t>
+            </a:r>
+          </a:p>
+        </p:txBody>
+      </p:sp>
+      <p:sp>
+        <p:nvSpPr>
+          <p:cNvPr id="29" name="TextBox 28"/>
+          <p:cNvSpPr txBox="1"/>
+          <p:nvPr/>
+        </p:nvSpPr>
+        <p:spPr>
+          <a:xfrm>
+            <a:off x="6729983" y="4992624"/>
+            <a:ext cx="4754880" cy="365760"/>
+          </a:xfrm>
+          <a:prstGeom prst="rect">
+            <a:avLst/>
+          </a:prstGeom>
+          <a:noFill/>
+        </p:spPr>
+        <p:txBody>
+          <a:bodyPr wrap="square" lIns="0" rIns="0" tIns="0" bIns="0">
+            <a:spAutoFit/>
+          </a:bodyPr>
+          <a:lstStyle/>
+          <a:p>
+            <a:pPr algn="l">
+              <a:lnSpc>
+                <a:spcPct val="140000"/>
+              </a:lnSpc>
+            </a:pPr>
+            <a:r>
+              <a:rPr sz="1100" b="0">
+                <a:solidFill>
+                  <a:srgbClr val="52514E"/>
+                </a:solidFill>
+                <a:latin typeface="맑은 고딕"/>
+                <a:ea typeface="맑은 고딕"/>
+                <a:cs typeface="맑은 고딕"/>
+              </a:rPr>
+              <a:t>천안시 행정포털 대시보드 내재화, 연 1회 자동 갱신 체계 정착</a:t>
+            </a:r>
+          </a:p>
+        </p:txBody>
+      </p:sp>
+      <p:sp>
+        <p:nvSpPr>
+          <p:cNvPr id="30" name="Rounded Rectangle 29"/>
           <p:cNvSpPr/>
           <p:nvPr/>
         </p:nvSpPr>
         <p:spPr>
           <a:xfrm>
-            <a:off x="658368" y="3310128"/>
-            <a:ext cx="68580" cy="896112"/>
-          </a:xfrm>
-          <a:prstGeom prst="rect">
-            <a:avLst/>
+            <a:off x="658368" y="5504688"/>
+            <a:ext cx="10874959" cy="822960"/>
+          </a:xfrm>
+          <a:prstGeom prst="roundRect">
+            <a:avLst>
+              <a:gd name="adj" fmla="val 6000"/>
+            </a:avLst>
           </a:prstGeom>
           <a:solidFill>
-            <a:srgbClr val="EDA100"/>
+            <a:srgbClr val="F6F7F9"/>
           </a:solidFill>
           <a:ln>
             <a:noFill/>
@@ -12963,74 +14060,33 @@
       </p:sp>
       <p:sp>
         <p:nvSpPr>
-          <p:cNvPr id="12" name="TextBox 11"/>
-          <p:cNvSpPr txBox="1"/>
-          <p:nvPr/>
-        </p:nvSpPr>
-        <p:spPr>
-          <a:xfrm>
-            <a:off x="932688" y="3438144"/>
-            <a:ext cx="2103120" cy="256032"/>
-          </a:xfrm>
-          <a:prstGeom prst="rect">
-            <a:avLst/>
-          </a:prstGeom>
-          <a:noFill/>
-        </p:spPr>
-        <p:txBody>
-          <a:bodyPr wrap="square" lIns="0" rIns="0" tIns="0" bIns="0">
-            <a:spAutoFit/>
-          </a:bodyPr>
-          <a:lstStyle/>
-          <a:p>
-            <a:pPr algn="l">
-              <a:lnSpc>
-                <a:spcPct val="135000"/>
-              </a:lnSpc>
-            </a:pPr>
-            <a:r>
-              <a:rPr sz="1250" b="1">
-                <a:solidFill>
-                  <a:srgbClr val="EDA100"/>
-                </a:solidFill>
-                <a:latin typeface="맑은 고딕"/>
-                <a:ea typeface="맑은 고딕"/>
-                <a:cs typeface="맑은 고딕"/>
-              </a:rPr>
-              <a:t>표본 크기</a:t>
-            </a:r>
-          </a:p>
-        </p:txBody>
-      </p:sp>
-      <p:sp>
-        <p:nvSpPr>
-          <p:cNvPr id="13" name="TextBox 12"/>
-          <p:cNvSpPr txBox="1"/>
-          <p:nvPr/>
-        </p:nvSpPr>
-        <p:spPr>
-          <a:xfrm>
-            <a:off x="3172968" y="3438144"/>
-            <a:ext cx="8046720" cy="256032"/>
-          </a:xfrm>
-          <a:prstGeom prst="rect">
-            <a:avLst/>
-          </a:prstGeom>
-          <a:noFill/>
-        </p:spPr>
-        <p:txBody>
-          <a:bodyPr wrap="square" lIns="0" rIns="0" tIns="0" bIns="0">
-            <a:spAutoFit/>
-          </a:bodyPr>
-          <a:lstStyle/>
-          <a:p>
-            <a:pPr algn="l">
-              <a:lnSpc>
-                <a:spcPct val="135000"/>
-              </a:lnSpc>
-            </a:pPr>
-            <a:r>
-              <a:rPr sz="1200" b="1">
+          <p:cNvPr id="31" name="TextBox 30"/>
+          <p:cNvSpPr txBox="1"/>
+          <p:nvPr/>
+        </p:nvSpPr>
+        <p:spPr>
+          <a:xfrm>
+            <a:off x="932688" y="5687568"/>
+            <a:ext cx="10515600" cy="502920"/>
+          </a:xfrm>
+          <a:prstGeom prst="rect">
+            <a:avLst/>
+          </a:prstGeom>
+          <a:noFill/>
+        </p:spPr>
+        <p:txBody>
+          <a:bodyPr wrap="square" lIns="0" rIns="0" tIns="0" bIns="0">
+            <a:spAutoFit/>
+          </a:bodyPr>
+          <a:lstStyle/>
+          <a:p>
+            <a:pPr algn="l">
+              <a:lnSpc>
+                <a:spcPct val="150000"/>
+              </a:lnSpc>
+            </a:pPr>
+            <a:r>
+              <a:rPr sz="1200" b="0">
                 <a:solidFill>
                   <a:srgbClr val="12151A"/>
                 </a:solidFill>
@@ -13038,210 +14094,20 @@
                 <a:ea typeface="맑은 고딕"/>
                 <a:cs typeface="맑은 고딕"/>
               </a:rPr>
-              <a:t>분석 단위가 25개 생활권이라 머신러닝 표본으로는 작습니다.</a:t>
-            </a:r>
-          </a:p>
-        </p:txBody>
-      </p:sp>
-      <p:sp>
-        <p:nvSpPr>
-          <p:cNvPr id="14" name="TextBox 13"/>
-          <p:cNvSpPr txBox="1"/>
-          <p:nvPr/>
-        </p:nvSpPr>
-        <p:spPr>
-          <a:xfrm>
-            <a:off x="3172968" y="3730752"/>
-            <a:ext cx="8046720" cy="384048"/>
-          </a:xfrm>
-          <a:prstGeom prst="rect">
-            <a:avLst/>
-          </a:prstGeom>
-          <a:noFill/>
-        </p:spPr>
-        <p:txBody>
-          <a:bodyPr wrap="square" lIns="0" rIns="0" tIns="0" bIns="0">
-            <a:spAutoFit/>
-          </a:bodyPr>
-          <a:lstStyle/>
-          <a:p>
-            <a:pPr algn="l">
-              <a:lnSpc>
-                <a:spcPct val="140000"/>
-              </a:lnSpc>
-            </a:pPr>
-            <a:r>
-              <a:rPr sz="1080" b="0">
-                <a:solidFill>
-                  <a:srgbClr val="52514E"/>
-                </a:solidFill>
-                <a:latin typeface="맑은 고딕"/>
-                <a:ea typeface="맑은 고딕"/>
-                <a:cs typeface="맑은 고딕"/>
-              </a:rPr>
-              <a:t>→ 500m 격자 단위로 내리면 표본이 수천 개로 늘어납니다. 지금은 규제를 강하게 걸고 Leave-One-Zone-Out CV와 베이스라인 비교로 과적합 여부를 확인하고 있습니다.</a:t>
-            </a:r>
-          </a:p>
-        </p:txBody>
-      </p:sp>
-      <p:sp>
-        <p:nvSpPr>
-          <p:cNvPr id="15" name="Rounded Rectangle 14"/>
-          <p:cNvSpPr/>
-          <p:nvPr/>
-        </p:nvSpPr>
-        <p:spPr>
-          <a:xfrm>
-            <a:off x="658368" y="4334256"/>
-            <a:ext cx="10874959" cy="896112"/>
-          </a:xfrm>
-          <a:prstGeom prst="roundRect">
-            <a:avLst>
-              <a:gd name="adj" fmla="val 6000"/>
-            </a:avLst>
-          </a:prstGeom>
-          <a:solidFill>
-            <a:srgbClr val="FFFFFF"/>
-          </a:solidFill>
-          <a:ln w="12700">
-            <a:solidFill>
-              <a:srgbClr val="E4E7EC"/>
-            </a:solidFill>
-          </a:ln>
-          <a:effectLst/>
-        </p:spPr>
-        <p:style>
-          <a:lnRef idx="1">
-            <a:schemeClr val="accent1"/>
-          </a:lnRef>
-          <a:fillRef idx="3">
-            <a:schemeClr val="accent1"/>
-          </a:fillRef>
-          <a:effectRef idx="2">
-            <a:schemeClr val="accent1"/>
-          </a:effectRef>
-          <a:fontRef idx="minor">
-            <a:schemeClr val="lt1"/>
-          </a:fontRef>
-        </p:style>
-        <p:txBody>
-          <a:bodyPr rtlCol="0" anchor="ctr"/>
-          <a:lstStyle/>
-          <a:p/>
-        </p:txBody>
-      </p:sp>
-      <p:sp>
-        <p:nvSpPr>
-          <p:cNvPr id="16" name="Rectangle 15"/>
-          <p:cNvSpPr/>
-          <p:nvPr/>
-        </p:nvSpPr>
-        <p:spPr>
-          <a:xfrm>
-            <a:off x="658368" y="4334256"/>
-            <a:ext cx="68580" cy="896112"/>
-          </a:xfrm>
-          <a:prstGeom prst="rect">
-            <a:avLst/>
-          </a:prstGeom>
-          <a:solidFill>
-            <a:srgbClr val="EDA100"/>
-          </a:solidFill>
-          <a:ln>
-            <a:noFill/>
-          </a:ln>
-          <a:effectLst/>
-        </p:spPr>
-        <p:style>
-          <a:lnRef idx="1">
-            <a:schemeClr val="accent1"/>
-          </a:lnRef>
-          <a:fillRef idx="3">
-            <a:schemeClr val="accent1"/>
-          </a:fillRef>
-          <a:effectRef idx="2">
-            <a:schemeClr val="accent1"/>
-          </a:effectRef>
-          <a:fontRef idx="minor">
-            <a:schemeClr val="lt1"/>
-          </a:fontRef>
-        </p:style>
-        <p:txBody>
-          <a:bodyPr rtlCol="0" anchor="ctr"/>
-          <a:lstStyle/>
-          <a:p/>
-        </p:txBody>
-      </p:sp>
-      <p:sp>
-        <p:nvSpPr>
-          <p:cNvPr id="17" name="TextBox 16"/>
-          <p:cNvSpPr txBox="1"/>
-          <p:nvPr/>
-        </p:nvSpPr>
-        <p:spPr>
-          <a:xfrm>
-            <a:off x="932688" y="4462272"/>
-            <a:ext cx="2103120" cy="256032"/>
-          </a:xfrm>
-          <a:prstGeom prst="rect">
-            <a:avLst/>
-          </a:prstGeom>
-          <a:noFill/>
-        </p:spPr>
-        <p:txBody>
-          <a:bodyPr wrap="square" lIns="0" rIns="0" tIns="0" bIns="0">
-            <a:spAutoFit/>
-          </a:bodyPr>
-          <a:lstStyle/>
-          <a:p>
-            <a:pPr algn="l">
-              <a:lnSpc>
-                <a:spcPct val="135000"/>
-              </a:lnSpc>
-            </a:pPr>
-            <a:r>
-              <a:rPr sz="1250" b="1">
-                <a:solidFill>
-                  <a:srgbClr val="EDA100"/>
-                </a:solidFill>
-                <a:latin typeface="맑은 고딕"/>
-                <a:ea typeface="맑은 고딕"/>
-                <a:cs typeface="맑은 고딕"/>
-              </a:rPr>
-              <a:t>공간 해상도</a:t>
-            </a:r>
-          </a:p>
-        </p:txBody>
-      </p:sp>
-      <p:sp>
-        <p:nvSpPr>
-          <p:cNvPr id="18" name="TextBox 17"/>
-          <p:cNvSpPr txBox="1"/>
-          <p:nvPr/>
-        </p:nvSpPr>
-        <p:spPr>
-          <a:xfrm>
-            <a:off x="3172968" y="4462272"/>
-            <a:ext cx="8046720" cy="256032"/>
-          </a:xfrm>
-          <a:prstGeom prst="rect">
-            <a:avLst/>
-          </a:prstGeom>
-          <a:noFill/>
-        </p:spPr>
-        <p:txBody>
-          <a:bodyPr wrap="square" lIns="0" rIns="0" tIns="0" bIns="0">
-            <a:spAutoFit/>
-          </a:bodyPr>
-          <a:lstStyle/>
-          <a:p>
-            <a:pPr algn="l">
-              <a:lnSpc>
-                <a:spcPct val="135000"/>
-              </a:lnSpc>
-            </a:pPr>
-            <a:r>
-              <a:rPr sz="1200" b="1">
+              <a:t>다른 지역에도 — 공간단위 정의(config.py)만 바꾸면 아산·청주 등에도 같은 방식으로 쓸 수 있습니다.</a:t>
+            </a:r>
+          </a:p>
+          <a:p>
+            <a:pPr algn="l">
+              <a:lnSpc>
+                <a:spcPct val="150000"/>
+              </a:lnSpc>
+              <a:spcBef>
+                <a:spcPts val="0"/>
+              </a:spcBef>
+            </a:pPr>
+            <a:r>
+              <a:rPr sz="1200" b="0">
                 <a:solidFill>
                   <a:srgbClr val="12151A"/>
                 </a:solidFill>
@@ -13249,266 +14115,14 @@
                 <a:ea typeface="맑은 고딕"/>
                 <a:cs typeface="맑은 고딕"/>
               </a:rPr>
-              <a:t>생활권 안쪽의 차이(같은 동 안의 편차)는 잡히지 않습니다.</a:t>
-            </a:r>
-          </a:p>
-        </p:txBody>
-      </p:sp>
-      <p:sp>
-        <p:nvSpPr>
-          <p:cNvPr id="19" name="TextBox 18"/>
-          <p:cNvSpPr txBox="1"/>
-          <p:nvPr/>
-        </p:nvSpPr>
-        <p:spPr>
-          <a:xfrm>
-            <a:off x="3172968" y="4754880"/>
-            <a:ext cx="8046720" cy="384048"/>
-          </a:xfrm>
-          <a:prstGeom prst="rect">
-            <a:avLst/>
-          </a:prstGeom>
-          <a:noFill/>
-        </p:spPr>
-        <p:txBody>
-          <a:bodyPr wrap="square" lIns="0" rIns="0" tIns="0" bIns="0">
-            <a:spAutoFit/>
-          </a:bodyPr>
-          <a:lstStyle/>
-          <a:p>
-            <a:pPr algn="l">
-              <a:lnSpc>
-                <a:spcPct val="140000"/>
-              </a:lnSpc>
-            </a:pPr>
-            <a:r>
-              <a:rPr sz="1080" b="0">
-                <a:solidFill>
-                  <a:srgbClr val="52514E"/>
-                </a:solidFill>
-                <a:latin typeface="맑은 고딕"/>
-                <a:ea typeface="맑은 고딕"/>
-                <a:cs typeface="맑은 고딕"/>
-              </a:rPr>
-              <a:t>→ 집계구·격자 데이터로 바꾸면 해결됩니다. 공간단위 정의만 교체하면 되도록 만들어 두었습니다.</a:t>
-            </a:r>
-          </a:p>
-        </p:txBody>
-      </p:sp>
-      <p:sp>
-        <p:nvSpPr>
-          <p:cNvPr id="20" name="Rounded Rectangle 19"/>
-          <p:cNvSpPr/>
-          <p:nvPr/>
-        </p:nvSpPr>
-        <p:spPr>
-          <a:xfrm>
-            <a:off x="658368" y="5358384"/>
-            <a:ext cx="10874959" cy="896112"/>
-          </a:xfrm>
-          <a:prstGeom prst="roundRect">
-            <a:avLst>
-              <a:gd name="adj" fmla="val 6000"/>
-            </a:avLst>
-          </a:prstGeom>
-          <a:solidFill>
-            <a:srgbClr val="FFFFFF"/>
-          </a:solidFill>
-          <a:ln w="12700">
-            <a:solidFill>
-              <a:srgbClr val="E4E7EC"/>
-            </a:solidFill>
-          </a:ln>
-          <a:effectLst/>
-        </p:spPr>
-        <p:style>
-          <a:lnRef idx="1">
-            <a:schemeClr val="accent1"/>
-          </a:lnRef>
-          <a:fillRef idx="3">
-            <a:schemeClr val="accent1"/>
-          </a:fillRef>
-          <a:effectRef idx="2">
-            <a:schemeClr val="accent1"/>
-          </a:effectRef>
-          <a:fontRef idx="minor">
-            <a:schemeClr val="lt1"/>
-          </a:fontRef>
-        </p:style>
-        <p:txBody>
-          <a:bodyPr rtlCol="0" anchor="ctr"/>
-          <a:lstStyle/>
-          <a:p/>
-        </p:txBody>
-      </p:sp>
-      <p:sp>
-        <p:nvSpPr>
-          <p:cNvPr id="21" name="Rectangle 20"/>
-          <p:cNvSpPr/>
-          <p:nvPr/>
-        </p:nvSpPr>
-        <p:spPr>
-          <a:xfrm>
-            <a:off x="658368" y="5358384"/>
-            <a:ext cx="68580" cy="896112"/>
-          </a:xfrm>
-          <a:prstGeom prst="rect">
-            <a:avLst/>
-          </a:prstGeom>
-          <a:solidFill>
-            <a:srgbClr val="EDA100"/>
-          </a:solidFill>
-          <a:ln>
-            <a:noFill/>
-          </a:ln>
-          <a:effectLst/>
-        </p:spPr>
-        <p:style>
-          <a:lnRef idx="1">
-            <a:schemeClr val="accent1"/>
-          </a:lnRef>
-          <a:fillRef idx="3">
-            <a:schemeClr val="accent1"/>
-          </a:fillRef>
-          <a:effectRef idx="2">
-            <a:schemeClr val="accent1"/>
-          </a:effectRef>
-          <a:fontRef idx="minor">
-            <a:schemeClr val="lt1"/>
-          </a:fontRef>
-        </p:style>
-        <p:txBody>
-          <a:bodyPr rtlCol="0" anchor="ctr"/>
-          <a:lstStyle/>
-          <a:p/>
-        </p:txBody>
-      </p:sp>
-      <p:sp>
-        <p:nvSpPr>
-          <p:cNvPr id="22" name="TextBox 21"/>
-          <p:cNvSpPr txBox="1"/>
-          <p:nvPr/>
-        </p:nvSpPr>
-        <p:spPr>
-          <a:xfrm>
-            <a:off x="932688" y="5486400"/>
-            <a:ext cx="2103120" cy="256032"/>
-          </a:xfrm>
-          <a:prstGeom prst="rect">
-            <a:avLst/>
-          </a:prstGeom>
-          <a:noFill/>
-        </p:spPr>
-        <p:txBody>
-          <a:bodyPr wrap="square" lIns="0" rIns="0" tIns="0" bIns="0">
-            <a:spAutoFit/>
-          </a:bodyPr>
-          <a:lstStyle/>
-          <a:p>
-            <a:pPr algn="l">
-              <a:lnSpc>
-                <a:spcPct val="135000"/>
-              </a:lnSpc>
-            </a:pPr>
-            <a:r>
-              <a:rPr sz="1250" b="1">
-                <a:solidFill>
-                  <a:srgbClr val="EDA100"/>
-                </a:solidFill>
-                <a:latin typeface="맑은 고딕"/>
-                <a:ea typeface="맑은 고딕"/>
-                <a:cs typeface="맑은 고딕"/>
-              </a:rPr>
-              <a:t>인과 아닌 상관</a:t>
-            </a:r>
-          </a:p>
-        </p:txBody>
-      </p:sp>
-      <p:sp>
-        <p:nvSpPr>
-          <p:cNvPr id="23" name="TextBox 22"/>
-          <p:cNvSpPr txBox="1"/>
-          <p:nvPr/>
-        </p:nvSpPr>
-        <p:spPr>
-          <a:xfrm>
-            <a:off x="3172968" y="5486400"/>
-            <a:ext cx="8046720" cy="256032"/>
-          </a:xfrm>
-          <a:prstGeom prst="rect">
-            <a:avLst/>
-          </a:prstGeom>
-          <a:noFill/>
-        </p:spPr>
-        <p:txBody>
-          <a:bodyPr wrap="square" lIns="0" rIns="0" tIns="0" bIns="0">
-            <a:spAutoFit/>
-          </a:bodyPr>
-          <a:lstStyle/>
-          <a:p>
-            <a:pPr algn="l">
-              <a:lnSpc>
-                <a:spcPct val="135000"/>
-              </a:lnSpc>
-            </a:pPr>
-            <a:r>
-              <a:rPr sz="1200" b="1">
-                <a:solidFill>
-                  <a:srgbClr val="12151A"/>
-                </a:solidFill>
-                <a:latin typeface="맑은 고딕"/>
-                <a:ea typeface="맑은 고딕"/>
-                <a:cs typeface="맑은 고딕"/>
-              </a:rPr>
-              <a:t>이 모델은 변화를 미리 살펴볼 뿐, 사업의 효과를 증명하지는 못합니다.</a:t>
-            </a:r>
-          </a:p>
-        </p:txBody>
-      </p:sp>
-      <p:sp>
-        <p:nvSpPr>
-          <p:cNvPr id="24" name="TextBox 23"/>
-          <p:cNvSpPr txBox="1"/>
-          <p:nvPr/>
-        </p:nvSpPr>
-        <p:spPr>
-          <a:xfrm>
-            <a:off x="3172968" y="5779008"/>
-            <a:ext cx="8046720" cy="384048"/>
-          </a:xfrm>
-          <a:prstGeom prst="rect">
-            <a:avLst/>
-          </a:prstGeom>
-          <a:noFill/>
-        </p:spPr>
-        <p:txBody>
-          <a:bodyPr wrap="square" lIns="0" rIns="0" tIns="0" bIns="0">
-            <a:spAutoFit/>
-          </a:bodyPr>
-          <a:lstStyle/>
-          <a:p>
-            <a:pPr algn="l">
-              <a:lnSpc>
-                <a:spcPct val="140000"/>
-              </a:lnSpc>
-            </a:pPr>
-            <a:r>
-              <a:rPr sz="1080" b="0">
-                <a:solidFill>
-                  <a:srgbClr val="52514E"/>
-                </a:solidFill>
-                <a:latin typeface="맑은 고딕"/>
-                <a:ea typeface="맑은 고딕"/>
-                <a:cs typeface="맑은 고딕"/>
-              </a:rPr>
-              <a:t>→ 시행 전후 이중차분(DID) 설계를 덧붙이면 효과 검증까지 넓힐 수 있습니다.</a:t>
-            </a:r>
-          </a:p>
-        </p:txBody>
-      </p:sp>
-      <p:sp>
-        <p:nvSpPr>
-          <p:cNvPr id="25" name="TextBox 24"/>
+              <a:t>원도심 공동화는 천안만의 일이 아니어서, 도움이 된다면 충남 시군이 함께 쓰는 자료가 되어도 좋겠습니다.</a:t>
+            </a:r>
+          </a:p>
+        </p:txBody>
+      </p:sp>
+      <p:sp>
+        <p:nvSpPr>
+          <p:cNvPr id="32" name="TextBox 31"/>
           <p:cNvSpPr txBox="1"/>
           <p:nvPr/>
         </p:nvSpPr>
@@ -13549,7 +14163,7 @@
       </p:sp>
       <p:sp>
         <p:nvSpPr>
-          <p:cNvPr id="26" name="TextBox 25"/>
+          <p:cNvPr id="33" name="TextBox 32"/>
           <p:cNvSpPr txBox="1"/>
           <p:nvPr/>
         </p:nvSpPr>
@@ -13894,7 +14508,7 @@
                 <a:ea typeface="맑은 고딕"/>
                 <a:cs typeface="맑은 고딕"/>
               </a:rPr>
-              <a:t>1.29배</a:t>
+              <a:t>1.82배</a:t>
             </a:r>
           </a:p>
         </p:txBody>
@@ -13935,7 +14549,7 @@
                 <a:ea typeface="맑은 고딕"/>
                 <a:cs typeface="맑은 고딕"/>
               </a:rPr>
-              <a:t>신도심 48.9 vs 원도심 38.1</a:t>
+              <a:t>신도심 57.0 vs 원도심 31.3</a:t>
             </a:r>
           </a:p>
         </p:txBody>
@@ -14105,7 +14719,7 @@
                 <a:ea typeface="맑은 고딕"/>
                 <a:cs typeface="맑은 고딕"/>
               </a:rPr>
-              <a:t>0.421</a:t>
+              <a:t>0.204</a:t>
             </a:r>
           </a:p>
         </p:txBody>
@@ -14316,7 +14930,7 @@
                 <a:ea typeface="맑은 고딕"/>
                 <a:cs typeface="맑은 고딕"/>
               </a:rPr>
-              <a:t>69%</a:t>
+              <a:t>72%</a:t>
             </a:r>
           </a:p>
         </p:txBody>
@@ -14357,7 +14971,7 @@
                 <a:ea typeface="맑은 고딕"/>
                 <a:cs typeface="맑은 고딕"/>
               </a:rPr>
-              <a:t>베이스라인 대비 MAE +5.3%</a:t>
+              <a:t>베이스라인 대비 MAE +3.0%</a:t>
             </a:r>
           </a:p>
         </p:txBody>
@@ -14527,7 +15141,7 @@
                 <a:ea typeface="맑은 고딕"/>
                 <a:cs typeface="맑은 고딕"/>
               </a:rPr>
-              <a:t>데이터 대기</a:t>
+              <a:t>188,907명</a:t>
             </a:r>
           </a:p>
         </p:txBody>
@@ -14568,7 +15182,7 @@
                 <a:ea typeface="맑은 고딕"/>
                 <a:cs typeface="맑은 고딕"/>
               </a:rPr>
-              <a:t>생활SOC 위치 자료 필요</a:t>
+              <a:t>12개소 · 커버리지 +28.6%p</a:t>
             </a:r>
           </a:p>
         </p:txBody>
@@ -15285,7 +15899,7 @@
                 <a:ea typeface="맑은 고딕"/>
                 <a:cs typeface="맑은 고딕"/>
               </a:rPr>
-              <a:t>생활권별 지수와 유형, 3년 뒤 전망과 그 이유, 0개소 우선순위표입니다.</a:t>
+              <a:t>생활권별 지수와 유형, 3년 뒤 전망과 그 이유, 12개소 우선순위표입니다.</a:t>
             </a:r>
           </a:p>
           <a:p>
@@ -15447,7 +16061,7 @@
                 <a:ea typeface="맑은 고딕"/>
                 <a:cs typeface="맑은 고딕"/>
               </a:rPr>
-              <a:t>INTEGRITY</a:t>
+              <a:t>LIMITATION</a:t>
             </a:r>
           </a:p>
         </p:txBody>
@@ -15488,21 +16102,62 @@
                 <a:ea typeface="맑은 고딕"/>
                 <a:cs typeface="맑은 고딕"/>
               </a:rPr>
-              <a:t>재현성과 데이터 윤리</a:t>
-            </a:r>
-          </a:p>
-        </p:txBody>
-      </p:sp>
-      <p:sp>
-        <p:nvSpPr>
-          <p:cNvPr id="4" name="Rounded Rectangle 3"/>
+              <a:t>저희가 아직 못 한 부분을 먼저 말씀드립니다</a:t>
+            </a:r>
+          </a:p>
+        </p:txBody>
+      </p:sp>
+      <p:sp>
+        <p:nvSpPr>
+          <p:cNvPr id="4" name="TextBox 3"/>
+          <p:cNvSpPr txBox="1"/>
+          <p:nvPr/>
+        </p:nvSpPr>
+        <p:spPr>
+          <a:xfrm>
+            <a:off x="658368" y="1517904"/>
+            <a:ext cx="10874959" cy="411480"/>
+          </a:xfrm>
+          <a:prstGeom prst="rect">
+            <a:avLst/>
+          </a:prstGeom>
+          <a:noFill/>
+        </p:spPr>
+        <p:txBody>
+          <a:bodyPr wrap="square" lIns="0" rIns="0" tIns="0" bIns="0">
+            <a:spAutoFit/>
+          </a:bodyPr>
+          <a:lstStyle/>
+          <a:p>
+            <a:pPr algn="l">
+              <a:lnSpc>
+                <a:spcPct val="145000"/>
+              </a:lnSpc>
+            </a:pPr>
+            <a:r>
+              <a:rPr sz="1350" b="0">
+                <a:solidFill>
+                  <a:srgbClr val="52514E"/>
+                </a:solidFill>
+                <a:latin typeface="맑은 고딕"/>
+                <a:ea typeface="맑은 고딕"/>
+                <a:cs typeface="맑은 고딕"/>
+              </a:rPr>
+              <a:t>행정에 쓰이는 자료인 만큼, 어디까지 믿고 쓰실 수 있는지 분명히 알려드리는 것이 도리라고 생각했습니다.</a:t>
+            </a:r>
+          </a:p>
+        </p:txBody>
+      </p:sp>
+      <p:sp>
+        <p:nvSpPr>
+          <p:cNvPr id="5" name="Rounded Rectangle 4"/>
           <p:cNvSpPr/>
           <p:nvPr/>
         </p:nvSpPr>
         <p:spPr>
           <a:xfrm>
-            <a:off x="658368" y="2121408"/>
-            <a:ext cx="5257800" cy="2487168"/>
+            <a:off x="658368" y="2286000"/>
+            <a:ext cx="10874959" cy="896112"/>
           </a:xfrm>
           <a:prstGeom prst="roundRect">
             <a:avLst>
@@ -15541,20 +16196,20 @@
       </p:sp>
       <p:sp>
         <p:nvSpPr>
-          <p:cNvPr id="5" name="Rectangle 4"/>
+          <p:cNvPr id="6" name="Rectangle 5"/>
           <p:cNvSpPr/>
           <p:nvPr/>
         </p:nvSpPr>
         <p:spPr>
           <a:xfrm>
-            <a:off x="658368" y="2121408"/>
-            <a:ext cx="5257800" cy="68580"/>
+            <a:off x="658368" y="2286000"/>
+            <a:ext cx="68580" cy="896112"/>
           </a:xfrm>
           <a:prstGeom prst="rect">
             <a:avLst/>
           </a:prstGeom>
           <a:solidFill>
-            <a:srgbClr val="1BAF7A"/>
+            <a:srgbClr val="EDA100"/>
           </a:solidFill>
           <a:ln>
             <a:noFill/>
@@ -15583,14 +16238,14 @@
       </p:sp>
       <p:sp>
         <p:nvSpPr>
-          <p:cNvPr id="6" name="TextBox 5"/>
-          <p:cNvSpPr txBox="1"/>
-          <p:nvPr/>
-        </p:nvSpPr>
-        <p:spPr>
-          <a:xfrm>
-            <a:off x="932688" y="2340864"/>
-            <a:ext cx="4114800" cy="274320"/>
+          <p:cNvPr id="7" name="TextBox 6"/>
+          <p:cNvSpPr txBox="1"/>
+          <p:nvPr/>
+        </p:nvSpPr>
+        <p:spPr>
+          <a:xfrm>
+            <a:off x="932688" y="2414016"/>
+            <a:ext cx="2103120" cy="256032"/>
           </a:xfrm>
           <a:prstGeom prst="rect">
             <a:avLst/>
@@ -15609,29 +16264,29 @@
               </a:lnSpc>
             </a:pPr>
             <a:r>
-              <a:rPr sz="1450" b="1">
-                <a:solidFill>
-                  <a:srgbClr val="1BAF7A"/>
-                </a:solidFill>
-                <a:latin typeface="맑은 고딕"/>
-                <a:ea typeface="맑은 고딕"/>
-                <a:cs typeface="맑은 고딕"/>
-              </a:rPr>
-              <a:t>재현성</a:t>
-            </a:r>
-          </a:p>
-        </p:txBody>
-      </p:sp>
-      <p:sp>
-        <p:nvSpPr>
-          <p:cNvPr id="7" name="TextBox 6"/>
-          <p:cNvSpPr txBox="1"/>
-          <p:nvPr/>
-        </p:nvSpPr>
-        <p:spPr>
-          <a:xfrm>
-            <a:off x="932688" y="2743200"/>
-            <a:ext cx="182880" cy="256032"/>
+              <a:rPr sz="1250" b="1">
+                <a:solidFill>
+                  <a:srgbClr val="EDA100"/>
+                </a:solidFill>
+                <a:latin typeface="맑은 고딕"/>
+                <a:ea typeface="맑은 고딕"/>
+                <a:cs typeface="맑은 고딕"/>
+              </a:rPr>
+              <a:t>예측 성능</a:t>
+            </a:r>
+          </a:p>
+        </p:txBody>
+      </p:sp>
+      <p:sp>
+        <p:nvSpPr>
+          <p:cNvPr id="8" name="TextBox 7"/>
+          <p:cNvSpPr txBox="1"/>
+          <p:nvPr/>
+        </p:nvSpPr>
+        <p:spPr>
+          <a:xfrm>
+            <a:off x="3172968" y="2414016"/>
+            <a:ext cx="8046720" cy="256032"/>
           </a:xfrm>
           <a:prstGeom prst="rect">
             <a:avLst/>
@@ -15650,29 +16305,29 @@
               </a:lnSpc>
             </a:pPr>
             <a:r>
-              <a:rPr sz="1300" b="1">
-                <a:solidFill>
-                  <a:srgbClr val="1BAF7A"/>
-                </a:solidFill>
-                <a:latin typeface="맑은 고딕"/>
-                <a:ea typeface="맑은 고딕"/>
-                <a:cs typeface="맑은 고딕"/>
-              </a:rPr>
-              <a:t>·</a:t>
-            </a:r>
-          </a:p>
-        </p:txBody>
-      </p:sp>
-      <p:sp>
-        <p:nvSpPr>
-          <p:cNvPr id="8" name="TextBox 7"/>
-          <p:cNvSpPr txBox="1"/>
-          <p:nvPr/>
-        </p:nvSpPr>
-        <p:spPr>
-          <a:xfrm>
-            <a:off x="1133856" y="2743200"/>
-            <a:ext cx="4572000" cy="411480"/>
+              <a:rPr sz="1200" b="1">
+                <a:solidFill>
+                  <a:srgbClr val="12151A"/>
+                </a:solidFill>
+                <a:latin typeface="맑은 고딕"/>
+                <a:ea typeface="맑은 고딕"/>
+                <a:cs typeface="맑은 고딕"/>
+              </a:rPr>
+              <a:t>3년 뒤 악화·개선 '방향'은 어느 정도 맞히지만, 변화의 '크기'까지는 아직 부족합니다.</a:t>
+            </a:r>
+          </a:p>
+        </p:txBody>
+      </p:sp>
+      <p:sp>
+        <p:nvSpPr>
+          <p:cNvPr id="9" name="TextBox 8"/>
+          <p:cNvSpPr txBox="1"/>
+          <p:nvPr/>
+        </p:nvSpPr>
+        <p:spPr>
+          <a:xfrm>
+            <a:off x="3172968" y="2706624"/>
+            <a:ext cx="8046720" cy="384048"/>
           </a:xfrm>
           <a:prstGeom prst="rect">
             <a:avLst/>
@@ -15691,275 +16346,29 @@
               </a:lnSpc>
             </a:pPr>
             <a:r>
-              <a:rPr sz="1100" b="0">
-                <a:solidFill>
-                  <a:srgbClr val="12151A"/>
-                </a:solidFill>
-                <a:latin typeface="맑은 고딕"/>
-                <a:ea typeface="맑은 고딕"/>
-                <a:cs typeface="맑은 고딕"/>
-              </a:rPr>
-              <a:t>전 과정이 공개 스크립트로 실행 — `python3 src/run_all.py` 한 줄</a:t>
-            </a:r>
-          </a:p>
-        </p:txBody>
-      </p:sp>
-      <p:sp>
-        <p:nvSpPr>
-          <p:cNvPr id="9" name="TextBox 8"/>
-          <p:cNvSpPr txBox="1"/>
-          <p:nvPr/>
-        </p:nvSpPr>
-        <p:spPr>
-          <a:xfrm>
-            <a:off x="932688" y="3218688"/>
-            <a:ext cx="182880" cy="256032"/>
-          </a:xfrm>
-          <a:prstGeom prst="rect">
-            <a:avLst/>
-          </a:prstGeom>
-          <a:noFill/>
-        </p:spPr>
-        <p:txBody>
-          <a:bodyPr wrap="square" lIns="0" rIns="0" tIns="0" bIns="0">
-            <a:spAutoFit/>
-          </a:bodyPr>
-          <a:lstStyle/>
-          <a:p>
-            <a:pPr algn="l">
-              <a:lnSpc>
-                <a:spcPct val="135000"/>
-              </a:lnSpc>
-            </a:pPr>
-            <a:r>
-              <a:rPr sz="1300" b="1">
-                <a:solidFill>
-                  <a:srgbClr val="1BAF7A"/>
-                </a:solidFill>
-                <a:latin typeface="맑은 고딕"/>
-                <a:ea typeface="맑은 고딕"/>
-                <a:cs typeface="맑은 고딕"/>
-              </a:rPr>
-              <a:t>·</a:t>
-            </a:r>
-          </a:p>
-        </p:txBody>
-      </p:sp>
-      <p:sp>
-        <p:nvSpPr>
-          <p:cNvPr id="10" name="TextBox 9"/>
-          <p:cNvSpPr txBox="1"/>
-          <p:nvPr/>
-        </p:nvSpPr>
-        <p:spPr>
-          <a:xfrm>
-            <a:off x="1133856" y="3218688"/>
-            <a:ext cx="4572000" cy="411480"/>
-          </a:xfrm>
-          <a:prstGeom prst="rect">
-            <a:avLst/>
-          </a:prstGeom>
-          <a:noFill/>
-        </p:spPr>
-        <p:txBody>
-          <a:bodyPr wrap="square" lIns="0" rIns="0" tIns="0" bIns="0">
-            <a:spAutoFit/>
-          </a:bodyPr>
-          <a:lstStyle/>
-          <a:p>
-            <a:pPr algn="l">
-              <a:lnSpc>
-                <a:spcPct val="140000"/>
-              </a:lnSpc>
-            </a:pPr>
-            <a:r>
-              <a:rPr sz="1100" b="0">
-                <a:solidFill>
-                  <a:srgbClr val="12151A"/>
-                </a:solidFill>
-                <a:latin typeface="맑은 고딕"/>
-                <a:ea typeface="맑은 고딕"/>
-                <a:cs typeface="맑은 고딕"/>
-              </a:rPr>
-              <a:t>난수 시드 고정(20260831) — 군집·모델 결과가 실행마다 동일</a:t>
-            </a:r>
-          </a:p>
-        </p:txBody>
-      </p:sp>
-      <p:sp>
-        <p:nvSpPr>
-          <p:cNvPr id="11" name="TextBox 10"/>
-          <p:cNvSpPr txBox="1"/>
-          <p:nvPr/>
-        </p:nvSpPr>
-        <p:spPr>
-          <a:xfrm>
-            <a:off x="932688" y="3694176"/>
-            <a:ext cx="182880" cy="256032"/>
-          </a:xfrm>
-          <a:prstGeom prst="rect">
-            <a:avLst/>
-          </a:prstGeom>
-          <a:noFill/>
-        </p:spPr>
-        <p:txBody>
-          <a:bodyPr wrap="square" lIns="0" rIns="0" tIns="0" bIns="0">
-            <a:spAutoFit/>
-          </a:bodyPr>
-          <a:lstStyle/>
-          <a:p>
-            <a:pPr algn="l">
-              <a:lnSpc>
-                <a:spcPct val="135000"/>
-              </a:lnSpc>
-            </a:pPr>
-            <a:r>
-              <a:rPr sz="1300" b="1">
-                <a:solidFill>
-                  <a:srgbClr val="1BAF7A"/>
-                </a:solidFill>
-                <a:latin typeface="맑은 고딕"/>
-                <a:ea typeface="맑은 고딕"/>
-                <a:cs typeface="맑은 고딕"/>
-              </a:rPr>
-              <a:t>·</a:t>
-            </a:r>
-          </a:p>
-        </p:txBody>
-      </p:sp>
-      <p:sp>
-        <p:nvSpPr>
-          <p:cNvPr id="12" name="TextBox 11"/>
-          <p:cNvSpPr txBox="1"/>
-          <p:nvPr/>
-        </p:nvSpPr>
-        <p:spPr>
-          <a:xfrm>
-            <a:off x="1133856" y="3694176"/>
-            <a:ext cx="4572000" cy="411480"/>
-          </a:xfrm>
-          <a:prstGeom prst="rect">
-            <a:avLst/>
-          </a:prstGeom>
-          <a:noFill/>
-        </p:spPr>
-        <p:txBody>
-          <a:bodyPr wrap="square" lIns="0" rIns="0" tIns="0" bIns="0">
-            <a:spAutoFit/>
-          </a:bodyPr>
-          <a:lstStyle/>
-          <a:p>
-            <a:pPr algn="l">
-              <a:lnSpc>
-                <a:spcPct val="140000"/>
-              </a:lnSpc>
-            </a:pPr>
-            <a:r>
-              <a:rPr sz="1100" b="0">
-                <a:solidFill>
-                  <a:srgbClr val="12151A"/>
-                </a:solidFill>
-                <a:latin typeface="맑은 고딕"/>
-                <a:ea typeface="맑은 고딕"/>
-                <a:cs typeface="맑은 고딕"/>
-              </a:rPr>
-              <a:t>그림 8종·분석표 9종·대시보드가 같은 실행에서 함께 생성됨</a:t>
-            </a:r>
-          </a:p>
-        </p:txBody>
-      </p:sp>
-      <p:sp>
-        <p:nvSpPr>
-          <p:cNvPr id="13" name="TextBox 12"/>
-          <p:cNvSpPr txBox="1"/>
-          <p:nvPr/>
-        </p:nvSpPr>
-        <p:spPr>
-          <a:xfrm>
-            <a:off x="932688" y="4169664"/>
-            <a:ext cx="182880" cy="256032"/>
-          </a:xfrm>
-          <a:prstGeom prst="rect">
-            <a:avLst/>
-          </a:prstGeom>
-          <a:noFill/>
-        </p:spPr>
-        <p:txBody>
-          <a:bodyPr wrap="square" lIns="0" rIns="0" tIns="0" bIns="0">
-            <a:spAutoFit/>
-          </a:bodyPr>
-          <a:lstStyle/>
-          <a:p>
-            <a:pPr algn="l">
-              <a:lnSpc>
-                <a:spcPct val="135000"/>
-              </a:lnSpc>
-            </a:pPr>
-            <a:r>
-              <a:rPr sz="1300" b="1">
-                <a:solidFill>
-                  <a:srgbClr val="1BAF7A"/>
-                </a:solidFill>
-                <a:latin typeface="맑은 고딕"/>
-                <a:ea typeface="맑은 고딕"/>
-                <a:cs typeface="맑은 고딕"/>
-              </a:rPr>
-              <a:t>·</a:t>
-            </a:r>
-          </a:p>
-        </p:txBody>
-      </p:sp>
-      <p:sp>
-        <p:nvSpPr>
-          <p:cNvPr id="14" name="TextBox 13"/>
-          <p:cNvSpPr txBox="1"/>
-          <p:nvPr/>
-        </p:nvSpPr>
-        <p:spPr>
-          <a:xfrm>
-            <a:off x="1133856" y="4169664"/>
-            <a:ext cx="4572000" cy="411480"/>
-          </a:xfrm>
-          <a:prstGeom prst="rect">
-            <a:avLst/>
-          </a:prstGeom>
-          <a:noFill/>
-        </p:spPr>
-        <p:txBody>
-          <a:bodyPr wrap="square" lIns="0" rIns="0" tIns="0" bIns="0">
-            <a:spAutoFit/>
-          </a:bodyPr>
-          <a:lstStyle/>
-          <a:p>
-            <a:pPr algn="l">
-              <a:lnSpc>
-                <a:spcPct val="140000"/>
-              </a:lnSpc>
-            </a:pPr>
-            <a:r>
-              <a:rPr sz="1100" b="0">
-                <a:solidFill>
-                  <a:srgbClr val="12151A"/>
-                </a:solidFill>
-                <a:latin typeface="맑은 고딕"/>
-                <a:ea typeface="맑은 고딕"/>
-                <a:cs typeface="맑은 고딕"/>
-              </a:rPr>
-              <a:t>지표 정의·가중치·모델 파라미터가 전부 코드에 명시</a:t>
-            </a:r>
-          </a:p>
-        </p:txBody>
-      </p:sp>
-      <p:sp>
-        <p:nvSpPr>
-          <p:cNvPr id="15" name="Rounded Rectangle 14"/>
+              <a:rPr sz="1080" b="0">
+                <a:solidFill>
+                  <a:srgbClr val="52514E"/>
+                </a:solidFill>
+                <a:latin typeface="맑은 고딕"/>
+                <a:ea typeface="맑은 고딕"/>
+                <a:cs typeface="맑은 고딕"/>
+              </a:rPr>
+              <a:t>→ 위험도 수준은 자기상관이 강해 '그대로 간다'는 예측이 이미 강력한 기준선입니다. 현재는 인구 축만 실데이터라, 상권 개·폐업 시계열이 더해지면 나아질 것으로 봅니다.</a:t>
+            </a:r>
+          </a:p>
+        </p:txBody>
+      </p:sp>
+      <p:sp>
+        <p:nvSpPr>
+          <p:cNvPr id="10" name="Rounded Rectangle 9"/>
           <p:cNvSpPr/>
           <p:nvPr/>
         </p:nvSpPr>
         <p:spPr>
           <a:xfrm>
-            <a:off x="6236207" y="2121408"/>
-            <a:ext cx="5257800" cy="2487168"/>
+            <a:off x="658368" y="3310128"/>
+            <a:ext cx="10874959" cy="896112"/>
           </a:xfrm>
           <a:prstGeom prst="roundRect">
             <a:avLst>
@@ -15998,6 +16407,1278 @@
       </p:sp>
       <p:sp>
         <p:nvSpPr>
+          <p:cNvPr id="11" name="Rectangle 10"/>
+          <p:cNvSpPr/>
+          <p:nvPr/>
+        </p:nvSpPr>
+        <p:spPr>
+          <a:xfrm>
+            <a:off x="658368" y="3310128"/>
+            <a:ext cx="68580" cy="896112"/>
+          </a:xfrm>
+          <a:prstGeom prst="rect">
+            <a:avLst/>
+          </a:prstGeom>
+          <a:solidFill>
+            <a:srgbClr val="EDA100"/>
+          </a:solidFill>
+          <a:ln>
+            <a:noFill/>
+          </a:ln>
+          <a:effectLst/>
+        </p:spPr>
+        <p:style>
+          <a:lnRef idx="1">
+            <a:schemeClr val="accent1"/>
+          </a:lnRef>
+          <a:fillRef idx="3">
+            <a:schemeClr val="accent1"/>
+          </a:fillRef>
+          <a:effectRef idx="2">
+            <a:schemeClr val="accent1"/>
+          </a:effectRef>
+          <a:fontRef idx="minor">
+            <a:schemeClr val="lt1"/>
+          </a:fontRef>
+        </p:style>
+        <p:txBody>
+          <a:bodyPr rtlCol="0" anchor="ctr"/>
+          <a:lstStyle/>
+          <a:p/>
+        </p:txBody>
+      </p:sp>
+      <p:sp>
+        <p:nvSpPr>
+          <p:cNvPr id="12" name="TextBox 11"/>
+          <p:cNvSpPr txBox="1"/>
+          <p:nvPr/>
+        </p:nvSpPr>
+        <p:spPr>
+          <a:xfrm>
+            <a:off x="932688" y="3438144"/>
+            <a:ext cx="2103120" cy="256032"/>
+          </a:xfrm>
+          <a:prstGeom prst="rect">
+            <a:avLst/>
+          </a:prstGeom>
+          <a:noFill/>
+        </p:spPr>
+        <p:txBody>
+          <a:bodyPr wrap="square" lIns="0" rIns="0" tIns="0" bIns="0">
+            <a:spAutoFit/>
+          </a:bodyPr>
+          <a:lstStyle/>
+          <a:p>
+            <a:pPr algn="l">
+              <a:lnSpc>
+                <a:spcPct val="135000"/>
+              </a:lnSpc>
+            </a:pPr>
+            <a:r>
+              <a:rPr sz="1250" b="1">
+                <a:solidFill>
+                  <a:srgbClr val="EDA100"/>
+                </a:solidFill>
+                <a:latin typeface="맑은 고딕"/>
+                <a:ea typeface="맑은 고딕"/>
+                <a:cs typeface="맑은 고딕"/>
+              </a:rPr>
+              <a:t>표본 크기</a:t>
+            </a:r>
+          </a:p>
+        </p:txBody>
+      </p:sp>
+      <p:sp>
+        <p:nvSpPr>
+          <p:cNvPr id="13" name="TextBox 12"/>
+          <p:cNvSpPr txBox="1"/>
+          <p:nvPr/>
+        </p:nvSpPr>
+        <p:spPr>
+          <a:xfrm>
+            <a:off x="3172968" y="3438144"/>
+            <a:ext cx="8046720" cy="256032"/>
+          </a:xfrm>
+          <a:prstGeom prst="rect">
+            <a:avLst/>
+          </a:prstGeom>
+          <a:noFill/>
+        </p:spPr>
+        <p:txBody>
+          <a:bodyPr wrap="square" lIns="0" rIns="0" tIns="0" bIns="0">
+            <a:spAutoFit/>
+          </a:bodyPr>
+          <a:lstStyle/>
+          <a:p>
+            <a:pPr algn="l">
+              <a:lnSpc>
+                <a:spcPct val="135000"/>
+              </a:lnSpc>
+            </a:pPr>
+            <a:r>
+              <a:rPr sz="1200" b="1">
+                <a:solidFill>
+                  <a:srgbClr val="12151A"/>
+                </a:solidFill>
+                <a:latin typeface="맑은 고딕"/>
+                <a:ea typeface="맑은 고딕"/>
+                <a:cs typeface="맑은 고딕"/>
+              </a:rPr>
+              <a:t>분석 단위가 25개 생활권이라 머신러닝 표본으로는 작습니다.</a:t>
+            </a:r>
+          </a:p>
+        </p:txBody>
+      </p:sp>
+      <p:sp>
+        <p:nvSpPr>
+          <p:cNvPr id="14" name="TextBox 13"/>
+          <p:cNvSpPr txBox="1"/>
+          <p:nvPr/>
+        </p:nvSpPr>
+        <p:spPr>
+          <a:xfrm>
+            <a:off x="3172968" y="3730752"/>
+            <a:ext cx="8046720" cy="384048"/>
+          </a:xfrm>
+          <a:prstGeom prst="rect">
+            <a:avLst/>
+          </a:prstGeom>
+          <a:noFill/>
+        </p:spPr>
+        <p:txBody>
+          <a:bodyPr wrap="square" lIns="0" rIns="0" tIns="0" bIns="0">
+            <a:spAutoFit/>
+          </a:bodyPr>
+          <a:lstStyle/>
+          <a:p>
+            <a:pPr algn="l">
+              <a:lnSpc>
+                <a:spcPct val="140000"/>
+              </a:lnSpc>
+            </a:pPr>
+            <a:r>
+              <a:rPr sz="1080" b="0">
+                <a:solidFill>
+                  <a:srgbClr val="52514E"/>
+                </a:solidFill>
+                <a:latin typeface="맑은 고딕"/>
+                <a:ea typeface="맑은 고딕"/>
+                <a:cs typeface="맑은 고딕"/>
+              </a:rPr>
+              <a:t>→ 500m 격자 단위로 내리면 표본이 수천 개로 늘어납니다. 지금은 규제를 강하게 걸고 Leave-One-Zone-Out CV와 베이스라인 비교로 과적합 여부를 확인하고 있습니다.</a:t>
+            </a:r>
+          </a:p>
+        </p:txBody>
+      </p:sp>
+      <p:sp>
+        <p:nvSpPr>
+          <p:cNvPr id="15" name="Rounded Rectangle 14"/>
+          <p:cNvSpPr/>
+          <p:nvPr/>
+        </p:nvSpPr>
+        <p:spPr>
+          <a:xfrm>
+            <a:off x="658368" y="4334256"/>
+            <a:ext cx="10874959" cy="896112"/>
+          </a:xfrm>
+          <a:prstGeom prst="roundRect">
+            <a:avLst>
+              <a:gd name="adj" fmla="val 6000"/>
+            </a:avLst>
+          </a:prstGeom>
+          <a:solidFill>
+            <a:srgbClr val="FFFFFF"/>
+          </a:solidFill>
+          <a:ln w="12700">
+            <a:solidFill>
+              <a:srgbClr val="E4E7EC"/>
+            </a:solidFill>
+          </a:ln>
+          <a:effectLst/>
+        </p:spPr>
+        <p:style>
+          <a:lnRef idx="1">
+            <a:schemeClr val="accent1"/>
+          </a:lnRef>
+          <a:fillRef idx="3">
+            <a:schemeClr val="accent1"/>
+          </a:fillRef>
+          <a:effectRef idx="2">
+            <a:schemeClr val="accent1"/>
+          </a:effectRef>
+          <a:fontRef idx="minor">
+            <a:schemeClr val="lt1"/>
+          </a:fontRef>
+        </p:style>
+        <p:txBody>
+          <a:bodyPr rtlCol="0" anchor="ctr"/>
+          <a:lstStyle/>
+          <a:p/>
+        </p:txBody>
+      </p:sp>
+      <p:sp>
+        <p:nvSpPr>
+          <p:cNvPr id="16" name="Rectangle 15"/>
+          <p:cNvSpPr/>
+          <p:nvPr/>
+        </p:nvSpPr>
+        <p:spPr>
+          <a:xfrm>
+            <a:off x="658368" y="4334256"/>
+            <a:ext cx="68580" cy="896112"/>
+          </a:xfrm>
+          <a:prstGeom prst="rect">
+            <a:avLst/>
+          </a:prstGeom>
+          <a:solidFill>
+            <a:srgbClr val="EDA100"/>
+          </a:solidFill>
+          <a:ln>
+            <a:noFill/>
+          </a:ln>
+          <a:effectLst/>
+        </p:spPr>
+        <p:style>
+          <a:lnRef idx="1">
+            <a:schemeClr val="accent1"/>
+          </a:lnRef>
+          <a:fillRef idx="3">
+            <a:schemeClr val="accent1"/>
+          </a:fillRef>
+          <a:effectRef idx="2">
+            <a:schemeClr val="accent1"/>
+          </a:effectRef>
+          <a:fontRef idx="minor">
+            <a:schemeClr val="lt1"/>
+          </a:fontRef>
+        </p:style>
+        <p:txBody>
+          <a:bodyPr rtlCol="0" anchor="ctr"/>
+          <a:lstStyle/>
+          <a:p/>
+        </p:txBody>
+      </p:sp>
+      <p:sp>
+        <p:nvSpPr>
+          <p:cNvPr id="17" name="TextBox 16"/>
+          <p:cNvSpPr txBox="1"/>
+          <p:nvPr/>
+        </p:nvSpPr>
+        <p:spPr>
+          <a:xfrm>
+            <a:off x="932688" y="4462272"/>
+            <a:ext cx="2103120" cy="256032"/>
+          </a:xfrm>
+          <a:prstGeom prst="rect">
+            <a:avLst/>
+          </a:prstGeom>
+          <a:noFill/>
+        </p:spPr>
+        <p:txBody>
+          <a:bodyPr wrap="square" lIns="0" rIns="0" tIns="0" bIns="0">
+            <a:spAutoFit/>
+          </a:bodyPr>
+          <a:lstStyle/>
+          <a:p>
+            <a:pPr algn="l">
+              <a:lnSpc>
+                <a:spcPct val="135000"/>
+              </a:lnSpc>
+            </a:pPr>
+            <a:r>
+              <a:rPr sz="1250" b="1">
+                <a:solidFill>
+                  <a:srgbClr val="EDA100"/>
+                </a:solidFill>
+                <a:latin typeface="맑은 고딕"/>
+                <a:ea typeface="맑은 고딕"/>
+                <a:cs typeface="맑은 고딕"/>
+              </a:rPr>
+              <a:t>공간 해상도</a:t>
+            </a:r>
+          </a:p>
+        </p:txBody>
+      </p:sp>
+      <p:sp>
+        <p:nvSpPr>
+          <p:cNvPr id="18" name="TextBox 17"/>
+          <p:cNvSpPr txBox="1"/>
+          <p:nvPr/>
+        </p:nvSpPr>
+        <p:spPr>
+          <a:xfrm>
+            <a:off x="3172968" y="4462272"/>
+            <a:ext cx="8046720" cy="256032"/>
+          </a:xfrm>
+          <a:prstGeom prst="rect">
+            <a:avLst/>
+          </a:prstGeom>
+          <a:noFill/>
+        </p:spPr>
+        <p:txBody>
+          <a:bodyPr wrap="square" lIns="0" rIns="0" tIns="0" bIns="0">
+            <a:spAutoFit/>
+          </a:bodyPr>
+          <a:lstStyle/>
+          <a:p>
+            <a:pPr algn="l">
+              <a:lnSpc>
+                <a:spcPct val="135000"/>
+              </a:lnSpc>
+            </a:pPr>
+            <a:r>
+              <a:rPr sz="1200" b="1">
+                <a:solidFill>
+                  <a:srgbClr val="12151A"/>
+                </a:solidFill>
+                <a:latin typeface="맑은 고딕"/>
+                <a:ea typeface="맑은 고딕"/>
+                <a:cs typeface="맑은 고딕"/>
+              </a:rPr>
+              <a:t>생활권 안쪽의 차이(같은 동 안의 편차)는 잡히지 않습니다.</a:t>
+            </a:r>
+          </a:p>
+        </p:txBody>
+      </p:sp>
+      <p:sp>
+        <p:nvSpPr>
+          <p:cNvPr id="19" name="TextBox 18"/>
+          <p:cNvSpPr txBox="1"/>
+          <p:nvPr/>
+        </p:nvSpPr>
+        <p:spPr>
+          <a:xfrm>
+            <a:off x="3172968" y="4754880"/>
+            <a:ext cx="8046720" cy="384048"/>
+          </a:xfrm>
+          <a:prstGeom prst="rect">
+            <a:avLst/>
+          </a:prstGeom>
+          <a:noFill/>
+        </p:spPr>
+        <p:txBody>
+          <a:bodyPr wrap="square" lIns="0" rIns="0" tIns="0" bIns="0">
+            <a:spAutoFit/>
+          </a:bodyPr>
+          <a:lstStyle/>
+          <a:p>
+            <a:pPr algn="l">
+              <a:lnSpc>
+                <a:spcPct val="140000"/>
+              </a:lnSpc>
+            </a:pPr>
+            <a:r>
+              <a:rPr sz="1080" b="0">
+                <a:solidFill>
+                  <a:srgbClr val="52514E"/>
+                </a:solidFill>
+                <a:latin typeface="맑은 고딕"/>
+                <a:ea typeface="맑은 고딕"/>
+                <a:cs typeface="맑은 고딕"/>
+              </a:rPr>
+              <a:t>→ 집계구·격자 데이터로 바꾸면 해결됩니다. 공간단위 정의만 교체하면 되도록 만들어 두었습니다.</a:t>
+            </a:r>
+          </a:p>
+        </p:txBody>
+      </p:sp>
+      <p:sp>
+        <p:nvSpPr>
+          <p:cNvPr id="20" name="Rounded Rectangle 19"/>
+          <p:cNvSpPr/>
+          <p:nvPr/>
+        </p:nvSpPr>
+        <p:spPr>
+          <a:xfrm>
+            <a:off x="658368" y="5358384"/>
+            <a:ext cx="10874959" cy="896112"/>
+          </a:xfrm>
+          <a:prstGeom prst="roundRect">
+            <a:avLst>
+              <a:gd name="adj" fmla="val 6000"/>
+            </a:avLst>
+          </a:prstGeom>
+          <a:solidFill>
+            <a:srgbClr val="FFFFFF"/>
+          </a:solidFill>
+          <a:ln w="12700">
+            <a:solidFill>
+              <a:srgbClr val="E4E7EC"/>
+            </a:solidFill>
+          </a:ln>
+          <a:effectLst/>
+        </p:spPr>
+        <p:style>
+          <a:lnRef idx="1">
+            <a:schemeClr val="accent1"/>
+          </a:lnRef>
+          <a:fillRef idx="3">
+            <a:schemeClr val="accent1"/>
+          </a:fillRef>
+          <a:effectRef idx="2">
+            <a:schemeClr val="accent1"/>
+          </a:effectRef>
+          <a:fontRef idx="minor">
+            <a:schemeClr val="lt1"/>
+          </a:fontRef>
+        </p:style>
+        <p:txBody>
+          <a:bodyPr rtlCol="0" anchor="ctr"/>
+          <a:lstStyle/>
+          <a:p/>
+        </p:txBody>
+      </p:sp>
+      <p:sp>
+        <p:nvSpPr>
+          <p:cNvPr id="21" name="Rectangle 20"/>
+          <p:cNvSpPr/>
+          <p:nvPr/>
+        </p:nvSpPr>
+        <p:spPr>
+          <a:xfrm>
+            <a:off x="658368" y="5358384"/>
+            <a:ext cx="68580" cy="896112"/>
+          </a:xfrm>
+          <a:prstGeom prst="rect">
+            <a:avLst/>
+          </a:prstGeom>
+          <a:solidFill>
+            <a:srgbClr val="EDA100"/>
+          </a:solidFill>
+          <a:ln>
+            <a:noFill/>
+          </a:ln>
+          <a:effectLst/>
+        </p:spPr>
+        <p:style>
+          <a:lnRef idx="1">
+            <a:schemeClr val="accent1"/>
+          </a:lnRef>
+          <a:fillRef idx="3">
+            <a:schemeClr val="accent1"/>
+          </a:fillRef>
+          <a:effectRef idx="2">
+            <a:schemeClr val="accent1"/>
+          </a:effectRef>
+          <a:fontRef idx="minor">
+            <a:schemeClr val="lt1"/>
+          </a:fontRef>
+        </p:style>
+        <p:txBody>
+          <a:bodyPr rtlCol="0" anchor="ctr"/>
+          <a:lstStyle/>
+          <a:p/>
+        </p:txBody>
+      </p:sp>
+      <p:sp>
+        <p:nvSpPr>
+          <p:cNvPr id="22" name="TextBox 21"/>
+          <p:cNvSpPr txBox="1"/>
+          <p:nvPr/>
+        </p:nvSpPr>
+        <p:spPr>
+          <a:xfrm>
+            <a:off x="932688" y="5486400"/>
+            <a:ext cx="2103120" cy="256032"/>
+          </a:xfrm>
+          <a:prstGeom prst="rect">
+            <a:avLst/>
+          </a:prstGeom>
+          <a:noFill/>
+        </p:spPr>
+        <p:txBody>
+          <a:bodyPr wrap="square" lIns="0" rIns="0" tIns="0" bIns="0">
+            <a:spAutoFit/>
+          </a:bodyPr>
+          <a:lstStyle/>
+          <a:p>
+            <a:pPr algn="l">
+              <a:lnSpc>
+                <a:spcPct val="135000"/>
+              </a:lnSpc>
+            </a:pPr>
+            <a:r>
+              <a:rPr sz="1250" b="1">
+                <a:solidFill>
+                  <a:srgbClr val="EDA100"/>
+                </a:solidFill>
+                <a:latin typeface="맑은 고딕"/>
+                <a:ea typeface="맑은 고딕"/>
+                <a:cs typeface="맑은 고딕"/>
+              </a:rPr>
+              <a:t>인과 아닌 상관</a:t>
+            </a:r>
+          </a:p>
+        </p:txBody>
+      </p:sp>
+      <p:sp>
+        <p:nvSpPr>
+          <p:cNvPr id="23" name="TextBox 22"/>
+          <p:cNvSpPr txBox="1"/>
+          <p:nvPr/>
+        </p:nvSpPr>
+        <p:spPr>
+          <a:xfrm>
+            <a:off x="3172968" y="5486400"/>
+            <a:ext cx="8046720" cy="256032"/>
+          </a:xfrm>
+          <a:prstGeom prst="rect">
+            <a:avLst/>
+          </a:prstGeom>
+          <a:noFill/>
+        </p:spPr>
+        <p:txBody>
+          <a:bodyPr wrap="square" lIns="0" rIns="0" tIns="0" bIns="0">
+            <a:spAutoFit/>
+          </a:bodyPr>
+          <a:lstStyle/>
+          <a:p>
+            <a:pPr algn="l">
+              <a:lnSpc>
+                <a:spcPct val="135000"/>
+              </a:lnSpc>
+            </a:pPr>
+            <a:r>
+              <a:rPr sz="1200" b="1">
+                <a:solidFill>
+                  <a:srgbClr val="12151A"/>
+                </a:solidFill>
+                <a:latin typeface="맑은 고딕"/>
+                <a:ea typeface="맑은 고딕"/>
+                <a:cs typeface="맑은 고딕"/>
+              </a:rPr>
+              <a:t>이 모델은 변화를 미리 살펴볼 뿐, 사업의 효과를 증명하지는 못합니다.</a:t>
+            </a:r>
+          </a:p>
+        </p:txBody>
+      </p:sp>
+      <p:sp>
+        <p:nvSpPr>
+          <p:cNvPr id="24" name="TextBox 23"/>
+          <p:cNvSpPr txBox="1"/>
+          <p:nvPr/>
+        </p:nvSpPr>
+        <p:spPr>
+          <a:xfrm>
+            <a:off x="3172968" y="5779008"/>
+            <a:ext cx="8046720" cy="384048"/>
+          </a:xfrm>
+          <a:prstGeom prst="rect">
+            <a:avLst/>
+          </a:prstGeom>
+          <a:noFill/>
+        </p:spPr>
+        <p:txBody>
+          <a:bodyPr wrap="square" lIns="0" rIns="0" tIns="0" bIns="0">
+            <a:spAutoFit/>
+          </a:bodyPr>
+          <a:lstStyle/>
+          <a:p>
+            <a:pPr algn="l">
+              <a:lnSpc>
+                <a:spcPct val="140000"/>
+              </a:lnSpc>
+            </a:pPr>
+            <a:r>
+              <a:rPr sz="1080" b="0">
+                <a:solidFill>
+                  <a:srgbClr val="52514E"/>
+                </a:solidFill>
+                <a:latin typeface="맑은 고딕"/>
+                <a:ea typeface="맑은 고딕"/>
+                <a:cs typeface="맑은 고딕"/>
+              </a:rPr>
+              <a:t>→ 시행 전후 이중차분(DID) 설계를 덧붙이면 효과 검증까지 넓힐 수 있습니다.</a:t>
+            </a:r>
+          </a:p>
+        </p:txBody>
+      </p:sp>
+      <p:sp>
+        <p:nvSpPr>
+          <p:cNvPr id="25" name="TextBox 24"/>
+          <p:cNvSpPr txBox="1"/>
+          <p:nvPr/>
+        </p:nvSpPr>
+        <p:spPr>
+          <a:xfrm>
+            <a:off x="658368" y="6437376"/>
+            <a:ext cx="5486400" cy="274320"/>
+          </a:xfrm>
+          <a:prstGeom prst="rect">
+            <a:avLst/>
+          </a:prstGeom>
+          <a:noFill/>
+        </p:spPr>
+        <p:txBody>
+          <a:bodyPr wrap="square" lIns="0" rIns="0" tIns="0" bIns="0">
+            <a:spAutoFit/>
+          </a:bodyPr>
+          <a:lstStyle/>
+          <a:p>
+            <a:pPr algn="l">
+              <a:lnSpc>
+                <a:spcPct val="135000"/>
+              </a:lnSpc>
+            </a:pPr>
+            <a:r>
+              <a:rPr sz="950" b="0">
+                <a:solidFill>
+                  <a:srgbClr val="52514E"/>
+                </a:solidFill>
+                <a:latin typeface="맑은 고딕"/>
+                <a:ea typeface="맑은 고딕"/>
+                <a:cs typeface="맑은 고딕"/>
+              </a:rPr>
+              <a:t>천안 균형발전 나침반(CBC)</a:t>
+            </a:r>
+          </a:p>
+        </p:txBody>
+      </p:sp>
+      <p:sp>
+        <p:nvSpPr>
+          <p:cNvPr id="26" name="TextBox 25"/>
+          <p:cNvSpPr txBox="1"/>
+          <p:nvPr/>
+        </p:nvSpPr>
+        <p:spPr>
+          <a:xfrm>
+            <a:off x="10618927" y="6437376"/>
+            <a:ext cx="914400" cy="274320"/>
+          </a:xfrm>
+          <a:prstGeom prst="rect">
+            <a:avLst/>
+          </a:prstGeom>
+          <a:noFill/>
+        </p:spPr>
+        <p:txBody>
+          <a:bodyPr wrap="square" lIns="0" rIns="0" tIns="0" bIns="0">
+            <a:spAutoFit/>
+          </a:bodyPr>
+          <a:lstStyle/>
+          <a:p>
+            <a:pPr algn="r">
+              <a:lnSpc>
+                <a:spcPct val="135000"/>
+              </a:lnSpc>
+            </a:pPr>
+            <a:r>
+              <a:rPr sz="950" b="0">
+                <a:solidFill>
+                  <a:srgbClr val="52514E"/>
+                </a:solidFill>
+                <a:latin typeface="맑은 고딕"/>
+                <a:ea typeface="맑은 고딕"/>
+                <a:cs typeface="맑은 고딕"/>
+              </a:rPr>
+              <a:t>19</a:t>
+            </a:r>
+          </a:p>
+        </p:txBody>
+      </p:sp>
+    </p:spTree>
+  </p:cSld>
+  <p:clrMapOvr>
+    <a:masterClrMapping/>
+  </p:clrMapOvr>
+</p:sld>
+</file>
+
+<file path=ppt/slides/slide21.xml><?xml version="1.0" encoding="utf-8"?>
+<p:sld xmlns:a="http://schemas.openxmlformats.org/drawingml/2006/main" xmlns:p="http://schemas.openxmlformats.org/presentationml/2006/main" xmlns:r="http://schemas.openxmlformats.org/officeDocument/2006/relationships">
+  <p:cSld>
+    <p:spTree>
+      <p:nvGrpSpPr>
+        <p:cNvPr id="1" name=""/>
+        <p:cNvGrpSpPr/>
+        <p:nvPr/>
+      </p:nvGrpSpPr>
+      <p:grpSpPr/>
+      <p:sp>
+        <p:nvSpPr>
+          <p:cNvPr id="2" name="TextBox 1"/>
+          <p:cNvSpPr txBox="1"/>
+          <p:nvPr/>
+        </p:nvSpPr>
+        <p:spPr>
+          <a:xfrm>
+            <a:off x="658368" y="475488"/>
+            <a:ext cx="10874959" cy="274320"/>
+          </a:xfrm>
+          <a:prstGeom prst="rect">
+            <a:avLst/>
+          </a:prstGeom>
+          <a:noFill/>
+        </p:spPr>
+        <p:txBody>
+          <a:bodyPr wrap="square" lIns="0" rIns="0" tIns="0" bIns="0">
+            <a:spAutoFit/>
+          </a:bodyPr>
+          <a:lstStyle/>
+          <a:p>
+            <a:pPr algn="l">
+              <a:lnSpc>
+                <a:spcPct val="135000"/>
+              </a:lnSpc>
+            </a:pPr>
+            <a:r>
+              <a:rPr sz="1150" b="1">
+                <a:solidFill>
+                  <a:srgbClr val="2A78D6"/>
+                </a:solidFill>
+                <a:latin typeface="맑은 고딕"/>
+                <a:ea typeface="맑은 고딕"/>
+                <a:cs typeface="맑은 고딕"/>
+              </a:rPr>
+              <a:t>INTEGRITY</a:t>
+            </a:r>
+          </a:p>
+        </p:txBody>
+      </p:sp>
+      <p:sp>
+        <p:nvSpPr>
+          <p:cNvPr id="3" name="TextBox 2"/>
+          <p:cNvSpPr txBox="1"/>
+          <p:nvPr/>
+        </p:nvSpPr>
+        <p:spPr>
+          <a:xfrm>
+            <a:off x="658368" y="804672"/>
+            <a:ext cx="10874959" cy="566928"/>
+          </a:xfrm>
+          <a:prstGeom prst="rect">
+            <a:avLst/>
+          </a:prstGeom>
+          <a:noFill/>
+        </p:spPr>
+        <p:txBody>
+          <a:bodyPr wrap="square" lIns="0" rIns="0" tIns="0" bIns="0">
+            <a:spAutoFit/>
+          </a:bodyPr>
+          <a:lstStyle/>
+          <a:p>
+            <a:pPr algn="l">
+              <a:lnSpc>
+                <a:spcPct val="118000"/>
+              </a:lnSpc>
+            </a:pPr>
+            <a:r>
+              <a:rPr sz="2700" b="1">
+                <a:solidFill>
+                  <a:srgbClr val="12151A"/>
+                </a:solidFill>
+                <a:latin typeface="맑은 고딕"/>
+                <a:ea typeface="맑은 고딕"/>
+                <a:cs typeface="맑은 고딕"/>
+              </a:rPr>
+              <a:t>재현성과 데이터 윤리</a:t>
+            </a:r>
+          </a:p>
+        </p:txBody>
+      </p:sp>
+      <p:sp>
+        <p:nvSpPr>
+          <p:cNvPr id="4" name="Rounded Rectangle 3"/>
+          <p:cNvSpPr/>
+          <p:nvPr/>
+        </p:nvSpPr>
+        <p:spPr>
+          <a:xfrm>
+            <a:off x="658368" y="2121408"/>
+            <a:ext cx="5257800" cy="2487168"/>
+          </a:xfrm>
+          <a:prstGeom prst="roundRect">
+            <a:avLst>
+              <a:gd name="adj" fmla="val 6000"/>
+            </a:avLst>
+          </a:prstGeom>
+          <a:solidFill>
+            <a:srgbClr val="FFFFFF"/>
+          </a:solidFill>
+          <a:ln w="12700">
+            <a:solidFill>
+              <a:srgbClr val="E4E7EC"/>
+            </a:solidFill>
+          </a:ln>
+          <a:effectLst/>
+        </p:spPr>
+        <p:style>
+          <a:lnRef idx="1">
+            <a:schemeClr val="accent1"/>
+          </a:lnRef>
+          <a:fillRef idx="3">
+            <a:schemeClr val="accent1"/>
+          </a:fillRef>
+          <a:effectRef idx="2">
+            <a:schemeClr val="accent1"/>
+          </a:effectRef>
+          <a:fontRef idx="minor">
+            <a:schemeClr val="lt1"/>
+          </a:fontRef>
+        </p:style>
+        <p:txBody>
+          <a:bodyPr rtlCol="0" anchor="ctr"/>
+          <a:lstStyle/>
+          <a:p/>
+        </p:txBody>
+      </p:sp>
+      <p:sp>
+        <p:nvSpPr>
+          <p:cNvPr id="5" name="Rectangle 4"/>
+          <p:cNvSpPr/>
+          <p:nvPr/>
+        </p:nvSpPr>
+        <p:spPr>
+          <a:xfrm>
+            <a:off x="658368" y="2121408"/>
+            <a:ext cx="5257800" cy="68580"/>
+          </a:xfrm>
+          <a:prstGeom prst="rect">
+            <a:avLst/>
+          </a:prstGeom>
+          <a:solidFill>
+            <a:srgbClr val="1BAF7A"/>
+          </a:solidFill>
+          <a:ln>
+            <a:noFill/>
+          </a:ln>
+          <a:effectLst/>
+        </p:spPr>
+        <p:style>
+          <a:lnRef idx="1">
+            <a:schemeClr val="accent1"/>
+          </a:lnRef>
+          <a:fillRef idx="3">
+            <a:schemeClr val="accent1"/>
+          </a:fillRef>
+          <a:effectRef idx="2">
+            <a:schemeClr val="accent1"/>
+          </a:effectRef>
+          <a:fontRef idx="minor">
+            <a:schemeClr val="lt1"/>
+          </a:fontRef>
+        </p:style>
+        <p:txBody>
+          <a:bodyPr rtlCol="0" anchor="ctr"/>
+          <a:lstStyle/>
+          <a:p/>
+        </p:txBody>
+      </p:sp>
+      <p:sp>
+        <p:nvSpPr>
+          <p:cNvPr id="6" name="TextBox 5"/>
+          <p:cNvSpPr txBox="1"/>
+          <p:nvPr/>
+        </p:nvSpPr>
+        <p:spPr>
+          <a:xfrm>
+            <a:off x="932688" y="2340864"/>
+            <a:ext cx="4114800" cy="274320"/>
+          </a:xfrm>
+          <a:prstGeom prst="rect">
+            <a:avLst/>
+          </a:prstGeom>
+          <a:noFill/>
+        </p:spPr>
+        <p:txBody>
+          <a:bodyPr wrap="square" lIns="0" rIns="0" tIns="0" bIns="0">
+            <a:spAutoFit/>
+          </a:bodyPr>
+          <a:lstStyle/>
+          <a:p>
+            <a:pPr algn="l">
+              <a:lnSpc>
+                <a:spcPct val="135000"/>
+              </a:lnSpc>
+            </a:pPr>
+            <a:r>
+              <a:rPr sz="1450" b="1">
+                <a:solidFill>
+                  <a:srgbClr val="1BAF7A"/>
+                </a:solidFill>
+                <a:latin typeface="맑은 고딕"/>
+                <a:ea typeface="맑은 고딕"/>
+                <a:cs typeface="맑은 고딕"/>
+              </a:rPr>
+              <a:t>재현성</a:t>
+            </a:r>
+          </a:p>
+        </p:txBody>
+      </p:sp>
+      <p:sp>
+        <p:nvSpPr>
+          <p:cNvPr id="7" name="TextBox 6"/>
+          <p:cNvSpPr txBox="1"/>
+          <p:nvPr/>
+        </p:nvSpPr>
+        <p:spPr>
+          <a:xfrm>
+            <a:off x="932688" y="2743200"/>
+            <a:ext cx="182880" cy="256032"/>
+          </a:xfrm>
+          <a:prstGeom prst="rect">
+            <a:avLst/>
+          </a:prstGeom>
+          <a:noFill/>
+        </p:spPr>
+        <p:txBody>
+          <a:bodyPr wrap="square" lIns="0" rIns="0" tIns="0" bIns="0">
+            <a:spAutoFit/>
+          </a:bodyPr>
+          <a:lstStyle/>
+          <a:p>
+            <a:pPr algn="l">
+              <a:lnSpc>
+                <a:spcPct val="135000"/>
+              </a:lnSpc>
+            </a:pPr>
+            <a:r>
+              <a:rPr sz="1300" b="1">
+                <a:solidFill>
+                  <a:srgbClr val="1BAF7A"/>
+                </a:solidFill>
+                <a:latin typeface="맑은 고딕"/>
+                <a:ea typeface="맑은 고딕"/>
+                <a:cs typeface="맑은 고딕"/>
+              </a:rPr>
+              <a:t>·</a:t>
+            </a:r>
+          </a:p>
+        </p:txBody>
+      </p:sp>
+      <p:sp>
+        <p:nvSpPr>
+          <p:cNvPr id="8" name="TextBox 7"/>
+          <p:cNvSpPr txBox="1"/>
+          <p:nvPr/>
+        </p:nvSpPr>
+        <p:spPr>
+          <a:xfrm>
+            <a:off x="1133856" y="2743200"/>
+            <a:ext cx="4572000" cy="411480"/>
+          </a:xfrm>
+          <a:prstGeom prst="rect">
+            <a:avLst/>
+          </a:prstGeom>
+          <a:noFill/>
+        </p:spPr>
+        <p:txBody>
+          <a:bodyPr wrap="square" lIns="0" rIns="0" tIns="0" bIns="0">
+            <a:spAutoFit/>
+          </a:bodyPr>
+          <a:lstStyle/>
+          <a:p>
+            <a:pPr algn="l">
+              <a:lnSpc>
+                <a:spcPct val="140000"/>
+              </a:lnSpc>
+            </a:pPr>
+            <a:r>
+              <a:rPr sz="1100" b="0">
+                <a:solidFill>
+                  <a:srgbClr val="12151A"/>
+                </a:solidFill>
+                <a:latin typeface="맑은 고딕"/>
+                <a:ea typeface="맑은 고딕"/>
+                <a:cs typeface="맑은 고딕"/>
+              </a:rPr>
+              <a:t>전 과정이 공개 스크립트로 실행 — `python3 src/run_all.py` 한 줄</a:t>
+            </a:r>
+          </a:p>
+        </p:txBody>
+      </p:sp>
+      <p:sp>
+        <p:nvSpPr>
+          <p:cNvPr id="9" name="TextBox 8"/>
+          <p:cNvSpPr txBox="1"/>
+          <p:nvPr/>
+        </p:nvSpPr>
+        <p:spPr>
+          <a:xfrm>
+            <a:off x="932688" y="3218688"/>
+            <a:ext cx="182880" cy="256032"/>
+          </a:xfrm>
+          <a:prstGeom prst="rect">
+            <a:avLst/>
+          </a:prstGeom>
+          <a:noFill/>
+        </p:spPr>
+        <p:txBody>
+          <a:bodyPr wrap="square" lIns="0" rIns="0" tIns="0" bIns="0">
+            <a:spAutoFit/>
+          </a:bodyPr>
+          <a:lstStyle/>
+          <a:p>
+            <a:pPr algn="l">
+              <a:lnSpc>
+                <a:spcPct val="135000"/>
+              </a:lnSpc>
+            </a:pPr>
+            <a:r>
+              <a:rPr sz="1300" b="1">
+                <a:solidFill>
+                  <a:srgbClr val="1BAF7A"/>
+                </a:solidFill>
+                <a:latin typeface="맑은 고딕"/>
+                <a:ea typeface="맑은 고딕"/>
+                <a:cs typeface="맑은 고딕"/>
+              </a:rPr>
+              <a:t>·</a:t>
+            </a:r>
+          </a:p>
+        </p:txBody>
+      </p:sp>
+      <p:sp>
+        <p:nvSpPr>
+          <p:cNvPr id="10" name="TextBox 9"/>
+          <p:cNvSpPr txBox="1"/>
+          <p:nvPr/>
+        </p:nvSpPr>
+        <p:spPr>
+          <a:xfrm>
+            <a:off x="1133856" y="3218688"/>
+            <a:ext cx="4572000" cy="411480"/>
+          </a:xfrm>
+          <a:prstGeom prst="rect">
+            <a:avLst/>
+          </a:prstGeom>
+          <a:noFill/>
+        </p:spPr>
+        <p:txBody>
+          <a:bodyPr wrap="square" lIns="0" rIns="0" tIns="0" bIns="0">
+            <a:spAutoFit/>
+          </a:bodyPr>
+          <a:lstStyle/>
+          <a:p>
+            <a:pPr algn="l">
+              <a:lnSpc>
+                <a:spcPct val="140000"/>
+              </a:lnSpc>
+            </a:pPr>
+            <a:r>
+              <a:rPr sz="1100" b="0">
+                <a:solidFill>
+                  <a:srgbClr val="12151A"/>
+                </a:solidFill>
+                <a:latin typeface="맑은 고딕"/>
+                <a:ea typeface="맑은 고딕"/>
+                <a:cs typeface="맑은 고딕"/>
+              </a:rPr>
+              <a:t>난수 시드 고정(20260831) — 군집·모델 결과가 실행마다 동일</a:t>
+            </a:r>
+          </a:p>
+        </p:txBody>
+      </p:sp>
+      <p:sp>
+        <p:nvSpPr>
+          <p:cNvPr id="11" name="TextBox 10"/>
+          <p:cNvSpPr txBox="1"/>
+          <p:nvPr/>
+        </p:nvSpPr>
+        <p:spPr>
+          <a:xfrm>
+            <a:off x="932688" y="3694176"/>
+            <a:ext cx="182880" cy="256032"/>
+          </a:xfrm>
+          <a:prstGeom prst="rect">
+            <a:avLst/>
+          </a:prstGeom>
+          <a:noFill/>
+        </p:spPr>
+        <p:txBody>
+          <a:bodyPr wrap="square" lIns="0" rIns="0" tIns="0" bIns="0">
+            <a:spAutoFit/>
+          </a:bodyPr>
+          <a:lstStyle/>
+          <a:p>
+            <a:pPr algn="l">
+              <a:lnSpc>
+                <a:spcPct val="135000"/>
+              </a:lnSpc>
+            </a:pPr>
+            <a:r>
+              <a:rPr sz="1300" b="1">
+                <a:solidFill>
+                  <a:srgbClr val="1BAF7A"/>
+                </a:solidFill>
+                <a:latin typeface="맑은 고딕"/>
+                <a:ea typeface="맑은 고딕"/>
+                <a:cs typeface="맑은 고딕"/>
+              </a:rPr>
+              <a:t>·</a:t>
+            </a:r>
+          </a:p>
+        </p:txBody>
+      </p:sp>
+      <p:sp>
+        <p:nvSpPr>
+          <p:cNvPr id="12" name="TextBox 11"/>
+          <p:cNvSpPr txBox="1"/>
+          <p:nvPr/>
+        </p:nvSpPr>
+        <p:spPr>
+          <a:xfrm>
+            <a:off x="1133856" y="3694176"/>
+            <a:ext cx="4572000" cy="411480"/>
+          </a:xfrm>
+          <a:prstGeom prst="rect">
+            <a:avLst/>
+          </a:prstGeom>
+          <a:noFill/>
+        </p:spPr>
+        <p:txBody>
+          <a:bodyPr wrap="square" lIns="0" rIns="0" tIns="0" bIns="0">
+            <a:spAutoFit/>
+          </a:bodyPr>
+          <a:lstStyle/>
+          <a:p>
+            <a:pPr algn="l">
+              <a:lnSpc>
+                <a:spcPct val="140000"/>
+              </a:lnSpc>
+            </a:pPr>
+            <a:r>
+              <a:rPr sz="1100" b="0">
+                <a:solidFill>
+                  <a:srgbClr val="12151A"/>
+                </a:solidFill>
+                <a:latin typeface="맑은 고딕"/>
+                <a:ea typeface="맑은 고딕"/>
+                <a:cs typeface="맑은 고딕"/>
+              </a:rPr>
+              <a:t>그림 8종·분석표 9종·대시보드가 같은 실행에서 함께 생성됨</a:t>
+            </a:r>
+          </a:p>
+        </p:txBody>
+      </p:sp>
+      <p:sp>
+        <p:nvSpPr>
+          <p:cNvPr id="13" name="TextBox 12"/>
+          <p:cNvSpPr txBox="1"/>
+          <p:nvPr/>
+        </p:nvSpPr>
+        <p:spPr>
+          <a:xfrm>
+            <a:off x="932688" y="4169664"/>
+            <a:ext cx="182880" cy="256032"/>
+          </a:xfrm>
+          <a:prstGeom prst="rect">
+            <a:avLst/>
+          </a:prstGeom>
+          <a:noFill/>
+        </p:spPr>
+        <p:txBody>
+          <a:bodyPr wrap="square" lIns="0" rIns="0" tIns="0" bIns="0">
+            <a:spAutoFit/>
+          </a:bodyPr>
+          <a:lstStyle/>
+          <a:p>
+            <a:pPr algn="l">
+              <a:lnSpc>
+                <a:spcPct val="135000"/>
+              </a:lnSpc>
+            </a:pPr>
+            <a:r>
+              <a:rPr sz="1300" b="1">
+                <a:solidFill>
+                  <a:srgbClr val="1BAF7A"/>
+                </a:solidFill>
+                <a:latin typeface="맑은 고딕"/>
+                <a:ea typeface="맑은 고딕"/>
+                <a:cs typeface="맑은 고딕"/>
+              </a:rPr>
+              <a:t>·</a:t>
+            </a:r>
+          </a:p>
+        </p:txBody>
+      </p:sp>
+      <p:sp>
+        <p:nvSpPr>
+          <p:cNvPr id="14" name="TextBox 13"/>
+          <p:cNvSpPr txBox="1"/>
+          <p:nvPr/>
+        </p:nvSpPr>
+        <p:spPr>
+          <a:xfrm>
+            <a:off x="1133856" y="4169664"/>
+            <a:ext cx="4572000" cy="411480"/>
+          </a:xfrm>
+          <a:prstGeom prst="rect">
+            <a:avLst/>
+          </a:prstGeom>
+          <a:noFill/>
+        </p:spPr>
+        <p:txBody>
+          <a:bodyPr wrap="square" lIns="0" rIns="0" tIns="0" bIns="0">
+            <a:spAutoFit/>
+          </a:bodyPr>
+          <a:lstStyle/>
+          <a:p>
+            <a:pPr algn="l">
+              <a:lnSpc>
+                <a:spcPct val="140000"/>
+              </a:lnSpc>
+            </a:pPr>
+            <a:r>
+              <a:rPr sz="1100" b="0">
+                <a:solidFill>
+                  <a:srgbClr val="12151A"/>
+                </a:solidFill>
+                <a:latin typeface="맑은 고딕"/>
+                <a:ea typeface="맑은 고딕"/>
+                <a:cs typeface="맑은 고딕"/>
+              </a:rPr>
+              <a:t>지표 정의·가중치·모델 파라미터가 전부 코드에 명시</a:t>
+            </a:r>
+          </a:p>
+        </p:txBody>
+      </p:sp>
+      <p:sp>
+        <p:nvSpPr>
+          <p:cNvPr id="15" name="Rounded Rectangle 14"/>
+          <p:cNvSpPr/>
+          <p:nvPr/>
+        </p:nvSpPr>
+        <p:spPr>
+          <a:xfrm>
+            <a:off x="6236207" y="2121408"/>
+            <a:ext cx="5257800" cy="2487168"/>
+          </a:xfrm>
+          <a:prstGeom prst="roundRect">
+            <a:avLst>
+              <a:gd name="adj" fmla="val 6000"/>
+            </a:avLst>
+          </a:prstGeom>
+          <a:solidFill>
+            <a:srgbClr val="FFFFFF"/>
+          </a:solidFill>
+          <a:ln w="12700">
+            <a:solidFill>
+              <a:srgbClr val="E4E7EC"/>
+            </a:solidFill>
+          </a:ln>
+          <a:effectLst/>
+        </p:spPr>
+        <p:style>
+          <a:lnRef idx="1">
+            <a:schemeClr val="accent1"/>
+          </a:lnRef>
+          <a:fillRef idx="3">
+            <a:schemeClr val="accent1"/>
+          </a:fillRef>
+          <a:effectRef idx="2">
+            <a:schemeClr val="accent1"/>
+          </a:effectRef>
+          <a:fontRef idx="minor">
+            <a:schemeClr val="lt1"/>
+          </a:fontRef>
+        </p:style>
+        <p:txBody>
+          <a:bodyPr rtlCol="0" anchor="ctr"/>
+          <a:lstStyle/>
+          <a:p/>
+        </p:txBody>
+      </p:sp>
+      <p:sp>
+        <p:nvSpPr>
           <p:cNvPr id="16" name="Rectangle 15"/>
           <p:cNvSpPr/>
           <p:nvPr/>
@@ -16590,7 +18271,7 @@
                 <a:ea typeface="맑은 고딕"/>
                 <a:cs typeface="맑은 고딕"/>
               </a:rPr>
-              <a:t>현재 상태: 실데이터 지표 1/5  ·  제출 전 실데이터 투입 후 재실행 필요</a:t>
+              <a:t>현재 상태: 실데이터 지표 4/5  ·  제출 전 실데이터 투입 후 재실행 필요</a:t>
             </a:r>
           </a:p>
         </p:txBody>
@@ -16672,7 +18353,7 @@
                 <a:ea typeface="맑은 고딕"/>
                 <a:cs typeface="맑은 고딕"/>
               </a:rPr>
-              <a:t>19</a:t>
+              <a:t>20</a:t>
             </a:r>
           </a:p>
         </p:txBody>
@@ -16941,7 +18622,7 @@
                 <a:ea typeface="맑은 고딕"/>
                 <a:cs typeface="맑은 고딕"/>
               </a:rPr>
-              <a:t>1.29배</a:t>
+              <a:t>1.82배</a:t>
             </a:r>
           </a:p>
         </p:txBody>
@@ -16982,7 +18663,7 @@
                 <a:ea typeface="맑은 고딕"/>
                 <a:cs typeface="맑은 고딕"/>
               </a:rPr>
-              <a:t>신도심 평균 CBI 48.9 vs 원도심 평균 38.1</a:t>
+              <a:t>신도심 평균 CBI 57.0 vs 원도심 평균 31.3</a:t>
             </a:r>
           </a:p>
         </p:txBody>
@@ -17023,7 +18704,7 @@
                 <a:ea typeface="맑은 고딕"/>
                 <a:cs typeface="맑은 고딕"/>
               </a:rPr>
-              <a:t>0.421</a:t>
+              <a:t>0.204</a:t>
             </a:r>
           </a:p>
         </p:txBody>
@@ -17064,7 +18745,7 @@
                 <a:ea typeface="맑은 고딕"/>
                 <a:cs typeface="맑은 고딕"/>
               </a:rPr>
-              <a:t>25개 생활권 CBI 지니계수 — 변동계수 78.6%</a:t>
+              <a:t>25개 생활권 CBI 지니계수 — 변동계수 36.8%</a:t>
             </a:r>
           </a:p>
         </p:txBody>
@@ -17105,7 +18786,7 @@
                 <a:ea typeface="맑은 고딕"/>
                 <a:cs typeface="맑은 고딕"/>
               </a:rPr>
-              <a:t>문성동 ↔ 성남면</a:t>
+              <a:t>부성동 ↔ 목천읍</a:t>
             </a:r>
           </a:p>
         </p:txBody>
@@ -17146,7 +18827,7 @@
                 <a:ea typeface="맑은 고딕"/>
                 <a:cs typeface="맑은 고딕"/>
               </a:rPr>
-              <a:t>최상위 91점 ↔ 최하위 0점, 같은 시(市)</a:t>
+              <a:t>최상위 59점 ↔ 최하위 18점, 같은 시(市)</a:t>
             </a:r>
           </a:p>
         </p:txBody>
@@ -17187,7 +18868,7 @@
                 <a:ea typeface="맑은 고딕"/>
                 <a:cs typeface="맑은 고딕"/>
               </a:rPr>
-              <a:t>11개 생활권</a:t>
+              <a:t>14개 생활권</a:t>
             </a:r>
           </a:p>
         </p:txBody>
@@ -17228,7 +18909,7 @@
                 <a:ea typeface="맑은 고딕"/>
                 <a:cs typeface="맑은 고딕"/>
               </a:rPr>
-              <a:t>여러 지표가 함께 낮은 '주의' 유형으로 분류되었습니다</a:t>
+              <a:t>여러 지표가 함께 낮은 '쇠퇴' 유형으로 분류되었습니다</a:t>
             </a:r>
           </a:p>
         </p:txBody>
@@ -18076,7 +19757,7 @@
                           <a:ea typeface="맑은 고딕"/>
                           <a:cs typeface="맑은 고딕"/>
                         </a:rPr>
-                        <a:t>3개 지표로 계산한 참고용 수치 한 장</a:t>
+                        <a:t>9개 지표로 계산한 참고용 수치 한 장</a:t>
                       </a:r>
                     </a:p>
                   </a:txBody>
@@ -21724,7 +23405,7 @@
                           <a:ea typeface="맑은 고딕"/>
                           <a:cs typeface="맑은 고딕"/>
                         </a:rPr>
-                        <a:t>미확보</a:t>
+                        <a:t>소상공인 상가(상권)정보(data.go.kr)</a:t>
                       </a:r>
                     </a:p>
                   </a:txBody>
@@ -21749,7 +23430,7 @@
                           <a:ea typeface="맑은 고딕"/>
                           <a:cs typeface="맑은 고딕"/>
                         </a:rPr>
-                        <a:t>상가정보 또는 LOCALDATA 인허가 파일을 넣으면 산출됩니다</a:t>
+                        <a:t>13,045건 매칭 / 25개 생활권 · 개폐업 시계열 없음</a:t>
                       </a:r>
                     </a:p>
                   </a:txBody>
@@ -21801,7 +23482,7 @@
                           <a:ea typeface="맑은 고딕"/>
                           <a:cs typeface="맑은 고딕"/>
                         </a:rPr>
-                        <a:t>nan</a:t>
+                        <a:t>실데이터</a:t>
                       </a:r>
                     </a:p>
                   </a:txBody>
@@ -21826,7 +23507,7 @@
                           <a:ea typeface="맑은 고딕"/>
                           <a:cs typeface="맑은 고딕"/>
                         </a:rPr>
-                        <a:t>미확보</a:t>
+                        <a:t>공공데이터포털 표준데이터 + 상가정보</a:t>
                       </a:r>
                     </a:p>
                   </a:txBody>
@@ -21851,7 +23532,7 @@
                           <a:ea typeface="맑은 고딕"/>
                           <a:cs typeface="맑은 고딕"/>
                         </a:rPr>
-                        <a:t>facility_*.csv 또는 상가정보를 넣으면 산출됩니다</a:t>
+                        <a:t>facility_daycare.csv(239) / facility_hospital.csv(366) / facility_park.csv(133) / 상가정보(490</a:t>
                       </a:r>
                     </a:p>
                   </a:txBody>
@@ -21928,7 +23609,7 @@
                           <a:ea typeface="맑은 고딕"/>
                           <a:cs typeface="맑은 고딕"/>
                         </a:rPr>
-                        <a:t>미확보</a:t>
+                        <a:t>KOSIS 미거주주택(빈집) 통계</a:t>
                       </a:r>
                     </a:p>
                   </a:txBody>
@@ -21953,7 +23634,7 @@
                           <a:ea typeface="맑은 고딕"/>
                           <a:cs typeface="맑은 고딕"/>
                         </a:rPr>
-                        <a:t>빈집 통계(천안시 동남구·서북구 단위)를 넣으면 산출됩니다</a:t>
+                        <a:t>자치구 단위(동남구 9.4%, 서북구 6.1%) → 구에 속한 생활권에 동일 적용</a:t>
                       </a:r>
                     </a:p>
                   </a:txBody>
@@ -22847,7 +24528,7 @@
                           <a:ea typeface="맑은 고딕"/>
                           <a:cs typeface="맑은 고딕"/>
                         </a:rPr>
-                        <a:t>신안동, 청룡동, 성정동, 신방동, 쌍용동</a:t>
+                        <a:t>성정동, 쌍용동, 신안동, 청룡동, 신방동</a:t>
                       </a:r>
                     </a:p>
                   </a:txBody>
@@ -22899,7 +24580,7 @@
                           <a:ea typeface="맑은 고딕"/>
                           <a:cs typeface="맑은 고딕"/>
                         </a:rPr>
-                        <a:t>풍세면, 병천면, 입장면, 북면, 광덕면, 수신면</a:t>
+                        <a:t>입장면, 풍세면, 수신면, 동면, 성남면, 북면</a:t>
                       </a:r>
                     </a:p>
                   </a:txBody>
@@ -22951,7 +24632,7 @@
                           <a:ea typeface="맑은 고딕"/>
                           <a:cs typeface="맑은 고딕"/>
                         </a:rPr>
-                        <a:t>부성동, 불당동, 백석동</a:t>
+                        <a:t>부성동, 백석동, 불당동</a:t>
                       </a:r>
                     </a:p>
                   </a:txBody>
@@ -23003,7 +24684,7 @@
                           <a:ea typeface="맑은 고딕"/>
                           <a:cs typeface="맑은 고딕"/>
                         </a:rPr>
-                        <a:t>문성동, 일봉동, 봉명동, 원성동, 중앙동</a:t>
+                        <a:t>문성동, 중앙동, 봉명동, 일봉동, 원성동</a:t>
                       </a:r>
                     </a:p>
                   </a:txBody>
@@ -23055,7 +24736,7 @@
                           <a:ea typeface="맑은 고딕"/>
                           <a:cs typeface="맑은 고딕"/>
                         </a:rPr>
-                        <a:t>성거읍, 직산읍, 목천읍, 성환읍</a:t>
+                        <a:t>성거읍, 직산읍, 성환읍, 목천읍</a:t>
                       </a:r>
                     </a:p>
                   </a:txBody>
@@ -23329,7 +25010,7 @@
                 <a:ea typeface="맑은 고딕"/>
                 <a:cs typeface="맑은 고딕"/>
               </a:rPr>
-              <a:t>5대 도메인 · 3개 지표</a:t>
+              <a:t>5대 도메인 · 9개 지표</a:t>
             </a:r>
           </a:p>
         </p:txBody>
@@ -24488,7 +26169,7 @@
                 <a:ea typeface="맑은 고딕"/>
                 <a:cs typeface="맑은 고딕"/>
               </a:rPr>
-              <a:t>살펴본 결과 — 25개 생활권 인구활력지수(잠정)</a:t>
+              <a:t>살펴본 결과 — 25개 생활권 CBI 균형발전지수</a:t>
             </a:r>
           </a:p>
         </p:txBody>
@@ -24529,7 +26210,7 @@
                 <a:ea typeface="맑은 고딕"/>
                 <a:cs typeface="맑은 고딕"/>
               </a:rPr>
-              <a:t>최상위 문성동 91점, 최하위 성남면 0점. (인구활력 도메인만 확보 — 균형발전지수로 부르기에는 이릅니다)</a:t>
+              <a:t>최상위 부성동 59점, 최하위 목천읍 18점. (4개 도메인 · 9개 지표)</a:t>
             </a:r>
           </a:p>
         </p:txBody>
@@ -24550,8 +26231,8 @@
         </p:blipFill>
         <p:spPr>
           <a:xfrm>
-            <a:off x="1491705" y="2084831"/>
-            <a:ext cx="4734125" cy="4114800"/>
+            <a:off x="1765447" y="2084831"/>
+            <a:ext cx="4186641" cy="4114800"/>
           </a:xfrm>
           <a:prstGeom prst="rect">
             <a:avLst/>
@@ -24723,7 +26404,7 @@
                 <a:ea typeface="맑은 고딕"/>
                 <a:cs typeface="맑은 고딕"/>
               </a:rPr>
-              <a:t>1.29배</a:t>
+              <a:t>1.82배</a:t>
             </a:r>
           </a:p>
         </p:txBody>
@@ -24764,7 +26445,7 @@
                 <a:ea typeface="맑은 고딕"/>
                 <a:cs typeface="맑은 고딕"/>
               </a:rPr>
-              <a:t>48.9 vs 38.1</a:t>
+              <a:t>57.0 vs 31.3</a:t>
             </a:r>
           </a:p>
         </p:txBody>
@@ -24934,7 +26615,7 @@
                 <a:ea typeface="맑은 고딕"/>
                 <a:cs typeface="맑은 고딕"/>
               </a:rPr>
-              <a:t>0.421</a:t>
+              <a:t>0.204</a:t>
             </a:r>
           </a:p>
         </p:txBody>
@@ -24975,7 +26656,7 @@
                 <a:ea typeface="맑은 고딕"/>
                 <a:cs typeface="맑은 고딕"/>
               </a:rPr>
-              <a:t>변동계수 78.6%</a:t>
+              <a:t>변동계수 36.8%</a:t>
             </a:r>
           </a:p>
         </p:txBody>
@@ -25145,7 +26826,7 @@
                 <a:ea typeface="맑은 고딕"/>
                 <a:cs typeface="맑은 고딕"/>
               </a:rPr>
-              <a:t>3개 유형</a:t>
+              <a:t>5개 유형</a:t>
             </a:r>
           </a:p>
         </p:txBody>
@@ -25186,7 +26867,7 @@
                 <a:ea typeface="맑은 고딕"/>
                 <a:cs typeface="맑은 고딕"/>
               </a:rPr>
-              <a:t>실루엣 계수 0.59</a:t>
+              <a:t>실루엣 계수 0.459</a:t>
             </a:r>
           </a:p>
         </p:txBody>

--- a/deliverables/기획서_천안균형발전나침반_CBC.pptx
+++ b/deliverables/기획서_천안균형발전나침반_CBC.pptx
@@ -3660,7 +3660,7 @@
                 <a:ea typeface="맑은 고딕"/>
                 <a:cs typeface="맑은 고딕"/>
               </a:rPr>
-              <a:t>25개 생활권 · 지표 9종</a:t>
+              <a:t>25개 생활권 · 지표 7종</a:t>
             </a:r>
           </a:p>
         </p:txBody>
@@ -3904,8 +3904,8 @@
         </p:blipFill>
         <p:spPr>
           <a:xfrm>
-            <a:off x="1741580" y="2157984"/>
-            <a:ext cx="4554415" cy="3200400"/>
+            <a:off x="2057168" y="2157984"/>
+            <a:ext cx="3923239" cy="3200400"/>
           </a:xfrm>
           <a:prstGeom prst="rect">
             <a:avLst/>
@@ -4722,7 +4722,7 @@
                 <a:ea typeface="맑은 고딕"/>
                 <a:cs typeface="맑은 고딕"/>
               </a:rPr>
-              <a:t>5년 인구증감률 상위는 11(+158%), 4(+81%)으로, 두 곳 모두 신축 입주가 이어진 지역입니다. 원도심에 속한 문성동도 사람이 돌아왔습니다.</a:t>
+              <a:t>5년 인구증감률 상위는 2(+158%), 0(+81%)으로, 두 곳 모두 신축 입주가 이어진 지역입니다. 원도심에 속한 문성동도 사람이 돌아왔습니다.</a:t>
             </a:r>
           </a:p>
           <a:p>
@@ -5833,7 +5833,7 @@
                 <a:ea typeface="맑은 고딕"/>
                 <a:cs typeface="맑은 고딕"/>
               </a:rPr>
-              <a:t>72%</a:t>
+              <a:t>75%</a:t>
             </a:r>
           </a:p>
         </p:txBody>
@@ -5915,7 +5915,7 @@
                 <a:ea typeface="맑은 고딕"/>
                 <a:cs typeface="맑은 고딕"/>
               </a:rPr>
-              <a:t>10.09 (베이스라인 10.4)</a:t>
+              <a:t>10.58 (베이스라인 10.4)</a:t>
             </a:r>
           </a:p>
         </p:txBody>
@@ -5997,7 +5997,7 @@
                 <a:ea typeface="맑은 고딕"/>
                 <a:cs typeface="맑은 고딕"/>
               </a:rPr>
-              <a:t>+3.0%</a:t>
+              <a:t>-1.7%</a:t>
             </a:r>
           </a:p>
         </p:txBody>
@@ -6079,7 +6079,7 @@
                 <a:ea typeface="맑은 고딕"/>
                 <a:cs typeface="맑은 고딕"/>
               </a:rPr>
-              <a:t>-0.13</a:t>
+              <a:t>-0.197</a:t>
             </a:r>
           </a:p>
         </p:txBody>
@@ -6760,7 +6760,7 @@
                           <a:ea typeface="맑은 고딕"/>
                           <a:cs typeface="맑은 고딕"/>
                         </a:rPr>
-                        <a:t>+7</a:t>
+                        <a:t>+10</a:t>
                       </a:r>
                     </a:p>
                   </a:txBody>
@@ -6964,7 +6964,109 @@
                           <a:ea typeface="맑은 고딕"/>
                           <a:cs typeface="맑은 고딕"/>
                         </a:rPr>
-                        <a:t>+4</a:t>
+                        <a:t>+3</a:t>
+                      </a:r>
+                    </a:p>
+                  </a:txBody>
+                  <a:tcPr anchor="ctr">
+                    <a:solidFill>
+                      <a:srgbClr val="FFFFFF"/>
+                    </a:solidFill>
+                  </a:tcPr>
+                </a:tc>
+              </a:tr>
+              <a:tr h="256032">
+                <a:tc>
+                  <a:txBody>
+                    <a:bodyPr/>
+                    <a:lstStyle/>
+                    <a:p>
+                      <a:pPr algn="l"/>
+                      <a:r>
+                        <a:rPr sz="900">
+                          <a:solidFill>
+                            <a:srgbClr val="12151A"/>
+                          </a:solidFill>
+                          <a:latin typeface="맑은 고딕"/>
+                          <a:ea typeface="맑은 고딕"/>
+                          <a:cs typeface="맑은 고딕"/>
+                        </a:rPr>
+                        <a:t>성환읍</a:t>
+                      </a:r>
+                    </a:p>
+                  </a:txBody>
+                  <a:tcPr anchor="ctr">
+                    <a:solidFill>
+                      <a:srgbClr val="FFFFFF"/>
+                    </a:solidFill>
+                  </a:tcPr>
+                </a:tc>
+                <a:tc>
+                  <a:txBody>
+                    <a:bodyPr/>
+                    <a:lstStyle/>
+                    <a:p>
+                      <a:pPr algn="ctr"/>
+                      <a:r>
+                        <a:rPr sz="900">
+                          <a:solidFill>
+                            <a:srgbClr val="12151A"/>
+                          </a:solidFill>
+                          <a:latin typeface="맑은 고딕"/>
+                          <a:ea typeface="맑은 고딕"/>
+                          <a:cs typeface="맑은 고딕"/>
+                        </a:rPr>
+                        <a:t>74</a:t>
+                      </a:r>
+                    </a:p>
+                  </a:txBody>
+                  <a:tcPr anchor="ctr">
+                    <a:solidFill>
+                      <a:srgbClr val="FFFFFF"/>
+                    </a:solidFill>
+                  </a:tcPr>
+                </a:tc>
+                <a:tc>
+                  <a:txBody>
+                    <a:bodyPr/>
+                    <a:lstStyle/>
+                    <a:p>
+                      <a:pPr algn="ctr"/>
+                      <a:r>
+                        <a:rPr sz="900">
+                          <a:solidFill>
+                            <a:srgbClr val="12151A"/>
+                          </a:solidFill>
+                          <a:latin typeface="맑은 고딕"/>
+                          <a:ea typeface="맑은 고딕"/>
+                          <a:cs typeface="맑은 고딕"/>
+                        </a:rPr>
+                        <a:t>96</a:t>
+                      </a:r>
+                    </a:p>
+                  </a:txBody>
+                  <a:tcPr anchor="ctr">
+                    <a:solidFill>
+                      <a:srgbClr val="FFFFFF"/>
+                    </a:solidFill>
+                  </a:tcPr>
+                </a:tc>
+                <a:tc>
+                  <a:txBody>
+                    <a:bodyPr/>
+                    <a:lstStyle/>
+                    <a:p>
+                      <a:pPr algn="ctr"/>
+                      <a:r>
+                        <a:rPr sz="900">
+                          <a:solidFill>
+                            <a:srgbClr val="12151A"/>
+                          </a:solidFill>
+                          <a:latin typeface="맑은 고딕"/>
+                          <a:ea typeface="맑은 고딕"/>
+                          <a:cs typeface="맑은 고딕"/>
+                        </a:rPr>
+                        <a:t>+21</a:t>
                       </a:r>
                     </a:p>
                   </a:txBody>
@@ -7041,7 +7143,7 @@
                           <a:ea typeface="맑은 고딕"/>
                           <a:cs typeface="맑은 고딕"/>
                         </a:rPr>
-                        <a:t>94</a:t>
+                        <a:t>92</a:t>
                       </a:r>
                     </a:p>
                   </a:txBody>
@@ -7066,109 +7168,7 @@
                           <a:ea typeface="맑은 고딕"/>
                           <a:cs typeface="맑은 고딕"/>
                         </a:rPr>
-                        <a:t>+6</a:t>
-                      </a:r>
-                    </a:p>
-                  </a:txBody>
-                  <a:tcPr anchor="ctr">
-                    <a:solidFill>
-                      <a:srgbClr val="FFFFFF"/>
-                    </a:solidFill>
-                  </a:tcPr>
-                </a:tc>
-              </a:tr>
-              <a:tr h="256032">
-                <a:tc>
-                  <a:txBody>
-                    <a:bodyPr/>
-                    <a:lstStyle/>
-                    <a:p>
-                      <a:pPr algn="l"/>
-                      <a:r>
-                        <a:rPr sz="900">
-                          <a:solidFill>
-                            <a:srgbClr val="12151A"/>
-                          </a:solidFill>
-                          <a:latin typeface="맑은 고딕"/>
-                          <a:ea typeface="맑은 고딕"/>
-                          <a:cs typeface="맑은 고딕"/>
-                        </a:rPr>
-                        <a:t>원성동</a:t>
-                      </a:r>
-                    </a:p>
-                  </a:txBody>
-                  <a:tcPr anchor="ctr">
-                    <a:solidFill>
-                      <a:srgbClr val="FFFFFF"/>
-                    </a:solidFill>
-                  </a:tcPr>
-                </a:tc>
-                <a:tc>
-                  <a:txBody>
-                    <a:bodyPr/>
-                    <a:lstStyle/>
-                    <a:p>
-                      <a:pPr algn="ctr"/>
-                      <a:r>
-                        <a:rPr sz="900">
-                          <a:solidFill>
-                            <a:srgbClr val="12151A"/>
-                          </a:solidFill>
-                          <a:latin typeface="맑은 고딕"/>
-                          <a:ea typeface="맑은 고딕"/>
-                          <a:cs typeface="맑은 고딕"/>
-                        </a:rPr>
-                        <a:t>74</a:t>
-                      </a:r>
-                    </a:p>
-                  </a:txBody>
-                  <a:tcPr anchor="ctr">
-                    <a:solidFill>
-                      <a:srgbClr val="FFFFFF"/>
-                    </a:solidFill>
-                  </a:tcPr>
-                </a:tc>
-                <a:tc>
-                  <a:txBody>
-                    <a:bodyPr/>
-                    <a:lstStyle/>
-                    <a:p>
-                      <a:pPr algn="ctr"/>
-                      <a:r>
-                        <a:rPr sz="900">
-                          <a:solidFill>
-                            <a:srgbClr val="12151A"/>
-                          </a:solidFill>
-                          <a:latin typeface="맑은 고딕"/>
-                          <a:ea typeface="맑은 고딕"/>
-                          <a:cs typeface="맑은 고딕"/>
-                        </a:rPr>
-                        <a:t>90</a:t>
-                      </a:r>
-                    </a:p>
-                  </a:txBody>
-                  <a:tcPr anchor="ctr">
-                    <a:solidFill>
-                      <a:srgbClr val="FFFFFF"/>
-                    </a:solidFill>
-                  </a:tcPr>
-                </a:tc>
-                <a:tc>
-                  <a:txBody>
-                    <a:bodyPr/>
-                    <a:lstStyle/>
-                    <a:p>
-                      <a:pPr algn="ctr"/>
-                      <a:r>
-                        <a:rPr sz="900">
-                          <a:solidFill>
-                            <a:srgbClr val="12151A"/>
-                          </a:solidFill>
-                          <a:latin typeface="맑은 고딕"/>
-                          <a:ea typeface="맑은 고딕"/>
-                          <a:cs typeface="맑은 고딕"/>
-                        </a:rPr>
-                        <a:t>+16</a:t>
+                        <a:t>+5</a:t>
                       </a:r>
                     </a:p>
                   </a:txBody>
@@ -8535,7 +8535,7 @@
                 <a:ea typeface="맑은 고딕"/>
                 <a:cs typeface="맑은 고딕"/>
               </a:rPr>
-              <a:t>상위 12개소 우선 투자 시 취약수요 커버리지 +28.6%p, 신규 수혜인구 약 188,907명.</a:t>
+              <a:t>상위 12개소 우선 투자 시 취약수요 커버리지 +34.0%p, 신규 수혜인구 약 242,320명.</a:t>
             </a:r>
           </a:p>
         </p:txBody>
@@ -8798,6 +8798,133 @@
                           <a:ea typeface="맑은 고딕"/>
                           <a:cs typeface="맑은 고딕"/>
                         </a:rPr>
+                        <a:t>쌍용동</a:t>
+                      </a:r>
+                    </a:p>
+                  </a:txBody>
+                  <a:tcPr anchor="ctr">
+                    <a:solidFill>
+                      <a:srgbClr val="FFFFFF"/>
+                    </a:solidFill>
+                  </a:tcPr>
+                </a:tc>
+                <a:tc>
+                  <a:txBody>
+                    <a:bodyPr/>
+                    <a:lstStyle/>
+                    <a:p>
+                      <a:pPr algn="ctr"/>
+                      <a:r>
+                        <a:rPr sz="950">
+                          <a:solidFill>
+                            <a:srgbClr val="12151A"/>
+                          </a:solidFill>
+                          <a:latin typeface="맑은 고딕"/>
+                          <a:ea typeface="맑은 고딕"/>
+                          <a:cs typeface="맑은 고딕"/>
+                        </a:rPr>
+                        <a:t>체육</a:t>
+                      </a:r>
+                    </a:p>
+                  </a:txBody>
+                  <a:tcPr anchor="ctr">
+                    <a:solidFill>
+                      <a:srgbClr val="FFFFFF"/>
+                    </a:solidFill>
+                  </a:tcPr>
+                </a:tc>
+                <a:tc>
+                  <a:txBody>
+                    <a:bodyPr/>
+                    <a:lstStyle/>
+                    <a:p>
+                      <a:pPr algn="ctr"/>
+                      <a:r>
+                        <a:rPr sz="950">
+                          <a:solidFill>
+                            <a:srgbClr val="12151A"/>
+                          </a:solidFill>
+                          <a:latin typeface="맑은 고딕"/>
+                          <a:ea typeface="맑은 고딕"/>
+                          <a:cs typeface="맑은 고딕"/>
+                        </a:rPr>
+                        <a:t>41,603</a:t>
+                      </a:r>
+                    </a:p>
+                  </a:txBody>
+                  <a:tcPr anchor="ctr">
+                    <a:solidFill>
+                      <a:srgbClr val="FFFFFF"/>
+                    </a:solidFill>
+                  </a:tcPr>
+                </a:tc>
+                <a:tc>
+                  <a:txBody>
+                    <a:bodyPr/>
+                    <a:lstStyle/>
+                    <a:p>
+                      <a:pPr algn="ctr"/>
+                      <a:r>
+                        <a:rPr sz="950">
+                          <a:solidFill>
+                            <a:srgbClr val="12151A"/>
+                          </a:solidFill>
+                          <a:latin typeface="맑은 고딕"/>
+                          <a:ea typeface="맑은 고딕"/>
+                          <a:cs typeface="맑은 고딕"/>
+                        </a:rPr>
+                        <a:t>+7.07%p</a:t>
+                      </a:r>
+                    </a:p>
+                  </a:txBody>
+                  <a:tcPr anchor="ctr">
+                    <a:solidFill>
+                      <a:srgbClr val="FFFFFF"/>
+                    </a:solidFill>
+                  </a:tcPr>
+                </a:tc>
+              </a:tr>
+              <a:tr h="306324">
+                <a:tc>
+                  <a:txBody>
+                    <a:bodyPr/>
+                    <a:lstStyle/>
+                    <a:p>
+                      <a:pPr algn="l"/>
+                      <a:r>
+                        <a:rPr sz="950">
+                          <a:solidFill>
+                            <a:srgbClr val="12151A"/>
+                          </a:solidFill>
+                          <a:latin typeface="맑은 고딕"/>
+                          <a:ea typeface="맑은 고딕"/>
+                          <a:cs typeface="맑은 고딕"/>
+                        </a:rPr>
+                        <a:t>2</a:t>
+                      </a:r>
+                    </a:p>
+                  </a:txBody>
+                  <a:tcPr anchor="ctr">
+                    <a:solidFill>
+                      <a:srgbClr val="FFFFFF"/>
+                    </a:solidFill>
+                  </a:tcPr>
+                </a:tc>
+                <a:tc>
+                  <a:txBody>
+                    <a:bodyPr/>
+                    <a:lstStyle/>
+                    <a:p>
+                      <a:pPr algn="ctr"/>
+                      <a:r>
+                        <a:rPr sz="950">
+                          <a:solidFill>
+                            <a:srgbClr val="12151A"/>
+                          </a:solidFill>
+                          <a:latin typeface="맑은 고딕"/>
+                          <a:ea typeface="맑은 고딕"/>
+                          <a:cs typeface="맑은 고딕"/>
+                        </a:rPr>
                         <a:t>신방동</a:t>
                       </a:r>
                     </a:p>
@@ -8848,7 +8975,7 @@
                           <a:ea typeface="맑은 고딕"/>
                           <a:cs typeface="맑은 고딕"/>
                         </a:rPr>
-                        <a:t>32,728</a:t>
+                        <a:t>27,432</a:t>
                       </a:r>
                     </a:p>
                   </a:txBody>
@@ -8873,7 +9000,7 @@
                           <a:ea typeface="맑은 고딕"/>
                           <a:cs typeface="맑은 고딕"/>
                         </a:rPr>
-                        <a:t>+5.03%p</a:t>
+                        <a:t>+4.02%p</a:t>
                       </a:r>
                     </a:p>
                   </a:txBody>
@@ -8900,7 +9027,7 @@
                           <a:ea typeface="맑은 고딕"/>
                           <a:cs typeface="맑은 고딕"/>
                         </a:rPr>
-                        <a:t>2</a:t>
+                        <a:t>3</a:t>
                       </a:r>
                     </a:p>
                   </a:txBody>
@@ -8975,7 +9102,7 @@
                           <a:ea typeface="맑은 고딕"/>
                           <a:cs typeface="맑은 고딕"/>
                         </a:rPr>
-                        <a:t>24,351</a:t>
+                        <a:t>26,717</a:t>
                       </a:r>
                     </a:p>
                   </a:txBody>
@@ -9000,7 +9127,7 @@
                           <a:ea typeface="맑은 고딕"/>
                           <a:cs typeface="맑은 고딕"/>
                         </a:rPr>
-                        <a:t>+4.09%p</a:t>
+                        <a:t>+3.95%p</a:t>
                       </a:r>
                     </a:p>
                   </a:txBody>
@@ -9027,7 +9154,7 @@
                           <a:ea typeface="맑은 고딕"/>
                           <a:cs typeface="맑은 고딕"/>
                         </a:rPr>
-                        <a:t>3</a:t>
+                        <a:t>4</a:t>
                       </a:r>
                     </a:p>
                   </a:txBody>
@@ -9052,7 +9179,7 @@
                           <a:ea typeface="맑은 고딕"/>
                           <a:cs typeface="맑은 고딕"/>
                         </a:rPr>
-                        <a:t>청룡동</a:t>
+                        <a:t>성정동</a:t>
                       </a:r>
                     </a:p>
                   </a:txBody>
@@ -9102,7 +9229,7 @@
                           <a:ea typeface="맑은 고딕"/>
                           <a:cs typeface="맑은 고딕"/>
                         </a:rPr>
-                        <a:t>19,277</a:t>
+                        <a:t>24,712</a:t>
                       </a:r>
                     </a:p>
                   </a:txBody>
@@ -9127,7 +9254,7 @@
                           <a:ea typeface="맑은 고딕"/>
                           <a:cs typeface="맑은 고딕"/>
                         </a:rPr>
-                        <a:t>+3.5%p</a:t>
+                        <a:t>+3.54%p</a:t>
                       </a:r>
                     </a:p>
                   </a:txBody>
@@ -9154,7 +9281,134 @@
                           <a:ea typeface="맑은 고딕"/>
                           <a:cs typeface="맑은 고딕"/>
                         </a:rPr>
-                        <a:t>4</a:t>
+                        <a:t>5</a:t>
+                      </a:r>
+                    </a:p>
+                  </a:txBody>
+                  <a:tcPr anchor="ctr">
+                    <a:solidFill>
+                      <a:srgbClr val="FFFFFF"/>
+                    </a:solidFill>
+                  </a:tcPr>
+                </a:tc>
+                <a:tc>
+                  <a:txBody>
+                    <a:bodyPr/>
+                    <a:lstStyle/>
+                    <a:p>
+                      <a:pPr algn="ctr"/>
+                      <a:r>
+                        <a:rPr sz="950">
+                          <a:solidFill>
+                            <a:srgbClr val="12151A"/>
+                          </a:solidFill>
+                          <a:latin typeface="맑은 고딕"/>
+                          <a:ea typeface="맑은 고딕"/>
+                          <a:cs typeface="맑은 고딕"/>
+                        </a:rPr>
+                        <a:t>일봉동</a:t>
+                      </a:r>
+                    </a:p>
+                  </a:txBody>
+                  <a:tcPr anchor="ctr">
+                    <a:solidFill>
+                      <a:srgbClr val="FFFFFF"/>
+                    </a:solidFill>
+                  </a:tcPr>
+                </a:tc>
+                <a:tc>
+                  <a:txBody>
+                    <a:bodyPr/>
+                    <a:lstStyle/>
+                    <a:p>
+                      <a:pPr algn="ctr"/>
+                      <a:r>
+                        <a:rPr sz="950">
+                          <a:solidFill>
+                            <a:srgbClr val="12151A"/>
+                          </a:solidFill>
+                          <a:latin typeface="맑은 고딕"/>
+                          <a:ea typeface="맑은 고딕"/>
+                          <a:cs typeface="맑은 고딕"/>
+                        </a:rPr>
+                        <a:t>체육</a:t>
+                      </a:r>
+                    </a:p>
+                  </a:txBody>
+                  <a:tcPr anchor="ctr">
+                    <a:solidFill>
+                      <a:srgbClr val="FFFFFF"/>
+                    </a:solidFill>
+                  </a:tcPr>
+                </a:tc>
+                <a:tc>
+                  <a:txBody>
+                    <a:bodyPr/>
+                    <a:lstStyle/>
+                    <a:p>
+                      <a:pPr algn="ctr"/>
+                      <a:r>
+                        <a:rPr sz="950">
+                          <a:solidFill>
+                            <a:srgbClr val="12151A"/>
+                          </a:solidFill>
+                          <a:latin typeface="맑은 고딕"/>
+                          <a:ea typeface="맑은 고딕"/>
+                          <a:cs typeface="맑은 고딕"/>
+                        </a:rPr>
+                        <a:t>21,780</a:t>
+                      </a:r>
+                    </a:p>
+                  </a:txBody>
+                  <a:tcPr anchor="ctr">
+                    <a:solidFill>
+                      <a:srgbClr val="FFFFFF"/>
+                    </a:solidFill>
+                  </a:tcPr>
+                </a:tc>
+                <a:tc>
+                  <a:txBody>
+                    <a:bodyPr/>
+                    <a:lstStyle/>
+                    <a:p>
+                      <a:pPr algn="ctr"/>
+                      <a:r>
+                        <a:rPr sz="950">
+                          <a:solidFill>
+                            <a:srgbClr val="12151A"/>
+                          </a:solidFill>
+                          <a:latin typeface="맑은 고딕"/>
+                          <a:ea typeface="맑은 고딕"/>
+                          <a:cs typeface="맑은 고딕"/>
+                        </a:rPr>
+                        <a:t>+3.11%p</a:t>
+                      </a:r>
+                    </a:p>
+                  </a:txBody>
+                  <a:tcPr anchor="ctr">
+                    <a:solidFill>
+                      <a:srgbClr val="FFFFFF"/>
+                    </a:solidFill>
+                  </a:tcPr>
+                </a:tc>
+              </a:tr>
+              <a:tr h="306324">
+                <a:tc>
+                  <a:txBody>
+                    <a:bodyPr/>
+                    <a:lstStyle/>
+                    <a:p>
+                      <a:pPr algn="l"/>
+                      <a:r>
+                        <a:rPr sz="950">
+                          <a:solidFill>
+                            <a:srgbClr val="12151A"/>
+                          </a:solidFill>
+                          <a:latin typeface="맑은 고딕"/>
+                          <a:ea typeface="맑은 고딕"/>
+                          <a:cs typeface="맑은 고딕"/>
+                        </a:rPr>
+                        <a:t>6</a:t>
                       </a:r>
                     </a:p>
                   </a:txBody>
@@ -9254,7 +9508,7 @@
                           <a:ea typeface="맑은 고딕"/>
                           <a:cs typeface="맑은 고딕"/>
                         </a:rPr>
-                        <a:t>+3.06%p</a:t>
+                        <a:t>+2.81%p</a:t>
                       </a:r>
                     </a:p>
                   </a:txBody>
@@ -9281,7 +9535,261 @@
                           <a:ea typeface="맑은 고딕"/>
                           <a:cs typeface="맑은 고딕"/>
                         </a:rPr>
-                        <a:t>5</a:t>
+                        <a:t>7</a:t>
+                      </a:r>
+                    </a:p>
+                  </a:txBody>
+                  <a:tcPr anchor="ctr">
+                    <a:solidFill>
+                      <a:srgbClr val="FFFFFF"/>
+                    </a:solidFill>
+                  </a:tcPr>
+                </a:tc>
+                <a:tc>
+                  <a:txBody>
+                    <a:bodyPr/>
+                    <a:lstStyle/>
+                    <a:p>
+                      <a:pPr algn="ctr"/>
+                      <a:r>
+                        <a:rPr sz="950">
+                          <a:solidFill>
+                            <a:srgbClr val="12151A"/>
+                          </a:solidFill>
+                          <a:latin typeface="맑은 고딕"/>
+                          <a:ea typeface="맑은 고딕"/>
+                          <a:cs typeface="맑은 고딕"/>
+                        </a:rPr>
+                        <a:t>성정동</a:t>
+                      </a:r>
+                    </a:p>
+                  </a:txBody>
+                  <a:tcPr anchor="ctr">
+                    <a:solidFill>
+                      <a:srgbClr val="FFFFFF"/>
+                    </a:solidFill>
+                  </a:tcPr>
+                </a:tc>
+                <a:tc>
+                  <a:txBody>
+                    <a:bodyPr/>
+                    <a:lstStyle/>
+                    <a:p>
+                      <a:pPr algn="ctr"/>
+                      <a:r>
+                        <a:rPr sz="950">
+                          <a:solidFill>
+                            <a:srgbClr val="12151A"/>
+                          </a:solidFill>
+                          <a:latin typeface="맑은 고딕"/>
+                          <a:ea typeface="맑은 고딕"/>
+                          <a:cs typeface="맑은 고딕"/>
+                        </a:rPr>
+                        <a:t>체육</a:t>
+                      </a:r>
+                    </a:p>
+                  </a:txBody>
+                  <a:tcPr anchor="ctr">
+                    <a:solidFill>
+                      <a:srgbClr val="FFFFFF"/>
+                    </a:solidFill>
+                  </a:tcPr>
+                </a:tc>
+                <a:tc>
+                  <a:txBody>
+                    <a:bodyPr/>
+                    <a:lstStyle/>
+                    <a:p>
+                      <a:pPr algn="ctr"/>
+                      <a:r>
+                        <a:rPr sz="950">
+                          <a:solidFill>
+                            <a:srgbClr val="12151A"/>
+                          </a:solidFill>
+                          <a:latin typeface="맑은 고딕"/>
+                          <a:ea typeface="맑은 고딕"/>
+                          <a:cs typeface="맑은 고딕"/>
+                        </a:rPr>
+                        <a:t>18,521</a:t>
+                      </a:r>
+                    </a:p>
+                  </a:txBody>
+                  <a:tcPr anchor="ctr">
+                    <a:solidFill>
+                      <a:srgbClr val="FFFFFF"/>
+                    </a:solidFill>
+                  </a:tcPr>
+                </a:tc>
+                <a:tc>
+                  <a:txBody>
+                    <a:bodyPr/>
+                    <a:lstStyle/>
+                    <a:p>
+                      <a:pPr algn="ctr"/>
+                      <a:r>
+                        <a:rPr sz="950">
+                          <a:solidFill>
+                            <a:srgbClr val="12151A"/>
+                          </a:solidFill>
+                          <a:latin typeface="맑은 고딕"/>
+                          <a:ea typeface="맑은 고딕"/>
+                          <a:cs typeface="맑은 고딕"/>
+                        </a:rPr>
+                        <a:t>+2.33%p</a:t>
+                      </a:r>
+                    </a:p>
+                  </a:txBody>
+                  <a:tcPr anchor="ctr">
+                    <a:solidFill>
+                      <a:srgbClr val="FFFFFF"/>
+                    </a:solidFill>
+                  </a:tcPr>
+                </a:tc>
+              </a:tr>
+              <a:tr h="306324">
+                <a:tc>
+                  <a:txBody>
+                    <a:bodyPr/>
+                    <a:lstStyle/>
+                    <a:p>
+                      <a:pPr algn="l"/>
+                      <a:r>
+                        <a:rPr sz="950">
+                          <a:solidFill>
+                            <a:srgbClr val="12151A"/>
+                          </a:solidFill>
+                          <a:latin typeface="맑은 고딕"/>
+                          <a:ea typeface="맑은 고딕"/>
+                          <a:cs typeface="맑은 고딕"/>
+                        </a:rPr>
+                        <a:t>8</a:t>
+                      </a:r>
+                    </a:p>
+                  </a:txBody>
+                  <a:tcPr anchor="ctr">
+                    <a:solidFill>
+                      <a:srgbClr val="FFFFFF"/>
+                    </a:solidFill>
+                  </a:tcPr>
+                </a:tc>
+                <a:tc>
+                  <a:txBody>
+                    <a:bodyPr/>
+                    <a:lstStyle/>
+                    <a:p>
+                      <a:pPr algn="ctr"/>
+                      <a:r>
+                        <a:rPr sz="950">
+                          <a:solidFill>
+                            <a:srgbClr val="12151A"/>
+                          </a:solidFill>
+                          <a:latin typeface="맑은 고딕"/>
+                          <a:ea typeface="맑은 고딕"/>
+                          <a:cs typeface="맑은 고딕"/>
+                        </a:rPr>
+                        <a:t>쌍용동</a:t>
+                      </a:r>
+                    </a:p>
+                  </a:txBody>
+                  <a:tcPr anchor="ctr">
+                    <a:solidFill>
+                      <a:srgbClr val="FFFFFF"/>
+                    </a:solidFill>
+                  </a:tcPr>
+                </a:tc>
+                <a:tc>
+                  <a:txBody>
+                    <a:bodyPr/>
+                    <a:lstStyle/>
+                    <a:p>
+                      <a:pPr algn="ctr"/>
+                      <a:r>
+                        <a:rPr sz="950">
+                          <a:solidFill>
+                            <a:srgbClr val="12151A"/>
+                          </a:solidFill>
+                          <a:latin typeface="맑은 고딕"/>
+                          <a:ea typeface="맑은 고딕"/>
+                          <a:cs typeface="맑은 고딕"/>
+                        </a:rPr>
+                        <a:t>체육</a:t>
+                      </a:r>
+                    </a:p>
+                  </a:txBody>
+                  <a:tcPr anchor="ctr">
+                    <a:solidFill>
+                      <a:srgbClr val="FFFFFF"/>
+                    </a:solidFill>
+                  </a:tcPr>
+                </a:tc>
+                <a:tc>
+                  <a:txBody>
+                    <a:bodyPr/>
+                    <a:lstStyle/>
+                    <a:p>
+                      <a:pPr algn="ctr"/>
+                      <a:r>
+                        <a:rPr sz="950">
+                          <a:solidFill>
+                            <a:srgbClr val="12151A"/>
+                          </a:solidFill>
+                          <a:latin typeface="맑은 고딕"/>
+                          <a:ea typeface="맑은 고딕"/>
+                          <a:cs typeface="맑은 고딕"/>
+                        </a:rPr>
+                        <a:t>19,772</a:t>
+                      </a:r>
+                    </a:p>
+                  </a:txBody>
+                  <a:tcPr anchor="ctr">
+                    <a:solidFill>
+                      <a:srgbClr val="FFFFFF"/>
+                    </a:solidFill>
+                  </a:tcPr>
+                </a:tc>
+                <a:tc>
+                  <a:txBody>
+                    <a:bodyPr/>
+                    <a:lstStyle/>
+                    <a:p>
+                      <a:pPr algn="ctr"/>
+                      <a:r>
+                        <a:rPr sz="950">
+                          <a:solidFill>
+                            <a:srgbClr val="12151A"/>
+                          </a:solidFill>
+                          <a:latin typeface="맑은 고딕"/>
+                          <a:ea typeface="맑은 고딕"/>
+                          <a:cs typeface="맑은 고딕"/>
+                        </a:rPr>
+                        <a:t>+1.8%p</a:t>
+                      </a:r>
+                    </a:p>
+                  </a:txBody>
+                  <a:tcPr anchor="ctr">
+                    <a:solidFill>
+                      <a:srgbClr val="FFFFFF"/>
+                    </a:solidFill>
+                  </a:tcPr>
+                </a:tc>
+              </a:tr>
+              <a:tr h="306324">
+                <a:tc>
+                  <a:txBody>
+                    <a:bodyPr/>
+                    <a:lstStyle/>
+                    <a:p>
+                      <a:pPr algn="l"/>
+                      <a:r>
+                        <a:rPr sz="950">
+                          <a:solidFill>
+                            <a:srgbClr val="12151A"/>
+                          </a:solidFill>
+                          <a:latin typeface="맑은 고딕"/>
+                          <a:ea typeface="맑은 고딕"/>
+                          <a:cs typeface="맑은 고딕"/>
+                        </a:rPr>
+                        <a:t>9</a:t>
                       </a:r>
                     </a:p>
                   </a:txBody>
@@ -9356,7 +9864,7 @@
                           <a:ea typeface="맑은 고딕"/>
                           <a:cs typeface="맑은 고딕"/>
                         </a:rPr>
-                        <a:t>20,430</a:t>
+                        <a:t>14,664</a:t>
                       </a:r>
                     </a:p>
                   </a:txBody>
@@ -9381,515 +9889,7 @@
                           <a:ea typeface="맑은 고딕"/>
                           <a:cs typeface="맑은 고딕"/>
                         </a:rPr>
-                        <a:t>+2.63%p</a:t>
-                      </a:r>
-                    </a:p>
-                  </a:txBody>
-                  <a:tcPr anchor="ctr">
-                    <a:solidFill>
-                      <a:srgbClr val="FFFFFF"/>
-                    </a:solidFill>
-                  </a:tcPr>
-                </a:tc>
-              </a:tr>
-              <a:tr h="306324">
-                <a:tc>
-                  <a:txBody>
-                    <a:bodyPr/>
-                    <a:lstStyle/>
-                    <a:p>
-                      <a:pPr algn="l"/>
-                      <a:r>
-                        <a:rPr sz="950">
-                          <a:solidFill>
-                            <a:srgbClr val="12151A"/>
-                          </a:solidFill>
-                          <a:latin typeface="맑은 고딕"/>
-                          <a:ea typeface="맑은 고딕"/>
-                          <a:cs typeface="맑은 고딕"/>
-                        </a:rPr>
-                        <a:t>6</a:t>
-                      </a:r>
-                    </a:p>
-                  </a:txBody>
-                  <a:tcPr anchor="ctr">
-                    <a:solidFill>
-                      <a:srgbClr val="FFFFFF"/>
-                    </a:solidFill>
-                  </a:tcPr>
-                </a:tc>
-                <a:tc>
-                  <a:txBody>
-                    <a:bodyPr/>
-                    <a:lstStyle/>
-                    <a:p>
-                      <a:pPr algn="ctr"/>
-                      <a:r>
-                        <a:rPr sz="950">
-                          <a:solidFill>
-                            <a:srgbClr val="12151A"/>
-                          </a:solidFill>
-                          <a:latin typeface="맑은 고딕"/>
-                          <a:ea typeface="맑은 고딕"/>
-                          <a:cs typeface="맑은 고딕"/>
-                        </a:rPr>
-                        <a:t>일봉동</a:t>
-                      </a:r>
-                    </a:p>
-                  </a:txBody>
-                  <a:tcPr anchor="ctr">
-                    <a:solidFill>
-                      <a:srgbClr val="FFFFFF"/>
-                    </a:solidFill>
-                  </a:tcPr>
-                </a:tc>
-                <a:tc>
-                  <a:txBody>
-                    <a:bodyPr/>
-                    <a:lstStyle/>
-                    <a:p>
-                      <a:pPr algn="ctr"/>
-                      <a:r>
-                        <a:rPr sz="950">
-                          <a:solidFill>
-                            <a:srgbClr val="12151A"/>
-                          </a:solidFill>
-                          <a:latin typeface="맑은 고딕"/>
-                          <a:ea typeface="맑은 고딕"/>
-                          <a:cs typeface="맑은 고딕"/>
-                        </a:rPr>
-                        <a:t>체육</a:t>
-                      </a:r>
-                    </a:p>
-                  </a:txBody>
-                  <a:tcPr anchor="ctr">
-                    <a:solidFill>
-                      <a:srgbClr val="FFFFFF"/>
-                    </a:solidFill>
-                  </a:tcPr>
-                </a:tc>
-                <a:tc>
-                  <a:txBody>
-                    <a:bodyPr/>
-                    <a:lstStyle/>
-                    <a:p>
-                      <a:pPr algn="ctr"/>
-                      <a:r>
-                        <a:rPr sz="950">
-                          <a:solidFill>
-                            <a:srgbClr val="12151A"/>
-                          </a:solidFill>
-                          <a:latin typeface="맑은 고딕"/>
-                          <a:ea typeface="맑은 고딕"/>
-                          <a:cs typeface="맑은 고딕"/>
-                        </a:rPr>
-                        <a:t>16,940</a:t>
-                      </a:r>
-                    </a:p>
-                  </a:txBody>
-                  <a:tcPr anchor="ctr">
-                    <a:solidFill>
-                      <a:srgbClr val="FFFFFF"/>
-                    </a:solidFill>
-                  </a:tcPr>
-                </a:tc>
-                <a:tc>
-                  <a:txBody>
-                    <a:bodyPr/>
-                    <a:lstStyle/>
-                    <a:p>
-                      <a:pPr algn="ctr"/>
-                      <a:r>
-                        <a:rPr sz="950">
-                          <a:solidFill>
-                            <a:srgbClr val="12151A"/>
-                          </a:solidFill>
-                          <a:latin typeface="맑은 고딕"/>
-                          <a:ea typeface="맑은 고딕"/>
-                          <a:cs typeface="맑은 고딕"/>
-                        </a:rPr>
-                        <a:t>+2.41%p</a:t>
-                      </a:r>
-                    </a:p>
-                  </a:txBody>
-                  <a:tcPr anchor="ctr">
-                    <a:solidFill>
-                      <a:srgbClr val="FFFFFF"/>
-                    </a:solidFill>
-                  </a:tcPr>
-                </a:tc>
-              </a:tr>
-              <a:tr h="306324">
-                <a:tc>
-                  <a:txBody>
-                    <a:bodyPr/>
-                    <a:lstStyle/>
-                    <a:p>
-                      <a:pPr algn="l"/>
-                      <a:r>
-                        <a:rPr sz="950">
-                          <a:solidFill>
-                            <a:srgbClr val="12151A"/>
-                          </a:solidFill>
-                          <a:latin typeface="맑은 고딕"/>
-                          <a:ea typeface="맑은 고딕"/>
-                          <a:cs typeface="맑은 고딕"/>
-                        </a:rPr>
-                        <a:t>7</a:t>
-                      </a:r>
-                    </a:p>
-                  </a:txBody>
-                  <a:tcPr anchor="ctr">
-                    <a:solidFill>
-                      <a:srgbClr val="FFFFFF"/>
-                    </a:solidFill>
-                  </a:tcPr>
-                </a:tc>
-                <a:tc>
-                  <a:txBody>
-                    <a:bodyPr/>
-                    <a:lstStyle/>
-                    <a:p>
-                      <a:pPr algn="ctr"/>
-                      <a:r>
-                        <a:rPr sz="950">
-                          <a:solidFill>
-                            <a:srgbClr val="12151A"/>
-                          </a:solidFill>
-                          <a:latin typeface="맑은 고딕"/>
-                          <a:ea typeface="맑은 고딕"/>
-                          <a:cs typeface="맑은 고딕"/>
-                        </a:rPr>
-                        <a:t>청룡동</a:t>
-                      </a:r>
-                    </a:p>
-                  </a:txBody>
-                  <a:tcPr anchor="ctr">
-                    <a:solidFill>
-                      <a:srgbClr val="FFFFFF"/>
-                    </a:solidFill>
-                  </a:tcPr>
-                </a:tc>
-                <a:tc>
-                  <a:txBody>
-                    <a:bodyPr/>
-                    <a:lstStyle/>
-                    <a:p>
-                      <a:pPr algn="ctr"/>
-                      <a:r>
-                        <a:rPr sz="950">
-                          <a:solidFill>
-                            <a:srgbClr val="12151A"/>
-                          </a:solidFill>
-                          <a:latin typeface="맑은 고딕"/>
-                          <a:ea typeface="맑은 고딕"/>
-                          <a:cs typeface="맑은 고딕"/>
-                        </a:rPr>
-                        <a:t>체육</a:t>
-                      </a:r>
-                    </a:p>
-                  </a:txBody>
-                  <a:tcPr anchor="ctr">
-                    <a:solidFill>
-                      <a:srgbClr val="FFFFFF"/>
-                    </a:solidFill>
-                  </a:tcPr>
-                </a:tc>
-                <a:tc>
-                  <a:txBody>
-                    <a:bodyPr/>
-                    <a:lstStyle/>
-                    <a:p>
-                      <a:pPr algn="ctr"/>
-                      <a:r>
-                        <a:rPr sz="950">
-                          <a:solidFill>
-                            <a:srgbClr val="12151A"/>
-                          </a:solidFill>
-                          <a:latin typeface="맑은 고딕"/>
-                          <a:ea typeface="맑은 고딕"/>
-                          <a:cs typeface="맑은 고딕"/>
-                        </a:rPr>
-                        <a:t>17,179</a:t>
-                      </a:r>
-                    </a:p>
-                  </a:txBody>
-                  <a:tcPr anchor="ctr">
-                    <a:solidFill>
-                      <a:srgbClr val="FFFFFF"/>
-                    </a:solidFill>
-                  </a:tcPr>
-                </a:tc>
-                <a:tc>
-                  <a:txBody>
-                    <a:bodyPr/>
-                    <a:lstStyle/>
-                    <a:p>
-                      <a:pPr algn="ctr"/>
-                      <a:r>
-                        <a:rPr sz="950">
-                          <a:solidFill>
-                            <a:srgbClr val="12151A"/>
-                          </a:solidFill>
-                          <a:latin typeface="맑은 고딕"/>
-                          <a:ea typeface="맑은 고딕"/>
-                          <a:cs typeface="맑은 고딕"/>
-                        </a:rPr>
-                        <a:t>+2.0%p</a:t>
-                      </a:r>
-                    </a:p>
-                  </a:txBody>
-                  <a:tcPr anchor="ctr">
-                    <a:solidFill>
-                      <a:srgbClr val="FFFFFF"/>
-                    </a:solidFill>
-                  </a:tcPr>
-                </a:tc>
-              </a:tr>
-              <a:tr h="306324">
-                <a:tc>
-                  <a:txBody>
-                    <a:bodyPr/>
-                    <a:lstStyle/>
-                    <a:p>
-                      <a:pPr algn="l"/>
-                      <a:r>
-                        <a:rPr sz="950">
-                          <a:solidFill>
-                            <a:srgbClr val="12151A"/>
-                          </a:solidFill>
-                          <a:latin typeface="맑은 고딕"/>
-                          <a:ea typeface="맑은 고딕"/>
-                          <a:cs typeface="맑은 고딕"/>
-                        </a:rPr>
-                        <a:t>8</a:t>
-                      </a:r>
-                    </a:p>
-                  </a:txBody>
-                  <a:tcPr anchor="ctr">
-                    <a:solidFill>
-                      <a:srgbClr val="FFFFFF"/>
-                    </a:solidFill>
-                  </a:tcPr>
-                </a:tc>
-                <a:tc>
-                  <a:txBody>
-                    <a:bodyPr/>
-                    <a:lstStyle/>
-                    <a:p>
-                      <a:pPr algn="ctr"/>
-                      <a:r>
-                        <a:rPr sz="950">
-                          <a:solidFill>
-                            <a:srgbClr val="12151A"/>
-                          </a:solidFill>
-                          <a:latin typeface="맑은 고딕"/>
-                          <a:ea typeface="맑은 고딕"/>
-                          <a:cs typeface="맑은 고딕"/>
-                        </a:rPr>
-                        <a:t>신안동</a:t>
-                      </a:r>
-                    </a:p>
-                  </a:txBody>
-                  <a:tcPr anchor="ctr">
-                    <a:solidFill>
-                      <a:srgbClr val="FFFFFF"/>
-                    </a:solidFill>
-                  </a:tcPr>
-                </a:tc>
-                <a:tc>
-                  <a:txBody>
-                    <a:bodyPr/>
-                    <a:lstStyle/>
-                    <a:p>
-                      <a:pPr algn="ctr"/>
-                      <a:r>
-                        <a:rPr sz="950">
-                          <a:solidFill>
-                            <a:srgbClr val="12151A"/>
-                          </a:solidFill>
-                          <a:latin typeface="맑은 고딕"/>
-                          <a:ea typeface="맑은 고딕"/>
-                          <a:cs typeface="맑은 고딕"/>
-                        </a:rPr>
-                        <a:t>체육</a:t>
-                      </a:r>
-                    </a:p>
-                  </a:txBody>
-                  <a:tcPr anchor="ctr">
-                    <a:solidFill>
-                      <a:srgbClr val="FFFFFF"/>
-                    </a:solidFill>
-                  </a:tcPr>
-                </a:tc>
-                <a:tc>
-                  <a:txBody>
-                    <a:bodyPr/>
-                    <a:lstStyle/>
-                    <a:p>
-                      <a:pPr algn="ctr"/>
-                      <a:r>
-                        <a:rPr sz="950">
-                          <a:solidFill>
-                            <a:srgbClr val="12151A"/>
-                          </a:solidFill>
-                          <a:latin typeface="맑은 고딕"/>
-                          <a:ea typeface="맑은 고딕"/>
-                          <a:cs typeface="맑은 고딕"/>
-                        </a:rPr>
-                        <a:t>9,016</a:t>
-                      </a:r>
-                    </a:p>
-                  </a:txBody>
-                  <a:tcPr anchor="ctr">
-                    <a:solidFill>
-                      <a:srgbClr val="FFFFFF"/>
-                    </a:solidFill>
-                  </a:tcPr>
-                </a:tc>
-                <a:tc>
-                  <a:txBody>
-                    <a:bodyPr/>
-                    <a:lstStyle/>
-                    <a:p>
-                      <a:pPr algn="ctr"/>
-                      <a:r>
-                        <a:rPr sz="950">
-                          <a:solidFill>
-                            <a:srgbClr val="12151A"/>
-                          </a:solidFill>
-                          <a:latin typeface="맑은 고딕"/>
-                          <a:ea typeface="맑은 고딕"/>
-                          <a:cs typeface="맑은 고딕"/>
-                        </a:rPr>
-                        <a:t>+1.79%p</a:t>
-                      </a:r>
-                    </a:p>
-                  </a:txBody>
-                  <a:tcPr anchor="ctr">
-                    <a:solidFill>
-                      <a:srgbClr val="FFFFFF"/>
-                    </a:solidFill>
-                  </a:tcPr>
-                </a:tc>
-              </a:tr>
-              <a:tr h="306324">
-                <a:tc>
-                  <a:txBody>
-                    <a:bodyPr/>
-                    <a:lstStyle/>
-                    <a:p>
-                      <a:pPr algn="l"/>
-                      <a:r>
-                        <a:rPr sz="950">
-                          <a:solidFill>
-                            <a:srgbClr val="12151A"/>
-                          </a:solidFill>
-                          <a:latin typeface="맑은 고딕"/>
-                          <a:ea typeface="맑은 고딕"/>
-                          <a:cs typeface="맑은 고딕"/>
-                        </a:rPr>
-                        <a:t>9</a:t>
-                      </a:r>
-                    </a:p>
-                  </a:txBody>
-                  <a:tcPr anchor="ctr">
-                    <a:solidFill>
-                      <a:srgbClr val="FFFFFF"/>
-                    </a:solidFill>
-                  </a:tcPr>
-                </a:tc>
-                <a:tc>
-                  <a:txBody>
-                    <a:bodyPr/>
-                    <a:lstStyle/>
-                    <a:p>
-                      <a:pPr algn="ctr"/>
-                      <a:r>
-                        <a:rPr sz="950">
-                          <a:solidFill>
-                            <a:srgbClr val="12151A"/>
-                          </a:solidFill>
-                          <a:latin typeface="맑은 고딕"/>
-                          <a:ea typeface="맑은 고딕"/>
-                          <a:cs typeface="맑은 고딕"/>
-                        </a:rPr>
-                        <a:t>문성동</a:t>
-                      </a:r>
-                    </a:p>
-                  </a:txBody>
-                  <a:tcPr anchor="ctr">
-                    <a:solidFill>
-                      <a:srgbClr val="FFFFFF"/>
-                    </a:solidFill>
-                  </a:tcPr>
-                </a:tc>
-                <a:tc>
-                  <a:txBody>
-                    <a:bodyPr/>
-                    <a:lstStyle/>
-                    <a:p>
-                      <a:pPr algn="ctr"/>
-                      <a:r>
-                        <a:rPr sz="950">
-                          <a:solidFill>
-                            <a:srgbClr val="12151A"/>
-                          </a:solidFill>
-                          <a:latin typeface="맑은 고딕"/>
-                          <a:ea typeface="맑은 고딕"/>
-                          <a:cs typeface="맑은 고딕"/>
-                        </a:rPr>
-                        <a:t>체육</a:t>
-                      </a:r>
-                    </a:p>
-                  </a:txBody>
-                  <a:tcPr anchor="ctr">
-                    <a:solidFill>
-                      <a:srgbClr val="FFFFFF"/>
-                    </a:solidFill>
-                  </a:tcPr>
-                </a:tc>
-                <a:tc>
-                  <a:txBody>
-                    <a:bodyPr/>
-                    <a:lstStyle/>
-                    <a:p>
-                      <a:pPr algn="ctr"/>
-                      <a:r>
-                        <a:rPr sz="950">
-                          <a:solidFill>
-                            <a:srgbClr val="12151A"/>
-                          </a:solidFill>
-                          <a:latin typeface="맑은 고딕"/>
-                          <a:ea typeface="맑은 고딕"/>
-                          <a:cs typeface="맑은 고딕"/>
-                        </a:rPr>
-                        <a:t>14,900</a:t>
-                      </a:r>
-                    </a:p>
-                  </a:txBody>
-                  <a:tcPr anchor="ctr">
-                    <a:solidFill>
-                      <a:srgbClr val="FFFFFF"/>
-                    </a:solidFill>
-                  </a:tcPr>
-                </a:tc>
-                <a:tc>
-                  <a:txBody>
-                    <a:bodyPr/>
-                    <a:lstStyle/>
-                    <a:p>
-                      <a:pPr algn="ctr"/>
-                      <a:r>
-                        <a:rPr sz="950">
-                          <a:solidFill>
-                            <a:srgbClr val="12151A"/>
-                          </a:solidFill>
-                          <a:latin typeface="맑은 고딕"/>
-                          <a:ea typeface="맑은 고딕"/>
-                          <a:cs typeface="맑은 고딕"/>
-                        </a:rPr>
-                        <a:t>+1.78%p</a:t>
+                        <a:t>+1.8%p</a:t>
                       </a:r>
                     </a:p>
                   </a:txBody>
@@ -9941,7 +9941,7 @@
                           <a:ea typeface="맑은 고딕"/>
                           <a:cs typeface="맑은 고딕"/>
                         </a:rPr>
-                        <a:t>신안동</a:t>
+                        <a:t>직산읍</a:t>
                       </a:r>
                     </a:p>
                   </a:txBody>
@@ -9966,7 +9966,7 @@
                           <a:ea typeface="맑은 고딕"/>
                           <a:cs typeface="맑은 고딕"/>
                         </a:rPr>
-                        <a:t>체육</a:t>
+                        <a:t>보육</a:t>
                       </a:r>
                     </a:p>
                   </a:txBody>
@@ -9991,7 +9991,7 @@
                           <a:ea typeface="맑은 고딕"/>
                           <a:cs typeface="맑은 고딕"/>
                         </a:rPr>
-                        <a:t>9,016</a:t>
+                        <a:t>9,709</a:t>
                       </a:r>
                     </a:p>
                   </a:txBody>
@@ -10016,7 +10016,7 @@
                           <a:ea typeface="맑은 고딕"/>
                           <a:cs typeface="맑은 고딕"/>
                         </a:rPr>
-                        <a:t>+0.99%p</a:t>
+                        <a:t>+1.34%p</a:t>
                       </a:r>
                     </a:p>
                   </a:txBody>
@@ -10987,7 +10987,7 @@
                 <a:ea typeface="맑은 고딕"/>
                 <a:cs typeface="맑은 고딕"/>
               </a:rPr>
-              <a:t>고령 비율이 가장 높은 곳은 14으로 54%였습니다.</a:t>
+              <a:t>고령 비율이 가장 높은 곳은 4으로 54%였습니다.</a:t>
             </a:r>
           </a:p>
           <a:p>
@@ -14508,7 +14508,7 @@
                 <a:ea typeface="맑은 고딕"/>
                 <a:cs typeface="맑은 고딕"/>
               </a:rPr>
-              <a:t>1.82배</a:t>
+              <a:t>0.85배</a:t>
             </a:r>
           </a:p>
         </p:txBody>
@@ -14549,7 +14549,7 @@
                 <a:ea typeface="맑은 고딕"/>
                 <a:cs typeface="맑은 고딕"/>
               </a:rPr>
-              <a:t>신도심 57.0 vs 원도심 31.3</a:t>
+              <a:t>신도심 36.7 vs 원도심 43.4</a:t>
             </a:r>
           </a:p>
         </p:txBody>
@@ -14719,7 +14719,7 @@
                 <a:ea typeface="맑은 고딕"/>
                 <a:cs typeface="맑은 고딕"/>
               </a:rPr>
-              <a:t>0.204</a:t>
+              <a:t>0.177</a:t>
             </a:r>
           </a:p>
         </p:txBody>
@@ -14930,7 +14930,7 @@
                 <a:ea typeface="맑은 고딕"/>
                 <a:cs typeface="맑은 고딕"/>
               </a:rPr>
-              <a:t>72%</a:t>
+              <a:t>75%</a:t>
             </a:r>
           </a:p>
         </p:txBody>
@@ -14971,7 +14971,7 @@
                 <a:ea typeface="맑은 고딕"/>
                 <a:cs typeface="맑은 고딕"/>
               </a:rPr>
-              <a:t>베이스라인 대비 MAE +3.0%</a:t>
+              <a:t>베이스라인 대비 MAE -1.7%</a:t>
             </a:r>
           </a:p>
         </p:txBody>
@@ -15141,7 +15141,7 @@
                 <a:ea typeface="맑은 고딕"/>
                 <a:cs typeface="맑은 고딕"/>
               </a:rPr>
-              <a:t>188,907명</a:t>
+              <a:t>242,320명</a:t>
             </a:r>
           </a:p>
         </p:txBody>
@@ -15182,7 +15182,7 @@
                 <a:ea typeface="맑은 고딕"/>
                 <a:cs typeface="맑은 고딕"/>
               </a:rPr>
-              <a:t>12개소 · 커버리지 +28.6%p</a:t>
+              <a:t>12개소 · 커버리지 +34.0%p</a:t>
             </a:r>
           </a:p>
         </p:txBody>
@@ -18271,7 +18271,7 @@
                 <a:ea typeface="맑은 고딕"/>
                 <a:cs typeface="맑은 고딕"/>
               </a:rPr>
-              <a:t>현재 상태: 실데이터 지표 4/5  ·  제출 전 실데이터 투입 후 재실행 필요</a:t>
+              <a:t>현재 상태: 실데이터 지표 3/5  ·  제출 전 실데이터 투입 후 재실행 필요</a:t>
             </a:r>
           </a:p>
         </p:txBody>
@@ -18622,7 +18622,7 @@
                 <a:ea typeface="맑은 고딕"/>
                 <a:cs typeface="맑은 고딕"/>
               </a:rPr>
-              <a:t>1.82배</a:t>
+              <a:t>0.85배</a:t>
             </a:r>
           </a:p>
         </p:txBody>
@@ -18663,7 +18663,7 @@
                 <a:ea typeface="맑은 고딕"/>
                 <a:cs typeface="맑은 고딕"/>
               </a:rPr>
-              <a:t>신도심 평균 CBI 57.0 vs 원도심 평균 31.3</a:t>
+              <a:t>신도심 평균 CBI 36.7 vs 원도심 평균 43.4</a:t>
             </a:r>
           </a:p>
         </p:txBody>
@@ -18704,7 +18704,7 @@
                 <a:ea typeface="맑은 고딕"/>
                 <a:cs typeface="맑은 고딕"/>
               </a:rPr>
-              <a:t>0.204</a:t>
+              <a:t>0.177</a:t>
             </a:r>
           </a:p>
         </p:txBody>
@@ -18745,7 +18745,7 @@
                 <a:ea typeface="맑은 고딕"/>
                 <a:cs typeface="맑은 고딕"/>
               </a:rPr>
-              <a:t>25개 생활권 CBI 지니계수 — 변동계수 36.8%</a:t>
+              <a:t>25개 생활권 CBI 지니계수 — 변동계수 34.4%</a:t>
             </a:r>
           </a:p>
         </p:txBody>
@@ -18786,7 +18786,7 @@
                 <a:ea typeface="맑은 고딕"/>
                 <a:cs typeface="맑은 고딕"/>
               </a:rPr>
-              <a:t>부성동 ↔ 목천읍</a:t>
+              <a:t>문성동 ↔ 성환읍</a:t>
             </a:r>
           </a:p>
         </p:txBody>
@@ -18827,7 +18827,7 @@
                 <a:ea typeface="맑은 고딕"/>
                 <a:cs typeface="맑은 고딕"/>
               </a:rPr>
-              <a:t>최상위 59점 ↔ 최하위 18점, 같은 시(市)</a:t>
+              <a:t>최상위 70점 ↔ 최하위 14점, 같은 시(市)</a:t>
             </a:r>
           </a:p>
         </p:txBody>
@@ -18909,7 +18909,7 @@
                 <a:ea typeface="맑은 고딕"/>
                 <a:cs typeface="맑은 고딕"/>
               </a:rPr>
-              <a:t>여러 지표가 함께 낮은 '쇠퇴' 유형으로 분류되었습니다</a:t>
+              <a:t>여러 지표가 함께 낮은 '주의' 유형으로 분류되었습니다</a:t>
             </a:r>
           </a:p>
         </p:txBody>
@@ -19757,7 +19757,7 @@
                           <a:ea typeface="맑은 고딕"/>
                           <a:cs typeface="맑은 고딕"/>
                         </a:rPr>
-                        <a:t>9개 지표로 계산한 참고용 수치 한 장</a:t>
+                        <a:t>7개 지표로 계산한 참고용 수치 한 장</a:t>
                       </a:r>
                     </a:p>
                   </a:txBody>
@@ -23609,7 +23609,7 @@
                           <a:ea typeface="맑은 고딕"/>
                           <a:cs typeface="맑은 고딕"/>
                         </a:rPr>
-                        <a:t>KOSIS 미거주주택(빈집) 통계</a:t>
+                        <a:t>미확보</a:t>
                       </a:r>
                     </a:p>
                   </a:txBody>
@@ -23634,7 +23634,7 @@
                           <a:ea typeface="맑은 고딕"/>
                           <a:cs typeface="맑은 고딕"/>
                         </a:rPr>
-                        <a:t>자치구 단위(동남구 9.4%, 서북구 6.1%) → 구에 속한 생활권에 동일 적용</a:t>
+                        <a:t>빈집 통계(천안시 동남구·서북구 단위)를 넣으면 생활권 지표로 산출됩니다</a:t>
                       </a:r>
                     </a:p>
                   </a:txBody>
@@ -24528,7 +24528,7 @@
                           <a:ea typeface="맑은 고딕"/>
                           <a:cs typeface="맑은 고딕"/>
                         </a:rPr>
-                        <a:t>성정동, 쌍용동, 신안동, 청룡동, 신방동</a:t>
+                        <a:t>신안동, 성정동, 청룡동, 신방동, 쌍용동</a:t>
                       </a:r>
                     </a:p>
                   </a:txBody>
@@ -24580,7 +24580,7 @@
                           <a:ea typeface="맑은 고딕"/>
                           <a:cs typeface="맑은 고딕"/>
                         </a:rPr>
-                        <a:t>입장면, 풍세면, 수신면, 동면, 성남면, 북면</a:t>
+                        <a:t>풍세면, 수신면, 동면, 성남면, 북면, 광덕면</a:t>
                       </a:r>
                     </a:p>
                   </a:txBody>
@@ -24736,7 +24736,7 @@
                           <a:ea typeface="맑은 고딕"/>
                           <a:cs typeface="맑은 고딕"/>
                         </a:rPr>
-                        <a:t>성거읍, 직산읍, 성환읍, 목천읍</a:t>
+                        <a:t>성거읍, 직산읍, 목천읍, 성환읍</a:t>
                       </a:r>
                     </a:p>
                   </a:txBody>
@@ -25010,7 +25010,7 @@
                 <a:ea typeface="맑은 고딕"/>
                 <a:cs typeface="맑은 고딕"/>
               </a:rPr>
-              <a:t>5대 도메인 · 9개 지표</a:t>
+              <a:t>5대 도메인 · 7개 지표</a:t>
             </a:r>
           </a:p>
         </p:txBody>
@@ -26210,7 +26210,7 @@
                 <a:ea typeface="맑은 고딕"/>
                 <a:cs typeface="맑은 고딕"/>
               </a:rPr>
-              <a:t>최상위 부성동 59점, 최하위 목천읍 18점. (4개 도메인 · 9개 지표)</a:t>
+              <a:t>최상위 문성동 70점, 최하위 성환읍 14점. (3개 도메인 · 7개 지표)</a:t>
             </a:r>
           </a:p>
         </p:txBody>
@@ -26404,7 +26404,7 @@
                 <a:ea typeface="맑은 고딕"/>
                 <a:cs typeface="맑은 고딕"/>
               </a:rPr>
-              <a:t>1.82배</a:t>
+              <a:t>0.85배</a:t>
             </a:r>
           </a:p>
         </p:txBody>
@@ -26445,7 +26445,7 @@
                 <a:ea typeface="맑은 고딕"/>
                 <a:cs typeface="맑은 고딕"/>
               </a:rPr>
-              <a:t>57.0 vs 31.3</a:t>
+              <a:t>36.7 vs 43.4</a:t>
             </a:r>
           </a:p>
         </p:txBody>
@@ -26615,7 +26615,7 @@
                 <a:ea typeface="맑은 고딕"/>
                 <a:cs typeface="맑은 고딕"/>
               </a:rPr>
-              <a:t>0.204</a:t>
+              <a:t>0.177</a:t>
             </a:r>
           </a:p>
         </p:txBody>
@@ -26656,7 +26656,7 @@
                 <a:ea typeface="맑은 고딕"/>
                 <a:cs typeface="맑은 고딕"/>
               </a:rPr>
-              <a:t>변동계수 36.8%</a:t>
+              <a:t>변동계수 34.4%</a:t>
             </a:r>
           </a:p>
         </p:txBody>
@@ -26826,7 +26826,7 @@
                 <a:ea typeface="맑은 고딕"/>
                 <a:cs typeface="맑은 고딕"/>
               </a:rPr>
-              <a:t>5개 유형</a:t>
+              <a:t>3개 유형</a:t>
             </a:r>
           </a:p>
         </p:txBody>
@@ -26867,7 +26867,7 @@
                 <a:ea typeface="맑은 고딕"/>
                 <a:cs typeface="맑은 고딕"/>
               </a:rPr>
-              <a:t>실루엣 계수 0.459</a:t>
+              <a:t>실루엣 계수 0.47</a:t>
             </a:r>
           </a:p>
         </p:txBody>

--- a/deliverables/기획서_천안균형발전나침반_CBC.pptx
+++ b/deliverables/기획서_천안균형발전나침반_CBC.pptx
@@ -25,7 +25,6 @@
     <p:sldId id="273" r:id="rId24"/>
     <p:sldId id="274" r:id="rId25"/>
     <p:sldId id="275" r:id="rId26"/>
-    <p:sldId id="276" r:id="rId27"/>
   </p:sldIdLst>
   <p:sldSz cx="12191695" cy="6858000" type="screen4x3"/>
   <p:notesSz cx="6858000" cy="9144000"/>
@@ -3317,7 +3316,48 @@
       </p:sp>
       <p:sp>
         <p:nvSpPr>
-          <p:cNvPr id="7" name="Rectangle 6"/>
+          <p:cNvPr id="7" name="TextBox 6"/>
+          <p:cNvSpPr txBox="1"/>
+          <p:nvPr/>
+        </p:nvSpPr>
+        <p:spPr>
+          <a:xfrm>
+            <a:off x="1051560" y="5815584"/>
+            <a:ext cx="9144000" cy="274320"/>
+          </a:xfrm>
+          <a:prstGeom prst="rect">
+            <a:avLst/>
+          </a:prstGeom>
+          <a:noFill/>
+        </p:spPr>
+        <p:txBody>
+          <a:bodyPr wrap="square" lIns="0" rIns="0" tIns="0" bIns="0">
+            <a:spAutoFit/>
+          </a:bodyPr>
+          <a:lstStyle/>
+          <a:p>
+            <a:pPr algn="l">
+              <a:lnSpc>
+                <a:spcPct val="135000"/>
+              </a:lnSpc>
+            </a:pPr>
+            <a:r>
+              <a:rPr sz="1000" b="0">
+                <a:solidFill>
+                  <a:srgbClr val="FAB219"/>
+                </a:solidFill>
+                <a:latin typeface="맑은 고딕"/>
+                <a:ea typeface="맑은 고딕"/>
+                <a:cs typeface="맑은 고딕"/>
+              </a:rPr>
+              <a:t>※ 현 단계 산출 범위: 인구활력 도메인만 확보 — 균형발전지수로 부르기에는 이릅니다</a:t>
+            </a:r>
+          </a:p>
+        </p:txBody>
+      </p:sp>
+      <p:sp>
+        <p:nvSpPr>
+          <p:cNvPr id="8" name="Rectangle 7"/>
           <p:cNvSpPr/>
           <p:nvPr/>
         </p:nvSpPr>
@@ -3359,7 +3399,7 @@
       </p:sp>
       <p:sp>
         <p:nvSpPr>
-          <p:cNvPr id="8" name="TextBox 7"/>
+          <p:cNvPr id="9" name="TextBox 8"/>
           <p:cNvSpPr txBox="1"/>
           <p:nvPr/>
         </p:nvSpPr>
@@ -3421,7 +3461,7 @@
       </p:sp>
       <p:sp>
         <p:nvSpPr>
-          <p:cNvPr id="9" name="TextBox 8"/>
+          <p:cNvPr id="10" name="TextBox 9"/>
           <p:cNvSpPr txBox="1"/>
           <p:nvPr/>
         </p:nvSpPr>
@@ -3462,7 +3502,7 @@
       </p:sp>
       <p:sp>
         <p:nvSpPr>
-          <p:cNvPr id="10" name="TextBox 9"/>
+          <p:cNvPr id="11" name="TextBox 10"/>
           <p:cNvSpPr txBox="1"/>
           <p:nvPr/>
         </p:nvSpPr>
@@ -3503,7 +3543,7 @@
       </p:sp>
       <p:sp>
         <p:nvSpPr>
-          <p:cNvPr id="11" name="TextBox 10"/>
+          <p:cNvPr id="12" name="TextBox 11"/>
           <p:cNvSpPr txBox="1"/>
           <p:nvPr/>
         </p:nvSpPr>
@@ -3544,7 +3584,7 @@
       </p:sp>
       <p:sp>
         <p:nvSpPr>
-          <p:cNvPr id="12" name="TextBox 11"/>
+          <p:cNvPr id="13" name="TextBox 12"/>
           <p:cNvSpPr txBox="1"/>
           <p:nvPr/>
         </p:nvSpPr>
@@ -3585,7 +3625,7 @@
       </p:sp>
       <p:sp>
         <p:nvSpPr>
-          <p:cNvPr id="13" name="TextBox 12"/>
+          <p:cNvPr id="14" name="TextBox 13"/>
           <p:cNvSpPr txBox="1"/>
           <p:nvPr/>
         </p:nvSpPr>
@@ -3626,7 +3666,7 @@
       </p:sp>
       <p:sp>
         <p:nvSpPr>
-          <p:cNvPr id="14" name="TextBox 13"/>
+          <p:cNvPr id="15" name="TextBox 14"/>
           <p:cNvSpPr txBox="1"/>
           <p:nvPr/>
         </p:nvSpPr>
@@ -3660,14 +3700,14 @@
                 <a:ea typeface="맑은 고딕"/>
                 <a:cs typeface="맑은 고딕"/>
               </a:rPr>
-              <a:t>25개 생활권 · 지표 7종</a:t>
-            </a:r>
-          </a:p>
-        </p:txBody>
-      </p:sp>
-      <p:sp>
-        <p:nvSpPr>
-          <p:cNvPr id="15" name="TextBox 14"/>
+              <a:t>25개 생활권 · 지표 3종</a:t>
+            </a:r>
+          </a:p>
+        </p:txBody>
+      </p:sp>
+      <p:sp>
+        <p:nvSpPr>
+          <p:cNvPr id="16" name="TextBox 15"/>
           <p:cNvSpPr txBox="1"/>
           <p:nvPr/>
         </p:nvSpPr>
@@ -3708,7 +3748,7 @@
       </p:sp>
       <p:sp>
         <p:nvSpPr>
-          <p:cNvPr id="16" name="TextBox 15"/>
+          <p:cNvPr id="17" name="TextBox 16"/>
           <p:cNvSpPr txBox="1"/>
           <p:nvPr/>
         </p:nvSpPr>
@@ -4722,7 +4762,7 @@
                 <a:ea typeface="맑은 고딕"/>
                 <a:cs typeface="맑은 고딕"/>
               </a:rPr>
-              <a:t>5년 인구증감률 상위는 2(+158%), 0(+81%)으로, 두 곳 모두 신축 입주가 이어진 지역입니다. 원도심에 속한 문성동도 사람이 돌아왔습니다.</a:t>
+              <a:t>5년 인구증감률 상위는 1(+158%), 0(+81%)으로, 두 곳 모두 신축 입주가 이어진 지역입니다. 원도심에 속한 문성동도 사람이 돌아왔습니다.</a:t>
             </a:r>
           </a:p>
           <a:p>
@@ -5833,7 +5873,7 @@
                 <a:ea typeface="맑은 고딕"/>
                 <a:cs typeface="맑은 고딕"/>
               </a:rPr>
-              <a:t>75%</a:t>
+              <a:t>69%</a:t>
             </a:r>
           </a:p>
         </p:txBody>
@@ -5915,7 +5955,7 @@
                 <a:ea typeface="맑은 고딕"/>
                 <a:cs typeface="맑은 고딕"/>
               </a:rPr>
-              <a:t>10.58 (베이스라인 10.4)</a:t>
+              <a:t>9.85 (베이스라인 10.4)</a:t>
             </a:r>
           </a:p>
         </p:txBody>
@@ -5997,7 +6037,7 @@
                 <a:ea typeface="맑은 고딕"/>
                 <a:cs typeface="맑은 고딕"/>
               </a:rPr>
-              <a:t>-1.7%</a:t>
+              <a:t>+5.3%</a:t>
             </a:r>
           </a:p>
         </p:txBody>
@@ -6079,7 +6119,7 @@
                 <a:ea typeface="맑은 고딕"/>
                 <a:cs typeface="맑은 고딕"/>
               </a:rPr>
-              <a:t>-0.197</a:t>
+              <a:t>-0.02</a:t>
             </a:r>
           </a:p>
         </p:txBody>
@@ -6991,6 +7031,108 @@
                           <a:ea typeface="맑은 고딕"/>
                           <a:cs typeface="맑은 고딕"/>
                         </a:rPr>
+                        <a:t>입장면</a:t>
+                      </a:r>
+                    </a:p>
+                  </a:txBody>
+                  <a:tcPr anchor="ctr">
+                    <a:solidFill>
+                      <a:srgbClr val="FFFFFF"/>
+                    </a:solidFill>
+                  </a:tcPr>
+                </a:tc>
+                <a:tc>
+                  <a:txBody>
+                    <a:bodyPr/>
+                    <a:lstStyle/>
+                    <a:p>
+                      <a:pPr algn="ctr"/>
+                      <a:r>
+                        <a:rPr sz="900">
+                          <a:solidFill>
+                            <a:srgbClr val="12151A"/>
+                          </a:solidFill>
+                          <a:latin typeface="맑은 고딕"/>
+                          <a:ea typeface="맑은 고딕"/>
+                          <a:cs typeface="맑은 고딕"/>
+                        </a:rPr>
+                        <a:t>88</a:t>
+                      </a:r>
+                    </a:p>
+                  </a:txBody>
+                  <a:tcPr anchor="ctr">
+                    <a:solidFill>
+                      <a:srgbClr val="FFFFFF"/>
+                    </a:solidFill>
+                  </a:tcPr>
+                </a:tc>
+                <a:tc>
+                  <a:txBody>
+                    <a:bodyPr/>
+                    <a:lstStyle/>
+                    <a:p>
+                      <a:pPr algn="ctr"/>
+                      <a:r>
+                        <a:rPr sz="900">
+                          <a:solidFill>
+                            <a:srgbClr val="12151A"/>
+                          </a:solidFill>
+                          <a:latin typeface="맑은 고딕"/>
+                          <a:ea typeface="맑은 고딕"/>
+                          <a:cs typeface="맑은 고딕"/>
+                        </a:rPr>
+                        <a:t>96</a:t>
+                      </a:r>
+                    </a:p>
+                  </a:txBody>
+                  <a:tcPr anchor="ctr">
+                    <a:solidFill>
+                      <a:srgbClr val="FFFFFF"/>
+                    </a:solidFill>
+                  </a:tcPr>
+                </a:tc>
+                <a:tc>
+                  <a:txBody>
+                    <a:bodyPr/>
+                    <a:lstStyle/>
+                    <a:p>
+                      <a:pPr algn="ctr"/>
+                      <a:r>
+                        <a:rPr sz="900">
+                          <a:solidFill>
+                            <a:srgbClr val="12151A"/>
+                          </a:solidFill>
+                          <a:latin typeface="맑은 고딕"/>
+                          <a:ea typeface="맑은 고딕"/>
+                          <a:cs typeface="맑은 고딕"/>
+                        </a:rPr>
+                        <a:t>+9</a:t>
+                      </a:r>
+                    </a:p>
+                  </a:txBody>
+                  <a:tcPr anchor="ctr">
+                    <a:solidFill>
+                      <a:srgbClr val="FFFFFF"/>
+                    </a:solidFill>
+                  </a:tcPr>
+                </a:tc>
+              </a:tr>
+              <a:tr h="256032">
+                <a:tc>
+                  <a:txBody>
+                    <a:bodyPr/>
+                    <a:lstStyle/>
+                    <a:p>
+                      <a:pPr algn="l"/>
+                      <a:r>
+                        <a:rPr sz="900">
+                          <a:solidFill>
+                            <a:srgbClr val="12151A"/>
+                          </a:solidFill>
+                          <a:latin typeface="맑은 고딕"/>
+                          <a:ea typeface="맑은 고딕"/>
+                          <a:cs typeface="맑은 고딕"/>
+                        </a:rPr>
                         <a:t>성환읍</a:t>
                       </a:r>
                     </a:p>
@@ -7041,7 +7183,7 @@
                           <a:ea typeface="맑은 고딕"/>
                           <a:cs typeface="맑은 고딕"/>
                         </a:rPr>
-                        <a:t>96</a:t>
+                        <a:t>95</a:t>
                       </a:r>
                     </a:p>
                   </a:txBody>
@@ -7077,108 +7219,6 @@
                   </a:tcPr>
                 </a:tc>
               </a:tr>
-              <a:tr h="256032">
-                <a:tc>
-                  <a:txBody>
-                    <a:bodyPr/>
-                    <a:lstStyle/>
-                    <a:p>
-                      <a:pPr algn="l"/>
-                      <a:r>
-                        <a:rPr sz="900">
-                          <a:solidFill>
-                            <a:srgbClr val="12151A"/>
-                          </a:solidFill>
-                          <a:latin typeface="맑은 고딕"/>
-                          <a:ea typeface="맑은 고딕"/>
-                          <a:cs typeface="맑은 고딕"/>
-                        </a:rPr>
-                        <a:t>입장면</a:t>
-                      </a:r>
-                    </a:p>
-                  </a:txBody>
-                  <a:tcPr anchor="ctr">
-                    <a:solidFill>
-                      <a:srgbClr val="FFFFFF"/>
-                    </a:solidFill>
-                  </a:tcPr>
-                </a:tc>
-                <a:tc>
-                  <a:txBody>
-                    <a:bodyPr/>
-                    <a:lstStyle/>
-                    <a:p>
-                      <a:pPr algn="ctr"/>
-                      <a:r>
-                        <a:rPr sz="900">
-                          <a:solidFill>
-                            <a:srgbClr val="12151A"/>
-                          </a:solidFill>
-                          <a:latin typeface="맑은 고딕"/>
-                          <a:ea typeface="맑은 고딕"/>
-                          <a:cs typeface="맑은 고딕"/>
-                        </a:rPr>
-                        <a:t>88</a:t>
-                      </a:r>
-                    </a:p>
-                  </a:txBody>
-                  <a:tcPr anchor="ctr">
-                    <a:solidFill>
-                      <a:srgbClr val="FFFFFF"/>
-                    </a:solidFill>
-                  </a:tcPr>
-                </a:tc>
-                <a:tc>
-                  <a:txBody>
-                    <a:bodyPr/>
-                    <a:lstStyle/>
-                    <a:p>
-                      <a:pPr algn="ctr"/>
-                      <a:r>
-                        <a:rPr sz="900">
-                          <a:solidFill>
-                            <a:srgbClr val="12151A"/>
-                          </a:solidFill>
-                          <a:latin typeface="맑은 고딕"/>
-                          <a:ea typeface="맑은 고딕"/>
-                          <a:cs typeface="맑은 고딕"/>
-                        </a:rPr>
-                        <a:t>92</a:t>
-                      </a:r>
-                    </a:p>
-                  </a:txBody>
-                  <a:tcPr anchor="ctr">
-                    <a:solidFill>
-                      <a:srgbClr val="FFFFFF"/>
-                    </a:solidFill>
-                  </a:tcPr>
-                </a:tc>
-                <a:tc>
-                  <a:txBody>
-                    <a:bodyPr/>
-                    <a:lstStyle/>
-                    <a:p>
-                      <a:pPr algn="ctr"/>
-                      <a:r>
-                        <a:rPr sz="900">
-                          <a:solidFill>
-                            <a:srgbClr val="12151A"/>
-                          </a:solidFill>
-                          <a:latin typeface="맑은 고딕"/>
-                          <a:ea typeface="맑은 고딕"/>
-                          <a:cs typeface="맑은 고딕"/>
-                        </a:rPr>
-                        <a:t>+5</a:t>
-                      </a:r>
-                    </a:p>
-                  </a:txBody>
-                  <a:tcPr anchor="ctr">
-                    <a:solidFill>
-                      <a:srgbClr val="FFFFFF"/>
-                    </a:solidFill>
-                  </a:tcPr>
-                </a:tc>
-              </a:tr>
             </a:tbl>
           </a:graphicData>
         </a:graphic>
@@ -8494,7 +8534,7 @@
                 <a:ea typeface="맑은 고딕"/>
                 <a:cs typeface="맑은 고딕"/>
               </a:rPr>
-              <a:t>처방 결과 — 투자 우선순위</a:t>
+              <a:t>처방 결과 — 생활SOC 위치 자료 확보 후 산출</a:t>
             </a:r>
           </a:p>
         </p:txBody>
@@ -8535,35 +8575,55 @@
                 <a:ea typeface="맑은 고딕"/>
                 <a:cs typeface="맑은 고딕"/>
               </a:rPr>
-              <a:t>상위 12개소 우선 투자 시 취약수요 커버리지 +34.0%p, 신규 수혜인구 약 242,320명.</a:t>
-            </a:r>
-          </a:p>
-        </p:txBody>
-      </p:sp>
-      <p:pic>
-        <p:nvPicPr>
-          <p:cNvPr id="5" name="Picture 4" descr="07_투자입지_지도.png"/>
-          <p:cNvPicPr>
-            <a:picLocks noChangeAspect="1"/>
-          </p:cNvPicPr>
-          <p:nvPr/>
-        </p:nvPicPr>
-        <p:blipFill>
-          <a:blip r:embed="rId2"/>
-          <a:stretch>
-            <a:fillRect/>
-          </a:stretch>
-        </p:blipFill>
-        <p:spPr>
-          <a:xfrm>
-            <a:off x="1180496" y="2212848"/>
-            <a:ext cx="3802062" cy="3931920"/>
-          </a:xfrm>
-          <a:prstGeom prst="rect">
-            <a:avLst/>
-          </a:prstGeom>
-        </p:spPr>
-      </p:pic>
+              <a:t>커버리지 계산에는 기존 생활SOC의 위치가 필요합니다. 현재는 미확보 상태입니다.</a:t>
+            </a:r>
+          </a:p>
+        </p:txBody>
+      </p:sp>
+      <p:sp>
+        <p:nvSpPr>
+          <p:cNvPr id="5" name="Rounded Rectangle 4"/>
+          <p:cNvSpPr/>
+          <p:nvPr/>
+        </p:nvSpPr>
+        <p:spPr>
+          <a:xfrm>
+            <a:off x="658368" y="2377440"/>
+            <a:ext cx="10874959" cy="1371600"/>
+          </a:xfrm>
+          <a:prstGeom prst="roundRect">
+            <a:avLst>
+              <a:gd name="adj" fmla="val 6000"/>
+            </a:avLst>
+          </a:prstGeom>
+          <a:solidFill>
+            <a:srgbClr val="F6F7F9"/>
+          </a:solidFill>
+          <a:ln>
+            <a:noFill/>
+          </a:ln>
+          <a:effectLst/>
+        </p:spPr>
+        <p:style>
+          <a:lnRef idx="1">
+            <a:schemeClr val="accent1"/>
+          </a:lnRef>
+          <a:fillRef idx="3">
+            <a:schemeClr val="accent1"/>
+          </a:fillRef>
+          <a:effectRef idx="2">
+            <a:schemeClr val="accent1"/>
+          </a:effectRef>
+          <a:fontRef idx="minor">
+            <a:schemeClr val="lt1"/>
+          </a:fontRef>
+        </p:style>
+        <p:txBody>
+          <a:bodyPr rtlCol="0" anchor="ctr"/>
+          <a:lstStyle/>
+          <a:p/>
+        </p:txBody>
+      </p:sp>
       <p:sp>
         <p:nvSpPr>
           <p:cNvPr id="6" name="TextBox 5"/>
@@ -8572,8 +8632,8 @@
         </p:nvSpPr>
         <p:spPr>
           <a:xfrm>
-            <a:off x="5779007" y="2212848"/>
-            <a:ext cx="5760720" cy="274320"/>
+            <a:off x="978407" y="2615184"/>
+            <a:ext cx="10424160" cy="292608"/>
           </a:xfrm>
           <a:prstGeom prst="rect">
             <a:avLst/>
@@ -8592,7 +8652,7 @@
               </a:lnSpc>
             </a:pPr>
             <a:r>
-              <a:rPr sz="1350" b="1">
+              <a:rPr sz="1450" b="1">
                 <a:solidFill>
                   <a:srgbClr val="12151A"/>
                 </a:solidFill>
@@ -8600,1437 +8660,73 @@
                 <a:ea typeface="맑은 고딕"/>
                 <a:cs typeface="맑은 고딕"/>
               </a:rPr>
-              <a:t>AI 추천 투자 순위 (상위 10)</a:t>
-            </a:r>
-          </a:p>
-        </p:txBody>
-      </p:sp>
-      <p:graphicFrame>
-        <p:nvGraphicFramePr>
-          <p:cNvPr id="7" name="Table 6"/>
-          <p:cNvGraphicFramePr>
-            <a:graphicFrameLocks noGrp="1"/>
-          </p:cNvGraphicFramePr>
-          <p:nvPr/>
-        </p:nvGraphicFramePr>
-        <p:xfrm>
-          <a:off x="5779007" y="2560320"/>
-          <a:ext cx="5760715" cy="3369564"/>
-        </p:xfrm>
-        <a:graphic>
-          <a:graphicData uri="http://schemas.openxmlformats.org/drawingml/2006/table">
-            <a:tbl>
-              <a:tblPr firstRow="1" bandRow="1">
-                <a:tableStyleId>{5C22544A-7EE6-4342-B048-85BDC9FD1C3A}</a:tableStyleId>
-              </a:tblPr>
-              <a:tblGrid>
-                <a:gridCol w="640079"/>
-                <a:gridCol w="1280159"/>
-                <a:gridCol w="1097279"/>
-                <a:gridCol w="1463039"/>
-                <a:gridCol w="1280159"/>
-              </a:tblGrid>
-              <a:tr h="306324">
-                <a:tc>
-                  <a:txBody>
-                    <a:bodyPr/>
-                    <a:lstStyle/>
-                    <a:p>
-                      <a:pPr algn="ctr"/>
-                      <a:r>
-                        <a:rPr sz="1000" b="1">
-                          <a:solidFill>
-                            <a:srgbClr val="12151A"/>
-                          </a:solidFill>
-                          <a:latin typeface="맑은 고딕"/>
-                          <a:ea typeface="맑은 고딕"/>
-                          <a:cs typeface="맑은 고딕"/>
-                        </a:rPr>
-                        <a:t>순위</a:t>
-                      </a:r>
-                    </a:p>
-                  </a:txBody>
-                  <a:tcPr anchor="ctr">
-                    <a:solidFill>
-                      <a:srgbClr val="F6F7F9"/>
-                    </a:solidFill>
-                  </a:tcPr>
-                </a:tc>
-                <a:tc>
-                  <a:txBody>
-                    <a:bodyPr/>
-                    <a:lstStyle/>
-                    <a:p>
-                      <a:pPr algn="ctr"/>
-                      <a:r>
-                        <a:rPr sz="1000" b="1">
-                          <a:solidFill>
-                            <a:srgbClr val="12151A"/>
-                          </a:solidFill>
-                          <a:latin typeface="맑은 고딕"/>
-                          <a:ea typeface="맑은 고딕"/>
-                          <a:cs typeface="맑은 고딕"/>
-                        </a:rPr>
-                        <a:t>생활권</a:t>
-                      </a:r>
-                    </a:p>
-                  </a:txBody>
-                  <a:tcPr anchor="ctr">
-                    <a:solidFill>
-                      <a:srgbClr val="F6F7F9"/>
-                    </a:solidFill>
-                  </a:tcPr>
-                </a:tc>
-                <a:tc>
-                  <a:txBody>
-                    <a:bodyPr/>
-                    <a:lstStyle/>
-                    <a:p>
-                      <a:pPr algn="ctr"/>
-                      <a:r>
-                        <a:rPr sz="1000" b="1">
-                          <a:solidFill>
-                            <a:srgbClr val="12151A"/>
-                          </a:solidFill>
-                          <a:latin typeface="맑은 고딕"/>
-                          <a:ea typeface="맑은 고딕"/>
-                          <a:cs typeface="맑은 고딕"/>
-                        </a:rPr>
-                        <a:t>시설유형</a:t>
-                      </a:r>
-                    </a:p>
-                  </a:txBody>
-                  <a:tcPr anchor="ctr">
-                    <a:solidFill>
-                      <a:srgbClr val="F6F7F9"/>
-                    </a:solidFill>
-                  </a:tcPr>
-                </a:tc>
-                <a:tc>
-                  <a:txBody>
-                    <a:bodyPr/>
-                    <a:lstStyle/>
-                    <a:p>
-                      <a:pPr algn="ctr"/>
-                      <a:r>
-                        <a:rPr sz="1000" b="1">
-                          <a:solidFill>
-                            <a:srgbClr val="12151A"/>
-                          </a:solidFill>
-                          <a:latin typeface="맑은 고딕"/>
-                          <a:ea typeface="맑은 고딕"/>
-                          <a:cs typeface="맑은 고딕"/>
-                        </a:rPr>
-                        <a:t>신규 수혜인구</a:t>
-                      </a:r>
-                    </a:p>
-                  </a:txBody>
-                  <a:tcPr anchor="ctr">
-                    <a:solidFill>
-                      <a:srgbClr val="F6F7F9"/>
-                    </a:solidFill>
-                  </a:tcPr>
-                </a:tc>
-                <a:tc>
-                  <a:txBody>
-                    <a:bodyPr/>
-                    <a:lstStyle/>
-                    <a:p>
-                      <a:pPr algn="ctr"/>
-                      <a:r>
-                        <a:rPr sz="1000" b="1">
-                          <a:solidFill>
-                            <a:srgbClr val="12151A"/>
-                          </a:solidFill>
-                          <a:latin typeface="맑은 고딕"/>
-                          <a:ea typeface="맑은 고딕"/>
-                          <a:cs typeface="맑은 고딕"/>
-                        </a:rPr>
-                        <a:t>커버리지 개선</a:t>
-                      </a:r>
-                    </a:p>
-                  </a:txBody>
-                  <a:tcPr anchor="ctr">
-                    <a:solidFill>
-                      <a:srgbClr val="F6F7F9"/>
-                    </a:solidFill>
-                  </a:tcPr>
-                </a:tc>
-              </a:tr>
-              <a:tr h="306324">
-                <a:tc>
-                  <a:txBody>
-                    <a:bodyPr/>
-                    <a:lstStyle/>
-                    <a:p>
-                      <a:pPr algn="l"/>
-                      <a:r>
-                        <a:rPr sz="950">
-                          <a:solidFill>
-                            <a:srgbClr val="12151A"/>
-                          </a:solidFill>
-                          <a:latin typeface="맑은 고딕"/>
-                          <a:ea typeface="맑은 고딕"/>
-                          <a:cs typeface="맑은 고딕"/>
-                        </a:rPr>
-                        <a:t>1</a:t>
-                      </a:r>
-                    </a:p>
-                  </a:txBody>
-                  <a:tcPr anchor="ctr">
-                    <a:solidFill>
-                      <a:srgbClr val="FFFFFF"/>
-                    </a:solidFill>
-                  </a:tcPr>
-                </a:tc>
-                <a:tc>
-                  <a:txBody>
-                    <a:bodyPr/>
-                    <a:lstStyle/>
-                    <a:p>
-                      <a:pPr algn="ctr"/>
-                      <a:r>
-                        <a:rPr sz="950">
-                          <a:solidFill>
-                            <a:srgbClr val="12151A"/>
-                          </a:solidFill>
-                          <a:latin typeface="맑은 고딕"/>
-                          <a:ea typeface="맑은 고딕"/>
-                          <a:cs typeface="맑은 고딕"/>
-                        </a:rPr>
-                        <a:t>쌍용동</a:t>
-                      </a:r>
-                    </a:p>
-                  </a:txBody>
-                  <a:tcPr anchor="ctr">
-                    <a:solidFill>
-                      <a:srgbClr val="FFFFFF"/>
-                    </a:solidFill>
-                  </a:tcPr>
-                </a:tc>
-                <a:tc>
-                  <a:txBody>
-                    <a:bodyPr/>
-                    <a:lstStyle/>
-                    <a:p>
-                      <a:pPr algn="ctr"/>
-                      <a:r>
-                        <a:rPr sz="950">
-                          <a:solidFill>
-                            <a:srgbClr val="12151A"/>
-                          </a:solidFill>
-                          <a:latin typeface="맑은 고딕"/>
-                          <a:ea typeface="맑은 고딕"/>
-                          <a:cs typeface="맑은 고딕"/>
-                        </a:rPr>
-                        <a:t>체육</a:t>
-                      </a:r>
-                    </a:p>
-                  </a:txBody>
-                  <a:tcPr anchor="ctr">
-                    <a:solidFill>
-                      <a:srgbClr val="FFFFFF"/>
-                    </a:solidFill>
-                  </a:tcPr>
-                </a:tc>
-                <a:tc>
-                  <a:txBody>
-                    <a:bodyPr/>
-                    <a:lstStyle/>
-                    <a:p>
-                      <a:pPr algn="ctr"/>
-                      <a:r>
-                        <a:rPr sz="950">
-                          <a:solidFill>
-                            <a:srgbClr val="12151A"/>
-                          </a:solidFill>
-                          <a:latin typeface="맑은 고딕"/>
-                          <a:ea typeface="맑은 고딕"/>
-                          <a:cs typeface="맑은 고딕"/>
-                        </a:rPr>
-                        <a:t>41,603</a:t>
-                      </a:r>
-                    </a:p>
-                  </a:txBody>
-                  <a:tcPr anchor="ctr">
-                    <a:solidFill>
-                      <a:srgbClr val="FFFFFF"/>
-                    </a:solidFill>
-                  </a:tcPr>
-                </a:tc>
-                <a:tc>
-                  <a:txBody>
-                    <a:bodyPr/>
-                    <a:lstStyle/>
-                    <a:p>
-                      <a:pPr algn="ctr"/>
-                      <a:r>
-                        <a:rPr sz="950">
-                          <a:solidFill>
-                            <a:srgbClr val="12151A"/>
-                          </a:solidFill>
-                          <a:latin typeface="맑은 고딕"/>
-                          <a:ea typeface="맑은 고딕"/>
-                          <a:cs typeface="맑은 고딕"/>
-                        </a:rPr>
-                        <a:t>+7.07%p</a:t>
-                      </a:r>
-                    </a:p>
-                  </a:txBody>
-                  <a:tcPr anchor="ctr">
-                    <a:solidFill>
-                      <a:srgbClr val="FFFFFF"/>
-                    </a:solidFill>
-                  </a:tcPr>
-                </a:tc>
-              </a:tr>
-              <a:tr h="306324">
-                <a:tc>
-                  <a:txBody>
-                    <a:bodyPr/>
-                    <a:lstStyle/>
-                    <a:p>
-                      <a:pPr algn="l"/>
-                      <a:r>
-                        <a:rPr sz="950">
-                          <a:solidFill>
-                            <a:srgbClr val="12151A"/>
-                          </a:solidFill>
-                          <a:latin typeface="맑은 고딕"/>
-                          <a:ea typeface="맑은 고딕"/>
-                          <a:cs typeface="맑은 고딕"/>
-                        </a:rPr>
-                        <a:t>2</a:t>
-                      </a:r>
-                    </a:p>
-                  </a:txBody>
-                  <a:tcPr anchor="ctr">
-                    <a:solidFill>
-                      <a:srgbClr val="FFFFFF"/>
-                    </a:solidFill>
-                  </a:tcPr>
-                </a:tc>
-                <a:tc>
-                  <a:txBody>
-                    <a:bodyPr/>
-                    <a:lstStyle/>
-                    <a:p>
-                      <a:pPr algn="ctr"/>
-                      <a:r>
-                        <a:rPr sz="950">
-                          <a:solidFill>
-                            <a:srgbClr val="12151A"/>
-                          </a:solidFill>
-                          <a:latin typeface="맑은 고딕"/>
-                          <a:ea typeface="맑은 고딕"/>
-                          <a:cs typeface="맑은 고딕"/>
-                        </a:rPr>
-                        <a:t>신방동</a:t>
-                      </a:r>
-                    </a:p>
-                  </a:txBody>
-                  <a:tcPr anchor="ctr">
-                    <a:solidFill>
-                      <a:srgbClr val="FFFFFF"/>
-                    </a:solidFill>
-                  </a:tcPr>
-                </a:tc>
-                <a:tc>
-                  <a:txBody>
-                    <a:bodyPr/>
-                    <a:lstStyle/>
-                    <a:p>
-                      <a:pPr algn="ctr"/>
-                      <a:r>
-                        <a:rPr sz="950">
-                          <a:solidFill>
-                            <a:srgbClr val="12151A"/>
-                          </a:solidFill>
-                          <a:latin typeface="맑은 고딕"/>
-                          <a:ea typeface="맑은 고딕"/>
-                          <a:cs typeface="맑은 고딕"/>
-                        </a:rPr>
-                        <a:t>체육</a:t>
-                      </a:r>
-                    </a:p>
-                  </a:txBody>
-                  <a:tcPr anchor="ctr">
-                    <a:solidFill>
-                      <a:srgbClr val="FFFFFF"/>
-                    </a:solidFill>
-                  </a:tcPr>
-                </a:tc>
-                <a:tc>
-                  <a:txBody>
-                    <a:bodyPr/>
-                    <a:lstStyle/>
-                    <a:p>
-                      <a:pPr algn="ctr"/>
-                      <a:r>
-                        <a:rPr sz="950">
-                          <a:solidFill>
-                            <a:srgbClr val="12151A"/>
-                          </a:solidFill>
-                          <a:latin typeface="맑은 고딕"/>
-                          <a:ea typeface="맑은 고딕"/>
-                          <a:cs typeface="맑은 고딕"/>
-                        </a:rPr>
-                        <a:t>27,432</a:t>
-                      </a:r>
-                    </a:p>
-                  </a:txBody>
-                  <a:tcPr anchor="ctr">
-                    <a:solidFill>
-                      <a:srgbClr val="FFFFFF"/>
-                    </a:solidFill>
-                  </a:tcPr>
-                </a:tc>
-                <a:tc>
-                  <a:txBody>
-                    <a:bodyPr/>
-                    <a:lstStyle/>
-                    <a:p>
-                      <a:pPr algn="ctr"/>
-                      <a:r>
-                        <a:rPr sz="950">
-                          <a:solidFill>
-                            <a:srgbClr val="12151A"/>
-                          </a:solidFill>
-                          <a:latin typeface="맑은 고딕"/>
-                          <a:ea typeface="맑은 고딕"/>
-                          <a:cs typeface="맑은 고딕"/>
-                        </a:rPr>
-                        <a:t>+4.02%p</a:t>
-                      </a:r>
-                    </a:p>
-                  </a:txBody>
-                  <a:tcPr anchor="ctr">
-                    <a:solidFill>
-                      <a:srgbClr val="FFFFFF"/>
-                    </a:solidFill>
-                  </a:tcPr>
-                </a:tc>
-              </a:tr>
-              <a:tr h="306324">
-                <a:tc>
-                  <a:txBody>
-                    <a:bodyPr/>
-                    <a:lstStyle/>
-                    <a:p>
-                      <a:pPr algn="l"/>
-                      <a:r>
-                        <a:rPr sz="950">
-                          <a:solidFill>
-                            <a:srgbClr val="12151A"/>
-                          </a:solidFill>
-                          <a:latin typeface="맑은 고딕"/>
-                          <a:ea typeface="맑은 고딕"/>
-                          <a:cs typeface="맑은 고딕"/>
-                        </a:rPr>
-                        <a:t>3</a:t>
-                      </a:r>
-                    </a:p>
-                  </a:txBody>
-                  <a:tcPr anchor="ctr">
-                    <a:solidFill>
-                      <a:srgbClr val="FFFFFF"/>
-                    </a:solidFill>
-                  </a:tcPr>
-                </a:tc>
-                <a:tc>
-                  <a:txBody>
-                    <a:bodyPr/>
-                    <a:lstStyle/>
-                    <a:p>
-                      <a:pPr algn="ctr"/>
-                      <a:r>
-                        <a:rPr sz="950">
-                          <a:solidFill>
-                            <a:srgbClr val="12151A"/>
-                          </a:solidFill>
-                          <a:latin typeface="맑은 고딕"/>
-                          <a:ea typeface="맑은 고딕"/>
-                          <a:cs typeface="맑은 고딕"/>
-                        </a:rPr>
-                        <a:t>봉명동</a:t>
-                      </a:r>
-                    </a:p>
-                  </a:txBody>
-                  <a:tcPr anchor="ctr">
-                    <a:solidFill>
-                      <a:srgbClr val="FFFFFF"/>
-                    </a:solidFill>
-                  </a:tcPr>
-                </a:tc>
-                <a:tc>
-                  <a:txBody>
-                    <a:bodyPr/>
-                    <a:lstStyle/>
-                    <a:p>
-                      <a:pPr algn="ctr"/>
-                      <a:r>
-                        <a:rPr sz="950">
-                          <a:solidFill>
-                            <a:srgbClr val="12151A"/>
-                          </a:solidFill>
-                          <a:latin typeface="맑은 고딕"/>
-                          <a:ea typeface="맑은 고딕"/>
-                          <a:cs typeface="맑은 고딕"/>
-                        </a:rPr>
-                        <a:t>체육</a:t>
-                      </a:r>
-                    </a:p>
-                  </a:txBody>
-                  <a:tcPr anchor="ctr">
-                    <a:solidFill>
-                      <a:srgbClr val="FFFFFF"/>
-                    </a:solidFill>
-                  </a:tcPr>
-                </a:tc>
-                <a:tc>
-                  <a:txBody>
-                    <a:bodyPr/>
-                    <a:lstStyle/>
-                    <a:p>
-                      <a:pPr algn="ctr"/>
-                      <a:r>
-                        <a:rPr sz="950">
-                          <a:solidFill>
-                            <a:srgbClr val="12151A"/>
-                          </a:solidFill>
-                          <a:latin typeface="맑은 고딕"/>
-                          <a:ea typeface="맑은 고딕"/>
-                          <a:cs typeface="맑은 고딕"/>
-                        </a:rPr>
-                        <a:t>26,717</a:t>
-                      </a:r>
-                    </a:p>
-                  </a:txBody>
-                  <a:tcPr anchor="ctr">
-                    <a:solidFill>
-                      <a:srgbClr val="FFFFFF"/>
-                    </a:solidFill>
-                  </a:tcPr>
-                </a:tc>
-                <a:tc>
-                  <a:txBody>
-                    <a:bodyPr/>
-                    <a:lstStyle/>
-                    <a:p>
-                      <a:pPr algn="ctr"/>
-                      <a:r>
-                        <a:rPr sz="950">
-                          <a:solidFill>
-                            <a:srgbClr val="12151A"/>
-                          </a:solidFill>
-                          <a:latin typeface="맑은 고딕"/>
-                          <a:ea typeface="맑은 고딕"/>
-                          <a:cs typeface="맑은 고딕"/>
-                        </a:rPr>
-                        <a:t>+3.95%p</a:t>
-                      </a:r>
-                    </a:p>
-                  </a:txBody>
-                  <a:tcPr anchor="ctr">
-                    <a:solidFill>
-                      <a:srgbClr val="FFFFFF"/>
-                    </a:solidFill>
-                  </a:tcPr>
-                </a:tc>
-              </a:tr>
-              <a:tr h="306324">
-                <a:tc>
-                  <a:txBody>
-                    <a:bodyPr/>
-                    <a:lstStyle/>
-                    <a:p>
-                      <a:pPr algn="l"/>
-                      <a:r>
-                        <a:rPr sz="950">
-                          <a:solidFill>
-                            <a:srgbClr val="12151A"/>
-                          </a:solidFill>
-                          <a:latin typeface="맑은 고딕"/>
-                          <a:ea typeface="맑은 고딕"/>
-                          <a:cs typeface="맑은 고딕"/>
-                        </a:rPr>
-                        <a:t>4</a:t>
-                      </a:r>
-                    </a:p>
-                  </a:txBody>
-                  <a:tcPr anchor="ctr">
-                    <a:solidFill>
-                      <a:srgbClr val="FFFFFF"/>
-                    </a:solidFill>
-                  </a:tcPr>
-                </a:tc>
-                <a:tc>
-                  <a:txBody>
-                    <a:bodyPr/>
-                    <a:lstStyle/>
-                    <a:p>
-                      <a:pPr algn="ctr"/>
-                      <a:r>
-                        <a:rPr sz="950">
-                          <a:solidFill>
-                            <a:srgbClr val="12151A"/>
-                          </a:solidFill>
-                          <a:latin typeface="맑은 고딕"/>
-                          <a:ea typeface="맑은 고딕"/>
-                          <a:cs typeface="맑은 고딕"/>
-                        </a:rPr>
-                        <a:t>성정동</a:t>
-                      </a:r>
-                    </a:p>
-                  </a:txBody>
-                  <a:tcPr anchor="ctr">
-                    <a:solidFill>
-                      <a:srgbClr val="FFFFFF"/>
-                    </a:solidFill>
-                  </a:tcPr>
-                </a:tc>
-                <a:tc>
-                  <a:txBody>
-                    <a:bodyPr/>
-                    <a:lstStyle/>
-                    <a:p>
-                      <a:pPr algn="ctr"/>
-                      <a:r>
-                        <a:rPr sz="950">
-                          <a:solidFill>
-                            <a:srgbClr val="12151A"/>
-                          </a:solidFill>
-                          <a:latin typeface="맑은 고딕"/>
-                          <a:ea typeface="맑은 고딕"/>
-                          <a:cs typeface="맑은 고딕"/>
-                        </a:rPr>
-                        <a:t>체육</a:t>
-                      </a:r>
-                    </a:p>
-                  </a:txBody>
-                  <a:tcPr anchor="ctr">
-                    <a:solidFill>
-                      <a:srgbClr val="FFFFFF"/>
-                    </a:solidFill>
-                  </a:tcPr>
-                </a:tc>
-                <a:tc>
-                  <a:txBody>
-                    <a:bodyPr/>
-                    <a:lstStyle/>
-                    <a:p>
-                      <a:pPr algn="ctr"/>
-                      <a:r>
-                        <a:rPr sz="950">
-                          <a:solidFill>
-                            <a:srgbClr val="12151A"/>
-                          </a:solidFill>
-                          <a:latin typeface="맑은 고딕"/>
-                          <a:ea typeface="맑은 고딕"/>
-                          <a:cs typeface="맑은 고딕"/>
-                        </a:rPr>
-                        <a:t>24,712</a:t>
-                      </a:r>
-                    </a:p>
-                  </a:txBody>
-                  <a:tcPr anchor="ctr">
-                    <a:solidFill>
-                      <a:srgbClr val="FFFFFF"/>
-                    </a:solidFill>
-                  </a:tcPr>
-                </a:tc>
-                <a:tc>
-                  <a:txBody>
-                    <a:bodyPr/>
-                    <a:lstStyle/>
-                    <a:p>
-                      <a:pPr algn="ctr"/>
-                      <a:r>
-                        <a:rPr sz="950">
-                          <a:solidFill>
-                            <a:srgbClr val="12151A"/>
-                          </a:solidFill>
-                          <a:latin typeface="맑은 고딕"/>
-                          <a:ea typeface="맑은 고딕"/>
-                          <a:cs typeface="맑은 고딕"/>
-                        </a:rPr>
-                        <a:t>+3.54%p</a:t>
-                      </a:r>
-                    </a:p>
-                  </a:txBody>
-                  <a:tcPr anchor="ctr">
-                    <a:solidFill>
-                      <a:srgbClr val="FFFFFF"/>
-                    </a:solidFill>
-                  </a:tcPr>
-                </a:tc>
-              </a:tr>
-              <a:tr h="306324">
-                <a:tc>
-                  <a:txBody>
-                    <a:bodyPr/>
-                    <a:lstStyle/>
-                    <a:p>
-                      <a:pPr algn="l"/>
-                      <a:r>
-                        <a:rPr sz="950">
-                          <a:solidFill>
-                            <a:srgbClr val="12151A"/>
-                          </a:solidFill>
-                          <a:latin typeface="맑은 고딕"/>
-                          <a:ea typeface="맑은 고딕"/>
-                          <a:cs typeface="맑은 고딕"/>
-                        </a:rPr>
-                        <a:t>5</a:t>
-                      </a:r>
-                    </a:p>
-                  </a:txBody>
-                  <a:tcPr anchor="ctr">
-                    <a:solidFill>
-                      <a:srgbClr val="FFFFFF"/>
-                    </a:solidFill>
-                  </a:tcPr>
-                </a:tc>
-                <a:tc>
-                  <a:txBody>
-                    <a:bodyPr/>
-                    <a:lstStyle/>
-                    <a:p>
-                      <a:pPr algn="ctr"/>
-                      <a:r>
-                        <a:rPr sz="950">
-                          <a:solidFill>
-                            <a:srgbClr val="12151A"/>
-                          </a:solidFill>
-                          <a:latin typeface="맑은 고딕"/>
-                          <a:ea typeface="맑은 고딕"/>
-                          <a:cs typeface="맑은 고딕"/>
-                        </a:rPr>
-                        <a:t>일봉동</a:t>
-                      </a:r>
-                    </a:p>
-                  </a:txBody>
-                  <a:tcPr anchor="ctr">
-                    <a:solidFill>
-                      <a:srgbClr val="FFFFFF"/>
-                    </a:solidFill>
-                  </a:tcPr>
-                </a:tc>
-                <a:tc>
-                  <a:txBody>
-                    <a:bodyPr/>
-                    <a:lstStyle/>
-                    <a:p>
-                      <a:pPr algn="ctr"/>
-                      <a:r>
-                        <a:rPr sz="950">
-                          <a:solidFill>
-                            <a:srgbClr val="12151A"/>
-                          </a:solidFill>
-                          <a:latin typeface="맑은 고딕"/>
-                          <a:ea typeface="맑은 고딕"/>
-                          <a:cs typeface="맑은 고딕"/>
-                        </a:rPr>
-                        <a:t>체육</a:t>
-                      </a:r>
-                    </a:p>
-                  </a:txBody>
-                  <a:tcPr anchor="ctr">
-                    <a:solidFill>
-                      <a:srgbClr val="FFFFFF"/>
-                    </a:solidFill>
-                  </a:tcPr>
-                </a:tc>
-                <a:tc>
-                  <a:txBody>
-                    <a:bodyPr/>
-                    <a:lstStyle/>
-                    <a:p>
-                      <a:pPr algn="ctr"/>
-                      <a:r>
-                        <a:rPr sz="950">
-                          <a:solidFill>
-                            <a:srgbClr val="12151A"/>
-                          </a:solidFill>
-                          <a:latin typeface="맑은 고딕"/>
-                          <a:ea typeface="맑은 고딕"/>
-                          <a:cs typeface="맑은 고딕"/>
-                        </a:rPr>
-                        <a:t>21,780</a:t>
-                      </a:r>
-                    </a:p>
-                  </a:txBody>
-                  <a:tcPr anchor="ctr">
-                    <a:solidFill>
-                      <a:srgbClr val="FFFFFF"/>
-                    </a:solidFill>
-                  </a:tcPr>
-                </a:tc>
-                <a:tc>
-                  <a:txBody>
-                    <a:bodyPr/>
-                    <a:lstStyle/>
-                    <a:p>
-                      <a:pPr algn="ctr"/>
-                      <a:r>
-                        <a:rPr sz="950">
-                          <a:solidFill>
-                            <a:srgbClr val="12151A"/>
-                          </a:solidFill>
-                          <a:latin typeface="맑은 고딕"/>
-                          <a:ea typeface="맑은 고딕"/>
-                          <a:cs typeface="맑은 고딕"/>
-                        </a:rPr>
-                        <a:t>+3.11%p</a:t>
-                      </a:r>
-                    </a:p>
-                  </a:txBody>
-                  <a:tcPr anchor="ctr">
-                    <a:solidFill>
-                      <a:srgbClr val="FFFFFF"/>
-                    </a:solidFill>
-                  </a:tcPr>
-                </a:tc>
-              </a:tr>
-              <a:tr h="306324">
-                <a:tc>
-                  <a:txBody>
-                    <a:bodyPr/>
-                    <a:lstStyle/>
-                    <a:p>
-                      <a:pPr algn="l"/>
-                      <a:r>
-                        <a:rPr sz="950">
-                          <a:solidFill>
-                            <a:srgbClr val="12151A"/>
-                          </a:solidFill>
-                          <a:latin typeface="맑은 고딕"/>
-                          <a:ea typeface="맑은 고딕"/>
-                          <a:cs typeface="맑은 고딕"/>
-                        </a:rPr>
-                        <a:t>6</a:t>
-                      </a:r>
-                    </a:p>
-                  </a:txBody>
-                  <a:tcPr anchor="ctr">
-                    <a:solidFill>
-                      <a:srgbClr val="FFFFFF"/>
-                    </a:solidFill>
-                  </a:tcPr>
-                </a:tc>
-                <a:tc>
-                  <a:txBody>
-                    <a:bodyPr/>
-                    <a:lstStyle/>
-                    <a:p>
-                      <a:pPr algn="ctr"/>
-                      <a:r>
-                        <a:rPr sz="950">
-                          <a:solidFill>
-                            <a:srgbClr val="12151A"/>
-                          </a:solidFill>
-                          <a:latin typeface="맑은 고딕"/>
-                          <a:ea typeface="맑은 고딕"/>
-                          <a:cs typeface="맑은 고딕"/>
-                        </a:rPr>
-                        <a:t>원성동</a:t>
-                      </a:r>
-                    </a:p>
-                  </a:txBody>
-                  <a:tcPr anchor="ctr">
-                    <a:solidFill>
-                      <a:srgbClr val="FFFFFF"/>
-                    </a:solidFill>
-                  </a:tcPr>
-                </a:tc>
-                <a:tc>
-                  <a:txBody>
-                    <a:bodyPr/>
-                    <a:lstStyle/>
-                    <a:p>
-                      <a:pPr algn="ctr"/>
-                      <a:r>
-                        <a:rPr sz="950">
-                          <a:solidFill>
-                            <a:srgbClr val="12151A"/>
-                          </a:solidFill>
-                          <a:latin typeface="맑은 고딕"/>
-                          <a:ea typeface="맑은 고딕"/>
-                          <a:cs typeface="맑은 고딕"/>
-                        </a:rPr>
-                        <a:t>체육</a:t>
-                      </a:r>
-                    </a:p>
-                  </a:txBody>
-                  <a:tcPr anchor="ctr">
-                    <a:solidFill>
-                      <a:srgbClr val="FFFFFF"/>
-                    </a:solidFill>
-                  </a:tcPr>
-                </a:tc>
-                <a:tc>
-                  <a:txBody>
-                    <a:bodyPr/>
-                    <a:lstStyle/>
-                    <a:p>
-                      <a:pPr algn="ctr"/>
-                      <a:r>
-                        <a:rPr sz="950">
-                          <a:solidFill>
-                            <a:srgbClr val="12151A"/>
-                          </a:solidFill>
-                          <a:latin typeface="맑은 고딕"/>
-                          <a:ea typeface="맑은 고딕"/>
-                          <a:cs typeface="맑은 고딕"/>
-                        </a:rPr>
-                        <a:t>18,133</a:t>
-                      </a:r>
-                    </a:p>
-                  </a:txBody>
-                  <a:tcPr anchor="ctr">
-                    <a:solidFill>
-                      <a:srgbClr val="FFFFFF"/>
-                    </a:solidFill>
-                  </a:tcPr>
-                </a:tc>
-                <a:tc>
-                  <a:txBody>
-                    <a:bodyPr/>
-                    <a:lstStyle/>
-                    <a:p>
-                      <a:pPr algn="ctr"/>
-                      <a:r>
-                        <a:rPr sz="950">
-                          <a:solidFill>
-                            <a:srgbClr val="12151A"/>
-                          </a:solidFill>
-                          <a:latin typeface="맑은 고딕"/>
-                          <a:ea typeface="맑은 고딕"/>
-                          <a:cs typeface="맑은 고딕"/>
-                        </a:rPr>
-                        <a:t>+2.81%p</a:t>
-                      </a:r>
-                    </a:p>
-                  </a:txBody>
-                  <a:tcPr anchor="ctr">
-                    <a:solidFill>
-                      <a:srgbClr val="FFFFFF"/>
-                    </a:solidFill>
-                  </a:tcPr>
-                </a:tc>
-              </a:tr>
-              <a:tr h="306324">
-                <a:tc>
-                  <a:txBody>
-                    <a:bodyPr/>
-                    <a:lstStyle/>
-                    <a:p>
-                      <a:pPr algn="l"/>
-                      <a:r>
-                        <a:rPr sz="950">
-                          <a:solidFill>
-                            <a:srgbClr val="12151A"/>
-                          </a:solidFill>
-                          <a:latin typeface="맑은 고딕"/>
-                          <a:ea typeface="맑은 고딕"/>
-                          <a:cs typeface="맑은 고딕"/>
-                        </a:rPr>
-                        <a:t>7</a:t>
-                      </a:r>
-                    </a:p>
-                  </a:txBody>
-                  <a:tcPr anchor="ctr">
-                    <a:solidFill>
-                      <a:srgbClr val="FFFFFF"/>
-                    </a:solidFill>
-                  </a:tcPr>
-                </a:tc>
-                <a:tc>
-                  <a:txBody>
-                    <a:bodyPr/>
-                    <a:lstStyle/>
-                    <a:p>
-                      <a:pPr algn="ctr"/>
-                      <a:r>
-                        <a:rPr sz="950">
-                          <a:solidFill>
-                            <a:srgbClr val="12151A"/>
-                          </a:solidFill>
-                          <a:latin typeface="맑은 고딕"/>
-                          <a:ea typeface="맑은 고딕"/>
-                          <a:cs typeface="맑은 고딕"/>
-                        </a:rPr>
-                        <a:t>성정동</a:t>
-                      </a:r>
-                    </a:p>
-                  </a:txBody>
-                  <a:tcPr anchor="ctr">
-                    <a:solidFill>
-                      <a:srgbClr val="FFFFFF"/>
-                    </a:solidFill>
-                  </a:tcPr>
-                </a:tc>
-                <a:tc>
-                  <a:txBody>
-                    <a:bodyPr/>
-                    <a:lstStyle/>
-                    <a:p>
-                      <a:pPr algn="ctr"/>
-                      <a:r>
-                        <a:rPr sz="950">
-                          <a:solidFill>
-                            <a:srgbClr val="12151A"/>
-                          </a:solidFill>
-                          <a:latin typeface="맑은 고딕"/>
-                          <a:ea typeface="맑은 고딕"/>
-                          <a:cs typeface="맑은 고딕"/>
-                        </a:rPr>
-                        <a:t>체육</a:t>
-                      </a:r>
-                    </a:p>
-                  </a:txBody>
-                  <a:tcPr anchor="ctr">
-                    <a:solidFill>
-                      <a:srgbClr val="FFFFFF"/>
-                    </a:solidFill>
-                  </a:tcPr>
-                </a:tc>
-                <a:tc>
-                  <a:txBody>
-                    <a:bodyPr/>
-                    <a:lstStyle/>
-                    <a:p>
-                      <a:pPr algn="ctr"/>
-                      <a:r>
-                        <a:rPr sz="950">
-                          <a:solidFill>
-                            <a:srgbClr val="12151A"/>
-                          </a:solidFill>
-                          <a:latin typeface="맑은 고딕"/>
-                          <a:ea typeface="맑은 고딕"/>
-                          <a:cs typeface="맑은 고딕"/>
-                        </a:rPr>
-                        <a:t>18,521</a:t>
-                      </a:r>
-                    </a:p>
-                  </a:txBody>
-                  <a:tcPr anchor="ctr">
-                    <a:solidFill>
-                      <a:srgbClr val="FFFFFF"/>
-                    </a:solidFill>
-                  </a:tcPr>
-                </a:tc>
-                <a:tc>
-                  <a:txBody>
-                    <a:bodyPr/>
-                    <a:lstStyle/>
-                    <a:p>
-                      <a:pPr algn="ctr"/>
-                      <a:r>
-                        <a:rPr sz="950">
-                          <a:solidFill>
-                            <a:srgbClr val="12151A"/>
-                          </a:solidFill>
-                          <a:latin typeface="맑은 고딕"/>
-                          <a:ea typeface="맑은 고딕"/>
-                          <a:cs typeface="맑은 고딕"/>
-                        </a:rPr>
-                        <a:t>+2.33%p</a:t>
-                      </a:r>
-                    </a:p>
-                  </a:txBody>
-                  <a:tcPr anchor="ctr">
-                    <a:solidFill>
-                      <a:srgbClr val="FFFFFF"/>
-                    </a:solidFill>
-                  </a:tcPr>
-                </a:tc>
-              </a:tr>
-              <a:tr h="306324">
-                <a:tc>
-                  <a:txBody>
-                    <a:bodyPr/>
-                    <a:lstStyle/>
-                    <a:p>
-                      <a:pPr algn="l"/>
-                      <a:r>
-                        <a:rPr sz="950">
-                          <a:solidFill>
-                            <a:srgbClr val="12151A"/>
-                          </a:solidFill>
-                          <a:latin typeface="맑은 고딕"/>
-                          <a:ea typeface="맑은 고딕"/>
-                          <a:cs typeface="맑은 고딕"/>
-                        </a:rPr>
-                        <a:t>8</a:t>
-                      </a:r>
-                    </a:p>
-                  </a:txBody>
-                  <a:tcPr anchor="ctr">
-                    <a:solidFill>
-                      <a:srgbClr val="FFFFFF"/>
-                    </a:solidFill>
-                  </a:tcPr>
-                </a:tc>
-                <a:tc>
-                  <a:txBody>
-                    <a:bodyPr/>
-                    <a:lstStyle/>
-                    <a:p>
-                      <a:pPr algn="ctr"/>
-                      <a:r>
-                        <a:rPr sz="950">
-                          <a:solidFill>
-                            <a:srgbClr val="12151A"/>
-                          </a:solidFill>
-                          <a:latin typeface="맑은 고딕"/>
-                          <a:ea typeface="맑은 고딕"/>
-                          <a:cs typeface="맑은 고딕"/>
-                        </a:rPr>
-                        <a:t>쌍용동</a:t>
-                      </a:r>
-                    </a:p>
-                  </a:txBody>
-                  <a:tcPr anchor="ctr">
-                    <a:solidFill>
-                      <a:srgbClr val="FFFFFF"/>
-                    </a:solidFill>
-                  </a:tcPr>
-                </a:tc>
-                <a:tc>
-                  <a:txBody>
-                    <a:bodyPr/>
-                    <a:lstStyle/>
-                    <a:p>
-                      <a:pPr algn="ctr"/>
-                      <a:r>
-                        <a:rPr sz="950">
-                          <a:solidFill>
-                            <a:srgbClr val="12151A"/>
-                          </a:solidFill>
-                          <a:latin typeface="맑은 고딕"/>
-                          <a:ea typeface="맑은 고딕"/>
-                          <a:cs typeface="맑은 고딕"/>
-                        </a:rPr>
-                        <a:t>체육</a:t>
-                      </a:r>
-                    </a:p>
-                  </a:txBody>
-                  <a:tcPr anchor="ctr">
-                    <a:solidFill>
-                      <a:srgbClr val="FFFFFF"/>
-                    </a:solidFill>
-                  </a:tcPr>
-                </a:tc>
-                <a:tc>
-                  <a:txBody>
-                    <a:bodyPr/>
-                    <a:lstStyle/>
-                    <a:p>
-                      <a:pPr algn="ctr"/>
-                      <a:r>
-                        <a:rPr sz="950">
-                          <a:solidFill>
-                            <a:srgbClr val="12151A"/>
-                          </a:solidFill>
-                          <a:latin typeface="맑은 고딕"/>
-                          <a:ea typeface="맑은 고딕"/>
-                          <a:cs typeface="맑은 고딕"/>
-                        </a:rPr>
-                        <a:t>19,772</a:t>
-                      </a:r>
-                    </a:p>
-                  </a:txBody>
-                  <a:tcPr anchor="ctr">
-                    <a:solidFill>
-                      <a:srgbClr val="FFFFFF"/>
-                    </a:solidFill>
-                  </a:tcPr>
-                </a:tc>
-                <a:tc>
-                  <a:txBody>
-                    <a:bodyPr/>
-                    <a:lstStyle/>
-                    <a:p>
-                      <a:pPr algn="ctr"/>
-                      <a:r>
-                        <a:rPr sz="950">
-                          <a:solidFill>
-                            <a:srgbClr val="12151A"/>
-                          </a:solidFill>
-                          <a:latin typeface="맑은 고딕"/>
-                          <a:ea typeface="맑은 고딕"/>
-                          <a:cs typeface="맑은 고딕"/>
-                        </a:rPr>
-                        <a:t>+1.8%p</a:t>
-                      </a:r>
-                    </a:p>
-                  </a:txBody>
-                  <a:tcPr anchor="ctr">
-                    <a:solidFill>
-                      <a:srgbClr val="FFFFFF"/>
-                    </a:solidFill>
-                  </a:tcPr>
-                </a:tc>
-              </a:tr>
-              <a:tr h="306324">
-                <a:tc>
-                  <a:txBody>
-                    <a:bodyPr/>
-                    <a:lstStyle/>
-                    <a:p>
-                      <a:pPr algn="l"/>
-                      <a:r>
-                        <a:rPr sz="950">
-                          <a:solidFill>
-                            <a:srgbClr val="12151A"/>
-                          </a:solidFill>
-                          <a:latin typeface="맑은 고딕"/>
-                          <a:ea typeface="맑은 고딕"/>
-                          <a:cs typeface="맑은 고딕"/>
-                        </a:rPr>
-                        <a:t>9</a:t>
-                      </a:r>
-                    </a:p>
-                  </a:txBody>
-                  <a:tcPr anchor="ctr">
-                    <a:solidFill>
-                      <a:srgbClr val="FFFFFF"/>
-                    </a:solidFill>
-                  </a:tcPr>
-                </a:tc>
-                <a:tc>
-                  <a:txBody>
-                    <a:bodyPr/>
-                    <a:lstStyle/>
-                    <a:p>
-                      <a:pPr algn="ctr"/>
-                      <a:r>
-                        <a:rPr sz="950">
-                          <a:solidFill>
-                            <a:srgbClr val="12151A"/>
-                          </a:solidFill>
-                          <a:latin typeface="맑은 고딕"/>
-                          <a:ea typeface="맑은 고딕"/>
-                          <a:cs typeface="맑은 고딕"/>
-                        </a:rPr>
-                        <a:t>신방동</a:t>
-                      </a:r>
-                    </a:p>
-                  </a:txBody>
-                  <a:tcPr anchor="ctr">
-                    <a:solidFill>
-                      <a:srgbClr val="FFFFFF"/>
-                    </a:solidFill>
-                  </a:tcPr>
-                </a:tc>
-                <a:tc>
-                  <a:txBody>
-                    <a:bodyPr/>
-                    <a:lstStyle/>
-                    <a:p>
-                      <a:pPr algn="ctr"/>
-                      <a:r>
-                        <a:rPr sz="950">
-                          <a:solidFill>
-                            <a:srgbClr val="12151A"/>
-                          </a:solidFill>
-                          <a:latin typeface="맑은 고딕"/>
-                          <a:ea typeface="맑은 고딕"/>
-                          <a:cs typeface="맑은 고딕"/>
-                        </a:rPr>
-                        <a:t>체육</a:t>
-                      </a:r>
-                    </a:p>
-                  </a:txBody>
-                  <a:tcPr anchor="ctr">
-                    <a:solidFill>
-                      <a:srgbClr val="FFFFFF"/>
-                    </a:solidFill>
-                  </a:tcPr>
-                </a:tc>
-                <a:tc>
-                  <a:txBody>
-                    <a:bodyPr/>
-                    <a:lstStyle/>
-                    <a:p>
-                      <a:pPr algn="ctr"/>
-                      <a:r>
-                        <a:rPr sz="950">
-                          <a:solidFill>
-                            <a:srgbClr val="12151A"/>
-                          </a:solidFill>
-                          <a:latin typeface="맑은 고딕"/>
-                          <a:ea typeface="맑은 고딕"/>
-                          <a:cs typeface="맑은 고딕"/>
-                        </a:rPr>
-                        <a:t>14,664</a:t>
-                      </a:r>
-                    </a:p>
-                  </a:txBody>
-                  <a:tcPr anchor="ctr">
-                    <a:solidFill>
-                      <a:srgbClr val="FFFFFF"/>
-                    </a:solidFill>
-                  </a:tcPr>
-                </a:tc>
-                <a:tc>
-                  <a:txBody>
-                    <a:bodyPr/>
-                    <a:lstStyle/>
-                    <a:p>
-                      <a:pPr algn="ctr"/>
-                      <a:r>
-                        <a:rPr sz="950">
-                          <a:solidFill>
-                            <a:srgbClr val="12151A"/>
-                          </a:solidFill>
-                          <a:latin typeface="맑은 고딕"/>
-                          <a:ea typeface="맑은 고딕"/>
-                          <a:cs typeface="맑은 고딕"/>
-                        </a:rPr>
-                        <a:t>+1.8%p</a:t>
-                      </a:r>
-                    </a:p>
-                  </a:txBody>
-                  <a:tcPr anchor="ctr">
-                    <a:solidFill>
-                      <a:srgbClr val="FFFFFF"/>
-                    </a:solidFill>
-                  </a:tcPr>
-                </a:tc>
-              </a:tr>
-              <a:tr h="306324">
-                <a:tc>
-                  <a:txBody>
-                    <a:bodyPr/>
-                    <a:lstStyle/>
-                    <a:p>
-                      <a:pPr algn="l"/>
-                      <a:r>
-                        <a:rPr sz="950">
-                          <a:solidFill>
-                            <a:srgbClr val="12151A"/>
-                          </a:solidFill>
-                          <a:latin typeface="맑은 고딕"/>
-                          <a:ea typeface="맑은 고딕"/>
-                          <a:cs typeface="맑은 고딕"/>
-                        </a:rPr>
-                        <a:t>10</a:t>
-                      </a:r>
-                    </a:p>
-                  </a:txBody>
-                  <a:tcPr anchor="ctr">
-                    <a:solidFill>
-                      <a:srgbClr val="FFFFFF"/>
-                    </a:solidFill>
-                  </a:tcPr>
-                </a:tc>
-                <a:tc>
-                  <a:txBody>
-                    <a:bodyPr/>
-                    <a:lstStyle/>
-                    <a:p>
-                      <a:pPr algn="ctr"/>
-                      <a:r>
-                        <a:rPr sz="950">
-                          <a:solidFill>
-                            <a:srgbClr val="12151A"/>
-                          </a:solidFill>
-                          <a:latin typeface="맑은 고딕"/>
-                          <a:ea typeface="맑은 고딕"/>
-                          <a:cs typeface="맑은 고딕"/>
-                        </a:rPr>
-                        <a:t>직산읍</a:t>
-                      </a:r>
-                    </a:p>
-                  </a:txBody>
-                  <a:tcPr anchor="ctr">
-                    <a:solidFill>
-                      <a:srgbClr val="FFFFFF"/>
-                    </a:solidFill>
-                  </a:tcPr>
-                </a:tc>
-                <a:tc>
-                  <a:txBody>
-                    <a:bodyPr/>
-                    <a:lstStyle/>
-                    <a:p>
-                      <a:pPr algn="ctr"/>
-                      <a:r>
-                        <a:rPr sz="950">
-                          <a:solidFill>
-                            <a:srgbClr val="12151A"/>
-                          </a:solidFill>
-                          <a:latin typeface="맑은 고딕"/>
-                          <a:ea typeface="맑은 고딕"/>
-                          <a:cs typeface="맑은 고딕"/>
-                        </a:rPr>
-                        <a:t>보육</a:t>
-                      </a:r>
-                    </a:p>
-                  </a:txBody>
-                  <a:tcPr anchor="ctr">
-                    <a:solidFill>
-                      <a:srgbClr val="FFFFFF"/>
-                    </a:solidFill>
-                  </a:tcPr>
-                </a:tc>
-                <a:tc>
-                  <a:txBody>
-                    <a:bodyPr/>
-                    <a:lstStyle/>
-                    <a:p>
-                      <a:pPr algn="ctr"/>
-                      <a:r>
-                        <a:rPr sz="950">
-                          <a:solidFill>
-                            <a:srgbClr val="12151A"/>
-                          </a:solidFill>
-                          <a:latin typeface="맑은 고딕"/>
-                          <a:ea typeface="맑은 고딕"/>
-                          <a:cs typeface="맑은 고딕"/>
-                        </a:rPr>
-                        <a:t>9,709</a:t>
-                      </a:r>
-                    </a:p>
-                  </a:txBody>
-                  <a:tcPr anchor="ctr">
-                    <a:solidFill>
-                      <a:srgbClr val="FFFFFF"/>
-                    </a:solidFill>
-                  </a:tcPr>
-                </a:tc>
-                <a:tc>
-                  <a:txBody>
-                    <a:bodyPr/>
-                    <a:lstStyle/>
-                    <a:p>
-                      <a:pPr algn="ctr"/>
-                      <a:r>
-                        <a:rPr sz="950">
-                          <a:solidFill>
-                            <a:srgbClr val="12151A"/>
-                          </a:solidFill>
-                          <a:latin typeface="맑은 고딕"/>
-                          <a:ea typeface="맑은 고딕"/>
-                          <a:cs typeface="맑은 고딕"/>
-                        </a:rPr>
-                        <a:t>+1.34%p</a:t>
-                      </a:r>
-                    </a:p>
-                  </a:txBody>
-                  <a:tcPr anchor="ctr">
-                    <a:solidFill>
-                      <a:srgbClr val="FFFFFF"/>
-                    </a:solidFill>
-                  </a:tcPr>
-                </a:tc>
-              </a:tr>
-            </a:tbl>
-          </a:graphicData>
-        </a:graphic>
-      </p:graphicFrame>
+              <a:t>설계와 코드는 완성되어 있고, 자료가 들어오면 즉시 산출됩니다.</a:t>
+            </a:r>
+          </a:p>
+        </p:txBody>
+      </p:sp>
+      <p:sp>
+        <p:nvSpPr>
+          <p:cNvPr id="7" name="TextBox 6"/>
+          <p:cNvSpPr txBox="1"/>
+          <p:nvPr/>
+        </p:nvSpPr>
+        <p:spPr>
+          <a:xfrm>
+            <a:off x="978407" y="3017520"/>
+            <a:ext cx="10424160" cy="640080"/>
+          </a:xfrm>
+          <a:prstGeom prst="rect">
+            <a:avLst/>
+          </a:prstGeom>
+          <a:noFill/>
+        </p:spPr>
+        <p:txBody>
+          <a:bodyPr wrap="square" lIns="0" rIns="0" tIns="0" bIns="0">
+            <a:spAutoFit/>
+          </a:bodyPr>
+          <a:lstStyle/>
+          <a:p>
+            <a:pPr algn="l">
+              <a:lnSpc>
+                <a:spcPct val="150000"/>
+              </a:lnSpc>
+            </a:pPr>
+            <a:r>
+              <a:rPr sz="1250" b="0">
+                <a:solidFill>
+                  <a:srgbClr val="52514E"/>
+                </a:solidFill>
+                <a:latin typeface="맑은 고딕"/>
+                <a:ea typeface="맑은 고딕"/>
+                <a:cs typeface="맑은 고딕"/>
+              </a:rPr>
+              <a:t>필요한 자료: 소상공인 상가(상권)정보 또는 공공데이터포털 생활SOC 표준데이터(위경도 포함)</a:t>
+            </a:r>
+          </a:p>
+          <a:p>
+            <a:pPr algn="l">
+              <a:lnSpc>
+                <a:spcPct val="150000"/>
+              </a:lnSpc>
+              <a:spcBef>
+                <a:spcPts val="0"/>
+              </a:spcBef>
+            </a:pPr>
+            <a:r>
+              <a:rPr sz="1250" b="0">
+                <a:solidFill>
+                  <a:srgbClr val="52514E"/>
+                </a:solidFill>
+                <a:latin typeface="맑은 고딕"/>
+                <a:ea typeface="맑은 고딕"/>
+                <a:cs typeface="맑은 고딕"/>
+              </a:rPr>
+              <a:t>산출물: 순위 · 생활권 · 시설유형 · 새로 닿는 인구 · 커버리지 개선폭이 담긴 표와 지도</a:t>
+            </a:r>
+          </a:p>
+        </p:txBody>
+      </p:sp>
       <p:sp>
         <p:nvSpPr>
           <p:cNvPr id="8" name="TextBox 7"/>
@@ -10167,7 +8863,7 @@
                 <a:ea typeface="맑은 고딕"/>
                 <a:cs typeface="맑은 고딕"/>
               </a:rPr>
-              <a:t>FINDING · 06</a:t>
+              <a:t>FOR WHOM</a:t>
             </a:r>
           </a:p>
         </p:txBody>
@@ -10208,7 +8904,7 @@
                 <a:ea typeface="맑은 고딕"/>
                 <a:cs typeface="맑은 고딕"/>
               </a:rPr>
-              <a:t>어디서 멈춰도 근거가 남습니다</a:t>
+              <a:t>결국, 이런 분들께 닿았으면 합니다</a:t>
             </a:r>
           </a:p>
         </p:txBody>
@@ -10249,69 +8945,21 @@
                 <a:ea typeface="맑은 고딕"/>
                 <a:cs typeface="맑은 고딕"/>
               </a:rPr>
-              <a:t>한계효용 곡선이 있으면 예산이 조정돼도 '몇 개소까지가 합리적인가'를 답할 수 있습니다.</a:t>
-            </a:r>
-          </a:p>
-        </p:txBody>
-      </p:sp>
-      <p:pic>
-        <p:nvPicPr>
-          <p:cNvPr id="5" name="Picture 4" descr="08_커버리지_곡선.png"/>
-          <p:cNvPicPr>
-            <a:picLocks noChangeAspect="1"/>
-          </p:cNvPicPr>
-          <p:nvPr/>
-        </p:nvPicPr>
-        <p:blipFill>
-          <a:blip r:embed="rId2"/>
-          <a:stretch>
-            <a:fillRect/>
-          </a:stretch>
-        </p:blipFill>
-        <p:spPr>
-          <a:xfrm>
-            <a:off x="2197518" y="2212848"/>
-            <a:ext cx="3505379" cy="3200400"/>
-          </a:xfrm>
-          <a:prstGeom prst="rect">
-            <a:avLst/>
-          </a:prstGeom>
-        </p:spPr>
-      </p:pic>
-      <p:pic>
-        <p:nvPicPr>
-          <p:cNvPr id="6" name="Picture 5" descr="06_SOC_사각지대.png"/>
-          <p:cNvPicPr>
-            <a:picLocks noChangeAspect="1"/>
-          </p:cNvPicPr>
-          <p:nvPr/>
-        </p:nvPicPr>
-        <p:blipFill>
-          <a:blip r:embed="rId3"/>
-          <a:stretch>
-            <a:fillRect/>
-          </a:stretch>
-        </p:blipFill>
-        <p:spPr>
-          <a:xfrm>
-            <a:off x="7561328" y="2212848"/>
-            <a:ext cx="3933439" cy="3200400"/>
-          </a:xfrm>
-          <a:prstGeom prst="rect">
-            <a:avLst/>
-          </a:prstGeom>
-        </p:spPr>
-      </p:pic>
-      <p:sp>
-        <p:nvSpPr>
-          <p:cNvPr id="7" name="Rounded Rectangle 6"/>
+              <a:t>지수와 모델은 수단일 뿐입니다. 저희가 계속 떠올린 것은 아래 네 분의 하루였습니다.</a:t>
+            </a:r>
+          </a:p>
+        </p:txBody>
+      </p:sp>
+      <p:sp>
+        <p:nvSpPr>
+          <p:cNvPr id="5" name="Rounded Rectangle 4"/>
           <p:cNvSpPr/>
           <p:nvPr/>
         </p:nvSpPr>
         <p:spPr>
           <a:xfrm>
-            <a:off x="658368" y="5577840"/>
-            <a:ext cx="10874959" cy="749808"/>
+            <a:off x="658368" y="2286000"/>
+            <a:ext cx="5257800" cy="1371600"/>
           </a:xfrm>
           <a:prstGeom prst="roundRect">
             <a:avLst>
@@ -10319,7 +8967,51 @@
             </a:avLst>
           </a:prstGeom>
           <a:solidFill>
-            <a:srgbClr val="F6F7F9"/>
+            <a:srgbClr val="FFFFFF"/>
+          </a:solidFill>
+          <a:ln w="12700">
+            <a:solidFill>
+              <a:srgbClr val="E4E7EC"/>
+            </a:solidFill>
+          </a:ln>
+          <a:effectLst/>
+        </p:spPr>
+        <p:style>
+          <a:lnRef idx="1">
+            <a:schemeClr val="accent1"/>
+          </a:lnRef>
+          <a:fillRef idx="3">
+            <a:schemeClr val="accent1"/>
+          </a:fillRef>
+          <a:effectRef idx="2">
+            <a:schemeClr val="accent1"/>
+          </a:effectRef>
+          <a:fontRef idx="minor">
+            <a:schemeClr val="lt1"/>
+          </a:fontRef>
+        </p:style>
+        <p:txBody>
+          <a:bodyPr rtlCol="0" anchor="ctr"/>
+          <a:lstStyle/>
+          <a:p/>
+        </p:txBody>
+      </p:sp>
+      <p:sp>
+        <p:nvSpPr>
+          <p:cNvPr id="6" name="Rectangle 5"/>
+          <p:cNvSpPr/>
+          <p:nvPr/>
+        </p:nvSpPr>
+        <p:spPr>
+          <a:xfrm>
+            <a:off x="658368" y="2286000"/>
+            <a:ext cx="68580" cy="1371600"/>
+          </a:xfrm>
+          <a:prstGeom prst="rect">
+            <a:avLst/>
+          </a:prstGeom>
+          <a:solidFill>
+            <a:srgbClr val="2A78D6"/>
           </a:solidFill>
           <a:ln>
             <a:noFill/>
@@ -10348,14 +9040,55 @@
       </p:sp>
       <p:sp>
         <p:nvSpPr>
+          <p:cNvPr id="7" name="TextBox 6"/>
+          <p:cNvSpPr txBox="1"/>
+          <p:nvPr/>
+        </p:nvSpPr>
+        <p:spPr>
+          <a:xfrm>
+            <a:off x="914400" y="2468880"/>
+            <a:ext cx="4663440" cy="274320"/>
+          </a:xfrm>
+          <a:prstGeom prst="rect">
+            <a:avLst/>
+          </a:prstGeom>
+          <a:noFill/>
+        </p:spPr>
+        <p:txBody>
+          <a:bodyPr wrap="square" lIns="0" rIns="0" tIns="0" bIns="0">
+            <a:spAutoFit/>
+          </a:bodyPr>
+          <a:lstStyle/>
+          <a:p>
+            <a:pPr algn="l">
+              <a:lnSpc>
+                <a:spcPct val="135000"/>
+              </a:lnSpc>
+            </a:pPr>
+            <a:r>
+              <a:rPr sz="1350" b="1">
+                <a:solidFill>
+                  <a:srgbClr val="2A78D6"/>
+                </a:solidFill>
+                <a:latin typeface="맑은 고딕"/>
+                <a:ea typeface="맑은 고딕"/>
+                <a:cs typeface="맑은 고딕"/>
+              </a:rPr>
+              <a:t>원도심에 오래 사신 어르신</a:t>
+            </a:r>
+          </a:p>
+        </p:txBody>
+      </p:sp>
+      <p:sp>
+        <p:nvSpPr>
           <p:cNvPr id="8" name="TextBox 7"/>
           <p:cNvSpPr txBox="1"/>
           <p:nvPr/>
         </p:nvSpPr>
         <p:spPr>
           <a:xfrm>
-            <a:off x="932688" y="5760720"/>
-            <a:ext cx="10515600" cy="457200"/>
+            <a:off x="914400" y="2834640"/>
+            <a:ext cx="4663440" cy="731520"/>
           </a:xfrm>
           <a:prstGeom prst="rect">
             <a:avLst/>
@@ -10374,15 +9107,15 @@
               </a:lnSpc>
             </a:pPr>
             <a:r>
-              <a:rPr sz="1200" b="0">
-                <a:solidFill>
-                  <a:srgbClr val="12151A"/>
-                </a:solidFill>
-                <a:latin typeface="맑은 고딕"/>
-                <a:ea typeface="맑은 고딕"/>
-                <a:cs typeface="맑은 고딕"/>
-              </a:rPr>
-              <a:t>예산 심의에서 자주 나오는 질문은 '왜 이 순서인가'와 '반만 하면 어떻게 되나'입니다.</a:t>
+              <a:rPr sz="1100" b="0">
+                <a:solidFill>
+                  <a:srgbClr val="52514E"/>
+                </a:solidFill>
+                <a:latin typeface="맑은 고딕"/>
+                <a:ea typeface="맑은 고딕"/>
+                <a:cs typeface="맑은 고딕"/>
+              </a:rPr>
+              <a:t>24 일대는 젊은 이웃이 하나둘 떠나고 상가도 비었습니다.</a:t>
             </a:r>
           </a:p>
           <a:p>
@@ -10395,6 +9128,664 @@
               </a:spcBef>
             </a:pPr>
             <a:r>
+              <a:rPr sz="1100" b="0">
+                <a:solidFill>
+                  <a:srgbClr val="52514E"/>
+                </a:solidFill>
+                <a:latin typeface="맑은 고딕"/>
+                <a:ea typeface="맑은 고딕"/>
+                <a:cs typeface="맑은 고딕"/>
+              </a:rPr>
+              <a:t>가게와 병원이 멀어질수록, 걸어서 하실 수 있는 일이 줄어듭니다.</a:t>
+            </a:r>
+          </a:p>
+        </p:txBody>
+      </p:sp>
+      <p:sp>
+        <p:nvSpPr>
+          <p:cNvPr id="9" name="Rounded Rectangle 8"/>
+          <p:cNvSpPr/>
+          <p:nvPr/>
+        </p:nvSpPr>
+        <p:spPr>
+          <a:xfrm>
+            <a:off x="6236207" y="2286000"/>
+            <a:ext cx="5257800" cy="1371600"/>
+          </a:xfrm>
+          <a:prstGeom prst="roundRect">
+            <a:avLst>
+              <a:gd name="adj" fmla="val 6000"/>
+            </a:avLst>
+          </a:prstGeom>
+          <a:solidFill>
+            <a:srgbClr val="FFFFFF"/>
+          </a:solidFill>
+          <a:ln w="12700">
+            <a:solidFill>
+              <a:srgbClr val="E4E7EC"/>
+            </a:solidFill>
+          </a:ln>
+          <a:effectLst/>
+        </p:spPr>
+        <p:style>
+          <a:lnRef idx="1">
+            <a:schemeClr val="accent1"/>
+          </a:lnRef>
+          <a:fillRef idx="3">
+            <a:schemeClr val="accent1"/>
+          </a:fillRef>
+          <a:effectRef idx="2">
+            <a:schemeClr val="accent1"/>
+          </a:effectRef>
+          <a:fontRef idx="minor">
+            <a:schemeClr val="lt1"/>
+          </a:fontRef>
+        </p:style>
+        <p:txBody>
+          <a:bodyPr rtlCol="0" anchor="ctr"/>
+          <a:lstStyle/>
+          <a:p/>
+        </p:txBody>
+      </p:sp>
+      <p:sp>
+        <p:nvSpPr>
+          <p:cNvPr id="10" name="Rectangle 9"/>
+          <p:cNvSpPr/>
+          <p:nvPr/>
+        </p:nvSpPr>
+        <p:spPr>
+          <a:xfrm>
+            <a:off x="6236207" y="2286000"/>
+            <a:ext cx="68580" cy="1371600"/>
+          </a:xfrm>
+          <a:prstGeom prst="rect">
+            <a:avLst/>
+          </a:prstGeom>
+          <a:solidFill>
+            <a:srgbClr val="8A7FB5"/>
+          </a:solidFill>
+          <a:ln>
+            <a:noFill/>
+          </a:ln>
+          <a:effectLst/>
+        </p:spPr>
+        <p:style>
+          <a:lnRef idx="1">
+            <a:schemeClr val="accent1"/>
+          </a:lnRef>
+          <a:fillRef idx="3">
+            <a:schemeClr val="accent1"/>
+          </a:fillRef>
+          <a:effectRef idx="2">
+            <a:schemeClr val="accent1"/>
+          </a:effectRef>
+          <a:fontRef idx="minor">
+            <a:schemeClr val="lt1"/>
+          </a:fontRef>
+        </p:style>
+        <p:txBody>
+          <a:bodyPr rtlCol="0" anchor="ctr"/>
+          <a:lstStyle/>
+          <a:p/>
+        </p:txBody>
+      </p:sp>
+      <p:sp>
+        <p:nvSpPr>
+          <p:cNvPr id="11" name="TextBox 10"/>
+          <p:cNvSpPr txBox="1"/>
+          <p:nvPr/>
+        </p:nvSpPr>
+        <p:spPr>
+          <a:xfrm>
+            <a:off x="6492240" y="2468880"/>
+            <a:ext cx="4663440" cy="274320"/>
+          </a:xfrm>
+          <a:prstGeom prst="rect">
+            <a:avLst/>
+          </a:prstGeom>
+          <a:noFill/>
+        </p:spPr>
+        <p:txBody>
+          <a:bodyPr wrap="square" lIns="0" rIns="0" tIns="0" bIns="0">
+            <a:spAutoFit/>
+          </a:bodyPr>
+          <a:lstStyle/>
+          <a:p>
+            <a:pPr algn="l">
+              <a:lnSpc>
+                <a:spcPct val="135000"/>
+              </a:lnSpc>
+            </a:pPr>
+            <a:r>
+              <a:rPr sz="1350" b="1">
+                <a:solidFill>
+                  <a:srgbClr val="8A7FB5"/>
+                </a:solidFill>
+                <a:latin typeface="맑은 고딕"/>
+                <a:ea typeface="맑은 고딕"/>
+                <a:cs typeface="맑은 고딕"/>
+              </a:rPr>
+              <a:t>농촌면에서 아이 키우시는 부모님</a:t>
+            </a:r>
+          </a:p>
+        </p:txBody>
+      </p:sp>
+      <p:sp>
+        <p:nvSpPr>
+          <p:cNvPr id="12" name="TextBox 11"/>
+          <p:cNvSpPr txBox="1"/>
+          <p:nvPr/>
+        </p:nvSpPr>
+        <p:spPr>
+          <a:xfrm>
+            <a:off x="6492240" y="2834640"/>
+            <a:ext cx="4663440" cy="731520"/>
+          </a:xfrm>
+          <a:prstGeom prst="rect">
+            <a:avLst/>
+          </a:prstGeom>
+          <a:noFill/>
+        </p:spPr>
+        <p:txBody>
+          <a:bodyPr wrap="square" lIns="0" rIns="0" tIns="0" bIns="0">
+            <a:spAutoFit/>
+          </a:bodyPr>
+          <a:lstStyle/>
+          <a:p>
+            <a:pPr algn="l">
+              <a:lnSpc>
+                <a:spcPct val="150000"/>
+              </a:lnSpc>
+            </a:pPr>
+            <a:r>
+              <a:rPr sz="1100" b="0">
+                <a:solidFill>
+                  <a:srgbClr val="52514E"/>
+                </a:solidFill>
+                <a:latin typeface="맑은 고딕"/>
+                <a:ea typeface="맑은 고딕"/>
+                <a:cs typeface="맑은 고딕"/>
+              </a:rPr>
+              <a:t>고령 비율이 가장 높은 곳은 23으로 54%였습니다.</a:t>
+            </a:r>
+          </a:p>
+          <a:p>
+            <a:pPr algn="l">
+              <a:lnSpc>
+                <a:spcPct val="150000"/>
+              </a:lnSpc>
+              <a:spcBef>
+                <a:spcPts val="0"/>
+              </a:spcBef>
+            </a:pPr>
+            <a:r>
+              <a:rPr sz="1100" b="0">
+                <a:solidFill>
+                  <a:srgbClr val="52514E"/>
+                </a:solidFill>
+                <a:latin typeface="맑은 고딕"/>
+                <a:ea typeface="맑은 고딕"/>
+                <a:cs typeface="맑은 고딕"/>
+              </a:rPr>
+              <a:t>어린이집·도서관이 가까이 없으면 그 부담은 온전히 가정의 몫이 됩니다.</a:t>
+            </a:r>
+          </a:p>
+        </p:txBody>
+      </p:sp>
+      <p:sp>
+        <p:nvSpPr>
+          <p:cNvPr id="13" name="Rounded Rectangle 12"/>
+          <p:cNvSpPr/>
+          <p:nvPr/>
+        </p:nvSpPr>
+        <p:spPr>
+          <a:xfrm>
+            <a:off x="658368" y="3858768"/>
+            <a:ext cx="5257800" cy="1371600"/>
+          </a:xfrm>
+          <a:prstGeom prst="roundRect">
+            <a:avLst>
+              <a:gd name="adj" fmla="val 6000"/>
+            </a:avLst>
+          </a:prstGeom>
+          <a:solidFill>
+            <a:srgbClr val="FFFFFF"/>
+          </a:solidFill>
+          <a:ln w="12700">
+            <a:solidFill>
+              <a:srgbClr val="E4E7EC"/>
+            </a:solidFill>
+          </a:ln>
+          <a:effectLst/>
+        </p:spPr>
+        <p:style>
+          <a:lnRef idx="1">
+            <a:schemeClr val="accent1"/>
+          </a:lnRef>
+          <a:fillRef idx="3">
+            <a:schemeClr val="accent1"/>
+          </a:fillRef>
+          <a:effectRef idx="2">
+            <a:schemeClr val="accent1"/>
+          </a:effectRef>
+          <a:fontRef idx="minor">
+            <a:schemeClr val="lt1"/>
+          </a:fontRef>
+        </p:style>
+        <p:txBody>
+          <a:bodyPr rtlCol="0" anchor="ctr"/>
+          <a:lstStyle/>
+          <a:p/>
+        </p:txBody>
+      </p:sp>
+      <p:sp>
+        <p:nvSpPr>
+          <p:cNvPr id="14" name="Rectangle 13"/>
+          <p:cNvSpPr/>
+          <p:nvPr/>
+        </p:nvSpPr>
+        <p:spPr>
+          <a:xfrm>
+            <a:off x="658368" y="3858768"/>
+            <a:ext cx="68580" cy="1371600"/>
+          </a:xfrm>
+          <a:prstGeom prst="rect">
+            <a:avLst/>
+          </a:prstGeom>
+          <a:solidFill>
+            <a:srgbClr val="EDA100"/>
+          </a:solidFill>
+          <a:ln>
+            <a:noFill/>
+          </a:ln>
+          <a:effectLst/>
+        </p:spPr>
+        <p:style>
+          <a:lnRef idx="1">
+            <a:schemeClr val="accent1"/>
+          </a:lnRef>
+          <a:fillRef idx="3">
+            <a:schemeClr val="accent1"/>
+          </a:fillRef>
+          <a:effectRef idx="2">
+            <a:schemeClr val="accent1"/>
+          </a:effectRef>
+          <a:fontRef idx="minor">
+            <a:schemeClr val="lt1"/>
+          </a:fontRef>
+        </p:style>
+        <p:txBody>
+          <a:bodyPr rtlCol="0" anchor="ctr"/>
+          <a:lstStyle/>
+          <a:p/>
+        </p:txBody>
+      </p:sp>
+      <p:sp>
+        <p:nvSpPr>
+          <p:cNvPr id="15" name="TextBox 14"/>
+          <p:cNvSpPr txBox="1"/>
+          <p:nvPr/>
+        </p:nvSpPr>
+        <p:spPr>
+          <a:xfrm>
+            <a:off x="914400" y="4041648"/>
+            <a:ext cx="4663440" cy="274320"/>
+          </a:xfrm>
+          <a:prstGeom prst="rect">
+            <a:avLst/>
+          </a:prstGeom>
+          <a:noFill/>
+        </p:spPr>
+        <p:txBody>
+          <a:bodyPr wrap="square" lIns="0" rIns="0" tIns="0" bIns="0">
+            <a:spAutoFit/>
+          </a:bodyPr>
+          <a:lstStyle/>
+          <a:p>
+            <a:pPr algn="l">
+              <a:lnSpc>
+                <a:spcPct val="135000"/>
+              </a:lnSpc>
+            </a:pPr>
+            <a:r>
+              <a:rPr sz="1350" b="1">
+                <a:solidFill>
+                  <a:srgbClr val="EDA100"/>
+                </a:solidFill>
+                <a:latin typeface="맑은 고딕"/>
+                <a:ea typeface="맑은 고딕"/>
+                <a:cs typeface="맑은 고딕"/>
+              </a:rPr>
+              <a:t>원도심에서 가게를 지켜오신 상인</a:t>
+            </a:r>
+          </a:p>
+        </p:txBody>
+      </p:sp>
+      <p:sp>
+        <p:nvSpPr>
+          <p:cNvPr id="16" name="TextBox 15"/>
+          <p:cNvSpPr txBox="1"/>
+          <p:nvPr/>
+        </p:nvSpPr>
+        <p:spPr>
+          <a:xfrm>
+            <a:off x="914400" y="4407407"/>
+            <a:ext cx="4663440" cy="731520"/>
+          </a:xfrm>
+          <a:prstGeom prst="rect">
+            <a:avLst/>
+          </a:prstGeom>
+          <a:noFill/>
+        </p:spPr>
+        <p:txBody>
+          <a:bodyPr wrap="square" lIns="0" rIns="0" tIns="0" bIns="0">
+            <a:spAutoFit/>
+          </a:bodyPr>
+          <a:lstStyle/>
+          <a:p>
+            <a:pPr algn="l">
+              <a:lnSpc>
+                <a:spcPct val="150000"/>
+              </a:lnSpc>
+            </a:pPr>
+            <a:r>
+              <a:rPr sz="1100" b="0">
+                <a:solidFill>
+                  <a:srgbClr val="52514E"/>
+                </a:solidFill>
+                <a:latin typeface="맑은 고딕"/>
+                <a:ea typeface="맑은 고딕"/>
+                <a:cs typeface="맑은 고딕"/>
+              </a:rPr>
+              <a:t>오가는 분이 줄면 매출이 줄고, 문 닫는 가게가 늘면 오가는 분이 더 줍니다.</a:t>
+            </a:r>
+          </a:p>
+          <a:p>
+            <a:pPr algn="l">
+              <a:lnSpc>
+                <a:spcPct val="150000"/>
+              </a:lnSpc>
+              <a:spcBef>
+                <a:spcPts val="0"/>
+              </a:spcBef>
+            </a:pPr>
+            <a:r>
+              <a:rPr sz="1100" b="0">
+                <a:solidFill>
+                  <a:srgbClr val="52514E"/>
+                </a:solidFill>
+                <a:latin typeface="맑은 고딕"/>
+                <a:ea typeface="맑은 고딕"/>
+                <a:cs typeface="맑은 고딕"/>
+              </a:rPr>
+              <a:t>이 고리를 일찍 알아차릴 수 있다면, 도움드릴 방법도 더 많아집니다.</a:t>
+            </a:r>
+          </a:p>
+        </p:txBody>
+      </p:sp>
+      <p:sp>
+        <p:nvSpPr>
+          <p:cNvPr id="17" name="Rounded Rectangle 16"/>
+          <p:cNvSpPr/>
+          <p:nvPr/>
+        </p:nvSpPr>
+        <p:spPr>
+          <a:xfrm>
+            <a:off x="6236207" y="3858768"/>
+            <a:ext cx="5257800" cy="1371600"/>
+          </a:xfrm>
+          <a:prstGeom prst="roundRect">
+            <a:avLst>
+              <a:gd name="adj" fmla="val 6000"/>
+            </a:avLst>
+          </a:prstGeom>
+          <a:solidFill>
+            <a:srgbClr val="FFFFFF"/>
+          </a:solidFill>
+          <a:ln w="12700">
+            <a:solidFill>
+              <a:srgbClr val="E4E7EC"/>
+            </a:solidFill>
+          </a:ln>
+          <a:effectLst/>
+        </p:spPr>
+        <p:style>
+          <a:lnRef idx="1">
+            <a:schemeClr val="accent1"/>
+          </a:lnRef>
+          <a:fillRef idx="3">
+            <a:schemeClr val="accent1"/>
+          </a:fillRef>
+          <a:effectRef idx="2">
+            <a:schemeClr val="accent1"/>
+          </a:effectRef>
+          <a:fontRef idx="minor">
+            <a:schemeClr val="lt1"/>
+          </a:fontRef>
+        </p:style>
+        <p:txBody>
+          <a:bodyPr rtlCol="0" anchor="ctr"/>
+          <a:lstStyle/>
+          <a:p/>
+        </p:txBody>
+      </p:sp>
+      <p:sp>
+        <p:nvSpPr>
+          <p:cNvPr id="18" name="Rectangle 17"/>
+          <p:cNvSpPr/>
+          <p:nvPr/>
+        </p:nvSpPr>
+        <p:spPr>
+          <a:xfrm>
+            <a:off x="6236207" y="3858768"/>
+            <a:ext cx="68580" cy="1371600"/>
+          </a:xfrm>
+          <a:prstGeom prst="rect">
+            <a:avLst/>
+          </a:prstGeom>
+          <a:solidFill>
+            <a:srgbClr val="2A78D6"/>
+          </a:solidFill>
+          <a:ln>
+            <a:noFill/>
+          </a:ln>
+          <a:effectLst/>
+        </p:spPr>
+        <p:style>
+          <a:lnRef idx="1">
+            <a:schemeClr val="accent1"/>
+          </a:lnRef>
+          <a:fillRef idx="3">
+            <a:schemeClr val="accent1"/>
+          </a:fillRef>
+          <a:effectRef idx="2">
+            <a:schemeClr val="accent1"/>
+          </a:effectRef>
+          <a:fontRef idx="minor">
+            <a:schemeClr val="lt1"/>
+          </a:fontRef>
+        </p:style>
+        <p:txBody>
+          <a:bodyPr rtlCol="0" anchor="ctr"/>
+          <a:lstStyle/>
+          <a:p/>
+        </p:txBody>
+      </p:sp>
+      <p:sp>
+        <p:nvSpPr>
+          <p:cNvPr id="19" name="TextBox 18"/>
+          <p:cNvSpPr txBox="1"/>
+          <p:nvPr/>
+        </p:nvSpPr>
+        <p:spPr>
+          <a:xfrm>
+            <a:off x="6492240" y="4041648"/>
+            <a:ext cx="4663440" cy="274320"/>
+          </a:xfrm>
+          <a:prstGeom prst="rect">
+            <a:avLst/>
+          </a:prstGeom>
+          <a:noFill/>
+        </p:spPr>
+        <p:txBody>
+          <a:bodyPr wrap="square" lIns="0" rIns="0" tIns="0" bIns="0">
+            <a:spAutoFit/>
+          </a:bodyPr>
+          <a:lstStyle/>
+          <a:p>
+            <a:pPr algn="l">
+              <a:lnSpc>
+                <a:spcPct val="135000"/>
+              </a:lnSpc>
+            </a:pPr>
+            <a:r>
+              <a:rPr sz="1350" b="1">
+                <a:solidFill>
+                  <a:srgbClr val="2A78D6"/>
+                </a:solidFill>
+                <a:latin typeface="맑은 고딕"/>
+                <a:ea typeface="맑은 고딕"/>
+                <a:cs typeface="맑은 고딕"/>
+              </a:rPr>
+              <a:t>신도심에서 자리 잡은 이웃</a:t>
+            </a:r>
+          </a:p>
+        </p:txBody>
+      </p:sp>
+      <p:sp>
+        <p:nvSpPr>
+          <p:cNvPr id="20" name="TextBox 19"/>
+          <p:cNvSpPr txBox="1"/>
+          <p:nvPr/>
+        </p:nvSpPr>
+        <p:spPr>
+          <a:xfrm>
+            <a:off x="6492240" y="4407407"/>
+            <a:ext cx="4663440" cy="731520"/>
+          </a:xfrm>
+          <a:prstGeom prst="rect">
+            <a:avLst/>
+          </a:prstGeom>
+          <a:noFill/>
+        </p:spPr>
+        <p:txBody>
+          <a:bodyPr wrap="square" lIns="0" rIns="0" tIns="0" bIns="0">
+            <a:spAutoFit/>
+          </a:bodyPr>
+          <a:lstStyle/>
+          <a:p>
+            <a:pPr algn="l">
+              <a:lnSpc>
+                <a:spcPct val="150000"/>
+              </a:lnSpc>
+            </a:pPr>
+            <a:r>
+              <a:rPr sz="1100" b="0">
+                <a:solidFill>
+                  <a:srgbClr val="52514E"/>
+                </a:solidFill>
+                <a:latin typeface="맑은 고딕"/>
+                <a:ea typeface="맑은 고딕"/>
+                <a:cs typeface="맑은 고딕"/>
+              </a:rPr>
+              <a:t>지금 여건이 좋은 곳도 언젠가는 나이가 듭니다.</a:t>
+            </a:r>
+          </a:p>
+          <a:p>
+            <a:pPr algn="l">
+              <a:lnSpc>
+                <a:spcPct val="150000"/>
+              </a:lnSpc>
+              <a:spcBef>
+                <a:spcPts val="0"/>
+              </a:spcBef>
+            </a:pPr>
+            <a:r>
+              <a:rPr sz="1100" b="0">
+                <a:solidFill>
+                  <a:srgbClr val="52514E"/>
+                </a:solidFill>
+                <a:latin typeface="맑은 고딕"/>
+                <a:ea typeface="맑은 고딕"/>
+                <a:cs typeface="맑은 고딕"/>
+              </a:rPr>
+              <a:t>미리 살펴보는 습관은 결국 천안시민 모두를 위한 준비라고 생각합니다.</a:t>
+            </a:r>
+          </a:p>
+        </p:txBody>
+      </p:sp>
+      <p:sp>
+        <p:nvSpPr>
+          <p:cNvPr id="21" name="Rounded Rectangle 20"/>
+          <p:cNvSpPr/>
+          <p:nvPr/>
+        </p:nvSpPr>
+        <p:spPr>
+          <a:xfrm>
+            <a:off x="658368" y="5541264"/>
+            <a:ext cx="10874959" cy="786384"/>
+          </a:xfrm>
+          <a:prstGeom prst="roundRect">
+            <a:avLst>
+              <a:gd name="adj" fmla="val 6000"/>
+            </a:avLst>
+          </a:prstGeom>
+          <a:solidFill>
+            <a:srgbClr val="EFF7F3"/>
+          </a:solidFill>
+          <a:ln>
+            <a:noFill/>
+          </a:ln>
+          <a:effectLst/>
+        </p:spPr>
+        <p:style>
+          <a:lnRef idx="1">
+            <a:schemeClr val="accent1"/>
+          </a:lnRef>
+          <a:fillRef idx="3">
+            <a:schemeClr val="accent1"/>
+          </a:fillRef>
+          <a:effectRef idx="2">
+            <a:schemeClr val="accent1"/>
+          </a:effectRef>
+          <a:fontRef idx="minor">
+            <a:schemeClr val="lt1"/>
+          </a:fontRef>
+        </p:style>
+        <p:txBody>
+          <a:bodyPr rtlCol="0" anchor="ctr"/>
+          <a:lstStyle/>
+          <a:p/>
+        </p:txBody>
+      </p:sp>
+      <p:sp>
+        <p:nvSpPr>
+          <p:cNvPr id="22" name="TextBox 21"/>
+          <p:cNvSpPr txBox="1"/>
+          <p:nvPr/>
+        </p:nvSpPr>
+        <p:spPr>
+          <a:xfrm>
+            <a:off x="932688" y="5724144"/>
+            <a:ext cx="10515600" cy="457200"/>
+          </a:xfrm>
+          <a:prstGeom prst="rect">
+            <a:avLst/>
+          </a:prstGeom>
+          <a:noFill/>
+        </p:spPr>
+        <p:txBody>
+          <a:bodyPr wrap="square" lIns="0" rIns="0" tIns="0" bIns="0">
+            <a:spAutoFit/>
+          </a:bodyPr>
+          <a:lstStyle/>
+          <a:p>
+            <a:pPr algn="l">
+              <a:lnSpc>
+                <a:spcPct val="150000"/>
+              </a:lnSpc>
+            </a:pPr>
+            <a:r>
               <a:rPr sz="1200" b="0">
                 <a:solidFill>
                   <a:srgbClr val="12151A"/>
@@ -10403,14 +9794,35 @@
                 <a:ea typeface="맑은 고딕"/>
                 <a:cs typeface="맑은 고딕"/>
               </a:rPr>
-              <a:t>이 곡선은 두 질문에 함께 답합니다. 좌측 그림의 좌상단(고령↑·SOC↓)이 먼저 살펴볼 구간입니다.</a:t>
-            </a:r>
-          </a:p>
-        </p:txBody>
-      </p:sp>
-      <p:sp>
-        <p:nvSpPr>
-          <p:cNvPr id="9" name="TextBox 8"/>
+              <a:t>저희는 천안시 사정을 현장에서 겪어보지 못한 참가자입니다. 다만 공개된 데이터로 할 수 있는 만큼은 성실하게 살펴보았습니다.</a:t>
+            </a:r>
+          </a:p>
+          <a:p>
+            <a:pPr algn="l">
+              <a:lnSpc>
+                <a:spcPct val="150000"/>
+              </a:lnSpc>
+              <a:spcBef>
+                <a:spcPts val="0"/>
+              </a:spcBef>
+            </a:pPr>
+            <a:r>
+              <a:rPr sz="1200" b="0">
+                <a:solidFill>
+                  <a:srgbClr val="12151A"/>
+                </a:solidFill>
+                <a:latin typeface="맑은 고딕"/>
+                <a:ea typeface="맑은 고딕"/>
+                <a:cs typeface="맑은 고딕"/>
+              </a:rPr>
+              <a:t>부족한 부분은 현장을 아시는 분들이 채워주시길 바라며, 이 자료가 그 논의의 출발점이 될 수 있다면 더 바랄 것이 없겠습니다.</a:t>
+            </a:r>
+          </a:p>
+        </p:txBody>
+      </p:sp>
+      <p:sp>
+        <p:nvSpPr>
+          <p:cNvPr id="23" name="TextBox 22"/>
           <p:cNvSpPr txBox="1"/>
           <p:nvPr/>
         </p:nvSpPr>
@@ -10451,7 +9863,7 @@
       </p:sp>
       <p:sp>
         <p:nvSpPr>
-          <p:cNvPr id="10" name="TextBox 9"/>
+          <p:cNvPr id="24" name="TextBox 23"/>
           <p:cNvSpPr txBox="1"/>
           <p:nvPr/>
         </p:nvSpPr>
@@ -10544,7 +9956,7 @@
                 <a:ea typeface="맑은 고딕"/>
                 <a:cs typeface="맑은 고딕"/>
               </a:rPr>
-              <a:t>FOR WHOM</a:t>
+              <a:t>APPLICATION</a:t>
             </a:r>
           </a:p>
         </p:txBody>
@@ -10585,7 +9997,7 @@
                 <a:ea typeface="맑은 고딕"/>
                 <a:cs typeface="맑은 고딕"/>
               </a:rPr>
-              <a:t>결국, 이런 분들께 닿았으면 합니다</a:t>
+              <a:t>실무에 이렇게 보탬이 되면 좋겠습니다</a:t>
             </a:r>
           </a:p>
         </p:txBody>
@@ -10626,7 +10038,7 @@
                 <a:ea typeface="맑은 고딕"/>
                 <a:cs typeface="맑은 고딕"/>
               </a:rPr>
-              <a:t>지수와 모델은 수단일 뿐입니다. 저희가 계속 떠올린 것은 아래 네 분의 하루였습니다.</a:t>
+              <a:t>따로 시간을 내어 다뤄야 하는 연구물이 아니라, 하시던 업무 곁에 놓고 참고하실 수 있는 자료로 준비했습니다.</a:t>
             </a:r>
           </a:p>
         </p:txBody>
@@ -10727,8 +10139,8 @@
         </p:nvSpPr>
         <p:spPr>
           <a:xfrm>
-            <a:off x="914400" y="2468880"/>
-            <a:ext cx="4663440" cy="274320"/>
+            <a:off x="914400" y="2450592"/>
+            <a:ext cx="2194560" cy="256032"/>
           </a:xfrm>
           <a:prstGeom prst="rect">
             <a:avLst/>
@@ -10747,48 +10159,89 @@
               </a:lnSpc>
             </a:pPr>
             <a:r>
+              <a:rPr sz="1250" b="1">
+                <a:solidFill>
+                  <a:srgbClr val="2A78D6"/>
+                </a:solidFill>
+                <a:latin typeface="맑은 고딕"/>
+                <a:ea typeface="맑은 고딕"/>
+                <a:cs typeface="맑은 고딕"/>
+              </a:rPr>
+              <a:t>도시재생 담당</a:t>
+            </a:r>
+          </a:p>
+        </p:txBody>
+      </p:sp>
+      <p:sp>
+        <p:nvSpPr>
+          <p:cNvPr id="8" name="TextBox 7"/>
+          <p:cNvSpPr txBox="1"/>
+          <p:nvPr/>
+        </p:nvSpPr>
+        <p:spPr>
+          <a:xfrm>
+            <a:off x="914400" y="2743200"/>
+            <a:ext cx="4663440" cy="256032"/>
+          </a:xfrm>
+          <a:prstGeom prst="rect">
+            <a:avLst/>
+          </a:prstGeom>
+          <a:noFill/>
+        </p:spPr>
+        <p:txBody>
+          <a:bodyPr wrap="square" lIns="0" rIns="0" tIns="0" bIns="0">
+            <a:spAutoFit/>
+          </a:bodyPr>
+          <a:lstStyle/>
+          <a:p>
+            <a:pPr algn="l">
+              <a:lnSpc>
+                <a:spcPct val="135000"/>
+              </a:lnSpc>
+            </a:pPr>
+            <a:r>
               <a:rPr sz="1350" b="1">
                 <a:solidFill>
-                  <a:srgbClr val="2A78D6"/>
-                </a:solidFill>
-                <a:latin typeface="맑은 고딕"/>
-                <a:ea typeface="맑은 고딕"/>
-                <a:cs typeface="맑은 고딕"/>
-              </a:rPr>
-              <a:t>원도심에 오래 사신 어르신</a:t>
-            </a:r>
-          </a:p>
-        </p:txBody>
-      </p:sp>
-      <p:sp>
-        <p:nvSpPr>
-          <p:cNvPr id="8" name="TextBox 7"/>
-          <p:cNvSpPr txBox="1"/>
-          <p:nvPr/>
-        </p:nvSpPr>
-        <p:spPr>
-          <a:xfrm>
-            <a:off x="914400" y="2834640"/>
-            <a:ext cx="4663440" cy="731520"/>
-          </a:xfrm>
-          <a:prstGeom prst="rect">
-            <a:avLst/>
-          </a:prstGeom>
-          <a:noFill/>
-        </p:spPr>
-        <p:txBody>
-          <a:bodyPr wrap="square" lIns="0" rIns="0" tIns="0" bIns="0">
-            <a:spAutoFit/>
-          </a:bodyPr>
-          <a:lstStyle/>
-          <a:p>
-            <a:pPr algn="l">
-              <a:lnSpc>
-                <a:spcPct val="150000"/>
-              </a:lnSpc>
-            </a:pPr>
-            <a:r>
-              <a:rPr sz="1100" b="0">
+                  <a:srgbClr val="12151A"/>
+                </a:solidFill>
+                <a:latin typeface="맑은 고딕"/>
+                <a:ea typeface="맑은 고딕"/>
+                <a:cs typeface="맑은 고딕"/>
+              </a:rPr>
+              <a:t>사업지 검토 · 공모 준비</a:t>
+            </a:r>
+          </a:p>
+        </p:txBody>
+      </p:sp>
+      <p:sp>
+        <p:nvSpPr>
+          <p:cNvPr id="9" name="TextBox 8"/>
+          <p:cNvSpPr txBox="1"/>
+          <p:nvPr/>
+        </p:nvSpPr>
+        <p:spPr>
+          <a:xfrm>
+            <a:off x="914400" y="3054096"/>
+            <a:ext cx="4663440" cy="548640"/>
+          </a:xfrm>
+          <a:prstGeom prst="rect">
+            <a:avLst/>
+          </a:prstGeom>
+          <a:noFill/>
+        </p:spPr>
+        <p:txBody>
+          <a:bodyPr wrap="square" lIns="0" rIns="0" tIns="0" bIns="0">
+            <a:spAutoFit/>
+          </a:bodyPr>
+          <a:lstStyle/>
+          <a:p>
+            <a:pPr algn="l">
+              <a:lnSpc>
+                <a:spcPct val="145000"/>
+              </a:lnSpc>
+            </a:pPr>
+            <a:r>
+              <a:rPr sz="1080" b="0">
                 <a:solidFill>
                   <a:srgbClr val="52514E"/>
                 </a:solidFill>
@@ -10796,20 +10249,20 @@
                 <a:ea typeface="맑은 고딕"/>
                 <a:cs typeface="맑은 고딕"/>
               </a:rPr>
-              <a:t>24 일대는 젊은 이웃이 하나둘 떠나고 상가도 비었습니다.</a:t>
-            </a:r>
-          </a:p>
-          <a:p>
-            <a:pPr algn="l">
-              <a:lnSpc>
-                <a:spcPct val="150000"/>
+              <a:t>지수가 낮은 곳과 3년 뒤 살펴볼 곳을 겹쳐 후보를 좁히실 때,</a:t>
+            </a:r>
+          </a:p>
+          <a:p>
+            <a:pPr algn="l">
+              <a:lnSpc>
+                <a:spcPct val="145000"/>
               </a:lnSpc>
               <a:spcBef>
                 <a:spcPts val="0"/>
               </a:spcBef>
             </a:pPr>
             <a:r>
-              <a:rPr sz="1100" b="0">
+              <a:rPr sz="1080" b="0">
                 <a:solidFill>
                   <a:srgbClr val="52514E"/>
                 </a:solidFill>
@@ -10817,14 +10270,14 @@
                 <a:ea typeface="맑은 고딕"/>
                 <a:cs typeface="맑은 고딕"/>
               </a:rPr>
-              <a:t>가게와 병원이 멀어질수록, 걸어서 하실 수 있는 일이 줄어듭니다.</a:t>
-            </a:r>
-          </a:p>
-        </p:txBody>
-      </p:sp>
-      <p:sp>
-        <p:nvSpPr>
-          <p:cNvPr id="9" name="Rounded Rectangle 8"/>
+              <a:t>공모의 '쇠퇴도 진단' 항목에 근거 수치로.</a:t>
+            </a:r>
+          </a:p>
+        </p:txBody>
+      </p:sp>
+      <p:sp>
+        <p:nvSpPr>
+          <p:cNvPr id="10" name="Rounded Rectangle 9"/>
           <p:cNvSpPr/>
           <p:nvPr/>
         </p:nvSpPr>
@@ -10870,7 +10323,7 @@
       </p:sp>
       <p:sp>
         <p:nvSpPr>
-          <p:cNvPr id="10" name="Rectangle 9"/>
+          <p:cNvPr id="11" name="Rectangle 10"/>
           <p:cNvSpPr/>
           <p:nvPr/>
         </p:nvSpPr>
@@ -10883,7 +10336,7 @@
             <a:avLst/>
           </a:prstGeom>
           <a:solidFill>
-            <a:srgbClr val="8A7FB5"/>
+            <a:srgbClr val="1BAF7A"/>
           </a:solidFill>
           <a:ln>
             <a:noFill/>
@@ -10912,14 +10365,14 @@
       </p:sp>
       <p:sp>
         <p:nvSpPr>
-          <p:cNvPr id="11" name="TextBox 10"/>
-          <p:cNvSpPr txBox="1"/>
-          <p:nvPr/>
-        </p:nvSpPr>
-        <p:spPr>
-          <a:xfrm>
-            <a:off x="6492240" y="2468880"/>
-            <a:ext cx="4663440" cy="274320"/>
+          <p:cNvPr id="12" name="TextBox 11"/>
+          <p:cNvSpPr txBox="1"/>
+          <p:nvPr/>
+        </p:nvSpPr>
+        <p:spPr>
+          <a:xfrm>
+            <a:off x="6492240" y="2450592"/>
+            <a:ext cx="2194560" cy="256032"/>
           </a:xfrm>
           <a:prstGeom prst="rect">
             <a:avLst/>
@@ -10938,48 +10391,89 @@
               </a:lnSpc>
             </a:pPr>
             <a:r>
+              <a:rPr sz="1250" b="1">
+                <a:solidFill>
+                  <a:srgbClr val="1BAF7A"/>
+                </a:solidFill>
+                <a:latin typeface="맑은 고딕"/>
+                <a:ea typeface="맑은 고딕"/>
+                <a:cs typeface="맑은 고딕"/>
+              </a:rPr>
+              <a:t>복지·보건 담당</a:t>
+            </a:r>
+          </a:p>
+        </p:txBody>
+      </p:sp>
+      <p:sp>
+        <p:nvSpPr>
+          <p:cNvPr id="13" name="TextBox 12"/>
+          <p:cNvSpPr txBox="1"/>
+          <p:nvPr/>
+        </p:nvSpPr>
+        <p:spPr>
+          <a:xfrm>
+            <a:off x="6492240" y="2743200"/>
+            <a:ext cx="4663440" cy="256032"/>
+          </a:xfrm>
+          <a:prstGeom prst="rect">
+            <a:avLst/>
+          </a:prstGeom>
+          <a:noFill/>
+        </p:spPr>
+        <p:txBody>
+          <a:bodyPr wrap="square" lIns="0" rIns="0" tIns="0" bIns="0">
+            <a:spAutoFit/>
+          </a:bodyPr>
+          <a:lstStyle/>
+          <a:p>
+            <a:pPr algn="l">
+              <a:lnSpc>
+                <a:spcPct val="135000"/>
+              </a:lnSpc>
+            </a:pPr>
+            <a:r>
               <a:rPr sz="1350" b="1">
                 <a:solidFill>
-                  <a:srgbClr val="8A7FB5"/>
-                </a:solidFill>
-                <a:latin typeface="맑은 고딕"/>
-                <a:ea typeface="맑은 고딕"/>
-                <a:cs typeface="맑은 고딕"/>
-              </a:rPr>
-              <a:t>농촌면에서 아이 키우시는 부모님</a:t>
-            </a:r>
-          </a:p>
-        </p:txBody>
-      </p:sp>
-      <p:sp>
-        <p:nvSpPr>
-          <p:cNvPr id="12" name="TextBox 11"/>
-          <p:cNvSpPr txBox="1"/>
-          <p:nvPr/>
-        </p:nvSpPr>
-        <p:spPr>
-          <a:xfrm>
-            <a:off x="6492240" y="2834640"/>
-            <a:ext cx="4663440" cy="731520"/>
-          </a:xfrm>
-          <a:prstGeom prst="rect">
-            <a:avLst/>
-          </a:prstGeom>
-          <a:noFill/>
-        </p:spPr>
-        <p:txBody>
-          <a:bodyPr wrap="square" lIns="0" rIns="0" tIns="0" bIns="0">
-            <a:spAutoFit/>
-          </a:bodyPr>
-          <a:lstStyle/>
-          <a:p>
-            <a:pPr algn="l">
-              <a:lnSpc>
-                <a:spcPct val="150000"/>
-              </a:lnSpc>
-            </a:pPr>
-            <a:r>
-              <a:rPr sz="1100" b="0">
+                  <a:srgbClr val="12151A"/>
+                </a:solidFill>
+                <a:latin typeface="맑은 고딕"/>
+                <a:ea typeface="맑은 고딕"/>
+                <a:cs typeface="맑은 고딕"/>
+              </a:rPr>
+              <a:t>생활시설 위치 검토</a:t>
+            </a:r>
+          </a:p>
+        </p:txBody>
+      </p:sp>
+      <p:sp>
+        <p:nvSpPr>
+          <p:cNvPr id="14" name="TextBox 13"/>
+          <p:cNvSpPr txBox="1"/>
+          <p:nvPr/>
+        </p:nvSpPr>
+        <p:spPr>
+          <a:xfrm>
+            <a:off x="6492240" y="3054096"/>
+            <a:ext cx="4663440" cy="548640"/>
+          </a:xfrm>
+          <a:prstGeom prst="rect">
+            <a:avLst/>
+          </a:prstGeom>
+          <a:noFill/>
+        </p:spPr>
+        <p:txBody>
+          <a:bodyPr wrap="square" lIns="0" rIns="0" tIns="0" bIns="0">
+            <a:spAutoFit/>
+          </a:bodyPr>
+          <a:lstStyle/>
+          <a:p>
+            <a:pPr algn="l">
+              <a:lnSpc>
+                <a:spcPct val="145000"/>
+              </a:lnSpc>
+            </a:pPr>
+            <a:r>
+              <a:rPr sz="1080" b="0">
                 <a:solidFill>
                   <a:srgbClr val="52514E"/>
                 </a:solidFill>
@@ -10987,20 +10481,20 @@
                 <a:ea typeface="맑은 고딕"/>
                 <a:cs typeface="맑은 고딕"/>
               </a:rPr>
-              <a:t>고령 비율이 가장 높은 곳은 4으로 54%였습니다.</a:t>
-            </a:r>
-          </a:p>
-          <a:p>
-            <a:pPr algn="l">
-              <a:lnSpc>
-                <a:spcPct val="150000"/>
+              <a:t>우선순위표의 좌표를 검토 후보 중 하나로,</a:t>
+            </a:r>
+          </a:p>
+          <a:p>
+            <a:pPr algn="l">
+              <a:lnSpc>
+                <a:spcPct val="145000"/>
               </a:lnSpc>
               <a:spcBef>
                 <a:spcPts val="0"/>
               </a:spcBef>
             </a:pPr>
             <a:r>
-              <a:rPr sz="1100" b="0">
+              <a:rPr sz="1080" b="0">
                 <a:solidFill>
                   <a:srgbClr val="52514E"/>
                 </a:solidFill>
@@ -11008,14 +10502,14 @@
                 <a:ea typeface="맑은 고딕"/>
                 <a:cs typeface="맑은 고딕"/>
               </a:rPr>
-              <a:t>어린이집·도서관이 가까이 없으면 그 부담은 온전히 가정의 몫이 됩니다.</a:t>
-            </a:r>
-          </a:p>
-        </p:txBody>
-      </p:sp>
-      <p:sp>
-        <p:nvSpPr>
-          <p:cNvPr id="13" name="Rounded Rectangle 12"/>
+              <a:t>왜 그 동네인지 설명하실 때 항목별 근거로.</a:t>
+            </a:r>
+          </a:p>
+        </p:txBody>
+      </p:sp>
+      <p:sp>
+        <p:nvSpPr>
+          <p:cNvPr id="15" name="Rounded Rectangle 14"/>
           <p:cNvSpPr/>
           <p:nvPr/>
         </p:nvSpPr>
@@ -11061,7 +10555,7 @@
       </p:sp>
       <p:sp>
         <p:nvSpPr>
-          <p:cNvPr id="14" name="Rectangle 13"/>
+          <p:cNvPr id="16" name="Rectangle 15"/>
           <p:cNvSpPr/>
           <p:nvPr/>
         </p:nvSpPr>
@@ -11103,14 +10597,14 @@
       </p:sp>
       <p:sp>
         <p:nvSpPr>
-          <p:cNvPr id="15" name="TextBox 14"/>
-          <p:cNvSpPr txBox="1"/>
-          <p:nvPr/>
-        </p:nvSpPr>
-        <p:spPr>
-          <a:xfrm>
-            <a:off x="914400" y="4041648"/>
-            <a:ext cx="4663440" cy="274320"/>
+          <p:cNvPr id="17" name="TextBox 16"/>
+          <p:cNvSpPr txBox="1"/>
+          <p:nvPr/>
+        </p:nvSpPr>
+        <p:spPr>
+          <a:xfrm>
+            <a:off x="914400" y="4023359"/>
+            <a:ext cx="2194560" cy="256032"/>
           </a:xfrm>
           <a:prstGeom prst="rect">
             <a:avLst/>
@@ -11129,48 +10623,89 @@
               </a:lnSpc>
             </a:pPr>
             <a:r>
+              <a:rPr sz="1250" b="1">
+                <a:solidFill>
+                  <a:srgbClr val="EDA100"/>
+                </a:solidFill>
+                <a:latin typeface="맑은 고딕"/>
+                <a:ea typeface="맑은 고딕"/>
+                <a:cs typeface="맑은 고딕"/>
+              </a:rPr>
+              <a:t>예산 담당</a:t>
+            </a:r>
+          </a:p>
+        </p:txBody>
+      </p:sp>
+      <p:sp>
+        <p:nvSpPr>
+          <p:cNvPr id="18" name="TextBox 17"/>
+          <p:cNvSpPr txBox="1"/>
+          <p:nvPr/>
+        </p:nvSpPr>
+        <p:spPr>
+          <a:xfrm>
+            <a:off x="914400" y="4315968"/>
+            <a:ext cx="4663440" cy="256032"/>
+          </a:xfrm>
+          <a:prstGeom prst="rect">
+            <a:avLst/>
+          </a:prstGeom>
+          <a:noFill/>
+        </p:spPr>
+        <p:txBody>
+          <a:bodyPr wrap="square" lIns="0" rIns="0" tIns="0" bIns="0">
+            <a:spAutoFit/>
+          </a:bodyPr>
+          <a:lstStyle/>
+          <a:p>
+            <a:pPr algn="l">
+              <a:lnSpc>
+                <a:spcPct val="135000"/>
+              </a:lnSpc>
+            </a:pPr>
+            <a:r>
               <a:rPr sz="1350" b="1">
                 <a:solidFill>
-                  <a:srgbClr val="EDA100"/>
-                </a:solidFill>
-                <a:latin typeface="맑은 고딕"/>
-                <a:ea typeface="맑은 고딕"/>
-                <a:cs typeface="맑은 고딕"/>
-              </a:rPr>
-              <a:t>원도심에서 가게를 지켜오신 상인</a:t>
-            </a:r>
-          </a:p>
-        </p:txBody>
-      </p:sp>
-      <p:sp>
-        <p:nvSpPr>
-          <p:cNvPr id="16" name="TextBox 15"/>
-          <p:cNvSpPr txBox="1"/>
-          <p:nvPr/>
-        </p:nvSpPr>
-        <p:spPr>
-          <a:xfrm>
-            <a:off x="914400" y="4407407"/>
-            <a:ext cx="4663440" cy="731520"/>
-          </a:xfrm>
-          <a:prstGeom prst="rect">
-            <a:avLst/>
-          </a:prstGeom>
-          <a:noFill/>
-        </p:spPr>
-        <p:txBody>
-          <a:bodyPr wrap="square" lIns="0" rIns="0" tIns="0" bIns="0">
-            <a:spAutoFit/>
-          </a:bodyPr>
-          <a:lstStyle/>
-          <a:p>
-            <a:pPr algn="l">
-              <a:lnSpc>
-                <a:spcPct val="150000"/>
-              </a:lnSpc>
-            </a:pPr>
-            <a:r>
-              <a:rPr sz="1100" b="0">
+                  <a:srgbClr val="12151A"/>
+                </a:solidFill>
+                <a:latin typeface="맑은 고딕"/>
+                <a:ea typeface="맑은 고딕"/>
+                <a:cs typeface="맑은 고딕"/>
+              </a:rPr>
+              <a:t>배분 검토 자료</a:t>
+            </a:r>
+          </a:p>
+        </p:txBody>
+      </p:sp>
+      <p:sp>
+        <p:nvSpPr>
+          <p:cNvPr id="19" name="TextBox 18"/>
+          <p:cNvSpPr txBox="1"/>
+          <p:nvPr/>
+        </p:nvSpPr>
+        <p:spPr>
+          <a:xfrm>
+            <a:off x="914400" y="4626864"/>
+            <a:ext cx="4663440" cy="548640"/>
+          </a:xfrm>
+          <a:prstGeom prst="rect">
+            <a:avLst/>
+          </a:prstGeom>
+          <a:noFill/>
+        </p:spPr>
+        <p:txBody>
+          <a:bodyPr wrap="square" lIns="0" rIns="0" tIns="0" bIns="0">
+            <a:spAutoFit/>
+          </a:bodyPr>
+          <a:lstStyle/>
+          <a:p>
+            <a:pPr algn="l">
+              <a:lnSpc>
+                <a:spcPct val="145000"/>
+              </a:lnSpc>
+            </a:pPr>
+            <a:r>
+              <a:rPr sz="1080" b="0">
                 <a:solidFill>
                   <a:srgbClr val="52514E"/>
                 </a:solidFill>
@@ -11178,20 +10713,20 @@
                 <a:ea typeface="맑은 고딕"/>
                 <a:cs typeface="맑은 고딕"/>
               </a:rPr>
-              <a:t>오가는 분이 줄면 매출이 줄고, 문 닫는 가게가 늘면 오가는 분이 더 줍니다.</a:t>
-            </a:r>
-          </a:p>
-          <a:p>
-            <a:pPr algn="l">
-              <a:lnSpc>
-                <a:spcPct val="150000"/>
+              <a:t>몇 개소까지면 어느 정도 효과인지 곡선으로 비교하실 때,</a:t>
+            </a:r>
+          </a:p>
+          <a:p>
+            <a:pPr algn="l">
+              <a:lnSpc>
+                <a:spcPct val="145000"/>
               </a:lnSpc>
               <a:spcBef>
                 <a:spcPts val="0"/>
               </a:spcBef>
             </a:pPr>
             <a:r>
-              <a:rPr sz="1100" b="0">
+              <a:rPr sz="1080" b="0">
                 <a:solidFill>
                   <a:srgbClr val="52514E"/>
                 </a:solidFill>
@@ -11199,14 +10734,14 @@
                 <a:ea typeface="맑은 고딕"/>
                 <a:cs typeface="맑은 고딕"/>
               </a:rPr>
-              <a:t>이 고리를 일찍 알아차릴 수 있다면, 도움드릴 방법도 더 많아집니다.</a:t>
-            </a:r>
-          </a:p>
-        </p:txBody>
-      </p:sp>
-      <p:sp>
-        <p:nvSpPr>
-          <p:cNvPr id="17" name="Rounded Rectangle 16"/>
+              <a:t>예산 조정이 필요할 때 판단의 참고로.</a:t>
+            </a:r>
+          </a:p>
+        </p:txBody>
+      </p:sp>
+      <p:sp>
+        <p:nvSpPr>
+          <p:cNvPr id="20" name="Rounded Rectangle 19"/>
           <p:cNvSpPr/>
           <p:nvPr/>
         </p:nvSpPr>
@@ -11252,7 +10787,7 @@
       </p:sp>
       <p:sp>
         <p:nvSpPr>
-          <p:cNvPr id="18" name="Rectangle 17"/>
+          <p:cNvPr id="21" name="Rectangle 20"/>
           <p:cNvSpPr/>
           <p:nvPr/>
         </p:nvSpPr>
@@ -11265,7 +10800,7 @@
             <a:avLst/>
           </a:prstGeom>
           <a:solidFill>
-            <a:srgbClr val="2A78D6"/>
+            <a:srgbClr val="4A3AA7"/>
           </a:solidFill>
           <a:ln>
             <a:noFill/>
@@ -11294,14 +10829,14 @@
       </p:sp>
       <p:sp>
         <p:nvSpPr>
-          <p:cNvPr id="19" name="TextBox 18"/>
-          <p:cNvSpPr txBox="1"/>
-          <p:nvPr/>
-        </p:nvSpPr>
-        <p:spPr>
-          <a:xfrm>
-            <a:off x="6492240" y="4041648"/>
-            <a:ext cx="4663440" cy="274320"/>
+          <p:cNvPr id="22" name="TextBox 21"/>
+          <p:cNvSpPr txBox="1"/>
+          <p:nvPr/>
+        </p:nvSpPr>
+        <p:spPr>
+          <a:xfrm>
+            <a:off x="6492240" y="4023359"/>
+            <a:ext cx="2194560" cy="256032"/>
           </a:xfrm>
           <a:prstGeom prst="rect">
             <a:avLst/>
@@ -11320,48 +10855,89 @@
               </a:lnSpc>
             </a:pPr>
             <a:r>
+              <a:rPr sz="1250" b="1">
+                <a:solidFill>
+                  <a:srgbClr val="4A3AA7"/>
+                </a:solidFill>
+                <a:latin typeface="맑은 고딕"/>
+                <a:ea typeface="맑은 고딕"/>
+                <a:cs typeface="맑은 고딕"/>
+              </a:rPr>
+              <a:t>기획·평가 담당</a:t>
+            </a:r>
+          </a:p>
+        </p:txBody>
+      </p:sp>
+      <p:sp>
+        <p:nvSpPr>
+          <p:cNvPr id="23" name="TextBox 22"/>
+          <p:cNvSpPr txBox="1"/>
+          <p:nvPr/>
+        </p:nvSpPr>
+        <p:spPr>
+          <a:xfrm>
+            <a:off x="6492240" y="4315968"/>
+            <a:ext cx="4663440" cy="256032"/>
+          </a:xfrm>
+          <a:prstGeom prst="rect">
+            <a:avLst/>
+          </a:prstGeom>
+          <a:noFill/>
+        </p:spPr>
+        <p:txBody>
+          <a:bodyPr wrap="square" lIns="0" rIns="0" tIns="0" bIns="0">
+            <a:spAutoFit/>
+          </a:bodyPr>
+          <a:lstStyle/>
+          <a:p>
+            <a:pPr algn="l">
+              <a:lnSpc>
+                <a:spcPct val="135000"/>
+              </a:lnSpc>
+            </a:pPr>
+            <a:r>
               <a:rPr sz="1350" b="1">
                 <a:solidFill>
-                  <a:srgbClr val="2A78D6"/>
-                </a:solidFill>
-                <a:latin typeface="맑은 고딕"/>
-                <a:ea typeface="맑은 고딕"/>
-                <a:cs typeface="맑은 고딕"/>
-              </a:rPr>
-              <a:t>신도심에서 자리 잡은 이웃</a:t>
-            </a:r>
-          </a:p>
-        </p:txBody>
-      </p:sp>
-      <p:sp>
-        <p:nvSpPr>
-          <p:cNvPr id="20" name="TextBox 19"/>
-          <p:cNvSpPr txBox="1"/>
-          <p:nvPr/>
-        </p:nvSpPr>
-        <p:spPr>
-          <a:xfrm>
-            <a:off x="6492240" y="4407407"/>
-            <a:ext cx="4663440" cy="731520"/>
-          </a:xfrm>
-          <a:prstGeom prst="rect">
-            <a:avLst/>
-          </a:prstGeom>
-          <a:noFill/>
-        </p:spPr>
-        <p:txBody>
-          <a:bodyPr wrap="square" lIns="0" rIns="0" tIns="0" bIns="0">
-            <a:spAutoFit/>
-          </a:bodyPr>
-          <a:lstStyle/>
-          <a:p>
-            <a:pPr algn="l">
-              <a:lnSpc>
-                <a:spcPct val="150000"/>
-              </a:lnSpc>
-            </a:pPr>
-            <a:r>
-              <a:rPr sz="1100" b="0">
+                  <a:srgbClr val="12151A"/>
+                </a:solidFill>
+                <a:latin typeface="맑은 고딕"/>
+                <a:ea typeface="맑은 고딕"/>
+                <a:cs typeface="맑은 고딕"/>
+              </a:rPr>
+              <a:t>시행 이후 확인</a:t>
+            </a:r>
+          </a:p>
+        </p:txBody>
+      </p:sp>
+      <p:sp>
+        <p:nvSpPr>
+          <p:cNvPr id="24" name="TextBox 23"/>
+          <p:cNvSpPr txBox="1"/>
+          <p:nvPr/>
+        </p:nvSpPr>
+        <p:spPr>
+          <a:xfrm>
+            <a:off x="6492240" y="4626864"/>
+            <a:ext cx="4663440" cy="548640"/>
+          </a:xfrm>
+          <a:prstGeom prst="rect">
+            <a:avLst/>
+          </a:prstGeom>
+          <a:noFill/>
+        </p:spPr>
+        <p:txBody>
+          <a:bodyPr wrap="square" lIns="0" rIns="0" tIns="0" bIns="0">
+            <a:spAutoFit/>
+          </a:bodyPr>
+          <a:lstStyle/>
+          <a:p>
+            <a:pPr algn="l">
+              <a:lnSpc>
+                <a:spcPct val="145000"/>
+              </a:lnSpc>
+            </a:pPr>
+            <a:r>
+              <a:rPr sz="1080" b="0">
                 <a:solidFill>
                   <a:srgbClr val="52514E"/>
                 </a:solidFill>
@@ -11369,20 +10945,20 @@
                 <a:ea typeface="맑은 고딕"/>
                 <a:cs typeface="맑은 고딕"/>
               </a:rPr>
-              <a:t>지금 여건이 좋은 곳도 언젠가는 나이가 듭니다.</a:t>
-            </a:r>
-          </a:p>
-          <a:p>
-            <a:pPr algn="l">
-              <a:lnSpc>
-                <a:spcPct val="150000"/>
+              <a:t>이듬해 같은 스크립트로 지수 변화를 이어 보실 때,</a:t>
+            </a:r>
+          </a:p>
+          <a:p>
+            <a:pPr algn="l">
+              <a:lnSpc>
+                <a:spcPct val="145000"/>
               </a:lnSpc>
               <a:spcBef>
                 <a:spcPts val="0"/>
               </a:spcBef>
             </a:pPr>
             <a:r>
-              <a:rPr sz="1100" b="0">
+              <a:rPr sz="1080" b="0">
                 <a:solidFill>
                   <a:srgbClr val="52514E"/>
                 </a:solidFill>
@@ -11390,14 +10966,14 @@
                 <a:ea typeface="맑은 고딕"/>
                 <a:cs typeface="맑은 고딕"/>
               </a:rPr>
-              <a:t>미리 살펴보는 습관은 결국 천안시민 모두를 위한 준비라고 생각합니다.</a:t>
-            </a:r>
-          </a:p>
-        </p:txBody>
-      </p:sp>
-      <p:sp>
-        <p:nvSpPr>
-          <p:cNvPr id="21" name="Rounded Rectangle 20"/>
+              <a:t>하신 사업이 수치로도 나아졌는지 확인하실 때.</a:t>
+            </a:r>
+          </a:p>
+        </p:txBody>
+      </p:sp>
+      <p:sp>
+        <p:nvSpPr>
+          <p:cNvPr id="25" name="Rounded Rectangle 24"/>
           <p:cNvSpPr/>
           <p:nvPr/>
         </p:nvSpPr>
@@ -11441,14 +11017,14 @@
       </p:sp>
       <p:sp>
         <p:nvSpPr>
-          <p:cNvPr id="22" name="TextBox 21"/>
-          <p:cNvSpPr txBox="1"/>
-          <p:nvPr/>
-        </p:nvSpPr>
-        <p:spPr>
-          <a:xfrm>
-            <a:off x="932688" y="5724144"/>
-            <a:ext cx="10515600" cy="457200"/>
+          <p:cNvPr id="26" name="TextBox 25"/>
+          <p:cNvSpPr txBox="1"/>
+          <p:nvPr/>
+        </p:nvSpPr>
+        <p:spPr>
+          <a:xfrm>
+            <a:off x="932688" y="5705856"/>
+            <a:ext cx="10515600" cy="502920"/>
           </a:xfrm>
           <a:prstGeom prst="rect">
             <a:avLst/>
@@ -11475,7 +11051,7 @@
                 <a:ea typeface="맑은 고딕"/>
                 <a:cs typeface="맑은 고딕"/>
               </a:rPr>
-              <a:t>저희는 천안시 사정을 현장에서 겪어보지 못한 참가자입니다. 다만 공개된 데이터로 할 수 있는 만큼은 성실하게 살펴보았습니다.</a:t>
+              <a:t>쓰시는 방법 — 연 1회 공공데이터를 새로 받아 스크립트를 실행하시면 모든 자료가 다시 만들어집니다.</a:t>
             </a:r>
           </a:p>
           <a:p>
@@ -11496,14 +11072,14 @@
                 <a:ea typeface="맑은 고딕"/>
                 <a:cs typeface="맑은 고딕"/>
               </a:rPr>
-              <a:t>부족한 부분은 현장을 아시는 분들이 채워주시길 바라며, 이 자료가 그 논의의 출발점이 될 수 있다면 더 바랄 것이 없겠습니다.</a:t>
-            </a:r>
-          </a:p>
-        </p:txBody>
-      </p:sp>
-      <p:sp>
-        <p:nvSpPr>
-          <p:cNvPr id="23" name="TextBox 22"/>
+              <a:t>별도 시스템이나 데이터 구매 없이, 담당자 한 분이 반나절이면 그 해 자료를 준비하실 수 있습니다.</a:t>
+            </a:r>
+          </a:p>
+        </p:txBody>
+      </p:sp>
+      <p:sp>
+        <p:nvSpPr>
+          <p:cNvPr id="27" name="TextBox 26"/>
           <p:cNvSpPr txBox="1"/>
           <p:nvPr/>
         </p:nvSpPr>
@@ -11544,7 +11120,7 @@
       </p:sp>
       <p:sp>
         <p:nvSpPr>
-          <p:cNvPr id="24" name="TextBox 23"/>
+          <p:cNvPr id="28" name="TextBox 27"/>
           <p:cNvSpPr txBox="1"/>
           <p:nvPr/>
         </p:nvSpPr>
@@ -11637,7 +11213,7 @@
                 <a:ea typeface="맑은 고딕"/>
                 <a:cs typeface="맑은 고딕"/>
               </a:rPr>
-              <a:t>APPLICATION</a:t>
+              <a:t>IMPACT</a:t>
             </a:r>
           </a:p>
         </p:txBody>
@@ -11678,7 +11254,7 @@
                 <a:ea typeface="맑은 고딕"/>
                 <a:cs typeface="맑은 고딕"/>
               </a:rPr>
-              <a:t>실무에 이렇게 보탬이 되면 좋겠습니다</a:t>
+              <a:t>기대효과와 실행 로드맵</a:t>
             </a:r>
           </a:p>
         </p:txBody>
@@ -11691,95 +11267,49 @@
         </p:nvSpPr>
         <p:spPr>
           <a:xfrm>
-            <a:off x="658368" y="1517904"/>
-            <a:ext cx="10874959" cy="411480"/>
-          </a:xfrm>
-          <a:prstGeom prst="rect">
-            <a:avLst/>
-          </a:prstGeom>
-          <a:noFill/>
-        </p:spPr>
-        <p:txBody>
-          <a:bodyPr wrap="square" lIns="0" rIns="0" tIns="0" bIns="0">
-            <a:spAutoFit/>
-          </a:bodyPr>
-          <a:lstStyle/>
-          <a:p>
-            <a:pPr algn="l">
-              <a:lnSpc>
-                <a:spcPct val="145000"/>
-              </a:lnSpc>
-            </a:pPr>
-            <a:r>
-              <a:rPr sz="1350" b="0">
-                <a:solidFill>
-                  <a:srgbClr val="52514E"/>
-                </a:solidFill>
-                <a:latin typeface="맑은 고딕"/>
-                <a:ea typeface="맑은 고딕"/>
-                <a:cs typeface="맑은 고딕"/>
-              </a:rPr>
-              <a:t>따로 시간을 내어 다뤄야 하는 연구물이 아니라, 하시던 업무 곁에 놓고 참고하실 수 있는 자료로 준비했습니다.</a:t>
-            </a:r>
-          </a:p>
-        </p:txBody>
-      </p:sp>
-      <p:sp>
-        <p:nvSpPr>
-          <p:cNvPr id="5" name="Rounded Rectangle 4"/>
+            <a:off x="658368" y="2084831"/>
+            <a:ext cx="5486400" cy="274320"/>
+          </a:xfrm>
+          <a:prstGeom prst="rect">
+            <a:avLst/>
+          </a:prstGeom>
+          <a:noFill/>
+        </p:spPr>
+        <p:txBody>
+          <a:bodyPr wrap="square" lIns="0" rIns="0" tIns="0" bIns="0">
+            <a:spAutoFit/>
+          </a:bodyPr>
+          <a:lstStyle/>
+          <a:p>
+            <a:pPr algn="l">
+              <a:lnSpc>
+                <a:spcPct val="135000"/>
+              </a:lnSpc>
+            </a:pPr>
+            <a:r>
+              <a:rPr sz="1450" b="1">
+                <a:solidFill>
+                  <a:srgbClr val="12151A"/>
+                </a:solidFill>
+                <a:latin typeface="맑은 고딕"/>
+                <a:ea typeface="맑은 고딕"/>
+                <a:cs typeface="맑은 고딕"/>
+              </a:rPr>
+              <a:t>기대효과</a:t>
+            </a:r>
+          </a:p>
+        </p:txBody>
+      </p:sp>
+      <p:sp>
+        <p:nvSpPr>
+          <p:cNvPr id="5" name="Rectangle 4"/>
           <p:cNvSpPr/>
           <p:nvPr/>
         </p:nvSpPr>
         <p:spPr>
           <a:xfrm>
-            <a:off x="658368" y="2286000"/>
-            <a:ext cx="5257800" cy="1371600"/>
-          </a:xfrm>
-          <a:prstGeom prst="roundRect">
-            <a:avLst>
-              <a:gd name="adj" fmla="val 6000"/>
-            </a:avLst>
-          </a:prstGeom>
-          <a:solidFill>
-            <a:srgbClr val="FFFFFF"/>
-          </a:solidFill>
-          <a:ln w="12700">
-            <a:solidFill>
-              <a:srgbClr val="E4E7EC"/>
-            </a:solidFill>
-          </a:ln>
-          <a:effectLst/>
-        </p:spPr>
-        <p:style>
-          <a:lnRef idx="1">
-            <a:schemeClr val="accent1"/>
-          </a:lnRef>
-          <a:fillRef idx="3">
-            <a:schemeClr val="accent1"/>
-          </a:fillRef>
-          <a:effectRef idx="2">
-            <a:schemeClr val="accent1"/>
-          </a:effectRef>
-          <a:fontRef idx="minor">
-            <a:schemeClr val="lt1"/>
-          </a:fontRef>
-        </p:style>
-        <p:txBody>
-          <a:bodyPr rtlCol="0" anchor="ctr"/>
-          <a:lstStyle/>
-          <a:p/>
-        </p:txBody>
-      </p:sp>
-      <p:sp>
-        <p:nvSpPr>
-          <p:cNvPr id="6" name="Rectangle 5"/>
-          <p:cNvSpPr/>
-          <p:nvPr/>
-        </p:nvSpPr>
-        <p:spPr>
-          <a:xfrm>
-            <a:off x="658368" y="2286000"/>
-            <a:ext cx="68580" cy="1371600"/>
+            <a:off x="658368" y="2468880"/>
+            <a:ext cx="68580" cy="566928"/>
           </a:xfrm>
           <a:prstGeom prst="rect">
             <a:avLst/>
@@ -11814,115 +11344,74 @@
       </p:sp>
       <p:sp>
         <p:nvSpPr>
+          <p:cNvPr id="6" name="TextBox 5"/>
+          <p:cNvSpPr txBox="1"/>
+          <p:nvPr/>
+        </p:nvSpPr>
+        <p:spPr>
+          <a:xfrm>
+            <a:off x="877824" y="2468880"/>
+            <a:ext cx="5120640" cy="256032"/>
+          </a:xfrm>
+          <a:prstGeom prst="rect">
+            <a:avLst/>
+          </a:prstGeom>
+          <a:noFill/>
+        </p:spPr>
+        <p:txBody>
+          <a:bodyPr wrap="square" lIns="0" rIns="0" tIns="0" bIns="0">
+            <a:spAutoFit/>
+          </a:bodyPr>
+          <a:lstStyle/>
+          <a:p>
+            <a:pPr algn="l">
+              <a:lnSpc>
+                <a:spcPct val="135000"/>
+              </a:lnSpc>
+            </a:pPr>
+            <a:r>
+              <a:rPr sz="1250" b="1">
+                <a:solidFill>
+                  <a:srgbClr val="12151A"/>
+                </a:solidFill>
+                <a:latin typeface="맑은 고딕"/>
+                <a:ea typeface="맑은 고딕"/>
+                <a:cs typeface="맑은 고딕"/>
+              </a:rPr>
+              <a:t>시민께 닿는 범위</a:t>
+            </a:r>
+          </a:p>
+        </p:txBody>
+      </p:sp>
+      <p:sp>
+        <p:nvSpPr>
           <p:cNvPr id="7" name="TextBox 6"/>
           <p:cNvSpPr txBox="1"/>
           <p:nvPr/>
         </p:nvSpPr>
         <p:spPr>
           <a:xfrm>
-            <a:off x="914400" y="2450592"/>
-            <a:ext cx="2194560" cy="256032"/>
-          </a:xfrm>
-          <a:prstGeom prst="rect">
-            <a:avLst/>
-          </a:prstGeom>
-          <a:noFill/>
-        </p:spPr>
-        <p:txBody>
-          <a:bodyPr wrap="square" lIns="0" rIns="0" tIns="0" bIns="0">
-            <a:spAutoFit/>
-          </a:bodyPr>
-          <a:lstStyle/>
-          <a:p>
-            <a:pPr algn="l">
-              <a:lnSpc>
-                <a:spcPct val="135000"/>
-              </a:lnSpc>
-            </a:pPr>
-            <a:r>
-              <a:rPr sz="1250" b="1">
-                <a:solidFill>
-                  <a:srgbClr val="2A78D6"/>
-                </a:solidFill>
-                <a:latin typeface="맑은 고딕"/>
-                <a:ea typeface="맑은 고딕"/>
-                <a:cs typeface="맑은 고딕"/>
-              </a:rPr>
-              <a:t>도시재생 담당</a:t>
-            </a:r>
-          </a:p>
-        </p:txBody>
-      </p:sp>
-      <p:sp>
-        <p:nvSpPr>
-          <p:cNvPr id="8" name="TextBox 7"/>
-          <p:cNvSpPr txBox="1"/>
-          <p:nvPr/>
-        </p:nvSpPr>
-        <p:spPr>
-          <a:xfrm>
-            <a:off x="914400" y="2743200"/>
-            <a:ext cx="4663440" cy="256032"/>
-          </a:xfrm>
-          <a:prstGeom prst="rect">
-            <a:avLst/>
-          </a:prstGeom>
-          <a:noFill/>
-        </p:spPr>
-        <p:txBody>
-          <a:bodyPr wrap="square" lIns="0" rIns="0" tIns="0" bIns="0">
-            <a:spAutoFit/>
-          </a:bodyPr>
-          <a:lstStyle/>
-          <a:p>
-            <a:pPr algn="l">
-              <a:lnSpc>
-                <a:spcPct val="135000"/>
-              </a:lnSpc>
-            </a:pPr>
-            <a:r>
-              <a:rPr sz="1350" b="1">
-                <a:solidFill>
-                  <a:srgbClr val="12151A"/>
-                </a:solidFill>
-                <a:latin typeface="맑은 고딕"/>
-                <a:ea typeface="맑은 고딕"/>
-                <a:cs typeface="맑은 고딕"/>
-              </a:rPr>
-              <a:t>사업지 검토 · 공모 준비</a:t>
-            </a:r>
-          </a:p>
-        </p:txBody>
-      </p:sp>
-      <p:sp>
-        <p:nvSpPr>
-          <p:cNvPr id="9" name="TextBox 8"/>
-          <p:cNvSpPr txBox="1"/>
-          <p:nvPr/>
-        </p:nvSpPr>
-        <p:spPr>
-          <a:xfrm>
-            <a:off x="914400" y="3054096"/>
-            <a:ext cx="4663440" cy="548640"/>
-          </a:xfrm>
-          <a:prstGeom prst="rect">
-            <a:avLst/>
-          </a:prstGeom>
-          <a:noFill/>
-        </p:spPr>
-        <p:txBody>
-          <a:bodyPr wrap="square" lIns="0" rIns="0" tIns="0" bIns="0">
-            <a:spAutoFit/>
-          </a:bodyPr>
-          <a:lstStyle/>
-          <a:p>
-            <a:pPr algn="l">
-              <a:lnSpc>
-                <a:spcPct val="145000"/>
-              </a:lnSpc>
-            </a:pPr>
-            <a:r>
-              <a:rPr sz="1080" b="0">
+            <a:off x="877824" y="2743200"/>
+            <a:ext cx="5120640" cy="365760"/>
+          </a:xfrm>
+          <a:prstGeom prst="rect">
+            <a:avLst/>
+          </a:prstGeom>
+          <a:noFill/>
+        </p:spPr>
+        <p:txBody>
+          <a:bodyPr wrap="square" lIns="0" rIns="0" tIns="0" bIns="0">
+            <a:spAutoFit/>
+          </a:bodyPr>
+          <a:lstStyle/>
+          <a:p>
+            <a:pPr algn="l">
+              <a:lnSpc>
+                <a:spcPct val="140000"/>
+              </a:lnSpc>
+            </a:pPr>
+            <a:r>
+              <a:rPr sz="1100" b="0">
                 <a:solidFill>
                   <a:srgbClr val="52514E"/>
                 </a:solidFill>
@@ -11930,55 +11419,30 @@
                 <a:ea typeface="맑은 고딕"/>
                 <a:cs typeface="맑은 고딕"/>
               </a:rPr>
-              <a:t>지수가 낮은 곳과 3년 뒤 살펴볼 곳을 겹쳐 후보를 좁히실 때,</a:t>
-            </a:r>
-          </a:p>
-          <a:p>
-            <a:pPr algn="l">
-              <a:lnSpc>
-                <a:spcPct val="145000"/>
-              </a:lnSpc>
-              <a:spcBef>
-                <a:spcPts val="0"/>
-              </a:spcBef>
-            </a:pPr>
-            <a:r>
-              <a:rPr sz="1080" b="0">
-                <a:solidFill>
-                  <a:srgbClr val="52514E"/>
-                </a:solidFill>
-                <a:latin typeface="맑은 고딕"/>
-                <a:ea typeface="맑은 고딕"/>
-                <a:cs typeface="맑은 고딕"/>
-              </a:rPr>
-              <a:t>공모의 '쇠퇴도 진단' 항목에 근거 수치로.</a:t>
-            </a:r>
-          </a:p>
-        </p:txBody>
-      </p:sp>
-      <p:sp>
-        <p:nvSpPr>
-          <p:cNvPr id="10" name="Rounded Rectangle 9"/>
+              <a:t>효과가 큰 곳부터 살펴보면, 같은 예산으로도 더 많은 분께 닿을 수 있습니다</a:t>
+            </a:r>
+          </a:p>
+        </p:txBody>
+      </p:sp>
+      <p:sp>
+        <p:nvSpPr>
+          <p:cNvPr id="8" name="Rectangle 7"/>
           <p:cNvSpPr/>
           <p:nvPr/>
         </p:nvSpPr>
         <p:spPr>
           <a:xfrm>
-            <a:off x="6236207" y="2286000"/>
-            <a:ext cx="5257800" cy="1371600"/>
-          </a:xfrm>
-          <a:prstGeom prst="roundRect">
-            <a:avLst>
-              <a:gd name="adj" fmla="val 6000"/>
-            </a:avLst>
+            <a:off x="658368" y="3218688"/>
+            <a:ext cx="68580" cy="566928"/>
+          </a:xfrm>
+          <a:prstGeom prst="rect">
+            <a:avLst/>
           </a:prstGeom>
           <a:solidFill>
-            <a:srgbClr val="FFFFFF"/>
+            <a:srgbClr val="2A78D6"/>
           </a:solidFill>
-          <a:ln w="12700">
-            <a:solidFill>
-              <a:srgbClr val="E4E7EC"/>
-            </a:solidFill>
+          <a:ln>
+            <a:noFill/>
           </a:ln>
           <a:effectLst/>
         </p:spPr>
@@ -12004,14 +11468,385 @@
       </p:sp>
       <p:sp>
         <p:nvSpPr>
+          <p:cNvPr id="9" name="TextBox 8"/>
+          <p:cNvSpPr txBox="1"/>
+          <p:nvPr/>
+        </p:nvSpPr>
+        <p:spPr>
+          <a:xfrm>
+            <a:off x="877824" y="3218688"/>
+            <a:ext cx="5120640" cy="256032"/>
+          </a:xfrm>
+          <a:prstGeom prst="rect">
+            <a:avLst/>
+          </a:prstGeom>
+          <a:noFill/>
+        </p:spPr>
+        <p:txBody>
+          <a:bodyPr wrap="square" lIns="0" rIns="0" tIns="0" bIns="0">
+            <a:spAutoFit/>
+          </a:bodyPr>
+          <a:lstStyle/>
+          <a:p>
+            <a:pPr algn="l">
+              <a:lnSpc>
+                <a:spcPct val="135000"/>
+              </a:lnSpc>
+            </a:pPr>
+            <a:r>
+              <a:rPr sz="1250" b="1">
+                <a:solidFill>
+                  <a:srgbClr val="12151A"/>
+                </a:solidFill>
+                <a:latin typeface="맑은 고딕"/>
+                <a:ea typeface="맑은 고딕"/>
+                <a:cs typeface="맑은 고딕"/>
+              </a:rPr>
+              <a:t>살펴보는 시점</a:t>
+            </a:r>
+          </a:p>
+        </p:txBody>
+      </p:sp>
+      <p:sp>
+        <p:nvSpPr>
+          <p:cNvPr id="10" name="TextBox 9"/>
+          <p:cNvSpPr txBox="1"/>
+          <p:nvPr/>
+        </p:nvSpPr>
+        <p:spPr>
+          <a:xfrm>
+            <a:off x="877824" y="3493008"/>
+            <a:ext cx="5120640" cy="365760"/>
+          </a:xfrm>
+          <a:prstGeom prst="rect">
+            <a:avLst/>
+          </a:prstGeom>
+          <a:noFill/>
+        </p:spPr>
+        <p:txBody>
+          <a:bodyPr wrap="square" lIns="0" rIns="0" tIns="0" bIns="0">
+            <a:spAutoFit/>
+          </a:bodyPr>
+          <a:lstStyle/>
+          <a:p>
+            <a:pPr algn="l">
+              <a:lnSpc>
+                <a:spcPct val="140000"/>
+              </a:lnSpc>
+            </a:pPr>
+            <a:r>
+              <a:rPr sz="1100" b="0">
+                <a:solidFill>
+                  <a:srgbClr val="52514E"/>
+                </a:solidFill>
+                <a:latin typeface="맑은 고딕"/>
+                <a:ea typeface="맑은 고딕"/>
+                <a:cs typeface="맑은 고딕"/>
+              </a:rPr>
+              <a:t>어려워진 뒤가 아니라, 3년 앞을 미리 짚어볼 수 있습니다</a:t>
+            </a:r>
+          </a:p>
+        </p:txBody>
+      </p:sp>
+      <p:sp>
+        <p:nvSpPr>
           <p:cNvPr id="11" name="Rectangle 10"/>
           <p:cNvSpPr/>
           <p:nvPr/>
         </p:nvSpPr>
         <p:spPr>
           <a:xfrm>
-            <a:off x="6236207" y="2286000"/>
-            <a:ext cx="68580" cy="1371600"/>
+            <a:off x="658368" y="3968496"/>
+            <a:ext cx="68580" cy="566928"/>
+          </a:xfrm>
+          <a:prstGeom prst="rect">
+            <a:avLst/>
+          </a:prstGeom>
+          <a:solidFill>
+            <a:srgbClr val="2A78D6"/>
+          </a:solidFill>
+          <a:ln>
+            <a:noFill/>
+          </a:ln>
+          <a:effectLst/>
+        </p:spPr>
+        <p:style>
+          <a:lnRef idx="1">
+            <a:schemeClr val="accent1"/>
+          </a:lnRef>
+          <a:fillRef idx="3">
+            <a:schemeClr val="accent1"/>
+          </a:fillRef>
+          <a:effectRef idx="2">
+            <a:schemeClr val="accent1"/>
+          </a:effectRef>
+          <a:fontRef idx="minor">
+            <a:schemeClr val="lt1"/>
+          </a:fontRef>
+        </p:style>
+        <p:txBody>
+          <a:bodyPr rtlCol="0" anchor="ctr"/>
+          <a:lstStyle/>
+          <a:p/>
+        </p:txBody>
+      </p:sp>
+      <p:sp>
+        <p:nvSpPr>
+          <p:cNvPr id="12" name="TextBox 11"/>
+          <p:cNvSpPr txBox="1"/>
+          <p:nvPr/>
+        </p:nvSpPr>
+        <p:spPr>
+          <a:xfrm>
+            <a:off x="877824" y="3968496"/>
+            <a:ext cx="5120640" cy="256032"/>
+          </a:xfrm>
+          <a:prstGeom prst="rect">
+            <a:avLst/>
+          </a:prstGeom>
+          <a:noFill/>
+        </p:spPr>
+        <p:txBody>
+          <a:bodyPr wrap="square" lIns="0" rIns="0" tIns="0" bIns="0">
+            <a:spAutoFit/>
+          </a:bodyPr>
+          <a:lstStyle/>
+          <a:p>
+            <a:pPr algn="l">
+              <a:lnSpc>
+                <a:spcPct val="135000"/>
+              </a:lnSpc>
+            </a:pPr>
+            <a:r>
+              <a:rPr sz="1250" b="1">
+                <a:solidFill>
+                  <a:srgbClr val="12151A"/>
+                </a:solidFill>
+                <a:latin typeface="맑은 고딕"/>
+                <a:ea typeface="맑은 고딕"/>
+                <a:cs typeface="맑은 고딕"/>
+              </a:rPr>
+              <a:t>설명하실 때</a:t>
+            </a:r>
+          </a:p>
+        </p:txBody>
+      </p:sp>
+      <p:sp>
+        <p:nvSpPr>
+          <p:cNvPr id="13" name="TextBox 12"/>
+          <p:cNvSpPr txBox="1"/>
+          <p:nvPr/>
+        </p:nvSpPr>
+        <p:spPr>
+          <a:xfrm>
+            <a:off x="877824" y="4242816"/>
+            <a:ext cx="5120640" cy="365760"/>
+          </a:xfrm>
+          <a:prstGeom prst="rect">
+            <a:avLst/>
+          </a:prstGeom>
+          <a:noFill/>
+        </p:spPr>
+        <p:txBody>
+          <a:bodyPr wrap="square" lIns="0" rIns="0" tIns="0" bIns="0">
+            <a:spAutoFit/>
+          </a:bodyPr>
+          <a:lstStyle/>
+          <a:p>
+            <a:pPr algn="l">
+              <a:lnSpc>
+                <a:spcPct val="140000"/>
+              </a:lnSpc>
+            </a:pPr>
+            <a:r>
+              <a:rPr sz="1100" b="0">
+                <a:solidFill>
+                  <a:srgbClr val="52514E"/>
+                </a:solidFill>
+                <a:latin typeface="맑은 고딕"/>
+                <a:ea typeface="맑은 고딕"/>
+                <a:cs typeface="맑은 고딕"/>
+              </a:rPr>
+              <a:t>판단 근거를 항목별 수치로 정리해 드려 설명 부담을 조금 덜어드립니다</a:t>
+            </a:r>
+          </a:p>
+        </p:txBody>
+      </p:sp>
+      <p:sp>
+        <p:nvSpPr>
+          <p:cNvPr id="14" name="Rectangle 13"/>
+          <p:cNvSpPr/>
+          <p:nvPr/>
+        </p:nvSpPr>
+        <p:spPr>
+          <a:xfrm>
+            <a:off x="658368" y="4718304"/>
+            <a:ext cx="68580" cy="566928"/>
+          </a:xfrm>
+          <a:prstGeom prst="rect">
+            <a:avLst/>
+          </a:prstGeom>
+          <a:solidFill>
+            <a:srgbClr val="2A78D6"/>
+          </a:solidFill>
+          <a:ln>
+            <a:noFill/>
+          </a:ln>
+          <a:effectLst/>
+        </p:spPr>
+        <p:style>
+          <a:lnRef idx="1">
+            <a:schemeClr val="accent1"/>
+          </a:lnRef>
+          <a:fillRef idx="3">
+            <a:schemeClr val="accent1"/>
+          </a:fillRef>
+          <a:effectRef idx="2">
+            <a:schemeClr val="accent1"/>
+          </a:effectRef>
+          <a:fontRef idx="minor">
+            <a:schemeClr val="lt1"/>
+          </a:fontRef>
+        </p:style>
+        <p:txBody>
+          <a:bodyPr rtlCol="0" anchor="ctr"/>
+          <a:lstStyle/>
+          <a:p/>
+        </p:txBody>
+      </p:sp>
+      <p:sp>
+        <p:nvSpPr>
+          <p:cNvPr id="15" name="TextBox 14"/>
+          <p:cNvSpPr txBox="1"/>
+          <p:nvPr/>
+        </p:nvSpPr>
+        <p:spPr>
+          <a:xfrm>
+            <a:off x="877824" y="4718304"/>
+            <a:ext cx="5120640" cy="256032"/>
+          </a:xfrm>
+          <a:prstGeom prst="rect">
+            <a:avLst/>
+          </a:prstGeom>
+          <a:noFill/>
+        </p:spPr>
+        <p:txBody>
+          <a:bodyPr wrap="square" lIns="0" rIns="0" tIns="0" bIns="0">
+            <a:spAutoFit/>
+          </a:bodyPr>
+          <a:lstStyle/>
+          <a:p>
+            <a:pPr algn="l">
+              <a:lnSpc>
+                <a:spcPct val="135000"/>
+              </a:lnSpc>
+            </a:pPr>
+            <a:r>
+              <a:rPr sz="1250" b="1">
+                <a:solidFill>
+                  <a:srgbClr val="12151A"/>
+                </a:solidFill>
+                <a:latin typeface="맑은 고딕"/>
+                <a:ea typeface="맑은 고딕"/>
+                <a:cs typeface="맑은 고딕"/>
+              </a:rPr>
+              <a:t>드는 비용</a:t>
+            </a:r>
+          </a:p>
+        </p:txBody>
+      </p:sp>
+      <p:sp>
+        <p:nvSpPr>
+          <p:cNvPr id="16" name="TextBox 15"/>
+          <p:cNvSpPr txBox="1"/>
+          <p:nvPr/>
+        </p:nvSpPr>
+        <p:spPr>
+          <a:xfrm>
+            <a:off x="877824" y="4992624"/>
+            <a:ext cx="5120640" cy="365760"/>
+          </a:xfrm>
+          <a:prstGeom prst="rect">
+            <a:avLst/>
+          </a:prstGeom>
+          <a:noFill/>
+        </p:spPr>
+        <p:txBody>
+          <a:bodyPr wrap="square" lIns="0" rIns="0" tIns="0" bIns="0">
+            <a:spAutoFit/>
+          </a:bodyPr>
+          <a:lstStyle/>
+          <a:p>
+            <a:pPr algn="l">
+              <a:lnSpc>
+                <a:spcPct val="140000"/>
+              </a:lnSpc>
+            </a:pPr>
+            <a:r>
+              <a:rPr sz="1100" b="0">
+                <a:solidFill>
+                  <a:srgbClr val="52514E"/>
+                </a:solidFill>
+                <a:latin typeface="맑은 고딕"/>
+                <a:ea typeface="맑은 고딕"/>
+                <a:cs typeface="맑은 고딕"/>
+              </a:rPr>
+              <a:t>데이터 구매나 시스템 없이, 스크립트 재실행만으로 매년 갱신됩니다</a:t>
+            </a:r>
+          </a:p>
+        </p:txBody>
+      </p:sp>
+      <p:sp>
+        <p:nvSpPr>
+          <p:cNvPr id="17" name="TextBox 16"/>
+          <p:cNvSpPr txBox="1"/>
+          <p:nvPr/>
+        </p:nvSpPr>
+        <p:spPr>
+          <a:xfrm>
+            <a:off x="6510528" y="2084831"/>
+            <a:ext cx="5029200" cy="274320"/>
+          </a:xfrm>
+          <a:prstGeom prst="rect">
+            <a:avLst/>
+          </a:prstGeom>
+          <a:noFill/>
+        </p:spPr>
+        <p:txBody>
+          <a:bodyPr wrap="square" lIns="0" rIns="0" tIns="0" bIns="0">
+            <a:spAutoFit/>
+          </a:bodyPr>
+          <a:lstStyle/>
+          <a:p>
+            <a:pPr algn="l">
+              <a:lnSpc>
+                <a:spcPct val="135000"/>
+              </a:lnSpc>
+            </a:pPr>
+            <a:r>
+              <a:rPr sz="1450" b="1">
+                <a:solidFill>
+                  <a:srgbClr val="12151A"/>
+                </a:solidFill>
+                <a:latin typeface="맑은 고딕"/>
+                <a:ea typeface="맑은 고딕"/>
+                <a:cs typeface="맑은 고딕"/>
+              </a:rPr>
+              <a:t>실행 로드맵</a:t>
+            </a:r>
+          </a:p>
+        </p:txBody>
+      </p:sp>
+      <p:sp>
+        <p:nvSpPr>
+          <p:cNvPr id="18" name="Rectangle 17"/>
+          <p:cNvSpPr/>
+          <p:nvPr/>
+        </p:nvSpPr>
+        <p:spPr>
+          <a:xfrm>
+            <a:off x="6510528" y="2468880"/>
+            <a:ext cx="68580" cy="566928"/>
           </a:xfrm>
           <a:prstGeom prst="rect">
             <a:avLst/>
@@ -12046,14 +11881,14 @@
       </p:sp>
       <p:sp>
         <p:nvSpPr>
-          <p:cNvPr id="12" name="TextBox 11"/>
-          <p:cNvSpPr txBox="1"/>
-          <p:nvPr/>
-        </p:nvSpPr>
-        <p:spPr>
-          <a:xfrm>
-            <a:off x="6492240" y="2450592"/>
-            <a:ext cx="2194560" cy="256032"/>
+          <p:cNvPr id="19" name="TextBox 18"/>
+          <p:cNvSpPr txBox="1"/>
+          <p:nvPr/>
+        </p:nvSpPr>
+        <p:spPr>
+          <a:xfrm>
+            <a:off x="6729983" y="2468880"/>
+            <a:ext cx="4754880" cy="256032"/>
           </a:xfrm>
           <a:prstGeom prst="rect">
             <a:avLst/>
@@ -12080,81 +11915,40 @@
                 <a:ea typeface="맑은 고딕"/>
                 <a:cs typeface="맑은 고딕"/>
               </a:rPr>
-              <a:t>복지·보건 담당</a:t>
-            </a:r>
-          </a:p>
-        </p:txBody>
-      </p:sp>
-      <p:sp>
-        <p:nvSpPr>
-          <p:cNvPr id="13" name="TextBox 12"/>
-          <p:cNvSpPr txBox="1"/>
-          <p:nvPr/>
-        </p:nvSpPr>
-        <p:spPr>
-          <a:xfrm>
-            <a:off x="6492240" y="2743200"/>
-            <a:ext cx="4663440" cy="256032"/>
-          </a:xfrm>
-          <a:prstGeom prst="rect">
-            <a:avLst/>
-          </a:prstGeom>
-          <a:noFill/>
-        </p:spPr>
-        <p:txBody>
-          <a:bodyPr wrap="square" lIns="0" rIns="0" tIns="0" bIns="0">
-            <a:spAutoFit/>
-          </a:bodyPr>
-          <a:lstStyle/>
-          <a:p>
-            <a:pPr algn="l">
-              <a:lnSpc>
-                <a:spcPct val="135000"/>
-              </a:lnSpc>
-            </a:pPr>
-            <a:r>
-              <a:rPr sz="1350" b="1">
-                <a:solidFill>
-                  <a:srgbClr val="12151A"/>
-                </a:solidFill>
-                <a:latin typeface="맑은 고딕"/>
-                <a:ea typeface="맑은 고딕"/>
-                <a:cs typeface="맑은 고딕"/>
-              </a:rPr>
-              <a:t>생활시설 위치 검토</a:t>
-            </a:r>
-          </a:p>
-        </p:txBody>
-      </p:sp>
-      <p:sp>
-        <p:nvSpPr>
-          <p:cNvPr id="14" name="TextBox 13"/>
-          <p:cNvSpPr txBox="1"/>
-          <p:nvPr/>
-        </p:nvSpPr>
-        <p:spPr>
-          <a:xfrm>
-            <a:off x="6492240" y="3054096"/>
-            <a:ext cx="4663440" cy="548640"/>
-          </a:xfrm>
-          <a:prstGeom prst="rect">
-            <a:avLst/>
-          </a:prstGeom>
-          <a:noFill/>
-        </p:spPr>
-        <p:txBody>
-          <a:bodyPr wrap="square" lIns="0" rIns="0" tIns="0" bIns="0">
-            <a:spAutoFit/>
-          </a:bodyPr>
-          <a:lstStyle/>
-          <a:p>
-            <a:pPr algn="l">
-              <a:lnSpc>
-                <a:spcPct val="145000"/>
-              </a:lnSpc>
-            </a:pPr>
-            <a:r>
-              <a:rPr sz="1080" b="0">
+              <a:t>1단계 · 즉시</a:t>
+            </a:r>
+          </a:p>
+        </p:txBody>
+      </p:sp>
+      <p:sp>
+        <p:nvSpPr>
+          <p:cNvPr id="20" name="TextBox 19"/>
+          <p:cNvSpPr txBox="1"/>
+          <p:nvPr/>
+        </p:nvSpPr>
+        <p:spPr>
+          <a:xfrm>
+            <a:off x="6729983" y="2743200"/>
+            <a:ext cx="4754880" cy="365760"/>
+          </a:xfrm>
+          <a:prstGeom prst="rect">
+            <a:avLst/>
+          </a:prstGeom>
+          <a:noFill/>
+        </p:spPr>
+        <p:txBody>
+          <a:bodyPr wrap="square" lIns="0" rIns="0" tIns="0" bIns="0">
+            <a:spAutoFit/>
+          </a:bodyPr>
+          <a:lstStyle/>
+          <a:p>
+            <a:pPr algn="l">
+              <a:lnSpc>
+                <a:spcPct val="140000"/>
+              </a:lnSpc>
+            </a:pPr>
+            <a:r>
+              <a:rPr sz="1100" b="0">
                 <a:solidFill>
                   <a:srgbClr val="52514E"/>
                 </a:solidFill>
@@ -12162,55 +11956,30 @@
                 <a:ea typeface="맑은 고딕"/>
                 <a:cs typeface="맑은 고딕"/>
               </a:rPr>
-              <a:t>우선순위표의 좌표를 검토 후보 중 하나로,</a:t>
-            </a:r>
-          </a:p>
-          <a:p>
-            <a:pPr algn="l">
-              <a:lnSpc>
-                <a:spcPct val="145000"/>
-              </a:lnSpc>
-              <a:spcBef>
-                <a:spcPts val="0"/>
-              </a:spcBef>
-            </a:pPr>
-            <a:r>
-              <a:rPr sz="1080" b="0">
-                <a:solidFill>
-                  <a:srgbClr val="52514E"/>
-                </a:solidFill>
-                <a:latin typeface="맑은 고딕"/>
-                <a:ea typeface="맑은 고딕"/>
-                <a:cs typeface="맑은 고딕"/>
-              </a:rPr>
-              <a:t>왜 그 동네인지 설명하실 때 항목별 근거로.</a:t>
-            </a:r>
-          </a:p>
-        </p:txBody>
-      </p:sp>
-      <p:sp>
-        <p:nvSpPr>
-          <p:cNvPr id="15" name="Rounded Rectangle 14"/>
+              <a:t>본 스크립트로 천안시 25개 생활권 기준선 진단 확정</a:t>
+            </a:r>
+          </a:p>
+        </p:txBody>
+      </p:sp>
+      <p:sp>
+        <p:nvSpPr>
+          <p:cNvPr id="21" name="Rectangle 20"/>
           <p:cNvSpPr/>
           <p:nvPr/>
         </p:nvSpPr>
         <p:spPr>
           <a:xfrm>
-            <a:off x="658368" y="3858768"/>
-            <a:ext cx="5257800" cy="1371600"/>
-          </a:xfrm>
-          <a:prstGeom prst="roundRect">
-            <a:avLst>
-              <a:gd name="adj" fmla="val 6000"/>
-            </a:avLst>
+            <a:off x="6510528" y="3218688"/>
+            <a:ext cx="68580" cy="566928"/>
+          </a:xfrm>
+          <a:prstGeom prst="rect">
+            <a:avLst/>
           </a:prstGeom>
           <a:solidFill>
-            <a:srgbClr val="FFFFFF"/>
+            <a:srgbClr val="2A78D6"/>
           </a:solidFill>
-          <a:ln w="12700">
-            <a:solidFill>
-              <a:srgbClr val="E4E7EC"/>
-            </a:solidFill>
+          <a:ln>
+            <a:noFill/>
           </a:ln>
           <a:effectLst/>
         </p:spPr>
@@ -12236,14 +12005,96 @@
       </p:sp>
       <p:sp>
         <p:nvSpPr>
-          <p:cNvPr id="16" name="Rectangle 15"/>
+          <p:cNvPr id="22" name="TextBox 21"/>
+          <p:cNvSpPr txBox="1"/>
+          <p:nvPr/>
+        </p:nvSpPr>
+        <p:spPr>
+          <a:xfrm>
+            <a:off x="6729983" y="3218688"/>
+            <a:ext cx="4754880" cy="256032"/>
+          </a:xfrm>
+          <a:prstGeom prst="rect">
+            <a:avLst/>
+          </a:prstGeom>
+          <a:noFill/>
+        </p:spPr>
+        <p:txBody>
+          <a:bodyPr wrap="square" lIns="0" rIns="0" tIns="0" bIns="0">
+            <a:spAutoFit/>
+          </a:bodyPr>
+          <a:lstStyle/>
+          <a:p>
+            <a:pPr algn="l">
+              <a:lnSpc>
+                <a:spcPct val="135000"/>
+              </a:lnSpc>
+            </a:pPr>
+            <a:r>
+              <a:rPr sz="1250" b="1">
+                <a:solidFill>
+                  <a:srgbClr val="2A78D6"/>
+                </a:solidFill>
+                <a:latin typeface="맑은 고딕"/>
+                <a:ea typeface="맑은 고딕"/>
+                <a:cs typeface="맑은 고딕"/>
+              </a:rPr>
+              <a:t>2단계 · 3개월</a:t>
+            </a:r>
+          </a:p>
+        </p:txBody>
+      </p:sp>
+      <p:sp>
+        <p:nvSpPr>
+          <p:cNvPr id="23" name="TextBox 22"/>
+          <p:cNvSpPr txBox="1"/>
+          <p:nvPr/>
+        </p:nvSpPr>
+        <p:spPr>
+          <a:xfrm>
+            <a:off x="6729983" y="3493008"/>
+            <a:ext cx="4754880" cy="365760"/>
+          </a:xfrm>
+          <a:prstGeom prst="rect">
+            <a:avLst/>
+          </a:prstGeom>
+          <a:noFill/>
+        </p:spPr>
+        <p:txBody>
+          <a:bodyPr wrap="square" lIns="0" rIns="0" tIns="0" bIns="0">
+            <a:spAutoFit/>
+          </a:bodyPr>
+          <a:lstStyle/>
+          <a:p>
+            <a:pPr algn="l">
+              <a:lnSpc>
+                <a:spcPct val="140000"/>
+              </a:lnSpc>
+            </a:pPr>
+            <a:r>
+              <a:rPr sz="1100" b="0">
+                <a:solidFill>
+                  <a:srgbClr val="52514E"/>
+                </a:solidFill>
+                <a:latin typeface="맑은 고딕"/>
+                <a:ea typeface="맑은 고딕"/>
+                <a:cs typeface="맑은 고딕"/>
+              </a:rPr>
+              <a:t>천안시 내부 행정데이터(인허가 원장·건축물대장·복지수급) 연계로 지표 정밀화</a:t>
+            </a:r>
+          </a:p>
+        </p:txBody>
+      </p:sp>
+      <p:sp>
+        <p:nvSpPr>
+          <p:cNvPr id="24" name="Rectangle 23"/>
           <p:cNvSpPr/>
           <p:nvPr/>
         </p:nvSpPr>
         <p:spPr>
           <a:xfrm>
-            <a:off x="658368" y="3858768"/>
-            <a:ext cx="68580" cy="1371600"/>
+            <a:off x="6510528" y="3968496"/>
+            <a:ext cx="68580" cy="566928"/>
           </a:xfrm>
           <a:prstGeom prst="rect">
             <a:avLst/>
@@ -12278,14 +12129,14 @@
       </p:sp>
       <p:sp>
         <p:nvSpPr>
-          <p:cNvPr id="17" name="TextBox 16"/>
-          <p:cNvSpPr txBox="1"/>
-          <p:nvPr/>
-        </p:nvSpPr>
-        <p:spPr>
-          <a:xfrm>
-            <a:off x="914400" y="4023359"/>
-            <a:ext cx="2194560" cy="256032"/>
+          <p:cNvPr id="25" name="TextBox 24"/>
+          <p:cNvSpPr txBox="1"/>
+          <p:nvPr/>
+        </p:nvSpPr>
+        <p:spPr>
+          <a:xfrm>
+            <a:off x="6729983" y="3968496"/>
+            <a:ext cx="4754880" cy="256032"/>
           </a:xfrm>
           <a:prstGeom prst="rect">
             <a:avLst/>
@@ -12312,81 +12163,40 @@
                 <a:ea typeface="맑은 고딕"/>
                 <a:cs typeface="맑은 고딕"/>
               </a:rPr>
-              <a:t>예산 담당</a:t>
-            </a:r>
-          </a:p>
-        </p:txBody>
-      </p:sp>
-      <p:sp>
-        <p:nvSpPr>
-          <p:cNvPr id="18" name="TextBox 17"/>
-          <p:cNvSpPr txBox="1"/>
-          <p:nvPr/>
-        </p:nvSpPr>
-        <p:spPr>
-          <a:xfrm>
-            <a:off x="914400" y="4315968"/>
-            <a:ext cx="4663440" cy="256032"/>
-          </a:xfrm>
-          <a:prstGeom prst="rect">
-            <a:avLst/>
-          </a:prstGeom>
-          <a:noFill/>
-        </p:spPr>
-        <p:txBody>
-          <a:bodyPr wrap="square" lIns="0" rIns="0" tIns="0" bIns="0">
-            <a:spAutoFit/>
-          </a:bodyPr>
-          <a:lstStyle/>
-          <a:p>
-            <a:pPr algn="l">
-              <a:lnSpc>
-                <a:spcPct val="135000"/>
-              </a:lnSpc>
-            </a:pPr>
-            <a:r>
-              <a:rPr sz="1350" b="1">
-                <a:solidFill>
-                  <a:srgbClr val="12151A"/>
-                </a:solidFill>
-                <a:latin typeface="맑은 고딕"/>
-                <a:ea typeface="맑은 고딕"/>
-                <a:cs typeface="맑은 고딕"/>
-              </a:rPr>
-              <a:t>배분 검토 자료</a:t>
-            </a:r>
-          </a:p>
-        </p:txBody>
-      </p:sp>
-      <p:sp>
-        <p:nvSpPr>
-          <p:cNvPr id="19" name="TextBox 18"/>
-          <p:cNvSpPr txBox="1"/>
-          <p:nvPr/>
-        </p:nvSpPr>
-        <p:spPr>
-          <a:xfrm>
-            <a:off x="914400" y="4626864"/>
-            <a:ext cx="4663440" cy="548640"/>
-          </a:xfrm>
-          <a:prstGeom prst="rect">
-            <a:avLst/>
-          </a:prstGeom>
-          <a:noFill/>
-        </p:spPr>
-        <p:txBody>
-          <a:bodyPr wrap="square" lIns="0" rIns="0" tIns="0" bIns="0">
-            <a:spAutoFit/>
-          </a:bodyPr>
-          <a:lstStyle/>
-          <a:p>
-            <a:pPr algn="l">
-              <a:lnSpc>
-                <a:spcPct val="145000"/>
-              </a:lnSpc>
-            </a:pPr>
-            <a:r>
-              <a:rPr sz="1080" b="0">
+              <a:t>3단계 · 6개월</a:t>
+            </a:r>
+          </a:p>
+        </p:txBody>
+      </p:sp>
+      <p:sp>
+        <p:nvSpPr>
+          <p:cNvPr id="26" name="TextBox 25"/>
+          <p:cNvSpPr txBox="1"/>
+          <p:nvPr/>
+        </p:nvSpPr>
+        <p:spPr>
+          <a:xfrm>
+            <a:off x="6729983" y="4242816"/>
+            <a:ext cx="4754880" cy="365760"/>
+          </a:xfrm>
+          <a:prstGeom prst="rect">
+            <a:avLst/>
+          </a:prstGeom>
+          <a:noFill/>
+        </p:spPr>
+        <p:txBody>
+          <a:bodyPr wrap="square" lIns="0" rIns="0" tIns="0" bIns="0">
+            <a:spAutoFit/>
+          </a:bodyPr>
+          <a:lstStyle/>
+          <a:p>
+            <a:pPr algn="l">
+              <a:lnSpc>
+                <a:spcPct val="140000"/>
+              </a:lnSpc>
+            </a:pPr>
+            <a:r>
+              <a:rPr sz="1100" b="0">
                 <a:solidFill>
                   <a:srgbClr val="52514E"/>
                 </a:solidFill>
@@ -12394,55 +12204,30 @@
                 <a:ea typeface="맑은 고딕"/>
                 <a:cs typeface="맑은 고딕"/>
               </a:rPr>
-              <a:t>몇 개소까지면 어느 정도 효과인지 곡선으로 비교하실 때,</a:t>
-            </a:r>
-          </a:p>
-          <a:p>
-            <a:pPr algn="l">
-              <a:lnSpc>
-                <a:spcPct val="145000"/>
-              </a:lnSpc>
-              <a:spcBef>
-                <a:spcPts val="0"/>
-              </a:spcBef>
-            </a:pPr>
-            <a:r>
-              <a:rPr sz="1080" b="0">
-                <a:solidFill>
-                  <a:srgbClr val="52514E"/>
-                </a:solidFill>
-                <a:latin typeface="맑은 고딕"/>
-                <a:ea typeface="맑은 고딕"/>
-                <a:cs typeface="맑은 고딕"/>
-              </a:rPr>
-              <a:t>예산 조정이 필요할 때 판단의 참고로.</a:t>
-            </a:r>
-          </a:p>
-        </p:txBody>
-      </p:sp>
-      <p:sp>
-        <p:nvSpPr>
-          <p:cNvPr id="20" name="Rounded Rectangle 19"/>
+              <a:t>500m 격자 단위로 공간해상도 상향 — 표본 확대로 예측모델 성능 개선</a:t>
+            </a:r>
+          </a:p>
+        </p:txBody>
+      </p:sp>
+      <p:sp>
+        <p:nvSpPr>
+          <p:cNvPr id="27" name="Rectangle 26"/>
           <p:cNvSpPr/>
           <p:nvPr/>
         </p:nvSpPr>
         <p:spPr>
           <a:xfrm>
-            <a:off x="6236207" y="3858768"/>
-            <a:ext cx="5257800" cy="1371600"/>
-          </a:xfrm>
-          <a:prstGeom prst="roundRect">
-            <a:avLst>
-              <a:gd name="adj" fmla="val 6000"/>
-            </a:avLst>
+            <a:off x="6510528" y="4718304"/>
+            <a:ext cx="68580" cy="566928"/>
+          </a:xfrm>
+          <a:prstGeom prst="rect">
+            <a:avLst/>
           </a:prstGeom>
           <a:solidFill>
-            <a:srgbClr val="FFFFFF"/>
+            <a:srgbClr val="2A78D6"/>
           </a:solidFill>
-          <a:ln w="12700">
-            <a:solidFill>
-              <a:srgbClr val="E4E7EC"/>
-            </a:solidFill>
+          <a:ln>
+            <a:noFill/>
           </a:ln>
           <a:effectLst/>
         </p:spPr>
@@ -12468,20 +12253,104 @@
       </p:sp>
       <p:sp>
         <p:nvSpPr>
-          <p:cNvPr id="21" name="Rectangle 20"/>
+          <p:cNvPr id="28" name="TextBox 27"/>
+          <p:cNvSpPr txBox="1"/>
+          <p:nvPr/>
+        </p:nvSpPr>
+        <p:spPr>
+          <a:xfrm>
+            <a:off x="6729983" y="4718304"/>
+            <a:ext cx="4754880" cy="256032"/>
+          </a:xfrm>
+          <a:prstGeom prst="rect">
+            <a:avLst/>
+          </a:prstGeom>
+          <a:noFill/>
+        </p:spPr>
+        <p:txBody>
+          <a:bodyPr wrap="square" lIns="0" rIns="0" tIns="0" bIns="0">
+            <a:spAutoFit/>
+          </a:bodyPr>
+          <a:lstStyle/>
+          <a:p>
+            <a:pPr algn="l">
+              <a:lnSpc>
+                <a:spcPct val="135000"/>
+              </a:lnSpc>
+            </a:pPr>
+            <a:r>
+              <a:rPr sz="1250" b="1">
+                <a:solidFill>
+                  <a:srgbClr val="2A78D6"/>
+                </a:solidFill>
+                <a:latin typeface="맑은 고딕"/>
+                <a:ea typeface="맑은 고딕"/>
+                <a:cs typeface="맑은 고딕"/>
+              </a:rPr>
+              <a:t>4단계 · 1년</a:t>
+            </a:r>
+          </a:p>
+        </p:txBody>
+      </p:sp>
+      <p:sp>
+        <p:nvSpPr>
+          <p:cNvPr id="29" name="TextBox 28"/>
+          <p:cNvSpPr txBox="1"/>
+          <p:nvPr/>
+        </p:nvSpPr>
+        <p:spPr>
+          <a:xfrm>
+            <a:off x="6729983" y="4992624"/>
+            <a:ext cx="4754880" cy="365760"/>
+          </a:xfrm>
+          <a:prstGeom prst="rect">
+            <a:avLst/>
+          </a:prstGeom>
+          <a:noFill/>
+        </p:spPr>
+        <p:txBody>
+          <a:bodyPr wrap="square" lIns="0" rIns="0" tIns="0" bIns="0">
+            <a:spAutoFit/>
+          </a:bodyPr>
+          <a:lstStyle/>
+          <a:p>
+            <a:pPr algn="l">
+              <a:lnSpc>
+                <a:spcPct val="140000"/>
+              </a:lnSpc>
+            </a:pPr>
+            <a:r>
+              <a:rPr sz="1100" b="0">
+                <a:solidFill>
+                  <a:srgbClr val="52514E"/>
+                </a:solidFill>
+                <a:latin typeface="맑은 고딕"/>
+                <a:ea typeface="맑은 고딕"/>
+                <a:cs typeface="맑은 고딕"/>
+              </a:rPr>
+              <a:t>천안시 행정포털 대시보드 내재화, 연 1회 자동 갱신 체계 정착</a:t>
+            </a:r>
+          </a:p>
+        </p:txBody>
+      </p:sp>
+      <p:sp>
+        <p:nvSpPr>
+          <p:cNvPr id="30" name="Rounded Rectangle 29"/>
           <p:cNvSpPr/>
           <p:nvPr/>
         </p:nvSpPr>
         <p:spPr>
           <a:xfrm>
-            <a:off x="6236207" y="3858768"/>
-            <a:ext cx="68580" cy="1371600"/>
-          </a:xfrm>
-          <a:prstGeom prst="rect">
-            <a:avLst/>
+            <a:off x="658368" y="5504688"/>
+            <a:ext cx="10874959" cy="822960"/>
+          </a:xfrm>
+          <a:prstGeom prst="roundRect">
+            <a:avLst>
+              <a:gd name="adj" fmla="val 6000"/>
+            </a:avLst>
           </a:prstGeom>
           <a:solidFill>
-            <a:srgbClr val="4A3AA7"/>
+            <a:srgbClr val="F6F7F9"/>
           </a:solidFill>
           <a:ln>
             <a:noFill/>
@@ -12510,74 +12379,33 @@
       </p:sp>
       <p:sp>
         <p:nvSpPr>
-          <p:cNvPr id="22" name="TextBox 21"/>
-          <p:cNvSpPr txBox="1"/>
-          <p:nvPr/>
-        </p:nvSpPr>
-        <p:spPr>
-          <a:xfrm>
-            <a:off x="6492240" y="4023359"/>
-            <a:ext cx="2194560" cy="256032"/>
-          </a:xfrm>
-          <a:prstGeom prst="rect">
-            <a:avLst/>
-          </a:prstGeom>
-          <a:noFill/>
-        </p:spPr>
-        <p:txBody>
-          <a:bodyPr wrap="square" lIns="0" rIns="0" tIns="0" bIns="0">
-            <a:spAutoFit/>
-          </a:bodyPr>
-          <a:lstStyle/>
-          <a:p>
-            <a:pPr algn="l">
-              <a:lnSpc>
-                <a:spcPct val="135000"/>
-              </a:lnSpc>
-            </a:pPr>
-            <a:r>
-              <a:rPr sz="1250" b="1">
-                <a:solidFill>
-                  <a:srgbClr val="4A3AA7"/>
-                </a:solidFill>
-                <a:latin typeface="맑은 고딕"/>
-                <a:ea typeface="맑은 고딕"/>
-                <a:cs typeface="맑은 고딕"/>
-              </a:rPr>
-              <a:t>기획·평가 담당</a:t>
-            </a:r>
-          </a:p>
-        </p:txBody>
-      </p:sp>
-      <p:sp>
-        <p:nvSpPr>
-          <p:cNvPr id="23" name="TextBox 22"/>
-          <p:cNvSpPr txBox="1"/>
-          <p:nvPr/>
-        </p:nvSpPr>
-        <p:spPr>
-          <a:xfrm>
-            <a:off x="6492240" y="4315968"/>
-            <a:ext cx="4663440" cy="256032"/>
-          </a:xfrm>
-          <a:prstGeom prst="rect">
-            <a:avLst/>
-          </a:prstGeom>
-          <a:noFill/>
-        </p:spPr>
-        <p:txBody>
-          <a:bodyPr wrap="square" lIns="0" rIns="0" tIns="0" bIns="0">
-            <a:spAutoFit/>
-          </a:bodyPr>
-          <a:lstStyle/>
-          <a:p>
-            <a:pPr algn="l">
-              <a:lnSpc>
-                <a:spcPct val="135000"/>
-              </a:lnSpc>
-            </a:pPr>
-            <a:r>
-              <a:rPr sz="1350" b="1">
+          <p:cNvPr id="31" name="TextBox 30"/>
+          <p:cNvSpPr txBox="1"/>
+          <p:nvPr/>
+        </p:nvSpPr>
+        <p:spPr>
+          <a:xfrm>
+            <a:off x="932688" y="5687568"/>
+            <a:ext cx="10515600" cy="502920"/>
+          </a:xfrm>
+          <a:prstGeom prst="rect">
+            <a:avLst/>
+          </a:prstGeom>
+          <a:noFill/>
+        </p:spPr>
+        <p:txBody>
+          <a:bodyPr wrap="square" lIns="0" rIns="0" tIns="0" bIns="0">
+            <a:spAutoFit/>
+          </a:bodyPr>
+          <a:lstStyle/>
+          <a:p>
+            <a:pPr algn="l">
+              <a:lnSpc>
+                <a:spcPct val="150000"/>
+              </a:lnSpc>
+            </a:pPr>
+            <a:r>
+              <a:rPr sz="1200" b="0">
                 <a:solidFill>
                   <a:srgbClr val="12151A"/>
                 </a:solidFill>
@@ -12585,145 +12413,19 @@
                 <a:ea typeface="맑은 고딕"/>
                 <a:cs typeface="맑은 고딕"/>
               </a:rPr>
-              <a:t>시행 이후 확인</a:t>
-            </a:r>
-          </a:p>
-        </p:txBody>
-      </p:sp>
-      <p:sp>
-        <p:nvSpPr>
-          <p:cNvPr id="24" name="TextBox 23"/>
-          <p:cNvSpPr txBox="1"/>
-          <p:nvPr/>
-        </p:nvSpPr>
-        <p:spPr>
-          <a:xfrm>
-            <a:off x="6492240" y="4626864"/>
-            <a:ext cx="4663440" cy="548640"/>
-          </a:xfrm>
-          <a:prstGeom prst="rect">
-            <a:avLst/>
-          </a:prstGeom>
-          <a:noFill/>
-        </p:spPr>
-        <p:txBody>
-          <a:bodyPr wrap="square" lIns="0" rIns="0" tIns="0" bIns="0">
-            <a:spAutoFit/>
-          </a:bodyPr>
-          <a:lstStyle/>
-          <a:p>
-            <a:pPr algn="l">
-              <a:lnSpc>
-                <a:spcPct val="145000"/>
-              </a:lnSpc>
-            </a:pPr>
-            <a:r>
-              <a:rPr sz="1080" b="0">
-                <a:solidFill>
-                  <a:srgbClr val="52514E"/>
-                </a:solidFill>
-                <a:latin typeface="맑은 고딕"/>
-                <a:ea typeface="맑은 고딕"/>
-                <a:cs typeface="맑은 고딕"/>
-              </a:rPr>
-              <a:t>이듬해 같은 스크립트로 지수 변화를 이어 보실 때,</a:t>
-            </a:r>
-          </a:p>
-          <a:p>
-            <a:pPr algn="l">
-              <a:lnSpc>
-                <a:spcPct val="145000"/>
+              <a:t>다른 지역에도 — 공간단위 정의(config.py)만 바꾸면 아산·청주 등에도 같은 방식으로 쓸 수 있습니다.</a:t>
+            </a:r>
+          </a:p>
+          <a:p>
+            <a:pPr algn="l">
+              <a:lnSpc>
+                <a:spcPct val="150000"/>
               </a:lnSpc>
               <a:spcBef>
                 <a:spcPts val="0"/>
               </a:spcBef>
             </a:pPr>
             <a:r>
-              <a:rPr sz="1080" b="0">
-                <a:solidFill>
-                  <a:srgbClr val="52514E"/>
-                </a:solidFill>
-                <a:latin typeface="맑은 고딕"/>
-                <a:ea typeface="맑은 고딕"/>
-                <a:cs typeface="맑은 고딕"/>
-              </a:rPr>
-              <a:t>하신 사업이 수치로도 나아졌는지 확인하실 때.</a:t>
-            </a:r>
-          </a:p>
-        </p:txBody>
-      </p:sp>
-      <p:sp>
-        <p:nvSpPr>
-          <p:cNvPr id="25" name="Rounded Rectangle 24"/>
-          <p:cNvSpPr/>
-          <p:nvPr/>
-        </p:nvSpPr>
-        <p:spPr>
-          <a:xfrm>
-            <a:off x="658368" y="5541264"/>
-            <a:ext cx="10874959" cy="786384"/>
-          </a:xfrm>
-          <a:prstGeom prst="roundRect">
-            <a:avLst>
-              <a:gd name="adj" fmla="val 6000"/>
-            </a:avLst>
-          </a:prstGeom>
-          <a:solidFill>
-            <a:srgbClr val="EFF7F3"/>
-          </a:solidFill>
-          <a:ln>
-            <a:noFill/>
-          </a:ln>
-          <a:effectLst/>
-        </p:spPr>
-        <p:style>
-          <a:lnRef idx="1">
-            <a:schemeClr val="accent1"/>
-          </a:lnRef>
-          <a:fillRef idx="3">
-            <a:schemeClr val="accent1"/>
-          </a:fillRef>
-          <a:effectRef idx="2">
-            <a:schemeClr val="accent1"/>
-          </a:effectRef>
-          <a:fontRef idx="minor">
-            <a:schemeClr val="lt1"/>
-          </a:fontRef>
-        </p:style>
-        <p:txBody>
-          <a:bodyPr rtlCol="0" anchor="ctr"/>
-          <a:lstStyle/>
-          <a:p/>
-        </p:txBody>
-      </p:sp>
-      <p:sp>
-        <p:nvSpPr>
-          <p:cNvPr id="26" name="TextBox 25"/>
-          <p:cNvSpPr txBox="1"/>
-          <p:nvPr/>
-        </p:nvSpPr>
-        <p:spPr>
-          <a:xfrm>
-            <a:off x="932688" y="5705856"/>
-            <a:ext cx="10515600" cy="502920"/>
-          </a:xfrm>
-          <a:prstGeom prst="rect">
-            <a:avLst/>
-          </a:prstGeom>
-          <a:noFill/>
-        </p:spPr>
-        <p:txBody>
-          <a:bodyPr wrap="square" lIns="0" rIns="0" tIns="0" bIns="0">
-            <a:spAutoFit/>
-          </a:bodyPr>
-          <a:lstStyle/>
-          <a:p>
-            <a:pPr algn="l">
-              <a:lnSpc>
-                <a:spcPct val="150000"/>
-              </a:lnSpc>
-            </a:pPr>
-            <a:r>
               <a:rPr sz="1200" b="0">
                 <a:solidFill>
                   <a:srgbClr val="12151A"/>
@@ -12732,35 +12434,14 @@
                 <a:ea typeface="맑은 고딕"/>
                 <a:cs typeface="맑은 고딕"/>
               </a:rPr>
-              <a:t>쓰시는 방법 — 연 1회 공공데이터를 새로 받아 스크립트를 실행하시면 모든 자료가 다시 만들어집니다.</a:t>
-            </a:r>
-          </a:p>
-          <a:p>
-            <a:pPr algn="l">
-              <a:lnSpc>
-                <a:spcPct val="150000"/>
-              </a:lnSpc>
-              <a:spcBef>
-                <a:spcPts val="0"/>
-              </a:spcBef>
-            </a:pPr>
-            <a:r>
-              <a:rPr sz="1200" b="0">
-                <a:solidFill>
-                  <a:srgbClr val="12151A"/>
-                </a:solidFill>
-                <a:latin typeface="맑은 고딕"/>
-                <a:ea typeface="맑은 고딕"/>
-                <a:cs typeface="맑은 고딕"/>
-              </a:rPr>
-              <a:t>별도 시스템이나 데이터 구매 없이, 담당자 한 분이 반나절이면 그 해 자료를 준비하실 수 있습니다.</a:t>
-            </a:r>
-          </a:p>
-        </p:txBody>
-      </p:sp>
-      <p:sp>
-        <p:nvSpPr>
-          <p:cNvPr id="27" name="TextBox 26"/>
+              <a:t>원도심 공동화는 천안만의 일이 아니어서, 도움이 된다면 충남 시군이 함께 쓰는 자료가 되어도 좋겠습니다.</a:t>
+            </a:r>
+          </a:p>
+        </p:txBody>
+      </p:sp>
+      <p:sp>
+        <p:nvSpPr>
+          <p:cNvPr id="32" name="TextBox 31"/>
           <p:cNvSpPr txBox="1"/>
           <p:nvPr/>
         </p:nvSpPr>
@@ -12801,7 +12482,7 @@
       </p:sp>
       <p:sp>
         <p:nvSpPr>
-          <p:cNvPr id="28" name="TextBox 27"/>
+          <p:cNvPr id="33" name="TextBox 32"/>
           <p:cNvSpPr txBox="1"/>
           <p:nvPr/>
         </p:nvSpPr>
@@ -12894,7 +12575,7 @@
                 <a:ea typeface="맑은 고딕"/>
                 <a:cs typeface="맑은 고딕"/>
               </a:rPr>
-              <a:t>IMPACT</a:t>
+              <a:t>LIMITATION</a:t>
             </a:r>
           </a:p>
         </p:txBody>
@@ -12935,7 +12616,7 @@
                 <a:ea typeface="맑은 고딕"/>
                 <a:cs typeface="맑은 고딕"/>
               </a:rPr>
-              <a:t>기대효과와 실행 로드맵</a:t>
+              <a:t>저희가 아직 못 한 부분을 먼저 말씀드립니다</a:t>
             </a:r>
           </a:p>
         </p:txBody>
@@ -12948,58 +12629,62 @@
         </p:nvSpPr>
         <p:spPr>
           <a:xfrm>
-            <a:off x="658368" y="2084831"/>
-            <a:ext cx="5486400" cy="274320"/>
-          </a:xfrm>
-          <a:prstGeom prst="rect">
-            <a:avLst/>
-          </a:prstGeom>
-          <a:noFill/>
-        </p:spPr>
-        <p:txBody>
-          <a:bodyPr wrap="square" lIns="0" rIns="0" tIns="0" bIns="0">
-            <a:spAutoFit/>
-          </a:bodyPr>
-          <a:lstStyle/>
-          <a:p>
-            <a:pPr algn="l">
-              <a:lnSpc>
-                <a:spcPct val="135000"/>
-              </a:lnSpc>
-            </a:pPr>
-            <a:r>
-              <a:rPr sz="1450" b="1">
-                <a:solidFill>
-                  <a:srgbClr val="12151A"/>
-                </a:solidFill>
-                <a:latin typeface="맑은 고딕"/>
-                <a:ea typeface="맑은 고딕"/>
-                <a:cs typeface="맑은 고딕"/>
-              </a:rPr>
-              <a:t>기대효과</a:t>
-            </a:r>
-          </a:p>
-        </p:txBody>
-      </p:sp>
-      <p:sp>
-        <p:nvSpPr>
-          <p:cNvPr id="5" name="Rectangle 4"/>
+            <a:off x="658368" y="1517904"/>
+            <a:ext cx="10874959" cy="411480"/>
+          </a:xfrm>
+          <a:prstGeom prst="rect">
+            <a:avLst/>
+          </a:prstGeom>
+          <a:noFill/>
+        </p:spPr>
+        <p:txBody>
+          <a:bodyPr wrap="square" lIns="0" rIns="0" tIns="0" bIns="0">
+            <a:spAutoFit/>
+          </a:bodyPr>
+          <a:lstStyle/>
+          <a:p>
+            <a:pPr algn="l">
+              <a:lnSpc>
+                <a:spcPct val="145000"/>
+              </a:lnSpc>
+            </a:pPr>
+            <a:r>
+              <a:rPr sz="1350" b="0">
+                <a:solidFill>
+                  <a:srgbClr val="52514E"/>
+                </a:solidFill>
+                <a:latin typeface="맑은 고딕"/>
+                <a:ea typeface="맑은 고딕"/>
+                <a:cs typeface="맑은 고딕"/>
+              </a:rPr>
+              <a:t>행정에 쓰이는 자료인 만큼, 어디까지 믿고 쓰실 수 있는지 분명히 알려드리는 것이 도리라고 생각했습니다.</a:t>
+            </a:r>
+          </a:p>
+        </p:txBody>
+      </p:sp>
+      <p:sp>
+        <p:nvSpPr>
+          <p:cNvPr id="5" name="Rounded Rectangle 4"/>
           <p:cNvSpPr/>
           <p:nvPr/>
         </p:nvSpPr>
         <p:spPr>
           <a:xfrm>
-            <a:off x="658368" y="2468880"/>
-            <a:ext cx="68580" cy="566928"/>
-          </a:xfrm>
-          <a:prstGeom prst="rect">
-            <a:avLst/>
+            <a:off x="658368" y="2286000"/>
+            <a:ext cx="10874959" cy="896112"/>
+          </a:xfrm>
+          <a:prstGeom prst="roundRect">
+            <a:avLst>
+              <a:gd name="adj" fmla="val 6000"/>
+            </a:avLst>
           </a:prstGeom>
           <a:solidFill>
-            <a:srgbClr val="2A78D6"/>
+            <a:srgbClr val="FFFFFF"/>
           </a:solidFill>
-          <a:ln>
-            <a:noFill/>
+          <a:ln w="12700">
+            <a:solidFill>
+              <a:srgbClr val="E4E7EC"/>
+            </a:solidFill>
           </a:ln>
           <a:effectLst/>
         </p:spPr>
@@ -13025,757 +12710,14 @@
       </p:sp>
       <p:sp>
         <p:nvSpPr>
-          <p:cNvPr id="6" name="TextBox 5"/>
-          <p:cNvSpPr txBox="1"/>
-          <p:nvPr/>
-        </p:nvSpPr>
-        <p:spPr>
-          <a:xfrm>
-            <a:off x="877824" y="2468880"/>
-            <a:ext cx="5120640" cy="256032"/>
-          </a:xfrm>
-          <a:prstGeom prst="rect">
-            <a:avLst/>
-          </a:prstGeom>
-          <a:noFill/>
-        </p:spPr>
-        <p:txBody>
-          <a:bodyPr wrap="square" lIns="0" rIns="0" tIns="0" bIns="0">
-            <a:spAutoFit/>
-          </a:bodyPr>
-          <a:lstStyle/>
-          <a:p>
-            <a:pPr algn="l">
-              <a:lnSpc>
-                <a:spcPct val="135000"/>
-              </a:lnSpc>
-            </a:pPr>
-            <a:r>
-              <a:rPr sz="1250" b="1">
-                <a:solidFill>
-                  <a:srgbClr val="12151A"/>
-                </a:solidFill>
-                <a:latin typeface="맑은 고딕"/>
-                <a:ea typeface="맑은 고딕"/>
-                <a:cs typeface="맑은 고딕"/>
-              </a:rPr>
-              <a:t>시민께 닿는 범위</a:t>
-            </a:r>
-          </a:p>
-        </p:txBody>
-      </p:sp>
-      <p:sp>
-        <p:nvSpPr>
-          <p:cNvPr id="7" name="TextBox 6"/>
-          <p:cNvSpPr txBox="1"/>
-          <p:nvPr/>
-        </p:nvSpPr>
-        <p:spPr>
-          <a:xfrm>
-            <a:off x="877824" y="2743200"/>
-            <a:ext cx="5120640" cy="365760"/>
-          </a:xfrm>
-          <a:prstGeom prst="rect">
-            <a:avLst/>
-          </a:prstGeom>
-          <a:noFill/>
-        </p:spPr>
-        <p:txBody>
-          <a:bodyPr wrap="square" lIns="0" rIns="0" tIns="0" bIns="0">
-            <a:spAutoFit/>
-          </a:bodyPr>
-          <a:lstStyle/>
-          <a:p>
-            <a:pPr algn="l">
-              <a:lnSpc>
-                <a:spcPct val="140000"/>
-              </a:lnSpc>
-            </a:pPr>
-            <a:r>
-              <a:rPr sz="1100" b="0">
-                <a:solidFill>
-                  <a:srgbClr val="52514E"/>
-                </a:solidFill>
-                <a:latin typeface="맑은 고딕"/>
-                <a:ea typeface="맑은 고딕"/>
-                <a:cs typeface="맑은 고딕"/>
-              </a:rPr>
-              <a:t>효과가 큰 곳부터 살펴보면, 같은 예산으로도 더 많은 분께 닿을 수 있습니다</a:t>
-            </a:r>
-          </a:p>
-        </p:txBody>
-      </p:sp>
-      <p:sp>
-        <p:nvSpPr>
-          <p:cNvPr id="8" name="Rectangle 7"/>
+          <p:cNvPr id="6" name="Rectangle 5"/>
           <p:cNvSpPr/>
           <p:nvPr/>
         </p:nvSpPr>
         <p:spPr>
           <a:xfrm>
-            <a:off x="658368" y="3218688"/>
-            <a:ext cx="68580" cy="566928"/>
-          </a:xfrm>
-          <a:prstGeom prst="rect">
-            <a:avLst/>
-          </a:prstGeom>
-          <a:solidFill>
-            <a:srgbClr val="2A78D6"/>
-          </a:solidFill>
-          <a:ln>
-            <a:noFill/>
-          </a:ln>
-          <a:effectLst/>
-        </p:spPr>
-        <p:style>
-          <a:lnRef idx="1">
-            <a:schemeClr val="accent1"/>
-          </a:lnRef>
-          <a:fillRef idx="3">
-            <a:schemeClr val="accent1"/>
-          </a:fillRef>
-          <a:effectRef idx="2">
-            <a:schemeClr val="accent1"/>
-          </a:effectRef>
-          <a:fontRef idx="minor">
-            <a:schemeClr val="lt1"/>
-          </a:fontRef>
-        </p:style>
-        <p:txBody>
-          <a:bodyPr rtlCol="0" anchor="ctr"/>
-          <a:lstStyle/>
-          <a:p/>
-        </p:txBody>
-      </p:sp>
-      <p:sp>
-        <p:nvSpPr>
-          <p:cNvPr id="9" name="TextBox 8"/>
-          <p:cNvSpPr txBox="1"/>
-          <p:nvPr/>
-        </p:nvSpPr>
-        <p:spPr>
-          <a:xfrm>
-            <a:off x="877824" y="3218688"/>
-            <a:ext cx="5120640" cy="256032"/>
-          </a:xfrm>
-          <a:prstGeom prst="rect">
-            <a:avLst/>
-          </a:prstGeom>
-          <a:noFill/>
-        </p:spPr>
-        <p:txBody>
-          <a:bodyPr wrap="square" lIns="0" rIns="0" tIns="0" bIns="0">
-            <a:spAutoFit/>
-          </a:bodyPr>
-          <a:lstStyle/>
-          <a:p>
-            <a:pPr algn="l">
-              <a:lnSpc>
-                <a:spcPct val="135000"/>
-              </a:lnSpc>
-            </a:pPr>
-            <a:r>
-              <a:rPr sz="1250" b="1">
-                <a:solidFill>
-                  <a:srgbClr val="12151A"/>
-                </a:solidFill>
-                <a:latin typeface="맑은 고딕"/>
-                <a:ea typeface="맑은 고딕"/>
-                <a:cs typeface="맑은 고딕"/>
-              </a:rPr>
-              <a:t>살펴보는 시점</a:t>
-            </a:r>
-          </a:p>
-        </p:txBody>
-      </p:sp>
-      <p:sp>
-        <p:nvSpPr>
-          <p:cNvPr id="10" name="TextBox 9"/>
-          <p:cNvSpPr txBox="1"/>
-          <p:nvPr/>
-        </p:nvSpPr>
-        <p:spPr>
-          <a:xfrm>
-            <a:off x="877824" y="3493008"/>
-            <a:ext cx="5120640" cy="365760"/>
-          </a:xfrm>
-          <a:prstGeom prst="rect">
-            <a:avLst/>
-          </a:prstGeom>
-          <a:noFill/>
-        </p:spPr>
-        <p:txBody>
-          <a:bodyPr wrap="square" lIns="0" rIns="0" tIns="0" bIns="0">
-            <a:spAutoFit/>
-          </a:bodyPr>
-          <a:lstStyle/>
-          <a:p>
-            <a:pPr algn="l">
-              <a:lnSpc>
-                <a:spcPct val="140000"/>
-              </a:lnSpc>
-            </a:pPr>
-            <a:r>
-              <a:rPr sz="1100" b="0">
-                <a:solidFill>
-                  <a:srgbClr val="52514E"/>
-                </a:solidFill>
-                <a:latin typeface="맑은 고딕"/>
-                <a:ea typeface="맑은 고딕"/>
-                <a:cs typeface="맑은 고딕"/>
-              </a:rPr>
-              <a:t>어려워진 뒤가 아니라, 3년 앞을 미리 짚어볼 수 있습니다</a:t>
-            </a:r>
-          </a:p>
-        </p:txBody>
-      </p:sp>
-      <p:sp>
-        <p:nvSpPr>
-          <p:cNvPr id="11" name="Rectangle 10"/>
-          <p:cNvSpPr/>
-          <p:nvPr/>
-        </p:nvSpPr>
-        <p:spPr>
-          <a:xfrm>
-            <a:off x="658368" y="3968496"/>
-            <a:ext cx="68580" cy="566928"/>
-          </a:xfrm>
-          <a:prstGeom prst="rect">
-            <a:avLst/>
-          </a:prstGeom>
-          <a:solidFill>
-            <a:srgbClr val="2A78D6"/>
-          </a:solidFill>
-          <a:ln>
-            <a:noFill/>
-          </a:ln>
-          <a:effectLst/>
-        </p:spPr>
-        <p:style>
-          <a:lnRef idx="1">
-            <a:schemeClr val="accent1"/>
-          </a:lnRef>
-          <a:fillRef idx="3">
-            <a:schemeClr val="accent1"/>
-          </a:fillRef>
-          <a:effectRef idx="2">
-            <a:schemeClr val="accent1"/>
-          </a:effectRef>
-          <a:fontRef idx="minor">
-            <a:schemeClr val="lt1"/>
-          </a:fontRef>
-        </p:style>
-        <p:txBody>
-          <a:bodyPr rtlCol="0" anchor="ctr"/>
-          <a:lstStyle/>
-          <a:p/>
-        </p:txBody>
-      </p:sp>
-      <p:sp>
-        <p:nvSpPr>
-          <p:cNvPr id="12" name="TextBox 11"/>
-          <p:cNvSpPr txBox="1"/>
-          <p:nvPr/>
-        </p:nvSpPr>
-        <p:spPr>
-          <a:xfrm>
-            <a:off x="877824" y="3968496"/>
-            <a:ext cx="5120640" cy="256032"/>
-          </a:xfrm>
-          <a:prstGeom prst="rect">
-            <a:avLst/>
-          </a:prstGeom>
-          <a:noFill/>
-        </p:spPr>
-        <p:txBody>
-          <a:bodyPr wrap="square" lIns="0" rIns="0" tIns="0" bIns="0">
-            <a:spAutoFit/>
-          </a:bodyPr>
-          <a:lstStyle/>
-          <a:p>
-            <a:pPr algn="l">
-              <a:lnSpc>
-                <a:spcPct val="135000"/>
-              </a:lnSpc>
-            </a:pPr>
-            <a:r>
-              <a:rPr sz="1250" b="1">
-                <a:solidFill>
-                  <a:srgbClr val="12151A"/>
-                </a:solidFill>
-                <a:latin typeface="맑은 고딕"/>
-                <a:ea typeface="맑은 고딕"/>
-                <a:cs typeface="맑은 고딕"/>
-              </a:rPr>
-              <a:t>설명하실 때</a:t>
-            </a:r>
-          </a:p>
-        </p:txBody>
-      </p:sp>
-      <p:sp>
-        <p:nvSpPr>
-          <p:cNvPr id="13" name="TextBox 12"/>
-          <p:cNvSpPr txBox="1"/>
-          <p:nvPr/>
-        </p:nvSpPr>
-        <p:spPr>
-          <a:xfrm>
-            <a:off x="877824" y="4242816"/>
-            <a:ext cx="5120640" cy="365760"/>
-          </a:xfrm>
-          <a:prstGeom prst="rect">
-            <a:avLst/>
-          </a:prstGeom>
-          <a:noFill/>
-        </p:spPr>
-        <p:txBody>
-          <a:bodyPr wrap="square" lIns="0" rIns="0" tIns="0" bIns="0">
-            <a:spAutoFit/>
-          </a:bodyPr>
-          <a:lstStyle/>
-          <a:p>
-            <a:pPr algn="l">
-              <a:lnSpc>
-                <a:spcPct val="140000"/>
-              </a:lnSpc>
-            </a:pPr>
-            <a:r>
-              <a:rPr sz="1100" b="0">
-                <a:solidFill>
-                  <a:srgbClr val="52514E"/>
-                </a:solidFill>
-                <a:latin typeface="맑은 고딕"/>
-                <a:ea typeface="맑은 고딕"/>
-                <a:cs typeface="맑은 고딕"/>
-              </a:rPr>
-              <a:t>판단 근거를 항목별 수치로 정리해 드려 설명 부담을 조금 덜어드립니다</a:t>
-            </a:r>
-          </a:p>
-        </p:txBody>
-      </p:sp>
-      <p:sp>
-        <p:nvSpPr>
-          <p:cNvPr id="14" name="Rectangle 13"/>
-          <p:cNvSpPr/>
-          <p:nvPr/>
-        </p:nvSpPr>
-        <p:spPr>
-          <a:xfrm>
-            <a:off x="658368" y="4718304"/>
-            <a:ext cx="68580" cy="566928"/>
-          </a:xfrm>
-          <a:prstGeom prst="rect">
-            <a:avLst/>
-          </a:prstGeom>
-          <a:solidFill>
-            <a:srgbClr val="2A78D6"/>
-          </a:solidFill>
-          <a:ln>
-            <a:noFill/>
-          </a:ln>
-          <a:effectLst/>
-        </p:spPr>
-        <p:style>
-          <a:lnRef idx="1">
-            <a:schemeClr val="accent1"/>
-          </a:lnRef>
-          <a:fillRef idx="3">
-            <a:schemeClr val="accent1"/>
-          </a:fillRef>
-          <a:effectRef idx="2">
-            <a:schemeClr val="accent1"/>
-          </a:effectRef>
-          <a:fontRef idx="minor">
-            <a:schemeClr val="lt1"/>
-          </a:fontRef>
-        </p:style>
-        <p:txBody>
-          <a:bodyPr rtlCol="0" anchor="ctr"/>
-          <a:lstStyle/>
-          <a:p/>
-        </p:txBody>
-      </p:sp>
-      <p:sp>
-        <p:nvSpPr>
-          <p:cNvPr id="15" name="TextBox 14"/>
-          <p:cNvSpPr txBox="1"/>
-          <p:nvPr/>
-        </p:nvSpPr>
-        <p:spPr>
-          <a:xfrm>
-            <a:off x="877824" y="4718304"/>
-            <a:ext cx="5120640" cy="256032"/>
-          </a:xfrm>
-          <a:prstGeom prst="rect">
-            <a:avLst/>
-          </a:prstGeom>
-          <a:noFill/>
-        </p:spPr>
-        <p:txBody>
-          <a:bodyPr wrap="square" lIns="0" rIns="0" tIns="0" bIns="0">
-            <a:spAutoFit/>
-          </a:bodyPr>
-          <a:lstStyle/>
-          <a:p>
-            <a:pPr algn="l">
-              <a:lnSpc>
-                <a:spcPct val="135000"/>
-              </a:lnSpc>
-            </a:pPr>
-            <a:r>
-              <a:rPr sz="1250" b="1">
-                <a:solidFill>
-                  <a:srgbClr val="12151A"/>
-                </a:solidFill>
-                <a:latin typeface="맑은 고딕"/>
-                <a:ea typeface="맑은 고딕"/>
-                <a:cs typeface="맑은 고딕"/>
-              </a:rPr>
-              <a:t>드는 비용</a:t>
-            </a:r>
-          </a:p>
-        </p:txBody>
-      </p:sp>
-      <p:sp>
-        <p:nvSpPr>
-          <p:cNvPr id="16" name="TextBox 15"/>
-          <p:cNvSpPr txBox="1"/>
-          <p:nvPr/>
-        </p:nvSpPr>
-        <p:spPr>
-          <a:xfrm>
-            <a:off x="877824" y="4992624"/>
-            <a:ext cx="5120640" cy="365760"/>
-          </a:xfrm>
-          <a:prstGeom prst="rect">
-            <a:avLst/>
-          </a:prstGeom>
-          <a:noFill/>
-        </p:spPr>
-        <p:txBody>
-          <a:bodyPr wrap="square" lIns="0" rIns="0" tIns="0" bIns="0">
-            <a:spAutoFit/>
-          </a:bodyPr>
-          <a:lstStyle/>
-          <a:p>
-            <a:pPr algn="l">
-              <a:lnSpc>
-                <a:spcPct val="140000"/>
-              </a:lnSpc>
-            </a:pPr>
-            <a:r>
-              <a:rPr sz="1100" b="0">
-                <a:solidFill>
-                  <a:srgbClr val="52514E"/>
-                </a:solidFill>
-                <a:latin typeface="맑은 고딕"/>
-                <a:ea typeface="맑은 고딕"/>
-                <a:cs typeface="맑은 고딕"/>
-              </a:rPr>
-              <a:t>데이터 구매나 시스템 없이, 스크립트 재실행만으로 매년 갱신됩니다</a:t>
-            </a:r>
-          </a:p>
-        </p:txBody>
-      </p:sp>
-      <p:sp>
-        <p:nvSpPr>
-          <p:cNvPr id="17" name="TextBox 16"/>
-          <p:cNvSpPr txBox="1"/>
-          <p:nvPr/>
-        </p:nvSpPr>
-        <p:spPr>
-          <a:xfrm>
-            <a:off x="6510528" y="2084831"/>
-            <a:ext cx="5029200" cy="274320"/>
-          </a:xfrm>
-          <a:prstGeom prst="rect">
-            <a:avLst/>
-          </a:prstGeom>
-          <a:noFill/>
-        </p:spPr>
-        <p:txBody>
-          <a:bodyPr wrap="square" lIns="0" rIns="0" tIns="0" bIns="0">
-            <a:spAutoFit/>
-          </a:bodyPr>
-          <a:lstStyle/>
-          <a:p>
-            <a:pPr algn="l">
-              <a:lnSpc>
-                <a:spcPct val="135000"/>
-              </a:lnSpc>
-            </a:pPr>
-            <a:r>
-              <a:rPr sz="1450" b="1">
-                <a:solidFill>
-                  <a:srgbClr val="12151A"/>
-                </a:solidFill>
-                <a:latin typeface="맑은 고딕"/>
-                <a:ea typeface="맑은 고딕"/>
-                <a:cs typeface="맑은 고딕"/>
-              </a:rPr>
-              <a:t>실행 로드맵</a:t>
-            </a:r>
-          </a:p>
-        </p:txBody>
-      </p:sp>
-      <p:sp>
-        <p:nvSpPr>
-          <p:cNvPr id="18" name="Rectangle 17"/>
-          <p:cNvSpPr/>
-          <p:nvPr/>
-        </p:nvSpPr>
-        <p:spPr>
-          <a:xfrm>
-            <a:off x="6510528" y="2468880"/>
-            <a:ext cx="68580" cy="566928"/>
-          </a:xfrm>
-          <a:prstGeom prst="rect">
-            <a:avLst/>
-          </a:prstGeom>
-          <a:solidFill>
-            <a:srgbClr val="1BAF7A"/>
-          </a:solidFill>
-          <a:ln>
-            <a:noFill/>
-          </a:ln>
-          <a:effectLst/>
-        </p:spPr>
-        <p:style>
-          <a:lnRef idx="1">
-            <a:schemeClr val="accent1"/>
-          </a:lnRef>
-          <a:fillRef idx="3">
-            <a:schemeClr val="accent1"/>
-          </a:fillRef>
-          <a:effectRef idx="2">
-            <a:schemeClr val="accent1"/>
-          </a:effectRef>
-          <a:fontRef idx="minor">
-            <a:schemeClr val="lt1"/>
-          </a:fontRef>
-        </p:style>
-        <p:txBody>
-          <a:bodyPr rtlCol="0" anchor="ctr"/>
-          <a:lstStyle/>
-          <a:p/>
-        </p:txBody>
-      </p:sp>
-      <p:sp>
-        <p:nvSpPr>
-          <p:cNvPr id="19" name="TextBox 18"/>
-          <p:cNvSpPr txBox="1"/>
-          <p:nvPr/>
-        </p:nvSpPr>
-        <p:spPr>
-          <a:xfrm>
-            <a:off x="6729983" y="2468880"/>
-            <a:ext cx="4754880" cy="256032"/>
-          </a:xfrm>
-          <a:prstGeom prst="rect">
-            <a:avLst/>
-          </a:prstGeom>
-          <a:noFill/>
-        </p:spPr>
-        <p:txBody>
-          <a:bodyPr wrap="square" lIns="0" rIns="0" tIns="0" bIns="0">
-            <a:spAutoFit/>
-          </a:bodyPr>
-          <a:lstStyle/>
-          <a:p>
-            <a:pPr algn="l">
-              <a:lnSpc>
-                <a:spcPct val="135000"/>
-              </a:lnSpc>
-            </a:pPr>
-            <a:r>
-              <a:rPr sz="1250" b="1">
-                <a:solidFill>
-                  <a:srgbClr val="1BAF7A"/>
-                </a:solidFill>
-                <a:latin typeface="맑은 고딕"/>
-                <a:ea typeface="맑은 고딕"/>
-                <a:cs typeface="맑은 고딕"/>
-              </a:rPr>
-              <a:t>1단계 · 즉시</a:t>
-            </a:r>
-          </a:p>
-        </p:txBody>
-      </p:sp>
-      <p:sp>
-        <p:nvSpPr>
-          <p:cNvPr id="20" name="TextBox 19"/>
-          <p:cNvSpPr txBox="1"/>
-          <p:nvPr/>
-        </p:nvSpPr>
-        <p:spPr>
-          <a:xfrm>
-            <a:off x="6729983" y="2743200"/>
-            <a:ext cx="4754880" cy="365760"/>
-          </a:xfrm>
-          <a:prstGeom prst="rect">
-            <a:avLst/>
-          </a:prstGeom>
-          <a:noFill/>
-        </p:spPr>
-        <p:txBody>
-          <a:bodyPr wrap="square" lIns="0" rIns="0" tIns="0" bIns="0">
-            <a:spAutoFit/>
-          </a:bodyPr>
-          <a:lstStyle/>
-          <a:p>
-            <a:pPr algn="l">
-              <a:lnSpc>
-                <a:spcPct val="140000"/>
-              </a:lnSpc>
-            </a:pPr>
-            <a:r>
-              <a:rPr sz="1100" b="0">
-                <a:solidFill>
-                  <a:srgbClr val="52514E"/>
-                </a:solidFill>
-                <a:latin typeface="맑은 고딕"/>
-                <a:ea typeface="맑은 고딕"/>
-                <a:cs typeface="맑은 고딕"/>
-              </a:rPr>
-              <a:t>본 스크립트로 천안시 25개 생활권 기준선 진단 확정</a:t>
-            </a:r>
-          </a:p>
-        </p:txBody>
-      </p:sp>
-      <p:sp>
-        <p:nvSpPr>
-          <p:cNvPr id="21" name="Rectangle 20"/>
-          <p:cNvSpPr/>
-          <p:nvPr/>
-        </p:nvSpPr>
-        <p:spPr>
-          <a:xfrm>
-            <a:off x="6510528" y="3218688"/>
-            <a:ext cx="68580" cy="566928"/>
-          </a:xfrm>
-          <a:prstGeom prst="rect">
-            <a:avLst/>
-          </a:prstGeom>
-          <a:solidFill>
-            <a:srgbClr val="2A78D6"/>
-          </a:solidFill>
-          <a:ln>
-            <a:noFill/>
-          </a:ln>
-          <a:effectLst/>
-        </p:spPr>
-        <p:style>
-          <a:lnRef idx="1">
-            <a:schemeClr val="accent1"/>
-          </a:lnRef>
-          <a:fillRef idx="3">
-            <a:schemeClr val="accent1"/>
-          </a:fillRef>
-          <a:effectRef idx="2">
-            <a:schemeClr val="accent1"/>
-          </a:effectRef>
-          <a:fontRef idx="minor">
-            <a:schemeClr val="lt1"/>
-          </a:fontRef>
-        </p:style>
-        <p:txBody>
-          <a:bodyPr rtlCol="0" anchor="ctr"/>
-          <a:lstStyle/>
-          <a:p/>
-        </p:txBody>
-      </p:sp>
-      <p:sp>
-        <p:nvSpPr>
-          <p:cNvPr id="22" name="TextBox 21"/>
-          <p:cNvSpPr txBox="1"/>
-          <p:nvPr/>
-        </p:nvSpPr>
-        <p:spPr>
-          <a:xfrm>
-            <a:off x="6729983" y="3218688"/>
-            <a:ext cx="4754880" cy="256032"/>
-          </a:xfrm>
-          <a:prstGeom prst="rect">
-            <a:avLst/>
-          </a:prstGeom>
-          <a:noFill/>
-        </p:spPr>
-        <p:txBody>
-          <a:bodyPr wrap="square" lIns="0" rIns="0" tIns="0" bIns="0">
-            <a:spAutoFit/>
-          </a:bodyPr>
-          <a:lstStyle/>
-          <a:p>
-            <a:pPr algn="l">
-              <a:lnSpc>
-                <a:spcPct val="135000"/>
-              </a:lnSpc>
-            </a:pPr>
-            <a:r>
-              <a:rPr sz="1250" b="1">
-                <a:solidFill>
-                  <a:srgbClr val="2A78D6"/>
-                </a:solidFill>
-                <a:latin typeface="맑은 고딕"/>
-                <a:ea typeface="맑은 고딕"/>
-                <a:cs typeface="맑은 고딕"/>
-              </a:rPr>
-              <a:t>2단계 · 3개월</a:t>
-            </a:r>
-          </a:p>
-        </p:txBody>
-      </p:sp>
-      <p:sp>
-        <p:nvSpPr>
-          <p:cNvPr id="23" name="TextBox 22"/>
-          <p:cNvSpPr txBox="1"/>
-          <p:nvPr/>
-        </p:nvSpPr>
-        <p:spPr>
-          <a:xfrm>
-            <a:off x="6729983" y="3493008"/>
-            <a:ext cx="4754880" cy="365760"/>
-          </a:xfrm>
-          <a:prstGeom prst="rect">
-            <a:avLst/>
-          </a:prstGeom>
-          <a:noFill/>
-        </p:spPr>
-        <p:txBody>
-          <a:bodyPr wrap="square" lIns="0" rIns="0" tIns="0" bIns="0">
-            <a:spAutoFit/>
-          </a:bodyPr>
-          <a:lstStyle/>
-          <a:p>
-            <a:pPr algn="l">
-              <a:lnSpc>
-                <a:spcPct val="140000"/>
-              </a:lnSpc>
-            </a:pPr>
-            <a:r>
-              <a:rPr sz="1100" b="0">
-                <a:solidFill>
-                  <a:srgbClr val="52514E"/>
-                </a:solidFill>
-                <a:latin typeface="맑은 고딕"/>
-                <a:ea typeface="맑은 고딕"/>
-                <a:cs typeface="맑은 고딕"/>
-              </a:rPr>
-              <a:t>천안시 내부 행정데이터(인허가 원장·건축물대장·복지수급) 연계로 지표 정밀화</a:t>
-            </a:r>
-          </a:p>
-        </p:txBody>
-      </p:sp>
-      <p:sp>
-        <p:nvSpPr>
-          <p:cNvPr id="24" name="Rectangle 23"/>
-          <p:cNvSpPr/>
-          <p:nvPr/>
-        </p:nvSpPr>
-        <p:spPr>
-          <a:xfrm>
-            <a:off x="6510528" y="3968496"/>
-            <a:ext cx="68580" cy="566928"/>
+            <a:off x="658368" y="2286000"/>
+            <a:ext cx="68580" cy="896112"/>
           </a:xfrm>
           <a:prstGeom prst="rect">
             <a:avLst/>
@@ -13810,14 +12752,14 @@
       </p:sp>
       <p:sp>
         <p:nvSpPr>
-          <p:cNvPr id="25" name="TextBox 24"/>
-          <p:cNvSpPr txBox="1"/>
-          <p:nvPr/>
-        </p:nvSpPr>
-        <p:spPr>
-          <a:xfrm>
-            <a:off x="6729983" y="3968496"/>
-            <a:ext cx="4754880" cy="256032"/>
+          <p:cNvPr id="7" name="TextBox 6"/>
+          <p:cNvSpPr txBox="1"/>
+          <p:nvPr/>
+        </p:nvSpPr>
+        <p:spPr>
+          <a:xfrm>
+            <a:off x="932688" y="2414016"/>
+            <a:ext cx="2103120" cy="256032"/>
           </a:xfrm>
           <a:prstGeom prst="rect">
             <a:avLst/>
@@ -13844,21 +12786,62 @@
                 <a:ea typeface="맑은 고딕"/>
                 <a:cs typeface="맑은 고딕"/>
               </a:rPr>
-              <a:t>3단계 · 6개월</a:t>
-            </a:r>
-          </a:p>
-        </p:txBody>
-      </p:sp>
-      <p:sp>
-        <p:nvSpPr>
-          <p:cNvPr id="26" name="TextBox 25"/>
-          <p:cNvSpPr txBox="1"/>
-          <p:nvPr/>
-        </p:nvSpPr>
-        <p:spPr>
-          <a:xfrm>
-            <a:off x="6729983" y="4242816"/>
-            <a:ext cx="4754880" cy="365760"/>
+              <a:t>예측 성능</a:t>
+            </a:r>
+          </a:p>
+        </p:txBody>
+      </p:sp>
+      <p:sp>
+        <p:nvSpPr>
+          <p:cNvPr id="8" name="TextBox 7"/>
+          <p:cNvSpPr txBox="1"/>
+          <p:nvPr/>
+        </p:nvSpPr>
+        <p:spPr>
+          <a:xfrm>
+            <a:off x="3172968" y="2414016"/>
+            <a:ext cx="8046720" cy="256032"/>
+          </a:xfrm>
+          <a:prstGeom prst="rect">
+            <a:avLst/>
+          </a:prstGeom>
+          <a:noFill/>
+        </p:spPr>
+        <p:txBody>
+          <a:bodyPr wrap="square" lIns="0" rIns="0" tIns="0" bIns="0">
+            <a:spAutoFit/>
+          </a:bodyPr>
+          <a:lstStyle/>
+          <a:p>
+            <a:pPr algn="l">
+              <a:lnSpc>
+                <a:spcPct val="135000"/>
+              </a:lnSpc>
+            </a:pPr>
+            <a:r>
+              <a:rPr sz="1200" b="1">
+                <a:solidFill>
+                  <a:srgbClr val="12151A"/>
+                </a:solidFill>
+                <a:latin typeface="맑은 고딕"/>
+                <a:ea typeface="맑은 고딕"/>
+                <a:cs typeface="맑은 고딕"/>
+              </a:rPr>
+              <a:t>3년 뒤 악화·개선 '방향'은 어느 정도 맞히지만, 변화의 '크기'까지는 아직 부족합니다.</a:t>
+            </a:r>
+          </a:p>
+        </p:txBody>
+      </p:sp>
+      <p:sp>
+        <p:nvSpPr>
+          <p:cNvPr id="9" name="TextBox 8"/>
+          <p:cNvSpPr txBox="1"/>
+          <p:nvPr/>
+        </p:nvSpPr>
+        <p:spPr>
+          <a:xfrm>
+            <a:off x="3172968" y="2706624"/>
+            <a:ext cx="8046720" cy="384048"/>
           </a:xfrm>
           <a:prstGeom prst="rect">
             <a:avLst/>
@@ -13877,7 +12860,7 @@
               </a:lnSpc>
             </a:pPr>
             <a:r>
-              <a:rPr sz="1100" b="0">
+              <a:rPr sz="1080" b="0">
                 <a:solidFill>
                   <a:srgbClr val="52514E"/>
                 </a:solidFill>
@@ -13885,27 +12868,73 @@
                 <a:ea typeface="맑은 고딕"/>
                 <a:cs typeface="맑은 고딕"/>
               </a:rPr>
-              <a:t>500m 격자 단위로 공간해상도 상향 — 표본 확대로 예측모델 성능 개선</a:t>
-            </a:r>
-          </a:p>
-        </p:txBody>
-      </p:sp>
-      <p:sp>
-        <p:nvSpPr>
-          <p:cNvPr id="27" name="Rectangle 26"/>
+              <a:t>→ 위험도 수준은 자기상관이 강해 '그대로 간다'는 예측이 이미 강력한 기준선입니다. 현재는 인구 축만 실데이터라, 상권 개·폐업 시계열이 더해지면 나아질 것으로 봅니다.</a:t>
+            </a:r>
+          </a:p>
+        </p:txBody>
+      </p:sp>
+      <p:sp>
+        <p:nvSpPr>
+          <p:cNvPr id="10" name="Rounded Rectangle 9"/>
           <p:cNvSpPr/>
           <p:nvPr/>
         </p:nvSpPr>
         <p:spPr>
           <a:xfrm>
-            <a:off x="6510528" y="4718304"/>
-            <a:ext cx="68580" cy="566928"/>
-          </a:xfrm>
-          <a:prstGeom prst="rect">
-            <a:avLst/>
+            <a:off x="658368" y="3310128"/>
+            <a:ext cx="10874959" cy="896112"/>
+          </a:xfrm>
+          <a:prstGeom prst="roundRect">
+            <a:avLst>
+              <a:gd name="adj" fmla="val 6000"/>
+            </a:avLst>
           </a:prstGeom>
           <a:solidFill>
-            <a:srgbClr val="2A78D6"/>
+            <a:srgbClr val="FFFFFF"/>
+          </a:solidFill>
+          <a:ln w="12700">
+            <a:solidFill>
+              <a:srgbClr val="E4E7EC"/>
+            </a:solidFill>
+          </a:ln>
+          <a:effectLst/>
+        </p:spPr>
+        <p:style>
+          <a:lnRef idx="1">
+            <a:schemeClr val="accent1"/>
+          </a:lnRef>
+          <a:fillRef idx="3">
+            <a:schemeClr val="accent1"/>
+          </a:fillRef>
+          <a:effectRef idx="2">
+            <a:schemeClr val="accent1"/>
+          </a:effectRef>
+          <a:fontRef idx="minor">
+            <a:schemeClr val="lt1"/>
+          </a:fontRef>
+        </p:style>
+        <p:txBody>
+          <a:bodyPr rtlCol="0" anchor="ctr"/>
+          <a:lstStyle/>
+          <a:p/>
+        </p:txBody>
+      </p:sp>
+      <p:sp>
+        <p:nvSpPr>
+          <p:cNvPr id="11" name="Rectangle 10"/>
+          <p:cNvSpPr/>
+          <p:nvPr/>
+        </p:nvSpPr>
+        <p:spPr>
+          <a:xfrm>
+            <a:off x="658368" y="3310128"/>
+            <a:ext cx="68580" cy="896112"/>
+          </a:xfrm>
+          <a:prstGeom prst="rect">
+            <a:avLst/>
+          </a:prstGeom>
+          <a:solidFill>
+            <a:srgbClr val="EDA100"/>
           </a:solidFill>
           <a:ln>
             <a:noFill/>
@@ -13934,14 +12963,14 @@
       </p:sp>
       <p:sp>
         <p:nvSpPr>
-          <p:cNvPr id="28" name="TextBox 27"/>
-          <p:cNvSpPr txBox="1"/>
-          <p:nvPr/>
-        </p:nvSpPr>
-        <p:spPr>
-          <a:xfrm>
-            <a:off x="6729983" y="4718304"/>
-            <a:ext cx="4754880" cy="256032"/>
+          <p:cNvPr id="12" name="TextBox 11"/>
+          <p:cNvSpPr txBox="1"/>
+          <p:nvPr/>
+        </p:nvSpPr>
+        <p:spPr>
+          <a:xfrm>
+            <a:off x="932688" y="3438144"/>
+            <a:ext cx="2103120" cy="256032"/>
           </a:xfrm>
           <a:prstGeom prst="rect">
             <a:avLst/>
@@ -13962,27 +12991,68 @@
             <a:r>
               <a:rPr sz="1250" b="1">
                 <a:solidFill>
-                  <a:srgbClr val="2A78D6"/>
-                </a:solidFill>
-                <a:latin typeface="맑은 고딕"/>
-                <a:ea typeface="맑은 고딕"/>
-                <a:cs typeface="맑은 고딕"/>
-              </a:rPr>
-              <a:t>4단계 · 1년</a:t>
-            </a:r>
-          </a:p>
-        </p:txBody>
-      </p:sp>
-      <p:sp>
-        <p:nvSpPr>
-          <p:cNvPr id="29" name="TextBox 28"/>
-          <p:cNvSpPr txBox="1"/>
-          <p:nvPr/>
-        </p:nvSpPr>
-        <p:spPr>
-          <a:xfrm>
-            <a:off x="6729983" y="4992624"/>
-            <a:ext cx="4754880" cy="365760"/>
+                  <a:srgbClr val="EDA100"/>
+                </a:solidFill>
+                <a:latin typeface="맑은 고딕"/>
+                <a:ea typeface="맑은 고딕"/>
+                <a:cs typeface="맑은 고딕"/>
+              </a:rPr>
+              <a:t>표본 크기</a:t>
+            </a:r>
+          </a:p>
+        </p:txBody>
+      </p:sp>
+      <p:sp>
+        <p:nvSpPr>
+          <p:cNvPr id="13" name="TextBox 12"/>
+          <p:cNvSpPr txBox="1"/>
+          <p:nvPr/>
+        </p:nvSpPr>
+        <p:spPr>
+          <a:xfrm>
+            <a:off x="3172968" y="3438144"/>
+            <a:ext cx="8046720" cy="256032"/>
+          </a:xfrm>
+          <a:prstGeom prst="rect">
+            <a:avLst/>
+          </a:prstGeom>
+          <a:noFill/>
+        </p:spPr>
+        <p:txBody>
+          <a:bodyPr wrap="square" lIns="0" rIns="0" tIns="0" bIns="0">
+            <a:spAutoFit/>
+          </a:bodyPr>
+          <a:lstStyle/>
+          <a:p>
+            <a:pPr algn="l">
+              <a:lnSpc>
+                <a:spcPct val="135000"/>
+              </a:lnSpc>
+            </a:pPr>
+            <a:r>
+              <a:rPr sz="1200" b="1">
+                <a:solidFill>
+                  <a:srgbClr val="12151A"/>
+                </a:solidFill>
+                <a:latin typeface="맑은 고딕"/>
+                <a:ea typeface="맑은 고딕"/>
+                <a:cs typeface="맑은 고딕"/>
+              </a:rPr>
+              <a:t>분석 단위가 25개 생활권이라 머신러닝 표본으로는 작습니다.</a:t>
+            </a:r>
+          </a:p>
+        </p:txBody>
+      </p:sp>
+      <p:sp>
+        <p:nvSpPr>
+          <p:cNvPr id="14" name="TextBox 13"/>
+          <p:cNvSpPr txBox="1"/>
+          <p:nvPr/>
+        </p:nvSpPr>
+        <p:spPr>
+          <a:xfrm>
+            <a:off x="3172968" y="3730752"/>
+            <a:ext cx="8046720" cy="384048"/>
           </a:xfrm>
           <a:prstGeom prst="rect">
             <a:avLst/>
@@ -14001,7 +13071,7 @@
               </a:lnSpc>
             </a:pPr>
             <a:r>
-              <a:rPr sz="1100" b="0">
+              <a:rPr sz="1080" b="0">
                 <a:solidFill>
                   <a:srgbClr val="52514E"/>
                 </a:solidFill>
@@ -14009,21 +13079,21 @@
                 <a:ea typeface="맑은 고딕"/>
                 <a:cs typeface="맑은 고딕"/>
               </a:rPr>
-              <a:t>천안시 행정포털 대시보드 내재화, 연 1회 자동 갱신 체계 정착</a:t>
-            </a:r>
-          </a:p>
-        </p:txBody>
-      </p:sp>
-      <p:sp>
-        <p:nvSpPr>
-          <p:cNvPr id="30" name="Rounded Rectangle 29"/>
+              <a:t>→ 500m 격자 단위로 내리면 표본이 수천 개로 늘어납니다. 지금은 규제를 강하게 걸고 Leave-One-Zone-Out CV와 베이스라인 비교로 과적합 여부를 확인하고 있습니다.</a:t>
+            </a:r>
+          </a:p>
+        </p:txBody>
+      </p:sp>
+      <p:sp>
+        <p:nvSpPr>
+          <p:cNvPr id="15" name="Rounded Rectangle 14"/>
           <p:cNvSpPr/>
           <p:nvPr/>
         </p:nvSpPr>
         <p:spPr>
           <a:xfrm>
-            <a:off x="658368" y="5504688"/>
-            <a:ext cx="10874959" cy="822960"/>
+            <a:off x="658368" y="4334256"/>
+            <a:ext cx="10874959" cy="896112"/>
           </a:xfrm>
           <a:prstGeom prst="roundRect">
             <a:avLst>
@@ -14031,7 +13101,51 @@
             </a:avLst>
           </a:prstGeom>
           <a:solidFill>
-            <a:srgbClr val="F6F7F9"/>
+            <a:srgbClr val="FFFFFF"/>
+          </a:solidFill>
+          <a:ln w="12700">
+            <a:solidFill>
+              <a:srgbClr val="E4E7EC"/>
+            </a:solidFill>
+          </a:ln>
+          <a:effectLst/>
+        </p:spPr>
+        <p:style>
+          <a:lnRef idx="1">
+            <a:schemeClr val="accent1"/>
+          </a:lnRef>
+          <a:fillRef idx="3">
+            <a:schemeClr val="accent1"/>
+          </a:fillRef>
+          <a:effectRef idx="2">
+            <a:schemeClr val="accent1"/>
+          </a:effectRef>
+          <a:fontRef idx="minor">
+            <a:schemeClr val="lt1"/>
+          </a:fontRef>
+        </p:style>
+        <p:txBody>
+          <a:bodyPr rtlCol="0" anchor="ctr"/>
+          <a:lstStyle/>
+          <a:p/>
+        </p:txBody>
+      </p:sp>
+      <p:sp>
+        <p:nvSpPr>
+          <p:cNvPr id="16" name="Rectangle 15"/>
+          <p:cNvSpPr/>
+          <p:nvPr/>
+        </p:nvSpPr>
+        <p:spPr>
+          <a:xfrm>
+            <a:off x="658368" y="4334256"/>
+            <a:ext cx="68580" cy="896112"/>
+          </a:xfrm>
+          <a:prstGeom prst="rect">
+            <a:avLst/>
+          </a:prstGeom>
+          <a:solidFill>
+            <a:srgbClr val="EDA100"/>
           </a:solidFill>
           <a:ln>
             <a:noFill/>
@@ -14060,33 +13174,74 @@
       </p:sp>
       <p:sp>
         <p:nvSpPr>
-          <p:cNvPr id="31" name="TextBox 30"/>
-          <p:cNvSpPr txBox="1"/>
-          <p:nvPr/>
-        </p:nvSpPr>
-        <p:spPr>
-          <a:xfrm>
-            <a:off x="932688" y="5687568"/>
-            <a:ext cx="10515600" cy="502920"/>
-          </a:xfrm>
-          <a:prstGeom prst="rect">
-            <a:avLst/>
-          </a:prstGeom>
-          <a:noFill/>
-        </p:spPr>
-        <p:txBody>
-          <a:bodyPr wrap="square" lIns="0" rIns="0" tIns="0" bIns="0">
-            <a:spAutoFit/>
-          </a:bodyPr>
-          <a:lstStyle/>
-          <a:p>
-            <a:pPr algn="l">
-              <a:lnSpc>
-                <a:spcPct val="150000"/>
-              </a:lnSpc>
-            </a:pPr>
-            <a:r>
-              <a:rPr sz="1200" b="0">
+          <p:cNvPr id="17" name="TextBox 16"/>
+          <p:cNvSpPr txBox="1"/>
+          <p:nvPr/>
+        </p:nvSpPr>
+        <p:spPr>
+          <a:xfrm>
+            <a:off x="932688" y="4462272"/>
+            <a:ext cx="2103120" cy="256032"/>
+          </a:xfrm>
+          <a:prstGeom prst="rect">
+            <a:avLst/>
+          </a:prstGeom>
+          <a:noFill/>
+        </p:spPr>
+        <p:txBody>
+          <a:bodyPr wrap="square" lIns="0" rIns="0" tIns="0" bIns="0">
+            <a:spAutoFit/>
+          </a:bodyPr>
+          <a:lstStyle/>
+          <a:p>
+            <a:pPr algn="l">
+              <a:lnSpc>
+                <a:spcPct val="135000"/>
+              </a:lnSpc>
+            </a:pPr>
+            <a:r>
+              <a:rPr sz="1250" b="1">
+                <a:solidFill>
+                  <a:srgbClr val="EDA100"/>
+                </a:solidFill>
+                <a:latin typeface="맑은 고딕"/>
+                <a:ea typeface="맑은 고딕"/>
+                <a:cs typeface="맑은 고딕"/>
+              </a:rPr>
+              <a:t>공간 해상도</a:t>
+            </a:r>
+          </a:p>
+        </p:txBody>
+      </p:sp>
+      <p:sp>
+        <p:nvSpPr>
+          <p:cNvPr id="18" name="TextBox 17"/>
+          <p:cNvSpPr txBox="1"/>
+          <p:nvPr/>
+        </p:nvSpPr>
+        <p:spPr>
+          <a:xfrm>
+            <a:off x="3172968" y="4462272"/>
+            <a:ext cx="8046720" cy="256032"/>
+          </a:xfrm>
+          <a:prstGeom prst="rect">
+            <a:avLst/>
+          </a:prstGeom>
+          <a:noFill/>
+        </p:spPr>
+        <p:txBody>
+          <a:bodyPr wrap="square" lIns="0" rIns="0" tIns="0" bIns="0">
+            <a:spAutoFit/>
+          </a:bodyPr>
+          <a:lstStyle/>
+          <a:p>
+            <a:pPr algn="l">
+              <a:lnSpc>
+                <a:spcPct val="135000"/>
+              </a:lnSpc>
+            </a:pPr>
+            <a:r>
+              <a:rPr sz="1200" b="1">
                 <a:solidFill>
                   <a:srgbClr val="12151A"/>
                 </a:solidFill>
@@ -14094,20 +13249,210 @@
                 <a:ea typeface="맑은 고딕"/>
                 <a:cs typeface="맑은 고딕"/>
               </a:rPr>
-              <a:t>다른 지역에도 — 공간단위 정의(config.py)만 바꾸면 아산·청주 등에도 같은 방식으로 쓸 수 있습니다.</a:t>
-            </a:r>
-          </a:p>
-          <a:p>
-            <a:pPr algn="l">
-              <a:lnSpc>
-                <a:spcPct val="150000"/>
-              </a:lnSpc>
-              <a:spcBef>
-                <a:spcPts val="0"/>
-              </a:spcBef>
-            </a:pPr>
-            <a:r>
-              <a:rPr sz="1200" b="0">
+              <a:t>생활권 안쪽의 차이(같은 동 안의 편차)는 잡히지 않습니다.</a:t>
+            </a:r>
+          </a:p>
+        </p:txBody>
+      </p:sp>
+      <p:sp>
+        <p:nvSpPr>
+          <p:cNvPr id="19" name="TextBox 18"/>
+          <p:cNvSpPr txBox="1"/>
+          <p:nvPr/>
+        </p:nvSpPr>
+        <p:spPr>
+          <a:xfrm>
+            <a:off x="3172968" y="4754880"/>
+            <a:ext cx="8046720" cy="384048"/>
+          </a:xfrm>
+          <a:prstGeom prst="rect">
+            <a:avLst/>
+          </a:prstGeom>
+          <a:noFill/>
+        </p:spPr>
+        <p:txBody>
+          <a:bodyPr wrap="square" lIns="0" rIns="0" tIns="0" bIns="0">
+            <a:spAutoFit/>
+          </a:bodyPr>
+          <a:lstStyle/>
+          <a:p>
+            <a:pPr algn="l">
+              <a:lnSpc>
+                <a:spcPct val="140000"/>
+              </a:lnSpc>
+            </a:pPr>
+            <a:r>
+              <a:rPr sz="1080" b="0">
+                <a:solidFill>
+                  <a:srgbClr val="52514E"/>
+                </a:solidFill>
+                <a:latin typeface="맑은 고딕"/>
+                <a:ea typeface="맑은 고딕"/>
+                <a:cs typeface="맑은 고딕"/>
+              </a:rPr>
+              <a:t>→ 집계구·격자 데이터로 바꾸면 해결됩니다. 공간단위 정의만 교체하면 되도록 만들어 두었습니다.</a:t>
+            </a:r>
+          </a:p>
+        </p:txBody>
+      </p:sp>
+      <p:sp>
+        <p:nvSpPr>
+          <p:cNvPr id="20" name="Rounded Rectangle 19"/>
+          <p:cNvSpPr/>
+          <p:nvPr/>
+        </p:nvSpPr>
+        <p:spPr>
+          <a:xfrm>
+            <a:off x="658368" y="5358384"/>
+            <a:ext cx="10874959" cy="896112"/>
+          </a:xfrm>
+          <a:prstGeom prst="roundRect">
+            <a:avLst>
+              <a:gd name="adj" fmla="val 6000"/>
+            </a:avLst>
+          </a:prstGeom>
+          <a:solidFill>
+            <a:srgbClr val="FFFFFF"/>
+          </a:solidFill>
+          <a:ln w="12700">
+            <a:solidFill>
+              <a:srgbClr val="E4E7EC"/>
+            </a:solidFill>
+          </a:ln>
+          <a:effectLst/>
+        </p:spPr>
+        <p:style>
+          <a:lnRef idx="1">
+            <a:schemeClr val="accent1"/>
+          </a:lnRef>
+          <a:fillRef idx="3">
+            <a:schemeClr val="accent1"/>
+          </a:fillRef>
+          <a:effectRef idx="2">
+            <a:schemeClr val="accent1"/>
+          </a:effectRef>
+          <a:fontRef idx="minor">
+            <a:schemeClr val="lt1"/>
+          </a:fontRef>
+        </p:style>
+        <p:txBody>
+          <a:bodyPr rtlCol="0" anchor="ctr"/>
+          <a:lstStyle/>
+          <a:p/>
+        </p:txBody>
+      </p:sp>
+      <p:sp>
+        <p:nvSpPr>
+          <p:cNvPr id="21" name="Rectangle 20"/>
+          <p:cNvSpPr/>
+          <p:nvPr/>
+        </p:nvSpPr>
+        <p:spPr>
+          <a:xfrm>
+            <a:off x="658368" y="5358384"/>
+            <a:ext cx="68580" cy="896112"/>
+          </a:xfrm>
+          <a:prstGeom prst="rect">
+            <a:avLst/>
+          </a:prstGeom>
+          <a:solidFill>
+            <a:srgbClr val="EDA100"/>
+          </a:solidFill>
+          <a:ln>
+            <a:noFill/>
+          </a:ln>
+          <a:effectLst/>
+        </p:spPr>
+        <p:style>
+          <a:lnRef idx="1">
+            <a:schemeClr val="accent1"/>
+          </a:lnRef>
+          <a:fillRef idx="3">
+            <a:schemeClr val="accent1"/>
+          </a:fillRef>
+          <a:effectRef idx="2">
+            <a:schemeClr val="accent1"/>
+          </a:effectRef>
+          <a:fontRef idx="minor">
+            <a:schemeClr val="lt1"/>
+          </a:fontRef>
+        </p:style>
+        <p:txBody>
+          <a:bodyPr rtlCol="0" anchor="ctr"/>
+          <a:lstStyle/>
+          <a:p/>
+        </p:txBody>
+      </p:sp>
+      <p:sp>
+        <p:nvSpPr>
+          <p:cNvPr id="22" name="TextBox 21"/>
+          <p:cNvSpPr txBox="1"/>
+          <p:nvPr/>
+        </p:nvSpPr>
+        <p:spPr>
+          <a:xfrm>
+            <a:off x="932688" y="5486400"/>
+            <a:ext cx="2103120" cy="256032"/>
+          </a:xfrm>
+          <a:prstGeom prst="rect">
+            <a:avLst/>
+          </a:prstGeom>
+          <a:noFill/>
+        </p:spPr>
+        <p:txBody>
+          <a:bodyPr wrap="square" lIns="0" rIns="0" tIns="0" bIns="0">
+            <a:spAutoFit/>
+          </a:bodyPr>
+          <a:lstStyle/>
+          <a:p>
+            <a:pPr algn="l">
+              <a:lnSpc>
+                <a:spcPct val="135000"/>
+              </a:lnSpc>
+            </a:pPr>
+            <a:r>
+              <a:rPr sz="1250" b="1">
+                <a:solidFill>
+                  <a:srgbClr val="EDA100"/>
+                </a:solidFill>
+                <a:latin typeface="맑은 고딕"/>
+                <a:ea typeface="맑은 고딕"/>
+                <a:cs typeface="맑은 고딕"/>
+              </a:rPr>
+              <a:t>인과 아닌 상관</a:t>
+            </a:r>
+          </a:p>
+        </p:txBody>
+      </p:sp>
+      <p:sp>
+        <p:nvSpPr>
+          <p:cNvPr id="23" name="TextBox 22"/>
+          <p:cNvSpPr txBox="1"/>
+          <p:nvPr/>
+        </p:nvSpPr>
+        <p:spPr>
+          <a:xfrm>
+            <a:off x="3172968" y="5486400"/>
+            <a:ext cx="8046720" cy="256032"/>
+          </a:xfrm>
+          <a:prstGeom prst="rect">
+            <a:avLst/>
+          </a:prstGeom>
+          <a:noFill/>
+        </p:spPr>
+        <p:txBody>
+          <a:bodyPr wrap="square" lIns="0" rIns="0" tIns="0" bIns="0">
+            <a:spAutoFit/>
+          </a:bodyPr>
+          <a:lstStyle/>
+          <a:p>
+            <a:pPr algn="l">
+              <a:lnSpc>
+                <a:spcPct val="135000"/>
+              </a:lnSpc>
+            </a:pPr>
+            <a:r>
+              <a:rPr sz="1200" b="1">
                 <a:solidFill>
                   <a:srgbClr val="12151A"/>
                 </a:solidFill>
@@ -14115,14 +13460,55 @@
                 <a:ea typeface="맑은 고딕"/>
                 <a:cs typeface="맑은 고딕"/>
               </a:rPr>
-              <a:t>원도심 공동화는 천안만의 일이 아니어서, 도움이 된다면 충남 시군이 함께 쓰는 자료가 되어도 좋겠습니다.</a:t>
-            </a:r>
-          </a:p>
-        </p:txBody>
-      </p:sp>
-      <p:sp>
-        <p:nvSpPr>
-          <p:cNvPr id="32" name="TextBox 31"/>
+              <a:t>이 모델은 변화를 미리 살펴볼 뿐, 사업의 효과를 증명하지는 못합니다.</a:t>
+            </a:r>
+          </a:p>
+        </p:txBody>
+      </p:sp>
+      <p:sp>
+        <p:nvSpPr>
+          <p:cNvPr id="24" name="TextBox 23"/>
+          <p:cNvSpPr txBox="1"/>
+          <p:nvPr/>
+        </p:nvSpPr>
+        <p:spPr>
+          <a:xfrm>
+            <a:off x="3172968" y="5779008"/>
+            <a:ext cx="8046720" cy="384048"/>
+          </a:xfrm>
+          <a:prstGeom prst="rect">
+            <a:avLst/>
+          </a:prstGeom>
+          <a:noFill/>
+        </p:spPr>
+        <p:txBody>
+          <a:bodyPr wrap="square" lIns="0" rIns="0" tIns="0" bIns="0">
+            <a:spAutoFit/>
+          </a:bodyPr>
+          <a:lstStyle/>
+          <a:p>
+            <a:pPr algn="l">
+              <a:lnSpc>
+                <a:spcPct val="140000"/>
+              </a:lnSpc>
+            </a:pPr>
+            <a:r>
+              <a:rPr sz="1080" b="0">
+                <a:solidFill>
+                  <a:srgbClr val="52514E"/>
+                </a:solidFill>
+                <a:latin typeface="맑은 고딕"/>
+                <a:ea typeface="맑은 고딕"/>
+                <a:cs typeface="맑은 고딕"/>
+              </a:rPr>
+              <a:t>→ 시행 전후 이중차분(DID) 설계를 덧붙이면 효과 검증까지 넓힐 수 있습니다.</a:t>
+            </a:r>
+          </a:p>
+        </p:txBody>
+      </p:sp>
+      <p:sp>
+        <p:nvSpPr>
+          <p:cNvPr id="25" name="TextBox 24"/>
           <p:cNvSpPr txBox="1"/>
           <p:nvPr/>
         </p:nvSpPr>
@@ -14163,7 +13549,7 @@
       </p:sp>
       <p:sp>
         <p:nvSpPr>
-          <p:cNvPr id="33" name="TextBox 32"/>
+          <p:cNvPr id="26" name="TextBox 25"/>
           <p:cNvSpPr txBox="1"/>
           <p:nvPr/>
         </p:nvSpPr>
@@ -14508,7 +13894,7 @@
                 <a:ea typeface="맑은 고딕"/>
                 <a:cs typeface="맑은 고딕"/>
               </a:rPr>
-              <a:t>0.85배</a:t>
+              <a:t>1.29배</a:t>
             </a:r>
           </a:p>
         </p:txBody>
@@ -14549,7 +13935,7 @@
                 <a:ea typeface="맑은 고딕"/>
                 <a:cs typeface="맑은 고딕"/>
               </a:rPr>
-              <a:t>신도심 36.7 vs 원도심 43.4</a:t>
+              <a:t>신도심 48.9 vs 원도심 38.1</a:t>
             </a:r>
           </a:p>
         </p:txBody>
@@ -14719,7 +14105,7 @@
                 <a:ea typeface="맑은 고딕"/>
                 <a:cs typeface="맑은 고딕"/>
               </a:rPr>
-              <a:t>0.177</a:t>
+              <a:t>0.421</a:t>
             </a:r>
           </a:p>
         </p:txBody>
@@ -14930,7 +14316,7 @@
                 <a:ea typeface="맑은 고딕"/>
                 <a:cs typeface="맑은 고딕"/>
               </a:rPr>
-              <a:t>75%</a:t>
+              <a:t>69%</a:t>
             </a:r>
           </a:p>
         </p:txBody>
@@ -14971,7 +14357,7 @@
                 <a:ea typeface="맑은 고딕"/>
                 <a:cs typeface="맑은 고딕"/>
               </a:rPr>
-              <a:t>베이스라인 대비 MAE -1.7%</a:t>
+              <a:t>베이스라인 대비 MAE +5.3%</a:t>
             </a:r>
           </a:p>
         </p:txBody>
@@ -15141,7 +14527,7 @@
                 <a:ea typeface="맑은 고딕"/>
                 <a:cs typeface="맑은 고딕"/>
               </a:rPr>
-              <a:t>242,320명</a:t>
+              <a:t>데이터 대기</a:t>
             </a:r>
           </a:p>
         </p:txBody>
@@ -15182,7 +14568,7 @@
                 <a:ea typeface="맑은 고딕"/>
                 <a:cs typeface="맑은 고딕"/>
               </a:rPr>
-              <a:t>12개소 · 커버리지 +34.0%p</a:t>
+              <a:t>생활SOC 위치 자료 필요</a:t>
             </a:r>
           </a:p>
         </p:txBody>
@@ -15899,7 +15285,7 @@
                 <a:ea typeface="맑은 고딕"/>
                 <a:cs typeface="맑은 고딕"/>
               </a:rPr>
-              <a:t>생활권별 지수와 유형, 3년 뒤 전망과 그 이유, 12개소 우선순위표입니다.</a:t>
+              <a:t>생활권별 지수와 유형, 3년 뒤 전망과 그 이유, 0개소 우선순위표입니다.</a:t>
             </a:r>
           </a:p>
           <a:p>
@@ -16061,7 +15447,7 @@
                 <a:ea typeface="맑은 고딕"/>
                 <a:cs typeface="맑은 고딕"/>
               </a:rPr>
-              <a:t>LIMITATION</a:t>
+              <a:t>INTEGRITY</a:t>
             </a:r>
           </a:p>
         </p:txBody>
@@ -16102,62 +15488,21 @@
                 <a:ea typeface="맑은 고딕"/>
                 <a:cs typeface="맑은 고딕"/>
               </a:rPr>
-              <a:t>저희가 아직 못 한 부분을 먼저 말씀드립니다</a:t>
-            </a:r>
-          </a:p>
-        </p:txBody>
-      </p:sp>
-      <p:sp>
-        <p:nvSpPr>
-          <p:cNvPr id="4" name="TextBox 3"/>
-          <p:cNvSpPr txBox="1"/>
-          <p:nvPr/>
-        </p:nvSpPr>
-        <p:spPr>
-          <a:xfrm>
-            <a:off x="658368" y="1517904"/>
-            <a:ext cx="10874959" cy="411480"/>
-          </a:xfrm>
-          <a:prstGeom prst="rect">
-            <a:avLst/>
-          </a:prstGeom>
-          <a:noFill/>
-        </p:spPr>
-        <p:txBody>
-          <a:bodyPr wrap="square" lIns="0" rIns="0" tIns="0" bIns="0">
-            <a:spAutoFit/>
-          </a:bodyPr>
-          <a:lstStyle/>
-          <a:p>
-            <a:pPr algn="l">
-              <a:lnSpc>
-                <a:spcPct val="145000"/>
-              </a:lnSpc>
-            </a:pPr>
-            <a:r>
-              <a:rPr sz="1350" b="0">
-                <a:solidFill>
-                  <a:srgbClr val="52514E"/>
-                </a:solidFill>
-                <a:latin typeface="맑은 고딕"/>
-                <a:ea typeface="맑은 고딕"/>
-                <a:cs typeface="맑은 고딕"/>
-              </a:rPr>
-              <a:t>행정에 쓰이는 자료인 만큼, 어디까지 믿고 쓰실 수 있는지 분명히 알려드리는 것이 도리라고 생각했습니다.</a:t>
-            </a:r>
-          </a:p>
-        </p:txBody>
-      </p:sp>
-      <p:sp>
-        <p:nvSpPr>
-          <p:cNvPr id="5" name="Rounded Rectangle 4"/>
+              <a:t>재현성과 데이터 윤리</a:t>
+            </a:r>
+          </a:p>
+        </p:txBody>
+      </p:sp>
+      <p:sp>
+        <p:nvSpPr>
+          <p:cNvPr id="4" name="Rounded Rectangle 3"/>
           <p:cNvSpPr/>
           <p:nvPr/>
         </p:nvSpPr>
         <p:spPr>
           <a:xfrm>
-            <a:off x="658368" y="2286000"/>
-            <a:ext cx="10874959" cy="896112"/>
+            <a:off x="658368" y="2121408"/>
+            <a:ext cx="5257800" cy="2487168"/>
           </a:xfrm>
           <a:prstGeom prst="roundRect">
             <a:avLst>
@@ -16196,20 +15541,20 @@
       </p:sp>
       <p:sp>
         <p:nvSpPr>
-          <p:cNvPr id="6" name="Rectangle 5"/>
+          <p:cNvPr id="5" name="Rectangle 4"/>
           <p:cNvSpPr/>
           <p:nvPr/>
         </p:nvSpPr>
         <p:spPr>
           <a:xfrm>
-            <a:off x="658368" y="2286000"/>
-            <a:ext cx="68580" cy="896112"/>
+            <a:off x="658368" y="2121408"/>
+            <a:ext cx="5257800" cy="68580"/>
           </a:xfrm>
           <a:prstGeom prst="rect">
             <a:avLst/>
           </a:prstGeom>
           <a:solidFill>
-            <a:srgbClr val="EDA100"/>
+            <a:srgbClr val="1BAF7A"/>
           </a:solidFill>
           <a:ln>
             <a:noFill/>
@@ -16238,14 +15583,55 @@
       </p:sp>
       <p:sp>
         <p:nvSpPr>
+          <p:cNvPr id="6" name="TextBox 5"/>
+          <p:cNvSpPr txBox="1"/>
+          <p:nvPr/>
+        </p:nvSpPr>
+        <p:spPr>
+          <a:xfrm>
+            <a:off x="932688" y="2340864"/>
+            <a:ext cx="4114800" cy="274320"/>
+          </a:xfrm>
+          <a:prstGeom prst="rect">
+            <a:avLst/>
+          </a:prstGeom>
+          <a:noFill/>
+        </p:spPr>
+        <p:txBody>
+          <a:bodyPr wrap="square" lIns="0" rIns="0" tIns="0" bIns="0">
+            <a:spAutoFit/>
+          </a:bodyPr>
+          <a:lstStyle/>
+          <a:p>
+            <a:pPr algn="l">
+              <a:lnSpc>
+                <a:spcPct val="135000"/>
+              </a:lnSpc>
+            </a:pPr>
+            <a:r>
+              <a:rPr sz="1450" b="1">
+                <a:solidFill>
+                  <a:srgbClr val="1BAF7A"/>
+                </a:solidFill>
+                <a:latin typeface="맑은 고딕"/>
+                <a:ea typeface="맑은 고딕"/>
+                <a:cs typeface="맑은 고딕"/>
+              </a:rPr>
+              <a:t>재현성</a:t>
+            </a:r>
+          </a:p>
+        </p:txBody>
+      </p:sp>
+      <p:sp>
+        <p:nvSpPr>
           <p:cNvPr id="7" name="TextBox 6"/>
           <p:cNvSpPr txBox="1"/>
           <p:nvPr/>
         </p:nvSpPr>
         <p:spPr>
           <a:xfrm>
-            <a:off x="932688" y="2414016"/>
-            <a:ext cx="2103120" cy="256032"/>
+            <a:off x="932688" y="2743200"/>
+            <a:ext cx="182880" cy="256032"/>
           </a:xfrm>
           <a:prstGeom prst="rect">
             <a:avLst/>
@@ -16264,15 +15650,15 @@
               </a:lnSpc>
             </a:pPr>
             <a:r>
-              <a:rPr sz="1250" b="1">
-                <a:solidFill>
-                  <a:srgbClr val="EDA100"/>
-                </a:solidFill>
-                <a:latin typeface="맑은 고딕"/>
-                <a:ea typeface="맑은 고딕"/>
-                <a:cs typeface="맑은 고딕"/>
-              </a:rPr>
-              <a:t>예측 성능</a:t>
+              <a:rPr sz="1300" b="1">
+                <a:solidFill>
+                  <a:srgbClr val="1BAF7A"/>
+                </a:solidFill>
+                <a:latin typeface="맑은 고딕"/>
+                <a:ea typeface="맑은 고딕"/>
+                <a:cs typeface="맑은 고딕"/>
+              </a:rPr>
+              <a:t>·</a:t>
             </a:r>
           </a:p>
         </p:txBody>
@@ -16285,8 +15671,49 @@
         </p:nvSpPr>
         <p:spPr>
           <a:xfrm>
-            <a:off x="3172968" y="2414016"/>
-            <a:ext cx="8046720" cy="256032"/>
+            <a:off x="1133856" y="2743200"/>
+            <a:ext cx="4572000" cy="411480"/>
+          </a:xfrm>
+          <a:prstGeom prst="rect">
+            <a:avLst/>
+          </a:prstGeom>
+          <a:noFill/>
+        </p:spPr>
+        <p:txBody>
+          <a:bodyPr wrap="square" lIns="0" rIns="0" tIns="0" bIns="0">
+            <a:spAutoFit/>
+          </a:bodyPr>
+          <a:lstStyle/>
+          <a:p>
+            <a:pPr algn="l">
+              <a:lnSpc>
+                <a:spcPct val="140000"/>
+              </a:lnSpc>
+            </a:pPr>
+            <a:r>
+              <a:rPr sz="1100" b="0">
+                <a:solidFill>
+                  <a:srgbClr val="12151A"/>
+                </a:solidFill>
+                <a:latin typeface="맑은 고딕"/>
+                <a:ea typeface="맑은 고딕"/>
+                <a:cs typeface="맑은 고딕"/>
+              </a:rPr>
+              <a:t>전 과정이 공개 스크립트로 실행 — `python3 src/run_all.py` 한 줄</a:t>
+            </a:r>
+          </a:p>
+        </p:txBody>
+      </p:sp>
+      <p:sp>
+        <p:nvSpPr>
+          <p:cNvPr id="9" name="TextBox 8"/>
+          <p:cNvSpPr txBox="1"/>
+          <p:nvPr/>
+        </p:nvSpPr>
+        <p:spPr>
+          <a:xfrm>
+            <a:off x="932688" y="3218688"/>
+            <a:ext cx="182880" cy="256032"/>
           </a:xfrm>
           <a:prstGeom prst="rect">
             <a:avLst/>
@@ -16305,7 +15732,48 @@
               </a:lnSpc>
             </a:pPr>
             <a:r>
-              <a:rPr sz="1200" b="1">
+              <a:rPr sz="1300" b="1">
+                <a:solidFill>
+                  <a:srgbClr val="1BAF7A"/>
+                </a:solidFill>
+                <a:latin typeface="맑은 고딕"/>
+                <a:ea typeface="맑은 고딕"/>
+                <a:cs typeface="맑은 고딕"/>
+              </a:rPr>
+              <a:t>·</a:t>
+            </a:r>
+          </a:p>
+        </p:txBody>
+      </p:sp>
+      <p:sp>
+        <p:nvSpPr>
+          <p:cNvPr id="10" name="TextBox 9"/>
+          <p:cNvSpPr txBox="1"/>
+          <p:nvPr/>
+        </p:nvSpPr>
+        <p:spPr>
+          <a:xfrm>
+            <a:off x="1133856" y="3218688"/>
+            <a:ext cx="4572000" cy="411480"/>
+          </a:xfrm>
+          <a:prstGeom prst="rect">
+            <a:avLst/>
+          </a:prstGeom>
+          <a:noFill/>
+        </p:spPr>
+        <p:txBody>
+          <a:bodyPr wrap="square" lIns="0" rIns="0" tIns="0" bIns="0">
+            <a:spAutoFit/>
+          </a:bodyPr>
+          <a:lstStyle/>
+          <a:p>
+            <a:pPr algn="l">
+              <a:lnSpc>
+                <a:spcPct val="140000"/>
+              </a:lnSpc>
+            </a:pPr>
+            <a:r>
+              <a:rPr sz="1100" b="0">
                 <a:solidFill>
                   <a:srgbClr val="12151A"/>
                 </a:solidFill>
@@ -16313,21 +15781,62 @@
                 <a:ea typeface="맑은 고딕"/>
                 <a:cs typeface="맑은 고딕"/>
               </a:rPr>
-              <a:t>3년 뒤 악화·개선 '방향'은 어느 정도 맞히지만, 변화의 '크기'까지는 아직 부족합니다.</a:t>
-            </a:r>
-          </a:p>
-        </p:txBody>
-      </p:sp>
-      <p:sp>
-        <p:nvSpPr>
-          <p:cNvPr id="9" name="TextBox 8"/>
-          <p:cNvSpPr txBox="1"/>
-          <p:nvPr/>
-        </p:nvSpPr>
-        <p:spPr>
-          <a:xfrm>
-            <a:off x="3172968" y="2706624"/>
-            <a:ext cx="8046720" cy="384048"/>
+              <a:t>난수 시드 고정(20260831) — 군집·모델 결과가 실행마다 동일</a:t>
+            </a:r>
+          </a:p>
+        </p:txBody>
+      </p:sp>
+      <p:sp>
+        <p:nvSpPr>
+          <p:cNvPr id="11" name="TextBox 10"/>
+          <p:cNvSpPr txBox="1"/>
+          <p:nvPr/>
+        </p:nvSpPr>
+        <p:spPr>
+          <a:xfrm>
+            <a:off x="932688" y="3694176"/>
+            <a:ext cx="182880" cy="256032"/>
+          </a:xfrm>
+          <a:prstGeom prst="rect">
+            <a:avLst/>
+          </a:prstGeom>
+          <a:noFill/>
+        </p:spPr>
+        <p:txBody>
+          <a:bodyPr wrap="square" lIns="0" rIns="0" tIns="0" bIns="0">
+            <a:spAutoFit/>
+          </a:bodyPr>
+          <a:lstStyle/>
+          <a:p>
+            <a:pPr algn="l">
+              <a:lnSpc>
+                <a:spcPct val="135000"/>
+              </a:lnSpc>
+            </a:pPr>
+            <a:r>
+              <a:rPr sz="1300" b="1">
+                <a:solidFill>
+                  <a:srgbClr val="1BAF7A"/>
+                </a:solidFill>
+                <a:latin typeface="맑은 고딕"/>
+                <a:ea typeface="맑은 고딕"/>
+                <a:cs typeface="맑은 고딕"/>
+              </a:rPr>
+              <a:t>·</a:t>
+            </a:r>
+          </a:p>
+        </p:txBody>
+      </p:sp>
+      <p:sp>
+        <p:nvSpPr>
+          <p:cNvPr id="12" name="TextBox 11"/>
+          <p:cNvSpPr txBox="1"/>
+          <p:nvPr/>
+        </p:nvSpPr>
+        <p:spPr>
+          <a:xfrm>
+            <a:off x="1133856" y="3694176"/>
+            <a:ext cx="4572000" cy="411480"/>
           </a:xfrm>
           <a:prstGeom prst="rect">
             <a:avLst/>
@@ -16346,29 +15855,111 @@
               </a:lnSpc>
             </a:pPr>
             <a:r>
-              <a:rPr sz="1080" b="0">
-                <a:solidFill>
-                  <a:srgbClr val="52514E"/>
-                </a:solidFill>
-                <a:latin typeface="맑은 고딕"/>
-                <a:ea typeface="맑은 고딕"/>
-                <a:cs typeface="맑은 고딕"/>
-              </a:rPr>
-              <a:t>→ 위험도 수준은 자기상관이 강해 '그대로 간다'는 예측이 이미 강력한 기준선입니다. 현재는 인구 축만 실데이터라, 상권 개·폐업 시계열이 더해지면 나아질 것으로 봅니다.</a:t>
-            </a:r>
-          </a:p>
-        </p:txBody>
-      </p:sp>
-      <p:sp>
-        <p:nvSpPr>
-          <p:cNvPr id="10" name="Rounded Rectangle 9"/>
+              <a:rPr sz="1100" b="0">
+                <a:solidFill>
+                  <a:srgbClr val="12151A"/>
+                </a:solidFill>
+                <a:latin typeface="맑은 고딕"/>
+                <a:ea typeface="맑은 고딕"/>
+                <a:cs typeface="맑은 고딕"/>
+              </a:rPr>
+              <a:t>그림 8종·분석표 9종·대시보드가 같은 실행에서 함께 생성됨</a:t>
+            </a:r>
+          </a:p>
+        </p:txBody>
+      </p:sp>
+      <p:sp>
+        <p:nvSpPr>
+          <p:cNvPr id="13" name="TextBox 12"/>
+          <p:cNvSpPr txBox="1"/>
+          <p:nvPr/>
+        </p:nvSpPr>
+        <p:spPr>
+          <a:xfrm>
+            <a:off x="932688" y="4169664"/>
+            <a:ext cx="182880" cy="256032"/>
+          </a:xfrm>
+          <a:prstGeom prst="rect">
+            <a:avLst/>
+          </a:prstGeom>
+          <a:noFill/>
+        </p:spPr>
+        <p:txBody>
+          <a:bodyPr wrap="square" lIns="0" rIns="0" tIns="0" bIns="0">
+            <a:spAutoFit/>
+          </a:bodyPr>
+          <a:lstStyle/>
+          <a:p>
+            <a:pPr algn="l">
+              <a:lnSpc>
+                <a:spcPct val="135000"/>
+              </a:lnSpc>
+            </a:pPr>
+            <a:r>
+              <a:rPr sz="1300" b="1">
+                <a:solidFill>
+                  <a:srgbClr val="1BAF7A"/>
+                </a:solidFill>
+                <a:latin typeface="맑은 고딕"/>
+                <a:ea typeface="맑은 고딕"/>
+                <a:cs typeface="맑은 고딕"/>
+              </a:rPr>
+              <a:t>·</a:t>
+            </a:r>
+          </a:p>
+        </p:txBody>
+      </p:sp>
+      <p:sp>
+        <p:nvSpPr>
+          <p:cNvPr id="14" name="TextBox 13"/>
+          <p:cNvSpPr txBox="1"/>
+          <p:nvPr/>
+        </p:nvSpPr>
+        <p:spPr>
+          <a:xfrm>
+            <a:off x="1133856" y="4169664"/>
+            <a:ext cx="4572000" cy="411480"/>
+          </a:xfrm>
+          <a:prstGeom prst="rect">
+            <a:avLst/>
+          </a:prstGeom>
+          <a:noFill/>
+        </p:spPr>
+        <p:txBody>
+          <a:bodyPr wrap="square" lIns="0" rIns="0" tIns="0" bIns="0">
+            <a:spAutoFit/>
+          </a:bodyPr>
+          <a:lstStyle/>
+          <a:p>
+            <a:pPr algn="l">
+              <a:lnSpc>
+                <a:spcPct val="140000"/>
+              </a:lnSpc>
+            </a:pPr>
+            <a:r>
+              <a:rPr sz="1100" b="0">
+                <a:solidFill>
+                  <a:srgbClr val="12151A"/>
+                </a:solidFill>
+                <a:latin typeface="맑은 고딕"/>
+                <a:ea typeface="맑은 고딕"/>
+                <a:cs typeface="맑은 고딕"/>
+              </a:rPr>
+              <a:t>지표 정의·가중치·모델 파라미터가 전부 코드에 명시</a:t>
+            </a:r>
+          </a:p>
+        </p:txBody>
+      </p:sp>
+      <p:sp>
+        <p:nvSpPr>
+          <p:cNvPr id="15" name="Rounded Rectangle 14"/>
           <p:cNvSpPr/>
           <p:nvPr/>
         </p:nvSpPr>
         <p:spPr>
           <a:xfrm>
-            <a:off x="658368" y="3310128"/>
-            <a:ext cx="10874959" cy="896112"/>
+            <a:off x="6236207" y="2121408"/>
+            <a:ext cx="5257800" cy="2487168"/>
           </a:xfrm>
           <a:prstGeom prst="roundRect">
             <a:avLst>
@@ -16407,1278 +15998,6 @@
       </p:sp>
       <p:sp>
         <p:nvSpPr>
-          <p:cNvPr id="11" name="Rectangle 10"/>
-          <p:cNvSpPr/>
-          <p:nvPr/>
-        </p:nvSpPr>
-        <p:spPr>
-          <a:xfrm>
-            <a:off x="658368" y="3310128"/>
-            <a:ext cx="68580" cy="896112"/>
-          </a:xfrm>
-          <a:prstGeom prst="rect">
-            <a:avLst/>
-          </a:prstGeom>
-          <a:solidFill>
-            <a:srgbClr val="EDA100"/>
-          </a:solidFill>
-          <a:ln>
-            <a:noFill/>
-          </a:ln>
-          <a:effectLst/>
-        </p:spPr>
-        <p:style>
-          <a:lnRef idx="1">
-            <a:schemeClr val="accent1"/>
-          </a:lnRef>
-          <a:fillRef idx="3">
-            <a:schemeClr val="accent1"/>
-          </a:fillRef>
-          <a:effectRef idx="2">
-            <a:schemeClr val="accent1"/>
-          </a:effectRef>
-          <a:fontRef idx="minor">
-            <a:schemeClr val="lt1"/>
-          </a:fontRef>
-        </p:style>
-        <p:txBody>
-          <a:bodyPr rtlCol="0" anchor="ctr"/>
-          <a:lstStyle/>
-          <a:p/>
-        </p:txBody>
-      </p:sp>
-      <p:sp>
-        <p:nvSpPr>
-          <p:cNvPr id="12" name="TextBox 11"/>
-          <p:cNvSpPr txBox="1"/>
-          <p:nvPr/>
-        </p:nvSpPr>
-        <p:spPr>
-          <a:xfrm>
-            <a:off x="932688" y="3438144"/>
-            <a:ext cx="2103120" cy="256032"/>
-          </a:xfrm>
-          <a:prstGeom prst="rect">
-            <a:avLst/>
-          </a:prstGeom>
-          <a:noFill/>
-        </p:spPr>
-        <p:txBody>
-          <a:bodyPr wrap="square" lIns="0" rIns="0" tIns="0" bIns="0">
-            <a:spAutoFit/>
-          </a:bodyPr>
-          <a:lstStyle/>
-          <a:p>
-            <a:pPr algn="l">
-              <a:lnSpc>
-                <a:spcPct val="135000"/>
-              </a:lnSpc>
-            </a:pPr>
-            <a:r>
-              <a:rPr sz="1250" b="1">
-                <a:solidFill>
-                  <a:srgbClr val="EDA100"/>
-                </a:solidFill>
-                <a:latin typeface="맑은 고딕"/>
-                <a:ea typeface="맑은 고딕"/>
-                <a:cs typeface="맑은 고딕"/>
-              </a:rPr>
-              <a:t>표본 크기</a:t>
-            </a:r>
-          </a:p>
-        </p:txBody>
-      </p:sp>
-      <p:sp>
-        <p:nvSpPr>
-          <p:cNvPr id="13" name="TextBox 12"/>
-          <p:cNvSpPr txBox="1"/>
-          <p:nvPr/>
-        </p:nvSpPr>
-        <p:spPr>
-          <a:xfrm>
-            <a:off x="3172968" y="3438144"/>
-            <a:ext cx="8046720" cy="256032"/>
-          </a:xfrm>
-          <a:prstGeom prst="rect">
-            <a:avLst/>
-          </a:prstGeom>
-          <a:noFill/>
-        </p:spPr>
-        <p:txBody>
-          <a:bodyPr wrap="square" lIns="0" rIns="0" tIns="0" bIns="0">
-            <a:spAutoFit/>
-          </a:bodyPr>
-          <a:lstStyle/>
-          <a:p>
-            <a:pPr algn="l">
-              <a:lnSpc>
-                <a:spcPct val="135000"/>
-              </a:lnSpc>
-            </a:pPr>
-            <a:r>
-              <a:rPr sz="1200" b="1">
-                <a:solidFill>
-                  <a:srgbClr val="12151A"/>
-                </a:solidFill>
-                <a:latin typeface="맑은 고딕"/>
-                <a:ea typeface="맑은 고딕"/>
-                <a:cs typeface="맑은 고딕"/>
-              </a:rPr>
-              <a:t>분석 단위가 25개 생활권이라 머신러닝 표본으로는 작습니다.</a:t>
-            </a:r>
-          </a:p>
-        </p:txBody>
-      </p:sp>
-      <p:sp>
-        <p:nvSpPr>
-          <p:cNvPr id="14" name="TextBox 13"/>
-          <p:cNvSpPr txBox="1"/>
-          <p:nvPr/>
-        </p:nvSpPr>
-        <p:spPr>
-          <a:xfrm>
-            <a:off x="3172968" y="3730752"/>
-            <a:ext cx="8046720" cy="384048"/>
-          </a:xfrm>
-          <a:prstGeom prst="rect">
-            <a:avLst/>
-          </a:prstGeom>
-          <a:noFill/>
-        </p:spPr>
-        <p:txBody>
-          <a:bodyPr wrap="square" lIns="0" rIns="0" tIns="0" bIns="0">
-            <a:spAutoFit/>
-          </a:bodyPr>
-          <a:lstStyle/>
-          <a:p>
-            <a:pPr algn="l">
-              <a:lnSpc>
-                <a:spcPct val="140000"/>
-              </a:lnSpc>
-            </a:pPr>
-            <a:r>
-              <a:rPr sz="1080" b="0">
-                <a:solidFill>
-                  <a:srgbClr val="52514E"/>
-                </a:solidFill>
-                <a:latin typeface="맑은 고딕"/>
-                <a:ea typeface="맑은 고딕"/>
-                <a:cs typeface="맑은 고딕"/>
-              </a:rPr>
-              <a:t>→ 500m 격자 단위로 내리면 표본이 수천 개로 늘어납니다. 지금은 규제를 강하게 걸고 Leave-One-Zone-Out CV와 베이스라인 비교로 과적합 여부를 확인하고 있습니다.</a:t>
-            </a:r>
-          </a:p>
-        </p:txBody>
-      </p:sp>
-      <p:sp>
-        <p:nvSpPr>
-          <p:cNvPr id="15" name="Rounded Rectangle 14"/>
-          <p:cNvSpPr/>
-          <p:nvPr/>
-        </p:nvSpPr>
-        <p:spPr>
-          <a:xfrm>
-            <a:off x="658368" y="4334256"/>
-            <a:ext cx="10874959" cy="896112"/>
-          </a:xfrm>
-          <a:prstGeom prst="roundRect">
-            <a:avLst>
-              <a:gd name="adj" fmla="val 6000"/>
-            </a:avLst>
-          </a:prstGeom>
-          <a:solidFill>
-            <a:srgbClr val="FFFFFF"/>
-          </a:solidFill>
-          <a:ln w="12700">
-            <a:solidFill>
-              <a:srgbClr val="E4E7EC"/>
-            </a:solidFill>
-          </a:ln>
-          <a:effectLst/>
-        </p:spPr>
-        <p:style>
-          <a:lnRef idx="1">
-            <a:schemeClr val="accent1"/>
-          </a:lnRef>
-          <a:fillRef idx="3">
-            <a:schemeClr val="accent1"/>
-          </a:fillRef>
-          <a:effectRef idx="2">
-            <a:schemeClr val="accent1"/>
-          </a:effectRef>
-          <a:fontRef idx="minor">
-            <a:schemeClr val="lt1"/>
-          </a:fontRef>
-        </p:style>
-        <p:txBody>
-          <a:bodyPr rtlCol="0" anchor="ctr"/>
-          <a:lstStyle/>
-          <a:p/>
-        </p:txBody>
-      </p:sp>
-      <p:sp>
-        <p:nvSpPr>
-          <p:cNvPr id="16" name="Rectangle 15"/>
-          <p:cNvSpPr/>
-          <p:nvPr/>
-        </p:nvSpPr>
-        <p:spPr>
-          <a:xfrm>
-            <a:off x="658368" y="4334256"/>
-            <a:ext cx="68580" cy="896112"/>
-          </a:xfrm>
-          <a:prstGeom prst="rect">
-            <a:avLst/>
-          </a:prstGeom>
-          <a:solidFill>
-            <a:srgbClr val="EDA100"/>
-          </a:solidFill>
-          <a:ln>
-            <a:noFill/>
-          </a:ln>
-          <a:effectLst/>
-        </p:spPr>
-        <p:style>
-          <a:lnRef idx="1">
-            <a:schemeClr val="accent1"/>
-          </a:lnRef>
-          <a:fillRef idx="3">
-            <a:schemeClr val="accent1"/>
-          </a:fillRef>
-          <a:effectRef idx="2">
-            <a:schemeClr val="accent1"/>
-          </a:effectRef>
-          <a:fontRef idx="minor">
-            <a:schemeClr val="lt1"/>
-          </a:fontRef>
-        </p:style>
-        <p:txBody>
-          <a:bodyPr rtlCol="0" anchor="ctr"/>
-          <a:lstStyle/>
-          <a:p/>
-        </p:txBody>
-      </p:sp>
-      <p:sp>
-        <p:nvSpPr>
-          <p:cNvPr id="17" name="TextBox 16"/>
-          <p:cNvSpPr txBox="1"/>
-          <p:nvPr/>
-        </p:nvSpPr>
-        <p:spPr>
-          <a:xfrm>
-            <a:off x="932688" y="4462272"/>
-            <a:ext cx="2103120" cy="256032"/>
-          </a:xfrm>
-          <a:prstGeom prst="rect">
-            <a:avLst/>
-          </a:prstGeom>
-          <a:noFill/>
-        </p:spPr>
-        <p:txBody>
-          <a:bodyPr wrap="square" lIns="0" rIns="0" tIns="0" bIns="0">
-            <a:spAutoFit/>
-          </a:bodyPr>
-          <a:lstStyle/>
-          <a:p>
-            <a:pPr algn="l">
-              <a:lnSpc>
-                <a:spcPct val="135000"/>
-              </a:lnSpc>
-            </a:pPr>
-            <a:r>
-              <a:rPr sz="1250" b="1">
-                <a:solidFill>
-                  <a:srgbClr val="EDA100"/>
-                </a:solidFill>
-                <a:latin typeface="맑은 고딕"/>
-                <a:ea typeface="맑은 고딕"/>
-                <a:cs typeface="맑은 고딕"/>
-              </a:rPr>
-              <a:t>공간 해상도</a:t>
-            </a:r>
-          </a:p>
-        </p:txBody>
-      </p:sp>
-      <p:sp>
-        <p:nvSpPr>
-          <p:cNvPr id="18" name="TextBox 17"/>
-          <p:cNvSpPr txBox="1"/>
-          <p:nvPr/>
-        </p:nvSpPr>
-        <p:spPr>
-          <a:xfrm>
-            <a:off x="3172968" y="4462272"/>
-            <a:ext cx="8046720" cy="256032"/>
-          </a:xfrm>
-          <a:prstGeom prst="rect">
-            <a:avLst/>
-          </a:prstGeom>
-          <a:noFill/>
-        </p:spPr>
-        <p:txBody>
-          <a:bodyPr wrap="square" lIns="0" rIns="0" tIns="0" bIns="0">
-            <a:spAutoFit/>
-          </a:bodyPr>
-          <a:lstStyle/>
-          <a:p>
-            <a:pPr algn="l">
-              <a:lnSpc>
-                <a:spcPct val="135000"/>
-              </a:lnSpc>
-            </a:pPr>
-            <a:r>
-              <a:rPr sz="1200" b="1">
-                <a:solidFill>
-                  <a:srgbClr val="12151A"/>
-                </a:solidFill>
-                <a:latin typeface="맑은 고딕"/>
-                <a:ea typeface="맑은 고딕"/>
-                <a:cs typeface="맑은 고딕"/>
-              </a:rPr>
-              <a:t>생활권 안쪽의 차이(같은 동 안의 편차)는 잡히지 않습니다.</a:t>
-            </a:r>
-          </a:p>
-        </p:txBody>
-      </p:sp>
-      <p:sp>
-        <p:nvSpPr>
-          <p:cNvPr id="19" name="TextBox 18"/>
-          <p:cNvSpPr txBox="1"/>
-          <p:nvPr/>
-        </p:nvSpPr>
-        <p:spPr>
-          <a:xfrm>
-            <a:off x="3172968" y="4754880"/>
-            <a:ext cx="8046720" cy="384048"/>
-          </a:xfrm>
-          <a:prstGeom prst="rect">
-            <a:avLst/>
-          </a:prstGeom>
-          <a:noFill/>
-        </p:spPr>
-        <p:txBody>
-          <a:bodyPr wrap="square" lIns="0" rIns="0" tIns="0" bIns="0">
-            <a:spAutoFit/>
-          </a:bodyPr>
-          <a:lstStyle/>
-          <a:p>
-            <a:pPr algn="l">
-              <a:lnSpc>
-                <a:spcPct val="140000"/>
-              </a:lnSpc>
-            </a:pPr>
-            <a:r>
-              <a:rPr sz="1080" b="0">
-                <a:solidFill>
-                  <a:srgbClr val="52514E"/>
-                </a:solidFill>
-                <a:latin typeface="맑은 고딕"/>
-                <a:ea typeface="맑은 고딕"/>
-                <a:cs typeface="맑은 고딕"/>
-              </a:rPr>
-              <a:t>→ 집계구·격자 데이터로 바꾸면 해결됩니다. 공간단위 정의만 교체하면 되도록 만들어 두었습니다.</a:t>
-            </a:r>
-          </a:p>
-        </p:txBody>
-      </p:sp>
-      <p:sp>
-        <p:nvSpPr>
-          <p:cNvPr id="20" name="Rounded Rectangle 19"/>
-          <p:cNvSpPr/>
-          <p:nvPr/>
-        </p:nvSpPr>
-        <p:spPr>
-          <a:xfrm>
-            <a:off x="658368" y="5358384"/>
-            <a:ext cx="10874959" cy="896112"/>
-          </a:xfrm>
-          <a:prstGeom prst="roundRect">
-            <a:avLst>
-              <a:gd name="adj" fmla="val 6000"/>
-            </a:avLst>
-          </a:prstGeom>
-          <a:solidFill>
-            <a:srgbClr val="FFFFFF"/>
-          </a:solidFill>
-          <a:ln w="12700">
-            <a:solidFill>
-              <a:srgbClr val="E4E7EC"/>
-            </a:solidFill>
-          </a:ln>
-          <a:effectLst/>
-        </p:spPr>
-        <p:style>
-          <a:lnRef idx="1">
-            <a:schemeClr val="accent1"/>
-          </a:lnRef>
-          <a:fillRef idx="3">
-            <a:schemeClr val="accent1"/>
-          </a:fillRef>
-          <a:effectRef idx="2">
-            <a:schemeClr val="accent1"/>
-          </a:effectRef>
-          <a:fontRef idx="minor">
-            <a:schemeClr val="lt1"/>
-          </a:fontRef>
-        </p:style>
-        <p:txBody>
-          <a:bodyPr rtlCol="0" anchor="ctr"/>
-          <a:lstStyle/>
-          <a:p/>
-        </p:txBody>
-      </p:sp>
-      <p:sp>
-        <p:nvSpPr>
-          <p:cNvPr id="21" name="Rectangle 20"/>
-          <p:cNvSpPr/>
-          <p:nvPr/>
-        </p:nvSpPr>
-        <p:spPr>
-          <a:xfrm>
-            <a:off x="658368" y="5358384"/>
-            <a:ext cx="68580" cy="896112"/>
-          </a:xfrm>
-          <a:prstGeom prst="rect">
-            <a:avLst/>
-          </a:prstGeom>
-          <a:solidFill>
-            <a:srgbClr val="EDA100"/>
-          </a:solidFill>
-          <a:ln>
-            <a:noFill/>
-          </a:ln>
-          <a:effectLst/>
-        </p:spPr>
-        <p:style>
-          <a:lnRef idx="1">
-            <a:schemeClr val="accent1"/>
-          </a:lnRef>
-          <a:fillRef idx="3">
-            <a:schemeClr val="accent1"/>
-          </a:fillRef>
-          <a:effectRef idx="2">
-            <a:schemeClr val="accent1"/>
-          </a:effectRef>
-          <a:fontRef idx="minor">
-            <a:schemeClr val="lt1"/>
-          </a:fontRef>
-        </p:style>
-        <p:txBody>
-          <a:bodyPr rtlCol="0" anchor="ctr"/>
-          <a:lstStyle/>
-          <a:p/>
-        </p:txBody>
-      </p:sp>
-      <p:sp>
-        <p:nvSpPr>
-          <p:cNvPr id="22" name="TextBox 21"/>
-          <p:cNvSpPr txBox="1"/>
-          <p:nvPr/>
-        </p:nvSpPr>
-        <p:spPr>
-          <a:xfrm>
-            <a:off x="932688" y="5486400"/>
-            <a:ext cx="2103120" cy="256032"/>
-          </a:xfrm>
-          <a:prstGeom prst="rect">
-            <a:avLst/>
-          </a:prstGeom>
-          <a:noFill/>
-        </p:spPr>
-        <p:txBody>
-          <a:bodyPr wrap="square" lIns="0" rIns="0" tIns="0" bIns="0">
-            <a:spAutoFit/>
-          </a:bodyPr>
-          <a:lstStyle/>
-          <a:p>
-            <a:pPr algn="l">
-              <a:lnSpc>
-                <a:spcPct val="135000"/>
-              </a:lnSpc>
-            </a:pPr>
-            <a:r>
-              <a:rPr sz="1250" b="1">
-                <a:solidFill>
-                  <a:srgbClr val="EDA100"/>
-                </a:solidFill>
-                <a:latin typeface="맑은 고딕"/>
-                <a:ea typeface="맑은 고딕"/>
-                <a:cs typeface="맑은 고딕"/>
-              </a:rPr>
-              <a:t>인과 아닌 상관</a:t>
-            </a:r>
-          </a:p>
-        </p:txBody>
-      </p:sp>
-      <p:sp>
-        <p:nvSpPr>
-          <p:cNvPr id="23" name="TextBox 22"/>
-          <p:cNvSpPr txBox="1"/>
-          <p:nvPr/>
-        </p:nvSpPr>
-        <p:spPr>
-          <a:xfrm>
-            <a:off x="3172968" y="5486400"/>
-            <a:ext cx="8046720" cy="256032"/>
-          </a:xfrm>
-          <a:prstGeom prst="rect">
-            <a:avLst/>
-          </a:prstGeom>
-          <a:noFill/>
-        </p:spPr>
-        <p:txBody>
-          <a:bodyPr wrap="square" lIns="0" rIns="0" tIns="0" bIns="0">
-            <a:spAutoFit/>
-          </a:bodyPr>
-          <a:lstStyle/>
-          <a:p>
-            <a:pPr algn="l">
-              <a:lnSpc>
-                <a:spcPct val="135000"/>
-              </a:lnSpc>
-            </a:pPr>
-            <a:r>
-              <a:rPr sz="1200" b="1">
-                <a:solidFill>
-                  <a:srgbClr val="12151A"/>
-                </a:solidFill>
-                <a:latin typeface="맑은 고딕"/>
-                <a:ea typeface="맑은 고딕"/>
-                <a:cs typeface="맑은 고딕"/>
-              </a:rPr>
-              <a:t>이 모델은 변화를 미리 살펴볼 뿐, 사업의 효과를 증명하지는 못합니다.</a:t>
-            </a:r>
-          </a:p>
-        </p:txBody>
-      </p:sp>
-      <p:sp>
-        <p:nvSpPr>
-          <p:cNvPr id="24" name="TextBox 23"/>
-          <p:cNvSpPr txBox="1"/>
-          <p:nvPr/>
-        </p:nvSpPr>
-        <p:spPr>
-          <a:xfrm>
-            <a:off x="3172968" y="5779008"/>
-            <a:ext cx="8046720" cy="384048"/>
-          </a:xfrm>
-          <a:prstGeom prst="rect">
-            <a:avLst/>
-          </a:prstGeom>
-          <a:noFill/>
-        </p:spPr>
-        <p:txBody>
-          <a:bodyPr wrap="square" lIns="0" rIns="0" tIns="0" bIns="0">
-            <a:spAutoFit/>
-          </a:bodyPr>
-          <a:lstStyle/>
-          <a:p>
-            <a:pPr algn="l">
-              <a:lnSpc>
-                <a:spcPct val="140000"/>
-              </a:lnSpc>
-            </a:pPr>
-            <a:r>
-              <a:rPr sz="1080" b="0">
-                <a:solidFill>
-                  <a:srgbClr val="52514E"/>
-                </a:solidFill>
-                <a:latin typeface="맑은 고딕"/>
-                <a:ea typeface="맑은 고딕"/>
-                <a:cs typeface="맑은 고딕"/>
-              </a:rPr>
-              <a:t>→ 시행 전후 이중차분(DID) 설계를 덧붙이면 효과 검증까지 넓힐 수 있습니다.</a:t>
-            </a:r>
-          </a:p>
-        </p:txBody>
-      </p:sp>
-      <p:sp>
-        <p:nvSpPr>
-          <p:cNvPr id="25" name="TextBox 24"/>
-          <p:cNvSpPr txBox="1"/>
-          <p:nvPr/>
-        </p:nvSpPr>
-        <p:spPr>
-          <a:xfrm>
-            <a:off x="658368" y="6437376"/>
-            <a:ext cx="5486400" cy="274320"/>
-          </a:xfrm>
-          <a:prstGeom prst="rect">
-            <a:avLst/>
-          </a:prstGeom>
-          <a:noFill/>
-        </p:spPr>
-        <p:txBody>
-          <a:bodyPr wrap="square" lIns="0" rIns="0" tIns="0" bIns="0">
-            <a:spAutoFit/>
-          </a:bodyPr>
-          <a:lstStyle/>
-          <a:p>
-            <a:pPr algn="l">
-              <a:lnSpc>
-                <a:spcPct val="135000"/>
-              </a:lnSpc>
-            </a:pPr>
-            <a:r>
-              <a:rPr sz="950" b="0">
-                <a:solidFill>
-                  <a:srgbClr val="52514E"/>
-                </a:solidFill>
-                <a:latin typeface="맑은 고딕"/>
-                <a:ea typeface="맑은 고딕"/>
-                <a:cs typeface="맑은 고딕"/>
-              </a:rPr>
-              <a:t>천안 균형발전 나침반(CBC)</a:t>
-            </a:r>
-          </a:p>
-        </p:txBody>
-      </p:sp>
-      <p:sp>
-        <p:nvSpPr>
-          <p:cNvPr id="26" name="TextBox 25"/>
-          <p:cNvSpPr txBox="1"/>
-          <p:nvPr/>
-        </p:nvSpPr>
-        <p:spPr>
-          <a:xfrm>
-            <a:off x="10618927" y="6437376"/>
-            <a:ext cx="914400" cy="274320"/>
-          </a:xfrm>
-          <a:prstGeom prst="rect">
-            <a:avLst/>
-          </a:prstGeom>
-          <a:noFill/>
-        </p:spPr>
-        <p:txBody>
-          <a:bodyPr wrap="square" lIns="0" rIns="0" tIns="0" bIns="0">
-            <a:spAutoFit/>
-          </a:bodyPr>
-          <a:lstStyle/>
-          <a:p>
-            <a:pPr algn="r">
-              <a:lnSpc>
-                <a:spcPct val="135000"/>
-              </a:lnSpc>
-            </a:pPr>
-            <a:r>
-              <a:rPr sz="950" b="0">
-                <a:solidFill>
-                  <a:srgbClr val="52514E"/>
-                </a:solidFill>
-                <a:latin typeface="맑은 고딕"/>
-                <a:ea typeface="맑은 고딕"/>
-                <a:cs typeface="맑은 고딕"/>
-              </a:rPr>
-              <a:t>19</a:t>
-            </a:r>
-          </a:p>
-        </p:txBody>
-      </p:sp>
-    </p:spTree>
-  </p:cSld>
-  <p:clrMapOvr>
-    <a:masterClrMapping/>
-  </p:clrMapOvr>
-</p:sld>
-</file>
-
-<file path=ppt/slides/slide21.xml><?xml version="1.0" encoding="utf-8"?>
-<p:sld xmlns:a="http://schemas.openxmlformats.org/drawingml/2006/main" xmlns:p="http://schemas.openxmlformats.org/presentationml/2006/main" xmlns:r="http://schemas.openxmlformats.org/officeDocument/2006/relationships">
-  <p:cSld>
-    <p:spTree>
-      <p:nvGrpSpPr>
-        <p:cNvPr id="1" name=""/>
-        <p:cNvGrpSpPr/>
-        <p:nvPr/>
-      </p:nvGrpSpPr>
-      <p:grpSpPr/>
-      <p:sp>
-        <p:nvSpPr>
-          <p:cNvPr id="2" name="TextBox 1"/>
-          <p:cNvSpPr txBox="1"/>
-          <p:nvPr/>
-        </p:nvSpPr>
-        <p:spPr>
-          <a:xfrm>
-            <a:off x="658368" y="475488"/>
-            <a:ext cx="10874959" cy="274320"/>
-          </a:xfrm>
-          <a:prstGeom prst="rect">
-            <a:avLst/>
-          </a:prstGeom>
-          <a:noFill/>
-        </p:spPr>
-        <p:txBody>
-          <a:bodyPr wrap="square" lIns="0" rIns="0" tIns="0" bIns="0">
-            <a:spAutoFit/>
-          </a:bodyPr>
-          <a:lstStyle/>
-          <a:p>
-            <a:pPr algn="l">
-              <a:lnSpc>
-                <a:spcPct val="135000"/>
-              </a:lnSpc>
-            </a:pPr>
-            <a:r>
-              <a:rPr sz="1150" b="1">
-                <a:solidFill>
-                  <a:srgbClr val="2A78D6"/>
-                </a:solidFill>
-                <a:latin typeface="맑은 고딕"/>
-                <a:ea typeface="맑은 고딕"/>
-                <a:cs typeface="맑은 고딕"/>
-              </a:rPr>
-              <a:t>INTEGRITY</a:t>
-            </a:r>
-          </a:p>
-        </p:txBody>
-      </p:sp>
-      <p:sp>
-        <p:nvSpPr>
-          <p:cNvPr id="3" name="TextBox 2"/>
-          <p:cNvSpPr txBox="1"/>
-          <p:nvPr/>
-        </p:nvSpPr>
-        <p:spPr>
-          <a:xfrm>
-            <a:off x="658368" y="804672"/>
-            <a:ext cx="10874959" cy="566928"/>
-          </a:xfrm>
-          <a:prstGeom prst="rect">
-            <a:avLst/>
-          </a:prstGeom>
-          <a:noFill/>
-        </p:spPr>
-        <p:txBody>
-          <a:bodyPr wrap="square" lIns="0" rIns="0" tIns="0" bIns="0">
-            <a:spAutoFit/>
-          </a:bodyPr>
-          <a:lstStyle/>
-          <a:p>
-            <a:pPr algn="l">
-              <a:lnSpc>
-                <a:spcPct val="118000"/>
-              </a:lnSpc>
-            </a:pPr>
-            <a:r>
-              <a:rPr sz="2700" b="1">
-                <a:solidFill>
-                  <a:srgbClr val="12151A"/>
-                </a:solidFill>
-                <a:latin typeface="맑은 고딕"/>
-                <a:ea typeface="맑은 고딕"/>
-                <a:cs typeface="맑은 고딕"/>
-              </a:rPr>
-              <a:t>재현성과 데이터 윤리</a:t>
-            </a:r>
-          </a:p>
-        </p:txBody>
-      </p:sp>
-      <p:sp>
-        <p:nvSpPr>
-          <p:cNvPr id="4" name="Rounded Rectangle 3"/>
-          <p:cNvSpPr/>
-          <p:nvPr/>
-        </p:nvSpPr>
-        <p:spPr>
-          <a:xfrm>
-            <a:off x="658368" y="2121408"/>
-            <a:ext cx="5257800" cy="2487168"/>
-          </a:xfrm>
-          <a:prstGeom prst="roundRect">
-            <a:avLst>
-              <a:gd name="adj" fmla="val 6000"/>
-            </a:avLst>
-          </a:prstGeom>
-          <a:solidFill>
-            <a:srgbClr val="FFFFFF"/>
-          </a:solidFill>
-          <a:ln w="12700">
-            <a:solidFill>
-              <a:srgbClr val="E4E7EC"/>
-            </a:solidFill>
-          </a:ln>
-          <a:effectLst/>
-        </p:spPr>
-        <p:style>
-          <a:lnRef idx="1">
-            <a:schemeClr val="accent1"/>
-          </a:lnRef>
-          <a:fillRef idx="3">
-            <a:schemeClr val="accent1"/>
-          </a:fillRef>
-          <a:effectRef idx="2">
-            <a:schemeClr val="accent1"/>
-          </a:effectRef>
-          <a:fontRef idx="minor">
-            <a:schemeClr val="lt1"/>
-          </a:fontRef>
-        </p:style>
-        <p:txBody>
-          <a:bodyPr rtlCol="0" anchor="ctr"/>
-          <a:lstStyle/>
-          <a:p/>
-        </p:txBody>
-      </p:sp>
-      <p:sp>
-        <p:nvSpPr>
-          <p:cNvPr id="5" name="Rectangle 4"/>
-          <p:cNvSpPr/>
-          <p:nvPr/>
-        </p:nvSpPr>
-        <p:spPr>
-          <a:xfrm>
-            <a:off x="658368" y="2121408"/>
-            <a:ext cx="5257800" cy="68580"/>
-          </a:xfrm>
-          <a:prstGeom prst="rect">
-            <a:avLst/>
-          </a:prstGeom>
-          <a:solidFill>
-            <a:srgbClr val="1BAF7A"/>
-          </a:solidFill>
-          <a:ln>
-            <a:noFill/>
-          </a:ln>
-          <a:effectLst/>
-        </p:spPr>
-        <p:style>
-          <a:lnRef idx="1">
-            <a:schemeClr val="accent1"/>
-          </a:lnRef>
-          <a:fillRef idx="3">
-            <a:schemeClr val="accent1"/>
-          </a:fillRef>
-          <a:effectRef idx="2">
-            <a:schemeClr val="accent1"/>
-          </a:effectRef>
-          <a:fontRef idx="minor">
-            <a:schemeClr val="lt1"/>
-          </a:fontRef>
-        </p:style>
-        <p:txBody>
-          <a:bodyPr rtlCol="0" anchor="ctr"/>
-          <a:lstStyle/>
-          <a:p/>
-        </p:txBody>
-      </p:sp>
-      <p:sp>
-        <p:nvSpPr>
-          <p:cNvPr id="6" name="TextBox 5"/>
-          <p:cNvSpPr txBox="1"/>
-          <p:nvPr/>
-        </p:nvSpPr>
-        <p:spPr>
-          <a:xfrm>
-            <a:off x="932688" y="2340864"/>
-            <a:ext cx="4114800" cy="274320"/>
-          </a:xfrm>
-          <a:prstGeom prst="rect">
-            <a:avLst/>
-          </a:prstGeom>
-          <a:noFill/>
-        </p:spPr>
-        <p:txBody>
-          <a:bodyPr wrap="square" lIns="0" rIns="0" tIns="0" bIns="0">
-            <a:spAutoFit/>
-          </a:bodyPr>
-          <a:lstStyle/>
-          <a:p>
-            <a:pPr algn="l">
-              <a:lnSpc>
-                <a:spcPct val="135000"/>
-              </a:lnSpc>
-            </a:pPr>
-            <a:r>
-              <a:rPr sz="1450" b="1">
-                <a:solidFill>
-                  <a:srgbClr val="1BAF7A"/>
-                </a:solidFill>
-                <a:latin typeface="맑은 고딕"/>
-                <a:ea typeface="맑은 고딕"/>
-                <a:cs typeface="맑은 고딕"/>
-              </a:rPr>
-              <a:t>재현성</a:t>
-            </a:r>
-          </a:p>
-        </p:txBody>
-      </p:sp>
-      <p:sp>
-        <p:nvSpPr>
-          <p:cNvPr id="7" name="TextBox 6"/>
-          <p:cNvSpPr txBox="1"/>
-          <p:nvPr/>
-        </p:nvSpPr>
-        <p:spPr>
-          <a:xfrm>
-            <a:off x="932688" y="2743200"/>
-            <a:ext cx="182880" cy="256032"/>
-          </a:xfrm>
-          <a:prstGeom prst="rect">
-            <a:avLst/>
-          </a:prstGeom>
-          <a:noFill/>
-        </p:spPr>
-        <p:txBody>
-          <a:bodyPr wrap="square" lIns="0" rIns="0" tIns="0" bIns="0">
-            <a:spAutoFit/>
-          </a:bodyPr>
-          <a:lstStyle/>
-          <a:p>
-            <a:pPr algn="l">
-              <a:lnSpc>
-                <a:spcPct val="135000"/>
-              </a:lnSpc>
-            </a:pPr>
-            <a:r>
-              <a:rPr sz="1300" b="1">
-                <a:solidFill>
-                  <a:srgbClr val="1BAF7A"/>
-                </a:solidFill>
-                <a:latin typeface="맑은 고딕"/>
-                <a:ea typeface="맑은 고딕"/>
-                <a:cs typeface="맑은 고딕"/>
-              </a:rPr>
-              <a:t>·</a:t>
-            </a:r>
-          </a:p>
-        </p:txBody>
-      </p:sp>
-      <p:sp>
-        <p:nvSpPr>
-          <p:cNvPr id="8" name="TextBox 7"/>
-          <p:cNvSpPr txBox="1"/>
-          <p:nvPr/>
-        </p:nvSpPr>
-        <p:spPr>
-          <a:xfrm>
-            <a:off x="1133856" y="2743200"/>
-            <a:ext cx="4572000" cy="411480"/>
-          </a:xfrm>
-          <a:prstGeom prst="rect">
-            <a:avLst/>
-          </a:prstGeom>
-          <a:noFill/>
-        </p:spPr>
-        <p:txBody>
-          <a:bodyPr wrap="square" lIns="0" rIns="0" tIns="0" bIns="0">
-            <a:spAutoFit/>
-          </a:bodyPr>
-          <a:lstStyle/>
-          <a:p>
-            <a:pPr algn="l">
-              <a:lnSpc>
-                <a:spcPct val="140000"/>
-              </a:lnSpc>
-            </a:pPr>
-            <a:r>
-              <a:rPr sz="1100" b="0">
-                <a:solidFill>
-                  <a:srgbClr val="12151A"/>
-                </a:solidFill>
-                <a:latin typeface="맑은 고딕"/>
-                <a:ea typeface="맑은 고딕"/>
-                <a:cs typeface="맑은 고딕"/>
-              </a:rPr>
-              <a:t>전 과정이 공개 스크립트로 실행 — `python3 src/run_all.py` 한 줄</a:t>
-            </a:r>
-          </a:p>
-        </p:txBody>
-      </p:sp>
-      <p:sp>
-        <p:nvSpPr>
-          <p:cNvPr id="9" name="TextBox 8"/>
-          <p:cNvSpPr txBox="1"/>
-          <p:nvPr/>
-        </p:nvSpPr>
-        <p:spPr>
-          <a:xfrm>
-            <a:off x="932688" y="3218688"/>
-            <a:ext cx="182880" cy="256032"/>
-          </a:xfrm>
-          <a:prstGeom prst="rect">
-            <a:avLst/>
-          </a:prstGeom>
-          <a:noFill/>
-        </p:spPr>
-        <p:txBody>
-          <a:bodyPr wrap="square" lIns="0" rIns="0" tIns="0" bIns="0">
-            <a:spAutoFit/>
-          </a:bodyPr>
-          <a:lstStyle/>
-          <a:p>
-            <a:pPr algn="l">
-              <a:lnSpc>
-                <a:spcPct val="135000"/>
-              </a:lnSpc>
-            </a:pPr>
-            <a:r>
-              <a:rPr sz="1300" b="1">
-                <a:solidFill>
-                  <a:srgbClr val="1BAF7A"/>
-                </a:solidFill>
-                <a:latin typeface="맑은 고딕"/>
-                <a:ea typeface="맑은 고딕"/>
-                <a:cs typeface="맑은 고딕"/>
-              </a:rPr>
-              <a:t>·</a:t>
-            </a:r>
-          </a:p>
-        </p:txBody>
-      </p:sp>
-      <p:sp>
-        <p:nvSpPr>
-          <p:cNvPr id="10" name="TextBox 9"/>
-          <p:cNvSpPr txBox="1"/>
-          <p:nvPr/>
-        </p:nvSpPr>
-        <p:spPr>
-          <a:xfrm>
-            <a:off x="1133856" y="3218688"/>
-            <a:ext cx="4572000" cy="411480"/>
-          </a:xfrm>
-          <a:prstGeom prst="rect">
-            <a:avLst/>
-          </a:prstGeom>
-          <a:noFill/>
-        </p:spPr>
-        <p:txBody>
-          <a:bodyPr wrap="square" lIns="0" rIns="0" tIns="0" bIns="0">
-            <a:spAutoFit/>
-          </a:bodyPr>
-          <a:lstStyle/>
-          <a:p>
-            <a:pPr algn="l">
-              <a:lnSpc>
-                <a:spcPct val="140000"/>
-              </a:lnSpc>
-            </a:pPr>
-            <a:r>
-              <a:rPr sz="1100" b="0">
-                <a:solidFill>
-                  <a:srgbClr val="12151A"/>
-                </a:solidFill>
-                <a:latin typeface="맑은 고딕"/>
-                <a:ea typeface="맑은 고딕"/>
-                <a:cs typeface="맑은 고딕"/>
-              </a:rPr>
-              <a:t>난수 시드 고정(20260831) — 군집·모델 결과가 실행마다 동일</a:t>
-            </a:r>
-          </a:p>
-        </p:txBody>
-      </p:sp>
-      <p:sp>
-        <p:nvSpPr>
-          <p:cNvPr id="11" name="TextBox 10"/>
-          <p:cNvSpPr txBox="1"/>
-          <p:nvPr/>
-        </p:nvSpPr>
-        <p:spPr>
-          <a:xfrm>
-            <a:off x="932688" y="3694176"/>
-            <a:ext cx="182880" cy="256032"/>
-          </a:xfrm>
-          <a:prstGeom prst="rect">
-            <a:avLst/>
-          </a:prstGeom>
-          <a:noFill/>
-        </p:spPr>
-        <p:txBody>
-          <a:bodyPr wrap="square" lIns="0" rIns="0" tIns="0" bIns="0">
-            <a:spAutoFit/>
-          </a:bodyPr>
-          <a:lstStyle/>
-          <a:p>
-            <a:pPr algn="l">
-              <a:lnSpc>
-                <a:spcPct val="135000"/>
-              </a:lnSpc>
-            </a:pPr>
-            <a:r>
-              <a:rPr sz="1300" b="1">
-                <a:solidFill>
-                  <a:srgbClr val="1BAF7A"/>
-                </a:solidFill>
-                <a:latin typeface="맑은 고딕"/>
-                <a:ea typeface="맑은 고딕"/>
-                <a:cs typeface="맑은 고딕"/>
-              </a:rPr>
-              <a:t>·</a:t>
-            </a:r>
-          </a:p>
-        </p:txBody>
-      </p:sp>
-      <p:sp>
-        <p:nvSpPr>
-          <p:cNvPr id="12" name="TextBox 11"/>
-          <p:cNvSpPr txBox="1"/>
-          <p:nvPr/>
-        </p:nvSpPr>
-        <p:spPr>
-          <a:xfrm>
-            <a:off x="1133856" y="3694176"/>
-            <a:ext cx="4572000" cy="411480"/>
-          </a:xfrm>
-          <a:prstGeom prst="rect">
-            <a:avLst/>
-          </a:prstGeom>
-          <a:noFill/>
-        </p:spPr>
-        <p:txBody>
-          <a:bodyPr wrap="square" lIns="0" rIns="0" tIns="0" bIns="0">
-            <a:spAutoFit/>
-          </a:bodyPr>
-          <a:lstStyle/>
-          <a:p>
-            <a:pPr algn="l">
-              <a:lnSpc>
-                <a:spcPct val="140000"/>
-              </a:lnSpc>
-            </a:pPr>
-            <a:r>
-              <a:rPr sz="1100" b="0">
-                <a:solidFill>
-                  <a:srgbClr val="12151A"/>
-                </a:solidFill>
-                <a:latin typeface="맑은 고딕"/>
-                <a:ea typeface="맑은 고딕"/>
-                <a:cs typeface="맑은 고딕"/>
-              </a:rPr>
-              <a:t>그림 8종·분석표 9종·대시보드가 같은 실행에서 함께 생성됨</a:t>
-            </a:r>
-          </a:p>
-        </p:txBody>
-      </p:sp>
-      <p:sp>
-        <p:nvSpPr>
-          <p:cNvPr id="13" name="TextBox 12"/>
-          <p:cNvSpPr txBox="1"/>
-          <p:nvPr/>
-        </p:nvSpPr>
-        <p:spPr>
-          <a:xfrm>
-            <a:off x="932688" y="4169664"/>
-            <a:ext cx="182880" cy="256032"/>
-          </a:xfrm>
-          <a:prstGeom prst="rect">
-            <a:avLst/>
-          </a:prstGeom>
-          <a:noFill/>
-        </p:spPr>
-        <p:txBody>
-          <a:bodyPr wrap="square" lIns="0" rIns="0" tIns="0" bIns="0">
-            <a:spAutoFit/>
-          </a:bodyPr>
-          <a:lstStyle/>
-          <a:p>
-            <a:pPr algn="l">
-              <a:lnSpc>
-                <a:spcPct val="135000"/>
-              </a:lnSpc>
-            </a:pPr>
-            <a:r>
-              <a:rPr sz="1300" b="1">
-                <a:solidFill>
-                  <a:srgbClr val="1BAF7A"/>
-                </a:solidFill>
-                <a:latin typeface="맑은 고딕"/>
-                <a:ea typeface="맑은 고딕"/>
-                <a:cs typeface="맑은 고딕"/>
-              </a:rPr>
-              <a:t>·</a:t>
-            </a:r>
-          </a:p>
-        </p:txBody>
-      </p:sp>
-      <p:sp>
-        <p:nvSpPr>
-          <p:cNvPr id="14" name="TextBox 13"/>
-          <p:cNvSpPr txBox="1"/>
-          <p:nvPr/>
-        </p:nvSpPr>
-        <p:spPr>
-          <a:xfrm>
-            <a:off x="1133856" y="4169664"/>
-            <a:ext cx="4572000" cy="411480"/>
-          </a:xfrm>
-          <a:prstGeom prst="rect">
-            <a:avLst/>
-          </a:prstGeom>
-          <a:noFill/>
-        </p:spPr>
-        <p:txBody>
-          <a:bodyPr wrap="square" lIns="0" rIns="0" tIns="0" bIns="0">
-            <a:spAutoFit/>
-          </a:bodyPr>
-          <a:lstStyle/>
-          <a:p>
-            <a:pPr algn="l">
-              <a:lnSpc>
-                <a:spcPct val="140000"/>
-              </a:lnSpc>
-            </a:pPr>
-            <a:r>
-              <a:rPr sz="1100" b="0">
-                <a:solidFill>
-                  <a:srgbClr val="12151A"/>
-                </a:solidFill>
-                <a:latin typeface="맑은 고딕"/>
-                <a:ea typeface="맑은 고딕"/>
-                <a:cs typeface="맑은 고딕"/>
-              </a:rPr>
-              <a:t>지표 정의·가중치·모델 파라미터가 전부 코드에 명시</a:t>
-            </a:r>
-          </a:p>
-        </p:txBody>
-      </p:sp>
-      <p:sp>
-        <p:nvSpPr>
-          <p:cNvPr id="15" name="Rounded Rectangle 14"/>
-          <p:cNvSpPr/>
-          <p:nvPr/>
-        </p:nvSpPr>
-        <p:spPr>
-          <a:xfrm>
-            <a:off x="6236207" y="2121408"/>
-            <a:ext cx="5257800" cy="2487168"/>
-          </a:xfrm>
-          <a:prstGeom prst="roundRect">
-            <a:avLst>
-              <a:gd name="adj" fmla="val 6000"/>
-            </a:avLst>
-          </a:prstGeom>
-          <a:solidFill>
-            <a:srgbClr val="FFFFFF"/>
-          </a:solidFill>
-          <a:ln w="12700">
-            <a:solidFill>
-              <a:srgbClr val="E4E7EC"/>
-            </a:solidFill>
-          </a:ln>
-          <a:effectLst/>
-        </p:spPr>
-        <p:style>
-          <a:lnRef idx="1">
-            <a:schemeClr val="accent1"/>
-          </a:lnRef>
-          <a:fillRef idx="3">
-            <a:schemeClr val="accent1"/>
-          </a:fillRef>
-          <a:effectRef idx="2">
-            <a:schemeClr val="accent1"/>
-          </a:effectRef>
-          <a:fontRef idx="minor">
-            <a:schemeClr val="lt1"/>
-          </a:fontRef>
-        </p:style>
-        <p:txBody>
-          <a:bodyPr rtlCol="0" anchor="ctr"/>
-          <a:lstStyle/>
-          <a:p/>
-        </p:txBody>
-      </p:sp>
-      <p:sp>
-        <p:nvSpPr>
           <p:cNvPr id="16" name="Rectangle 15"/>
           <p:cNvSpPr/>
           <p:nvPr/>
@@ -18271,7 +16590,7 @@
                 <a:ea typeface="맑은 고딕"/>
                 <a:cs typeface="맑은 고딕"/>
               </a:rPr>
-              <a:t>현재 상태: 실데이터 지표 3/5  ·  제출 전 실데이터 투입 후 재실행 필요</a:t>
+              <a:t>현재 상태: 실데이터 지표 1/5  ·  제출 전 실데이터 투입 후 재실행 필요</a:t>
             </a:r>
           </a:p>
         </p:txBody>
@@ -18353,7 +16672,7 @@
                 <a:ea typeface="맑은 고딕"/>
                 <a:cs typeface="맑은 고딕"/>
               </a:rPr>
-              <a:t>20</a:t>
+              <a:t>19</a:t>
             </a:r>
           </a:p>
         </p:txBody>
@@ -18622,7 +16941,7 @@
                 <a:ea typeface="맑은 고딕"/>
                 <a:cs typeface="맑은 고딕"/>
               </a:rPr>
-              <a:t>0.85배</a:t>
+              <a:t>1.29배</a:t>
             </a:r>
           </a:p>
         </p:txBody>
@@ -18663,7 +16982,7 @@
                 <a:ea typeface="맑은 고딕"/>
                 <a:cs typeface="맑은 고딕"/>
               </a:rPr>
-              <a:t>신도심 평균 CBI 36.7 vs 원도심 평균 43.4</a:t>
+              <a:t>신도심 평균 CBI 48.9 vs 원도심 평균 38.1</a:t>
             </a:r>
           </a:p>
         </p:txBody>
@@ -18704,7 +17023,7 @@
                 <a:ea typeface="맑은 고딕"/>
                 <a:cs typeface="맑은 고딕"/>
               </a:rPr>
-              <a:t>0.177</a:t>
+              <a:t>0.421</a:t>
             </a:r>
           </a:p>
         </p:txBody>
@@ -18745,7 +17064,7 @@
                 <a:ea typeface="맑은 고딕"/>
                 <a:cs typeface="맑은 고딕"/>
               </a:rPr>
-              <a:t>25개 생활권 CBI 지니계수 — 변동계수 34.4%</a:t>
+              <a:t>25개 생활권 CBI 지니계수 — 변동계수 78.6%</a:t>
             </a:r>
           </a:p>
         </p:txBody>
@@ -18786,7 +17105,7 @@
                 <a:ea typeface="맑은 고딕"/>
                 <a:cs typeface="맑은 고딕"/>
               </a:rPr>
-              <a:t>문성동 ↔ 성환읍</a:t>
+              <a:t>문성동 ↔ 성남면</a:t>
             </a:r>
           </a:p>
         </p:txBody>
@@ -18827,7 +17146,7 @@
                 <a:ea typeface="맑은 고딕"/>
                 <a:cs typeface="맑은 고딕"/>
               </a:rPr>
-              <a:t>최상위 70점 ↔ 최하위 14점, 같은 시(市)</a:t>
+              <a:t>최상위 91점 ↔ 최하위 0점, 같은 시(市)</a:t>
             </a:r>
           </a:p>
         </p:txBody>
@@ -18868,7 +17187,7 @@
                 <a:ea typeface="맑은 고딕"/>
                 <a:cs typeface="맑은 고딕"/>
               </a:rPr>
-              <a:t>14개 생활권</a:t>
+              <a:t>11개 생활권</a:t>
             </a:r>
           </a:p>
         </p:txBody>
@@ -19757,7 +18076,7 @@
                           <a:ea typeface="맑은 고딕"/>
                           <a:cs typeface="맑은 고딕"/>
                         </a:rPr>
-                        <a:t>7개 지표로 계산한 참고용 수치 한 장</a:t>
+                        <a:t>3개 지표로 계산한 참고용 수치 한 장</a:t>
                       </a:r>
                     </a:p>
                   </a:txBody>
@@ -23405,7 +21724,7 @@
                           <a:ea typeface="맑은 고딕"/>
                           <a:cs typeface="맑은 고딕"/>
                         </a:rPr>
-                        <a:t>소상공인 상가(상권)정보(data.go.kr)</a:t>
+                        <a:t>미확보</a:t>
                       </a:r>
                     </a:p>
                   </a:txBody>
@@ -23430,7 +21749,7 @@
                           <a:ea typeface="맑은 고딕"/>
                           <a:cs typeface="맑은 고딕"/>
                         </a:rPr>
-                        <a:t>13,045건 매칭 / 25개 생활권 · 개폐업 시계열 없음</a:t>
+                        <a:t>상가정보 또는 LOCALDATA 인허가 파일을 넣으면 산출됩니다</a:t>
                       </a:r>
                     </a:p>
                   </a:txBody>
@@ -23482,7 +21801,7 @@
                           <a:ea typeface="맑은 고딕"/>
                           <a:cs typeface="맑은 고딕"/>
                         </a:rPr>
-                        <a:t>실데이터</a:t>
+                        <a:t>nan</a:t>
                       </a:r>
                     </a:p>
                   </a:txBody>
@@ -23507,7 +21826,7 @@
                           <a:ea typeface="맑은 고딕"/>
                           <a:cs typeface="맑은 고딕"/>
                         </a:rPr>
-                        <a:t>공공데이터포털 표준데이터 + 상가정보</a:t>
+                        <a:t>미확보</a:t>
                       </a:r>
                     </a:p>
                   </a:txBody>
@@ -23532,7 +21851,7 @@
                           <a:ea typeface="맑은 고딕"/>
                           <a:cs typeface="맑은 고딕"/>
                         </a:rPr>
-                        <a:t>facility_daycare.csv(239) / facility_hospital.csv(366) / facility_park.csv(133) / 상가정보(490</a:t>
+                        <a:t>facility_*.csv 또는 상가정보를 넣으면 산출됩니다</a:t>
                       </a:r>
                     </a:p>
                   </a:txBody>
@@ -24528,7 +22847,7 @@
                           <a:ea typeface="맑은 고딕"/>
                           <a:cs typeface="맑은 고딕"/>
                         </a:rPr>
-                        <a:t>신안동, 성정동, 청룡동, 신방동, 쌍용동</a:t>
+                        <a:t>신안동, 청룡동, 성정동, 신방동, 쌍용동</a:t>
                       </a:r>
                     </a:p>
                   </a:txBody>
@@ -24580,7 +22899,7 @@
                           <a:ea typeface="맑은 고딕"/>
                           <a:cs typeface="맑은 고딕"/>
                         </a:rPr>
-                        <a:t>풍세면, 수신면, 동면, 성남면, 북면, 광덕면</a:t>
+                        <a:t>풍세면, 병천면, 입장면, 북면, 광덕면, 수신면</a:t>
                       </a:r>
                     </a:p>
                   </a:txBody>
@@ -24632,7 +22951,7 @@
                           <a:ea typeface="맑은 고딕"/>
                           <a:cs typeface="맑은 고딕"/>
                         </a:rPr>
-                        <a:t>부성동, 백석동, 불당동</a:t>
+                        <a:t>부성동, 불당동, 백석동</a:t>
                       </a:r>
                     </a:p>
                   </a:txBody>
@@ -24684,7 +23003,7 @@
                           <a:ea typeface="맑은 고딕"/>
                           <a:cs typeface="맑은 고딕"/>
                         </a:rPr>
-                        <a:t>문성동, 중앙동, 봉명동, 일봉동, 원성동</a:t>
+                        <a:t>문성동, 일봉동, 봉명동, 원성동, 중앙동</a:t>
                       </a:r>
                     </a:p>
                   </a:txBody>
@@ -25010,7 +23329,7 @@
                 <a:ea typeface="맑은 고딕"/>
                 <a:cs typeface="맑은 고딕"/>
               </a:rPr>
-              <a:t>5대 도메인 · 7개 지표</a:t>
+              <a:t>5대 도메인 · 3개 지표</a:t>
             </a:r>
           </a:p>
         </p:txBody>
@@ -26169,7 +24488,7 @@
                 <a:ea typeface="맑은 고딕"/>
                 <a:cs typeface="맑은 고딕"/>
               </a:rPr>
-              <a:t>살펴본 결과 — 25개 생활권 CBI 균형발전지수</a:t>
+              <a:t>살펴본 결과 — 25개 생활권 인구활력지수(잠정)</a:t>
             </a:r>
           </a:p>
         </p:txBody>
@@ -26210,7 +24529,7 @@
                 <a:ea typeface="맑은 고딕"/>
                 <a:cs typeface="맑은 고딕"/>
               </a:rPr>
-              <a:t>최상위 문성동 70점, 최하위 성환읍 14점. (3개 도메인 · 7개 지표)</a:t>
+              <a:t>최상위 문성동 91점, 최하위 성남면 0점. (인구활력 도메인만 확보 — 균형발전지수로 부르기에는 이릅니다)</a:t>
             </a:r>
           </a:p>
         </p:txBody>
@@ -26231,8 +24550,8 @@
         </p:blipFill>
         <p:spPr>
           <a:xfrm>
-            <a:off x="1765447" y="2084831"/>
-            <a:ext cx="4186641" cy="4114800"/>
+            <a:off x="1491705" y="2084831"/>
+            <a:ext cx="4734125" cy="4114800"/>
           </a:xfrm>
           <a:prstGeom prst="rect">
             <a:avLst/>
@@ -26404,7 +24723,7 @@
                 <a:ea typeface="맑은 고딕"/>
                 <a:cs typeface="맑은 고딕"/>
               </a:rPr>
-              <a:t>0.85배</a:t>
+              <a:t>1.29배</a:t>
             </a:r>
           </a:p>
         </p:txBody>
@@ -26445,7 +24764,7 @@
                 <a:ea typeface="맑은 고딕"/>
                 <a:cs typeface="맑은 고딕"/>
               </a:rPr>
-              <a:t>36.7 vs 43.4</a:t>
+              <a:t>48.9 vs 38.1</a:t>
             </a:r>
           </a:p>
         </p:txBody>
@@ -26615,7 +24934,7 @@
                 <a:ea typeface="맑은 고딕"/>
                 <a:cs typeface="맑은 고딕"/>
               </a:rPr>
-              <a:t>0.177</a:t>
+              <a:t>0.421</a:t>
             </a:r>
           </a:p>
         </p:txBody>
@@ -26656,7 +24975,7 @@
                 <a:ea typeface="맑은 고딕"/>
                 <a:cs typeface="맑은 고딕"/>
               </a:rPr>
-              <a:t>변동계수 34.4%</a:t>
+              <a:t>변동계수 78.6%</a:t>
             </a:r>
           </a:p>
         </p:txBody>
@@ -26867,7 +25186,7 @@
                 <a:ea typeface="맑은 고딕"/>
                 <a:cs typeface="맑은 고딕"/>
               </a:rPr>
-              <a:t>실루엣 계수 0.47</a:t>
+              <a:t>실루엣 계수 0.59</a:t>
             </a:r>
           </a:p>
         </p:txBody>

--- a/deliverables/기획서_천안균형발전나침반_CBC.pptx
+++ b/deliverables/기획서_천안균형발전나침반_CBC.pptx
@@ -25,6 +25,7 @@
     <p:sldId id="273" r:id="rId24"/>
     <p:sldId id="274" r:id="rId25"/>
     <p:sldId id="275" r:id="rId26"/>
+    <p:sldId id="276" r:id="rId27"/>
   </p:sldIdLst>
   <p:sldSz cx="12191695" cy="6858000" type="screen4x3"/>
   <p:notesSz cx="6858000" cy="9144000"/>
@@ -3316,48 +3317,7 @@
       </p:sp>
       <p:sp>
         <p:nvSpPr>
-          <p:cNvPr id="7" name="TextBox 6"/>
-          <p:cNvSpPr txBox="1"/>
-          <p:nvPr/>
-        </p:nvSpPr>
-        <p:spPr>
-          <a:xfrm>
-            <a:off x="1051560" y="5815584"/>
-            <a:ext cx="9144000" cy="274320"/>
-          </a:xfrm>
-          <a:prstGeom prst="rect">
-            <a:avLst/>
-          </a:prstGeom>
-          <a:noFill/>
-        </p:spPr>
-        <p:txBody>
-          <a:bodyPr wrap="square" lIns="0" rIns="0" tIns="0" bIns="0">
-            <a:spAutoFit/>
-          </a:bodyPr>
-          <a:lstStyle/>
-          <a:p>
-            <a:pPr algn="l">
-              <a:lnSpc>
-                <a:spcPct val="135000"/>
-              </a:lnSpc>
-            </a:pPr>
-            <a:r>
-              <a:rPr sz="1000" b="0">
-                <a:solidFill>
-                  <a:srgbClr val="FAB219"/>
-                </a:solidFill>
-                <a:latin typeface="맑은 고딕"/>
-                <a:ea typeface="맑은 고딕"/>
-                <a:cs typeface="맑은 고딕"/>
-              </a:rPr>
-              <a:t>※ 현 단계 산출 범위: 인구활력 도메인만 확보 — 균형발전지수로 부르기에는 이릅니다</a:t>
-            </a:r>
-          </a:p>
-        </p:txBody>
-      </p:sp>
-      <p:sp>
-        <p:nvSpPr>
-          <p:cNvPr id="8" name="Rectangle 7"/>
+          <p:cNvPr id="7" name="Rectangle 6"/>
           <p:cNvSpPr/>
           <p:nvPr/>
         </p:nvSpPr>
@@ -3399,7 +3359,7 @@
       </p:sp>
       <p:sp>
         <p:nvSpPr>
-          <p:cNvPr id="9" name="TextBox 8"/>
+          <p:cNvPr id="8" name="TextBox 7"/>
           <p:cNvSpPr txBox="1"/>
           <p:nvPr/>
         </p:nvSpPr>
@@ -3461,7 +3421,7 @@
       </p:sp>
       <p:sp>
         <p:nvSpPr>
-          <p:cNvPr id="10" name="TextBox 9"/>
+          <p:cNvPr id="9" name="TextBox 8"/>
           <p:cNvSpPr txBox="1"/>
           <p:nvPr/>
         </p:nvSpPr>
@@ -3502,7 +3462,7 @@
       </p:sp>
       <p:sp>
         <p:nvSpPr>
-          <p:cNvPr id="11" name="TextBox 10"/>
+          <p:cNvPr id="10" name="TextBox 9"/>
           <p:cNvSpPr txBox="1"/>
           <p:nvPr/>
         </p:nvSpPr>
@@ -3543,7 +3503,7 @@
       </p:sp>
       <p:sp>
         <p:nvSpPr>
-          <p:cNvPr id="12" name="TextBox 11"/>
+          <p:cNvPr id="11" name="TextBox 10"/>
           <p:cNvSpPr txBox="1"/>
           <p:nvPr/>
         </p:nvSpPr>
@@ -3584,7 +3544,7 @@
       </p:sp>
       <p:sp>
         <p:nvSpPr>
-          <p:cNvPr id="13" name="TextBox 12"/>
+          <p:cNvPr id="12" name="TextBox 11"/>
           <p:cNvSpPr txBox="1"/>
           <p:nvPr/>
         </p:nvSpPr>
@@ -3625,7 +3585,7 @@
       </p:sp>
       <p:sp>
         <p:nvSpPr>
-          <p:cNvPr id="14" name="TextBox 13"/>
+          <p:cNvPr id="13" name="TextBox 12"/>
           <p:cNvSpPr txBox="1"/>
           <p:nvPr/>
         </p:nvSpPr>
@@ -3666,7 +3626,7 @@
       </p:sp>
       <p:sp>
         <p:nvSpPr>
-          <p:cNvPr id="15" name="TextBox 14"/>
+          <p:cNvPr id="14" name="TextBox 13"/>
           <p:cNvSpPr txBox="1"/>
           <p:nvPr/>
         </p:nvSpPr>
@@ -3700,14 +3660,14 @@
                 <a:ea typeface="맑은 고딕"/>
                 <a:cs typeface="맑은 고딕"/>
               </a:rPr>
-              <a:t>25개 생활권 · 지표 3종</a:t>
-            </a:r>
-          </a:p>
-        </p:txBody>
-      </p:sp>
-      <p:sp>
-        <p:nvSpPr>
-          <p:cNvPr id="16" name="TextBox 15"/>
+              <a:t>25개 생활권 · 지표 7종</a:t>
+            </a:r>
+          </a:p>
+        </p:txBody>
+      </p:sp>
+      <p:sp>
+        <p:nvSpPr>
+          <p:cNvPr id="15" name="TextBox 14"/>
           <p:cNvSpPr txBox="1"/>
           <p:nvPr/>
         </p:nvSpPr>
@@ -3748,7 +3708,7 @@
       </p:sp>
       <p:sp>
         <p:nvSpPr>
-          <p:cNvPr id="17" name="TextBox 16"/>
+          <p:cNvPr id="16" name="TextBox 15"/>
           <p:cNvSpPr txBox="1"/>
           <p:nvPr/>
         </p:nvSpPr>
@@ -3923,7 +3883,7 @@
                 <a:ea typeface="맑은 고딕"/>
                 <a:cs typeface="맑은 고딕"/>
               </a:rPr>
-              <a:t>원도심과 농촌면은 지수가 모두 낮게 나왔습니다. 그런데 항목을 나눠 보니 사정이 서로 달랐습니다.</a:t>
+              <a:t>항목을 나눠 보니 원도심과 농촌면의 사정이 서로 달랐습니다. 원도심은 시설과 상권을 갖췄는데 사람이 빠지고, 농촌면은 전반이 부족합니다.</a:t>
             </a:r>
           </a:p>
         </p:txBody>
@@ -4073,7 +4033,7 @@
                 <a:ea typeface="맑은 고딕"/>
                 <a:cs typeface="맑은 고딕"/>
               </a:rPr>
-              <a:t>시설은 이미 갖춰져 있습니다.</a:t>
+              <a:t>생활SOC 61 · 상권여건 53 · 인구활력 38</a:t>
             </a:r>
           </a:p>
           <a:p>
@@ -4094,7 +4054,7 @@
                 <a:ea typeface="맑은 고딕"/>
                 <a:cs typeface="맑은 고딕"/>
               </a:rPr>
-              <a:t>어려운 쪽은 상권과 인구였습니다.</a:t>
+              <a:t>→ 부족한 것은 시설이 아니라 사람입니다.</a:t>
             </a:r>
           </a:p>
           <a:p>
@@ -4115,7 +4075,7 @@
                 <a:ea typeface="맑은 고딕"/>
                 <a:cs typeface="맑은 고딕"/>
               </a:rPr>
-              <a:t>→ 새로 짓기보다, 비어 있는 공간을 다시 쓰는 방향이 맞지 않을까 합니다</a:t>
+              <a:t>   새로 짓기보다 비어 있는 공간을 다시 쓰는 방향이 맞지 않을까 합니다</a:t>
             </a:r>
           </a:p>
         </p:txBody>
@@ -4241,7 +4201,7 @@
                 <a:ea typeface="맑은 고딕"/>
                 <a:cs typeface="맑은 고딕"/>
               </a:rPr>
-              <a:t>가까운 시설 자체가 부족합니다.</a:t>
+              <a:t>인구활력 16 · 생활SOC 8 · 상권여건 6</a:t>
             </a:r>
           </a:p>
           <a:p>
@@ -4262,7 +4222,7 @@
                 <a:ea typeface="맑은 고딕"/>
                 <a:cs typeface="맑은 고딕"/>
               </a:rPr>
-              <a:t>대중교통 여건도 넉넉하지 않습니다.</a:t>
+              <a:t>→ 특정 항목이 아니라 전반이 부족합니다.</a:t>
             </a:r>
           </a:p>
           <a:p>
@@ -4283,7 +4243,7 @@
                 <a:ea typeface="맑은 고딕"/>
                 <a:cs typeface="맑은 고딕"/>
               </a:rPr>
-              <a:t>→ 거점 복합시설과 이동 지원을 함께 보시면 좋겠습니다</a:t>
+              <a:t>   거점 복합시설과 이동 지원을 함께 보시면 좋겠습니다</a:t>
             </a:r>
           </a:p>
         </p:txBody>
@@ -4762,7 +4722,7 @@
                 <a:ea typeface="맑은 고딕"/>
                 <a:cs typeface="맑은 고딕"/>
               </a:rPr>
-              <a:t>5년 인구증감률 상위는 1(+158%), 0(+81%)으로, 두 곳 모두 신축 입주가 이어진 지역입니다. 원도심에 속한 문성동도 사람이 돌아왔습니다.</a:t>
+              <a:t>5년 인구증감률 상위는 11(+158%), 1(+81%)으로, 두 곳 모두 신축 입주가 이어진 지역입니다. 원도심에 속한 문성동도 사람이 돌아왔습니다.</a:t>
             </a:r>
           </a:p>
           <a:p>
@@ -5873,7 +5833,7 @@
                 <a:ea typeface="맑은 고딕"/>
                 <a:cs typeface="맑은 고딕"/>
               </a:rPr>
-              <a:t>69%</a:t>
+              <a:t>66%</a:t>
             </a:r>
           </a:p>
         </p:txBody>
@@ -5955,7 +5915,7 @@
                 <a:ea typeface="맑은 고딕"/>
                 <a:cs typeface="맑은 고딕"/>
               </a:rPr>
-              <a:t>9.85 (베이스라인 10.4)</a:t>
+              <a:t>10.79 (베이스라인 10.4)</a:t>
             </a:r>
           </a:p>
         </p:txBody>
@@ -6037,7 +5997,7 @@
                 <a:ea typeface="맑은 고딕"/>
                 <a:cs typeface="맑은 고딕"/>
               </a:rPr>
-              <a:t>+5.3%</a:t>
+              <a:t>-3.7%</a:t>
             </a:r>
           </a:p>
         </p:txBody>
@@ -6119,7 +6079,7 @@
                 <a:ea typeface="맑은 고딕"/>
                 <a:cs typeface="맑은 고딕"/>
               </a:rPr>
-              <a:t>-0.02</a:t>
+              <a:t>-0.135</a:t>
             </a:r>
           </a:p>
         </p:txBody>
@@ -6800,7 +6760,7 @@
                           <a:ea typeface="맑은 고딕"/>
                           <a:cs typeface="맑은 고딕"/>
                         </a:rPr>
-                        <a:t>+10</a:t>
+                        <a:t>+7</a:t>
                       </a:r>
                     </a:p>
                   </a:txBody>
@@ -6902,7 +6862,7 @@
                           <a:ea typeface="맑은 고딕"/>
                           <a:cs typeface="맑은 고딕"/>
                         </a:rPr>
-                        <a:t>+4</a:t>
+                        <a:t>+5</a:t>
                       </a:r>
                     </a:p>
                   </a:txBody>
@@ -7004,7 +6964,109 @@
                           <a:ea typeface="맑은 고딕"/>
                           <a:cs typeface="맑은 고딕"/>
                         </a:rPr>
-                        <a:t>+3</a:t>
+                        <a:t>+4</a:t>
+                      </a:r>
+                    </a:p>
+                  </a:txBody>
+                  <a:tcPr anchor="ctr">
+                    <a:solidFill>
+                      <a:srgbClr val="FFFFFF"/>
+                    </a:solidFill>
+                  </a:tcPr>
+                </a:tc>
+              </a:tr>
+              <a:tr h="256032">
+                <a:tc>
+                  <a:txBody>
+                    <a:bodyPr/>
+                    <a:lstStyle/>
+                    <a:p>
+                      <a:pPr algn="l"/>
+                      <a:r>
+                        <a:rPr sz="900">
+                          <a:solidFill>
+                            <a:srgbClr val="12151A"/>
+                          </a:solidFill>
+                          <a:latin typeface="맑은 고딕"/>
+                          <a:ea typeface="맑은 고딕"/>
+                          <a:cs typeface="맑은 고딕"/>
+                        </a:rPr>
+                        <a:t>성환읍</a:t>
+                      </a:r>
+                    </a:p>
+                  </a:txBody>
+                  <a:tcPr anchor="ctr">
+                    <a:solidFill>
+                      <a:srgbClr val="FFFFFF"/>
+                    </a:solidFill>
+                  </a:tcPr>
+                </a:tc>
+                <a:tc>
+                  <a:txBody>
+                    <a:bodyPr/>
+                    <a:lstStyle/>
+                    <a:p>
+                      <a:pPr algn="ctr"/>
+                      <a:r>
+                        <a:rPr sz="900">
+                          <a:solidFill>
+                            <a:srgbClr val="12151A"/>
+                          </a:solidFill>
+                          <a:latin typeface="맑은 고딕"/>
+                          <a:ea typeface="맑은 고딕"/>
+                          <a:cs typeface="맑은 고딕"/>
+                        </a:rPr>
+                        <a:t>74</a:t>
+                      </a:r>
+                    </a:p>
+                  </a:txBody>
+                  <a:tcPr anchor="ctr">
+                    <a:solidFill>
+                      <a:srgbClr val="FFFFFF"/>
+                    </a:solidFill>
+                  </a:tcPr>
+                </a:tc>
+                <a:tc>
+                  <a:txBody>
+                    <a:bodyPr/>
+                    <a:lstStyle/>
+                    <a:p>
+                      <a:pPr algn="ctr"/>
+                      <a:r>
+                        <a:rPr sz="900">
+                          <a:solidFill>
+                            <a:srgbClr val="12151A"/>
+                          </a:solidFill>
+                          <a:latin typeface="맑은 고딕"/>
+                          <a:ea typeface="맑은 고딕"/>
+                          <a:cs typeface="맑은 고딕"/>
+                        </a:rPr>
+                        <a:t>94</a:t>
+                      </a:r>
+                    </a:p>
+                  </a:txBody>
+                  <a:tcPr anchor="ctr">
+                    <a:solidFill>
+                      <a:srgbClr val="FFFFFF"/>
+                    </a:solidFill>
+                  </a:tcPr>
+                </a:tc>
+                <a:tc>
+                  <a:txBody>
+                    <a:bodyPr/>
+                    <a:lstStyle/>
+                    <a:p>
+                      <a:pPr algn="ctr"/>
+                      <a:r>
+                        <a:rPr sz="900">
+                          <a:solidFill>
+                            <a:srgbClr val="12151A"/>
+                          </a:solidFill>
+                          <a:latin typeface="맑은 고딕"/>
+                          <a:ea typeface="맑은 고딕"/>
+                          <a:cs typeface="맑은 고딕"/>
+                        </a:rPr>
+                        <a:t>+20</a:t>
                       </a:r>
                     </a:p>
                   </a:txBody>
@@ -7081,7 +7143,7 @@
                           <a:ea typeface="맑은 고딕"/>
                           <a:cs typeface="맑은 고딕"/>
                         </a:rPr>
-                        <a:t>96</a:t>
+                        <a:t>93</a:t>
                       </a:r>
                     </a:p>
                   </a:txBody>
@@ -7106,109 +7168,7 @@
                           <a:ea typeface="맑은 고딕"/>
                           <a:cs typeface="맑은 고딕"/>
                         </a:rPr>
-                        <a:t>+9</a:t>
-                      </a:r>
-                    </a:p>
-                  </a:txBody>
-                  <a:tcPr anchor="ctr">
-                    <a:solidFill>
-                      <a:srgbClr val="FFFFFF"/>
-                    </a:solidFill>
-                  </a:tcPr>
-                </a:tc>
-              </a:tr>
-              <a:tr h="256032">
-                <a:tc>
-                  <a:txBody>
-                    <a:bodyPr/>
-                    <a:lstStyle/>
-                    <a:p>
-                      <a:pPr algn="l"/>
-                      <a:r>
-                        <a:rPr sz="900">
-                          <a:solidFill>
-                            <a:srgbClr val="12151A"/>
-                          </a:solidFill>
-                          <a:latin typeface="맑은 고딕"/>
-                          <a:ea typeface="맑은 고딕"/>
-                          <a:cs typeface="맑은 고딕"/>
-                        </a:rPr>
-                        <a:t>성환읍</a:t>
-                      </a:r>
-                    </a:p>
-                  </a:txBody>
-                  <a:tcPr anchor="ctr">
-                    <a:solidFill>
-                      <a:srgbClr val="FFFFFF"/>
-                    </a:solidFill>
-                  </a:tcPr>
-                </a:tc>
-                <a:tc>
-                  <a:txBody>
-                    <a:bodyPr/>
-                    <a:lstStyle/>
-                    <a:p>
-                      <a:pPr algn="ctr"/>
-                      <a:r>
-                        <a:rPr sz="900">
-                          <a:solidFill>
-                            <a:srgbClr val="12151A"/>
-                          </a:solidFill>
-                          <a:latin typeface="맑은 고딕"/>
-                          <a:ea typeface="맑은 고딕"/>
-                          <a:cs typeface="맑은 고딕"/>
-                        </a:rPr>
-                        <a:t>74</a:t>
-                      </a:r>
-                    </a:p>
-                  </a:txBody>
-                  <a:tcPr anchor="ctr">
-                    <a:solidFill>
-                      <a:srgbClr val="FFFFFF"/>
-                    </a:solidFill>
-                  </a:tcPr>
-                </a:tc>
-                <a:tc>
-                  <a:txBody>
-                    <a:bodyPr/>
-                    <a:lstStyle/>
-                    <a:p>
-                      <a:pPr algn="ctr"/>
-                      <a:r>
-                        <a:rPr sz="900">
-                          <a:solidFill>
-                            <a:srgbClr val="12151A"/>
-                          </a:solidFill>
-                          <a:latin typeface="맑은 고딕"/>
-                          <a:ea typeface="맑은 고딕"/>
-                          <a:cs typeface="맑은 고딕"/>
-                        </a:rPr>
-                        <a:t>95</a:t>
-                      </a:r>
-                    </a:p>
-                  </a:txBody>
-                  <a:tcPr anchor="ctr">
-                    <a:solidFill>
-                      <a:srgbClr val="FFFFFF"/>
-                    </a:solidFill>
-                  </a:tcPr>
-                </a:tc>
-                <a:tc>
-                  <a:txBody>
-                    <a:bodyPr/>
-                    <a:lstStyle/>
-                    <a:p>
-                      <a:pPr algn="ctr"/>
-                      <a:r>
-                        <a:rPr sz="900">
-                          <a:solidFill>
-                            <a:srgbClr val="12151A"/>
-                          </a:solidFill>
-                          <a:latin typeface="맑은 고딕"/>
-                          <a:ea typeface="맑은 고딕"/>
-                          <a:cs typeface="맑은 고딕"/>
-                        </a:rPr>
-                        <a:t>+21</a:t>
+                        <a:t>+5</a:t>
                       </a:r>
                     </a:p>
                   </a:txBody>
@@ -8534,7 +8494,7 @@
                 <a:ea typeface="맑은 고딕"/>
                 <a:cs typeface="맑은 고딕"/>
               </a:rPr>
-              <a:t>처방 결과 — 생활SOC 위치 자료 확보 후 산출</a:t>
+              <a:t>처방 결과 — 투자 우선순위</a:t>
             </a:r>
           </a:p>
         </p:txBody>
@@ -8575,55 +8535,35 @@
                 <a:ea typeface="맑은 고딕"/>
                 <a:cs typeface="맑은 고딕"/>
               </a:rPr>
-              <a:t>커버리지 계산에는 기존 생활SOC의 위치가 필요합니다. 현재는 미확보 상태입니다.</a:t>
-            </a:r>
-          </a:p>
-        </p:txBody>
-      </p:sp>
-      <p:sp>
-        <p:nvSpPr>
-          <p:cNvPr id="5" name="Rounded Rectangle 4"/>
-          <p:cNvSpPr/>
-          <p:nvPr/>
-        </p:nvSpPr>
-        <p:spPr>
-          <a:xfrm>
-            <a:off x="658368" y="2377440"/>
-            <a:ext cx="10874959" cy="1371600"/>
-          </a:xfrm>
-          <a:prstGeom prst="roundRect">
-            <a:avLst>
-              <a:gd name="adj" fmla="val 6000"/>
-            </a:avLst>
-          </a:prstGeom>
-          <a:solidFill>
-            <a:srgbClr val="F6F7F9"/>
-          </a:solidFill>
-          <a:ln>
-            <a:noFill/>
-          </a:ln>
-          <a:effectLst/>
-        </p:spPr>
-        <p:style>
-          <a:lnRef idx="1">
-            <a:schemeClr val="accent1"/>
-          </a:lnRef>
-          <a:fillRef idx="3">
-            <a:schemeClr val="accent1"/>
-          </a:fillRef>
-          <a:effectRef idx="2">
-            <a:schemeClr val="accent1"/>
-          </a:effectRef>
-          <a:fontRef idx="minor">
-            <a:schemeClr val="lt1"/>
-          </a:fontRef>
-        </p:style>
-        <p:txBody>
-          <a:bodyPr rtlCol="0" anchor="ctr"/>
-          <a:lstStyle/>
-          <a:p/>
-        </p:txBody>
-      </p:sp>
+              <a:t>상위 12개소 우선 투자 시 취약수요 커버리지 +40.2%p, 신규 수혜인구 약 204,062명.</a:t>
+            </a:r>
+          </a:p>
+        </p:txBody>
+      </p:sp>
+      <p:pic>
+        <p:nvPicPr>
+          <p:cNvPr id="5" name="Picture 4" descr="07_투자입지_지도.png"/>
+          <p:cNvPicPr>
+            <a:picLocks noChangeAspect="1"/>
+          </p:cNvPicPr>
+          <p:nvPr/>
+        </p:nvPicPr>
+        <p:blipFill>
+          <a:blip r:embed="rId2"/>
+          <a:stretch>
+            <a:fillRect/>
+          </a:stretch>
+        </p:blipFill>
+        <p:spPr>
+          <a:xfrm>
+            <a:off x="1180496" y="2212848"/>
+            <a:ext cx="3802062" cy="3931920"/>
+          </a:xfrm>
+          <a:prstGeom prst="rect">
+            <a:avLst/>
+          </a:prstGeom>
+        </p:spPr>
+      </p:pic>
       <p:sp>
         <p:nvSpPr>
           <p:cNvPr id="6" name="TextBox 5"/>
@@ -8632,8 +8572,8 @@
         </p:nvSpPr>
         <p:spPr>
           <a:xfrm>
-            <a:off x="978407" y="2615184"/>
-            <a:ext cx="10424160" cy="292608"/>
+            <a:off x="5779007" y="2212848"/>
+            <a:ext cx="5760720" cy="274320"/>
           </a:xfrm>
           <a:prstGeom prst="rect">
             <a:avLst/>
@@ -8652,7 +8592,7 @@
               </a:lnSpc>
             </a:pPr>
             <a:r>
-              <a:rPr sz="1450" b="1">
+              <a:rPr sz="1350" b="1">
                 <a:solidFill>
                   <a:srgbClr val="12151A"/>
                 </a:solidFill>
@@ -8660,73 +8600,1437 @@
                 <a:ea typeface="맑은 고딕"/>
                 <a:cs typeface="맑은 고딕"/>
               </a:rPr>
-              <a:t>설계와 코드는 완성되어 있고, 자료가 들어오면 즉시 산출됩니다.</a:t>
-            </a:r>
-          </a:p>
-        </p:txBody>
-      </p:sp>
-      <p:sp>
-        <p:nvSpPr>
-          <p:cNvPr id="7" name="TextBox 6"/>
-          <p:cNvSpPr txBox="1"/>
-          <p:nvPr/>
-        </p:nvSpPr>
-        <p:spPr>
-          <a:xfrm>
-            <a:off x="978407" y="3017520"/>
-            <a:ext cx="10424160" cy="640080"/>
-          </a:xfrm>
-          <a:prstGeom prst="rect">
-            <a:avLst/>
-          </a:prstGeom>
-          <a:noFill/>
-        </p:spPr>
-        <p:txBody>
-          <a:bodyPr wrap="square" lIns="0" rIns="0" tIns="0" bIns="0">
-            <a:spAutoFit/>
-          </a:bodyPr>
-          <a:lstStyle/>
-          <a:p>
-            <a:pPr algn="l">
-              <a:lnSpc>
-                <a:spcPct val="150000"/>
-              </a:lnSpc>
-            </a:pPr>
-            <a:r>
-              <a:rPr sz="1250" b="0">
-                <a:solidFill>
-                  <a:srgbClr val="52514E"/>
-                </a:solidFill>
-                <a:latin typeface="맑은 고딕"/>
-                <a:ea typeface="맑은 고딕"/>
-                <a:cs typeface="맑은 고딕"/>
-              </a:rPr>
-              <a:t>필요한 자료: 소상공인 상가(상권)정보 또는 공공데이터포털 생활SOC 표준데이터(위경도 포함)</a:t>
-            </a:r>
-          </a:p>
-          <a:p>
-            <a:pPr algn="l">
-              <a:lnSpc>
-                <a:spcPct val="150000"/>
-              </a:lnSpc>
-              <a:spcBef>
-                <a:spcPts val="0"/>
-              </a:spcBef>
-            </a:pPr>
-            <a:r>
-              <a:rPr sz="1250" b="0">
-                <a:solidFill>
-                  <a:srgbClr val="52514E"/>
-                </a:solidFill>
-                <a:latin typeface="맑은 고딕"/>
-                <a:ea typeface="맑은 고딕"/>
-                <a:cs typeface="맑은 고딕"/>
-              </a:rPr>
-              <a:t>산출물: 순위 · 생활권 · 시설유형 · 새로 닿는 인구 · 커버리지 개선폭이 담긴 표와 지도</a:t>
-            </a:r>
-          </a:p>
-        </p:txBody>
-      </p:sp>
+              <a:t>AI 추천 투자 순위 (상위 10)</a:t>
+            </a:r>
+          </a:p>
+        </p:txBody>
+      </p:sp>
+      <p:graphicFrame>
+        <p:nvGraphicFramePr>
+          <p:cNvPr id="7" name="Table 6"/>
+          <p:cNvGraphicFramePr>
+            <a:graphicFrameLocks noGrp="1"/>
+          </p:cNvGraphicFramePr>
+          <p:nvPr/>
+        </p:nvGraphicFramePr>
+        <p:xfrm>
+          <a:off x="5779007" y="2560320"/>
+          <a:ext cx="5760715" cy="3369564"/>
+        </p:xfrm>
+        <a:graphic>
+          <a:graphicData uri="http://schemas.openxmlformats.org/drawingml/2006/table">
+            <a:tbl>
+              <a:tblPr firstRow="1" bandRow="1">
+                <a:tableStyleId>{5C22544A-7EE6-4342-B048-85BDC9FD1C3A}</a:tableStyleId>
+              </a:tblPr>
+              <a:tblGrid>
+                <a:gridCol w="640079"/>
+                <a:gridCol w="1280159"/>
+                <a:gridCol w="1097279"/>
+                <a:gridCol w="1463039"/>
+                <a:gridCol w="1280159"/>
+              </a:tblGrid>
+              <a:tr h="306324">
+                <a:tc>
+                  <a:txBody>
+                    <a:bodyPr/>
+                    <a:lstStyle/>
+                    <a:p>
+                      <a:pPr algn="ctr"/>
+                      <a:r>
+                        <a:rPr sz="1000" b="1">
+                          <a:solidFill>
+                            <a:srgbClr val="12151A"/>
+                          </a:solidFill>
+                          <a:latin typeface="맑은 고딕"/>
+                          <a:ea typeface="맑은 고딕"/>
+                          <a:cs typeface="맑은 고딕"/>
+                        </a:rPr>
+                        <a:t>순위</a:t>
+                      </a:r>
+                    </a:p>
+                  </a:txBody>
+                  <a:tcPr anchor="ctr">
+                    <a:solidFill>
+                      <a:srgbClr val="F6F7F9"/>
+                    </a:solidFill>
+                  </a:tcPr>
+                </a:tc>
+                <a:tc>
+                  <a:txBody>
+                    <a:bodyPr/>
+                    <a:lstStyle/>
+                    <a:p>
+                      <a:pPr algn="ctr"/>
+                      <a:r>
+                        <a:rPr sz="1000" b="1">
+                          <a:solidFill>
+                            <a:srgbClr val="12151A"/>
+                          </a:solidFill>
+                          <a:latin typeface="맑은 고딕"/>
+                          <a:ea typeface="맑은 고딕"/>
+                          <a:cs typeface="맑은 고딕"/>
+                        </a:rPr>
+                        <a:t>생활권</a:t>
+                      </a:r>
+                    </a:p>
+                  </a:txBody>
+                  <a:tcPr anchor="ctr">
+                    <a:solidFill>
+                      <a:srgbClr val="F6F7F9"/>
+                    </a:solidFill>
+                  </a:tcPr>
+                </a:tc>
+                <a:tc>
+                  <a:txBody>
+                    <a:bodyPr/>
+                    <a:lstStyle/>
+                    <a:p>
+                      <a:pPr algn="ctr"/>
+                      <a:r>
+                        <a:rPr sz="1000" b="1">
+                          <a:solidFill>
+                            <a:srgbClr val="12151A"/>
+                          </a:solidFill>
+                          <a:latin typeface="맑은 고딕"/>
+                          <a:ea typeface="맑은 고딕"/>
+                          <a:cs typeface="맑은 고딕"/>
+                        </a:rPr>
+                        <a:t>시설유형</a:t>
+                      </a:r>
+                    </a:p>
+                  </a:txBody>
+                  <a:tcPr anchor="ctr">
+                    <a:solidFill>
+                      <a:srgbClr val="F6F7F9"/>
+                    </a:solidFill>
+                  </a:tcPr>
+                </a:tc>
+                <a:tc>
+                  <a:txBody>
+                    <a:bodyPr/>
+                    <a:lstStyle/>
+                    <a:p>
+                      <a:pPr algn="ctr"/>
+                      <a:r>
+                        <a:rPr sz="1000" b="1">
+                          <a:solidFill>
+                            <a:srgbClr val="12151A"/>
+                          </a:solidFill>
+                          <a:latin typeface="맑은 고딕"/>
+                          <a:ea typeface="맑은 고딕"/>
+                          <a:cs typeface="맑은 고딕"/>
+                        </a:rPr>
+                        <a:t>신규 수혜인구</a:t>
+                      </a:r>
+                    </a:p>
+                  </a:txBody>
+                  <a:tcPr anchor="ctr">
+                    <a:solidFill>
+                      <a:srgbClr val="F6F7F9"/>
+                    </a:solidFill>
+                  </a:tcPr>
+                </a:tc>
+                <a:tc>
+                  <a:txBody>
+                    <a:bodyPr/>
+                    <a:lstStyle/>
+                    <a:p>
+                      <a:pPr algn="ctr"/>
+                      <a:r>
+                        <a:rPr sz="1000" b="1">
+                          <a:solidFill>
+                            <a:srgbClr val="12151A"/>
+                          </a:solidFill>
+                          <a:latin typeface="맑은 고딕"/>
+                          <a:ea typeface="맑은 고딕"/>
+                          <a:cs typeface="맑은 고딕"/>
+                        </a:rPr>
+                        <a:t>커버리지 개선</a:t>
+                      </a:r>
+                    </a:p>
+                  </a:txBody>
+                  <a:tcPr anchor="ctr">
+                    <a:solidFill>
+                      <a:srgbClr val="F6F7F9"/>
+                    </a:solidFill>
+                  </a:tcPr>
+                </a:tc>
+              </a:tr>
+              <a:tr h="306324">
+                <a:tc>
+                  <a:txBody>
+                    <a:bodyPr/>
+                    <a:lstStyle/>
+                    <a:p>
+                      <a:pPr algn="l"/>
+                      <a:r>
+                        <a:rPr sz="950">
+                          <a:solidFill>
+                            <a:srgbClr val="12151A"/>
+                          </a:solidFill>
+                          <a:latin typeface="맑은 고딕"/>
+                          <a:ea typeface="맑은 고딕"/>
+                          <a:cs typeface="맑은 고딕"/>
+                        </a:rPr>
+                        <a:t>1</a:t>
+                      </a:r>
+                    </a:p>
+                  </a:txBody>
+                  <a:tcPr anchor="ctr">
+                    <a:solidFill>
+                      <a:srgbClr val="FFFFFF"/>
+                    </a:solidFill>
+                  </a:tcPr>
+                </a:tc>
+                <a:tc>
+                  <a:txBody>
+                    <a:bodyPr/>
+                    <a:lstStyle/>
+                    <a:p>
+                      <a:pPr algn="ctr"/>
+                      <a:r>
+                        <a:rPr sz="950">
+                          <a:solidFill>
+                            <a:srgbClr val="12151A"/>
+                          </a:solidFill>
+                          <a:latin typeface="맑은 고딕"/>
+                          <a:ea typeface="맑은 고딕"/>
+                          <a:cs typeface="맑은 고딕"/>
+                        </a:rPr>
+                        <a:t>봉명동</a:t>
+                      </a:r>
+                    </a:p>
+                  </a:txBody>
+                  <a:tcPr anchor="ctr">
+                    <a:solidFill>
+                      <a:srgbClr val="FFFFFF"/>
+                    </a:solidFill>
+                  </a:tcPr>
+                </a:tc>
+                <a:tc>
+                  <a:txBody>
+                    <a:bodyPr/>
+                    <a:lstStyle/>
+                    <a:p>
+                      <a:pPr algn="ctr"/>
+                      <a:r>
+                        <a:rPr sz="950">
+                          <a:solidFill>
+                            <a:srgbClr val="12151A"/>
+                          </a:solidFill>
+                          <a:latin typeface="맑은 고딕"/>
+                          <a:ea typeface="맑은 고딕"/>
+                          <a:cs typeface="맑은 고딕"/>
+                        </a:rPr>
+                        <a:t>의료</a:t>
+                      </a:r>
+                    </a:p>
+                  </a:txBody>
+                  <a:tcPr anchor="ctr">
+                    <a:solidFill>
+                      <a:srgbClr val="FFFFFF"/>
+                    </a:solidFill>
+                  </a:tcPr>
+                </a:tc>
+                <a:tc>
+                  <a:txBody>
+                    <a:bodyPr/>
+                    <a:lstStyle/>
+                    <a:p>
+                      <a:pPr algn="ctr"/>
+                      <a:r>
+                        <a:rPr sz="950">
+                          <a:solidFill>
+                            <a:srgbClr val="12151A"/>
+                          </a:solidFill>
+                          <a:latin typeface="맑은 고딕"/>
+                          <a:ea typeface="맑은 고딕"/>
+                          <a:cs typeface="맑은 고딕"/>
+                        </a:rPr>
+                        <a:t>26,717</a:t>
+                      </a:r>
+                    </a:p>
+                  </a:txBody>
+                  <a:tcPr anchor="ctr">
+                    <a:solidFill>
+                      <a:srgbClr val="FFFFFF"/>
+                    </a:solidFill>
+                  </a:tcPr>
+                </a:tc>
+                <a:tc>
+                  <a:txBody>
+                    <a:bodyPr/>
+                    <a:lstStyle/>
+                    <a:p>
+                      <a:pPr algn="ctr"/>
+                      <a:r>
+                        <a:rPr sz="950">
+                          <a:solidFill>
+                            <a:srgbClr val="12151A"/>
+                          </a:solidFill>
+                          <a:latin typeface="맑은 고딕"/>
+                          <a:ea typeface="맑은 고딕"/>
+                          <a:cs typeface="맑은 고딕"/>
+                        </a:rPr>
+                        <a:t>+5.69%p</a:t>
+                      </a:r>
+                    </a:p>
+                  </a:txBody>
+                  <a:tcPr anchor="ctr">
+                    <a:solidFill>
+                      <a:srgbClr val="FFFFFF"/>
+                    </a:solidFill>
+                  </a:tcPr>
+                </a:tc>
+              </a:tr>
+              <a:tr h="306324">
+                <a:tc>
+                  <a:txBody>
+                    <a:bodyPr/>
+                    <a:lstStyle/>
+                    <a:p>
+                      <a:pPr algn="l"/>
+                      <a:r>
+                        <a:rPr sz="950">
+                          <a:solidFill>
+                            <a:srgbClr val="12151A"/>
+                          </a:solidFill>
+                          <a:latin typeface="맑은 고딕"/>
+                          <a:ea typeface="맑은 고딕"/>
+                          <a:cs typeface="맑은 고딕"/>
+                        </a:rPr>
+                        <a:t>2</a:t>
+                      </a:r>
+                    </a:p>
+                  </a:txBody>
+                  <a:tcPr anchor="ctr">
+                    <a:solidFill>
+                      <a:srgbClr val="FFFFFF"/>
+                    </a:solidFill>
+                  </a:tcPr>
+                </a:tc>
+                <a:tc>
+                  <a:txBody>
+                    <a:bodyPr/>
+                    <a:lstStyle/>
+                    <a:p>
+                      <a:pPr algn="ctr"/>
+                      <a:r>
+                        <a:rPr sz="950">
+                          <a:solidFill>
+                            <a:srgbClr val="12151A"/>
+                          </a:solidFill>
+                          <a:latin typeface="맑은 고딕"/>
+                          <a:ea typeface="맑은 고딕"/>
+                          <a:cs typeface="맑은 고딕"/>
+                        </a:rPr>
+                        <a:t>봉명동</a:t>
+                      </a:r>
+                    </a:p>
+                  </a:txBody>
+                  <a:tcPr anchor="ctr">
+                    <a:solidFill>
+                      <a:srgbClr val="FFFFFF"/>
+                    </a:solidFill>
+                  </a:tcPr>
+                </a:tc>
+                <a:tc>
+                  <a:txBody>
+                    <a:bodyPr/>
+                    <a:lstStyle/>
+                    <a:p>
+                      <a:pPr algn="ctr"/>
+                      <a:r>
+                        <a:rPr sz="950">
+                          <a:solidFill>
+                            <a:srgbClr val="12151A"/>
+                          </a:solidFill>
+                          <a:latin typeface="맑은 고딕"/>
+                          <a:ea typeface="맑은 고딕"/>
+                          <a:cs typeface="맑은 고딕"/>
+                        </a:rPr>
+                        <a:t>보육</a:t>
+                      </a:r>
+                    </a:p>
+                  </a:txBody>
+                  <a:tcPr anchor="ctr">
+                    <a:solidFill>
+                      <a:srgbClr val="FFFFFF"/>
+                    </a:solidFill>
+                  </a:tcPr>
+                </a:tc>
+                <a:tc>
+                  <a:txBody>
+                    <a:bodyPr/>
+                    <a:lstStyle/>
+                    <a:p>
+                      <a:pPr algn="ctr"/>
+                      <a:r>
+                        <a:rPr sz="950">
+                          <a:solidFill>
+                            <a:srgbClr val="12151A"/>
+                          </a:solidFill>
+                          <a:latin typeface="맑은 고딕"/>
+                          <a:ea typeface="맑은 고딕"/>
+                          <a:cs typeface="맑은 고딕"/>
+                        </a:rPr>
+                        <a:t>24,351</a:t>
+                      </a:r>
+                    </a:p>
+                  </a:txBody>
+                  <a:tcPr anchor="ctr">
+                    <a:solidFill>
+                      <a:srgbClr val="FFFFFF"/>
+                    </a:solidFill>
+                  </a:tcPr>
+                </a:tc>
+                <a:tc>
+                  <a:txBody>
+                    <a:bodyPr/>
+                    <a:lstStyle/>
+                    <a:p>
+                      <a:pPr algn="ctr"/>
+                      <a:r>
+                        <a:rPr sz="950">
+                          <a:solidFill>
+                            <a:srgbClr val="12151A"/>
+                          </a:solidFill>
+                          <a:latin typeface="맑은 고딕"/>
+                          <a:ea typeface="맑은 고딕"/>
+                          <a:cs typeface="맑은 고딕"/>
+                        </a:rPr>
+                        <a:t>+5.11%p</a:t>
+                      </a:r>
+                    </a:p>
+                  </a:txBody>
+                  <a:tcPr anchor="ctr">
+                    <a:solidFill>
+                      <a:srgbClr val="FFFFFF"/>
+                    </a:solidFill>
+                  </a:tcPr>
+                </a:tc>
+              </a:tr>
+              <a:tr h="306324">
+                <a:tc>
+                  <a:txBody>
+                    <a:bodyPr/>
+                    <a:lstStyle/>
+                    <a:p>
+                      <a:pPr algn="l"/>
+                      <a:r>
+                        <a:rPr sz="950">
+                          <a:solidFill>
+                            <a:srgbClr val="12151A"/>
+                          </a:solidFill>
+                          <a:latin typeface="맑은 고딕"/>
+                          <a:ea typeface="맑은 고딕"/>
+                          <a:cs typeface="맑은 고딕"/>
+                        </a:rPr>
+                        <a:t>3</a:t>
+                      </a:r>
+                    </a:p>
+                  </a:txBody>
+                  <a:tcPr anchor="ctr">
+                    <a:solidFill>
+                      <a:srgbClr val="FFFFFF"/>
+                    </a:solidFill>
+                  </a:tcPr>
+                </a:tc>
+                <a:tc>
+                  <a:txBody>
+                    <a:bodyPr/>
+                    <a:lstStyle/>
+                    <a:p>
+                      <a:pPr algn="ctr"/>
+                      <a:r>
+                        <a:rPr sz="950">
+                          <a:solidFill>
+                            <a:srgbClr val="12151A"/>
+                          </a:solidFill>
+                          <a:latin typeface="맑은 고딕"/>
+                          <a:ea typeface="맑은 고딕"/>
+                          <a:cs typeface="맑은 고딕"/>
+                        </a:rPr>
+                        <a:t>일봉동</a:t>
+                      </a:r>
+                    </a:p>
+                  </a:txBody>
+                  <a:tcPr anchor="ctr">
+                    <a:solidFill>
+                      <a:srgbClr val="FFFFFF"/>
+                    </a:solidFill>
+                  </a:tcPr>
+                </a:tc>
+                <a:tc>
+                  <a:txBody>
+                    <a:bodyPr/>
+                    <a:lstStyle/>
+                    <a:p>
+                      <a:pPr algn="ctr"/>
+                      <a:r>
+                        <a:rPr sz="950">
+                          <a:solidFill>
+                            <a:srgbClr val="12151A"/>
+                          </a:solidFill>
+                          <a:latin typeface="맑은 고딕"/>
+                          <a:ea typeface="맑은 고딕"/>
+                          <a:cs typeface="맑은 고딕"/>
+                        </a:rPr>
+                        <a:t>복지</a:t>
+                      </a:r>
+                    </a:p>
+                  </a:txBody>
+                  <a:tcPr anchor="ctr">
+                    <a:solidFill>
+                      <a:srgbClr val="FFFFFF"/>
+                    </a:solidFill>
+                  </a:tcPr>
+                </a:tc>
+                <a:tc>
+                  <a:txBody>
+                    <a:bodyPr/>
+                    <a:lstStyle/>
+                    <a:p>
+                      <a:pPr algn="ctr"/>
+                      <a:r>
+                        <a:rPr sz="950">
+                          <a:solidFill>
+                            <a:srgbClr val="12151A"/>
+                          </a:solidFill>
+                          <a:latin typeface="맑은 고딕"/>
+                          <a:ea typeface="맑은 고딕"/>
+                          <a:cs typeface="맑은 고딕"/>
+                        </a:rPr>
+                        <a:t>23,066</a:t>
+                      </a:r>
+                    </a:p>
+                  </a:txBody>
+                  <a:tcPr anchor="ctr">
+                    <a:solidFill>
+                      <a:srgbClr val="FFFFFF"/>
+                    </a:solidFill>
+                  </a:tcPr>
+                </a:tc>
+                <a:tc>
+                  <a:txBody>
+                    <a:bodyPr/>
+                    <a:lstStyle/>
+                    <a:p>
+                      <a:pPr algn="ctr"/>
+                      <a:r>
+                        <a:rPr sz="950">
+                          <a:solidFill>
+                            <a:srgbClr val="12151A"/>
+                          </a:solidFill>
+                          <a:latin typeface="맑은 고딕"/>
+                          <a:ea typeface="맑은 고딕"/>
+                          <a:cs typeface="맑은 고딕"/>
+                        </a:rPr>
+                        <a:t>+4.86%p</a:t>
+                      </a:r>
+                    </a:p>
+                  </a:txBody>
+                  <a:tcPr anchor="ctr">
+                    <a:solidFill>
+                      <a:srgbClr val="FFFFFF"/>
+                    </a:solidFill>
+                  </a:tcPr>
+                </a:tc>
+              </a:tr>
+              <a:tr h="306324">
+                <a:tc>
+                  <a:txBody>
+                    <a:bodyPr/>
+                    <a:lstStyle/>
+                    <a:p>
+                      <a:pPr algn="l"/>
+                      <a:r>
+                        <a:rPr sz="950">
+                          <a:solidFill>
+                            <a:srgbClr val="12151A"/>
+                          </a:solidFill>
+                          <a:latin typeface="맑은 고딕"/>
+                          <a:ea typeface="맑은 고딕"/>
+                          <a:cs typeface="맑은 고딕"/>
+                        </a:rPr>
+                        <a:t>4</a:t>
+                      </a:r>
+                    </a:p>
+                  </a:txBody>
+                  <a:tcPr anchor="ctr">
+                    <a:solidFill>
+                      <a:srgbClr val="FFFFFF"/>
+                    </a:solidFill>
+                  </a:tcPr>
+                </a:tc>
+                <a:tc>
+                  <a:txBody>
+                    <a:bodyPr/>
+                    <a:lstStyle/>
+                    <a:p>
+                      <a:pPr algn="ctr"/>
+                      <a:r>
+                        <a:rPr sz="950">
+                          <a:solidFill>
+                            <a:srgbClr val="12151A"/>
+                          </a:solidFill>
+                          <a:latin typeface="맑은 고딕"/>
+                          <a:ea typeface="맑은 고딕"/>
+                          <a:cs typeface="맑은 고딕"/>
+                        </a:rPr>
+                        <a:t>일봉동</a:t>
+                      </a:r>
+                    </a:p>
+                  </a:txBody>
+                  <a:tcPr anchor="ctr">
+                    <a:solidFill>
+                      <a:srgbClr val="FFFFFF"/>
+                    </a:solidFill>
+                  </a:tcPr>
+                </a:tc>
+                <a:tc>
+                  <a:txBody>
+                    <a:bodyPr/>
+                    <a:lstStyle/>
+                    <a:p>
+                      <a:pPr algn="ctr"/>
+                      <a:r>
+                        <a:rPr sz="950">
+                          <a:solidFill>
+                            <a:srgbClr val="12151A"/>
+                          </a:solidFill>
+                          <a:latin typeface="맑은 고딕"/>
+                          <a:ea typeface="맑은 고딕"/>
+                          <a:cs typeface="맑은 고딕"/>
+                        </a:rPr>
+                        <a:t>의료</a:t>
+                      </a:r>
+                    </a:p>
+                  </a:txBody>
+                  <a:tcPr anchor="ctr">
+                    <a:solidFill>
+                      <a:srgbClr val="FFFFFF"/>
+                    </a:solidFill>
+                  </a:tcPr>
+                </a:tc>
+                <a:tc>
+                  <a:txBody>
+                    <a:bodyPr/>
+                    <a:lstStyle/>
+                    <a:p>
+                      <a:pPr algn="ctr"/>
+                      <a:r>
+                        <a:rPr sz="950">
+                          <a:solidFill>
+                            <a:srgbClr val="12151A"/>
+                          </a:solidFill>
+                          <a:latin typeface="맑은 고딕"/>
+                          <a:ea typeface="맑은 고딕"/>
+                          <a:cs typeface="맑은 고딕"/>
+                        </a:rPr>
+                        <a:t>21,780</a:t>
+                      </a:r>
+                    </a:p>
+                  </a:txBody>
+                  <a:tcPr anchor="ctr">
+                    <a:solidFill>
+                      <a:srgbClr val="FFFFFF"/>
+                    </a:solidFill>
+                  </a:tcPr>
+                </a:tc>
+                <a:tc>
+                  <a:txBody>
+                    <a:bodyPr/>
+                    <a:lstStyle/>
+                    <a:p>
+                      <a:pPr algn="ctr"/>
+                      <a:r>
+                        <a:rPr sz="950">
+                          <a:solidFill>
+                            <a:srgbClr val="12151A"/>
+                          </a:solidFill>
+                          <a:latin typeface="맑은 고딕"/>
+                          <a:ea typeface="맑은 고딕"/>
+                          <a:cs typeface="맑은 고딕"/>
+                        </a:rPr>
+                        <a:t>+4.62%p</a:t>
+                      </a:r>
+                    </a:p>
+                  </a:txBody>
+                  <a:tcPr anchor="ctr">
+                    <a:solidFill>
+                      <a:srgbClr val="FFFFFF"/>
+                    </a:solidFill>
+                  </a:tcPr>
+                </a:tc>
+              </a:tr>
+              <a:tr h="306324">
+                <a:tc>
+                  <a:txBody>
+                    <a:bodyPr/>
+                    <a:lstStyle/>
+                    <a:p>
+                      <a:pPr algn="l"/>
+                      <a:r>
+                        <a:rPr sz="950">
+                          <a:solidFill>
+                            <a:srgbClr val="12151A"/>
+                          </a:solidFill>
+                          <a:latin typeface="맑은 고딕"/>
+                          <a:ea typeface="맑은 고딕"/>
+                          <a:cs typeface="맑은 고딕"/>
+                        </a:rPr>
+                        <a:t>5</a:t>
+                      </a:r>
+                    </a:p>
+                  </a:txBody>
+                  <a:tcPr anchor="ctr">
+                    <a:solidFill>
+                      <a:srgbClr val="FFFFFF"/>
+                    </a:solidFill>
+                  </a:tcPr>
+                </a:tc>
+                <a:tc>
+                  <a:txBody>
+                    <a:bodyPr/>
+                    <a:lstStyle/>
+                    <a:p>
+                      <a:pPr algn="ctr"/>
+                      <a:r>
+                        <a:rPr sz="950">
+                          <a:solidFill>
+                            <a:srgbClr val="12151A"/>
+                          </a:solidFill>
+                          <a:latin typeface="맑은 고딕"/>
+                          <a:ea typeface="맑은 고딕"/>
+                          <a:cs typeface="맑은 고딕"/>
+                        </a:rPr>
+                        <a:t>원성동</a:t>
+                      </a:r>
+                    </a:p>
+                  </a:txBody>
+                  <a:tcPr anchor="ctr">
+                    <a:solidFill>
+                      <a:srgbClr val="FFFFFF"/>
+                    </a:solidFill>
+                  </a:tcPr>
+                </a:tc>
+                <a:tc>
+                  <a:txBody>
+                    <a:bodyPr/>
+                    <a:lstStyle/>
+                    <a:p>
+                      <a:pPr algn="ctr"/>
+                      <a:r>
+                        <a:rPr sz="950">
+                          <a:solidFill>
+                            <a:srgbClr val="12151A"/>
+                          </a:solidFill>
+                          <a:latin typeface="맑은 고딕"/>
+                          <a:ea typeface="맑은 고딕"/>
+                          <a:cs typeface="맑은 고딕"/>
+                        </a:rPr>
+                        <a:t>의료</a:t>
+                      </a:r>
+                    </a:p>
+                  </a:txBody>
+                  <a:tcPr anchor="ctr">
+                    <a:solidFill>
+                      <a:srgbClr val="FFFFFF"/>
+                    </a:solidFill>
+                  </a:tcPr>
+                </a:tc>
+                <a:tc>
+                  <a:txBody>
+                    <a:bodyPr/>
+                    <a:lstStyle/>
+                    <a:p>
+                      <a:pPr algn="ctr"/>
+                      <a:r>
+                        <a:rPr sz="950">
+                          <a:solidFill>
+                            <a:srgbClr val="12151A"/>
+                          </a:solidFill>
+                          <a:latin typeface="맑은 고딕"/>
+                          <a:ea typeface="맑은 고딕"/>
+                          <a:cs typeface="맑은 고딕"/>
+                        </a:rPr>
+                        <a:t>18,133</a:t>
+                      </a:r>
+                    </a:p>
+                  </a:txBody>
+                  <a:tcPr anchor="ctr">
+                    <a:solidFill>
+                      <a:srgbClr val="FFFFFF"/>
+                    </a:solidFill>
+                  </a:tcPr>
+                </a:tc>
+                <a:tc>
+                  <a:txBody>
+                    <a:bodyPr/>
+                    <a:lstStyle/>
+                    <a:p>
+                      <a:pPr algn="ctr"/>
+                      <a:r>
+                        <a:rPr sz="950">
+                          <a:solidFill>
+                            <a:srgbClr val="12151A"/>
+                          </a:solidFill>
+                          <a:latin typeface="맑은 고딕"/>
+                          <a:ea typeface="맑은 고딕"/>
+                          <a:cs typeface="맑은 고딕"/>
+                        </a:rPr>
+                        <a:t>+4.23%p</a:t>
+                      </a:r>
+                    </a:p>
+                  </a:txBody>
+                  <a:tcPr anchor="ctr">
+                    <a:solidFill>
+                      <a:srgbClr val="FFFFFF"/>
+                    </a:solidFill>
+                  </a:tcPr>
+                </a:tc>
+              </a:tr>
+              <a:tr h="306324">
+                <a:tc>
+                  <a:txBody>
+                    <a:bodyPr/>
+                    <a:lstStyle/>
+                    <a:p>
+                      <a:pPr algn="l"/>
+                      <a:r>
+                        <a:rPr sz="950">
+                          <a:solidFill>
+                            <a:srgbClr val="12151A"/>
+                          </a:solidFill>
+                          <a:latin typeface="맑은 고딕"/>
+                          <a:ea typeface="맑은 고딕"/>
+                          <a:cs typeface="맑은 고딕"/>
+                        </a:rPr>
+                        <a:t>6</a:t>
+                      </a:r>
+                    </a:p>
+                  </a:txBody>
+                  <a:tcPr anchor="ctr">
+                    <a:solidFill>
+                      <a:srgbClr val="FFFFFF"/>
+                    </a:solidFill>
+                  </a:tcPr>
+                </a:tc>
+                <a:tc>
+                  <a:txBody>
+                    <a:bodyPr/>
+                    <a:lstStyle/>
+                    <a:p>
+                      <a:pPr algn="ctr"/>
+                      <a:r>
+                        <a:rPr sz="950">
+                          <a:solidFill>
+                            <a:srgbClr val="12151A"/>
+                          </a:solidFill>
+                          <a:latin typeface="맑은 고딕"/>
+                          <a:ea typeface="맑은 고딕"/>
+                          <a:cs typeface="맑은 고딕"/>
+                        </a:rPr>
+                        <a:t>원성동</a:t>
+                      </a:r>
+                    </a:p>
+                  </a:txBody>
+                  <a:tcPr anchor="ctr">
+                    <a:solidFill>
+                      <a:srgbClr val="FFFFFF"/>
+                    </a:solidFill>
+                  </a:tcPr>
+                </a:tc>
+                <a:tc>
+                  <a:txBody>
+                    <a:bodyPr/>
+                    <a:lstStyle/>
+                    <a:p>
+                      <a:pPr algn="ctr"/>
+                      <a:r>
+                        <a:rPr sz="950">
+                          <a:solidFill>
+                            <a:srgbClr val="12151A"/>
+                          </a:solidFill>
+                          <a:latin typeface="맑은 고딕"/>
+                          <a:ea typeface="맑은 고딕"/>
+                          <a:cs typeface="맑은 고딕"/>
+                        </a:rPr>
+                        <a:t>보육</a:t>
+                      </a:r>
+                    </a:p>
+                  </a:txBody>
+                  <a:tcPr anchor="ctr">
+                    <a:solidFill>
+                      <a:srgbClr val="FFFFFF"/>
+                    </a:solidFill>
+                  </a:tcPr>
+                </a:tc>
+                <a:tc>
+                  <a:txBody>
+                    <a:bodyPr/>
+                    <a:lstStyle/>
+                    <a:p>
+                      <a:pPr algn="ctr"/>
+                      <a:r>
+                        <a:rPr sz="950">
+                          <a:solidFill>
+                            <a:srgbClr val="12151A"/>
+                          </a:solidFill>
+                          <a:latin typeface="맑은 고딕"/>
+                          <a:ea typeface="맑은 고딕"/>
+                          <a:cs typeface="맑은 고딕"/>
+                        </a:rPr>
+                        <a:t>17,505</a:t>
+                      </a:r>
+                    </a:p>
+                  </a:txBody>
+                  <a:tcPr anchor="ctr">
+                    <a:solidFill>
+                      <a:srgbClr val="FFFFFF"/>
+                    </a:solidFill>
+                  </a:tcPr>
+                </a:tc>
+                <a:tc>
+                  <a:txBody>
+                    <a:bodyPr/>
+                    <a:lstStyle/>
+                    <a:p>
+                      <a:pPr algn="ctr"/>
+                      <a:r>
+                        <a:rPr sz="950">
+                          <a:solidFill>
+                            <a:srgbClr val="12151A"/>
+                          </a:solidFill>
+                          <a:latin typeface="맑은 고딕"/>
+                          <a:ea typeface="맑은 고딕"/>
+                          <a:cs typeface="맑은 고딕"/>
+                        </a:rPr>
+                        <a:t>+3.89%p</a:t>
+                      </a:r>
+                    </a:p>
+                  </a:txBody>
+                  <a:tcPr anchor="ctr">
+                    <a:solidFill>
+                      <a:srgbClr val="FFFFFF"/>
+                    </a:solidFill>
+                  </a:tcPr>
+                </a:tc>
+              </a:tr>
+              <a:tr h="306324">
+                <a:tc>
+                  <a:txBody>
+                    <a:bodyPr/>
+                    <a:lstStyle/>
+                    <a:p>
+                      <a:pPr algn="l"/>
+                      <a:r>
+                        <a:rPr sz="950">
+                          <a:solidFill>
+                            <a:srgbClr val="12151A"/>
+                          </a:solidFill>
+                          <a:latin typeface="맑은 고딕"/>
+                          <a:ea typeface="맑은 고딕"/>
+                          <a:cs typeface="맑은 고딕"/>
+                        </a:rPr>
+                        <a:t>7</a:t>
+                      </a:r>
+                    </a:p>
+                  </a:txBody>
+                  <a:tcPr anchor="ctr">
+                    <a:solidFill>
+                      <a:srgbClr val="FFFFFF"/>
+                    </a:solidFill>
+                  </a:tcPr>
+                </a:tc>
+                <a:tc>
+                  <a:txBody>
+                    <a:bodyPr/>
+                    <a:lstStyle/>
+                    <a:p>
+                      <a:pPr algn="ctr"/>
+                      <a:r>
+                        <a:rPr sz="950">
+                          <a:solidFill>
+                            <a:srgbClr val="12151A"/>
+                          </a:solidFill>
+                          <a:latin typeface="맑은 고딕"/>
+                          <a:ea typeface="맑은 고딕"/>
+                          <a:cs typeface="맑은 고딕"/>
+                        </a:rPr>
+                        <a:t>중앙동</a:t>
+                      </a:r>
+                    </a:p>
+                  </a:txBody>
+                  <a:tcPr anchor="ctr">
+                    <a:solidFill>
+                      <a:srgbClr val="FFFFFF"/>
+                    </a:solidFill>
+                  </a:tcPr>
+                </a:tc>
+                <a:tc>
+                  <a:txBody>
+                    <a:bodyPr/>
+                    <a:lstStyle/>
+                    <a:p>
+                      <a:pPr algn="ctr"/>
+                      <a:r>
+                        <a:rPr sz="950">
+                          <a:solidFill>
+                            <a:srgbClr val="12151A"/>
+                          </a:solidFill>
+                          <a:latin typeface="맑은 고딕"/>
+                          <a:ea typeface="맑은 고딕"/>
+                          <a:cs typeface="맑은 고딕"/>
+                        </a:rPr>
+                        <a:t>공원</a:t>
+                      </a:r>
+                    </a:p>
+                  </a:txBody>
+                  <a:tcPr anchor="ctr">
+                    <a:solidFill>
+                      <a:srgbClr val="FFFFFF"/>
+                    </a:solidFill>
+                  </a:tcPr>
+                </a:tc>
+                <a:tc>
+                  <a:txBody>
+                    <a:bodyPr/>
+                    <a:lstStyle/>
+                    <a:p>
+                      <a:pPr algn="ctr"/>
+                      <a:r>
+                        <a:rPr sz="950">
+                          <a:solidFill>
+                            <a:srgbClr val="12151A"/>
+                          </a:solidFill>
+                          <a:latin typeface="맑은 고딕"/>
+                          <a:ea typeface="맑은 고딕"/>
+                          <a:cs typeface="맑은 고딕"/>
+                        </a:rPr>
+                        <a:t>16,101</a:t>
+                      </a:r>
+                    </a:p>
+                  </a:txBody>
+                  <a:tcPr anchor="ctr">
+                    <a:solidFill>
+                      <a:srgbClr val="FFFFFF"/>
+                    </a:solidFill>
+                  </a:tcPr>
+                </a:tc>
+                <a:tc>
+                  <a:txBody>
+                    <a:bodyPr/>
+                    <a:lstStyle/>
+                    <a:p>
+                      <a:pPr algn="ctr"/>
+                      <a:r>
+                        <a:rPr sz="950">
+                          <a:solidFill>
+                            <a:srgbClr val="12151A"/>
+                          </a:solidFill>
+                          <a:latin typeface="맑은 고딕"/>
+                          <a:ea typeface="맑은 고딕"/>
+                          <a:cs typeface="맑은 고딕"/>
+                        </a:rPr>
+                        <a:t>+2.97%p</a:t>
+                      </a:r>
+                    </a:p>
+                  </a:txBody>
+                  <a:tcPr anchor="ctr">
+                    <a:solidFill>
+                      <a:srgbClr val="FFFFFF"/>
+                    </a:solidFill>
+                  </a:tcPr>
+                </a:tc>
+              </a:tr>
+              <a:tr h="306324">
+                <a:tc>
+                  <a:txBody>
+                    <a:bodyPr/>
+                    <a:lstStyle/>
+                    <a:p>
+                      <a:pPr algn="l"/>
+                      <a:r>
+                        <a:rPr sz="950">
+                          <a:solidFill>
+                            <a:srgbClr val="12151A"/>
+                          </a:solidFill>
+                          <a:latin typeface="맑은 고딕"/>
+                          <a:ea typeface="맑은 고딕"/>
+                          <a:cs typeface="맑은 고딕"/>
+                        </a:rPr>
+                        <a:t>8</a:t>
+                      </a:r>
+                    </a:p>
+                  </a:txBody>
+                  <a:tcPr anchor="ctr">
+                    <a:solidFill>
+                      <a:srgbClr val="FFFFFF"/>
+                    </a:solidFill>
+                  </a:tcPr>
+                </a:tc>
+                <a:tc>
+                  <a:txBody>
+                    <a:bodyPr/>
+                    <a:lstStyle/>
+                    <a:p>
+                      <a:pPr algn="ctr"/>
+                      <a:r>
+                        <a:rPr sz="950">
+                          <a:solidFill>
+                            <a:srgbClr val="12151A"/>
+                          </a:solidFill>
+                          <a:latin typeface="맑은 고딕"/>
+                          <a:ea typeface="맑은 고딕"/>
+                          <a:cs typeface="맑은 고딕"/>
+                        </a:rPr>
+                        <a:t>중앙동</a:t>
+                      </a:r>
+                    </a:p>
+                  </a:txBody>
+                  <a:tcPr anchor="ctr">
+                    <a:solidFill>
+                      <a:srgbClr val="FFFFFF"/>
+                    </a:solidFill>
+                  </a:tcPr>
+                </a:tc>
+                <a:tc>
+                  <a:txBody>
+                    <a:bodyPr/>
+                    <a:lstStyle/>
+                    <a:p>
+                      <a:pPr algn="ctr"/>
+                      <a:r>
+                        <a:rPr sz="950">
+                          <a:solidFill>
+                            <a:srgbClr val="12151A"/>
+                          </a:solidFill>
+                          <a:latin typeface="맑은 고딕"/>
+                          <a:ea typeface="맑은 고딕"/>
+                          <a:cs typeface="맑은 고딕"/>
+                        </a:rPr>
+                        <a:t>체육</a:t>
+                      </a:r>
+                    </a:p>
+                  </a:txBody>
+                  <a:tcPr anchor="ctr">
+                    <a:solidFill>
+                      <a:srgbClr val="FFFFFF"/>
+                    </a:solidFill>
+                  </a:tcPr>
+                </a:tc>
+                <a:tc>
+                  <a:txBody>
+                    <a:bodyPr/>
+                    <a:lstStyle/>
+                    <a:p>
+                      <a:pPr algn="ctr"/>
+                      <a:r>
+                        <a:rPr sz="950">
+                          <a:solidFill>
+                            <a:srgbClr val="12151A"/>
+                          </a:solidFill>
+                          <a:latin typeface="맑은 고딕"/>
+                          <a:ea typeface="맑은 고딕"/>
+                          <a:cs typeface="맑은 고딕"/>
+                        </a:rPr>
+                        <a:t>16,248</a:t>
+                      </a:r>
+                    </a:p>
+                  </a:txBody>
+                  <a:tcPr anchor="ctr">
+                    <a:solidFill>
+                      <a:srgbClr val="FFFFFF"/>
+                    </a:solidFill>
+                  </a:tcPr>
+                </a:tc>
+                <a:tc>
+                  <a:txBody>
+                    <a:bodyPr/>
+                    <a:lstStyle/>
+                    <a:p>
+                      <a:pPr algn="ctr"/>
+                      <a:r>
+                        <a:rPr sz="950">
+                          <a:solidFill>
+                            <a:srgbClr val="12151A"/>
+                          </a:solidFill>
+                          <a:latin typeface="맑은 고딕"/>
+                          <a:ea typeface="맑은 고딕"/>
+                          <a:cs typeface="맑은 고딕"/>
+                        </a:rPr>
+                        <a:t>+2.51%p</a:t>
+                      </a:r>
+                    </a:p>
+                  </a:txBody>
+                  <a:tcPr anchor="ctr">
+                    <a:solidFill>
+                      <a:srgbClr val="FFFFFF"/>
+                    </a:solidFill>
+                  </a:tcPr>
+                </a:tc>
+              </a:tr>
+              <a:tr h="306324">
+                <a:tc>
+                  <a:txBody>
+                    <a:bodyPr/>
+                    <a:lstStyle/>
+                    <a:p>
+                      <a:pPr algn="l"/>
+                      <a:r>
+                        <a:rPr sz="950">
+                          <a:solidFill>
+                            <a:srgbClr val="12151A"/>
+                          </a:solidFill>
+                          <a:latin typeface="맑은 고딕"/>
+                          <a:ea typeface="맑은 고딕"/>
+                          <a:cs typeface="맑은 고딕"/>
+                        </a:rPr>
+                        <a:t>9</a:t>
+                      </a:r>
+                    </a:p>
+                  </a:txBody>
+                  <a:tcPr anchor="ctr">
+                    <a:solidFill>
+                      <a:srgbClr val="FFFFFF"/>
+                    </a:solidFill>
+                  </a:tcPr>
+                </a:tc>
+                <a:tc>
+                  <a:txBody>
+                    <a:bodyPr/>
+                    <a:lstStyle/>
+                    <a:p>
+                      <a:pPr algn="ctr"/>
+                      <a:r>
+                        <a:rPr sz="950">
+                          <a:solidFill>
+                            <a:srgbClr val="12151A"/>
+                          </a:solidFill>
+                          <a:latin typeface="맑은 고딕"/>
+                          <a:ea typeface="맑은 고딕"/>
+                          <a:cs typeface="맑은 고딕"/>
+                        </a:rPr>
+                        <a:t>성거읍</a:t>
+                      </a:r>
+                    </a:p>
+                  </a:txBody>
+                  <a:tcPr anchor="ctr">
+                    <a:solidFill>
+                      <a:srgbClr val="FFFFFF"/>
+                    </a:solidFill>
+                  </a:tcPr>
+                </a:tc>
+                <a:tc>
+                  <a:txBody>
+                    <a:bodyPr/>
+                    <a:lstStyle/>
+                    <a:p>
+                      <a:pPr algn="ctr"/>
+                      <a:r>
+                        <a:rPr sz="950">
+                          <a:solidFill>
+                            <a:srgbClr val="12151A"/>
+                          </a:solidFill>
+                          <a:latin typeface="맑은 고딕"/>
+                          <a:ea typeface="맑은 고딕"/>
+                          <a:cs typeface="맑은 고딕"/>
+                        </a:rPr>
+                        <a:t>의료</a:t>
+                      </a:r>
+                    </a:p>
+                  </a:txBody>
+                  <a:tcPr anchor="ctr">
+                    <a:solidFill>
+                      <a:srgbClr val="FFFFFF"/>
+                    </a:solidFill>
+                  </a:tcPr>
+                </a:tc>
+                <a:tc>
+                  <a:txBody>
+                    <a:bodyPr/>
+                    <a:lstStyle/>
+                    <a:p>
+                      <a:pPr algn="ctr"/>
+                      <a:r>
+                        <a:rPr sz="950">
+                          <a:solidFill>
+                            <a:srgbClr val="12151A"/>
+                          </a:solidFill>
+                          <a:latin typeface="맑은 고딕"/>
+                          <a:ea typeface="맑은 고딕"/>
+                          <a:cs typeface="맑은 고딕"/>
+                        </a:rPr>
+                        <a:t>10,432</a:t>
+                      </a:r>
+                    </a:p>
+                  </a:txBody>
+                  <a:tcPr anchor="ctr">
+                    <a:solidFill>
+                      <a:srgbClr val="FFFFFF"/>
+                    </a:solidFill>
+                  </a:tcPr>
+                </a:tc>
+                <a:tc>
+                  <a:txBody>
+                    <a:bodyPr/>
+                    <a:lstStyle/>
+                    <a:p>
+                      <a:pPr algn="ctr"/>
+                      <a:r>
+                        <a:rPr sz="950">
+                          <a:solidFill>
+                            <a:srgbClr val="12151A"/>
+                          </a:solidFill>
+                          <a:latin typeface="맑은 고딕"/>
+                          <a:ea typeface="맑은 고딕"/>
+                          <a:cs typeface="맑은 고딕"/>
+                        </a:rPr>
+                        <a:t>+1.83%p</a:t>
+                      </a:r>
+                    </a:p>
+                  </a:txBody>
+                  <a:tcPr anchor="ctr">
+                    <a:solidFill>
+                      <a:srgbClr val="FFFFFF"/>
+                    </a:solidFill>
+                  </a:tcPr>
+                </a:tc>
+              </a:tr>
+              <a:tr h="306324">
+                <a:tc>
+                  <a:txBody>
+                    <a:bodyPr/>
+                    <a:lstStyle/>
+                    <a:p>
+                      <a:pPr algn="l"/>
+                      <a:r>
+                        <a:rPr sz="950">
+                          <a:solidFill>
+                            <a:srgbClr val="12151A"/>
+                          </a:solidFill>
+                          <a:latin typeface="맑은 고딕"/>
+                          <a:ea typeface="맑은 고딕"/>
+                          <a:cs typeface="맑은 고딕"/>
+                        </a:rPr>
+                        <a:t>10</a:t>
+                      </a:r>
+                    </a:p>
+                  </a:txBody>
+                  <a:tcPr anchor="ctr">
+                    <a:solidFill>
+                      <a:srgbClr val="FFFFFF"/>
+                    </a:solidFill>
+                  </a:tcPr>
+                </a:tc>
+                <a:tc>
+                  <a:txBody>
+                    <a:bodyPr/>
+                    <a:lstStyle/>
+                    <a:p>
+                      <a:pPr algn="ctr"/>
+                      <a:r>
+                        <a:rPr sz="950">
+                          <a:solidFill>
+                            <a:srgbClr val="12151A"/>
+                          </a:solidFill>
+                          <a:latin typeface="맑은 고딕"/>
+                          <a:ea typeface="맑은 고딕"/>
+                          <a:cs typeface="맑은 고딕"/>
+                        </a:rPr>
+                        <a:t>성거읍</a:t>
+                      </a:r>
+                    </a:p>
+                  </a:txBody>
+                  <a:tcPr anchor="ctr">
+                    <a:solidFill>
+                      <a:srgbClr val="FFFFFF"/>
+                    </a:solidFill>
+                  </a:tcPr>
+                </a:tc>
+                <a:tc>
+                  <a:txBody>
+                    <a:bodyPr/>
+                    <a:lstStyle/>
+                    <a:p>
+                      <a:pPr algn="ctr"/>
+                      <a:r>
+                        <a:rPr sz="950">
+                          <a:solidFill>
+                            <a:srgbClr val="12151A"/>
+                          </a:solidFill>
+                          <a:latin typeface="맑은 고딕"/>
+                          <a:ea typeface="맑은 고딕"/>
+                          <a:cs typeface="맑은 고딕"/>
+                        </a:rPr>
+                        <a:t>보육</a:t>
+                      </a:r>
+                    </a:p>
+                  </a:txBody>
+                  <a:tcPr anchor="ctr">
+                    <a:solidFill>
+                      <a:srgbClr val="FFFFFF"/>
+                    </a:solidFill>
+                  </a:tcPr>
+                </a:tc>
+                <a:tc>
+                  <a:txBody>
+                    <a:bodyPr/>
+                    <a:lstStyle/>
+                    <a:p>
+                      <a:pPr algn="ctr"/>
+                      <a:r>
+                        <a:rPr sz="950">
+                          <a:solidFill>
+                            <a:srgbClr val="12151A"/>
+                          </a:solidFill>
+                          <a:latin typeface="맑은 고딕"/>
+                          <a:ea typeface="맑은 고딕"/>
+                          <a:cs typeface="맑은 고딕"/>
+                        </a:rPr>
+                        <a:t>10,311</a:t>
+                      </a:r>
+                    </a:p>
+                  </a:txBody>
+                  <a:tcPr anchor="ctr">
+                    <a:solidFill>
+                      <a:srgbClr val="FFFFFF"/>
+                    </a:solidFill>
+                  </a:tcPr>
+                </a:tc>
+                <a:tc>
+                  <a:txBody>
+                    <a:bodyPr/>
+                    <a:lstStyle/>
+                    <a:p>
+                      <a:pPr algn="ctr"/>
+                      <a:r>
+                        <a:rPr sz="950">
+                          <a:solidFill>
+                            <a:srgbClr val="12151A"/>
+                          </a:solidFill>
+                          <a:latin typeface="맑은 고딕"/>
+                          <a:ea typeface="맑은 고딕"/>
+                          <a:cs typeface="맑은 고딕"/>
+                        </a:rPr>
+                        <a:t>+1.62%p</a:t>
+                      </a:r>
+                    </a:p>
+                  </a:txBody>
+                  <a:tcPr anchor="ctr">
+                    <a:solidFill>
+                      <a:srgbClr val="FFFFFF"/>
+                    </a:solidFill>
+                  </a:tcPr>
+                </a:tc>
+              </a:tr>
+            </a:tbl>
+          </a:graphicData>
+        </a:graphic>
+      </p:graphicFrame>
       <p:sp>
         <p:nvSpPr>
           <p:cNvPr id="8" name="TextBox 7"/>
@@ -8863,7 +10167,7 @@
                 <a:ea typeface="맑은 고딕"/>
                 <a:cs typeface="맑은 고딕"/>
               </a:rPr>
-              <a:t>FOR WHOM</a:t>
+              <a:t>FINDING · 06</a:t>
             </a:r>
           </a:p>
         </p:txBody>
@@ -8904,7 +10208,7 @@
                 <a:ea typeface="맑은 고딕"/>
                 <a:cs typeface="맑은 고딕"/>
               </a:rPr>
-              <a:t>결국, 이런 분들께 닿았으면 합니다</a:t>
+              <a:t>어디서 멈춰도 근거가 남습니다</a:t>
             </a:r>
           </a:p>
         </p:txBody>
@@ -8945,21 +10249,69 @@
                 <a:ea typeface="맑은 고딕"/>
                 <a:cs typeface="맑은 고딕"/>
               </a:rPr>
-              <a:t>지수와 모델은 수단일 뿐입니다. 저희가 계속 떠올린 것은 아래 네 분의 하루였습니다.</a:t>
-            </a:r>
-          </a:p>
-        </p:txBody>
-      </p:sp>
-      <p:sp>
-        <p:nvSpPr>
-          <p:cNvPr id="5" name="Rounded Rectangle 4"/>
+              <a:t>한계효용 곡선이 있으면 예산이 조정돼도 '몇 개소까지가 합리적인가'를 답할 수 있습니다.</a:t>
+            </a:r>
+          </a:p>
+        </p:txBody>
+      </p:sp>
+      <p:pic>
+        <p:nvPicPr>
+          <p:cNvPr id="5" name="Picture 4" descr="08_커버리지_곡선.png"/>
+          <p:cNvPicPr>
+            <a:picLocks noChangeAspect="1"/>
+          </p:cNvPicPr>
+          <p:nvPr/>
+        </p:nvPicPr>
+        <p:blipFill>
+          <a:blip r:embed="rId2"/>
+          <a:stretch>
+            <a:fillRect/>
+          </a:stretch>
+        </p:blipFill>
+        <p:spPr>
+          <a:xfrm>
+            <a:off x="2197518" y="2212848"/>
+            <a:ext cx="3505379" cy="3200400"/>
+          </a:xfrm>
+          <a:prstGeom prst="rect">
+            <a:avLst/>
+          </a:prstGeom>
+        </p:spPr>
+      </p:pic>
+      <p:pic>
+        <p:nvPicPr>
+          <p:cNvPr id="6" name="Picture 5" descr="06_SOC_사각지대.png"/>
+          <p:cNvPicPr>
+            <a:picLocks noChangeAspect="1"/>
+          </p:cNvPicPr>
+          <p:nvPr/>
+        </p:nvPicPr>
+        <p:blipFill>
+          <a:blip r:embed="rId3"/>
+          <a:stretch>
+            <a:fillRect/>
+          </a:stretch>
+        </p:blipFill>
+        <p:spPr>
+          <a:xfrm>
+            <a:off x="7561328" y="2212848"/>
+            <a:ext cx="3933439" cy="3200400"/>
+          </a:xfrm>
+          <a:prstGeom prst="rect">
+            <a:avLst/>
+          </a:prstGeom>
+        </p:spPr>
+      </p:pic>
+      <p:sp>
+        <p:nvSpPr>
+          <p:cNvPr id="7" name="Rounded Rectangle 6"/>
           <p:cNvSpPr/>
           <p:nvPr/>
         </p:nvSpPr>
         <p:spPr>
           <a:xfrm>
-            <a:off x="658368" y="2286000"/>
-            <a:ext cx="5257800" cy="1371600"/>
+            <a:off x="658368" y="5577840"/>
+            <a:ext cx="10874959" cy="749808"/>
           </a:xfrm>
           <a:prstGeom prst="roundRect">
             <a:avLst>
@@ -8967,12 +10319,10 @@
             </a:avLst>
           </a:prstGeom>
           <a:solidFill>
-            <a:srgbClr val="FFFFFF"/>
+            <a:srgbClr val="F6F7F9"/>
           </a:solidFill>
-          <a:ln w="12700">
-            <a:solidFill>
-              <a:srgbClr val="E4E7EC"/>
-            </a:solidFill>
+          <a:ln>
+            <a:noFill/>
           </a:ln>
           <a:effectLst/>
         </p:spPr>
@@ -8998,97 +10348,14 @@
       </p:sp>
       <p:sp>
         <p:nvSpPr>
-          <p:cNvPr id="6" name="Rectangle 5"/>
-          <p:cNvSpPr/>
-          <p:nvPr/>
-        </p:nvSpPr>
-        <p:spPr>
-          <a:xfrm>
-            <a:off x="658368" y="2286000"/>
-            <a:ext cx="68580" cy="1371600"/>
-          </a:xfrm>
-          <a:prstGeom prst="rect">
-            <a:avLst/>
-          </a:prstGeom>
-          <a:solidFill>
-            <a:srgbClr val="2A78D6"/>
-          </a:solidFill>
-          <a:ln>
-            <a:noFill/>
-          </a:ln>
-          <a:effectLst/>
-        </p:spPr>
-        <p:style>
-          <a:lnRef idx="1">
-            <a:schemeClr val="accent1"/>
-          </a:lnRef>
-          <a:fillRef idx="3">
-            <a:schemeClr val="accent1"/>
-          </a:fillRef>
-          <a:effectRef idx="2">
-            <a:schemeClr val="accent1"/>
-          </a:effectRef>
-          <a:fontRef idx="minor">
-            <a:schemeClr val="lt1"/>
-          </a:fontRef>
-        </p:style>
-        <p:txBody>
-          <a:bodyPr rtlCol="0" anchor="ctr"/>
-          <a:lstStyle/>
-          <a:p/>
-        </p:txBody>
-      </p:sp>
-      <p:sp>
-        <p:nvSpPr>
-          <p:cNvPr id="7" name="TextBox 6"/>
-          <p:cNvSpPr txBox="1"/>
-          <p:nvPr/>
-        </p:nvSpPr>
-        <p:spPr>
-          <a:xfrm>
-            <a:off x="914400" y="2468880"/>
-            <a:ext cx="4663440" cy="274320"/>
-          </a:xfrm>
-          <a:prstGeom prst="rect">
-            <a:avLst/>
-          </a:prstGeom>
-          <a:noFill/>
-        </p:spPr>
-        <p:txBody>
-          <a:bodyPr wrap="square" lIns="0" rIns="0" tIns="0" bIns="0">
-            <a:spAutoFit/>
-          </a:bodyPr>
-          <a:lstStyle/>
-          <a:p>
-            <a:pPr algn="l">
-              <a:lnSpc>
-                <a:spcPct val="135000"/>
-              </a:lnSpc>
-            </a:pPr>
-            <a:r>
-              <a:rPr sz="1350" b="1">
-                <a:solidFill>
-                  <a:srgbClr val="2A78D6"/>
-                </a:solidFill>
-                <a:latin typeface="맑은 고딕"/>
-                <a:ea typeface="맑은 고딕"/>
-                <a:cs typeface="맑은 고딕"/>
-              </a:rPr>
-              <a:t>원도심에 오래 사신 어르신</a:t>
-            </a:r>
-          </a:p>
-        </p:txBody>
-      </p:sp>
-      <p:sp>
-        <p:nvSpPr>
           <p:cNvPr id="8" name="TextBox 7"/>
           <p:cNvSpPr txBox="1"/>
           <p:nvPr/>
         </p:nvSpPr>
         <p:spPr>
           <a:xfrm>
-            <a:off x="914400" y="2834640"/>
-            <a:ext cx="4663440" cy="731520"/>
+            <a:off x="932688" y="5760720"/>
+            <a:ext cx="10515600" cy="457200"/>
           </a:xfrm>
           <a:prstGeom prst="rect">
             <a:avLst/>
@@ -9107,15 +10374,15 @@
               </a:lnSpc>
             </a:pPr>
             <a:r>
-              <a:rPr sz="1100" b="0">
-                <a:solidFill>
-                  <a:srgbClr val="52514E"/>
-                </a:solidFill>
-                <a:latin typeface="맑은 고딕"/>
-                <a:ea typeface="맑은 고딕"/>
-                <a:cs typeface="맑은 고딕"/>
-              </a:rPr>
-              <a:t>24 일대는 젊은 이웃이 하나둘 떠나고 상가도 비었습니다.</a:t>
+              <a:rPr sz="1200" b="0">
+                <a:solidFill>
+                  <a:srgbClr val="12151A"/>
+                </a:solidFill>
+                <a:latin typeface="맑은 고딕"/>
+                <a:ea typeface="맑은 고딕"/>
+                <a:cs typeface="맑은 고딕"/>
+              </a:rPr>
+              <a:t>예산 심의에서 자주 나오는 질문은 '왜 이 순서인가'와 '반만 하면 어떻게 되나'입니다.</a:t>
             </a:r>
           </a:p>
           <a:p>
@@ -9128,664 +10395,6 @@
               </a:spcBef>
             </a:pPr>
             <a:r>
-              <a:rPr sz="1100" b="0">
-                <a:solidFill>
-                  <a:srgbClr val="52514E"/>
-                </a:solidFill>
-                <a:latin typeface="맑은 고딕"/>
-                <a:ea typeface="맑은 고딕"/>
-                <a:cs typeface="맑은 고딕"/>
-              </a:rPr>
-              <a:t>가게와 병원이 멀어질수록, 걸어서 하실 수 있는 일이 줄어듭니다.</a:t>
-            </a:r>
-          </a:p>
-        </p:txBody>
-      </p:sp>
-      <p:sp>
-        <p:nvSpPr>
-          <p:cNvPr id="9" name="Rounded Rectangle 8"/>
-          <p:cNvSpPr/>
-          <p:nvPr/>
-        </p:nvSpPr>
-        <p:spPr>
-          <a:xfrm>
-            <a:off x="6236207" y="2286000"/>
-            <a:ext cx="5257800" cy="1371600"/>
-          </a:xfrm>
-          <a:prstGeom prst="roundRect">
-            <a:avLst>
-              <a:gd name="adj" fmla="val 6000"/>
-            </a:avLst>
-          </a:prstGeom>
-          <a:solidFill>
-            <a:srgbClr val="FFFFFF"/>
-          </a:solidFill>
-          <a:ln w="12700">
-            <a:solidFill>
-              <a:srgbClr val="E4E7EC"/>
-            </a:solidFill>
-          </a:ln>
-          <a:effectLst/>
-        </p:spPr>
-        <p:style>
-          <a:lnRef idx="1">
-            <a:schemeClr val="accent1"/>
-          </a:lnRef>
-          <a:fillRef idx="3">
-            <a:schemeClr val="accent1"/>
-          </a:fillRef>
-          <a:effectRef idx="2">
-            <a:schemeClr val="accent1"/>
-          </a:effectRef>
-          <a:fontRef idx="minor">
-            <a:schemeClr val="lt1"/>
-          </a:fontRef>
-        </p:style>
-        <p:txBody>
-          <a:bodyPr rtlCol="0" anchor="ctr"/>
-          <a:lstStyle/>
-          <a:p/>
-        </p:txBody>
-      </p:sp>
-      <p:sp>
-        <p:nvSpPr>
-          <p:cNvPr id="10" name="Rectangle 9"/>
-          <p:cNvSpPr/>
-          <p:nvPr/>
-        </p:nvSpPr>
-        <p:spPr>
-          <a:xfrm>
-            <a:off x="6236207" y="2286000"/>
-            <a:ext cx="68580" cy="1371600"/>
-          </a:xfrm>
-          <a:prstGeom prst="rect">
-            <a:avLst/>
-          </a:prstGeom>
-          <a:solidFill>
-            <a:srgbClr val="8A7FB5"/>
-          </a:solidFill>
-          <a:ln>
-            <a:noFill/>
-          </a:ln>
-          <a:effectLst/>
-        </p:spPr>
-        <p:style>
-          <a:lnRef idx="1">
-            <a:schemeClr val="accent1"/>
-          </a:lnRef>
-          <a:fillRef idx="3">
-            <a:schemeClr val="accent1"/>
-          </a:fillRef>
-          <a:effectRef idx="2">
-            <a:schemeClr val="accent1"/>
-          </a:effectRef>
-          <a:fontRef idx="minor">
-            <a:schemeClr val="lt1"/>
-          </a:fontRef>
-        </p:style>
-        <p:txBody>
-          <a:bodyPr rtlCol="0" anchor="ctr"/>
-          <a:lstStyle/>
-          <a:p/>
-        </p:txBody>
-      </p:sp>
-      <p:sp>
-        <p:nvSpPr>
-          <p:cNvPr id="11" name="TextBox 10"/>
-          <p:cNvSpPr txBox="1"/>
-          <p:nvPr/>
-        </p:nvSpPr>
-        <p:spPr>
-          <a:xfrm>
-            <a:off x="6492240" y="2468880"/>
-            <a:ext cx="4663440" cy="274320"/>
-          </a:xfrm>
-          <a:prstGeom prst="rect">
-            <a:avLst/>
-          </a:prstGeom>
-          <a:noFill/>
-        </p:spPr>
-        <p:txBody>
-          <a:bodyPr wrap="square" lIns="0" rIns="0" tIns="0" bIns="0">
-            <a:spAutoFit/>
-          </a:bodyPr>
-          <a:lstStyle/>
-          <a:p>
-            <a:pPr algn="l">
-              <a:lnSpc>
-                <a:spcPct val="135000"/>
-              </a:lnSpc>
-            </a:pPr>
-            <a:r>
-              <a:rPr sz="1350" b="1">
-                <a:solidFill>
-                  <a:srgbClr val="8A7FB5"/>
-                </a:solidFill>
-                <a:latin typeface="맑은 고딕"/>
-                <a:ea typeface="맑은 고딕"/>
-                <a:cs typeface="맑은 고딕"/>
-              </a:rPr>
-              <a:t>농촌면에서 아이 키우시는 부모님</a:t>
-            </a:r>
-          </a:p>
-        </p:txBody>
-      </p:sp>
-      <p:sp>
-        <p:nvSpPr>
-          <p:cNvPr id="12" name="TextBox 11"/>
-          <p:cNvSpPr txBox="1"/>
-          <p:nvPr/>
-        </p:nvSpPr>
-        <p:spPr>
-          <a:xfrm>
-            <a:off x="6492240" y="2834640"/>
-            <a:ext cx="4663440" cy="731520"/>
-          </a:xfrm>
-          <a:prstGeom prst="rect">
-            <a:avLst/>
-          </a:prstGeom>
-          <a:noFill/>
-        </p:spPr>
-        <p:txBody>
-          <a:bodyPr wrap="square" lIns="0" rIns="0" tIns="0" bIns="0">
-            <a:spAutoFit/>
-          </a:bodyPr>
-          <a:lstStyle/>
-          <a:p>
-            <a:pPr algn="l">
-              <a:lnSpc>
-                <a:spcPct val="150000"/>
-              </a:lnSpc>
-            </a:pPr>
-            <a:r>
-              <a:rPr sz="1100" b="0">
-                <a:solidFill>
-                  <a:srgbClr val="52514E"/>
-                </a:solidFill>
-                <a:latin typeface="맑은 고딕"/>
-                <a:ea typeface="맑은 고딕"/>
-                <a:cs typeface="맑은 고딕"/>
-              </a:rPr>
-              <a:t>고령 비율이 가장 높은 곳은 23으로 54%였습니다.</a:t>
-            </a:r>
-          </a:p>
-          <a:p>
-            <a:pPr algn="l">
-              <a:lnSpc>
-                <a:spcPct val="150000"/>
-              </a:lnSpc>
-              <a:spcBef>
-                <a:spcPts val="0"/>
-              </a:spcBef>
-            </a:pPr>
-            <a:r>
-              <a:rPr sz="1100" b="0">
-                <a:solidFill>
-                  <a:srgbClr val="52514E"/>
-                </a:solidFill>
-                <a:latin typeface="맑은 고딕"/>
-                <a:ea typeface="맑은 고딕"/>
-                <a:cs typeface="맑은 고딕"/>
-              </a:rPr>
-              <a:t>어린이집·도서관이 가까이 없으면 그 부담은 온전히 가정의 몫이 됩니다.</a:t>
-            </a:r>
-          </a:p>
-        </p:txBody>
-      </p:sp>
-      <p:sp>
-        <p:nvSpPr>
-          <p:cNvPr id="13" name="Rounded Rectangle 12"/>
-          <p:cNvSpPr/>
-          <p:nvPr/>
-        </p:nvSpPr>
-        <p:spPr>
-          <a:xfrm>
-            <a:off x="658368" y="3858768"/>
-            <a:ext cx="5257800" cy="1371600"/>
-          </a:xfrm>
-          <a:prstGeom prst="roundRect">
-            <a:avLst>
-              <a:gd name="adj" fmla="val 6000"/>
-            </a:avLst>
-          </a:prstGeom>
-          <a:solidFill>
-            <a:srgbClr val="FFFFFF"/>
-          </a:solidFill>
-          <a:ln w="12700">
-            <a:solidFill>
-              <a:srgbClr val="E4E7EC"/>
-            </a:solidFill>
-          </a:ln>
-          <a:effectLst/>
-        </p:spPr>
-        <p:style>
-          <a:lnRef idx="1">
-            <a:schemeClr val="accent1"/>
-          </a:lnRef>
-          <a:fillRef idx="3">
-            <a:schemeClr val="accent1"/>
-          </a:fillRef>
-          <a:effectRef idx="2">
-            <a:schemeClr val="accent1"/>
-          </a:effectRef>
-          <a:fontRef idx="minor">
-            <a:schemeClr val="lt1"/>
-          </a:fontRef>
-        </p:style>
-        <p:txBody>
-          <a:bodyPr rtlCol="0" anchor="ctr"/>
-          <a:lstStyle/>
-          <a:p/>
-        </p:txBody>
-      </p:sp>
-      <p:sp>
-        <p:nvSpPr>
-          <p:cNvPr id="14" name="Rectangle 13"/>
-          <p:cNvSpPr/>
-          <p:nvPr/>
-        </p:nvSpPr>
-        <p:spPr>
-          <a:xfrm>
-            <a:off x="658368" y="3858768"/>
-            <a:ext cx="68580" cy="1371600"/>
-          </a:xfrm>
-          <a:prstGeom prst="rect">
-            <a:avLst/>
-          </a:prstGeom>
-          <a:solidFill>
-            <a:srgbClr val="EDA100"/>
-          </a:solidFill>
-          <a:ln>
-            <a:noFill/>
-          </a:ln>
-          <a:effectLst/>
-        </p:spPr>
-        <p:style>
-          <a:lnRef idx="1">
-            <a:schemeClr val="accent1"/>
-          </a:lnRef>
-          <a:fillRef idx="3">
-            <a:schemeClr val="accent1"/>
-          </a:fillRef>
-          <a:effectRef idx="2">
-            <a:schemeClr val="accent1"/>
-          </a:effectRef>
-          <a:fontRef idx="minor">
-            <a:schemeClr val="lt1"/>
-          </a:fontRef>
-        </p:style>
-        <p:txBody>
-          <a:bodyPr rtlCol="0" anchor="ctr"/>
-          <a:lstStyle/>
-          <a:p/>
-        </p:txBody>
-      </p:sp>
-      <p:sp>
-        <p:nvSpPr>
-          <p:cNvPr id="15" name="TextBox 14"/>
-          <p:cNvSpPr txBox="1"/>
-          <p:nvPr/>
-        </p:nvSpPr>
-        <p:spPr>
-          <a:xfrm>
-            <a:off x="914400" y="4041648"/>
-            <a:ext cx="4663440" cy="274320"/>
-          </a:xfrm>
-          <a:prstGeom prst="rect">
-            <a:avLst/>
-          </a:prstGeom>
-          <a:noFill/>
-        </p:spPr>
-        <p:txBody>
-          <a:bodyPr wrap="square" lIns="0" rIns="0" tIns="0" bIns="0">
-            <a:spAutoFit/>
-          </a:bodyPr>
-          <a:lstStyle/>
-          <a:p>
-            <a:pPr algn="l">
-              <a:lnSpc>
-                <a:spcPct val="135000"/>
-              </a:lnSpc>
-            </a:pPr>
-            <a:r>
-              <a:rPr sz="1350" b="1">
-                <a:solidFill>
-                  <a:srgbClr val="EDA100"/>
-                </a:solidFill>
-                <a:latin typeface="맑은 고딕"/>
-                <a:ea typeface="맑은 고딕"/>
-                <a:cs typeface="맑은 고딕"/>
-              </a:rPr>
-              <a:t>원도심에서 가게를 지켜오신 상인</a:t>
-            </a:r>
-          </a:p>
-        </p:txBody>
-      </p:sp>
-      <p:sp>
-        <p:nvSpPr>
-          <p:cNvPr id="16" name="TextBox 15"/>
-          <p:cNvSpPr txBox="1"/>
-          <p:nvPr/>
-        </p:nvSpPr>
-        <p:spPr>
-          <a:xfrm>
-            <a:off x="914400" y="4407407"/>
-            <a:ext cx="4663440" cy="731520"/>
-          </a:xfrm>
-          <a:prstGeom prst="rect">
-            <a:avLst/>
-          </a:prstGeom>
-          <a:noFill/>
-        </p:spPr>
-        <p:txBody>
-          <a:bodyPr wrap="square" lIns="0" rIns="0" tIns="0" bIns="0">
-            <a:spAutoFit/>
-          </a:bodyPr>
-          <a:lstStyle/>
-          <a:p>
-            <a:pPr algn="l">
-              <a:lnSpc>
-                <a:spcPct val="150000"/>
-              </a:lnSpc>
-            </a:pPr>
-            <a:r>
-              <a:rPr sz="1100" b="0">
-                <a:solidFill>
-                  <a:srgbClr val="52514E"/>
-                </a:solidFill>
-                <a:latin typeface="맑은 고딕"/>
-                <a:ea typeface="맑은 고딕"/>
-                <a:cs typeface="맑은 고딕"/>
-              </a:rPr>
-              <a:t>오가는 분이 줄면 매출이 줄고, 문 닫는 가게가 늘면 오가는 분이 더 줍니다.</a:t>
-            </a:r>
-          </a:p>
-          <a:p>
-            <a:pPr algn="l">
-              <a:lnSpc>
-                <a:spcPct val="150000"/>
-              </a:lnSpc>
-              <a:spcBef>
-                <a:spcPts val="0"/>
-              </a:spcBef>
-            </a:pPr>
-            <a:r>
-              <a:rPr sz="1100" b="0">
-                <a:solidFill>
-                  <a:srgbClr val="52514E"/>
-                </a:solidFill>
-                <a:latin typeface="맑은 고딕"/>
-                <a:ea typeface="맑은 고딕"/>
-                <a:cs typeface="맑은 고딕"/>
-              </a:rPr>
-              <a:t>이 고리를 일찍 알아차릴 수 있다면, 도움드릴 방법도 더 많아집니다.</a:t>
-            </a:r>
-          </a:p>
-        </p:txBody>
-      </p:sp>
-      <p:sp>
-        <p:nvSpPr>
-          <p:cNvPr id="17" name="Rounded Rectangle 16"/>
-          <p:cNvSpPr/>
-          <p:nvPr/>
-        </p:nvSpPr>
-        <p:spPr>
-          <a:xfrm>
-            <a:off x="6236207" y="3858768"/>
-            <a:ext cx="5257800" cy="1371600"/>
-          </a:xfrm>
-          <a:prstGeom prst="roundRect">
-            <a:avLst>
-              <a:gd name="adj" fmla="val 6000"/>
-            </a:avLst>
-          </a:prstGeom>
-          <a:solidFill>
-            <a:srgbClr val="FFFFFF"/>
-          </a:solidFill>
-          <a:ln w="12700">
-            <a:solidFill>
-              <a:srgbClr val="E4E7EC"/>
-            </a:solidFill>
-          </a:ln>
-          <a:effectLst/>
-        </p:spPr>
-        <p:style>
-          <a:lnRef idx="1">
-            <a:schemeClr val="accent1"/>
-          </a:lnRef>
-          <a:fillRef idx="3">
-            <a:schemeClr val="accent1"/>
-          </a:fillRef>
-          <a:effectRef idx="2">
-            <a:schemeClr val="accent1"/>
-          </a:effectRef>
-          <a:fontRef idx="minor">
-            <a:schemeClr val="lt1"/>
-          </a:fontRef>
-        </p:style>
-        <p:txBody>
-          <a:bodyPr rtlCol="0" anchor="ctr"/>
-          <a:lstStyle/>
-          <a:p/>
-        </p:txBody>
-      </p:sp>
-      <p:sp>
-        <p:nvSpPr>
-          <p:cNvPr id="18" name="Rectangle 17"/>
-          <p:cNvSpPr/>
-          <p:nvPr/>
-        </p:nvSpPr>
-        <p:spPr>
-          <a:xfrm>
-            <a:off x="6236207" y="3858768"/>
-            <a:ext cx="68580" cy="1371600"/>
-          </a:xfrm>
-          <a:prstGeom prst="rect">
-            <a:avLst/>
-          </a:prstGeom>
-          <a:solidFill>
-            <a:srgbClr val="2A78D6"/>
-          </a:solidFill>
-          <a:ln>
-            <a:noFill/>
-          </a:ln>
-          <a:effectLst/>
-        </p:spPr>
-        <p:style>
-          <a:lnRef idx="1">
-            <a:schemeClr val="accent1"/>
-          </a:lnRef>
-          <a:fillRef idx="3">
-            <a:schemeClr val="accent1"/>
-          </a:fillRef>
-          <a:effectRef idx="2">
-            <a:schemeClr val="accent1"/>
-          </a:effectRef>
-          <a:fontRef idx="minor">
-            <a:schemeClr val="lt1"/>
-          </a:fontRef>
-        </p:style>
-        <p:txBody>
-          <a:bodyPr rtlCol="0" anchor="ctr"/>
-          <a:lstStyle/>
-          <a:p/>
-        </p:txBody>
-      </p:sp>
-      <p:sp>
-        <p:nvSpPr>
-          <p:cNvPr id="19" name="TextBox 18"/>
-          <p:cNvSpPr txBox="1"/>
-          <p:nvPr/>
-        </p:nvSpPr>
-        <p:spPr>
-          <a:xfrm>
-            <a:off x="6492240" y="4041648"/>
-            <a:ext cx="4663440" cy="274320"/>
-          </a:xfrm>
-          <a:prstGeom prst="rect">
-            <a:avLst/>
-          </a:prstGeom>
-          <a:noFill/>
-        </p:spPr>
-        <p:txBody>
-          <a:bodyPr wrap="square" lIns="0" rIns="0" tIns="0" bIns="0">
-            <a:spAutoFit/>
-          </a:bodyPr>
-          <a:lstStyle/>
-          <a:p>
-            <a:pPr algn="l">
-              <a:lnSpc>
-                <a:spcPct val="135000"/>
-              </a:lnSpc>
-            </a:pPr>
-            <a:r>
-              <a:rPr sz="1350" b="1">
-                <a:solidFill>
-                  <a:srgbClr val="2A78D6"/>
-                </a:solidFill>
-                <a:latin typeface="맑은 고딕"/>
-                <a:ea typeface="맑은 고딕"/>
-                <a:cs typeface="맑은 고딕"/>
-              </a:rPr>
-              <a:t>신도심에서 자리 잡은 이웃</a:t>
-            </a:r>
-          </a:p>
-        </p:txBody>
-      </p:sp>
-      <p:sp>
-        <p:nvSpPr>
-          <p:cNvPr id="20" name="TextBox 19"/>
-          <p:cNvSpPr txBox="1"/>
-          <p:nvPr/>
-        </p:nvSpPr>
-        <p:spPr>
-          <a:xfrm>
-            <a:off x="6492240" y="4407407"/>
-            <a:ext cx="4663440" cy="731520"/>
-          </a:xfrm>
-          <a:prstGeom prst="rect">
-            <a:avLst/>
-          </a:prstGeom>
-          <a:noFill/>
-        </p:spPr>
-        <p:txBody>
-          <a:bodyPr wrap="square" lIns="0" rIns="0" tIns="0" bIns="0">
-            <a:spAutoFit/>
-          </a:bodyPr>
-          <a:lstStyle/>
-          <a:p>
-            <a:pPr algn="l">
-              <a:lnSpc>
-                <a:spcPct val="150000"/>
-              </a:lnSpc>
-            </a:pPr>
-            <a:r>
-              <a:rPr sz="1100" b="0">
-                <a:solidFill>
-                  <a:srgbClr val="52514E"/>
-                </a:solidFill>
-                <a:latin typeface="맑은 고딕"/>
-                <a:ea typeface="맑은 고딕"/>
-                <a:cs typeface="맑은 고딕"/>
-              </a:rPr>
-              <a:t>지금 여건이 좋은 곳도 언젠가는 나이가 듭니다.</a:t>
-            </a:r>
-          </a:p>
-          <a:p>
-            <a:pPr algn="l">
-              <a:lnSpc>
-                <a:spcPct val="150000"/>
-              </a:lnSpc>
-              <a:spcBef>
-                <a:spcPts val="0"/>
-              </a:spcBef>
-            </a:pPr>
-            <a:r>
-              <a:rPr sz="1100" b="0">
-                <a:solidFill>
-                  <a:srgbClr val="52514E"/>
-                </a:solidFill>
-                <a:latin typeface="맑은 고딕"/>
-                <a:ea typeface="맑은 고딕"/>
-                <a:cs typeface="맑은 고딕"/>
-              </a:rPr>
-              <a:t>미리 살펴보는 습관은 결국 천안시민 모두를 위한 준비라고 생각합니다.</a:t>
-            </a:r>
-          </a:p>
-        </p:txBody>
-      </p:sp>
-      <p:sp>
-        <p:nvSpPr>
-          <p:cNvPr id="21" name="Rounded Rectangle 20"/>
-          <p:cNvSpPr/>
-          <p:nvPr/>
-        </p:nvSpPr>
-        <p:spPr>
-          <a:xfrm>
-            <a:off x="658368" y="5541264"/>
-            <a:ext cx="10874959" cy="786384"/>
-          </a:xfrm>
-          <a:prstGeom prst="roundRect">
-            <a:avLst>
-              <a:gd name="adj" fmla="val 6000"/>
-            </a:avLst>
-          </a:prstGeom>
-          <a:solidFill>
-            <a:srgbClr val="EFF7F3"/>
-          </a:solidFill>
-          <a:ln>
-            <a:noFill/>
-          </a:ln>
-          <a:effectLst/>
-        </p:spPr>
-        <p:style>
-          <a:lnRef idx="1">
-            <a:schemeClr val="accent1"/>
-          </a:lnRef>
-          <a:fillRef idx="3">
-            <a:schemeClr val="accent1"/>
-          </a:fillRef>
-          <a:effectRef idx="2">
-            <a:schemeClr val="accent1"/>
-          </a:effectRef>
-          <a:fontRef idx="minor">
-            <a:schemeClr val="lt1"/>
-          </a:fontRef>
-        </p:style>
-        <p:txBody>
-          <a:bodyPr rtlCol="0" anchor="ctr"/>
-          <a:lstStyle/>
-          <a:p/>
-        </p:txBody>
-      </p:sp>
-      <p:sp>
-        <p:nvSpPr>
-          <p:cNvPr id="22" name="TextBox 21"/>
-          <p:cNvSpPr txBox="1"/>
-          <p:nvPr/>
-        </p:nvSpPr>
-        <p:spPr>
-          <a:xfrm>
-            <a:off x="932688" y="5724144"/>
-            <a:ext cx="10515600" cy="457200"/>
-          </a:xfrm>
-          <a:prstGeom prst="rect">
-            <a:avLst/>
-          </a:prstGeom>
-          <a:noFill/>
-        </p:spPr>
-        <p:txBody>
-          <a:bodyPr wrap="square" lIns="0" rIns="0" tIns="0" bIns="0">
-            <a:spAutoFit/>
-          </a:bodyPr>
-          <a:lstStyle/>
-          <a:p>
-            <a:pPr algn="l">
-              <a:lnSpc>
-                <a:spcPct val="150000"/>
-              </a:lnSpc>
-            </a:pPr>
-            <a:r>
               <a:rPr sz="1200" b="0">
                 <a:solidFill>
                   <a:srgbClr val="12151A"/>
@@ -9794,35 +10403,14 @@
                 <a:ea typeface="맑은 고딕"/>
                 <a:cs typeface="맑은 고딕"/>
               </a:rPr>
-              <a:t>저희는 천안시 사정을 현장에서 겪어보지 못한 참가자입니다. 다만 공개된 데이터로 할 수 있는 만큼은 성실하게 살펴보았습니다.</a:t>
-            </a:r>
-          </a:p>
-          <a:p>
-            <a:pPr algn="l">
-              <a:lnSpc>
-                <a:spcPct val="150000"/>
-              </a:lnSpc>
-              <a:spcBef>
-                <a:spcPts val="0"/>
-              </a:spcBef>
-            </a:pPr>
-            <a:r>
-              <a:rPr sz="1200" b="0">
-                <a:solidFill>
-                  <a:srgbClr val="12151A"/>
-                </a:solidFill>
-                <a:latin typeface="맑은 고딕"/>
-                <a:ea typeface="맑은 고딕"/>
-                <a:cs typeface="맑은 고딕"/>
-              </a:rPr>
-              <a:t>부족한 부분은 현장을 아시는 분들이 채워주시길 바라며, 이 자료가 그 논의의 출발점이 될 수 있다면 더 바랄 것이 없겠습니다.</a:t>
-            </a:r>
-          </a:p>
-        </p:txBody>
-      </p:sp>
-      <p:sp>
-        <p:nvSpPr>
-          <p:cNvPr id="23" name="TextBox 22"/>
+              <a:t>이 곡선은 두 질문에 함께 답합니다. 좌측 그림의 좌상단(고령↑·SOC↓)이 먼저 살펴볼 구간입니다.</a:t>
+            </a:r>
+          </a:p>
+        </p:txBody>
+      </p:sp>
+      <p:sp>
+        <p:nvSpPr>
+          <p:cNvPr id="9" name="TextBox 8"/>
           <p:cNvSpPr txBox="1"/>
           <p:nvPr/>
         </p:nvSpPr>
@@ -9863,7 +10451,7 @@
       </p:sp>
       <p:sp>
         <p:nvSpPr>
-          <p:cNvPr id="24" name="TextBox 23"/>
+          <p:cNvPr id="10" name="TextBox 9"/>
           <p:cNvSpPr txBox="1"/>
           <p:nvPr/>
         </p:nvSpPr>
@@ -9956,7 +10544,7 @@
                 <a:ea typeface="맑은 고딕"/>
                 <a:cs typeface="맑은 고딕"/>
               </a:rPr>
-              <a:t>APPLICATION</a:t>
+              <a:t>FOR WHOM</a:t>
             </a:r>
           </a:p>
         </p:txBody>
@@ -9997,7 +10585,7 @@
                 <a:ea typeface="맑은 고딕"/>
                 <a:cs typeface="맑은 고딕"/>
               </a:rPr>
-              <a:t>실무에 이렇게 보탬이 되면 좋겠습니다</a:t>
+              <a:t>결국, 이런 분들께 닿았으면 합니다</a:t>
             </a:r>
           </a:p>
         </p:txBody>
@@ -10038,7 +10626,7 @@
                 <a:ea typeface="맑은 고딕"/>
                 <a:cs typeface="맑은 고딕"/>
               </a:rPr>
-              <a:t>따로 시간을 내어 다뤄야 하는 연구물이 아니라, 하시던 업무 곁에 놓고 참고하실 수 있는 자료로 준비했습니다.</a:t>
+              <a:t>지수와 모델은 수단일 뿐입니다. 저희가 계속 떠올린 것은 아래 네 분의 하루였습니다.</a:t>
             </a:r>
           </a:p>
         </p:txBody>
@@ -10139,8 +10727,8 @@
         </p:nvSpPr>
         <p:spPr>
           <a:xfrm>
-            <a:off x="914400" y="2450592"/>
-            <a:ext cx="2194560" cy="256032"/>
+            <a:off x="914400" y="2468880"/>
+            <a:ext cx="4663440" cy="274320"/>
           </a:xfrm>
           <a:prstGeom prst="rect">
             <a:avLst/>
@@ -10159,7 +10747,7 @@
               </a:lnSpc>
             </a:pPr>
             <a:r>
-              <a:rPr sz="1250" b="1">
+              <a:rPr sz="1350" b="1">
                 <a:solidFill>
                   <a:srgbClr val="2A78D6"/>
                 </a:solidFill>
@@ -10167,7 +10755,7 @@
                 <a:ea typeface="맑은 고딕"/>
                 <a:cs typeface="맑은 고딕"/>
               </a:rPr>
-              <a:t>도시재생 담당</a:t>
+              <a:t>원도심에 오래 사신 어르신</a:t>
             </a:r>
           </a:p>
         </p:txBody>
@@ -10180,68 +10768,27 @@
         </p:nvSpPr>
         <p:spPr>
           <a:xfrm>
-            <a:off x="914400" y="2743200"/>
-            <a:ext cx="4663440" cy="256032"/>
-          </a:xfrm>
-          <a:prstGeom prst="rect">
-            <a:avLst/>
-          </a:prstGeom>
-          <a:noFill/>
-        </p:spPr>
-        <p:txBody>
-          <a:bodyPr wrap="square" lIns="0" rIns="0" tIns="0" bIns="0">
-            <a:spAutoFit/>
-          </a:bodyPr>
-          <a:lstStyle/>
-          <a:p>
-            <a:pPr algn="l">
-              <a:lnSpc>
-                <a:spcPct val="135000"/>
-              </a:lnSpc>
-            </a:pPr>
-            <a:r>
-              <a:rPr sz="1350" b="1">
-                <a:solidFill>
-                  <a:srgbClr val="12151A"/>
-                </a:solidFill>
-                <a:latin typeface="맑은 고딕"/>
-                <a:ea typeface="맑은 고딕"/>
-                <a:cs typeface="맑은 고딕"/>
-              </a:rPr>
-              <a:t>사업지 검토 · 공모 준비</a:t>
-            </a:r>
-          </a:p>
-        </p:txBody>
-      </p:sp>
-      <p:sp>
-        <p:nvSpPr>
-          <p:cNvPr id="9" name="TextBox 8"/>
-          <p:cNvSpPr txBox="1"/>
-          <p:nvPr/>
-        </p:nvSpPr>
-        <p:spPr>
-          <a:xfrm>
-            <a:off x="914400" y="3054096"/>
-            <a:ext cx="4663440" cy="548640"/>
-          </a:xfrm>
-          <a:prstGeom prst="rect">
-            <a:avLst/>
-          </a:prstGeom>
-          <a:noFill/>
-        </p:spPr>
-        <p:txBody>
-          <a:bodyPr wrap="square" lIns="0" rIns="0" tIns="0" bIns="0">
-            <a:spAutoFit/>
-          </a:bodyPr>
-          <a:lstStyle/>
-          <a:p>
-            <a:pPr algn="l">
-              <a:lnSpc>
-                <a:spcPct val="145000"/>
-              </a:lnSpc>
-            </a:pPr>
-            <a:r>
-              <a:rPr sz="1080" b="0">
+            <a:off x="914400" y="2834640"/>
+            <a:ext cx="4663440" cy="731520"/>
+          </a:xfrm>
+          <a:prstGeom prst="rect">
+            <a:avLst/>
+          </a:prstGeom>
+          <a:noFill/>
+        </p:spPr>
+        <p:txBody>
+          <a:bodyPr wrap="square" lIns="0" rIns="0" tIns="0" bIns="0">
+            <a:spAutoFit/>
+          </a:bodyPr>
+          <a:lstStyle/>
+          <a:p>
+            <a:pPr algn="l">
+              <a:lnSpc>
+                <a:spcPct val="150000"/>
+              </a:lnSpc>
+            </a:pPr>
+            <a:r>
+              <a:rPr sz="1100" b="0">
                 <a:solidFill>
                   <a:srgbClr val="52514E"/>
                 </a:solidFill>
@@ -10249,20 +10796,20 @@
                 <a:ea typeface="맑은 고딕"/>
                 <a:cs typeface="맑은 고딕"/>
               </a:rPr>
-              <a:t>지수가 낮은 곳과 3년 뒤 살펴볼 곳을 겹쳐 후보를 좁히실 때,</a:t>
-            </a:r>
-          </a:p>
-          <a:p>
-            <a:pPr algn="l">
-              <a:lnSpc>
-                <a:spcPct val="145000"/>
+              <a:t>24 일대는 젊은 이웃이 하나둘 떠나고 상가도 비었습니다.</a:t>
+            </a:r>
+          </a:p>
+          <a:p>
+            <a:pPr algn="l">
+              <a:lnSpc>
+                <a:spcPct val="150000"/>
               </a:lnSpc>
               <a:spcBef>
                 <a:spcPts val="0"/>
               </a:spcBef>
             </a:pPr>
             <a:r>
-              <a:rPr sz="1080" b="0">
+              <a:rPr sz="1100" b="0">
                 <a:solidFill>
                   <a:srgbClr val="52514E"/>
                 </a:solidFill>
@@ -10270,14 +10817,14 @@
                 <a:ea typeface="맑은 고딕"/>
                 <a:cs typeface="맑은 고딕"/>
               </a:rPr>
-              <a:t>공모의 '쇠퇴도 진단' 항목에 근거 수치로.</a:t>
-            </a:r>
-          </a:p>
-        </p:txBody>
-      </p:sp>
-      <p:sp>
-        <p:nvSpPr>
-          <p:cNvPr id="10" name="Rounded Rectangle 9"/>
+              <a:t>가게와 병원이 멀어질수록, 걸어서 하실 수 있는 일이 줄어듭니다.</a:t>
+            </a:r>
+          </a:p>
+        </p:txBody>
+      </p:sp>
+      <p:sp>
+        <p:nvSpPr>
+          <p:cNvPr id="9" name="Rounded Rectangle 8"/>
           <p:cNvSpPr/>
           <p:nvPr/>
         </p:nvSpPr>
@@ -10323,7 +10870,7 @@
       </p:sp>
       <p:sp>
         <p:nvSpPr>
-          <p:cNvPr id="11" name="Rectangle 10"/>
+          <p:cNvPr id="10" name="Rectangle 9"/>
           <p:cNvSpPr/>
           <p:nvPr/>
         </p:nvSpPr>
@@ -10336,7 +10883,7 @@
             <a:avLst/>
           </a:prstGeom>
           <a:solidFill>
-            <a:srgbClr val="1BAF7A"/>
+            <a:srgbClr val="8A7FB5"/>
           </a:solidFill>
           <a:ln>
             <a:noFill/>
@@ -10365,115 +10912,74 @@
       </p:sp>
       <p:sp>
         <p:nvSpPr>
+          <p:cNvPr id="11" name="TextBox 10"/>
+          <p:cNvSpPr txBox="1"/>
+          <p:nvPr/>
+        </p:nvSpPr>
+        <p:spPr>
+          <a:xfrm>
+            <a:off x="6492240" y="2468880"/>
+            <a:ext cx="4663440" cy="274320"/>
+          </a:xfrm>
+          <a:prstGeom prst="rect">
+            <a:avLst/>
+          </a:prstGeom>
+          <a:noFill/>
+        </p:spPr>
+        <p:txBody>
+          <a:bodyPr wrap="square" lIns="0" rIns="0" tIns="0" bIns="0">
+            <a:spAutoFit/>
+          </a:bodyPr>
+          <a:lstStyle/>
+          <a:p>
+            <a:pPr algn="l">
+              <a:lnSpc>
+                <a:spcPct val="135000"/>
+              </a:lnSpc>
+            </a:pPr>
+            <a:r>
+              <a:rPr sz="1350" b="1">
+                <a:solidFill>
+                  <a:srgbClr val="8A7FB5"/>
+                </a:solidFill>
+                <a:latin typeface="맑은 고딕"/>
+                <a:ea typeface="맑은 고딕"/>
+                <a:cs typeface="맑은 고딕"/>
+              </a:rPr>
+              <a:t>농촌면에서 아이 키우시는 부모님</a:t>
+            </a:r>
+          </a:p>
+        </p:txBody>
+      </p:sp>
+      <p:sp>
+        <p:nvSpPr>
           <p:cNvPr id="12" name="TextBox 11"/>
           <p:cNvSpPr txBox="1"/>
           <p:nvPr/>
         </p:nvSpPr>
         <p:spPr>
           <a:xfrm>
-            <a:off x="6492240" y="2450592"/>
-            <a:ext cx="2194560" cy="256032"/>
-          </a:xfrm>
-          <a:prstGeom prst="rect">
-            <a:avLst/>
-          </a:prstGeom>
-          <a:noFill/>
-        </p:spPr>
-        <p:txBody>
-          <a:bodyPr wrap="square" lIns="0" rIns="0" tIns="0" bIns="0">
-            <a:spAutoFit/>
-          </a:bodyPr>
-          <a:lstStyle/>
-          <a:p>
-            <a:pPr algn="l">
-              <a:lnSpc>
-                <a:spcPct val="135000"/>
-              </a:lnSpc>
-            </a:pPr>
-            <a:r>
-              <a:rPr sz="1250" b="1">
-                <a:solidFill>
-                  <a:srgbClr val="1BAF7A"/>
-                </a:solidFill>
-                <a:latin typeface="맑은 고딕"/>
-                <a:ea typeface="맑은 고딕"/>
-                <a:cs typeface="맑은 고딕"/>
-              </a:rPr>
-              <a:t>복지·보건 담당</a:t>
-            </a:r>
-          </a:p>
-        </p:txBody>
-      </p:sp>
-      <p:sp>
-        <p:nvSpPr>
-          <p:cNvPr id="13" name="TextBox 12"/>
-          <p:cNvSpPr txBox="1"/>
-          <p:nvPr/>
-        </p:nvSpPr>
-        <p:spPr>
-          <a:xfrm>
-            <a:off x="6492240" y="2743200"/>
-            <a:ext cx="4663440" cy="256032"/>
-          </a:xfrm>
-          <a:prstGeom prst="rect">
-            <a:avLst/>
-          </a:prstGeom>
-          <a:noFill/>
-        </p:spPr>
-        <p:txBody>
-          <a:bodyPr wrap="square" lIns="0" rIns="0" tIns="0" bIns="0">
-            <a:spAutoFit/>
-          </a:bodyPr>
-          <a:lstStyle/>
-          <a:p>
-            <a:pPr algn="l">
-              <a:lnSpc>
-                <a:spcPct val="135000"/>
-              </a:lnSpc>
-            </a:pPr>
-            <a:r>
-              <a:rPr sz="1350" b="1">
-                <a:solidFill>
-                  <a:srgbClr val="12151A"/>
-                </a:solidFill>
-                <a:latin typeface="맑은 고딕"/>
-                <a:ea typeface="맑은 고딕"/>
-                <a:cs typeface="맑은 고딕"/>
-              </a:rPr>
-              <a:t>생활시설 위치 검토</a:t>
-            </a:r>
-          </a:p>
-        </p:txBody>
-      </p:sp>
-      <p:sp>
-        <p:nvSpPr>
-          <p:cNvPr id="14" name="TextBox 13"/>
-          <p:cNvSpPr txBox="1"/>
-          <p:nvPr/>
-        </p:nvSpPr>
-        <p:spPr>
-          <a:xfrm>
-            <a:off x="6492240" y="3054096"/>
-            <a:ext cx="4663440" cy="548640"/>
-          </a:xfrm>
-          <a:prstGeom prst="rect">
-            <a:avLst/>
-          </a:prstGeom>
-          <a:noFill/>
-        </p:spPr>
-        <p:txBody>
-          <a:bodyPr wrap="square" lIns="0" rIns="0" tIns="0" bIns="0">
-            <a:spAutoFit/>
-          </a:bodyPr>
-          <a:lstStyle/>
-          <a:p>
-            <a:pPr algn="l">
-              <a:lnSpc>
-                <a:spcPct val="145000"/>
-              </a:lnSpc>
-            </a:pPr>
-            <a:r>
-              <a:rPr sz="1080" b="0">
+            <a:off x="6492240" y="2834640"/>
+            <a:ext cx="4663440" cy="731520"/>
+          </a:xfrm>
+          <a:prstGeom prst="rect">
+            <a:avLst/>
+          </a:prstGeom>
+          <a:noFill/>
+        </p:spPr>
+        <p:txBody>
+          <a:bodyPr wrap="square" lIns="0" rIns="0" tIns="0" bIns="0">
+            <a:spAutoFit/>
+          </a:bodyPr>
+          <a:lstStyle/>
+          <a:p>
+            <a:pPr algn="l">
+              <a:lnSpc>
+                <a:spcPct val="150000"/>
+              </a:lnSpc>
+            </a:pPr>
+            <a:r>
+              <a:rPr sz="1100" b="0">
                 <a:solidFill>
                   <a:srgbClr val="52514E"/>
                 </a:solidFill>
@@ -10481,20 +10987,20 @@
                 <a:ea typeface="맑은 고딕"/>
                 <a:cs typeface="맑은 고딕"/>
               </a:rPr>
-              <a:t>우선순위표의 좌표를 검토 후보 중 하나로,</a:t>
-            </a:r>
-          </a:p>
-          <a:p>
-            <a:pPr algn="l">
-              <a:lnSpc>
-                <a:spcPct val="145000"/>
+              <a:t>고령 비율이 가장 높은 곳은 24으로 54%였습니다.</a:t>
+            </a:r>
+          </a:p>
+          <a:p>
+            <a:pPr algn="l">
+              <a:lnSpc>
+                <a:spcPct val="150000"/>
               </a:lnSpc>
               <a:spcBef>
                 <a:spcPts val="0"/>
               </a:spcBef>
             </a:pPr>
             <a:r>
-              <a:rPr sz="1080" b="0">
+              <a:rPr sz="1100" b="0">
                 <a:solidFill>
                   <a:srgbClr val="52514E"/>
                 </a:solidFill>
@@ -10502,14 +11008,14 @@
                 <a:ea typeface="맑은 고딕"/>
                 <a:cs typeface="맑은 고딕"/>
               </a:rPr>
-              <a:t>왜 그 동네인지 설명하실 때 항목별 근거로.</a:t>
-            </a:r>
-          </a:p>
-        </p:txBody>
-      </p:sp>
-      <p:sp>
-        <p:nvSpPr>
-          <p:cNvPr id="15" name="Rounded Rectangle 14"/>
+              <a:t>어린이집·도서관이 가까이 없으면 그 부담은 온전히 가정의 몫이 됩니다.</a:t>
+            </a:r>
+          </a:p>
+        </p:txBody>
+      </p:sp>
+      <p:sp>
+        <p:nvSpPr>
+          <p:cNvPr id="13" name="Rounded Rectangle 12"/>
           <p:cNvSpPr/>
           <p:nvPr/>
         </p:nvSpPr>
@@ -10555,7 +11061,7 @@
       </p:sp>
       <p:sp>
         <p:nvSpPr>
-          <p:cNvPr id="16" name="Rectangle 15"/>
+          <p:cNvPr id="14" name="Rectangle 13"/>
           <p:cNvSpPr/>
           <p:nvPr/>
         </p:nvSpPr>
@@ -10597,14 +11103,14 @@
       </p:sp>
       <p:sp>
         <p:nvSpPr>
-          <p:cNvPr id="17" name="TextBox 16"/>
-          <p:cNvSpPr txBox="1"/>
-          <p:nvPr/>
-        </p:nvSpPr>
-        <p:spPr>
-          <a:xfrm>
-            <a:off x="914400" y="4023359"/>
-            <a:ext cx="2194560" cy="256032"/>
+          <p:cNvPr id="15" name="TextBox 14"/>
+          <p:cNvSpPr txBox="1"/>
+          <p:nvPr/>
+        </p:nvSpPr>
+        <p:spPr>
+          <a:xfrm>
+            <a:off x="914400" y="4041648"/>
+            <a:ext cx="4663440" cy="274320"/>
           </a:xfrm>
           <a:prstGeom prst="rect">
             <a:avLst/>
@@ -10623,7 +11129,7 @@
               </a:lnSpc>
             </a:pPr>
             <a:r>
-              <a:rPr sz="1250" b="1">
+              <a:rPr sz="1350" b="1">
                 <a:solidFill>
                   <a:srgbClr val="EDA100"/>
                 </a:solidFill>
@@ -10631,81 +11137,40 @@
                 <a:ea typeface="맑은 고딕"/>
                 <a:cs typeface="맑은 고딕"/>
               </a:rPr>
-              <a:t>예산 담당</a:t>
-            </a:r>
-          </a:p>
-        </p:txBody>
-      </p:sp>
-      <p:sp>
-        <p:nvSpPr>
-          <p:cNvPr id="18" name="TextBox 17"/>
-          <p:cNvSpPr txBox="1"/>
-          <p:nvPr/>
-        </p:nvSpPr>
-        <p:spPr>
-          <a:xfrm>
-            <a:off x="914400" y="4315968"/>
-            <a:ext cx="4663440" cy="256032"/>
-          </a:xfrm>
-          <a:prstGeom prst="rect">
-            <a:avLst/>
-          </a:prstGeom>
-          <a:noFill/>
-        </p:spPr>
-        <p:txBody>
-          <a:bodyPr wrap="square" lIns="0" rIns="0" tIns="0" bIns="0">
-            <a:spAutoFit/>
-          </a:bodyPr>
-          <a:lstStyle/>
-          <a:p>
-            <a:pPr algn="l">
-              <a:lnSpc>
-                <a:spcPct val="135000"/>
-              </a:lnSpc>
-            </a:pPr>
-            <a:r>
-              <a:rPr sz="1350" b="1">
-                <a:solidFill>
-                  <a:srgbClr val="12151A"/>
-                </a:solidFill>
-                <a:latin typeface="맑은 고딕"/>
-                <a:ea typeface="맑은 고딕"/>
-                <a:cs typeface="맑은 고딕"/>
-              </a:rPr>
-              <a:t>배분 검토 자료</a:t>
-            </a:r>
-          </a:p>
-        </p:txBody>
-      </p:sp>
-      <p:sp>
-        <p:nvSpPr>
-          <p:cNvPr id="19" name="TextBox 18"/>
-          <p:cNvSpPr txBox="1"/>
-          <p:nvPr/>
-        </p:nvSpPr>
-        <p:spPr>
-          <a:xfrm>
-            <a:off x="914400" y="4626864"/>
-            <a:ext cx="4663440" cy="548640"/>
-          </a:xfrm>
-          <a:prstGeom prst="rect">
-            <a:avLst/>
-          </a:prstGeom>
-          <a:noFill/>
-        </p:spPr>
-        <p:txBody>
-          <a:bodyPr wrap="square" lIns="0" rIns="0" tIns="0" bIns="0">
